--- a/figures/Figure_1.pptx
+++ b/figures/Figure_1.pptx
@@ -2515,7 +2515,7 @@
           </p:nvSpPr>
           <p:spPr>
             <a:xfrm>
-              <a:off x="1542933" y="2516383"/>
+              <a:off x="1535481" y="2516369"/>
               <a:ext cx="77571" cy="77571"/>
             </a:xfrm>
             <a:prstGeom prst="ellipse">
@@ -2541,7 +2541,7 @@
           </p:nvSpPr>
           <p:spPr>
             <a:xfrm>
-              <a:off x="1554887" y="2437194"/>
+              <a:off x="1631569" y="2437283"/>
               <a:ext cx="77571" cy="77571"/>
             </a:xfrm>
             <a:prstGeom prst="ellipse">
@@ -2567,7 +2567,7 @@
           </p:nvSpPr>
           <p:spPr>
             <a:xfrm>
-              <a:off x="1527664" y="2556680"/>
+              <a:off x="1672001" y="2556577"/>
               <a:ext cx="77571" cy="77571"/>
             </a:xfrm>
             <a:prstGeom prst="ellipse">
@@ -2593,7 +2593,7 @@
           </p:nvSpPr>
           <p:spPr>
             <a:xfrm>
-              <a:off x="1537243" y="2553267"/>
+              <a:off x="1702827" y="2553287"/>
               <a:ext cx="77571" cy="77571"/>
             </a:xfrm>
             <a:prstGeom prst="ellipse">
@@ -2619,7 +2619,7 @@
           </p:nvSpPr>
           <p:spPr>
             <a:xfrm>
-              <a:off x="1661592" y="2582628"/>
+              <a:off x="1533548" y="2582705"/>
               <a:ext cx="77571" cy="77571"/>
             </a:xfrm>
             <a:prstGeom prst="ellipse">
@@ -2645,7 +2645,7 @@
           </p:nvSpPr>
           <p:spPr>
             <a:xfrm>
-              <a:off x="1721908" y="2415334"/>
+              <a:off x="1683809" y="2415401"/>
               <a:ext cx="77571" cy="77571"/>
             </a:xfrm>
             <a:prstGeom prst="ellipse">
@@ -2671,7 +2671,7 @@
           </p:nvSpPr>
           <p:spPr>
             <a:xfrm>
-              <a:off x="1758884" y="2322229"/>
+              <a:off x="1688015" y="2322231"/>
               <a:ext cx="77571" cy="77571"/>
             </a:xfrm>
             <a:prstGeom prst="ellipse">
@@ -2697,7 +2697,7 @@
           </p:nvSpPr>
           <p:spPr>
             <a:xfrm>
-              <a:off x="1676051" y="2534963"/>
+              <a:off x="1545070" y="2534950"/>
               <a:ext cx="77571" cy="77571"/>
             </a:xfrm>
             <a:prstGeom prst="ellipse">
@@ -2723,7 +2723,7 @@
           </p:nvSpPr>
           <p:spPr>
             <a:xfrm>
-              <a:off x="1519161" y="2616182"/>
+              <a:off x="1551456" y="2616069"/>
               <a:ext cx="77571" cy="77571"/>
             </a:xfrm>
             <a:prstGeom prst="ellipse">
@@ -2749,7 +2749,7 @@
           </p:nvSpPr>
           <p:spPr>
             <a:xfrm>
-              <a:off x="1636272" y="2392414"/>
+              <a:off x="1519161" y="2392396"/>
               <a:ext cx="77571" cy="77571"/>
             </a:xfrm>
             <a:prstGeom prst="ellipse">
@@ -2775,7 +2775,7 @@
           </p:nvSpPr>
           <p:spPr>
             <a:xfrm>
-              <a:off x="2511832" y="2625624"/>
+              <a:off x="2487865" y="2625585"/>
               <a:ext cx="77571" cy="77571"/>
             </a:xfrm>
             <a:prstGeom prst="ellipse">
@@ -2801,7 +2801,7 @@
           </p:nvSpPr>
           <p:spPr>
             <a:xfrm>
-              <a:off x="2562783" y="2554113"/>
+              <a:off x="2501207" y="2554085"/>
               <a:ext cx="77571" cy="77571"/>
             </a:xfrm>
             <a:prstGeom prst="ellipse">
@@ -2827,7 +2827,7 @@
           </p:nvSpPr>
           <p:spPr>
             <a:xfrm>
-              <a:off x="2472564" y="1874007"/>
+              <a:off x="2466881" y="1874081"/>
               <a:ext cx="77571" cy="77571"/>
             </a:xfrm>
             <a:prstGeom prst="ellipse">
@@ -2853,7 +2853,7 @@
           </p:nvSpPr>
           <p:spPr>
             <a:xfrm>
-              <a:off x="2513950" y="2463296"/>
+              <a:off x="2629379" y="2463246"/>
               <a:ext cx="77571" cy="77571"/>
             </a:xfrm>
             <a:prstGeom prst="ellipse">
@@ -2879,7 +2879,7 @@
           </p:nvSpPr>
           <p:spPr>
             <a:xfrm>
-              <a:off x="2548520" y="2547229"/>
+              <a:off x="2618949" y="2547174"/>
               <a:ext cx="77571" cy="77571"/>
             </a:xfrm>
             <a:prstGeom prst="ellipse">
@@ -2905,7 +2905,7 @@
           </p:nvSpPr>
           <p:spPr>
             <a:xfrm>
-              <a:off x="2675294" y="2619300"/>
+              <a:off x="2475449" y="2619326"/>
               <a:ext cx="77571" cy="77571"/>
             </a:xfrm>
             <a:prstGeom prst="ellipse">
@@ -2931,7 +2931,7 @@
           </p:nvSpPr>
           <p:spPr>
             <a:xfrm>
-              <a:off x="2657470" y="2648387"/>
+              <a:off x="2479800" y="2648423"/>
               <a:ext cx="77571" cy="77571"/>
             </a:xfrm>
             <a:prstGeom prst="ellipse">
@@ -2957,7 +2957,7 @@
           </p:nvSpPr>
           <p:spPr>
             <a:xfrm>
-              <a:off x="2459877" y="2453980"/>
+              <a:off x="2642117" y="2454055"/>
               <a:ext cx="77571" cy="77571"/>
             </a:xfrm>
             <a:prstGeom prst="ellipse">
@@ -2983,7 +2983,7 @@
           </p:nvSpPr>
           <p:spPr>
             <a:xfrm>
-              <a:off x="2514408" y="1732646"/>
+              <a:off x="2627935" y="1732533"/>
               <a:ext cx="77571" cy="77571"/>
             </a:xfrm>
             <a:prstGeom prst="ellipse">
@@ -3009,7 +3009,7 @@
           </p:nvSpPr>
           <p:spPr>
             <a:xfrm>
-              <a:off x="2471883" y="1942963"/>
+              <a:off x="2627544" y="1942924"/>
               <a:ext cx="77571" cy="77571"/>
             </a:xfrm>
             <a:prstGeom prst="ellipse">
@@ -3035,7 +3035,7 @@
           </p:nvSpPr>
           <p:spPr>
             <a:xfrm>
-              <a:off x="2517079" y="2637721"/>
+              <a:off x="2587651" y="2637867"/>
               <a:ext cx="77571" cy="77571"/>
             </a:xfrm>
             <a:prstGeom prst="ellipse">
@@ -3061,7 +3061,7 @@
           </p:nvSpPr>
           <p:spPr>
             <a:xfrm>
-              <a:off x="2504353" y="2409041"/>
+              <a:off x="2534636" y="2409111"/>
               <a:ext cx="77571" cy="77571"/>
             </a:xfrm>
             <a:prstGeom prst="ellipse">
@@ -3087,7 +3087,7 @@
           </p:nvSpPr>
           <p:spPr>
             <a:xfrm>
-              <a:off x="2659014" y="2345899"/>
+              <a:off x="2582222" y="2345861"/>
               <a:ext cx="77571" cy="77571"/>
             </a:xfrm>
             <a:prstGeom prst="ellipse">
@@ -3113,7 +3113,7 @@
           </p:nvSpPr>
           <p:spPr>
             <a:xfrm>
-              <a:off x="2522192" y="2356942"/>
+              <a:off x="2549358" y="2356928"/>
               <a:ext cx="77571" cy="77571"/>
             </a:xfrm>
             <a:prstGeom prst="ellipse">
@@ -3139,7 +3139,7 @@
           </p:nvSpPr>
           <p:spPr>
             <a:xfrm>
-              <a:off x="2428785" y="2539250"/>
+              <a:off x="2482464" y="2539289"/>
               <a:ext cx="77571" cy="77571"/>
             </a:xfrm>
             <a:prstGeom prst="ellipse">
@@ -3165,7 +3165,7 @@
           </p:nvSpPr>
           <p:spPr>
             <a:xfrm>
-              <a:off x="2603410" y="2471718"/>
+              <a:off x="2458980" y="2471705"/>
               <a:ext cx="77571" cy="77571"/>
             </a:xfrm>
             <a:prstGeom prst="ellipse">
@@ -3191,7 +3191,7 @@
           </p:nvSpPr>
           <p:spPr>
             <a:xfrm>
-              <a:off x="2524827" y="1933936"/>
+              <a:off x="2452314" y="1933897"/>
               <a:ext cx="77571" cy="77571"/>
             </a:xfrm>
             <a:prstGeom prst="ellipse">
@@ -3217,7 +3217,7 @@
           </p:nvSpPr>
           <p:spPr>
             <a:xfrm>
-              <a:off x="2665433" y="2087736"/>
+              <a:off x="2447780" y="2087755"/>
               <a:ext cx="77571" cy="77571"/>
             </a:xfrm>
             <a:prstGeom prst="ellipse">
@@ -3243,7 +3243,7 @@
           </p:nvSpPr>
           <p:spPr>
             <a:xfrm>
-              <a:off x="3491050" y="2579862"/>
+              <a:off x="3489196" y="2579848"/>
               <a:ext cx="77571" cy="77571"/>
             </a:xfrm>
             <a:prstGeom prst="ellipse">
@@ -3269,7 +3269,7 @@
           </p:nvSpPr>
           <p:spPr>
             <a:xfrm>
-              <a:off x="3413687" y="2334992"/>
+              <a:off x="3510815" y="2335019"/>
               <a:ext cx="77571" cy="77571"/>
             </a:xfrm>
             <a:prstGeom prst="ellipse">
@@ -3295,7 +3295,7 @@
           </p:nvSpPr>
           <p:spPr>
             <a:xfrm>
-              <a:off x="3430623" y="2593995"/>
+              <a:off x="3375469" y="2594096"/>
               <a:ext cx="77571" cy="77571"/>
             </a:xfrm>
             <a:prstGeom prst="ellipse">
@@ -3321,7 +3321,7 @@
           </p:nvSpPr>
           <p:spPr>
             <a:xfrm>
-              <a:off x="3419019" y="2695776"/>
+              <a:off x="3358255" y="2695776"/>
               <a:ext cx="77571" cy="77571"/>
             </a:xfrm>
             <a:prstGeom prst="ellipse">
@@ -3347,7 +3347,7 @@
           </p:nvSpPr>
           <p:spPr>
             <a:xfrm>
-              <a:off x="3567844" y="2409149"/>
+              <a:off x="3408589" y="2409087"/>
               <a:ext cx="77571" cy="77571"/>
             </a:xfrm>
             <a:prstGeom prst="ellipse">
@@ -3373,7 +3373,7 @@
           </p:nvSpPr>
           <p:spPr>
             <a:xfrm>
-              <a:off x="3445254" y="2568012"/>
+              <a:off x="3567737" y="2568077"/>
               <a:ext cx="77571" cy="77571"/>
             </a:xfrm>
             <a:prstGeom prst="ellipse">
@@ -3399,7 +3399,7 @@
           </p:nvSpPr>
           <p:spPr>
             <a:xfrm>
-              <a:off x="3352556" y="1538218"/>
+              <a:off x="3588197" y="1538186"/>
               <a:ext cx="77571" cy="77571"/>
             </a:xfrm>
             <a:prstGeom prst="ellipse">
@@ -3425,7 +3425,7 @@
           </p:nvSpPr>
           <p:spPr>
             <a:xfrm>
-              <a:off x="3525583" y="2619434"/>
+              <a:off x="3466743" y="2619454"/>
               <a:ext cx="77571" cy="77571"/>
             </a:xfrm>
             <a:prstGeom prst="ellipse">
@@ -3451,7 +3451,7 @@
           </p:nvSpPr>
           <p:spPr>
             <a:xfrm>
-              <a:off x="3338624" y="2232949"/>
+              <a:off x="3581563" y="2232914"/>
               <a:ext cx="77571" cy="77571"/>
             </a:xfrm>
             <a:prstGeom prst="ellipse">
@@ -3477,7 +3477,7 @@
           </p:nvSpPr>
           <p:spPr>
             <a:xfrm>
-              <a:off x="3494508" y="1857933"/>
+              <a:off x="3509214" y="1857786"/>
               <a:ext cx="77571" cy="77571"/>
             </a:xfrm>
             <a:prstGeom prst="ellipse">
@@ -3503,7 +3503,7 @@
           </p:nvSpPr>
           <p:spPr>
             <a:xfrm>
-              <a:off x="3433520" y="1242069"/>
+              <a:off x="3364528" y="1242069"/>
               <a:ext cx="77571" cy="77571"/>
             </a:xfrm>
             <a:prstGeom prst="ellipse">
@@ -3529,7 +3529,7 @@
           </p:nvSpPr>
           <p:spPr>
             <a:xfrm>
-              <a:off x="3363038" y="2120244"/>
+              <a:off x="3472172" y="2120292"/>
               <a:ext cx="77571" cy="77571"/>
             </a:xfrm>
             <a:prstGeom prst="ellipse">
@@ -3555,7 +3555,7 @@
           </p:nvSpPr>
           <p:spPr>
             <a:xfrm>
-              <a:off x="3577107" y="2306893"/>
+              <a:off x="3379646" y="2306850"/>
               <a:ext cx="77571" cy="77571"/>
             </a:xfrm>
             <a:prstGeom prst="ellipse">
@@ -3581,7 +3581,7 @@
           </p:nvSpPr>
           <p:spPr>
             <a:xfrm>
-              <a:off x="3462964" y="2149324"/>
+              <a:off x="3555461" y="2149179"/>
               <a:ext cx="77571" cy="77571"/>
             </a:xfrm>
             <a:prstGeom prst="ellipse">
@@ -3607,7 +3607,7 @@
           </p:nvSpPr>
           <p:spPr>
             <a:xfrm>
-              <a:off x="3560960" y="2277611"/>
+              <a:off x="3509786" y="2277737"/>
               <a:ext cx="77571" cy="77571"/>
             </a:xfrm>
             <a:prstGeom prst="ellipse">
@@ -3633,7 +3633,7 @@
           </p:nvSpPr>
           <p:spPr>
             <a:xfrm>
-              <a:off x="3401226" y="2448917"/>
+              <a:off x="3591836" y="2448868"/>
               <a:ext cx="77571" cy="77571"/>
             </a:xfrm>
             <a:prstGeom prst="ellipse">
@@ -3659,7 +3659,7 @@
           </p:nvSpPr>
           <p:spPr>
             <a:xfrm>
-              <a:off x="3496478" y="2350942"/>
+              <a:off x="3340175" y="2350995"/>
               <a:ext cx="77571" cy="77571"/>
             </a:xfrm>
             <a:prstGeom prst="ellipse">
@@ -3685,7 +3685,7 @@
           </p:nvSpPr>
           <p:spPr>
             <a:xfrm>
-              <a:off x="3590113" y="2334678"/>
+              <a:off x="3476147" y="2334582"/>
               <a:ext cx="77571" cy="77571"/>
             </a:xfrm>
             <a:prstGeom prst="ellipse">
@@ -3711,7 +3711,7 @@
           </p:nvSpPr>
           <p:spPr>
             <a:xfrm>
-              <a:off x="3575231" y="2447334"/>
+              <a:off x="3594838" y="2447296"/>
               <a:ext cx="77571" cy="77571"/>
             </a:xfrm>
             <a:prstGeom prst="ellipse">
@@ -3737,7 +3737,7 @@
           </p:nvSpPr>
           <p:spPr>
             <a:xfrm>
-              <a:off x="3364294" y="2435514"/>
+              <a:off x="3425370" y="2435457"/>
               <a:ext cx="77571" cy="77571"/>
             </a:xfrm>
             <a:prstGeom prst="ellipse">
@@ -3763,7 +3763,7 @@
           </p:nvSpPr>
           <p:spPr>
             <a:xfrm>
-              <a:off x="4302265" y="2454963"/>
+              <a:off x="4425710" y="2454937"/>
               <a:ext cx="77571" cy="77571"/>
             </a:xfrm>
             <a:prstGeom prst="ellipse">
@@ -3789,7 +3789,7 @@
           </p:nvSpPr>
           <p:spPr>
             <a:xfrm>
-              <a:off x="4315633" y="2452368"/>
+              <a:off x="4327539" y="2452479"/>
               <a:ext cx="77571" cy="77571"/>
             </a:xfrm>
             <a:prstGeom prst="ellipse">
@@ -3815,7 +3815,7 @@
           </p:nvSpPr>
           <p:spPr>
             <a:xfrm>
-              <a:off x="4496284" y="2403620"/>
+              <a:off x="4281517" y="2403528"/>
               <a:ext cx="77571" cy="77571"/>
             </a:xfrm>
             <a:prstGeom prst="ellipse">
@@ -3841,7 +3841,7 @@
           </p:nvSpPr>
           <p:spPr>
             <a:xfrm>
-              <a:off x="4415507" y="2558169"/>
+              <a:off x="4292025" y="2558233"/>
               <a:ext cx="77571" cy="77571"/>
             </a:xfrm>
             <a:prstGeom prst="ellipse">
@@ -3867,7 +3867,7 @@
           </p:nvSpPr>
           <p:spPr>
             <a:xfrm>
-              <a:off x="4460893" y="2141502"/>
+              <a:off x="4491537" y="2141573"/>
               <a:ext cx="77571" cy="77571"/>
             </a:xfrm>
             <a:prstGeom prst="ellipse">
@@ -3893,7 +3893,7 @@
           </p:nvSpPr>
           <p:spPr>
             <a:xfrm>
-              <a:off x="4510442" y="2161931"/>
+              <a:off x="4266096" y="2161871"/>
               <a:ext cx="77571" cy="77571"/>
             </a:xfrm>
             <a:prstGeom prst="ellipse">
@@ -3919,7 +3919,7 @@
           </p:nvSpPr>
           <p:spPr>
             <a:xfrm>
-              <a:off x="4457888" y="2406140"/>
+              <a:off x="4510442" y="2406115"/>
               <a:ext cx="77571" cy="77571"/>
             </a:xfrm>
             <a:prstGeom prst="ellipse">
@@ -3945,7 +3945,7 @@
           </p:nvSpPr>
           <p:spPr>
             <a:xfrm>
-              <a:off x="4432567" y="2321234"/>
+              <a:off x="4468439" y="2321257"/>
               <a:ext cx="77571" cy="77571"/>
             </a:xfrm>
             <a:prstGeom prst="ellipse">
@@ -3971,7 +3971,7 @@
           </p:nvSpPr>
           <p:spPr>
             <a:xfrm>
-              <a:off x="4505210" y="2221214"/>
+              <a:off x="4506443" y="2221108"/>
               <a:ext cx="77571" cy="77571"/>
             </a:xfrm>
             <a:prstGeom prst="ellipse">
@@ -3997,7 +3997,7 @@
           </p:nvSpPr>
           <p:spPr>
             <a:xfrm>
-              <a:off x="4496929" y="1968728"/>
+              <a:off x="4252106" y="1968728"/>
               <a:ext cx="77571" cy="77571"/>
             </a:xfrm>
             <a:prstGeom prst="ellipse">
@@ -4023,7 +4023,7 @@
           </p:nvSpPr>
           <p:spPr>
             <a:xfrm>
-              <a:off x="4345240" y="2043414"/>
+              <a:off x="4354604" y="2043508"/>
               <a:ext cx="77571" cy="77571"/>
             </a:xfrm>
             <a:prstGeom prst="ellipse">
@@ -4049,7 +4049,7 @@
           </p:nvSpPr>
           <p:spPr>
             <a:xfrm>
-              <a:off x="4463020" y="1890214"/>
+              <a:off x="4256600" y="1890216"/>
               <a:ext cx="77571" cy="77571"/>
             </a:xfrm>
             <a:prstGeom prst="ellipse">
@@ -4075,7 +4075,7 @@
           </p:nvSpPr>
           <p:spPr>
             <a:xfrm>
-              <a:off x="4300587" y="2150270"/>
+              <a:off x="4392495" y="2150204"/>
               <a:ext cx="77571" cy="77571"/>
             </a:xfrm>
             <a:prstGeom prst="ellipse">
@@ -4101,7 +4101,7 @@
           </p:nvSpPr>
           <p:spPr>
             <a:xfrm>
-              <a:off x="4364920" y="2077012"/>
+              <a:off x="4335959" y="2076922"/>
               <a:ext cx="77571" cy="77571"/>
             </a:xfrm>
             <a:prstGeom prst="ellipse">
@@ -4127,7 +4127,7 @@
           </p:nvSpPr>
           <p:spPr>
             <a:xfrm>
-              <a:off x="4363992" y="2522771"/>
+              <a:off x="4297330" y="2522680"/>
               <a:ext cx="77571" cy="77571"/>
             </a:xfrm>
             <a:prstGeom prst="ellipse">
@@ -4153,7 +4153,7 @@
           </p:nvSpPr>
           <p:spPr>
             <a:xfrm>
-              <a:off x="4252972" y="2340065"/>
+              <a:off x="4498010" y="2340130"/>
               <a:ext cx="77571" cy="77571"/>
             </a:xfrm>
             <a:prstGeom prst="ellipse">
@@ -4179,7 +4179,7 @@
           </p:nvSpPr>
           <p:spPr>
             <a:xfrm>
-              <a:off x="4471048" y="2236789"/>
+              <a:off x="4483590" y="2236631"/>
               <a:ext cx="77571" cy="77571"/>
             </a:xfrm>
             <a:prstGeom prst="ellipse">
@@ -4205,7 +4205,7 @@
           </p:nvSpPr>
           <p:spPr>
             <a:xfrm>
-              <a:off x="4398720" y="2304796"/>
+              <a:off x="4273413" y="2304785"/>
               <a:ext cx="77571" cy="77571"/>
             </a:xfrm>
             <a:prstGeom prst="ellipse">
@@ -4231,7 +4231,7 @@
           </p:nvSpPr>
           <p:spPr>
             <a:xfrm>
-              <a:off x="4318890" y="2016740"/>
+              <a:off x="4330331" y="2016721"/>
               <a:ext cx="77571" cy="77571"/>
             </a:xfrm>
             <a:prstGeom prst="ellipse">
@@ -4257,7 +4257,7 @@
           </p:nvSpPr>
           <p:spPr>
             <a:xfrm>
-              <a:off x="4334404" y="2272530"/>
+              <a:off x="4323667" y="2272536"/>
               <a:ext cx="77571" cy="77571"/>
             </a:xfrm>
             <a:prstGeom prst="ellipse">
@@ -4283,7 +4283,7 @@
           </p:nvSpPr>
           <p:spPr>
             <a:xfrm>
-              <a:off x="4487641" y="2122460"/>
+              <a:off x="4413069" y="2122399"/>
               <a:ext cx="77571" cy="77571"/>
             </a:xfrm>
             <a:prstGeom prst="ellipse">
@@ -4309,7 +4309,7 @@
           </p:nvSpPr>
           <p:spPr>
             <a:xfrm>
-              <a:off x="4346893" y="1998675"/>
+              <a:off x="4266949" y="1998666"/>
               <a:ext cx="77571" cy="77571"/>
             </a:xfrm>
             <a:prstGeom prst="ellipse">
@@ -4335,7 +4335,7 @@
           </p:nvSpPr>
           <p:spPr>
             <a:xfrm>
-              <a:off x="4440382" y="2184639"/>
+              <a:off x="4306445" y="2184631"/>
               <a:ext cx="77571" cy="77571"/>
             </a:xfrm>
             <a:prstGeom prst="ellipse">
@@ -4361,7 +4361,7 @@
           </p:nvSpPr>
           <p:spPr>
             <a:xfrm>
-              <a:off x="4331491" y="2151097"/>
+              <a:off x="4450479" y="2150965"/>
               <a:ext cx="77571" cy="77571"/>
             </a:xfrm>
             <a:prstGeom prst="ellipse">
@@ -4387,42 +4387,42 @@
           </p:nvSpPr>
           <p:spPr>
             <a:xfrm>
-              <a:off x="1681914" y="2055868"/>
-              <a:ext cx="2740754" cy="627905"/>
+              <a:off x="1668508" y="2055838"/>
+              <a:ext cx="2753301" cy="627947"/>
             </a:xfrm>
             <a:custGeom>
               <a:avLst/>
               <a:pathLst>
-                <a:path w="2740754" h="627905">
+                <a:path w="2753301" h="627947">
                   <a:moveTo>
-                    <a:pt x="0" y="178209"/>
+                    <a:pt x="0" y="178221"/>
                   </a:moveTo>
                   <a:lnTo>
-                    <a:pt x="1447997" y="171024"/>
+                    <a:pt x="1454626" y="171036"/>
                   </a:lnTo>
                   <a:lnTo>
-                    <a:pt x="1827169" y="135941"/>
+                    <a:pt x="1835534" y="135950"/>
                   </a:lnTo>
                   <a:lnTo>
-                    <a:pt x="2361582" y="62376"/>
+                    <a:pt x="2372393" y="62380"/>
                   </a:lnTo>
                   <a:lnTo>
-                    <a:pt x="2740754" y="0"/>
+                    <a:pt x="2753301" y="0"/>
                   </a:lnTo>
                   <a:lnTo>
-                    <a:pt x="2740754" y="406904"/>
+                    <a:pt x="2753301" y="406931"/>
                   </a:lnTo>
                   <a:lnTo>
-                    <a:pt x="2361582" y="399756"/>
+                    <a:pt x="2372393" y="399783"/>
                   </a:lnTo>
                   <a:lnTo>
-                    <a:pt x="1827169" y="404033"/>
+                    <a:pt x="1835534" y="404060"/>
                   </a:lnTo>
                   <a:lnTo>
-                    <a:pt x="1447997" y="424178"/>
+                    <a:pt x="1454626" y="424207"/>
                   </a:lnTo>
                   <a:lnTo>
-                    <a:pt x="0" y="627905"/>
+                    <a:pt x="0" y="627947"/>
                   </a:lnTo>
                   <a:close/>
                 </a:path>
@@ -4448,27 +4448,27 @@
           </p:nvSpPr>
           <p:spPr>
             <a:xfrm>
-              <a:off x="1681914" y="2055868"/>
-              <a:ext cx="2740754" cy="178209"/>
+              <a:off x="1668508" y="2055838"/>
+              <a:ext cx="2753301" cy="178221"/>
             </a:xfrm>
             <a:custGeom>
               <a:avLst/>
               <a:pathLst>
-                <a:path w="2740754" h="178209">
+                <a:path w="2753301" h="178221">
                   <a:moveTo>
-                    <a:pt x="0" y="178209"/>
+                    <a:pt x="0" y="178221"/>
                   </a:moveTo>
                   <a:lnTo>
-                    <a:pt x="1447997" y="171024"/>
+                    <a:pt x="1454626" y="171036"/>
                   </a:lnTo>
                   <a:lnTo>
-                    <a:pt x="1827169" y="135941"/>
+                    <a:pt x="1835534" y="135950"/>
                   </a:lnTo>
                   <a:lnTo>
-                    <a:pt x="2361582" y="62376"/>
+                    <a:pt x="2372393" y="62380"/>
                   </a:lnTo>
                   <a:lnTo>
-                    <a:pt x="2740754" y="0"/>
+                    <a:pt x="2753301" y="0"/>
                   </a:lnTo>
                 </a:path>
               </a:pathLst>
@@ -4488,27 +4488,27 @@
           </p:nvSpPr>
           <p:spPr>
             <a:xfrm>
-              <a:off x="1681914" y="2455625"/>
-              <a:ext cx="2740754" cy="228148"/>
+              <a:off x="1668508" y="2455622"/>
+              <a:ext cx="2753301" cy="228163"/>
             </a:xfrm>
             <a:custGeom>
               <a:avLst/>
               <a:pathLst>
-                <a:path w="2740754" h="228148">
+                <a:path w="2753301" h="228163">
                   <a:moveTo>
-                    <a:pt x="2740754" y="7147"/>
+                    <a:pt x="2753301" y="7147"/>
                   </a:moveTo>
                   <a:lnTo>
-                    <a:pt x="2361582" y="0"/>
+                    <a:pt x="2372393" y="0"/>
                   </a:lnTo>
                   <a:lnTo>
-                    <a:pt x="1827169" y="4276"/>
+                    <a:pt x="1835534" y="4276"/>
                   </a:lnTo>
                   <a:lnTo>
-                    <a:pt x="1447997" y="24422"/>
+                    <a:pt x="1454626" y="24423"/>
                   </a:lnTo>
                   <a:lnTo>
-                    <a:pt x="0" y="228148"/>
+                    <a:pt x="0" y="228163"/>
                   </a:lnTo>
                 </a:path>
               </a:pathLst>
@@ -4528,27 +4528,27 @@
           </p:nvSpPr>
           <p:spPr>
             <a:xfrm>
-              <a:off x="1681914" y="2259320"/>
-              <a:ext cx="2740754" cy="199605"/>
+              <a:off x="1668508" y="2259304"/>
+              <a:ext cx="2753301" cy="199618"/>
             </a:xfrm>
             <a:custGeom>
               <a:avLst/>
               <a:pathLst>
-                <a:path w="2740754" h="199605">
+                <a:path w="2753301" h="199618">
                   <a:moveTo>
-                    <a:pt x="0" y="199605"/>
+                    <a:pt x="0" y="199618"/>
                   </a:moveTo>
                   <a:lnTo>
-                    <a:pt x="1447997" y="94149"/>
+                    <a:pt x="1454626" y="94156"/>
                   </a:lnTo>
                   <a:lnTo>
-                    <a:pt x="1827169" y="66535"/>
+                    <a:pt x="1835534" y="66539"/>
                   </a:lnTo>
                   <a:lnTo>
-                    <a:pt x="2361582" y="27614"/>
+                    <a:pt x="2372393" y="27616"/>
                   </a:lnTo>
                   <a:lnTo>
-                    <a:pt x="2740754" y="0"/>
+                    <a:pt x="2753301" y="0"/>
                   </a:lnTo>
                 </a:path>
               </a:pathLst>
@@ -4577,7 +4577,7 @@
           </p:nvSpPr>
           <p:spPr>
             <a:xfrm>
-              <a:off x="3942974" y="1344225"/>
+              <a:off x="3942116" y="1344153"/>
               <a:ext cx="479694" cy="82021"/>
             </a:xfrm>
             <a:prstGeom prst="rect">
@@ -4684,7 +4684,7 @@
           </p:nvSpPr>
           <p:spPr>
             <a:xfrm rot="-5400000">
-              <a:off x="1177387" y="2461089"/>
+              <a:off x="1177387" y="2461090"/>
               <a:ext cx="194218" cy="100218"/>
             </a:xfrm>
             <a:prstGeom prst="rect">
@@ -4730,7 +4730,7 @@
           </p:nvSpPr>
           <p:spPr>
             <a:xfrm rot="-5400000">
-              <a:off x="1177387" y="2026820"/>
+              <a:off x="1177387" y="2026792"/>
               <a:ext cx="194218" cy="100218"/>
             </a:xfrm>
             <a:prstGeom prst="rect">
@@ -4776,7 +4776,7 @@
           </p:nvSpPr>
           <p:spPr>
             <a:xfrm rot="-5400000">
-              <a:off x="1177387" y="1592550"/>
+              <a:off x="1177387" y="1592493"/>
               <a:ext cx="194218" cy="100218"/>
             </a:xfrm>
             <a:prstGeom prst="rect">
@@ -4822,7 +4822,7 @@
           </p:nvSpPr>
           <p:spPr>
             <a:xfrm rot="-5400000">
-              <a:off x="1138525" y="1158281"/>
+              <a:off x="1138525" y="1158194"/>
               <a:ext cx="271942" cy="100218"/>
             </a:xfrm>
             <a:prstGeom prst="rect">
@@ -4868,7 +4868,7 @@
           </p:nvSpPr>
           <p:spPr>
             <a:xfrm>
-              <a:off x="1370425" y="2511198"/>
+              <a:off x="1370425" y="2511199"/>
               <a:ext cx="37957" cy="0"/>
             </a:xfrm>
             <a:custGeom>
@@ -4908,7 +4908,7 @@
           </p:nvSpPr>
           <p:spPr>
             <a:xfrm>
-              <a:off x="1370425" y="2076929"/>
+              <a:off x="1370425" y="2076901"/>
               <a:ext cx="37957" cy="0"/>
             </a:xfrm>
             <a:custGeom>
@@ -4948,7 +4948,7 @@
           </p:nvSpPr>
           <p:spPr>
             <a:xfrm>
-              <a:off x="1370425" y="1642660"/>
+              <a:off x="1370425" y="1642602"/>
               <a:ext cx="37957" cy="0"/>
             </a:xfrm>
             <a:custGeom>
@@ -4988,7 +4988,7 @@
           </p:nvSpPr>
           <p:spPr>
             <a:xfrm>
-              <a:off x="1370425" y="1208390"/>
+              <a:off x="1370425" y="1208304"/>
               <a:ext cx="37957" cy="0"/>
             </a:xfrm>
             <a:custGeom>
@@ -5068,7 +5068,7 @@
           </p:nvSpPr>
           <p:spPr>
             <a:xfrm>
-              <a:off x="1681914" y="2807247"/>
+              <a:off x="1668508" y="2807247"/>
               <a:ext cx="0" cy="37957"/>
             </a:xfrm>
             <a:custGeom>
@@ -5108,7 +5108,7 @@
           </p:nvSpPr>
           <p:spPr>
             <a:xfrm>
-              <a:off x="2595499" y="2807247"/>
+              <a:off x="2586276" y="2807247"/>
               <a:ext cx="0" cy="37957"/>
             </a:xfrm>
             <a:custGeom>
@@ -5148,7 +5148,7 @@
           </p:nvSpPr>
           <p:spPr>
             <a:xfrm>
-              <a:off x="3509084" y="2807247"/>
+              <a:off x="3504043" y="2807247"/>
               <a:ext cx="0" cy="37957"/>
             </a:xfrm>
             <a:custGeom>
@@ -5188,7 +5188,7 @@
           </p:nvSpPr>
           <p:spPr>
             <a:xfrm>
-              <a:off x="4422668" y="2807247"/>
+              <a:off x="4421810" y="2807247"/>
               <a:ext cx="0" cy="37957"/>
             </a:xfrm>
             <a:custGeom>
@@ -5228,7 +5228,7 @@
           </p:nvSpPr>
           <p:spPr>
             <a:xfrm>
-              <a:off x="1643052" y="2875571"/>
+              <a:off x="1629646" y="2875571"/>
               <a:ext cx="77724" cy="100218"/>
             </a:xfrm>
             <a:prstGeom prst="rect">
@@ -5274,7 +5274,7 @@
           </p:nvSpPr>
           <p:spPr>
             <a:xfrm>
-              <a:off x="2556637" y="2875571"/>
+              <a:off x="2547414" y="2875571"/>
               <a:ext cx="77724" cy="100218"/>
             </a:xfrm>
             <a:prstGeom prst="rect">
@@ -5320,7 +5320,7 @@
           </p:nvSpPr>
           <p:spPr>
             <a:xfrm>
-              <a:off x="3470222" y="2875571"/>
+              <a:off x="3465181" y="2875571"/>
               <a:ext cx="77724" cy="100218"/>
             </a:xfrm>
             <a:prstGeom prst="rect">
@@ -5366,7 +5366,7 @@
           </p:nvSpPr>
           <p:spPr>
             <a:xfrm>
-              <a:off x="4383806" y="2875571"/>
+              <a:off x="4382948" y="2875571"/>
               <a:ext cx="77724" cy="100218"/>
             </a:xfrm>
             <a:prstGeom prst="rect">
@@ -5530,7 +5530,7 @@
           </p:nvSpPr>
           <p:spPr>
             <a:xfrm>
-              <a:off x="5066724" y="2363274"/>
+              <a:off x="4968288" y="2362924"/>
               <a:ext cx="77571" cy="77571"/>
             </a:xfrm>
             <a:prstGeom prst="ellipse">
@@ -5556,7 +5556,7 @@
           </p:nvSpPr>
           <p:spPr>
             <a:xfrm>
-              <a:off x="5108534" y="1486560"/>
+              <a:off x="4948748" y="1486472"/>
               <a:ext cx="77571" cy="77571"/>
             </a:xfrm>
             <a:prstGeom prst="ellipse">
@@ -5582,7 +5582,7 @@
           </p:nvSpPr>
           <p:spPr>
             <a:xfrm>
-              <a:off x="4948748" y="2354811"/>
+              <a:off x="5046954" y="2354545"/>
               <a:ext cx="77571" cy="77571"/>
             </a:xfrm>
             <a:prstGeom prst="ellipse">
@@ -5608,7 +5608,7 @@
           </p:nvSpPr>
           <p:spPr>
             <a:xfrm>
-              <a:off x="5041915" y="2251967"/>
+              <a:off x="5183452" y="2251466"/>
               <a:ext cx="77571" cy="77571"/>
             </a:xfrm>
             <a:prstGeom prst="ellipse">
@@ -5634,7 +5634,7 @@
           </p:nvSpPr>
           <p:spPr>
             <a:xfrm>
-              <a:off x="5085586" y="2441709"/>
+              <a:off x="5051729" y="2441350"/>
               <a:ext cx="77571" cy="77571"/>
             </a:xfrm>
             <a:prstGeom prst="ellipse">
@@ -5660,7 +5660,7 @@
           </p:nvSpPr>
           <p:spPr>
             <a:xfrm>
-              <a:off x="4983221" y="1751627"/>
+              <a:off x="5120474" y="1751740"/>
               <a:ext cx="77571" cy="77571"/>
             </a:xfrm>
             <a:prstGeom prst="ellipse">
@@ -5686,7 +5686,7 @@
           </p:nvSpPr>
           <p:spPr>
             <a:xfrm>
-              <a:off x="5091899" y="1304819"/>
+              <a:off x="5142897" y="1304628"/>
               <a:ext cx="77571" cy="77571"/>
             </a:xfrm>
             <a:prstGeom prst="ellipse">
@@ -5712,7 +5712,7 @@
           </p:nvSpPr>
           <p:spPr>
             <a:xfrm>
-              <a:off x="5137863" y="2114032"/>
+              <a:off x="4987504" y="2113878"/>
               <a:ext cx="77571" cy="77571"/>
             </a:xfrm>
             <a:prstGeom prst="ellipse">
@@ -5738,7 +5738,7 @@
           </p:nvSpPr>
           <p:spPr>
             <a:xfrm>
-              <a:off x="4972520" y="2655074"/>
+              <a:off x="5162644" y="2654751"/>
               <a:ext cx="77571" cy="77571"/>
             </a:xfrm>
             <a:prstGeom prst="ellipse">
@@ -5764,7 +5764,7 @@
           </p:nvSpPr>
           <p:spPr>
             <a:xfrm>
-              <a:off x="5003481" y="2073141"/>
+              <a:off x="5066527" y="2072972"/>
               <a:ext cx="77571" cy="77571"/>
             </a:xfrm>
             <a:prstGeom prst="ellipse">
@@ -5790,7 +5790,7 @@
           </p:nvSpPr>
           <p:spPr>
             <a:xfrm>
-              <a:off x="6018764" y="2676379"/>
+              <a:off x="5883395" y="2676110"/>
               <a:ext cx="77571" cy="77571"/>
             </a:xfrm>
             <a:prstGeom prst="ellipse">
@@ -5816,7 +5816,7 @@
           </p:nvSpPr>
           <p:spPr>
             <a:xfrm>
-              <a:off x="5916654" y="1752388"/>
+              <a:off x="6049659" y="1751961"/>
               <a:ext cx="77571" cy="77571"/>
             </a:xfrm>
             <a:prstGeom prst="ellipse">
@@ -5842,7 +5842,7 @@
           </p:nvSpPr>
           <p:spPr>
             <a:xfrm>
-              <a:off x="5895580" y="2267058"/>
+              <a:off x="5876332" y="2266915"/>
               <a:ext cx="77571" cy="77571"/>
             </a:xfrm>
             <a:prstGeom prst="ellipse">
@@ -5868,7 +5868,7 @@
           </p:nvSpPr>
           <p:spPr>
             <a:xfrm>
-              <a:off x="6014629" y="2695776"/>
+              <a:off x="6029818" y="2695776"/>
               <a:ext cx="77571" cy="77571"/>
             </a:xfrm>
             <a:prstGeom prst="ellipse">
@@ -5894,7 +5894,7 @@
           </p:nvSpPr>
           <p:spPr>
             <a:xfrm>
-              <a:off x="5933778" y="1940704"/>
+              <a:off x="5953886" y="1940496"/>
               <a:ext cx="77571" cy="77571"/>
             </a:xfrm>
             <a:prstGeom prst="ellipse">
@@ -5920,7 +5920,7 @@
           </p:nvSpPr>
           <p:spPr>
             <a:xfrm>
-              <a:off x="6027462" y="1242069"/>
+              <a:off x="6032138" y="1242069"/>
               <a:ext cx="77571" cy="77571"/>
             </a:xfrm>
             <a:prstGeom prst="ellipse">
@@ -5946,7 +5946,7 @@
           </p:nvSpPr>
           <p:spPr>
             <a:xfrm>
-              <a:off x="5894854" y="2662280"/>
+              <a:off x="5964107" y="2661728"/>
               <a:ext cx="77571" cy="77571"/>
             </a:xfrm>
             <a:prstGeom prst="ellipse">
@@ -5972,7 +5972,7 @@
           </p:nvSpPr>
           <p:spPr>
             <a:xfrm>
-              <a:off x="5859617" y="2602068"/>
+              <a:off x="6002830" y="2602014"/>
               <a:ext cx="77571" cy="77571"/>
             </a:xfrm>
             <a:prstGeom prst="ellipse">
@@ -5998,7 +5998,7 @@
           </p:nvSpPr>
           <p:spPr>
             <a:xfrm>
-              <a:off x="5914210" y="2291628"/>
+              <a:off x="6002621" y="2291326"/>
               <a:ext cx="77571" cy="77571"/>
             </a:xfrm>
             <a:prstGeom prst="ellipse">
@@ -6024,7 +6024,7 @@
           </p:nvSpPr>
           <p:spPr>
             <a:xfrm>
-              <a:off x="5922110" y="2669056"/>
+              <a:off x="5981666" y="2668672"/>
               <a:ext cx="77571" cy="77571"/>
             </a:xfrm>
             <a:prstGeom prst="ellipse">
@@ -6050,7 +6050,7 @@
           </p:nvSpPr>
           <p:spPr>
             <a:xfrm>
-              <a:off x="6015786" y="2456683"/>
+              <a:off x="6026111" y="2456308"/>
               <a:ext cx="77571" cy="77571"/>
             </a:xfrm>
             <a:prstGeom prst="ellipse">
@@ -6076,7 +6076,7 @@
           </p:nvSpPr>
           <p:spPr>
             <a:xfrm>
-              <a:off x="5919617" y="2665294"/>
+              <a:off x="6064794" y="2665322"/>
               <a:ext cx="77571" cy="77571"/>
             </a:xfrm>
             <a:prstGeom prst="ellipse">
@@ -6102,7 +6102,7 @@
           </p:nvSpPr>
           <p:spPr>
             <a:xfrm>
-              <a:off x="5944046" y="2174682"/>
+              <a:off x="6074720" y="2174472"/>
               <a:ext cx="77571" cy="77571"/>
             </a:xfrm>
             <a:prstGeom prst="ellipse">
@@ -6128,7 +6128,7 @@
           </p:nvSpPr>
           <p:spPr>
             <a:xfrm>
-              <a:off x="5880654" y="2038403"/>
+              <a:off x="6066913" y="2038365"/>
               <a:ext cx="77571" cy="77571"/>
             </a:xfrm>
             <a:prstGeom prst="ellipse">
@@ -6154,7 +6154,7 @@
           </p:nvSpPr>
           <p:spPr>
             <a:xfrm>
-              <a:off x="5903872" y="2099309"/>
+              <a:off x="6035472" y="2099164"/>
               <a:ext cx="77571" cy="77571"/>
             </a:xfrm>
             <a:prstGeom prst="ellipse">
@@ -6180,7 +6180,7 @@
           </p:nvSpPr>
           <p:spPr>
             <a:xfrm>
-              <a:off x="6066950" y="1899713"/>
+              <a:off x="6073399" y="1899408"/>
               <a:ext cx="77571" cy="77571"/>
             </a:xfrm>
             <a:prstGeom prst="ellipse">
@@ -6206,7 +6206,7 @@
           </p:nvSpPr>
           <p:spPr>
             <a:xfrm>
-              <a:off x="5868227" y="2423157"/>
+              <a:off x="5994195" y="2422733"/>
               <a:ext cx="77571" cy="77571"/>
             </a:xfrm>
             <a:prstGeom prst="ellipse">
@@ -6232,7 +6232,7 @@
           </p:nvSpPr>
           <p:spPr>
             <a:xfrm>
-              <a:off x="5895512" y="2658417"/>
+              <a:off x="6102848" y="2658176"/>
               <a:ext cx="77571" cy="77571"/>
             </a:xfrm>
             <a:prstGeom prst="ellipse">
@@ -6258,7 +6258,7 @@
           </p:nvSpPr>
           <p:spPr>
             <a:xfrm>
-              <a:off x="6969023" y="2401282"/>
+              <a:off x="6887170" y="2401205"/>
               <a:ext cx="77571" cy="77571"/>
             </a:xfrm>
             <a:prstGeom prst="ellipse">
@@ -6284,7 +6284,7 @@
           </p:nvSpPr>
           <p:spPr>
             <a:xfrm>
-              <a:off x="6962370" y="2497055"/>
+              <a:off x="6918258" y="2496733"/>
               <a:ext cx="77571" cy="77571"/>
             </a:xfrm>
             <a:prstGeom prst="ellipse">
@@ -6310,7 +6310,7 @@
           </p:nvSpPr>
           <p:spPr>
             <a:xfrm>
-              <a:off x="6992827" y="2600254"/>
+              <a:off x="6993351" y="2600101"/>
               <a:ext cx="77571" cy="77571"/>
             </a:xfrm>
             <a:prstGeom prst="ellipse">
@@ -6336,7 +6336,7 @@
           </p:nvSpPr>
           <p:spPr>
             <a:xfrm>
-              <a:off x="6914770" y="2353273"/>
+              <a:off x="6887962" y="2353066"/>
               <a:ext cx="77571" cy="77571"/>
             </a:xfrm>
             <a:prstGeom prst="ellipse">
@@ -6362,7 +6362,7 @@
           </p:nvSpPr>
           <p:spPr>
             <a:xfrm>
-              <a:off x="6787872" y="1818694"/>
+              <a:off x="6835653" y="1818449"/>
               <a:ext cx="77571" cy="77571"/>
             </a:xfrm>
             <a:prstGeom prst="ellipse">
@@ -6388,7 +6388,7 @@
           </p:nvSpPr>
           <p:spPr>
             <a:xfrm>
-              <a:off x="6905391" y="1461715"/>
+              <a:off x="6782275" y="1461613"/>
               <a:ext cx="77571" cy="77571"/>
             </a:xfrm>
             <a:prstGeom prst="ellipse">
@@ -6414,7 +6414,7 @@
           </p:nvSpPr>
           <p:spPr>
             <a:xfrm>
-              <a:off x="6919676" y="1702936"/>
+              <a:off x="6971299" y="1702623"/>
               <a:ext cx="77571" cy="77571"/>
             </a:xfrm>
             <a:prstGeom prst="ellipse">
@@ -6440,7 +6440,7 @@
           </p:nvSpPr>
           <p:spPr>
             <a:xfrm>
-              <a:off x="7004467" y="2433493"/>
+              <a:off x="7034168" y="2433233"/>
               <a:ext cx="77571" cy="77571"/>
             </a:xfrm>
             <a:prstGeom prst="ellipse">
@@ -6466,7 +6466,7 @@
           </p:nvSpPr>
           <p:spPr>
             <a:xfrm>
-              <a:off x="6898853" y="2373878"/>
+              <a:off x="6934411" y="2373378"/>
               <a:ext cx="77571" cy="77571"/>
             </a:xfrm>
             <a:prstGeom prst="ellipse">
@@ -6492,7 +6492,7 @@
           </p:nvSpPr>
           <p:spPr>
             <a:xfrm>
-              <a:off x="6982939" y="1779743"/>
+              <a:off x="7002603" y="1779424"/>
               <a:ext cx="77571" cy="77571"/>
             </a:xfrm>
             <a:prstGeom prst="ellipse">
@@ -6518,7 +6518,7 @@
           </p:nvSpPr>
           <p:spPr>
             <a:xfrm>
-              <a:off x="6850229" y="1992155"/>
+              <a:off x="6947718" y="1991997"/>
               <a:ext cx="77571" cy="77571"/>
             </a:xfrm>
             <a:prstGeom prst="ellipse">
@@ -6544,7 +6544,7 @@
           </p:nvSpPr>
           <p:spPr>
             <a:xfrm>
-              <a:off x="6919331" y="2574506"/>
+              <a:off x="6924612" y="2574516"/>
               <a:ext cx="77571" cy="77571"/>
             </a:xfrm>
             <a:prstGeom prst="ellipse">
@@ -6570,7 +6570,7 @@
           </p:nvSpPr>
           <p:spPr>
             <a:xfrm>
-              <a:off x="6910881" y="1727665"/>
+              <a:off x="6783335" y="1727377"/>
               <a:ext cx="77571" cy="77571"/>
             </a:xfrm>
             <a:prstGeom prst="ellipse">
@@ -6596,7 +6596,7 @@
           </p:nvSpPr>
           <p:spPr>
             <a:xfrm>
-              <a:off x="6822808" y="1929609"/>
+              <a:off x="6950469" y="1929483"/>
               <a:ext cx="77571" cy="77571"/>
             </a:xfrm>
             <a:prstGeom prst="ellipse">
@@ -6622,7 +6622,7 @@
           </p:nvSpPr>
           <p:spPr>
             <a:xfrm>
-              <a:off x="7001668" y="2127030"/>
+              <a:off x="6872434" y="2126529"/>
               <a:ext cx="77571" cy="77571"/>
             </a:xfrm>
             <a:prstGeom prst="ellipse">
@@ -6648,7 +6648,7 @@
           </p:nvSpPr>
           <p:spPr>
             <a:xfrm>
-              <a:off x="6932793" y="2544491"/>
+              <a:off x="6855669" y="2544451"/>
               <a:ext cx="77571" cy="77571"/>
             </a:xfrm>
             <a:prstGeom prst="ellipse">
@@ -6674,7 +6674,7 @@
           </p:nvSpPr>
           <p:spPr>
             <a:xfrm>
-              <a:off x="6868097" y="2117629"/>
+              <a:off x="6827779" y="2117309"/>
               <a:ext cx="77571" cy="77571"/>
             </a:xfrm>
             <a:prstGeom prst="ellipse">
@@ -6700,7 +6700,7 @@
           </p:nvSpPr>
           <p:spPr>
             <a:xfrm>
-              <a:off x="6790945" y="2516471"/>
+              <a:off x="6851050" y="2516408"/>
               <a:ext cx="77571" cy="77571"/>
             </a:xfrm>
             <a:prstGeom prst="ellipse">
@@ -6726,7 +6726,7 @@
           </p:nvSpPr>
           <p:spPr>
             <a:xfrm>
-              <a:off x="6958202" y="1908550"/>
+              <a:off x="6892640" y="1908243"/>
               <a:ext cx="77571" cy="77571"/>
             </a:xfrm>
             <a:prstGeom prst="ellipse">
@@ -6752,7 +6752,7 @@
           </p:nvSpPr>
           <p:spPr>
             <a:xfrm>
-              <a:off x="6934753" y="2132153"/>
+              <a:off x="6921020" y="2132252"/>
               <a:ext cx="77571" cy="77571"/>
             </a:xfrm>
             <a:prstGeom prst="ellipse">
@@ -6778,7 +6778,7 @@
           </p:nvSpPr>
           <p:spPr>
             <a:xfrm>
-              <a:off x="7689230" y="2246072"/>
+              <a:off x="7777651" y="2245910"/>
               <a:ext cx="77571" cy="77571"/>
             </a:xfrm>
             <a:prstGeom prst="ellipse">
@@ -6804,7 +6804,7 @@
           </p:nvSpPr>
           <p:spPr>
             <a:xfrm>
-              <a:off x="7762135" y="2396609"/>
+              <a:off x="7774208" y="2396507"/>
               <a:ext cx="77571" cy="77571"/>
             </a:xfrm>
             <a:prstGeom prst="ellipse">
@@ -6830,7 +6830,7 @@
           </p:nvSpPr>
           <p:spPr>
             <a:xfrm>
-              <a:off x="7832240" y="2455674"/>
+              <a:off x="7814122" y="2455390"/>
               <a:ext cx="77571" cy="77571"/>
             </a:xfrm>
             <a:prstGeom prst="ellipse">
@@ -6856,7 +6856,7 @@
           </p:nvSpPr>
           <p:spPr>
             <a:xfrm>
-              <a:off x="7889522" y="2227408"/>
+              <a:off x="7940029" y="2227479"/>
               <a:ext cx="77571" cy="77571"/>
             </a:xfrm>
             <a:prstGeom prst="ellipse">
@@ -6882,7 +6882,7 @@
           </p:nvSpPr>
           <p:spPr>
             <a:xfrm>
-              <a:off x="7825314" y="2102241"/>
+              <a:off x="7930896" y="2101940"/>
               <a:ext cx="77571" cy="77571"/>
             </a:xfrm>
             <a:prstGeom prst="ellipse">
@@ -6908,7 +6908,7 @@
           </p:nvSpPr>
           <p:spPr>
             <a:xfrm>
-              <a:off x="7765944" y="2156451"/>
+              <a:off x="7737001" y="2156083"/>
               <a:ext cx="77571" cy="77571"/>
             </a:xfrm>
             <a:prstGeom prst="ellipse">
@@ -6934,7 +6934,7 @@
           </p:nvSpPr>
           <p:spPr>
             <a:xfrm>
-              <a:off x="7920059" y="2395049"/>
+              <a:off x="7725183" y="2394884"/>
               <a:ext cx="77571" cy="77571"/>
             </a:xfrm>
             <a:prstGeom prst="ellipse">
@@ -6960,7 +6960,7 @@
           </p:nvSpPr>
           <p:spPr>
             <a:xfrm>
-              <a:off x="7694890" y="2181273"/>
+              <a:off x="7901815" y="2180889"/>
               <a:ext cx="77571" cy="77571"/>
             </a:xfrm>
             <a:prstGeom prst="ellipse">
@@ -6986,7 +6986,7 @@
           </p:nvSpPr>
           <p:spPr>
             <a:xfrm>
-              <a:off x="7795740" y="2433062"/>
+              <a:off x="7794294" y="2432824"/>
               <a:ext cx="77571" cy="77571"/>
             </a:xfrm>
             <a:prstGeom prst="ellipse">
@@ -7012,7 +7012,7 @@
           </p:nvSpPr>
           <p:spPr>
             <a:xfrm>
-              <a:off x="7896542" y="2313189"/>
+              <a:off x="7866828" y="2312817"/>
               <a:ext cx="77571" cy="77571"/>
             </a:xfrm>
             <a:prstGeom prst="ellipse">
@@ -7038,7 +7038,7 @@
           </p:nvSpPr>
           <p:spPr>
             <a:xfrm>
-              <a:off x="7891335" y="2138232"/>
+              <a:off x="7719116" y="2138082"/>
               <a:ext cx="77571" cy="77571"/>
             </a:xfrm>
             <a:prstGeom prst="ellipse">
@@ -7064,7 +7064,7 @@
           </p:nvSpPr>
           <p:spPr>
             <a:xfrm>
-              <a:off x="7732370" y="1812057"/>
+              <a:off x="7915399" y="1812088"/>
               <a:ext cx="77571" cy="77571"/>
             </a:xfrm>
             <a:prstGeom prst="ellipse">
@@ -7090,7 +7090,7 @@
           </p:nvSpPr>
           <p:spPr>
             <a:xfrm>
-              <a:off x="7834950" y="2419579"/>
+              <a:off x="7816557" y="2419447"/>
               <a:ext cx="77571" cy="77571"/>
             </a:xfrm>
             <a:prstGeom prst="ellipse">
@@ -7116,7 +7116,7 @@
           </p:nvSpPr>
           <p:spPr>
             <a:xfrm>
-              <a:off x="7824438" y="2635022"/>
+              <a:off x="7708838" y="2634770"/>
               <a:ext cx="77571" cy="77571"/>
             </a:xfrm>
             <a:prstGeom prst="ellipse">
@@ -7142,7 +7142,7 @@
           </p:nvSpPr>
           <p:spPr>
             <a:xfrm>
-              <a:off x="7834612" y="2487323"/>
+              <a:off x="7740477" y="2486889"/>
               <a:ext cx="77571" cy="77571"/>
             </a:xfrm>
             <a:prstGeom prst="ellipse">
@@ -7168,7 +7168,7 @@
           </p:nvSpPr>
           <p:spPr>
             <a:xfrm>
-              <a:off x="7800217" y="2254203"/>
+              <a:off x="7727846" y="2254024"/>
               <a:ext cx="77571" cy="77571"/>
             </a:xfrm>
             <a:prstGeom prst="ellipse">
@@ -7194,7 +7194,7 @@
           </p:nvSpPr>
           <p:spPr>
             <a:xfrm>
-              <a:off x="7940029" y="2388462"/>
+              <a:off x="7834037" y="2388146"/>
               <a:ext cx="77571" cy="77571"/>
             </a:xfrm>
             <a:prstGeom prst="ellipse">
@@ -7220,7 +7220,7 @@
           </p:nvSpPr>
           <p:spPr>
             <a:xfrm>
-              <a:off x="7840444" y="2228877"/>
+              <a:off x="7735972" y="2228702"/>
               <a:ext cx="77571" cy="77571"/>
             </a:xfrm>
             <a:prstGeom prst="ellipse">
@@ -7246,7 +7246,7 @@
           </p:nvSpPr>
           <p:spPr>
             <a:xfrm>
-              <a:off x="7762384" y="2204436"/>
+              <a:off x="7906761" y="2204280"/>
               <a:ext cx="77571" cy="77571"/>
             </a:xfrm>
             <a:prstGeom prst="ellipse">
@@ -7272,7 +7272,7 @@
           </p:nvSpPr>
           <p:spPr>
             <a:xfrm>
-              <a:off x="7762387" y="2025415"/>
+              <a:off x="7704911" y="2025049"/>
               <a:ext cx="77571" cy="77571"/>
             </a:xfrm>
             <a:prstGeom prst="ellipse">
@@ -7298,7 +7298,7 @@
           </p:nvSpPr>
           <p:spPr>
             <a:xfrm>
-              <a:off x="7818772" y="2071210"/>
+              <a:off x="7853064" y="2070869"/>
               <a:ext cx="77571" cy="77571"/>
             </a:xfrm>
             <a:prstGeom prst="ellipse">
@@ -7324,7 +7324,7 @@
           </p:nvSpPr>
           <p:spPr>
             <a:xfrm>
-              <a:off x="7838084" y="2141818"/>
+              <a:off x="7817212" y="2141885"/>
               <a:ext cx="77571" cy="77571"/>
             </a:xfrm>
             <a:prstGeom prst="ellipse">
@@ -7350,7 +7350,7 @@
           </p:nvSpPr>
           <p:spPr>
             <a:xfrm>
-              <a:off x="7831559" y="2526693"/>
+              <a:off x="7785911" y="2526715"/>
               <a:ext cx="77571" cy="77571"/>
             </a:xfrm>
             <a:prstGeom prst="ellipse">
@@ -7376,7 +7376,7 @@
           </p:nvSpPr>
           <p:spPr>
             <a:xfrm>
-              <a:off x="7910701" y="2220305"/>
+              <a:off x="7746089" y="2220248"/>
               <a:ext cx="77571" cy="77571"/>
             </a:xfrm>
             <a:prstGeom prst="ellipse">
@@ -7402,42 +7402,42 @@
           </p:nvSpPr>
           <p:spPr>
             <a:xfrm>
-              <a:off x="5110320" y="1993079"/>
-              <a:ext cx="2746412" cy="456265"/>
+              <a:off x="5112956" y="1992894"/>
+              <a:ext cx="2758650" cy="456244"/>
             </a:xfrm>
             <a:custGeom>
               <a:avLst/>
               <a:pathLst>
-                <a:path w="2746412" h="456265">
+                <a:path w="2758650" h="456244">
                   <a:moveTo>
                     <a:pt x="0" y="0"/>
                   </a:moveTo>
                   <a:lnTo>
-                    <a:pt x="1450987" y="116000"/>
+                    <a:pt x="1457452" y="115994"/>
                   </a:lnTo>
                   <a:lnTo>
-                    <a:pt x="1830941" y="134930"/>
+                    <a:pt x="1839100" y="134924"/>
                   </a:lnTo>
                   <a:lnTo>
-                    <a:pt x="2366457" y="152469"/>
+                    <a:pt x="2377003" y="152462"/>
                   </a:lnTo>
                   <a:lnTo>
-                    <a:pt x="2746412" y="159383"/>
+                    <a:pt x="2758650" y="159376"/>
                   </a:lnTo>
                   <a:lnTo>
-                    <a:pt x="2746412" y="456265"/>
+                    <a:pt x="2758650" y="456244"/>
                   </a:lnTo>
                   <a:lnTo>
-                    <a:pt x="2366457" y="425420"/>
+                    <a:pt x="2377003" y="425400"/>
                   </a:lnTo>
                   <a:lnTo>
-                    <a:pt x="1830941" y="389740"/>
+                    <a:pt x="1839100" y="389722"/>
                   </a:lnTo>
                   <a:lnTo>
-                    <a:pt x="1450987" y="370912"/>
+                    <a:pt x="1457452" y="370894"/>
                   </a:lnTo>
                   <a:lnTo>
-                    <a:pt x="0" y="342715"/>
+                    <a:pt x="0" y="342699"/>
                   </a:lnTo>
                   <a:close/>
                 </a:path>
@@ -7463,27 +7463,27 @@
           </p:nvSpPr>
           <p:spPr>
             <a:xfrm>
-              <a:off x="5110320" y="1993079"/>
-              <a:ext cx="2746412" cy="159383"/>
+              <a:off x="5112956" y="1992894"/>
+              <a:ext cx="2758650" cy="159376"/>
             </a:xfrm>
             <a:custGeom>
               <a:avLst/>
               <a:pathLst>
-                <a:path w="2746412" h="159383">
+                <a:path w="2758650" h="159376">
                   <a:moveTo>
                     <a:pt x="0" y="0"/>
                   </a:moveTo>
                   <a:lnTo>
-                    <a:pt x="1450987" y="116000"/>
+                    <a:pt x="1457452" y="115994"/>
                   </a:lnTo>
                   <a:lnTo>
-                    <a:pt x="1830941" y="134930"/>
+                    <a:pt x="1839100" y="134924"/>
                   </a:lnTo>
                   <a:lnTo>
-                    <a:pt x="2366457" y="152469"/>
+                    <a:pt x="2377003" y="152462"/>
                   </a:lnTo>
                   <a:lnTo>
-                    <a:pt x="2746412" y="159383"/>
+                    <a:pt x="2758650" y="159376"/>
                   </a:lnTo>
                 </a:path>
               </a:pathLst>
@@ -7503,24 +7503,24 @@
           </p:nvSpPr>
           <p:spPr>
             <a:xfrm>
-              <a:off x="5110320" y="2335795"/>
-              <a:ext cx="2746412" cy="113550"/>
+              <a:off x="5112956" y="2335594"/>
+              <a:ext cx="2758650" cy="113544"/>
             </a:xfrm>
             <a:custGeom>
               <a:avLst/>
               <a:pathLst>
-                <a:path w="2746412" h="113550">
+                <a:path w="2758650" h="113544">
                   <a:moveTo>
-                    <a:pt x="2746412" y="113550"/>
+                    <a:pt x="2758650" y="113544"/>
                   </a:moveTo>
                   <a:lnTo>
-                    <a:pt x="2366457" y="82704"/>
+                    <a:pt x="2377003" y="82700"/>
                   </a:lnTo>
                   <a:lnTo>
-                    <a:pt x="1830941" y="47025"/>
+                    <a:pt x="1839100" y="47023"/>
                   </a:lnTo>
                   <a:lnTo>
-                    <a:pt x="1450987" y="28196"/>
+                    <a:pt x="1457452" y="28195"/>
                   </a:lnTo>
                   <a:lnTo>
                     <a:pt x="0" y="0"/>
@@ -7543,27 +7543,27 @@
           </p:nvSpPr>
           <p:spPr>
             <a:xfrm>
-              <a:off x="5110320" y="2164437"/>
-              <a:ext cx="2746412" cy="136466"/>
+              <a:off x="5112956" y="2164244"/>
+              <a:ext cx="2758650" cy="136460"/>
             </a:xfrm>
             <a:custGeom>
               <a:avLst/>
               <a:pathLst>
-                <a:path w="2746412" h="136466">
+                <a:path w="2758650" h="136460">
                   <a:moveTo>
                     <a:pt x="0" y="0"/>
                   </a:moveTo>
                   <a:lnTo>
-                    <a:pt x="1450987" y="72098"/>
+                    <a:pt x="1457452" y="72094"/>
                   </a:lnTo>
                   <a:lnTo>
-                    <a:pt x="1830941" y="90977"/>
+                    <a:pt x="1839100" y="90973"/>
                   </a:lnTo>
                   <a:lnTo>
-                    <a:pt x="2366457" y="117587"/>
+                    <a:pt x="2377003" y="117581"/>
                   </a:lnTo>
                   <a:lnTo>
-                    <a:pt x="2746412" y="136466"/>
+                    <a:pt x="2758650" y="136460"/>
                   </a:lnTo>
                 </a:path>
               </a:pathLst>
@@ -7592,7 +7592,7 @@
           </p:nvSpPr>
           <p:spPr>
             <a:xfrm>
-              <a:off x="7377038" y="1344331"/>
+              <a:off x="7391912" y="1344173"/>
               <a:ext cx="479694" cy="82021"/>
             </a:xfrm>
             <a:prstGeom prst="rect">
@@ -7699,7 +7699,7 @@
           </p:nvSpPr>
           <p:spPr>
             <a:xfrm>
-              <a:off x="4800012" y="2496472"/>
+              <a:off x="4800012" y="2496264"/>
               <a:ext cx="37957" cy="0"/>
             </a:xfrm>
             <a:custGeom>
@@ -7739,7 +7739,7 @@
           </p:nvSpPr>
           <p:spPr>
             <a:xfrm>
-              <a:off x="4800012" y="1968092"/>
+              <a:off x="4800012" y="1967908"/>
               <a:ext cx="37957" cy="0"/>
             </a:xfrm>
             <a:custGeom>
@@ -7779,7 +7779,7 @@
           </p:nvSpPr>
           <p:spPr>
             <a:xfrm>
-              <a:off x="4800012" y="1439712"/>
+              <a:off x="4800012" y="1439553"/>
               <a:ext cx="37957" cy="0"/>
             </a:xfrm>
             <a:custGeom>
@@ -7859,7 +7859,7 @@
           </p:nvSpPr>
           <p:spPr>
             <a:xfrm>
-              <a:off x="5110320" y="2807247"/>
+              <a:off x="5112956" y="2807247"/>
               <a:ext cx="0" cy="37957"/>
             </a:xfrm>
             <a:custGeom>
@@ -7899,7 +7899,7 @@
           </p:nvSpPr>
           <p:spPr>
             <a:xfrm>
-              <a:off x="6025791" y="2807247"/>
+              <a:off x="6032506" y="2807247"/>
               <a:ext cx="0" cy="37957"/>
             </a:xfrm>
             <a:custGeom>
@@ -7939,7 +7939,7 @@
           </p:nvSpPr>
           <p:spPr>
             <a:xfrm>
-              <a:off x="6941261" y="2807247"/>
+              <a:off x="6952056" y="2807247"/>
               <a:ext cx="0" cy="37957"/>
             </a:xfrm>
             <a:custGeom>
@@ -7979,7 +7979,7 @@
           </p:nvSpPr>
           <p:spPr>
             <a:xfrm>
-              <a:off x="7856732" y="2807247"/>
+              <a:off x="7871606" y="2807247"/>
               <a:ext cx="0" cy="37957"/>
             </a:xfrm>
             <a:custGeom>
@@ -8019,7 +8019,7 @@
           </p:nvSpPr>
           <p:spPr>
             <a:xfrm>
-              <a:off x="5071458" y="2875571"/>
+              <a:off x="5074094" y="2875571"/>
               <a:ext cx="77724" cy="100218"/>
             </a:xfrm>
             <a:prstGeom prst="rect">
@@ -8065,7 +8065,7 @@
           </p:nvSpPr>
           <p:spPr>
             <a:xfrm>
-              <a:off x="5986929" y="2875571"/>
+              <a:off x="5993644" y="2875571"/>
               <a:ext cx="77724" cy="100218"/>
             </a:xfrm>
             <a:prstGeom prst="rect">
@@ -8111,7 +8111,7 @@
           </p:nvSpPr>
           <p:spPr>
             <a:xfrm>
-              <a:off x="6902399" y="2875571"/>
+              <a:off x="6913194" y="2875571"/>
               <a:ext cx="77724" cy="100218"/>
             </a:xfrm>
             <a:prstGeom prst="rect">
@@ -8157,7 +8157,7 @@
           </p:nvSpPr>
           <p:spPr>
             <a:xfrm>
-              <a:off x="7817870" y="2875571"/>
+              <a:off x="7832744" y="2875571"/>
               <a:ext cx="77724" cy="100218"/>
             </a:xfrm>
             <a:prstGeom prst="rect">
@@ -8275,7 +8275,7 @@
           </p:nvSpPr>
           <p:spPr>
             <a:xfrm>
-              <a:off x="1847763" y="4653681"/>
+              <a:off x="1628966" y="4653995"/>
               <a:ext cx="77571" cy="77571"/>
             </a:xfrm>
             <a:prstGeom prst="ellipse">
@@ -8301,7 +8301,7 @@
           </p:nvSpPr>
           <p:spPr>
             <a:xfrm>
-              <a:off x="1737494" y="4494113"/>
+              <a:off x="1628284" y="4496069"/>
               <a:ext cx="77571" cy="77571"/>
             </a:xfrm>
             <a:prstGeom prst="ellipse">
@@ -8327,7 +8327,7 @@
           </p:nvSpPr>
           <p:spPr>
             <a:xfrm>
-              <a:off x="1519161" y="4723842"/>
+              <a:off x="1886680" y="4722034"/>
               <a:ext cx="77571" cy="77571"/>
             </a:xfrm>
             <a:prstGeom prst="ellipse">
@@ -8353,7 +8353,7 @@
           </p:nvSpPr>
           <p:spPr>
             <a:xfrm>
-              <a:off x="1696897" y="4584532"/>
+              <a:off x="1884722" y="4580982"/>
               <a:ext cx="77571" cy="77571"/>
             </a:xfrm>
             <a:prstGeom prst="ellipse">
@@ -8379,7 +8379,7 @@
           </p:nvSpPr>
           <p:spPr>
             <a:xfrm>
-              <a:off x="1621832" y="4612730"/>
+              <a:off x="1694851" y="4614002"/>
               <a:ext cx="77571" cy="77571"/>
             </a:xfrm>
             <a:prstGeom prst="ellipse">
@@ -8405,7 +8405,7 @@
           </p:nvSpPr>
           <p:spPr>
             <a:xfrm>
-              <a:off x="1535691" y="4477990"/>
+              <a:off x="1747197" y="4476431"/>
               <a:ext cx="77571" cy="77571"/>
             </a:xfrm>
             <a:prstGeom prst="ellipse">
@@ -8431,7 +8431,7 @@
           </p:nvSpPr>
           <p:spPr>
             <a:xfrm>
-              <a:off x="1610253" y="4133008"/>
+              <a:off x="1670275" y="4132028"/>
               <a:ext cx="77571" cy="77571"/>
             </a:xfrm>
             <a:prstGeom prst="ellipse">
@@ -8457,7 +8457,7 @@
           </p:nvSpPr>
           <p:spPr>
             <a:xfrm>
-              <a:off x="1677932" y="4581260"/>
+              <a:off x="1519161" y="4583689"/>
               <a:ext cx="77571" cy="77571"/>
             </a:xfrm>
             <a:prstGeom prst="ellipse">
@@ -8483,7 +8483,7 @@
           </p:nvSpPr>
           <p:spPr>
             <a:xfrm>
-              <a:off x="1597360" y="4534781"/>
+              <a:off x="1666230" y="4534122"/>
               <a:ext cx="77571" cy="77571"/>
             </a:xfrm>
             <a:prstGeom prst="ellipse">
@@ -8509,7 +8509,7 @@
           </p:nvSpPr>
           <p:spPr>
             <a:xfrm>
-              <a:off x="1837608" y="4476330"/>
+              <a:off x="1666660" y="4477147"/>
               <a:ext cx="77571" cy="77571"/>
             </a:xfrm>
             <a:prstGeom prst="ellipse">
@@ -8535,7 +8535,7 @@
           </p:nvSpPr>
           <p:spPr>
             <a:xfrm>
-              <a:off x="2736963" y="4730797"/>
+              <a:off x="2589168" y="4731251"/>
               <a:ext cx="77571" cy="77571"/>
             </a:xfrm>
             <a:prstGeom prst="ellipse">
@@ -8561,7 +8561,7 @@
           </p:nvSpPr>
           <p:spPr>
             <a:xfrm>
-              <a:off x="2781122" y="4783176"/>
+              <a:off x="2510064" y="4783265"/>
               <a:ext cx="77571" cy="77571"/>
             </a:xfrm>
             <a:prstGeom prst="ellipse">
@@ -8587,7 +8587,7 @@
           </p:nvSpPr>
           <p:spPr>
             <a:xfrm>
-              <a:off x="2500488" y="3552882"/>
+              <a:off x="2383502" y="3552261"/>
               <a:ext cx="77571" cy="77571"/>
             </a:xfrm>
             <a:prstGeom prst="ellipse">
@@ -8613,7 +8613,7 @@
           </p:nvSpPr>
           <p:spPr>
             <a:xfrm>
-              <a:off x="2788839" y="4647053"/>
+              <a:off x="2748256" y="4648235"/>
               <a:ext cx="77571" cy="77571"/>
             </a:xfrm>
             <a:prstGeom prst="ellipse">
@@ -8639,7 +8639,7 @@
           </p:nvSpPr>
           <p:spPr>
             <a:xfrm>
-              <a:off x="2598346" y="4674468"/>
+              <a:off x="2591279" y="4672974"/>
               <a:ext cx="77571" cy="77571"/>
             </a:xfrm>
             <a:prstGeom prst="ellipse">
@@ -8665,7 +8665,7 @@
           </p:nvSpPr>
           <p:spPr>
             <a:xfrm>
-              <a:off x="2444767" y="4502666"/>
+              <a:off x="2412890" y="4503893"/>
               <a:ext cx="77571" cy="77571"/>
             </a:xfrm>
             <a:prstGeom prst="ellipse">
@@ -8691,7 +8691,7 @@
           </p:nvSpPr>
           <p:spPr>
             <a:xfrm>
-              <a:off x="2435988" y="4673949"/>
+              <a:off x="2339228" y="4673592"/>
               <a:ext cx="77571" cy="77571"/>
             </a:xfrm>
             <a:prstGeom prst="ellipse">
@@ -8717,7 +8717,7 @@
           </p:nvSpPr>
           <p:spPr>
             <a:xfrm>
-              <a:off x="2557114" y="4679054"/>
+              <a:off x="2423479" y="4677331"/>
               <a:ext cx="77571" cy="77571"/>
             </a:xfrm>
             <a:prstGeom prst="ellipse">
@@ -8743,7 +8743,7 @@
           </p:nvSpPr>
           <p:spPr>
             <a:xfrm>
-              <a:off x="2338980" y="4036640"/>
+              <a:off x="2575815" y="4034811"/>
               <a:ext cx="77571" cy="77571"/>
             </a:xfrm>
             <a:prstGeom prst="ellipse">
@@ -8769,7 +8769,7 @@
           </p:nvSpPr>
           <p:spPr>
             <a:xfrm>
-              <a:off x="2365733" y="4180034"/>
+              <a:off x="2541830" y="4179238"/>
               <a:ext cx="77571" cy="77571"/>
             </a:xfrm>
             <a:prstGeom prst="ellipse">
@@ -8795,7 +8795,7 @@
           </p:nvSpPr>
           <p:spPr>
             <a:xfrm>
-              <a:off x="2333729" y="4410530"/>
+              <a:off x="2411065" y="4411099"/>
               <a:ext cx="77571" cy="77571"/>
             </a:xfrm>
             <a:prstGeom prst="ellipse">
@@ -8821,7 +8821,7 @@
           </p:nvSpPr>
           <p:spPr>
             <a:xfrm>
-              <a:off x="2490742" y="4500881"/>
+              <a:off x="2521035" y="4500276"/>
               <a:ext cx="77571" cy="77571"/>
             </a:xfrm>
             <a:prstGeom prst="ellipse">
@@ -8847,7 +8847,7 @@
           </p:nvSpPr>
           <p:spPr>
             <a:xfrm>
-              <a:off x="2421050" y="4339279"/>
+              <a:off x="2658888" y="4337691"/>
               <a:ext cx="77571" cy="77571"/>
             </a:xfrm>
             <a:prstGeom prst="ellipse">
@@ -8873,7 +8873,7 @@
           </p:nvSpPr>
           <p:spPr>
             <a:xfrm>
-              <a:off x="2381880" y="4560170"/>
+              <a:off x="2805274" y="4561093"/>
               <a:ext cx="77571" cy="77571"/>
             </a:xfrm>
             <a:prstGeom prst="ellipse">
@@ -8899,7 +8899,7 @@
           </p:nvSpPr>
           <p:spPr>
             <a:xfrm>
-              <a:off x="2732560" y="4585933"/>
+              <a:off x="2393554" y="4587555"/>
               <a:ext cx="77571" cy="77571"/>
             </a:xfrm>
             <a:prstGeom prst="ellipse">
@@ -8925,7 +8925,7 @@
           </p:nvSpPr>
           <p:spPr>
             <a:xfrm>
-              <a:off x="2378108" y="4450659"/>
+              <a:off x="2731768" y="4450257"/>
               <a:ext cx="77571" cy="77571"/>
             </a:xfrm>
             <a:prstGeom prst="ellipse">
@@ -8951,7 +8951,7 @@
           </p:nvSpPr>
           <p:spPr>
             <a:xfrm>
-              <a:off x="2764135" y="3880489"/>
+              <a:off x="2685794" y="3882252"/>
               <a:ext cx="77571" cy="77571"/>
             </a:xfrm>
             <a:prstGeom prst="ellipse">
@@ -8977,7 +8977,7 @@
           </p:nvSpPr>
           <p:spPr>
             <a:xfrm>
-              <a:off x="2729749" y="4145897"/>
+              <a:off x="2712525" y="4145778"/>
               <a:ext cx="77571" cy="77571"/>
             </a:xfrm>
             <a:prstGeom prst="ellipse">
@@ -9003,7 +9003,7 @@
           </p:nvSpPr>
           <p:spPr>
             <a:xfrm>
-              <a:off x="3608945" y="4438686"/>
+              <a:off x="3273002" y="4436899"/>
               <a:ext cx="77571" cy="77571"/>
             </a:xfrm>
             <a:prstGeom prst="ellipse">
@@ -9029,7 +9029,7 @@
           </p:nvSpPr>
           <p:spPr>
             <a:xfrm>
-              <a:off x="3454019" y="4323711"/>
+              <a:off x="3266102" y="4322931"/>
               <a:ext cx="77571" cy="77571"/>
             </a:xfrm>
             <a:prstGeom prst="ellipse">
@@ -9055,7 +9055,7 @@
           </p:nvSpPr>
           <p:spPr>
             <a:xfrm>
-              <a:off x="3334012" y="4771257"/>
+              <a:off x="3641580" y="4769341"/>
               <a:ext cx="77571" cy="77571"/>
             </a:xfrm>
             <a:prstGeom prst="ellipse">
@@ -9081,7 +9081,7 @@
           </p:nvSpPr>
           <p:spPr>
             <a:xfrm>
-              <a:off x="3464238" y="4763444"/>
+              <a:off x="3208580" y="4762120"/>
               <a:ext cx="77571" cy="77571"/>
             </a:xfrm>
             <a:prstGeom prst="ellipse">
@@ -9107,7 +9107,7 @@
           </p:nvSpPr>
           <p:spPr>
             <a:xfrm>
-              <a:off x="3498327" y="4548565"/>
+              <a:off x="3291075" y="4547925"/>
               <a:ext cx="77571" cy="77571"/>
             </a:xfrm>
             <a:prstGeom prst="ellipse">
@@ -9133,7 +9133,7 @@
           </p:nvSpPr>
           <p:spPr>
             <a:xfrm>
-              <a:off x="3276288" y="4775684"/>
+              <a:off x="3528147" y="4775664"/>
               <a:ext cx="77571" cy="77571"/>
             </a:xfrm>
             <a:prstGeom prst="ellipse">
@@ -9159,7 +9159,7 @@
           </p:nvSpPr>
           <p:spPr>
             <a:xfrm>
-              <a:off x="3570000" y="3773590"/>
+              <a:off x="3521153" y="3772285"/>
               <a:ext cx="77571" cy="77571"/>
             </a:xfrm>
             <a:prstGeom prst="ellipse">
@@ -9185,7 +9185,7 @@
           </p:nvSpPr>
           <p:spPr>
             <a:xfrm>
-              <a:off x="3633270" y="4794129"/>
+              <a:off x="3534644" y="4794129"/>
               <a:ext cx="77571" cy="77571"/>
             </a:xfrm>
             <a:prstGeom prst="ellipse">
@@ -9211,7 +9211,7 @@
           </p:nvSpPr>
           <p:spPr>
             <a:xfrm>
-              <a:off x="3575766" y="4268351"/>
+              <a:off x="3554639" y="4266773"/>
               <a:ext cx="77571" cy="77571"/>
             </a:xfrm>
             <a:prstGeom prst="ellipse">
@@ -9237,7 +9237,7 @@
           </p:nvSpPr>
           <p:spPr>
             <a:xfrm>
-              <a:off x="3459021" y="3580772"/>
+              <a:off x="3660750" y="3580108"/>
               <a:ext cx="77571" cy="77571"/>
             </a:xfrm>
             <a:prstGeom prst="ellipse">
@@ -9263,7 +9263,7 @@
           </p:nvSpPr>
           <p:spPr>
             <a:xfrm>
-              <a:off x="3255157" y="3461564"/>
+              <a:off x="3235730" y="3461564"/>
               <a:ext cx="77571" cy="77571"/>
             </a:xfrm>
             <a:prstGeom prst="ellipse">
@@ -9289,7 +9289,7 @@
           </p:nvSpPr>
           <p:spPr>
             <a:xfrm>
-              <a:off x="3483438" y="4248652"/>
+              <a:off x="3510795" y="4251400"/>
               <a:ext cx="77571" cy="77571"/>
             </a:xfrm>
             <a:prstGeom prst="ellipse">
@@ -9315,7 +9315,7 @@
           </p:nvSpPr>
           <p:spPr>
             <a:xfrm>
-              <a:off x="3263645" y="4110397"/>
+              <a:off x="3431697" y="4109833"/>
               <a:ext cx="77571" cy="77571"/>
             </a:xfrm>
             <a:prstGeom prst="ellipse">
@@ -9341,7 +9341,7 @@
           </p:nvSpPr>
           <p:spPr>
             <a:xfrm>
-              <a:off x="3255767" y="4060359"/>
+              <a:off x="3410105" y="4060247"/>
               <a:ext cx="77571" cy="77571"/>
             </a:xfrm>
             <a:prstGeom prst="ellipse">
@@ -9367,7 +9367,7 @@
           </p:nvSpPr>
           <p:spPr>
             <a:xfrm>
-              <a:off x="3471090" y="4101618"/>
+              <a:off x="3170094" y="4100246"/>
               <a:ext cx="77571" cy="77571"/>
             </a:xfrm>
             <a:prstGeom prst="ellipse">
@@ -9393,7 +9393,7 @@
           </p:nvSpPr>
           <p:spPr>
             <a:xfrm>
-              <a:off x="3545906" y="4692526"/>
+              <a:off x="3570352" y="4693599"/>
               <a:ext cx="77571" cy="77571"/>
             </a:xfrm>
             <a:prstGeom prst="ellipse">
@@ -9419,7 +9419,7 @@
           </p:nvSpPr>
           <p:spPr>
             <a:xfrm>
-              <a:off x="3546963" y="4049351"/>
+              <a:off x="3439618" y="4047205"/>
               <a:ext cx="77571" cy="77571"/>
             </a:xfrm>
             <a:prstGeom prst="ellipse">
@@ -9445,7 +9445,7 @@
           </p:nvSpPr>
           <p:spPr>
             <a:xfrm>
-              <a:off x="3457325" y="4494323"/>
+              <a:off x="3218241" y="4496148"/>
               <a:ext cx="77571" cy="77571"/>
             </a:xfrm>
             <a:prstGeom prst="ellipse">
@@ -9471,7 +9471,7 @@
           </p:nvSpPr>
           <p:spPr>
             <a:xfrm>
-              <a:off x="3624483" y="4516243"/>
+              <a:off x="3573636" y="4517891"/>
               <a:ext cx="77571" cy="77571"/>
             </a:xfrm>
             <a:prstGeom prst="ellipse">
@@ -9497,7 +9497,7 @@
           </p:nvSpPr>
           <p:spPr>
             <a:xfrm>
-              <a:off x="3634604" y="4302088"/>
+              <a:off x="3526575" y="4301434"/>
               <a:ext cx="77571" cy="77571"/>
             </a:xfrm>
             <a:prstGeom prst="ellipse">
@@ -9523,7 +9523,7 @@
           </p:nvSpPr>
           <p:spPr>
             <a:xfrm>
-              <a:off x="4388293" y="4290509"/>
+              <a:off x="4392670" y="4290416"/>
               <a:ext cx="77571" cy="77571"/>
             </a:xfrm>
             <a:prstGeom prst="ellipse">
@@ -9549,7 +9549,7 @@
           </p:nvSpPr>
           <p:spPr>
             <a:xfrm>
-              <a:off x="4248195" y="4403455"/>
+              <a:off x="4135900" y="4404430"/>
               <a:ext cx="77571" cy="77571"/>
             </a:xfrm>
             <a:prstGeom prst="ellipse">
@@ -9575,7 +9575,7 @@
           </p:nvSpPr>
           <p:spPr>
             <a:xfrm>
-              <a:off x="4230701" y="4325915"/>
+              <a:off x="4447453" y="4324101"/>
               <a:ext cx="77571" cy="77571"/>
             </a:xfrm>
             <a:prstGeom prst="ellipse">
@@ -9601,7 +9601,7 @@
           </p:nvSpPr>
           <p:spPr>
             <a:xfrm>
-              <a:off x="4150044" y="4633934"/>
+              <a:off x="4123270" y="4633571"/>
               <a:ext cx="77571" cy="77571"/>
             </a:xfrm>
             <a:prstGeom prst="ellipse">
@@ -9627,7 +9627,7 @@
           </p:nvSpPr>
           <p:spPr>
             <a:xfrm>
-              <a:off x="4224767" y="4053138"/>
+              <a:off x="4144928" y="4052911"/>
               <a:ext cx="77571" cy="77571"/>
             </a:xfrm>
             <a:prstGeom prst="ellipse">
@@ -9653,7 +9653,7 @@
           </p:nvSpPr>
           <p:spPr>
             <a:xfrm>
-              <a:off x="4335010" y="4425765"/>
+              <a:off x="4084228" y="4425619"/>
               <a:ext cx="77571" cy="77571"/>
             </a:xfrm>
             <a:prstGeom prst="ellipse">
@@ -9679,7 +9679,7 @@
           </p:nvSpPr>
           <p:spPr>
             <a:xfrm>
-              <a:off x="4323278" y="4553130"/>
+              <a:off x="4386672" y="4552086"/>
               <a:ext cx="77571" cy="77571"/>
             </a:xfrm>
             <a:prstGeom prst="ellipse">
@@ -9705,7 +9705,7 @@
           </p:nvSpPr>
           <p:spPr>
             <a:xfrm>
-              <a:off x="4424782" y="4232909"/>
+              <a:off x="4282957" y="4231531"/>
               <a:ext cx="77571" cy="77571"/>
             </a:xfrm>
             <a:prstGeom prst="ellipse">
@@ -9731,7 +9731,7 @@
           </p:nvSpPr>
           <p:spPr>
             <a:xfrm>
-              <a:off x="4050665" y="4159407"/>
+              <a:off x="4097204" y="4158112"/>
               <a:ext cx="77571" cy="77571"/>
             </a:xfrm>
             <a:prstGeom prst="ellipse">
@@ -9757,7 +9757,7 @@
           </p:nvSpPr>
           <p:spPr>
             <a:xfrm>
-              <a:off x="4165267" y="3847453"/>
+              <a:off x="4149021" y="3847402"/>
               <a:ext cx="77571" cy="77571"/>
             </a:xfrm>
             <a:prstGeom prst="ellipse">
@@ -9783,7 +9783,7 @@
           </p:nvSpPr>
           <p:spPr>
             <a:xfrm>
-              <a:off x="4203429" y="3873551"/>
+              <a:off x="4312800" y="3874433"/>
               <a:ext cx="77571" cy="77571"/>
             </a:xfrm>
             <a:prstGeom prst="ellipse">
@@ -9809,7 +9809,7 @@
           </p:nvSpPr>
           <p:spPr>
             <a:xfrm>
-              <a:off x="4375631" y="3850199"/>
+              <a:off x="4487096" y="3850260"/>
               <a:ext cx="77571" cy="77571"/>
             </a:xfrm>
             <a:prstGeom prst="ellipse">
@@ -9835,7 +9835,7 @@
           </p:nvSpPr>
           <p:spPr>
             <a:xfrm>
-              <a:off x="4114305" y="3963690"/>
+              <a:off x="4399522" y="3964937"/>
               <a:ext cx="77571" cy="77571"/>
             </a:xfrm>
             <a:prstGeom prst="ellipse">
@@ -9861,7 +9861,7 @@
           </p:nvSpPr>
           <p:spPr>
             <a:xfrm>
-              <a:off x="4137072" y="4241278"/>
+              <a:off x="4343885" y="4240234"/>
               <a:ext cx="77571" cy="77571"/>
             </a:xfrm>
             <a:prstGeom prst="ellipse">
@@ -9887,7 +9887,7 @@
           </p:nvSpPr>
           <p:spPr>
             <a:xfrm>
-              <a:off x="4086386" y="4271851"/>
+              <a:off x="4159996" y="4270285"/>
               <a:ext cx="77571" cy="77571"/>
             </a:xfrm>
             <a:prstGeom prst="ellipse">
@@ -9913,7 +9913,7 @@
           </p:nvSpPr>
           <p:spPr>
             <a:xfrm>
-              <a:off x="4181535" y="4161647"/>
+              <a:off x="4510442" y="4163144"/>
               <a:ext cx="77571" cy="77571"/>
             </a:xfrm>
             <a:prstGeom prst="ellipse">
@@ -9939,7 +9939,7 @@
           </p:nvSpPr>
           <p:spPr>
             <a:xfrm>
-              <a:off x="4084269" y="4120174"/>
+              <a:off x="4209270" y="4117016"/>
               <a:ext cx="77571" cy="77571"/>
             </a:xfrm>
             <a:prstGeom prst="ellipse">
@@ -9965,7 +9965,7 @@
           </p:nvSpPr>
           <p:spPr>
             <a:xfrm>
-              <a:off x="4465788" y="4104762"/>
+              <a:off x="4366309" y="4104458"/>
               <a:ext cx="77571" cy="77571"/>
             </a:xfrm>
             <a:prstGeom prst="ellipse">
@@ -9991,7 +9991,7 @@
           </p:nvSpPr>
           <p:spPr>
             <a:xfrm>
-              <a:off x="4439734" y="3903522"/>
+              <a:off x="4488857" y="3905322"/>
               <a:ext cx="77571" cy="77571"/>
             </a:xfrm>
             <a:prstGeom prst="ellipse">
@@ -10017,7 +10017,7 @@
           </p:nvSpPr>
           <p:spPr>
             <a:xfrm>
-              <a:off x="4047891" y="4036942"/>
+              <a:off x="4109959" y="4036838"/>
               <a:ext cx="77571" cy="77571"/>
             </a:xfrm>
             <a:prstGeom prst="ellipse">
@@ -10043,7 +10043,7 @@
           </p:nvSpPr>
           <p:spPr>
             <a:xfrm>
-              <a:off x="4510442" y="4083283"/>
+              <a:off x="4150519" y="4083040"/>
               <a:ext cx="77571" cy="77571"/>
             </a:xfrm>
             <a:prstGeom prst="ellipse">
@@ -10069,7 +10069,7 @@
           </p:nvSpPr>
           <p:spPr>
             <a:xfrm>
-              <a:off x="4207417" y="3872155"/>
+              <a:off x="4057574" y="3872059"/>
               <a:ext cx="77571" cy="77571"/>
             </a:xfrm>
             <a:prstGeom prst="ellipse">
@@ -10095,7 +10095,7 @@
           </p:nvSpPr>
           <p:spPr>
             <a:xfrm>
-              <a:off x="4419977" y="4119189"/>
+              <a:off x="4066343" y="4118712"/>
               <a:ext cx="77571" cy="77571"/>
             </a:xfrm>
             <a:prstGeom prst="ellipse">
@@ -10121,7 +10121,7 @@
           </p:nvSpPr>
           <p:spPr>
             <a:xfrm>
-              <a:off x="4207914" y="3931958"/>
+              <a:off x="4488879" y="3928958"/>
               <a:ext cx="77571" cy="77571"/>
             </a:xfrm>
             <a:prstGeom prst="ellipse">
@@ -10147,42 +10147,42 @@
           </p:nvSpPr>
           <p:spPr>
             <a:xfrm>
-              <a:off x="1749754" y="3981207"/>
-              <a:ext cx="2566006" cy="802022"/>
+              <a:off x="1736559" y="3981239"/>
+              <a:ext cx="2579419" cy="801633"/>
             </a:xfrm>
             <a:custGeom>
               <a:avLst/>
               <a:pathLst>
-                <a:path w="2566006" h="802022">
+                <a:path w="2579419" h="801633">
                   <a:moveTo>
-                    <a:pt x="0" y="327074"/>
+                    <a:pt x="0" y="326916"/>
                   </a:moveTo>
                   <a:lnTo>
-                    <a:pt x="1355674" y="242228"/>
+                    <a:pt x="1362761" y="242110"/>
                   </a:lnTo>
                   <a:lnTo>
-                    <a:pt x="1710671" y="186703"/>
+                    <a:pt x="1719613" y="186612"/>
                   </a:lnTo>
                   <a:lnTo>
-                    <a:pt x="2211010" y="83789"/>
+                    <a:pt x="2222567" y="83749"/>
                   </a:lnTo>
                   <a:lnTo>
-                    <a:pt x="2566006" y="0"/>
+                    <a:pt x="2579419" y="0"/>
                   </a:lnTo>
                   <a:lnTo>
-                    <a:pt x="2566006" y="426029"/>
+                    <a:pt x="2579419" y="425823"/>
                   </a:lnTo>
                   <a:lnTo>
-                    <a:pt x="2211010" y="439506"/>
+                    <a:pt x="2222567" y="439293"/>
                   </a:lnTo>
                   <a:lnTo>
-                    <a:pt x="1710671" y="473682"/>
+                    <a:pt x="1719613" y="473452"/>
                   </a:lnTo>
                   <a:lnTo>
-                    <a:pt x="1355674" y="515424"/>
+                    <a:pt x="1362761" y="515174"/>
                   </a:lnTo>
                   <a:lnTo>
-                    <a:pt x="0" y="802022"/>
+                    <a:pt x="0" y="801633"/>
                   </a:lnTo>
                   <a:close/>
                 </a:path>
@@ -10208,27 +10208,27 @@
           </p:nvSpPr>
           <p:spPr>
             <a:xfrm>
-              <a:off x="1749754" y="3981207"/>
-              <a:ext cx="2566006" cy="327074"/>
+              <a:off x="1736559" y="3981239"/>
+              <a:ext cx="2579419" cy="326916"/>
             </a:xfrm>
             <a:custGeom>
               <a:avLst/>
               <a:pathLst>
-                <a:path w="2566006" h="327074">
+                <a:path w="2579419" h="326916">
                   <a:moveTo>
-                    <a:pt x="0" y="327074"/>
+                    <a:pt x="0" y="326916"/>
                   </a:moveTo>
                   <a:lnTo>
-                    <a:pt x="1355674" y="242228"/>
+                    <a:pt x="1362761" y="242110"/>
                   </a:lnTo>
                   <a:lnTo>
-                    <a:pt x="1710671" y="186703"/>
+                    <a:pt x="1719613" y="186612"/>
                   </a:lnTo>
                   <a:lnTo>
-                    <a:pt x="2211010" y="83789"/>
+                    <a:pt x="2222567" y="83749"/>
                   </a:lnTo>
                   <a:lnTo>
-                    <a:pt x="2566006" y="0"/>
+                    <a:pt x="2579419" y="0"/>
                   </a:lnTo>
                 </a:path>
               </a:pathLst>
@@ -10248,27 +10248,27 @@
           </p:nvSpPr>
           <p:spPr>
             <a:xfrm>
-              <a:off x="1749754" y="4407237"/>
-              <a:ext cx="2566006" cy="375992"/>
+              <a:off x="1736559" y="4407062"/>
+              <a:ext cx="2579419" cy="375810"/>
             </a:xfrm>
             <a:custGeom>
               <a:avLst/>
               <a:pathLst>
-                <a:path w="2566006" h="375992">
+                <a:path w="2579419" h="375810">
                   <a:moveTo>
-                    <a:pt x="2566006" y="0"/>
+                    <a:pt x="2579419" y="0"/>
                   </a:moveTo>
                   <a:lnTo>
-                    <a:pt x="2211010" y="13476"/>
+                    <a:pt x="2222567" y="13470"/>
                   </a:lnTo>
                   <a:lnTo>
-                    <a:pt x="1710671" y="47652"/>
+                    <a:pt x="1719613" y="47629"/>
                   </a:lnTo>
                   <a:lnTo>
-                    <a:pt x="1355674" y="89394"/>
+                    <a:pt x="1362761" y="89350"/>
                   </a:lnTo>
                   <a:lnTo>
-                    <a:pt x="0" y="375992"/>
+                    <a:pt x="0" y="375810"/>
                   </a:lnTo>
                 </a:path>
               </a:pathLst>
@@ -10288,27 +10288,27 @@
           </p:nvSpPr>
           <p:spPr>
             <a:xfrm>
-              <a:off x="1749754" y="4194222"/>
-              <a:ext cx="2566006" cy="351533"/>
+              <a:off x="1736559" y="4194151"/>
+              <a:ext cx="2579419" cy="351363"/>
             </a:xfrm>
             <a:custGeom>
               <a:avLst/>
               <a:pathLst>
-                <a:path w="2566006" h="351533">
+                <a:path w="2579419" h="351363">
                   <a:moveTo>
-                    <a:pt x="0" y="351533"/>
+                    <a:pt x="0" y="351363"/>
                   </a:moveTo>
                   <a:lnTo>
-                    <a:pt x="1355674" y="165811"/>
+                    <a:pt x="1362761" y="165730"/>
                   </a:lnTo>
                   <a:lnTo>
-                    <a:pt x="1710671" y="117177"/>
+                    <a:pt x="1719613" y="117121"/>
                   </a:lnTo>
                   <a:lnTo>
-                    <a:pt x="2211010" y="48633"/>
+                    <a:pt x="2222567" y="48609"/>
                   </a:lnTo>
                   <a:lnTo>
-                    <a:pt x="2566006" y="0"/>
+                    <a:pt x="2579419" y="0"/>
                   </a:lnTo>
                 </a:path>
               </a:pathLst>
@@ -10337,7 +10337,7 @@
           </p:nvSpPr>
           <p:spPr>
             <a:xfrm>
-              <a:off x="3836066" y="3510646"/>
+              <a:off x="3836285" y="3510846"/>
               <a:ext cx="479694" cy="82021"/>
             </a:xfrm>
             <a:prstGeom prst="rect">
@@ -10444,7 +10444,7 @@
           </p:nvSpPr>
           <p:spPr>
             <a:xfrm rot="-5400000">
-              <a:off x="1177387" y="4791033"/>
+              <a:off x="1177387" y="4790647"/>
               <a:ext cx="194218" cy="100218"/>
             </a:xfrm>
             <a:prstGeom prst="rect">
@@ -10490,7 +10490,7 @@
           </p:nvSpPr>
           <p:spPr>
             <a:xfrm rot="-5400000">
-              <a:off x="1177387" y="4495710"/>
+              <a:off x="1177387" y="4495468"/>
               <a:ext cx="194218" cy="100218"/>
             </a:xfrm>
             <a:prstGeom prst="rect">
@@ -10536,7 +10536,7 @@
           </p:nvSpPr>
           <p:spPr>
             <a:xfrm rot="-5400000">
-              <a:off x="1177387" y="4200388"/>
+              <a:off x="1177387" y="4200289"/>
               <a:ext cx="194218" cy="100218"/>
             </a:xfrm>
             <a:prstGeom prst="rect">
@@ -10582,7 +10582,7 @@
           </p:nvSpPr>
           <p:spPr>
             <a:xfrm rot="-5400000">
-              <a:off x="1177387" y="3905065"/>
+              <a:off x="1177387" y="3905110"/>
               <a:ext cx="194218" cy="100218"/>
             </a:xfrm>
             <a:prstGeom prst="rect">
@@ -10628,7 +10628,7 @@
           </p:nvSpPr>
           <p:spPr>
             <a:xfrm rot="-5400000">
-              <a:off x="1177387" y="3609743"/>
+              <a:off x="1177387" y="3609930"/>
               <a:ext cx="194218" cy="100218"/>
             </a:xfrm>
             <a:prstGeom prst="rect">
@@ -10674,7 +10674,7 @@
           </p:nvSpPr>
           <p:spPr>
             <a:xfrm rot="-5400000">
-              <a:off x="1177387" y="3314421"/>
+              <a:off x="1177387" y="3314751"/>
               <a:ext cx="194218" cy="100218"/>
             </a:xfrm>
             <a:prstGeom prst="rect">
@@ -10720,7 +10720,7 @@
           </p:nvSpPr>
           <p:spPr>
             <a:xfrm>
-              <a:off x="1370425" y="4841142"/>
+              <a:off x="1370425" y="4840756"/>
               <a:ext cx="37957" cy="0"/>
             </a:xfrm>
             <a:custGeom>
@@ -10760,7 +10760,7 @@
           </p:nvSpPr>
           <p:spPr>
             <a:xfrm>
-              <a:off x="1370425" y="4545819"/>
+              <a:off x="1370425" y="4545577"/>
               <a:ext cx="37957" cy="0"/>
             </a:xfrm>
             <a:custGeom>
@@ -10800,7 +10800,7 @@
           </p:nvSpPr>
           <p:spPr>
             <a:xfrm>
-              <a:off x="1370425" y="4250497"/>
+              <a:off x="1370425" y="4250398"/>
               <a:ext cx="37957" cy="0"/>
             </a:xfrm>
             <a:custGeom>
@@ -10840,7 +10840,7 @@
           </p:nvSpPr>
           <p:spPr>
             <a:xfrm>
-              <a:off x="1370425" y="3955174"/>
+              <a:off x="1370425" y="3955219"/>
               <a:ext cx="37957" cy="0"/>
             </a:xfrm>
             <a:custGeom>
@@ -10880,7 +10880,7 @@
           </p:nvSpPr>
           <p:spPr>
             <a:xfrm>
-              <a:off x="1370425" y="3659852"/>
+              <a:off x="1370425" y="3660040"/>
               <a:ext cx="37957" cy="0"/>
             </a:xfrm>
             <a:custGeom>
@@ -10920,7 +10920,7 @@
           </p:nvSpPr>
           <p:spPr>
             <a:xfrm>
-              <a:off x="1370425" y="3364530"/>
+              <a:off x="1370425" y="3364860"/>
               <a:ext cx="37957" cy="0"/>
             </a:xfrm>
             <a:custGeom>
@@ -11000,7 +11000,7 @@
           </p:nvSpPr>
           <p:spPr>
             <a:xfrm>
-              <a:off x="1749754" y="4899543"/>
+              <a:off x="1736559" y="4899543"/>
               <a:ext cx="0" cy="37957"/>
             </a:xfrm>
             <a:custGeom>
@@ -11040,7 +11040,7 @@
           </p:nvSpPr>
           <p:spPr>
             <a:xfrm>
-              <a:off x="2605089" y="4899543"/>
+              <a:off x="2596366" y="4899543"/>
               <a:ext cx="0" cy="37957"/>
             </a:xfrm>
             <a:custGeom>
@@ -11080,7 +11080,7 @@
           </p:nvSpPr>
           <p:spPr>
             <a:xfrm>
-              <a:off x="3460425" y="4899543"/>
+              <a:off x="3456173" y="4899543"/>
               <a:ext cx="0" cy="37957"/>
             </a:xfrm>
             <a:custGeom>
@@ -11120,7 +11120,7 @@
           </p:nvSpPr>
           <p:spPr>
             <a:xfrm>
-              <a:off x="4315760" y="4899543"/>
+              <a:off x="4315979" y="4899543"/>
               <a:ext cx="0" cy="37957"/>
             </a:xfrm>
             <a:custGeom>
@@ -11160,7 +11160,7 @@
           </p:nvSpPr>
           <p:spPr>
             <a:xfrm>
-              <a:off x="1710892" y="4967867"/>
+              <a:off x="1697697" y="4967867"/>
               <a:ext cx="77724" cy="100218"/>
             </a:xfrm>
             <a:prstGeom prst="rect">
@@ -11206,7 +11206,7 @@
           </p:nvSpPr>
           <p:spPr>
             <a:xfrm>
-              <a:off x="2566227" y="4967867"/>
+              <a:off x="2557504" y="4967867"/>
               <a:ext cx="77724" cy="100218"/>
             </a:xfrm>
             <a:prstGeom prst="rect">
@@ -11252,7 +11252,7 @@
           </p:nvSpPr>
           <p:spPr>
             <a:xfrm>
-              <a:off x="3421563" y="4967867"/>
+              <a:off x="3417311" y="4967867"/>
               <a:ext cx="77724" cy="100218"/>
             </a:xfrm>
             <a:prstGeom prst="rect">
@@ -11298,7 +11298,7 @@
           </p:nvSpPr>
           <p:spPr>
             <a:xfrm>
-              <a:off x="4276898" y="4967867"/>
+              <a:off x="4277117" y="4967867"/>
               <a:ext cx="77724" cy="100218"/>
             </a:xfrm>
             <a:prstGeom prst="rect">
@@ -11462,7 +11462,7 @@
           </p:nvSpPr>
           <p:spPr>
             <a:xfrm>
-              <a:off x="4948748" y="4319625"/>
+              <a:off x="5218900" y="4320942"/>
               <a:ext cx="77571" cy="77571"/>
             </a:xfrm>
             <a:prstGeom prst="ellipse">
@@ -11488,7 +11488,7 @@
           </p:nvSpPr>
           <p:spPr>
             <a:xfrm>
-              <a:off x="5103598" y="3598208"/>
+              <a:off x="4948748" y="3598441"/>
               <a:ext cx="77571" cy="77571"/>
             </a:xfrm>
             <a:prstGeom prst="ellipse">
@@ -11514,7 +11514,7 @@
           </p:nvSpPr>
           <p:spPr>
             <a:xfrm>
-              <a:off x="4951702" y="4392438"/>
+              <a:off x="5320649" y="4395499"/>
               <a:ext cx="77571" cy="77571"/>
             </a:xfrm>
             <a:prstGeom prst="ellipse">
@@ -11540,7 +11540,7 @@
           </p:nvSpPr>
           <p:spPr>
             <a:xfrm>
-              <a:off x="4991748" y="4138683"/>
+              <a:off x="5358532" y="4138873"/>
               <a:ext cx="77571" cy="77571"/>
             </a:xfrm>
             <a:prstGeom prst="ellipse">
@@ -11566,7 +11566,7 @@
           </p:nvSpPr>
           <p:spPr>
             <a:xfrm>
-              <a:off x="5112180" y="4446525"/>
+              <a:off x="4952182" y="4447881"/>
               <a:ext cx="77571" cy="77571"/>
             </a:xfrm>
             <a:prstGeom prst="ellipse">
@@ -11592,7 +11592,7 @@
           </p:nvSpPr>
           <p:spPr>
             <a:xfrm>
-              <a:off x="5255053" y="3504698"/>
+              <a:off x="5391607" y="3506257"/>
               <a:ext cx="77571" cy="77571"/>
             </a:xfrm>
             <a:prstGeom prst="ellipse">
@@ -11618,7 +11618,7 @@
           </p:nvSpPr>
           <p:spPr>
             <a:xfrm>
-              <a:off x="5407982" y="3461564"/>
+              <a:off x="5384715" y="3461564"/>
               <a:ext cx="77571" cy="77571"/>
             </a:xfrm>
             <a:prstGeom prst="ellipse">
@@ -11644,7 +11644,7 @@
           </p:nvSpPr>
           <p:spPr>
             <a:xfrm>
-              <a:off x="4968095" y="3854644"/>
+              <a:off x="5044190" y="3852441"/>
               <a:ext cx="77571" cy="77571"/>
             </a:xfrm>
             <a:prstGeom prst="ellipse">
@@ -11670,7 +11670,7 @@
           </p:nvSpPr>
           <p:spPr>
             <a:xfrm>
-              <a:off x="4974674" y="4601162"/>
+              <a:off x="5122011" y="4607040"/>
               <a:ext cx="77571" cy="77571"/>
             </a:xfrm>
             <a:prstGeom prst="ellipse">
@@ -11696,7 +11696,7 @@
           </p:nvSpPr>
           <p:spPr>
             <a:xfrm>
-              <a:off x="5128074" y="4201062"/>
+              <a:off x="5091259" y="4204735"/>
               <a:ext cx="77571" cy="77571"/>
             </a:xfrm>
             <a:prstGeom prst="ellipse">
@@ -11722,7 +11722,7 @@
           </p:nvSpPr>
           <p:spPr>
             <a:xfrm>
-              <a:off x="5949367" y="4493029"/>
+              <a:off x="5822458" y="4492493"/>
               <a:ext cx="77571" cy="77571"/>
             </a:xfrm>
             <a:prstGeom prst="ellipse">
@@ -11748,7 +11748,7 @@
           </p:nvSpPr>
           <p:spPr>
             <a:xfrm>
-              <a:off x="5783147" y="3948482"/>
+              <a:off x="5939286" y="3951218"/>
               <a:ext cx="77571" cy="77571"/>
             </a:xfrm>
             <a:prstGeom prst="ellipse">
@@ -11774,7 +11774,7 @@
           </p:nvSpPr>
           <p:spPr>
             <a:xfrm>
-              <a:off x="6028144" y="4399262"/>
+              <a:off x="6122322" y="4400406"/>
               <a:ext cx="77571" cy="77571"/>
             </a:xfrm>
             <a:prstGeom prst="ellipse">
@@ -11800,7 +11800,7 @@
           </p:nvSpPr>
           <p:spPr>
             <a:xfrm>
-              <a:off x="5871359" y="4651958"/>
+              <a:off x="6190747" y="4652728"/>
               <a:ext cx="77571" cy="77571"/>
             </a:xfrm>
             <a:prstGeom prst="ellipse">
@@ -11826,7 +11826,7 @@
           </p:nvSpPr>
           <p:spPr>
             <a:xfrm>
-              <a:off x="5939019" y="4274366"/>
+              <a:off x="6079568" y="4278126"/>
               <a:ext cx="77571" cy="77571"/>
             </a:xfrm>
             <a:prstGeom prst="ellipse">
@@ -11852,7 +11852,7 @@
           </p:nvSpPr>
           <p:spPr>
             <a:xfrm>
-              <a:off x="5798655" y="3920563"/>
+              <a:off x="5855591" y="3921732"/>
               <a:ext cx="77571" cy="77571"/>
             </a:xfrm>
             <a:prstGeom prst="ellipse">
@@ -11878,7 +11878,7 @@
           </p:nvSpPr>
           <p:spPr>
             <a:xfrm>
-              <a:off x="5871011" y="4736485"/>
+              <a:off x="6190023" y="4735762"/>
               <a:ext cx="77571" cy="77571"/>
             </a:xfrm>
             <a:prstGeom prst="ellipse">
@@ -11904,7 +11904,7 @@
           </p:nvSpPr>
           <p:spPr>
             <a:xfrm>
-              <a:off x="6260870" y="4619987"/>
+              <a:off x="5859283" y="4621383"/>
               <a:ext cx="77571" cy="77571"/>
             </a:xfrm>
             <a:prstGeom prst="ellipse">
@@ -11930,7 +11930,7 @@
           </p:nvSpPr>
           <p:spPr>
             <a:xfrm>
-              <a:off x="5802921" y="4478215"/>
+              <a:off x="5963906" y="4479451"/>
               <a:ext cx="77571" cy="77571"/>
             </a:xfrm>
             <a:prstGeom prst="ellipse">
@@ -11956,7 +11956,7 @@
           </p:nvSpPr>
           <p:spPr>
             <a:xfrm>
-              <a:off x="6229667" y="4731772"/>
+              <a:off x="5962156" y="4732915"/>
               <a:ext cx="77571" cy="77571"/>
             </a:xfrm>
             <a:prstGeom prst="ellipse">
@@ -11982,7 +11982,7 @@
           </p:nvSpPr>
           <p:spPr>
             <a:xfrm>
-              <a:off x="6148579" y="4607452"/>
+              <a:off x="6258768" y="4611309"/>
               <a:ext cx="77571" cy="77571"/>
             </a:xfrm>
             <a:prstGeom prst="ellipse">
@@ -12008,7 +12008,7 @@
           </p:nvSpPr>
           <p:spPr>
             <a:xfrm>
-              <a:off x="5991506" y="4730538"/>
+              <a:off x="6206975" y="4734130"/>
               <a:ext cx="77571" cy="77571"/>
             </a:xfrm>
             <a:prstGeom prst="ellipse">
@@ -12034,7 +12034,7 @@
           </p:nvSpPr>
           <p:spPr>
             <a:xfrm>
-              <a:off x="5986930" y="4432983"/>
+              <a:off x="6249750" y="4436516"/>
               <a:ext cx="77571" cy="77571"/>
             </a:xfrm>
             <a:prstGeom prst="ellipse">
@@ -12060,7 +12060,7 @@
           </p:nvSpPr>
           <p:spPr>
             <a:xfrm>
-              <a:off x="5869475" y="4377239"/>
+              <a:off x="6007758" y="4376855"/>
               <a:ext cx="77571" cy="77571"/>
             </a:xfrm>
             <a:prstGeom prst="ellipse">
@@ -12086,7 +12086,7 @@
           </p:nvSpPr>
           <p:spPr>
             <a:xfrm>
-              <a:off x="5877130" y="4112345"/>
+              <a:off x="5977560" y="4114133"/>
               <a:ext cx="77571" cy="77571"/>
             </a:xfrm>
             <a:prstGeom prst="ellipse">
@@ -12112,7 +12112,7 @@
           </p:nvSpPr>
           <p:spPr>
             <a:xfrm>
-              <a:off x="6049273" y="4156159"/>
+              <a:off x="6202260" y="4155232"/>
               <a:ext cx="77571" cy="77571"/>
             </a:xfrm>
             <a:prstGeom prst="ellipse">
@@ -12138,7 +12138,7 @@
           </p:nvSpPr>
           <p:spPr>
             <a:xfrm>
-              <a:off x="6230411" y="4492516"/>
+              <a:off x="6255151" y="4492998"/>
               <a:ext cx="77571" cy="77571"/>
             </a:xfrm>
             <a:prstGeom prst="ellipse">
@@ -12164,7 +12164,7 @@
           </p:nvSpPr>
           <p:spPr>
             <a:xfrm>
-              <a:off x="6209984" y="4794129"/>
+              <a:off x="6174129" y="4794129"/>
               <a:ext cx="77571" cy="77571"/>
             </a:xfrm>
             <a:prstGeom prst="ellipse">
@@ -12190,7 +12190,7 @@
           </p:nvSpPr>
           <p:spPr>
             <a:xfrm>
-              <a:off x="6655248" y="4479629"/>
+              <a:off x="6803598" y="4482205"/>
               <a:ext cx="77571" cy="77571"/>
             </a:xfrm>
             <a:prstGeom prst="ellipse">
@@ -12216,7 +12216,7 @@
           </p:nvSpPr>
           <p:spPr>
             <a:xfrm>
-              <a:off x="6637161" y="4549351"/>
+              <a:off x="6738034" y="4551714"/>
               <a:ext cx="77571" cy="77571"/>
             </a:xfrm>
             <a:prstGeom prst="ellipse">
@@ -12242,7 +12242,7 @@
           </p:nvSpPr>
           <p:spPr>
             <a:xfrm>
-              <a:off x="6631748" y="4523902"/>
+              <a:off x="7102560" y="4525419"/>
               <a:ext cx="77571" cy="77571"/>
             </a:xfrm>
             <a:prstGeom prst="ellipse">
@@ -12268,7 +12268,7 @@
           </p:nvSpPr>
           <p:spPr>
             <a:xfrm>
-              <a:off x="6968824" y="4582286"/>
+              <a:off x="6885979" y="4583696"/>
               <a:ext cx="77571" cy="77571"/>
             </a:xfrm>
             <a:prstGeom prst="ellipse">
@@ -12294,7 +12294,7 @@
           </p:nvSpPr>
           <p:spPr>
             <a:xfrm>
-              <a:off x="6712421" y="3668591"/>
+              <a:off x="6978631" y="3668579"/>
               <a:ext cx="77571" cy="77571"/>
             </a:xfrm>
             <a:prstGeom prst="ellipse">
@@ -12320,7 +12320,7 @@
           </p:nvSpPr>
           <p:spPr>
             <a:xfrm>
-              <a:off x="6931994" y="3713859"/>
+              <a:off x="6904393" y="3714837"/>
               <a:ext cx="77571" cy="77571"/>
             </a:xfrm>
             <a:prstGeom prst="ellipse">
@@ -12346,7 +12346,7 @@
           </p:nvSpPr>
           <p:spPr>
             <a:xfrm>
-              <a:off x="6700833" y="4296870"/>
+              <a:off x="6869554" y="4300278"/>
               <a:ext cx="77571" cy="77571"/>
             </a:xfrm>
             <a:prstGeom prst="ellipse">
@@ -12372,7 +12372,7 @@
           </p:nvSpPr>
           <p:spPr>
             <a:xfrm>
-              <a:off x="6866923" y="4469053"/>
+              <a:off x="6810395" y="4472299"/>
               <a:ext cx="77571" cy="77571"/>
             </a:xfrm>
             <a:prstGeom prst="ellipse">
@@ -12398,7 +12398,7 @@
           </p:nvSpPr>
           <p:spPr>
             <a:xfrm>
-              <a:off x="7096491" y="4597666"/>
+              <a:off x="6929025" y="4601493"/>
               <a:ext cx="77571" cy="77571"/>
             </a:xfrm>
             <a:prstGeom prst="ellipse">
@@ -12424,7 +12424,7 @@
           </p:nvSpPr>
           <p:spPr>
             <a:xfrm>
-              <a:off x="6853364" y="4260240"/>
+              <a:off x="7009900" y="4259674"/>
               <a:ext cx="77571" cy="77571"/>
             </a:xfrm>
             <a:prstGeom prst="ellipse">
@@ -12450,7 +12450,7 @@
           </p:nvSpPr>
           <p:spPr>
             <a:xfrm>
-              <a:off x="6714152" y="4031221"/>
+              <a:off x="6906106" y="4032792"/>
               <a:ext cx="77571" cy="77571"/>
             </a:xfrm>
             <a:prstGeom prst="ellipse">
@@ -12476,7 +12476,7 @@
           </p:nvSpPr>
           <p:spPr>
             <a:xfrm>
-              <a:off x="6940165" y="4657641"/>
+              <a:off x="6998263" y="4656771"/>
               <a:ext cx="77571" cy="77571"/>
             </a:xfrm>
             <a:prstGeom prst="ellipse">
@@ -12502,7 +12502,7 @@
           </p:nvSpPr>
           <p:spPr>
             <a:xfrm>
-              <a:off x="7019292" y="3863428"/>
+              <a:off x="6755040" y="3865915"/>
               <a:ext cx="77571" cy="77571"/>
             </a:xfrm>
             <a:prstGeom prst="ellipse">
@@ -12528,7 +12528,7 @@
           </p:nvSpPr>
           <p:spPr>
             <a:xfrm>
-              <a:off x="6668879" y="4239553"/>
+              <a:off x="6895261" y="4240861"/>
               <a:ext cx="77571" cy="77571"/>
             </a:xfrm>
             <a:prstGeom prst="ellipse">
@@ -12554,7 +12554,7 @@
           </p:nvSpPr>
           <p:spPr>
             <a:xfrm>
-              <a:off x="6973536" y="4300324"/>
+              <a:off x="7011607" y="4305210"/>
               <a:ext cx="77571" cy="77571"/>
             </a:xfrm>
             <a:prstGeom prst="ellipse">
@@ -12580,7 +12580,7 @@
           </p:nvSpPr>
           <p:spPr>
             <a:xfrm>
-              <a:off x="6849322" y="4589302"/>
+              <a:off x="6954266" y="4589593"/>
               <a:ext cx="77571" cy="77571"/>
             </a:xfrm>
             <a:prstGeom prst="ellipse">
@@ -12606,7 +12606,7 @@
           </p:nvSpPr>
           <p:spPr>
             <a:xfrm>
-              <a:off x="6898433" y="4031918"/>
+              <a:off x="6927221" y="4033274"/>
               <a:ext cx="77571" cy="77571"/>
             </a:xfrm>
             <a:prstGeom prst="ellipse">
@@ -12632,7 +12632,7 @@
           </p:nvSpPr>
           <p:spPr>
             <a:xfrm>
-              <a:off x="7068382" y="4285487"/>
+              <a:off x="6800921" y="4289562"/>
               <a:ext cx="77571" cy="77571"/>
             </a:xfrm>
             <a:prstGeom prst="ellipse">
@@ -12658,7 +12658,7 @@
           </p:nvSpPr>
           <p:spPr>
             <a:xfrm>
-              <a:off x="6769327" y="4007600"/>
+              <a:off x="6919096" y="4009127"/>
               <a:ext cx="77571" cy="77571"/>
             </a:xfrm>
             <a:prstGeom prst="ellipse">
@@ -12684,7 +12684,7 @@
           </p:nvSpPr>
           <p:spPr>
             <a:xfrm>
-              <a:off x="7111272" y="4253180"/>
+              <a:off x="7041606" y="4258452"/>
               <a:ext cx="77571" cy="77571"/>
             </a:xfrm>
             <a:prstGeom prst="ellipse">
@@ -12710,7 +12710,7 @@
           </p:nvSpPr>
           <p:spPr>
             <a:xfrm>
-              <a:off x="7888161" y="4424875"/>
+              <a:off x="7712266" y="4426355"/>
               <a:ext cx="77571" cy="77571"/>
             </a:xfrm>
             <a:prstGeom prst="ellipse">
@@ -12736,7 +12736,7 @@
           </p:nvSpPr>
           <p:spPr>
             <a:xfrm>
-              <a:off x="7512168" y="4523350"/>
+              <a:off x="7638035" y="4525815"/>
               <a:ext cx="77571" cy="77571"/>
             </a:xfrm>
             <a:prstGeom prst="ellipse">
@@ -12762,7 +12762,7 @@
           </p:nvSpPr>
           <p:spPr>
             <a:xfrm>
-              <a:off x="7530296" y="4270239"/>
+              <a:off x="7530641" y="4274102"/>
               <a:ext cx="77571" cy="77571"/>
             </a:xfrm>
             <a:prstGeom prst="ellipse">
@@ -12788,7 +12788,7 @@
           </p:nvSpPr>
           <p:spPr>
             <a:xfrm>
-              <a:off x="7859317" y="4044567"/>
+              <a:off x="7774273" y="4044068"/>
               <a:ext cx="77571" cy="77571"/>
             </a:xfrm>
             <a:prstGeom prst="ellipse">
@@ -12814,7 +12814,7 @@
           </p:nvSpPr>
           <p:spPr>
             <a:xfrm>
-              <a:off x="7729745" y="4243130"/>
+              <a:off x="7573094" y="4245036"/>
               <a:ext cx="77571" cy="77571"/>
             </a:xfrm>
             <a:prstGeom prst="ellipse">
@@ -12840,7 +12840,7 @@
           </p:nvSpPr>
           <p:spPr>
             <a:xfrm>
-              <a:off x="7838017" y="4285641"/>
+              <a:off x="7492920" y="4289413"/>
               <a:ext cx="77571" cy="77571"/>
             </a:xfrm>
             <a:prstGeom prst="ellipse">
@@ -12866,7 +12866,7 @@
           </p:nvSpPr>
           <p:spPr>
             <a:xfrm>
-              <a:off x="7753699" y="4439989"/>
+              <a:off x="7764109" y="4440330"/>
               <a:ext cx="77571" cy="77571"/>
             </a:xfrm>
             <a:prstGeom prst="ellipse">
@@ -12892,7 +12892,7 @@
           </p:nvSpPr>
           <p:spPr>
             <a:xfrm>
-              <a:off x="7508619" y="4326731"/>
+              <a:off x="7931158" y="4330803"/>
               <a:ext cx="77571" cy="77571"/>
             </a:xfrm>
             <a:prstGeom prst="ellipse">
@@ -12918,7 +12918,7 @@
           </p:nvSpPr>
           <p:spPr>
             <a:xfrm>
-              <a:off x="7657251" y="4438235"/>
+              <a:off x="7568039" y="4440228"/>
               <a:ext cx="77571" cy="77571"/>
             </a:xfrm>
             <a:prstGeom prst="ellipse">
@@ -12944,7 +12944,7 @@
           </p:nvSpPr>
           <p:spPr>
             <a:xfrm>
-              <a:off x="7538786" y="4348981"/>
+              <a:off x="7873364" y="4349530"/>
               <a:ext cx="77571" cy="77571"/>
             </a:xfrm>
             <a:prstGeom prst="ellipse">
@@ -12970,7 +12970,7 @@
           </p:nvSpPr>
           <p:spPr>
             <a:xfrm>
-              <a:off x="7940029" y="4084020"/>
+              <a:off x="7898082" y="4086257"/>
               <a:ext cx="77571" cy="77571"/>
             </a:xfrm>
             <a:prstGeom prst="ellipse">
@@ -12996,7 +12996,7 @@
           </p:nvSpPr>
           <p:spPr>
             <a:xfrm>
-              <a:off x="7794212" y="3777363"/>
+              <a:off x="7925245" y="3782066"/>
               <a:ext cx="77571" cy="77571"/>
             </a:xfrm>
             <a:prstGeom prst="ellipse">
@@ -13022,7 +13022,7 @@
           </p:nvSpPr>
           <p:spPr>
             <a:xfrm>
-              <a:off x="7580315" y="4455244"/>
+              <a:off x="7520689" y="4457351"/>
               <a:ext cx="77571" cy="77571"/>
             </a:xfrm>
             <a:prstGeom prst="ellipse">
@@ -13048,7 +13048,7 @@
           </p:nvSpPr>
           <p:spPr>
             <a:xfrm>
-              <a:off x="7547691" y="4623944"/>
+              <a:off x="7873187" y="4627407"/>
               <a:ext cx="77571" cy="77571"/>
             </a:xfrm>
             <a:prstGeom prst="ellipse">
@@ -13074,7 +13074,7 @@
           </p:nvSpPr>
           <p:spPr>
             <a:xfrm>
-              <a:off x="7892055" y="4586834"/>
+              <a:off x="7682167" y="4589362"/>
               <a:ext cx="77571" cy="77571"/>
             </a:xfrm>
             <a:prstGeom prst="ellipse">
@@ -13100,7 +13100,7 @@
           </p:nvSpPr>
           <p:spPr>
             <a:xfrm>
-              <a:off x="7611373" y="4322745"/>
+              <a:off x="7513400" y="4325503"/>
               <a:ext cx="77571" cy="77571"/>
             </a:xfrm>
             <a:prstGeom prst="ellipse">
@@ -13126,7 +13126,7 @@
           </p:nvSpPr>
           <p:spPr>
             <a:xfrm>
-              <a:off x="7803054" y="4520396"/>
+              <a:off x="7877156" y="4523041"/>
               <a:ext cx="77571" cy="77571"/>
             </a:xfrm>
             <a:prstGeom prst="ellipse">
@@ -13152,7 +13152,7 @@
           </p:nvSpPr>
           <p:spPr>
             <a:xfrm>
-              <a:off x="7608348" y="4403371"/>
+              <a:off x="7874716" y="4405531"/>
               <a:ext cx="77571" cy="77571"/>
             </a:xfrm>
             <a:prstGeom prst="ellipse">
@@ -13178,7 +13178,7 @@
           </p:nvSpPr>
           <p:spPr>
             <a:xfrm>
-              <a:off x="7921651" y="3863066"/>
+              <a:off x="7795386" y="3863522"/>
               <a:ext cx="77571" cy="77571"/>
             </a:xfrm>
             <a:prstGeom prst="ellipse">
@@ -13204,7 +13204,7 @@
           </p:nvSpPr>
           <p:spPr>
             <a:xfrm>
-              <a:off x="7623984" y="4219120"/>
+              <a:off x="7940029" y="4218846"/>
               <a:ext cx="77571" cy="77571"/>
             </a:xfrm>
             <a:prstGeom prst="ellipse">
@@ -13230,7 +13230,7 @@
           </p:nvSpPr>
           <p:spPr>
             <a:xfrm>
-              <a:off x="7615595" y="4313258"/>
+              <a:off x="7615705" y="4312900"/>
               <a:ext cx="77571" cy="77571"/>
             </a:xfrm>
             <a:prstGeom prst="ellipse">
@@ -13256,7 +13256,7 @@
           </p:nvSpPr>
           <p:spPr>
             <a:xfrm>
-              <a:off x="7568547" y="4254180"/>
+              <a:off x="7670988" y="4256084"/>
               <a:ext cx="77571" cy="77571"/>
             </a:xfrm>
             <a:prstGeom prst="ellipse">
@@ -13282,7 +13282,7 @@
           </p:nvSpPr>
           <p:spPr>
             <a:xfrm>
-              <a:off x="7685304" y="4583709"/>
+              <a:off x="7504111" y="4584913"/>
               <a:ext cx="77571" cy="77571"/>
             </a:xfrm>
             <a:prstGeom prst="ellipse">
@@ -13308,7 +13308,7 @@
           </p:nvSpPr>
           <p:spPr>
             <a:xfrm>
-              <a:off x="7530452" y="4207987"/>
+              <a:off x="7667733" y="4206853"/>
               <a:ext cx="77571" cy="77571"/>
             </a:xfrm>
             <a:prstGeom prst="ellipse">
@@ -13334,42 +13334,42 @@
           </p:nvSpPr>
           <p:spPr>
             <a:xfrm>
-              <a:off x="5210882" y="4105270"/>
-              <a:ext cx="2551353" cy="393656"/>
+              <a:off x="5204846" y="4106873"/>
+              <a:ext cx="2547362" cy="394187"/>
             </a:xfrm>
             <a:custGeom>
               <a:avLst/>
               <a:pathLst>
-                <a:path w="2551353" h="393656">
+                <a:path w="2547362" h="394187">
                   <a:moveTo>
                     <a:pt x="0" y="0"/>
                   </a:moveTo>
                   <a:lnTo>
-                    <a:pt x="1347933" y="114857"/>
+                    <a:pt x="1345824" y="115012"/>
                   </a:lnTo>
                   <a:lnTo>
-                    <a:pt x="1700902" y="131568"/>
+                    <a:pt x="1698241" y="131745"/>
                   </a:lnTo>
                   <a:lnTo>
-                    <a:pt x="2198384" y="143824"/>
+                    <a:pt x="2194945" y="144018"/>
                   </a:lnTo>
                   <a:lnTo>
-                    <a:pt x="2551353" y="146234"/>
+                    <a:pt x="2547362" y="146431"/>
                   </a:lnTo>
                   <a:lnTo>
-                    <a:pt x="2551353" y="393656"/>
+                    <a:pt x="2547362" y="394187"/>
                   </a:lnTo>
                   <a:lnTo>
-                    <a:pt x="2198384" y="362913"/>
+                    <a:pt x="2194945" y="363402"/>
                   </a:lnTo>
                   <a:lnTo>
-                    <a:pt x="1700902" y="328443"/>
+                    <a:pt x="1698241" y="328886"/>
                   </a:lnTo>
                   <a:lnTo>
-                    <a:pt x="1347933" y="312001"/>
+                    <a:pt x="1345824" y="312422"/>
                   </a:lnTo>
                   <a:lnTo>
-                    <a:pt x="0" y="300254"/>
+                    <a:pt x="0" y="300658"/>
                   </a:lnTo>
                   <a:close/>
                 </a:path>
@@ -13395,27 +13395,27 @@
           </p:nvSpPr>
           <p:spPr>
             <a:xfrm>
-              <a:off x="5210882" y="4105270"/>
-              <a:ext cx="2551353" cy="146234"/>
+              <a:off x="5204846" y="4106873"/>
+              <a:ext cx="2547362" cy="146431"/>
             </a:xfrm>
             <a:custGeom>
               <a:avLst/>
               <a:pathLst>
-                <a:path w="2551353" h="146234">
+                <a:path w="2547362" h="146431">
                   <a:moveTo>
                     <a:pt x="0" y="0"/>
                   </a:moveTo>
                   <a:lnTo>
-                    <a:pt x="1347933" y="114857"/>
+                    <a:pt x="1345824" y="115012"/>
                   </a:lnTo>
                   <a:lnTo>
-                    <a:pt x="1700902" y="131568"/>
+                    <a:pt x="1698241" y="131745"/>
                   </a:lnTo>
                   <a:lnTo>
-                    <a:pt x="2198384" y="143824"/>
+                    <a:pt x="2194945" y="144018"/>
                   </a:lnTo>
                   <a:lnTo>
-                    <a:pt x="2551353" y="146234"/>
+                    <a:pt x="2547362" y="146431"/>
                   </a:lnTo>
                 </a:path>
               </a:pathLst>
@@ -13435,24 +13435,24 @@
           </p:nvSpPr>
           <p:spPr>
             <a:xfrm>
-              <a:off x="5210882" y="4405525"/>
-              <a:ext cx="2551353" cy="93402"/>
+              <a:off x="5204846" y="4407532"/>
+              <a:ext cx="2547362" cy="93528"/>
             </a:xfrm>
             <a:custGeom>
               <a:avLst/>
               <a:pathLst>
-                <a:path w="2551353" h="93402">
+                <a:path w="2547362" h="93528">
                   <a:moveTo>
-                    <a:pt x="2551353" y="93402"/>
+                    <a:pt x="2547362" y="93528"/>
                   </a:moveTo>
                   <a:lnTo>
-                    <a:pt x="2198384" y="62659"/>
+                    <a:pt x="2194945" y="62744"/>
                   </a:lnTo>
                   <a:lnTo>
-                    <a:pt x="1700902" y="28189"/>
+                    <a:pt x="1698241" y="28227"/>
                   </a:lnTo>
                   <a:lnTo>
-                    <a:pt x="1347933" y="11747"/>
+                    <a:pt x="1345824" y="11763"/>
                   </a:lnTo>
                   <a:lnTo>
                     <a:pt x="0" y="0"/>
@@ -13475,27 +13475,27 @@
           </p:nvSpPr>
           <p:spPr>
             <a:xfrm>
-              <a:off x="5210882" y="4255398"/>
-              <a:ext cx="2551353" cy="119818"/>
+              <a:off x="5204846" y="4257202"/>
+              <a:ext cx="2547362" cy="119979"/>
             </a:xfrm>
             <a:custGeom>
               <a:avLst/>
               <a:pathLst>
-                <a:path w="2551353" h="119818">
+                <a:path w="2547362" h="119979">
                   <a:moveTo>
                     <a:pt x="0" y="0"/>
                   </a:moveTo>
                   <a:lnTo>
-                    <a:pt x="1347933" y="63302"/>
+                    <a:pt x="1345824" y="63387"/>
                   </a:lnTo>
                   <a:lnTo>
-                    <a:pt x="1700902" y="79879"/>
+                    <a:pt x="1698241" y="79986"/>
                   </a:lnTo>
                   <a:lnTo>
-                    <a:pt x="2198384" y="103242"/>
+                    <a:pt x="2194945" y="103381"/>
                   </a:lnTo>
                   <a:lnTo>
-                    <a:pt x="2551353" y="119818"/>
+                    <a:pt x="2547362" y="119979"/>
                   </a:lnTo>
                 </a:path>
               </a:pathLst>
@@ -13524,7 +13524,7 @@
           </p:nvSpPr>
           <p:spPr>
             <a:xfrm>
-              <a:off x="7282542" y="3510894"/>
+              <a:off x="7272514" y="3511862"/>
               <a:ext cx="479694" cy="82021"/>
             </a:xfrm>
             <a:prstGeom prst="rect">
@@ -13631,7 +13631,7 @@
           </p:nvSpPr>
           <p:spPr>
             <a:xfrm>
-              <a:off x="4800012" y="4705577"/>
+              <a:off x="4800012" y="4707988"/>
               <a:ext cx="37957" cy="0"/>
             </a:xfrm>
             <a:custGeom>
@@ -13671,7 +13671,7 @@
           </p:nvSpPr>
           <p:spPr>
             <a:xfrm>
-              <a:off x="4800012" y="4433541"/>
+              <a:off x="4800012" y="4435586"/>
               <a:ext cx="37957" cy="0"/>
             </a:xfrm>
             <a:custGeom>
@@ -13711,7 +13711,7 @@
           </p:nvSpPr>
           <p:spPr>
             <a:xfrm>
-              <a:off x="4800012" y="4161504"/>
+              <a:off x="4800012" y="4163183"/>
               <a:ext cx="37957" cy="0"/>
             </a:xfrm>
             <a:custGeom>
@@ -13751,7 +13751,7 @@
           </p:nvSpPr>
           <p:spPr>
             <a:xfrm>
-              <a:off x="4800012" y="3889468"/>
+              <a:off x="4800012" y="3890780"/>
               <a:ext cx="37957" cy="0"/>
             </a:xfrm>
             <a:custGeom>
@@ -13791,7 +13791,7 @@
           </p:nvSpPr>
           <p:spPr>
             <a:xfrm>
-              <a:off x="4800012" y="3617431"/>
+              <a:off x="4800012" y="3618377"/>
               <a:ext cx="37957" cy="0"/>
             </a:xfrm>
             <a:custGeom>
@@ -13831,7 +13831,7 @@
           </p:nvSpPr>
           <p:spPr>
             <a:xfrm>
-              <a:off x="4800012" y="3345395"/>
+              <a:off x="4800012" y="3345974"/>
               <a:ext cx="37957" cy="0"/>
             </a:xfrm>
             <a:custGeom>
@@ -13911,7 +13911,7 @@
           </p:nvSpPr>
           <p:spPr>
             <a:xfrm>
-              <a:off x="5210882" y="4899543"/>
+              <a:off x="5204846" y="4899543"/>
               <a:ext cx="0" cy="37957"/>
             </a:xfrm>
             <a:custGeom>
@@ -13951,7 +13951,7 @@
           </p:nvSpPr>
           <p:spPr>
             <a:xfrm>
-              <a:off x="6061333" y="4899543"/>
+              <a:off x="6053966" y="4899543"/>
               <a:ext cx="0" cy="37957"/>
             </a:xfrm>
             <a:custGeom>
@@ -13991,7 +13991,7 @@
           </p:nvSpPr>
           <p:spPr>
             <a:xfrm>
-              <a:off x="6911785" y="4899543"/>
+              <a:off x="6903087" y="4899543"/>
               <a:ext cx="0" cy="37957"/>
             </a:xfrm>
             <a:custGeom>
@@ -14031,7 +14031,7 @@
           </p:nvSpPr>
           <p:spPr>
             <a:xfrm>
-              <a:off x="7762236" y="4899543"/>
+              <a:off x="7752208" y="4899543"/>
               <a:ext cx="0" cy="37957"/>
             </a:xfrm>
             <a:custGeom>
@@ -14071,7 +14071,7 @@
           </p:nvSpPr>
           <p:spPr>
             <a:xfrm>
-              <a:off x="5172020" y="4967867"/>
+              <a:off x="5165984" y="4967867"/>
               <a:ext cx="77724" cy="100218"/>
             </a:xfrm>
             <a:prstGeom prst="rect">
@@ -14117,7 +14117,7 @@
           </p:nvSpPr>
           <p:spPr>
             <a:xfrm>
-              <a:off x="6022471" y="4967867"/>
+              <a:off x="6015104" y="4967867"/>
               <a:ext cx="77724" cy="100218"/>
             </a:xfrm>
             <a:prstGeom prst="rect">
@@ -14163,7 +14163,7 @@
           </p:nvSpPr>
           <p:spPr>
             <a:xfrm>
-              <a:off x="6872923" y="4967867"/>
+              <a:off x="6864225" y="4967867"/>
               <a:ext cx="77724" cy="100218"/>
             </a:xfrm>
             <a:prstGeom prst="rect">
@@ -14209,7 +14209,7 @@
           </p:nvSpPr>
           <p:spPr>
             <a:xfrm>
-              <a:off x="7723374" y="4967867"/>
+              <a:off x="7713346" y="4967867"/>
               <a:ext cx="77724" cy="100218"/>
             </a:xfrm>
             <a:prstGeom prst="rect">
@@ -14327,7 +14327,7 @@
           </p:nvSpPr>
           <p:spPr>
             <a:xfrm>
-              <a:off x="1762995" y="6437608"/>
+              <a:off x="1519161" y="6436087"/>
               <a:ext cx="77571" cy="77571"/>
             </a:xfrm>
             <a:prstGeom prst="ellipse">
@@ -14353,7 +14353,7 @@
           </p:nvSpPr>
           <p:spPr>
             <a:xfrm>
-              <a:off x="1817274" y="6295678"/>
+              <a:off x="1585797" y="6297310"/>
               <a:ext cx="77571" cy="77571"/>
             </a:xfrm>
             <a:prstGeom prst="ellipse">
@@ -14379,7 +14379,7 @@
           </p:nvSpPr>
           <p:spPr>
             <a:xfrm>
-              <a:off x="1740851" y="6380129"/>
+              <a:off x="1719573" y="6381305"/>
               <a:ext cx="77571" cy="77571"/>
             </a:xfrm>
             <a:prstGeom prst="ellipse">
@@ -14405,7 +14405,7 @@
           </p:nvSpPr>
           <p:spPr>
             <a:xfrm>
-              <a:off x="1852792" y="6575962"/>
+              <a:off x="1659033" y="6572696"/>
               <a:ext cx="77571" cy="77571"/>
             </a:xfrm>
             <a:prstGeom prst="ellipse">
@@ -14431,7 +14431,7 @@
           </p:nvSpPr>
           <p:spPr>
             <a:xfrm>
-              <a:off x="1519161" y="6744566"/>
+              <a:off x="1826766" y="6741668"/>
               <a:ext cx="77571" cy="77571"/>
             </a:xfrm>
             <a:prstGeom prst="ellipse">
@@ -14457,7 +14457,7 @@
           </p:nvSpPr>
           <p:spPr>
             <a:xfrm>
-              <a:off x="1547360" y="6403963"/>
+              <a:off x="1869325" y="6403632"/>
               <a:ext cx="77571" cy="77571"/>
             </a:xfrm>
             <a:prstGeom prst="ellipse">
@@ -14483,7 +14483,7 @@
           </p:nvSpPr>
           <p:spPr>
             <a:xfrm>
-              <a:off x="1875514" y="6539334"/>
+              <a:off x="1843652" y="6537087"/>
               <a:ext cx="77571" cy="77571"/>
             </a:xfrm>
             <a:prstGeom prst="ellipse">
@@ -14509,7 +14509,7 @@
           </p:nvSpPr>
           <p:spPr>
             <a:xfrm>
-              <a:off x="1941179" y="6579402"/>
+              <a:off x="1609345" y="6579274"/>
               <a:ext cx="77571" cy="77571"/>
             </a:xfrm>
             <a:prstGeom prst="ellipse">
@@ -14535,7 +14535,7 @@
           </p:nvSpPr>
           <p:spPr>
             <a:xfrm>
-              <a:off x="1536585" y="6683120"/>
+              <a:off x="1905170" y="6683696"/>
               <a:ext cx="77571" cy="77571"/>
             </a:xfrm>
             <a:prstGeom prst="ellipse">
@@ -14561,7 +14561,7 @@
           </p:nvSpPr>
           <p:spPr>
             <a:xfrm>
-              <a:off x="1795280" y="6362916"/>
+              <a:off x="1774306" y="6361878"/>
               <a:ext cx="77571" cy="77571"/>
             </a:xfrm>
             <a:prstGeom prst="ellipse">
@@ -14587,7 +14587,7 @@
           </p:nvSpPr>
           <p:spPr>
             <a:xfrm>
-              <a:off x="2382679" y="6553826"/>
+              <a:off x="2359183" y="6552053"/>
               <a:ext cx="77571" cy="77571"/>
             </a:xfrm>
             <a:prstGeom prst="ellipse">
@@ -14613,7 +14613,7 @@
           </p:nvSpPr>
           <p:spPr>
             <a:xfrm>
-              <a:off x="2500693" y="5786871"/>
+              <a:off x="2581909" y="5786164"/>
               <a:ext cx="77571" cy="77571"/>
             </a:xfrm>
             <a:prstGeom prst="ellipse">
@@ -14639,7 +14639,7 @@
           </p:nvSpPr>
           <p:spPr>
             <a:xfrm>
-              <a:off x="2607959" y="5945709"/>
+              <a:off x="2363983" y="5943347"/>
               <a:ext cx="77571" cy="77571"/>
             </a:xfrm>
             <a:prstGeom prst="ellipse">
@@ -14665,7 +14665,7 @@
           </p:nvSpPr>
           <p:spPr>
             <a:xfrm>
-              <a:off x="2387488" y="6197024"/>
+              <a:off x="2378108" y="6196505"/>
               <a:ext cx="77571" cy="77571"/>
             </a:xfrm>
             <a:prstGeom prst="ellipse">
@@ -14691,7 +14691,7 @@
           </p:nvSpPr>
           <p:spPr>
             <a:xfrm>
-              <a:off x="2413747" y="6342444"/>
+              <a:off x="2309338" y="6339046"/>
               <a:ext cx="77571" cy="77571"/>
             </a:xfrm>
             <a:prstGeom prst="ellipse">
@@ -14717,7 +14717,7 @@
           </p:nvSpPr>
           <p:spPr>
             <a:xfrm>
-              <a:off x="2442730" y="6886426"/>
+              <a:off x="2487407" y="6886426"/>
               <a:ext cx="77571" cy="77571"/>
             </a:xfrm>
             <a:prstGeom prst="ellipse">
@@ -14743,7 +14743,7 @@
           </p:nvSpPr>
           <p:spPr>
             <a:xfrm>
-              <a:off x="2796464" y="6600393"/>
+              <a:off x="2347263" y="6597575"/>
               <a:ext cx="77571" cy="77571"/>
             </a:xfrm>
             <a:prstGeom prst="ellipse">
@@ -14769,7 +14769,7 @@
           </p:nvSpPr>
           <p:spPr>
             <a:xfrm>
-              <a:off x="2404562" y="6146104"/>
+              <a:off x="2560476" y="6148583"/>
               <a:ext cx="77571" cy="77571"/>
             </a:xfrm>
             <a:prstGeom prst="ellipse">
@@ -14795,7 +14795,7 @@
           </p:nvSpPr>
           <p:spPr>
             <a:xfrm>
-              <a:off x="2720148" y="5641258"/>
+              <a:off x="2682953" y="5641464"/>
               <a:ext cx="77571" cy="77571"/>
             </a:xfrm>
             <a:prstGeom prst="ellipse">
@@ -14821,7 +14821,7 @@
           </p:nvSpPr>
           <p:spPr>
             <a:xfrm>
-              <a:off x="2550846" y="5553861"/>
+              <a:off x="2334528" y="5553861"/>
               <a:ext cx="77571" cy="77571"/>
             </a:xfrm>
             <a:prstGeom prst="ellipse">
@@ -14847,7 +14847,7 @@
           </p:nvSpPr>
           <p:spPr>
             <a:xfrm>
-              <a:off x="2772403" y="6432298"/>
+              <a:off x="2708060" y="6430004"/>
               <a:ext cx="77571" cy="77571"/>
             </a:xfrm>
             <a:prstGeom prst="ellipse">
@@ -14873,7 +14873,7 @@
           </p:nvSpPr>
           <p:spPr>
             <a:xfrm>
-              <a:off x="2533736" y="6126848"/>
+              <a:off x="2509795" y="6127503"/>
               <a:ext cx="77571" cy="77571"/>
             </a:xfrm>
             <a:prstGeom prst="ellipse">
@@ -14899,7 +14899,7 @@
           </p:nvSpPr>
           <p:spPr>
             <a:xfrm>
-              <a:off x="2408142" y="5912834"/>
+              <a:off x="2708983" y="5915083"/>
               <a:ext cx="77571" cy="77571"/>
             </a:xfrm>
             <a:prstGeom prst="ellipse">
@@ -14925,7 +14925,7 @@
           </p:nvSpPr>
           <p:spPr>
             <a:xfrm>
-              <a:off x="2763409" y="6059268"/>
+              <a:off x="2614198" y="6058691"/>
               <a:ext cx="77571" cy="77571"/>
             </a:xfrm>
             <a:prstGeom prst="ellipse">
@@ -14951,7 +14951,7 @@
           </p:nvSpPr>
           <p:spPr>
             <a:xfrm>
-              <a:off x="2594094" y="6594110"/>
+              <a:off x="2432686" y="6591778"/>
               <a:ext cx="77571" cy="77571"/>
             </a:xfrm>
             <a:prstGeom prst="ellipse">
@@ -14977,7 +14977,7 @@
           </p:nvSpPr>
           <p:spPr>
             <a:xfrm>
-              <a:off x="2380600" y="6533677"/>
+              <a:off x="2567210" y="6533591"/>
               <a:ext cx="77571" cy="77571"/>
             </a:xfrm>
             <a:prstGeom prst="ellipse">
@@ -15003,7 +15003,7 @@
           </p:nvSpPr>
           <p:spPr>
             <a:xfrm>
-              <a:off x="2420612" y="5965810"/>
+              <a:off x="2598788" y="5963292"/>
               <a:ext cx="77571" cy="77571"/>
             </a:xfrm>
             <a:prstGeom prst="ellipse">
@@ -15029,7 +15029,7 @@
           </p:nvSpPr>
           <p:spPr>
             <a:xfrm>
-              <a:off x="2775550" y="6013186"/>
+              <a:off x="2632275" y="6014722"/>
               <a:ext cx="77571" cy="77571"/>
             </a:xfrm>
             <a:prstGeom prst="ellipse">
@@ -15055,7 +15055,7 @@
           </p:nvSpPr>
           <p:spPr>
             <a:xfrm>
-              <a:off x="3370119" y="6641051"/>
+              <a:off x="3400434" y="6636407"/>
               <a:ext cx="77571" cy="77571"/>
             </a:xfrm>
             <a:prstGeom prst="ellipse">
@@ -15081,7 +15081,7 @@
           </p:nvSpPr>
           <p:spPr>
             <a:xfrm>
-              <a:off x="3509755" y="6315745"/>
+              <a:off x="3421098" y="6314782"/>
               <a:ext cx="77571" cy="77571"/>
             </a:xfrm>
             <a:prstGeom prst="ellipse">
@@ -15107,7 +15107,7 @@
           </p:nvSpPr>
           <p:spPr>
             <a:xfrm>
-              <a:off x="3665572" y="6441652"/>
+              <a:off x="3467684" y="6437683"/>
               <a:ext cx="77571" cy="77571"/>
             </a:xfrm>
             <a:prstGeom prst="ellipse">
@@ -15133,7 +15133,7 @@
           </p:nvSpPr>
           <p:spPr>
             <a:xfrm>
-              <a:off x="3435619" y="6713011"/>
+              <a:off x="3210866" y="6712253"/>
               <a:ext cx="77571" cy="77571"/>
             </a:xfrm>
             <a:prstGeom prst="ellipse">
@@ -15159,7 +15159,7 @@
           </p:nvSpPr>
           <p:spPr>
             <a:xfrm>
-              <a:off x="3309871" y="6293697"/>
+              <a:off x="3583932" y="6289933"/>
               <a:ext cx="77571" cy="77571"/>
             </a:xfrm>
             <a:prstGeom prst="ellipse">
@@ -15185,7 +15185,7 @@
           </p:nvSpPr>
           <p:spPr>
             <a:xfrm>
-              <a:off x="3498342" y="6595650"/>
+              <a:off x="3594517" y="6592160"/>
               <a:ext cx="77571" cy="77571"/>
             </a:xfrm>
             <a:prstGeom prst="ellipse">
@@ -15211,7 +15211,7 @@
           </p:nvSpPr>
           <p:spPr>
             <a:xfrm>
-              <a:off x="3526136" y="5706790"/>
+              <a:off x="3412697" y="5706184"/>
               <a:ext cx="77571" cy="77571"/>
             </a:xfrm>
             <a:prstGeom prst="ellipse">
@@ -15237,7 +15237,7 @@
           </p:nvSpPr>
           <p:spPr>
             <a:xfrm>
-              <a:off x="3425939" y="6514631"/>
+              <a:off x="3359195" y="6513347"/>
               <a:ext cx="77571" cy="77571"/>
             </a:xfrm>
             <a:prstGeom prst="ellipse">
@@ -15263,7 +15263,7 @@
           </p:nvSpPr>
           <p:spPr>
             <a:xfrm>
-              <a:off x="3590974" y="6181080"/>
+              <a:off x="3468869" y="6183338"/>
               <a:ext cx="77571" cy="77571"/>
             </a:xfrm>
             <a:prstGeom prst="ellipse">
@@ -15289,7 +15289,7 @@
           </p:nvSpPr>
           <p:spPr>
             <a:xfrm>
-              <a:off x="3387088" y="5979459"/>
+              <a:off x="3281502" y="5976528"/>
               <a:ext cx="77571" cy="77571"/>
             </a:xfrm>
             <a:prstGeom prst="ellipse">
@@ -15315,7 +15315,7 @@
           </p:nvSpPr>
           <p:spPr>
             <a:xfrm>
-              <a:off x="3413472" y="5613227"/>
+              <a:off x="3181262" y="5610864"/>
               <a:ext cx="77571" cy="77571"/>
             </a:xfrm>
             <a:prstGeom prst="ellipse">
@@ -15341,7 +15341,7 @@
           </p:nvSpPr>
           <p:spPr>
             <a:xfrm>
-              <a:off x="3475489" y="5849802"/>
+              <a:off x="3456365" y="5849215"/>
               <a:ext cx="77571" cy="77571"/>
             </a:xfrm>
             <a:prstGeom prst="ellipse">
@@ -15367,7 +15367,7 @@
           </p:nvSpPr>
           <p:spPr>
             <a:xfrm>
-              <a:off x="3611450" y="6541042"/>
+              <a:off x="3483725" y="6540163"/>
               <a:ext cx="77571" cy="77571"/>
             </a:xfrm>
             <a:prstGeom prst="ellipse">
@@ -15393,7 +15393,7 @@
           </p:nvSpPr>
           <p:spPr>
             <a:xfrm>
-              <a:off x="3372076" y="6106149"/>
+              <a:off x="3558684" y="6108397"/>
               <a:ext cx="77571" cy="77571"/>
             </a:xfrm>
             <a:prstGeom prst="ellipse">
@@ -15419,7 +15419,7 @@
           </p:nvSpPr>
           <p:spPr>
             <a:xfrm>
-              <a:off x="3401019" y="6257842"/>
+              <a:off x="3295203" y="6254823"/>
               <a:ext cx="77571" cy="77571"/>
             </a:xfrm>
             <a:prstGeom prst="ellipse">
@@ -15445,7 +15445,7 @@
           </p:nvSpPr>
           <p:spPr>
             <a:xfrm>
-              <a:off x="3424556" y="6059955"/>
+              <a:off x="3323722" y="6056466"/>
               <a:ext cx="77571" cy="77571"/>
             </a:xfrm>
             <a:prstGeom prst="ellipse">
@@ -15471,7 +15471,7 @@
           </p:nvSpPr>
           <p:spPr>
             <a:xfrm>
-              <a:off x="3260464" y="6511922"/>
+              <a:off x="3464129" y="6507409"/>
               <a:ext cx="77571" cy="77571"/>
             </a:xfrm>
             <a:prstGeom prst="ellipse">
@@ -15497,7 +15497,7 @@
           </p:nvSpPr>
           <p:spPr>
             <a:xfrm>
-              <a:off x="3439666" y="6102255"/>
+              <a:off x="3527578" y="6100626"/>
               <a:ext cx="77571" cy="77571"/>
             </a:xfrm>
             <a:prstGeom prst="ellipse">
@@ -15523,7 +15523,7 @@
           </p:nvSpPr>
           <p:spPr>
             <a:xfrm>
-              <a:off x="3328894" y="6470180"/>
+              <a:off x="3212492" y="6467791"/>
               <a:ext cx="77571" cy="77571"/>
             </a:xfrm>
             <a:prstGeom prst="ellipse">
@@ -15549,7 +15549,7 @@
           </p:nvSpPr>
           <p:spPr>
             <a:xfrm>
-              <a:off x="3602157" y="6425094"/>
+              <a:off x="3435514" y="6425941"/>
               <a:ext cx="77571" cy="77571"/>
             </a:xfrm>
             <a:prstGeom prst="ellipse">
@@ -15575,7 +15575,7 @@
           </p:nvSpPr>
           <p:spPr>
             <a:xfrm>
-              <a:off x="4510442" y="6484412"/>
+              <a:off x="4439614" y="6483947"/>
               <a:ext cx="77571" cy="77571"/>
             </a:xfrm>
             <a:prstGeom prst="ellipse">
@@ -15601,7 +15601,7 @@
           </p:nvSpPr>
           <p:spPr>
             <a:xfrm>
-              <a:off x="4497830" y="6430335"/>
+              <a:off x="4195384" y="6430519"/>
               <a:ext cx="77571" cy="77571"/>
             </a:xfrm>
             <a:prstGeom prst="ellipse">
@@ -15627,7 +15627,7 @@
           </p:nvSpPr>
           <p:spPr>
             <a:xfrm>
-              <a:off x="4272705" y="6625507"/>
+              <a:off x="4191897" y="6623452"/>
               <a:ext cx="77571" cy="77571"/>
             </a:xfrm>
             <a:prstGeom prst="ellipse">
@@ -15653,7 +15653,7 @@
           </p:nvSpPr>
           <p:spPr>
             <a:xfrm>
-              <a:off x="4469488" y="6158935"/>
+              <a:off x="4445526" y="6157584"/>
               <a:ext cx="77571" cy="77571"/>
             </a:xfrm>
             <a:prstGeom prst="ellipse">
@@ -15679,7 +15679,7 @@
           </p:nvSpPr>
           <p:spPr>
             <a:xfrm>
-              <a:off x="4459028" y="6222003"/>
+              <a:off x="4068789" y="6221450"/>
               <a:ext cx="77571" cy="77571"/>
             </a:xfrm>
             <a:prstGeom prst="ellipse">
@@ -15705,7 +15705,7 @@
           </p:nvSpPr>
           <p:spPr>
             <a:xfrm>
-              <a:off x="4390410" y="5647069"/>
+              <a:off x="4123170" y="5645615"/>
               <a:ext cx="77571" cy="77571"/>
             </a:xfrm>
             <a:prstGeom prst="ellipse">
@@ -15731,7 +15731,7 @@
           </p:nvSpPr>
           <p:spPr>
             <a:xfrm>
-              <a:off x="4271920" y="6198880"/>
+              <a:off x="4218290" y="6197941"/>
               <a:ext cx="77571" cy="77571"/>
             </a:xfrm>
             <a:prstGeom prst="ellipse">
@@ -15757,7 +15757,7 @@
           </p:nvSpPr>
           <p:spPr>
             <a:xfrm>
-              <a:off x="4232858" y="6423869"/>
+              <a:off x="4373931" y="6425627"/>
               <a:ext cx="77571" cy="77571"/>
             </a:xfrm>
             <a:prstGeom prst="ellipse">
@@ -15783,7 +15783,7 @@
           </p:nvSpPr>
           <p:spPr>
             <a:xfrm>
-              <a:off x="4485813" y="6210356"/>
+              <a:off x="4326111" y="6209374"/>
               <a:ext cx="77571" cy="77571"/>
             </a:xfrm>
             <a:prstGeom prst="ellipse">
@@ -15809,7 +15809,7 @@
           </p:nvSpPr>
           <p:spPr>
             <a:xfrm>
-              <a:off x="4331894" y="6089828"/>
+              <a:off x="4081940" y="6089232"/>
               <a:ext cx="77571" cy="77571"/>
             </a:xfrm>
             <a:prstGeom prst="ellipse">
@@ -15835,7 +15835,7 @@
           </p:nvSpPr>
           <p:spPr>
             <a:xfrm>
-              <a:off x="4234139" y="6024599"/>
+              <a:off x="4197079" y="6021118"/>
               <a:ext cx="77571" cy="77571"/>
             </a:xfrm>
             <a:prstGeom prst="ellipse">
@@ -15861,7 +15861,7 @@
           </p:nvSpPr>
           <p:spPr>
             <a:xfrm>
-              <a:off x="4509672" y="5873362"/>
+              <a:off x="4280592" y="5875890"/>
               <a:ext cx="77571" cy="77571"/>
             </a:xfrm>
             <a:prstGeom prst="ellipse">
@@ -15887,7 +15887,7 @@
           </p:nvSpPr>
           <p:spPr>
             <a:xfrm>
-              <a:off x="4093994" y="6377521"/>
+              <a:off x="4209425" y="6373271"/>
               <a:ext cx="77571" cy="77571"/>
             </a:xfrm>
             <a:prstGeom prst="ellipse">
@@ -15913,7 +15913,7 @@
           </p:nvSpPr>
           <p:spPr>
             <a:xfrm>
-              <a:off x="4416784" y="5767273"/>
+              <a:off x="4044051" y="5765128"/>
               <a:ext cx="77571" cy="77571"/>
             </a:xfrm>
             <a:prstGeom prst="ellipse">
@@ -15939,7 +15939,7 @@
           </p:nvSpPr>
           <p:spPr>
             <a:xfrm>
-              <a:off x="4318976" y="6695335"/>
+              <a:off x="4048370" y="6693574"/>
               <a:ext cx="77571" cy="77571"/>
             </a:xfrm>
             <a:prstGeom prst="ellipse">
@@ -15965,7 +15965,7 @@
           </p:nvSpPr>
           <p:spPr>
             <a:xfrm>
-              <a:off x="4444956" y="6541659"/>
+              <a:off x="4340865" y="6540178"/>
               <a:ext cx="77571" cy="77571"/>
             </a:xfrm>
             <a:prstGeom prst="ellipse">
@@ -15991,7 +15991,7 @@
           </p:nvSpPr>
           <p:spPr>
             <a:xfrm>
-              <a:off x="4100082" y="6351203"/>
+              <a:off x="4205139" y="6348938"/>
               <a:ext cx="77571" cy="77571"/>
             </a:xfrm>
             <a:prstGeom prst="ellipse">
@@ -16017,7 +16017,7 @@
           </p:nvSpPr>
           <p:spPr>
             <a:xfrm>
-              <a:off x="4321322" y="6449359"/>
+              <a:off x="4377682" y="6448639"/>
               <a:ext cx="77571" cy="77571"/>
             </a:xfrm>
             <a:prstGeom prst="ellipse">
@@ -16043,7 +16043,7 @@
           </p:nvSpPr>
           <p:spPr>
             <a:xfrm>
-              <a:off x="4476446" y="6306423"/>
+              <a:off x="4105349" y="6307331"/>
               <a:ext cx="77571" cy="77571"/>
             </a:xfrm>
             <a:prstGeom prst="ellipse">
@@ -16069,7 +16069,7 @@
           </p:nvSpPr>
           <p:spPr>
             <a:xfrm>
-              <a:off x="4309912" y="6499329"/>
+              <a:off x="4510442" y="6498933"/>
               <a:ext cx="77571" cy="77571"/>
             </a:xfrm>
             <a:prstGeom prst="ellipse">
@@ -16095,7 +16095,7 @@
           </p:nvSpPr>
           <p:spPr>
             <a:xfrm>
-              <a:off x="4244799" y="6276072"/>
+              <a:off x="4171483" y="6277432"/>
               <a:ext cx="77571" cy="77571"/>
             </a:xfrm>
             <a:prstGeom prst="ellipse">
@@ -16121,7 +16121,7 @@
           </p:nvSpPr>
           <p:spPr>
             <a:xfrm>
-              <a:off x="4202917" y="6192840"/>
+              <a:off x="4186089" y="6192392"/>
               <a:ext cx="77571" cy="77571"/>
             </a:xfrm>
             <a:prstGeom prst="ellipse">
@@ -16147,7 +16147,7 @@
           </p:nvSpPr>
           <p:spPr>
             <a:xfrm>
-              <a:off x="4228400" y="6201940"/>
+              <a:off x="4042594" y="6202106"/>
               <a:ext cx="77571" cy="77571"/>
             </a:xfrm>
             <a:prstGeom prst="ellipse">
@@ -16173,7 +16173,7 @@
           </p:nvSpPr>
           <p:spPr>
             <a:xfrm>
-              <a:off x="4286618" y="6270155"/>
+              <a:off x="4191454" y="6270587"/>
               <a:ext cx="77571" cy="77571"/>
             </a:xfrm>
             <a:prstGeom prst="ellipse">
@@ -16199,42 +16199,42 @@
           </p:nvSpPr>
           <p:spPr>
             <a:xfrm>
-              <a:off x="1770868" y="6068361"/>
-              <a:ext cx="2537674" cy="479462"/>
+              <a:off x="1696891" y="6067547"/>
+              <a:ext cx="2605999" cy="478945"/>
             </a:xfrm>
             <a:custGeom>
               <a:avLst/>
               <a:pathLst>
-                <a:path w="2537674" h="479462">
+                <a:path w="2605999" h="478945">
                   <a:moveTo>
                     <a:pt x="0" y="0"/>
                   </a:moveTo>
                   <a:lnTo>
-                    <a:pt x="1340706" y="106117"/>
+                    <a:pt x="1376803" y="106003"/>
                   </a:lnTo>
                   <a:lnTo>
-                    <a:pt x="1691783" y="96020"/>
+                    <a:pt x="1737332" y="95916"/>
                   </a:lnTo>
                   <a:lnTo>
-                    <a:pt x="2186597" y="53118"/>
+                    <a:pt x="2245470" y="53061"/>
                   </a:lnTo>
                   <a:lnTo>
-                    <a:pt x="2537674" y="11356"/>
+                    <a:pt x="2605999" y="11343"/>
                   </a:lnTo>
                   <a:lnTo>
-                    <a:pt x="2537674" y="430053"/>
+                    <a:pt x="2605999" y="429589"/>
                   </a:lnTo>
                   <a:lnTo>
-                    <a:pt x="2186597" y="393555"/>
+                    <a:pt x="2245470" y="393130"/>
                   </a:lnTo>
                   <a:lnTo>
-                    <a:pt x="1691783" y="358073"/>
+                    <a:pt x="1737332" y="357687"/>
                   </a:lnTo>
                   <a:lnTo>
-                    <a:pt x="1340706" y="353240"/>
+                    <a:pt x="1376803" y="352859"/>
                   </a:lnTo>
                   <a:lnTo>
-                    <a:pt x="0" y="479462"/>
+                    <a:pt x="0" y="478945"/>
                   </a:lnTo>
                   <a:close/>
                 </a:path>
@@ -16260,27 +16260,27 @@
           </p:nvSpPr>
           <p:spPr>
             <a:xfrm>
-              <a:off x="1770868" y="6068361"/>
-              <a:ext cx="2537674" cy="106117"/>
+              <a:off x="1696891" y="6067547"/>
+              <a:ext cx="2605999" cy="106003"/>
             </a:xfrm>
             <a:custGeom>
               <a:avLst/>
               <a:pathLst>
-                <a:path w="2537674" h="106117">
+                <a:path w="2605999" h="106003">
                   <a:moveTo>
                     <a:pt x="0" y="0"/>
                   </a:moveTo>
                   <a:lnTo>
-                    <a:pt x="1340706" y="106117"/>
+                    <a:pt x="1376803" y="106003"/>
                   </a:lnTo>
                   <a:lnTo>
-                    <a:pt x="1691783" y="96020"/>
+                    <a:pt x="1737332" y="95916"/>
                   </a:lnTo>
                   <a:lnTo>
-                    <a:pt x="2186597" y="53118"/>
+                    <a:pt x="2245470" y="53061"/>
                   </a:lnTo>
                   <a:lnTo>
-                    <a:pt x="2537674" y="11356"/>
+                    <a:pt x="2605999" y="11343"/>
                   </a:lnTo>
                 </a:path>
               </a:pathLst>
@@ -16300,27 +16300,27 @@
           </p:nvSpPr>
           <p:spPr>
             <a:xfrm>
-              <a:off x="1770868" y="6421602"/>
-              <a:ext cx="2537674" cy="126221"/>
+              <a:off x="1696891" y="6420406"/>
+              <a:ext cx="2605999" cy="126085"/>
             </a:xfrm>
             <a:custGeom>
               <a:avLst/>
               <a:pathLst>
-                <a:path w="2537674" h="126221">
+                <a:path w="2605999" h="126085">
                   <a:moveTo>
-                    <a:pt x="2537674" y="76812"/>
+                    <a:pt x="2605999" y="76729"/>
                   </a:moveTo>
                   <a:lnTo>
-                    <a:pt x="2186597" y="40314"/>
+                    <a:pt x="2245470" y="40270"/>
                   </a:lnTo>
                   <a:lnTo>
-                    <a:pt x="1691783" y="4833"/>
+                    <a:pt x="1737332" y="4827"/>
                   </a:lnTo>
                   <a:lnTo>
-                    <a:pt x="1340706" y="0"/>
+                    <a:pt x="1376803" y="0"/>
                   </a:lnTo>
                   <a:lnTo>
-                    <a:pt x="0" y="126221"/>
+                    <a:pt x="0" y="126085"/>
                   </a:lnTo>
                 </a:path>
               </a:pathLst>
@@ -16340,27 +16340,27 @@
           </p:nvSpPr>
           <p:spPr>
             <a:xfrm>
-              <a:off x="1770868" y="6289066"/>
-              <a:ext cx="2537674" cy="19026"/>
+              <a:off x="1696891" y="6288013"/>
+              <a:ext cx="2605999" cy="19006"/>
             </a:xfrm>
             <a:custGeom>
               <a:avLst/>
               <a:pathLst>
-                <a:path w="2537674" h="19026">
+                <a:path w="2605999" h="19006">
                   <a:moveTo>
-                    <a:pt x="0" y="19026"/>
+                    <a:pt x="0" y="19006"/>
                   </a:moveTo>
                   <a:lnTo>
-                    <a:pt x="1340706" y="8974"/>
+                    <a:pt x="1376803" y="8964"/>
                   </a:lnTo>
                   <a:lnTo>
-                    <a:pt x="1691783" y="6342"/>
+                    <a:pt x="1737332" y="6335"/>
                   </a:lnTo>
                   <a:lnTo>
-                    <a:pt x="2186597" y="2632"/>
+                    <a:pt x="2245470" y="2629"/>
                   </a:lnTo>
                   <a:lnTo>
-                    <a:pt x="2537674" y="0"/>
+                    <a:pt x="2605999" y="0"/>
                   </a:lnTo>
                 </a:path>
               </a:pathLst>
@@ -16389,7 +16389,7 @@
           </p:nvSpPr>
           <p:spPr>
             <a:xfrm>
-              <a:off x="3828848" y="5601448"/>
+              <a:off x="3823196" y="5601005"/>
               <a:ext cx="479694" cy="82021"/>
             </a:xfrm>
             <a:prstGeom prst="rect">
@@ -16496,7 +16496,7 @@
           </p:nvSpPr>
           <p:spPr>
             <a:xfrm rot="-5400000">
-              <a:off x="1177387" y="6842425"/>
+              <a:off x="1177387" y="6840721"/>
               <a:ext cx="194218" cy="100218"/>
             </a:xfrm>
             <a:prstGeom prst="rect">
@@ -16542,7 +16542,7 @@
           </p:nvSpPr>
           <p:spPr>
             <a:xfrm rot="-5400000">
-              <a:off x="1177387" y="6433529"/>
+              <a:off x="1177387" y="6432266"/>
               <a:ext cx="194218" cy="100218"/>
             </a:xfrm>
             <a:prstGeom prst="rect">
@@ -16588,7 +16588,7 @@
           </p:nvSpPr>
           <p:spPr>
             <a:xfrm rot="-5400000">
-              <a:off x="1177387" y="6024632"/>
+              <a:off x="1177387" y="6023811"/>
               <a:ext cx="194218" cy="100218"/>
             </a:xfrm>
             <a:prstGeom prst="rect">
@@ -16634,7 +16634,7 @@
           </p:nvSpPr>
           <p:spPr>
             <a:xfrm rot="-5400000">
-              <a:off x="1177387" y="5615736"/>
+              <a:off x="1177387" y="5615356"/>
               <a:ext cx="194218" cy="100218"/>
             </a:xfrm>
             <a:prstGeom prst="rect">
@@ -16680,7 +16680,7 @@
           </p:nvSpPr>
           <p:spPr>
             <a:xfrm>
-              <a:off x="1370425" y="6892534"/>
+              <a:off x="1370425" y="6890830"/>
               <a:ext cx="37957" cy="0"/>
             </a:xfrm>
             <a:custGeom>
@@ -16720,7 +16720,7 @@
           </p:nvSpPr>
           <p:spPr>
             <a:xfrm>
-              <a:off x="1370425" y="6483638"/>
+              <a:off x="1370425" y="6482375"/>
               <a:ext cx="37957" cy="0"/>
             </a:xfrm>
             <a:custGeom>
@@ -16760,7 +16760,7 @@
           </p:nvSpPr>
           <p:spPr>
             <a:xfrm>
-              <a:off x="1370425" y="6074741"/>
+              <a:off x="1370425" y="6073920"/>
               <a:ext cx="37957" cy="0"/>
             </a:xfrm>
             <a:custGeom>
@@ -16800,7 +16800,7 @@
           </p:nvSpPr>
           <p:spPr>
             <a:xfrm>
-              <a:off x="1370425" y="5665845"/>
+              <a:off x="1370425" y="5665465"/>
               <a:ext cx="37957" cy="0"/>
             </a:xfrm>
             <a:custGeom>
@@ -16880,7 +16880,7 @@
           </p:nvSpPr>
           <p:spPr>
             <a:xfrm>
-              <a:off x="1770868" y="6991840"/>
+              <a:off x="1696891" y="6991840"/>
               <a:ext cx="0" cy="37957"/>
             </a:xfrm>
             <a:custGeom>
@@ -16920,7 +16920,7 @@
           </p:nvSpPr>
           <p:spPr>
             <a:xfrm>
-              <a:off x="2616759" y="6991840"/>
+              <a:off x="2565558" y="6991840"/>
               <a:ext cx="0" cy="37957"/>
             </a:xfrm>
             <a:custGeom>
@@ -16960,7 +16960,7 @@
           </p:nvSpPr>
           <p:spPr>
             <a:xfrm>
-              <a:off x="3462651" y="6991840"/>
+              <a:off x="3434224" y="6991840"/>
               <a:ext cx="0" cy="37957"/>
             </a:xfrm>
             <a:custGeom>
@@ -17000,7 +17000,7 @@
           </p:nvSpPr>
           <p:spPr>
             <a:xfrm>
-              <a:off x="4308543" y="6991840"/>
+              <a:off x="4302890" y="6991840"/>
               <a:ext cx="0" cy="37957"/>
             </a:xfrm>
             <a:custGeom>
@@ -17040,7 +17040,7 @@
           </p:nvSpPr>
           <p:spPr>
             <a:xfrm>
-              <a:off x="1732006" y="7060163"/>
+              <a:off x="1658029" y="7060163"/>
               <a:ext cx="77724" cy="100218"/>
             </a:xfrm>
             <a:prstGeom prst="rect">
@@ -17086,7 +17086,7 @@
           </p:nvSpPr>
           <p:spPr>
             <a:xfrm>
-              <a:off x="2577897" y="7060163"/>
+              <a:off x="2526696" y="7060163"/>
               <a:ext cx="77724" cy="100218"/>
             </a:xfrm>
             <a:prstGeom prst="rect">
@@ -17132,7 +17132,7 @@
           </p:nvSpPr>
           <p:spPr>
             <a:xfrm>
-              <a:off x="3423789" y="7060163"/>
+              <a:off x="3395362" y="7060163"/>
               <a:ext cx="77724" cy="100218"/>
             </a:xfrm>
             <a:prstGeom prst="rect">
@@ -17178,7 +17178,7 @@
           </p:nvSpPr>
           <p:spPr>
             <a:xfrm>
-              <a:off x="4269681" y="7060163"/>
+              <a:off x="4264028" y="7060163"/>
               <a:ext cx="77724" cy="100218"/>
             </a:xfrm>
             <a:prstGeom prst="rect">
@@ -17388,7 +17388,7 @@
           </p:nvSpPr>
           <p:spPr>
             <a:xfrm>
-              <a:off x="5290221" y="6348663"/>
+              <a:off x="4948748" y="6348760"/>
               <a:ext cx="77571" cy="77571"/>
             </a:xfrm>
             <a:prstGeom prst="ellipse">
@@ -17414,7 +17414,7 @@
           </p:nvSpPr>
           <p:spPr>
             <a:xfrm>
-              <a:off x="5355632" y="6272814"/>
+              <a:off x="5232536" y="6272098"/>
               <a:ext cx="77571" cy="77571"/>
             </a:xfrm>
             <a:prstGeom prst="ellipse">
@@ -17440,7 +17440,7 @@
           </p:nvSpPr>
           <p:spPr>
             <a:xfrm>
-              <a:off x="4999152" y="6334329"/>
+              <a:off x="5276132" y="6332533"/>
               <a:ext cx="77571" cy="77571"/>
             </a:xfrm>
             <a:prstGeom prst="ellipse">
@@ -17466,7 +17466,7 @@
           </p:nvSpPr>
           <p:spPr>
             <a:xfrm>
-              <a:off x="5178978" y="6651926"/>
+              <a:off x="5078594" y="6653082"/>
               <a:ext cx="77571" cy="77571"/>
             </a:xfrm>
             <a:prstGeom prst="ellipse">
@@ -17492,7 +17492,7 @@
           </p:nvSpPr>
           <p:spPr>
             <a:xfrm>
-              <a:off x="5044915" y="6613551"/>
+              <a:off x="5231342" y="6612502"/>
               <a:ext cx="77571" cy="77571"/>
             </a:xfrm>
             <a:prstGeom prst="ellipse">
@@ -17518,7 +17518,7 @@
           </p:nvSpPr>
           <p:spPr>
             <a:xfrm>
-              <a:off x="5025614" y="6567622"/>
+              <a:off x="5068745" y="6568321"/>
               <a:ext cx="77571" cy="77571"/>
             </a:xfrm>
             <a:prstGeom prst="ellipse">
@@ -17544,7 +17544,7 @@
           </p:nvSpPr>
           <p:spPr>
             <a:xfrm>
-              <a:off x="5206179" y="6089023"/>
+              <a:off x="5047060" y="6088836"/>
               <a:ext cx="77571" cy="77571"/>
             </a:xfrm>
             <a:prstGeom prst="ellipse">
@@ -17570,7 +17570,7 @@
           </p:nvSpPr>
           <p:spPr>
             <a:xfrm>
-              <a:off x="5363928" y="6371542"/>
+              <a:off x="5270734" y="6371455"/>
               <a:ext cx="77571" cy="77571"/>
             </a:xfrm>
             <a:prstGeom prst="ellipse">
@@ -17596,7 +17596,7 @@
           </p:nvSpPr>
           <p:spPr>
             <a:xfrm>
-              <a:off x="5372087" y="6592437"/>
+              <a:off x="4979338" y="6591582"/>
               <a:ext cx="77571" cy="77571"/>
             </a:xfrm>
             <a:prstGeom prst="ellipse">
@@ -17622,7 +17622,7 @@
           </p:nvSpPr>
           <p:spPr>
             <a:xfrm>
-              <a:off x="4948748" y="6244749"/>
+              <a:off x="5197941" y="6245181"/>
               <a:ext cx="77571" cy="77571"/>
             </a:xfrm>
             <a:prstGeom prst="ellipse">
@@ -17648,7 +17648,7 @@
           </p:nvSpPr>
           <p:spPr>
             <a:xfrm>
-              <a:off x="6058166" y="6886426"/>
+              <a:off x="6110690" y="6886426"/>
               <a:ext cx="77571" cy="77571"/>
             </a:xfrm>
             <a:prstGeom prst="ellipse">
@@ -17674,7 +17674,7 @@
           </p:nvSpPr>
           <p:spPr>
             <a:xfrm>
-              <a:off x="6044854" y="6498853"/>
+              <a:off x="5959008" y="6499445"/>
               <a:ext cx="77571" cy="77571"/>
             </a:xfrm>
             <a:prstGeom prst="ellipse">
@@ -17700,7 +17700,7 @@
           </p:nvSpPr>
           <p:spPr>
             <a:xfrm>
-              <a:off x="6208008" y="6281035"/>
+              <a:off x="5780773" y="6281243"/>
               <a:ext cx="77571" cy="77571"/>
             </a:xfrm>
             <a:prstGeom prst="ellipse">
@@ -17726,7 +17726,7 @@
           </p:nvSpPr>
           <p:spPr>
             <a:xfrm>
-              <a:off x="6021063" y="6744873"/>
+              <a:off x="5965450" y="6746434"/>
               <a:ext cx="77571" cy="77571"/>
             </a:xfrm>
             <a:prstGeom prst="ellipse">
@@ -17752,7 +17752,7 @@
           </p:nvSpPr>
           <p:spPr>
             <a:xfrm>
-              <a:off x="6140364" y="6415805"/>
+              <a:off x="5938271" y="6416302"/>
               <a:ext cx="77571" cy="77571"/>
             </a:xfrm>
             <a:prstGeom prst="ellipse">
@@ -17778,7 +17778,7 @@
           </p:nvSpPr>
           <p:spPr>
             <a:xfrm>
-              <a:off x="6048107" y="6019409"/>
+              <a:off x="6172800" y="6019559"/>
               <a:ext cx="77571" cy="77571"/>
             </a:xfrm>
             <a:prstGeom prst="ellipse">
@@ -17804,7 +17804,7 @@
           </p:nvSpPr>
           <p:spPr>
             <a:xfrm>
-              <a:off x="5881852" y="6453231"/>
+              <a:off x="6185132" y="6454036"/>
               <a:ext cx="77571" cy="77571"/>
             </a:xfrm>
             <a:prstGeom prst="ellipse">
@@ -17830,7 +17830,7 @@
           </p:nvSpPr>
           <p:spPr>
             <a:xfrm>
-              <a:off x="6112348" y="6523245"/>
+              <a:off x="5992040" y="6522792"/>
               <a:ext cx="77571" cy="77571"/>
             </a:xfrm>
             <a:prstGeom prst="ellipse">
@@ -17856,7 +17856,7 @@
           </p:nvSpPr>
           <p:spPr>
             <a:xfrm>
-              <a:off x="6230349" y="6259236"/>
+              <a:off x="5912697" y="6259145"/>
               <a:ext cx="77571" cy="77571"/>
             </a:xfrm>
             <a:prstGeom prst="ellipse">
@@ -17882,7 +17882,7 @@
           </p:nvSpPr>
           <p:spPr>
             <a:xfrm>
-              <a:off x="5917987" y="6615309"/>
+              <a:off x="6190055" y="6614796"/>
               <a:ext cx="77571" cy="77571"/>
             </a:xfrm>
             <a:prstGeom prst="ellipse">
@@ -17908,7 +17908,7 @@
           </p:nvSpPr>
           <p:spPr>
             <a:xfrm>
-              <a:off x="5949606" y="6200154"/>
+              <a:off x="5732523" y="6200573"/>
               <a:ext cx="77571" cy="77571"/>
             </a:xfrm>
             <a:prstGeom prst="ellipse">
@@ -17934,7 +17934,7 @@
           </p:nvSpPr>
           <p:spPr>
             <a:xfrm>
-              <a:off x="5968047" y="6575957"/>
+              <a:off x="5739446" y="6575766"/>
               <a:ext cx="77571" cy="77571"/>
             </a:xfrm>
             <a:prstGeom prst="ellipse">
@@ -17960,7 +17960,7 @@
           </p:nvSpPr>
           <p:spPr>
             <a:xfrm>
-              <a:off x="5887645" y="6170850"/>
+              <a:off x="5890739" y="6172148"/>
               <a:ext cx="77571" cy="77571"/>
             </a:xfrm>
             <a:prstGeom prst="ellipse">
@@ -17986,7 +17986,7 @@
           </p:nvSpPr>
           <p:spPr>
             <a:xfrm>
-              <a:off x="6053249" y="5811731"/>
+              <a:off x="5725540" y="5811771"/>
               <a:ext cx="77571" cy="77571"/>
             </a:xfrm>
             <a:prstGeom prst="ellipse">
@@ -18012,7 +18012,7 @@
           </p:nvSpPr>
           <p:spPr>
             <a:xfrm>
-              <a:off x="5994334" y="6092081"/>
+              <a:off x="6063793" y="6091218"/>
               <a:ext cx="77571" cy="77571"/>
             </a:xfrm>
             <a:prstGeom prst="ellipse">
@@ -18038,7 +18038,7 @@
           </p:nvSpPr>
           <p:spPr>
             <a:xfrm>
-              <a:off x="5934501" y="6142008"/>
+              <a:off x="5721133" y="6141801"/>
               <a:ext cx="77571" cy="77571"/>
             </a:xfrm>
             <a:prstGeom prst="ellipse">
@@ -18064,7 +18064,7 @@
           </p:nvSpPr>
           <p:spPr>
             <a:xfrm>
-              <a:off x="6016591" y="6264103"/>
+              <a:off x="6117013" y="6263984"/>
               <a:ext cx="77571" cy="77571"/>
             </a:xfrm>
             <a:prstGeom prst="ellipse">
@@ -18090,7 +18090,7 @@
           </p:nvSpPr>
           <p:spPr>
             <a:xfrm>
-              <a:off x="5892253" y="6553348"/>
+              <a:off x="5926274" y="6553796"/>
               <a:ext cx="77571" cy="77571"/>
             </a:xfrm>
             <a:prstGeom prst="ellipse">
@@ -18116,7 +18116,7 @@
           </p:nvSpPr>
           <p:spPr>
             <a:xfrm>
-              <a:off x="6892143" y="6323550"/>
+              <a:off x="6901882" y="6322865"/>
               <a:ext cx="77571" cy="77571"/>
             </a:xfrm>
             <a:prstGeom prst="ellipse">
@@ -18142,7 +18142,7 @@
           </p:nvSpPr>
           <p:spPr>
             <a:xfrm>
-              <a:off x="6936342" y="6380536"/>
+              <a:off x="6707185" y="6381512"/>
               <a:ext cx="77571" cy="77571"/>
             </a:xfrm>
             <a:prstGeom prst="ellipse">
@@ -18168,7 +18168,7 @@
           </p:nvSpPr>
           <p:spPr>
             <a:xfrm>
-              <a:off x="6704244" y="6593152"/>
+              <a:off x="6955503" y="6593980"/>
               <a:ext cx="77571" cy="77571"/>
             </a:xfrm>
             <a:prstGeom prst="ellipse">
@@ -18194,7 +18194,7 @@
           </p:nvSpPr>
           <p:spPr>
             <a:xfrm>
-              <a:off x="6740776" y="6141630"/>
+              <a:off x="6679260" y="6140950"/>
               <a:ext cx="77571" cy="77571"/>
             </a:xfrm>
             <a:prstGeom prst="ellipse">
@@ -18220,7 +18220,7 @@
           </p:nvSpPr>
           <p:spPr>
             <a:xfrm>
-              <a:off x="6894431" y="6384694"/>
+              <a:off x="7078599" y="6384121"/>
               <a:ext cx="77571" cy="77571"/>
             </a:xfrm>
             <a:prstGeom prst="ellipse">
@@ -18246,7 +18246,7 @@
           </p:nvSpPr>
           <p:spPr>
             <a:xfrm>
-              <a:off x="6907443" y="6162990"/>
+              <a:off x="6939372" y="6162423"/>
               <a:ext cx="77571" cy="77571"/>
             </a:xfrm>
             <a:prstGeom prst="ellipse">
@@ -18272,7 +18272,7 @@
           </p:nvSpPr>
           <p:spPr>
             <a:xfrm>
-              <a:off x="6969734" y="5698159"/>
+              <a:off x="6791811" y="5696567"/>
               <a:ext cx="77571" cy="77571"/>
             </a:xfrm>
             <a:prstGeom prst="ellipse">
@@ -18298,7 +18298,7 @@
           </p:nvSpPr>
           <p:spPr>
             <a:xfrm>
-              <a:off x="6909335" y="6442124"/>
+              <a:off x="6990012" y="6442896"/>
               <a:ext cx="77571" cy="77571"/>
             </a:xfrm>
             <a:prstGeom prst="ellipse">
@@ -18324,7 +18324,7 @@
           </p:nvSpPr>
           <p:spPr>
             <a:xfrm>
-              <a:off x="6843777" y="6261021"/>
+              <a:off x="6669732" y="6262016"/>
               <a:ext cx="77571" cy="77571"/>
             </a:xfrm>
             <a:prstGeom prst="ellipse">
@@ -18350,7 +18350,7 @@
           </p:nvSpPr>
           <p:spPr>
             <a:xfrm>
-              <a:off x="6707007" y="5553861"/>
+              <a:off x="6600685" y="5553861"/>
               <a:ext cx="77571" cy="77571"/>
             </a:xfrm>
             <a:prstGeom prst="ellipse">
@@ -18376,7 +18376,7 @@
           </p:nvSpPr>
           <p:spPr>
             <a:xfrm>
-              <a:off x="6769442" y="6266851"/>
+              <a:off x="6600672" y="6268054"/>
               <a:ext cx="77571" cy="77571"/>
             </a:xfrm>
             <a:prstGeom prst="ellipse">
@@ -18402,7 +18402,7 @@
           </p:nvSpPr>
           <p:spPr>
             <a:xfrm>
-              <a:off x="6736250" y="6383369"/>
+              <a:off x="6941981" y="6383864"/>
               <a:ext cx="77571" cy="77571"/>
             </a:xfrm>
             <a:prstGeom prst="ellipse">
@@ -18428,7 +18428,7 @@
           </p:nvSpPr>
           <p:spPr>
             <a:xfrm>
-              <a:off x="6641975" y="6139902"/>
+              <a:off x="6789167" y="6138585"/>
               <a:ext cx="77571" cy="77571"/>
             </a:xfrm>
             <a:prstGeom prst="ellipse">
@@ -18454,7 +18454,7 @@
           </p:nvSpPr>
           <p:spPr>
             <a:xfrm>
-              <a:off x="6957437" y="6067362"/>
+              <a:off x="6786234" y="6067381"/>
               <a:ext cx="77571" cy="77571"/>
             </a:xfrm>
             <a:prstGeom prst="ellipse">
@@ -18480,7 +18480,7 @@
           </p:nvSpPr>
           <p:spPr>
             <a:xfrm>
-              <a:off x="6625417" y="5929145"/>
+              <a:off x="6806931" y="5929631"/>
               <a:ext cx="77571" cy="77571"/>
             </a:xfrm>
             <a:prstGeom prst="ellipse">
@@ -18506,7 +18506,7 @@
           </p:nvSpPr>
           <p:spPr>
             <a:xfrm>
-              <a:off x="6655130" y="6484451"/>
+              <a:off x="6939230" y="6485159"/>
               <a:ext cx="77571" cy="77571"/>
             </a:xfrm>
             <a:prstGeom prst="ellipse">
@@ -18532,7 +18532,7 @@
           </p:nvSpPr>
           <p:spPr>
             <a:xfrm>
-              <a:off x="6609772" y="6517404"/>
+              <a:off x="6778814" y="6516217"/>
               <a:ext cx="77571" cy="77571"/>
             </a:xfrm>
             <a:prstGeom prst="ellipse">
@@ -18558,7 +18558,7 @@
           </p:nvSpPr>
           <p:spPr>
             <a:xfrm>
-              <a:off x="6761985" y="6724600"/>
+              <a:off x="6764177" y="6724681"/>
               <a:ext cx="77571" cy="77571"/>
             </a:xfrm>
             <a:prstGeom prst="ellipse">
@@ -18584,7 +18584,7 @@
           </p:nvSpPr>
           <p:spPr>
             <a:xfrm>
-              <a:off x="6840247" y="6312777"/>
+              <a:off x="6847286" y="6311526"/>
               <a:ext cx="77571" cy="77571"/>
             </a:xfrm>
             <a:prstGeom prst="ellipse">
@@ -18610,7 +18610,7 @@
           </p:nvSpPr>
           <p:spPr>
             <a:xfrm>
-              <a:off x="7051914" y="6229431"/>
+              <a:off x="6657341" y="6230272"/>
               <a:ext cx="77571" cy="77571"/>
             </a:xfrm>
             <a:prstGeom prst="ellipse">
@@ -18636,7 +18636,7 @@
           </p:nvSpPr>
           <p:spPr>
             <a:xfrm>
-              <a:off x="7860294" y="6276889"/>
+              <a:off x="7758713" y="6278510"/>
               <a:ext cx="77571" cy="77571"/>
             </a:xfrm>
             <a:prstGeom prst="ellipse">
@@ -18662,7 +18662,7 @@
           </p:nvSpPr>
           <p:spPr>
             <a:xfrm>
-              <a:off x="7580806" y="6408322"/>
+              <a:off x="7637252" y="6407995"/>
               <a:ext cx="77571" cy="77571"/>
             </a:xfrm>
             <a:prstGeom prst="ellipse">
@@ -18688,7 +18688,7 @@
           </p:nvSpPr>
           <p:spPr>
             <a:xfrm>
-              <a:off x="7461526" y="6485798"/>
+              <a:off x="7519960" y="6485755"/>
               <a:ext cx="77571" cy="77571"/>
             </a:xfrm>
             <a:prstGeom prst="ellipse">
@@ -18714,7 +18714,7 @@
           </p:nvSpPr>
           <p:spPr>
             <a:xfrm>
-              <a:off x="7505884" y="6522122"/>
+              <a:off x="7719122" y="6523089"/>
               <a:ext cx="77571" cy="77571"/>
             </a:xfrm>
             <a:prstGeom prst="ellipse">
@@ -18740,7 +18740,7 @@
           </p:nvSpPr>
           <p:spPr>
             <a:xfrm>
-              <a:off x="7650293" y="6319332"/>
+              <a:off x="7680307" y="6320410"/>
               <a:ext cx="77571" cy="77571"/>
             </a:xfrm>
             <a:prstGeom prst="ellipse">
@@ -18766,7 +18766,7 @@
           </p:nvSpPr>
           <p:spPr>
             <a:xfrm>
-              <a:off x="7793488" y="6252967"/>
+              <a:off x="7742264" y="6253305"/>
               <a:ext cx="77571" cy="77571"/>
             </a:xfrm>
             <a:prstGeom prst="ellipse">
@@ -18792,7 +18792,7 @@
           </p:nvSpPr>
           <p:spPr>
             <a:xfrm>
-              <a:off x="7735689" y="6481822"/>
+              <a:off x="7869256" y="6483391"/>
               <a:ext cx="77571" cy="77571"/>
             </a:xfrm>
             <a:prstGeom prst="ellipse">
@@ -18818,7 +18818,7 @@
           </p:nvSpPr>
           <p:spPr>
             <a:xfrm>
-              <a:off x="7814086" y="6184430"/>
+              <a:off x="7866509" y="6184085"/>
               <a:ext cx="77571" cy="77571"/>
             </a:xfrm>
             <a:prstGeom prst="ellipse">
@@ -18844,7 +18844,7 @@
           </p:nvSpPr>
           <p:spPr>
             <a:xfrm>
-              <a:off x="7910028" y="6559276"/>
+              <a:off x="7760172" y="6558808"/>
               <a:ext cx="77571" cy="77571"/>
             </a:xfrm>
             <a:prstGeom prst="ellipse">
@@ -18870,7 +18870,7 @@
           </p:nvSpPr>
           <p:spPr>
             <a:xfrm>
-              <a:off x="7906616" y="6402816"/>
+              <a:off x="7633176" y="6402733"/>
               <a:ext cx="77571" cy="77571"/>
             </a:xfrm>
             <a:prstGeom prst="ellipse">
@@ -18896,7 +18896,7 @@
           </p:nvSpPr>
           <p:spPr>
             <a:xfrm>
-              <a:off x="7486829" y="6324637"/>
+              <a:off x="7703352" y="6326413"/>
               <a:ext cx="77571" cy="77571"/>
             </a:xfrm>
             <a:prstGeom prst="ellipse">
@@ -18922,7 +18922,7 @@
           </p:nvSpPr>
           <p:spPr>
             <a:xfrm>
-              <a:off x="7836455" y="6414272"/>
+              <a:off x="7883903" y="6413001"/>
               <a:ext cx="77571" cy="77571"/>
             </a:xfrm>
             <a:prstGeom prst="ellipse">
@@ -18948,7 +18948,7 @@
           </p:nvSpPr>
           <p:spPr>
             <a:xfrm>
-              <a:off x="7642297" y="6370387"/>
+              <a:off x="7915906" y="6369905"/>
               <a:ext cx="77571" cy="77571"/>
             </a:xfrm>
             <a:prstGeom prst="ellipse">
@@ -18974,7 +18974,7 @@
           </p:nvSpPr>
           <p:spPr>
             <a:xfrm>
-              <a:off x="7940029" y="6681310"/>
+              <a:off x="7751807" y="6683227"/>
               <a:ext cx="77571" cy="77571"/>
             </a:xfrm>
             <a:prstGeom prst="ellipse">
@@ -19000,7 +19000,7 @@
           </p:nvSpPr>
           <p:spPr>
             <a:xfrm>
-              <a:off x="7748213" y="6391645"/>
+              <a:off x="7940029" y="6392886"/>
               <a:ext cx="77571" cy="77571"/>
             </a:xfrm>
             <a:prstGeom prst="ellipse">
@@ -19026,7 +19026,7 @@
           </p:nvSpPr>
           <p:spPr>
             <a:xfrm>
-              <a:off x="7697198" y="6411245"/>
+              <a:off x="7764535" y="6411728"/>
               <a:ext cx="77571" cy="77571"/>
             </a:xfrm>
             <a:prstGeom prst="ellipse">
@@ -19052,7 +19052,7 @@
           </p:nvSpPr>
           <p:spPr>
             <a:xfrm>
-              <a:off x="7612538" y="6290606"/>
+              <a:off x="7865849" y="6291789"/>
               <a:ext cx="77571" cy="77571"/>
             </a:xfrm>
             <a:prstGeom prst="ellipse">
@@ -19078,7 +19078,7 @@
           </p:nvSpPr>
           <p:spPr>
             <a:xfrm>
-              <a:off x="7877018" y="6319894"/>
+              <a:off x="7597628" y="6320035"/>
               <a:ext cx="77571" cy="77571"/>
             </a:xfrm>
             <a:prstGeom prst="ellipse">
@@ -19104,7 +19104,7 @@
           </p:nvSpPr>
           <p:spPr>
             <a:xfrm>
-              <a:off x="7868711" y="6698578"/>
+              <a:off x="7829109" y="6697159"/>
               <a:ext cx="77571" cy="77571"/>
             </a:xfrm>
             <a:prstGeom prst="ellipse">
@@ -19130,7 +19130,7 @@
           </p:nvSpPr>
           <p:spPr>
             <a:xfrm>
-              <a:off x="7513641" y="6285528"/>
+              <a:off x="7763848" y="6286160"/>
               <a:ext cx="77571" cy="77571"/>
             </a:xfrm>
             <a:prstGeom prst="ellipse">
@@ -19156,7 +19156,7 @@
           </p:nvSpPr>
           <p:spPr>
             <a:xfrm>
-              <a:off x="7841380" y="6167652"/>
+              <a:off x="7544973" y="6169106"/>
               <a:ext cx="77571" cy="77571"/>
             </a:xfrm>
             <a:prstGeom prst="ellipse">
@@ -19182,7 +19182,7 @@
           </p:nvSpPr>
           <p:spPr>
             <a:xfrm>
-              <a:off x="7880605" y="6198437"/>
+              <a:off x="7843924" y="6198586"/>
               <a:ext cx="77571" cy="77571"/>
             </a:xfrm>
             <a:prstGeom prst="ellipse">
@@ -19208,7 +19208,7 @@
           </p:nvSpPr>
           <p:spPr>
             <a:xfrm>
-              <a:off x="7456054" y="6511480"/>
+              <a:off x="7645449" y="6512294"/>
               <a:ext cx="77571" cy="77571"/>
             </a:xfrm>
             <a:prstGeom prst="ellipse">
@@ -19234,7 +19234,7 @@
           </p:nvSpPr>
           <p:spPr>
             <a:xfrm>
-              <a:off x="7893220" y="6584163"/>
+              <a:off x="7885917" y="6584537"/>
               <a:ext cx="77571" cy="77571"/>
             </a:xfrm>
             <a:prstGeom prst="ellipse">
@@ -19260,42 +19260,42 @@
           </p:nvSpPr>
           <p:spPr>
             <a:xfrm>
-              <a:off x="5166097" y="6194888"/>
-              <a:ext cx="2571101" cy="334718"/>
+              <a:off x="5114639" y="6194906"/>
+              <a:ext cx="2643364" cy="334907"/>
             </a:xfrm>
             <a:custGeom>
               <a:avLst/>
               <a:pathLst>
-                <a:path w="2571101" h="334718">
+                <a:path w="2643364" h="334907">
                   <a:moveTo>
                     <a:pt x="0" y="0"/>
                   </a:moveTo>
                   <a:lnTo>
-                    <a:pt x="1358366" y="68125"/>
+                    <a:pt x="1396544" y="68164"/>
                   </a:lnTo>
                   <a:lnTo>
-                    <a:pt x="1714067" y="66482"/>
+                    <a:pt x="1762243" y="66520"/>
                   </a:lnTo>
                   <a:lnTo>
-                    <a:pt x="2215400" y="49157"/>
+                    <a:pt x="2277666" y="49185"/>
                   </a:lnTo>
                   <a:lnTo>
-                    <a:pt x="2571101" y="29533"/>
+                    <a:pt x="2643364" y="29550"/>
                   </a:lnTo>
                   <a:lnTo>
-                    <a:pt x="2571101" y="324580"/>
+                    <a:pt x="2643364" y="324763"/>
                   </a:lnTo>
                   <a:lnTo>
-                    <a:pt x="2215400" y="302273"/>
+                    <a:pt x="2277666" y="302443"/>
                   </a:lnTo>
                   <a:lnTo>
-                    <a:pt x="1714067" y="281166"/>
+                    <a:pt x="1762243" y="281324"/>
                   </a:lnTo>
                   <a:lnTo>
-                    <a:pt x="1358366" y="276840"/>
+                    <a:pt x="1396544" y="276996"/>
                   </a:lnTo>
                   <a:lnTo>
-                    <a:pt x="0" y="334718"/>
+                    <a:pt x="0" y="334907"/>
                   </a:lnTo>
                   <a:close/>
                 </a:path>
@@ -19321,27 +19321,27 @@
           </p:nvSpPr>
           <p:spPr>
             <a:xfrm>
-              <a:off x="5166097" y="6194888"/>
-              <a:ext cx="2571101" cy="68125"/>
+              <a:off x="5114639" y="6194906"/>
+              <a:ext cx="2643364" cy="68164"/>
             </a:xfrm>
             <a:custGeom>
               <a:avLst/>
               <a:pathLst>
-                <a:path w="2571101" h="68125">
+                <a:path w="2643364" h="68164">
                   <a:moveTo>
                     <a:pt x="0" y="0"/>
                   </a:moveTo>
                   <a:lnTo>
-                    <a:pt x="1358366" y="68125"/>
+                    <a:pt x="1396544" y="68164"/>
                   </a:lnTo>
                   <a:lnTo>
-                    <a:pt x="1714067" y="66482"/>
+                    <a:pt x="1762243" y="66520"/>
                   </a:lnTo>
                   <a:lnTo>
-                    <a:pt x="2215400" y="49157"/>
+                    <a:pt x="2277666" y="49185"/>
                   </a:lnTo>
                   <a:lnTo>
-                    <a:pt x="2571101" y="29533"/>
+                    <a:pt x="2643364" y="29550"/>
                   </a:lnTo>
                 </a:path>
               </a:pathLst>
@@ -19361,27 +19361,27 @@
           </p:nvSpPr>
           <p:spPr>
             <a:xfrm>
-              <a:off x="5166097" y="6471728"/>
-              <a:ext cx="2571101" cy="57878"/>
+              <a:off x="5114639" y="6471902"/>
+              <a:ext cx="2643364" cy="57910"/>
             </a:xfrm>
             <a:custGeom>
               <a:avLst/>
               <a:pathLst>
-                <a:path w="2571101" h="57878">
+                <a:path w="2643364" h="57910">
                   <a:moveTo>
-                    <a:pt x="2571101" y="47740"/>
+                    <a:pt x="2643364" y="47767"/>
                   </a:moveTo>
                   <a:lnTo>
-                    <a:pt x="2215400" y="25433"/>
+                    <a:pt x="2277666" y="25447"/>
                   </a:lnTo>
                   <a:lnTo>
-                    <a:pt x="1714067" y="4326"/>
+                    <a:pt x="1762243" y="4328"/>
                   </a:lnTo>
                   <a:lnTo>
-                    <a:pt x="1358366" y="0"/>
+                    <a:pt x="1396544" y="0"/>
                   </a:lnTo>
                   <a:lnTo>
-                    <a:pt x="0" y="57878"/>
+                    <a:pt x="0" y="57910"/>
                   </a:lnTo>
                 </a:path>
               </a:pathLst>
@@ -19401,27 +19401,27 @@
           </p:nvSpPr>
           <p:spPr>
             <a:xfrm>
-              <a:off x="5166097" y="6362247"/>
-              <a:ext cx="2571101" cy="9698"/>
+              <a:off x="5114639" y="6362359"/>
+              <a:ext cx="2643364" cy="9703"/>
             </a:xfrm>
             <a:custGeom>
               <a:avLst/>
               <a:pathLst>
-                <a:path w="2571101" h="9698">
+                <a:path w="2643364" h="9703">
                   <a:moveTo>
                     <a:pt x="0" y="0"/>
                   </a:moveTo>
                   <a:lnTo>
-                    <a:pt x="1358366" y="5123"/>
+                    <a:pt x="1396544" y="5126"/>
                   </a:lnTo>
                   <a:lnTo>
-                    <a:pt x="1714067" y="6465"/>
+                    <a:pt x="1762243" y="6469"/>
                   </a:lnTo>
                   <a:lnTo>
-                    <a:pt x="2215400" y="8356"/>
+                    <a:pt x="2277666" y="8361"/>
                   </a:lnTo>
                   <a:lnTo>
-                    <a:pt x="2571101" y="9698"/>
+                    <a:pt x="2643364" y="9703"/>
                   </a:lnTo>
                 </a:path>
               </a:pathLst>
@@ -19450,7 +19450,7 @@
           </p:nvSpPr>
           <p:spPr>
             <a:xfrm>
-              <a:off x="7257504" y="5603232"/>
+              <a:off x="7278310" y="5602986"/>
               <a:ext cx="479694" cy="82021"/>
             </a:xfrm>
             <a:prstGeom prst="rect">
@@ -19557,7 +19557,7 @@
           </p:nvSpPr>
           <p:spPr>
             <a:xfrm>
-              <a:off x="4800012" y="6903147"/>
+              <a:off x="4800012" y="6903565"/>
               <a:ext cx="37957" cy="0"/>
             </a:xfrm>
             <a:custGeom>
@@ -19597,7 +19597,7 @@
           </p:nvSpPr>
           <p:spPr>
             <a:xfrm>
-              <a:off x="4800012" y="6611435"/>
+              <a:off x="4800012" y="6611688"/>
               <a:ext cx="37957" cy="0"/>
             </a:xfrm>
             <a:custGeom>
@@ -19637,7 +19637,7 @@
           </p:nvSpPr>
           <p:spPr>
             <a:xfrm>
-              <a:off x="4800012" y="6319722"/>
+              <a:off x="4800012" y="6319811"/>
               <a:ext cx="37957" cy="0"/>
             </a:xfrm>
             <a:custGeom>
@@ -19677,7 +19677,7 @@
           </p:nvSpPr>
           <p:spPr>
             <a:xfrm>
-              <a:off x="4800012" y="6028010"/>
+              <a:off x="4800012" y="6027934"/>
               <a:ext cx="37957" cy="0"/>
             </a:xfrm>
             <a:custGeom>
@@ -19717,7 +19717,7 @@
           </p:nvSpPr>
           <p:spPr>
             <a:xfrm>
-              <a:off x="4800012" y="5736297"/>
+              <a:off x="4800012" y="5736057"/>
               <a:ext cx="37957" cy="0"/>
             </a:xfrm>
             <a:custGeom>
@@ -19757,7 +19757,7 @@
           </p:nvSpPr>
           <p:spPr>
             <a:xfrm>
-              <a:off x="4800012" y="5444585"/>
+              <a:off x="4800012" y="5444180"/>
               <a:ext cx="37957" cy="0"/>
             </a:xfrm>
             <a:custGeom>
@@ -19837,7 +19837,7 @@
           </p:nvSpPr>
           <p:spPr>
             <a:xfrm>
-              <a:off x="5166097" y="6991840"/>
+              <a:off x="5114639" y="6991840"/>
               <a:ext cx="0" cy="37957"/>
             </a:xfrm>
             <a:custGeom>
@@ -19877,7 +19877,7 @@
           </p:nvSpPr>
           <p:spPr>
             <a:xfrm>
-              <a:off x="6023131" y="6991840"/>
+              <a:off x="5995761" y="6991840"/>
               <a:ext cx="0" cy="37957"/>
             </a:xfrm>
             <a:custGeom>
@@ -19917,7 +19917,7 @@
           </p:nvSpPr>
           <p:spPr>
             <a:xfrm>
-              <a:off x="6880165" y="6991840"/>
+              <a:off x="6876882" y="6991840"/>
               <a:ext cx="0" cy="37957"/>
             </a:xfrm>
             <a:custGeom>
@@ -19957,7 +19957,7 @@
           </p:nvSpPr>
           <p:spPr>
             <a:xfrm>
-              <a:off x="7737199" y="6991840"/>
+              <a:off x="7758004" y="6991840"/>
               <a:ext cx="0" cy="37957"/>
             </a:xfrm>
             <a:custGeom>
@@ -19997,7 +19997,7 @@
           </p:nvSpPr>
           <p:spPr>
             <a:xfrm>
-              <a:off x="5127235" y="7060163"/>
+              <a:off x="5075777" y="7060163"/>
               <a:ext cx="77724" cy="100218"/>
             </a:xfrm>
             <a:prstGeom prst="rect">
@@ -20043,7 +20043,7 @@
           </p:nvSpPr>
           <p:spPr>
             <a:xfrm>
-              <a:off x="5984269" y="7060163"/>
+              <a:off x="5956899" y="7060163"/>
               <a:ext cx="77724" cy="100218"/>
             </a:xfrm>
             <a:prstGeom prst="rect">
@@ -20089,7 +20089,7 @@
           </p:nvSpPr>
           <p:spPr>
             <a:xfrm>
-              <a:off x="6841303" y="7060163"/>
+              <a:off x="6838020" y="7060163"/>
               <a:ext cx="77724" cy="100218"/>
             </a:xfrm>
             <a:prstGeom prst="rect">
@@ -20135,7 +20135,7 @@
           </p:nvSpPr>
           <p:spPr>
             <a:xfrm>
-              <a:off x="7698337" y="7060163"/>
+              <a:off x="7719142" y="7060163"/>
               <a:ext cx="77724" cy="100218"/>
             </a:xfrm>
             <a:prstGeom prst="rect">

--- a/figures/Figure_1.pptx
+++ b/figures/Figure_1.pptx
@@ -2515,7 +2515,7 @@
           </p:nvSpPr>
           <p:spPr>
             <a:xfrm>
-              <a:off x="1535481" y="2516369"/>
+              <a:off x="1564307" y="2516442"/>
               <a:ext cx="77571" cy="77571"/>
             </a:xfrm>
             <a:prstGeom prst="ellipse">
@@ -2541,7 +2541,7 @@
           </p:nvSpPr>
           <p:spPr>
             <a:xfrm>
-              <a:off x="1631569" y="2437283"/>
+              <a:off x="1639136" y="2437244"/>
               <a:ext cx="77571" cy="77571"/>
             </a:xfrm>
             <a:prstGeom prst="ellipse">
@@ -2567,7 +2567,7 @@
           </p:nvSpPr>
           <p:spPr>
             <a:xfrm>
-              <a:off x="1672001" y="2556577"/>
+              <a:off x="1582367" y="2556743"/>
               <a:ext cx="77571" cy="77571"/>
             </a:xfrm>
             <a:prstGeom prst="ellipse">
@@ -2593,7 +2593,7 @@
           </p:nvSpPr>
           <p:spPr>
             <a:xfrm>
-              <a:off x="1702827" y="2553287"/>
+              <a:off x="1736416" y="2553306"/>
               <a:ext cx="77571" cy="77571"/>
             </a:xfrm>
             <a:prstGeom prst="ellipse">
@@ -2619,7 +2619,7 @@
           </p:nvSpPr>
           <p:spPr>
             <a:xfrm>
-              <a:off x="1533548" y="2582705"/>
+              <a:off x="1519161" y="2582720"/>
               <a:ext cx="77571" cy="77571"/>
             </a:xfrm>
             <a:prstGeom prst="ellipse">
@@ -2645,7 +2645,7 @@
           </p:nvSpPr>
           <p:spPr>
             <a:xfrm>
-              <a:off x="1683809" y="2415401"/>
+              <a:off x="1654605" y="2415472"/>
               <a:ext cx="77571" cy="77571"/>
             </a:xfrm>
             <a:prstGeom prst="ellipse">
@@ -2671,7 +2671,7 @@
           </p:nvSpPr>
           <p:spPr>
             <a:xfrm>
-              <a:off x="1688015" y="2322231"/>
+              <a:off x="1520704" y="2322306"/>
               <a:ext cx="77571" cy="77571"/>
             </a:xfrm>
             <a:prstGeom prst="ellipse">
@@ -2697,7 +2697,7 @@
           </p:nvSpPr>
           <p:spPr>
             <a:xfrm>
-              <a:off x="1545070" y="2534950"/>
+              <a:off x="1596724" y="2535093"/>
               <a:ext cx="77571" cy="77571"/>
             </a:xfrm>
             <a:prstGeom prst="ellipse">
@@ -2723,7 +2723,7 @@
           </p:nvSpPr>
           <p:spPr>
             <a:xfrm>
-              <a:off x="1551456" y="2616069"/>
+              <a:off x="1590097" y="2616160"/>
               <a:ext cx="77571" cy="77571"/>
             </a:xfrm>
             <a:prstGeom prst="ellipse">
@@ -2749,7 +2749,7 @@
           </p:nvSpPr>
           <p:spPr>
             <a:xfrm>
-              <a:off x="1519161" y="2392396"/>
+              <a:off x="1723524" y="2392350"/>
               <a:ext cx="77571" cy="77571"/>
             </a:xfrm>
             <a:prstGeom prst="ellipse">
@@ -2775,7 +2775,7 @@
           </p:nvSpPr>
           <p:spPr>
             <a:xfrm>
-              <a:off x="2487865" y="2625585"/>
+              <a:off x="2631339" y="2625613"/>
               <a:ext cx="77571" cy="77571"/>
             </a:xfrm>
             <a:prstGeom prst="ellipse">
@@ -2801,7 +2801,7 @@
           </p:nvSpPr>
           <p:spPr>
             <a:xfrm>
-              <a:off x="2501207" y="2554085"/>
+              <a:off x="2573056" y="2554089"/>
               <a:ext cx="77571" cy="77571"/>
             </a:xfrm>
             <a:prstGeom prst="ellipse">
@@ -2827,7 +2827,7 @@
           </p:nvSpPr>
           <p:spPr>
             <a:xfrm>
-              <a:off x="2466881" y="1874081"/>
+              <a:off x="2449199" y="1874060"/>
               <a:ext cx="77571" cy="77571"/>
             </a:xfrm>
             <a:prstGeom prst="ellipse">
@@ -2853,7 +2853,7 @@
           </p:nvSpPr>
           <p:spPr>
             <a:xfrm>
-              <a:off x="2629379" y="2463246"/>
+              <a:off x="2681361" y="2463322"/>
               <a:ext cx="77571" cy="77571"/>
             </a:xfrm>
             <a:prstGeom prst="ellipse">
@@ -2879,7 +2879,7 @@
           </p:nvSpPr>
           <p:spPr>
             <a:xfrm>
-              <a:off x="2618949" y="2547174"/>
+              <a:off x="2539050" y="2547224"/>
               <a:ext cx="77571" cy="77571"/>
             </a:xfrm>
             <a:prstGeom prst="ellipse">
@@ -2905,7 +2905,7 @@
           </p:nvSpPr>
           <p:spPr>
             <a:xfrm>
-              <a:off x="2475449" y="2619326"/>
+              <a:off x="2456739" y="2619373"/>
               <a:ext cx="77571" cy="77571"/>
             </a:xfrm>
             <a:prstGeom prst="ellipse">
@@ -2931,7 +2931,7 @@
           </p:nvSpPr>
           <p:spPr>
             <a:xfrm>
-              <a:off x="2479800" y="2648423"/>
+              <a:off x="2631492" y="2648572"/>
               <a:ext cx="77571" cy="77571"/>
             </a:xfrm>
             <a:prstGeom prst="ellipse">
@@ -2957,7 +2957,7 @@
           </p:nvSpPr>
           <p:spPr>
             <a:xfrm>
-              <a:off x="2642117" y="2454055"/>
+              <a:off x="2440638" y="2454002"/>
               <a:ext cx="77571" cy="77571"/>
             </a:xfrm>
             <a:prstGeom prst="ellipse">
@@ -2983,7 +2983,7 @@
           </p:nvSpPr>
           <p:spPr>
             <a:xfrm>
-              <a:off x="2627935" y="1732533"/>
+              <a:off x="2480700" y="1732557"/>
               <a:ext cx="77571" cy="77571"/>
             </a:xfrm>
             <a:prstGeom prst="ellipse">
@@ -3009,7 +3009,7 @@
           </p:nvSpPr>
           <p:spPr>
             <a:xfrm>
-              <a:off x="2627544" y="1942924"/>
+              <a:off x="2470612" y="1942988"/>
               <a:ext cx="77571" cy="77571"/>
             </a:xfrm>
             <a:prstGeom prst="ellipse">
@@ -3035,7 +3035,7 @@
           </p:nvSpPr>
           <p:spPr>
             <a:xfrm>
-              <a:off x="2587651" y="2637867"/>
+              <a:off x="2464143" y="2637940"/>
               <a:ext cx="77571" cy="77571"/>
             </a:xfrm>
             <a:prstGeom prst="ellipse">
@@ -3061,7 +3061,7 @@
           </p:nvSpPr>
           <p:spPr>
             <a:xfrm>
-              <a:off x="2534636" y="2409111"/>
+              <a:off x="2554162" y="2409196"/>
               <a:ext cx="77571" cy="77571"/>
             </a:xfrm>
             <a:prstGeom prst="ellipse">
@@ -3087,7 +3087,7 @@
           </p:nvSpPr>
           <p:spPr>
             <a:xfrm>
-              <a:off x="2582222" y="2345861"/>
+              <a:off x="2476046" y="2345957"/>
               <a:ext cx="77571" cy="77571"/>
             </a:xfrm>
             <a:prstGeom prst="ellipse">
@@ -3113,7 +3113,7 @@
           </p:nvSpPr>
           <p:spPr>
             <a:xfrm>
-              <a:off x="2549358" y="2356928"/>
+              <a:off x="2682501" y="2356904"/>
               <a:ext cx="77571" cy="77571"/>
             </a:xfrm>
             <a:prstGeom prst="ellipse">
@@ -3139,7 +3139,7 @@
           </p:nvSpPr>
           <p:spPr>
             <a:xfrm>
-              <a:off x="2482464" y="2539289"/>
+              <a:off x="2649567" y="2539438"/>
               <a:ext cx="77571" cy="77571"/>
             </a:xfrm>
             <a:prstGeom prst="ellipse">
@@ -3165,7 +3165,7 @@
           </p:nvSpPr>
           <p:spPr>
             <a:xfrm>
-              <a:off x="2458980" y="2471705"/>
+              <a:off x="2430737" y="2471801"/>
               <a:ext cx="77571" cy="77571"/>
             </a:xfrm>
             <a:prstGeom prst="ellipse">
@@ -3191,7 +3191,7 @@
           </p:nvSpPr>
           <p:spPr>
             <a:xfrm>
-              <a:off x="2452314" y="1933897"/>
+              <a:off x="2618199" y="1933908"/>
               <a:ext cx="77571" cy="77571"/>
             </a:xfrm>
             <a:prstGeom prst="ellipse">
@@ -3217,7 +3217,7 @@
           </p:nvSpPr>
           <p:spPr>
             <a:xfrm>
-              <a:off x="2447780" y="2087755"/>
+              <a:off x="2491815" y="2087883"/>
               <a:ext cx="77571" cy="77571"/>
             </a:xfrm>
             <a:prstGeom prst="ellipse">
@@ -3243,7 +3243,7 @@
           </p:nvSpPr>
           <p:spPr>
             <a:xfrm>
-              <a:off x="3489196" y="2579848"/>
+              <a:off x="3556694" y="2579961"/>
               <a:ext cx="77571" cy="77571"/>
             </a:xfrm>
             <a:prstGeom prst="ellipse">
@@ -3269,7 +3269,7 @@
           </p:nvSpPr>
           <p:spPr>
             <a:xfrm>
-              <a:off x="3510815" y="2335019"/>
+              <a:off x="3361012" y="2335030"/>
               <a:ext cx="77571" cy="77571"/>
             </a:xfrm>
             <a:prstGeom prst="ellipse">
@@ -3295,7 +3295,7 @@
           </p:nvSpPr>
           <p:spPr>
             <a:xfrm>
-              <a:off x="3375469" y="2594096"/>
+              <a:off x="3538715" y="2594117"/>
               <a:ext cx="77571" cy="77571"/>
             </a:xfrm>
             <a:prstGeom prst="ellipse">
@@ -3321,7 +3321,7 @@
           </p:nvSpPr>
           <p:spPr>
             <a:xfrm>
-              <a:off x="3358255" y="2695776"/>
+              <a:off x="3467978" y="2695776"/>
               <a:ext cx="77571" cy="77571"/>
             </a:xfrm>
             <a:prstGeom prst="ellipse">
@@ -3347,7 +3347,7 @@
           </p:nvSpPr>
           <p:spPr>
             <a:xfrm>
-              <a:off x="3408589" y="2409087"/>
+              <a:off x="3506256" y="2409159"/>
               <a:ext cx="77571" cy="77571"/>
             </a:xfrm>
             <a:prstGeom prst="ellipse">
@@ -3373,7 +3373,7 @@
           </p:nvSpPr>
           <p:spPr>
             <a:xfrm>
-              <a:off x="3567737" y="2568077"/>
+              <a:off x="3504978" y="2568145"/>
               <a:ext cx="77571" cy="77571"/>
             </a:xfrm>
             <a:prstGeom prst="ellipse">
@@ -3399,7 +3399,7 @@
           </p:nvSpPr>
           <p:spPr>
             <a:xfrm>
-              <a:off x="3588197" y="1538186"/>
+              <a:off x="3599912" y="1538133"/>
               <a:ext cx="77571" cy="77571"/>
             </a:xfrm>
             <a:prstGeom prst="ellipse">
@@ -3425,7 +3425,7 @@
           </p:nvSpPr>
           <p:spPr>
             <a:xfrm>
-              <a:off x="3466743" y="2619454"/>
+              <a:off x="3537270" y="2619521"/>
               <a:ext cx="77571" cy="77571"/>
             </a:xfrm>
             <a:prstGeom prst="ellipse">
@@ -3451,7 +3451,7 @@
           </p:nvSpPr>
           <p:spPr>
             <a:xfrm>
-              <a:off x="3581563" y="2232914"/>
+              <a:off x="3420705" y="2233049"/>
               <a:ext cx="77571" cy="77571"/>
             </a:xfrm>
             <a:prstGeom prst="ellipse">
@@ -3477,7 +3477,7 @@
           </p:nvSpPr>
           <p:spPr>
             <a:xfrm>
-              <a:off x="3509214" y="1857786"/>
+              <a:off x="3347993" y="1857954"/>
               <a:ext cx="77571" cy="77571"/>
             </a:xfrm>
             <a:prstGeom prst="ellipse">
@@ -3503,7 +3503,7 @@
           </p:nvSpPr>
           <p:spPr>
             <a:xfrm>
-              <a:off x="3364528" y="1242069"/>
+              <a:off x="3555126" y="1242069"/>
               <a:ext cx="77571" cy="77571"/>
             </a:xfrm>
             <a:prstGeom prst="ellipse">
@@ -3529,7 +3529,7 @@
           </p:nvSpPr>
           <p:spPr>
             <a:xfrm>
-              <a:off x="3472172" y="2120292"/>
+              <a:off x="3434885" y="2120342"/>
               <a:ext cx="77571" cy="77571"/>
             </a:xfrm>
             <a:prstGeom prst="ellipse">
@@ -3555,7 +3555,7 @@
           </p:nvSpPr>
           <p:spPr>
             <a:xfrm>
-              <a:off x="3379646" y="2306850"/>
+              <a:off x="3366392" y="2306897"/>
               <a:ext cx="77571" cy="77571"/>
             </a:xfrm>
             <a:prstGeom prst="ellipse">
@@ -3581,7 +3581,7 @@
           </p:nvSpPr>
           <p:spPr>
             <a:xfrm>
-              <a:off x="3555461" y="2149179"/>
+              <a:off x="3488917" y="2149344"/>
               <a:ext cx="77571" cy="77571"/>
             </a:xfrm>
             <a:prstGeom prst="ellipse">
@@ -3607,7 +3607,7 @@
           </p:nvSpPr>
           <p:spPr>
             <a:xfrm>
-              <a:off x="3509786" y="2277737"/>
+              <a:off x="3574629" y="2277786"/>
               <a:ext cx="77571" cy="77571"/>
             </a:xfrm>
             <a:prstGeom prst="ellipse">
@@ -3633,7 +3633,7 @@
           </p:nvSpPr>
           <p:spPr>
             <a:xfrm>
-              <a:off x="3591836" y="2448868"/>
+              <a:off x="3438392" y="2448937"/>
               <a:ext cx="77571" cy="77571"/>
             </a:xfrm>
             <a:prstGeom prst="ellipse">
@@ -3659,7 +3659,7 @@
           </p:nvSpPr>
           <p:spPr>
             <a:xfrm>
-              <a:off x="3340175" y="2350995"/>
+              <a:off x="3503845" y="2350999"/>
               <a:ext cx="77571" cy="77571"/>
             </a:xfrm>
             <a:prstGeom prst="ellipse">
@@ -3685,7 +3685,7 @@
           </p:nvSpPr>
           <p:spPr>
             <a:xfrm>
-              <a:off x="3476147" y="2334582"/>
+              <a:off x="3357636" y="2334711"/>
               <a:ext cx="77571" cy="77571"/>
             </a:xfrm>
             <a:prstGeom prst="ellipse">
@@ -3711,7 +3711,7 @@
           </p:nvSpPr>
           <p:spPr>
             <a:xfrm>
-              <a:off x="3594838" y="2447296"/>
+              <a:off x="3546054" y="2447417"/>
               <a:ext cx="77571" cy="77571"/>
             </a:xfrm>
             <a:prstGeom prst="ellipse">
@@ -3737,7 +3737,7 @@
           </p:nvSpPr>
           <p:spPr>
             <a:xfrm>
-              <a:off x="3425370" y="2435457"/>
+              <a:off x="3528951" y="2435535"/>
               <a:ext cx="77571" cy="77571"/>
             </a:xfrm>
             <a:prstGeom prst="ellipse">
@@ -3763,7 +3763,7 @@
           </p:nvSpPr>
           <p:spPr>
             <a:xfrm>
-              <a:off x="4425710" y="2454937"/>
+              <a:off x="4284130" y="2454976"/>
               <a:ext cx="77571" cy="77571"/>
             </a:xfrm>
             <a:prstGeom prst="ellipse">
@@ -3789,7 +3789,7 @@
           </p:nvSpPr>
           <p:spPr>
             <a:xfrm>
-              <a:off x="4327539" y="2452479"/>
+              <a:off x="4467991" y="2452480"/>
               <a:ext cx="77571" cy="77571"/>
             </a:xfrm>
             <a:prstGeom prst="ellipse">
@@ -3815,7 +3815,7 @@
           </p:nvSpPr>
           <p:spPr>
             <a:xfrm>
-              <a:off x="4281517" y="2403528"/>
+              <a:off x="4363178" y="2403680"/>
               <a:ext cx="77571" cy="77571"/>
             </a:xfrm>
             <a:prstGeom prst="ellipse">
@@ -3841,7 +3841,7 @@
           </p:nvSpPr>
           <p:spPr>
             <a:xfrm>
-              <a:off x="4292025" y="2558233"/>
+              <a:off x="4325924" y="2558315"/>
               <a:ext cx="77571" cy="77571"/>
             </a:xfrm>
             <a:prstGeom prst="ellipse">
@@ -3867,7 +3867,7 @@
           </p:nvSpPr>
           <p:spPr>
             <a:xfrm>
-              <a:off x="4491537" y="2141573"/>
+              <a:off x="4325495" y="2141550"/>
               <a:ext cx="77571" cy="77571"/>
             </a:xfrm>
             <a:prstGeom prst="ellipse">
@@ -3893,7 +3893,7 @@
           </p:nvSpPr>
           <p:spPr>
             <a:xfrm>
-              <a:off x="4266096" y="2161871"/>
+              <a:off x="4363113" y="2161837"/>
               <a:ext cx="77571" cy="77571"/>
             </a:xfrm>
             <a:prstGeom prst="ellipse">
@@ -3919,7 +3919,7 @@
           </p:nvSpPr>
           <p:spPr>
             <a:xfrm>
-              <a:off x="4510442" y="2406115"/>
+              <a:off x="4470422" y="2406157"/>
               <a:ext cx="77571" cy="77571"/>
             </a:xfrm>
             <a:prstGeom prst="ellipse">
@@ -3945,7 +3945,7 @@
           </p:nvSpPr>
           <p:spPr>
             <a:xfrm>
-              <a:off x="4468439" y="2321257"/>
+              <a:off x="4510442" y="2321284"/>
               <a:ext cx="77571" cy="77571"/>
             </a:xfrm>
             <a:prstGeom prst="ellipse">
@@ -3971,7 +3971,7 @@
           </p:nvSpPr>
           <p:spPr>
             <a:xfrm>
-              <a:off x="4506443" y="2221108"/>
+              <a:off x="4305953" y="2221151"/>
               <a:ext cx="77571" cy="77571"/>
             </a:xfrm>
             <a:prstGeom prst="ellipse">
@@ -3997,7 +3997,7 @@
           </p:nvSpPr>
           <p:spPr>
             <a:xfrm>
-              <a:off x="4252106" y="1968728"/>
+              <a:off x="4322737" y="1968804"/>
               <a:ext cx="77571" cy="77571"/>
             </a:xfrm>
             <a:prstGeom prst="ellipse">
@@ -4023,7 +4023,7 @@
           </p:nvSpPr>
           <p:spPr>
             <a:xfrm>
-              <a:off x="4354604" y="2043508"/>
+              <a:off x="4316910" y="2043545"/>
               <a:ext cx="77571" cy="77571"/>
             </a:xfrm>
             <a:prstGeom prst="ellipse">
@@ -4049,7 +4049,7 @@
           </p:nvSpPr>
           <p:spPr>
             <a:xfrm>
-              <a:off x="4256600" y="1890216"/>
+              <a:off x="4487263" y="1890297"/>
               <a:ext cx="77571" cy="77571"/>
             </a:xfrm>
             <a:prstGeom prst="ellipse">
@@ -4075,7 +4075,7 @@
           </p:nvSpPr>
           <p:spPr>
             <a:xfrm>
-              <a:off x="4392495" y="2150204"/>
+              <a:off x="4381034" y="2150332"/>
               <a:ext cx="77571" cy="77571"/>
             </a:xfrm>
             <a:prstGeom prst="ellipse">
@@ -4101,7 +4101,7 @@
           </p:nvSpPr>
           <p:spPr>
             <a:xfrm>
-              <a:off x="4335959" y="2076922"/>
+              <a:off x="4396701" y="2076939"/>
               <a:ext cx="77571" cy="77571"/>
             </a:xfrm>
             <a:prstGeom prst="ellipse">
@@ -4127,7 +4127,7 @@
           </p:nvSpPr>
           <p:spPr>
             <a:xfrm>
-              <a:off x="4297330" y="2522680"/>
+              <a:off x="4429893" y="2522852"/>
               <a:ext cx="77571" cy="77571"/>
             </a:xfrm>
             <a:prstGeom prst="ellipse">
@@ -4153,7 +4153,7 @@
           </p:nvSpPr>
           <p:spPr>
             <a:xfrm>
-              <a:off x="4498010" y="2340130"/>
+              <a:off x="4355488" y="2340176"/>
               <a:ext cx="77571" cy="77571"/>
             </a:xfrm>
             <a:prstGeom prst="ellipse">
@@ -4179,7 +4179,7 @@
           </p:nvSpPr>
           <p:spPr>
             <a:xfrm>
-              <a:off x="4483590" y="2236631"/>
+              <a:off x="4381811" y="2236711"/>
               <a:ext cx="77571" cy="77571"/>
             </a:xfrm>
             <a:prstGeom prst="ellipse">
@@ -4205,7 +4205,7 @@
           </p:nvSpPr>
           <p:spPr>
             <a:xfrm>
-              <a:off x="4273413" y="2304785"/>
+              <a:off x="4472437" y="2304967"/>
               <a:ext cx="77571" cy="77571"/>
             </a:xfrm>
             <a:prstGeom prst="ellipse">
@@ -4231,7 +4231,7 @@
           </p:nvSpPr>
           <p:spPr>
             <a:xfrm>
-              <a:off x="4330331" y="2016721"/>
+              <a:off x="4439694" y="2016775"/>
               <a:ext cx="77571" cy="77571"/>
             </a:xfrm>
             <a:prstGeom prst="ellipse">
@@ -4257,7 +4257,7 @@
           </p:nvSpPr>
           <p:spPr>
             <a:xfrm>
-              <a:off x="4323667" y="2272536"/>
+              <a:off x="4342687" y="2272561"/>
               <a:ext cx="77571" cy="77571"/>
             </a:xfrm>
             <a:prstGeom prst="ellipse">
@@ -4283,7 +4283,7 @@
           </p:nvSpPr>
           <p:spPr>
             <a:xfrm>
-              <a:off x="4413069" y="2122399"/>
+              <a:off x="4315429" y="2122577"/>
               <a:ext cx="77571" cy="77571"/>
             </a:xfrm>
             <a:prstGeom prst="ellipse">
@@ -4309,7 +4309,7 @@
           </p:nvSpPr>
           <p:spPr>
             <a:xfrm>
-              <a:off x="4266949" y="1998666"/>
+              <a:off x="4326322" y="1998834"/>
               <a:ext cx="77571" cy="77571"/>
             </a:xfrm>
             <a:prstGeom prst="ellipse">
@@ -4335,7 +4335,7 @@
           </p:nvSpPr>
           <p:spPr>
             <a:xfrm>
-              <a:off x="4306445" y="2184631"/>
+              <a:off x="4350470" y="2184777"/>
               <a:ext cx="77571" cy="77571"/>
             </a:xfrm>
             <a:prstGeom prst="ellipse">
@@ -4361,7 +4361,7 @@
           </p:nvSpPr>
           <p:spPr>
             <a:xfrm>
-              <a:off x="4450479" y="2150965"/>
+              <a:off x="4325482" y="2151131"/>
               <a:ext cx="77571" cy="77571"/>
             </a:xfrm>
             <a:prstGeom prst="ellipse">
@@ -4387,42 +4387,42 @@
           </p:nvSpPr>
           <p:spPr>
             <a:xfrm>
-              <a:off x="1668508" y="2055838"/>
-              <a:ext cx="2753301" cy="627947"/>
+              <a:off x="1684045" y="2055912"/>
+              <a:ext cx="2737260" cy="627946"/>
             </a:xfrm>
             <a:custGeom>
               <a:avLst/>
               <a:pathLst>
-                <a:path w="2753301" h="627947">
+                <a:path w="2737260" h="627946">
                   <a:moveTo>
                     <a:pt x="0" y="178221"/>
                   </a:moveTo>
                   <a:lnTo>
-                    <a:pt x="1454626" y="171036"/>
+                    <a:pt x="1446151" y="171035"/>
                   </a:lnTo>
                   <a:lnTo>
-                    <a:pt x="1835534" y="135950"/>
+                    <a:pt x="1824840" y="135950"/>
                   </a:lnTo>
                   <a:lnTo>
-                    <a:pt x="2372393" y="62380"/>
+                    <a:pt x="2358571" y="62380"/>
                   </a:lnTo>
                   <a:lnTo>
-                    <a:pt x="2753301" y="0"/>
+                    <a:pt x="2737260" y="0"/>
                   </a:lnTo>
                   <a:lnTo>
-                    <a:pt x="2753301" y="406931"/>
+                    <a:pt x="2737260" y="406931"/>
                   </a:lnTo>
                   <a:lnTo>
-                    <a:pt x="2372393" y="399783"/>
+                    <a:pt x="2358571" y="399783"/>
                   </a:lnTo>
                   <a:lnTo>
-                    <a:pt x="1835534" y="404060"/>
+                    <a:pt x="1824840" y="404059"/>
                   </a:lnTo>
                   <a:lnTo>
-                    <a:pt x="1454626" y="424207"/>
+                    <a:pt x="1446151" y="424207"/>
                   </a:lnTo>
                   <a:lnTo>
-                    <a:pt x="0" y="627947"/>
+                    <a:pt x="0" y="627946"/>
                   </a:lnTo>
                   <a:close/>
                 </a:path>
@@ -4448,27 +4448,27 @@
           </p:nvSpPr>
           <p:spPr>
             <a:xfrm>
-              <a:off x="1668508" y="2055838"/>
-              <a:ext cx="2753301" cy="178221"/>
+              <a:off x="1684045" y="2055912"/>
+              <a:ext cx="2737260" cy="178221"/>
             </a:xfrm>
             <a:custGeom>
               <a:avLst/>
               <a:pathLst>
-                <a:path w="2753301" h="178221">
+                <a:path w="2737260" h="178221">
                   <a:moveTo>
                     <a:pt x="0" y="178221"/>
                   </a:moveTo>
                   <a:lnTo>
-                    <a:pt x="1454626" y="171036"/>
+                    <a:pt x="1446151" y="171035"/>
                   </a:lnTo>
                   <a:lnTo>
-                    <a:pt x="1835534" y="135950"/>
+                    <a:pt x="1824840" y="135950"/>
                   </a:lnTo>
                   <a:lnTo>
-                    <a:pt x="2372393" y="62380"/>
+                    <a:pt x="2358571" y="62380"/>
                   </a:lnTo>
                   <a:lnTo>
-                    <a:pt x="2753301" y="0"/>
+                    <a:pt x="2737260" y="0"/>
                   </a:lnTo>
                 </a:path>
               </a:pathLst>
@@ -4488,24 +4488,24 @@
           </p:nvSpPr>
           <p:spPr>
             <a:xfrm>
-              <a:off x="1668508" y="2455622"/>
-              <a:ext cx="2753301" cy="228163"/>
+              <a:off x="1684045" y="2455695"/>
+              <a:ext cx="2737260" cy="228163"/>
             </a:xfrm>
             <a:custGeom>
               <a:avLst/>
               <a:pathLst>
-                <a:path w="2753301" h="228163">
+                <a:path w="2737260" h="228163">
                   <a:moveTo>
-                    <a:pt x="2753301" y="7147"/>
+                    <a:pt x="2737260" y="7147"/>
                   </a:moveTo>
                   <a:lnTo>
-                    <a:pt x="2372393" y="0"/>
+                    <a:pt x="2358571" y="0"/>
                   </a:lnTo>
                   <a:lnTo>
-                    <a:pt x="1835534" y="4276"/>
+                    <a:pt x="1824840" y="4276"/>
                   </a:lnTo>
                   <a:lnTo>
-                    <a:pt x="1454626" y="24423"/>
+                    <a:pt x="1446151" y="24423"/>
                   </a:lnTo>
                   <a:lnTo>
                     <a:pt x="0" y="228163"/>
@@ -4528,27 +4528,27 @@
           </p:nvSpPr>
           <p:spPr>
             <a:xfrm>
-              <a:off x="1668508" y="2259304"/>
-              <a:ext cx="2753301" cy="199618"/>
+              <a:off x="1684045" y="2259377"/>
+              <a:ext cx="2737260" cy="199618"/>
             </a:xfrm>
             <a:custGeom>
               <a:avLst/>
               <a:pathLst>
-                <a:path w="2753301" h="199618">
+                <a:path w="2737260" h="199618">
                   <a:moveTo>
                     <a:pt x="0" y="199618"/>
                   </a:moveTo>
                   <a:lnTo>
-                    <a:pt x="1454626" y="94156"/>
+                    <a:pt x="1446151" y="94155"/>
                   </a:lnTo>
                   <a:lnTo>
-                    <a:pt x="1835534" y="66539"/>
+                    <a:pt x="1824840" y="66539"/>
                   </a:lnTo>
                   <a:lnTo>
-                    <a:pt x="2372393" y="27616"/>
+                    <a:pt x="2358571" y="27616"/>
                   </a:lnTo>
                   <a:lnTo>
-                    <a:pt x="2753301" y="0"/>
+                    <a:pt x="2737260" y="0"/>
                   </a:lnTo>
                 </a:path>
               </a:pathLst>
@@ -4577,7 +4577,7 @@
           </p:nvSpPr>
           <p:spPr>
             <a:xfrm>
-              <a:off x="3942116" y="1344153"/>
+              <a:off x="3941611" y="1344227"/>
               <a:ext cx="479694" cy="82021"/>
             </a:xfrm>
             <a:prstGeom prst="rect">
@@ -4684,7 +4684,7 @@
           </p:nvSpPr>
           <p:spPr>
             <a:xfrm rot="-5400000">
-              <a:off x="1177387" y="2461090"/>
+              <a:off x="1177387" y="2461163"/>
               <a:ext cx="194218" cy="100218"/>
             </a:xfrm>
             <a:prstGeom prst="rect">
@@ -4730,7 +4730,7 @@
           </p:nvSpPr>
           <p:spPr>
             <a:xfrm rot="-5400000">
-              <a:off x="1177387" y="2026792"/>
+              <a:off x="1177387" y="2026865"/>
               <a:ext cx="194218" cy="100218"/>
             </a:xfrm>
             <a:prstGeom prst="rect">
@@ -4776,7 +4776,7 @@
           </p:nvSpPr>
           <p:spPr>
             <a:xfrm rot="-5400000">
-              <a:off x="1177387" y="1592493"/>
+              <a:off x="1177387" y="1592567"/>
               <a:ext cx="194218" cy="100218"/>
             </a:xfrm>
             <a:prstGeom prst="rect">
@@ -4822,7 +4822,7 @@
           </p:nvSpPr>
           <p:spPr>
             <a:xfrm rot="-5400000">
-              <a:off x="1138525" y="1158194"/>
+              <a:off x="1138525" y="1158269"/>
               <a:ext cx="271942" cy="100218"/>
             </a:xfrm>
             <a:prstGeom prst="rect">
@@ -4868,7 +4868,7 @@
           </p:nvSpPr>
           <p:spPr>
             <a:xfrm>
-              <a:off x="1370425" y="2511199"/>
+              <a:off x="1370425" y="2511272"/>
               <a:ext cx="37957" cy="0"/>
             </a:xfrm>
             <a:custGeom>
@@ -4908,7 +4908,7 @@
           </p:nvSpPr>
           <p:spPr>
             <a:xfrm>
-              <a:off x="1370425" y="2076901"/>
+              <a:off x="1370425" y="2076974"/>
               <a:ext cx="37957" cy="0"/>
             </a:xfrm>
             <a:custGeom>
@@ -4948,7 +4948,7 @@
           </p:nvSpPr>
           <p:spPr>
             <a:xfrm>
-              <a:off x="1370425" y="1642602"/>
+              <a:off x="1370425" y="1642676"/>
               <a:ext cx="37957" cy="0"/>
             </a:xfrm>
             <a:custGeom>
@@ -4988,7 +4988,7 @@
           </p:nvSpPr>
           <p:spPr>
             <a:xfrm>
-              <a:off x="1370425" y="1208304"/>
+              <a:off x="1370425" y="1208378"/>
               <a:ext cx="37957" cy="0"/>
             </a:xfrm>
             <a:custGeom>
@@ -5068,7 +5068,7 @@
           </p:nvSpPr>
           <p:spPr>
             <a:xfrm>
-              <a:off x="1668508" y="2807247"/>
+              <a:off x="1684045" y="2807247"/>
               <a:ext cx="0" cy="37957"/>
             </a:xfrm>
             <a:custGeom>
@@ -5108,7 +5108,7 @@
           </p:nvSpPr>
           <p:spPr>
             <a:xfrm>
-              <a:off x="2586276" y="2807247"/>
+              <a:off x="2596465" y="2807247"/>
               <a:ext cx="0" cy="37957"/>
             </a:xfrm>
             <a:custGeom>
@@ -5148,7 +5148,7 @@
           </p:nvSpPr>
           <p:spPr>
             <a:xfrm>
-              <a:off x="3504043" y="2807247"/>
+              <a:off x="3508885" y="2807247"/>
               <a:ext cx="0" cy="37957"/>
             </a:xfrm>
             <a:custGeom>
@@ -5188,7 +5188,7 @@
           </p:nvSpPr>
           <p:spPr>
             <a:xfrm>
-              <a:off x="4421810" y="2807247"/>
+              <a:off x="4421306" y="2807247"/>
               <a:ext cx="0" cy="37957"/>
             </a:xfrm>
             <a:custGeom>
@@ -5228,7 +5228,7 @@
           </p:nvSpPr>
           <p:spPr>
             <a:xfrm>
-              <a:off x="1629646" y="2875571"/>
+              <a:off x="1645183" y="2875571"/>
               <a:ext cx="77724" cy="100218"/>
             </a:xfrm>
             <a:prstGeom prst="rect">
@@ -5274,7 +5274,7 @@
           </p:nvSpPr>
           <p:spPr>
             <a:xfrm>
-              <a:off x="2547414" y="2875571"/>
+              <a:off x="2557603" y="2875571"/>
               <a:ext cx="77724" cy="100218"/>
             </a:xfrm>
             <a:prstGeom prst="rect">
@@ -5320,7 +5320,7 @@
           </p:nvSpPr>
           <p:spPr>
             <a:xfrm>
-              <a:off x="3465181" y="2875571"/>
+              <a:off x="3470023" y="2875571"/>
               <a:ext cx="77724" cy="100218"/>
             </a:xfrm>
             <a:prstGeom prst="rect">
@@ -5366,7 +5366,7 @@
           </p:nvSpPr>
           <p:spPr>
             <a:xfrm>
-              <a:off x="4382948" y="2875571"/>
+              <a:off x="4382444" y="2875571"/>
               <a:ext cx="77724" cy="100218"/>
             </a:xfrm>
             <a:prstGeom prst="rect">
@@ -5530,7 +5530,7 @@
           </p:nvSpPr>
           <p:spPr>
             <a:xfrm>
-              <a:off x="4968288" y="2362924"/>
+              <a:off x="4972543" y="2362980"/>
               <a:ext cx="77571" cy="77571"/>
             </a:xfrm>
             <a:prstGeom prst="ellipse">
@@ -5556,7 +5556,7 @@
           </p:nvSpPr>
           <p:spPr>
             <a:xfrm>
-              <a:off x="4948748" y="1486472"/>
+              <a:off x="5057484" y="1486393"/>
               <a:ext cx="77571" cy="77571"/>
             </a:xfrm>
             <a:prstGeom prst="ellipse">
@@ -5582,7 +5582,7 @@
           </p:nvSpPr>
           <p:spPr>
             <a:xfrm>
-              <a:off x="5046954" y="2354545"/>
+              <a:off x="4975459" y="2354516"/>
               <a:ext cx="77571" cy="77571"/>
             </a:xfrm>
             <a:prstGeom prst="ellipse">
@@ -5608,7 +5608,7 @@
           </p:nvSpPr>
           <p:spPr>
             <a:xfrm>
-              <a:off x="5183452" y="2251466"/>
+              <a:off x="4997471" y="2251785"/>
               <a:ext cx="77571" cy="77571"/>
             </a:xfrm>
             <a:prstGeom prst="ellipse">
@@ -5634,7 +5634,7 @@
           </p:nvSpPr>
           <p:spPr>
             <a:xfrm>
-              <a:off x="5051729" y="2441350"/>
+              <a:off x="5073393" y="2441388"/>
               <a:ext cx="77571" cy="77571"/>
             </a:xfrm>
             <a:prstGeom prst="ellipse">
@@ -5660,7 +5660,7 @@
           </p:nvSpPr>
           <p:spPr>
             <a:xfrm>
-              <a:off x="5120474" y="1751740"/>
+              <a:off x="5077169" y="1751736"/>
               <a:ext cx="77571" cy="77571"/>
             </a:xfrm>
             <a:prstGeom prst="ellipse">
@@ -5686,7 +5686,7 @@
           </p:nvSpPr>
           <p:spPr>
             <a:xfrm>
-              <a:off x="5142897" y="1304628"/>
+              <a:off x="5091771" y="1304730"/>
               <a:ext cx="77571" cy="77571"/>
             </a:xfrm>
             <a:prstGeom prst="ellipse">
@@ -5712,7 +5712,7 @@
           </p:nvSpPr>
           <p:spPr>
             <a:xfrm>
-              <a:off x="4987504" y="2113878"/>
+              <a:off x="5023940" y="2113885"/>
               <a:ext cx="77571" cy="77571"/>
             </a:xfrm>
             <a:prstGeom prst="ellipse">
@@ -5738,7 +5738,7 @@
           </p:nvSpPr>
           <p:spPr>
             <a:xfrm>
-              <a:off x="5162644" y="2654751"/>
+              <a:off x="4948748" y="2654666"/>
               <a:ext cx="77571" cy="77571"/>
             </a:xfrm>
             <a:prstGeom prst="ellipse">
@@ -5764,7 +5764,7 @@
           </p:nvSpPr>
           <p:spPr>
             <a:xfrm>
-              <a:off x="5066527" y="2072972"/>
+              <a:off x="5069594" y="2072837"/>
               <a:ext cx="77571" cy="77571"/>
             </a:xfrm>
             <a:prstGeom prst="ellipse">
@@ -5790,7 +5790,7 @@
           </p:nvSpPr>
           <p:spPr>
             <a:xfrm>
-              <a:off x="5883395" y="2676110"/>
+              <a:off x="5965707" y="2676451"/>
               <a:ext cx="77571" cy="77571"/>
             </a:xfrm>
             <a:prstGeom prst="ellipse">
@@ -5816,7 +5816,7 @@
           </p:nvSpPr>
           <p:spPr>
             <a:xfrm>
-              <a:off x="6049659" y="1751961"/>
+              <a:off x="5956648" y="1752039"/>
               <a:ext cx="77571" cy="77571"/>
             </a:xfrm>
             <a:prstGeom prst="ellipse">
@@ -5842,7 +5842,7 @@
           </p:nvSpPr>
           <p:spPr>
             <a:xfrm>
-              <a:off x="5876332" y="2266915"/>
+              <a:off x="5883091" y="2266844"/>
               <a:ext cx="77571" cy="77571"/>
             </a:xfrm>
             <a:prstGeom prst="ellipse">
@@ -5868,7 +5868,7 @@
           </p:nvSpPr>
           <p:spPr>
             <a:xfrm>
-              <a:off x="6029818" y="2695776"/>
+              <a:off x="5936935" y="2695776"/>
               <a:ext cx="77571" cy="77571"/>
             </a:xfrm>
             <a:prstGeom prst="ellipse">
@@ -5894,7 +5894,7 @@
           </p:nvSpPr>
           <p:spPr>
             <a:xfrm>
-              <a:off x="5953886" y="1940496"/>
+              <a:off x="5967680" y="1940806"/>
               <a:ext cx="77571" cy="77571"/>
             </a:xfrm>
             <a:prstGeom prst="ellipse">
@@ -5920,7 +5920,7 @@
           </p:nvSpPr>
           <p:spPr>
             <a:xfrm>
-              <a:off x="6032138" y="1242069"/>
+              <a:off x="5909220" y="1242069"/>
               <a:ext cx="77571" cy="77571"/>
             </a:xfrm>
             <a:prstGeom prst="ellipse">
@@ -5946,7 +5946,7 @@
           </p:nvSpPr>
           <p:spPr>
             <a:xfrm>
-              <a:off x="5964107" y="2661728"/>
+              <a:off x="6028563" y="2661856"/>
               <a:ext cx="77571" cy="77571"/>
             </a:xfrm>
             <a:prstGeom prst="ellipse">
@@ -5972,7 +5972,7 @@
           </p:nvSpPr>
           <p:spPr>
             <a:xfrm>
-              <a:off x="6002830" y="2602014"/>
+              <a:off x="5968162" y="2602012"/>
               <a:ext cx="77571" cy="77571"/>
             </a:xfrm>
             <a:prstGeom prst="ellipse">
@@ -5998,7 +5998,7 @@
           </p:nvSpPr>
           <p:spPr>
             <a:xfrm>
-              <a:off x="6002621" y="2291326"/>
+              <a:off x="5879964" y="2291368"/>
               <a:ext cx="77571" cy="77571"/>
             </a:xfrm>
             <a:prstGeom prst="ellipse">
@@ -6024,7 +6024,7 @@
           </p:nvSpPr>
           <p:spPr>
             <a:xfrm>
-              <a:off x="5981666" y="2668672"/>
+              <a:off x="5951852" y="2668683"/>
               <a:ext cx="77571" cy="77571"/>
             </a:xfrm>
             <a:prstGeom prst="ellipse">
@@ -6050,7 +6050,7 @@
           </p:nvSpPr>
           <p:spPr>
             <a:xfrm>
-              <a:off x="6026111" y="2456308"/>
+              <a:off x="5864052" y="2456320"/>
               <a:ext cx="77571" cy="77571"/>
             </a:xfrm>
             <a:prstGeom prst="ellipse">
@@ -6076,7 +6076,7 @@
           </p:nvSpPr>
           <p:spPr>
             <a:xfrm>
-              <a:off x="6064794" y="2665322"/>
+              <a:off x="6008957" y="2665168"/>
               <a:ext cx="77571" cy="77571"/>
             </a:xfrm>
             <a:prstGeom prst="ellipse">
@@ -6102,7 +6102,7 @@
           </p:nvSpPr>
           <p:spPr>
             <a:xfrm>
-              <a:off x="6074720" y="2174472"/>
+              <a:off x="6011178" y="2174235"/>
               <a:ext cx="77571" cy="77571"/>
             </a:xfrm>
             <a:prstGeom prst="ellipse">
@@ -6128,7 +6128,7 @@
           </p:nvSpPr>
           <p:spPr>
             <a:xfrm>
-              <a:off x="6066913" y="2038365"/>
+              <a:off x="5874240" y="2038356"/>
               <a:ext cx="77571" cy="77571"/>
             </a:xfrm>
             <a:prstGeom prst="ellipse">
@@ -6154,7 +6154,7 @@
           </p:nvSpPr>
           <p:spPr>
             <a:xfrm>
-              <a:off x="6035472" y="2099164"/>
+              <a:off x="5831745" y="2099131"/>
               <a:ext cx="77571" cy="77571"/>
             </a:xfrm>
             <a:prstGeom prst="ellipse">
@@ -6180,7 +6180,7 @@
           </p:nvSpPr>
           <p:spPr>
             <a:xfrm>
-              <a:off x="6073399" y="1899408"/>
+              <a:off x="5823696" y="1899444"/>
               <a:ext cx="77571" cy="77571"/>
             </a:xfrm>
             <a:prstGeom prst="ellipse">
@@ -6206,7 +6206,7 @@
           </p:nvSpPr>
           <p:spPr>
             <a:xfrm>
-              <a:off x="5994195" y="2422733"/>
+              <a:off x="5978184" y="2422680"/>
               <a:ext cx="77571" cy="77571"/>
             </a:xfrm>
             <a:prstGeom prst="ellipse">
@@ -6232,7 +6232,7 @@
           </p:nvSpPr>
           <p:spPr>
             <a:xfrm>
-              <a:off x="6102848" y="2658176"/>
+              <a:off x="5826553" y="2657976"/>
               <a:ext cx="77571" cy="77571"/>
             </a:xfrm>
             <a:prstGeom prst="ellipse">
@@ -6258,7 +6258,7 @@
           </p:nvSpPr>
           <p:spPr>
             <a:xfrm>
-              <a:off x="6887170" y="2401205"/>
+              <a:off x="6949535" y="2401316"/>
               <a:ext cx="77571" cy="77571"/>
             </a:xfrm>
             <a:prstGeom prst="ellipse">
@@ -6284,7 +6284,7 @@
           </p:nvSpPr>
           <p:spPr>
             <a:xfrm>
-              <a:off x="6918258" y="2496733"/>
+              <a:off x="6791058" y="2497001"/>
               <a:ext cx="77571" cy="77571"/>
             </a:xfrm>
             <a:prstGeom prst="ellipse">
@@ -6310,7 +6310,7 @@
           </p:nvSpPr>
           <p:spPr>
             <a:xfrm>
-              <a:off x="6993351" y="2600101"/>
+              <a:off x="6940632" y="2599970"/>
               <a:ext cx="77571" cy="77571"/>
             </a:xfrm>
             <a:prstGeom prst="ellipse">
@@ -6336,7 +6336,7 @@
           </p:nvSpPr>
           <p:spPr>
             <a:xfrm>
-              <a:off x="6887962" y="2353066"/>
+              <a:off x="6743897" y="2353406"/>
               <a:ext cx="77571" cy="77571"/>
             </a:xfrm>
             <a:prstGeom prst="ellipse">
@@ -6362,7 +6362,7 @@
           </p:nvSpPr>
           <p:spPr>
             <a:xfrm>
-              <a:off x="6835653" y="1818449"/>
+              <a:off x="6798637" y="1818441"/>
               <a:ext cx="77571" cy="77571"/>
             </a:xfrm>
             <a:prstGeom prst="ellipse">
@@ -6388,7 +6388,7 @@
           </p:nvSpPr>
           <p:spPr>
             <a:xfrm>
-              <a:off x="6782275" y="1461613"/>
+              <a:off x="6968401" y="1461539"/>
               <a:ext cx="77571" cy="77571"/>
             </a:xfrm>
             <a:prstGeom prst="ellipse">
@@ -6414,7 +6414,7 @@
           </p:nvSpPr>
           <p:spPr>
             <a:xfrm>
-              <a:off x="6971299" y="1702623"/>
+              <a:off x="6830286" y="1702894"/>
               <a:ext cx="77571" cy="77571"/>
             </a:xfrm>
             <a:prstGeom prst="ellipse">
@@ -6440,7 +6440,7 @@
           </p:nvSpPr>
           <p:spPr>
             <a:xfrm>
-              <a:off x="7034168" y="2433233"/>
+              <a:off x="6980937" y="2433158"/>
               <a:ext cx="77571" cy="77571"/>
             </a:xfrm>
             <a:prstGeom prst="ellipse">
@@ -6466,7 +6466,7 @@
           </p:nvSpPr>
           <p:spPr>
             <a:xfrm>
-              <a:off x="6934411" y="2373378"/>
+              <a:off x="6951912" y="2373521"/>
               <a:ext cx="77571" cy="77571"/>
             </a:xfrm>
             <a:prstGeom prst="ellipse">
@@ -6492,7 +6492,7 @@
           </p:nvSpPr>
           <p:spPr>
             <a:xfrm>
-              <a:off x="7002603" y="1779424"/>
+              <a:off x="6882500" y="1779382"/>
               <a:ext cx="77571" cy="77571"/>
             </a:xfrm>
             <a:prstGeom prst="ellipse">
@@ -6518,7 +6518,7 @@
           </p:nvSpPr>
           <p:spPr>
             <a:xfrm>
-              <a:off x="6947718" y="1991997"/>
+              <a:off x="6883134" y="1991658"/>
               <a:ext cx="77571" cy="77571"/>
             </a:xfrm>
             <a:prstGeom prst="ellipse">
@@ -6544,7 +6544,7 @@
           </p:nvSpPr>
           <p:spPr>
             <a:xfrm>
-              <a:off x="6924612" y="2574516"/>
+              <a:off x="6889155" y="2574374"/>
               <a:ext cx="77571" cy="77571"/>
             </a:xfrm>
             <a:prstGeom prst="ellipse">
@@ -6570,7 +6570,7 @@
           </p:nvSpPr>
           <p:spPr>
             <a:xfrm>
-              <a:off x="6783335" y="1727377"/>
+              <a:off x="6794508" y="1727363"/>
               <a:ext cx="77571" cy="77571"/>
             </a:xfrm>
             <a:prstGeom prst="ellipse">
@@ -6596,7 +6596,7 @@
           </p:nvSpPr>
           <p:spPr>
             <a:xfrm>
-              <a:off x="6950469" y="1929483"/>
+              <a:off x="6995709" y="1929415"/>
               <a:ext cx="77571" cy="77571"/>
             </a:xfrm>
             <a:prstGeom prst="ellipse">
@@ -6622,7 +6622,7 @@
           </p:nvSpPr>
           <p:spPr>
             <a:xfrm>
-              <a:off x="6872434" y="2126529"/>
+              <a:off x="6939281" y="2126796"/>
               <a:ext cx="77571" cy="77571"/>
             </a:xfrm>
             <a:prstGeom prst="ellipse">
@@ -6648,7 +6648,7 @@
           </p:nvSpPr>
           <p:spPr>
             <a:xfrm>
-              <a:off x="6855669" y="2544451"/>
+              <a:off x="6940673" y="2544464"/>
               <a:ext cx="77571" cy="77571"/>
             </a:xfrm>
             <a:prstGeom prst="ellipse">
@@ -6674,7 +6674,7 @@
           </p:nvSpPr>
           <p:spPr>
             <a:xfrm>
-              <a:off x="6827779" y="2117309"/>
+              <a:off x="6884627" y="2117353"/>
               <a:ext cx="77571" cy="77571"/>
             </a:xfrm>
             <a:prstGeom prst="ellipse">
@@ -6700,7 +6700,7 @@
           </p:nvSpPr>
           <p:spPr>
             <a:xfrm>
-              <a:off x="6851050" y="2516408"/>
+              <a:off x="6879869" y="2516275"/>
               <a:ext cx="77571" cy="77571"/>
             </a:xfrm>
             <a:prstGeom prst="ellipse">
@@ -6726,7 +6726,7 @@
           </p:nvSpPr>
           <p:spPr>
             <a:xfrm>
-              <a:off x="6892640" y="1908243"/>
+              <a:off x="6771787" y="1908272"/>
               <a:ext cx="77571" cy="77571"/>
             </a:xfrm>
             <a:prstGeom prst="ellipse">
@@ -6752,7 +6752,7 @@
           </p:nvSpPr>
           <p:spPr>
             <a:xfrm>
-              <a:off x="6921020" y="2132252"/>
+              <a:off x="6815677" y="2131962"/>
               <a:ext cx="77571" cy="77571"/>
             </a:xfrm>
             <a:prstGeom prst="ellipse">
@@ -6778,7 +6778,7 @@
           </p:nvSpPr>
           <p:spPr>
             <a:xfrm>
-              <a:off x="7777651" y="2245910"/>
+              <a:off x="7688756" y="2245745"/>
               <a:ext cx="77571" cy="77571"/>
             </a:xfrm>
             <a:prstGeom prst="ellipse">
@@ -6804,7 +6804,7 @@
           </p:nvSpPr>
           <p:spPr>
             <a:xfrm>
-              <a:off x="7774208" y="2396507"/>
+              <a:off x="7865337" y="2396305"/>
               <a:ext cx="77571" cy="77571"/>
             </a:xfrm>
             <a:prstGeom prst="ellipse">
@@ -6830,7 +6830,7 @@
           </p:nvSpPr>
           <p:spPr>
             <a:xfrm>
-              <a:off x="7814122" y="2455390"/>
+              <a:off x="7735878" y="2455294"/>
               <a:ext cx="77571" cy="77571"/>
             </a:xfrm>
             <a:prstGeom prst="ellipse">
@@ -6856,7 +6856,7 @@
           </p:nvSpPr>
           <p:spPr>
             <a:xfrm>
-              <a:off x="7940029" y="2227479"/>
+              <a:off x="7696977" y="2227262"/>
               <a:ext cx="77571" cy="77571"/>
             </a:xfrm>
             <a:prstGeom prst="ellipse">
@@ -6882,7 +6882,7 @@
           </p:nvSpPr>
           <p:spPr>
             <a:xfrm>
-              <a:off x="7930896" y="2101940"/>
+              <a:off x="7742344" y="2101797"/>
               <a:ext cx="77571" cy="77571"/>
             </a:xfrm>
             <a:prstGeom prst="ellipse">
@@ -6908,7 +6908,7 @@
           </p:nvSpPr>
           <p:spPr>
             <a:xfrm>
-              <a:off x="7737001" y="2156083"/>
+              <a:off x="7714777" y="2156324"/>
               <a:ext cx="77571" cy="77571"/>
             </a:xfrm>
             <a:prstGeom prst="ellipse">
@@ -6934,7 +6934,7 @@
           </p:nvSpPr>
           <p:spPr>
             <a:xfrm>
-              <a:off x="7725183" y="2394884"/>
+              <a:off x="7788785" y="2394823"/>
               <a:ext cx="77571" cy="77571"/>
             </a:xfrm>
             <a:prstGeom prst="ellipse">
@@ -6960,7 +6960,7 @@
           </p:nvSpPr>
           <p:spPr>
             <a:xfrm>
-              <a:off x="7901815" y="2180889"/>
+              <a:off x="7712427" y="2181092"/>
               <a:ext cx="77571" cy="77571"/>
             </a:xfrm>
             <a:prstGeom prst="ellipse">
@@ -6986,7 +6986,7 @@
           </p:nvSpPr>
           <p:spPr>
             <a:xfrm>
-              <a:off x="7794294" y="2432824"/>
+              <a:off x="7713791" y="2432817"/>
               <a:ext cx="77571" cy="77571"/>
             </a:xfrm>
             <a:prstGeom prst="ellipse">
@@ -7012,7 +7012,7 @@
           </p:nvSpPr>
           <p:spPr>
             <a:xfrm>
-              <a:off x="7866828" y="2312817"/>
+              <a:off x="7841228" y="2312898"/>
               <a:ext cx="77571" cy="77571"/>
             </a:xfrm>
             <a:prstGeom prst="ellipse">
@@ -7038,7 +7038,7 @@
           </p:nvSpPr>
           <p:spPr>
             <a:xfrm>
-              <a:off x="7719116" y="2138082"/>
+              <a:off x="7940029" y="2138026"/>
               <a:ext cx="77571" cy="77571"/>
             </a:xfrm>
             <a:prstGeom prst="ellipse">
@@ -7064,7 +7064,7 @@
           </p:nvSpPr>
           <p:spPr>
             <a:xfrm>
-              <a:off x="7915399" y="1812088"/>
+              <a:off x="7682675" y="1811929"/>
               <a:ext cx="77571" cy="77571"/>
             </a:xfrm>
             <a:prstGeom prst="ellipse">
@@ -7090,7 +7090,7 @@
           </p:nvSpPr>
           <p:spPr>
             <a:xfrm>
-              <a:off x="7816557" y="2419447"/>
+              <a:off x="7903282" y="2419571"/>
               <a:ext cx="77571" cy="77571"/>
             </a:xfrm>
             <a:prstGeom prst="ellipse">
@@ -7116,7 +7116,7 @@
           </p:nvSpPr>
           <p:spPr>
             <a:xfrm>
-              <a:off x="7708838" y="2634770"/>
+              <a:off x="7934693" y="2634794"/>
               <a:ext cx="77571" cy="77571"/>
             </a:xfrm>
             <a:prstGeom prst="ellipse">
@@ -7142,7 +7142,7 @@
           </p:nvSpPr>
           <p:spPr>
             <a:xfrm>
-              <a:off x="7740477" y="2486889"/>
+              <a:off x="7865623" y="2486910"/>
               <a:ext cx="77571" cy="77571"/>
             </a:xfrm>
             <a:prstGeom prst="ellipse">
@@ -7168,7 +7168,7 @@
           </p:nvSpPr>
           <p:spPr>
             <a:xfrm>
-              <a:off x="7727846" y="2254024"/>
+              <a:off x="7754686" y="2254198"/>
               <a:ext cx="77571" cy="77571"/>
             </a:xfrm>
             <a:prstGeom prst="ellipse">
@@ -7194,7 +7194,7 @@
           </p:nvSpPr>
           <p:spPr>
             <a:xfrm>
-              <a:off x="7834037" y="2388146"/>
+              <a:off x="7710690" y="2388118"/>
               <a:ext cx="77571" cy="77571"/>
             </a:xfrm>
             <a:prstGeom prst="ellipse">
@@ -7220,7 +7220,7 @@
           </p:nvSpPr>
           <p:spPr>
             <a:xfrm>
-              <a:off x="7735972" y="2228702"/>
+              <a:off x="7683276" y="2228430"/>
               <a:ext cx="77571" cy="77571"/>
             </a:xfrm>
             <a:prstGeom prst="ellipse">
@@ -7246,7 +7246,7 @@
           </p:nvSpPr>
           <p:spPr>
             <a:xfrm>
-              <a:off x="7906761" y="2204280"/>
+              <a:off x="7887012" y="2204425"/>
               <a:ext cx="77571" cy="77571"/>
             </a:xfrm>
             <a:prstGeom prst="ellipse">
@@ -7272,7 +7272,7 @@
           </p:nvSpPr>
           <p:spPr>
             <a:xfrm>
-              <a:off x="7704911" y="2025049"/>
+              <a:off x="7913996" y="2025175"/>
               <a:ext cx="77571" cy="77571"/>
             </a:xfrm>
             <a:prstGeom prst="ellipse">
@@ -7298,7 +7298,7 @@
           </p:nvSpPr>
           <p:spPr>
             <a:xfrm>
-              <a:off x="7853064" y="2070869"/>
+              <a:off x="7809687" y="2071033"/>
               <a:ext cx="77571" cy="77571"/>
             </a:xfrm>
             <a:prstGeom prst="ellipse">
@@ -7324,7 +7324,7 @@
           </p:nvSpPr>
           <p:spPr>
             <a:xfrm>
-              <a:off x="7817212" y="2141885"/>
+              <a:off x="7925839" y="2141801"/>
               <a:ext cx="77571" cy="77571"/>
             </a:xfrm>
             <a:prstGeom prst="ellipse">
@@ -7350,7 +7350,7 @@
           </p:nvSpPr>
           <p:spPr>
             <a:xfrm>
-              <a:off x="7785911" y="2526715"/>
+              <a:off x="7906765" y="2526550"/>
               <a:ext cx="77571" cy="77571"/>
             </a:xfrm>
             <a:prstGeom prst="ellipse">
@@ -7376,7 +7376,7 @@
           </p:nvSpPr>
           <p:spPr>
             <a:xfrm>
-              <a:off x="7746089" y="2220248"/>
+              <a:off x="7803822" y="2220293"/>
               <a:ext cx="77571" cy="77571"/>
             </a:xfrm>
             <a:prstGeom prst="ellipse">
@@ -7402,42 +7402,42 @@
           </p:nvSpPr>
           <p:spPr>
             <a:xfrm>
-              <a:off x="5112956" y="1992894"/>
-              <a:ext cx="2758650" cy="456244"/>
+              <a:off x="5022432" y="1992921"/>
+              <a:ext cx="2821906" cy="456236"/>
             </a:xfrm>
             <a:custGeom>
               <a:avLst/>
               <a:pathLst>
-                <a:path w="2758650" h="456244">
+                <a:path w="2821906" h="456236">
                   <a:moveTo>
                     <a:pt x="0" y="0"/>
                   </a:moveTo>
                   <a:lnTo>
-                    <a:pt x="1457452" y="115994"/>
+                    <a:pt x="1490872" y="115992"/>
                   </a:lnTo>
                   <a:lnTo>
-                    <a:pt x="1839100" y="134924"/>
+                    <a:pt x="1881271" y="134921"/>
                   </a:lnTo>
                   <a:lnTo>
-                    <a:pt x="2377003" y="152462"/>
+                    <a:pt x="2431507" y="152460"/>
                   </a:lnTo>
                   <a:lnTo>
-                    <a:pt x="2758650" y="159376"/>
+                    <a:pt x="2821906" y="159373"/>
                   </a:lnTo>
                   <a:lnTo>
-                    <a:pt x="2758650" y="456244"/>
+                    <a:pt x="2821906" y="456236"/>
                   </a:lnTo>
                   <a:lnTo>
-                    <a:pt x="2377003" y="425400"/>
+                    <a:pt x="2431507" y="425393"/>
                   </a:lnTo>
                   <a:lnTo>
-                    <a:pt x="1839100" y="389722"/>
+                    <a:pt x="1881271" y="389716"/>
                   </a:lnTo>
                   <a:lnTo>
-                    <a:pt x="1457452" y="370894"/>
+                    <a:pt x="1490872" y="370888"/>
                   </a:lnTo>
                   <a:lnTo>
-                    <a:pt x="0" y="342699"/>
+                    <a:pt x="0" y="342693"/>
                   </a:lnTo>
                   <a:close/>
                 </a:path>
@@ -7463,27 +7463,27 @@
           </p:nvSpPr>
           <p:spPr>
             <a:xfrm>
-              <a:off x="5112956" y="1992894"/>
-              <a:ext cx="2758650" cy="159376"/>
+              <a:off x="5022432" y="1992921"/>
+              <a:ext cx="2821906" cy="159373"/>
             </a:xfrm>
             <a:custGeom>
               <a:avLst/>
               <a:pathLst>
-                <a:path w="2758650" h="159376">
+                <a:path w="2821906" h="159373">
                   <a:moveTo>
                     <a:pt x="0" y="0"/>
                   </a:moveTo>
                   <a:lnTo>
-                    <a:pt x="1457452" y="115994"/>
+                    <a:pt x="1490872" y="115992"/>
                   </a:lnTo>
                   <a:lnTo>
-                    <a:pt x="1839100" y="134924"/>
+                    <a:pt x="1881271" y="134921"/>
                   </a:lnTo>
                   <a:lnTo>
-                    <a:pt x="2377003" y="152462"/>
+                    <a:pt x="2431507" y="152460"/>
                   </a:lnTo>
                   <a:lnTo>
-                    <a:pt x="2758650" y="159376"/>
+                    <a:pt x="2821906" y="159373"/>
                   </a:lnTo>
                 </a:path>
               </a:pathLst>
@@ -7503,24 +7503,24 @@
           </p:nvSpPr>
           <p:spPr>
             <a:xfrm>
-              <a:off x="5112956" y="2335594"/>
-              <a:ext cx="2758650" cy="113544"/>
+              <a:off x="5022432" y="2335615"/>
+              <a:ext cx="2821906" cy="113542"/>
             </a:xfrm>
             <a:custGeom>
               <a:avLst/>
               <a:pathLst>
-                <a:path w="2758650" h="113544">
+                <a:path w="2821906" h="113542">
                   <a:moveTo>
-                    <a:pt x="2758650" y="113544"/>
+                    <a:pt x="2821906" y="113542"/>
                   </a:moveTo>
                   <a:lnTo>
-                    <a:pt x="2377003" y="82700"/>
+                    <a:pt x="2431507" y="82699"/>
                   </a:lnTo>
                   <a:lnTo>
-                    <a:pt x="1839100" y="47023"/>
+                    <a:pt x="1881271" y="47022"/>
                   </a:lnTo>
                   <a:lnTo>
-                    <a:pt x="1457452" y="28195"/>
+                    <a:pt x="1490872" y="28194"/>
                   </a:lnTo>
                   <a:lnTo>
                     <a:pt x="0" y="0"/>
@@ -7543,27 +7543,27 @@
           </p:nvSpPr>
           <p:spPr>
             <a:xfrm>
-              <a:off x="5112956" y="2164244"/>
-              <a:ext cx="2758650" cy="136460"/>
+              <a:off x="5022432" y="2164268"/>
+              <a:ext cx="2821906" cy="136458"/>
             </a:xfrm>
             <a:custGeom>
               <a:avLst/>
               <a:pathLst>
-                <a:path w="2758650" h="136460">
+                <a:path w="2821906" h="136458">
                   <a:moveTo>
                     <a:pt x="0" y="0"/>
                   </a:moveTo>
                   <a:lnTo>
-                    <a:pt x="1457452" y="72094"/>
+                    <a:pt x="1490872" y="72093"/>
                   </a:lnTo>
                   <a:lnTo>
-                    <a:pt x="1839100" y="90973"/>
+                    <a:pt x="1881271" y="90972"/>
                   </a:lnTo>
                   <a:lnTo>
-                    <a:pt x="2377003" y="117581"/>
+                    <a:pt x="2431507" y="117579"/>
                   </a:lnTo>
                   <a:lnTo>
-                    <a:pt x="2758650" y="136460"/>
+                    <a:pt x="2821906" y="136458"/>
                   </a:lnTo>
                 </a:path>
               </a:pathLst>
@@ -7592,7 +7592,7 @@
           </p:nvSpPr>
           <p:spPr>
             <a:xfrm>
-              <a:off x="7391912" y="1344173"/>
+              <a:off x="7364645" y="1344209"/>
               <a:ext cx="479694" cy="82021"/>
             </a:xfrm>
             <a:prstGeom prst="rect">
@@ -7699,7 +7699,7 @@
           </p:nvSpPr>
           <p:spPr>
             <a:xfrm>
-              <a:off x="4800012" y="2496264"/>
+              <a:off x="4800012" y="2496283"/>
               <a:ext cx="37957" cy="0"/>
             </a:xfrm>
             <a:custGeom>
@@ -7739,7 +7739,7 @@
           </p:nvSpPr>
           <p:spPr>
             <a:xfrm>
-              <a:off x="4800012" y="1967908"/>
+              <a:off x="4800012" y="1967936"/>
               <a:ext cx="37957" cy="0"/>
             </a:xfrm>
             <a:custGeom>
@@ -7779,7 +7779,7 @@
           </p:nvSpPr>
           <p:spPr>
             <a:xfrm>
-              <a:off x="4800012" y="1439553"/>
+              <a:off x="4800012" y="1439589"/>
               <a:ext cx="37957" cy="0"/>
             </a:xfrm>
             <a:custGeom>
@@ -7859,7 +7859,7 @@
           </p:nvSpPr>
           <p:spPr>
             <a:xfrm>
-              <a:off x="5112956" y="2807247"/>
+              <a:off x="5022432" y="2807247"/>
               <a:ext cx="0" cy="37957"/>
             </a:xfrm>
             <a:custGeom>
@@ -7899,7 +7899,7 @@
           </p:nvSpPr>
           <p:spPr>
             <a:xfrm>
-              <a:off x="6032506" y="2807247"/>
+              <a:off x="5963068" y="2807247"/>
               <a:ext cx="0" cy="37957"/>
             </a:xfrm>
             <a:custGeom>
@@ -7939,7 +7939,7 @@
           </p:nvSpPr>
           <p:spPr>
             <a:xfrm>
-              <a:off x="6952056" y="2807247"/>
+              <a:off x="6903703" y="2807247"/>
               <a:ext cx="0" cy="37957"/>
             </a:xfrm>
             <a:custGeom>
@@ -7979,7 +7979,7 @@
           </p:nvSpPr>
           <p:spPr>
             <a:xfrm>
-              <a:off x="7871606" y="2807247"/>
+              <a:off x="7844339" y="2807247"/>
               <a:ext cx="0" cy="37957"/>
             </a:xfrm>
             <a:custGeom>
@@ -8019,7 +8019,7 @@
           </p:nvSpPr>
           <p:spPr>
             <a:xfrm>
-              <a:off x="5074094" y="2875571"/>
+              <a:off x="4983570" y="2875571"/>
               <a:ext cx="77724" cy="100218"/>
             </a:xfrm>
             <a:prstGeom prst="rect">
@@ -8065,7 +8065,7 @@
           </p:nvSpPr>
           <p:spPr>
             <a:xfrm>
-              <a:off x="5993644" y="2875571"/>
+              <a:off x="5924206" y="2875571"/>
               <a:ext cx="77724" cy="100218"/>
             </a:xfrm>
             <a:prstGeom prst="rect">
@@ -8111,7 +8111,7 @@
           </p:nvSpPr>
           <p:spPr>
             <a:xfrm>
-              <a:off x="6913194" y="2875571"/>
+              <a:off x="6864841" y="2875571"/>
               <a:ext cx="77724" cy="100218"/>
             </a:xfrm>
             <a:prstGeom prst="rect">
@@ -8157,7 +8157,7 @@
           </p:nvSpPr>
           <p:spPr>
             <a:xfrm>
-              <a:off x="7832744" y="2875571"/>
+              <a:off x="7805477" y="2875571"/>
               <a:ext cx="77724" cy="100218"/>
             </a:xfrm>
             <a:prstGeom prst="rect">
@@ -8275,7 +8275,7 @@
           </p:nvSpPr>
           <p:spPr>
             <a:xfrm>
-              <a:off x="1628966" y="4653995"/>
+              <a:off x="1552500" y="4653189"/>
               <a:ext cx="77571" cy="77571"/>
             </a:xfrm>
             <a:prstGeom prst="ellipse">
@@ -8301,7 +8301,7 @@
           </p:nvSpPr>
           <p:spPr>
             <a:xfrm>
-              <a:off x="1628284" y="4496069"/>
+              <a:off x="1642371" y="4495777"/>
               <a:ext cx="77571" cy="77571"/>
             </a:xfrm>
             <a:prstGeom prst="ellipse">
@@ -8327,7 +8327,7 @@
           </p:nvSpPr>
           <p:spPr>
             <a:xfrm>
-              <a:off x="1886680" y="4722034"/>
+              <a:off x="1764628" y="4723233"/>
               <a:ext cx="77571" cy="77571"/>
             </a:xfrm>
             <a:prstGeom prst="ellipse">
@@ -8353,7 +8353,7 @@
           </p:nvSpPr>
           <p:spPr>
             <a:xfrm>
-              <a:off x="1884722" y="4580982"/>
+              <a:off x="1519161" y="4582452"/>
               <a:ext cx="77571" cy="77571"/>
             </a:xfrm>
             <a:prstGeom prst="ellipse">
@@ -8379,7 +8379,7 @@
           </p:nvSpPr>
           <p:spPr>
             <a:xfrm>
-              <a:off x="1694851" y="4614002"/>
+              <a:off x="1910446" y="4614091"/>
               <a:ext cx="77571" cy="77571"/>
             </a:xfrm>
             <a:prstGeom prst="ellipse">
@@ -8405,7 +8405,7 @@
           </p:nvSpPr>
           <p:spPr>
             <a:xfrm>
-              <a:off x="1747197" y="4476431"/>
+              <a:off x="1863635" y="4477716"/>
               <a:ext cx="77571" cy="77571"/>
             </a:xfrm>
             <a:prstGeom prst="ellipse">
@@ -8431,7 +8431,7 @@
           </p:nvSpPr>
           <p:spPr>
             <a:xfrm>
-              <a:off x="1670275" y="4132028"/>
+              <a:off x="1929921" y="4132039"/>
               <a:ext cx="77571" cy="77571"/>
             </a:xfrm>
             <a:prstGeom prst="ellipse">
@@ -8457,7 +8457,7 @@
           </p:nvSpPr>
           <p:spPr>
             <a:xfrm>
-              <a:off x="1519161" y="4583689"/>
+              <a:off x="1578023" y="4584796"/>
               <a:ext cx="77571" cy="77571"/>
             </a:xfrm>
             <a:prstGeom prst="ellipse">
@@ -8483,7 +8483,7 @@
           </p:nvSpPr>
           <p:spPr>
             <a:xfrm>
-              <a:off x="1666230" y="4534122"/>
+              <a:off x="1577225" y="4534600"/>
               <a:ext cx="77571" cy="77571"/>
             </a:xfrm>
             <a:prstGeom prst="ellipse">
@@ -8509,7 +8509,7 @@
           </p:nvSpPr>
           <p:spPr>
             <a:xfrm>
-              <a:off x="1666660" y="4477147"/>
+              <a:off x="1925562" y="4478647"/>
               <a:ext cx="77571" cy="77571"/>
             </a:xfrm>
             <a:prstGeom prst="ellipse">
@@ -8535,7 +8535,7 @@
           </p:nvSpPr>
           <p:spPr>
             <a:xfrm>
-              <a:off x="2589168" y="4731251"/>
+              <a:off x="2789734" y="4734143"/>
               <a:ext cx="77571" cy="77571"/>
             </a:xfrm>
             <a:prstGeom prst="ellipse">
@@ -8561,7 +8561,7 @@
           </p:nvSpPr>
           <p:spPr>
             <a:xfrm>
-              <a:off x="2510064" y="4783265"/>
+              <a:off x="2445627" y="4786016"/>
               <a:ext cx="77571" cy="77571"/>
             </a:xfrm>
             <a:prstGeom prst="ellipse">
@@ -8587,7 +8587,7 @@
           </p:nvSpPr>
           <p:spPr>
             <a:xfrm>
-              <a:off x="2383502" y="3552261"/>
+              <a:off x="2369370" y="3552477"/>
               <a:ext cx="77571" cy="77571"/>
             </a:xfrm>
             <a:prstGeom prst="ellipse">
@@ -8613,7 +8613,7 @@
           </p:nvSpPr>
           <p:spPr>
             <a:xfrm>
-              <a:off x="2748256" y="4648235"/>
+              <a:off x="2804370" y="4649583"/>
               <a:ext cx="77571" cy="77571"/>
             </a:xfrm>
             <a:prstGeom prst="ellipse">
@@ -8639,7 +8639,7 @@
           </p:nvSpPr>
           <p:spPr>
             <a:xfrm>
-              <a:off x="2591279" y="4672974"/>
+              <a:off x="2593739" y="4675357"/>
               <a:ext cx="77571" cy="77571"/>
             </a:xfrm>
             <a:prstGeom prst="ellipse">
@@ -8665,7 +8665,7 @@
           </p:nvSpPr>
           <p:spPr>
             <a:xfrm>
-              <a:off x="2412890" y="4503893"/>
+              <a:off x="2433034" y="4504550"/>
               <a:ext cx="77571" cy="77571"/>
             </a:xfrm>
             <a:prstGeom prst="ellipse">
@@ -8691,7 +8691,7 @@
           </p:nvSpPr>
           <p:spPr>
             <a:xfrm>
-              <a:off x="2339228" y="4673592"/>
+              <a:off x="2615396" y="4677333"/>
               <a:ext cx="77571" cy="77571"/>
             </a:xfrm>
             <a:prstGeom prst="ellipse">
@@ -8717,7 +8717,7 @@
           </p:nvSpPr>
           <p:spPr>
             <a:xfrm>
-              <a:off x="2423479" y="4677331"/>
+              <a:off x="2388033" y="4681303"/>
               <a:ext cx="77571" cy="77571"/>
             </a:xfrm>
             <a:prstGeom prst="ellipse">
@@ -8743,7 +8743,7 @@
           </p:nvSpPr>
           <p:spPr>
             <a:xfrm>
-              <a:off x="2575815" y="4034811"/>
+              <a:off x="2425865" y="4035139"/>
               <a:ext cx="77571" cy="77571"/>
             </a:xfrm>
             <a:prstGeom prst="ellipse">
@@ -8769,7 +8769,7 @@
           </p:nvSpPr>
           <p:spPr>
             <a:xfrm>
-              <a:off x="2541830" y="4179238"/>
+              <a:off x="2816065" y="4180524"/>
               <a:ext cx="77571" cy="77571"/>
             </a:xfrm>
             <a:prstGeom prst="ellipse">
@@ -8795,7 +8795,7 @@
           </p:nvSpPr>
           <p:spPr>
             <a:xfrm>
-              <a:off x="2411065" y="4411099"/>
+              <a:off x="2524428" y="4411694"/>
               <a:ext cx="77571" cy="77571"/>
             </a:xfrm>
             <a:prstGeom prst="ellipse">
@@ -8821,7 +8821,7 @@
           </p:nvSpPr>
           <p:spPr>
             <a:xfrm>
-              <a:off x="2521035" y="4500276"/>
+              <a:off x="2537437" y="4501366"/>
               <a:ext cx="77571" cy="77571"/>
             </a:xfrm>
             <a:prstGeom prst="ellipse">
@@ -8847,7 +8847,7 @@
           </p:nvSpPr>
           <p:spPr>
             <a:xfrm>
-              <a:off x="2658888" y="4337691"/>
+              <a:off x="2536096" y="4338907"/>
               <a:ext cx="77571" cy="77571"/>
             </a:xfrm>
             <a:prstGeom prst="ellipse">
@@ -8873,7 +8873,7 @@
           </p:nvSpPr>
           <p:spPr>
             <a:xfrm>
-              <a:off x="2805274" y="4561093"/>
+              <a:off x="2787079" y="4560606"/>
               <a:ext cx="77571" cy="77571"/>
             </a:xfrm>
             <a:prstGeom prst="ellipse">
@@ -8899,7 +8899,7 @@
           </p:nvSpPr>
           <p:spPr>
             <a:xfrm>
-              <a:off x="2393554" y="4587555"/>
+              <a:off x="2640556" y="4589577"/>
               <a:ext cx="77571" cy="77571"/>
             </a:xfrm>
             <a:prstGeom prst="ellipse">
@@ -8925,7 +8925,7 @@
           </p:nvSpPr>
           <p:spPr>
             <a:xfrm>
-              <a:off x="2731768" y="4450257"/>
+              <a:off x="2559207" y="4453811"/>
               <a:ext cx="77571" cy="77571"/>
             </a:xfrm>
             <a:prstGeom prst="ellipse">
@@ -8951,7 +8951,7 @@
           </p:nvSpPr>
           <p:spPr>
             <a:xfrm>
-              <a:off x="2685794" y="3882252"/>
+              <a:off x="2536272" y="3879739"/>
               <a:ext cx="77571" cy="77571"/>
             </a:xfrm>
             <a:prstGeom prst="ellipse">
@@ -8977,7 +8977,7 @@
           </p:nvSpPr>
           <p:spPr>
             <a:xfrm>
-              <a:off x="2712525" y="4145778"/>
+              <a:off x="2571965" y="4143908"/>
               <a:ext cx="77571" cy="77571"/>
             </a:xfrm>
             <a:prstGeom prst="ellipse">
@@ -9003,7 +9003,7 @@
           </p:nvSpPr>
           <p:spPr>
             <a:xfrm>
-              <a:off x="3273002" y="4436899"/>
+              <a:off x="3532094" y="4437382"/>
               <a:ext cx="77571" cy="77571"/>
             </a:xfrm>
             <a:prstGeom prst="ellipse">
@@ -9029,7 +9029,7 @@
           </p:nvSpPr>
           <p:spPr>
             <a:xfrm>
-              <a:off x="3266102" y="4322931"/>
+              <a:off x="3345889" y="4325674"/>
               <a:ext cx="77571" cy="77571"/>
             </a:xfrm>
             <a:prstGeom prst="ellipse">
@@ -9055,7 +9055,7 @@
           </p:nvSpPr>
           <p:spPr>
             <a:xfrm>
-              <a:off x="3641580" y="4769341"/>
+              <a:off x="3582211" y="4774085"/>
               <a:ext cx="77571" cy="77571"/>
             </a:xfrm>
             <a:prstGeom prst="ellipse">
@@ -9081,7 +9081,7 @@
           </p:nvSpPr>
           <p:spPr>
             <a:xfrm>
-              <a:off x="3208580" y="4762120"/>
+              <a:off x="3302145" y="4765167"/>
               <a:ext cx="77571" cy="77571"/>
             </a:xfrm>
             <a:prstGeom prst="ellipse">
@@ -9107,7 +9107,7 @@
           </p:nvSpPr>
           <p:spPr>
             <a:xfrm>
-              <a:off x="3291075" y="4547925"/>
+              <a:off x="3654638" y="4547667"/>
               <a:ext cx="77571" cy="77571"/>
             </a:xfrm>
             <a:prstGeom prst="ellipse">
@@ -9133,7 +9133,7 @@
           </p:nvSpPr>
           <p:spPr>
             <a:xfrm>
-              <a:off x="3528147" y="4775664"/>
+              <a:off x="3374822" y="4777238"/>
               <a:ext cx="77571" cy="77571"/>
             </a:xfrm>
             <a:prstGeom prst="ellipse">
@@ -9159,7 +9159,7 @@
           </p:nvSpPr>
           <p:spPr>
             <a:xfrm>
-              <a:off x="3521153" y="3772285"/>
+              <a:off x="3231335" y="3770412"/>
               <a:ext cx="77571" cy="77571"/>
             </a:xfrm>
             <a:prstGeom prst="ellipse">
@@ -9185,7 +9185,7 @@
           </p:nvSpPr>
           <p:spPr>
             <a:xfrm>
-              <a:off x="3534644" y="4794129"/>
+              <a:off x="3236999" y="4794129"/>
               <a:ext cx="77571" cy="77571"/>
             </a:xfrm>
             <a:prstGeom prst="ellipse">
@@ -9211,7 +9211,7 @@
           </p:nvSpPr>
           <p:spPr>
             <a:xfrm>
-              <a:off x="3554639" y="4266773"/>
+              <a:off x="3557135" y="4266201"/>
               <a:ext cx="77571" cy="77571"/>
             </a:xfrm>
             <a:prstGeom prst="ellipse">
@@ -9237,7 +9237,7 @@
           </p:nvSpPr>
           <p:spPr>
             <a:xfrm>
-              <a:off x="3660750" y="3580108"/>
+              <a:off x="3216169" y="3577981"/>
               <a:ext cx="77571" cy="77571"/>
             </a:xfrm>
             <a:prstGeom prst="ellipse">
@@ -9263,7 +9263,7 @@
           </p:nvSpPr>
           <p:spPr>
             <a:xfrm>
-              <a:off x="3235730" y="3461564"/>
+              <a:off x="3259161" y="3461564"/>
               <a:ext cx="77571" cy="77571"/>
             </a:xfrm>
             <a:prstGeom prst="ellipse">
@@ -9289,7 +9289,7 @@
           </p:nvSpPr>
           <p:spPr>
             <a:xfrm>
-              <a:off x="3510795" y="4251400"/>
+              <a:off x="3547370" y="4248532"/>
               <a:ext cx="77571" cy="77571"/>
             </a:xfrm>
             <a:prstGeom prst="ellipse">
@@ -9315,7 +9315,7 @@
           </p:nvSpPr>
           <p:spPr>
             <a:xfrm>
-              <a:off x="3431697" y="4109833"/>
+              <a:off x="3510029" y="4109587"/>
               <a:ext cx="77571" cy="77571"/>
             </a:xfrm>
             <a:prstGeom prst="ellipse">
@@ -9341,7 +9341,7 @@
           </p:nvSpPr>
           <p:spPr>
             <a:xfrm>
-              <a:off x="3410105" y="4060247"/>
+              <a:off x="3369557" y="4062061"/>
               <a:ext cx="77571" cy="77571"/>
             </a:xfrm>
             <a:prstGeom prst="ellipse">
@@ -9367,7 +9367,7 @@
           </p:nvSpPr>
           <p:spPr>
             <a:xfrm>
-              <a:off x="3170094" y="4100246"/>
+              <a:off x="3488843" y="4102291"/>
               <a:ext cx="77571" cy="77571"/>
             </a:xfrm>
             <a:prstGeom prst="ellipse">
@@ -9393,7 +9393,7 @@
           </p:nvSpPr>
           <p:spPr>
             <a:xfrm>
-              <a:off x="3570352" y="4693599"/>
+              <a:off x="3486255" y="4693259"/>
               <a:ext cx="77571" cy="77571"/>
             </a:xfrm>
             <a:prstGeom prst="ellipse">
@@ -9419,7 +9419,7 @@
           </p:nvSpPr>
           <p:spPr>
             <a:xfrm>
-              <a:off x="3439618" y="4047205"/>
+              <a:off x="3487608" y="4049619"/>
               <a:ext cx="77571" cy="77571"/>
             </a:xfrm>
             <a:prstGeom prst="ellipse">
@@ -9445,7 +9445,7 @@
           </p:nvSpPr>
           <p:spPr>
             <a:xfrm>
-              <a:off x="3218241" y="4496148"/>
+              <a:off x="3475236" y="4496806"/>
               <a:ext cx="77571" cy="77571"/>
             </a:xfrm>
             <a:prstGeom prst="ellipse">
@@ -9471,7 +9471,7 @@
           </p:nvSpPr>
           <p:spPr>
             <a:xfrm>
-              <a:off x="3573636" y="4517891"/>
+              <a:off x="3469994" y="4518962"/>
               <a:ext cx="77571" cy="77571"/>
             </a:xfrm>
             <a:prstGeom prst="ellipse">
@@ -9497,7 +9497,7 @@
           </p:nvSpPr>
           <p:spPr>
             <a:xfrm>
-              <a:off x="3526575" y="4301434"/>
+              <a:off x="3248006" y="4302742"/>
               <a:ext cx="77571" cy="77571"/>
             </a:xfrm>
             <a:prstGeom prst="ellipse">
@@ -9523,7 +9523,7 @@
           </p:nvSpPr>
           <p:spPr>
             <a:xfrm>
-              <a:off x="4392670" y="4290416"/>
+              <a:off x="4066699" y="4290983"/>
               <a:ext cx="77571" cy="77571"/>
             </a:xfrm>
             <a:prstGeom prst="ellipse">
@@ -9549,7 +9549,7 @@
           </p:nvSpPr>
           <p:spPr>
             <a:xfrm>
-              <a:off x="4135900" y="4404430"/>
+              <a:off x="4161993" y="4405073"/>
               <a:ext cx="77571" cy="77571"/>
             </a:xfrm>
             <a:prstGeom prst="ellipse">
@@ -9575,7 +9575,7 @@
           </p:nvSpPr>
           <p:spPr>
             <a:xfrm>
-              <a:off x="4447453" y="4324101"/>
+              <a:off x="4288505" y="4326196"/>
               <a:ext cx="77571" cy="77571"/>
             </a:xfrm>
             <a:prstGeom prst="ellipse">
@@ -9601,7 +9601,7 @@
           </p:nvSpPr>
           <p:spPr>
             <a:xfrm>
-              <a:off x="4123270" y="4633571"/>
+              <a:off x="4175306" y="4635928"/>
               <a:ext cx="77571" cy="77571"/>
             </a:xfrm>
             <a:prstGeom prst="ellipse">
@@ -9627,7 +9627,7 @@
           </p:nvSpPr>
           <p:spPr>
             <a:xfrm>
-              <a:off x="4144928" y="4052911"/>
+              <a:off x="4436482" y="4054280"/>
               <a:ext cx="77571" cy="77571"/>
             </a:xfrm>
             <a:prstGeom prst="ellipse">
@@ -9653,7 +9653,7 @@
           </p:nvSpPr>
           <p:spPr>
             <a:xfrm>
-              <a:off x="4084228" y="4425619"/>
+              <a:off x="4280530" y="4427565"/>
               <a:ext cx="77571" cy="77571"/>
             </a:xfrm>
             <a:prstGeom prst="ellipse">
@@ -9679,7 +9679,7 @@
           </p:nvSpPr>
           <p:spPr>
             <a:xfrm>
-              <a:off x="4386672" y="4552086"/>
+              <a:off x="4124956" y="4553751"/>
               <a:ext cx="77571" cy="77571"/>
             </a:xfrm>
             <a:prstGeom prst="ellipse">
@@ -9705,7 +9705,7 @@
           </p:nvSpPr>
           <p:spPr>
             <a:xfrm>
-              <a:off x="4282957" y="4231531"/>
+              <a:off x="4510442" y="4234140"/>
               <a:ext cx="77571" cy="77571"/>
             </a:xfrm>
             <a:prstGeom prst="ellipse">
@@ -9731,7 +9731,7 @@
           </p:nvSpPr>
           <p:spPr>
             <a:xfrm>
-              <a:off x="4097204" y="4158112"/>
+              <a:off x="4174473" y="4157435"/>
               <a:ext cx="77571" cy="77571"/>
             </a:xfrm>
             <a:prstGeom prst="ellipse">
@@ -9757,7 +9757,7 @@
           </p:nvSpPr>
           <p:spPr>
             <a:xfrm>
-              <a:off x="4149021" y="3847402"/>
+              <a:off x="4432368" y="3847580"/>
               <a:ext cx="77571" cy="77571"/>
             </a:xfrm>
             <a:prstGeom prst="ellipse">
@@ -9783,7 +9783,7 @@
           </p:nvSpPr>
           <p:spPr>
             <a:xfrm>
-              <a:off x="4312800" y="3874433"/>
+              <a:off x="4423550" y="3871048"/>
               <a:ext cx="77571" cy="77571"/>
             </a:xfrm>
             <a:prstGeom prst="ellipse">
@@ -9809,7 +9809,7 @@
           </p:nvSpPr>
           <p:spPr>
             <a:xfrm>
-              <a:off x="4487096" y="3850260"/>
+              <a:off x="4381723" y="3850054"/>
               <a:ext cx="77571" cy="77571"/>
             </a:xfrm>
             <a:prstGeom prst="ellipse">
@@ -9835,7 +9835,7 @@
           </p:nvSpPr>
           <p:spPr>
             <a:xfrm>
-              <a:off x="4399522" y="3964937"/>
+              <a:off x="4242719" y="3963630"/>
               <a:ext cx="77571" cy="77571"/>
             </a:xfrm>
             <a:prstGeom prst="ellipse">
@@ -9861,7 +9861,7 @@
           </p:nvSpPr>
           <p:spPr>
             <a:xfrm>
-              <a:off x="4343885" y="4240234"/>
+              <a:off x="4281827" y="4241021"/>
               <a:ext cx="77571" cy="77571"/>
             </a:xfrm>
             <a:prstGeom prst="ellipse">
@@ -9887,7 +9887,7 @@
           </p:nvSpPr>
           <p:spPr>
             <a:xfrm>
-              <a:off x="4159996" y="4270285"/>
+              <a:off x="4254400" y="4270513"/>
               <a:ext cx="77571" cy="77571"/>
             </a:xfrm>
             <a:prstGeom prst="ellipse">
@@ -9913,7 +9913,7 @@
           </p:nvSpPr>
           <p:spPr>
             <a:xfrm>
-              <a:off x="4510442" y="4163144"/>
+              <a:off x="4490773" y="4163442"/>
               <a:ext cx="77571" cy="77571"/>
             </a:xfrm>
             <a:prstGeom prst="ellipse">
@@ -9939,7 +9939,7 @@
           </p:nvSpPr>
           <p:spPr>
             <a:xfrm>
-              <a:off x="4209270" y="4117016"/>
+              <a:off x="4106673" y="4117144"/>
               <a:ext cx="77571" cy="77571"/>
             </a:xfrm>
             <a:prstGeom prst="ellipse">
@@ -9965,7 +9965,7 @@
           </p:nvSpPr>
           <p:spPr>
             <a:xfrm>
-              <a:off x="4366309" y="4104458"/>
+              <a:off x="4385411" y="4107070"/>
               <a:ext cx="77571" cy="77571"/>
             </a:xfrm>
             <a:prstGeom prst="ellipse">
@@ -9991,7 +9991,7 @@
           </p:nvSpPr>
           <p:spPr>
             <a:xfrm>
-              <a:off x="4488857" y="3905322"/>
+              <a:off x="4088766" y="3904311"/>
               <a:ext cx="77571" cy="77571"/>
             </a:xfrm>
             <a:prstGeom prst="ellipse">
@@ -10017,7 +10017,7 @@
           </p:nvSpPr>
           <p:spPr>
             <a:xfrm>
-              <a:off x="4109959" y="4036838"/>
+              <a:off x="4129556" y="4033767"/>
               <a:ext cx="77571" cy="77571"/>
             </a:xfrm>
             <a:prstGeom prst="ellipse">
@@ -10043,7 +10043,7 @@
           </p:nvSpPr>
           <p:spPr>
             <a:xfrm>
-              <a:off x="4150519" y="4083040"/>
+              <a:off x="4480993" y="4084288"/>
               <a:ext cx="77571" cy="77571"/>
             </a:xfrm>
             <a:prstGeom prst="ellipse">
@@ -10069,7 +10069,7 @@
           </p:nvSpPr>
           <p:spPr>
             <a:xfrm>
-              <a:off x="4057574" y="3872059"/>
+              <a:off x="4444143" y="3874330"/>
               <a:ext cx="77571" cy="77571"/>
             </a:xfrm>
             <a:prstGeom prst="ellipse">
@@ -10095,7 +10095,7 @@
           </p:nvSpPr>
           <p:spPr>
             <a:xfrm>
-              <a:off x="4066343" y="4118712"/>
+              <a:off x="4371323" y="4118986"/>
               <a:ext cx="77571" cy="77571"/>
             </a:xfrm>
             <a:prstGeom prst="ellipse">
@@ -10121,7 +10121,7 @@
           </p:nvSpPr>
           <p:spPr>
             <a:xfrm>
-              <a:off x="4488879" y="3928958"/>
+              <a:off x="4349091" y="3928350"/>
               <a:ext cx="77571" cy="77571"/>
             </a:xfrm>
             <a:prstGeom prst="ellipse">
@@ -10147,42 +10147,42 @@
           </p:nvSpPr>
           <p:spPr>
             <a:xfrm>
-              <a:off x="1736559" y="3981239"/>
-              <a:ext cx="2579419" cy="801633"/>
+              <a:off x="1791829" y="3980623"/>
+              <a:ext cx="2522065" cy="804147"/>
             </a:xfrm>
             <a:custGeom>
               <a:avLst/>
               <a:pathLst>
-                <a:path w="2579419" h="801633">
+                <a:path w="2522065" h="804147">
                   <a:moveTo>
-                    <a:pt x="0" y="326916"/>
+                    <a:pt x="0" y="327941"/>
                   </a:moveTo>
                   <a:lnTo>
-                    <a:pt x="1362761" y="242110"/>
+                    <a:pt x="1332459" y="242870"/>
                   </a:lnTo>
                   <a:lnTo>
-                    <a:pt x="1719613" y="186612"/>
+                    <a:pt x="1681377" y="187198"/>
                   </a:lnTo>
                   <a:lnTo>
-                    <a:pt x="2222567" y="83749"/>
+                    <a:pt x="2173148" y="84011"/>
                   </a:lnTo>
                   <a:lnTo>
-                    <a:pt x="2579419" y="0"/>
+                    <a:pt x="2522065" y="0"/>
                   </a:lnTo>
                   <a:lnTo>
-                    <a:pt x="2579419" y="425823"/>
+                    <a:pt x="2522065" y="427158"/>
                   </a:lnTo>
                   <a:lnTo>
-                    <a:pt x="2222567" y="439293"/>
+                    <a:pt x="2173148" y="440670"/>
                   </a:lnTo>
                   <a:lnTo>
-                    <a:pt x="1719613" y="473452"/>
+                    <a:pt x="1681377" y="474937"/>
                   </a:lnTo>
                   <a:lnTo>
-                    <a:pt x="1362761" y="515174"/>
+                    <a:pt x="1332459" y="516789"/>
                   </a:lnTo>
                   <a:lnTo>
-                    <a:pt x="0" y="801633"/>
+                    <a:pt x="0" y="804147"/>
                   </a:lnTo>
                   <a:close/>
                 </a:path>
@@ -10208,27 +10208,27 @@
           </p:nvSpPr>
           <p:spPr>
             <a:xfrm>
-              <a:off x="1736559" y="3981239"/>
-              <a:ext cx="2579419" cy="326916"/>
+              <a:off x="1791829" y="3980623"/>
+              <a:ext cx="2522065" cy="327941"/>
             </a:xfrm>
             <a:custGeom>
               <a:avLst/>
               <a:pathLst>
-                <a:path w="2579419" h="326916">
+                <a:path w="2522065" h="327941">
                   <a:moveTo>
-                    <a:pt x="0" y="326916"/>
+                    <a:pt x="0" y="327941"/>
                   </a:moveTo>
                   <a:lnTo>
-                    <a:pt x="1362761" y="242110"/>
+                    <a:pt x="1332459" y="242870"/>
                   </a:lnTo>
                   <a:lnTo>
-                    <a:pt x="1719613" y="186612"/>
+                    <a:pt x="1681377" y="187198"/>
                   </a:lnTo>
                   <a:lnTo>
-                    <a:pt x="2222567" y="83749"/>
+                    <a:pt x="2173148" y="84011"/>
                   </a:lnTo>
                   <a:lnTo>
-                    <a:pt x="2579419" y="0"/>
+                    <a:pt x="2522065" y="0"/>
                   </a:lnTo>
                 </a:path>
               </a:pathLst>
@@ -10248,27 +10248,27 @@
           </p:nvSpPr>
           <p:spPr>
             <a:xfrm>
-              <a:off x="1736559" y="4407062"/>
-              <a:ext cx="2579419" cy="375810"/>
+              <a:off x="1791829" y="4407781"/>
+              <a:ext cx="2522065" cy="376989"/>
             </a:xfrm>
             <a:custGeom>
               <a:avLst/>
               <a:pathLst>
-                <a:path w="2579419" h="375810">
+                <a:path w="2522065" h="376989">
                   <a:moveTo>
-                    <a:pt x="2579419" y="0"/>
+                    <a:pt x="2522065" y="0"/>
                   </a:moveTo>
                   <a:lnTo>
-                    <a:pt x="2222567" y="13470"/>
+                    <a:pt x="2173148" y="13512"/>
                   </a:lnTo>
                   <a:lnTo>
-                    <a:pt x="1719613" y="47629"/>
+                    <a:pt x="1681377" y="47778"/>
                   </a:lnTo>
                   <a:lnTo>
-                    <a:pt x="1362761" y="89350"/>
+                    <a:pt x="1332459" y="89631"/>
                   </a:lnTo>
                   <a:lnTo>
-                    <a:pt x="0" y="375810"/>
+                    <a:pt x="0" y="376989"/>
                   </a:lnTo>
                 </a:path>
               </a:pathLst>
@@ -10288,27 +10288,27 @@
           </p:nvSpPr>
           <p:spPr>
             <a:xfrm>
-              <a:off x="1736559" y="4194151"/>
-              <a:ext cx="2579419" cy="351363"/>
+              <a:off x="1791829" y="4194202"/>
+              <a:ext cx="2522065" cy="352465"/>
             </a:xfrm>
             <a:custGeom>
               <a:avLst/>
               <a:pathLst>
-                <a:path w="2579419" h="351363">
+                <a:path w="2522065" h="352465">
                   <a:moveTo>
-                    <a:pt x="0" y="351363"/>
+                    <a:pt x="0" y="352465"/>
                   </a:moveTo>
                   <a:lnTo>
-                    <a:pt x="1362761" y="165730"/>
+                    <a:pt x="1332459" y="166250"/>
                   </a:lnTo>
                   <a:lnTo>
-                    <a:pt x="1719613" y="117121"/>
+                    <a:pt x="1681377" y="117488"/>
                   </a:lnTo>
                   <a:lnTo>
-                    <a:pt x="2222567" y="48609"/>
+                    <a:pt x="2173148" y="48762"/>
                   </a:lnTo>
                   <a:lnTo>
-                    <a:pt x="2579419" y="0"/>
+                    <a:pt x="2522065" y="0"/>
                   </a:lnTo>
                 </a:path>
               </a:pathLst>
@@ -10337,7 +10337,7 @@
           </p:nvSpPr>
           <p:spPr>
             <a:xfrm>
-              <a:off x="3836285" y="3510846"/>
+              <a:off x="3834200" y="3509140"/>
               <a:ext cx="479694" cy="82021"/>
             </a:xfrm>
             <a:prstGeom prst="rect">
@@ -10444,7 +10444,7 @@
           </p:nvSpPr>
           <p:spPr>
             <a:xfrm rot="-5400000">
-              <a:off x="1177387" y="4790647"/>
+              <a:off x="1177387" y="4792726"/>
               <a:ext cx="194218" cy="100218"/>
             </a:xfrm>
             <a:prstGeom prst="rect">
@@ -10490,7 +10490,7 @@
           </p:nvSpPr>
           <p:spPr>
             <a:xfrm rot="-5400000">
-              <a:off x="1177387" y="4495468"/>
+              <a:off x="1177387" y="4496621"/>
               <a:ext cx="194218" cy="100218"/>
             </a:xfrm>
             <a:prstGeom prst="rect">
@@ -10536,7 +10536,7 @@
           </p:nvSpPr>
           <p:spPr>
             <a:xfrm rot="-5400000">
-              <a:off x="1177387" y="4200289"/>
+              <a:off x="1177387" y="4200516"/>
               <a:ext cx="194218" cy="100218"/>
             </a:xfrm>
             <a:prstGeom prst="rect">
@@ -10582,7 +10582,7 @@
           </p:nvSpPr>
           <p:spPr>
             <a:xfrm rot="-5400000">
-              <a:off x="1177387" y="3905110"/>
+              <a:off x="1177387" y="3904412"/>
               <a:ext cx="194218" cy="100218"/>
             </a:xfrm>
             <a:prstGeom prst="rect">
@@ -10628,7 +10628,7 @@
           </p:nvSpPr>
           <p:spPr>
             <a:xfrm rot="-5400000">
-              <a:off x="1177387" y="3609930"/>
+              <a:off x="1177387" y="3608307"/>
               <a:ext cx="194218" cy="100218"/>
             </a:xfrm>
             <a:prstGeom prst="rect">
@@ -10674,7 +10674,7 @@
           </p:nvSpPr>
           <p:spPr>
             <a:xfrm rot="-5400000">
-              <a:off x="1177387" y="3314751"/>
+              <a:off x="1177387" y="3312202"/>
               <a:ext cx="194218" cy="100218"/>
             </a:xfrm>
             <a:prstGeom prst="rect">
@@ -10720,7 +10720,7 @@
           </p:nvSpPr>
           <p:spPr>
             <a:xfrm>
-              <a:off x="1370425" y="4840756"/>
+              <a:off x="1370425" y="4842835"/>
               <a:ext cx="37957" cy="0"/>
             </a:xfrm>
             <a:custGeom>
@@ -10760,7 +10760,7 @@
           </p:nvSpPr>
           <p:spPr>
             <a:xfrm>
-              <a:off x="1370425" y="4545577"/>
+              <a:off x="1370425" y="4546730"/>
               <a:ext cx="37957" cy="0"/>
             </a:xfrm>
             <a:custGeom>
@@ -10800,7 +10800,7 @@
           </p:nvSpPr>
           <p:spPr>
             <a:xfrm>
-              <a:off x="1370425" y="4250398"/>
+              <a:off x="1370425" y="4250626"/>
               <a:ext cx="37957" cy="0"/>
             </a:xfrm>
             <a:custGeom>
@@ -10840,7 +10840,7 @@
           </p:nvSpPr>
           <p:spPr>
             <a:xfrm>
-              <a:off x="1370425" y="3955219"/>
+              <a:off x="1370425" y="3954521"/>
               <a:ext cx="37957" cy="0"/>
             </a:xfrm>
             <a:custGeom>
@@ -10880,7 +10880,7 @@
           </p:nvSpPr>
           <p:spPr>
             <a:xfrm>
-              <a:off x="1370425" y="3660040"/>
+              <a:off x="1370425" y="3658416"/>
               <a:ext cx="37957" cy="0"/>
             </a:xfrm>
             <a:custGeom>
@@ -10920,7 +10920,7 @@
           </p:nvSpPr>
           <p:spPr>
             <a:xfrm>
-              <a:off x="1370425" y="3364860"/>
+              <a:off x="1370425" y="3362311"/>
               <a:ext cx="37957" cy="0"/>
             </a:xfrm>
             <a:custGeom>
@@ -11000,7 +11000,7 @@
           </p:nvSpPr>
           <p:spPr>
             <a:xfrm>
-              <a:off x="1736559" y="4899543"/>
+              <a:off x="1791829" y="4899543"/>
               <a:ext cx="0" cy="37957"/>
             </a:xfrm>
             <a:custGeom>
@@ -11040,7 +11040,7 @@
           </p:nvSpPr>
           <p:spPr>
             <a:xfrm>
-              <a:off x="2596366" y="4899543"/>
+              <a:off x="2632517" y="4899543"/>
               <a:ext cx="0" cy="37957"/>
             </a:xfrm>
             <a:custGeom>
@@ -11080,7 +11080,7 @@
           </p:nvSpPr>
           <p:spPr>
             <a:xfrm>
-              <a:off x="3456173" y="4899543"/>
+              <a:off x="3473206" y="4899543"/>
               <a:ext cx="0" cy="37957"/>
             </a:xfrm>
             <a:custGeom>
@@ -11120,7 +11120,7 @@
           </p:nvSpPr>
           <p:spPr>
             <a:xfrm>
-              <a:off x="4315979" y="4899543"/>
+              <a:off x="4313895" y="4899543"/>
               <a:ext cx="0" cy="37957"/>
             </a:xfrm>
             <a:custGeom>
@@ -11160,7 +11160,7 @@
           </p:nvSpPr>
           <p:spPr>
             <a:xfrm>
-              <a:off x="1697697" y="4967867"/>
+              <a:off x="1752967" y="4967867"/>
               <a:ext cx="77724" cy="100218"/>
             </a:xfrm>
             <a:prstGeom prst="rect">
@@ -11206,7 +11206,7 @@
           </p:nvSpPr>
           <p:spPr>
             <a:xfrm>
-              <a:off x="2557504" y="4967867"/>
+              <a:off x="2593655" y="4967867"/>
               <a:ext cx="77724" cy="100218"/>
             </a:xfrm>
             <a:prstGeom prst="rect">
@@ -11252,7 +11252,7 @@
           </p:nvSpPr>
           <p:spPr>
             <a:xfrm>
-              <a:off x="3417311" y="4967867"/>
+              <a:off x="3434344" y="4967867"/>
               <a:ext cx="77724" cy="100218"/>
             </a:xfrm>
             <a:prstGeom prst="rect">
@@ -11298,7 +11298,7 @@
           </p:nvSpPr>
           <p:spPr>
             <a:xfrm>
-              <a:off x="4277117" y="4967867"/>
+              <a:off x="4275033" y="4967867"/>
               <a:ext cx="77724" cy="100218"/>
             </a:xfrm>
             <a:prstGeom prst="rect">
@@ -11462,7 +11462,7 @@
           </p:nvSpPr>
           <p:spPr>
             <a:xfrm>
-              <a:off x="5218900" y="4320942"/>
+              <a:off x="5295327" y="4316320"/>
               <a:ext cx="77571" cy="77571"/>
             </a:xfrm>
             <a:prstGeom prst="ellipse">
@@ -11488,7 +11488,7 @@
           </p:nvSpPr>
           <p:spPr>
             <a:xfrm>
-              <a:off x="4948748" y="3598441"/>
+              <a:off x="5069734" y="3600415"/>
               <a:ext cx="77571" cy="77571"/>
             </a:xfrm>
             <a:prstGeom prst="ellipse">
@@ -11514,7 +11514,7 @@
           </p:nvSpPr>
           <p:spPr>
             <a:xfrm>
-              <a:off x="5320649" y="4395499"/>
+              <a:off x="5248000" y="4394340"/>
               <a:ext cx="77571" cy="77571"/>
             </a:xfrm>
             <a:prstGeom prst="ellipse">
@@ -11540,7 +11540,7 @@
           </p:nvSpPr>
           <p:spPr>
             <a:xfrm>
-              <a:off x="5358532" y="4138873"/>
+              <a:off x="4979971" y="4136911"/>
               <a:ext cx="77571" cy="77571"/>
             </a:xfrm>
             <a:prstGeom prst="ellipse">
@@ -11566,7 +11566,7 @@
           </p:nvSpPr>
           <p:spPr>
             <a:xfrm>
-              <a:off x="4952182" y="4447881"/>
+              <a:off x="4966786" y="4445751"/>
               <a:ext cx="77571" cy="77571"/>
             </a:xfrm>
             <a:prstGeom prst="ellipse">
@@ -11592,7 +11592,7 @@
           </p:nvSpPr>
           <p:spPr>
             <a:xfrm>
-              <a:off x="5391607" y="3506257"/>
+              <a:off x="5070160" y="3505722"/>
               <a:ext cx="77571" cy="77571"/>
             </a:xfrm>
             <a:prstGeom prst="ellipse">
@@ -11618,7 +11618,7 @@
           </p:nvSpPr>
           <p:spPr>
             <a:xfrm>
-              <a:off x="5384715" y="3461564"/>
+              <a:off x="5240337" y="3461564"/>
               <a:ext cx="77571" cy="77571"/>
             </a:xfrm>
             <a:prstGeom prst="ellipse">
@@ -11644,7 +11644,7 @@
           </p:nvSpPr>
           <p:spPr>
             <a:xfrm>
-              <a:off x="5044190" y="3852441"/>
+              <a:off x="5024606" y="3852662"/>
               <a:ext cx="77571" cy="77571"/>
             </a:xfrm>
             <a:prstGeom prst="ellipse">
@@ -11670,7 +11670,7 @@
           </p:nvSpPr>
           <p:spPr>
             <a:xfrm>
-              <a:off x="5122011" y="4607040"/>
+              <a:off x="4948748" y="4602746"/>
               <a:ext cx="77571" cy="77571"/>
             </a:xfrm>
             <a:prstGeom prst="ellipse">
@@ -11696,7 +11696,7 @@
           </p:nvSpPr>
           <p:spPr>
             <a:xfrm>
-              <a:off x="5091259" y="4204735"/>
+              <a:off x="5351002" y="4200807"/>
               <a:ext cx="77571" cy="77571"/>
             </a:xfrm>
             <a:prstGeom prst="ellipse">
@@ -11722,7 +11722,7 @@
           </p:nvSpPr>
           <p:spPr>
             <a:xfrm>
-              <a:off x="5822458" y="4492493"/>
+              <a:off x="5815969" y="4492795"/>
               <a:ext cx="77571" cy="77571"/>
             </a:xfrm>
             <a:prstGeom prst="ellipse">
@@ -11748,7 +11748,7 @@
           </p:nvSpPr>
           <p:spPr>
             <a:xfrm>
-              <a:off x="5939286" y="3951218"/>
+              <a:off x="5770943" y="3948056"/>
               <a:ext cx="77571" cy="77571"/>
             </a:xfrm>
             <a:prstGeom prst="ellipse">
@@ -11774,7 +11774,7 @@
           </p:nvSpPr>
           <p:spPr>
             <a:xfrm>
-              <a:off x="6122322" y="4400406"/>
+              <a:off x="6085229" y="4395814"/>
               <a:ext cx="77571" cy="77571"/>
             </a:xfrm>
             <a:prstGeom prst="ellipse">
@@ -11800,7 +11800,7 @@
           </p:nvSpPr>
           <p:spPr>
             <a:xfrm>
-              <a:off x="6190747" y="4652728"/>
+              <a:off x="5801618" y="4652840"/>
               <a:ext cx="77571" cy="77571"/>
             </a:xfrm>
             <a:prstGeom prst="ellipse">
@@ -11826,7 +11826,7 @@
           </p:nvSpPr>
           <p:spPr>
             <a:xfrm>
-              <a:off x="6079568" y="4278126"/>
+              <a:off x="5829837" y="4277497"/>
               <a:ext cx="77571" cy="77571"/>
             </a:xfrm>
             <a:prstGeom prst="ellipse">
@@ -11852,7 +11852,7 @@
           </p:nvSpPr>
           <p:spPr>
             <a:xfrm>
-              <a:off x="5855591" y="3921732"/>
+              <a:off x="5988178" y="3922636"/>
               <a:ext cx="77571" cy="77571"/>
             </a:xfrm>
             <a:prstGeom prst="ellipse">
@@ -11878,7 +11878,7 @@
           </p:nvSpPr>
           <p:spPr>
             <a:xfrm>
-              <a:off x="6190023" y="4735762"/>
+              <a:off x="5839958" y="4735974"/>
               <a:ext cx="77571" cy="77571"/>
             </a:xfrm>
             <a:prstGeom prst="ellipse">
@@ -11904,7 +11904,7 @@
           </p:nvSpPr>
           <p:spPr>
             <a:xfrm>
-              <a:off x="5859283" y="4621383"/>
+              <a:off x="5858814" y="4617293"/>
               <a:ext cx="77571" cy="77571"/>
             </a:xfrm>
             <a:prstGeom prst="ellipse">
@@ -11930,7 +11930,7 @@
           </p:nvSpPr>
           <p:spPr>
             <a:xfrm>
-              <a:off x="5963906" y="4479451"/>
+              <a:off x="6111899" y="4475548"/>
               <a:ext cx="77571" cy="77571"/>
             </a:xfrm>
             <a:prstGeom prst="ellipse">
@@ -11956,7 +11956,7 @@
           </p:nvSpPr>
           <p:spPr>
             <a:xfrm>
-              <a:off x="5962156" y="4732915"/>
+              <a:off x="6231528" y="4731659"/>
               <a:ext cx="77571" cy="77571"/>
             </a:xfrm>
             <a:prstGeom prst="ellipse">
@@ -11982,7 +11982,7 @@
           </p:nvSpPr>
           <p:spPr>
             <a:xfrm>
-              <a:off x="6258768" y="4611309"/>
+              <a:off x="6179675" y="4607115"/>
               <a:ext cx="77571" cy="77571"/>
             </a:xfrm>
             <a:prstGeom prst="ellipse">
@@ -12008,7 +12008,7 @@
           </p:nvSpPr>
           <p:spPr>
             <a:xfrm>
-              <a:off x="6206975" y="4734130"/>
+              <a:off x="6078915" y="4728440"/>
               <a:ext cx="77571" cy="77571"/>
             </a:xfrm>
             <a:prstGeom prst="ellipse">
@@ -12034,7 +12034,7 @@
           </p:nvSpPr>
           <p:spPr>
             <a:xfrm>
-              <a:off x="6249750" y="4436516"/>
+              <a:off x="6199530" y="4433239"/>
               <a:ext cx="77571" cy="77571"/>
             </a:xfrm>
             <a:prstGeom prst="ellipse">
@@ -12060,7 +12060,7 @@
           </p:nvSpPr>
           <p:spPr>
             <a:xfrm>
-              <a:off x="6007758" y="4376855"/>
+              <a:off x="6105236" y="4378176"/>
               <a:ext cx="77571" cy="77571"/>
             </a:xfrm>
             <a:prstGeom prst="ellipse">
@@ -12086,7 +12086,7 @@
           </p:nvSpPr>
           <p:spPr>
             <a:xfrm>
-              <a:off x="5977560" y="4114133"/>
+              <a:off x="5854699" y="4110801"/>
               <a:ext cx="77571" cy="77571"/>
             </a:xfrm>
             <a:prstGeom prst="ellipse">
@@ -12112,7 +12112,7 @@
           </p:nvSpPr>
           <p:spPr>
             <a:xfrm>
-              <a:off x="6202260" y="4155232"/>
+              <a:off x="5804114" y="4154390"/>
               <a:ext cx="77571" cy="77571"/>
             </a:xfrm>
             <a:prstGeom prst="ellipse">
@@ -12138,7 +12138,7 @@
           </p:nvSpPr>
           <p:spPr>
             <a:xfrm>
-              <a:off x="6255151" y="4492998"/>
+              <a:off x="6214939" y="4490573"/>
               <a:ext cx="77571" cy="77571"/>
             </a:xfrm>
             <a:prstGeom prst="ellipse">
@@ -12164,7 +12164,7 @@
           </p:nvSpPr>
           <p:spPr>
             <a:xfrm>
-              <a:off x="6174129" y="4794129"/>
+              <a:off x="5788516" y="4794129"/>
               <a:ext cx="77571" cy="77571"/>
             </a:xfrm>
             <a:prstGeom prst="ellipse">
@@ -12190,7 +12190,7 @@
           </p:nvSpPr>
           <p:spPr>
             <a:xfrm>
-              <a:off x="6803598" y="4482205"/>
+              <a:off x="6792271" y="4480430"/>
               <a:ext cx="77571" cy="77571"/>
             </a:xfrm>
             <a:prstGeom prst="ellipse">
@@ -12216,7 +12216,7 @@
           </p:nvSpPr>
           <p:spPr>
             <a:xfrm>
-              <a:off x="6738034" y="4551714"/>
+              <a:off x="6840093" y="4552463"/>
               <a:ext cx="77571" cy="77571"/>
             </a:xfrm>
             <a:prstGeom prst="ellipse">
@@ -12242,7 +12242,7 @@
           </p:nvSpPr>
           <p:spPr>
             <a:xfrm>
-              <a:off x="7102560" y="4525419"/>
+              <a:off x="6695439" y="4526010"/>
               <a:ext cx="77571" cy="77571"/>
             </a:xfrm>
             <a:prstGeom prst="ellipse">
@@ -12268,7 +12268,7 @@
           </p:nvSpPr>
           <p:spPr>
             <a:xfrm>
-              <a:off x="6885979" y="4583696"/>
+              <a:off x="6635458" y="4584073"/>
               <a:ext cx="77571" cy="77571"/>
             </a:xfrm>
             <a:prstGeom prst="ellipse">
@@ -12294,7 +12294,7 @@
           </p:nvSpPr>
           <p:spPr>
             <a:xfrm>
-              <a:off x="6978631" y="3668579"/>
+              <a:off x="6982906" y="3667095"/>
               <a:ext cx="77571" cy="77571"/>
             </a:xfrm>
             <a:prstGeom prst="ellipse">
@@ -12320,7 +12320,7 @@
           </p:nvSpPr>
           <p:spPr>
             <a:xfrm>
-              <a:off x="6904393" y="3714837"/>
+              <a:off x="6645417" y="3717130"/>
               <a:ext cx="77571" cy="77571"/>
             </a:xfrm>
             <a:prstGeom prst="ellipse">
@@ -12346,7 +12346,7 @@
           </p:nvSpPr>
           <p:spPr>
             <a:xfrm>
-              <a:off x="6869554" y="4300278"/>
+              <a:off x="7097444" y="4299055"/>
               <a:ext cx="77571" cy="77571"/>
             </a:xfrm>
             <a:prstGeom prst="ellipse">
@@ -12372,7 +12372,7 @@
           </p:nvSpPr>
           <p:spPr>
             <a:xfrm>
-              <a:off x="6810395" y="4472299"/>
+              <a:off x="6925047" y="4470810"/>
               <a:ext cx="77571" cy="77571"/>
             </a:xfrm>
             <a:prstGeom prst="ellipse">
@@ -12398,7 +12398,7 @@
           </p:nvSpPr>
           <p:spPr>
             <a:xfrm>
-              <a:off x="6929025" y="4601493"/>
+              <a:off x="6995317" y="4597350"/>
               <a:ext cx="77571" cy="77571"/>
             </a:xfrm>
             <a:prstGeom prst="ellipse">
@@ -12424,7 +12424,7 @@
           </p:nvSpPr>
           <p:spPr>
             <a:xfrm>
-              <a:off x="7009900" y="4259674"/>
+              <a:off x="6968269" y="4262357"/>
               <a:ext cx="77571" cy="77571"/>
             </a:xfrm>
             <a:prstGeom prst="ellipse">
@@ -12450,7 +12450,7 @@
           </p:nvSpPr>
           <p:spPr>
             <a:xfrm>
-              <a:off x="6906106" y="4032792"/>
+              <a:off x="6948387" y="4032338"/>
               <a:ext cx="77571" cy="77571"/>
             </a:xfrm>
             <a:prstGeom prst="ellipse">
@@ -12476,7 +12476,7 @@
           </p:nvSpPr>
           <p:spPr>
             <a:xfrm>
-              <a:off x="6998263" y="4656771"/>
+              <a:off x="6693716" y="4655101"/>
               <a:ext cx="77571" cy="77571"/>
             </a:xfrm>
             <a:prstGeom prst="ellipse">
@@ -12502,7 +12502,7 @@
           </p:nvSpPr>
           <p:spPr>
             <a:xfrm>
-              <a:off x="6755040" y="3865915"/>
+              <a:off x="6927635" y="3864017"/>
               <a:ext cx="77571" cy="77571"/>
             </a:xfrm>
             <a:prstGeom prst="ellipse">
@@ -12528,7 +12528,7 @@
           </p:nvSpPr>
           <p:spPr>
             <a:xfrm>
-              <a:off x="6895261" y="4240861"/>
+              <a:off x="6632739" y="4238898"/>
               <a:ext cx="77571" cy="77571"/>
             </a:xfrm>
             <a:prstGeom prst="ellipse">
@@ -12554,7 +12554,7 @@
           </p:nvSpPr>
           <p:spPr>
             <a:xfrm>
-              <a:off x="7011607" y="4305210"/>
+              <a:off x="6966247" y="4303250"/>
               <a:ext cx="77571" cy="77571"/>
             </a:xfrm>
             <a:prstGeom prst="ellipse">
@@ -12580,7 +12580,7 @@
           </p:nvSpPr>
           <p:spPr>
             <a:xfrm>
-              <a:off x="6954266" y="4589593"/>
+              <a:off x="6821034" y="4589511"/>
               <a:ext cx="77571" cy="77571"/>
             </a:xfrm>
             <a:prstGeom prst="ellipse">
@@ -12606,7 +12606,7 @@
           </p:nvSpPr>
           <p:spPr>
             <a:xfrm>
-              <a:off x="6927221" y="4033274"/>
+              <a:off x="6762381" y="4033107"/>
               <a:ext cx="77571" cy="77571"/>
             </a:xfrm>
             <a:prstGeom prst="ellipse">
@@ -12632,7 +12632,7 @@
           </p:nvSpPr>
           <p:spPr>
             <a:xfrm>
-              <a:off x="6800921" y="4289562"/>
+              <a:off x="6762563" y="4288713"/>
               <a:ext cx="77571" cy="77571"/>
             </a:xfrm>
             <a:prstGeom prst="ellipse">
@@ -12658,7 +12658,7 @@
           </p:nvSpPr>
           <p:spPr>
             <a:xfrm>
-              <a:off x="6919096" y="4009127"/>
+              <a:off x="6798514" y="4006214"/>
               <a:ext cx="77571" cy="77571"/>
             </a:xfrm>
             <a:prstGeom prst="ellipse">
@@ -12684,7 +12684,7 @@
           </p:nvSpPr>
           <p:spPr>
             <a:xfrm>
-              <a:off x="7041606" y="4258452"/>
+              <a:off x="6916361" y="4253085"/>
               <a:ext cx="77571" cy="77571"/>
             </a:xfrm>
             <a:prstGeom prst="ellipse">
@@ -12710,7 +12710,7 @@
           </p:nvSpPr>
           <p:spPr>
             <a:xfrm>
-              <a:off x="7712266" y="4426355"/>
+              <a:off x="7491037" y="4423050"/>
               <a:ext cx="77571" cy="77571"/>
             </a:xfrm>
             <a:prstGeom prst="ellipse">
@@ -12736,7 +12736,7 @@
           </p:nvSpPr>
           <p:spPr>
             <a:xfrm>
-              <a:off x="7638035" y="4525815"/>
+              <a:off x="7913359" y="4523834"/>
               <a:ext cx="77571" cy="77571"/>
             </a:xfrm>
             <a:prstGeom prst="ellipse">
@@ -12762,7 +12762,7 @@
           </p:nvSpPr>
           <p:spPr>
             <a:xfrm>
-              <a:off x="7530641" y="4274102"/>
+              <a:off x="7810845" y="4269433"/>
               <a:ext cx="77571" cy="77571"/>
             </a:xfrm>
             <a:prstGeom prst="ellipse">
@@ -12788,7 +12788,7 @@
           </p:nvSpPr>
           <p:spPr>
             <a:xfrm>
-              <a:off x="7774273" y="4044068"/>
+              <a:off x="7594132" y="4043194"/>
               <a:ext cx="77571" cy="77571"/>
             </a:xfrm>
             <a:prstGeom prst="ellipse">
@@ -12814,7 +12814,7 @@
           </p:nvSpPr>
           <p:spPr>
             <a:xfrm>
-              <a:off x="7573094" y="4245036"/>
+              <a:off x="7725498" y="4242721"/>
               <a:ext cx="77571" cy="77571"/>
             </a:xfrm>
             <a:prstGeom prst="ellipse">
@@ -12840,7 +12840,7 @@
           </p:nvSpPr>
           <p:spPr>
             <a:xfrm>
-              <a:off x="7492920" y="4289413"/>
+              <a:off x="7559944" y="4285396"/>
               <a:ext cx="77571" cy="77571"/>
             </a:xfrm>
             <a:prstGeom prst="ellipse">
@@ -12866,7 +12866,7 @@
           </p:nvSpPr>
           <p:spPr>
             <a:xfrm>
-              <a:off x="7764109" y="4440330"/>
+              <a:off x="7529319" y="4440951"/>
               <a:ext cx="77571" cy="77571"/>
             </a:xfrm>
             <a:prstGeom prst="ellipse">
@@ -12892,7 +12892,7 @@
           </p:nvSpPr>
           <p:spPr>
             <a:xfrm>
-              <a:off x="7931158" y="4330803"/>
+              <a:off x="7517453" y="4331008"/>
               <a:ext cx="77571" cy="77571"/>
             </a:xfrm>
             <a:prstGeom prst="ellipse">
@@ -12918,7 +12918,7 @@
           </p:nvSpPr>
           <p:spPr>
             <a:xfrm>
-              <a:off x="7568039" y="4440228"/>
+              <a:off x="7567861" y="4440421"/>
               <a:ext cx="77571" cy="77571"/>
             </a:xfrm>
             <a:prstGeom prst="ellipse">
@@ -12944,7 +12944,7 @@
           </p:nvSpPr>
           <p:spPr>
             <a:xfrm>
-              <a:off x="7873364" y="4349530"/>
+              <a:off x="7895316" y="4348877"/>
               <a:ext cx="77571" cy="77571"/>
             </a:xfrm>
             <a:prstGeom prst="ellipse">
@@ -12970,7 +12970,7 @@
           </p:nvSpPr>
           <p:spPr>
             <a:xfrm>
-              <a:off x="7898082" y="4086257"/>
+              <a:off x="7566470" y="4087117"/>
               <a:ext cx="77571" cy="77571"/>
             </a:xfrm>
             <a:prstGeom prst="ellipse">
@@ -12996,7 +12996,7 @@
           </p:nvSpPr>
           <p:spPr>
             <a:xfrm>
-              <a:off x="7925245" y="3782066"/>
+              <a:off x="7906019" y="3779141"/>
               <a:ext cx="77571" cy="77571"/>
             </a:xfrm>
             <a:prstGeom prst="ellipse">
@@ -13022,7 +13022,7 @@
           </p:nvSpPr>
           <p:spPr>
             <a:xfrm>
-              <a:off x="7520689" y="4457351"/>
+              <a:off x="7479830" y="4455051"/>
               <a:ext cx="77571" cy="77571"/>
             </a:xfrm>
             <a:prstGeom prst="ellipse">
@@ -13048,7 +13048,7 @@
           </p:nvSpPr>
           <p:spPr>
             <a:xfrm>
-              <a:off x="7873187" y="4627407"/>
+              <a:off x="7715745" y="4624107"/>
               <a:ext cx="77571" cy="77571"/>
             </a:xfrm>
             <a:prstGeom prst="ellipse">
@@ -13074,7 +13074,7 @@
           </p:nvSpPr>
           <p:spPr>
             <a:xfrm>
-              <a:off x="7682167" y="4589362"/>
+              <a:off x="7605976" y="4589000"/>
               <a:ext cx="77571" cy="77571"/>
             </a:xfrm>
             <a:prstGeom prst="ellipse">
@@ -13100,7 +13100,7 @@
           </p:nvSpPr>
           <p:spPr>
             <a:xfrm>
-              <a:off x="7513400" y="4325503"/>
+              <a:off x="7899419" y="4323504"/>
               <a:ext cx="77571" cy="77571"/>
             </a:xfrm>
             <a:prstGeom prst="ellipse">
@@ -13126,7 +13126,7 @@
           </p:nvSpPr>
           <p:spPr>
             <a:xfrm>
-              <a:off x="7877156" y="4523041"/>
+              <a:off x="7611593" y="4517198"/>
               <a:ext cx="77571" cy="77571"/>
             </a:xfrm>
             <a:prstGeom prst="ellipse">
@@ -13152,7 +13152,7 @@
           </p:nvSpPr>
           <p:spPr>
             <a:xfrm>
-              <a:off x="7874716" y="4405531"/>
+              <a:off x="7940029" y="4403339"/>
               <a:ext cx="77571" cy="77571"/>
             </a:xfrm>
             <a:prstGeom prst="ellipse">
@@ -13178,7 +13178,7 @@
           </p:nvSpPr>
           <p:spPr>
             <a:xfrm>
-              <a:off x="7795386" y="3863522"/>
+              <a:off x="7744873" y="3864128"/>
               <a:ext cx="77571" cy="77571"/>
             </a:xfrm>
             <a:prstGeom prst="ellipse">
@@ -13204,7 +13204,7 @@
           </p:nvSpPr>
           <p:spPr>
             <a:xfrm>
-              <a:off x="7940029" y="4218846"/>
+              <a:off x="7751422" y="4219431"/>
               <a:ext cx="77571" cy="77571"/>
             </a:xfrm>
             <a:prstGeom prst="ellipse">
@@ -13230,7 +13230,7 @@
           </p:nvSpPr>
           <p:spPr>
             <a:xfrm>
-              <a:off x="7615705" y="4312900"/>
+              <a:off x="7635099" y="4312199"/>
               <a:ext cx="77571" cy="77571"/>
             </a:xfrm>
             <a:prstGeom prst="ellipse">
@@ -13256,7 +13256,7 @@
           </p:nvSpPr>
           <p:spPr>
             <a:xfrm>
-              <a:off x="7670988" y="4256084"/>
+              <a:off x="7887588" y="4254930"/>
               <a:ext cx="77571" cy="77571"/>
             </a:xfrm>
             <a:prstGeom prst="ellipse">
@@ -13282,7 +13282,7 @@
           </p:nvSpPr>
           <p:spPr>
             <a:xfrm>
-              <a:off x="7504111" y="4584913"/>
+              <a:off x="7516018" y="4584249"/>
               <a:ext cx="77571" cy="77571"/>
             </a:xfrm>
             <a:prstGeom prst="ellipse">
@@ -13308,7 +13308,7 @@
           </p:nvSpPr>
           <p:spPr>
             <a:xfrm>
-              <a:off x="7667733" y="4206853"/>
+              <a:off x="7558835" y="4208924"/>
               <a:ext cx="77571" cy="77571"/>
             </a:xfrm>
             <a:prstGeom prst="ellipse">
@@ -13334,42 +13334,42 @@
           </p:nvSpPr>
           <p:spPr>
             <a:xfrm>
-              <a:off x="5204846" y="4106873"/>
-              <a:ext cx="2547362" cy="394187"/>
+              <a:off x="5176363" y="4105908"/>
+              <a:ext cx="2574234" cy="393300"/>
             </a:xfrm>
             <a:custGeom>
               <a:avLst/>
               <a:pathLst>
-                <a:path w="2547362" h="394187">
+                <a:path w="2574234" h="393300">
                   <a:moveTo>
                     <a:pt x="0" y="0"/>
                   </a:moveTo>
                   <a:lnTo>
-                    <a:pt x="1345824" y="115012"/>
+                    <a:pt x="1360021" y="114753"/>
                   </a:lnTo>
                   <a:lnTo>
-                    <a:pt x="1698241" y="131745"/>
+                    <a:pt x="1716156" y="131449"/>
                   </a:lnTo>
                   <a:lnTo>
-                    <a:pt x="2194945" y="144018"/>
+                    <a:pt x="2218100" y="143694"/>
                   </a:lnTo>
                   <a:lnTo>
-                    <a:pt x="2547362" y="146431"/>
+                    <a:pt x="2574234" y="146101"/>
                   </a:lnTo>
                   <a:lnTo>
-                    <a:pt x="2547362" y="394187"/>
+                    <a:pt x="2574234" y="393300"/>
                   </a:lnTo>
                   <a:lnTo>
-                    <a:pt x="2194945" y="363402"/>
+                    <a:pt x="2218100" y="362584"/>
                   </a:lnTo>
                   <a:lnTo>
-                    <a:pt x="1698241" y="328886"/>
+                    <a:pt x="1716156" y="328146"/>
                   </a:lnTo>
                   <a:lnTo>
-                    <a:pt x="1345824" y="312422"/>
+                    <a:pt x="1360021" y="311719"/>
                   </a:lnTo>
                   <a:lnTo>
-                    <a:pt x="0" y="300658"/>
+                    <a:pt x="0" y="299982"/>
                   </a:lnTo>
                   <a:close/>
                 </a:path>
@@ -13395,27 +13395,27 @@
           </p:nvSpPr>
           <p:spPr>
             <a:xfrm>
-              <a:off x="5204846" y="4106873"/>
-              <a:ext cx="2547362" cy="146431"/>
+              <a:off x="5176363" y="4105908"/>
+              <a:ext cx="2574234" cy="146101"/>
             </a:xfrm>
             <a:custGeom>
               <a:avLst/>
               <a:pathLst>
-                <a:path w="2547362" h="146431">
+                <a:path w="2574234" h="146101">
                   <a:moveTo>
                     <a:pt x="0" y="0"/>
                   </a:moveTo>
                   <a:lnTo>
-                    <a:pt x="1345824" y="115012"/>
+                    <a:pt x="1360021" y="114753"/>
                   </a:lnTo>
                   <a:lnTo>
-                    <a:pt x="1698241" y="131745"/>
+                    <a:pt x="1716156" y="131449"/>
                   </a:lnTo>
                   <a:lnTo>
-                    <a:pt x="2194945" y="144018"/>
+                    <a:pt x="2218100" y="143694"/>
                   </a:lnTo>
                   <a:lnTo>
-                    <a:pt x="2547362" y="146431"/>
+                    <a:pt x="2574234" y="146101"/>
                   </a:lnTo>
                 </a:path>
               </a:pathLst>
@@ -13435,24 +13435,24 @@
           </p:nvSpPr>
           <p:spPr>
             <a:xfrm>
-              <a:off x="5204846" y="4407532"/>
-              <a:ext cx="2547362" cy="93528"/>
+              <a:off x="5176363" y="4405890"/>
+              <a:ext cx="2574234" cy="93318"/>
             </a:xfrm>
             <a:custGeom>
               <a:avLst/>
               <a:pathLst>
-                <a:path w="2547362" h="93528">
+                <a:path w="2574234" h="93318">
                   <a:moveTo>
-                    <a:pt x="2547362" y="93528"/>
+                    <a:pt x="2574234" y="93318"/>
                   </a:moveTo>
                   <a:lnTo>
-                    <a:pt x="2194945" y="62744"/>
+                    <a:pt x="2218100" y="62602"/>
                   </a:lnTo>
                   <a:lnTo>
-                    <a:pt x="1698241" y="28227"/>
+                    <a:pt x="1716156" y="28164"/>
                   </a:lnTo>
                   <a:lnTo>
-                    <a:pt x="1345824" y="11763"/>
+                    <a:pt x="1360021" y="11737"/>
                   </a:lnTo>
                   <a:lnTo>
                     <a:pt x="0" y="0"/>
@@ -13475,27 +13475,27 @@
           </p:nvSpPr>
           <p:spPr>
             <a:xfrm>
-              <a:off x="5204846" y="4257202"/>
-              <a:ext cx="2547362" cy="119979"/>
+              <a:off x="5176363" y="4255899"/>
+              <a:ext cx="2574234" cy="119710"/>
             </a:xfrm>
             <a:custGeom>
               <a:avLst/>
               <a:pathLst>
-                <a:path w="2547362" h="119979">
+                <a:path w="2574234" h="119710">
                   <a:moveTo>
                     <a:pt x="0" y="0"/>
                   </a:moveTo>
                   <a:lnTo>
-                    <a:pt x="1345824" y="63387"/>
+                    <a:pt x="1360021" y="63245"/>
                   </a:lnTo>
                   <a:lnTo>
-                    <a:pt x="1698241" y="79986"/>
+                    <a:pt x="1716156" y="79806"/>
                   </a:lnTo>
                   <a:lnTo>
-                    <a:pt x="2194945" y="103381"/>
+                    <a:pt x="2218100" y="103148"/>
                   </a:lnTo>
                   <a:lnTo>
-                    <a:pt x="2547362" y="119979"/>
+                    <a:pt x="2574234" y="119710"/>
                   </a:lnTo>
                 </a:path>
               </a:pathLst>
@@ -13524,7 +13524,7 @@
           </p:nvSpPr>
           <p:spPr>
             <a:xfrm>
-              <a:off x="7272514" y="3511862"/>
+              <a:off x="7270904" y="3511959"/>
               <a:ext cx="479694" cy="82021"/>
             </a:xfrm>
             <a:prstGeom prst="rect">
@@ -13631,7 +13631,7 @@
           </p:nvSpPr>
           <p:spPr>
             <a:xfrm>
-              <a:off x="4800012" y="4707988"/>
+              <a:off x="4800012" y="4705671"/>
               <a:ext cx="37957" cy="0"/>
             </a:xfrm>
             <a:custGeom>
@@ -13671,7 +13671,7 @@
           </p:nvSpPr>
           <p:spPr>
             <a:xfrm>
-              <a:off x="4800012" y="4435586"/>
+              <a:off x="4800012" y="4433881"/>
               <a:ext cx="37957" cy="0"/>
             </a:xfrm>
             <a:custGeom>
@@ -13711,7 +13711,7 @@
           </p:nvSpPr>
           <p:spPr>
             <a:xfrm>
-              <a:off x="4800012" y="4163183"/>
+              <a:off x="4800012" y="4162091"/>
               <a:ext cx="37957" cy="0"/>
             </a:xfrm>
             <a:custGeom>
@@ -13751,7 +13751,7 @@
           </p:nvSpPr>
           <p:spPr>
             <a:xfrm>
-              <a:off x="4800012" y="3890780"/>
+              <a:off x="4800012" y="3890301"/>
               <a:ext cx="37957" cy="0"/>
             </a:xfrm>
             <a:custGeom>
@@ -13791,7 +13791,7 @@
           </p:nvSpPr>
           <p:spPr>
             <a:xfrm>
-              <a:off x="4800012" y="3618377"/>
+              <a:off x="4800012" y="3618511"/>
               <a:ext cx="37957" cy="0"/>
             </a:xfrm>
             <a:custGeom>
@@ -13831,7 +13831,7 @@
           </p:nvSpPr>
           <p:spPr>
             <a:xfrm>
-              <a:off x="4800012" y="3345974"/>
+              <a:off x="4800012" y="3346721"/>
               <a:ext cx="37957" cy="0"/>
             </a:xfrm>
             <a:custGeom>
@@ -13911,7 +13911,7 @@
           </p:nvSpPr>
           <p:spPr>
             <a:xfrm>
-              <a:off x="5204846" y="4899543"/>
+              <a:off x="5176363" y="4899543"/>
               <a:ext cx="0" cy="37957"/>
             </a:xfrm>
             <a:custGeom>
@@ -13951,7 +13951,7 @@
           </p:nvSpPr>
           <p:spPr>
             <a:xfrm>
-              <a:off x="6053966" y="4899543"/>
+              <a:off x="6034442" y="4899543"/>
               <a:ext cx="0" cy="37957"/>
             </a:xfrm>
             <a:custGeom>
@@ -13991,7 +13991,7 @@
           </p:nvSpPr>
           <p:spPr>
             <a:xfrm>
-              <a:off x="6903087" y="4899543"/>
+              <a:off x="6892520" y="4899543"/>
               <a:ext cx="0" cy="37957"/>
             </a:xfrm>
             <a:custGeom>
@@ -14031,7 +14031,7 @@
           </p:nvSpPr>
           <p:spPr>
             <a:xfrm>
-              <a:off x="7752208" y="4899543"/>
+              <a:off x="7750598" y="4899543"/>
               <a:ext cx="0" cy="37957"/>
             </a:xfrm>
             <a:custGeom>
@@ -14071,7 +14071,7 @@
           </p:nvSpPr>
           <p:spPr>
             <a:xfrm>
-              <a:off x="5165984" y="4967867"/>
+              <a:off x="5137501" y="4967867"/>
               <a:ext cx="77724" cy="100218"/>
             </a:xfrm>
             <a:prstGeom prst="rect">
@@ -14117,7 +14117,7 @@
           </p:nvSpPr>
           <p:spPr>
             <a:xfrm>
-              <a:off x="6015104" y="4967867"/>
+              <a:off x="5995580" y="4967867"/>
               <a:ext cx="77724" cy="100218"/>
             </a:xfrm>
             <a:prstGeom prst="rect">
@@ -14163,7 +14163,7 @@
           </p:nvSpPr>
           <p:spPr>
             <a:xfrm>
-              <a:off x="6864225" y="4967867"/>
+              <a:off x="6853658" y="4967867"/>
               <a:ext cx="77724" cy="100218"/>
             </a:xfrm>
             <a:prstGeom prst="rect">
@@ -14209,7 +14209,7 @@
           </p:nvSpPr>
           <p:spPr>
             <a:xfrm>
-              <a:off x="7713346" y="4967867"/>
+              <a:off x="7711736" y="4967867"/>
               <a:ext cx="77724" cy="100218"/>
             </a:xfrm>
             <a:prstGeom prst="rect">
@@ -14327,7 +14327,7 @@
           </p:nvSpPr>
           <p:spPr>
             <a:xfrm>
-              <a:off x="1519161" y="6436087"/>
+              <a:off x="1714171" y="6432245"/>
               <a:ext cx="77571" cy="77571"/>
             </a:xfrm>
             <a:prstGeom prst="ellipse">
@@ -14353,7 +14353,7 @@
           </p:nvSpPr>
           <p:spPr>
             <a:xfrm>
-              <a:off x="1585797" y="6297310"/>
+              <a:off x="1535132" y="6294230"/>
               <a:ext cx="77571" cy="77571"/>
             </a:xfrm>
             <a:prstGeom prst="ellipse">
@@ -14379,7 +14379,7 @@
           </p:nvSpPr>
           <p:spPr>
             <a:xfrm>
-              <a:off x="1719573" y="6381305"/>
+              <a:off x="1550741" y="6378307"/>
               <a:ext cx="77571" cy="77571"/>
             </a:xfrm>
             <a:prstGeom prst="ellipse">
@@ -14405,7 +14405,7 @@
           </p:nvSpPr>
           <p:spPr>
             <a:xfrm>
-              <a:off x="1659033" y="6572696"/>
+              <a:off x="1566910" y="6573145"/>
               <a:ext cx="77571" cy="77571"/>
             </a:xfrm>
             <a:prstGeom prst="ellipse">
@@ -14431,7 +14431,7 @@
           </p:nvSpPr>
           <p:spPr>
             <a:xfrm>
-              <a:off x="1826766" y="6741668"/>
+              <a:off x="1519161" y="6741025"/>
               <a:ext cx="77571" cy="77571"/>
             </a:xfrm>
             <a:prstGeom prst="ellipse">
@@ -14457,7 +14457,7 @@
           </p:nvSpPr>
           <p:spPr>
             <a:xfrm>
-              <a:off x="1869325" y="6403632"/>
+              <a:off x="1824393" y="6404004"/>
               <a:ext cx="77571" cy="77571"/>
             </a:xfrm>
             <a:prstGeom prst="ellipse">
@@ -14483,7 +14483,7 @@
           </p:nvSpPr>
           <p:spPr>
             <a:xfrm>
-              <a:off x="1843652" y="6537087"/>
+              <a:off x="1778136" y="6537637"/>
               <a:ext cx="77571" cy="77571"/>
             </a:xfrm>
             <a:prstGeom prst="ellipse">
@@ -14509,7 +14509,7 @@
           </p:nvSpPr>
           <p:spPr>
             <a:xfrm>
-              <a:off x="1609345" y="6579274"/>
+              <a:off x="1791400" y="6578126"/>
               <a:ext cx="77571" cy="77571"/>
             </a:xfrm>
             <a:prstGeom prst="ellipse">
@@ -14535,7 +14535,7 @@
           </p:nvSpPr>
           <p:spPr>
             <a:xfrm>
-              <a:off x="1905170" y="6683696"/>
+              <a:off x="1724161" y="6680030"/>
               <a:ext cx="77571" cy="77571"/>
             </a:xfrm>
             <a:prstGeom prst="ellipse">
@@ -14561,7 +14561,7 @@
           </p:nvSpPr>
           <p:spPr>
             <a:xfrm>
-              <a:off x="1774306" y="6361878"/>
+              <a:off x="1572285" y="6359934"/>
               <a:ext cx="77571" cy="77571"/>
             </a:xfrm>
             <a:prstGeom prst="ellipse">
@@ -14587,7 +14587,7 @@
           </p:nvSpPr>
           <p:spPr>
             <a:xfrm>
-              <a:off x="2359183" y="6552053"/>
+              <a:off x="2622362" y="6552360"/>
               <a:ext cx="77571" cy="77571"/>
             </a:xfrm>
             <a:prstGeom prst="ellipse">
@@ -14613,7 +14613,7 @@
           </p:nvSpPr>
           <p:spPr>
             <a:xfrm>
-              <a:off x="2581909" y="5786164"/>
+              <a:off x="2440282" y="5784900"/>
               <a:ext cx="77571" cy="77571"/>
             </a:xfrm>
             <a:prstGeom prst="ellipse">
@@ -14639,7 +14639,7 @@
           </p:nvSpPr>
           <p:spPr>
             <a:xfrm>
-              <a:off x="2363983" y="5943347"/>
+              <a:off x="2698548" y="5943614"/>
               <a:ext cx="77571" cy="77571"/>
             </a:xfrm>
             <a:prstGeom prst="ellipse">
@@ -14665,7 +14665,7 @@
           </p:nvSpPr>
           <p:spPr>
             <a:xfrm>
-              <a:off x="2378108" y="6196505"/>
+              <a:off x="2317308" y="6196243"/>
               <a:ext cx="77571" cy="77571"/>
             </a:xfrm>
             <a:prstGeom prst="ellipse">
@@ -14691,7 +14691,7 @@
           </p:nvSpPr>
           <p:spPr>
             <a:xfrm>
-              <a:off x="2309338" y="6339046"/>
+              <a:off x="2456669" y="6339425"/>
               <a:ext cx="77571" cy="77571"/>
             </a:xfrm>
             <a:prstGeom prst="ellipse">
@@ -14717,7 +14717,7 @@
           </p:nvSpPr>
           <p:spPr>
             <a:xfrm>
-              <a:off x="2487407" y="6886426"/>
+              <a:off x="2397940" y="6886426"/>
               <a:ext cx="77571" cy="77571"/>
             </a:xfrm>
             <a:prstGeom prst="ellipse">
@@ -14743,7 +14743,7 @@
           </p:nvSpPr>
           <p:spPr>
             <a:xfrm>
-              <a:off x="2347263" y="6597575"/>
+              <a:off x="2449788" y="6595900"/>
               <a:ext cx="77571" cy="77571"/>
             </a:xfrm>
             <a:prstGeom prst="ellipse">
@@ -14769,7 +14769,7 @@
           </p:nvSpPr>
           <p:spPr>
             <a:xfrm>
-              <a:off x="2560476" y="6148583"/>
+              <a:off x="2364581" y="6148066"/>
               <a:ext cx="77571" cy="77571"/>
             </a:xfrm>
             <a:prstGeom prst="ellipse">
@@ -14795,7 +14795,7 @@
           </p:nvSpPr>
           <p:spPr>
             <a:xfrm>
-              <a:off x="2682953" y="5641464"/>
+              <a:off x="2362199" y="5642920"/>
               <a:ext cx="77571" cy="77571"/>
             </a:xfrm>
             <a:prstGeom prst="ellipse">
@@ -14821,7 +14821,7 @@
           </p:nvSpPr>
           <p:spPr>
             <a:xfrm>
-              <a:off x="2334528" y="5553861"/>
+              <a:off x="2395441" y="5553861"/>
               <a:ext cx="77571" cy="77571"/>
             </a:xfrm>
             <a:prstGeom prst="ellipse">
@@ -14847,7 +14847,7 @@
           </p:nvSpPr>
           <p:spPr>
             <a:xfrm>
-              <a:off x="2708060" y="6430004"/>
+              <a:off x="2487244" y="6430552"/>
               <a:ext cx="77571" cy="77571"/>
             </a:xfrm>
             <a:prstGeom prst="ellipse">
@@ -14873,7 +14873,7 @@
           </p:nvSpPr>
           <p:spPr>
             <a:xfrm>
-              <a:off x="2509795" y="6127503"/>
+              <a:off x="2438106" y="6126571"/>
               <a:ext cx="77571" cy="77571"/>
             </a:xfrm>
             <a:prstGeom prst="ellipse">
@@ -14899,7 +14899,7 @@
           </p:nvSpPr>
           <p:spPr>
             <a:xfrm>
-              <a:off x="2708983" y="5915083"/>
+              <a:off x="2383930" y="5915408"/>
               <a:ext cx="77571" cy="77571"/>
             </a:xfrm>
             <a:prstGeom prst="ellipse">
@@ -14925,7 +14925,7 @@
           </p:nvSpPr>
           <p:spPr>
             <a:xfrm>
-              <a:off x="2614198" y="6058691"/>
+              <a:off x="2735779" y="6059811"/>
               <a:ext cx="77571" cy="77571"/>
             </a:xfrm>
             <a:prstGeom prst="ellipse">
@@ -14951,7 +14951,7 @@
           </p:nvSpPr>
           <p:spPr>
             <a:xfrm>
-              <a:off x="2432686" y="6591778"/>
+              <a:off x="2562257" y="6590773"/>
               <a:ext cx="77571" cy="77571"/>
             </a:xfrm>
             <a:prstGeom prst="ellipse">
@@ -14977,7 +14977,7 @@
           </p:nvSpPr>
           <p:spPr>
             <a:xfrm>
-              <a:off x="2567210" y="6533591"/>
+              <a:off x="2463105" y="6531985"/>
               <a:ext cx="77571" cy="77571"/>
             </a:xfrm>
             <a:prstGeom prst="ellipse">
@@ -15003,7 +15003,7 @@
           </p:nvSpPr>
           <p:spPr>
             <a:xfrm>
-              <a:off x="2598788" y="5963292"/>
+              <a:off x="2709008" y="5964785"/>
               <a:ext cx="77571" cy="77571"/>
             </a:xfrm>
             <a:prstGeom prst="ellipse">
@@ -15029,7 +15029,7 @@
           </p:nvSpPr>
           <p:spPr>
             <a:xfrm>
-              <a:off x="2632275" y="6014722"/>
+              <a:off x="2356419" y="6012058"/>
               <a:ext cx="77571" cy="77571"/>
             </a:xfrm>
             <a:prstGeom prst="ellipse">
@@ -15055,7 +15055,7 @@
           </p:nvSpPr>
           <p:spPr>
             <a:xfrm>
-              <a:off x="3400434" y="6636407"/>
+              <a:off x="3213076" y="6635787"/>
               <a:ext cx="77571" cy="77571"/>
             </a:xfrm>
             <a:prstGeom prst="ellipse">
@@ -15081,7 +15081,7 @@
           </p:nvSpPr>
           <p:spPr>
             <a:xfrm>
-              <a:off x="3421098" y="6314782"/>
+              <a:off x="3508026" y="6314536"/>
               <a:ext cx="77571" cy="77571"/>
             </a:xfrm>
             <a:prstGeom prst="ellipse">
@@ -15107,7 +15107,7 @@
           </p:nvSpPr>
           <p:spPr>
             <a:xfrm>
-              <a:off x="3467684" y="6437683"/>
+              <a:off x="3466292" y="6439163"/>
               <a:ext cx="77571" cy="77571"/>
             </a:xfrm>
             <a:prstGeom prst="ellipse">
@@ -15133,7 +15133,7 @@
           </p:nvSpPr>
           <p:spPr>
             <a:xfrm>
-              <a:off x="3210866" y="6712253"/>
+              <a:off x="3525806" y="6712242"/>
               <a:ext cx="77571" cy="77571"/>
             </a:xfrm>
             <a:prstGeom prst="ellipse">
@@ -15159,7 +15159,7 @@
           </p:nvSpPr>
           <p:spPr>
             <a:xfrm>
-              <a:off x="3583932" y="6289933"/>
+              <a:off x="3544086" y="6290116"/>
               <a:ext cx="77571" cy="77571"/>
             </a:xfrm>
             <a:prstGeom prst="ellipse">
@@ -15185,7 +15185,7 @@
           </p:nvSpPr>
           <p:spPr>
             <a:xfrm>
-              <a:off x="3594517" y="6592160"/>
+              <a:off x="3646662" y="6594444"/>
               <a:ext cx="77571" cy="77571"/>
             </a:xfrm>
             <a:prstGeom prst="ellipse">
@@ -15211,7 +15211,7 @@
           </p:nvSpPr>
           <p:spPr>
             <a:xfrm>
-              <a:off x="3412697" y="5706184"/>
+              <a:off x="3146817" y="5707294"/>
               <a:ext cx="77571" cy="77571"/>
             </a:xfrm>
             <a:prstGeom prst="ellipse">
@@ -15237,7 +15237,7 @@
           </p:nvSpPr>
           <p:spPr>
             <a:xfrm>
-              <a:off x="3359195" y="6513347"/>
+              <a:off x="3286737" y="6513188"/>
               <a:ext cx="77571" cy="77571"/>
             </a:xfrm>
             <a:prstGeom prst="ellipse">
@@ -15263,7 +15263,7 @@
           </p:nvSpPr>
           <p:spPr>
             <a:xfrm>
-              <a:off x="3468869" y="6183338"/>
+              <a:off x="3160583" y="6182342"/>
               <a:ext cx="77571" cy="77571"/>
             </a:xfrm>
             <a:prstGeom prst="ellipse">
@@ -15289,7 +15289,7 @@
           </p:nvSpPr>
           <p:spPr>
             <a:xfrm>
-              <a:off x="3281502" y="5976528"/>
+              <a:off x="3515526" y="5979227"/>
               <a:ext cx="77571" cy="77571"/>
             </a:xfrm>
             <a:prstGeom prst="ellipse">
@@ -15315,7 +15315,7 @@
           </p:nvSpPr>
           <p:spPr>
             <a:xfrm>
-              <a:off x="3181262" y="5610864"/>
+              <a:off x="3434850" y="5613942"/>
               <a:ext cx="77571" cy="77571"/>
             </a:xfrm>
             <a:prstGeom prst="ellipse">
@@ -15341,7 +15341,7 @@
           </p:nvSpPr>
           <p:spPr>
             <a:xfrm>
-              <a:off x="3456365" y="5849215"/>
+              <a:off x="3253212" y="5850785"/>
               <a:ext cx="77571" cy="77571"/>
             </a:xfrm>
             <a:prstGeom prst="ellipse">
@@ -15367,7 +15367,7 @@
           </p:nvSpPr>
           <p:spPr>
             <a:xfrm>
-              <a:off x="3483725" y="6540163"/>
+              <a:off x="3645824" y="6539492"/>
               <a:ext cx="77571" cy="77571"/>
             </a:xfrm>
             <a:prstGeom prst="ellipse">
@@ -15393,7 +15393,7 @@
           </p:nvSpPr>
           <p:spPr>
             <a:xfrm>
-              <a:off x="3558684" y="6108397"/>
+              <a:off x="3394266" y="6107363"/>
               <a:ext cx="77571" cy="77571"/>
             </a:xfrm>
             <a:prstGeom prst="ellipse">
@@ -15419,7 +15419,7 @@
           </p:nvSpPr>
           <p:spPr>
             <a:xfrm>
-              <a:off x="3295203" y="6254823"/>
+              <a:off x="3336695" y="6256622"/>
               <a:ext cx="77571" cy="77571"/>
             </a:xfrm>
             <a:prstGeom prst="ellipse">
@@ -15445,7 +15445,7 @@
           </p:nvSpPr>
           <p:spPr>
             <a:xfrm>
-              <a:off x="3323722" y="6056466"/>
+              <a:off x="3210845" y="6057515"/>
               <a:ext cx="77571" cy="77571"/>
             </a:xfrm>
             <a:prstGeom prst="ellipse">
@@ -15471,7 +15471,7 @@
           </p:nvSpPr>
           <p:spPr>
             <a:xfrm>
-              <a:off x="3464129" y="6507409"/>
+              <a:off x="3603879" y="6507960"/>
               <a:ext cx="77571" cy="77571"/>
             </a:xfrm>
             <a:prstGeom prst="ellipse">
@@ -15497,7 +15497,7 @@
           </p:nvSpPr>
           <p:spPr>
             <a:xfrm>
-              <a:off x="3527578" y="6100626"/>
+              <a:off x="3221567" y="6102919"/>
               <a:ext cx="77571" cy="77571"/>
             </a:xfrm>
             <a:prstGeom prst="ellipse">
@@ -15523,7 +15523,7 @@
           </p:nvSpPr>
           <p:spPr>
             <a:xfrm>
-              <a:off x="3212492" y="6467791"/>
+              <a:off x="3386197" y="6467305"/>
               <a:ext cx="77571" cy="77571"/>
             </a:xfrm>
             <a:prstGeom prst="ellipse">
@@ -15549,7 +15549,7 @@
           </p:nvSpPr>
           <p:spPr>
             <a:xfrm>
-              <a:off x="3435514" y="6425941"/>
+              <a:off x="3618181" y="6424475"/>
               <a:ext cx="77571" cy="77571"/>
             </a:xfrm>
             <a:prstGeom prst="ellipse">
@@ -15575,7 +15575,7 @@
           </p:nvSpPr>
           <p:spPr>
             <a:xfrm>
-              <a:off x="4439614" y="6483947"/>
+              <a:off x="4353555" y="6483267"/>
               <a:ext cx="77571" cy="77571"/>
             </a:xfrm>
             <a:prstGeom prst="ellipse">
@@ -15601,7 +15601,7 @@
           </p:nvSpPr>
           <p:spPr>
             <a:xfrm>
-              <a:off x="4195384" y="6430519"/>
+              <a:off x="4360736" y="6428496"/>
               <a:ext cx="77571" cy="77571"/>
             </a:xfrm>
             <a:prstGeom prst="ellipse">
@@ -15627,7 +15627,7 @@
           </p:nvSpPr>
           <p:spPr>
             <a:xfrm>
-              <a:off x="4191897" y="6623452"/>
+              <a:off x="4481487" y="6624009"/>
               <a:ext cx="77571" cy="77571"/>
             </a:xfrm>
             <a:prstGeom prst="ellipse">
@@ -15653,7 +15653,7 @@
           </p:nvSpPr>
           <p:spPr>
             <a:xfrm>
-              <a:off x="4445526" y="6157584"/>
+              <a:off x="4268556" y="6158229"/>
               <a:ext cx="77571" cy="77571"/>
             </a:xfrm>
             <a:prstGeom prst="ellipse">
@@ -15679,7 +15679,7 @@
           </p:nvSpPr>
           <p:spPr>
             <a:xfrm>
-              <a:off x="4068789" y="6221450"/>
+              <a:off x="4221786" y="6222397"/>
               <a:ext cx="77571" cy="77571"/>
             </a:xfrm>
             <a:prstGeom prst="ellipse">
@@ -15705,7 +15705,7 @@
           </p:nvSpPr>
           <p:spPr>
             <a:xfrm>
-              <a:off x="4123170" y="5645615"/>
+              <a:off x="4446137" y="5646157"/>
               <a:ext cx="77571" cy="77571"/>
             </a:xfrm>
             <a:prstGeom prst="ellipse">
@@ -15731,7 +15731,7 @@
           </p:nvSpPr>
           <p:spPr>
             <a:xfrm>
-              <a:off x="4218290" y="6197941"/>
+              <a:off x="4062291" y="6196789"/>
               <a:ext cx="77571" cy="77571"/>
             </a:xfrm>
             <a:prstGeom prst="ellipse">
@@ -15757,7 +15757,7 @@
           </p:nvSpPr>
           <p:spPr>
             <a:xfrm>
-              <a:off x="4373931" y="6425627"/>
+              <a:off x="4440515" y="6426106"/>
               <a:ext cx="77571" cy="77571"/>
             </a:xfrm>
             <a:prstGeom prst="ellipse">
@@ -15783,7 +15783,7 @@
           </p:nvSpPr>
           <p:spPr>
             <a:xfrm>
-              <a:off x="4326111" y="6209374"/>
+              <a:off x="4510442" y="6213501"/>
               <a:ext cx="77571" cy="77571"/>
             </a:xfrm>
             <a:prstGeom prst="ellipse">
@@ -15809,7 +15809,7 @@
           </p:nvSpPr>
           <p:spPr>
             <a:xfrm>
-              <a:off x="4081940" y="6089232"/>
+              <a:off x="4223693" y="6085928"/>
               <a:ext cx="77571" cy="77571"/>
             </a:xfrm>
             <a:prstGeom prst="ellipse">
@@ -15835,7 +15835,7 @@
           </p:nvSpPr>
           <p:spPr>
             <a:xfrm>
-              <a:off x="4197079" y="6021118"/>
+              <a:off x="4249010" y="6024074"/>
               <a:ext cx="77571" cy="77571"/>
             </a:xfrm>
             <a:prstGeom prst="ellipse">
@@ -15861,7 +15861,7 @@
           </p:nvSpPr>
           <p:spPr>
             <a:xfrm>
-              <a:off x="4280592" y="5875890"/>
+              <a:off x="4500802" y="5875949"/>
               <a:ext cx="77571" cy="77571"/>
             </a:xfrm>
             <a:prstGeom prst="ellipse">
@@ -15887,7 +15887,7 @@
           </p:nvSpPr>
           <p:spPr>
             <a:xfrm>
-              <a:off x="4209425" y="6373271"/>
+              <a:off x="4223538" y="6375587"/>
               <a:ext cx="77571" cy="77571"/>
             </a:xfrm>
             <a:prstGeom prst="ellipse">
@@ -15913,7 +15913,7 @@
           </p:nvSpPr>
           <p:spPr>
             <a:xfrm>
-              <a:off x="4044051" y="5765128"/>
+              <a:off x="4197530" y="5767439"/>
               <a:ext cx="77571" cy="77571"/>
             </a:xfrm>
             <a:prstGeom prst="ellipse">
@@ -15939,7 +15939,7 @@
           </p:nvSpPr>
           <p:spPr>
             <a:xfrm>
-              <a:off x="4048370" y="6693574"/>
+              <a:off x="4060250" y="6690370"/>
               <a:ext cx="77571" cy="77571"/>
             </a:xfrm>
             <a:prstGeom prst="ellipse">
@@ -15965,7 +15965,7 @@
           </p:nvSpPr>
           <p:spPr>
             <a:xfrm>
-              <a:off x="4340865" y="6540178"/>
+              <a:off x="4156080" y="6539956"/>
               <a:ext cx="77571" cy="77571"/>
             </a:xfrm>
             <a:prstGeom prst="ellipse">
@@ -15991,7 +15991,7 @@
           </p:nvSpPr>
           <p:spPr>
             <a:xfrm>
-              <a:off x="4205139" y="6348938"/>
+              <a:off x="4215851" y="6352019"/>
               <a:ext cx="77571" cy="77571"/>
             </a:xfrm>
             <a:prstGeom prst="ellipse">
@@ -16017,7 +16017,7 @@
           </p:nvSpPr>
           <p:spPr>
             <a:xfrm>
-              <a:off x="4377682" y="6448639"/>
+              <a:off x="4413214" y="6449135"/>
               <a:ext cx="77571" cy="77571"/>
             </a:xfrm>
             <a:prstGeom prst="ellipse">
@@ -16043,7 +16043,7 @@
           </p:nvSpPr>
           <p:spPr>
             <a:xfrm>
-              <a:off x="4105349" y="6307331"/>
+              <a:off x="4233473" y="6303802"/>
               <a:ext cx="77571" cy="77571"/>
             </a:xfrm>
             <a:prstGeom prst="ellipse">
@@ -16069,7 +16069,7 @@
           </p:nvSpPr>
           <p:spPr>
             <a:xfrm>
-              <a:off x="4510442" y="6498933"/>
+              <a:off x="4435683" y="6498200"/>
               <a:ext cx="77571" cy="77571"/>
             </a:xfrm>
             <a:prstGeom prst="ellipse">
@@ -16095,7 +16095,7 @@
           </p:nvSpPr>
           <p:spPr>
             <a:xfrm>
-              <a:off x="4171483" y="6277432"/>
+              <a:off x="4184930" y="6276322"/>
               <a:ext cx="77571" cy="77571"/>
             </a:xfrm>
             <a:prstGeom prst="ellipse">
@@ -16121,7 +16121,7 @@
           </p:nvSpPr>
           <p:spPr>
             <a:xfrm>
-              <a:off x="4186089" y="6192392"/>
+              <a:off x="4073616" y="6190171"/>
               <a:ext cx="77571" cy="77571"/>
             </a:xfrm>
             <a:prstGeom prst="ellipse">
@@ -16147,7 +16147,7 @@
           </p:nvSpPr>
           <p:spPr>
             <a:xfrm>
-              <a:off x="4042594" y="6202106"/>
+              <a:off x="4063197" y="6200110"/>
               <a:ext cx="77571" cy="77571"/>
             </a:xfrm>
             <a:prstGeom prst="ellipse">
@@ -16173,7 +16173,7 @@
           </p:nvSpPr>
           <p:spPr>
             <a:xfrm>
-              <a:off x="4191454" y="6270587"/>
+              <a:off x="4106120" y="6271937"/>
               <a:ext cx="77571" cy="77571"/>
             </a:xfrm>
             <a:prstGeom prst="ellipse">
@@ -16199,42 +16199,42 @@
           </p:nvSpPr>
           <p:spPr>
             <a:xfrm>
-              <a:off x="1696891" y="6067547"/>
-              <a:ext cx="2605999" cy="478945"/>
+              <a:off x="1673161" y="6068190"/>
+              <a:ext cx="2642423" cy="477959"/>
             </a:xfrm>
             <a:custGeom>
               <a:avLst/>
               <a:pathLst>
-                <a:path w="2605999" h="478945">
+                <a:path w="2642423" h="477959">
                   <a:moveTo>
                     <a:pt x="0" y="0"/>
                   </a:moveTo>
                   <a:lnTo>
-                    <a:pt x="1376803" y="106003"/>
+                    <a:pt x="1396047" y="105785"/>
                   </a:lnTo>
                   <a:lnTo>
-                    <a:pt x="1737332" y="95916"/>
+                    <a:pt x="1761615" y="95719"/>
                   </a:lnTo>
                   <a:lnTo>
-                    <a:pt x="2245470" y="53061"/>
+                    <a:pt x="2276855" y="52952"/>
                   </a:lnTo>
                   <a:lnTo>
-                    <a:pt x="2605999" y="11343"/>
+                    <a:pt x="2642423" y="11320"/>
                   </a:lnTo>
                   <a:lnTo>
-                    <a:pt x="2605999" y="429589"/>
+                    <a:pt x="2642423" y="428705"/>
                   </a:lnTo>
                   <a:lnTo>
-                    <a:pt x="2245470" y="393130"/>
+                    <a:pt x="2276855" y="392321"/>
                   </a:lnTo>
                   <a:lnTo>
-                    <a:pt x="1737332" y="357687"/>
+                    <a:pt x="1761615" y="356951"/>
                   </a:lnTo>
                   <a:lnTo>
-                    <a:pt x="1376803" y="352859"/>
+                    <a:pt x="1396047" y="352133"/>
                   </a:lnTo>
                   <a:lnTo>
-                    <a:pt x="0" y="478945"/>
+                    <a:pt x="0" y="477959"/>
                   </a:lnTo>
                   <a:close/>
                 </a:path>
@@ -16260,27 +16260,27 @@
           </p:nvSpPr>
           <p:spPr>
             <a:xfrm>
-              <a:off x="1696891" y="6067547"/>
-              <a:ext cx="2605999" cy="106003"/>
+              <a:off x="1673161" y="6068190"/>
+              <a:ext cx="2642423" cy="105785"/>
             </a:xfrm>
             <a:custGeom>
               <a:avLst/>
               <a:pathLst>
-                <a:path w="2605999" h="106003">
+                <a:path w="2642423" h="105785">
                   <a:moveTo>
                     <a:pt x="0" y="0"/>
                   </a:moveTo>
                   <a:lnTo>
-                    <a:pt x="1376803" y="106003"/>
+                    <a:pt x="1396047" y="105785"/>
                   </a:lnTo>
                   <a:lnTo>
-                    <a:pt x="1737332" y="95916"/>
+                    <a:pt x="1761615" y="95719"/>
                   </a:lnTo>
                   <a:lnTo>
-                    <a:pt x="2245470" y="53061"/>
+                    <a:pt x="2276855" y="52952"/>
                   </a:lnTo>
                   <a:lnTo>
-                    <a:pt x="2605999" y="11343"/>
+                    <a:pt x="2642423" y="11320"/>
                   </a:lnTo>
                 </a:path>
               </a:pathLst>
@@ -16300,27 +16300,27 @@
           </p:nvSpPr>
           <p:spPr>
             <a:xfrm>
-              <a:off x="1696891" y="6420406"/>
-              <a:ext cx="2605999" cy="126085"/>
+              <a:off x="1673161" y="6420323"/>
+              <a:ext cx="2642423" cy="125826"/>
             </a:xfrm>
             <a:custGeom>
               <a:avLst/>
               <a:pathLst>
-                <a:path w="2605999" h="126085">
+                <a:path w="2642423" h="125826">
                   <a:moveTo>
-                    <a:pt x="2605999" y="76729"/>
+                    <a:pt x="2642423" y="76571"/>
                   </a:moveTo>
                   <a:lnTo>
-                    <a:pt x="2245470" y="40270"/>
+                    <a:pt x="2276855" y="40188"/>
                   </a:lnTo>
                   <a:lnTo>
-                    <a:pt x="1737332" y="4827"/>
+                    <a:pt x="1761615" y="4817"/>
                   </a:lnTo>
                   <a:lnTo>
-                    <a:pt x="1376803" y="0"/>
+                    <a:pt x="1396047" y="0"/>
                   </a:lnTo>
                   <a:lnTo>
-                    <a:pt x="0" y="126085"/>
+                    <a:pt x="0" y="125826"/>
                   </a:lnTo>
                 </a:path>
               </a:pathLst>
@@ -16340,27 +16340,27 @@
           </p:nvSpPr>
           <p:spPr>
             <a:xfrm>
-              <a:off x="1696891" y="6288013"/>
-              <a:ext cx="2605999" cy="19006"/>
+              <a:off x="1673161" y="6288203"/>
+              <a:ext cx="2642423" cy="18966"/>
             </a:xfrm>
             <a:custGeom>
               <a:avLst/>
               <a:pathLst>
-                <a:path w="2605999" h="19006">
+                <a:path w="2642423" h="18966">
                   <a:moveTo>
-                    <a:pt x="0" y="19006"/>
+                    <a:pt x="0" y="18966"/>
                   </a:moveTo>
                   <a:lnTo>
-                    <a:pt x="1376803" y="8964"/>
+                    <a:pt x="1396047" y="8946"/>
                   </a:lnTo>
                   <a:lnTo>
-                    <a:pt x="1737332" y="6335"/>
+                    <a:pt x="1761615" y="6322"/>
                   </a:lnTo>
                   <a:lnTo>
-                    <a:pt x="2245470" y="2629"/>
+                    <a:pt x="2276855" y="2623"/>
                   </a:lnTo>
                   <a:lnTo>
-                    <a:pt x="2605999" y="0"/>
+                    <a:pt x="2642423" y="0"/>
                   </a:lnTo>
                 </a:path>
               </a:pathLst>
@@ -16389,7 +16389,7 @@
           </p:nvSpPr>
           <p:spPr>
             <a:xfrm>
-              <a:off x="3823196" y="5601005"/>
+              <a:off x="3835890" y="5602355"/>
               <a:ext cx="479694" cy="82021"/>
             </a:xfrm>
             <a:prstGeom prst="rect">
@@ -16496,7 +16496,7 @@
           </p:nvSpPr>
           <p:spPr>
             <a:xfrm rot="-5400000">
-              <a:off x="1177387" y="6840721"/>
+              <a:off x="1177387" y="6839670"/>
               <a:ext cx="194218" cy="100218"/>
             </a:xfrm>
             <a:prstGeom prst="rect">
@@ -16542,7 +16542,7 @@
           </p:nvSpPr>
           <p:spPr>
             <a:xfrm rot="-5400000">
-              <a:off x="1177387" y="6432266"/>
+              <a:off x="1177387" y="6432056"/>
               <a:ext cx="194218" cy="100218"/>
             </a:xfrm>
             <a:prstGeom prst="rect">
@@ -16588,7 +16588,7 @@
           </p:nvSpPr>
           <p:spPr>
             <a:xfrm rot="-5400000">
-              <a:off x="1177387" y="6023811"/>
+              <a:off x="1177387" y="6024441"/>
               <a:ext cx="194218" cy="100218"/>
             </a:xfrm>
             <a:prstGeom prst="rect">
@@ -16634,7 +16634,7 @@
           </p:nvSpPr>
           <p:spPr>
             <a:xfrm rot="-5400000">
-              <a:off x="1177387" y="5615356"/>
+              <a:off x="1177387" y="5616827"/>
               <a:ext cx="194218" cy="100218"/>
             </a:xfrm>
             <a:prstGeom prst="rect">
@@ -16680,7 +16680,7 @@
           </p:nvSpPr>
           <p:spPr>
             <a:xfrm>
-              <a:off x="1370425" y="6890830"/>
+              <a:off x="1370425" y="6889779"/>
               <a:ext cx="37957" cy="0"/>
             </a:xfrm>
             <a:custGeom>
@@ -16720,7 +16720,7 @@
           </p:nvSpPr>
           <p:spPr>
             <a:xfrm>
-              <a:off x="1370425" y="6482375"/>
+              <a:off x="1370425" y="6482165"/>
               <a:ext cx="37957" cy="0"/>
             </a:xfrm>
             <a:custGeom>
@@ -16760,7 +16760,7 @@
           </p:nvSpPr>
           <p:spPr>
             <a:xfrm>
-              <a:off x="1370425" y="6073920"/>
+              <a:off x="1370425" y="6074550"/>
               <a:ext cx="37957" cy="0"/>
             </a:xfrm>
             <a:custGeom>
@@ -16800,7 +16800,7 @@
           </p:nvSpPr>
           <p:spPr>
             <a:xfrm>
-              <a:off x="1370425" y="5665465"/>
+              <a:off x="1370425" y="5666936"/>
               <a:ext cx="37957" cy="0"/>
             </a:xfrm>
             <a:custGeom>
@@ -16880,7 +16880,7 @@
           </p:nvSpPr>
           <p:spPr>
             <a:xfrm>
-              <a:off x="1696891" y="6991840"/>
+              <a:off x="1673161" y="6991840"/>
               <a:ext cx="0" cy="37957"/>
             </a:xfrm>
             <a:custGeom>
@@ -16920,7 +16920,7 @@
           </p:nvSpPr>
           <p:spPr>
             <a:xfrm>
-              <a:off x="2565558" y="6991840"/>
+              <a:off x="2553968" y="6991840"/>
               <a:ext cx="0" cy="37957"/>
             </a:xfrm>
             <a:custGeom>
@@ -16960,7 +16960,7 @@
           </p:nvSpPr>
           <p:spPr>
             <a:xfrm>
-              <a:off x="3434224" y="6991840"/>
+              <a:off x="3434776" y="6991840"/>
               <a:ext cx="0" cy="37957"/>
             </a:xfrm>
             <a:custGeom>
@@ -17000,7 +17000,7 @@
           </p:nvSpPr>
           <p:spPr>
             <a:xfrm>
-              <a:off x="4302890" y="6991840"/>
+              <a:off x="4315584" y="6991840"/>
               <a:ext cx="0" cy="37957"/>
             </a:xfrm>
             <a:custGeom>
@@ -17040,7 +17040,7 @@
           </p:nvSpPr>
           <p:spPr>
             <a:xfrm>
-              <a:off x="1658029" y="7060163"/>
+              <a:off x="1634299" y="7060163"/>
               <a:ext cx="77724" cy="100218"/>
             </a:xfrm>
             <a:prstGeom prst="rect">
@@ -17086,7 +17086,7 @@
           </p:nvSpPr>
           <p:spPr>
             <a:xfrm>
-              <a:off x="2526696" y="7060163"/>
+              <a:off x="2515106" y="7060163"/>
               <a:ext cx="77724" cy="100218"/>
             </a:xfrm>
             <a:prstGeom prst="rect">
@@ -17132,7 +17132,7 @@
           </p:nvSpPr>
           <p:spPr>
             <a:xfrm>
-              <a:off x="3395362" y="7060163"/>
+              <a:off x="3395914" y="7060163"/>
               <a:ext cx="77724" cy="100218"/>
             </a:xfrm>
             <a:prstGeom prst="rect">
@@ -17178,7 +17178,7 @@
           </p:nvSpPr>
           <p:spPr>
             <a:xfrm>
-              <a:off x="4264028" y="7060163"/>
+              <a:off x="4276722" y="7060163"/>
               <a:ext cx="77724" cy="100218"/>
             </a:xfrm>
             <a:prstGeom prst="rect">
@@ -17388,7 +17388,7 @@
           </p:nvSpPr>
           <p:spPr>
             <a:xfrm>
-              <a:off x="4948748" y="6348760"/>
+              <a:off x="5386336" y="6350281"/>
               <a:ext cx="77571" cy="77571"/>
             </a:xfrm>
             <a:prstGeom prst="ellipse">
@@ -17414,7 +17414,7 @@
           </p:nvSpPr>
           <p:spPr>
             <a:xfrm>
-              <a:off x="5232536" y="6272098"/>
+              <a:off x="4974187" y="6273139"/>
               <a:ext cx="77571" cy="77571"/>
             </a:xfrm>
             <a:prstGeom prst="ellipse">
@@ -17440,7 +17440,7 @@
           </p:nvSpPr>
           <p:spPr>
             <a:xfrm>
-              <a:off x="5276132" y="6332533"/>
+              <a:off x="5201855" y="6333993"/>
               <a:ext cx="77571" cy="77571"/>
             </a:xfrm>
             <a:prstGeom prst="ellipse">
@@ -17466,7 +17466,7 @@
           </p:nvSpPr>
           <p:spPr>
             <a:xfrm>
-              <a:off x="5078594" y="6653082"/>
+              <a:off x="5013860" y="6653066"/>
               <a:ext cx="77571" cy="77571"/>
             </a:xfrm>
             <a:prstGeom prst="ellipse">
@@ -17492,7 +17492,7 @@
           </p:nvSpPr>
           <p:spPr>
             <a:xfrm>
-              <a:off x="5231342" y="6612502"/>
+              <a:off x="5427771" y="6612228"/>
               <a:ext cx="77571" cy="77571"/>
             </a:xfrm>
             <a:prstGeom prst="ellipse">
@@ -17518,7 +17518,7 @@
           </p:nvSpPr>
           <p:spPr>
             <a:xfrm>
-              <a:off x="5068745" y="6568321"/>
+              <a:off x="5029088" y="6568708"/>
               <a:ext cx="77571" cy="77571"/>
             </a:xfrm>
             <a:prstGeom prst="ellipse">
@@ -17544,7 +17544,7 @@
           </p:nvSpPr>
           <p:spPr>
             <a:xfrm>
-              <a:off x="5047060" y="6088836"/>
+              <a:off x="5265940" y="6087964"/>
               <a:ext cx="77571" cy="77571"/>
             </a:xfrm>
             <a:prstGeom prst="ellipse">
@@ -17570,7 +17570,7 @@
           </p:nvSpPr>
           <p:spPr>
             <a:xfrm>
-              <a:off x="5270734" y="6371455"/>
+              <a:off x="4948748" y="6371847"/>
               <a:ext cx="77571" cy="77571"/>
             </a:xfrm>
             <a:prstGeom prst="ellipse">
@@ -17596,7 +17596,7 @@
           </p:nvSpPr>
           <p:spPr>
             <a:xfrm>
-              <a:off x="4979338" y="6591582"/>
+              <a:off x="5187661" y="6592564"/>
               <a:ext cx="77571" cy="77571"/>
             </a:xfrm>
             <a:prstGeom prst="ellipse">
@@ -17622,7 +17622,7 @@
           </p:nvSpPr>
           <p:spPr>
             <a:xfrm>
-              <a:off x="5197941" y="6245181"/>
+              <a:off x="5050141" y="6244897"/>
               <a:ext cx="77571" cy="77571"/>
             </a:xfrm>
             <a:prstGeom prst="ellipse">
@@ -17648,7 +17648,7 @@
           </p:nvSpPr>
           <p:spPr>
             <a:xfrm>
-              <a:off x="6110690" y="6886426"/>
+              <a:off x="6155884" y="6886426"/>
               <a:ext cx="77571" cy="77571"/>
             </a:xfrm>
             <a:prstGeom prst="ellipse">
@@ -17674,7 +17674,7 @@
           </p:nvSpPr>
           <p:spPr>
             <a:xfrm>
-              <a:off x="5959008" y="6499445"/>
+              <a:off x="6181085" y="6498238"/>
               <a:ext cx="77571" cy="77571"/>
             </a:xfrm>
             <a:prstGeom prst="ellipse">
@@ -17700,7 +17700,7 @@
           </p:nvSpPr>
           <p:spPr>
             <a:xfrm>
-              <a:off x="5780773" y="6281243"/>
+              <a:off x="5845106" y="6281259"/>
               <a:ext cx="77571" cy="77571"/>
             </a:xfrm>
             <a:prstGeom prst="ellipse">
@@ -17726,7 +17726,7 @@
           </p:nvSpPr>
           <p:spPr>
             <a:xfrm>
-              <a:off x="5965450" y="6746434"/>
+              <a:off x="5994202" y="6746991"/>
               <a:ext cx="77571" cy="77571"/>
             </a:xfrm>
             <a:prstGeom prst="ellipse">
@@ -17752,7 +17752,7 @@
           </p:nvSpPr>
           <p:spPr>
             <a:xfrm>
-              <a:off x="5938271" y="6416302"/>
+              <a:off x="5958376" y="6415793"/>
               <a:ext cx="77571" cy="77571"/>
             </a:xfrm>
             <a:prstGeom prst="ellipse">
@@ -17778,7 +17778,7 @@
           </p:nvSpPr>
           <p:spPr>
             <a:xfrm>
-              <a:off x="6172800" y="6019559"/>
+              <a:off x="5923214" y="6020130"/>
               <a:ext cx="77571" cy="77571"/>
             </a:xfrm>
             <a:prstGeom prst="ellipse">
@@ -17804,7 +17804,7 @@
           </p:nvSpPr>
           <p:spPr>
             <a:xfrm>
-              <a:off x="6185132" y="6454036"/>
+              <a:off x="5859254" y="6453107"/>
               <a:ext cx="77571" cy="77571"/>
             </a:xfrm>
             <a:prstGeom prst="ellipse">
@@ -17830,7 +17830,7 @@
           </p:nvSpPr>
           <p:spPr>
             <a:xfrm>
-              <a:off x="5992040" y="6522792"/>
+              <a:off x="6221146" y="6522598"/>
               <a:ext cx="77571" cy="77571"/>
             </a:xfrm>
             <a:prstGeom prst="ellipse">
@@ -17856,7 +17856,7 @@
           </p:nvSpPr>
           <p:spPr>
             <a:xfrm>
-              <a:off x="5912697" y="6259145"/>
+              <a:off x="6135761" y="6258114"/>
               <a:ext cx="77571" cy="77571"/>
             </a:xfrm>
             <a:prstGeom prst="ellipse">
@@ -17882,7 +17882,7 @@
           </p:nvSpPr>
           <p:spPr>
             <a:xfrm>
-              <a:off x="6190055" y="6614796"/>
+              <a:off x="5796419" y="6616590"/>
               <a:ext cx="77571" cy="77571"/>
             </a:xfrm>
             <a:prstGeom prst="ellipse">
@@ -17908,7 +17908,7 @@
           </p:nvSpPr>
           <p:spPr>
             <a:xfrm>
-              <a:off x="5732523" y="6200573"/>
+              <a:off x="6120476" y="6201327"/>
               <a:ext cx="77571" cy="77571"/>
             </a:xfrm>
             <a:prstGeom prst="ellipse">
@@ -17934,7 +17934,7 @@
           </p:nvSpPr>
           <p:spPr>
             <a:xfrm>
-              <a:off x="5739446" y="6575766"/>
+              <a:off x="6153750" y="6575543"/>
               <a:ext cx="77571" cy="77571"/>
             </a:xfrm>
             <a:prstGeom prst="ellipse">
@@ -17960,7 +17960,7 @@
           </p:nvSpPr>
           <p:spPr>
             <a:xfrm>
-              <a:off x="5890739" y="6172148"/>
+              <a:off x="6005786" y="6172181"/>
               <a:ext cx="77571" cy="77571"/>
             </a:xfrm>
             <a:prstGeom prst="ellipse">
@@ -17986,7 +17986,7 @@
           </p:nvSpPr>
           <p:spPr>
             <a:xfrm>
-              <a:off x="5725540" y="5811771"/>
+              <a:off x="5797845" y="5811723"/>
               <a:ext cx="77571" cy="77571"/>
             </a:xfrm>
             <a:prstGeom prst="ellipse">
@@ -18012,7 +18012,7 @@
           </p:nvSpPr>
           <p:spPr>
             <a:xfrm>
-              <a:off x="6063793" y="6091218"/>
+              <a:off x="6113581" y="6091199"/>
               <a:ext cx="77571" cy="77571"/>
             </a:xfrm>
             <a:prstGeom prst="ellipse">
@@ -18038,7 +18038,7 @@
           </p:nvSpPr>
           <p:spPr>
             <a:xfrm>
-              <a:off x="5721133" y="6141801"/>
+              <a:off x="6018887" y="6142088"/>
               <a:ext cx="77571" cy="77571"/>
             </a:xfrm>
             <a:prstGeom prst="ellipse">
@@ -18064,7 +18064,7 @@
           </p:nvSpPr>
           <p:spPr>
             <a:xfrm>
-              <a:off x="6117013" y="6263984"/>
+              <a:off x="5914417" y="6264486"/>
               <a:ext cx="77571" cy="77571"/>
             </a:xfrm>
             <a:prstGeom prst="ellipse">
@@ -18090,7 +18090,7 @@
           </p:nvSpPr>
           <p:spPr>
             <a:xfrm>
-              <a:off x="5926274" y="6553796"/>
+              <a:off x="6228420" y="6554993"/>
               <a:ext cx="77571" cy="77571"/>
             </a:xfrm>
             <a:prstGeom prst="ellipse">
@@ -18116,7 +18116,7 @@
           </p:nvSpPr>
           <p:spPr>
             <a:xfrm>
-              <a:off x="6901882" y="6322865"/>
+              <a:off x="7078804" y="6322762"/>
               <a:ext cx="77571" cy="77571"/>
             </a:xfrm>
             <a:prstGeom prst="ellipse">
@@ -18142,7 +18142,7 @@
           </p:nvSpPr>
           <p:spPr>
             <a:xfrm>
-              <a:off x="6707185" y="6381512"/>
+              <a:off x="6923112" y="6382566"/>
               <a:ext cx="77571" cy="77571"/>
             </a:xfrm>
             <a:prstGeom prst="ellipse">
@@ -18168,7 +18168,7 @@
           </p:nvSpPr>
           <p:spPr>
             <a:xfrm>
-              <a:off x="6955503" y="6593980"/>
+              <a:off x="6756666" y="6593722"/>
               <a:ext cx="77571" cy="77571"/>
             </a:xfrm>
             <a:prstGeom prst="ellipse">
@@ -18194,7 +18194,7 @@
           </p:nvSpPr>
           <p:spPr>
             <a:xfrm>
-              <a:off x="6679260" y="6140950"/>
+              <a:off x="6815975" y="6140937"/>
               <a:ext cx="77571" cy="77571"/>
             </a:xfrm>
             <a:prstGeom prst="ellipse">
@@ -18220,7 +18220,7 @@
           </p:nvSpPr>
           <p:spPr>
             <a:xfrm>
-              <a:off x="7078599" y="6384121"/>
+              <a:off x="7080013" y="6384572"/>
               <a:ext cx="77571" cy="77571"/>
             </a:xfrm>
             <a:prstGeom prst="ellipse">
@@ -18246,7 +18246,7 @@
           </p:nvSpPr>
           <p:spPr>
             <a:xfrm>
-              <a:off x="6939372" y="6162423"/>
+              <a:off x="6856919" y="6162258"/>
               <a:ext cx="77571" cy="77571"/>
             </a:xfrm>
             <a:prstGeom prst="ellipse">
@@ -18272,7 +18272,7 @@
           </p:nvSpPr>
           <p:spPr>
             <a:xfrm>
-              <a:off x="6791811" y="5696567"/>
+              <a:off x="6849178" y="5698138"/>
               <a:ext cx="77571" cy="77571"/>
             </a:xfrm>
             <a:prstGeom prst="ellipse">
@@ -18298,7 +18298,7 @@
           </p:nvSpPr>
           <p:spPr>
             <a:xfrm>
-              <a:off x="6990012" y="6442896"/>
+              <a:off x="6737988" y="6442234"/>
               <a:ext cx="77571" cy="77571"/>
             </a:xfrm>
             <a:prstGeom prst="ellipse">
@@ -18324,7 +18324,7 @@
           </p:nvSpPr>
           <p:spPr>
             <a:xfrm>
-              <a:off x="6669732" y="6262016"/>
+              <a:off x="6703095" y="6261136"/>
               <a:ext cx="77571" cy="77571"/>
             </a:xfrm>
             <a:prstGeom prst="ellipse">
@@ -18350,7 +18350,7 @@
           </p:nvSpPr>
           <p:spPr>
             <a:xfrm>
-              <a:off x="6600685" y="5553861"/>
+              <a:off x="6755523" y="5553861"/>
               <a:ext cx="77571" cy="77571"/>
             </a:xfrm>
             <a:prstGeom prst="ellipse">
@@ -18376,7 +18376,7 @@
           </p:nvSpPr>
           <p:spPr>
             <a:xfrm>
-              <a:off x="6600672" y="6268054"/>
+              <a:off x="6876607" y="6267869"/>
               <a:ext cx="77571" cy="77571"/>
             </a:xfrm>
             <a:prstGeom prst="ellipse">
@@ -18402,7 +18402,7 @@
           </p:nvSpPr>
           <p:spPr>
             <a:xfrm>
-              <a:off x="6941981" y="6383864"/>
+              <a:off x="7008781" y="6383392"/>
               <a:ext cx="77571" cy="77571"/>
             </a:xfrm>
             <a:prstGeom prst="ellipse">
@@ -18428,7 +18428,7 @@
           </p:nvSpPr>
           <p:spPr>
             <a:xfrm>
-              <a:off x="6789167" y="6138585"/>
+              <a:off x="6888119" y="6140004"/>
               <a:ext cx="77571" cy="77571"/>
             </a:xfrm>
             <a:prstGeom prst="ellipse">
@@ -18454,7 +18454,7 @@
           </p:nvSpPr>
           <p:spPr>
             <a:xfrm>
-              <a:off x="6786234" y="6067381"/>
+              <a:off x="6647425" y="6066690"/>
               <a:ext cx="77571" cy="77571"/>
             </a:xfrm>
             <a:prstGeom prst="ellipse">
@@ -18480,7 +18480,7 @@
           </p:nvSpPr>
           <p:spPr>
             <a:xfrm>
-              <a:off x="6806931" y="5929631"/>
+              <a:off x="6769854" y="5928660"/>
               <a:ext cx="77571" cy="77571"/>
             </a:xfrm>
             <a:prstGeom prst="ellipse">
@@ -18506,7 +18506,7 @@
           </p:nvSpPr>
           <p:spPr>
             <a:xfrm>
-              <a:off x="6939230" y="6485159"/>
+              <a:off x="6820939" y="6484784"/>
               <a:ext cx="77571" cy="77571"/>
             </a:xfrm>
             <a:prstGeom prst="ellipse">
@@ -18532,7 +18532,7 @@
           </p:nvSpPr>
           <p:spPr>
             <a:xfrm>
-              <a:off x="6778814" y="6516217"/>
+              <a:off x="6978384" y="6517775"/>
               <a:ext cx="77571" cy="77571"/>
             </a:xfrm>
             <a:prstGeom prst="ellipse">
@@ -18558,7 +18558,7 @@
           </p:nvSpPr>
           <p:spPr>
             <a:xfrm>
-              <a:off x="6764177" y="6724681"/>
+              <a:off x="7003418" y="6725695"/>
               <a:ext cx="77571" cy="77571"/>
             </a:xfrm>
             <a:prstGeom prst="ellipse">
@@ -18584,7 +18584,7 @@
           </p:nvSpPr>
           <p:spPr>
             <a:xfrm>
-              <a:off x="6847286" y="6311526"/>
+              <a:off x="6881694" y="6313344"/>
               <a:ext cx="77571" cy="77571"/>
             </a:xfrm>
             <a:prstGeom prst="ellipse">
@@ -18610,7 +18610,7 @@
           </p:nvSpPr>
           <p:spPr>
             <a:xfrm>
-              <a:off x="6657341" y="6230272"/>
+              <a:off x="6659148" y="6229027"/>
               <a:ext cx="77571" cy="77571"/>
             </a:xfrm>
             <a:prstGeom prst="ellipse">
@@ -18636,7 +18636,7 @@
           </p:nvSpPr>
           <p:spPr>
             <a:xfrm>
-              <a:off x="7758713" y="6278510"/>
+              <a:off x="7860406" y="6278496"/>
               <a:ext cx="77571" cy="77571"/>
             </a:xfrm>
             <a:prstGeom prst="ellipse">
@@ -18662,7 +18662,7 @@
           </p:nvSpPr>
           <p:spPr>
             <a:xfrm>
-              <a:off x="7637252" y="6407995"/>
+              <a:off x="7877398" y="6407850"/>
               <a:ext cx="77571" cy="77571"/>
             </a:xfrm>
             <a:prstGeom prst="ellipse">
@@ -18688,7 +18688,7 @@
           </p:nvSpPr>
           <p:spPr>
             <a:xfrm>
-              <a:off x="7519960" y="6485755"/>
+              <a:off x="7627845" y="6484334"/>
               <a:ext cx="77571" cy="77571"/>
             </a:xfrm>
             <a:prstGeom prst="ellipse">
@@ -18714,7 +18714,7 @@
           </p:nvSpPr>
           <p:spPr>
             <a:xfrm>
-              <a:off x="7719122" y="6523089"/>
+              <a:off x="7722631" y="6521883"/>
               <a:ext cx="77571" cy="77571"/>
             </a:xfrm>
             <a:prstGeom prst="ellipse">
@@ -18740,7 +18740,7 @@
           </p:nvSpPr>
           <p:spPr>
             <a:xfrm>
-              <a:off x="7680307" y="6320410"/>
+              <a:off x="7768485" y="6320448"/>
               <a:ext cx="77571" cy="77571"/>
             </a:xfrm>
             <a:prstGeom prst="ellipse">
@@ -18766,7 +18766,7 @@
           </p:nvSpPr>
           <p:spPr>
             <a:xfrm>
-              <a:off x="7742264" y="6253305"/>
+              <a:off x="7640616" y="6254610"/>
               <a:ext cx="77571" cy="77571"/>
             </a:xfrm>
             <a:prstGeom prst="ellipse">
@@ -18792,7 +18792,7 @@
           </p:nvSpPr>
           <p:spPr>
             <a:xfrm>
-              <a:off x="7869256" y="6483391"/>
+              <a:off x="7886390" y="6483669"/>
               <a:ext cx="77571" cy="77571"/>
             </a:xfrm>
             <a:prstGeom prst="ellipse">
@@ -18818,7 +18818,7 @@
           </p:nvSpPr>
           <p:spPr>
             <a:xfrm>
-              <a:off x="7866509" y="6184085"/>
+              <a:off x="7795689" y="6184959"/>
               <a:ext cx="77571" cy="77571"/>
             </a:xfrm>
             <a:prstGeom prst="ellipse">
@@ -18844,7 +18844,7 @@
           </p:nvSpPr>
           <p:spPr>
             <a:xfrm>
-              <a:off x="7760172" y="6558808"/>
+              <a:off x="7676218" y="6560527"/>
               <a:ext cx="77571" cy="77571"/>
             </a:xfrm>
             <a:prstGeom prst="ellipse">
@@ -18870,7 +18870,7 @@
           </p:nvSpPr>
           <p:spPr>
             <a:xfrm>
-              <a:off x="7633176" y="6402733"/>
+              <a:off x="7940029" y="6403231"/>
               <a:ext cx="77571" cy="77571"/>
             </a:xfrm>
             <a:prstGeom prst="ellipse">
@@ -18896,7 +18896,7 @@
           </p:nvSpPr>
           <p:spPr>
             <a:xfrm>
-              <a:off x="7703352" y="6326413"/>
+              <a:off x="7610404" y="6326030"/>
               <a:ext cx="77571" cy="77571"/>
             </a:xfrm>
             <a:prstGeom prst="ellipse">
@@ -18922,7 +18922,7 @@
           </p:nvSpPr>
           <p:spPr>
             <a:xfrm>
-              <a:off x="7883903" y="6413001"/>
+              <a:off x="7499767" y="6414257"/>
               <a:ext cx="77571" cy="77571"/>
             </a:xfrm>
             <a:prstGeom prst="ellipse">
@@ -18948,7 +18948,7 @@
           </p:nvSpPr>
           <p:spPr>
             <a:xfrm>
-              <a:off x="7915906" y="6369905"/>
+              <a:off x="7905994" y="6371903"/>
               <a:ext cx="77571" cy="77571"/>
             </a:xfrm>
             <a:prstGeom prst="ellipse">
@@ -18974,7 +18974,7 @@
           </p:nvSpPr>
           <p:spPr>
             <a:xfrm>
-              <a:off x="7751807" y="6683227"/>
+              <a:off x="7547327" y="6683309"/>
               <a:ext cx="77571" cy="77571"/>
             </a:xfrm>
             <a:prstGeom prst="ellipse">
@@ -19000,7 +19000,7 @@
           </p:nvSpPr>
           <p:spPr>
             <a:xfrm>
-              <a:off x="7940029" y="6392886"/>
+              <a:off x="7905855" y="6392483"/>
               <a:ext cx="77571" cy="77571"/>
             </a:xfrm>
             <a:prstGeom prst="ellipse">
@@ -19026,7 +19026,7 @@
           </p:nvSpPr>
           <p:spPr>
             <a:xfrm>
-              <a:off x="7764535" y="6411728"/>
+              <a:off x="7661759" y="6410790"/>
               <a:ext cx="77571" cy="77571"/>
             </a:xfrm>
             <a:prstGeom prst="ellipse">
@@ -19052,7 +19052,7 @@
           </p:nvSpPr>
           <p:spPr>
             <a:xfrm>
-              <a:off x="7865849" y="6291789"/>
+              <a:off x="7674054" y="6291665"/>
               <a:ext cx="77571" cy="77571"/>
             </a:xfrm>
             <a:prstGeom prst="ellipse">
@@ -19078,7 +19078,7 @@
           </p:nvSpPr>
           <p:spPr>
             <a:xfrm>
-              <a:off x="7597628" y="6320035"/>
+              <a:off x="7549154" y="6321180"/>
               <a:ext cx="77571" cy="77571"/>
             </a:xfrm>
             <a:prstGeom prst="ellipse">
@@ -19104,7 +19104,7 @@
           </p:nvSpPr>
           <p:spPr>
             <a:xfrm>
-              <a:off x="7829109" y="6697159"/>
+              <a:off x="7534919" y="6698923"/>
               <a:ext cx="77571" cy="77571"/>
             </a:xfrm>
             <a:prstGeom prst="ellipse">
@@ -19130,7 +19130,7 @@
           </p:nvSpPr>
           <p:spPr>
             <a:xfrm>
-              <a:off x="7763848" y="6286160"/>
+              <a:off x="7491250" y="6285335"/>
               <a:ext cx="77571" cy="77571"/>
             </a:xfrm>
             <a:prstGeom prst="ellipse">
@@ -19156,7 +19156,7 @@
           </p:nvSpPr>
           <p:spPr>
             <a:xfrm>
-              <a:off x="7544973" y="6169106"/>
+              <a:off x="7824842" y="6167798"/>
               <a:ext cx="77571" cy="77571"/>
             </a:xfrm>
             <a:prstGeom prst="ellipse">
@@ -19182,7 +19182,7 @@
           </p:nvSpPr>
           <p:spPr>
             <a:xfrm>
-              <a:off x="7843924" y="6198586"/>
+              <a:off x="7849588" y="6197521"/>
               <a:ext cx="77571" cy="77571"/>
             </a:xfrm>
             <a:prstGeom prst="ellipse">
@@ -19208,7 +19208,7 @@
           </p:nvSpPr>
           <p:spPr>
             <a:xfrm>
-              <a:off x="7645449" y="6512294"/>
+              <a:off x="7660779" y="6512606"/>
               <a:ext cx="77571" cy="77571"/>
             </a:xfrm>
             <a:prstGeom prst="ellipse">
@@ -19234,7 +19234,7 @@
           </p:nvSpPr>
           <p:spPr>
             <a:xfrm>
-              <a:off x="7885917" y="6584537"/>
+              <a:off x="7556214" y="6584242"/>
               <a:ext cx="77571" cy="77571"/>
             </a:xfrm>
             <a:prstGeom prst="ellipse">
@@ -19260,42 +19260,42 @@
           </p:nvSpPr>
           <p:spPr>
             <a:xfrm>
-              <a:off x="5114639" y="6194906"/>
-              <a:ext cx="2643364" cy="334907"/>
+              <a:off x="5227602" y="6194811"/>
+              <a:ext cx="2525669" cy="335090"/>
             </a:xfrm>
             <a:custGeom>
               <a:avLst/>
               <a:pathLst>
-                <a:path w="2643364" h="334907">
+                <a:path w="2525669" h="335090">
                   <a:moveTo>
                     <a:pt x="0" y="0"/>
                   </a:moveTo>
                   <a:lnTo>
-                    <a:pt x="1396544" y="68164"/>
+                    <a:pt x="1334363" y="68201"/>
                   </a:lnTo>
                   <a:lnTo>
-                    <a:pt x="1762243" y="66520"/>
+                    <a:pt x="1683779" y="66556"/>
                   </a:lnTo>
                   <a:lnTo>
-                    <a:pt x="2277666" y="49185"/>
+                    <a:pt x="2176253" y="49212"/>
                   </a:lnTo>
                   <a:lnTo>
-                    <a:pt x="2643364" y="29550"/>
+                    <a:pt x="2525669" y="29566"/>
                   </a:lnTo>
                   <a:lnTo>
-                    <a:pt x="2643364" y="324763"/>
+                    <a:pt x="2525669" y="324941"/>
                   </a:lnTo>
                   <a:lnTo>
-                    <a:pt x="2277666" y="302443"/>
+                    <a:pt x="2176253" y="302609"/>
                   </a:lnTo>
                   <a:lnTo>
-                    <a:pt x="1762243" y="281324"/>
+                    <a:pt x="1683779" y="281479"/>
                   </a:lnTo>
                   <a:lnTo>
-                    <a:pt x="1396544" y="276996"/>
+                    <a:pt x="1334363" y="277148"/>
                   </a:lnTo>
                   <a:lnTo>
-                    <a:pt x="0" y="334907"/>
+                    <a:pt x="0" y="335090"/>
                   </a:lnTo>
                   <a:close/>
                 </a:path>
@@ -19321,27 +19321,27 @@
           </p:nvSpPr>
           <p:spPr>
             <a:xfrm>
-              <a:off x="5114639" y="6194906"/>
-              <a:ext cx="2643364" cy="68164"/>
+              <a:off x="5227602" y="6194811"/>
+              <a:ext cx="2525669" cy="68201"/>
             </a:xfrm>
             <a:custGeom>
               <a:avLst/>
               <a:pathLst>
-                <a:path w="2643364" h="68164">
+                <a:path w="2525669" h="68201">
                   <a:moveTo>
                     <a:pt x="0" y="0"/>
                   </a:moveTo>
                   <a:lnTo>
-                    <a:pt x="1396544" y="68164"/>
+                    <a:pt x="1334363" y="68201"/>
                   </a:lnTo>
                   <a:lnTo>
-                    <a:pt x="1762243" y="66520"/>
+                    <a:pt x="1683779" y="66556"/>
                   </a:lnTo>
                   <a:lnTo>
-                    <a:pt x="2277666" y="49185"/>
+                    <a:pt x="2176253" y="49212"/>
                   </a:lnTo>
                   <a:lnTo>
-                    <a:pt x="2643364" y="29550"/>
+                    <a:pt x="2525669" y="29566"/>
                   </a:lnTo>
                 </a:path>
               </a:pathLst>
@@ -19361,27 +19361,27 @@
           </p:nvSpPr>
           <p:spPr>
             <a:xfrm>
-              <a:off x="5114639" y="6471902"/>
-              <a:ext cx="2643364" cy="57910"/>
+              <a:off x="5227602" y="6471960"/>
+              <a:ext cx="2525669" cy="57942"/>
             </a:xfrm>
             <a:custGeom>
               <a:avLst/>
               <a:pathLst>
-                <a:path w="2643364" h="57910">
+                <a:path w="2525669" h="57942">
                   <a:moveTo>
-                    <a:pt x="2643364" y="47767"/>
+                    <a:pt x="2525669" y="47793"/>
                   </a:moveTo>
                   <a:lnTo>
-                    <a:pt x="2277666" y="25447"/>
+                    <a:pt x="2176253" y="25461"/>
                   </a:lnTo>
                   <a:lnTo>
-                    <a:pt x="1762243" y="4328"/>
+                    <a:pt x="1683779" y="4330"/>
                   </a:lnTo>
                   <a:lnTo>
-                    <a:pt x="1396544" y="0"/>
+                    <a:pt x="1334363" y="0"/>
                   </a:lnTo>
                   <a:lnTo>
-                    <a:pt x="0" y="57910"/>
+                    <a:pt x="0" y="57942"/>
                   </a:lnTo>
                 </a:path>
               </a:pathLst>
@@ -19401,27 +19401,27 @@
           </p:nvSpPr>
           <p:spPr>
             <a:xfrm>
-              <a:off x="5114639" y="6362359"/>
-              <a:ext cx="2643364" cy="9703"/>
+              <a:off x="5227602" y="6362357"/>
+              <a:ext cx="2525669" cy="9708"/>
             </a:xfrm>
             <a:custGeom>
               <a:avLst/>
               <a:pathLst>
-                <a:path w="2643364" h="9703">
+                <a:path w="2525669" h="9708">
                   <a:moveTo>
                     <a:pt x="0" y="0"/>
                   </a:moveTo>
                   <a:lnTo>
-                    <a:pt x="1396544" y="5126"/>
+                    <a:pt x="1334363" y="5129"/>
                   </a:lnTo>
                   <a:lnTo>
-                    <a:pt x="1762243" y="6469"/>
+                    <a:pt x="1683779" y="6472"/>
                   </a:lnTo>
                   <a:lnTo>
-                    <a:pt x="2277666" y="8361"/>
+                    <a:pt x="2176253" y="8365"/>
                   </a:lnTo>
                   <a:lnTo>
-                    <a:pt x="2643364" y="9703"/>
+                    <a:pt x="2525669" y="9708"/>
                   </a:lnTo>
                 </a:path>
               </a:pathLst>
@@ -19450,7 +19450,7 @@
           </p:nvSpPr>
           <p:spPr>
             <a:xfrm>
-              <a:off x="7278310" y="5602986"/>
+              <a:off x="7273578" y="5602634"/>
               <a:ext cx="479694" cy="82021"/>
             </a:xfrm>
             <a:prstGeom prst="rect">
@@ -19557,7 +19557,7 @@
           </p:nvSpPr>
           <p:spPr>
             <a:xfrm>
-              <a:off x="4800012" y="6903565"/>
+              <a:off x="4800012" y="6903859"/>
               <a:ext cx="37957" cy="0"/>
             </a:xfrm>
             <a:custGeom>
@@ -19597,7 +19597,7 @@
           </p:nvSpPr>
           <p:spPr>
             <a:xfrm>
-              <a:off x="4800012" y="6611688"/>
+              <a:off x="4800012" y="6611822"/>
               <a:ext cx="37957" cy="0"/>
             </a:xfrm>
             <a:custGeom>
@@ -19637,7 +19637,7 @@
           </p:nvSpPr>
           <p:spPr>
             <a:xfrm>
-              <a:off x="4800012" y="6319811"/>
+              <a:off x="4800012" y="6319785"/>
               <a:ext cx="37957" cy="0"/>
             </a:xfrm>
             <a:custGeom>
@@ -19677,7 +19677,7 @@
           </p:nvSpPr>
           <p:spPr>
             <a:xfrm>
-              <a:off x="4800012" y="6027934"/>
+              <a:off x="4800012" y="6027748"/>
               <a:ext cx="37957" cy="0"/>
             </a:xfrm>
             <a:custGeom>
@@ -19717,7 +19717,7 @@
           </p:nvSpPr>
           <p:spPr>
             <a:xfrm>
-              <a:off x="4800012" y="5736057"/>
+              <a:off x="4800012" y="5735711"/>
               <a:ext cx="37957" cy="0"/>
             </a:xfrm>
             <a:custGeom>
@@ -19757,7 +19757,7 @@
           </p:nvSpPr>
           <p:spPr>
             <a:xfrm>
-              <a:off x="4800012" y="5444180"/>
+              <a:off x="4800012" y="5443674"/>
               <a:ext cx="37957" cy="0"/>
             </a:xfrm>
             <a:custGeom>
@@ -19837,7 +19837,7 @@
           </p:nvSpPr>
           <p:spPr>
             <a:xfrm>
-              <a:off x="5114639" y="6991840"/>
+              <a:off x="5227602" y="6991840"/>
               <a:ext cx="0" cy="37957"/>
             </a:xfrm>
             <a:custGeom>
@@ -19877,7 +19877,7 @@
           </p:nvSpPr>
           <p:spPr>
             <a:xfrm>
-              <a:off x="5995761" y="6991840"/>
+              <a:off x="6069492" y="6991840"/>
               <a:ext cx="0" cy="37957"/>
             </a:xfrm>
             <a:custGeom>
@@ -19917,7 +19917,7 @@
           </p:nvSpPr>
           <p:spPr>
             <a:xfrm>
-              <a:off x="6876882" y="6991840"/>
+              <a:off x="6911382" y="6991840"/>
               <a:ext cx="0" cy="37957"/>
             </a:xfrm>
             <a:custGeom>
@@ -19957,7 +19957,7 @@
           </p:nvSpPr>
           <p:spPr>
             <a:xfrm>
-              <a:off x="7758004" y="6991840"/>
+              <a:off x="7753272" y="6991840"/>
               <a:ext cx="0" cy="37957"/>
             </a:xfrm>
             <a:custGeom>
@@ -19997,7 +19997,7 @@
           </p:nvSpPr>
           <p:spPr>
             <a:xfrm>
-              <a:off x="5075777" y="7060163"/>
+              <a:off x="5188740" y="7060163"/>
               <a:ext cx="77724" cy="100218"/>
             </a:xfrm>
             <a:prstGeom prst="rect">
@@ -20043,7 +20043,7 @@
           </p:nvSpPr>
           <p:spPr>
             <a:xfrm>
-              <a:off x="5956899" y="7060163"/>
+              <a:off x="6030630" y="7060163"/>
               <a:ext cx="77724" cy="100218"/>
             </a:xfrm>
             <a:prstGeom prst="rect">
@@ -20089,7 +20089,7 @@
           </p:nvSpPr>
           <p:spPr>
             <a:xfrm>
-              <a:off x="6838020" y="7060163"/>
+              <a:off x="6872520" y="7060163"/>
               <a:ext cx="77724" cy="100218"/>
             </a:xfrm>
             <a:prstGeom prst="rect">
@@ -20135,7 +20135,7 @@
           </p:nvSpPr>
           <p:spPr>
             <a:xfrm>
-              <a:off x="7719142" y="7060163"/>
+              <a:off x="7714410" y="7060163"/>
               <a:ext cx="77724" cy="100218"/>
             </a:xfrm>
             <a:prstGeom prst="rect">

--- a/figures/Figure_1.pptx
+++ b/figures/Figure_1.pptx
@@ -2515,7 +2515,7 @@
           </p:nvSpPr>
           <p:spPr>
             <a:xfrm>
-              <a:off x="1564307" y="2516442"/>
+              <a:off x="1754597" y="2516580"/>
               <a:ext cx="77571" cy="77571"/>
             </a:xfrm>
             <a:prstGeom prst="ellipse">
@@ -2541,7 +2541,7 @@
           </p:nvSpPr>
           <p:spPr>
             <a:xfrm>
-              <a:off x="1639136" y="2437244"/>
+              <a:off x="1538470" y="2437262"/>
               <a:ext cx="77571" cy="77571"/>
             </a:xfrm>
             <a:prstGeom prst="ellipse">
@@ -2567,7 +2567,7 @@
           </p:nvSpPr>
           <p:spPr>
             <a:xfrm>
-              <a:off x="1582367" y="2556743"/>
+              <a:off x="1738645" y="2556653"/>
               <a:ext cx="77571" cy="77571"/>
             </a:xfrm>
             <a:prstGeom prst="ellipse">
@@ -2593,7 +2593,7 @@
           </p:nvSpPr>
           <p:spPr>
             <a:xfrm>
-              <a:off x="1736416" y="2553306"/>
+              <a:off x="1618973" y="2553316"/>
               <a:ext cx="77571" cy="77571"/>
             </a:xfrm>
             <a:prstGeom prst="ellipse">
@@ -2619,7 +2619,7 @@
           </p:nvSpPr>
           <p:spPr>
             <a:xfrm>
-              <a:off x="1519161" y="2582720"/>
+              <a:off x="1519161" y="2582731"/>
               <a:ext cx="77571" cy="77571"/>
             </a:xfrm>
             <a:prstGeom prst="ellipse">
@@ -2645,7 +2645,7 @@
           </p:nvSpPr>
           <p:spPr>
             <a:xfrm>
-              <a:off x="1654605" y="2415472"/>
+              <a:off x="1641907" y="2415461"/>
               <a:ext cx="77571" cy="77571"/>
             </a:xfrm>
             <a:prstGeom prst="ellipse">
@@ -2671,7 +2671,7 @@
           </p:nvSpPr>
           <p:spPr>
             <a:xfrm>
-              <a:off x="1520704" y="2322306"/>
+              <a:off x="1531667" y="2322351"/>
               <a:ext cx="77571" cy="77571"/>
             </a:xfrm>
             <a:prstGeom prst="ellipse">
@@ -2697,7 +2697,7 @@
           </p:nvSpPr>
           <p:spPr>
             <a:xfrm>
-              <a:off x="1596724" y="2535093"/>
+              <a:off x="1657687" y="2535083"/>
               <a:ext cx="77571" cy="77571"/>
             </a:xfrm>
             <a:prstGeom prst="ellipse">
@@ -2723,7 +2723,7 @@
           </p:nvSpPr>
           <p:spPr>
             <a:xfrm>
-              <a:off x="1590097" y="2616160"/>
+              <a:off x="1624583" y="2616247"/>
               <a:ext cx="77571" cy="77571"/>
             </a:xfrm>
             <a:prstGeom prst="ellipse">
@@ -2749,7 +2749,7 @@
           </p:nvSpPr>
           <p:spPr>
             <a:xfrm>
-              <a:off x="1723524" y="2392350"/>
+              <a:off x="1674591" y="2392419"/>
               <a:ext cx="77571" cy="77571"/>
             </a:xfrm>
             <a:prstGeom prst="ellipse">
@@ -2775,7 +2775,7 @@
           </p:nvSpPr>
           <p:spPr>
             <a:xfrm>
-              <a:off x="2631339" y="2625613"/>
+              <a:off x="2576799" y="2625651"/>
               <a:ext cx="77571" cy="77571"/>
             </a:xfrm>
             <a:prstGeom prst="ellipse">
@@ -2801,7 +2801,7 @@
           </p:nvSpPr>
           <p:spPr>
             <a:xfrm>
-              <a:off x="2573056" y="2554089"/>
+              <a:off x="2466821" y="2554220"/>
               <a:ext cx="77571" cy="77571"/>
             </a:xfrm>
             <a:prstGeom prst="ellipse">
@@ -2827,7 +2827,7 @@
           </p:nvSpPr>
           <p:spPr>
             <a:xfrm>
-              <a:off x="2449199" y="1874060"/>
+              <a:off x="2467388" y="1874002"/>
               <a:ext cx="77571" cy="77571"/>
             </a:xfrm>
             <a:prstGeom prst="ellipse">
@@ -2853,7 +2853,7 @@
           </p:nvSpPr>
           <p:spPr>
             <a:xfrm>
-              <a:off x="2681361" y="2463322"/>
+              <a:off x="2620685" y="2463373"/>
               <a:ext cx="77571" cy="77571"/>
             </a:xfrm>
             <a:prstGeom prst="ellipse">
@@ -2879,7 +2879,7 @@
           </p:nvSpPr>
           <p:spPr>
             <a:xfrm>
-              <a:off x="2539050" y="2547224"/>
+              <a:off x="2537698" y="2547275"/>
               <a:ext cx="77571" cy="77571"/>
             </a:xfrm>
             <a:prstGeom prst="ellipse">
@@ -2905,7 +2905,7 @@
           </p:nvSpPr>
           <p:spPr>
             <a:xfrm>
-              <a:off x="2456739" y="2619373"/>
+              <a:off x="2664772" y="2619352"/>
               <a:ext cx="77571" cy="77571"/>
             </a:xfrm>
             <a:prstGeom prst="ellipse">
@@ -2931,7 +2931,7 @@
           </p:nvSpPr>
           <p:spPr>
             <a:xfrm>
-              <a:off x="2631492" y="2648572"/>
+              <a:off x="2492835" y="2648588"/>
               <a:ext cx="77571" cy="77571"/>
             </a:xfrm>
             <a:prstGeom prst="ellipse">
@@ -2957,7 +2957,7 @@
           </p:nvSpPr>
           <p:spPr>
             <a:xfrm>
-              <a:off x="2440638" y="2454002"/>
+              <a:off x="2437090" y="2454026"/>
               <a:ext cx="77571" cy="77571"/>
             </a:xfrm>
             <a:prstGeom prst="ellipse">
@@ -2983,7 +2983,7 @@
           </p:nvSpPr>
           <p:spPr>
             <a:xfrm>
-              <a:off x="2480700" y="1732557"/>
+              <a:off x="2589313" y="1732550"/>
               <a:ext cx="77571" cy="77571"/>
             </a:xfrm>
             <a:prstGeom prst="ellipse">
@@ -3009,7 +3009,7 @@
           </p:nvSpPr>
           <p:spPr>
             <a:xfrm>
-              <a:off x="2470612" y="1942988"/>
+              <a:off x="2555111" y="1943022"/>
               <a:ext cx="77571" cy="77571"/>
             </a:xfrm>
             <a:prstGeom prst="ellipse">
@@ -3035,7 +3035,7 @@
           </p:nvSpPr>
           <p:spPr>
             <a:xfrm>
-              <a:off x="2464143" y="2637940"/>
+              <a:off x="2645637" y="2637831"/>
               <a:ext cx="77571" cy="77571"/>
             </a:xfrm>
             <a:prstGeom prst="ellipse">
@@ -3061,7 +3061,7 @@
           </p:nvSpPr>
           <p:spPr>
             <a:xfrm>
-              <a:off x="2554162" y="2409196"/>
+              <a:off x="2582740" y="2409228"/>
               <a:ext cx="77571" cy="77571"/>
             </a:xfrm>
             <a:prstGeom prst="ellipse">
@@ -3087,7 +3087,7 @@
           </p:nvSpPr>
           <p:spPr>
             <a:xfrm>
-              <a:off x="2476046" y="2345957"/>
+              <a:off x="2624950" y="2345867"/>
               <a:ext cx="77571" cy="77571"/>
             </a:xfrm>
             <a:prstGeom prst="ellipse">
@@ -3113,7 +3113,7 @@
           </p:nvSpPr>
           <p:spPr>
             <a:xfrm>
-              <a:off x="2682501" y="2356904"/>
+              <a:off x="2556895" y="2357000"/>
               <a:ext cx="77571" cy="77571"/>
             </a:xfrm>
             <a:prstGeom prst="ellipse">
@@ -3139,7 +3139,7 @@
           </p:nvSpPr>
           <p:spPr>
             <a:xfrm>
-              <a:off x="2649567" y="2539438"/>
+              <a:off x="2479738" y="2539415"/>
               <a:ext cx="77571" cy="77571"/>
             </a:xfrm>
             <a:prstGeom prst="ellipse">
@@ -3165,7 +3165,7 @@
           </p:nvSpPr>
           <p:spPr>
             <a:xfrm>
-              <a:off x="2430737" y="2471801"/>
+              <a:off x="2580442" y="2471871"/>
               <a:ext cx="77571" cy="77571"/>
             </a:xfrm>
             <a:prstGeom prst="ellipse">
@@ -3191,7 +3191,7 @@
           </p:nvSpPr>
           <p:spPr>
             <a:xfrm>
-              <a:off x="2618199" y="1933908"/>
+              <a:off x="2640474" y="1934012"/>
               <a:ext cx="77571" cy="77571"/>
             </a:xfrm>
             <a:prstGeom prst="ellipse">
@@ -3217,7 +3217,7 @@
           </p:nvSpPr>
           <p:spPr>
             <a:xfrm>
-              <a:off x="2491815" y="2087883"/>
+              <a:off x="2513658" y="2087839"/>
               <a:ext cx="77571" cy="77571"/>
             </a:xfrm>
             <a:prstGeom prst="ellipse">
@@ -3243,7 +3243,7 @@
           </p:nvSpPr>
           <p:spPr>
             <a:xfrm>
-              <a:off x="3556694" y="2579961"/>
+              <a:off x="3367039" y="2580021"/>
               <a:ext cx="77571" cy="77571"/>
             </a:xfrm>
             <a:prstGeom prst="ellipse">
@@ -3269,7 +3269,7 @@
           </p:nvSpPr>
           <p:spPr>
             <a:xfrm>
-              <a:off x="3361012" y="2335030"/>
+              <a:off x="3376930" y="2335014"/>
               <a:ext cx="77571" cy="77571"/>
             </a:xfrm>
             <a:prstGeom prst="ellipse">
@@ -3295,7 +3295,7 @@
           </p:nvSpPr>
           <p:spPr>
             <a:xfrm>
-              <a:off x="3538715" y="2594117"/>
+              <a:off x="3526235" y="2594107"/>
               <a:ext cx="77571" cy="77571"/>
             </a:xfrm>
             <a:prstGeom prst="ellipse">
@@ -3321,7 +3321,7 @@
           </p:nvSpPr>
           <p:spPr>
             <a:xfrm>
-              <a:off x="3467978" y="2695776"/>
+              <a:off x="3528226" y="2695776"/>
               <a:ext cx="77571" cy="77571"/>
             </a:xfrm>
             <a:prstGeom prst="ellipse">
@@ -3347,7 +3347,7 @@
           </p:nvSpPr>
           <p:spPr>
             <a:xfrm>
-              <a:off x="3506256" y="2409159"/>
+              <a:off x="3548872" y="2409163"/>
               <a:ext cx="77571" cy="77571"/>
             </a:xfrm>
             <a:prstGeom prst="ellipse">
@@ -3373,7 +3373,7 @@
           </p:nvSpPr>
           <p:spPr>
             <a:xfrm>
-              <a:off x="3504978" y="2568145"/>
+              <a:off x="3542162" y="2568105"/>
               <a:ext cx="77571" cy="77571"/>
             </a:xfrm>
             <a:prstGeom prst="ellipse">
@@ -3399,7 +3399,7 @@
           </p:nvSpPr>
           <p:spPr>
             <a:xfrm>
-              <a:off x="3599912" y="1538133"/>
+              <a:off x="3345365" y="1538117"/>
               <a:ext cx="77571" cy="77571"/>
             </a:xfrm>
             <a:prstGeom prst="ellipse">
@@ -3425,7 +3425,7 @@
           </p:nvSpPr>
           <p:spPr>
             <a:xfrm>
-              <a:off x="3537270" y="2619521"/>
+              <a:off x="3544040" y="2619488"/>
               <a:ext cx="77571" cy="77571"/>
             </a:xfrm>
             <a:prstGeom prst="ellipse">
@@ -3451,7 +3451,7 @@
           </p:nvSpPr>
           <p:spPr>
             <a:xfrm>
-              <a:off x="3420705" y="2233049"/>
+              <a:off x="3371985" y="2232982"/>
               <a:ext cx="77571" cy="77571"/>
             </a:xfrm>
             <a:prstGeom prst="ellipse">
@@ -3477,7 +3477,7 @@
           </p:nvSpPr>
           <p:spPr>
             <a:xfrm>
-              <a:off x="3347993" y="1857954"/>
+              <a:off x="3482628" y="1857892"/>
               <a:ext cx="77571" cy="77571"/>
             </a:xfrm>
             <a:prstGeom prst="ellipse">
@@ -3503,7 +3503,7 @@
           </p:nvSpPr>
           <p:spPr>
             <a:xfrm>
-              <a:off x="3555126" y="1242069"/>
+              <a:off x="3462318" y="1242069"/>
               <a:ext cx="77571" cy="77571"/>
             </a:xfrm>
             <a:prstGeom prst="ellipse">
@@ -3529,7 +3529,7 @@
           </p:nvSpPr>
           <p:spPr>
             <a:xfrm>
-              <a:off x="3434885" y="2120342"/>
+              <a:off x="3531264" y="2120311"/>
               <a:ext cx="77571" cy="77571"/>
             </a:xfrm>
             <a:prstGeom prst="ellipse">
@@ -3555,7 +3555,7 @@
           </p:nvSpPr>
           <p:spPr>
             <a:xfrm>
-              <a:off x="3366392" y="2306897"/>
+              <a:off x="3593610" y="2306912"/>
               <a:ext cx="77571" cy="77571"/>
             </a:xfrm>
             <a:prstGeom prst="ellipse">
@@ -3581,7 +3581,7 @@
           </p:nvSpPr>
           <p:spPr>
             <a:xfrm>
-              <a:off x="3488917" y="2149344"/>
+              <a:off x="3549990" y="2149271"/>
               <a:ext cx="77571" cy="77571"/>
             </a:xfrm>
             <a:prstGeom prst="ellipse">
@@ -3607,7 +3607,7 @@
           </p:nvSpPr>
           <p:spPr>
             <a:xfrm>
-              <a:off x="3574629" y="2277786"/>
+              <a:off x="3404776" y="2277701"/>
               <a:ext cx="77571" cy="77571"/>
             </a:xfrm>
             <a:prstGeom prst="ellipse">
@@ -3633,7 +3633,7 @@
           </p:nvSpPr>
           <p:spPr>
             <a:xfrm>
-              <a:off x="3438392" y="2448937"/>
+              <a:off x="3482269" y="2448926"/>
               <a:ext cx="77571" cy="77571"/>
             </a:xfrm>
             <a:prstGeom prst="ellipse">
@@ -3659,7 +3659,7 @@
           </p:nvSpPr>
           <p:spPr>
             <a:xfrm>
-              <a:off x="3503845" y="2350999"/>
+              <a:off x="3347665" y="2350984"/>
               <a:ext cx="77571" cy="77571"/>
             </a:xfrm>
             <a:prstGeom prst="ellipse">
@@ -3685,7 +3685,7 @@
           </p:nvSpPr>
           <p:spPr>
             <a:xfrm>
-              <a:off x="3357636" y="2334711"/>
+              <a:off x="3424475" y="2334711"/>
               <a:ext cx="77571" cy="77571"/>
             </a:xfrm>
             <a:prstGeom prst="ellipse">
@@ -3711,7 +3711,7 @@
           </p:nvSpPr>
           <p:spPr>
             <a:xfrm>
-              <a:off x="3546054" y="2447417"/>
+              <a:off x="3524240" y="2447414"/>
               <a:ext cx="77571" cy="77571"/>
             </a:xfrm>
             <a:prstGeom prst="ellipse">
@@ -3737,7 +3737,7 @@
           </p:nvSpPr>
           <p:spPr>
             <a:xfrm>
-              <a:off x="3528951" y="2435535"/>
+              <a:off x="3563966" y="2435553"/>
               <a:ext cx="77571" cy="77571"/>
             </a:xfrm>
             <a:prstGeom prst="ellipse">
@@ -3763,7 +3763,7 @@
           </p:nvSpPr>
           <p:spPr>
             <a:xfrm>
-              <a:off x="4284130" y="2454976"/>
+              <a:off x="4291276" y="2455101"/>
               <a:ext cx="77571" cy="77571"/>
             </a:xfrm>
             <a:prstGeom prst="ellipse">
@@ -3789,7 +3789,7 @@
           </p:nvSpPr>
           <p:spPr>
             <a:xfrm>
-              <a:off x="4467991" y="2452480"/>
+              <a:off x="4289957" y="2452565"/>
               <a:ext cx="77571" cy="77571"/>
             </a:xfrm>
             <a:prstGeom prst="ellipse">
@@ -3815,7 +3815,7 @@
           </p:nvSpPr>
           <p:spPr>
             <a:xfrm>
-              <a:off x="4363178" y="2403680"/>
+              <a:off x="4482198" y="2403705"/>
               <a:ext cx="77571" cy="77571"/>
             </a:xfrm>
             <a:prstGeom prst="ellipse">
@@ -3841,7 +3841,7 @@
           </p:nvSpPr>
           <p:spPr>
             <a:xfrm>
-              <a:off x="4325924" y="2558315"/>
+              <a:off x="4510442" y="2558337"/>
               <a:ext cx="77571" cy="77571"/>
             </a:xfrm>
             <a:prstGeom prst="ellipse">
@@ -3867,7 +3867,7 @@
           </p:nvSpPr>
           <p:spPr>
             <a:xfrm>
-              <a:off x="4325495" y="2141550"/>
+              <a:off x="4365447" y="2141605"/>
               <a:ext cx="77571" cy="77571"/>
             </a:xfrm>
             <a:prstGeom prst="ellipse">
@@ -3893,7 +3893,7 @@
           </p:nvSpPr>
           <p:spPr>
             <a:xfrm>
-              <a:off x="4363113" y="2161837"/>
+              <a:off x="4350993" y="2161987"/>
               <a:ext cx="77571" cy="77571"/>
             </a:xfrm>
             <a:prstGeom prst="ellipse">
@@ -3919,7 +3919,7 @@
           </p:nvSpPr>
           <p:spPr>
             <a:xfrm>
-              <a:off x="4470422" y="2406157"/>
+              <a:off x="4447381" y="2406278"/>
               <a:ext cx="77571" cy="77571"/>
             </a:xfrm>
             <a:prstGeom prst="ellipse">
@@ -3945,7 +3945,7 @@
           </p:nvSpPr>
           <p:spPr>
             <a:xfrm>
-              <a:off x="4510442" y="2321284"/>
+              <a:off x="4260325" y="2321248"/>
               <a:ext cx="77571" cy="77571"/>
             </a:xfrm>
             <a:prstGeom prst="ellipse">
@@ -3971,7 +3971,7 @@
           </p:nvSpPr>
           <p:spPr>
             <a:xfrm>
-              <a:off x="4305953" y="2221151"/>
+              <a:off x="4257586" y="2221200"/>
               <a:ext cx="77571" cy="77571"/>
             </a:xfrm>
             <a:prstGeom prst="ellipse">
@@ -3997,7 +3997,7 @@
           </p:nvSpPr>
           <p:spPr>
             <a:xfrm>
-              <a:off x="4322737" y="1968804"/>
+              <a:off x="4372966" y="1968911"/>
               <a:ext cx="77571" cy="77571"/>
             </a:xfrm>
             <a:prstGeom prst="ellipse">
@@ -4023,7 +4023,7 @@
           </p:nvSpPr>
           <p:spPr>
             <a:xfrm>
-              <a:off x="4316910" y="2043545"/>
+              <a:off x="4360277" y="2043585"/>
               <a:ext cx="77571" cy="77571"/>
             </a:xfrm>
             <a:prstGeom prst="ellipse">
@@ -4049,7 +4049,7 @@
           </p:nvSpPr>
           <p:spPr>
             <a:xfrm>
-              <a:off x="4487263" y="1890297"/>
+              <a:off x="4405227" y="1890179"/>
               <a:ext cx="77571" cy="77571"/>
             </a:xfrm>
             <a:prstGeom prst="ellipse">
@@ -4075,7 +4075,7 @@
           </p:nvSpPr>
           <p:spPr>
             <a:xfrm>
-              <a:off x="4381034" y="2150332"/>
+              <a:off x="4452929" y="2150270"/>
               <a:ext cx="77571" cy="77571"/>
             </a:xfrm>
             <a:prstGeom prst="ellipse">
@@ -4101,7 +4101,7 @@
           </p:nvSpPr>
           <p:spPr>
             <a:xfrm>
-              <a:off x="4396701" y="2076939"/>
+              <a:off x="4338436" y="2077066"/>
               <a:ext cx="77571" cy="77571"/>
             </a:xfrm>
             <a:prstGeom prst="ellipse">
@@ -4127,7 +4127,7 @@
           </p:nvSpPr>
           <p:spPr>
             <a:xfrm>
-              <a:off x="4429893" y="2522852"/>
+              <a:off x="4370076" y="2522882"/>
               <a:ext cx="77571" cy="77571"/>
             </a:xfrm>
             <a:prstGeom prst="ellipse">
@@ -4153,7 +4153,7 @@
           </p:nvSpPr>
           <p:spPr>
             <a:xfrm>
-              <a:off x="4355488" y="2340176"/>
+              <a:off x="4309602" y="2340218"/>
               <a:ext cx="77571" cy="77571"/>
             </a:xfrm>
             <a:prstGeom prst="ellipse">
@@ -4179,7 +4179,7 @@
           </p:nvSpPr>
           <p:spPr>
             <a:xfrm>
-              <a:off x="4381811" y="2236711"/>
+              <a:off x="4279171" y="2236747"/>
               <a:ext cx="77571" cy="77571"/>
             </a:xfrm>
             <a:prstGeom prst="ellipse">
@@ -4205,7 +4205,7 @@
           </p:nvSpPr>
           <p:spPr>
             <a:xfrm>
-              <a:off x="4472437" y="2304967"/>
+              <a:off x="4425431" y="2304952"/>
               <a:ext cx="77571" cy="77571"/>
             </a:xfrm>
             <a:prstGeom prst="ellipse">
@@ -4231,7 +4231,7 @@
           </p:nvSpPr>
           <p:spPr>
             <a:xfrm>
-              <a:off x="4439694" y="2016775"/>
+              <a:off x="4294026" y="2016671"/>
               <a:ext cx="77571" cy="77571"/>
             </a:xfrm>
             <a:prstGeom prst="ellipse">
@@ -4257,7 +4257,7 @@
           </p:nvSpPr>
           <p:spPr>
             <a:xfrm>
-              <a:off x="4342687" y="2272561"/>
+              <a:off x="4445538" y="2272679"/>
               <a:ext cx="77571" cy="77571"/>
             </a:xfrm>
             <a:prstGeom prst="ellipse">
@@ -4283,7 +4283,7 @@
           </p:nvSpPr>
           <p:spPr>
             <a:xfrm>
-              <a:off x="4315429" y="2122577"/>
+              <a:off x="4413991" y="2122433"/>
               <a:ext cx="77571" cy="77571"/>
             </a:xfrm>
             <a:prstGeom prst="ellipse">
@@ -4309,7 +4309,7 @@
           </p:nvSpPr>
           <p:spPr>
             <a:xfrm>
-              <a:off x="4326322" y="1998834"/>
+              <a:off x="4452134" y="1998821"/>
               <a:ext cx="77571" cy="77571"/>
             </a:xfrm>
             <a:prstGeom prst="ellipse">
@@ -4335,7 +4335,7 @@
           </p:nvSpPr>
           <p:spPr>
             <a:xfrm>
-              <a:off x="4350470" y="2184777"/>
+              <a:off x="4394177" y="2184802"/>
               <a:ext cx="77571" cy="77571"/>
             </a:xfrm>
             <a:prstGeom prst="ellipse">
@@ -4361,7 +4361,7 @@
           </p:nvSpPr>
           <p:spPr>
             <a:xfrm>
-              <a:off x="4325482" y="2151131"/>
+              <a:off x="4363612" y="2151011"/>
               <a:ext cx="77571" cy="77571"/>
             </a:xfrm>
             <a:prstGeom prst="ellipse">
@@ -4387,42 +4387,42 @@
           </p:nvSpPr>
           <p:spPr>
             <a:xfrm>
-              <a:off x="1684045" y="2055912"/>
-              <a:ext cx="2737260" cy="627946"/>
+              <a:off x="1680047" y="2055909"/>
+              <a:ext cx="2742301" cy="627957"/>
             </a:xfrm>
             <a:custGeom>
               <a:avLst/>
               <a:pathLst>
-                <a:path w="2737260" h="627946">
+                <a:path w="2742301" h="627957">
                   <a:moveTo>
-                    <a:pt x="0" y="178221"/>
+                    <a:pt x="0" y="178224"/>
                   </a:moveTo>
                   <a:lnTo>
-                    <a:pt x="1446151" y="171035"/>
+                    <a:pt x="1448814" y="171038"/>
                   </a:lnTo>
                   <a:lnTo>
-                    <a:pt x="1824840" y="135950"/>
+                    <a:pt x="1828200" y="135952"/>
                   </a:lnTo>
                   <a:lnTo>
-                    <a:pt x="2358571" y="62380"/>
+                    <a:pt x="2362915" y="62381"/>
                   </a:lnTo>
                   <a:lnTo>
-                    <a:pt x="2737260" y="0"/>
+                    <a:pt x="2742301" y="0"/>
                   </a:lnTo>
                   <a:lnTo>
-                    <a:pt x="2737260" y="406931"/>
+                    <a:pt x="2742301" y="406938"/>
                   </a:lnTo>
                   <a:lnTo>
-                    <a:pt x="2358571" y="399783"/>
+                    <a:pt x="2362915" y="399790"/>
                   </a:lnTo>
                   <a:lnTo>
-                    <a:pt x="1824840" y="404059"/>
+                    <a:pt x="1828200" y="404067"/>
                   </a:lnTo>
                   <a:lnTo>
-                    <a:pt x="1446151" y="424207"/>
+                    <a:pt x="1448814" y="424214"/>
                   </a:lnTo>
                   <a:lnTo>
-                    <a:pt x="0" y="627946"/>
+                    <a:pt x="0" y="627957"/>
                   </a:lnTo>
                   <a:close/>
                 </a:path>
@@ -4448,27 +4448,27 @@
           </p:nvSpPr>
           <p:spPr>
             <a:xfrm>
-              <a:off x="1684045" y="2055912"/>
-              <a:ext cx="2737260" cy="178221"/>
+              <a:off x="1680047" y="2055909"/>
+              <a:ext cx="2742301" cy="178224"/>
             </a:xfrm>
             <a:custGeom>
               <a:avLst/>
               <a:pathLst>
-                <a:path w="2737260" h="178221">
+                <a:path w="2742301" h="178224">
                   <a:moveTo>
-                    <a:pt x="0" y="178221"/>
+                    <a:pt x="0" y="178224"/>
                   </a:moveTo>
                   <a:lnTo>
-                    <a:pt x="1446151" y="171035"/>
+                    <a:pt x="1448814" y="171038"/>
                   </a:lnTo>
                   <a:lnTo>
-                    <a:pt x="1824840" y="135950"/>
+                    <a:pt x="1828200" y="135952"/>
                   </a:lnTo>
                   <a:lnTo>
-                    <a:pt x="2358571" y="62380"/>
+                    <a:pt x="2362915" y="62381"/>
                   </a:lnTo>
                   <a:lnTo>
-                    <a:pt x="2737260" y="0"/>
+                    <a:pt x="2742301" y="0"/>
                   </a:lnTo>
                 </a:path>
               </a:pathLst>
@@ -4488,27 +4488,27 @@
           </p:nvSpPr>
           <p:spPr>
             <a:xfrm>
-              <a:off x="1684045" y="2455695"/>
-              <a:ext cx="2737260" cy="228163"/>
+              <a:off x="1680047" y="2455700"/>
+              <a:ext cx="2742301" cy="228167"/>
             </a:xfrm>
             <a:custGeom>
               <a:avLst/>
               <a:pathLst>
-                <a:path w="2737260" h="228163">
+                <a:path w="2742301" h="228167">
                   <a:moveTo>
-                    <a:pt x="2737260" y="7147"/>
+                    <a:pt x="2742301" y="7147"/>
                   </a:moveTo>
                   <a:lnTo>
-                    <a:pt x="2358571" y="0"/>
+                    <a:pt x="2362915" y="0"/>
                   </a:lnTo>
                   <a:lnTo>
-                    <a:pt x="1824840" y="4276"/>
+                    <a:pt x="1828200" y="4276"/>
                   </a:lnTo>
                   <a:lnTo>
-                    <a:pt x="1446151" y="24423"/>
+                    <a:pt x="1448814" y="24424"/>
                   </a:lnTo>
                   <a:lnTo>
-                    <a:pt x="0" y="228163"/>
+                    <a:pt x="0" y="228167"/>
                   </a:lnTo>
                 </a:path>
               </a:pathLst>
@@ -4528,27 +4528,27 @@
           </p:nvSpPr>
           <p:spPr>
             <a:xfrm>
-              <a:off x="1684045" y="2259377"/>
-              <a:ext cx="2737260" cy="199618"/>
+              <a:off x="1680047" y="2259378"/>
+              <a:ext cx="2742301" cy="199622"/>
             </a:xfrm>
             <a:custGeom>
               <a:avLst/>
               <a:pathLst>
-                <a:path w="2737260" h="199618">
+                <a:path w="2742301" h="199622">
                   <a:moveTo>
-                    <a:pt x="0" y="199618"/>
+                    <a:pt x="0" y="199622"/>
                   </a:moveTo>
                   <a:lnTo>
-                    <a:pt x="1446151" y="94155"/>
+                    <a:pt x="1448814" y="94157"/>
                   </a:lnTo>
                   <a:lnTo>
-                    <a:pt x="1824840" y="66539"/>
+                    <a:pt x="1828200" y="66540"/>
                   </a:lnTo>
                   <a:lnTo>
-                    <a:pt x="2358571" y="27616"/>
+                    <a:pt x="2362915" y="27616"/>
                   </a:lnTo>
                   <a:lnTo>
-                    <a:pt x="2737260" y="0"/>
+                    <a:pt x="2742301" y="0"/>
                   </a:lnTo>
                 </a:path>
               </a:pathLst>
@@ -4577,7 +4577,7 @@
           </p:nvSpPr>
           <p:spPr>
             <a:xfrm>
-              <a:off x="3941611" y="1344227"/>
+              <a:off x="3942654" y="1344214"/>
               <a:ext cx="479694" cy="82021"/>
             </a:xfrm>
             <a:prstGeom prst="rect">
@@ -4684,7 +4684,7 @@
           </p:nvSpPr>
           <p:spPr>
             <a:xfrm rot="-5400000">
-              <a:off x="1177387" y="2461163"/>
+              <a:off x="1177387" y="2461169"/>
               <a:ext cx="194218" cy="100218"/>
             </a:xfrm>
             <a:prstGeom prst="rect">
@@ -4730,7 +4730,7 @@
           </p:nvSpPr>
           <p:spPr>
             <a:xfrm rot="-5400000">
-              <a:off x="1177387" y="2026865"/>
+              <a:off x="1177387" y="2026863"/>
               <a:ext cx="194218" cy="100218"/>
             </a:xfrm>
             <a:prstGeom prst="rect">
@@ -4776,7 +4776,7 @@
           </p:nvSpPr>
           <p:spPr>
             <a:xfrm rot="-5400000">
-              <a:off x="1177387" y="1592567"/>
+              <a:off x="1177387" y="1592557"/>
               <a:ext cx="194218" cy="100218"/>
             </a:xfrm>
             <a:prstGeom prst="rect">
@@ -4822,7 +4822,7 @@
           </p:nvSpPr>
           <p:spPr>
             <a:xfrm rot="-5400000">
-              <a:off x="1138525" y="1158269"/>
+              <a:off x="1138525" y="1158252"/>
               <a:ext cx="271942" cy="100218"/>
             </a:xfrm>
             <a:prstGeom prst="rect">
@@ -4868,7 +4868,7 @@
           </p:nvSpPr>
           <p:spPr>
             <a:xfrm>
-              <a:off x="1370425" y="2511272"/>
+              <a:off x="1370425" y="2511278"/>
               <a:ext cx="37957" cy="0"/>
             </a:xfrm>
             <a:custGeom>
@@ -4908,7 +4908,7 @@
           </p:nvSpPr>
           <p:spPr>
             <a:xfrm>
-              <a:off x="1370425" y="2076974"/>
+              <a:off x="1370425" y="2076972"/>
               <a:ext cx="37957" cy="0"/>
             </a:xfrm>
             <a:custGeom>
@@ -4948,7 +4948,7 @@
           </p:nvSpPr>
           <p:spPr>
             <a:xfrm>
-              <a:off x="1370425" y="1642676"/>
+              <a:off x="1370425" y="1642667"/>
               <a:ext cx="37957" cy="0"/>
             </a:xfrm>
             <a:custGeom>
@@ -4988,7 +4988,7 @@
           </p:nvSpPr>
           <p:spPr>
             <a:xfrm>
-              <a:off x="1370425" y="1208378"/>
+              <a:off x="1370425" y="1208361"/>
               <a:ext cx="37957" cy="0"/>
             </a:xfrm>
             <a:custGeom>
@@ -5068,7 +5068,7 @@
           </p:nvSpPr>
           <p:spPr>
             <a:xfrm>
-              <a:off x="1684045" y="2807247"/>
+              <a:off x="1680047" y="2807247"/>
               <a:ext cx="0" cy="37957"/>
             </a:xfrm>
             <a:custGeom>
@@ -5108,7 +5108,7 @@
           </p:nvSpPr>
           <p:spPr>
             <a:xfrm>
-              <a:off x="2596465" y="2807247"/>
+              <a:off x="2594148" y="2807247"/>
               <a:ext cx="0" cy="37957"/>
             </a:xfrm>
             <a:custGeom>
@@ -5148,7 +5148,7 @@
           </p:nvSpPr>
           <p:spPr>
             <a:xfrm>
-              <a:off x="3508885" y="2807247"/>
+              <a:off x="3508248" y="2807247"/>
               <a:ext cx="0" cy="37957"/>
             </a:xfrm>
             <a:custGeom>
@@ -5188,7 +5188,7 @@
           </p:nvSpPr>
           <p:spPr>
             <a:xfrm>
-              <a:off x="4421306" y="2807247"/>
+              <a:off x="4422348" y="2807247"/>
               <a:ext cx="0" cy="37957"/>
             </a:xfrm>
             <a:custGeom>
@@ -5228,7 +5228,7 @@
           </p:nvSpPr>
           <p:spPr>
             <a:xfrm>
-              <a:off x="1645183" y="2875571"/>
+              <a:off x="1641185" y="2875571"/>
               <a:ext cx="77724" cy="100218"/>
             </a:xfrm>
             <a:prstGeom prst="rect">
@@ -5274,7 +5274,7 @@
           </p:nvSpPr>
           <p:spPr>
             <a:xfrm>
-              <a:off x="2557603" y="2875571"/>
+              <a:off x="2555286" y="2875571"/>
               <a:ext cx="77724" cy="100218"/>
             </a:xfrm>
             <a:prstGeom prst="rect">
@@ -5320,7 +5320,7 @@
           </p:nvSpPr>
           <p:spPr>
             <a:xfrm>
-              <a:off x="3470023" y="2875571"/>
+              <a:off x="3469386" y="2875571"/>
               <a:ext cx="77724" cy="100218"/>
             </a:xfrm>
             <a:prstGeom prst="rect">
@@ -5366,7 +5366,7 @@
           </p:nvSpPr>
           <p:spPr>
             <a:xfrm>
-              <a:off x="4382444" y="2875571"/>
+              <a:off x="4383486" y="2875571"/>
               <a:ext cx="77724" cy="100218"/>
             </a:xfrm>
             <a:prstGeom prst="rect">
@@ -5530,7 +5530,7 @@
           </p:nvSpPr>
           <p:spPr>
             <a:xfrm>
-              <a:off x="4972543" y="2362980"/>
+              <a:off x="4952790" y="2363103"/>
               <a:ext cx="77571" cy="77571"/>
             </a:xfrm>
             <a:prstGeom prst="ellipse">
@@ -5556,7 +5556,7 @@
           </p:nvSpPr>
           <p:spPr>
             <a:xfrm>
-              <a:off x="5057484" y="1486393"/>
+              <a:off x="5078398" y="1486167"/>
               <a:ext cx="77571" cy="77571"/>
             </a:xfrm>
             <a:prstGeom prst="ellipse">
@@ -5582,7 +5582,7 @@
           </p:nvSpPr>
           <p:spPr>
             <a:xfrm>
-              <a:off x="4975459" y="2354516"/>
+              <a:off x="5021191" y="2355012"/>
               <a:ext cx="77571" cy="77571"/>
             </a:xfrm>
             <a:prstGeom prst="ellipse">
@@ -5608,7 +5608,7 @@
           </p:nvSpPr>
           <p:spPr>
             <a:xfrm>
-              <a:off x="4997471" y="2251785"/>
+              <a:off x="5143360" y="2251919"/>
               <a:ext cx="77571" cy="77571"/>
             </a:xfrm>
             <a:prstGeom prst="ellipse">
@@ -5634,7 +5634,7 @@
           </p:nvSpPr>
           <p:spPr>
             <a:xfrm>
-              <a:off x="5073393" y="2441388"/>
+              <a:off x="4948748" y="2441708"/>
               <a:ext cx="77571" cy="77571"/>
             </a:xfrm>
             <a:prstGeom prst="ellipse">
@@ -5660,7 +5660,7 @@
           </p:nvSpPr>
           <p:spPr>
             <a:xfrm>
-              <a:off x="5077169" y="1751736"/>
+              <a:off x="5045932" y="1751541"/>
               <a:ext cx="77571" cy="77571"/>
             </a:xfrm>
             <a:prstGeom prst="ellipse">
@@ -5686,7 +5686,7 @@
           </p:nvSpPr>
           <p:spPr>
             <a:xfrm>
-              <a:off x="5091771" y="1304730"/>
+              <a:off x="5110537" y="1304630"/>
               <a:ext cx="77571" cy="77571"/>
             </a:xfrm>
             <a:prstGeom prst="ellipse">
@@ -5712,7 +5712,7 @@
           </p:nvSpPr>
           <p:spPr>
             <a:xfrm>
-              <a:off x="5023940" y="2113885"/>
+              <a:off x="5053702" y="2114108"/>
               <a:ext cx="77571" cy="77571"/>
             </a:xfrm>
             <a:prstGeom prst="ellipse">
@@ -5738,7 +5738,7 @@
           </p:nvSpPr>
           <p:spPr>
             <a:xfrm>
-              <a:off x="4948748" y="2654666"/>
+              <a:off x="4976466" y="2654973"/>
               <a:ext cx="77571" cy="77571"/>
             </a:xfrm>
             <a:prstGeom prst="ellipse">
@@ -5764,7 +5764,7 @@
           </p:nvSpPr>
           <p:spPr>
             <a:xfrm>
-              <a:off x="5069594" y="2072837"/>
+              <a:off x="4976224" y="2073069"/>
               <a:ext cx="77571" cy="77571"/>
             </a:xfrm>
             <a:prstGeom prst="ellipse">
@@ -5790,7 +5790,7 @@
           </p:nvSpPr>
           <p:spPr>
             <a:xfrm>
-              <a:off x="5965707" y="2676451"/>
+              <a:off x="5920109" y="2676520"/>
               <a:ext cx="77571" cy="77571"/>
             </a:xfrm>
             <a:prstGeom prst="ellipse">
@@ -5816,7 +5816,7 @@
           </p:nvSpPr>
           <p:spPr>
             <a:xfrm>
-              <a:off x="5956648" y="1752039"/>
+              <a:off x="5842801" y="1752217"/>
               <a:ext cx="77571" cy="77571"/>
             </a:xfrm>
             <a:prstGeom prst="ellipse">
@@ -5842,7 +5842,7 @@
           </p:nvSpPr>
           <p:spPr>
             <a:xfrm>
-              <a:off x="5883091" y="2266844"/>
+              <a:off x="6024214" y="2267311"/>
               <a:ext cx="77571" cy="77571"/>
             </a:xfrm>
             <a:prstGeom prst="ellipse">
@@ -5868,7 +5868,7 @@
           </p:nvSpPr>
           <p:spPr>
             <a:xfrm>
-              <a:off x="5936935" y="2695776"/>
+              <a:off x="5843413" y="2695776"/>
               <a:ext cx="77571" cy="77571"/>
             </a:xfrm>
             <a:prstGeom prst="ellipse">
@@ -5894,7 +5894,7 @@
           </p:nvSpPr>
           <p:spPr>
             <a:xfrm>
-              <a:off x="5967680" y="1940806"/>
+              <a:off x="5892633" y="1940596"/>
               <a:ext cx="77571" cy="77571"/>
             </a:xfrm>
             <a:prstGeom prst="ellipse">
@@ -5920,7 +5920,7 @@
           </p:nvSpPr>
           <p:spPr>
             <a:xfrm>
-              <a:off x="5909220" y="1242069"/>
+              <a:off x="5986718" y="1242069"/>
               <a:ext cx="77571" cy="77571"/>
             </a:xfrm>
             <a:prstGeom prst="ellipse">
@@ -5946,7 +5946,7 @@
           </p:nvSpPr>
           <p:spPr>
             <a:xfrm>
-              <a:off x="6028563" y="2661856"/>
+              <a:off x="5827524" y="2661994"/>
               <a:ext cx="77571" cy="77571"/>
             </a:xfrm>
             <a:prstGeom prst="ellipse">
@@ -5972,7 +5972,7 @@
           </p:nvSpPr>
           <p:spPr>
             <a:xfrm>
-              <a:off x="5968162" y="2602012"/>
+              <a:off x="5992841" y="2602150"/>
               <a:ext cx="77571" cy="77571"/>
             </a:xfrm>
             <a:prstGeom prst="ellipse">
@@ -5998,7 +5998,7 @@
           </p:nvSpPr>
           <p:spPr>
             <a:xfrm>
-              <a:off x="5879964" y="2291368"/>
+              <a:off x="5853249" y="2291832"/>
               <a:ext cx="77571" cy="77571"/>
             </a:xfrm>
             <a:prstGeom prst="ellipse">
@@ -6024,7 +6024,7 @@
           </p:nvSpPr>
           <p:spPr>
             <a:xfrm>
-              <a:off x="5951852" y="2668683"/>
+              <a:off x="5938919" y="2668948"/>
               <a:ext cx="77571" cy="77571"/>
             </a:xfrm>
             <a:prstGeom prst="ellipse">
@@ -6050,7 +6050,7 @@
           </p:nvSpPr>
           <p:spPr>
             <a:xfrm>
-              <a:off x="5864052" y="2456320"/>
+              <a:off x="6055147" y="2456483"/>
               <a:ext cx="77571" cy="77571"/>
             </a:xfrm>
             <a:prstGeom prst="ellipse">
@@ -6076,7 +6076,7 @@
           </p:nvSpPr>
           <p:spPr>
             <a:xfrm>
-              <a:off x="6008957" y="2665168"/>
+              <a:off x="6067937" y="2665341"/>
               <a:ext cx="77571" cy="77571"/>
             </a:xfrm>
             <a:prstGeom prst="ellipse">
@@ -6102,7 +6102,7 @@
           </p:nvSpPr>
           <p:spPr>
             <a:xfrm>
-              <a:off x="6011178" y="2174235"/>
+              <a:off x="6020258" y="2174351"/>
               <a:ext cx="77571" cy="77571"/>
             </a:xfrm>
             <a:prstGeom prst="ellipse">
@@ -6128,7 +6128,7 @@
           </p:nvSpPr>
           <p:spPr>
             <a:xfrm>
-              <a:off x="5874240" y="2038356"/>
+              <a:off x="5998132" y="2038403"/>
               <a:ext cx="77571" cy="77571"/>
             </a:xfrm>
             <a:prstGeom prst="ellipse">
@@ -6154,7 +6154,7 @@
           </p:nvSpPr>
           <p:spPr>
             <a:xfrm>
-              <a:off x="5831745" y="2099131"/>
+              <a:off x="6009122" y="2099178"/>
               <a:ext cx="77571" cy="77571"/>
             </a:xfrm>
             <a:prstGeom prst="ellipse">
@@ -6180,7 +6180,7 @@
           </p:nvSpPr>
           <p:spPr>
             <a:xfrm>
-              <a:off x="5823696" y="1899444"/>
+              <a:off x="6010072" y="1899472"/>
               <a:ext cx="77571" cy="77571"/>
             </a:xfrm>
             <a:prstGeom prst="ellipse">
@@ -6206,7 +6206,7 @@
           </p:nvSpPr>
           <p:spPr>
             <a:xfrm>
-              <a:off x="5978184" y="2422680"/>
+              <a:off x="5838360" y="2422840"/>
               <a:ext cx="77571" cy="77571"/>
             </a:xfrm>
             <a:prstGeom prst="ellipse">
@@ -6232,7 +6232,7 @@
           </p:nvSpPr>
           <p:spPr>
             <a:xfrm>
-              <a:off x="5826553" y="2657976"/>
+              <a:off x="6011575" y="2658497"/>
               <a:ext cx="77571" cy="77571"/>
             </a:xfrm>
             <a:prstGeom prst="ellipse">
@@ -6258,7 +6258,7 @@
           </p:nvSpPr>
           <p:spPr>
             <a:xfrm>
-              <a:off x="6949535" y="2401316"/>
+              <a:off x="6774549" y="2401452"/>
               <a:ext cx="77571" cy="77571"/>
             </a:xfrm>
             <a:prstGeom prst="ellipse">
@@ -6284,7 +6284,7 @@
           </p:nvSpPr>
           <p:spPr>
             <a:xfrm>
-              <a:off x="6791058" y="2497001"/>
+              <a:off x="7004483" y="2496946"/>
               <a:ext cx="77571" cy="77571"/>
             </a:xfrm>
             <a:prstGeom prst="ellipse">
@@ -6310,7 +6310,7 @@
           </p:nvSpPr>
           <p:spPr>
             <a:xfrm>
-              <a:off x="6940632" y="2599970"/>
+              <a:off x="6899829" y="2600344"/>
               <a:ext cx="77571" cy="77571"/>
             </a:xfrm>
             <a:prstGeom prst="ellipse">
@@ -6336,7 +6336,7 @@
           </p:nvSpPr>
           <p:spPr>
             <a:xfrm>
-              <a:off x="6743897" y="2353406"/>
+              <a:off x="6863992" y="2353637"/>
               <a:ext cx="77571" cy="77571"/>
             </a:xfrm>
             <a:prstGeom prst="ellipse">
@@ -6362,7 +6362,7 @@
           </p:nvSpPr>
           <p:spPr>
             <a:xfrm>
-              <a:off x="6798637" y="1818441"/>
+              <a:off x="6961397" y="1818620"/>
               <a:ext cx="77571" cy="77571"/>
             </a:xfrm>
             <a:prstGeom prst="ellipse">
@@ -6388,7 +6388,7 @@
           </p:nvSpPr>
           <p:spPr>
             <a:xfrm>
-              <a:off x="6968401" y="1461539"/>
+              <a:off x="6764873" y="1461660"/>
               <a:ext cx="77571" cy="77571"/>
             </a:xfrm>
             <a:prstGeom prst="ellipse">
@@ -6414,7 +6414,7 @@
           </p:nvSpPr>
           <p:spPr>
             <a:xfrm>
-              <a:off x="6830286" y="1702894"/>
+              <a:off x="6924049" y="1702710"/>
               <a:ext cx="77571" cy="77571"/>
             </a:xfrm>
             <a:prstGeom prst="ellipse">
@@ -6440,7 +6440,7 @@
           </p:nvSpPr>
           <p:spPr>
             <a:xfrm>
-              <a:off x="6980937" y="2433158"/>
+              <a:off x="6977853" y="2433257"/>
               <a:ext cx="77571" cy="77571"/>
             </a:xfrm>
             <a:prstGeom prst="ellipse">
@@ -6466,7 +6466,7 @@
           </p:nvSpPr>
           <p:spPr>
             <a:xfrm>
-              <a:off x="6951912" y="2373521"/>
+              <a:off x="6934260" y="2373557"/>
               <a:ext cx="77571" cy="77571"/>
             </a:xfrm>
             <a:prstGeom prst="ellipse">
@@ -6492,7 +6492,7 @@
           </p:nvSpPr>
           <p:spPr>
             <a:xfrm>
-              <a:off x="6882500" y="1779382"/>
+              <a:off x="6766976" y="1779555"/>
               <a:ext cx="77571" cy="77571"/>
             </a:xfrm>
             <a:prstGeom prst="ellipse">
@@ -6518,7 +6518,7 @@
           </p:nvSpPr>
           <p:spPr>
             <a:xfrm>
-              <a:off x="6883134" y="1991658"/>
+              <a:off x="6782398" y="1991783"/>
               <a:ext cx="77571" cy="77571"/>
             </a:xfrm>
             <a:prstGeom prst="ellipse">
@@ -6544,7 +6544,7 @@
           </p:nvSpPr>
           <p:spPr>
             <a:xfrm>
-              <a:off x="6889155" y="2574374"/>
+              <a:off x="6966172" y="2574749"/>
               <a:ext cx="77571" cy="77571"/>
             </a:xfrm>
             <a:prstGeom prst="ellipse">
@@ -6570,7 +6570,7 @@
           </p:nvSpPr>
           <p:spPr>
             <a:xfrm>
-              <a:off x="6794508" y="1727363"/>
+              <a:off x="6757013" y="1727394"/>
               <a:ext cx="77571" cy="77571"/>
             </a:xfrm>
             <a:prstGeom prst="ellipse">
@@ -6596,7 +6596,7 @@
           </p:nvSpPr>
           <p:spPr>
             <a:xfrm>
-              <a:off x="6995709" y="1929415"/>
+              <a:off x="7011633" y="1929471"/>
               <a:ext cx="77571" cy="77571"/>
             </a:xfrm>
             <a:prstGeom prst="ellipse">
@@ -6622,7 +6622,7 @@
           </p:nvSpPr>
           <p:spPr>
             <a:xfrm>
-              <a:off x="6939281" y="2126796"/>
+              <a:off x="6851256" y="2126668"/>
               <a:ext cx="77571" cy="77571"/>
             </a:xfrm>
             <a:prstGeom prst="ellipse">
@@ -6648,7 +6648,7 @@
           </p:nvSpPr>
           <p:spPr>
             <a:xfrm>
-              <a:off x="6940673" y="2544464"/>
+              <a:off x="6854879" y="2544668"/>
               <a:ext cx="77571" cy="77571"/>
             </a:xfrm>
             <a:prstGeom prst="ellipse">
@@ -6674,7 +6674,7 @@
           </p:nvSpPr>
           <p:spPr>
             <a:xfrm>
-              <a:off x="6884627" y="2117353"/>
+              <a:off x="6998605" y="2117555"/>
               <a:ext cx="77571" cy="77571"/>
             </a:xfrm>
             <a:prstGeom prst="ellipse">
@@ -6700,7 +6700,7 @@
           </p:nvSpPr>
           <p:spPr>
             <a:xfrm>
-              <a:off x="6879869" y="2516275"/>
+              <a:off x="6842242" y="2516505"/>
               <a:ext cx="77571" cy="77571"/>
             </a:xfrm>
             <a:prstGeom prst="ellipse">
@@ -6726,7 +6726,7 @@
           </p:nvSpPr>
           <p:spPr>
             <a:xfrm>
-              <a:off x="6771787" y="1908272"/>
+              <a:off x="6900081" y="1908348"/>
               <a:ext cx="77571" cy="77571"/>
             </a:xfrm>
             <a:prstGeom prst="ellipse">
@@ -6752,7 +6752,7 @@
           </p:nvSpPr>
           <p:spPr>
             <a:xfrm>
-              <a:off x="6815677" y="2131962"/>
+              <a:off x="6817680" y="2132368"/>
               <a:ext cx="77571" cy="77571"/>
             </a:xfrm>
             <a:prstGeom prst="ellipse">
@@ -6778,7 +6778,7 @@
           </p:nvSpPr>
           <p:spPr>
             <a:xfrm>
-              <a:off x="7688756" y="2245745"/>
+              <a:off x="7808487" y="2246031"/>
               <a:ext cx="77571" cy="77571"/>
             </a:xfrm>
             <a:prstGeom prst="ellipse">
@@ -6804,7 +6804,7 @@
           </p:nvSpPr>
           <p:spPr>
             <a:xfrm>
-              <a:off x="7865337" y="2396305"/>
+              <a:off x="7847078" y="2396765"/>
               <a:ext cx="77571" cy="77571"/>
             </a:xfrm>
             <a:prstGeom prst="ellipse">
@@ -6830,7 +6830,7 @@
           </p:nvSpPr>
           <p:spPr>
             <a:xfrm>
-              <a:off x="7735878" y="2455294"/>
+              <a:off x="7785302" y="2455726"/>
               <a:ext cx="77571" cy="77571"/>
             </a:xfrm>
             <a:prstGeom prst="ellipse">
@@ -6856,7 +6856,7 @@
           </p:nvSpPr>
           <p:spPr>
             <a:xfrm>
-              <a:off x="7696977" y="2227262"/>
+              <a:off x="7802898" y="2227484"/>
               <a:ext cx="77571" cy="77571"/>
             </a:xfrm>
             <a:prstGeom prst="ellipse">
@@ -6882,7 +6882,7 @@
           </p:nvSpPr>
           <p:spPr>
             <a:xfrm>
-              <a:off x="7742344" y="2101797"/>
+              <a:off x="7914944" y="2101920"/>
               <a:ext cx="77571" cy="77571"/>
             </a:xfrm>
             <a:prstGeom prst="ellipse">
@@ -6908,7 +6908,7 @@
           </p:nvSpPr>
           <p:spPr>
             <a:xfrm>
-              <a:off x="7714777" y="2156324"/>
+              <a:off x="7914126" y="2156407"/>
               <a:ext cx="77571" cy="77571"/>
             </a:xfrm>
             <a:prstGeom prst="ellipse">
@@ -6934,7 +6934,7 @@
           </p:nvSpPr>
           <p:spPr>
             <a:xfrm>
-              <a:off x="7788785" y="2394823"/>
+              <a:off x="7915428" y="2394797"/>
               <a:ext cx="77571" cy="77571"/>
             </a:xfrm>
             <a:prstGeom prst="ellipse">
@@ -6960,7 +6960,7 @@
           </p:nvSpPr>
           <p:spPr>
             <a:xfrm>
-              <a:off x="7712427" y="2181092"/>
+              <a:off x="7696624" y="2181233"/>
               <a:ext cx="77571" cy="77571"/>
             </a:xfrm>
             <a:prstGeom prst="ellipse">
@@ -6986,7 +6986,7 @@
           </p:nvSpPr>
           <p:spPr>
             <a:xfrm>
-              <a:off x="7713791" y="2432817"/>
+              <a:off x="7806252" y="2432777"/>
               <a:ext cx="77571" cy="77571"/>
             </a:xfrm>
             <a:prstGeom prst="ellipse">
@@ -7012,7 +7012,7 @@
           </p:nvSpPr>
           <p:spPr>
             <a:xfrm>
-              <a:off x="7841228" y="2312898"/>
+              <a:off x="7896419" y="2313164"/>
               <a:ext cx="77571" cy="77571"/>
             </a:xfrm>
             <a:prstGeom prst="ellipse">
@@ -7038,7 +7038,7 @@
           </p:nvSpPr>
           <p:spPr>
             <a:xfrm>
-              <a:off x="7940029" y="2138026"/>
+              <a:off x="7821320" y="2138326"/>
               <a:ext cx="77571" cy="77571"/>
             </a:xfrm>
             <a:prstGeom prst="ellipse">
@@ -7064,7 +7064,7 @@
           </p:nvSpPr>
           <p:spPr>
             <a:xfrm>
-              <a:off x="7682675" y="1811929"/>
+              <a:off x="7809253" y="1812020"/>
               <a:ext cx="77571" cy="77571"/>
             </a:xfrm>
             <a:prstGeom prst="ellipse">
@@ -7090,7 +7090,7 @@
           </p:nvSpPr>
           <p:spPr>
             <a:xfrm>
-              <a:off x="7903282" y="2419571"/>
+              <a:off x="7748754" y="2419659"/>
               <a:ext cx="77571" cy="77571"/>
             </a:xfrm>
             <a:prstGeom prst="ellipse">
@@ -7116,7 +7116,7 @@
           </p:nvSpPr>
           <p:spPr>
             <a:xfrm>
-              <a:off x="7934693" y="2634794"/>
+              <a:off x="7787950" y="2635152"/>
               <a:ext cx="77571" cy="77571"/>
             </a:xfrm>
             <a:prstGeom prst="ellipse">
@@ -7142,7 +7142,7 @@
           </p:nvSpPr>
           <p:spPr>
             <a:xfrm>
-              <a:off x="7865623" y="2486910"/>
+              <a:off x="7843824" y="2487111"/>
               <a:ext cx="77571" cy="77571"/>
             </a:xfrm>
             <a:prstGeom prst="ellipse">
@@ -7168,7 +7168,7 @@
           </p:nvSpPr>
           <p:spPr>
             <a:xfrm>
-              <a:off x="7754686" y="2254198"/>
+              <a:off x="7809613" y="2254057"/>
               <a:ext cx="77571" cy="77571"/>
             </a:xfrm>
             <a:prstGeom prst="ellipse">
@@ -7194,7 +7194,7 @@
           </p:nvSpPr>
           <p:spPr>
             <a:xfrm>
-              <a:off x="7710690" y="2388118"/>
+              <a:off x="7934773" y="2388331"/>
               <a:ext cx="77571" cy="77571"/>
             </a:xfrm>
             <a:prstGeom prst="ellipse">
@@ -7220,7 +7220,7 @@
           </p:nvSpPr>
           <p:spPr>
             <a:xfrm>
-              <a:off x="7683276" y="2228430"/>
+              <a:off x="7749433" y="2228817"/>
               <a:ext cx="77571" cy="77571"/>
             </a:xfrm>
             <a:prstGeom prst="ellipse">
@@ -7246,7 +7246,7 @@
           </p:nvSpPr>
           <p:spPr>
             <a:xfrm>
-              <a:off x="7887012" y="2204425"/>
+              <a:off x="7846690" y="2204475"/>
               <a:ext cx="77571" cy="77571"/>
             </a:xfrm>
             <a:prstGeom prst="ellipse">
@@ -7272,7 +7272,7 @@
           </p:nvSpPr>
           <p:spPr>
             <a:xfrm>
-              <a:off x="7913996" y="2025175"/>
+              <a:off x="7856225" y="2025027"/>
               <a:ext cx="77571" cy="77571"/>
             </a:xfrm>
             <a:prstGeom prst="ellipse">
@@ -7298,7 +7298,7 @@
           </p:nvSpPr>
           <p:spPr>
             <a:xfrm>
-              <a:off x="7809687" y="2071033"/>
+              <a:off x="7940029" y="2071071"/>
               <a:ext cx="77571" cy="77571"/>
             </a:xfrm>
             <a:prstGeom prst="ellipse">
@@ -7324,7 +7324,7 @@
           </p:nvSpPr>
           <p:spPr>
             <a:xfrm>
-              <a:off x="7925839" y="2141801"/>
+              <a:off x="7839177" y="2141899"/>
               <a:ext cx="77571" cy="77571"/>
             </a:xfrm>
             <a:prstGeom prst="ellipse">
@@ -7350,7 +7350,7 @@
           </p:nvSpPr>
           <p:spPr>
             <a:xfrm>
-              <a:off x="7906765" y="2526550"/>
+              <a:off x="7935477" y="2526687"/>
               <a:ext cx="77571" cy="77571"/>
             </a:xfrm>
             <a:prstGeom prst="ellipse">
@@ -7376,7 +7376,7 @@
           </p:nvSpPr>
           <p:spPr>
             <a:xfrm>
-              <a:off x="7803822" y="2220293"/>
+              <a:off x="7830227" y="2220311"/>
               <a:ext cx="77571" cy="77571"/>
             </a:xfrm>
             <a:prstGeom prst="ellipse">
@@ -7402,42 +7402,42 @@
           </p:nvSpPr>
           <p:spPr>
             <a:xfrm>
-              <a:off x="5022432" y="1992921"/>
-              <a:ext cx="2821906" cy="456236"/>
+              <a:off x="5063037" y="1992999"/>
+              <a:ext cx="2785576" cy="456349"/>
             </a:xfrm>
             <a:custGeom>
               <a:avLst/>
               <a:pathLst>
-                <a:path w="2821906" h="456236">
+                <a:path w="2785576" h="456349">
                   <a:moveTo>
                     <a:pt x="0" y="0"/>
                   </a:moveTo>
                   <a:lnTo>
-                    <a:pt x="1490872" y="115992"/>
+                    <a:pt x="1471678" y="116021"/>
                   </a:lnTo>
                   <a:lnTo>
-                    <a:pt x="1881271" y="134921"/>
+                    <a:pt x="1857051" y="134955"/>
                   </a:lnTo>
                   <a:lnTo>
-                    <a:pt x="2431507" y="152460"/>
+                    <a:pt x="2400204" y="152497"/>
                   </a:lnTo>
                   <a:lnTo>
-                    <a:pt x="2821906" y="159373"/>
+                    <a:pt x="2785576" y="159412"/>
                   </a:lnTo>
                   <a:lnTo>
-                    <a:pt x="2821906" y="456236"/>
+                    <a:pt x="2785576" y="456349"/>
                   </a:lnTo>
                   <a:lnTo>
-                    <a:pt x="2431507" y="425393"/>
+                    <a:pt x="2400204" y="425497"/>
                   </a:lnTo>
                   <a:lnTo>
-                    <a:pt x="1881271" y="389716"/>
+                    <a:pt x="1857051" y="389812"/>
                   </a:lnTo>
                   <a:lnTo>
-                    <a:pt x="1490872" y="370888"/>
+                    <a:pt x="1471678" y="370979"/>
                   </a:lnTo>
                   <a:lnTo>
-                    <a:pt x="0" y="342693"/>
+                    <a:pt x="0" y="342778"/>
                   </a:lnTo>
                   <a:close/>
                 </a:path>
@@ -7463,27 +7463,27 @@
           </p:nvSpPr>
           <p:spPr>
             <a:xfrm>
-              <a:off x="5022432" y="1992921"/>
-              <a:ext cx="2821906" cy="159373"/>
+              <a:off x="5063037" y="1992999"/>
+              <a:ext cx="2785576" cy="159412"/>
             </a:xfrm>
             <a:custGeom>
               <a:avLst/>
               <a:pathLst>
-                <a:path w="2821906" h="159373">
+                <a:path w="2785576" h="159412">
                   <a:moveTo>
                     <a:pt x="0" y="0"/>
                   </a:moveTo>
                   <a:lnTo>
-                    <a:pt x="1490872" y="115992"/>
+                    <a:pt x="1471678" y="116021"/>
                   </a:lnTo>
                   <a:lnTo>
-                    <a:pt x="1881271" y="134921"/>
+                    <a:pt x="1857051" y="134955"/>
                   </a:lnTo>
                   <a:lnTo>
-                    <a:pt x="2431507" y="152460"/>
+                    <a:pt x="2400204" y="152497"/>
                   </a:lnTo>
                   <a:lnTo>
-                    <a:pt x="2821906" y="159373"/>
+                    <a:pt x="2785576" y="159412"/>
                   </a:lnTo>
                 </a:path>
               </a:pathLst>
@@ -7503,24 +7503,24 @@
           </p:nvSpPr>
           <p:spPr>
             <a:xfrm>
-              <a:off x="5022432" y="2335615"/>
-              <a:ext cx="2821906" cy="113542"/>
+              <a:off x="5063037" y="2335777"/>
+              <a:ext cx="2785576" cy="113570"/>
             </a:xfrm>
             <a:custGeom>
               <a:avLst/>
               <a:pathLst>
-                <a:path w="2821906" h="113542">
+                <a:path w="2785576" h="113570">
                   <a:moveTo>
-                    <a:pt x="2821906" y="113542"/>
+                    <a:pt x="2785576" y="113570"/>
                   </a:moveTo>
                   <a:lnTo>
-                    <a:pt x="2431507" y="82699"/>
+                    <a:pt x="2400204" y="82719"/>
                   </a:lnTo>
                   <a:lnTo>
-                    <a:pt x="1881271" y="47022"/>
+                    <a:pt x="1857051" y="47033"/>
                   </a:lnTo>
                   <a:lnTo>
-                    <a:pt x="1490872" y="28194"/>
+                    <a:pt x="1471678" y="28201"/>
                   </a:lnTo>
                   <a:lnTo>
                     <a:pt x="0" y="0"/>
@@ -7543,27 +7543,27 @@
           </p:nvSpPr>
           <p:spPr>
             <a:xfrm>
-              <a:off x="5022432" y="2164268"/>
-              <a:ext cx="2821906" cy="136458"/>
+              <a:off x="5063037" y="2164388"/>
+              <a:ext cx="2785576" cy="136491"/>
             </a:xfrm>
             <a:custGeom>
               <a:avLst/>
               <a:pathLst>
-                <a:path w="2821906" h="136458">
+                <a:path w="2785576" h="136491">
                   <a:moveTo>
                     <a:pt x="0" y="0"/>
                   </a:moveTo>
                   <a:lnTo>
-                    <a:pt x="1490872" y="72093"/>
+                    <a:pt x="1471678" y="72111"/>
                   </a:lnTo>
                   <a:lnTo>
-                    <a:pt x="1881271" y="90972"/>
+                    <a:pt x="1857051" y="90994"/>
                   </a:lnTo>
                   <a:lnTo>
-                    <a:pt x="2431507" y="117579"/>
+                    <a:pt x="2400204" y="117608"/>
                   </a:lnTo>
                   <a:lnTo>
-                    <a:pt x="2821906" y="136458"/>
+                    <a:pt x="2785576" y="136491"/>
                   </a:lnTo>
                 </a:path>
               </a:pathLst>
@@ -7592,7 +7592,7 @@
           </p:nvSpPr>
           <p:spPr>
             <a:xfrm>
-              <a:off x="7364645" y="1344209"/>
+              <a:off x="7368920" y="1344148"/>
               <a:ext cx="479694" cy="82021"/>
             </a:xfrm>
             <a:prstGeom prst="rect">
@@ -7699,7 +7699,7 @@
           </p:nvSpPr>
           <p:spPr>
             <a:xfrm>
-              <a:off x="4800012" y="2496283"/>
+              <a:off x="4800012" y="2496484"/>
               <a:ext cx="37957" cy="0"/>
             </a:xfrm>
             <a:custGeom>
@@ -7739,7 +7739,7 @@
           </p:nvSpPr>
           <p:spPr>
             <a:xfrm>
-              <a:off x="4800012" y="1967936"/>
+              <a:off x="4800012" y="1968008"/>
               <a:ext cx="37957" cy="0"/>
             </a:xfrm>
             <a:custGeom>
@@ -7779,7 +7779,7 @@
           </p:nvSpPr>
           <p:spPr>
             <a:xfrm>
-              <a:off x="4800012" y="1439589"/>
+              <a:off x="4800012" y="1439531"/>
               <a:ext cx="37957" cy="0"/>
             </a:xfrm>
             <a:custGeom>
@@ -7859,7 +7859,7 @@
           </p:nvSpPr>
           <p:spPr>
             <a:xfrm>
-              <a:off x="5022432" y="2807247"/>
+              <a:off x="5063037" y="2807247"/>
               <a:ext cx="0" cy="37957"/>
             </a:xfrm>
             <a:custGeom>
@@ -7899,7 +7899,7 @@
           </p:nvSpPr>
           <p:spPr>
             <a:xfrm>
-              <a:off x="5963068" y="2807247"/>
+              <a:off x="5991563" y="2807247"/>
               <a:ext cx="0" cy="37957"/>
             </a:xfrm>
             <a:custGeom>
@@ -7939,7 +7939,7 @@
           </p:nvSpPr>
           <p:spPr>
             <a:xfrm>
-              <a:off x="6903703" y="2807247"/>
+              <a:off x="6920088" y="2807247"/>
               <a:ext cx="0" cy="37957"/>
             </a:xfrm>
             <a:custGeom>
@@ -7979,7 +7979,7 @@
           </p:nvSpPr>
           <p:spPr>
             <a:xfrm>
-              <a:off x="7844339" y="2807247"/>
+              <a:off x="7848614" y="2807247"/>
               <a:ext cx="0" cy="37957"/>
             </a:xfrm>
             <a:custGeom>
@@ -8019,7 +8019,7 @@
           </p:nvSpPr>
           <p:spPr>
             <a:xfrm>
-              <a:off x="4983570" y="2875571"/>
+              <a:off x="5024175" y="2875571"/>
               <a:ext cx="77724" cy="100218"/>
             </a:xfrm>
             <a:prstGeom prst="rect">
@@ -8065,7 +8065,7 @@
           </p:nvSpPr>
           <p:spPr>
             <a:xfrm>
-              <a:off x="5924206" y="2875571"/>
+              <a:off x="5952701" y="2875571"/>
               <a:ext cx="77724" cy="100218"/>
             </a:xfrm>
             <a:prstGeom prst="rect">
@@ -8111,7 +8111,7 @@
           </p:nvSpPr>
           <p:spPr>
             <a:xfrm>
-              <a:off x="6864841" y="2875571"/>
+              <a:off x="6881226" y="2875571"/>
               <a:ext cx="77724" cy="100218"/>
             </a:xfrm>
             <a:prstGeom prst="rect">
@@ -8157,7 +8157,7 @@
           </p:nvSpPr>
           <p:spPr>
             <a:xfrm>
-              <a:off x="7805477" y="2875571"/>
+              <a:off x="7809752" y="2875571"/>
               <a:ext cx="77724" cy="100218"/>
             </a:xfrm>
             <a:prstGeom prst="rect">
@@ -8275,7 +8275,7 @@
           </p:nvSpPr>
           <p:spPr>
             <a:xfrm>
-              <a:off x="1552500" y="4653189"/>
+              <a:off x="1630328" y="4652750"/>
               <a:ext cx="77571" cy="77571"/>
             </a:xfrm>
             <a:prstGeom prst="ellipse">
@@ -8301,7 +8301,7 @@
           </p:nvSpPr>
           <p:spPr>
             <a:xfrm>
-              <a:off x="1642371" y="4495777"/>
+              <a:off x="1717179" y="4496587"/>
               <a:ext cx="77571" cy="77571"/>
             </a:xfrm>
             <a:prstGeom prst="ellipse">
@@ -8327,7 +8327,7 @@
           </p:nvSpPr>
           <p:spPr>
             <a:xfrm>
-              <a:off x="1764628" y="4723233"/>
+              <a:off x="1519161" y="4725885"/>
               <a:ext cx="77571" cy="77571"/>
             </a:xfrm>
             <a:prstGeom prst="ellipse">
@@ -8353,7 +8353,7 @@
           </p:nvSpPr>
           <p:spPr>
             <a:xfrm>
-              <a:off x="1519161" y="4582452"/>
+              <a:off x="1593104" y="4585602"/>
               <a:ext cx="77571" cy="77571"/>
             </a:xfrm>
             <a:prstGeom prst="ellipse">
@@ -8379,7 +8379,7 @@
           </p:nvSpPr>
           <p:spPr>
             <a:xfrm>
-              <a:off x="1910446" y="4614091"/>
+              <a:off x="1853531" y="4613845"/>
               <a:ext cx="77571" cy="77571"/>
             </a:xfrm>
             <a:prstGeom prst="ellipse">
@@ -8405,7 +8405,7 @@
           </p:nvSpPr>
           <p:spPr>
             <a:xfrm>
-              <a:off x="1863635" y="4477716"/>
+              <a:off x="1612555" y="4478305"/>
               <a:ext cx="77571" cy="77571"/>
             </a:xfrm>
             <a:prstGeom prst="ellipse">
@@ -8431,7 +8431,7 @@
           </p:nvSpPr>
           <p:spPr>
             <a:xfrm>
-              <a:off x="1929921" y="4132039"/>
+              <a:off x="1782513" y="4134313"/>
               <a:ext cx="77571" cy="77571"/>
             </a:xfrm>
             <a:prstGeom prst="ellipse">
@@ -8457,7 +8457,7 @@
           </p:nvSpPr>
           <p:spPr>
             <a:xfrm>
-              <a:off x="1578023" y="4584796"/>
+              <a:off x="1723034" y="4584482"/>
               <a:ext cx="77571" cy="77571"/>
             </a:xfrm>
             <a:prstGeom prst="ellipse">
@@ -8483,7 +8483,7 @@
           </p:nvSpPr>
           <p:spPr>
             <a:xfrm>
-              <a:off x="1577225" y="4534600"/>
+              <a:off x="1659170" y="4534634"/>
               <a:ext cx="77571" cy="77571"/>
             </a:xfrm>
             <a:prstGeom prst="ellipse">
@@ -8509,7 +8509,7 @@
           </p:nvSpPr>
           <p:spPr>
             <a:xfrm>
-              <a:off x="1925562" y="4478647"/>
+              <a:off x="1765071" y="4480091"/>
               <a:ext cx="77571" cy="77571"/>
             </a:xfrm>
             <a:prstGeom prst="ellipse">
@@ -8535,7 +8535,7 @@
           </p:nvSpPr>
           <p:spPr>
             <a:xfrm>
-              <a:off x="2789734" y="4734143"/>
+              <a:off x="2711574" y="4731539"/>
               <a:ext cx="77571" cy="77571"/>
             </a:xfrm>
             <a:prstGeom prst="ellipse">
@@ -8561,7 +8561,7 @@
           </p:nvSpPr>
           <p:spPr>
             <a:xfrm>
-              <a:off x="2445627" y="4786016"/>
+              <a:off x="2544947" y="4786895"/>
               <a:ext cx="77571" cy="77571"/>
             </a:xfrm>
             <a:prstGeom prst="ellipse">
@@ -8587,7 +8587,7 @@
           </p:nvSpPr>
           <p:spPr>
             <a:xfrm>
-              <a:off x="2369370" y="3552477"/>
+              <a:off x="2432566" y="3553390"/>
               <a:ext cx="77571" cy="77571"/>
             </a:xfrm>
             <a:prstGeom prst="ellipse">
@@ -8613,7 +8613,7 @@
           </p:nvSpPr>
           <p:spPr>
             <a:xfrm>
-              <a:off x="2804370" y="4649583"/>
+              <a:off x="2575963" y="4648958"/>
               <a:ext cx="77571" cy="77571"/>
             </a:xfrm>
             <a:prstGeom prst="ellipse">
@@ -8639,7 +8639,7 @@
           </p:nvSpPr>
           <p:spPr>
             <a:xfrm>
-              <a:off x="2593739" y="4675357"/>
+              <a:off x="2404087" y="4676209"/>
               <a:ext cx="77571" cy="77571"/>
             </a:xfrm>
             <a:prstGeom prst="ellipse">
@@ -8665,7 +8665,7 @@
           </p:nvSpPr>
           <p:spPr>
             <a:xfrm>
-              <a:off x="2433034" y="4504550"/>
+              <a:off x="2571143" y="4505413"/>
               <a:ext cx="77571" cy="77571"/>
             </a:xfrm>
             <a:prstGeom prst="ellipse">
@@ -8691,7 +8691,7 @@
           </p:nvSpPr>
           <p:spPr>
             <a:xfrm>
-              <a:off x="2615396" y="4677333"/>
+              <a:off x="2702969" y="4676458"/>
               <a:ext cx="77571" cy="77571"/>
             </a:xfrm>
             <a:prstGeom prst="ellipse">
@@ -8717,7 +8717,7 @@
           </p:nvSpPr>
           <p:spPr>
             <a:xfrm>
-              <a:off x="2388033" y="4681303"/>
+              <a:off x="2659398" y="4680920"/>
               <a:ext cx="77571" cy="77571"/>
             </a:xfrm>
             <a:prstGeom prst="ellipse">
@@ -8743,7 +8743,7 @@
           </p:nvSpPr>
           <p:spPr>
             <a:xfrm>
-              <a:off x="2425865" y="4035139"/>
+              <a:off x="2454297" y="4037109"/>
               <a:ext cx="77571" cy="77571"/>
             </a:xfrm>
             <a:prstGeom prst="ellipse">
@@ -8769,7 +8769,7 @@
           </p:nvSpPr>
           <p:spPr>
             <a:xfrm>
-              <a:off x="2816065" y="4180524"/>
+              <a:off x="2811235" y="4180513"/>
               <a:ext cx="77571" cy="77571"/>
             </a:xfrm>
             <a:prstGeom prst="ellipse">
@@ -8795,7 +8795,7 @@
           </p:nvSpPr>
           <p:spPr>
             <a:xfrm>
-              <a:off x="2524428" y="4411694"/>
+              <a:off x="2696125" y="4413951"/>
               <a:ext cx="77571" cy="77571"/>
             </a:xfrm>
             <a:prstGeom prst="ellipse">
@@ -8821,7 +8821,7 @@
           </p:nvSpPr>
           <p:spPr>
             <a:xfrm>
-              <a:off x="2537437" y="4501366"/>
+              <a:off x="2490857" y="4502240"/>
               <a:ext cx="77571" cy="77571"/>
             </a:xfrm>
             <a:prstGeom prst="ellipse">
@@ -8847,7 +8847,7 @@
           </p:nvSpPr>
           <p:spPr>
             <a:xfrm>
-              <a:off x="2536096" y="4338907"/>
+              <a:off x="2678277" y="4339409"/>
               <a:ext cx="77571" cy="77571"/>
             </a:xfrm>
             <a:prstGeom prst="ellipse">
@@ -8873,7 +8873,7 @@
           </p:nvSpPr>
           <p:spPr>
             <a:xfrm>
-              <a:off x="2787079" y="4560606"/>
+              <a:off x="2713479" y="4560764"/>
               <a:ext cx="77571" cy="77571"/>
             </a:xfrm>
             <a:prstGeom prst="ellipse">
@@ -8899,7 +8899,7 @@
           </p:nvSpPr>
           <p:spPr>
             <a:xfrm>
-              <a:off x="2640556" y="4589577"/>
+              <a:off x="2725349" y="4589793"/>
               <a:ext cx="77571" cy="77571"/>
             </a:xfrm>
             <a:prstGeom prst="ellipse">
@@ -8925,7 +8925,7 @@
           </p:nvSpPr>
           <p:spPr>
             <a:xfrm>
-              <a:off x="2559207" y="4453811"/>
+              <a:off x="2515480" y="4451190"/>
               <a:ext cx="77571" cy="77571"/>
             </a:xfrm>
             <a:prstGeom prst="ellipse">
@@ -8951,7 +8951,7 @@
           </p:nvSpPr>
           <p:spPr>
             <a:xfrm>
-              <a:off x="2536272" y="3879739"/>
+              <a:off x="2650101" y="3883026"/>
               <a:ext cx="77571" cy="77571"/>
             </a:xfrm>
             <a:prstGeom prst="ellipse">
@@ -8977,7 +8977,7 @@
           </p:nvSpPr>
           <p:spPr>
             <a:xfrm>
-              <a:off x="2571965" y="4143908"/>
+              <a:off x="2575589" y="4145280"/>
               <a:ext cx="77571" cy="77571"/>
             </a:xfrm>
             <a:prstGeom prst="ellipse">
@@ -9003,7 +9003,7 @@
           </p:nvSpPr>
           <p:spPr>
             <a:xfrm>
-              <a:off x="3532094" y="4437382"/>
+              <a:off x="3619146" y="4440386"/>
               <a:ext cx="77571" cy="77571"/>
             </a:xfrm>
             <a:prstGeom prst="ellipse">
@@ -9029,7 +9029,7 @@
           </p:nvSpPr>
           <p:spPr>
             <a:xfrm>
-              <a:off x="3345889" y="4325674"/>
+              <a:off x="3597434" y="4324492"/>
               <a:ext cx="77571" cy="77571"/>
             </a:xfrm>
             <a:prstGeom prst="ellipse">
@@ -9055,7 +9055,7 @@
           </p:nvSpPr>
           <p:spPr>
             <a:xfrm>
-              <a:off x="3582211" y="4774085"/>
+              <a:off x="3425494" y="4771684"/>
               <a:ext cx="77571" cy="77571"/>
             </a:xfrm>
             <a:prstGeom prst="ellipse">
@@ -9081,7 +9081,7 @@
           </p:nvSpPr>
           <p:spPr>
             <a:xfrm>
-              <a:off x="3302145" y="4765167"/>
+              <a:off x="3341018" y="4763773"/>
               <a:ext cx="77571" cy="77571"/>
             </a:xfrm>
             <a:prstGeom prst="ellipse">
@@ -9107,7 +9107,7 @@
           </p:nvSpPr>
           <p:spPr>
             <a:xfrm>
-              <a:off x="3654638" y="4547667"/>
+              <a:off x="3226674" y="4550121"/>
               <a:ext cx="77571" cy="77571"/>
             </a:xfrm>
             <a:prstGeom prst="ellipse">
@@ -9133,7 +9133,7 @@
           </p:nvSpPr>
           <p:spPr>
             <a:xfrm>
-              <a:off x="3374822" y="4777238"/>
+              <a:off x="3298668" y="4776500"/>
               <a:ext cx="77571" cy="77571"/>
             </a:xfrm>
             <a:prstGeom prst="ellipse">
@@ -9159,7 +9159,7 @@
           </p:nvSpPr>
           <p:spPr>
             <a:xfrm>
-              <a:off x="3231335" y="3770412"/>
+              <a:off x="3200803" y="3775474"/>
               <a:ext cx="77571" cy="77571"/>
             </a:xfrm>
             <a:prstGeom prst="ellipse">
@@ -9185,7 +9185,7 @@
           </p:nvSpPr>
           <p:spPr>
             <a:xfrm>
-              <a:off x="3236999" y="4794129"/>
+              <a:off x="3653642" y="4794129"/>
               <a:ext cx="77571" cy="77571"/>
             </a:xfrm>
             <a:prstGeom prst="ellipse">
@@ -9211,7 +9211,7 @@
           </p:nvSpPr>
           <p:spPr>
             <a:xfrm>
-              <a:off x="3557135" y="4266201"/>
+              <a:off x="3416586" y="4268372"/>
               <a:ext cx="77571" cy="77571"/>
             </a:xfrm>
             <a:prstGeom prst="ellipse">
@@ -9237,7 +9237,7 @@
           </p:nvSpPr>
           <p:spPr>
             <a:xfrm>
-              <a:off x="3216169" y="3577981"/>
+              <a:off x="3491393" y="3582874"/>
               <a:ext cx="77571" cy="77571"/>
             </a:xfrm>
             <a:prstGeom prst="ellipse">
@@ -9263,7 +9263,7 @@
           </p:nvSpPr>
           <p:spPr>
             <a:xfrm>
-              <a:off x="3259161" y="3461564"/>
+              <a:off x="3381518" y="3461564"/>
               <a:ext cx="77571" cy="77571"/>
             </a:xfrm>
             <a:prstGeom prst="ellipse">
@@ -9289,7 +9289,7 @@
           </p:nvSpPr>
           <p:spPr>
             <a:xfrm>
-              <a:off x="3547370" y="4248532"/>
+              <a:off x="3598473" y="4250048"/>
               <a:ext cx="77571" cy="77571"/>
             </a:xfrm>
             <a:prstGeom prst="ellipse">
@@ -9315,7 +9315,7 @@
           </p:nvSpPr>
           <p:spPr>
             <a:xfrm>
-              <a:off x="3510029" y="4109587"/>
+              <a:off x="3670217" y="4111324"/>
               <a:ext cx="77571" cy="77571"/>
             </a:xfrm>
             <a:prstGeom prst="ellipse">
@@ -9341,7 +9341,7 @@
           </p:nvSpPr>
           <p:spPr>
             <a:xfrm>
-              <a:off x="3369557" y="4062061"/>
+              <a:off x="3674039" y="4064793"/>
               <a:ext cx="77571" cy="77571"/>
             </a:xfrm>
             <a:prstGeom prst="ellipse">
@@ -9367,7 +9367,7 @@
           </p:nvSpPr>
           <p:spPr>
             <a:xfrm>
-              <a:off x="3488843" y="4102291"/>
+              <a:off x="3432328" y="4103156"/>
               <a:ext cx="77571" cy="77571"/>
             </a:xfrm>
             <a:prstGeom prst="ellipse">
@@ -9393,7 +9393,7 @@
           </p:nvSpPr>
           <p:spPr>
             <a:xfrm>
-              <a:off x="3486255" y="4693259"/>
+              <a:off x="3510962" y="4695366"/>
               <a:ext cx="77571" cy="77571"/>
             </a:xfrm>
             <a:prstGeom prst="ellipse">
@@ -9419,7 +9419,7 @@
           </p:nvSpPr>
           <p:spPr>
             <a:xfrm>
-              <a:off x="3487608" y="4049619"/>
+              <a:off x="3305787" y="4051405"/>
               <a:ext cx="77571" cy="77571"/>
             </a:xfrm>
             <a:prstGeom prst="ellipse">
@@ -9445,7 +9445,7 @@
           </p:nvSpPr>
           <p:spPr>
             <a:xfrm>
-              <a:off x="3475236" y="4496806"/>
+              <a:off x="3541018" y="4496366"/>
               <a:ext cx="77571" cy="77571"/>
             </a:xfrm>
             <a:prstGeom prst="ellipse">
@@ -9471,7 +9471,7 @@
           </p:nvSpPr>
           <p:spPr>
             <a:xfrm>
-              <a:off x="3469994" y="4518962"/>
+              <a:off x="3201525" y="4518338"/>
               <a:ext cx="77571" cy="77571"/>
             </a:xfrm>
             <a:prstGeom prst="ellipse">
@@ -9497,7 +9497,7 @@
           </p:nvSpPr>
           <p:spPr>
             <a:xfrm>
-              <a:off x="3248006" y="4302742"/>
+              <a:off x="3373666" y="4302730"/>
               <a:ext cx="77571" cy="77571"/>
             </a:xfrm>
             <a:prstGeom prst="ellipse">
@@ -9523,7 +9523,7 @@
           </p:nvSpPr>
           <p:spPr>
             <a:xfrm>
-              <a:off x="4066699" y="4290983"/>
+              <a:off x="4394503" y="4291536"/>
               <a:ext cx="77571" cy="77571"/>
             </a:xfrm>
             <a:prstGeom prst="ellipse">
@@ -9549,7 +9549,7 @@
           </p:nvSpPr>
           <p:spPr>
             <a:xfrm>
-              <a:off x="4161993" y="4405073"/>
+              <a:off x="4054946" y="4403369"/>
               <a:ext cx="77571" cy="77571"/>
             </a:xfrm>
             <a:prstGeom prst="ellipse">
@@ -9575,7 +9575,7 @@
           </p:nvSpPr>
           <p:spPr>
             <a:xfrm>
-              <a:off x="4288505" y="4326196"/>
+              <a:off x="4236180" y="4325726"/>
               <a:ext cx="77571" cy="77571"/>
             </a:xfrm>
             <a:prstGeom prst="ellipse">
@@ -9601,7 +9601,7 @@
           </p:nvSpPr>
           <p:spPr>
             <a:xfrm>
-              <a:off x="4175306" y="4635928"/>
+              <a:off x="4510442" y="4638260"/>
               <a:ext cx="77571" cy="77571"/>
             </a:xfrm>
             <a:prstGeom prst="ellipse">
@@ -9627,7 +9627,7 @@
           </p:nvSpPr>
           <p:spPr>
             <a:xfrm>
-              <a:off x="4436482" y="4054280"/>
+              <a:off x="4444826" y="4055451"/>
               <a:ext cx="77571" cy="77571"/>
             </a:xfrm>
             <a:prstGeom prst="ellipse">
@@ -9653,7 +9653,7 @@
           </p:nvSpPr>
           <p:spPr>
             <a:xfrm>
-              <a:off x="4280530" y="4427565"/>
+              <a:off x="4479632" y="4427791"/>
               <a:ext cx="77571" cy="77571"/>
             </a:xfrm>
             <a:prstGeom prst="ellipse">
@@ -9679,7 +9679,7 @@
           </p:nvSpPr>
           <p:spPr>
             <a:xfrm>
-              <a:off x="4124956" y="4553751"/>
+              <a:off x="4073529" y="4554643"/>
               <a:ext cx="77571" cy="77571"/>
             </a:xfrm>
             <a:prstGeom prst="ellipse">
@@ -9705,7 +9705,7 @@
           </p:nvSpPr>
           <p:spPr>
             <a:xfrm>
-              <a:off x="4510442" y="4234140"/>
+              <a:off x="4273265" y="4232982"/>
               <a:ext cx="77571" cy="77571"/>
             </a:xfrm>
             <a:prstGeom prst="ellipse">
@@ -9731,7 +9731,7 @@
           </p:nvSpPr>
           <p:spPr>
             <a:xfrm>
-              <a:off x="4174473" y="4157435"/>
+              <a:off x="4409939" y="4160105"/>
               <a:ext cx="77571" cy="77571"/>
             </a:xfrm>
             <a:prstGeom prst="ellipse">
@@ -9757,7 +9757,7 @@
           </p:nvSpPr>
           <p:spPr>
             <a:xfrm>
-              <a:off x="4432368" y="3847580"/>
+              <a:off x="4440993" y="3848587"/>
               <a:ext cx="77571" cy="77571"/>
             </a:xfrm>
             <a:prstGeom prst="ellipse">
@@ -9783,7 +9783,7 @@
           </p:nvSpPr>
           <p:spPr>
             <a:xfrm>
-              <a:off x="4423550" y="3871048"/>
+              <a:off x="4054624" y="3875606"/>
               <a:ext cx="77571" cy="77571"/>
             </a:xfrm>
             <a:prstGeom prst="ellipse">
@@ -9809,7 +9809,7 @@
           </p:nvSpPr>
           <p:spPr>
             <a:xfrm>
-              <a:off x="4381723" y="3850054"/>
+              <a:off x="4432415" y="3851192"/>
               <a:ext cx="77571" cy="77571"/>
             </a:xfrm>
             <a:prstGeom prst="ellipse">
@@ -9835,7 +9835,7 @@
           </p:nvSpPr>
           <p:spPr>
             <a:xfrm>
-              <a:off x="4242719" y="3963630"/>
+              <a:off x="4172402" y="3966777"/>
               <a:ext cx="77571" cy="77571"/>
             </a:xfrm>
             <a:prstGeom prst="ellipse">
@@ -9861,7 +9861,7 @@
           </p:nvSpPr>
           <p:spPr>
             <a:xfrm>
-              <a:off x="4281827" y="4241021"/>
+              <a:off x="4367421" y="4244311"/>
               <a:ext cx="77571" cy="77571"/>
             </a:xfrm>
             <a:prstGeom prst="ellipse">
@@ -9887,7 +9887,7 @@
           </p:nvSpPr>
           <p:spPr>
             <a:xfrm>
-              <a:off x="4254400" y="4270513"/>
+              <a:off x="4266805" y="4274626"/>
               <a:ext cx="77571" cy="77571"/>
             </a:xfrm>
             <a:prstGeom prst="ellipse">
@@ -9913,7 +9913,7 @@
           </p:nvSpPr>
           <p:spPr>
             <a:xfrm>
-              <a:off x="4490773" y="4163442"/>
+              <a:off x="4079647" y="4164622"/>
               <a:ext cx="77571" cy="77571"/>
             </a:xfrm>
             <a:prstGeom prst="ellipse">
@@ -9939,7 +9939,7 @@
           </p:nvSpPr>
           <p:spPr>
             <a:xfrm>
-              <a:off x="4106673" y="4117144"/>
+              <a:off x="4482382" y="4119496"/>
               <a:ext cx="77571" cy="77571"/>
             </a:xfrm>
             <a:prstGeom prst="ellipse">
@@ -9965,7 +9965,7 @@
           </p:nvSpPr>
           <p:spPr>
             <a:xfrm>
-              <a:off x="4385411" y="4107070"/>
+              <a:off x="4385302" y="4107297"/>
               <a:ext cx="77571" cy="77571"/>
             </a:xfrm>
             <a:prstGeom prst="ellipse">
@@ -9991,7 +9991,7 @@
           </p:nvSpPr>
           <p:spPr>
             <a:xfrm>
-              <a:off x="4088766" y="3904311"/>
+              <a:off x="4269933" y="3906930"/>
               <a:ext cx="77571" cy="77571"/>
             </a:xfrm>
             <a:prstGeom prst="ellipse">
@@ -10017,7 +10017,7 @@
           </p:nvSpPr>
           <p:spPr>
             <a:xfrm>
-              <a:off x="4129556" y="4033767"/>
+              <a:off x="4275947" y="4037470"/>
               <a:ext cx="77571" cy="77571"/>
             </a:xfrm>
             <a:prstGeom prst="ellipse">
@@ -10043,7 +10043,7 @@
           </p:nvSpPr>
           <p:spPr>
             <a:xfrm>
-              <a:off x="4480993" y="4084288"/>
+              <a:off x="4354884" y="4084919"/>
               <a:ext cx="77571" cy="77571"/>
             </a:xfrm>
             <a:prstGeom prst="ellipse">
@@ -10069,7 +10069,7 @@
           </p:nvSpPr>
           <p:spPr>
             <a:xfrm>
-              <a:off x="4444143" y="3874330"/>
+              <a:off x="4469576" y="3873547"/>
               <a:ext cx="77571" cy="77571"/>
             </a:xfrm>
             <a:prstGeom prst="ellipse">
@@ -10095,7 +10095,7 @@
           </p:nvSpPr>
           <p:spPr>
             <a:xfrm>
-              <a:off x="4371323" y="4118986"/>
+              <a:off x="4165524" y="4118705"/>
               <a:ext cx="77571" cy="77571"/>
             </a:xfrm>
             <a:prstGeom prst="ellipse">
@@ -10121,7 +10121,7 @@
           </p:nvSpPr>
           <p:spPr>
             <a:xfrm>
-              <a:off x="4349091" y="3928350"/>
+              <a:off x="4211103" y="3931436"/>
               <a:ext cx="77571" cy="77571"/>
             </a:xfrm>
             <a:prstGeom prst="ellipse">
@@ -10147,42 +10147,42 @@
           </p:nvSpPr>
           <p:spPr>
             <a:xfrm>
-              <a:off x="1791829" y="3980623"/>
-              <a:ext cx="2522065" cy="804147"/>
+              <a:off x="1761832" y="3982568"/>
+              <a:ext cx="2558371" cy="802115"/>
             </a:xfrm>
             <a:custGeom>
               <a:avLst/>
               <a:pathLst>
-                <a:path w="2522065" h="804147">
+                <a:path w="2558371" h="802115">
                   <a:moveTo>
-                    <a:pt x="0" y="327941"/>
+                    <a:pt x="0" y="327112"/>
                   </a:moveTo>
                   <a:lnTo>
-                    <a:pt x="1332459" y="242870"/>
+                    <a:pt x="1351640" y="242256"/>
                   </a:lnTo>
                   <a:lnTo>
-                    <a:pt x="1681377" y="187198"/>
+                    <a:pt x="1705580" y="186725"/>
                   </a:lnTo>
                   <a:lnTo>
-                    <a:pt x="2173148" y="84011"/>
+                    <a:pt x="2204431" y="83799"/>
                   </a:lnTo>
                   <a:lnTo>
-                    <a:pt x="2522065" y="0"/>
+                    <a:pt x="2558371" y="0"/>
                   </a:lnTo>
                   <a:lnTo>
-                    <a:pt x="2522065" y="427158"/>
+                    <a:pt x="2558371" y="426079"/>
                   </a:lnTo>
                   <a:lnTo>
-                    <a:pt x="2173148" y="440670"/>
+                    <a:pt x="2204431" y="439557"/>
                   </a:lnTo>
                   <a:lnTo>
-                    <a:pt x="1681377" y="474937"/>
+                    <a:pt x="1705580" y="473737"/>
                   </a:lnTo>
                   <a:lnTo>
-                    <a:pt x="1332459" y="516789"/>
+                    <a:pt x="1351640" y="515483"/>
                   </a:lnTo>
                   <a:lnTo>
-                    <a:pt x="0" y="804147"/>
+                    <a:pt x="0" y="802115"/>
                   </a:lnTo>
                   <a:close/>
                 </a:path>
@@ -10208,27 +10208,27 @@
           </p:nvSpPr>
           <p:spPr>
             <a:xfrm>
-              <a:off x="1791829" y="3980623"/>
-              <a:ext cx="2522065" cy="327941"/>
+              <a:off x="1761832" y="3982568"/>
+              <a:ext cx="2558371" cy="327112"/>
             </a:xfrm>
             <a:custGeom>
               <a:avLst/>
               <a:pathLst>
-                <a:path w="2522065" h="327941">
+                <a:path w="2558371" h="327112">
                   <a:moveTo>
-                    <a:pt x="0" y="327941"/>
+                    <a:pt x="0" y="327112"/>
                   </a:moveTo>
                   <a:lnTo>
-                    <a:pt x="1332459" y="242870"/>
+                    <a:pt x="1351640" y="242256"/>
                   </a:lnTo>
                   <a:lnTo>
-                    <a:pt x="1681377" y="187198"/>
+                    <a:pt x="1705580" y="186725"/>
                   </a:lnTo>
                   <a:lnTo>
-                    <a:pt x="2173148" y="84011"/>
+                    <a:pt x="2204431" y="83799"/>
                   </a:lnTo>
                   <a:lnTo>
-                    <a:pt x="2522065" y="0"/>
+                    <a:pt x="2558371" y="0"/>
                   </a:lnTo>
                 </a:path>
               </a:pathLst>
@@ -10248,27 +10248,27 @@
           </p:nvSpPr>
           <p:spPr>
             <a:xfrm>
-              <a:off x="1791829" y="4407781"/>
-              <a:ext cx="2522065" cy="376989"/>
+              <a:off x="1761832" y="4408647"/>
+              <a:ext cx="2558371" cy="376036"/>
             </a:xfrm>
             <a:custGeom>
               <a:avLst/>
               <a:pathLst>
-                <a:path w="2522065" h="376989">
+                <a:path w="2558371" h="376036">
                   <a:moveTo>
-                    <a:pt x="2522065" y="0"/>
+                    <a:pt x="2558371" y="0"/>
                   </a:moveTo>
                   <a:lnTo>
-                    <a:pt x="2173148" y="13512"/>
+                    <a:pt x="2204431" y="13478"/>
                   </a:lnTo>
                   <a:lnTo>
-                    <a:pt x="1681377" y="47778"/>
+                    <a:pt x="1705580" y="47658"/>
                   </a:lnTo>
                   <a:lnTo>
-                    <a:pt x="1332459" y="89631"/>
+                    <a:pt x="1351640" y="89404"/>
                   </a:lnTo>
                   <a:lnTo>
-                    <a:pt x="0" y="376989"/>
+                    <a:pt x="0" y="376036"/>
                   </a:lnTo>
                 </a:path>
               </a:pathLst>
@@ -10288,27 +10288,27 @@
           </p:nvSpPr>
           <p:spPr>
             <a:xfrm>
-              <a:off x="1791829" y="4194202"/>
-              <a:ext cx="2522065" cy="352465"/>
+              <a:off x="1761832" y="4195607"/>
+              <a:ext cx="2558371" cy="351574"/>
             </a:xfrm>
             <a:custGeom>
               <a:avLst/>
               <a:pathLst>
-                <a:path w="2522065" h="352465">
+                <a:path w="2558371" h="351574">
                   <a:moveTo>
-                    <a:pt x="0" y="352465"/>
+                    <a:pt x="0" y="351574"/>
                   </a:moveTo>
                   <a:lnTo>
-                    <a:pt x="1332459" y="166250"/>
+                    <a:pt x="1351640" y="165830"/>
                   </a:lnTo>
                   <a:lnTo>
-                    <a:pt x="1681377" y="117488"/>
+                    <a:pt x="1705580" y="117191"/>
                   </a:lnTo>
                   <a:lnTo>
-                    <a:pt x="2173148" y="48762"/>
+                    <a:pt x="2204431" y="48638"/>
                   </a:lnTo>
                   <a:lnTo>
-                    <a:pt x="2522065" y="0"/>
+                    <a:pt x="2558371" y="0"/>
                   </a:lnTo>
                 </a:path>
               </a:pathLst>
@@ -10337,7 +10337,7 @@
           </p:nvSpPr>
           <p:spPr>
             <a:xfrm>
-              <a:off x="3834200" y="3509140"/>
+              <a:off x="3840508" y="3511966"/>
               <a:ext cx="479694" cy="82021"/>
             </a:xfrm>
             <a:prstGeom prst="rect">
@@ -10444,7 +10444,7 @@
           </p:nvSpPr>
           <p:spPr>
             <a:xfrm rot="-5400000">
-              <a:off x="1177387" y="4792726"/>
+              <a:off x="1177387" y="4792493"/>
               <a:ext cx="194218" cy="100218"/>
             </a:xfrm>
             <a:prstGeom prst="rect">
@@ -10490,7 +10490,7 @@
           </p:nvSpPr>
           <p:spPr>
             <a:xfrm rot="-5400000">
-              <a:off x="1177387" y="4496621"/>
+              <a:off x="1177387" y="4497136"/>
               <a:ext cx="194218" cy="100218"/>
             </a:xfrm>
             <a:prstGeom prst="rect">
@@ -10536,7 +10536,7 @@
           </p:nvSpPr>
           <p:spPr>
             <a:xfrm rot="-5400000">
-              <a:off x="1177387" y="4200516"/>
+              <a:off x="1177387" y="4201779"/>
               <a:ext cx="194218" cy="100218"/>
             </a:xfrm>
             <a:prstGeom prst="rect">
@@ -10582,7 +10582,7 @@
           </p:nvSpPr>
           <p:spPr>
             <a:xfrm rot="-5400000">
-              <a:off x="1177387" y="3904412"/>
+              <a:off x="1177387" y="3906423"/>
               <a:ext cx="194218" cy="100218"/>
             </a:xfrm>
             <a:prstGeom prst="rect">
@@ -10628,7 +10628,7 @@
           </p:nvSpPr>
           <p:spPr>
             <a:xfrm rot="-5400000">
-              <a:off x="1177387" y="3608307"/>
+              <a:off x="1177387" y="3611066"/>
               <a:ext cx="194218" cy="100218"/>
             </a:xfrm>
             <a:prstGeom prst="rect">
@@ -10674,7 +10674,7 @@
           </p:nvSpPr>
           <p:spPr>
             <a:xfrm rot="-5400000">
-              <a:off x="1177387" y="3312202"/>
+              <a:off x="1177387" y="3315709"/>
               <a:ext cx="194218" cy="100218"/>
             </a:xfrm>
             <a:prstGeom prst="rect">
@@ -10720,7 +10720,7 @@
           </p:nvSpPr>
           <p:spPr>
             <a:xfrm>
-              <a:off x="1370425" y="4842835"/>
+              <a:off x="1370425" y="4842602"/>
               <a:ext cx="37957" cy="0"/>
             </a:xfrm>
             <a:custGeom>
@@ -10760,7 +10760,7 @@
           </p:nvSpPr>
           <p:spPr>
             <a:xfrm>
-              <a:off x="1370425" y="4546730"/>
+              <a:off x="1370425" y="4547245"/>
               <a:ext cx="37957" cy="0"/>
             </a:xfrm>
             <a:custGeom>
@@ -10800,7 +10800,7 @@
           </p:nvSpPr>
           <p:spPr>
             <a:xfrm>
-              <a:off x="1370425" y="4250626"/>
+              <a:off x="1370425" y="4251888"/>
               <a:ext cx="37957" cy="0"/>
             </a:xfrm>
             <a:custGeom>
@@ -10840,7 +10840,7 @@
           </p:nvSpPr>
           <p:spPr>
             <a:xfrm>
-              <a:off x="1370425" y="3954521"/>
+              <a:off x="1370425" y="3956532"/>
               <a:ext cx="37957" cy="0"/>
             </a:xfrm>
             <a:custGeom>
@@ -10880,7 +10880,7 @@
           </p:nvSpPr>
           <p:spPr>
             <a:xfrm>
-              <a:off x="1370425" y="3658416"/>
+              <a:off x="1370425" y="3661175"/>
               <a:ext cx="37957" cy="0"/>
             </a:xfrm>
             <a:custGeom>
@@ -10920,7 +10920,7 @@
           </p:nvSpPr>
           <p:spPr>
             <a:xfrm>
-              <a:off x="1370425" y="3362311"/>
+              <a:off x="1370425" y="3365818"/>
               <a:ext cx="37957" cy="0"/>
             </a:xfrm>
             <a:custGeom>
@@ -11000,7 +11000,7 @@
           </p:nvSpPr>
           <p:spPr>
             <a:xfrm>
-              <a:off x="1791829" y="4899543"/>
+              <a:off x="1761832" y="4899543"/>
               <a:ext cx="0" cy="37957"/>
             </a:xfrm>
             <a:custGeom>
@@ -11040,7 +11040,7 @@
           </p:nvSpPr>
           <p:spPr>
             <a:xfrm>
-              <a:off x="2632517" y="4899543"/>
+              <a:off x="2614622" y="4899543"/>
               <a:ext cx="0" cy="37957"/>
             </a:xfrm>
             <a:custGeom>
@@ -11080,7 +11080,7 @@
           </p:nvSpPr>
           <p:spPr>
             <a:xfrm>
-              <a:off x="3473206" y="4899543"/>
+              <a:off x="3467412" y="4899543"/>
               <a:ext cx="0" cy="37957"/>
             </a:xfrm>
             <a:custGeom>
@@ -11120,7 +11120,7 @@
           </p:nvSpPr>
           <p:spPr>
             <a:xfrm>
-              <a:off x="4313895" y="4899543"/>
+              <a:off x="4320203" y="4899543"/>
               <a:ext cx="0" cy="37957"/>
             </a:xfrm>
             <a:custGeom>
@@ -11160,7 +11160,7 @@
           </p:nvSpPr>
           <p:spPr>
             <a:xfrm>
-              <a:off x="1752967" y="4967867"/>
+              <a:off x="1722970" y="4967867"/>
               <a:ext cx="77724" cy="100218"/>
             </a:xfrm>
             <a:prstGeom prst="rect">
@@ -11206,7 +11206,7 @@
           </p:nvSpPr>
           <p:spPr>
             <a:xfrm>
-              <a:off x="2593655" y="4967867"/>
+              <a:off x="2575760" y="4967867"/>
               <a:ext cx="77724" cy="100218"/>
             </a:xfrm>
             <a:prstGeom prst="rect">
@@ -11252,7 +11252,7 @@
           </p:nvSpPr>
           <p:spPr>
             <a:xfrm>
-              <a:off x="3434344" y="4967867"/>
+              <a:off x="3428550" y="4967867"/>
               <a:ext cx="77724" cy="100218"/>
             </a:xfrm>
             <a:prstGeom prst="rect">
@@ -11298,7 +11298,7 @@
           </p:nvSpPr>
           <p:spPr>
             <a:xfrm>
-              <a:off x="4275033" y="4967867"/>
+              <a:off x="4281341" y="4967867"/>
               <a:ext cx="77724" cy="100218"/>
             </a:xfrm>
             <a:prstGeom prst="rect">
@@ -11462,7 +11462,7 @@
           </p:nvSpPr>
           <p:spPr>
             <a:xfrm>
-              <a:off x="5295327" y="4316320"/>
+              <a:off x="5020717" y="4318354"/>
               <a:ext cx="77571" cy="77571"/>
             </a:xfrm>
             <a:prstGeom prst="ellipse">
@@ -11488,7 +11488,7 @@
           </p:nvSpPr>
           <p:spPr>
             <a:xfrm>
-              <a:off x="5069734" y="3600415"/>
+              <a:off x="4948748" y="3598429"/>
               <a:ext cx="77571" cy="77571"/>
             </a:xfrm>
             <a:prstGeom prst="ellipse">
@@ -11514,7 +11514,7 @@
           </p:nvSpPr>
           <p:spPr>
             <a:xfrm>
-              <a:off x="5248000" y="4394340"/>
+              <a:off x="5134465" y="4389617"/>
               <a:ext cx="77571" cy="77571"/>
             </a:xfrm>
             <a:prstGeom prst="ellipse">
@@ -11540,7 +11540,7 @@
           </p:nvSpPr>
           <p:spPr>
             <a:xfrm>
-              <a:off x="4979971" y="4136911"/>
+              <a:off x="5022255" y="4135548"/>
               <a:ext cx="77571" cy="77571"/>
             </a:xfrm>
             <a:prstGeom prst="ellipse">
@@ -11566,7 +11566,7 @@
           </p:nvSpPr>
           <p:spPr>
             <a:xfrm>
-              <a:off x="4966786" y="4445751"/>
+              <a:off x="5246434" y="4441169"/>
               <a:ext cx="77571" cy="77571"/>
             </a:xfrm>
             <a:prstGeom prst="ellipse">
@@ -11592,7 +11592,7 @@
           </p:nvSpPr>
           <p:spPr>
             <a:xfrm>
-              <a:off x="5070160" y="3505722"/>
+              <a:off x="5080481" y="3503554"/>
               <a:ext cx="77571" cy="77571"/>
             </a:xfrm>
             <a:prstGeom prst="ellipse">
@@ -11618,7 +11618,7 @@
           </p:nvSpPr>
           <p:spPr>
             <a:xfrm>
-              <a:off x="5240337" y="3461564"/>
+              <a:off x="5266360" y="3461564"/>
               <a:ext cx="77571" cy="77571"/>
             </a:xfrm>
             <a:prstGeom prst="ellipse">
@@ -11644,7 +11644,7 @@
           </p:nvSpPr>
           <p:spPr>
             <a:xfrm>
-              <a:off x="5024606" y="3852662"/>
+              <a:off x="5318036" y="3850369"/>
               <a:ext cx="77571" cy="77571"/>
             </a:xfrm>
             <a:prstGeom prst="ellipse">
@@ -11670,7 +11670,7 @@
           </p:nvSpPr>
           <p:spPr>
             <a:xfrm>
-              <a:off x="4948748" y="4602746"/>
+              <a:off x="4963486" y="4602701"/>
               <a:ext cx="77571" cy="77571"/>
             </a:xfrm>
             <a:prstGeom prst="ellipse">
@@ -11696,7 +11696,7 @@
           </p:nvSpPr>
           <p:spPr>
             <a:xfrm>
-              <a:off x="5351002" y="4200807"/>
+              <a:off x="4989468" y="4199764"/>
               <a:ext cx="77571" cy="77571"/>
             </a:xfrm>
             <a:prstGeom prst="ellipse">
@@ -11722,7 +11722,7 @@
           </p:nvSpPr>
           <p:spPr>
             <a:xfrm>
-              <a:off x="5815969" y="4492795"/>
+              <a:off x="5981027" y="4489604"/>
               <a:ext cx="77571" cy="77571"/>
             </a:xfrm>
             <a:prstGeom prst="ellipse">
@@ -11748,7 +11748,7 @@
           </p:nvSpPr>
           <p:spPr>
             <a:xfrm>
-              <a:off x="5770943" y="3948056"/>
+              <a:off x="5827428" y="3946432"/>
               <a:ext cx="77571" cy="77571"/>
             </a:xfrm>
             <a:prstGeom prst="ellipse">
@@ -11774,7 +11774,7 @@
           </p:nvSpPr>
           <p:spPr>
             <a:xfrm>
-              <a:off x="6085229" y="4395814"/>
+              <a:off x="5988522" y="4395850"/>
               <a:ext cx="77571" cy="77571"/>
             </a:xfrm>
             <a:prstGeom prst="ellipse">
@@ -11800,7 +11800,7 @@
           </p:nvSpPr>
           <p:spPr>
             <a:xfrm>
-              <a:off x="5801618" y="4652840"/>
+              <a:off x="5748302" y="4650494"/>
               <a:ext cx="77571" cy="77571"/>
             </a:xfrm>
             <a:prstGeom prst="ellipse">
@@ -11826,7 +11826,7 @@
           </p:nvSpPr>
           <p:spPr>
             <a:xfrm>
-              <a:off x="5829837" y="4277497"/>
+              <a:off x="5749530" y="4273375"/>
               <a:ext cx="77571" cy="77571"/>
             </a:xfrm>
             <a:prstGeom prst="ellipse">
@@ -11852,7 +11852,7 @@
           </p:nvSpPr>
           <p:spPr>
             <a:xfrm>
-              <a:off x="5988178" y="3922636"/>
+              <a:off x="5874791" y="3920237"/>
               <a:ext cx="77571" cy="77571"/>
             </a:xfrm>
             <a:prstGeom prst="ellipse">
@@ -11878,7 +11878,7 @@
           </p:nvSpPr>
           <p:spPr>
             <a:xfrm>
-              <a:off x="5839958" y="4735974"/>
+              <a:off x="5895618" y="4734456"/>
               <a:ext cx="77571" cy="77571"/>
             </a:xfrm>
             <a:prstGeom prst="ellipse">
@@ -11904,7 +11904,7 @@
           </p:nvSpPr>
           <p:spPr>
             <a:xfrm>
-              <a:off x="5858814" y="4617293"/>
+              <a:off x="6228646" y="4617980"/>
               <a:ext cx="77571" cy="77571"/>
             </a:xfrm>
             <a:prstGeom prst="ellipse">
@@ -11930,7 +11930,7 @@
           </p:nvSpPr>
           <p:spPr>
             <a:xfrm>
-              <a:off x="6111899" y="4475548"/>
+              <a:off x="6201566" y="4475603"/>
               <a:ext cx="77571" cy="77571"/>
             </a:xfrm>
             <a:prstGeom prst="ellipse">
@@ -11956,7 +11956,7 @@
           </p:nvSpPr>
           <p:spPr>
             <a:xfrm>
-              <a:off x="6231528" y="4731659"/>
+              <a:off x="6136690" y="4729586"/>
               <a:ext cx="77571" cy="77571"/>
             </a:xfrm>
             <a:prstGeom prst="ellipse">
@@ -11982,7 +11982,7 @@
           </p:nvSpPr>
           <p:spPr>
             <a:xfrm>
-              <a:off x="6179675" y="4607115"/>
+              <a:off x="6034694" y="4607771"/>
               <a:ext cx="77571" cy="77571"/>
             </a:xfrm>
             <a:prstGeom prst="ellipse">
@@ -12008,7 +12008,7 @@
           </p:nvSpPr>
           <p:spPr>
             <a:xfrm>
-              <a:off x="6078915" y="4728440"/>
+              <a:off x="6230488" y="4728742"/>
               <a:ext cx="77571" cy="77571"/>
             </a:xfrm>
             <a:prstGeom prst="ellipse">
@@ -12034,7 +12034,7 @@
           </p:nvSpPr>
           <p:spPr>
             <a:xfrm>
-              <a:off x="6199530" y="4433239"/>
+              <a:off x="5901580" y="4432409"/>
               <a:ext cx="77571" cy="77571"/>
             </a:xfrm>
             <a:prstGeom prst="ellipse">
@@ -12060,7 +12060,7 @@
           </p:nvSpPr>
           <p:spPr>
             <a:xfrm>
-              <a:off x="6105236" y="4378176"/>
+              <a:off x="6012129" y="4373477"/>
               <a:ext cx="77571" cy="77571"/>
             </a:xfrm>
             <a:prstGeom prst="ellipse">
@@ -12086,7 +12086,7 @@
           </p:nvSpPr>
           <p:spPr>
             <a:xfrm>
-              <a:off x="5854699" y="4110801"/>
+              <a:off x="5815045" y="4108221"/>
               <a:ext cx="77571" cy="77571"/>
             </a:xfrm>
             <a:prstGeom prst="ellipse">
@@ -12112,7 +12112,7 @@
           </p:nvSpPr>
           <p:spPr>
             <a:xfrm>
-              <a:off x="5804114" y="4154390"/>
+              <a:off x="5877348" y="4153087"/>
               <a:ext cx="77571" cy="77571"/>
             </a:xfrm>
             <a:prstGeom prst="ellipse">
@@ -12138,7 +12138,7 @@
           </p:nvSpPr>
           <p:spPr>
             <a:xfrm>
-              <a:off x="6214939" y="4490573"/>
+              <a:off x="6181470" y="4490738"/>
               <a:ext cx="77571" cy="77571"/>
             </a:xfrm>
             <a:prstGeom prst="ellipse">
@@ -12164,7 +12164,7 @@
           </p:nvSpPr>
           <p:spPr>
             <a:xfrm>
-              <a:off x="5788516" y="4794129"/>
+              <a:off x="5781364" y="4794129"/>
               <a:ext cx="77571" cy="77571"/>
             </a:xfrm>
             <a:prstGeom prst="ellipse">
@@ -12190,7 +12190,7 @@
           </p:nvSpPr>
           <p:spPr>
             <a:xfrm>
-              <a:off x="6792271" y="4480430"/>
+              <a:off x="6851737" y="4481711"/>
               <a:ext cx="77571" cy="77571"/>
             </a:xfrm>
             <a:prstGeom prst="ellipse">
@@ -12216,7 +12216,7 @@
           </p:nvSpPr>
           <p:spPr>
             <a:xfrm>
-              <a:off x="6840093" y="4552463"/>
+              <a:off x="6888016" y="4549860"/>
               <a:ext cx="77571" cy="77571"/>
             </a:xfrm>
             <a:prstGeom prst="ellipse">
@@ -12242,7 +12242,7 @@
           </p:nvSpPr>
           <p:spPr>
             <a:xfrm>
-              <a:off x="6695439" y="4526010"/>
+              <a:off x="7088008" y="4523955"/>
               <a:ext cx="77571" cy="77571"/>
             </a:xfrm>
             <a:prstGeom prst="ellipse">
@@ -12268,7 +12268,7 @@
           </p:nvSpPr>
           <p:spPr>
             <a:xfrm>
-              <a:off x="6635458" y="4584073"/>
+              <a:off x="7026914" y="4579602"/>
               <a:ext cx="77571" cy="77571"/>
             </a:xfrm>
             <a:prstGeom prst="ellipse">
@@ -12294,7 +12294,7 @@
           </p:nvSpPr>
           <p:spPr>
             <a:xfrm>
-              <a:off x="6982906" y="3667095"/>
+              <a:off x="7088362" y="3665141"/>
               <a:ext cx="77571" cy="77571"/>
             </a:xfrm>
             <a:prstGeom prst="ellipse">
@@ -12320,7 +12320,7 @@
           </p:nvSpPr>
           <p:spPr>
             <a:xfrm>
-              <a:off x="6645417" y="3717130"/>
+              <a:off x="6888260" y="3714702"/>
               <a:ext cx="77571" cy="77571"/>
             </a:xfrm>
             <a:prstGeom prst="ellipse">
@@ -12346,7 +12346,7 @@
           </p:nvSpPr>
           <p:spPr>
             <a:xfrm>
-              <a:off x="7097444" y="4299055"/>
+              <a:off x="6665311" y="4296034"/>
               <a:ext cx="77571" cy="77571"/>
             </a:xfrm>
             <a:prstGeom prst="ellipse">
@@ -12372,7 +12372,7 @@
           </p:nvSpPr>
           <p:spPr>
             <a:xfrm>
-              <a:off x="6925047" y="4470810"/>
+              <a:off x="6836757" y="4470236"/>
               <a:ext cx="77571" cy="77571"/>
             </a:xfrm>
             <a:prstGeom prst="ellipse">
@@ -12398,7 +12398,7 @@
           </p:nvSpPr>
           <p:spPr>
             <a:xfrm>
-              <a:off x="6995317" y="4597350"/>
+              <a:off x="6852870" y="4594531"/>
               <a:ext cx="77571" cy="77571"/>
             </a:xfrm>
             <a:prstGeom prst="ellipse">
@@ -12424,7 +12424,7 @@
           </p:nvSpPr>
           <p:spPr>
             <a:xfrm>
-              <a:off x="6968269" y="4262357"/>
+              <a:off x="6633093" y="4257574"/>
               <a:ext cx="77571" cy="77571"/>
             </a:xfrm>
             <a:prstGeom prst="ellipse">
@@ -12450,7 +12450,7 @@
           </p:nvSpPr>
           <p:spPr>
             <a:xfrm>
-              <a:off x="6948387" y="4032338"/>
+              <a:off x="6878509" y="4032852"/>
               <a:ext cx="77571" cy="77571"/>
             </a:xfrm>
             <a:prstGeom prst="ellipse">
@@ -12476,7 +12476,7 @@
           </p:nvSpPr>
           <p:spPr>
             <a:xfrm>
-              <a:off x="6693716" y="4655101"/>
+              <a:off x="6809908" y="4655674"/>
               <a:ext cx="77571" cy="77571"/>
             </a:xfrm>
             <a:prstGeom prst="ellipse">
@@ -12502,7 +12502,7 @@
           </p:nvSpPr>
           <p:spPr>
             <a:xfrm>
-              <a:off x="6927635" y="3864017"/>
+              <a:off x="6925829" y="3860746"/>
               <a:ext cx="77571" cy="77571"/>
             </a:xfrm>
             <a:prstGeom prst="ellipse">
@@ -12528,7 +12528,7 @@
           </p:nvSpPr>
           <p:spPr>
             <a:xfrm>
-              <a:off x="6632739" y="4238898"/>
+              <a:off x="6844711" y="4237370"/>
               <a:ext cx="77571" cy="77571"/>
             </a:xfrm>
             <a:prstGeom prst="ellipse">
@@ -12554,7 +12554,7 @@
           </p:nvSpPr>
           <p:spPr>
             <a:xfrm>
-              <a:off x="6966247" y="4303250"/>
+              <a:off x="6850548" y="4301835"/>
               <a:ext cx="77571" cy="77571"/>
             </a:xfrm>
             <a:prstGeom prst="ellipse">
@@ -12580,7 +12580,7 @@
           </p:nvSpPr>
           <p:spPr>
             <a:xfrm>
-              <a:off x="6821034" y="4589511"/>
+              <a:off x="7054147" y="4588015"/>
               <a:ext cx="77571" cy="77571"/>
             </a:xfrm>
             <a:prstGeom prst="ellipse">
@@ -12606,7 +12606,7 @@
           </p:nvSpPr>
           <p:spPr>
             <a:xfrm>
-              <a:off x="6762381" y="4033107"/>
+              <a:off x="6680965" y="4031885"/>
               <a:ext cx="77571" cy="77571"/>
             </a:xfrm>
             <a:prstGeom prst="ellipse">
@@ -12632,7 +12632,7 @@
           </p:nvSpPr>
           <p:spPr>
             <a:xfrm>
-              <a:off x="6762563" y="4288713"/>
+              <a:off x="6697934" y="4284619"/>
               <a:ext cx="77571" cy="77571"/>
             </a:xfrm>
             <a:prstGeom prst="ellipse">
@@ -12658,7 +12658,7 @@
           </p:nvSpPr>
           <p:spPr>
             <a:xfrm>
-              <a:off x="6798514" y="4006214"/>
+              <a:off x="6919446" y="4004358"/>
               <a:ext cx="77571" cy="77571"/>
             </a:xfrm>
             <a:prstGeom prst="ellipse">
@@ -12684,7 +12684,7 @@
           </p:nvSpPr>
           <p:spPr>
             <a:xfrm>
-              <a:off x="6916361" y="4253085"/>
+              <a:off x="6927582" y="4253181"/>
               <a:ext cx="77571" cy="77571"/>
             </a:xfrm>
             <a:prstGeom prst="ellipse">
@@ -12710,7 +12710,7 @@
           </p:nvSpPr>
           <p:spPr>
             <a:xfrm>
-              <a:off x="7491037" y="4423050"/>
+              <a:off x="7741821" y="4422337"/>
               <a:ext cx="77571" cy="77571"/>
             </a:xfrm>
             <a:prstGeom prst="ellipse">
@@ -12736,7 +12736,7 @@
           </p:nvSpPr>
           <p:spPr>
             <a:xfrm>
-              <a:off x="7913359" y="4523834"/>
+              <a:off x="7779733" y="4521055"/>
               <a:ext cx="77571" cy="77571"/>
             </a:xfrm>
             <a:prstGeom prst="ellipse">
@@ -12762,7 +12762,7 @@
           </p:nvSpPr>
           <p:spPr>
             <a:xfrm>
-              <a:off x="7810845" y="4269433"/>
+              <a:off x="7700659" y="4267735"/>
               <a:ext cx="77571" cy="77571"/>
             </a:xfrm>
             <a:prstGeom prst="ellipse">
@@ -12788,7 +12788,7 @@
           </p:nvSpPr>
           <p:spPr>
             <a:xfrm>
-              <a:off x="7594132" y="4043194"/>
+              <a:off x="7560405" y="4040737"/>
               <a:ext cx="77571" cy="77571"/>
             </a:xfrm>
             <a:prstGeom prst="ellipse">
@@ -12814,7 +12814,7 @@
           </p:nvSpPr>
           <p:spPr>
             <a:xfrm>
-              <a:off x="7725498" y="4242721"/>
+              <a:off x="7867700" y="4241623"/>
               <a:ext cx="77571" cy="77571"/>
             </a:xfrm>
             <a:prstGeom prst="ellipse">
@@ -12840,7 +12840,7 @@
           </p:nvSpPr>
           <p:spPr>
             <a:xfrm>
-              <a:off x="7559944" y="4285396"/>
+              <a:off x="7778244" y="4285893"/>
               <a:ext cx="77571" cy="77571"/>
             </a:xfrm>
             <a:prstGeom prst="ellipse">
@@ -12866,7 +12866,7 @@
           </p:nvSpPr>
           <p:spPr>
             <a:xfrm>
-              <a:off x="7529319" y="4440951"/>
+              <a:off x="7911075" y="4438386"/>
               <a:ext cx="77571" cy="77571"/>
             </a:xfrm>
             <a:prstGeom prst="ellipse">
@@ -12892,7 +12892,7 @@
           </p:nvSpPr>
           <p:spPr>
             <a:xfrm>
-              <a:off x="7517453" y="4331008"/>
+              <a:off x="7828395" y="4326699"/>
               <a:ext cx="77571" cy="77571"/>
             </a:xfrm>
             <a:prstGeom prst="ellipse">
@@ -12918,7 +12918,7 @@
           </p:nvSpPr>
           <p:spPr>
             <a:xfrm>
-              <a:off x="7567861" y="4440421"/>
+              <a:off x="7843182" y="4439146"/>
               <a:ext cx="77571" cy="77571"/>
             </a:xfrm>
             <a:prstGeom prst="ellipse">
@@ -12944,7 +12944,7 @@
           </p:nvSpPr>
           <p:spPr>
             <a:xfrm>
-              <a:off x="7895316" y="4348877"/>
+              <a:off x="7937673" y="4350116"/>
               <a:ext cx="77571" cy="77571"/>
             </a:xfrm>
             <a:prstGeom prst="ellipse">
@@ -12970,7 +12970,7 @@
           </p:nvSpPr>
           <p:spPr>
             <a:xfrm>
-              <a:off x="7566470" y="4087117"/>
+              <a:off x="7847705" y="4085247"/>
               <a:ext cx="77571" cy="77571"/>
             </a:xfrm>
             <a:prstGeom prst="ellipse">
@@ -12996,7 +12996,7 @@
           </p:nvSpPr>
           <p:spPr>
             <a:xfrm>
-              <a:off x="7906019" y="3779141"/>
+              <a:off x="7584832" y="3775096"/>
               <a:ext cx="77571" cy="77571"/>
             </a:xfrm>
             <a:prstGeom prst="ellipse">
@@ -13022,7 +13022,7 @@
           </p:nvSpPr>
           <p:spPr>
             <a:xfrm>
-              <a:off x="7479830" y="4455051"/>
+              <a:off x="7530593" y="4453451"/>
               <a:ext cx="77571" cy="77571"/>
             </a:xfrm>
             <a:prstGeom prst="ellipse">
@@ -13048,7 +13048,7 @@
           </p:nvSpPr>
           <p:spPr>
             <a:xfrm>
-              <a:off x="7715745" y="4624107"/>
+              <a:off x="7859495" y="4621874"/>
               <a:ext cx="77571" cy="77571"/>
             </a:xfrm>
             <a:prstGeom prst="ellipse">
@@ -13074,7 +13074,7 @@
           </p:nvSpPr>
           <p:spPr>
             <a:xfrm>
-              <a:off x="7605976" y="4589000"/>
+              <a:off x="7852773" y="4584072"/>
               <a:ext cx="77571" cy="77571"/>
             </a:xfrm>
             <a:prstGeom prst="ellipse">
@@ -13100,7 +13100,7 @@
           </p:nvSpPr>
           <p:spPr>
             <a:xfrm>
-              <a:off x="7899419" y="4323504"/>
+              <a:off x="7599093" y="4320385"/>
               <a:ext cx="77571" cy="77571"/>
             </a:xfrm>
             <a:prstGeom prst="ellipse">
@@ -13126,7 +13126,7 @@
           </p:nvSpPr>
           <p:spPr>
             <a:xfrm>
-              <a:off x="7611593" y="4517198"/>
+              <a:off x="7667542" y="4517938"/>
               <a:ext cx="77571" cy="77571"/>
             </a:xfrm>
             <a:prstGeom prst="ellipse">
@@ -13152,7 +13152,7 @@
           </p:nvSpPr>
           <p:spPr>
             <a:xfrm>
-              <a:off x="7940029" y="4403339"/>
+              <a:off x="7796306" y="4399477"/>
               <a:ext cx="77571" cy="77571"/>
             </a:xfrm>
             <a:prstGeom prst="ellipse">
@@ -13178,7 +13178,7 @@
           </p:nvSpPr>
           <p:spPr>
             <a:xfrm>
-              <a:off x="7744873" y="3864128"/>
+              <a:off x="7940029" y="3862159"/>
               <a:ext cx="77571" cy="77571"/>
             </a:xfrm>
             <a:prstGeom prst="ellipse">
@@ -13204,7 +13204,7 @@
           </p:nvSpPr>
           <p:spPr>
             <a:xfrm>
-              <a:off x="7751422" y="4219431"/>
+              <a:off x="7672751" y="4216075"/>
               <a:ext cx="77571" cy="77571"/>
             </a:xfrm>
             <a:prstGeom prst="ellipse">
@@ -13230,7 +13230,7 @@
           </p:nvSpPr>
           <p:spPr>
             <a:xfrm>
-              <a:off x="7635099" y="4312199"/>
+              <a:off x="7565473" y="4310922"/>
               <a:ext cx="77571" cy="77571"/>
             </a:xfrm>
             <a:prstGeom prst="ellipse">
@@ -13256,7 +13256,7 @@
           </p:nvSpPr>
           <p:spPr>
             <a:xfrm>
-              <a:off x="7887588" y="4254930"/>
+              <a:off x="7932019" y="4252060"/>
               <a:ext cx="77571" cy="77571"/>
             </a:xfrm>
             <a:prstGeom prst="ellipse">
@@ -13282,7 +13282,7 @@
           </p:nvSpPr>
           <p:spPr>
             <a:xfrm>
-              <a:off x="7516018" y="4584249"/>
+              <a:off x="7691146" y="4582104"/>
               <a:ext cx="77571" cy="77571"/>
             </a:xfrm>
             <a:prstGeom prst="ellipse">
@@ -13308,7 +13308,7 @@
           </p:nvSpPr>
           <p:spPr>
             <a:xfrm>
-              <a:off x="7558835" y="4208924"/>
+              <a:off x="7729500" y="4206145"/>
               <a:ext cx="77571" cy="77571"/>
             </a:xfrm>
             <a:prstGeom prst="ellipse">
@@ -13334,42 +13334,42 @@
           </p:nvSpPr>
           <p:spPr>
             <a:xfrm>
-              <a:off x="5176363" y="4105908"/>
-              <a:ext cx="2574234" cy="393300"/>
+              <a:off x="5175442" y="4103414"/>
+              <a:ext cx="2573474" cy="393968"/>
             </a:xfrm>
             <a:custGeom>
               <a:avLst/>
               <a:pathLst>
-                <a:path w="2574234" h="393300">
+                <a:path w="2573474" h="393968">
                   <a:moveTo>
                     <a:pt x="0" y="0"/>
                   </a:moveTo>
                   <a:lnTo>
-                    <a:pt x="1360021" y="114753"/>
+                    <a:pt x="1359620" y="114948"/>
                   </a:lnTo>
                   <a:lnTo>
-                    <a:pt x="1716156" y="131449"/>
+                    <a:pt x="1715649" y="131672"/>
                   </a:lnTo>
                   <a:lnTo>
-                    <a:pt x="2218100" y="143694"/>
+                    <a:pt x="2217445" y="143938"/>
                   </a:lnTo>
                   <a:lnTo>
-                    <a:pt x="2574234" y="146101"/>
+                    <a:pt x="2573474" y="146350"/>
                   </a:lnTo>
                   <a:lnTo>
-                    <a:pt x="2574234" y="393300"/>
+                    <a:pt x="2573474" y="393968"/>
                   </a:lnTo>
                   <a:lnTo>
-                    <a:pt x="2218100" y="362584"/>
+                    <a:pt x="2217445" y="363201"/>
                   </a:lnTo>
                   <a:lnTo>
-                    <a:pt x="1716156" y="328146"/>
+                    <a:pt x="1715649" y="328704"/>
                   </a:lnTo>
                   <a:lnTo>
-                    <a:pt x="1360021" y="311719"/>
+                    <a:pt x="1359620" y="312249"/>
                   </a:lnTo>
                   <a:lnTo>
-                    <a:pt x="0" y="299982"/>
+                    <a:pt x="0" y="300492"/>
                   </a:lnTo>
                   <a:close/>
                 </a:path>
@@ -13395,27 +13395,27 @@
           </p:nvSpPr>
           <p:spPr>
             <a:xfrm>
-              <a:off x="5176363" y="4105908"/>
-              <a:ext cx="2574234" cy="146101"/>
+              <a:off x="5175442" y="4103414"/>
+              <a:ext cx="2573474" cy="146350"/>
             </a:xfrm>
             <a:custGeom>
               <a:avLst/>
               <a:pathLst>
-                <a:path w="2574234" h="146101">
+                <a:path w="2573474" h="146350">
                   <a:moveTo>
                     <a:pt x="0" y="0"/>
                   </a:moveTo>
                   <a:lnTo>
-                    <a:pt x="1360021" y="114753"/>
+                    <a:pt x="1359620" y="114948"/>
                   </a:lnTo>
                   <a:lnTo>
-                    <a:pt x="1716156" y="131449"/>
+                    <a:pt x="1715649" y="131672"/>
                   </a:lnTo>
                   <a:lnTo>
-                    <a:pt x="2218100" y="143694"/>
+                    <a:pt x="2217445" y="143938"/>
                   </a:lnTo>
                   <a:lnTo>
-                    <a:pt x="2574234" y="146101"/>
+                    <a:pt x="2573474" y="146350"/>
                   </a:lnTo>
                 </a:path>
               </a:pathLst>
@@ -13435,24 +13435,24 @@
           </p:nvSpPr>
           <p:spPr>
             <a:xfrm>
-              <a:off x="5176363" y="4405890"/>
-              <a:ext cx="2574234" cy="93318"/>
+              <a:off x="5175442" y="4403906"/>
+              <a:ext cx="2573474" cy="93476"/>
             </a:xfrm>
             <a:custGeom>
               <a:avLst/>
               <a:pathLst>
-                <a:path w="2574234" h="93318">
+                <a:path w="2573474" h="93476">
                   <a:moveTo>
-                    <a:pt x="2574234" y="93318"/>
+                    <a:pt x="2573474" y="93476"/>
                   </a:moveTo>
                   <a:lnTo>
-                    <a:pt x="2218100" y="62602"/>
+                    <a:pt x="2217445" y="62709"/>
                   </a:lnTo>
                   <a:lnTo>
-                    <a:pt x="1716156" y="28164"/>
+                    <a:pt x="1715649" y="28212"/>
                   </a:lnTo>
                   <a:lnTo>
-                    <a:pt x="1360021" y="11737"/>
+                    <a:pt x="1359620" y="11757"/>
                   </a:lnTo>
                   <a:lnTo>
                     <a:pt x="0" y="0"/>
@@ -13475,27 +13475,27 @@
           </p:nvSpPr>
           <p:spPr>
             <a:xfrm>
-              <a:off x="5176363" y="4255899"/>
-              <a:ext cx="2574234" cy="119710"/>
+              <a:off x="5175442" y="4253660"/>
+              <a:ext cx="2573474" cy="119913"/>
             </a:xfrm>
             <a:custGeom>
               <a:avLst/>
               <a:pathLst>
-                <a:path w="2574234" h="119710">
+                <a:path w="2573474" h="119913">
                   <a:moveTo>
                     <a:pt x="0" y="0"/>
                   </a:moveTo>
                   <a:lnTo>
-                    <a:pt x="1360021" y="63245"/>
+                    <a:pt x="1359620" y="63352"/>
                   </a:lnTo>
                   <a:lnTo>
-                    <a:pt x="1716156" y="79806"/>
+                    <a:pt x="1715649" y="79942"/>
                   </a:lnTo>
                   <a:lnTo>
-                    <a:pt x="2218100" y="103148"/>
+                    <a:pt x="2217445" y="103324"/>
                   </a:lnTo>
                   <a:lnTo>
-                    <a:pt x="2574234" y="119710"/>
+                    <a:pt x="2573474" y="119913"/>
                   </a:lnTo>
                 </a:path>
               </a:pathLst>
@@ -13524,7 +13524,7 @@
           </p:nvSpPr>
           <p:spPr>
             <a:xfrm>
-              <a:off x="7270904" y="3511959"/>
+              <a:off x="7269223" y="3508665"/>
               <a:ext cx="479694" cy="82021"/>
             </a:xfrm>
             <a:prstGeom prst="rect">
@@ -13631,7 +13631,7 @@
           </p:nvSpPr>
           <p:spPr>
             <a:xfrm>
-              <a:off x="4800012" y="4705671"/>
+              <a:off x="4800012" y="4704197"/>
               <a:ext cx="37957" cy="0"/>
             </a:xfrm>
             <a:custGeom>
@@ -13671,7 +13671,7 @@
           </p:nvSpPr>
           <p:spPr>
             <a:xfrm>
-              <a:off x="4800012" y="4433881"/>
+              <a:off x="4800012" y="4431945"/>
               <a:ext cx="37957" cy="0"/>
             </a:xfrm>
             <a:custGeom>
@@ -13711,7 +13711,7 @@
           </p:nvSpPr>
           <p:spPr>
             <a:xfrm>
-              <a:off x="4800012" y="4162091"/>
+              <a:off x="4800012" y="4159693"/>
               <a:ext cx="37957" cy="0"/>
             </a:xfrm>
             <a:custGeom>
@@ -13751,7 +13751,7 @@
           </p:nvSpPr>
           <p:spPr>
             <a:xfrm>
-              <a:off x="4800012" y="3890301"/>
+              <a:off x="4800012" y="3887440"/>
               <a:ext cx="37957" cy="0"/>
             </a:xfrm>
             <a:custGeom>
@@ -13791,7 +13791,7 @@
           </p:nvSpPr>
           <p:spPr>
             <a:xfrm>
-              <a:off x="4800012" y="3618511"/>
+              <a:off x="4800012" y="3615188"/>
               <a:ext cx="37957" cy="0"/>
             </a:xfrm>
             <a:custGeom>
@@ -13831,7 +13831,7 @@
           </p:nvSpPr>
           <p:spPr>
             <a:xfrm>
-              <a:off x="4800012" y="3346721"/>
+              <a:off x="4800012" y="3342936"/>
               <a:ext cx="37957" cy="0"/>
             </a:xfrm>
             <a:custGeom>
@@ -13911,7 +13911,7 @@
           </p:nvSpPr>
           <p:spPr>
             <a:xfrm>
-              <a:off x="5176363" y="4899543"/>
+              <a:off x="5175442" y="4899543"/>
               <a:ext cx="0" cy="37957"/>
             </a:xfrm>
             <a:custGeom>
@@ -13951,7 +13951,7 @@
           </p:nvSpPr>
           <p:spPr>
             <a:xfrm>
-              <a:off x="6034442" y="4899543"/>
+              <a:off x="6033267" y="4899543"/>
               <a:ext cx="0" cy="37957"/>
             </a:xfrm>
             <a:custGeom>
@@ -13991,7 +13991,7 @@
           </p:nvSpPr>
           <p:spPr>
             <a:xfrm>
-              <a:off x="6892520" y="4899543"/>
+              <a:off x="6891092" y="4899543"/>
               <a:ext cx="0" cy="37957"/>
             </a:xfrm>
             <a:custGeom>
@@ -14031,7 +14031,7 @@
           </p:nvSpPr>
           <p:spPr>
             <a:xfrm>
-              <a:off x="7750598" y="4899543"/>
+              <a:off x="7748917" y="4899543"/>
               <a:ext cx="0" cy="37957"/>
             </a:xfrm>
             <a:custGeom>
@@ -14071,7 +14071,7 @@
           </p:nvSpPr>
           <p:spPr>
             <a:xfrm>
-              <a:off x="5137501" y="4967867"/>
+              <a:off x="5136580" y="4967867"/>
               <a:ext cx="77724" cy="100218"/>
             </a:xfrm>
             <a:prstGeom prst="rect">
@@ -14117,7 +14117,7 @@
           </p:nvSpPr>
           <p:spPr>
             <a:xfrm>
-              <a:off x="5995580" y="4967867"/>
+              <a:off x="5994405" y="4967867"/>
               <a:ext cx="77724" cy="100218"/>
             </a:xfrm>
             <a:prstGeom prst="rect">
@@ -14163,7 +14163,7 @@
           </p:nvSpPr>
           <p:spPr>
             <a:xfrm>
-              <a:off x="6853658" y="4967867"/>
+              <a:off x="6852230" y="4967867"/>
               <a:ext cx="77724" cy="100218"/>
             </a:xfrm>
             <a:prstGeom prst="rect">
@@ -14209,7 +14209,7 @@
           </p:nvSpPr>
           <p:spPr>
             <a:xfrm>
-              <a:off x="7711736" y="4967867"/>
+              <a:off x="7710055" y="4967867"/>
               <a:ext cx="77724" cy="100218"/>
             </a:xfrm>
             <a:prstGeom prst="rect">
@@ -14327,7 +14327,7 @@
           </p:nvSpPr>
           <p:spPr>
             <a:xfrm>
-              <a:off x="1714171" y="6432245"/>
+              <a:off x="1581430" y="6435915"/>
               <a:ext cx="77571" cy="77571"/>
             </a:xfrm>
             <a:prstGeom prst="ellipse">
@@ -14353,7 +14353,7 @@
           </p:nvSpPr>
           <p:spPr>
             <a:xfrm>
-              <a:off x="1535132" y="6294230"/>
+              <a:off x="1938782" y="6296056"/>
               <a:ext cx="77571" cy="77571"/>
             </a:xfrm>
             <a:prstGeom prst="ellipse">
@@ -14379,7 +14379,7 @@
           </p:nvSpPr>
           <p:spPr>
             <a:xfrm>
-              <a:off x="1550741" y="6378307"/>
+              <a:off x="1724765" y="6380478"/>
               <a:ext cx="77571" cy="77571"/>
             </a:xfrm>
             <a:prstGeom prst="ellipse">
@@ -14405,7 +14405,7 @@
           </p:nvSpPr>
           <p:spPr>
             <a:xfrm>
-              <a:off x="1566910" y="6573145"/>
+              <a:off x="1834607" y="6577579"/>
               <a:ext cx="77571" cy="77571"/>
             </a:xfrm>
             <a:prstGeom prst="ellipse">
@@ -14431,7 +14431,7 @@
           </p:nvSpPr>
           <p:spPr>
             <a:xfrm>
-              <a:off x="1519161" y="6741025"/>
+              <a:off x="1519161" y="6743743"/>
               <a:ext cx="77571" cy="77571"/>
             </a:xfrm>
             <a:prstGeom prst="ellipse">
@@ -14457,7 +14457,7 @@
           </p:nvSpPr>
           <p:spPr>
             <a:xfrm>
-              <a:off x="1824393" y="6404004"/>
+              <a:off x="1537508" y="6407535"/>
               <a:ext cx="77571" cy="77571"/>
             </a:xfrm>
             <a:prstGeom prst="ellipse">
@@ -14483,7 +14483,7 @@
           </p:nvSpPr>
           <p:spPr>
             <a:xfrm>
-              <a:off x="1778136" y="6537637"/>
+              <a:off x="1984577" y="6540478"/>
               <a:ext cx="77571" cy="77571"/>
             </a:xfrm>
             <a:prstGeom prst="ellipse">
@@ -14509,7 +14509,7 @@
           </p:nvSpPr>
           <p:spPr>
             <a:xfrm>
-              <a:off x="1791400" y="6578126"/>
+              <a:off x="1548090" y="6579573"/>
               <a:ext cx="77571" cy="77571"/>
             </a:xfrm>
             <a:prstGeom prst="ellipse">
@@ -14535,7 +14535,7 @@
           </p:nvSpPr>
           <p:spPr>
             <a:xfrm>
-              <a:off x="1724161" y="6680030"/>
+              <a:off x="1536429" y="6683829"/>
               <a:ext cx="77571" cy="77571"/>
             </a:xfrm>
             <a:prstGeom prst="ellipse">
@@ -14561,7 +14561,7 @@
           </p:nvSpPr>
           <p:spPr>
             <a:xfrm>
-              <a:off x="1572285" y="6359934"/>
+              <a:off x="1536742" y="6361293"/>
               <a:ext cx="77571" cy="77571"/>
             </a:xfrm>
             <a:prstGeom prst="ellipse">
@@ -14587,7 +14587,7 @@
           </p:nvSpPr>
           <p:spPr>
             <a:xfrm>
-              <a:off x="2622362" y="6552360"/>
+              <a:off x="2369343" y="6555582"/>
               <a:ext cx="77571" cy="77571"/>
             </a:xfrm>
             <a:prstGeom prst="ellipse">
@@ -14613,7 +14613,7 @@
           </p:nvSpPr>
           <p:spPr>
             <a:xfrm>
-              <a:off x="2440282" y="5784900"/>
+              <a:off x="2742197" y="5786070"/>
               <a:ext cx="77571" cy="77571"/>
             </a:xfrm>
             <a:prstGeom prst="ellipse">
@@ -14639,7 +14639,7 @@
           </p:nvSpPr>
           <p:spPr>
             <a:xfrm>
-              <a:off x="2698548" y="5943614"/>
+              <a:off x="2591662" y="5944993"/>
               <a:ext cx="77571" cy="77571"/>
             </a:xfrm>
             <a:prstGeom prst="ellipse">
@@ -14665,7 +14665,7 @@
           </p:nvSpPr>
           <p:spPr>
             <a:xfrm>
-              <a:off x="2317308" y="6196243"/>
+              <a:off x="2786479" y="6198093"/>
               <a:ext cx="77571" cy="77571"/>
             </a:xfrm>
             <a:prstGeom prst="ellipse">
@@ -14691,7 +14691,7 @@
           </p:nvSpPr>
           <p:spPr>
             <a:xfrm>
-              <a:off x="2456669" y="6339425"/>
+              <a:off x="2570543" y="6344080"/>
               <a:ext cx="77571" cy="77571"/>
             </a:xfrm>
             <a:prstGeom prst="ellipse">
@@ -14717,7 +14717,7 @@
           </p:nvSpPr>
           <p:spPr>
             <a:xfrm>
-              <a:off x="2397940" y="6886426"/>
+              <a:off x="2367729" y="6886426"/>
               <a:ext cx="77571" cy="77571"/>
             </a:xfrm>
             <a:prstGeom prst="ellipse">
@@ -14743,7 +14743,7 @@
           </p:nvSpPr>
           <p:spPr>
             <a:xfrm>
-              <a:off x="2449788" y="6595900"/>
+              <a:off x="2610614" y="6600624"/>
               <a:ext cx="77571" cy="77571"/>
             </a:xfrm>
             <a:prstGeom prst="ellipse">
@@ -14769,7 +14769,7 @@
           </p:nvSpPr>
           <p:spPr>
             <a:xfrm>
-              <a:off x="2364581" y="6148066"/>
+              <a:off x="2390014" y="6146893"/>
               <a:ext cx="77571" cy="77571"/>
             </a:xfrm>
             <a:prstGeom prst="ellipse">
@@ -14795,7 +14795,7 @@
           </p:nvSpPr>
           <p:spPr>
             <a:xfrm>
-              <a:off x="2362199" y="5642920"/>
+              <a:off x="2801843" y="5643160"/>
               <a:ext cx="77571" cy="77571"/>
             </a:xfrm>
             <a:prstGeom prst="ellipse">
@@ -14821,7 +14821,7 @@
           </p:nvSpPr>
           <p:spPr>
             <a:xfrm>
-              <a:off x="2395441" y="5553861"/>
+              <a:off x="2623928" y="5553861"/>
               <a:ext cx="77571" cy="77571"/>
             </a:xfrm>
             <a:prstGeom prst="ellipse">
@@ -14847,7 +14847,7 @@
           </p:nvSpPr>
           <p:spPr>
             <a:xfrm>
-              <a:off x="2487244" y="6430552"/>
+              <a:off x="2480805" y="6431973"/>
               <a:ext cx="77571" cy="77571"/>
             </a:xfrm>
             <a:prstGeom prst="ellipse">
@@ -14873,7 +14873,7 @@
           </p:nvSpPr>
           <p:spPr>
             <a:xfrm>
-              <a:off x="2438106" y="6126571"/>
+              <a:off x="2738355" y="6129315"/>
               <a:ext cx="77571" cy="77571"/>
             </a:xfrm>
             <a:prstGeom prst="ellipse">
@@ -14899,7 +14899,7 @@
           </p:nvSpPr>
           <p:spPr>
             <a:xfrm>
-              <a:off x="2383930" y="5915408"/>
+              <a:off x="2804731" y="5915404"/>
               <a:ext cx="77571" cy="77571"/>
             </a:xfrm>
             <a:prstGeom prst="ellipse">
@@ -14925,7 +14925,7 @@
           </p:nvSpPr>
           <p:spPr>
             <a:xfrm>
-              <a:off x="2735779" y="6059811"/>
+              <a:off x="2716906" y="6058678"/>
               <a:ext cx="77571" cy="77571"/>
             </a:xfrm>
             <a:prstGeom prst="ellipse">
@@ -14951,7 +14951,7 @@
           </p:nvSpPr>
           <p:spPr>
             <a:xfrm>
-              <a:off x="2562257" y="6590773"/>
+              <a:off x="2811726" y="6594498"/>
               <a:ext cx="77571" cy="77571"/>
             </a:xfrm>
             <a:prstGeom prst="ellipse">
@@ -14977,7 +14977,7 @@
           </p:nvSpPr>
           <p:spPr>
             <a:xfrm>
-              <a:off x="2463105" y="6531985"/>
+              <a:off x="2358797" y="6534692"/>
               <a:ext cx="77571" cy="77571"/>
             </a:xfrm>
             <a:prstGeom prst="ellipse">
@@ -15003,7 +15003,7 @@
           </p:nvSpPr>
           <p:spPr>
             <a:xfrm>
-              <a:off x="2709008" y="5964785"/>
+              <a:off x="2358363" y="5965403"/>
               <a:ext cx="77571" cy="77571"/>
             </a:xfrm>
             <a:prstGeom prst="ellipse">
@@ -15029,7 +15029,7 @@
           </p:nvSpPr>
           <p:spPr>
             <a:xfrm>
-              <a:off x="2356419" y="6012058"/>
+              <a:off x="2410007" y="6013174"/>
               <a:ext cx="77571" cy="77571"/>
             </a:xfrm>
             <a:prstGeom prst="ellipse">
@@ -15055,7 +15055,7 @@
           </p:nvSpPr>
           <p:spPr>
             <a:xfrm>
-              <a:off x="3213076" y="6635787"/>
+              <a:off x="3452736" y="6639830"/>
               <a:ext cx="77571" cy="77571"/>
             </a:xfrm>
             <a:prstGeom prst="ellipse">
@@ -15081,7 +15081,7 @@
           </p:nvSpPr>
           <p:spPr>
             <a:xfrm>
-              <a:off x="3508026" y="6314536"/>
+              <a:off x="3507253" y="6317012"/>
               <a:ext cx="77571" cy="77571"/>
             </a:xfrm>
             <a:prstGeom prst="ellipse">
@@ -15107,7 +15107,7 @@
           </p:nvSpPr>
           <p:spPr>
             <a:xfrm>
-              <a:off x="3466292" y="6439163"/>
+              <a:off x="3241200" y="6440547"/>
               <a:ext cx="77571" cy="77571"/>
             </a:xfrm>
             <a:prstGeom prst="ellipse">
@@ -15133,7 +15133,7 @@
           </p:nvSpPr>
           <p:spPr>
             <a:xfrm>
-              <a:off x="3525806" y="6712242"/>
+              <a:off x="3506196" y="6714844"/>
               <a:ext cx="77571" cy="77571"/>
             </a:xfrm>
             <a:prstGeom prst="ellipse">
@@ -15159,7 +15159,7 @@
           </p:nvSpPr>
           <p:spPr>
             <a:xfrm>
-              <a:off x="3544086" y="6290116"/>
+              <a:off x="3308764" y="6291448"/>
               <a:ext cx="77571" cy="77571"/>
             </a:xfrm>
             <a:prstGeom prst="ellipse">
@@ -15185,7 +15185,7 @@
           </p:nvSpPr>
           <p:spPr>
             <a:xfrm>
-              <a:off x="3646662" y="6594444"/>
+              <a:off x="3311132" y="6593590"/>
               <a:ext cx="77571" cy="77571"/>
             </a:xfrm>
             <a:prstGeom prst="ellipse">
@@ -15211,7 +15211,7 @@
           </p:nvSpPr>
           <p:spPr>
             <a:xfrm>
-              <a:off x="3146817" y="5707294"/>
+              <a:off x="3568157" y="5707568"/>
               <a:ext cx="77571" cy="77571"/>
             </a:xfrm>
             <a:prstGeom prst="ellipse">
@@ -15237,7 +15237,7 @@
           </p:nvSpPr>
           <p:spPr>
             <a:xfrm>
-              <a:off x="3286737" y="6513188"/>
+              <a:off x="3436478" y="6517908"/>
               <a:ext cx="77571" cy="77571"/>
             </a:xfrm>
             <a:prstGeom prst="ellipse">
@@ -15263,7 +15263,7 @@
           </p:nvSpPr>
           <p:spPr>
             <a:xfrm>
-              <a:off x="3160583" y="6182342"/>
+              <a:off x="3437820" y="6183143"/>
               <a:ext cx="77571" cy="77571"/>
             </a:xfrm>
             <a:prstGeom prst="ellipse">
@@ -15289,7 +15289,7 @@
           </p:nvSpPr>
           <p:spPr>
             <a:xfrm>
-              <a:off x="3515526" y="5979227"/>
+              <a:off x="3190797" y="5978419"/>
               <a:ext cx="77571" cy="77571"/>
             </a:xfrm>
             <a:prstGeom prst="ellipse">
@@ -15315,7 +15315,7 @@
           </p:nvSpPr>
           <p:spPr>
             <a:xfrm>
-              <a:off x="3434850" y="5613942"/>
+              <a:off x="3250578" y="5614106"/>
               <a:ext cx="77571" cy="77571"/>
             </a:xfrm>
             <a:prstGeom prst="ellipse">
@@ -15341,7 +15341,7 @@
           </p:nvSpPr>
           <p:spPr>
             <a:xfrm>
-              <a:off x="3253212" y="5850785"/>
+              <a:off x="3331110" y="5851343"/>
               <a:ext cx="77571" cy="77571"/>
             </a:xfrm>
             <a:prstGeom prst="ellipse">
@@ -15367,7 +15367,7 @@
           </p:nvSpPr>
           <p:spPr>
             <a:xfrm>
-              <a:off x="3645824" y="6539492"/>
+              <a:off x="3355546" y="6542076"/>
               <a:ext cx="77571" cy="77571"/>
             </a:xfrm>
             <a:prstGeom prst="ellipse">
@@ -15393,7 +15393,7 @@
           </p:nvSpPr>
           <p:spPr>
             <a:xfrm>
-              <a:off x="3394266" y="6107363"/>
+              <a:off x="3616623" y="6107745"/>
               <a:ext cx="77571" cy="77571"/>
             </a:xfrm>
             <a:prstGeom prst="ellipse">
@@ -15419,7 +15419,7 @@
           </p:nvSpPr>
           <p:spPr>
             <a:xfrm>
-              <a:off x="3336695" y="6256622"/>
+              <a:off x="3636455" y="6257601"/>
               <a:ext cx="77571" cy="77571"/>
             </a:xfrm>
             <a:prstGeom prst="ellipse">
@@ -15445,7 +15445,7 @@
           </p:nvSpPr>
           <p:spPr>
             <a:xfrm>
-              <a:off x="3210845" y="6057515"/>
+              <a:off x="3471255" y="6059115"/>
               <a:ext cx="77571" cy="77571"/>
             </a:xfrm>
             <a:prstGeom prst="ellipse">
@@ -15471,7 +15471,7 @@
           </p:nvSpPr>
           <p:spPr>
             <a:xfrm>
-              <a:off x="3603879" y="6507960"/>
+              <a:off x="3202573" y="6510809"/>
               <a:ext cx="77571" cy="77571"/>
             </a:xfrm>
             <a:prstGeom prst="ellipse">
@@ -15497,7 +15497,7 @@
           </p:nvSpPr>
           <p:spPr>
             <a:xfrm>
-              <a:off x="3221567" y="6102919"/>
+              <a:off x="3234102" y="6102258"/>
               <a:ext cx="77571" cy="77571"/>
             </a:xfrm>
             <a:prstGeom prst="ellipse">
@@ -15523,7 +15523,7 @@
           </p:nvSpPr>
           <p:spPr>
             <a:xfrm>
-              <a:off x="3386197" y="6467305"/>
+              <a:off x="3424875" y="6473152"/>
               <a:ext cx="77571" cy="77571"/>
             </a:xfrm>
             <a:prstGeom prst="ellipse">
@@ -15549,7 +15549,7 @@
           </p:nvSpPr>
           <p:spPr>
             <a:xfrm>
-              <a:off x="3618181" y="6424475"/>
+              <a:off x="3229381" y="6426028"/>
               <a:ext cx="77571" cy="77571"/>
             </a:xfrm>
             <a:prstGeom prst="ellipse">
@@ -15575,7 +15575,7 @@
           </p:nvSpPr>
           <p:spPr>
             <a:xfrm>
-              <a:off x="4353555" y="6483267"/>
+              <a:off x="4317407" y="6485472"/>
               <a:ext cx="77571" cy="77571"/>
             </a:xfrm>
             <a:prstGeom prst="ellipse">
@@ -15601,7 +15601,7 @@
           </p:nvSpPr>
           <p:spPr>
             <a:xfrm>
-              <a:off x="4360736" y="6428496"/>
+              <a:off x="4448192" y="6431475"/>
               <a:ext cx="77571" cy="77571"/>
             </a:xfrm>
             <a:prstGeom prst="ellipse">
@@ -15627,7 +15627,7 @@
           </p:nvSpPr>
           <p:spPr>
             <a:xfrm>
-              <a:off x="4481487" y="6624009"/>
+              <a:off x="4104626" y="6625050"/>
               <a:ext cx="77571" cy="77571"/>
             </a:xfrm>
             <a:prstGeom prst="ellipse">
@@ -15653,7 +15653,7 @@
           </p:nvSpPr>
           <p:spPr>
             <a:xfrm>
-              <a:off x="4268556" y="6158229"/>
+              <a:off x="4096793" y="6159532"/>
               <a:ext cx="77571" cy="77571"/>
             </a:xfrm>
             <a:prstGeom prst="ellipse">
@@ -15679,7 +15679,7 @@
           </p:nvSpPr>
           <p:spPr>
             <a:xfrm>
-              <a:off x="4221786" y="6222397"/>
+              <a:off x="4437440" y="6222556"/>
               <a:ext cx="77571" cy="77571"/>
             </a:xfrm>
             <a:prstGeom prst="ellipse">
@@ -15705,7 +15705,7 @@
           </p:nvSpPr>
           <p:spPr>
             <a:xfrm>
-              <a:off x="4446137" y="5646157"/>
+              <a:off x="4353696" y="5648761"/>
               <a:ext cx="77571" cy="77571"/>
             </a:xfrm>
             <a:prstGeom prst="ellipse">
@@ -15731,7 +15731,7 @@
           </p:nvSpPr>
           <p:spPr>
             <a:xfrm>
-              <a:off x="4062291" y="6196789"/>
+              <a:off x="4375782" y="6197484"/>
               <a:ext cx="77571" cy="77571"/>
             </a:xfrm>
             <a:prstGeom prst="ellipse">
@@ -15757,7 +15757,7 @@
           </p:nvSpPr>
           <p:spPr>
             <a:xfrm>
-              <a:off x="4440515" y="6426106"/>
+              <a:off x="4266831" y="6428484"/>
               <a:ext cx="77571" cy="77571"/>
             </a:xfrm>
             <a:prstGeom prst="ellipse">
@@ -15783,7 +15783,7 @@
           </p:nvSpPr>
           <p:spPr>
             <a:xfrm>
-              <a:off x="4510442" y="6213501"/>
+              <a:off x="4353989" y="6214227"/>
               <a:ext cx="77571" cy="77571"/>
             </a:xfrm>
             <a:prstGeom prst="ellipse">
@@ -15809,7 +15809,7 @@
           </p:nvSpPr>
           <p:spPr>
             <a:xfrm>
-              <a:off x="4223693" y="6085928"/>
+              <a:off x="4195284" y="6087658"/>
               <a:ext cx="77571" cy="77571"/>
             </a:xfrm>
             <a:prstGeom prst="ellipse">
@@ -15835,7 +15835,7 @@
           </p:nvSpPr>
           <p:spPr>
             <a:xfrm>
-              <a:off x="4249010" y="6024074"/>
+              <a:off x="4320522" y="6026087"/>
               <a:ext cx="77571" cy="77571"/>
             </a:xfrm>
             <a:prstGeom prst="ellipse">
@@ -15861,7 +15861,7 @@
           </p:nvSpPr>
           <p:spPr>
             <a:xfrm>
-              <a:off x="4500802" y="5875949"/>
+              <a:off x="4072570" y="5877241"/>
               <a:ext cx="77571" cy="77571"/>
             </a:xfrm>
             <a:prstGeom prst="ellipse">
@@ -15887,7 +15887,7 @@
           </p:nvSpPr>
           <p:spPr>
             <a:xfrm>
-              <a:off x="4223538" y="6375587"/>
+              <a:off x="4103044" y="6377528"/>
               <a:ext cx="77571" cy="77571"/>
             </a:xfrm>
             <a:prstGeom prst="ellipse">
@@ -15913,7 +15913,7 @@
           </p:nvSpPr>
           <p:spPr>
             <a:xfrm>
-              <a:off x="4197530" y="5767439"/>
+              <a:off x="4482772" y="5766342"/>
               <a:ext cx="77571" cy="77571"/>
             </a:xfrm>
             <a:prstGeom prst="ellipse">
@@ -15939,7 +15939,7 @@
           </p:nvSpPr>
           <p:spPr>
             <a:xfrm>
-              <a:off x="4060250" y="6690370"/>
+              <a:off x="4188053" y="6694767"/>
               <a:ext cx="77571" cy="77571"/>
             </a:xfrm>
             <a:prstGeom prst="ellipse">
@@ -15965,7 +15965,7 @@
           </p:nvSpPr>
           <p:spPr>
             <a:xfrm>
-              <a:off x="4156080" y="6539956"/>
+              <a:off x="4134526" y="6540325"/>
               <a:ext cx="77571" cy="77571"/>
             </a:xfrm>
             <a:prstGeom prst="ellipse">
@@ -15991,7 +15991,7 @@
           </p:nvSpPr>
           <p:spPr>
             <a:xfrm>
-              <a:off x="4215851" y="6352019"/>
+              <a:off x="4510442" y="6351539"/>
               <a:ext cx="77571" cy="77571"/>
             </a:xfrm>
             <a:prstGeom prst="ellipse">
@@ -16017,7 +16017,7 @@
           </p:nvSpPr>
           <p:spPr>
             <a:xfrm>
-              <a:off x="4413214" y="6449135"/>
+              <a:off x="4391874" y="6452693"/>
               <a:ext cx="77571" cy="77571"/>
             </a:xfrm>
             <a:prstGeom prst="ellipse">
@@ -16043,7 +16043,7 @@
           </p:nvSpPr>
           <p:spPr>
             <a:xfrm>
-              <a:off x="4233473" y="6303802"/>
+              <a:off x="4116962" y="6308265"/>
               <a:ext cx="77571" cy="77571"/>
             </a:xfrm>
             <a:prstGeom prst="ellipse">
@@ -16069,7 +16069,7 @@
           </p:nvSpPr>
           <p:spPr>
             <a:xfrm>
-              <a:off x="4435683" y="6498200"/>
+              <a:off x="4319190" y="6500777"/>
               <a:ext cx="77571" cy="77571"/>
             </a:xfrm>
             <a:prstGeom prst="ellipse">
@@ -16095,7 +16095,7 @@
           </p:nvSpPr>
           <p:spPr>
             <a:xfrm>
-              <a:off x="4184930" y="6276322"/>
+              <a:off x="4504389" y="6278711"/>
               <a:ext cx="77571" cy="77571"/>
             </a:xfrm>
             <a:prstGeom prst="ellipse">
@@ -16121,7 +16121,7 @@
           </p:nvSpPr>
           <p:spPr>
             <a:xfrm>
-              <a:off x="4073616" y="6190171"/>
+              <a:off x="4391393" y="6194872"/>
               <a:ext cx="77571" cy="77571"/>
             </a:xfrm>
             <a:prstGeom prst="ellipse">
@@ -16147,7 +16147,7 @@
           </p:nvSpPr>
           <p:spPr>
             <a:xfrm>
-              <a:off x="4063197" y="6200110"/>
+              <a:off x="4057833" y="6204870"/>
               <a:ext cx="77571" cy="77571"/>
             </a:xfrm>
             <a:prstGeom prst="ellipse">
@@ -16173,7 +16173,7 @@
           </p:nvSpPr>
           <p:spPr>
             <a:xfrm>
-              <a:off x="4106120" y="6271937"/>
+              <a:off x="4071994" y="6271725"/>
               <a:ext cx="77571" cy="77571"/>
             </a:xfrm>
             <a:prstGeom prst="ellipse">
@@ -16199,42 +16199,42 @@
           </p:nvSpPr>
           <p:spPr>
             <a:xfrm>
-              <a:off x="1673161" y="6068190"/>
-              <a:ext cx="2642423" cy="477959"/>
+              <a:off x="1781437" y="6069257"/>
+              <a:ext cx="2533697" cy="479559"/>
             </a:xfrm>
             <a:custGeom>
               <a:avLst/>
               <a:pathLst>
-                <a:path w="2642423" h="477959">
+                <a:path w="2533697" h="479559">
                   <a:moveTo>
                     <a:pt x="0" y="0"/>
                   </a:moveTo>
                   <a:lnTo>
-                    <a:pt x="1396047" y="105785"/>
+                    <a:pt x="1338605" y="106139"/>
                   </a:lnTo>
                   <a:lnTo>
-                    <a:pt x="1761615" y="95719"/>
+                    <a:pt x="1689131" y="96039"/>
                   </a:lnTo>
                   <a:lnTo>
-                    <a:pt x="2276855" y="52952"/>
+                    <a:pt x="2183171" y="53129"/>
                   </a:lnTo>
                   <a:lnTo>
-                    <a:pt x="2642423" y="11320"/>
+                    <a:pt x="2533697" y="11358"/>
                   </a:lnTo>
                   <a:lnTo>
-                    <a:pt x="2642423" y="428705"/>
+                    <a:pt x="2533697" y="430140"/>
                   </a:lnTo>
                   <a:lnTo>
-                    <a:pt x="2276855" y="392321"/>
+                    <a:pt x="2183171" y="393634"/>
                   </a:lnTo>
                   <a:lnTo>
-                    <a:pt x="1761615" y="356951"/>
+                    <a:pt x="1689131" y="358146"/>
                   </a:lnTo>
                   <a:lnTo>
-                    <a:pt x="1396047" y="352133"/>
+                    <a:pt x="1338605" y="353312"/>
                   </a:lnTo>
                   <a:lnTo>
-                    <a:pt x="0" y="477959"/>
+                    <a:pt x="0" y="479559"/>
                   </a:lnTo>
                   <a:close/>
                 </a:path>
@@ -16260,27 +16260,27 @@
           </p:nvSpPr>
           <p:spPr>
             <a:xfrm>
-              <a:off x="1673161" y="6068190"/>
-              <a:ext cx="2642423" cy="105785"/>
+              <a:off x="1781437" y="6069257"/>
+              <a:ext cx="2533697" cy="106139"/>
             </a:xfrm>
             <a:custGeom>
               <a:avLst/>
               <a:pathLst>
-                <a:path w="2642423" h="105785">
+                <a:path w="2533697" h="106139">
                   <a:moveTo>
                     <a:pt x="0" y="0"/>
                   </a:moveTo>
                   <a:lnTo>
-                    <a:pt x="1396047" y="105785"/>
+                    <a:pt x="1338605" y="106139"/>
                   </a:lnTo>
                   <a:lnTo>
-                    <a:pt x="1761615" y="95719"/>
+                    <a:pt x="1689131" y="96039"/>
                   </a:lnTo>
                   <a:lnTo>
-                    <a:pt x="2276855" y="52952"/>
+                    <a:pt x="2183171" y="53129"/>
                   </a:lnTo>
                   <a:lnTo>
-                    <a:pt x="2642423" y="11320"/>
+                    <a:pt x="2533697" y="11358"/>
                   </a:lnTo>
                 </a:path>
               </a:pathLst>
@@ -16300,27 +16300,27 @@
           </p:nvSpPr>
           <p:spPr>
             <a:xfrm>
-              <a:off x="1673161" y="6420323"/>
-              <a:ext cx="2642423" cy="125826"/>
+              <a:off x="1781437" y="6422569"/>
+              <a:ext cx="2533697" cy="126247"/>
             </a:xfrm>
             <a:custGeom>
               <a:avLst/>
               <a:pathLst>
-                <a:path w="2642423" h="125826">
+                <a:path w="2533697" h="126247">
                   <a:moveTo>
-                    <a:pt x="2642423" y="76571"/>
+                    <a:pt x="2533697" y="76828"/>
                   </a:moveTo>
                   <a:lnTo>
-                    <a:pt x="2276855" y="40188"/>
+                    <a:pt x="2183171" y="40322"/>
                   </a:lnTo>
                   <a:lnTo>
-                    <a:pt x="1761615" y="4817"/>
+                    <a:pt x="1689131" y="4834"/>
                   </a:lnTo>
                   <a:lnTo>
-                    <a:pt x="1396047" y="0"/>
+                    <a:pt x="1338605" y="0"/>
                   </a:lnTo>
                   <a:lnTo>
-                    <a:pt x="0" y="125826"/>
+                    <a:pt x="0" y="126247"/>
                   </a:lnTo>
                 </a:path>
               </a:pathLst>
@@ -16340,27 +16340,27 @@
           </p:nvSpPr>
           <p:spPr>
             <a:xfrm>
-              <a:off x="1673161" y="6288203"/>
-              <a:ext cx="2642423" cy="18966"/>
+              <a:off x="1781437" y="6290007"/>
+              <a:ext cx="2533697" cy="19030"/>
             </a:xfrm>
             <a:custGeom>
               <a:avLst/>
               <a:pathLst>
-                <a:path w="2642423" h="18966">
+                <a:path w="2533697" h="19030">
                   <a:moveTo>
-                    <a:pt x="0" y="18966"/>
+                    <a:pt x="0" y="19030"/>
                   </a:moveTo>
                   <a:lnTo>
-                    <a:pt x="1396047" y="8946"/>
+                    <a:pt x="1338605" y="8976"/>
                   </a:lnTo>
                   <a:lnTo>
-                    <a:pt x="1761615" y="6322"/>
+                    <a:pt x="1689131" y="6343"/>
                   </a:lnTo>
                   <a:lnTo>
-                    <a:pt x="2276855" y="2623"/>
+                    <a:pt x="2183171" y="2632"/>
                   </a:lnTo>
                   <a:lnTo>
-                    <a:pt x="2642423" y="0"/>
+                    <a:pt x="2533697" y="0"/>
                   </a:lnTo>
                 </a:path>
               </a:pathLst>
@@ -16389,7 +16389,7 @@
           </p:nvSpPr>
           <p:spPr>
             <a:xfrm>
-              <a:off x="3835890" y="5602355"/>
+              <a:off x="3835441" y="5602275"/>
               <a:ext cx="479694" cy="82021"/>
             </a:xfrm>
             <a:prstGeom prst="rect">
@@ -16496,7 +16496,7 @@
           </p:nvSpPr>
           <p:spPr>
             <a:xfrm rot="-5400000">
-              <a:off x="1177387" y="6839670"/>
+              <a:off x="1177387" y="6843488"/>
               <a:ext cx="194218" cy="100218"/>
             </a:xfrm>
             <a:prstGeom prst="rect">
@@ -16542,7 +16542,7 @@
           </p:nvSpPr>
           <p:spPr>
             <a:xfrm rot="-5400000">
-              <a:off x="1177387" y="6432056"/>
+              <a:off x="1177387" y="6434509"/>
               <a:ext cx="194218" cy="100218"/>
             </a:xfrm>
             <a:prstGeom prst="rect">
@@ -16588,7 +16588,7 @@
           </p:nvSpPr>
           <p:spPr>
             <a:xfrm rot="-5400000">
-              <a:off x="1177387" y="6024441"/>
+              <a:off x="1177387" y="6025530"/>
               <a:ext cx="194218" cy="100218"/>
             </a:xfrm>
             <a:prstGeom prst="rect">
@@ -16634,7 +16634,7 @@
           </p:nvSpPr>
           <p:spPr>
             <a:xfrm rot="-5400000">
-              <a:off x="1177387" y="5616827"/>
+              <a:off x="1177387" y="5616551"/>
               <a:ext cx="194218" cy="100218"/>
             </a:xfrm>
             <a:prstGeom prst="rect">
@@ -16680,7 +16680,7 @@
           </p:nvSpPr>
           <p:spPr>
             <a:xfrm>
-              <a:off x="1370425" y="6889779"/>
+              <a:off x="1370425" y="6893597"/>
               <a:ext cx="37957" cy="0"/>
             </a:xfrm>
             <a:custGeom>
@@ -16720,7 +16720,7 @@
           </p:nvSpPr>
           <p:spPr>
             <a:xfrm>
-              <a:off x="1370425" y="6482165"/>
+              <a:off x="1370425" y="6484618"/>
               <a:ext cx="37957" cy="0"/>
             </a:xfrm>
             <a:custGeom>
@@ -16760,7 +16760,7 @@
           </p:nvSpPr>
           <p:spPr>
             <a:xfrm>
-              <a:off x="1370425" y="6074550"/>
+              <a:off x="1370425" y="6075639"/>
               <a:ext cx="37957" cy="0"/>
             </a:xfrm>
             <a:custGeom>
@@ -16800,7 +16800,7 @@
           </p:nvSpPr>
           <p:spPr>
             <a:xfrm>
-              <a:off x="1370425" y="5666936"/>
+              <a:off x="1370425" y="5666660"/>
               <a:ext cx="37957" cy="0"/>
             </a:xfrm>
             <a:custGeom>
@@ -16880,7 +16880,7 @@
           </p:nvSpPr>
           <p:spPr>
             <a:xfrm>
-              <a:off x="1673161" y="6991840"/>
+              <a:off x="1781437" y="6991840"/>
               <a:ext cx="0" cy="37957"/>
             </a:xfrm>
             <a:custGeom>
@@ -16920,7 +16920,7 @@
           </p:nvSpPr>
           <p:spPr>
             <a:xfrm>
-              <a:off x="2553968" y="6991840"/>
+              <a:off x="2626003" y="6991840"/>
               <a:ext cx="0" cy="37957"/>
             </a:xfrm>
             <a:custGeom>
@@ -16960,7 +16960,7 @@
           </p:nvSpPr>
           <p:spPr>
             <a:xfrm>
-              <a:off x="3434776" y="6991840"/>
+              <a:off x="3470569" y="6991840"/>
               <a:ext cx="0" cy="37957"/>
             </a:xfrm>
             <a:custGeom>
@@ -17000,7 +17000,7 @@
           </p:nvSpPr>
           <p:spPr>
             <a:xfrm>
-              <a:off x="4315584" y="6991840"/>
+              <a:off x="4315135" y="6991840"/>
               <a:ext cx="0" cy="37957"/>
             </a:xfrm>
             <a:custGeom>
@@ -17040,7 +17040,7 @@
           </p:nvSpPr>
           <p:spPr>
             <a:xfrm>
-              <a:off x="1634299" y="7060163"/>
+              <a:off x="1742575" y="7060163"/>
               <a:ext cx="77724" cy="100218"/>
             </a:xfrm>
             <a:prstGeom prst="rect">
@@ -17086,7 +17086,7 @@
           </p:nvSpPr>
           <p:spPr>
             <a:xfrm>
-              <a:off x="2515106" y="7060163"/>
+              <a:off x="2587141" y="7060163"/>
               <a:ext cx="77724" cy="100218"/>
             </a:xfrm>
             <a:prstGeom prst="rect">
@@ -17132,7 +17132,7 @@
           </p:nvSpPr>
           <p:spPr>
             <a:xfrm>
-              <a:off x="3395914" y="7060163"/>
+              <a:off x="3431707" y="7060163"/>
               <a:ext cx="77724" cy="100218"/>
             </a:xfrm>
             <a:prstGeom prst="rect">
@@ -17178,7 +17178,7 @@
           </p:nvSpPr>
           <p:spPr>
             <a:xfrm>
-              <a:off x="4276722" y="7060163"/>
+              <a:off x="4276273" y="7060163"/>
               <a:ext cx="77724" cy="100218"/>
             </a:xfrm>
             <a:prstGeom prst="rect">
@@ -17388,7 +17388,7 @@
           </p:nvSpPr>
           <p:spPr>
             <a:xfrm>
-              <a:off x="5386336" y="6350281"/>
+              <a:off x="5248619" y="6348812"/>
               <a:ext cx="77571" cy="77571"/>
             </a:xfrm>
             <a:prstGeom prst="ellipse">
@@ -17414,7 +17414,7 @@
           </p:nvSpPr>
           <p:spPr>
             <a:xfrm>
-              <a:off x="4974187" y="6273139"/>
+              <a:off x="5205329" y="6272539"/>
               <a:ext cx="77571" cy="77571"/>
             </a:xfrm>
             <a:prstGeom prst="ellipse">
@@ -17440,7 +17440,7 @@
           </p:nvSpPr>
           <p:spPr>
             <a:xfrm>
-              <a:off x="5201855" y="6333993"/>
+              <a:off x="5033864" y="6333327"/>
               <a:ext cx="77571" cy="77571"/>
             </a:xfrm>
             <a:prstGeom prst="ellipse">
@@ -17466,7 +17466,7 @@
           </p:nvSpPr>
           <p:spPr>
             <a:xfrm>
-              <a:off x="5013860" y="6653066"/>
+              <a:off x="5264434" y="6653186"/>
               <a:ext cx="77571" cy="77571"/>
             </a:xfrm>
             <a:prstGeom prst="ellipse">
@@ -17492,7 +17492,7 @@
           </p:nvSpPr>
           <p:spPr>
             <a:xfrm>
-              <a:off x="5427771" y="6612228"/>
+              <a:off x="5173065" y="6612143"/>
               <a:ext cx="77571" cy="77571"/>
             </a:xfrm>
             <a:prstGeom prst="ellipse">
@@ -17518,7 +17518,7 @@
           </p:nvSpPr>
           <p:spPr>
             <a:xfrm>
-              <a:off x="5029088" y="6568708"/>
+              <a:off x="4999333" y="6567528"/>
               <a:ext cx="77571" cy="77571"/>
             </a:xfrm>
             <a:prstGeom prst="ellipse">
@@ -17544,7 +17544,7 @@
           </p:nvSpPr>
           <p:spPr>
             <a:xfrm>
-              <a:off x="5265940" y="6087964"/>
+              <a:off x="5020183" y="6088032"/>
               <a:ext cx="77571" cy="77571"/>
             </a:xfrm>
             <a:prstGeom prst="ellipse">
@@ -17570,7 +17570,7 @@
           </p:nvSpPr>
           <p:spPr>
             <a:xfrm>
-              <a:off x="4948748" y="6371847"/>
+              <a:off x="5080504" y="6370110"/>
               <a:ext cx="77571" cy="77571"/>
             </a:xfrm>
             <a:prstGeom prst="ellipse">
@@ -17596,7 +17596,7 @@
           </p:nvSpPr>
           <p:spPr>
             <a:xfrm>
-              <a:off x="5187661" y="6592564"/>
+              <a:off x="5148020" y="6592053"/>
               <a:ext cx="77571" cy="77571"/>
             </a:xfrm>
             <a:prstGeom prst="ellipse">
@@ -17622,7 +17622,7 @@
           </p:nvSpPr>
           <p:spPr>
             <a:xfrm>
-              <a:off x="5050141" y="6244897"/>
+              <a:off x="4948748" y="6245395"/>
               <a:ext cx="77571" cy="77571"/>
             </a:xfrm>
             <a:prstGeom prst="ellipse">
@@ -17648,7 +17648,7 @@
           </p:nvSpPr>
           <p:spPr>
             <a:xfrm>
-              <a:off x="6155884" y="6886426"/>
+              <a:off x="5914233" y="6886426"/>
               <a:ext cx="77571" cy="77571"/>
             </a:xfrm>
             <a:prstGeom prst="ellipse">
@@ -17674,7 +17674,7 @@
           </p:nvSpPr>
           <p:spPr>
             <a:xfrm>
-              <a:off x="6181085" y="6498238"/>
+              <a:off x="6048574" y="6497508"/>
               <a:ext cx="77571" cy="77571"/>
             </a:xfrm>
             <a:prstGeom prst="ellipse">
@@ -17700,7 +17700,7 @@
           </p:nvSpPr>
           <p:spPr>
             <a:xfrm>
-              <a:off x="5845106" y="6281259"/>
+              <a:off x="5977018" y="6279786"/>
               <a:ext cx="77571" cy="77571"/>
             </a:xfrm>
             <a:prstGeom prst="ellipse">
@@ -17726,7 +17726,7 @@
           </p:nvSpPr>
           <p:spPr>
             <a:xfrm>
-              <a:off x="5994202" y="6746991"/>
+              <a:off x="6150559" y="6745201"/>
               <a:ext cx="77571" cy="77571"/>
             </a:xfrm>
             <a:prstGeom prst="ellipse">
@@ -17752,7 +17752,7 @@
           </p:nvSpPr>
           <p:spPr>
             <a:xfrm>
-              <a:off x="5958376" y="6415793"/>
+              <a:off x="5974994" y="6416674"/>
               <a:ext cx="77571" cy="77571"/>
             </a:xfrm>
             <a:prstGeom prst="ellipse">
@@ -17778,7 +17778,7 @@
           </p:nvSpPr>
           <p:spPr>
             <a:xfrm>
-              <a:off x="5923214" y="6020130"/>
+              <a:off x="5996914" y="6019660"/>
               <a:ext cx="77571" cy="77571"/>
             </a:xfrm>
             <a:prstGeom prst="ellipse">
@@ -17804,7 +17804,7 @@
           </p:nvSpPr>
           <p:spPr>
             <a:xfrm>
-              <a:off x="5859254" y="6453107"/>
+              <a:off x="6046329" y="6452094"/>
               <a:ext cx="77571" cy="77571"/>
             </a:xfrm>
             <a:prstGeom prst="ellipse">
@@ -17830,7 +17830,7 @@
           </p:nvSpPr>
           <p:spPr>
             <a:xfrm>
-              <a:off x="6221146" y="6522598"/>
+              <a:off x="5781632" y="6522460"/>
               <a:ext cx="77571" cy="77571"/>
             </a:xfrm>
             <a:prstGeom prst="ellipse">
@@ -17856,7 +17856,7 @@
           </p:nvSpPr>
           <p:spPr>
             <a:xfrm>
-              <a:off x="6135761" y="6258114"/>
+              <a:off x="5760645" y="6259740"/>
               <a:ext cx="77571" cy="77571"/>
             </a:xfrm>
             <a:prstGeom prst="ellipse">
@@ -17882,7 +17882,7 @@
           </p:nvSpPr>
           <p:spPr>
             <a:xfrm>
-              <a:off x="5796419" y="6616590"/>
+              <a:off x="6032487" y="6615445"/>
               <a:ext cx="77571" cy="77571"/>
             </a:xfrm>
             <a:prstGeom prst="ellipse">
@@ -17908,7 +17908,7 @@
           </p:nvSpPr>
           <p:spPr>
             <a:xfrm>
-              <a:off x="6120476" y="6201327"/>
+              <a:off x="6196984" y="6199525"/>
               <a:ext cx="77571" cy="77571"/>
             </a:xfrm>
             <a:prstGeom prst="ellipse">
@@ -17934,7 +17934,7 @@
           </p:nvSpPr>
           <p:spPr>
             <a:xfrm>
-              <a:off x="6153750" y="6575543"/>
+              <a:off x="6119735" y="6574953"/>
               <a:ext cx="77571" cy="77571"/>
             </a:xfrm>
             <a:prstGeom prst="ellipse">
@@ -17960,7 +17960,7 @@
           </p:nvSpPr>
           <p:spPr>
             <a:xfrm>
-              <a:off x="6005786" y="6172181"/>
+              <a:off x="6014266" y="6171944"/>
               <a:ext cx="77571" cy="77571"/>
             </a:xfrm>
             <a:prstGeom prst="ellipse">
@@ -17986,7 +17986,7 @@
           </p:nvSpPr>
           <p:spPr>
             <a:xfrm>
-              <a:off x="5797845" y="5811723"/>
+              <a:off x="5734094" y="5811142"/>
               <a:ext cx="77571" cy="77571"/>
             </a:xfrm>
             <a:prstGeom prst="ellipse">
@@ -18012,7 +18012,7 @@
           </p:nvSpPr>
           <p:spPr>
             <a:xfrm>
-              <a:off x="6113581" y="6091199"/>
+              <a:off x="6025190" y="6091408"/>
               <a:ext cx="77571" cy="77571"/>
             </a:xfrm>
             <a:prstGeom prst="ellipse">
@@ -18038,7 +18038,7 @@
           </p:nvSpPr>
           <p:spPr>
             <a:xfrm>
-              <a:off x="6018887" y="6142088"/>
+              <a:off x="5699874" y="6142997"/>
               <a:ext cx="77571" cy="77571"/>
             </a:xfrm>
             <a:prstGeom prst="ellipse">
@@ -18064,7 +18064,7 @@
           </p:nvSpPr>
           <p:spPr>
             <a:xfrm>
-              <a:off x="5914417" y="6264486"/>
+              <a:off x="5782475" y="6263319"/>
               <a:ext cx="77571" cy="77571"/>
             </a:xfrm>
             <a:prstGeom prst="ellipse">
@@ -18090,7 +18090,7 @@
           </p:nvSpPr>
           <p:spPr>
             <a:xfrm>
-              <a:off x="6228420" y="6554993"/>
+              <a:off x="6031422" y="6555226"/>
               <a:ext cx="77571" cy="77571"/>
             </a:xfrm>
             <a:prstGeom prst="ellipse">
@@ -18116,7 +18116,7 @@
           </p:nvSpPr>
           <p:spPr>
             <a:xfrm>
-              <a:off x="7078804" y="6322762"/>
+              <a:off x="6889892" y="6321875"/>
               <a:ext cx="77571" cy="77571"/>
             </a:xfrm>
             <a:prstGeom prst="ellipse">
@@ -18142,7 +18142,7 @@
           </p:nvSpPr>
           <p:spPr>
             <a:xfrm>
-              <a:off x="6923112" y="6382566"/>
+              <a:off x="6638064" y="6380804"/>
               <a:ext cx="77571" cy="77571"/>
             </a:xfrm>
             <a:prstGeom prst="ellipse">
@@ -18168,7 +18168,7 @@
           </p:nvSpPr>
           <p:spPr>
             <a:xfrm>
-              <a:off x="6756666" y="6593722"/>
+              <a:off x="7064717" y="6593870"/>
               <a:ext cx="77571" cy="77571"/>
             </a:xfrm>
             <a:prstGeom prst="ellipse">
@@ -18194,7 +18194,7 @@
           </p:nvSpPr>
           <p:spPr>
             <a:xfrm>
-              <a:off x="6815975" y="6140937"/>
+              <a:off x="6692549" y="6141173"/>
               <a:ext cx="77571" cy="77571"/>
             </a:xfrm>
             <a:prstGeom prst="ellipse">
@@ -18220,7 +18220,7 @@
           </p:nvSpPr>
           <p:spPr>
             <a:xfrm>
-              <a:off x="7080013" y="6384572"/>
+              <a:off x="6978738" y="6384782"/>
               <a:ext cx="77571" cy="77571"/>
             </a:xfrm>
             <a:prstGeom prst="ellipse">
@@ -18246,7 +18246,7 @@
           </p:nvSpPr>
           <p:spPr>
             <a:xfrm>
-              <a:off x="6856919" y="6162258"/>
+              <a:off x="6726102" y="6163204"/>
               <a:ext cx="77571" cy="77571"/>
             </a:xfrm>
             <a:prstGeom prst="ellipse">
@@ -18272,7 +18272,7 @@
           </p:nvSpPr>
           <p:spPr>
             <a:xfrm>
-              <a:off x="6849178" y="5698138"/>
+              <a:off x="6887359" y="5698712"/>
               <a:ext cx="77571" cy="77571"/>
             </a:xfrm>
             <a:prstGeom prst="ellipse">
@@ -18298,7 +18298,7 @@
           </p:nvSpPr>
           <p:spPr>
             <a:xfrm>
-              <a:off x="6737988" y="6442234"/>
+              <a:off x="6940656" y="6442027"/>
               <a:ext cx="77571" cy="77571"/>
             </a:xfrm>
             <a:prstGeom prst="ellipse">
@@ -18324,7 +18324,7 @@
           </p:nvSpPr>
           <p:spPr>
             <a:xfrm>
-              <a:off x="6703095" y="6261136"/>
+              <a:off x="6758340" y="6261365"/>
               <a:ext cx="77571" cy="77571"/>
             </a:xfrm>
             <a:prstGeom prst="ellipse">
@@ -18350,7 +18350,7 @@
           </p:nvSpPr>
           <p:spPr>
             <a:xfrm>
-              <a:off x="6755523" y="5553861"/>
+              <a:off x="7049955" y="5553861"/>
               <a:ext cx="77571" cy="77571"/>
             </a:xfrm>
             <a:prstGeom prst="ellipse">
@@ -18376,7 +18376,7 @@
           </p:nvSpPr>
           <p:spPr>
             <a:xfrm>
-              <a:off x="6876607" y="6267869"/>
+              <a:off x="6606363" y="6267330"/>
               <a:ext cx="77571" cy="77571"/>
             </a:xfrm>
             <a:prstGeom prst="ellipse">
@@ -18402,7 +18402,7 @@
           </p:nvSpPr>
           <p:spPr>
             <a:xfrm>
-              <a:off x="7008781" y="6383392"/>
+              <a:off x="6962877" y="6384818"/>
               <a:ext cx="77571" cy="77571"/>
             </a:xfrm>
             <a:prstGeom prst="ellipse">
@@ -18428,7 +18428,7 @@
           </p:nvSpPr>
           <p:spPr>
             <a:xfrm>
-              <a:off x="6888119" y="6140004"/>
+              <a:off x="6907658" y="6140182"/>
               <a:ext cx="77571" cy="77571"/>
             </a:xfrm>
             <a:prstGeom prst="ellipse">
@@ -18454,7 +18454,7 @@
           </p:nvSpPr>
           <p:spPr>
             <a:xfrm>
-              <a:off x="6647425" y="6066690"/>
+              <a:off x="6883389" y="6067878"/>
               <a:ext cx="77571" cy="77571"/>
             </a:xfrm>
             <a:prstGeom prst="ellipse">
@@ -18480,7 +18480,7 @@
           </p:nvSpPr>
           <p:spPr>
             <a:xfrm>
-              <a:off x="6769854" y="5928660"/>
+              <a:off x="6668682" y="5928964"/>
               <a:ext cx="77571" cy="77571"/>
             </a:xfrm>
             <a:prstGeom prst="ellipse">
@@ -18506,7 +18506,7 @@
           </p:nvSpPr>
           <p:spPr>
             <a:xfrm>
-              <a:off x="6820939" y="6484784"/>
+              <a:off x="6907783" y="6485039"/>
               <a:ext cx="77571" cy="77571"/>
             </a:xfrm>
             <a:prstGeom prst="ellipse">
@@ -18532,7 +18532,7 @@
           </p:nvSpPr>
           <p:spPr>
             <a:xfrm>
-              <a:off x="6978384" y="6517775"/>
+              <a:off x="6732032" y="6517033"/>
               <a:ext cx="77571" cy="77571"/>
             </a:xfrm>
             <a:prstGeom prst="ellipse">
@@ -18558,7 +18558,7 @@
           </p:nvSpPr>
           <p:spPr>
             <a:xfrm>
-              <a:off x="7003418" y="6725695"/>
+              <a:off x="6982221" y="6725315"/>
               <a:ext cx="77571" cy="77571"/>
             </a:xfrm>
             <a:prstGeom prst="ellipse">
@@ -18584,7 +18584,7 @@
           </p:nvSpPr>
           <p:spPr>
             <a:xfrm>
-              <a:off x="6881694" y="6313344"/>
+              <a:off x="6705200" y="6311991"/>
               <a:ext cx="77571" cy="77571"/>
             </a:xfrm>
             <a:prstGeom prst="ellipse">
@@ -18610,7 +18610,7 @@
           </p:nvSpPr>
           <p:spPr>
             <a:xfrm>
-              <a:off x="6659148" y="6229027"/>
+              <a:off x="6932520" y="6228796"/>
               <a:ext cx="77571" cy="77571"/>
             </a:xfrm>
             <a:prstGeom prst="ellipse">
@@ -18636,7 +18636,7 @@
           </p:nvSpPr>
           <p:spPr>
             <a:xfrm>
-              <a:off x="7860406" y="6278496"/>
+              <a:off x="7676810" y="6278323"/>
               <a:ext cx="77571" cy="77571"/>
             </a:xfrm>
             <a:prstGeom prst="ellipse">
@@ -18662,7 +18662,7 @@
           </p:nvSpPr>
           <p:spPr>
             <a:xfrm>
-              <a:off x="7877398" y="6407850"/>
+              <a:off x="7566837" y="6407404"/>
               <a:ext cx="77571" cy="77571"/>
             </a:xfrm>
             <a:prstGeom prst="ellipse">
@@ -18688,7 +18688,7 @@
           </p:nvSpPr>
           <p:spPr>
             <a:xfrm>
-              <a:off x="7627845" y="6484334"/>
+              <a:off x="7656132" y="6484894"/>
               <a:ext cx="77571" cy="77571"/>
             </a:xfrm>
             <a:prstGeom prst="ellipse">
@@ -18714,7 +18714,7 @@
           </p:nvSpPr>
           <p:spPr>
             <a:xfrm>
-              <a:off x="7722631" y="6521883"/>
+              <a:off x="7567661" y="6522072"/>
               <a:ext cx="77571" cy="77571"/>
             </a:xfrm>
             <a:prstGeom prst="ellipse">
@@ -18740,7 +18740,7 @@
           </p:nvSpPr>
           <p:spPr>
             <a:xfrm>
-              <a:off x="7768485" y="6320448"/>
+              <a:off x="7922055" y="6320247"/>
               <a:ext cx="77571" cy="77571"/>
             </a:xfrm>
             <a:prstGeom prst="ellipse">
@@ -18766,7 +18766,7 @@
           </p:nvSpPr>
           <p:spPr>
             <a:xfrm>
-              <a:off x="7640616" y="6254610"/>
+              <a:off x="7614841" y="6253341"/>
               <a:ext cx="77571" cy="77571"/>
             </a:xfrm>
             <a:prstGeom prst="ellipse">
@@ -18792,7 +18792,7 @@
           </p:nvSpPr>
           <p:spPr>
             <a:xfrm>
-              <a:off x="7886390" y="6483669"/>
+              <a:off x="7516663" y="6481650"/>
               <a:ext cx="77571" cy="77571"/>
             </a:xfrm>
             <a:prstGeom prst="ellipse">
@@ -18818,7 +18818,7 @@
           </p:nvSpPr>
           <p:spPr>
             <a:xfrm>
-              <a:off x="7795689" y="6184959"/>
+              <a:off x="7837966" y="6184585"/>
               <a:ext cx="77571" cy="77571"/>
             </a:xfrm>
             <a:prstGeom prst="ellipse">
@@ -18844,7 +18844,7 @@
           </p:nvSpPr>
           <p:spPr>
             <a:xfrm>
-              <a:off x="7676218" y="6560527"/>
+              <a:off x="7689731" y="6559833"/>
               <a:ext cx="77571" cy="77571"/>
             </a:xfrm>
             <a:prstGeom prst="ellipse">
@@ -18870,7 +18870,7 @@
           </p:nvSpPr>
           <p:spPr>
             <a:xfrm>
-              <a:off x="7940029" y="6403231"/>
+              <a:off x="7853980" y="6403036"/>
               <a:ext cx="77571" cy="77571"/>
             </a:xfrm>
             <a:prstGeom prst="ellipse">
@@ -18896,7 +18896,7 @@
           </p:nvSpPr>
           <p:spPr>
             <a:xfrm>
-              <a:off x="7610404" y="6326030"/>
+              <a:off x="7635924" y="6326316"/>
               <a:ext cx="77571" cy="77571"/>
             </a:xfrm>
             <a:prstGeom prst="ellipse">
@@ -18922,7 +18922,7 @@
           </p:nvSpPr>
           <p:spPr>
             <a:xfrm>
-              <a:off x="7499767" y="6414257"/>
+              <a:off x="7643280" y="6414284"/>
               <a:ext cx="77571" cy="77571"/>
             </a:xfrm>
             <a:prstGeom prst="ellipse">
@@ -18948,7 +18948,7 @@
           </p:nvSpPr>
           <p:spPr>
             <a:xfrm>
-              <a:off x="7905994" y="6371903"/>
+              <a:off x="7763713" y="6370586"/>
               <a:ext cx="77571" cy="77571"/>
             </a:xfrm>
             <a:prstGeom prst="ellipse">
@@ -18974,7 +18974,7 @@
           </p:nvSpPr>
           <p:spPr>
             <a:xfrm>
-              <a:off x="7547327" y="6683309"/>
+              <a:off x="7940029" y="6682019"/>
               <a:ext cx="77571" cy="77571"/>
             </a:xfrm>
             <a:prstGeom prst="ellipse">
@@ -19000,7 +19000,7 @@
           </p:nvSpPr>
           <p:spPr>
             <a:xfrm>
-              <a:off x="7905855" y="6392483"/>
+              <a:off x="7884866" y="6391964"/>
               <a:ext cx="77571" cy="77571"/>
             </a:xfrm>
             <a:prstGeom prst="ellipse">
@@ -19026,7 +19026,7 @@
           </p:nvSpPr>
           <p:spPr>
             <a:xfrm>
-              <a:off x="7661759" y="6410790"/>
+              <a:off x="7506091" y="6410446"/>
               <a:ext cx="77571" cy="77571"/>
             </a:xfrm>
             <a:prstGeom prst="ellipse">
@@ -19052,7 +19052,7 @@
           </p:nvSpPr>
           <p:spPr>
             <a:xfrm>
-              <a:off x="7674054" y="6291665"/>
+              <a:off x="7907143" y="6291594"/>
               <a:ext cx="77571" cy="77571"/>
             </a:xfrm>
             <a:prstGeom prst="ellipse">
@@ -19078,7 +19078,7 @@
           </p:nvSpPr>
           <p:spPr>
             <a:xfrm>
-              <a:off x="7549154" y="6321180"/>
+              <a:off x="7521997" y="6321002"/>
               <a:ext cx="77571" cy="77571"/>
             </a:xfrm>
             <a:prstGeom prst="ellipse">
@@ -19104,7 +19104,7 @@
           </p:nvSpPr>
           <p:spPr>
             <a:xfrm>
-              <a:off x="7534919" y="6698923"/>
+              <a:off x="7904925" y="6698696"/>
               <a:ext cx="77571" cy="77571"/>
             </a:xfrm>
             <a:prstGeom prst="ellipse">
@@ -19130,7 +19130,7 @@
           </p:nvSpPr>
           <p:spPr>
             <a:xfrm>
-              <a:off x="7491250" y="6285335"/>
+              <a:off x="7603610" y="6284765"/>
               <a:ext cx="77571" cy="77571"/>
             </a:xfrm>
             <a:prstGeom prst="ellipse">
@@ -19156,7 +19156,7 @@
           </p:nvSpPr>
           <p:spPr>
             <a:xfrm>
-              <a:off x="7824842" y="6167798"/>
+              <a:off x="7447744" y="6169274"/>
               <a:ext cx="77571" cy="77571"/>
             </a:xfrm>
             <a:prstGeom prst="ellipse">
@@ -19182,7 +19182,7 @@
           </p:nvSpPr>
           <p:spPr>
             <a:xfrm>
-              <a:off x="7849588" y="6197521"/>
+              <a:off x="7456971" y="6196879"/>
               <a:ext cx="77571" cy="77571"/>
             </a:xfrm>
             <a:prstGeom prst="ellipse">
@@ -19208,7 +19208,7 @@
           </p:nvSpPr>
           <p:spPr>
             <a:xfrm>
-              <a:off x="7660779" y="6512606"/>
+              <a:off x="7858871" y="6512328"/>
               <a:ext cx="77571" cy="77571"/>
             </a:xfrm>
             <a:prstGeom prst="ellipse">
@@ -19234,7 +19234,7 @@
           </p:nvSpPr>
           <p:spPr>
             <a:xfrm>
-              <a:off x="7556214" y="6584242"/>
+              <a:off x="7578617" y="6583917"/>
               <a:ext cx="77571" cy="77571"/>
             </a:xfrm>
             <a:prstGeom prst="ellipse">
@@ -19260,42 +19260,42 @@
           </p:nvSpPr>
           <p:spPr>
             <a:xfrm>
-              <a:off x="5227602" y="6194811"/>
-              <a:ext cx="2525669" cy="335090"/>
+              <a:off x="5114166" y="6194864"/>
+              <a:ext cx="2620530" cy="334721"/>
             </a:xfrm>
             <a:custGeom>
               <a:avLst/>
               <a:pathLst>
-                <a:path w="2525669" h="335090">
+                <a:path w="2620530" h="334721">
                   <a:moveTo>
                     <a:pt x="0" y="0"/>
                   </a:moveTo>
                   <a:lnTo>
-                    <a:pt x="1334363" y="68201"/>
+                    <a:pt x="1384480" y="68126"/>
                   </a:lnTo>
                   <a:lnTo>
-                    <a:pt x="1683779" y="66556"/>
+                    <a:pt x="1747020" y="66483"/>
                   </a:lnTo>
                   <a:lnTo>
-                    <a:pt x="2176253" y="49212"/>
+                    <a:pt x="2257991" y="49158"/>
                   </a:lnTo>
                   <a:lnTo>
-                    <a:pt x="2525669" y="29566"/>
+                    <a:pt x="2620530" y="29534"/>
                   </a:lnTo>
                   <a:lnTo>
-                    <a:pt x="2525669" y="324941"/>
+                    <a:pt x="2620530" y="324583"/>
                   </a:lnTo>
                   <a:lnTo>
-                    <a:pt x="2176253" y="302609"/>
+                    <a:pt x="2257991" y="302275"/>
                   </a:lnTo>
                   <a:lnTo>
-                    <a:pt x="1683779" y="281479"/>
+                    <a:pt x="1747020" y="281168"/>
                   </a:lnTo>
                   <a:lnTo>
-                    <a:pt x="1334363" y="277148"/>
+                    <a:pt x="1384480" y="276842"/>
                   </a:lnTo>
                   <a:lnTo>
-                    <a:pt x="0" y="335090"/>
+                    <a:pt x="0" y="334721"/>
                   </a:lnTo>
                   <a:close/>
                 </a:path>
@@ -19321,27 +19321,27 @@
           </p:nvSpPr>
           <p:spPr>
             <a:xfrm>
-              <a:off x="5227602" y="6194811"/>
-              <a:ext cx="2525669" cy="68201"/>
+              <a:off x="5114166" y="6194864"/>
+              <a:ext cx="2620530" cy="68126"/>
             </a:xfrm>
             <a:custGeom>
               <a:avLst/>
               <a:pathLst>
-                <a:path w="2525669" h="68201">
+                <a:path w="2620530" h="68126">
                   <a:moveTo>
                     <a:pt x="0" y="0"/>
                   </a:moveTo>
                   <a:lnTo>
-                    <a:pt x="1334363" y="68201"/>
+                    <a:pt x="1384480" y="68126"/>
                   </a:lnTo>
                   <a:lnTo>
-                    <a:pt x="1683779" y="66556"/>
+                    <a:pt x="1747020" y="66483"/>
                   </a:lnTo>
                   <a:lnTo>
-                    <a:pt x="2176253" y="49212"/>
+                    <a:pt x="2257991" y="49158"/>
                   </a:lnTo>
                   <a:lnTo>
-                    <a:pt x="2525669" y="29566"/>
+                    <a:pt x="2620530" y="29534"/>
                   </a:lnTo>
                 </a:path>
               </a:pathLst>
@@ -19361,27 +19361,27 @@
           </p:nvSpPr>
           <p:spPr>
             <a:xfrm>
-              <a:off x="5227602" y="6471960"/>
-              <a:ext cx="2525669" cy="57942"/>
+              <a:off x="5114166" y="6471706"/>
+              <a:ext cx="2620530" cy="57878"/>
             </a:xfrm>
             <a:custGeom>
               <a:avLst/>
               <a:pathLst>
-                <a:path w="2525669" h="57942">
+                <a:path w="2620530" h="57878">
                   <a:moveTo>
-                    <a:pt x="2525669" y="47793"/>
+                    <a:pt x="2620530" y="47740"/>
                   </a:moveTo>
                   <a:lnTo>
-                    <a:pt x="2176253" y="25461"/>
+                    <a:pt x="2257991" y="25433"/>
                   </a:lnTo>
                   <a:lnTo>
-                    <a:pt x="1683779" y="4330"/>
+                    <a:pt x="1747020" y="4326"/>
                   </a:lnTo>
                   <a:lnTo>
-                    <a:pt x="1334363" y="0"/>
+                    <a:pt x="1384480" y="0"/>
                   </a:lnTo>
                   <a:lnTo>
-                    <a:pt x="0" y="57942"/>
+                    <a:pt x="0" y="57878"/>
                   </a:lnTo>
                 </a:path>
               </a:pathLst>
@@ -19401,27 +19401,27 @@
           </p:nvSpPr>
           <p:spPr>
             <a:xfrm>
-              <a:off x="5227602" y="6362357"/>
-              <a:ext cx="2525669" cy="9708"/>
+              <a:off x="5114166" y="6362224"/>
+              <a:ext cx="2620530" cy="9698"/>
             </a:xfrm>
             <a:custGeom>
               <a:avLst/>
               <a:pathLst>
-                <a:path w="2525669" h="9708">
+                <a:path w="2620530" h="9698">
                   <a:moveTo>
                     <a:pt x="0" y="0"/>
                   </a:moveTo>
                   <a:lnTo>
-                    <a:pt x="1334363" y="5129"/>
+                    <a:pt x="1384480" y="5123"/>
                   </a:lnTo>
                   <a:lnTo>
-                    <a:pt x="1683779" y="6472"/>
+                    <a:pt x="1747020" y="6465"/>
                   </a:lnTo>
                   <a:lnTo>
-                    <a:pt x="2176253" y="8365"/>
+                    <a:pt x="2257991" y="8356"/>
                   </a:lnTo>
                   <a:lnTo>
-                    <a:pt x="2525669" y="9708"/>
+                    <a:pt x="2620530" y="9698"/>
                   </a:lnTo>
                 </a:path>
               </a:pathLst>
@@ -19450,7 +19450,7 @@
           </p:nvSpPr>
           <p:spPr>
             <a:xfrm>
-              <a:off x="7273578" y="5602634"/>
+              <a:off x="7255002" y="5603204"/>
               <a:ext cx="479694" cy="82021"/>
             </a:xfrm>
             <a:prstGeom prst="rect">
@@ -19557,7 +19557,7 @@
           </p:nvSpPr>
           <p:spPr>
             <a:xfrm>
-              <a:off x="4800012" y="6903859"/>
+              <a:off x="4800012" y="6903129"/>
               <a:ext cx="37957" cy="0"/>
             </a:xfrm>
             <a:custGeom>
@@ -19597,7 +19597,7 @@
           </p:nvSpPr>
           <p:spPr>
             <a:xfrm>
-              <a:off x="4800012" y="6611822"/>
+              <a:off x="4800012" y="6611414"/>
               <a:ext cx="37957" cy="0"/>
             </a:xfrm>
             <a:custGeom>
@@ -19637,7 +19637,7 @@
           </p:nvSpPr>
           <p:spPr>
             <a:xfrm>
-              <a:off x="4800012" y="6319785"/>
+              <a:off x="4800012" y="6319699"/>
               <a:ext cx="37957" cy="0"/>
             </a:xfrm>
             <a:custGeom>
@@ -19677,7 +19677,7 @@
           </p:nvSpPr>
           <p:spPr>
             <a:xfrm>
-              <a:off x="4800012" y="6027748"/>
+              <a:off x="4800012" y="6027984"/>
               <a:ext cx="37957" cy="0"/>
             </a:xfrm>
             <a:custGeom>
@@ -19717,7 +19717,7 @@
           </p:nvSpPr>
           <p:spPr>
             <a:xfrm>
-              <a:off x="4800012" y="5735711"/>
+              <a:off x="4800012" y="5736270"/>
               <a:ext cx="37957" cy="0"/>
             </a:xfrm>
             <a:custGeom>
@@ -19757,7 +19757,7 @@
           </p:nvSpPr>
           <p:spPr>
             <a:xfrm>
-              <a:off x="4800012" y="5443674"/>
+              <a:off x="4800012" y="5444555"/>
               <a:ext cx="37957" cy="0"/>
             </a:xfrm>
             <a:custGeom>
@@ -19837,7 +19837,7 @@
           </p:nvSpPr>
           <p:spPr>
             <a:xfrm>
-              <a:off x="5227602" y="6991840"/>
+              <a:off x="5114166" y="6991840"/>
               <a:ext cx="0" cy="37957"/>
             </a:xfrm>
             <a:custGeom>
@@ -19877,7 +19877,7 @@
           </p:nvSpPr>
           <p:spPr>
             <a:xfrm>
-              <a:off x="6069492" y="6991840"/>
+              <a:off x="5987676" y="6991840"/>
               <a:ext cx="0" cy="37957"/>
             </a:xfrm>
             <a:custGeom>
@@ -19917,7 +19917,7 @@
           </p:nvSpPr>
           <p:spPr>
             <a:xfrm>
-              <a:off x="6911382" y="6991840"/>
+              <a:off x="6861186" y="6991840"/>
               <a:ext cx="0" cy="37957"/>
             </a:xfrm>
             <a:custGeom>
@@ -19957,7 +19957,7 @@
           </p:nvSpPr>
           <p:spPr>
             <a:xfrm>
-              <a:off x="7753272" y="6991840"/>
+              <a:off x="7734697" y="6991840"/>
               <a:ext cx="0" cy="37957"/>
             </a:xfrm>
             <a:custGeom>
@@ -19997,7 +19997,7 @@
           </p:nvSpPr>
           <p:spPr>
             <a:xfrm>
-              <a:off x="5188740" y="7060163"/>
+              <a:off x="5075304" y="7060163"/>
               <a:ext cx="77724" cy="100218"/>
             </a:xfrm>
             <a:prstGeom prst="rect">
@@ -20043,7 +20043,7 @@
           </p:nvSpPr>
           <p:spPr>
             <a:xfrm>
-              <a:off x="6030630" y="7060163"/>
+              <a:off x="5948814" y="7060163"/>
               <a:ext cx="77724" cy="100218"/>
             </a:xfrm>
             <a:prstGeom prst="rect">
@@ -20089,7 +20089,7 @@
           </p:nvSpPr>
           <p:spPr>
             <a:xfrm>
-              <a:off x="6872520" y="7060163"/>
+              <a:off x="6822324" y="7060163"/>
               <a:ext cx="77724" cy="100218"/>
             </a:xfrm>
             <a:prstGeom prst="rect">
@@ -20135,7 +20135,7 @@
           </p:nvSpPr>
           <p:spPr>
             <a:xfrm>
-              <a:off x="7714410" y="7060163"/>
+              <a:off x="7695835" y="7060163"/>
               <a:ext cx="77724" cy="100218"/>
             </a:xfrm>
             <a:prstGeom prst="rect">

--- a/figures/Figure_1.pptx
+++ b/figures/Figure_1.pptx
@@ -2250,9 +2250,9 @@
         <p:grpSpPr>
           <a:xfrm>
             <a:off x="914400" y="914400"/>
-            <a:ext cx="7315200" cy="7315200"/>
+            <a:ext cx="6120000" cy="6120000"/>
             <a:chOff x="914400" y="914400"/>
-            <a:chExt cx="7315200" cy="7315200"/>
+            <a:chExt cx="6120000" cy="6120000"/>
           </a:xfrm>
         </p:grpSpPr>
         <p:sp>
@@ -2264,7 +2264,7 @@
           <p:spPr>
             <a:xfrm>
               <a:off x="914400" y="914400"/>
-              <a:ext cx="7315200" cy="7315200"/>
+              <a:ext cx="6120000" cy="6120000"/>
             </a:xfrm>
             <a:prstGeom prst="rect">
               <a:avLst/>
@@ -2298,8 +2298,8 @@
           </p:nvSpPr>
           <p:spPr>
             <a:xfrm>
-              <a:off x="8229600" y="914400"/>
-              <a:ext cx="0" cy="7315200"/>
+              <a:off x="914400" y="914400"/>
+              <a:ext cx="6120000" cy="6120000"/>
             </a:xfrm>
             <a:prstGeom prst="rect">
               <a:avLst/>
@@ -2334,7 +2334,7 @@
           <p:spPr>
             <a:xfrm>
               <a:off x="965010" y="939705"/>
-              <a:ext cx="3784392" cy="2092296"/>
+              <a:ext cx="3142498" cy="1733547"/>
             </a:xfrm>
             <a:prstGeom prst="rect">
               <a:avLst/>
@@ -2359,8 +2359,8 @@
           </p:nvSpPr>
           <p:spPr>
             <a:xfrm>
-              <a:off x="4749402" y="939705"/>
-              <a:ext cx="3429587" cy="2092296"/>
+              <a:off x="4107509" y="939705"/>
+              <a:ext cx="2876280" cy="1733547"/>
             </a:xfrm>
             <a:prstGeom prst="rect">
               <a:avLst/>
@@ -2385,8 +2385,8 @@
           </p:nvSpPr>
           <p:spPr>
             <a:xfrm>
-              <a:off x="965010" y="3032001"/>
-              <a:ext cx="3784392" cy="2092296"/>
+              <a:off x="965010" y="2673252"/>
+              <a:ext cx="3142498" cy="1733547"/>
             </a:xfrm>
             <a:prstGeom prst="rect">
               <a:avLst/>
@@ -2411,8 +2411,8 @@
           </p:nvSpPr>
           <p:spPr>
             <a:xfrm>
-              <a:off x="4749402" y="3032001"/>
-              <a:ext cx="3429587" cy="2092296"/>
+              <a:off x="4107509" y="2673252"/>
+              <a:ext cx="2876280" cy="1733547"/>
             </a:xfrm>
             <a:prstGeom prst="rect">
               <a:avLst/>
@@ -2437,8 +2437,8 @@
           </p:nvSpPr>
           <p:spPr>
             <a:xfrm>
-              <a:off x="965010" y="5124297"/>
-              <a:ext cx="3784392" cy="3079997"/>
+              <a:off x="965010" y="4406799"/>
+              <a:ext cx="3142498" cy="2602295"/>
             </a:xfrm>
             <a:prstGeom prst="rect">
               <a:avLst/>
@@ -2463,8 +2463,8 @@
           </p:nvSpPr>
           <p:spPr>
             <a:xfrm>
-              <a:off x="4749402" y="5124297"/>
-              <a:ext cx="3429587" cy="3079997"/>
+              <a:off x="4107509" y="4406799"/>
+              <a:ext cx="2876280" cy="2602295"/>
             </a:xfrm>
             <a:prstGeom prst="rect">
               <a:avLst/>
@@ -2489,8 +2489,8 @@
           </p:nvSpPr>
           <p:spPr>
             <a:xfrm>
-              <a:off x="1408383" y="1208169"/>
-              <a:ext cx="3290409" cy="1599078"/>
+              <a:off x="1310306" y="1141550"/>
+              <a:ext cx="2746591" cy="1359782"/>
             </a:xfrm>
             <a:prstGeom prst="rect">
               <a:avLst/>
@@ -2515,8 +2515,8 @@
           </p:nvSpPr>
           <p:spPr>
             <a:xfrm>
-              <a:off x="1754597" y="2516580"/>
-              <a:ext cx="77571" cy="77571"/>
+              <a:off x="1453146" y="2249407"/>
+              <a:ext cx="75116" cy="75116"/>
             </a:xfrm>
             <a:prstGeom prst="ellipse">
               <a:avLst/>
@@ -2541,8 +2541,8 @@
           </p:nvSpPr>
           <p:spPr>
             <a:xfrm>
-              <a:off x="1538470" y="2437262"/>
-              <a:ext cx="77571" cy="77571"/>
+              <a:off x="1603587" y="2182075"/>
+              <a:ext cx="75116" cy="75116"/>
             </a:xfrm>
             <a:prstGeom prst="ellipse">
               <a:avLst/>
@@ -2567,8 +2567,8 @@
           </p:nvSpPr>
           <p:spPr>
             <a:xfrm>
-              <a:off x="1738645" y="2556653"/>
-              <a:ext cx="77571" cy="77571"/>
+              <a:off x="1440333" y="2283629"/>
+              <a:ext cx="75116" cy="75116"/>
             </a:xfrm>
             <a:prstGeom prst="ellipse">
               <a:avLst/>
@@ -2593,8 +2593,8 @@
           </p:nvSpPr>
           <p:spPr>
             <a:xfrm>
-              <a:off x="1618973" y="2553316"/>
-              <a:ext cx="77571" cy="77571"/>
+              <a:off x="1397593" y="2280745"/>
+              <a:ext cx="75116" cy="75116"/>
             </a:xfrm>
             <a:prstGeom prst="ellipse">
               <a:avLst/>
@@ -2619,8 +2619,8 @@
           </p:nvSpPr>
           <p:spPr>
             <a:xfrm>
-              <a:off x="1519161" y="2582731"/>
-              <a:ext cx="77571" cy="77571"/>
+              <a:off x="1411488" y="2305719"/>
+              <a:ext cx="75116" cy="75116"/>
             </a:xfrm>
             <a:prstGeom prst="ellipse">
               <a:avLst/>
@@ -2645,8 +2645,8 @@
           </p:nvSpPr>
           <p:spPr>
             <a:xfrm>
-              <a:off x="1641907" y="2415461"/>
-              <a:ext cx="77571" cy="77571"/>
+              <a:off x="1509321" y="2163499"/>
+              <a:ext cx="75116" cy="75116"/>
             </a:xfrm>
             <a:prstGeom prst="ellipse">
               <a:avLst/>
@@ -2671,8 +2671,8 @@
           </p:nvSpPr>
           <p:spPr>
             <a:xfrm>
-              <a:off x="1531667" y="2322351"/>
-              <a:ext cx="77571" cy="77571"/>
+              <a:off x="1534963" y="2084244"/>
+              <a:ext cx="75116" cy="75116"/>
             </a:xfrm>
             <a:prstGeom prst="ellipse">
               <a:avLst/>
@@ -2697,8 +2697,8 @@
           </p:nvSpPr>
           <p:spPr>
             <a:xfrm>
-              <a:off x="1657687" y="2535083"/>
-              <a:ext cx="77571" cy="77571"/>
+              <a:off x="1444685" y="2265247"/>
+              <a:ext cx="75116" cy="75116"/>
             </a:xfrm>
             <a:prstGeom prst="ellipse">
               <a:avLst/>
@@ -2723,8 +2723,8 @@
           </p:nvSpPr>
           <p:spPr>
             <a:xfrm>
-              <a:off x="1624583" y="2616247"/>
-              <a:ext cx="77571" cy="77571"/>
+              <a:off x="1432321" y="2334279"/>
+              <a:ext cx="75116" cy="75116"/>
             </a:xfrm>
             <a:prstGeom prst="ellipse">
               <a:avLst/>
@@ -2749,8 +2749,8 @@
           </p:nvSpPr>
           <p:spPr>
             <a:xfrm>
-              <a:off x="1674591" y="2392419"/>
-              <a:ext cx="77571" cy="77571"/>
+              <a:off x="1469420" y="2143913"/>
+              <a:ext cx="75116" cy="75116"/>
             </a:xfrm>
             <a:prstGeom prst="ellipse">
               <a:avLst/>
@@ -2775,8 +2775,8 @@
           </p:nvSpPr>
           <p:spPr>
             <a:xfrm>
-              <a:off x="2576799" y="2625651"/>
-              <a:ext cx="77571" cy="77571"/>
+              <a:off x="2288300" y="2342285"/>
+              <a:ext cx="75116" cy="75116"/>
             </a:xfrm>
             <a:prstGeom prst="ellipse">
               <a:avLst/>
@@ -2801,8 +2801,8 @@
           </p:nvSpPr>
           <p:spPr>
             <a:xfrm>
-              <a:off x="2466821" y="2554220"/>
-              <a:ext cx="77571" cy="77571"/>
+              <a:off x="2273398" y="2281447"/>
+              <a:ext cx="75116" cy="75116"/>
             </a:xfrm>
             <a:prstGeom prst="ellipse">
               <a:avLst/>
@@ -2827,8 +2827,8 @@
           </p:nvSpPr>
           <p:spPr>
             <a:xfrm>
-              <a:off x="2467388" y="1874002"/>
-              <a:ext cx="77571" cy="77571"/>
+              <a:off x="2162276" y="1703175"/>
+              <a:ext cx="75116" cy="75116"/>
             </a:xfrm>
             <a:prstGeom prst="ellipse">
               <a:avLst/>
@@ -2853,8 +2853,8 @@
           </p:nvSpPr>
           <p:spPr>
             <a:xfrm>
-              <a:off x="2620685" y="2463373"/>
-              <a:ext cx="77571" cy="77571"/>
+              <a:off x="2305331" y="2204238"/>
+              <a:ext cx="75116" cy="75116"/>
             </a:xfrm>
             <a:prstGeom prst="ellipse">
               <a:avLst/>
@@ -2879,8 +2879,8 @@
           </p:nvSpPr>
           <p:spPr>
             <a:xfrm>
-              <a:off x="2537698" y="2547275"/>
-              <a:ext cx="77571" cy="77571"/>
+              <a:off x="2214221" y="2275565"/>
+              <a:ext cx="75116" cy="75116"/>
             </a:xfrm>
             <a:prstGeom prst="ellipse">
               <a:avLst/>
@@ -2905,8 +2905,8 @@
           </p:nvSpPr>
           <p:spPr>
             <a:xfrm>
-              <a:off x="2664772" y="2619352"/>
-              <a:ext cx="77571" cy="77571"/>
+              <a:off x="2342987" y="2336845"/>
+              <a:ext cx="75116" cy="75116"/>
             </a:xfrm>
             <a:prstGeom prst="ellipse">
               <a:avLst/>
@@ -2931,8 +2931,8 @@
           </p:nvSpPr>
           <p:spPr>
             <a:xfrm>
-              <a:off x="2492835" y="2648588"/>
-              <a:ext cx="77571" cy="77571"/>
+              <a:off x="2263682" y="2361731"/>
+              <a:ext cx="75116" cy="75116"/>
             </a:xfrm>
             <a:prstGeom prst="ellipse">
               <a:avLst/>
@@ -2957,8 +2957,8 @@
           </p:nvSpPr>
           <p:spPr>
             <a:xfrm>
-              <a:off x="2437090" y="2454026"/>
-              <a:ext cx="77571" cy="77571"/>
+              <a:off x="2354678" y="2196331"/>
+              <a:ext cx="75116" cy="75116"/>
             </a:xfrm>
             <a:prstGeom prst="ellipse">
               <a:avLst/>
@@ -2983,8 +2983,8 @@
           </p:nvSpPr>
           <p:spPr>
             <a:xfrm>
-              <a:off x="2589313" y="1732550"/>
-              <a:ext cx="77571" cy="77571"/>
+              <a:off x="2246425" y="1582900"/>
+              <a:ext cx="75116" cy="75116"/>
             </a:xfrm>
             <a:prstGeom prst="ellipse">
               <a:avLst/>
@@ -3009,8 +3009,8 @@
           </p:nvSpPr>
           <p:spPr>
             <a:xfrm>
-              <a:off x="2555111" y="1943022"/>
-              <a:ext cx="77571" cy="77571"/>
+              <a:off x="2320236" y="1761884"/>
+              <a:ext cx="75116" cy="75116"/>
             </a:xfrm>
             <a:prstGeom prst="ellipse">
               <a:avLst/>
@@ -3035,8 +3035,8 @@
           </p:nvSpPr>
           <p:spPr>
             <a:xfrm>
-              <a:off x="2645637" y="2637831"/>
-              <a:ext cx="77571" cy="77571"/>
+              <a:off x="2315106" y="2352695"/>
+              <a:ext cx="75116" cy="75116"/>
             </a:xfrm>
             <a:prstGeom prst="ellipse">
               <a:avLst/>
@@ -3061,8 +3061,8 @@
           </p:nvSpPr>
           <p:spPr>
             <a:xfrm>
-              <a:off x="2582740" y="2409228"/>
-              <a:ext cx="77571" cy="77571"/>
+              <a:off x="2323087" y="2158181"/>
+              <a:ext cx="75116" cy="75116"/>
             </a:xfrm>
             <a:prstGeom prst="ellipse">
               <a:avLst/>
@@ -3087,8 +3087,8 @@
           </p:nvSpPr>
           <p:spPr>
             <a:xfrm>
-              <a:off x="2624950" y="2345867"/>
-              <a:ext cx="77571" cy="77571"/>
+              <a:off x="2287926" y="2104397"/>
+              <a:ext cx="75116" cy="75116"/>
             </a:xfrm>
             <a:prstGeom prst="ellipse">
               <a:avLst/>
@@ -3113,8 +3113,8 @@
           </p:nvSpPr>
           <p:spPr>
             <a:xfrm>
-              <a:off x="2556895" y="2357000"/>
-              <a:ext cx="77571" cy="77571"/>
+              <a:off x="2329714" y="2113825"/>
+              <a:ext cx="75116" cy="75116"/>
             </a:xfrm>
             <a:prstGeom prst="ellipse">
               <a:avLst/>
@@ -3139,8 +3139,8 @@
           </p:nvSpPr>
           <p:spPr>
             <a:xfrm>
-              <a:off x="2479738" y="2539415"/>
-              <a:ext cx="77571" cy="77571"/>
+              <a:off x="2208508" y="2268902"/>
+              <a:ext cx="75116" cy="75116"/>
             </a:xfrm>
             <a:prstGeom prst="ellipse">
               <a:avLst/>
@@ -3165,8 +3165,8 @@
           </p:nvSpPr>
           <p:spPr>
             <a:xfrm>
-              <a:off x="2580442" y="2471871"/>
-              <a:ext cx="77571" cy="77571"/>
+              <a:off x="2274098" y="2211459"/>
+              <a:ext cx="75116" cy="75116"/>
             </a:xfrm>
             <a:prstGeom prst="ellipse">
               <a:avLst/>
@@ -3191,8 +3191,8 @@
           </p:nvSpPr>
           <p:spPr>
             <a:xfrm>
-              <a:off x="2640474" y="1934012"/>
-              <a:ext cx="77571" cy="77571"/>
+              <a:off x="2299517" y="1754121"/>
+              <a:ext cx="75116" cy="75116"/>
             </a:xfrm>
             <a:prstGeom prst="ellipse">
               <a:avLst/>
@@ -3217,8 +3217,8 @@
           </p:nvSpPr>
           <p:spPr>
             <a:xfrm>
-              <a:off x="2513658" y="2087839"/>
-              <a:ext cx="77571" cy="77571"/>
+              <a:off x="2321799" y="1885034"/>
+              <a:ext cx="75116" cy="75116"/>
             </a:xfrm>
             <a:prstGeom prst="ellipse">
               <a:avLst/>
@@ -3243,8 +3243,8 @@
           </p:nvSpPr>
           <p:spPr>
             <a:xfrm>
-              <a:off x="3367039" y="2580021"/>
-              <a:ext cx="77571" cy="77571"/>
+              <a:off x="2982326" y="2303410"/>
+              <a:ext cx="75116" cy="75116"/>
             </a:xfrm>
             <a:prstGeom prst="ellipse">
               <a:avLst/>
@@ -3269,8 +3269,8 @@
           </p:nvSpPr>
           <p:spPr>
             <a:xfrm>
-              <a:off x="3376930" y="2335014"/>
-              <a:ext cx="77571" cy="77571"/>
+              <a:off x="3095139" y="2095177"/>
+              <a:ext cx="75116" cy="75116"/>
             </a:xfrm>
             <a:prstGeom prst="ellipse">
               <a:avLst/>
@@ -3295,8 +3295,8 @@
           </p:nvSpPr>
           <p:spPr>
             <a:xfrm>
-              <a:off x="3526235" y="2594107"/>
-              <a:ext cx="77571" cy="77571"/>
+              <a:off x="3038492" y="2315447"/>
+              <a:ext cx="75116" cy="75116"/>
             </a:xfrm>
             <a:prstGeom prst="ellipse">
               <a:avLst/>
@@ -3321,8 +3321,8 @@
           </p:nvSpPr>
           <p:spPr>
             <a:xfrm>
-              <a:off x="3528226" y="2695776"/>
-              <a:ext cx="77571" cy="77571"/>
+              <a:off x="3031155" y="2401965"/>
+              <a:ext cx="75116" cy="75116"/>
             </a:xfrm>
             <a:prstGeom prst="ellipse">
               <a:avLst/>
@@ -3347,8 +3347,8 @@
           </p:nvSpPr>
           <p:spPr>
             <a:xfrm>
-              <a:off x="3548872" y="2409163"/>
-              <a:ext cx="77571" cy="77571"/>
+              <a:off x="3091439" y="2158223"/>
+              <a:ext cx="75116" cy="75116"/>
             </a:xfrm>
             <a:prstGeom prst="ellipse">
               <a:avLst/>
@@ -3373,8 +3373,8 @@
           </p:nvSpPr>
           <p:spPr>
             <a:xfrm>
-              <a:off x="3542162" y="2568105"/>
-              <a:ext cx="77571" cy="77571"/>
+              <a:off x="2987949" y="2293336"/>
+              <a:ext cx="75116" cy="75116"/>
             </a:xfrm>
             <a:prstGeom prst="ellipse">
               <a:avLst/>
@@ -3399,8 +3399,8 @@
           </p:nvSpPr>
           <p:spPr>
             <a:xfrm>
-              <a:off x="3345365" y="1538117"/>
-              <a:ext cx="77571" cy="77571"/>
+              <a:off x="3030211" y="1417635"/>
+              <a:ext cx="75116" cy="75116"/>
             </a:xfrm>
             <a:prstGeom prst="ellipse">
               <a:avLst/>
@@ -3425,8 +3425,8 @@
           </p:nvSpPr>
           <p:spPr>
             <a:xfrm>
-              <a:off x="3544040" y="2619488"/>
-              <a:ext cx="77571" cy="77571"/>
+              <a:off x="2996891" y="2337083"/>
+              <a:ext cx="75116" cy="75116"/>
             </a:xfrm>
             <a:prstGeom prst="ellipse">
               <a:avLst/>
@@ -3451,8 +3451,8 @@
           </p:nvSpPr>
           <p:spPr>
             <a:xfrm>
-              <a:off x="3371985" y="2232982"/>
-              <a:ext cx="77571" cy="77571"/>
+              <a:off x="3075540" y="2008447"/>
+              <a:ext cx="75116" cy="75116"/>
             </a:xfrm>
             <a:prstGeom prst="ellipse">
               <a:avLst/>
@@ -3477,8 +3477,8 @@
           </p:nvSpPr>
           <p:spPr>
             <a:xfrm>
-              <a:off x="3482628" y="1857892"/>
-              <a:ext cx="77571" cy="77571"/>
+              <a:off x="2975010" y="1689437"/>
+              <a:ext cx="75116" cy="75116"/>
             </a:xfrm>
             <a:prstGeom prst="ellipse">
               <a:avLst/>
@@ -3503,8 +3503,8 @@
           </p:nvSpPr>
           <p:spPr>
             <a:xfrm>
-              <a:off x="3462318" y="1242069"/>
-              <a:ext cx="77571" cy="77571"/>
+              <a:off x="2962836" y="1165800"/>
+              <a:ext cx="75116" cy="75116"/>
             </a:xfrm>
             <a:prstGeom prst="ellipse">
               <a:avLst/>
@@ -3529,8 +3529,8 @@
           </p:nvSpPr>
           <p:spPr>
             <a:xfrm>
-              <a:off x="3531264" y="2120311"/>
-              <a:ext cx="77571" cy="77571"/>
+              <a:off x="3087251" y="1912657"/>
+              <a:ext cx="75116" cy="75116"/>
             </a:xfrm>
             <a:prstGeom prst="ellipse">
               <a:avLst/>
@@ -3555,8 +3555,8 @@
           </p:nvSpPr>
           <p:spPr>
             <a:xfrm>
-              <a:off x="3593610" y="2306912"/>
-              <a:ext cx="77571" cy="77571"/>
+              <a:off x="3059766" y="2071181"/>
+              <a:ext cx="75116" cy="75116"/>
             </a:xfrm>
             <a:prstGeom prst="ellipse">
               <a:avLst/>
@@ -3581,8 +3581,8 @@
           </p:nvSpPr>
           <p:spPr>
             <a:xfrm>
-              <a:off x="3549990" y="2149271"/>
-              <a:ext cx="77571" cy="77571"/>
+              <a:off x="2962575" y="1937175"/>
+              <a:ext cx="75116" cy="75116"/>
             </a:xfrm>
             <a:prstGeom prst="ellipse">
               <a:avLst/>
@@ -3607,8 +3607,8 @@
           </p:nvSpPr>
           <p:spPr>
             <a:xfrm>
-              <a:off x="3404776" y="2277701"/>
-              <a:ext cx="77571" cy="77571"/>
+              <a:off x="3113590" y="2046463"/>
+              <a:ext cx="75116" cy="75116"/>
             </a:xfrm>
             <a:prstGeom prst="ellipse">
               <a:avLst/>
@@ -3633,8 +3633,8 @@
           </p:nvSpPr>
           <p:spPr>
             <a:xfrm>
-              <a:off x="3482269" y="2448926"/>
-              <a:ext cx="77571" cy="77571"/>
+              <a:off x="3010386" y="2191956"/>
+              <a:ext cx="75116" cy="75116"/>
             </a:xfrm>
             <a:prstGeom prst="ellipse">
               <a:avLst/>
@@ -3659,8 +3659,8 @@
           </p:nvSpPr>
           <p:spPr>
             <a:xfrm>
-              <a:off x="3347665" y="2350984"/>
-              <a:ext cx="77571" cy="77571"/>
+              <a:off x="3015665" y="2108721"/>
+              <a:ext cx="75116" cy="75116"/>
             </a:xfrm>
             <a:prstGeom prst="ellipse">
               <a:avLst/>
@@ -3685,8 +3685,8 @@
           </p:nvSpPr>
           <p:spPr>
             <a:xfrm>
-              <a:off x="3424475" y="2334711"/>
-              <a:ext cx="77571" cy="77571"/>
+              <a:off x="2972928" y="2094823"/>
+              <a:ext cx="75116" cy="75116"/>
             </a:xfrm>
             <a:prstGeom prst="ellipse">
               <a:avLst/>
@@ -3711,8 +3711,8 @@
           </p:nvSpPr>
           <p:spPr>
             <a:xfrm>
-              <a:off x="3524240" y="2447414"/>
-              <a:ext cx="77571" cy="77571"/>
+              <a:off x="3016582" y="2190648"/>
+              <a:ext cx="75116" cy="75116"/>
             </a:xfrm>
             <a:prstGeom prst="ellipse">
               <a:avLst/>
@@ -3737,8 +3737,8 @@
           </p:nvSpPr>
           <p:spPr>
             <a:xfrm>
-              <a:off x="3563966" y="2435553"/>
-              <a:ext cx="77571" cy="77571"/>
+              <a:off x="2943863" y="2180690"/>
+              <a:ext cx="75116" cy="75116"/>
             </a:xfrm>
             <a:prstGeom prst="ellipse">
               <a:avLst/>
@@ -3763,8 +3763,8 @@
           </p:nvSpPr>
           <p:spPr>
             <a:xfrm>
-              <a:off x="4291276" y="2455101"/>
-              <a:ext cx="77571" cy="77571"/>
+              <a:off x="3808459" y="2197179"/>
+              <a:ext cx="75116" cy="75116"/>
             </a:xfrm>
             <a:prstGeom prst="ellipse">
               <a:avLst/>
@@ -3789,8 +3789,8 @@
           </p:nvSpPr>
           <p:spPr>
             <a:xfrm>
-              <a:off x="4289957" y="2452565"/>
-              <a:ext cx="77571" cy="77571"/>
+              <a:off x="3796734" y="2195049"/>
+              <a:ext cx="75116" cy="75116"/>
             </a:xfrm>
             <a:prstGeom prst="ellipse">
               <a:avLst/>
@@ -3815,8 +3815,8 @@
           </p:nvSpPr>
           <p:spPr>
             <a:xfrm>
-              <a:off x="4482198" y="2403705"/>
-              <a:ext cx="77571" cy="77571"/>
+              <a:off x="3818476" y="2153496"/>
+              <a:ext cx="75116" cy="75116"/>
             </a:xfrm>
             <a:prstGeom prst="ellipse">
               <a:avLst/>
@@ -3841,8 +3841,8 @@
           </p:nvSpPr>
           <p:spPr>
             <a:xfrm>
-              <a:off x="4510442" y="2558337"/>
-              <a:ext cx="77571" cy="77571"/>
+              <a:off x="3794476" y="2284949"/>
+              <a:ext cx="75116" cy="75116"/>
             </a:xfrm>
             <a:prstGeom prst="ellipse">
               <a:avLst/>
@@ -3867,8 +3867,8 @@
           </p:nvSpPr>
           <p:spPr>
             <a:xfrm>
-              <a:off x="4365447" y="2141605"/>
-              <a:ext cx="77571" cy="77571"/>
+              <a:off x="3890625" y="1930692"/>
+              <a:ext cx="75116" cy="75116"/>
             </a:xfrm>
             <a:prstGeom prst="ellipse">
               <a:avLst/>
@@ -3893,8 +3893,8 @@
           </p:nvSpPr>
           <p:spPr>
             <a:xfrm>
-              <a:off x="4350993" y="2161987"/>
-              <a:ext cx="77571" cy="77571"/>
+              <a:off x="3785199" y="1947943"/>
+              <a:ext cx="75116" cy="75116"/>
             </a:xfrm>
             <a:prstGeom prst="ellipse">
               <a:avLst/>
@@ -3919,8 +3919,8 @@
           </p:nvSpPr>
           <p:spPr>
             <a:xfrm>
-              <a:off x="4447381" y="2406278"/>
-              <a:ext cx="77571" cy="77571"/>
+              <a:off x="3886384" y="2155630"/>
+              <a:ext cx="75116" cy="75116"/>
             </a:xfrm>
             <a:prstGeom prst="ellipse">
               <a:avLst/>
@@ -3945,8 +3945,8 @@
           </p:nvSpPr>
           <p:spPr>
             <a:xfrm>
-              <a:off x="4260325" y="2321248"/>
-              <a:ext cx="77571" cy="77571"/>
+              <a:off x="3850401" y="2083470"/>
+              <a:ext cx="75116" cy="75116"/>
             </a:xfrm>
             <a:prstGeom prst="ellipse">
               <a:avLst/>
@@ -3971,8 +3971,8 @@
           </p:nvSpPr>
           <p:spPr>
             <a:xfrm>
-              <a:off x="4257586" y="2221200"/>
-              <a:ext cx="77571" cy="77571"/>
+              <a:off x="3758394" y="1998317"/>
+              <a:ext cx="75116" cy="75116"/>
             </a:xfrm>
             <a:prstGeom prst="ellipse">
               <a:avLst/>
@@ -3997,8 +3997,8 @@
           </p:nvSpPr>
           <p:spPr>
             <a:xfrm>
-              <a:off x="4372966" y="1968911"/>
-              <a:ext cx="77571" cy="77571"/>
+              <a:off x="3742450" y="1783804"/>
+              <a:ext cx="75116" cy="75116"/>
             </a:xfrm>
             <a:prstGeom prst="ellipse">
               <a:avLst/>
@@ -4023,8 +4023,8 @@
           </p:nvSpPr>
           <p:spPr>
             <a:xfrm>
-              <a:off x="4360277" y="2043585"/>
-              <a:ext cx="77571" cy="77571"/>
+              <a:off x="3894495" y="1847272"/>
+              <a:ext cx="75116" cy="75116"/>
             </a:xfrm>
             <a:prstGeom prst="ellipse">
               <a:avLst/>
@@ -4049,8 +4049,8 @@
           </p:nvSpPr>
           <p:spPr>
             <a:xfrm>
-              <a:off x="4405227" y="1890179"/>
-              <a:ext cx="77571" cy="77571"/>
+              <a:off x="3734957" y="1716968"/>
+              <a:ext cx="75116" cy="75116"/>
             </a:xfrm>
             <a:prstGeom prst="ellipse">
               <a:avLst/>
@@ -4075,8 +4075,8 @@
           </p:nvSpPr>
           <p:spPr>
             <a:xfrm>
-              <a:off x="4452929" y="2150270"/>
-              <a:ext cx="77571" cy="77571"/>
+              <a:off x="3864402" y="1938013"/>
+              <a:ext cx="75116" cy="75116"/>
             </a:xfrm>
             <a:prstGeom prst="ellipse">
               <a:avLst/>
@@ -4101,8 +4101,8 @@
           </p:nvSpPr>
           <p:spPr>
             <a:xfrm>
-              <a:off x="4338436" y="2077066"/>
-              <a:ext cx="77571" cy="77571"/>
+              <a:off x="3764553" y="1875806"/>
+              <a:ext cx="75116" cy="75116"/>
             </a:xfrm>
             <a:prstGeom prst="ellipse">
               <a:avLst/>
@@ -4127,8 +4127,8 @@
           </p:nvSpPr>
           <p:spPr>
             <a:xfrm>
-              <a:off x="4370076" y="2522882"/>
-              <a:ext cx="77571" cy="77571"/>
+              <a:off x="3703310" y="2254799"/>
+              <a:ext cx="75116" cy="75116"/>
             </a:xfrm>
             <a:prstGeom prst="ellipse">
               <a:avLst/>
@@ -4153,8 +4153,8 @@
           </p:nvSpPr>
           <p:spPr>
             <a:xfrm>
-              <a:off x="4309602" y="2340218"/>
-              <a:ext cx="77571" cy="77571"/>
+              <a:off x="3890767" y="2099597"/>
+              <a:ext cx="75116" cy="75116"/>
             </a:xfrm>
             <a:prstGeom prst="ellipse">
               <a:avLst/>
@@ -4179,8 +4179,8 @@
           </p:nvSpPr>
           <p:spPr>
             <a:xfrm>
-              <a:off x="4279171" y="2236747"/>
-              <a:ext cx="77571" cy="77571"/>
+              <a:off x="3832755" y="2011617"/>
+              <a:ext cx="75116" cy="75116"/>
             </a:xfrm>
             <a:prstGeom prst="ellipse">
               <a:avLst/>
@@ -4205,8 +4205,8 @@
           </p:nvSpPr>
           <p:spPr>
             <a:xfrm>
-              <a:off x="4425431" y="2304952"/>
-              <a:ext cx="77571" cy="77571"/>
+              <a:off x="3805586" y="2069614"/>
+              <a:ext cx="75116" cy="75116"/>
             </a:xfrm>
             <a:prstGeom prst="ellipse">
               <a:avLst/>
@@ -4231,8 +4231,8 @@
           </p:nvSpPr>
           <p:spPr>
             <a:xfrm>
-              <a:off x="4294026" y="2016671"/>
-              <a:ext cx="77571" cy="77571"/>
+              <a:off x="3780771" y="1824514"/>
+              <a:ext cx="75116" cy="75116"/>
             </a:xfrm>
             <a:prstGeom prst="ellipse">
               <a:avLst/>
@@ -4257,8 +4257,8 @@
           </p:nvSpPr>
           <p:spPr>
             <a:xfrm>
-              <a:off x="4445538" y="2272679"/>
-              <a:ext cx="77571" cy="77571"/>
+              <a:off x="3816836" y="2042105"/>
+              <a:ext cx="75116" cy="75116"/>
             </a:xfrm>
             <a:prstGeom prst="ellipse">
               <a:avLst/>
@@ -4283,8 +4283,8 @@
           </p:nvSpPr>
           <p:spPr>
             <a:xfrm>
-              <a:off x="4413991" y="2122433"/>
-              <a:ext cx="77571" cy="77571"/>
+              <a:off x="3704147" y="1914432"/>
+              <a:ext cx="75116" cy="75116"/>
             </a:xfrm>
             <a:prstGeom prst="ellipse">
               <a:avLst/>
@@ -4309,8 +4309,8 @@
           </p:nvSpPr>
           <p:spPr>
             <a:xfrm>
-              <a:off x="4452134" y="1998821"/>
-              <a:ext cx="77571" cy="77571"/>
+              <a:off x="3810514" y="1809195"/>
+              <a:ext cx="75116" cy="75116"/>
             </a:xfrm>
             <a:prstGeom prst="ellipse">
               <a:avLst/>
@@ -4335,8 +4335,8 @@
           </p:nvSpPr>
           <p:spPr>
             <a:xfrm>
-              <a:off x="4394177" y="2184802"/>
-              <a:ext cx="77571" cy="77571"/>
+              <a:off x="3741816" y="1967343"/>
+              <a:ext cx="75116" cy="75116"/>
             </a:xfrm>
             <a:prstGeom prst="ellipse">
               <a:avLst/>
@@ -4361,8 +4361,8 @@
           </p:nvSpPr>
           <p:spPr>
             <a:xfrm>
-              <a:off x="4363612" y="2151011"/>
-              <a:ext cx="77571" cy="77571"/>
+              <a:off x="3750841" y="1938746"/>
+              <a:ext cx="75116" cy="75116"/>
             </a:xfrm>
             <a:prstGeom prst="ellipse">
               <a:avLst/>
@@ -4387,42 +4387,42 @@
           </p:nvSpPr>
           <p:spPr>
             <a:xfrm>
-              <a:off x="1680047" y="2055909"/>
-              <a:ext cx="2742301" cy="627957"/>
+              <a:off x="1544118" y="1862409"/>
+              <a:ext cx="2278536" cy="533928"/>
             </a:xfrm>
             <a:custGeom>
               <a:avLst/>
               <a:pathLst>
-                <a:path w="2742301" h="627957">
+                <a:path w="2278536" h="533928">
                   <a:moveTo>
-                    <a:pt x="0" y="178224"/>
+                    <a:pt x="0" y="151537"/>
                   </a:moveTo>
                   <a:lnTo>
-                    <a:pt x="1448814" y="171038"/>
+                    <a:pt x="1203798" y="145427"/>
                   </a:lnTo>
                   <a:lnTo>
-                    <a:pt x="1828200" y="135952"/>
+                    <a:pt x="1519024" y="115595"/>
                   </a:lnTo>
                   <a:lnTo>
-                    <a:pt x="2362915" y="62381"/>
+                    <a:pt x="1963310" y="53040"/>
                   </a:lnTo>
                   <a:lnTo>
-                    <a:pt x="2742301" y="0"/>
+                    <a:pt x="2278536" y="0"/>
                   </a:lnTo>
                   <a:lnTo>
-                    <a:pt x="2742301" y="406938"/>
+                    <a:pt x="2278536" y="346003"/>
                   </a:lnTo>
                   <a:lnTo>
-                    <a:pt x="2362915" y="399790"/>
+                    <a:pt x="1963310" y="339926"/>
                   </a:lnTo>
                   <a:lnTo>
-                    <a:pt x="1828200" y="404067"/>
+                    <a:pt x="1519024" y="343562"/>
                   </a:lnTo>
                   <a:lnTo>
-                    <a:pt x="1448814" y="424214"/>
+                    <a:pt x="1203798" y="360693"/>
                   </a:lnTo>
                   <a:lnTo>
-                    <a:pt x="0" y="627957"/>
+                    <a:pt x="0" y="533928"/>
                   </a:lnTo>
                   <a:close/>
                 </a:path>
@@ -4448,27 +4448,27 @@
           </p:nvSpPr>
           <p:spPr>
             <a:xfrm>
-              <a:off x="1680047" y="2055909"/>
-              <a:ext cx="2742301" cy="178224"/>
+              <a:off x="1544118" y="1862409"/>
+              <a:ext cx="2278536" cy="151537"/>
             </a:xfrm>
             <a:custGeom>
               <a:avLst/>
               <a:pathLst>
-                <a:path w="2742301" h="178224">
+                <a:path w="2278536" h="151537">
                   <a:moveTo>
-                    <a:pt x="0" y="178224"/>
+                    <a:pt x="0" y="151537"/>
                   </a:moveTo>
                   <a:lnTo>
-                    <a:pt x="1448814" y="171038"/>
+                    <a:pt x="1203798" y="145427"/>
                   </a:lnTo>
                   <a:lnTo>
-                    <a:pt x="1828200" y="135952"/>
+                    <a:pt x="1519024" y="115595"/>
                   </a:lnTo>
                   <a:lnTo>
-                    <a:pt x="2362915" y="62381"/>
+                    <a:pt x="1963310" y="53040"/>
                   </a:lnTo>
                   <a:lnTo>
-                    <a:pt x="2742301" y="0"/>
+                    <a:pt x="2278536" y="0"/>
                   </a:lnTo>
                 </a:path>
               </a:pathLst>
@@ -4488,27 +4488,27 @@
           </p:nvSpPr>
           <p:spPr>
             <a:xfrm>
-              <a:off x="1680047" y="2455700"/>
-              <a:ext cx="2742301" cy="228167"/>
+              <a:off x="1544118" y="2202335"/>
+              <a:ext cx="2278536" cy="194001"/>
             </a:xfrm>
             <a:custGeom>
               <a:avLst/>
               <a:pathLst>
-                <a:path w="2742301" h="228167">
+                <a:path w="2278536" h="194001">
                   <a:moveTo>
-                    <a:pt x="2742301" y="7147"/>
+                    <a:pt x="2278536" y="6077"/>
                   </a:moveTo>
                   <a:lnTo>
-                    <a:pt x="2362915" y="0"/>
+                    <a:pt x="1963310" y="0"/>
                   </a:lnTo>
                   <a:lnTo>
-                    <a:pt x="1828200" y="4276"/>
+                    <a:pt x="1519024" y="3636"/>
                   </a:lnTo>
                   <a:lnTo>
-                    <a:pt x="1448814" y="24424"/>
+                    <a:pt x="1203798" y="20766"/>
                   </a:lnTo>
                   <a:lnTo>
-                    <a:pt x="0" y="228167"/>
+                    <a:pt x="0" y="194001"/>
                   </a:lnTo>
                 </a:path>
               </a:pathLst>
@@ -4528,27 +4528,27 @@
           </p:nvSpPr>
           <p:spPr>
             <a:xfrm>
-              <a:off x="1680047" y="2259378"/>
-              <a:ext cx="2742301" cy="199622"/>
+              <a:off x="1544118" y="2035411"/>
+              <a:ext cx="2278536" cy="169730"/>
             </a:xfrm>
             <a:custGeom>
               <a:avLst/>
               <a:pathLst>
-                <a:path w="2742301" h="199622">
+                <a:path w="2278536" h="169730">
                   <a:moveTo>
-                    <a:pt x="0" y="199622"/>
+                    <a:pt x="0" y="169730"/>
                   </a:moveTo>
                   <a:lnTo>
-                    <a:pt x="1448814" y="94157"/>
+                    <a:pt x="1203798" y="80058"/>
                   </a:lnTo>
                   <a:lnTo>
-                    <a:pt x="1828200" y="66540"/>
+                    <a:pt x="1519024" y="56576"/>
                   </a:lnTo>
                   <a:lnTo>
-                    <a:pt x="2362915" y="27616"/>
+                    <a:pt x="1963310" y="23481"/>
                   </a:lnTo>
                   <a:lnTo>
-                    <a:pt x="2742301" y="0"/>
+                    <a:pt x="2278536" y="0"/>
                   </a:lnTo>
                 </a:path>
               </a:pathLst>
@@ -4577,7 +4577,7 @@
           </p:nvSpPr>
           <p:spPr>
             <a:xfrm>
-              <a:off x="3942654" y="1344214"/>
+              <a:off x="3342960" y="1245000"/>
               <a:ext cx="479694" cy="82021"/>
             </a:xfrm>
             <a:prstGeom prst="rect">
@@ -4623,8 +4623,8 @@
           </p:nvSpPr>
           <p:spPr>
             <a:xfrm>
-              <a:off x="1408383" y="1208169"/>
-              <a:ext cx="3290409" cy="1599078"/>
+              <a:off x="1310306" y="1141550"/>
+              <a:ext cx="2746591" cy="1359782"/>
             </a:xfrm>
             <a:prstGeom prst="rect">
               <a:avLst/>
@@ -4644,15 +4644,15 @@
           </p:nvSpPr>
           <p:spPr>
             <a:xfrm>
-              <a:off x="1408383" y="1208169"/>
-              <a:ext cx="0" cy="1599078"/>
+              <a:off x="1310306" y="1141550"/>
+              <a:ext cx="0" cy="1359782"/>
             </a:xfrm>
             <a:custGeom>
               <a:avLst/>
               <a:pathLst>
-                <a:path w="0" h="1599078">
+                <a:path w="0" h="1359782">
                   <a:moveTo>
-                    <a:pt x="0" y="1599078"/>
+                    <a:pt x="0" y="1359782"/>
                   </a:moveTo>
                   <a:lnTo>
                     <a:pt x="0" y="0"/>
@@ -4684,8 +4684,8 @@
           </p:nvSpPr>
           <p:spPr>
             <a:xfrm rot="-5400000">
-              <a:off x="1177387" y="2461169"/>
-              <a:ext cx="194218" cy="100218"/>
+              <a:off x="1140740" y="2213152"/>
+              <a:ext cx="141274" cy="72877"/>
             </a:xfrm>
             <a:prstGeom prst="rect">
               <a:avLst/>
@@ -4698,7 +4698,7 @@
             <a:p>
               <a:pPr algn="l" marL="0" marR="0" indent="0">
                 <a:lnSpc>
-                  <a:spcPts val="1100"/>
+                  <a:spcPts val="800"/>
                 </a:lnSpc>
                 <a:spcBef>
                   <a:spcPts val="0"/>
@@ -4708,7 +4708,7 @@
                 </a:spcAft>
               </a:pPr>
               <a:r>
-                <a:rPr sz="1100">
+                <a:rPr sz="800">
                   <a:solidFill>
                     <a:srgbClr val="000000">
                       <a:alpha val="100000"/>
@@ -4730,8 +4730,8 @@
           </p:nvSpPr>
           <p:spPr>
             <a:xfrm rot="-5400000">
-              <a:off x="1177387" y="2026863"/>
-              <a:ext cx="194218" cy="100218"/>
+              <a:off x="1140740" y="1843879"/>
+              <a:ext cx="141274" cy="72877"/>
             </a:xfrm>
             <a:prstGeom prst="rect">
               <a:avLst/>
@@ -4744,7 +4744,7 @@
             <a:p>
               <a:pPr algn="l" marL="0" marR="0" indent="0">
                 <a:lnSpc>
-                  <a:spcPts val="1100"/>
+                  <a:spcPts val="800"/>
                 </a:lnSpc>
                 <a:spcBef>
                   <a:spcPts val="0"/>
@@ -4754,7 +4754,7 @@
                 </a:spcAft>
               </a:pPr>
               <a:r>
-                <a:rPr sz="1100">
+                <a:rPr sz="800">
                   <a:solidFill>
                     <a:srgbClr val="000000">
                       <a:alpha val="100000"/>
@@ -4776,8 +4776,8 @@
           </p:nvSpPr>
           <p:spPr>
             <a:xfrm rot="-5400000">
-              <a:off x="1177387" y="1592557"/>
-              <a:ext cx="194218" cy="100218"/>
+              <a:off x="1140740" y="1474606"/>
+              <a:ext cx="141274" cy="72877"/>
             </a:xfrm>
             <a:prstGeom prst="rect">
               <a:avLst/>
@@ -4790,7 +4790,7 @@
             <a:p>
               <a:pPr algn="l" marL="0" marR="0" indent="0">
                 <a:lnSpc>
-                  <a:spcPts val="1100"/>
+                  <a:spcPts val="800"/>
                 </a:lnSpc>
                 <a:spcBef>
                   <a:spcPts val="0"/>
@@ -4800,7 +4800,7 @@
                 </a:spcAft>
               </a:pPr>
               <a:r>
-                <a:rPr sz="1100">
+                <a:rPr sz="800">
                   <a:solidFill>
                     <a:srgbClr val="000000">
                       <a:alpha val="100000"/>
@@ -4822,8 +4822,8 @@
           </p:nvSpPr>
           <p:spPr>
             <a:xfrm rot="-5400000">
-              <a:off x="1138525" y="1158252"/>
-              <a:ext cx="271942" cy="100218"/>
+              <a:off x="1112485" y="1105333"/>
+              <a:ext cx="197784" cy="72877"/>
             </a:xfrm>
             <a:prstGeom prst="rect">
               <a:avLst/>
@@ -4836,7 +4836,7 @@
             <a:p>
               <a:pPr algn="l" marL="0" marR="0" indent="0">
                 <a:lnSpc>
-                  <a:spcPts val="1100"/>
+                  <a:spcPts val="800"/>
                 </a:lnSpc>
                 <a:spcBef>
                   <a:spcPts val="0"/>
@@ -4846,7 +4846,7 @@
                 </a:spcAft>
               </a:pPr>
               <a:r>
-                <a:rPr sz="1100">
+                <a:rPr sz="800">
                   <a:solidFill>
                     <a:srgbClr val="000000">
                       <a:alpha val="100000"/>
@@ -4868,18 +4868,18 @@
           </p:nvSpPr>
           <p:spPr>
             <a:xfrm>
-              <a:off x="1370425" y="2511278"/>
-              <a:ext cx="37957" cy="0"/>
+              <a:off x="1281838" y="2249591"/>
+              <a:ext cx="28468" cy="0"/>
             </a:xfrm>
             <a:custGeom>
               <a:avLst/>
               <a:pathLst>
-                <a:path w="37957" h="0">
+                <a:path w="28468" h="0">
                   <a:moveTo>
                     <a:pt x="0" y="0"/>
                   </a:moveTo>
                   <a:lnTo>
-                    <a:pt x="37957" y="0"/>
+                    <a:pt x="28468" y="0"/>
                   </a:lnTo>
                 </a:path>
               </a:pathLst>
@@ -4908,18 +4908,18 @@
           </p:nvSpPr>
           <p:spPr>
             <a:xfrm>
-              <a:off x="1370425" y="2076972"/>
-              <a:ext cx="37957" cy="0"/>
+              <a:off x="1281838" y="1880318"/>
+              <a:ext cx="28468" cy="0"/>
             </a:xfrm>
             <a:custGeom>
               <a:avLst/>
               <a:pathLst>
-                <a:path w="37957" h="0">
+                <a:path w="28468" h="0">
                   <a:moveTo>
                     <a:pt x="0" y="0"/>
                   </a:moveTo>
                   <a:lnTo>
-                    <a:pt x="37957" y="0"/>
+                    <a:pt x="28468" y="0"/>
                   </a:lnTo>
                 </a:path>
               </a:pathLst>
@@ -4948,18 +4948,18 @@
           </p:nvSpPr>
           <p:spPr>
             <a:xfrm>
-              <a:off x="1370425" y="1642667"/>
-              <a:ext cx="37957" cy="0"/>
+              <a:off x="1281838" y="1511045"/>
+              <a:ext cx="28468" cy="0"/>
             </a:xfrm>
             <a:custGeom>
               <a:avLst/>
               <a:pathLst>
-                <a:path w="37957" h="0">
+                <a:path w="28468" h="0">
                   <a:moveTo>
                     <a:pt x="0" y="0"/>
                   </a:moveTo>
                   <a:lnTo>
-                    <a:pt x="37957" y="0"/>
+                    <a:pt x="28468" y="0"/>
                   </a:lnTo>
                 </a:path>
               </a:pathLst>
@@ -4988,18 +4988,18 @@
           </p:nvSpPr>
           <p:spPr>
             <a:xfrm>
-              <a:off x="1370425" y="1208361"/>
-              <a:ext cx="37957" cy="0"/>
+              <a:off x="1281838" y="1141772"/>
+              <a:ext cx="28468" cy="0"/>
             </a:xfrm>
             <a:custGeom>
               <a:avLst/>
               <a:pathLst>
-                <a:path w="37957" h="0">
+                <a:path w="28468" h="0">
                   <a:moveTo>
                     <a:pt x="0" y="0"/>
                   </a:moveTo>
                   <a:lnTo>
-                    <a:pt x="37957" y="0"/>
+                    <a:pt x="28468" y="0"/>
                   </a:lnTo>
                 </a:path>
               </a:pathLst>
@@ -5028,18 +5028,18 @@
           </p:nvSpPr>
           <p:spPr>
             <a:xfrm>
-              <a:off x="1408383" y="2807247"/>
-              <a:ext cx="3290409" cy="0"/>
+              <a:off x="1310306" y="2501332"/>
+              <a:ext cx="2746591" cy="0"/>
             </a:xfrm>
             <a:custGeom>
               <a:avLst/>
               <a:pathLst>
-                <a:path w="3290409" h="0">
+                <a:path w="2746591" h="0">
                   <a:moveTo>
                     <a:pt x="0" y="0"/>
                   </a:moveTo>
                   <a:lnTo>
-                    <a:pt x="3290409" y="0"/>
+                    <a:pt x="2746591" y="0"/>
                   </a:lnTo>
                 </a:path>
               </a:pathLst>
@@ -5068,15 +5068,15 @@
           </p:nvSpPr>
           <p:spPr>
             <a:xfrm>
-              <a:off x="1680047" y="2807247"/>
-              <a:ext cx="0" cy="37957"/>
+              <a:off x="1544118" y="2501332"/>
+              <a:ext cx="0" cy="28468"/>
             </a:xfrm>
             <a:custGeom>
               <a:avLst/>
               <a:pathLst>
-                <a:path w="0" h="37957">
+                <a:path w="0" h="28468">
                   <a:moveTo>
-                    <a:pt x="0" y="37957"/>
+                    <a:pt x="0" y="28468"/>
                   </a:moveTo>
                   <a:lnTo>
                     <a:pt x="0" y="0"/>
@@ -5108,15 +5108,15 @@
           </p:nvSpPr>
           <p:spPr>
             <a:xfrm>
-              <a:off x="2594148" y="2807247"/>
-              <a:ext cx="0" cy="37957"/>
+              <a:off x="2303630" y="2501332"/>
+              <a:ext cx="0" cy="28468"/>
             </a:xfrm>
             <a:custGeom>
               <a:avLst/>
               <a:pathLst>
-                <a:path w="0" h="37957">
+                <a:path w="0" h="28468">
                   <a:moveTo>
-                    <a:pt x="0" y="37957"/>
+                    <a:pt x="0" y="28468"/>
                   </a:moveTo>
                   <a:lnTo>
                     <a:pt x="0" y="0"/>
@@ -5148,15 +5148,15 @@
           </p:nvSpPr>
           <p:spPr>
             <a:xfrm>
-              <a:off x="3508248" y="2807247"/>
-              <a:ext cx="0" cy="37957"/>
+              <a:off x="3063142" y="2501332"/>
+              <a:ext cx="0" cy="28468"/>
             </a:xfrm>
             <a:custGeom>
               <a:avLst/>
               <a:pathLst>
-                <a:path w="0" h="37957">
+                <a:path w="0" h="28468">
                   <a:moveTo>
-                    <a:pt x="0" y="37957"/>
+                    <a:pt x="0" y="28468"/>
                   </a:moveTo>
                   <a:lnTo>
                     <a:pt x="0" y="0"/>
@@ -5188,15 +5188,15 @@
           </p:nvSpPr>
           <p:spPr>
             <a:xfrm>
-              <a:off x="4422348" y="2807247"/>
-              <a:ext cx="0" cy="37957"/>
+              <a:off x="3822654" y="2501332"/>
+              <a:ext cx="0" cy="28468"/>
             </a:xfrm>
             <a:custGeom>
               <a:avLst/>
               <a:pathLst>
-                <a:path w="0" h="37957">
+                <a:path w="0" h="28468">
                   <a:moveTo>
-                    <a:pt x="0" y="37957"/>
+                    <a:pt x="0" y="28468"/>
                   </a:moveTo>
                   <a:lnTo>
                     <a:pt x="0" y="0"/>
@@ -5228,8 +5228,8 @@
           </p:nvSpPr>
           <p:spPr>
             <a:xfrm>
-              <a:off x="1641185" y="2875571"/>
-              <a:ext cx="77724" cy="100218"/>
+              <a:off x="1515863" y="2552575"/>
+              <a:ext cx="56509" cy="72877"/>
             </a:xfrm>
             <a:prstGeom prst="rect">
               <a:avLst/>
@@ -5242,7 +5242,7 @@
             <a:p>
               <a:pPr algn="l" marL="0" marR="0" indent="0">
                 <a:lnSpc>
-                  <a:spcPts val="1100"/>
+                  <a:spcPts val="800"/>
                 </a:lnSpc>
                 <a:spcBef>
                   <a:spcPts val="0"/>
@@ -5252,7 +5252,7 @@
                 </a:spcAft>
               </a:pPr>
               <a:r>
-                <a:rPr sz="1100">
+                <a:rPr sz="800">
                   <a:solidFill>
                     <a:srgbClr val="000000">
                       <a:alpha val="100000"/>
@@ -5274,8 +5274,8 @@
           </p:nvSpPr>
           <p:spPr>
             <a:xfrm>
-              <a:off x="2555286" y="2875571"/>
-              <a:ext cx="77724" cy="100218"/>
+              <a:off x="2275375" y="2552575"/>
+              <a:ext cx="56509" cy="72877"/>
             </a:xfrm>
             <a:prstGeom prst="rect">
               <a:avLst/>
@@ -5288,7 +5288,7 @@
             <a:p>
               <a:pPr algn="l" marL="0" marR="0" indent="0">
                 <a:lnSpc>
-                  <a:spcPts val="1100"/>
+                  <a:spcPts val="800"/>
                 </a:lnSpc>
                 <a:spcBef>
                   <a:spcPts val="0"/>
@@ -5298,7 +5298,7 @@
                 </a:spcAft>
               </a:pPr>
               <a:r>
-                <a:rPr sz="1100">
+                <a:rPr sz="800">
                   <a:solidFill>
                     <a:srgbClr val="000000">
                       <a:alpha val="100000"/>
@@ -5320,8 +5320,8 @@
           </p:nvSpPr>
           <p:spPr>
             <a:xfrm>
-              <a:off x="3469386" y="2875571"/>
-              <a:ext cx="77724" cy="100218"/>
+              <a:off x="3034887" y="2552575"/>
+              <a:ext cx="56509" cy="72877"/>
             </a:xfrm>
             <a:prstGeom prst="rect">
               <a:avLst/>
@@ -5334,7 +5334,7 @@
             <a:p>
               <a:pPr algn="l" marL="0" marR="0" indent="0">
                 <a:lnSpc>
-                  <a:spcPts val="1100"/>
+                  <a:spcPts val="800"/>
                 </a:lnSpc>
                 <a:spcBef>
                   <a:spcPts val="0"/>
@@ -5344,7 +5344,7 @@
                 </a:spcAft>
               </a:pPr>
               <a:r>
-                <a:rPr sz="1100">
+                <a:rPr sz="800">
                   <a:solidFill>
                     <a:srgbClr val="000000">
                       <a:alpha val="100000"/>
@@ -5366,8 +5366,8 @@
           </p:nvSpPr>
           <p:spPr>
             <a:xfrm>
-              <a:off x="4383486" y="2875571"/>
-              <a:ext cx="77724" cy="100218"/>
+              <a:off x="3794399" y="2552575"/>
+              <a:ext cx="56509" cy="72877"/>
             </a:xfrm>
             <a:prstGeom prst="rect">
               <a:avLst/>
@@ -5380,7 +5380,7 @@
             <a:p>
               <a:pPr algn="l" marL="0" marR="0" indent="0">
                 <a:lnSpc>
-                  <a:spcPts val="1100"/>
+                  <a:spcPts val="800"/>
                 </a:lnSpc>
                 <a:spcBef>
                   <a:spcPts val="0"/>
@@ -5390,7 +5390,7 @@
                 </a:spcAft>
               </a:pPr>
               <a:r>
-                <a:rPr sz="1100">
+                <a:rPr sz="800">
                   <a:solidFill>
                     <a:srgbClr val="000000">
                       <a:alpha val="100000"/>
@@ -5412,8 +5412,8 @@
           </p:nvSpPr>
           <p:spPr>
             <a:xfrm rot="-5400000">
-              <a:off x="910098" y="1948272"/>
-              <a:ext cx="256946" cy="118872"/>
+              <a:off x="934421" y="1775721"/>
+              <a:ext cx="197510" cy="91440"/>
             </a:xfrm>
             <a:prstGeom prst="rect">
               <a:avLst/>
@@ -5426,7 +5426,7 @@
             <a:p>
               <a:pPr algn="l" marL="0" marR="0" indent="0">
                 <a:lnSpc>
-                  <a:spcPts val="1300"/>
+                  <a:spcPts val="1000"/>
                 </a:lnSpc>
                 <a:spcBef>
                   <a:spcPts val="0"/>
@@ -5436,7 +5436,7 @@
                 </a:spcAft>
               </a:pPr>
               <a:r>
-                <a:rPr sz="1300" b="1">
+                <a:rPr sz="1000" b="1">
                   <a:solidFill>
                     <a:srgbClr val="000000">
                       <a:alpha val="100000"/>
@@ -5458,8 +5458,8 @@
           </p:nvSpPr>
           <p:spPr>
             <a:xfrm>
-              <a:off x="1408383" y="965010"/>
-              <a:ext cx="1421617" cy="127924"/>
+              <a:off x="1310306" y="965010"/>
+              <a:ext cx="1015989" cy="91440"/>
             </a:xfrm>
             <a:prstGeom prst="rect">
               <a:avLst/>
@@ -5472,7 +5472,7 @@
             <a:p>
               <a:pPr algn="l" marL="0" marR="0" indent="0">
                 <a:lnSpc>
-                  <a:spcPts val="1400"/>
+                  <a:spcPts val="1000"/>
                 </a:lnSpc>
                 <a:spcBef>
                   <a:spcPts val="0"/>
@@ -5482,7 +5482,7 @@
                 </a:spcAft>
               </a:pPr>
               <a:r>
-                <a:rPr sz="1400" b="1">
+                <a:rPr sz="1000" b="1">
                   <a:solidFill>
                     <a:srgbClr val="000000">
                       <a:alpha val="100000"/>
@@ -5504,8 +5504,8 @@
           </p:nvSpPr>
           <p:spPr>
             <a:xfrm>
-              <a:off x="4837970" y="1208169"/>
-              <a:ext cx="3290409" cy="1599078"/>
+              <a:off x="4186587" y="1141550"/>
+              <a:ext cx="2746591" cy="1359782"/>
             </a:xfrm>
             <a:prstGeom prst="rect">
               <a:avLst/>
@@ -5530,8 +5530,8 @@
           </p:nvSpPr>
           <p:spPr>
             <a:xfrm>
-              <a:off x="4952790" y="2363103"/>
-              <a:ext cx="77571" cy="77571"/>
+              <a:off x="4371800" y="2118809"/>
+              <a:ext cx="75116" cy="75116"/>
             </a:xfrm>
             <a:prstGeom prst="ellipse">
               <a:avLst/>
@@ -5556,8 +5556,8 @@
           </p:nvSpPr>
           <p:spPr>
             <a:xfrm>
-              <a:off x="5078398" y="1486167"/>
-              <a:ext cx="77571" cy="77571"/>
+              <a:off x="4325526" y="1373631"/>
+              <a:ext cx="75116" cy="75116"/>
             </a:xfrm>
             <a:prstGeom prst="ellipse">
               <a:avLst/>
@@ -5582,8 +5582,8 @@
           </p:nvSpPr>
           <p:spPr>
             <a:xfrm>
-              <a:off x="5021191" y="2355012"/>
-              <a:ext cx="77571" cy="77571"/>
+              <a:off x="4273874" y="2111899"/>
+              <a:ext cx="75116" cy="75116"/>
             </a:xfrm>
             <a:prstGeom prst="ellipse">
               <a:avLst/>
@@ -5608,8 +5608,8 @@
           </p:nvSpPr>
           <p:spPr>
             <a:xfrm>
-              <a:off x="5143360" y="2251919"/>
-              <a:ext cx="77571" cy="77571"/>
+              <a:off x="4368151" y="2024262"/>
+              <a:ext cx="75116" cy="75116"/>
             </a:xfrm>
             <a:prstGeom prst="ellipse">
               <a:avLst/>
@@ -5634,8 +5634,8 @@
           </p:nvSpPr>
           <p:spPr>
             <a:xfrm>
-              <a:off x="4948748" y="2441708"/>
-              <a:ext cx="77571" cy="77571"/>
+              <a:off x="4379851" y="2185589"/>
+              <a:ext cx="75116" cy="75116"/>
             </a:xfrm>
             <a:prstGeom prst="ellipse">
               <a:avLst/>
@@ -5660,8 +5660,8 @@
           </p:nvSpPr>
           <p:spPr>
             <a:xfrm>
-              <a:off x="5045932" y="1751541"/>
-              <a:ext cx="77571" cy="77571"/>
+              <a:off x="4300233" y="1599217"/>
+              <a:ext cx="75116" cy="75116"/>
             </a:xfrm>
             <a:prstGeom prst="ellipse">
               <a:avLst/>
@@ -5686,8 +5686,8 @@
           </p:nvSpPr>
           <p:spPr>
             <a:xfrm>
-              <a:off x="5110537" y="1304630"/>
-              <a:ext cx="77571" cy="77571"/>
+              <a:off x="4320141" y="1218932"/>
+              <a:ext cx="75116" cy="75116"/>
             </a:xfrm>
             <a:prstGeom prst="ellipse">
               <a:avLst/>
@@ -5712,8 +5712,8 @@
           </p:nvSpPr>
           <p:spPr>
             <a:xfrm>
-              <a:off x="5053702" y="2114108"/>
-              <a:ext cx="77571" cy="77571"/>
+              <a:off x="4323650" y="1907208"/>
+              <a:ext cx="75116" cy="75116"/>
             </a:xfrm>
             <a:prstGeom prst="ellipse">
               <a:avLst/>
@@ -5738,8 +5738,8 @@
           </p:nvSpPr>
           <p:spPr>
             <a:xfrm>
-              <a:off x="4976466" y="2654973"/>
-              <a:ext cx="77571" cy="77571"/>
+              <a:off x="4412424" y="2367310"/>
+              <a:ext cx="75116" cy="75116"/>
             </a:xfrm>
             <a:prstGeom prst="ellipse">
               <a:avLst/>
@@ -5764,8 +5764,8 @@
           </p:nvSpPr>
           <p:spPr>
             <a:xfrm>
-              <a:off x="4976224" y="2073069"/>
-              <a:ext cx="77571" cy="77571"/>
+              <a:off x="4416958" y="1872384"/>
+              <a:ext cx="75116" cy="75116"/>
             </a:xfrm>
             <a:prstGeom prst="ellipse">
               <a:avLst/>
@@ -5790,8 +5790,8 @@
           </p:nvSpPr>
           <p:spPr>
             <a:xfrm>
-              <a:off x="5920109" y="2676520"/>
-              <a:ext cx="77571" cy="77571"/>
+              <a:off x="5081574" y="2385566"/>
+              <a:ext cx="75116" cy="75116"/>
             </a:xfrm>
             <a:prstGeom prst="ellipse">
               <a:avLst/>
@@ -5816,8 +5816,8 @@
           </p:nvSpPr>
           <p:spPr>
             <a:xfrm>
-              <a:off x="5842801" y="1752217"/>
-              <a:ext cx="77571" cy="77571"/>
+              <a:off x="5075689" y="1599452"/>
+              <a:ext cx="75116" cy="75116"/>
             </a:xfrm>
             <a:prstGeom prst="ellipse">
               <a:avLst/>
@@ -5842,8 +5842,8 @@
           </p:nvSpPr>
           <p:spPr>
             <a:xfrm>
-              <a:off x="6024214" y="2267311"/>
-              <a:ext cx="77571" cy="77571"/>
+              <a:off x="5093000" y="2037240"/>
+              <a:ext cx="75116" cy="75116"/>
             </a:xfrm>
             <a:prstGeom prst="ellipse">
               <a:avLst/>
@@ -5868,8 +5868,8 @@
           </p:nvSpPr>
           <p:spPr>
             <a:xfrm>
-              <a:off x="5843413" y="2695776"/>
-              <a:ext cx="77571" cy="77571"/>
+              <a:off x="5211446" y="2401965"/>
+              <a:ext cx="75116" cy="75116"/>
             </a:xfrm>
             <a:prstGeom prst="ellipse">
               <a:avLst/>
@@ -5894,8 +5894,8 @@
           </p:nvSpPr>
           <p:spPr>
             <a:xfrm>
-              <a:off x="5892633" y="1940596"/>
-              <a:ext cx="77571" cy="77571"/>
+              <a:off x="5234984" y="1759871"/>
+              <a:ext cx="75116" cy="75116"/>
             </a:xfrm>
             <a:prstGeom prst="ellipse">
               <a:avLst/>
@@ -5920,8 +5920,8 @@
           </p:nvSpPr>
           <p:spPr>
             <a:xfrm>
-              <a:off x="5986718" y="1242069"/>
-              <a:ext cx="77571" cy="77571"/>
+              <a:off x="5095230" y="1165800"/>
+              <a:ext cx="75116" cy="75116"/>
             </a:xfrm>
             <a:prstGeom prst="ellipse">
               <a:avLst/>
@@ -5946,8 +5946,8 @@
           </p:nvSpPr>
           <p:spPr>
             <a:xfrm>
-              <a:off x="5827524" y="2661994"/>
-              <a:ext cx="77571" cy="77571"/>
+              <a:off x="5058147" y="2373162"/>
+              <a:ext cx="75116" cy="75116"/>
             </a:xfrm>
             <a:prstGeom prst="ellipse">
               <a:avLst/>
@@ -5972,8 +5972,8 @@
           </p:nvSpPr>
           <p:spPr>
             <a:xfrm>
-              <a:off x="5992841" y="2602150"/>
-              <a:ext cx="77571" cy="77571"/>
+              <a:off x="5152454" y="2322321"/>
+              <a:ext cx="75116" cy="75116"/>
             </a:xfrm>
             <a:prstGeom prst="ellipse">
               <a:avLst/>
@@ -5998,8 +5998,8 @@
           </p:nvSpPr>
           <p:spPr>
             <a:xfrm>
-              <a:off x="5853249" y="2291832"/>
-              <a:ext cx="77571" cy="77571"/>
+              <a:off x="5069345" y="2058358"/>
+              <a:ext cx="75116" cy="75116"/>
             </a:xfrm>
             <a:prstGeom prst="ellipse">
               <a:avLst/>
@@ -6024,8 +6024,8 @@
           </p:nvSpPr>
           <p:spPr>
             <a:xfrm>
-              <a:off x="5938919" y="2668948"/>
-              <a:ext cx="77571" cy="77571"/>
+              <a:off x="5224645" y="2378903"/>
+              <a:ext cx="75116" cy="75116"/>
             </a:xfrm>
             <a:prstGeom prst="ellipse">
               <a:avLst/>
@@ -6050,8 +6050,8 @@
           </p:nvSpPr>
           <p:spPr>
             <a:xfrm>
-              <a:off x="6055147" y="2456483"/>
-              <a:ext cx="77571" cy="77571"/>
+              <a:off x="5095298" y="2198512"/>
+              <a:ext cx="75116" cy="75116"/>
             </a:xfrm>
             <a:prstGeom prst="ellipse">
               <a:avLst/>
@@ -6076,8 +6076,8 @@
           </p:nvSpPr>
           <p:spPr>
             <a:xfrm>
-              <a:off x="6067937" y="2665341"/>
-              <a:ext cx="77571" cy="77571"/>
+              <a:off x="5175154" y="2375839"/>
+              <a:ext cx="75116" cy="75116"/>
             </a:xfrm>
             <a:prstGeom prst="ellipse">
               <a:avLst/>
@@ -6102,8 +6102,8 @@
           </p:nvSpPr>
           <p:spPr>
             <a:xfrm>
-              <a:off x="6020258" y="2174351"/>
-              <a:ext cx="77571" cy="77571"/>
+              <a:off x="5148559" y="1958494"/>
+              <a:ext cx="75116" cy="75116"/>
             </a:xfrm>
             <a:prstGeom prst="ellipse">
               <a:avLst/>
@@ -6128,8 +6128,8 @@
           </p:nvSpPr>
           <p:spPr>
             <a:xfrm>
-              <a:off x="5998132" y="2038403"/>
-              <a:ext cx="77571" cy="77571"/>
+              <a:off x="5112961" y="1842764"/>
+              <a:ext cx="75116" cy="75116"/>
             </a:xfrm>
             <a:prstGeom prst="ellipse">
               <a:avLst/>
@@ -6154,8 +6154,8 @@
           </p:nvSpPr>
           <p:spPr>
             <a:xfrm>
-              <a:off x="6009122" y="2099178"/>
-              <a:ext cx="77571" cy="77571"/>
+              <a:off x="5179763" y="1894661"/>
+              <a:ext cx="75116" cy="75116"/>
             </a:xfrm>
             <a:prstGeom prst="ellipse">
               <a:avLst/>
@@ -6180,8 +6180,8 @@
           </p:nvSpPr>
           <p:spPr>
             <a:xfrm>
-              <a:off x="6010072" y="1899472"/>
-              <a:ext cx="77571" cy="77571"/>
+              <a:off x="5104554" y="1724803"/>
+              <a:ext cx="75116" cy="75116"/>
             </a:xfrm>
             <a:prstGeom prst="ellipse">
               <a:avLst/>
@@ -6206,8 +6206,8 @@
           </p:nvSpPr>
           <p:spPr>
             <a:xfrm>
-              <a:off x="5838360" y="2422840"/>
-              <a:ext cx="77571" cy="77571"/>
+              <a:off x="5113227" y="2169819"/>
+              <a:ext cx="75116" cy="75116"/>
             </a:xfrm>
             <a:prstGeom prst="ellipse">
               <a:avLst/>
@@ -6232,8 +6232,8 @@
           </p:nvSpPr>
           <p:spPr>
             <a:xfrm>
-              <a:off x="6011575" y="2658497"/>
-              <a:ext cx="77571" cy="77571"/>
+              <a:off x="5106179" y="2369934"/>
+              <a:ext cx="75116" cy="75116"/>
             </a:xfrm>
             <a:prstGeom prst="ellipse">
               <a:avLst/>
@@ -6258,8 +6258,8 @@
           </p:nvSpPr>
           <p:spPr>
             <a:xfrm>
-              <a:off x="6774549" y="2401452"/>
-              <a:ext cx="77571" cy="77571"/>
+              <a:off x="5952354" y="2151522"/>
+              <a:ext cx="75116" cy="75116"/>
             </a:xfrm>
             <a:prstGeom prst="ellipse">
               <a:avLst/>
@@ -6284,8 +6284,8 @@
           </p:nvSpPr>
           <p:spPr>
             <a:xfrm>
-              <a:off x="7004483" y="2496946"/>
-              <a:ext cx="77571" cy="77571"/>
+              <a:off x="5860641" y="2232928"/>
+              <a:ext cx="75116" cy="75116"/>
             </a:xfrm>
             <a:prstGeom prst="ellipse">
               <a:avLst/>
@@ -6310,8 +6310,8 @@
           </p:nvSpPr>
           <p:spPr>
             <a:xfrm>
-              <a:off x="6899829" y="2600344"/>
-              <a:ext cx="77571" cy="77571"/>
+              <a:off x="5915309" y="2320621"/>
+              <a:ext cx="75116" cy="75116"/>
             </a:xfrm>
             <a:prstGeom prst="ellipse">
               <a:avLst/>
@@ -6336,8 +6336,8 @@
           </p:nvSpPr>
           <p:spPr>
             <a:xfrm>
-              <a:off x="6863992" y="2353637"/>
-              <a:ext cx="77571" cy="77571"/>
+              <a:off x="5789264" y="2110761"/>
+              <a:ext cx="75116" cy="75116"/>
             </a:xfrm>
             <a:prstGeom prst="ellipse">
               <a:avLst/>
@@ -6362,8 +6362,8 @@
           </p:nvSpPr>
           <p:spPr>
             <a:xfrm>
-              <a:off x="6961397" y="1818620"/>
-              <a:ext cx="77571" cy="77571"/>
+              <a:off x="5891949" y="1656131"/>
+              <a:ext cx="75116" cy="75116"/>
             </a:xfrm>
             <a:prstGeom prst="ellipse">
               <a:avLst/>
@@ -6388,8 +6388,8 @@
           </p:nvSpPr>
           <p:spPr>
             <a:xfrm>
-              <a:off x="6764873" y="1461660"/>
-              <a:ext cx="77571" cy="77571"/>
+              <a:off x="5855530" y="1352390"/>
+              <a:ext cx="75116" cy="75116"/>
             </a:xfrm>
             <a:prstGeom prst="ellipse">
               <a:avLst/>
@@ -6414,8 +6414,8 @@
           </p:nvSpPr>
           <p:spPr>
             <a:xfrm>
-              <a:off x="6924049" y="1702710"/>
-              <a:ext cx="77571" cy="77571"/>
+              <a:off x="5985343" y="1557453"/>
+              <a:ext cx="75116" cy="75116"/>
             </a:xfrm>
             <a:prstGeom prst="ellipse">
               <a:avLst/>
@@ -6440,8 +6440,8 @@
           </p:nvSpPr>
           <p:spPr>
             <a:xfrm>
-              <a:off x="6977853" y="2433257"/>
-              <a:ext cx="77571" cy="77571"/>
+              <a:off x="5965007" y="2178578"/>
+              <a:ext cx="75116" cy="75116"/>
             </a:xfrm>
             <a:prstGeom prst="ellipse">
               <a:avLst/>
@@ -6466,8 +6466,8 @@
           </p:nvSpPr>
           <p:spPr>
             <a:xfrm>
-              <a:off x="6934260" y="2373557"/>
-              <a:ext cx="77571" cy="77571"/>
+              <a:off x="5958700" y="2127882"/>
+              <a:ext cx="75116" cy="75116"/>
             </a:xfrm>
             <a:prstGeom prst="ellipse">
               <a:avLst/>
@@ -6492,8 +6492,8 @@
           </p:nvSpPr>
           <p:spPr>
             <a:xfrm>
-              <a:off x="6766976" y="1779555"/>
-              <a:ext cx="77571" cy="77571"/>
+              <a:off x="5958289" y="1622705"/>
+              <a:ext cx="75116" cy="75116"/>
             </a:xfrm>
             <a:prstGeom prst="ellipse">
               <a:avLst/>
@@ -6518,8 +6518,8 @@
           </p:nvSpPr>
           <p:spPr>
             <a:xfrm>
-              <a:off x="6782398" y="1991783"/>
-              <a:ext cx="77571" cy="77571"/>
+              <a:off x="5972124" y="1803390"/>
+              <a:ext cx="75116" cy="75116"/>
             </a:xfrm>
             <a:prstGeom prst="ellipse">
               <a:avLst/>
@@ -6544,8 +6544,8 @@
           </p:nvSpPr>
           <p:spPr>
             <a:xfrm>
-              <a:off x="6966172" y="2574749"/>
-              <a:ext cx="77571" cy="77571"/>
+              <a:off x="5880526" y="2298696"/>
+              <a:ext cx="75116" cy="75116"/>
             </a:xfrm>
             <a:prstGeom prst="ellipse">
               <a:avLst/>
@@ -6570,8 +6570,8 @@
           </p:nvSpPr>
           <p:spPr>
             <a:xfrm>
-              <a:off x="6757013" y="1727394"/>
-              <a:ext cx="77571" cy="77571"/>
+              <a:off x="5964680" y="1578799"/>
+              <a:ext cx="75116" cy="75116"/>
             </a:xfrm>
             <a:prstGeom prst="ellipse">
               <a:avLst/>
@@ -6596,8 +6596,8 @@
           </p:nvSpPr>
           <p:spPr>
             <a:xfrm>
-              <a:off x="7011633" y="1929471"/>
-              <a:ext cx="77571" cy="77571"/>
+              <a:off x="5944013" y="1750407"/>
+              <a:ext cx="75116" cy="75116"/>
             </a:xfrm>
             <a:prstGeom prst="ellipse">
               <a:avLst/>
@@ -6622,8 +6622,8 @@
           </p:nvSpPr>
           <p:spPr>
             <a:xfrm>
-              <a:off x="6851256" y="2126668"/>
-              <a:ext cx="77571" cy="77571"/>
+              <a:off x="5870531" y="1917991"/>
+              <a:ext cx="75116" cy="75116"/>
             </a:xfrm>
             <a:prstGeom prst="ellipse">
               <a:avLst/>
@@ -6648,8 +6648,8 @@
           </p:nvSpPr>
           <p:spPr>
             <a:xfrm>
-              <a:off x="6854879" y="2544668"/>
-              <a:ext cx="77571" cy="77571"/>
+              <a:off x="5814427" y="2273409"/>
+              <a:ext cx="75116" cy="75116"/>
             </a:xfrm>
             <a:prstGeom prst="ellipse">
               <a:avLst/>
@@ -6674,8 +6674,8 @@
           </p:nvSpPr>
           <p:spPr>
             <a:xfrm>
-              <a:off x="6998605" y="2117555"/>
-              <a:ext cx="77571" cy="77571"/>
+              <a:off x="5996062" y="1910108"/>
+              <a:ext cx="75116" cy="75116"/>
             </a:xfrm>
             <a:prstGeom prst="ellipse">
               <a:avLst/>
@@ -6700,8 +6700,8 @@
           </p:nvSpPr>
           <p:spPr>
             <a:xfrm>
-              <a:off x="6842242" y="2516505"/>
-              <a:ext cx="77571" cy="77571"/>
+              <a:off x="5842898" y="2249486"/>
+              <a:ext cx="75116" cy="75116"/>
             </a:xfrm>
             <a:prstGeom prst="ellipse">
               <a:avLst/>
@@ -6726,8 +6726,8 @@
           </p:nvSpPr>
           <p:spPr>
             <a:xfrm>
-              <a:off x="6900081" y="1908348"/>
-              <a:ext cx="77571" cy="77571"/>
+              <a:off x="5927884" y="1732288"/>
+              <a:ext cx="75116" cy="75116"/>
             </a:xfrm>
             <a:prstGeom prst="ellipse">
               <a:avLst/>
@@ -6752,8 +6752,8 @@
           </p:nvSpPr>
           <p:spPr>
             <a:xfrm>
-              <a:off x="6817680" y="2132368"/>
-              <a:ext cx="77571" cy="77571"/>
+              <a:off x="5990744" y="1922804"/>
+              <a:ext cx="75116" cy="75116"/>
             </a:xfrm>
             <a:prstGeom prst="ellipse">
               <a:avLst/>
@@ -6778,8 +6778,8 @@
           </p:nvSpPr>
           <p:spPr>
             <a:xfrm>
-              <a:off x="7808487" y="2246031"/>
-              <a:ext cx="77571" cy="77571"/>
+              <a:off x="6610221" y="2019326"/>
+              <a:ext cx="75116" cy="75116"/>
             </a:xfrm>
             <a:prstGeom prst="ellipse">
               <a:avLst/>
@@ -6804,8 +6804,8 @@
           </p:nvSpPr>
           <p:spPr>
             <a:xfrm>
-              <a:off x="7847078" y="2396765"/>
-              <a:ext cx="77571" cy="77571"/>
+              <a:off x="6588475" y="2147385"/>
+              <a:ext cx="75116" cy="75116"/>
             </a:xfrm>
             <a:prstGeom prst="ellipse">
               <a:avLst/>
@@ -6830,8 +6830,8 @@
           </p:nvSpPr>
           <p:spPr>
             <a:xfrm>
-              <a:off x="7785302" y="2455726"/>
-              <a:ext cx="77571" cy="77571"/>
+              <a:off x="6667176" y="2197539"/>
+              <a:ext cx="75116" cy="75116"/>
             </a:xfrm>
             <a:prstGeom prst="ellipse">
               <a:avLst/>
@@ -6856,8 +6856,8 @@
           </p:nvSpPr>
           <p:spPr>
             <a:xfrm>
-              <a:off x="7802898" y="2227484"/>
-              <a:ext cx="77571" cy="77571"/>
+              <a:off x="6555776" y="2003790"/>
+              <a:ext cx="75116" cy="75116"/>
             </a:xfrm>
             <a:prstGeom prst="ellipse">
               <a:avLst/>
@@ -6882,8 +6882,8 @@
           </p:nvSpPr>
           <p:spPr>
             <a:xfrm>
-              <a:off x="7914944" y="2101920"/>
-              <a:ext cx="77571" cy="77571"/>
+              <a:off x="6733324" y="1896968"/>
+              <a:ext cx="75116" cy="75116"/>
             </a:xfrm>
             <a:prstGeom prst="ellipse">
               <a:avLst/>
@@ -6908,8 +6908,8 @@
           </p:nvSpPr>
           <p:spPr>
             <a:xfrm>
-              <a:off x="7914126" y="2156407"/>
-              <a:ext cx="77571" cy="77571"/>
+              <a:off x="6699026" y="1943096"/>
+              <a:ext cx="75116" cy="75116"/>
             </a:xfrm>
             <a:prstGeom prst="ellipse">
               <a:avLst/>
@@ -6934,8 +6934,8 @@
           </p:nvSpPr>
           <p:spPr>
             <a:xfrm>
-              <a:off x="7915428" y="2394797"/>
-              <a:ext cx="77571" cy="77571"/>
+              <a:off x="6769952" y="2146108"/>
+              <a:ext cx="75116" cy="75116"/>
             </a:xfrm>
             <a:prstGeom prst="ellipse">
               <a:avLst/>
@@ -6960,8 +6960,8 @@
           </p:nvSpPr>
           <p:spPr>
             <a:xfrm>
-              <a:off x="7696624" y="2181233"/>
-              <a:ext cx="77571" cy="77571"/>
+              <a:off x="6677891" y="1964076"/>
+              <a:ext cx="75116" cy="75116"/>
             </a:xfrm>
             <a:prstGeom prst="ellipse">
               <a:avLst/>
@@ -6986,8 +6986,8 @@
           </p:nvSpPr>
           <p:spPr>
             <a:xfrm>
-              <a:off x="7806252" y="2432777"/>
-              <a:ext cx="77571" cy="77571"/>
+              <a:off x="6708180" y="2178229"/>
+              <a:ext cx="75116" cy="75116"/>
             </a:xfrm>
             <a:prstGeom prst="ellipse">
               <a:avLst/>
@@ -7012,8 +7012,8 @@
           </p:nvSpPr>
           <p:spPr>
             <a:xfrm>
-              <a:off x="7896419" y="2313164"/>
-              <a:ext cx="77571" cy="77571"/>
+              <a:off x="6605835" y="2076543"/>
+              <a:ext cx="75116" cy="75116"/>
             </a:xfrm>
             <a:prstGeom prst="ellipse">
               <a:avLst/>
@@ -7038,8 +7038,8 @@
           </p:nvSpPr>
           <p:spPr>
             <a:xfrm>
-              <a:off x="7821320" y="2138326"/>
-              <a:ext cx="77571" cy="77571"/>
+              <a:off x="6560175" y="1927790"/>
+              <a:ext cx="75116" cy="75116"/>
             </a:xfrm>
             <a:prstGeom prst="ellipse">
               <a:avLst/>
@@ -7064,8 +7064,8 @@
           </p:nvSpPr>
           <p:spPr>
             <a:xfrm>
-              <a:off x="7809253" y="1812020"/>
-              <a:ext cx="77571" cy="77571"/>
+              <a:off x="6747967" y="1650265"/>
+              <a:ext cx="75116" cy="75116"/>
             </a:xfrm>
             <a:prstGeom prst="ellipse">
               <a:avLst/>
@@ -7090,8 +7090,8 @@
           </p:nvSpPr>
           <p:spPr>
             <a:xfrm>
-              <a:off x="7748754" y="2419659"/>
-              <a:ext cx="77571" cy="77571"/>
+              <a:off x="6573943" y="2166983"/>
+              <a:ext cx="75116" cy="75116"/>
             </a:xfrm>
             <a:prstGeom prst="ellipse">
               <a:avLst/>
@@ -7116,8 +7116,8 @@
           </p:nvSpPr>
           <p:spPr>
             <a:xfrm>
-              <a:off x="7787950" y="2635152"/>
-              <a:ext cx="77571" cy="77571"/>
+              <a:off x="6627378" y="2350005"/>
+              <a:ext cx="75116" cy="75116"/>
             </a:xfrm>
             <a:prstGeom prst="ellipse">
               <a:avLst/>
@@ -7142,8 +7142,8 @@
           </p:nvSpPr>
           <p:spPr>
             <a:xfrm>
-              <a:off x="7843824" y="2487111"/>
-              <a:ext cx="77571" cy="77571"/>
+              <a:off x="6570560" y="2224304"/>
+              <a:ext cx="75116" cy="75116"/>
             </a:xfrm>
             <a:prstGeom prst="ellipse">
               <a:avLst/>
@@ -7168,8 +7168,8 @@
           </p:nvSpPr>
           <p:spPr>
             <a:xfrm>
-              <a:off x="7809613" y="2254057"/>
-              <a:ext cx="77571" cy="77571"/>
+              <a:off x="6770776" y="2026373"/>
+              <a:ext cx="75116" cy="75116"/>
             </a:xfrm>
             <a:prstGeom prst="ellipse">
               <a:avLst/>
@@ -7194,8 +7194,8 @@
           </p:nvSpPr>
           <p:spPr>
             <a:xfrm>
-              <a:off x="7934773" y="2388331"/>
-              <a:ext cx="77571" cy="77571"/>
+              <a:off x="6651630" y="2140550"/>
+              <a:ext cx="75116" cy="75116"/>
             </a:xfrm>
             <a:prstGeom prst="ellipse">
               <a:avLst/>
@@ -7220,8 +7220,8 @@
           </p:nvSpPr>
           <p:spPr>
             <a:xfrm>
-              <a:off x="7749433" y="2228817"/>
-              <a:ext cx="77571" cy="77571"/>
+              <a:off x="6570626" y="2004709"/>
+              <a:ext cx="75116" cy="75116"/>
             </a:xfrm>
             <a:prstGeom prst="ellipse">
               <a:avLst/>
@@ -7246,8 +7246,8 @@
           </p:nvSpPr>
           <p:spPr>
             <a:xfrm>
-              <a:off x="7846690" y="2204475"/>
-              <a:ext cx="77571" cy="77571"/>
+              <a:off x="6579239" y="1984060"/>
+              <a:ext cx="75116" cy="75116"/>
             </a:xfrm>
             <a:prstGeom prst="ellipse">
               <a:avLst/>
@@ -7272,8 +7272,8 @@
           </p:nvSpPr>
           <p:spPr>
             <a:xfrm>
-              <a:off x="7856225" y="2025027"/>
-              <a:ext cx="77571" cy="77571"/>
+              <a:off x="6690429" y="1831501"/>
+              <a:ext cx="75116" cy="75116"/>
             </a:xfrm>
             <a:prstGeom prst="ellipse">
               <a:avLst/>
@@ -7298,8 +7298,8 @@
           </p:nvSpPr>
           <p:spPr>
             <a:xfrm>
-              <a:off x="7940029" y="2071071"/>
-              <a:ext cx="77571" cy="77571"/>
+              <a:off x="6657699" y="1870711"/>
+              <a:ext cx="75116" cy="75116"/>
             </a:xfrm>
             <a:prstGeom prst="ellipse">
               <a:avLst/>
@@ -7324,8 +7324,8 @@
           </p:nvSpPr>
           <p:spPr>
             <a:xfrm>
-              <a:off x="7839177" y="2141899"/>
-              <a:ext cx="77571" cy="77571"/>
+              <a:off x="6715840" y="1930847"/>
+              <a:ext cx="75116" cy="75116"/>
             </a:xfrm>
             <a:prstGeom prst="ellipse">
               <a:avLst/>
@@ -7350,8 +7350,8 @@
           </p:nvSpPr>
           <p:spPr>
             <a:xfrm>
-              <a:off x="7935477" y="2526687"/>
-              <a:ext cx="77571" cy="77571"/>
+              <a:off x="6626338" y="2258206"/>
+              <a:ext cx="75116" cy="75116"/>
             </a:xfrm>
             <a:prstGeom prst="ellipse">
               <a:avLst/>
@@ -7376,8 +7376,8 @@
           </p:nvSpPr>
           <p:spPr>
             <a:xfrm>
-              <a:off x="7830227" y="2220311"/>
-              <a:ext cx="77571" cy="77571"/>
+              <a:off x="6626848" y="1997589"/>
+              <a:ext cx="75116" cy="75116"/>
             </a:xfrm>
             <a:prstGeom prst="ellipse">
               <a:avLst/>
@@ -7402,42 +7402,42 @@
           </p:nvSpPr>
           <p:spPr>
             <a:xfrm>
-              <a:off x="5063037" y="1992999"/>
-              <a:ext cx="2785576" cy="456349"/>
+              <a:off x="4394117" y="1808886"/>
+              <a:ext cx="2304794" cy="387965"/>
             </a:xfrm>
             <a:custGeom>
               <a:avLst/>
               <a:pathLst>
-                <a:path w="2785576" h="456349">
+                <a:path w="2304794" h="387965">
                   <a:moveTo>
                     <a:pt x="0" y="0"/>
                   </a:moveTo>
                   <a:lnTo>
-                    <a:pt x="1471678" y="116021"/>
+                    <a:pt x="1217670" y="98635"/>
                   </a:lnTo>
                   <a:lnTo>
-                    <a:pt x="1857051" y="134955"/>
+                    <a:pt x="1536529" y="114732"/>
                   </a:lnTo>
                   <a:lnTo>
-                    <a:pt x="2400204" y="152497"/>
+                    <a:pt x="1985935" y="129645"/>
                   </a:lnTo>
                   <a:lnTo>
-                    <a:pt x="2785576" y="159412"/>
+                    <a:pt x="2304794" y="135524"/>
                   </a:lnTo>
                   <a:lnTo>
-                    <a:pt x="2785576" y="456349"/>
+                    <a:pt x="2304794" y="387965"/>
                   </a:lnTo>
                   <a:lnTo>
-                    <a:pt x="2400204" y="425497"/>
+                    <a:pt x="1985935" y="361737"/>
                   </a:lnTo>
                   <a:lnTo>
-                    <a:pt x="1857051" y="389812"/>
+                    <a:pt x="1536529" y="331398"/>
                   </a:lnTo>
                   <a:lnTo>
-                    <a:pt x="1471678" y="370979"/>
+                    <a:pt x="1217670" y="315388"/>
                   </a:lnTo>
                   <a:lnTo>
-                    <a:pt x="0" y="342778"/>
+                    <a:pt x="0" y="291413"/>
                   </a:lnTo>
                   <a:close/>
                 </a:path>
@@ -7463,27 +7463,27 @@
           </p:nvSpPr>
           <p:spPr>
             <a:xfrm>
-              <a:off x="5063037" y="1992999"/>
-              <a:ext cx="2785576" cy="159412"/>
+              <a:off x="4394117" y="1808886"/>
+              <a:ext cx="2304794" cy="135524"/>
             </a:xfrm>
             <a:custGeom>
               <a:avLst/>
               <a:pathLst>
-                <a:path w="2785576" h="159412">
+                <a:path w="2304794" h="135524">
                   <a:moveTo>
                     <a:pt x="0" y="0"/>
                   </a:moveTo>
                   <a:lnTo>
-                    <a:pt x="1471678" y="116021"/>
+                    <a:pt x="1217670" y="98635"/>
                   </a:lnTo>
                   <a:lnTo>
-                    <a:pt x="1857051" y="134955"/>
+                    <a:pt x="1536529" y="114732"/>
                   </a:lnTo>
                   <a:lnTo>
-                    <a:pt x="2400204" y="152497"/>
+                    <a:pt x="1985935" y="129645"/>
                   </a:lnTo>
                   <a:lnTo>
-                    <a:pt x="2785576" y="159412"/>
+                    <a:pt x="2304794" y="135524"/>
                   </a:lnTo>
                 </a:path>
               </a:pathLst>
@@ -7503,24 +7503,24 @@
           </p:nvSpPr>
           <p:spPr>
             <a:xfrm>
-              <a:off x="5063037" y="2335777"/>
-              <a:ext cx="2785576" cy="113570"/>
+              <a:off x="4394117" y="2100299"/>
+              <a:ext cx="2304794" cy="96552"/>
             </a:xfrm>
             <a:custGeom>
               <a:avLst/>
               <a:pathLst>
-                <a:path w="2785576" h="113570">
+                <a:path w="2304794" h="96552">
                   <a:moveTo>
-                    <a:pt x="2785576" y="113570"/>
+                    <a:pt x="2304794" y="96552"/>
                   </a:moveTo>
                   <a:lnTo>
-                    <a:pt x="2400204" y="82719"/>
+                    <a:pt x="1985935" y="70324"/>
                   </a:lnTo>
                   <a:lnTo>
-                    <a:pt x="1857051" y="47033"/>
+                    <a:pt x="1536529" y="39985"/>
                   </a:lnTo>
                   <a:lnTo>
-                    <a:pt x="1471678" y="28201"/>
+                    <a:pt x="1217670" y="23975"/>
                   </a:lnTo>
                   <a:lnTo>
                     <a:pt x="0" y="0"/>
@@ -7543,27 +7543,27 @@
           </p:nvSpPr>
           <p:spPr>
             <a:xfrm>
-              <a:off x="5063037" y="2164388"/>
-              <a:ext cx="2785576" cy="136491"/>
+              <a:off x="4394117" y="1954592"/>
+              <a:ext cx="2304794" cy="116038"/>
             </a:xfrm>
             <a:custGeom>
               <a:avLst/>
               <a:pathLst>
-                <a:path w="2785576" h="136491">
+                <a:path w="2304794" h="116038">
                   <a:moveTo>
                     <a:pt x="0" y="0"/>
                   </a:moveTo>
                   <a:lnTo>
-                    <a:pt x="1471678" y="72111"/>
+                    <a:pt x="1217670" y="61305"/>
                   </a:lnTo>
                   <a:lnTo>
-                    <a:pt x="1857051" y="90994"/>
+                    <a:pt x="1536529" y="77359"/>
                   </a:lnTo>
                   <a:lnTo>
-                    <a:pt x="2400204" y="117608"/>
+                    <a:pt x="1985935" y="99985"/>
                   </a:lnTo>
                   <a:lnTo>
-                    <a:pt x="2785576" y="136491"/>
+                    <a:pt x="2304794" y="116038"/>
                   </a:lnTo>
                 </a:path>
               </a:pathLst>
@@ -7592,7 +7592,7 @@
           </p:nvSpPr>
           <p:spPr>
             <a:xfrm>
-              <a:off x="7368920" y="1344148"/>
+              <a:off x="6219218" y="1244973"/>
               <a:ext cx="479694" cy="82021"/>
             </a:xfrm>
             <a:prstGeom prst="rect">
@@ -7638,8 +7638,8 @@
           </p:nvSpPr>
           <p:spPr>
             <a:xfrm>
-              <a:off x="4837970" y="1208169"/>
-              <a:ext cx="3290409" cy="1599078"/>
+              <a:off x="4186587" y="1141550"/>
+              <a:ext cx="2746591" cy="1359782"/>
             </a:xfrm>
             <a:prstGeom prst="rect">
               <a:avLst/>
@@ -7659,15 +7659,15 @@
           </p:nvSpPr>
           <p:spPr>
             <a:xfrm>
-              <a:off x="4837970" y="1208169"/>
-              <a:ext cx="0" cy="1599078"/>
+              <a:off x="4186587" y="1141550"/>
+              <a:ext cx="0" cy="1359782"/>
             </a:xfrm>
             <a:custGeom>
               <a:avLst/>
               <a:pathLst>
-                <a:path w="0" h="1599078">
+                <a:path w="0" h="1359782">
                   <a:moveTo>
-                    <a:pt x="0" y="1599078"/>
+                    <a:pt x="0" y="1359782"/>
                   </a:moveTo>
                   <a:lnTo>
                     <a:pt x="0" y="0"/>
@@ -7699,18 +7699,18 @@
           </p:nvSpPr>
           <p:spPr>
             <a:xfrm>
-              <a:off x="4800012" y="2496484"/>
-              <a:ext cx="37957" cy="0"/>
+              <a:off x="4158119" y="2236924"/>
+              <a:ext cx="28468" cy="0"/>
             </a:xfrm>
             <a:custGeom>
               <a:avLst/>
               <a:pathLst>
-                <a:path w="37957" h="0">
+                <a:path w="28468" h="0">
                   <a:moveTo>
                     <a:pt x="0" y="0"/>
                   </a:moveTo>
                   <a:lnTo>
-                    <a:pt x="37957" y="0"/>
+                    <a:pt x="28468" y="0"/>
                   </a:lnTo>
                 </a:path>
               </a:pathLst>
@@ -7739,18 +7739,18 @@
           </p:nvSpPr>
           <p:spPr>
             <a:xfrm>
-              <a:off x="4800012" y="1968008"/>
-              <a:ext cx="37957" cy="0"/>
+              <a:off x="4158119" y="1787639"/>
+              <a:ext cx="28468" cy="0"/>
             </a:xfrm>
             <a:custGeom>
               <a:avLst/>
               <a:pathLst>
-                <a:path w="37957" h="0">
+                <a:path w="28468" h="0">
                   <a:moveTo>
                     <a:pt x="0" y="0"/>
                   </a:moveTo>
                   <a:lnTo>
-                    <a:pt x="37957" y="0"/>
+                    <a:pt x="28468" y="0"/>
                   </a:lnTo>
                 </a:path>
               </a:pathLst>
@@ -7779,18 +7779,18 @@
           </p:nvSpPr>
           <p:spPr>
             <a:xfrm>
-              <a:off x="4800012" y="1439531"/>
-              <a:ext cx="37957" cy="0"/>
+              <a:off x="4158119" y="1338354"/>
+              <a:ext cx="28468" cy="0"/>
             </a:xfrm>
             <a:custGeom>
               <a:avLst/>
               <a:pathLst>
-                <a:path w="37957" h="0">
+                <a:path w="28468" h="0">
                   <a:moveTo>
                     <a:pt x="0" y="0"/>
                   </a:moveTo>
                   <a:lnTo>
-                    <a:pt x="37957" y="0"/>
+                    <a:pt x="28468" y="0"/>
                   </a:lnTo>
                 </a:path>
               </a:pathLst>
@@ -7819,18 +7819,18 @@
           </p:nvSpPr>
           <p:spPr>
             <a:xfrm>
-              <a:off x="4837970" y="2807247"/>
-              <a:ext cx="3290409" cy="0"/>
+              <a:off x="4186587" y="2501332"/>
+              <a:ext cx="2746591" cy="0"/>
             </a:xfrm>
             <a:custGeom>
               <a:avLst/>
               <a:pathLst>
-                <a:path w="3290409" h="0">
+                <a:path w="2746591" h="0">
                   <a:moveTo>
                     <a:pt x="0" y="0"/>
                   </a:moveTo>
                   <a:lnTo>
-                    <a:pt x="3290409" y="0"/>
+                    <a:pt x="2746591" y="0"/>
                   </a:lnTo>
                 </a:path>
               </a:pathLst>
@@ -7859,15 +7859,15 @@
           </p:nvSpPr>
           <p:spPr>
             <a:xfrm>
-              <a:off x="5063037" y="2807247"/>
-              <a:ext cx="0" cy="37957"/>
+              <a:off x="4394117" y="2501332"/>
+              <a:ext cx="0" cy="28468"/>
             </a:xfrm>
             <a:custGeom>
               <a:avLst/>
               <a:pathLst>
-                <a:path w="0" h="37957">
+                <a:path w="0" h="28468">
                   <a:moveTo>
-                    <a:pt x="0" y="37957"/>
+                    <a:pt x="0" y="28468"/>
                   </a:moveTo>
                   <a:lnTo>
                     <a:pt x="0" y="0"/>
@@ -7899,15 +7899,15 @@
           </p:nvSpPr>
           <p:spPr>
             <a:xfrm>
-              <a:off x="5991563" y="2807247"/>
-              <a:ext cx="0" cy="37957"/>
+              <a:off x="5162382" y="2501332"/>
+              <a:ext cx="0" cy="28468"/>
             </a:xfrm>
             <a:custGeom>
               <a:avLst/>
               <a:pathLst>
-                <a:path w="0" h="37957">
+                <a:path w="0" h="28468">
                   <a:moveTo>
-                    <a:pt x="0" y="37957"/>
+                    <a:pt x="0" y="28468"/>
                   </a:moveTo>
                   <a:lnTo>
                     <a:pt x="0" y="0"/>
@@ -7939,15 +7939,15 @@
           </p:nvSpPr>
           <p:spPr>
             <a:xfrm>
-              <a:off x="6920088" y="2807247"/>
-              <a:ext cx="0" cy="37957"/>
+              <a:off x="5930647" y="2501332"/>
+              <a:ext cx="0" cy="28468"/>
             </a:xfrm>
             <a:custGeom>
               <a:avLst/>
               <a:pathLst>
-                <a:path w="0" h="37957">
+                <a:path w="0" h="28468">
                   <a:moveTo>
-                    <a:pt x="0" y="37957"/>
+                    <a:pt x="0" y="28468"/>
                   </a:moveTo>
                   <a:lnTo>
                     <a:pt x="0" y="0"/>
@@ -7979,15 +7979,15 @@
           </p:nvSpPr>
           <p:spPr>
             <a:xfrm>
-              <a:off x="7848614" y="2807247"/>
-              <a:ext cx="0" cy="37957"/>
+              <a:off x="6698912" y="2501332"/>
+              <a:ext cx="0" cy="28468"/>
             </a:xfrm>
             <a:custGeom>
               <a:avLst/>
               <a:pathLst>
-                <a:path w="0" h="37957">
+                <a:path w="0" h="28468">
                   <a:moveTo>
-                    <a:pt x="0" y="37957"/>
+                    <a:pt x="0" y="28468"/>
                   </a:moveTo>
                   <a:lnTo>
                     <a:pt x="0" y="0"/>
@@ -8019,8 +8019,8 @@
           </p:nvSpPr>
           <p:spPr>
             <a:xfrm>
-              <a:off x="5024175" y="2875571"/>
-              <a:ext cx="77724" cy="100218"/>
+              <a:off x="4365862" y="2552575"/>
+              <a:ext cx="56509" cy="72877"/>
             </a:xfrm>
             <a:prstGeom prst="rect">
               <a:avLst/>
@@ -8033,7 +8033,7 @@
             <a:p>
               <a:pPr algn="l" marL="0" marR="0" indent="0">
                 <a:lnSpc>
-                  <a:spcPts val="1100"/>
+                  <a:spcPts val="800"/>
                 </a:lnSpc>
                 <a:spcBef>
                   <a:spcPts val="0"/>
@@ -8043,7 +8043,7 @@
                 </a:spcAft>
               </a:pPr>
               <a:r>
-                <a:rPr sz="1100">
+                <a:rPr sz="800">
                   <a:solidFill>
                     <a:srgbClr val="000000">
                       <a:alpha val="100000"/>
@@ -8065,8 +8065,8 @@
           </p:nvSpPr>
           <p:spPr>
             <a:xfrm>
-              <a:off x="5952701" y="2875571"/>
-              <a:ext cx="77724" cy="100218"/>
+              <a:off x="5134127" y="2552575"/>
+              <a:ext cx="56509" cy="72877"/>
             </a:xfrm>
             <a:prstGeom prst="rect">
               <a:avLst/>
@@ -8079,7 +8079,7 @@
             <a:p>
               <a:pPr algn="l" marL="0" marR="0" indent="0">
                 <a:lnSpc>
-                  <a:spcPts val="1100"/>
+                  <a:spcPts val="800"/>
                 </a:lnSpc>
                 <a:spcBef>
                   <a:spcPts val="0"/>
@@ -8089,7 +8089,7 @@
                 </a:spcAft>
               </a:pPr>
               <a:r>
-                <a:rPr sz="1100">
+                <a:rPr sz="800">
                   <a:solidFill>
                     <a:srgbClr val="000000">
                       <a:alpha val="100000"/>
@@ -8111,8 +8111,8 @@
           </p:nvSpPr>
           <p:spPr>
             <a:xfrm>
-              <a:off x="6881226" y="2875571"/>
-              <a:ext cx="77724" cy="100218"/>
+              <a:off x="5902392" y="2552575"/>
+              <a:ext cx="56509" cy="72877"/>
             </a:xfrm>
             <a:prstGeom prst="rect">
               <a:avLst/>
@@ -8125,7 +8125,7 @@
             <a:p>
               <a:pPr algn="l" marL="0" marR="0" indent="0">
                 <a:lnSpc>
-                  <a:spcPts val="1100"/>
+                  <a:spcPts val="800"/>
                 </a:lnSpc>
                 <a:spcBef>
                   <a:spcPts val="0"/>
@@ -8135,7 +8135,7 @@
                 </a:spcAft>
               </a:pPr>
               <a:r>
-                <a:rPr sz="1100">
+                <a:rPr sz="800">
                   <a:solidFill>
                     <a:srgbClr val="000000">
                       <a:alpha val="100000"/>
@@ -8157,8 +8157,8 @@
           </p:nvSpPr>
           <p:spPr>
             <a:xfrm>
-              <a:off x="7809752" y="2875571"/>
-              <a:ext cx="77724" cy="100218"/>
+              <a:off x="6670657" y="2552575"/>
+              <a:ext cx="56509" cy="72877"/>
             </a:xfrm>
             <a:prstGeom prst="rect">
               <a:avLst/>
@@ -8171,7 +8171,7 @@
             <a:p>
               <a:pPr algn="l" marL="0" marR="0" indent="0">
                 <a:lnSpc>
-                  <a:spcPts val="1100"/>
+                  <a:spcPts val="800"/>
                 </a:lnSpc>
                 <a:spcBef>
                   <a:spcPts val="0"/>
@@ -8181,7 +8181,7 @@
                 </a:spcAft>
               </a:pPr>
               <a:r>
-                <a:rPr sz="1100">
+                <a:rPr sz="800">
                   <a:solidFill>
                     <a:srgbClr val="000000">
                       <a:alpha val="100000"/>
@@ -8203,8 +8203,8 @@
           </p:nvSpPr>
           <p:spPr>
             <a:xfrm>
-              <a:off x="4837970" y="965010"/>
-              <a:ext cx="1411559" cy="127924"/>
+              <a:off x="4186587" y="965010"/>
+              <a:ext cx="1008674" cy="91440"/>
             </a:xfrm>
             <a:prstGeom prst="rect">
               <a:avLst/>
@@ -8217,7 +8217,7 @@
             <a:p>
               <a:pPr algn="l" marL="0" marR="0" indent="0">
                 <a:lnSpc>
-                  <a:spcPts val="1400"/>
+                  <a:spcPts val="1000"/>
                 </a:lnSpc>
                 <a:spcBef>
                   <a:spcPts val="0"/>
@@ -8227,7 +8227,7 @@
                 </a:spcAft>
               </a:pPr>
               <a:r>
-                <a:rPr sz="1400" b="1">
+                <a:rPr sz="1000" b="1">
                   <a:solidFill>
                     <a:srgbClr val="000000">
                       <a:alpha val="100000"/>
@@ -8249,8 +8249,8 @@
           </p:nvSpPr>
           <p:spPr>
             <a:xfrm>
-              <a:off x="1408383" y="3300465"/>
-              <a:ext cx="3290409" cy="1599078"/>
+              <a:off x="1310306" y="2875097"/>
+              <a:ext cx="2746591" cy="1359782"/>
             </a:xfrm>
             <a:prstGeom prst="rect">
               <a:avLst/>
@@ -8275,8 +8275,8 @@
           </p:nvSpPr>
           <p:spPr>
             <a:xfrm>
-              <a:off x="1630328" y="4652750"/>
-              <a:ext cx="77571" cy="77571"/>
+              <a:off x="1546345" y="4021003"/>
+              <a:ext cx="75116" cy="75116"/>
             </a:xfrm>
             <a:prstGeom prst="ellipse">
               <a:avLst/>
@@ -8301,8 +8301,8 @@
           </p:nvSpPr>
           <p:spPr>
             <a:xfrm>
-              <a:off x="1717179" y="4496587"/>
-              <a:ext cx="77571" cy="77571"/>
+              <a:off x="1528079" y="3887746"/>
+              <a:ext cx="75116" cy="75116"/>
             </a:xfrm>
             <a:prstGeom prst="ellipse">
               <a:avLst/>
@@ -8327,8 +8327,8 @@
           </p:nvSpPr>
           <p:spPr>
             <a:xfrm>
-              <a:off x="1519161" y="4725885"/>
-              <a:ext cx="77571" cy="77571"/>
+              <a:off x="1619787" y="4080935"/>
+              <a:ext cx="75116" cy="75116"/>
             </a:xfrm>
             <a:prstGeom prst="ellipse">
               <a:avLst/>
@@ -8353,8 +8353,8 @@
           </p:nvSpPr>
           <p:spPr>
             <a:xfrm>
-              <a:off x="1593104" y="4585602"/>
-              <a:ext cx="77571" cy="77571"/>
+              <a:off x="1691303" y="3960293"/>
+              <a:ext cx="75116" cy="75116"/>
             </a:xfrm>
             <a:prstGeom prst="ellipse">
               <a:avLst/>
@@ -8379,8 +8379,8 @@
           </p:nvSpPr>
           <p:spPr>
             <a:xfrm>
-              <a:off x="1853531" y="4613845"/>
-              <a:ext cx="77571" cy="77571"/>
+              <a:off x="1397593" y="3987961"/>
+              <a:ext cx="75116" cy="75116"/>
             </a:xfrm>
             <a:prstGeom prst="ellipse">
               <a:avLst/>
@@ -8405,8 +8405,8 @@
           </p:nvSpPr>
           <p:spPr>
             <a:xfrm>
-              <a:off x="1612555" y="4478305"/>
-              <a:ext cx="77571" cy="77571"/>
+              <a:off x="1557519" y="3870755"/>
+              <a:ext cx="75116" cy="75116"/>
             </a:xfrm>
             <a:prstGeom prst="ellipse">
               <a:avLst/>
@@ -8431,8 +8431,8 @@
           </p:nvSpPr>
           <p:spPr>
             <a:xfrm>
-              <a:off x="1782513" y="4134313"/>
-              <a:ext cx="77571" cy="77571"/>
+              <a:off x="1722765" y="3578062"/>
+              <a:ext cx="75116" cy="75116"/>
             </a:xfrm>
             <a:prstGeom prst="ellipse">
               <a:avLst/>
@@ -8457,8 +8457,8 @@
           </p:nvSpPr>
           <p:spPr>
             <a:xfrm>
-              <a:off x="1723034" y="4584482"/>
-              <a:ext cx="77571" cy="77571"/>
+              <a:off x="1447167" y="3962084"/>
+              <a:ext cx="75116" cy="75116"/>
             </a:xfrm>
             <a:prstGeom prst="ellipse">
               <a:avLst/>
@@ -8483,8 +8483,8 @@
           </p:nvSpPr>
           <p:spPr>
             <a:xfrm>
-              <a:off x="1659170" y="4534634"/>
-              <a:ext cx="77571" cy="77571"/>
+              <a:off x="1587309" y="3921109"/>
+              <a:ext cx="75116" cy="75116"/>
             </a:xfrm>
             <a:prstGeom prst="ellipse">
               <a:avLst/>
@@ -8509,8 +8509,8 @@
           </p:nvSpPr>
           <p:spPr>
             <a:xfrm>
-              <a:off x="1765071" y="4480091"/>
-              <a:ext cx="77571" cy="77571"/>
+              <a:off x="1774718" y="3871126"/>
+              <a:ext cx="75116" cy="75116"/>
             </a:xfrm>
             <a:prstGeom prst="ellipse">
               <a:avLst/>
@@ -8535,8 +8535,8 @@
           </p:nvSpPr>
           <p:spPr>
             <a:xfrm>
-              <a:off x="2711574" y="4731539"/>
-              <a:ext cx="77571" cy="77571"/>
+              <a:off x="2204863" y="4088507"/>
+              <a:ext cx="75116" cy="75116"/>
             </a:xfrm>
             <a:prstGeom prst="ellipse">
               <a:avLst/>
@@ -8561,8 +8561,8 @@
           </p:nvSpPr>
           <p:spPr>
             <a:xfrm>
-              <a:off x="2544947" y="4786895"/>
-              <a:ext cx="77571" cy="77571"/>
+              <a:off x="2359239" y="4131320"/>
+              <a:ext cx="75116" cy="75116"/>
             </a:xfrm>
             <a:prstGeom prst="ellipse">
               <a:avLst/>
@@ -8587,8 +8587,8 @@
           </p:nvSpPr>
           <p:spPr>
             <a:xfrm>
-              <a:off x="2432566" y="3553390"/>
-              <a:ext cx="77571" cy="77571"/>
+              <a:off x="2168313" y="3084082"/>
+              <a:ext cx="75116" cy="75116"/>
             </a:xfrm>
             <a:prstGeom prst="ellipse">
               <a:avLst/>
@@ -8613,8 +8613,8 @@
           </p:nvSpPr>
           <p:spPr>
             <a:xfrm>
-              <a:off x="2575963" y="4648958"/>
-              <a:ext cx="77571" cy="77571"/>
+              <a:off x="2369624" y="4018179"/>
+              <a:ext cx="75116" cy="75116"/>
             </a:xfrm>
             <a:prstGeom prst="ellipse">
               <a:avLst/>
@@ -8639,8 +8639,8 @@
           </p:nvSpPr>
           <p:spPr>
             <a:xfrm>
-              <a:off x="2404087" y="4676209"/>
-              <a:ext cx="77571" cy="77571"/>
+              <a:off x="2387263" y="4038264"/>
+              <a:ext cx="75116" cy="75116"/>
             </a:xfrm>
             <a:prstGeom prst="ellipse">
               <a:avLst/>
@@ -8665,8 +8665,8 @@
           </p:nvSpPr>
           <p:spPr>
             <a:xfrm>
-              <a:off x="2571143" y="4505413"/>
-              <a:ext cx="77571" cy="77571"/>
+              <a:off x="2487679" y="3892418"/>
+              <a:ext cx="75116" cy="75116"/>
             </a:xfrm>
             <a:prstGeom prst="ellipse">
               <a:avLst/>
@@ -8691,8 +8691,8 @@
           </p:nvSpPr>
           <p:spPr>
             <a:xfrm>
-              <a:off x="2702969" y="4676458"/>
-              <a:ext cx="77571" cy="77571"/>
+              <a:off x="2165479" y="4039369"/>
+              <a:ext cx="75116" cy="75116"/>
             </a:xfrm>
             <a:prstGeom prst="ellipse">
               <a:avLst/>
@@ -8717,8 +8717,8 @@
           </p:nvSpPr>
           <p:spPr>
             <a:xfrm>
-              <a:off x="2659398" y="4680920"/>
-              <a:ext cx="77571" cy="77571"/>
+              <a:off x="2084927" y="4042177"/>
+              <a:ext cx="75116" cy="75116"/>
             </a:xfrm>
             <a:prstGeom prst="ellipse">
               <a:avLst/>
@@ -8743,8 +8743,8 @@
           </p:nvSpPr>
           <p:spPr>
             <a:xfrm>
-              <a:off x="2454297" y="4037109"/>
-              <a:ext cx="77571" cy="77571"/>
+              <a:off x="2483019" y="3494220"/>
+              <a:ext cx="75116" cy="75116"/>
             </a:xfrm>
             <a:prstGeom prst="ellipse">
               <a:avLst/>
@@ -8769,8 +8769,8 @@
           </p:nvSpPr>
           <p:spPr>
             <a:xfrm>
-              <a:off x="2811235" y="4180513"/>
-              <a:ext cx="77571" cy="77571"/>
+              <a:off x="2160474" y="3619193"/>
+              <a:ext cx="75116" cy="75116"/>
             </a:xfrm>
             <a:prstGeom prst="ellipse">
               <a:avLst/>
@@ -8795,8 +8795,8 @@
           </p:nvSpPr>
           <p:spPr>
             <a:xfrm>
-              <a:off x="2696125" y="4413951"/>
-              <a:ext cx="77571" cy="77571"/>
+              <a:off x="2321373" y="3815627"/>
+              <a:ext cx="75116" cy="75116"/>
             </a:xfrm>
             <a:prstGeom prst="ellipse">
               <a:avLst/>
@@ -8821,8 +8821,8 @@
           </p:nvSpPr>
           <p:spPr>
             <a:xfrm>
-              <a:off x="2490857" y="4502240"/>
-              <a:ext cx="77571" cy="77571"/>
+              <a:off x="2354130" y="3890580"/>
+              <a:ext cx="75116" cy="75116"/>
             </a:xfrm>
             <a:prstGeom prst="ellipse">
               <a:avLst/>
@@ -8847,8 +8847,8 @@
           </p:nvSpPr>
           <p:spPr>
             <a:xfrm>
-              <a:off x="2678277" y="4339409"/>
-              <a:ext cx="77571" cy="77571"/>
+              <a:off x="2375621" y="3751666"/>
+              <a:ext cx="75116" cy="75116"/>
             </a:xfrm>
             <a:prstGeom prst="ellipse">
               <a:avLst/>
@@ -8873,8 +8873,8 @@
           </p:nvSpPr>
           <p:spPr>
             <a:xfrm>
-              <a:off x="2713479" y="4560764"/>
-              <a:ext cx="77571" cy="77571"/>
+              <a:off x="2390257" y="3942908"/>
+              <a:ext cx="75116" cy="75116"/>
             </a:xfrm>
             <a:prstGeom prst="ellipse">
               <a:avLst/>
@@ -8899,8 +8899,8 @@
           </p:nvSpPr>
           <p:spPr>
             <a:xfrm>
-              <a:off x="2725349" y="4589793"/>
-              <a:ext cx="77571" cy="77571"/>
+              <a:off x="2271854" y="3965834"/>
+              <a:ext cx="75116" cy="75116"/>
             </a:xfrm>
             <a:prstGeom prst="ellipse">
               <a:avLst/>
@@ -8925,8 +8925,8 @@
           </p:nvSpPr>
           <p:spPr>
             <a:xfrm>
-              <a:off x="2515480" y="4451190"/>
-              <a:ext cx="77571" cy="77571"/>
+              <a:off x="2158202" y="3850417"/>
+              <a:ext cx="75116" cy="75116"/>
             </a:xfrm>
             <a:prstGeom prst="ellipse">
               <a:avLst/>
@@ -8951,8 +8951,8 @@
           </p:nvSpPr>
           <p:spPr>
             <a:xfrm>
-              <a:off x="2650101" y="3883026"/>
-              <a:ext cx="77571" cy="77571"/>
+              <a:off x="2476619" y="3364555"/>
+              <a:ext cx="75116" cy="75116"/>
             </a:xfrm>
             <a:prstGeom prst="ellipse">
               <a:avLst/>
@@ -8977,8 +8977,8 @@
           </p:nvSpPr>
           <p:spPr>
             <a:xfrm>
-              <a:off x="2575589" y="4145280"/>
-              <a:ext cx="77571" cy="77571"/>
+              <a:off x="2177397" y="3587494"/>
+              <a:ext cx="75116" cy="75116"/>
             </a:xfrm>
             <a:prstGeom prst="ellipse">
               <a:avLst/>
@@ -9003,8 +9003,8 @@
           </p:nvSpPr>
           <p:spPr>
             <a:xfrm>
-              <a:off x="3619146" y="4440386"/>
-              <a:ext cx="77571" cy="77571"/>
+              <a:off x="3150159" y="3838151"/>
+              <a:ext cx="75116" cy="75116"/>
             </a:xfrm>
             <a:prstGeom prst="ellipse">
               <a:avLst/>
@@ -9029,8 +9029,8 @@
           </p:nvSpPr>
           <p:spPr>
             <a:xfrm>
-              <a:off x="3597434" y="4324492"/>
-              <a:ext cx="77571" cy="77571"/>
+              <a:off x="2879186" y="3739567"/>
+              <a:ext cx="75116" cy="75116"/>
             </a:xfrm>
             <a:prstGeom prst="ellipse">
               <a:avLst/>
@@ -9055,8 +9055,8 @@
           </p:nvSpPr>
           <p:spPr>
             <a:xfrm>
-              <a:off x="3425494" y="4771684"/>
-              <a:ext cx="77571" cy="77571"/>
+              <a:off x="3127567" y="4119963"/>
+              <a:ext cx="75116" cy="75116"/>
             </a:xfrm>
             <a:prstGeom prst="ellipse">
               <a:avLst/>
@@ -9081,8 +9081,8 @@
           </p:nvSpPr>
           <p:spPr>
             <a:xfrm>
-              <a:off x="3341018" y="4763773"/>
-              <a:ext cx="77571" cy="77571"/>
+              <a:off x="2983451" y="4114141"/>
+              <a:ext cx="75116" cy="75116"/>
             </a:xfrm>
             <a:prstGeom prst="ellipse">
               <a:avLst/>
@@ -9107,8 +9107,8 @@
           </p:nvSpPr>
           <p:spPr>
             <a:xfrm>
-              <a:off x="3226674" y="4550121"/>
-              <a:ext cx="77571" cy="77571"/>
+              <a:off x="2850721" y="3929991"/>
+              <a:ext cx="75116" cy="75116"/>
             </a:xfrm>
             <a:prstGeom prst="ellipse">
               <a:avLst/>
@@ -9133,8 +9133,8 @@
           </p:nvSpPr>
           <p:spPr>
             <a:xfrm>
-              <a:off x="3298668" y="4776500"/>
-              <a:ext cx="77571" cy="77571"/>
+              <a:off x="2978831" y="4125047"/>
+              <a:ext cx="75116" cy="75116"/>
             </a:xfrm>
             <a:prstGeom prst="ellipse">
               <a:avLst/>
@@ -9159,8 +9159,8 @@
           </p:nvSpPr>
           <p:spPr>
             <a:xfrm>
-              <a:off x="3200803" y="3775474"/>
-              <a:ext cx="77571" cy="77571"/>
+              <a:off x="2839309" y="3271010"/>
+              <a:ext cx="75116" cy="75116"/>
             </a:xfrm>
             <a:prstGeom prst="ellipse">
               <a:avLst/>
@@ -9185,8 +9185,8 @@
           </p:nvSpPr>
           <p:spPr>
             <a:xfrm>
-              <a:off x="3653642" y="4794129"/>
-              <a:ext cx="77571" cy="77571"/>
+              <a:off x="3184332" y="4140663"/>
+              <a:ext cx="75116" cy="75116"/>
             </a:xfrm>
             <a:prstGeom prst="ellipse">
               <a:avLst/>
@@ -9211,8 +9211,8 @@
           </p:nvSpPr>
           <p:spPr>
             <a:xfrm>
-              <a:off x="3416586" y="4268372"/>
-              <a:ext cx="77571" cy="77571"/>
+              <a:off x="3060994" y="3692436"/>
+              <a:ext cx="75116" cy="75116"/>
             </a:xfrm>
             <a:prstGeom prst="ellipse">
               <a:avLst/>
@@ -9237,8 +9237,8 @@
           </p:nvSpPr>
           <p:spPr>
             <a:xfrm>
-              <a:off x="3491393" y="3582874"/>
-              <a:ext cx="77571" cy="77571"/>
+              <a:off x="2837545" y="3106713"/>
+              <a:ext cx="75116" cy="75116"/>
             </a:xfrm>
             <a:prstGeom prst="ellipse">
               <a:avLst/>
@@ -9263,8 +9263,8 @@
           </p:nvSpPr>
           <p:spPr>
             <a:xfrm>
-              <a:off x="3381518" y="3461564"/>
-              <a:ext cx="77571" cy="77571"/>
+              <a:off x="3167537" y="3007511"/>
+              <a:ext cx="75116" cy="75116"/>
             </a:xfrm>
             <a:prstGeom prst="ellipse">
               <a:avLst/>
@@ -9289,8 +9289,8 @@
           </p:nvSpPr>
           <p:spPr>
             <a:xfrm>
-              <a:off x="3598473" y="4250048"/>
-              <a:ext cx="77571" cy="77571"/>
+              <a:off x="3182257" y="3677736"/>
+              <a:ext cx="75116" cy="75116"/>
             </a:xfrm>
             <a:prstGeom prst="ellipse">
               <a:avLst/>
@@ -9315,8 +9315,8 @@
           </p:nvSpPr>
           <p:spPr>
             <a:xfrm>
-              <a:off x="3670217" y="4111324"/>
-              <a:ext cx="77571" cy="77571"/>
+              <a:off x="2853882" y="3558024"/>
+              <a:ext cx="75116" cy="75116"/>
             </a:xfrm>
             <a:prstGeom prst="ellipse">
               <a:avLst/>
@@ -9341,8 +9341,8 @@
           </p:nvSpPr>
           <p:spPr>
             <a:xfrm>
-              <a:off x="3674039" y="4064793"/>
-              <a:ext cx="77571" cy="77571"/>
+              <a:off x="3132639" y="3516482"/>
+              <a:ext cx="75116" cy="75116"/>
             </a:xfrm>
             <a:prstGeom prst="ellipse">
               <a:avLst/>
@@ -9367,8 +9367,8 @@
           </p:nvSpPr>
           <p:spPr>
             <a:xfrm>
-              <a:off x="3432328" y="4103156"/>
-              <a:ext cx="77571" cy="77571"/>
+              <a:off x="3167924" y="3549597"/>
+              <a:ext cx="75116" cy="75116"/>
             </a:xfrm>
             <a:prstGeom prst="ellipse">
               <a:avLst/>
@@ -9393,8 +9393,8 @@
           </p:nvSpPr>
           <p:spPr>
             <a:xfrm>
-              <a:off x="3510962" y="4695366"/>
-              <a:ext cx="77571" cy="77571"/>
+              <a:off x="2929284" y="4055414"/>
+              <a:ext cx="75116" cy="75116"/>
             </a:xfrm>
             <a:prstGeom prst="ellipse">
               <a:avLst/>
@@ -9419,8 +9419,8 @@
           </p:nvSpPr>
           <p:spPr>
             <a:xfrm>
-              <a:off x="3305787" y="4051405"/>
-              <a:ext cx="77571" cy="77571"/>
+              <a:off x="3001427" y="3505043"/>
+              <a:ext cx="75116" cy="75116"/>
             </a:xfrm>
             <a:prstGeom prst="ellipse">
               <a:avLst/>
@@ -9445,8 +9445,8 @@
           </p:nvSpPr>
           <p:spPr>
             <a:xfrm>
-              <a:off x="3541018" y="4496366"/>
-              <a:ext cx="77571" cy="77571"/>
+              <a:off x="2818015" y="3886483"/>
+              <a:ext cx="75116" cy="75116"/>
             </a:xfrm>
             <a:prstGeom prst="ellipse">
               <a:avLst/>
@@ -9471,8 +9471,8 @@
           </p:nvSpPr>
           <p:spPr>
             <a:xfrm>
-              <a:off x="3201525" y="4518338"/>
-              <a:ext cx="77571" cy="77571"/>
+              <a:off x="3067632" y="3904410"/>
+              <a:ext cx="75116" cy="75116"/>
             </a:xfrm>
             <a:prstGeom prst="ellipse">
               <a:avLst/>
@@ -9497,8 +9497,8 @@
           </p:nvSpPr>
           <p:spPr>
             <a:xfrm>
-              <a:off x="3373666" y="4302730"/>
-              <a:ext cx="77571" cy="77571"/>
+              <a:off x="3102111" y="3722958"/>
+              <a:ext cx="75116" cy="75116"/>
             </a:xfrm>
             <a:prstGeom prst="ellipse">
               <a:avLst/>
@@ -9523,8 +9523,8 @@
           </p:nvSpPr>
           <p:spPr>
             <a:xfrm>
-              <a:off x="4394503" y="4291536"/>
-              <a:ext cx="77571" cy="77571"/>
+              <a:off x="3575207" y="3709962"/>
+              <a:ext cx="75116" cy="75116"/>
             </a:xfrm>
             <a:prstGeom prst="ellipse">
               <a:avLst/>
@@ -9549,8 +9549,8 @@
           </p:nvSpPr>
           <p:spPr>
             <a:xfrm>
-              <a:off x="4054946" y="4403369"/>
-              <a:ext cx="77571" cy="77571"/>
+              <a:off x="3650248" y="3809023"/>
+              <a:ext cx="75116" cy="75116"/>
             </a:xfrm>
             <a:prstGeom prst="ellipse">
               <a:avLst/>
@@ -9575,8 +9575,8 @@
           </p:nvSpPr>
           <p:spPr>
             <a:xfrm>
-              <a:off x="4236180" y="4325726"/>
-              <a:ext cx="77571" cy="77571"/>
+              <a:off x="3515459" y="3739650"/>
+              <a:ext cx="75116" cy="75116"/>
             </a:xfrm>
             <a:prstGeom prst="ellipse">
               <a:avLst/>
@@ -9601,8 +9601,8 @@
           </p:nvSpPr>
           <p:spPr>
             <a:xfrm>
-              <a:off x="4510442" y="4638260"/>
-              <a:ext cx="77571" cy="77571"/>
+              <a:off x="3729401" y="4006638"/>
+              <a:ext cx="75116" cy="75116"/>
             </a:xfrm>
             <a:prstGeom prst="ellipse">
               <a:avLst/>
@@ -9627,8 +9627,8 @@
           </p:nvSpPr>
           <p:spPr>
             <a:xfrm>
-              <a:off x="4444826" y="4055451"/>
-              <a:ext cx="77571" cy="77571"/>
+              <a:off x="3862420" y="3508276"/>
+              <a:ext cx="75116" cy="75116"/>
             </a:xfrm>
             <a:prstGeom prst="ellipse">
               <a:avLst/>
@@ -9653,8 +9653,8 @@
           </p:nvSpPr>
           <p:spPr>
             <a:xfrm>
-              <a:off x="4479632" y="4427791"/>
-              <a:ext cx="77571" cy="77571"/>
+              <a:off x="3603138" y="3827569"/>
+              <a:ext cx="75116" cy="75116"/>
             </a:xfrm>
             <a:prstGeom prst="ellipse">
               <a:avLst/>
@@ -9679,8 +9679,8 @@
           </p:nvSpPr>
           <p:spPr>
             <a:xfrm>
-              <a:off x="4073529" y="4554643"/>
-              <a:ext cx="77571" cy="77571"/>
+              <a:off x="3780252" y="3934364"/>
+              <a:ext cx="75116" cy="75116"/>
             </a:xfrm>
             <a:prstGeom prst="ellipse">
               <a:avLst/>
@@ -9705,8 +9705,8 @@
           </p:nvSpPr>
           <p:spPr>
             <a:xfrm>
-              <a:off x="4273265" y="4232982"/>
-              <a:ext cx="77571" cy="77571"/>
+              <a:off x="3571637" y="3662854"/>
+              <a:ext cx="75116" cy="75116"/>
             </a:xfrm>
             <a:prstGeom prst="ellipse">
               <a:avLst/>
@@ -9731,8 +9731,8 @@
           </p:nvSpPr>
           <p:spPr>
             <a:xfrm>
-              <a:off x="4409939" y="4160105"/>
-              <a:ext cx="77571" cy="77571"/>
+              <a:off x="3894495" y="3599726"/>
+              <a:ext cx="75116" cy="75116"/>
             </a:xfrm>
             <a:prstGeom prst="ellipse">
               <a:avLst/>
@@ -9757,8 +9757,8 @@
           </p:nvSpPr>
           <p:spPr>
             <a:xfrm>
-              <a:off x="4440993" y="3848587"/>
-              <a:ext cx="77571" cy="77571"/>
+              <a:off x="3807444" y="3333511"/>
+              <a:ext cx="75116" cy="75116"/>
             </a:xfrm>
             <a:prstGeom prst="ellipse">
               <a:avLst/>
@@ -9783,8 +9783,8 @@
           </p:nvSpPr>
           <p:spPr>
             <a:xfrm>
-              <a:off x="4054624" y="3875606"/>
-              <a:ext cx="77571" cy="77571"/>
+              <a:off x="3564236" y="3356379"/>
+              <a:ext cx="75116" cy="75116"/>
             </a:xfrm>
             <a:prstGeom prst="ellipse">
               <a:avLst/>
@@ -9809,8 +9809,8 @@
           </p:nvSpPr>
           <p:spPr>
             <a:xfrm>
-              <a:off x="4432415" y="3851192"/>
-              <a:ext cx="77571" cy="77571"/>
+              <a:off x="3501343" y="3337278"/>
+              <a:ext cx="75116" cy="75116"/>
             </a:xfrm>
             <a:prstGeom prst="ellipse">
               <a:avLst/>
@@ -9835,8 +9835,8 @@
           </p:nvSpPr>
           <p:spPr>
             <a:xfrm>
-              <a:off x="4172402" y="3966777"/>
-              <a:ext cx="77571" cy="77571"/>
+              <a:off x="3541703" y="3434678"/>
+              <a:ext cx="75116" cy="75116"/>
             </a:xfrm>
             <a:prstGeom prst="ellipse">
               <a:avLst/>
@@ -9861,8 +9861,8 @@
           </p:nvSpPr>
           <p:spPr>
             <a:xfrm>
-              <a:off x="4367421" y="4244311"/>
-              <a:ext cx="77571" cy="77571"/>
+              <a:off x="3698502" y="3670721"/>
+              <a:ext cx="75116" cy="75116"/>
             </a:xfrm>
             <a:prstGeom prst="ellipse">
               <a:avLst/>
@@ -9887,8 +9887,8 @@
           </p:nvSpPr>
           <p:spPr>
             <a:xfrm>
-              <a:off x="4266805" y="4274626"/>
-              <a:ext cx="77571" cy="77571"/>
+              <a:off x="3554320" y="3697092"/>
+              <a:ext cx="75116" cy="75116"/>
             </a:xfrm>
             <a:prstGeom prst="ellipse">
               <a:avLst/>
@@ -9913,8 +9913,8 @@
           </p:nvSpPr>
           <p:spPr>
             <a:xfrm>
-              <a:off x="4079647" y="4164622"/>
-              <a:ext cx="77571" cy="77571"/>
+              <a:off x="3890426" y="3602160"/>
+              <a:ext cx="75116" cy="75116"/>
             </a:xfrm>
             <a:prstGeom prst="ellipse">
               <a:avLst/>
@@ -9939,8 +9939,8 @@
           </p:nvSpPr>
           <p:spPr>
             <a:xfrm>
-              <a:off x="4482382" y="4119496"/>
-              <a:ext cx="77571" cy="77571"/>
+              <a:off x="3706434" y="3564426"/>
+              <a:ext cx="75116" cy="75116"/>
             </a:xfrm>
             <a:prstGeom prst="ellipse">
               <a:avLst/>
@@ -9965,8 +9965,8 @@
           </p:nvSpPr>
           <p:spPr>
             <a:xfrm>
-              <a:off x="4385302" y="4107297"/>
-              <a:ext cx="77571" cy="77571"/>
+              <a:off x="3504761" y="3553215"/>
+              <a:ext cx="75116" cy="75116"/>
             </a:xfrm>
             <a:prstGeom prst="ellipse">
               <a:avLst/>
@@ -9991,8 +9991,8 @@
           </p:nvSpPr>
           <p:spPr>
             <a:xfrm>
-              <a:off x="4269933" y="3906930"/>
-              <a:ext cx="77571" cy="77571"/>
+              <a:off x="3772586" y="3382482"/>
+              <a:ext cx="75116" cy="75116"/>
             </a:xfrm>
             <a:prstGeom prst="ellipse">
               <a:avLst/>
@@ -10017,8 +10017,8 @@
           </p:nvSpPr>
           <p:spPr>
             <a:xfrm>
-              <a:off x="4275947" y="4037470"/>
-              <a:ext cx="77571" cy="77571"/>
+              <a:off x="3682925" y="3495998"/>
+              <a:ext cx="75116" cy="75116"/>
             </a:xfrm>
             <a:prstGeom prst="ellipse">
               <a:avLst/>
@@ -10043,8 +10043,8 @@
           </p:nvSpPr>
           <p:spPr>
             <a:xfrm>
-              <a:off x="4354884" y="4084919"/>
-              <a:ext cx="77571" cy="77571"/>
+              <a:off x="3730666" y="3535891"/>
+              <a:ext cx="75116" cy="75116"/>
             </a:xfrm>
             <a:prstGeom prst="ellipse">
               <a:avLst/>
@@ -10069,8 +10069,8 @@
           </p:nvSpPr>
           <p:spPr>
             <a:xfrm>
-              <a:off x="4469576" y="3873547"/>
-              <a:ext cx="77571" cy="77571"/>
+              <a:off x="3641377" y="3356295"/>
+              <a:ext cx="75116" cy="75116"/>
             </a:xfrm>
             <a:prstGeom prst="ellipse">
               <a:avLst/>
@@ -10095,8 +10095,8 @@
           </p:nvSpPr>
           <p:spPr>
             <a:xfrm>
-              <a:off x="4165524" y="4118705"/>
-              <a:ext cx="77571" cy="77571"/>
+              <a:off x="3694814" y="3564135"/>
+              <a:ext cx="75116" cy="75116"/>
             </a:xfrm>
             <a:prstGeom prst="ellipse">
               <a:avLst/>
@@ -10121,8 +10121,8 @@
           </p:nvSpPr>
           <p:spPr>
             <a:xfrm>
-              <a:off x="4211103" y="3931436"/>
-              <a:ext cx="77571" cy="77571"/>
+              <a:off x="3568789" y="3405086"/>
+              <a:ext cx="75116" cy="75116"/>
             </a:xfrm>
             <a:prstGeom prst="ellipse">
               <a:avLst/>
@@ -10147,42 +10147,42 @@
           </p:nvSpPr>
           <p:spPr>
             <a:xfrm>
-              <a:off x="1761832" y="3982568"/>
-              <a:ext cx="2558371" cy="802115"/>
+              <a:off x="1609722" y="3452987"/>
+              <a:ext cx="2134363" cy="683125"/>
             </a:xfrm>
             <a:custGeom>
               <a:avLst/>
               <a:pathLst>
-                <a:path w="2558371" h="802115">
+                <a:path w="2134363" h="683125">
                   <a:moveTo>
-                    <a:pt x="0" y="327112"/>
+                    <a:pt x="0" y="278586"/>
                   </a:moveTo>
                   <a:lnTo>
-                    <a:pt x="1351640" y="242256"/>
+                    <a:pt x="1127628" y="206318"/>
                   </a:lnTo>
                   <a:lnTo>
-                    <a:pt x="1705580" y="186725"/>
+                    <a:pt x="1422908" y="159025"/>
                   </a:lnTo>
                   <a:lnTo>
-                    <a:pt x="2204431" y="83799"/>
+                    <a:pt x="1839082" y="71368"/>
                   </a:lnTo>
                   <a:lnTo>
-                    <a:pt x="2558371" y="0"/>
+                    <a:pt x="2134363" y="0"/>
                   </a:lnTo>
                   <a:lnTo>
-                    <a:pt x="2558371" y="426079"/>
+                    <a:pt x="2134363" y="362872"/>
                   </a:lnTo>
                   <a:lnTo>
-                    <a:pt x="2204431" y="439557"/>
+                    <a:pt x="1839082" y="374350"/>
                   </a:lnTo>
                   <a:lnTo>
-                    <a:pt x="1705580" y="473737"/>
+                    <a:pt x="1422908" y="403460"/>
                   </a:lnTo>
                   <a:lnTo>
-                    <a:pt x="1351640" y="515483"/>
+                    <a:pt x="1127628" y="439013"/>
                   </a:lnTo>
                   <a:lnTo>
-                    <a:pt x="0" y="802115"/>
+                    <a:pt x="0" y="683125"/>
                   </a:lnTo>
                   <a:close/>
                 </a:path>
@@ -10208,27 +10208,27 @@
           </p:nvSpPr>
           <p:spPr>
             <a:xfrm>
-              <a:off x="1761832" y="3982568"/>
-              <a:ext cx="2558371" cy="327112"/>
+              <a:off x="1609722" y="3452987"/>
+              <a:ext cx="2134363" cy="278586"/>
             </a:xfrm>
             <a:custGeom>
               <a:avLst/>
               <a:pathLst>
-                <a:path w="2558371" h="327112">
+                <a:path w="2134363" h="278586">
                   <a:moveTo>
-                    <a:pt x="0" y="327112"/>
+                    <a:pt x="0" y="278586"/>
                   </a:moveTo>
                   <a:lnTo>
-                    <a:pt x="1351640" y="242256"/>
+                    <a:pt x="1127628" y="206318"/>
                   </a:lnTo>
                   <a:lnTo>
-                    <a:pt x="1705580" y="186725"/>
+                    <a:pt x="1422908" y="159025"/>
                   </a:lnTo>
                   <a:lnTo>
-                    <a:pt x="2204431" y="83799"/>
+                    <a:pt x="1839082" y="71368"/>
                   </a:lnTo>
                   <a:lnTo>
-                    <a:pt x="2558371" y="0"/>
+                    <a:pt x="2134363" y="0"/>
                   </a:lnTo>
                 </a:path>
               </a:pathLst>
@@ -10248,27 +10248,27 @@
           </p:nvSpPr>
           <p:spPr>
             <a:xfrm>
-              <a:off x="1761832" y="4408647"/>
-              <a:ext cx="2558371" cy="376036"/>
+              <a:off x="1609722" y="3815859"/>
+              <a:ext cx="2134363" cy="320253"/>
             </a:xfrm>
             <a:custGeom>
               <a:avLst/>
               <a:pathLst>
-                <a:path w="2558371" h="376036">
+                <a:path w="2134363" h="320253">
                   <a:moveTo>
-                    <a:pt x="2558371" y="0"/>
+                    <a:pt x="2134363" y="0"/>
                   </a:moveTo>
                   <a:lnTo>
-                    <a:pt x="2204431" y="13478"/>
+                    <a:pt x="1839082" y="11478"/>
                   </a:lnTo>
                   <a:lnTo>
-                    <a:pt x="1705580" y="47658"/>
+                    <a:pt x="1422908" y="40588"/>
                   </a:lnTo>
                   <a:lnTo>
-                    <a:pt x="1351640" y="89404"/>
+                    <a:pt x="1127628" y="76141"/>
                   </a:lnTo>
                   <a:lnTo>
-                    <a:pt x="0" y="376036"/>
+                    <a:pt x="0" y="320253"/>
                   </a:lnTo>
                 </a:path>
               </a:pathLst>
@@ -10288,27 +10288,27 @@
           </p:nvSpPr>
           <p:spPr>
             <a:xfrm>
-              <a:off x="1761832" y="4195607"/>
-              <a:ext cx="2558371" cy="351574"/>
+              <a:off x="1609722" y="3634423"/>
+              <a:ext cx="2134363" cy="299420"/>
             </a:xfrm>
             <a:custGeom>
               <a:avLst/>
               <a:pathLst>
-                <a:path w="2558371" h="351574">
+                <a:path w="2134363" h="299420">
                   <a:moveTo>
-                    <a:pt x="0" y="351574"/>
+                    <a:pt x="0" y="299420"/>
                   </a:moveTo>
                   <a:lnTo>
-                    <a:pt x="1351640" y="165830"/>
+                    <a:pt x="1127628" y="141230"/>
                   </a:lnTo>
                   <a:lnTo>
-                    <a:pt x="1705580" y="117191"/>
+                    <a:pt x="1422908" y="99806"/>
                   </a:lnTo>
                   <a:lnTo>
-                    <a:pt x="2204431" y="48638"/>
+                    <a:pt x="1839082" y="41423"/>
                   </a:lnTo>
                   <a:lnTo>
-                    <a:pt x="2558371" y="0"/>
+                    <a:pt x="2134363" y="0"/>
                   </a:lnTo>
                 </a:path>
               </a:pathLst>
@@ -10337,7 +10337,7 @@
           </p:nvSpPr>
           <p:spPr>
             <a:xfrm>
-              <a:off x="3840508" y="3511966"/>
+              <a:off x="3264391" y="3033946"/>
               <a:ext cx="479694" cy="82021"/>
             </a:xfrm>
             <a:prstGeom prst="rect">
@@ -10383,8 +10383,8 @@
           </p:nvSpPr>
           <p:spPr>
             <a:xfrm>
-              <a:off x="1408383" y="3300465"/>
-              <a:ext cx="3290409" cy="1599078"/>
+              <a:off x="1310306" y="2875097"/>
+              <a:ext cx="2746591" cy="1359782"/>
             </a:xfrm>
             <a:prstGeom prst="rect">
               <a:avLst/>
@@ -10404,15 +10404,15 @@
           </p:nvSpPr>
           <p:spPr>
             <a:xfrm>
-              <a:off x="1408383" y="3300465"/>
-              <a:ext cx="0" cy="1599078"/>
+              <a:off x="1310306" y="2875097"/>
+              <a:ext cx="0" cy="1359782"/>
             </a:xfrm>
             <a:custGeom>
               <a:avLst/>
               <a:pathLst>
-                <a:path w="0" h="1599078">
+                <a:path w="0" h="1359782">
                   <a:moveTo>
-                    <a:pt x="0" y="1599078"/>
+                    <a:pt x="0" y="1359782"/>
                   </a:moveTo>
                   <a:lnTo>
                     <a:pt x="0" y="0"/>
@@ -10444,8 +10444,8 @@
           </p:nvSpPr>
           <p:spPr>
             <a:xfrm rot="-5400000">
-              <a:off x="1177387" y="4792493"/>
-              <a:ext cx="194218" cy="100218"/>
+              <a:off x="1140740" y="4149000"/>
+              <a:ext cx="141274" cy="72877"/>
             </a:xfrm>
             <a:prstGeom prst="rect">
               <a:avLst/>
@@ -10458,7 +10458,7 @@
             <a:p>
               <a:pPr algn="l" marL="0" marR="0" indent="0">
                 <a:lnSpc>
-                  <a:spcPts val="1100"/>
+                  <a:spcPts val="800"/>
                 </a:lnSpc>
                 <a:spcBef>
                   <a:spcPts val="0"/>
@@ -10468,7 +10468,7 @@
                 </a:spcAft>
               </a:pPr>
               <a:r>
-                <a:rPr sz="1100">
+                <a:rPr sz="800">
                   <a:solidFill>
                     <a:srgbClr val="000000">
                       <a:alpha val="100000"/>
@@ -10490,8 +10490,8 @@
           </p:nvSpPr>
           <p:spPr>
             <a:xfrm rot="-5400000">
-              <a:off x="1177387" y="4497136"/>
-              <a:ext cx="194218" cy="100218"/>
+              <a:off x="1140740" y="3897458"/>
+              <a:ext cx="141274" cy="72877"/>
             </a:xfrm>
             <a:prstGeom prst="rect">
               <a:avLst/>
@@ -10504,7 +10504,7 @@
             <a:p>
               <a:pPr algn="l" marL="0" marR="0" indent="0">
                 <a:lnSpc>
-                  <a:spcPts val="1100"/>
+                  <a:spcPts val="800"/>
                 </a:lnSpc>
                 <a:spcBef>
                   <a:spcPts val="0"/>
@@ -10514,7 +10514,7 @@
                 </a:spcAft>
               </a:pPr>
               <a:r>
-                <a:rPr sz="1100">
+                <a:rPr sz="800">
                   <a:solidFill>
                     <a:srgbClr val="000000">
                       <a:alpha val="100000"/>
@@ -10536,8 +10536,8 @@
           </p:nvSpPr>
           <p:spPr>
             <a:xfrm rot="-5400000">
-              <a:off x="1177387" y="4201779"/>
-              <a:ext cx="194218" cy="100218"/>
+              <a:off x="1140740" y="3645917"/>
+              <a:ext cx="141274" cy="72877"/>
             </a:xfrm>
             <a:prstGeom prst="rect">
               <a:avLst/>
@@ -10550,7 +10550,7 @@
             <a:p>
               <a:pPr algn="l" marL="0" marR="0" indent="0">
                 <a:lnSpc>
-                  <a:spcPts val="1100"/>
+                  <a:spcPts val="800"/>
                 </a:lnSpc>
                 <a:spcBef>
                   <a:spcPts val="0"/>
@@ -10560,7 +10560,7 @@
                 </a:spcAft>
               </a:pPr>
               <a:r>
-                <a:rPr sz="1100">
+                <a:rPr sz="800">
                   <a:solidFill>
                     <a:srgbClr val="000000">
                       <a:alpha val="100000"/>
@@ -10582,8 +10582,8 @@
           </p:nvSpPr>
           <p:spPr>
             <a:xfrm rot="-5400000">
-              <a:off x="1177387" y="3906423"/>
-              <a:ext cx="194218" cy="100218"/>
+              <a:off x="1140740" y="3394375"/>
+              <a:ext cx="141274" cy="72877"/>
             </a:xfrm>
             <a:prstGeom prst="rect">
               <a:avLst/>
@@ -10596,7 +10596,7 @@
             <a:p>
               <a:pPr algn="l" marL="0" marR="0" indent="0">
                 <a:lnSpc>
-                  <a:spcPts val="1100"/>
+                  <a:spcPts val="800"/>
                 </a:lnSpc>
                 <a:spcBef>
                   <a:spcPts val="0"/>
@@ -10606,7 +10606,7 @@
                 </a:spcAft>
               </a:pPr>
               <a:r>
-                <a:rPr sz="1100">
+                <a:rPr sz="800">
                   <a:solidFill>
                     <a:srgbClr val="000000">
                       <a:alpha val="100000"/>
@@ -10628,8 +10628,8 @@
           </p:nvSpPr>
           <p:spPr>
             <a:xfrm rot="-5400000">
-              <a:off x="1177387" y="3611066"/>
-              <a:ext cx="194218" cy="100218"/>
+              <a:off x="1140740" y="3142833"/>
+              <a:ext cx="141274" cy="72877"/>
             </a:xfrm>
             <a:prstGeom prst="rect">
               <a:avLst/>
@@ -10642,7 +10642,7 @@
             <a:p>
               <a:pPr algn="l" marL="0" marR="0" indent="0">
                 <a:lnSpc>
-                  <a:spcPts val="1100"/>
+                  <a:spcPts val="800"/>
                 </a:lnSpc>
                 <a:spcBef>
                   <a:spcPts val="0"/>
@@ -10652,7 +10652,7 @@
                 </a:spcAft>
               </a:pPr>
               <a:r>
-                <a:rPr sz="1100">
+                <a:rPr sz="800">
                   <a:solidFill>
                     <a:srgbClr val="000000">
                       <a:alpha val="100000"/>
@@ -10674,8 +10674,8 @@
           </p:nvSpPr>
           <p:spPr>
             <a:xfrm rot="-5400000">
-              <a:off x="1177387" y="3315709"/>
-              <a:ext cx="194218" cy="100218"/>
+              <a:off x="1140740" y="2891291"/>
+              <a:ext cx="141274" cy="72877"/>
             </a:xfrm>
             <a:prstGeom prst="rect">
               <a:avLst/>
@@ -10688,7 +10688,7 @@
             <a:p>
               <a:pPr algn="l" marL="0" marR="0" indent="0">
                 <a:lnSpc>
-                  <a:spcPts val="1100"/>
+                  <a:spcPts val="800"/>
                 </a:lnSpc>
                 <a:spcBef>
                   <a:spcPts val="0"/>
@@ -10698,7 +10698,7 @@
                 </a:spcAft>
               </a:pPr>
               <a:r>
-                <a:rPr sz="1100">
+                <a:rPr sz="800">
                   <a:solidFill>
                     <a:srgbClr val="000000">
                       <a:alpha val="100000"/>
@@ -10720,18 +10720,18 @@
           </p:nvSpPr>
           <p:spPr>
             <a:xfrm>
-              <a:off x="1370425" y="4842602"/>
-              <a:ext cx="37957" cy="0"/>
+              <a:off x="1281838" y="4185439"/>
+              <a:ext cx="28468" cy="0"/>
             </a:xfrm>
             <a:custGeom>
               <a:avLst/>
               <a:pathLst>
-                <a:path w="37957" h="0">
+                <a:path w="28468" h="0">
                   <a:moveTo>
                     <a:pt x="0" y="0"/>
                   </a:moveTo>
                   <a:lnTo>
-                    <a:pt x="37957" y="0"/>
+                    <a:pt x="28468" y="0"/>
                   </a:lnTo>
                 </a:path>
               </a:pathLst>
@@ -10760,18 +10760,18 @@
           </p:nvSpPr>
           <p:spPr>
             <a:xfrm>
-              <a:off x="1370425" y="4547245"/>
-              <a:ext cx="37957" cy="0"/>
+              <a:off x="1281838" y="3933897"/>
+              <a:ext cx="28468" cy="0"/>
             </a:xfrm>
             <a:custGeom>
               <a:avLst/>
               <a:pathLst>
-                <a:path w="37957" h="0">
+                <a:path w="28468" h="0">
                   <a:moveTo>
                     <a:pt x="0" y="0"/>
                   </a:moveTo>
                   <a:lnTo>
-                    <a:pt x="37957" y="0"/>
+                    <a:pt x="28468" y="0"/>
                   </a:lnTo>
                 </a:path>
               </a:pathLst>
@@ -10800,18 +10800,18 @@
           </p:nvSpPr>
           <p:spPr>
             <a:xfrm>
-              <a:off x="1370425" y="4251888"/>
-              <a:ext cx="37957" cy="0"/>
+              <a:off x="1281838" y="3682355"/>
+              <a:ext cx="28468" cy="0"/>
             </a:xfrm>
             <a:custGeom>
               <a:avLst/>
               <a:pathLst>
-                <a:path w="37957" h="0">
+                <a:path w="28468" h="0">
                   <a:moveTo>
                     <a:pt x="0" y="0"/>
                   </a:moveTo>
                   <a:lnTo>
-                    <a:pt x="37957" y="0"/>
+                    <a:pt x="28468" y="0"/>
                   </a:lnTo>
                 </a:path>
               </a:pathLst>
@@ -10840,18 +10840,18 @@
           </p:nvSpPr>
           <p:spPr>
             <a:xfrm>
-              <a:off x="1370425" y="3956532"/>
-              <a:ext cx="37957" cy="0"/>
+              <a:off x="1281838" y="3430814"/>
+              <a:ext cx="28468" cy="0"/>
             </a:xfrm>
             <a:custGeom>
               <a:avLst/>
               <a:pathLst>
-                <a:path w="37957" h="0">
+                <a:path w="28468" h="0">
                   <a:moveTo>
                     <a:pt x="0" y="0"/>
                   </a:moveTo>
                   <a:lnTo>
-                    <a:pt x="37957" y="0"/>
+                    <a:pt x="28468" y="0"/>
                   </a:lnTo>
                 </a:path>
               </a:pathLst>
@@ -10880,18 +10880,18 @@
           </p:nvSpPr>
           <p:spPr>
             <a:xfrm>
-              <a:off x="1370425" y="3661175"/>
-              <a:ext cx="37957" cy="0"/>
+              <a:off x="1281838" y="3179272"/>
+              <a:ext cx="28468" cy="0"/>
             </a:xfrm>
             <a:custGeom>
               <a:avLst/>
               <a:pathLst>
-                <a:path w="37957" h="0">
+                <a:path w="28468" h="0">
                   <a:moveTo>
                     <a:pt x="0" y="0"/>
                   </a:moveTo>
                   <a:lnTo>
-                    <a:pt x="37957" y="0"/>
+                    <a:pt x="28468" y="0"/>
                   </a:lnTo>
                 </a:path>
               </a:pathLst>
@@ -10920,18 +10920,18 @@
           </p:nvSpPr>
           <p:spPr>
             <a:xfrm>
-              <a:off x="1370425" y="3365818"/>
-              <a:ext cx="37957" cy="0"/>
+              <a:off x="1281838" y="2927730"/>
+              <a:ext cx="28468" cy="0"/>
             </a:xfrm>
             <a:custGeom>
               <a:avLst/>
               <a:pathLst>
-                <a:path w="37957" h="0">
+                <a:path w="28468" h="0">
                   <a:moveTo>
                     <a:pt x="0" y="0"/>
                   </a:moveTo>
                   <a:lnTo>
-                    <a:pt x="37957" y="0"/>
+                    <a:pt x="28468" y="0"/>
                   </a:lnTo>
                 </a:path>
               </a:pathLst>
@@ -10960,18 +10960,18 @@
           </p:nvSpPr>
           <p:spPr>
             <a:xfrm>
-              <a:off x="1408383" y="4899543"/>
-              <a:ext cx="3290409" cy="0"/>
+              <a:off x="1310306" y="4234879"/>
+              <a:ext cx="2746591" cy="0"/>
             </a:xfrm>
             <a:custGeom>
               <a:avLst/>
               <a:pathLst>
-                <a:path w="3290409" h="0">
+                <a:path w="2746591" h="0">
                   <a:moveTo>
                     <a:pt x="0" y="0"/>
                   </a:moveTo>
                   <a:lnTo>
-                    <a:pt x="3290409" y="0"/>
+                    <a:pt x="2746591" y="0"/>
                   </a:lnTo>
                 </a:path>
               </a:pathLst>
@@ -11000,15 +11000,15 @@
           </p:nvSpPr>
           <p:spPr>
             <a:xfrm>
-              <a:off x="1761832" y="4899543"/>
-              <a:ext cx="0" cy="37957"/>
+              <a:off x="1609722" y="4234879"/>
+              <a:ext cx="0" cy="28468"/>
             </a:xfrm>
             <a:custGeom>
               <a:avLst/>
               <a:pathLst>
-                <a:path w="0" h="37957">
+                <a:path w="0" h="28468">
                   <a:moveTo>
-                    <a:pt x="0" y="37957"/>
+                    <a:pt x="0" y="28468"/>
                   </a:moveTo>
                   <a:lnTo>
                     <a:pt x="0" y="0"/>
@@ -11040,15 +11040,15 @@
           </p:nvSpPr>
           <p:spPr>
             <a:xfrm>
-              <a:off x="2614622" y="4899543"/>
-              <a:ext cx="0" cy="37957"/>
+              <a:off x="2321176" y="4234879"/>
+              <a:ext cx="0" cy="28468"/>
             </a:xfrm>
             <a:custGeom>
               <a:avLst/>
               <a:pathLst>
-                <a:path w="0" h="37957">
+                <a:path w="0" h="28468">
                   <a:moveTo>
-                    <a:pt x="0" y="37957"/>
+                    <a:pt x="0" y="28468"/>
                   </a:moveTo>
                   <a:lnTo>
                     <a:pt x="0" y="0"/>
@@ -11080,15 +11080,15 @@
           </p:nvSpPr>
           <p:spPr>
             <a:xfrm>
-              <a:off x="3467412" y="4899543"/>
-              <a:ext cx="0" cy="37957"/>
+              <a:off x="3032630" y="4234879"/>
+              <a:ext cx="0" cy="28468"/>
             </a:xfrm>
             <a:custGeom>
               <a:avLst/>
               <a:pathLst>
-                <a:path w="0" h="37957">
+                <a:path w="0" h="28468">
                   <a:moveTo>
-                    <a:pt x="0" y="37957"/>
+                    <a:pt x="0" y="28468"/>
                   </a:moveTo>
                   <a:lnTo>
                     <a:pt x="0" y="0"/>
@@ -11120,15 +11120,15 @@
           </p:nvSpPr>
           <p:spPr>
             <a:xfrm>
-              <a:off x="4320203" y="4899543"/>
-              <a:ext cx="0" cy="37957"/>
+              <a:off x="3744085" y="4234879"/>
+              <a:ext cx="0" cy="28468"/>
             </a:xfrm>
             <a:custGeom>
               <a:avLst/>
               <a:pathLst>
-                <a:path w="0" h="37957">
+                <a:path w="0" h="28468">
                   <a:moveTo>
-                    <a:pt x="0" y="37957"/>
+                    <a:pt x="0" y="28468"/>
                   </a:moveTo>
                   <a:lnTo>
                     <a:pt x="0" y="0"/>
@@ -11160,8 +11160,8 @@
           </p:nvSpPr>
           <p:spPr>
             <a:xfrm>
-              <a:off x="1722970" y="4967867"/>
-              <a:ext cx="77724" cy="100218"/>
+              <a:off x="1581467" y="4286122"/>
+              <a:ext cx="56509" cy="72877"/>
             </a:xfrm>
             <a:prstGeom prst="rect">
               <a:avLst/>
@@ -11174,7 +11174,7 @@
             <a:p>
               <a:pPr algn="l" marL="0" marR="0" indent="0">
                 <a:lnSpc>
-                  <a:spcPts val="1100"/>
+                  <a:spcPts val="800"/>
                 </a:lnSpc>
                 <a:spcBef>
                   <a:spcPts val="0"/>
@@ -11184,7 +11184,7 @@
                 </a:spcAft>
               </a:pPr>
               <a:r>
-                <a:rPr sz="1100">
+                <a:rPr sz="800">
                   <a:solidFill>
                     <a:srgbClr val="000000">
                       <a:alpha val="100000"/>
@@ -11206,8 +11206,8 @@
           </p:nvSpPr>
           <p:spPr>
             <a:xfrm>
-              <a:off x="2575760" y="4967867"/>
-              <a:ext cx="77724" cy="100218"/>
+              <a:off x="2292921" y="4286122"/>
+              <a:ext cx="56509" cy="72877"/>
             </a:xfrm>
             <a:prstGeom prst="rect">
               <a:avLst/>
@@ -11220,7 +11220,7 @@
             <a:p>
               <a:pPr algn="l" marL="0" marR="0" indent="0">
                 <a:lnSpc>
-                  <a:spcPts val="1100"/>
+                  <a:spcPts val="800"/>
                 </a:lnSpc>
                 <a:spcBef>
                   <a:spcPts val="0"/>
@@ -11230,7 +11230,7 @@
                 </a:spcAft>
               </a:pPr>
               <a:r>
-                <a:rPr sz="1100">
+                <a:rPr sz="800">
                   <a:solidFill>
                     <a:srgbClr val="000000">
                       <a:alpha val="100000"/>
@@ -11252,8 +11252,8 @@
           </p:nvSpPr>
           <p:spPr>
             <a:xfrm>
-              <a:off x="3428550" y="4967867"/>
-              <a:ext cx="77724" cy="100218"/>
+              <a:off x="3004375" y="4286122"/>
+              <a:ext cx="56509" cy="72877"/>
             </a:xfrm>
             <a:prstGeom prst="rect">
               <a:avLst/>
@@ -11266,7 +11266,7 @@
             <a:p>
               <a:pPr algn="l" marL="0" marR="0" indent="0">
                 <a:lnSpc>
-                  <a:spcPts val="1100"/>
+                  <a:spcPts val="800"/>
                 </a:lnSpc>
                 <a:spcBef>
                   <a:spcPts val="0"/>
@@ -11276,7 +11276,7 @@
                 </a:spcAft>
               </a:pPr>
               <a:r>
-                <a:rPr sz="1100">
+                <a:rPr sz="800">
                   <a:solidFill>
                     <a:srgbClr val="000000">
                       <a:alpha val="100000"/>
@@ -11298,8 +11298,8 @@
           </p:nvSpPr>
           <p:spPr>
             <a:xfrm>
-              <a:off x="4281341" y="4967867"/>
-              <a:ext cx="77724" cy="100218"/>
+              <a:off x="3715830" y="4286122"/>
+              <a:ext cx="56509" cy="72877"/>
             </a:xfrm>
             <a:prstGeom prst="rect">
               <a:avLst/>
@@ -11312,7 +11312,7 @@
             <a:p>
               <a:pPr algn="l" marL="0" marR="0" indent="0">
                 <a:lnSpc>
-                  <a:spcPts val="1100"/>
+                  <a:spcPts val="800"/>
                 </a:lnSpc>
                 <a:spcBef>
                   <a:spcPts val="0"/>
@@ -11322,7 +11322,7 @@
                 </a:spcAft>
               </a:pPr>
               <a:r>
-                <a:rPr sz="1100">
+                <a:rPr sz="800">
                   <a:solidFill>
                     <a:srgbClr val="000000">
                       <a:alpha val="100000"/>
@@ -11344,8 +11344,8 @@
           </p:nvSpPr>
           <p:spPr>
             <a:xfrm rot="-5400000">
-              <a:off x="910098" y="4040568"/>
-              <a:ext cx="256946" cy="118872"/>
+              <a:off x="934421" y="3509268"/>
+              <a:ext cx="197510" cy="91440"/>
             </a:xfrm>
             <a:prstGeom prst="rect">
               <a:avLst/>
@@ -11358,7 +11358,7 @@
             <a:p>
               <a:pPr algn="l" marL="0" marR="0" indent="0">
                 <a:lnSpc>
-                  <a:spcPts val="1300"/>
+                  <a:spcPts val="1000"/>
                 </a:lnSpc>
                 <a:spcBef>
                   <a:spcPts val="0"/>
@@ -11368,7 +11368,7 @@
                 </a:spcAft>
               </a:pPr>
               <a:r>
-                <a:rPr sz="1300" b="1">
+                <a:rPr sz="1000" b="1">
                   <a:solidFill>
                     <a:srgbClr val="000000">
                       <a:alpha val="100000"/>
@@ -11390,8 +11390,8 @@
           </p:nvSpPr>
           <p:spPr>
             <a:xfrm>
-              <a:off x="1408383" y="3057306"/>
-              <a:ext cx="1254373" cy="127924"/>
+              <a:off x="1310306" y="2698557"/>
+              <a:ext cx="896569" cy="91440"/>
             </a:xfrm>
             <a:prstGeom prst="rect">
               <a:avLst/>
@@ -11404,7 +11404,7 @@
             <a:p>
               <a:pPr algn="l" marL="0" marR="0" indent="0">
                 <a:lnSpc>
-                  <a:spcPts val="1400"/>
+                  <a:spcPts val="1000"/>
                 </a:lnSpc>
                 <a:spcBef>
                   <a:spcPts val="0"/>
@@ -11414,7 +11414,7 @@
                 </a:spcAft>
               </a:pPr>
               <a:r>
-                <a:rPr sz="1400" b="1">
+                <a:rPr sz="1000" b="1">
                   <a:solidFill>
                     <a:srgbClr val="000000">
                       <a:alpha val="100000"/>
@@ -11436,8 +11436,8 @@
           </p:nvSpPr>
           <p:spPr>
             <a:xfrm>
-              <a:off x="4837970" y="3300465"/>
-              <a:ext cx="3290409" cy="1599078"/>
+              <a:off x="4186587" y="2875097"/>
+              <a:ext cx="2746591" cy="1359782"/>
             </a:xfrm>
             <a:prstGeom prst="rect">
               <a:avLst/>
@@ -11462,8 +11462,8 @@
           </p:nvSpPr>
           <p:spPr>
             <a:xfrm>
-              <a:off x="5020717" y="4318354"/>
-              <a:ext cx="77571" cy="77571"/>
+              <a:off x="4512011" y="3737141"/>
+              <a:ext cx="75116" cy="75116"/>
             </a:xfrm>
             <a:prstGeom prst="ellipse">
               <a:avLst/>
@@ -11488,8 +11488,8 @@
           </p:nvSpPr>
           <p:spPr>
             <a:xfrm>
-              <a:off x="4948748" y="3598429"/>
-              <a:ext cx="77571" cy="77571"/>
+              <a:off x="4466929" y="3122503"/>
+              <a:ext cx="75116" cy="75116"/>
             </a:xfrm>
             <a:prstGeom prst="ellipse">
               <a:avLst/>
@@ -11514,8 +11514,8 @@
           </p:nvSpPr>
           <p:spPr>
             <a:xfrm>
-              <a:off x="5134465" y="4389617"/>
-              <a:ext cx="77571" cy="77571"/>
+              <a:off x="4273874" y="3799900"/>
+              <a:ext cx="75116" cy="75116"/>
             </a:xfrm>
             <a:prstGeom prst="ellipse">
               <a:avLst/>
@@ -11540,8 +11540,8 @@
           </p:nvSpPr>
           <p:spPr>
             <a:xfrm>
-              <a:off x="5022255" y="4135548"/>
-              <a:ext cx="77571" cy="77571"/>
+              <a:off x="4294144" y="3583088"/>
+              <a:ext cx="75116" cy="75116"/>
             </a:xfrm>
             <a:prstGeom prst="ellipse">
               <a:avLst/>
@@ -11566,8 +11566,8 @@
           </p:nvSpPr>
           <p:spPr>
             <a:xfrm>
-              <a:off x="5246434" y="4441169"/>
-              <a:ext cx="77571" cy="77571"/>
+              <a:off x="4565535" y="3845626"/>
+              <a:ext cx="75116" cy="75116"/>
             </a:xfrm>
             <a:prstGeom prst="ellipse">
               <a:avLst/>
@@ -11592,8 +11592,8 @@
           </p:nvSpPr>
           <p:spPr>
             <a:xfrm>
-              <a:off x="5080481" y="3503554"/>
-              <a:ext cx="77571" cy="77571"/>
+              <a:off x="4400831" y="3043701"/>
+              <a:ext cx="75116" cy="75116"/>
             </a:xfrm>
             <a:prstGeom prst="ellipse">
               <a:avLst/>
@@ -11618,8 +11618,8 @@
           </p:nvSpPr>
           <p:spPr>
             <a:xfrm>
-              <a:off x="5266360" y="3461564"/>
-              <a:ext cx="77571" cy="77571"/>
+              <a:off x="4346195" y="3007511"/>
+              <a:ext cx="75116" cy="75116"/>
             </a:xfrm>
             <a:prstGeom prst="ellipse">
               <a:avLst/>
@@ -11644,8 +11644,8 @@
           </p:nvSpPr>
           <p:spPr>
             <a:xfrm>
-              <a:off x="5318036" y="3850369"/>
-              <a:ext cx="77571" cy="77571"/>
+              <a:off x="4544601" y="3341317"/>
+              <a:ext cx="75116" cy="75116"/>
             </a:xfrm>
             <a:prstGeom prst="ellipse">
               <a:avLst/>
@@ -11670,8 +11670,8 @@
           </p:nvSpPr>
           <p:spPr>
             <a:xfrm>
-              <a:off x="4963486" y="4602701"/>
-              <a:ext cx="77571" cy="77571"/>
+              <a:off x="4494319" y="3980980"/>
+              <a:ext cx="75116" cy="75116"/>
             </a:xfrm>
             <a:prstGeom prst="ellipse">
               <a:avLst/>
@@ -11696,8 +11696,8 @@
           </p:nvSpPr>
           <p:spPr>
             <a:xfrm>
-              <a:off x="4989468" y="4199764"/>
-              <a:ext cx="77571" cy="77571"/>
+              <a:off x="4613449" y="3637681"/>
+              <a:ext cx="75116" cy="75116"/>
             </a:xfrm>
             <a:prstGeom prst="ellipse">
               <a:avLst/>
@@ -11722,8 +11722,8 @@
           </p:nvSpPr>
           <p:spPr>
             <a:xfrm>
-              <a:off x="5981027" y="4489604"/>
-              <a:ext cx="77571" cy="77571"/>
+              <a:off x="5353496" y="3884264"/>
+              <a:ext cx="75116" cy="75116"/>
             </a:xfrm>
             <a:prstGeom prst="ellipse">
               <a:avLst/>
@@ -11748,8 +11748,8 @@
           </p:nvSpPr>
           <p:spPr>
             <a:xfrm>
-              <a:off x="5827428" y="3946432"/>
-              <a:ext cx="77571" cy="77571"/>
+              <a:off x="5159873" y="3421979"/>
+              <a:ext cx="75116" cy="75116"/>
             </a:xfrm>
             <a:prstGeom prst="ellipse">
               <a:avLst/>
@@ -11774,8 +11774,8 @@
           </p:nvSpPr>
           <p:spPr>
             <a:xfrm>
-              <a:off x="5988522" y="4395850"/>
-              <a:ext cx="77571" cy="77571"/>
+              <a:off x="5122873" y="3805471"/>
+              <a:ext cx="75116" cy="75116"/>
             </a:xfrm>
             <a:prstGeom prst="ellipse">
               <a:avLst/>
@@ -11800,8 +11800,8 @@
           </p:nvSpPr>
           <p:spPr>
             <a:xfrm>
-              <a:off x="5748302" y="4650494"/>
-              <a:ext cx="77571" cy="77571"/>
+              <a:off x="5237710" y="4018928"/>
+              <a:ext cx="75116" cy="75116"/>
             </a:xfrm>
             <a:prstGeom prst="ellipse">
               <a:avLst/>
@@ -11826,8 +11826,8 @@
           </p:nvSpPr>
           <p:spPr>
             <a:xfrm>
-              <a:off x="5749530" y="4273375"/>
-              <a:ext cx="77571" cy="77571"/>
+              <a:off x="4974438" y="3701871"/>
+              <a:ext cx="75116" cy="75116"/>
             </a:xfrm>
             <a:prstGeom prst="ellipse">
               <a:avLst/>
@@ -11852,8 +11852,8 @@
           </p:nvSpPr>
           <p:spPr>
             <a:xfrm>
-              <a:off x="5874791" y="3920237"/>
-              <a:ext cx="77571" cy="77571"/>
+              <a:off x="5218886" y="3398945"/>
+              <a:ext cx="75116" cy="75116"/>
             </a:xfrm>
             <a:prstGeom prst="ellipse">
               <a:avLst/>
@@ -11878,8 +11878,8 @@
           </p:nvSpPr>
           <p:spPr>
             <a:xfrm>
-              <a:off x="5895618" y="4734456"/>
-              <a:ext cx="77571" cy="77571"/>
+              <a:off x="5094142" y="4093872"/>
+              <a:ext cx="75116" cy="75116"/>
             </a:xfrm>
             <a:prstGeom prst="ellipse">
               <a:avLst/>
@@ -11904,8 +11904,8 @@
           </p:nvSpPr>
           <p:spPr>
             <a:xfrm>
-              <a:off x="6228646" y="4617980"/>
-              <a:ext cx="77571" cy="77571"/>
+              <a:off x="5223108" y="3993073"/>
+              <a:ext cx="75116" cy="75116"/>
             </a:xfrm>
             <a:prstGeom prst="ellipse">
               <a:avLst/>
@@ -11930,8 +11930,8 @@
           </p:nvSpPr>
           <p:spPr>
             <a:xfrm>
-              <a:off x="6201566" y="4475603"/>
-              <a:ext cx="77571" cy="77571"/>
+              <a:off x="5180146" y="3870997"/>
+              <a:ext cx="75116" cy="75116"/>
             </a:xfrm>
             <a:prstGeom prst="ellipse">
               <a:avLst/>
@@ -11956,8 +11956,8 @@
           </p:nvSpPr>
           <p:spPr>
             <a:xfrm>
-              <a:off x="6136690" y="4729586"/>
-              <a:ext cx="77571" cy="77571"/>
+              <a:off x="4991746" y="4088232"/>
+              <a:ext cx="75116" cy="75116"/>
             </a:xfrm>
             <a:prstGeom prst="ellipse">
               <a:avLst/>
@@ -11982,8 +11982,8 @@
           </p:nvSpPr>
           <p:spPr>
             <a:xfrm>
-              <a:off x="6034694" y="4607771"/>
-              <a:ext cx="77571" cy="77571"/>
+              <a:off x="5349054" y="3985056"/>
+              <a:ext cx="75116" cy="75116"/>
             </a:xfrm>
             <a:prstGeom prst="ellipse">
               <a:avLst/>
@@ -12008,8 +12008,8 @@
           </p:nvSpPr>
           <p:spPr>
             <a:xfrm>
-              <a:off x="6230488" y="4728742"/>
-              <a:ext cx="77571" cy="77571"/>
+              <a:off x="5305183" y="4087298"/>
+              <a:ext cx="75116" cy="75116"/>
             </a:xfrm>
             <a:prstGeom prst="ellipse">
               <a:avLst/>
@@ -12034,8 +12034,8 @@
           </p:nvSpPr>
           <p:spPr>
             <a:xfrm>
-              <a:off x="5901580" y="4432409"/>
-              <a:ext cx="77571" cy="77571"/>
+              <a:off x="5261116" y="3837431"/>
+              <a:ext cx="75116" cy="75116"/>
             </a:xfrm>
             <a:prstGeom prst="ellipse">
               <a:avLst/>
@@ -12060,8 +12060,8 @@
           </p:nvSpPr>
           <p:spPr>
             <a:xfrm>
-              <a:off x="6012129" y="4373477"/>
-              <a:ext cx="77571" cy="77571"/>
+              <a:off x="5223698" y="3785803"/>
+              <a:ext cx="75116" cy="75116"/>
             </a:xfrm>
             <a:prstGeom prst="ellipse">
               <a:avLst/>
@@ -12086,8 +12086,8 @@
           </p:nvSpPr>
           <p:spPr>
             <a:xfrm>
-              <a:off x="5815045" y="4108221"/>
-              <a:ext cx="77571" cy="77571"/>
+              <a:off x="5200854" y="3561138"/>
+              <a:ext cx="75116" cy="75116"/>
             </a:xfrm>
             <a:prstGeom prst="ellipse">
               <a:avLst/>
@@ -12112,8 +12112,8 @@
           </p:nvSpPr>
           <p:spPr>
             <a:xfrm>
-              <a:off x="5877348" y="4153087"/>
-              <a:ext cx="77571" cy="77571"/>
+              <a:off x="5008179" y="3595499"/>
+              <a:ext cx="75116" cy="75116"/>
             </a:xfrm>
             <a:prstGeom prst="ellipse">
               <a:avLst/>
@@ -12138,8 +12138,8 @@
           </p:nvSpPr>
           <p:spPr>
             <a:xfrm>
-              <a:off x="6181470" y="4490738"/>
-              <a:ext cx="77571" cy="77571"/>
+              <a:off x="5299642" y="3886547"/>
+              <a:ext cx="75116" cy="75116"/>
             </a:xfrm>
             <a:prstGeom prst="ellipse">
               <a:avLst/>
@@ -12164,8 +12164,8 @@
           </p:nvSpPr>
           <p:spPr>
             <a:xfrm>
-              <a:off x="5781364" y="4794129"/>
-              <a:ext cx="77571" cy="77571"/>
+              <a:off x="5186257" y="4140663"/>
+              <a:ext cx="75116" cy="75116"/>
             </a:xfrm>
             <a:prstGeom prst="ellipse">
               <a:avLst/>
@@ -12190,8 +12190,8 @@
           </p:nvSpPr>
           <p:spPr>
             <a:xfrm>
-              <a:off x="6851737" y="4481711"/>
-              <a:ext cx="77571" cy="77571"/>
+              <a:off x="5892494" y="3874785"/>
+              <a:ext cx="75116" cy="75116"/>
             </a:xfrm>
             <a:prstGeom prst="ellipse">
               <a:avLst/>
@@ -12216,8 +12216,8 @@
           </p:nvSpPr>
           <p:spPr>
             <a:xfrm>
-              <a:off x="6888016" y="4549860"/>
-              <a:ext cx="77571" cy="77571"/>
+              <a:off x="5999513" y="3934437"/>
+              <a:ext cx="75116" cy="75116"/>
             </a:xfrm>
             <a:prstGeom prst="ellipse">
               <a:avLst/>
@@ -12242,8 +12242,8 @@
           </p:nvSpPr>
           <p:spPr>
             <a:xfrm>
-              <a:off x="7088008" y="4523955"/>
-              <a:ext cx="77571" cy="77571"/>
+              <a:off x="6009657" y="3914117"/>
+              <a:ext cx="75116" cy="75116"/>
             </a:xfrm>
             <a:prstGeom prst="ellipse">
               <a:avLst/>
@@ -12268,8 +12268,8 @@
           </p:nvSpPr>
           <p:spPr>
             <a:xfrm>
-              <a:off x="7026914" y="4579602"/>
-              <a:ext cx="77571" cy="77571"/>
+              <a:off x="5674536" y="3961029"/>
+              <a:ext cx="75116" cy="75116"/>
             </a:xfrm>
             <a:prstGeom prst="ellipse">
               <a:avLst/>
@@ -12294,8 +12294,8 @@
           </p:nvSpPr>
           <p:spPr>
             <a:xfrm>
-              <a:off x="7088362" y="3665141"/>
-              <a:ext cx="77571" cy="77571"/>
+              <a:off x="5910187" y="3180740"/>
+              <a:ext cx="75116" cy="75116"/>
             </a:xfrm>
             <a:prstGeom prst="ellipse">
               <a:avLst/>
@@ -12320,8 +12320,8 @@
           </p:nvSpPr>
           <p:spPr>
             <a:xfrm>
-              <a:off x="6888260" y="3714702"/>
-              <a:ext cx="77571" cy="77571"/>
+              <a:off x="5870204" y="3224024"/>
+              <a:ext cx="75116" cy="75116"/>
             </a:xfrm>
             <a:prstGeom prst="ellipse">
               <a:avLst/>
@@ -12346,8 +12346,8 @@
           </p:nvSpPr>
           <p:spPr>
             <a:xfrm>
-              <a:off x="6665311" y="4296034"/>
-              <a:ext cx="77571" cy="77571"/>
+              <a:off x="5959135" y="3717726"/>
+              <a:ext cx="75116" cy="75116"/>
             </a:xfrm>
             <a:prstGeom prst="ellipse">
               <a:avLst/>
@@ -12372,8 +12372,8 @@
           </p:nvSpPr>
           <p:spPr>
             <a:xfrm>
-              <a:off x="6836757" y="4470236"/>
-              <a:ext cx="77571" cy="77571"/>
+              <a:off x="5673721" y="3868742"/>
+              <a:ext cx="75116" cy="75116"/>
             </a:xfrm>
             <a:prstGeom prst="ellipse">
               <a:avLst/>
@@ -12398,8 +12398,8 @@
           </p:nvSpPr>
           <p:spPr>
             <a:xfrm>
-              <a:off x="6852870" y="4594531"/>
-              <a:ext cx="77571" cy="77571"/>
+              <a:off x="5786828" y="3975274"/>
+              <a:ext cx="75116" cy="75116"/>
             </a:xfrm>
             <a:prstGeom prst="ellipse">
               <a:avLst/>
@@ -12424,8 +12424,8 @@
           </p:nvSpPr>
           <p:spPr>
             <a:xfrm>
-              <a:off x="6633093" y="4257574"/>
-              <a:ext cx="77571" cy="77571"/>
+              <a:off x="5735933" y="3687107"/>
+              <a:ext cx="75116" cy="75116"/>
             </a:xfrm>
             <a:prstGeom prst="ellipse">
               <a:avLst/>
@@ -12450,8 +12450,8 @@
           </p:nvSpPr>
           <p:spPr>
             <a:xfrm>
-              <a:off x="6878509" y="4032852"/>
-              <a:ext cx="77571" cy="77571"/>
+              <a:off x="5871114" y="3493336"/>
+              <a:ext cx="75116" cy="75116"/>
             </a:xfrm>
             <a:prstGeom prst="ellipse">
               <a:avLst/>
@@ -12476,8 +12476,8 @@
           </p:nvSpPr>
           <p:spPr>
             <a:xfrm>
-              <a:off x="6809908" y="4655674"/>
-              <a:ext cx="77571" cy="77571"/>
+              <a:off x="5879024" y="4024328"/>
+              <a:ext cx="75116" cy="75116"/>
             </a:xfrm>
             <a:prstGeom prst="ellipse">
               <a:avLst/>
@@ -12502,8 +12502,8 @@
           </p:nvSpPr>
           <p:spPr>
             <a:xfrm>
-              <a:off x="6925829" y="3860746"/>
-              <a:ext cx="77571" cy="77571"/>
+              <a:off x="5984347" y="3350681"/>
+              <a:ext cx="75116" cy="75116"/>
             </a:xfrm>
             <a:prstGeom prst="ellipse">
               <a:avLst/>
@@ -12528,8 +12528,8 @@
           </p:nvSpPr>
           <p:spPr>
             <a:xfrm>
-              <a:off x="6844711" y="4237370"/>
-              <a:ext cx="77571" cy="77571"/>
+              <a:off x="5900708" y="3669446"/>
+              <a:ext cx="75116" cy="75116"/>
             </a:xfrm>
             <a:prstGeom prst="ellipse">
               <a:avLst/>
@@ -12554,8 +12554,8 @@
           </p:nvSpPr>
           <p:spPr>
             <a:xfrm>
-              <a:off x="6850548" y="4301835"/>
-              <a:ext cx="77571" cy="77571"/>
+              <a:off x="6067111" y="3722708"/>
+              <a:ext cx="75116" cy="75116"/>
             </a:xfrm>
             <a:prstGeom prst="ellipse">
               <a:avLst/>
@@ -12580,8 +12580,8 @@
           </p:nvSpPr>
           <p:spPr>
             <a:xfrm>
-              <a:off x="7054147" y="4588015"/>
-              <a:ext cx="77571" cy="77571"/>
+              <a:off x="6016759" y="3966454"/>
+              <a:ext cx="75116" cy="75116"/>
             </a:xfrm>
             <a:prstGeom prst="ellipse">
               <a:avLst/>
@@ -12606,8 +12606,8 @@
           </p:nvSpPr>
           <p:spPr>
             <a:xfrm>
-              <a:off x="6680965" y="4031885"/>
-              <a:ext cx="77571" cy="77571"/>
+              <a:off x="5958084" y="3494226"/>
+              <a:ext cx="75116" cy="75116"/>
             </a:xfrm>
             <a:prstGeom prst="ellipse">
               <a:avLst/>
@@ -12632,8 +12632,8 @@
           </p:nvSpPr>
           <p:spPr>
             <a:xfrm>
-              <a:off x="6697934" y="4284619"/>
-              <a:ext cx="77571" cy="77571"/>
+              <a:off x="5901732" y="3709276"/>
+              <a:ext cx="75116" cy="75116"/>
             </a:xfrm>
             <a:prstGeom prst="ellipse">
               <a:avLst/>
@@ -12658,8 +12658,8 @@
           </p:nvSpPr>
           <p:spPr>
             <a:xfrm>
-              <a:off x="6919446" y="4004358"/>
-              <a:ext cx="77571" cy="77571"/>
+              <a:off x="5769452" y="3471377"/>
+              <a:ext cx="75116" cy="75116"/>
             </a:xfrm>
             <a:prstGeom prst="ellipse">
               <a:avLst/>
@@ -12684,8 +12684,8 @@
           </p:nvSpPr>
           <p:spPr>
             <a:xfrm>
-              <a:off x="6927582" y="4253181"/>
-              <a:ext cx="77571" cy="77571"/>
+              <a:off x="5823664" y="3682792"/>
+              <a:ext cx="75116" cy="75116"/>
             </a:xfrm>
             <a:prstGeom prst="ellipse">
               <a:avLst/>
@@ -12710,8 +12710,8 @@
           </p:nvSpPr>
           <p:spPr>
             <a:xfrm>
-              <a:off x="7741821" y="4422337"/>
-              <a:ext cx="77571" cy="77571"/>
+              <a:off x="6533582" y="3825752"/>
+              <a:ext cx="75116" cy="75116"/>
             </a:xfrm>
             <a:prstGeom prst="ellipse">
               <a:avLst/>
@@ -12736,8 +12736,8 @@
           </p:nvSpPr>
           <p:spPr>
             <a:xfrm>
-              <a:off x="7779733" y="4521055"/>
-              <a:ext cx="77571" cy="77571"/>
+              <a:off x="6633355" y="3913871"/>
+              <a:ext cx="75116" cy="75116"/>
             </a:xfrm>
             <a:prstGeom prst="ellipse">
               <a:avLst/>
@@ -12762,8 +12762,8 @@
           </p:nvSpPr>
           <p:spPr>
             <a:xfrm>
-              <a:off x="7700659" y="4267735"/>
-              <a:ext cx="77571" cy="77571"/>
+              <a:off x="6648132" y="3697516"/>
+              <a:ext cx="75116" cy="75116"/>
             </a:xfrm>
             <a:prstGeom prst="ellipse">
               <a:avLst/>
@@ -12788,8 +12788,8 @@
           </p:nvSpPr>
           <p:spPr>
             <a:xfrm>
-              <a:off x="7560405" y="4040737"/>
-              <a:ext cx="77571" cy="77571"/>
+              <a:off x="6432505" y="3501890"/>
+              <a:ext cx="75116" cy="75116"/>
             </a:xfrm>
             <a:prstGeom prst="ellipse">
               <a:avLst/>
@@ -12814,8 +12814,8 @@
           </p:nvSpPr>
           <p:spPr>
             <a:xfrm>
-              <a:off x="7867700" y="4241623"/>
-              <a:ext cx="77571" cy="77571"/>
+              <a:off x="6705134" y="3673420"/>
+              <a:ext cx="75116" cy="75116"/>
             </a:xfrm>
             <a:prstGeom prst="ellipse">
               <a:avLst/>
@@ -12840,8 +12840,8 @@
           </p:nvSpPr>
           <p:spPr>
             <a:xfrm>
-              <a:off x="7778244" y="4285893"/>
-              <a:ext cx="77571" cy="77571"/>
+              <a:off x="6520335" y="3708517"/>
+              <a:ext cx="75116" cy="75116"/>
             </a:xfrm>
             <a:prstGeom prst="ellipse">
               <a:avLst/>
@@ -12866,8 +12866,8 @@
           </p:nvSpPr>
           <p:spPr>
             <a:xfrm>
-              <a:off x="7911075" y="4438386"/>
-              <a:ext cx="77571" cy="77571"/>
+              <a:off x="6693704" y="3839486"/>
+              <a:ext cx="75116" cy="75116"/>
             </a:xfrm>
             <a:prstGeom prst="ellipse">
               <a:avLst/>
@@ -12892,8 +12892,8 @@
           </p:nvSpPr>
           <p:spPr>
             <a:xfrm>
-              <a:off x="7828395" y="4326699"/>
-              <a:ext cx="77571" cy="77571"/>
+              <a:off x="6564053" y="3745314"/>
+              <a:ext cx="75116" cy="75116"/>
             </a:xfrm>
             <a:prstGeom prst="ellipse">
               <a:avLst/>
@@ -12918,8 +12918,8 @@
           </p:nvSpPr>
           <p:spPr>
             <a:xfrm>
-              <a:off x="7843182" y="4439146"/>
-              <a:ext cx="77571" cy="77571"/>
+              <a:off x="6529219" y="3839086"/>
+              <a:ext cx="75116" cy="75116"/>
             </a:xfrm>
             <a:prstGeom prst="ellipse">
               <a:avLst/>
@@ -12944,8 +12944,8 @@
           </p:nvSpPr>
           <p:spPr>
             <a:xfrm>
-              <a:off x="7937673" y="4350116"/>
-              <a:ext cx="77571" cy="77571"/>
+              <a:off x="6543691" y="3762684"/>
+              <a:ext cx="75116" cy="75116"/>
             </a:xfrm>
             <a:prstGeom prst="ellipse">
               <a:avLst/>
@@ -12970,8 +12970,8 @@
           </p:nvSpPr>
           <p:spPr>
             <a:xfrm>
-              <a:off x="7847705" y="4085247"/>
-              <a:ext cx="77571" cy="77571"/>
+              <a:off x="6625943" y="3538739"/>
+              <a:ext cx="75116" cy="75116"/>
             </a:xfrm>
             <a:prstGeom prst="ellipse">
               <a:avLst/>
@@ -12996,8 +12996,8 @@
           </p:nvSpPr>
           <p:spPr>
             <a:xfrm>
-              <a:off x="7584832" y="3775096"/>
-              <a:ext cx="77571" cy="77571"/>
+              <a:off x="6697875" y="3275694"/>
+              <a:ext cx="75116" cy="75116"/>
             </a:xfrm>
             <a:prstGeom prst="ellipse">
               <a:avLst/>
@@ -13022,8 +13022,8 @@
           </p:nvSpPr>
           <p:spPr>
             <a:xfrm>
-              <a:off x="7530593" y="4453451"/>
-              <a:ext cx="77571" cy="77571"/>
+              <a:off x="6576090" y="3855436"/>
+              <a:ext cx="75116" cy="75116"/>
             </a:xfrm>
             <a:prstGeom prst="ellipse">
               <a:avLst/>
@@ -13048,8 +13048,8 @@
           </p:nvSpPr>
           <p:spPr>
             <a:xfrm>
-              <a:off x="7859495" y="4621874"/>
-              <a:ext cx="77571" cy="77571"/>
+              <a:off x="6425106" y="3999647"/>
+              <a:ext cx="75116" cy="75116"/>
             </a:xfrm>
             <a:prstGeom prst="ellipse">
               <a:avLst/>
@@ -13074,8 +13074,8 @@
           </p:nvSpPr>
           <p:spPr>
             <a:xfrm>
-              <a:off x="7852773" y="4584072"/>
-              <a:ext cx="77571" cy="77571"/>
+              <a:off x="6770776" y="3965788"/>
+              <a:ext cx="75116" cy="75116"/>
             </a:xfrm>
             <a:prstGeom prst="ellipse">
               <a:avLst/>
@@ -13100,8 +13100,8 @@
           </p:nvSpPr>
           <p:spPr>
             <a:xfrm>
-              <a:off x="7599093" y="4320385"/>
-              <a:ext cx="77571" cy="77571"/>
+              <a:off x="6478109" y="3742062"/>
+              <a:ext cx="75116" cy="75116"/>
             </a:xfrm>
             <a:prstGeom prst="ellipse">
               <a:avLst/>
@@ -13126,8 +13126,8 @@
           </p:nvSpPr>
           <p:spPr>
             <a:xfrm>
-              <a:off x="7667542" y="4517938"/>
-              <a:ext cx="77571" cy="77571"/>
+              <a:off x="6412940" y="3906920"/>
+              <a:ext cx="75116" cy="75116"/>
             </a:xfrm>
             <a:prstGeom prst="ellipse">
               <a:avLst/>
@@ -13152,8 +13152,8 @@
           </p:nvSpPr>
           <p:spPr>
             <a:xfrm>
-              <a:off x="7796306" y="4399477"/>
-              <a:ext cx="77571" cy="77571"/>
+              <a:off x="6498947" y="3809039"/>
+              <a:ext cx="75116" cy="75116"/>
             </a:xfrm>
             <a:prstGeom prst="ellipse">
               <a:avLst/>
@@ -13178,8 +13178,8 @@
           </p:nvSpPr>
           <p:spPr>
             <a:xfrm>
-              <a:off x="7940029" y="3862159"/>
-              <a:ext cx="77571" cy="77571"/>
+              <a:off x="6728275" y="3350734"/>
+              <a:ext cx="75116" cy="75116"/>
             </a:xfrm>
             <a:prstGeom prst="ellipse">
               <a:avLst/>
@@ -13204,8 +13204,8 @@
           </p:nvSpPr>
           <p:spPr>
             <a:xfrm>
-              <a:off x="7672751" y="4216075"/>
-              <a:ext cx="77571" cy="77571"/>
+              <a:off x="6568657" y="3652477"/>
+              <a:ext cx="75116" cy="75116"/>
             </a:xfrm>
             <a:prstGeom prst="ellipse">
               <a:avLst/>
@@ -13230,8 +13230,8 @@
           </p:nvSpPr>
           <p:spPr>
             <a:xfrm>
-              <a:off x="7565473" y="4310922"/>
-              <a:ext cx="77571" cy="77571"/>
+              <a:off x="6474352" y="3731702"/>
+              <a:ext cx="75116" cy="75116"/>
             </a:xfrm>
             <a:prstGeom prst="ellipse">
               <a:avLst/>
@@ -13256,8 +13256,8 @@
           </p:nvSpPr>
           <p:spPr>
             <a:xfrm>
-              <a:off x="7932019" y="4252060"/>
-              <a:ext cx="77571" cy="77571"/>
+              <a:off x="6669436" y="3682357"/>
+              <a:ext cx="75116" cy="75116"/>
             </a:xfrm>
             <a:prstGeom prst="ellipse">
               <a:avLst/>
@@ -13282,8 +13282,8 @@
           </p:nvSpPr>
           <p:spPr>
             <a:xfrm>
-              <a:off x="7691146" y="4582104"/>
-              <a:ext cx="77571" cy="77571"/>
+              <a:off x="6731289" y="3963132"/>
+              <a:ext cx="75116" cy="75116"/>
             </a:xfrm>
             <a:prstGeom prst="ellipse">
               <a:avLst/>
@@ -13308,8 +13308,8 @@
           </p:nvSpPr>
           <p:spPr>
             <a:xfrm>
-              <a:off x="7729500" y="4206145"/>
-              <a:ext cx="77571" cy="77571"/>
+              <a:off x="6688542" y="3642379"/>
+              <a:ext cx="75116" cy="75116"/>
             </a:xfrm>
             <a:prstGeom prst="ellipse">
               <a:avLst/>
@@ -13334,42 +13334,42 @@
           </p:nvSpPr>
           <p:spPr>
             <a:xfrm>
-              <a:off x="5175442" y="4103414"/>
-              <a:ext cx="2573474" cy="393968"/>
+              <a:off x="4487609" y="3559804"/>
+              <a:ext cx="2129082" cy="335652"/>
             </a:xfrm>
             <a:custGeom>
               <a:avLst/>
               <a:pathLst>
-                <a:path w="2573474" h="393968">
+                <a:path w="2129082" h="335652">
                   <a:moveTo>
                     <a:pt x="0" y="0"/>
                   </a:moveTo>
                   <a:lnTo>
-                    <a:pt x="1359620" y="114948"/>
+                    <a:pt x="1124838" y="97933"/>
                   </a:lnTo>
                   <a:lnTo>
-                    <a:pt x="1715649" y="131672"/>
+                    <a:pt x="1419388" y="112182"/>
                   </a:lnTo>
                   <a:lnTo>
-                    <a:pt x="2217445" y="143938"/>
+                    <a:pt x="1834533" y="122632"/>
                   </a:lnTo>
                   <a:lnTo>
-                    <a:pt x="2573474" y="146350"/>
+                    <a:pt x="2129082" y="124687"/>
                   </a:lnTo>
                   <a:lnTo>
-                    <a:pt x="2573474" y="393968"/>
+                    <a:pt x="2129082" y="335652"/>
                   </a:lnTo>
                   <a:lnTo>
-                    <a:pt x="2217445" y="363201"/>
+                    <a:pt x="1834533" y="309439"/>
                   </a:lnTo>
                   <a:lnTo>
-                    <a:pt x="1715649" y="328704"/>
+                    <a:pt x="1419388" y="280048"/>
                   </a:lnTo>
                   <a:lnTo>
-                    <a:pt x="1359620" y="312249"/>
+                    <a:pt x="1124838" y="266029"/>
                   </a:lnTo>
                   <a:lnTo>
-                    <a:pt x="0" y="300492"/>
+                    <a:pt x="0" y="256012"/>
                   </a:lnTo>
                   <a:close/>
                 </a:path>
@@ -13395,27 +13395,27 @@
           </p:nvSpPr>
           <p:spPr>
             <a:xfrm>
-              <a:off x="5175442" y="4103414"/>
-              <a:ext cx="2573474" cy="146350"/>
+              <a:off x="4487609" y="3559804"/>
+              <a:ext cx="2129082" cy="124687"/>
             </a:xfrm>
             <a:custGeom>
               <a:avLst/>
               <a:pathLst>
-                <a:path w="2573474" h="146350">
+                <a:path w="2129082" h="124687">
                   <a:moveTo>
                     <a:pt x="0" y="0"/>
                   </a:moveTo>
                   <a:lnTo>
-                    <a:pt x="1359620" y="114948"/>
+                    <a:pt x="1124838" y="97933"/>
                   </a:lnTo>
                   <a:lnTo>
-                    <a:pt x="1715649" y="131672"/>
+                    <a:pt x="1419388" y="112182"/>
                   </a:lnTo>
                   <a:lnTo>
-                    <a:pt x="2217445" y="143938"/>
+                    <a:pt x="1834533" y="122632"/>
                   </a:lnTo>
                   <a:lnTo>
-                    <a:pt x="2573474" y="146350"/>
+                    <a:pt x="2129082" y="124687"/>
                   </a:lnTo>
                 </a:path>
               </a:pathLst>
@@ -13435,24 +13435,24 @@
           </p:nvSpPr>
           <p:spPr>
             <a:xfrm>
-              <a:off x="5175442" y="4403906"/>
-              <a:ext cx="2573474" cy="93476"/>
+              <a:off x="4487609" y="3815817"/>
+              <a:ext cx="2129082" cy="79640"/>
             </a:xfrm>
             <a:custGeom>
               <a:avLst/>
               <a:pathLst>
-                <a:path w="2573474" h="93476">
+                <a:path w="2129082" h="79640">
                   <a:moveTo>
-                    <a:pt x="2573474" y="93476"/>
+                    <a:pt x="2129082" y="79640"/>
                   </a:moveTo>
                   <a:lnTo>
-                    <a:pt x="2217445" y="62709"/>
+                    <a:pt x="1834533" y="53426"/>
                   </a:lnTo>
                   <a:lnTo>
-                    <a:pt x="1715649" y="28212"/>
+                    <a:pt x="1419388" y="24036"/>
                   </a:lnTo>
                   <a:lnTo>
-                    <a:pt x="1359620" y="11757"/>
+                    <a:pt x="1124838" y="10016"/>
                   </a:lnTo>
                   <a:lnTo>
                     <a:pt x="0" y="0"/>
@@ -13475,27 +13475,27 @@
           </p:nvSpPr>
           <p:spPr>
             <a:xfrm>
-              <a:off x="5175442" y="4253660"/>
-              <a:ext cx="2573474" cy="119913"/>
+              <a:off x="4487609" y="3687811"/>
+              <a:ext cx="2129082" cy="102163"/>
             </a:xfrm>
             <a:custGeom>
               <a:avLst/>
               <a:pathLst>
-                <a:path w="2573474" h="119913">
+                <a:path w="2129082" h="102163">
                   <a:moveTo>
                     <a:pt x="0" y="0"/>
                   </a:moveTo>
                   <a:lnTo>
-                    <a:pt x="1359620" y="63352"/>
+                    <a:pt x="1124838" y="53975"/>
                   </a:lnTo>
                   <a:lnTo>
-                    <a:pt x="1715649" y="79942"/>
+                    <a:pt x="1419388" y="68109"/>
                   </a:lnTo>
                   <a:lnTo>
-                    <a:pt x="2217445" y="103324"/>
+                    <a:pt x="1834533" y="88029"/>
                   </a:lnTo>
                   <a:lnTo>
-                    <a:pt x="2573474" y="119913"/>
+                    <a:pt x="2129082" y="102163"/>
                   </a:lnTo>
                 </a:path>
               </a:pathLst>
@@ -13524,7 +13524,7 @@
           </p:nvSpPr>
           <p:spPr>
             <a:xfrm>
-              <a:off x="7269223" y="3508665"/>
+              <a:off x="6136998" y="3034879"/>
               <a:ext cx="479694" cy="82021"/>
             </a:xfrm>
             <a:prstGeom prst="rect">
@@ -13570,8 +13570,8 @@
           </p:nvSpPr>
           <p:spPr>
             <a:xfrm>
-              <a:off x="4837970" y="3300465"/>
-              <a:ext cx="3290409" cy="1599078"/>
+              <a:off x="4186587" y="2875097"/>
+              <a:ext cx="2746591" cy="1359782"/>
             </a:xfrm>
             <a:prstGeom prst="rect">
               <a:avLst/>
@@ -13591,15 +13591,15 @@
           </p:nvSpPr>
           <p:spPr>
             <a:xfrm>
-              <a:off x="4837970" y="3300465"/>
-              <a:ext cx="0" cy="1599078"/>
+              <a:off x="4186587" y="2875097"/>
+              <a:ext cx="0" cy="1359782"/>
             </a:xfrm>
             <a:custGeom>
               <a:avLst/>
               <a:pathLst>
-                <a:path w="0" h="1599078">
+                <a:path w="0" h="1359782">
                   <a:moveTo>
-                    <a:pt x="0" y="1599078"/>
+                    <a:pt x="0" y="1359782"/>
                   </a:moveTo>
                   <a:lnTo>
                     <a:pt x="0" y="0"/>
@@ -13631,18 +13631,18 @@
           </p:nvSpPr>
           <p:spPr>
             <a:xfrm>
-              <a:off x="4800012" y="4704197"/>
-              <a:ext cx="37957" cy="0"/>
+              <a:off x="4158119" y="4071658"/>
+              <a:ext cx="28468" cy="0"/>
             </a:xfrm>
             <a:custGeom>
               <a:avLst/>
               <a:pathLst>
-                <a:path w="37957" h="0">
+                <a:path w="28468" h="0">
                   <a:moveTo>
                     <a:pt x="0" y="0"/>
                   </a:moveTo>
                   <a:lnTo>
-                    <a:pt x="37957" y="0"/>
+                    <a:pt x="28468" y="0"/>
                   </a:lnTo>
                 </a:path>
               </a:pathLst>
@@ -13671,18 +13671,18 @@
           </p:nvSpPr>
           <p:spPr>
             <a:xfrm>
-              <a:off x="4800012" y="4431945"/>
-              <a:ext cx="37957" cy="0"/>
+              <a:off x="4158119" y="3839705"/>
+              <a:ext cx="28468" cy="0"/>
             </a:xfrm>
             <a:custGeom>
               <a:avLst/>
               <a:pathLst>
-                <a:path w="37957" h="0">
+                <a:path w="28468" h="0">
                   <a:moveTo>
                     <a:pt x="0" y="0"/>
                   </a:moveTo>
                   <a:lnTo>
-                    <a:pt x="37957" y="0"/>
+                    <a:pt x="28468" y="0"/>
                   </a:lnTo>
                 </a:path>
               </a:pathLst>
@@ -13711,18 +13711,18 @@
           </p:nvSpPr>
           <p:spPr>
             <a:xfrm>
-              <a:off x="4800012" y="4159693"/>
-              <a:ext cx="37957" cy="0"/>
+              <a:off x="4158119" y="3607752"/>
+              <a:ext cx="28468" cy="0"/>
             </a:xfrm>
             <a:custGeom>
               <a:avLst/>
               <a:pathLst>
-                <a:path w="37957" h="0">
+                <a:path w="28468" h="0">
                   <a:moveTo>
                     <a:pt x="0" y="0"/>
                   </a:moveTo>
                   <a:lnTo>
-                    <a:pt x="37957" y="0"/>
+                    <a:pt x="28468" y="0"/>
                   </a:lnTo>
                 </a:path>
               </a:pathLst>
@@ -13751,18 +13751,18 @@
           </p:nvSpPr>
           <p:spPr>
             <a:xfrm>
-              <a:off x="4800012" y="3887440"/>
-              <a:ext cx="37957" cy="0"/>
+              <a:off x="4158119" y="3375800"/>
+              <a:ext cx="28468" cy="0"/>
             </a:xfrm>
             <a:custGeom>
               <a:avLst/>
               <a:pathLst>
-                <a:path w="37957" h="0">
+                <a:path w="28468" h="0">
                   <a:moveTo>
                     <a:pt x="0" y="0"/>
                   </a:moveTo>
                   <a:lnTo>
-                    <a:pt x="37957" y="0"/>
+                    <a:pt x="28468" y="0"/>
                   </a:lnTo>
                 </a:path>
               </a:pathLst>
@@ -13791,18 +13791,18 @@
           </p:nvSpPr>
           <p:spPr>
             <a:xfrm>
-              <a:off x="4800012" y="3615188"/>
-              <a:ext cx="37957" cy="0"/>
+              <a:off x="4158119" y="3143847"/>
+              <a:ext cx="28468" cy="0"/>
             </a:xfrm>
             <a:custGeom>
               <a:avLst/>
               <a:pathLst>
-                <a:path w="37957" h="0">
+                <a:path w="28468" h="0">
                   <a:moveTo>
                     <a:pt x="0" y="0"/>
                   </a:moveTo>
                   <a:lnTo>
-                    <a:pt x="37957" y="0"/>
+                    <a:pt x="28468" y="0"/>
                   </a:lnTo>
                 </a:path>
               </a:pathLst>
@@ -13831,18 +13831,18 @@
           </p:nvSpPr>
           <p:spPr>
             <a:xfrm>
-              <a:off x="4800012" y="3342936"/>
-              <a:ext cx="37957" cy="0"/>
+              <a:off x="4158119" y="2911894"/>
+              <a:ext cx="28468" cy="0"/>
             </a:xfrm>
             <a:custGeom>
               <a:avLst/>
               <a:pathLst>
-                <a:path w="37957" h="0">
+                <a:path w="28468" h="0">
                   <a:moveTo>
                     <a:pt x="0" y="0"/>
                   </a:moveTo>
                   <a:lnTo>
-                    <a:pt x="37957" y="0"/>
+                    <a:pt x="28468" y="0"/>
                   </a:lnTo>
                 </a:path>
               </a:pathLst>
@@ -13871,18 +13871,18 @@
           </p:nvSpPr>
           <p:spPr>
             <a:xfrm>
-              <a:off x="4837970" y="4899543"/>
-              <a:ext cx="3290409" cy="0"/>
+              <a:off x="4186587" y="4234879"/>
+              <a:ext cx="2746591" cy="0"/>
             </a:xfrm>
             <a:custGeom>
               <a:avLst/>
               <a:pathLst>
-                <a:path w="3290409" h="0">
+                <a:path w="2746591" h="0">
                   <a:moveTo>
                     <a:pt x="0" y="0"/>
                   </a:moveTo>
                   <a:lnTo>
-                    <a:pt x="3290409" y="0"/>
+                    <a:pt x="2746591" y="0"/>
                   </a:lnTo>
                 </a:path>
               </a:pathLst>
@@ -13911,15 +13911,15 @@
           </p:nvSpPr>
           <p:spPr>
             <a:xfrm>
-              <a:off x="5175442" y="4899543"/>
-              <a:ext cx="0" cy="37957"/>
+              <a:off x="4487609" y="4234879"/>
+              <a:ext cx="0" cy="28468"/>
             </a:xfrm>
             <a:custGeom>
               <a:avLst/>
               <a:pathLst>
-                <a:path w="0" h="37957">
+                <a:path w="0" h="28468">
                   <a:moveTo>
-                    <a:pt x="0" y="37957"/>
+                    <a:pt x="0" y="28468"/>
                   </a:moveTo>
                   <a:lnTo>
                     <a:pt x="0" y="0"/>
@@ -13951,15 +13951,15 @@
           </p:nvSpPr>
           <p:spPr>
             <a:xfrm>
-              <a:off x="6033267" y="4899543"/>
-              <a:ext cx="0" cy="37957"/>
+              <a:off x="5197303" y="4234879"/>
+              <a:ext cx="0" cy="28468"/>
             </a:xfrm>
             <a:custGeom>
               <a:avLst/>
               <a:pathLst>
-                <a:path w="0" h="37957">
+                <a:path w="0" h="28468">
                   <a:moveTo>
-                    <a:pt x="0" y="37957"/>
+                    <a:pt x="0" y="28468"/>
                   </a:moveTo>
                   <a:lnTo>
                     <a:pt x="0" y="0"/>
@@ -13991,15 +13991,15 @@
           </p:nvSpPr>
           <p:spPr>
             <a:xfrm>
-              <a:off x="6891092" y="4899543"/>
-              <a:ext cx="0" cy="37957"/>
+              <a:off x="5906998" y="4234879"/>
+              <a:ext cx="0" cy="28468"/>
             </a:xfrm>
             <a:custGeom>
               <a:avLst/>
               <a:pathLst>
-                <a:path w="0" h="37957">
+                <a:path w="0" h="28468">
                   <a:moveTo>
-                    <a:pt x="0" y="37957"/>
+                    <a:pt x="0" y="28468"/>
                   </a:moveTo>
                   <a:lnTo>
                     <a:pt x="0" y="0"/>
@@ -14031,15 +14031,15 @@
           </p:nvSpPr>
           <p:spPr>
             <a:xfrm>
-              <a:off x="7748917" y="4899543"/>
-              <a:ext cx="0" cy="37957"/>
+              <a:off x="6616692" y="4234879"/>
+              <a:ext cx="0" cy="28468"/>
             </a:xfrm>
             <a:custGeom>
               <a:avLst/>
               <a:pathLst>
-                <a:path w="0" h="37957">
+                <a:path w="0" h="28468">
                   <a:moveTo>
-                    <a:pt x="0" y="37957"/>
+                    <a:pt x="0" y="28468"/>
                   </a:moveTo>
                   <a:lnTo>
                     <a:pt x="0" y="0"/>
@@ -14071,8 +14071,8 @@
           </p:nvSpPr>
           <p:spPr>
             <a:xfrm>
-              <a:off x="5136580" y="4967867"/>
-              <a:ext cx="77724" cy="100218"/>
+              <a:off x="4459354" y="4286122"/>
+              <a:ext cx="56509" cy="72877"/>
             </a:xfrm>
             <a:prstGeom prst="rect">
               <a:avLst/>
@@ -14085,7 +14085,7 @@
             <a:p>
               <a:pPr algn="l" marL="0" marR="0" indent="0">
                 <a:lnSpc>
-                  <a:spcPts val="1100"/>
+                  <a:spcPts val="800"/>
                 </a:lnSpc>
                 <a:spcBef>
                   <a:spcPts val="0"/>
@@ -14095,7 +14095,7 @@
                 </a:spcAft>
               </a:pPr>
               <a:r>
-                <a:rPr sz="1100">
+                <a:rPr sz="800">
                   <a:solidFill>
                     <a:srgbClr val="000000">
                       <a:alpha val="100000"/>
@@ -14117,8 +14117,8 @@
           </p:nvSpPr>
           <p:spPr>
             <a:xfrm>
-              <a:off x="5994405" y="4967867"/>
-              <a:ext cx="77724" cy="100218"/>
+              <a:off x="5169048" y="4286122"/>
+              <a:ext cx="56509" cy="72877"/>
             </a:xfrm>
             <a:prstGeom prst="rect">
               <a:avLst/>
@@ -14131,7 +14131,7 @@
             <a:p>
               <a:pPr algn="l" marL="0" marR="0" indent="0">
                 <a:lnSpc>
-                  <a:spcPts val="1100"/>
+                  <a:spcPts val="800"/>
                 </a:lnSpc>
                 <a:spcBef>
                   <a:spcPts val="0"/>
@@ -14141,7 +14141,7 @@
                 </a:spcAft>
               </a:pPr>
               <a:r>
-                <a:rPr sz="1100">
+                <a:rPr sz="800">
                   <a:solidFill>
                     <a:srgbClr val="000000">
                       <a:alpha val="100000"/>
@@ -14163,8 +14163,8 @@
           </p:nvSpPr>
           <p:spPr>
             <a:xfrm>
-              <a:off x="6852230" y="4967867"/>
-              <a:ext cx="77724" cy="100218"/>
+              <a:off x="5878743" y="4286122"/>
+              <a:ext cx="56509" cy="72877"/>
             </a:xfrm>
             <a:prstGeom prst="rect">
               <a:avLst/>
@@ -14177,7 +14177,7 @@
             <a:p>
               <a:pPr algn="l" marL="0" marR="0" indent="0">
                 <a:lnSpc>
-                  <a:spcPts val="1100"/>
+                  <a:spcPts val="800"/>
                 </a:lnSpc>
                 <a:spcBef>
                   <a:spcPts val="0"/>
@@ -14187,7 +14187,7 @@
                 </a:spcAft>
               </a:pPr>
               <a:r>
-                <a:rPr sz="1100">
+                <a:rPr sz="800">
                   <a:solidFill>
                     <a:srgbClr val="000000">
                       <a:alpha val="100000"/>
@@ -14209,8 +14209,8 @@
           </p:nvSpPr>
           <p:spPr>
             <a:xfrm>
-              <a:off x="7710055" y="4967867"/>
-              <a:ext cx="77724" cy="100218"/>
+              <a:off x="6588437" y="4286122"/>
+              <a:ext cx="56509" cy="72877"/>
             </a:xfrm>
             <a:prstGeom prst="rect">
               <a:avLst/>
@@ -14223,7 +14223,7 @@
             <a:p>
               <a:pPr algn="l" marL="0" marR="0" indent="0">
                 <a:lnSpc>
-                  <a:spcPts val="1100"/>
+                  <a:spcPts val="800"/>
                 </a:lnSpc>
                 <a:spcBef>
                   <a:spcPts val="0"/>
@@ -14233,7 +14233,7 @@
                 </a:spcAft>
               </a:pPr>
               <a:r>
-                <a:rPr sz="1100">
+                <a:rPr sz="800">
                   <a:solidFill>
                     <a:srgbClr val="000000">
                       <a:alpha val="100000"/>
@@ -14255,8 +14255,8 @@
           </p:nvSpPr>
           <p:spPr>
             <a:xfrm>
-              <a:off x="4837970" y="3057306"/>
-              <a:ext cx="1244315" cy="127924"/>
+              <a:off x="4186587" y="2698557"/>
+              <a:ext cx="889254" cy="91440"/>
             </a:xfrm>
             <a:prstGeom prst="rect">
               <a:avLst/>
@@ -14269,7 +14269,7 @@
             <a:p>
               <a:pPr algn="l" marL="0" marR="0" indent="0">
                 <a:lnSpc>
-                  <a:spcPts val="1400"/>
+                  <a:spcPts val="1000"/>
                 </a:lnSpc>
                 <a:spcBef>
                   <a:spcPts val="0"/>
@@ -14279,7 +14279,7 @@
                 </a:spcAft>
               </a:pPr>
               <a:r>
-                <a:rPr sz="1400" b="1">
+                <a:rPr sz="1000" b="1">
                   <a:solidFill>
                     <a:srgbClr val="000000">
                       <a:alpha val="100000"/>
@@ -14301,8 +14301,8 @@
           </p:nvSpPr>
           <p:spPr>
             <a:xfrm>
-              <a:off x="1408383" y="5392761"/>
-              <a:ext cx="3290409" cy="1599078"/>
+              <a:off x="1310306" y="4608644"/>
+              <a:ext cx="2746591" cy="1359782"/>
             </a:xfrm>
             <a:prstGeom prst="rect">
               <a:avLst/>
@@ -14327,8 +14327,8 @@
           </p:nvSpPr>
           <p:spPr>
             <a:xfrm>
-              <a:off x="1581430" y="6435915"/>
-              <a:ext cx="77571" cy="77571"/>
+              <a:off x="1419669" y="5491420"/>
+              <a:ext cx="75116" cy="75116"/>
             </a:xfrm>
             <a:prstGeom prst="ellipse">
               <a:avLst/>
@@ -14353,8 +14353,8 @@
           </p:nvSpPr>
           <p:spPr>
             <a:xfrm>
-              <a:off x="1938782" y="6296056"/>
-              <a:ext cx="77571" cy="77571"/>
+              <a:off x="1412253" y="5371395"/>
+              <a:ext cx="75116" cy="75116"/>
             </a:xfrm>
             <a:prstGeom prst="ellipse">
               <a:avLst/>
@@ -14379,8 +14379,8 @@
           </p:nvSpPr>
           <p:spPr>
             <a:xfrm>
-              <a:off x="1724765" y="6380478"/>
-              <a:ext cx="77571" cy="77571"/>
+              <a:off x="1545428" y="5442300"/>
+              <a:ext cx="75116" cy="75116"/>
             </a:xfrm>
             <a:prstGeom prst="ellipse">
               <a:avLst/>
@@ -14405,8 +14405,8 @@
           </p:nvSpPr>
           <p:spPr>
             <a:xfrm>
-              <a:off x="1834607" y="6577579"/>
-              <a:ext cx="77571" cy="77571"/>
+              <a:off x="1702465" y="5606274"/>
+              <a:ext cx="75116" cy="75116"/>
             </a:xfrm>
             <a:prstGeom prst="ellipse">
               <a:avLst/>
@@ -14431,8 +14431,8 @@
           </p:nvSpPr>
           <p:spPr>
             <a:xfrm>
-              <a:off x="1519161" y="6743743"/>
-              <a:ext cx="77571" cy="77571"/>
+              <a:off x="1614988" y="5750544"/>
+              <a:ext cx="75116" cy="75116"/>
             </a:xfrm>
             <a:prstGeom prst="ellipse">
               <a:avLst/>
@@ -14457,8 +14457,8 @@
           </p:nvSpPr>
           <p:spPr>
             <a:xfrm>
-              <a:off x="1537508" y="6407535"/>
-              <a:ext cx="77571" cy="77571"/>
+              <a:off x="1406680" y="5465423"/>
+              <a:ext cx="75116" cy="75116"/>
             </a:xfrm>
             <a:prstGeom prst="ellipse">
               <a:avLst/>
@@ -14483,8 +14483,8 @@
           </p:nvSpPr>
           <p:spPr>
             <a:xfrm>
-              <a:off x="1984577" y="6540478"/>
-              <a:ext cx="77571" cy="77571"/>
+              <a:off x="1455118" y="5577352"/>
+              <a:ext cx="75116" cy="75116"/>
             </a:xfrm>
             <a:prstGeom prst="ellipse">
               <a:avLst/>
@@ -14509,8 +14509,8 @@
           </p:nvSpPr>
           <p:spPr>
             <a:xfrm>
-              <a:off x="1548090" y="6579573"/>
-              <a:ext cx="77571" cy="77571"/>
+              <a:off x="1732662" y="5613343"/>
+              <a:ext cx="75116" cy="75116"/>
             </a:xfrm>
             <a:prstGeom prst="ellipse">
               <a:avLst/>
@@ -14535,8 +14535,8 @@
           </p:nvSpPr>
           <p:spPr>
             <a:xfrm>
-              <a:off x="1536429" y="6683829"/>
-              <a:ext cx="77571" cy="77571"/>
+              <a:off x="1397593" y="5700741"/>
+              <a:ext cx="75116" cy="75116"/>
             </a:xfrm>
             <a:prstGeom prst="ellipse">
               <a:avLst/>
@@ -14561,8 +14561,8 @@
           </p:nvSpPr>
           <p:spPr>
             <a:xfrm>
-              <a:off x="1536742" y="6361293"/>
-              <a:ext cx="77571" cy="77571"/>
+              <a:off x="1724596" y="5426686"/>
+              <a:ext cx="75116" cy="75116"/>
             </a:xfrm>
             <a:prstGeom prst="ellipse">
               <a:avLst/>
@@ -14587,8 +14587,8 @@
           </p:nvSpPr>
           <p:spPr>
             <a:xfrm>
-              <a:off x="2369343" y="6555582"/>
-              <a:ext cx="77571" cy="77571"/>
+              <a:off x="2259778" y="5589963"/>
+              <a:ext cx="75116" cy="75116"/>
             </a:xfrm>
             <a:prstGeom prst="ellipse">
               <a:avLst/>
@@ -14613,8 +14613,8 @@
           </p:nvSpPr>
           <p:spPr>
             <a:xfrm>
-              <a:off x="2742197" y="5786070"/>
-              <a:ext cx="77571" cy="77571"/>
+              <a:off x="2290401" y="4939129"/>
+              <a:ext cx="75116" cy="75116"/>
             </a:xfrm>
             <a:prstGeom prst="ellipse">
               <a:avLst/>
@@ -14639,8 +14639,8 @@
           </p:nvSpPr>
           <p:spPr>
             <a:xfrm>
-              <a:off x="2591662" y="5944993"/>
-              <a:ext cx="77571" cy="77571"/>
+              <a:off x="2215724" y="5074287"/>
+              <a:ext cx="75116" cy="75116"/>
             </a:xfrm>
             <a:prstGeom prst="ellipse">
               <a:avLst/>
@@ -14665,8 +14665,8 @@
           </p:nvSpPr>
           <p:spPr>
             <a:xfrm>
-              <a:off x="2786479" y="6198093"/>
-              <a:ext cx="77571" cy="77571"/>
+              <a:off x="2181844" y="5287928"/>
+              <a:ext cx="75116" cy="75116"/>
             </a:xfrm>
             <a:prstGeom prst="ellipse">
               <a:avLst/>
@@ -14691,8 +14691,8 @@
           </p:nvSpPr>
           <p:spPr>
             <a:xfrm>
-              <a:off x="2570543" y="6344080"/>
-              <a:ext cx="77571" cy="77571"/>
+              <a:off x="2116581" y="5408524"/>
+              <a:ext cx="75116" cy="75116"/>
             </a:xfrm>
             <a:prstGeom prst="ellipse">
               <a:avLst/>
@@ -14717,8 +14717,8 @@
           </p:nvSpPr>
           <p:spPr>
             <a:xfrm>
-              <a:off x="2367729" y="6886426"/>
-              <a:ext cx="77571" cy="77571"/>
+              <a:off x="2330687" y="5874211"/>
+              <a:ext cx="75116" cy="75116"/>
             </a:xfrm>
             <a:prstGeom prst="ellipse">
               <a:avLst/>
@@ -14743,8 +14743,8 @@
           </p:nvSpPr>
           <p:spPr>
             <a:xfrm>
-              <a:off x="2610614" y="6600624"/>
-              <a:ext cx="77571" cy="77571"/>
+              <a:off x="2290652" y="5627260"/>
+              <a:ext cx="75116" cy="75116"/>
             </a:xfrm>
             <a:prstGeom prst="ellipse">
               <a:avLst/>
@@ -14769,8 +14769,8 @@
           </p:nvSpPr>
           <p:spPr>
             <a:xfrm>
-              <a:off x="2390014" y="6146893"/>
-              <a:ext cx="77571" cy="77571"/>
+              <a:off x="2363375" y="5245107"/>
+              <a:ext cx="75116" cy="75116"/>
             </a:xfrm>
             <a:prstGeom prst="ellipse">
               <a:avLst/>
@@ -14795,8 +14795,8 @@
           </p:nvSpPr>
           <p:spPr>
             <a:xfrm>
-              <a:off x="2801843" y="5643160"/>
-              <a:ext cx="77571" cy="77571"/>
+              <a:off x="2099573" y="4816462"/>
+              <a:ext cx="75116" cy="75116"/>
             </a:xfrm>
             <a:prstGeom prst="ellipse">
               <a:avLst/>
@@ -14821,8 +14821,8 @@
           </p:nvSpPr>
           <p:spPr>
             <a:xfrm>
-              <a:off x="2623928" y="5553861"/>
-              <a:ext cx="77571" cy="77571"/>
+              <a:off x="2422043" y="4741059"/>
+              <a:ext cx="75116" cy="75116"/>
             </a:xfrm>
             <a:prstGeom prst="ellipse">
               <a:avLst/>
@@ -14847,8 +14847,8 @@
           </p:nvSpPr>
           <p:spPr>
             <a:xfrm>
-              <a:off x="2480805" y="6431973"/>
-              <a:ext cx="77571" cy="77571"/>
+              <a:off x="2308781" y="5485619"/>
+              <a:ext cx="75116" cy="75116"/>
             </a:xfrm>
             <a:prstGeom prst="ellipse">
               <a:avLst/>
@@ -14873,8 +14873,8 @@
           </p:nvSpPr>
           <p:spPr>
             <a:xfrm>
-              <a:off x="2738355" y="6129315"/>
-              <a:ext cx="77571" cy="77571"/>
+              <a:off x="2344322" y="5228813"/>
+              <a:ext cx="75116" cy="75116"/>
             </a:xfrm>
             <a:prstGeom prst="ellipse">
               <a:avLst/>
@@ -14899,8 +14899,8 @@
           </p:nvSpPr>
           <p:spPr>
             <a:xfrm>
-              <a:off x="2804731" y="5915404"/>
-              <a:ext cx="77571" cy="77571"/>
+              <a:off x="2433296" y="5046730"/>
+              <a:ext cx="75116" cy="75116"/>
             </a:xfrm>
             <a:prstGeom prst="ellipse">
               <a:avLst/>
@@ -14925,8 +14925,8 @@
           </p:nvSpPr>
           <p:spPr>
             <a:xfrm>
-              <a:off x="2716906" y="6058678"/>
-              <a:ext cx="77571" cy="77571"/>
+              <a:off x="2249856" y="5170520"/>
+              <a:ext cx="75116" cy="75116"/>
             </a:xfrm>
             <a:prstGeom prst="ellipse">
               <a:avLst/>
@@ -14951,8 +14951,8 @@
           </p:nvSpPr>
           <p:spPr>
             <a:xfrm>
-              <a:off x="2811726" y="6594498"/>
-              <a:ext cx="77571" cy="77571"/>
+              <a:off x="2164023" y="5624159"/>
+              <a:ext cx="75116" cy="75116"/>
             </a:xfrm>
             <a:prstGeom prst="ellipse">
               <a:avLst/>
@@ -14977,8 +14977,8 @@
           </p:nvSpPr>
           <p:spPr>
             <a:xfrm>
-              <a:off x="2358797" y="6534692"/>
-              <a:ext cx="77571" cy="77571"/>
+              <a:off x="2303672" y="5574059"/>
+              <a:ext cx="75116" cy="75116"/>
             </a:xfrm>
             <a:prstGeom prst="ellipse">
               <a:avLst/>
@@ -15003,8 +15003,8 @@
           </p:nvSpPr>
           <p:spPr>
             <a:xfrm>
-              <a:off x="2358363" y="5965403"/>
-              <a:ext cx="77571" cy="77571"/>
+              <a:off x="2135392" y="5088662"/>
+              <a:ext cx="75116" cy="75116"/>
             </a:xfrm>
             <a:prstGeom prst="ellipse">
               <a:avLst/>
@@ -15029,8 +15029,8 @@
           </p:nvSpPr>
           <p:spPr>
             <a:xfrm>
-              <a:off x="2410007" y="6013174"/>
-              <a:ext cx="77571" cy="77571"/>
+              <a:off x="2117442" y="5130625"/>
+              <a:ext cx="75116" cy="75116"/>
             </a:xfrm>
             <a:prstGeom prst="ellipse">
               <a:avLst/>
@@ -15055,8 +15055,8 @@
           </p:nvSpPr>
           <p:spPr>
             <a:xfrm>
-              <a:off x="3452736" y="6639830"/>
-              <a:ext cx="77571" cy="77571"/>
+              <a:off x="3049620" y="5662120"/>
+              <a:ext cx="75116" cy="75116"/>
             </a:xfrm>
             <a:prstGeom prst="ellipse">
               <a:avLst/>
@@ -15081,8 +15081,8 @@
           </p:nvSpPr>
           <p:spPr>
             <a:xfrm>
-              <a:off x="3507253" y="6317012"/>
-              <a:ext cx="77571" cy="77571"/>
+              <a:off x="2784455" y="5390009"/>
+              <a:ext cx="75116" cy="75116"/>
             </a:xfrm>
             <a:prstGeom prst="ellipse">
               <a:avLst/>
@@ -15107,8 +15107,8 @@
           </p:nvSpPr>
           <p:spPr>
             <a:xfrm>
-              <a:off x="3241200" y="6440547"/>
-              <a:ext cx="77571" cy="77571"/>
+              <a:off x="2854172" y="5494209"/>
+              <a:ext cx="75116" cy="75116"/>
             </a:xfrm>
             <a:prstGeom prst="ellipse">
               <a:avLst/>
@@ -15133,8 +15133,8 @@
           </p:nvSpPr>
           <p:spPr>
             <a:xfrm>
-              <a:off x="3506196" y="6714844"/>
-              <a:ext cx="77571" cy="77571"/>
+              <a:off x="2973188" y="5725196"/>
+              <a:ext cx="75116" cy="75116"/>
             </a:xfrm>
             <a:prstGeom prst="ellipse">
               <a:avLst/>
@@ -15159,8 +15159,8 @@
           </p:nvSpPr>
           <p:spPr>
             <a:xfrm>
-              <a:off x="3308764" y="6291448"/>
-              <a:ext cx="77571" cy="77571"/>
+              <a:off x="3048289" y="5369167"/>
+              <a:ext cx="75116" cy="75116"/>
             </a:xfrm>
             <a:prstGeom prst="ellipse">
               <a:avLst/>
@@ -15185,8 +15185,8 @@
           </p:nvSpPr>
           <p:spPr>
             <a:xfrm>
-              <a:off x="3311132" y="6593590"/>
-              <a:ext cx="77571" cy="77571"/>
+              <a:off x="2898561" y="5624097"/>
+              <a:ext cx="75116" cy="75116"/>
             </a:xfrm>
             <a:prstGeom prst="ellipse">
               <a:avLst/>
@@ -15211,8 +15211,8 @@
           </p:nvSpPr>
           <p:spPr>
             <a:xfrm>
-              <a:off x="3568157" y="5707568"/>
-              <a:ext cx="77571" cy="77571"/>
+              <a:off x="3112447" y="4869359"/>
+              <a:ext cx="75116" cy="75116"/>
             </a:xfrm>
             <a:prstGeom prst="ellipse">
               <a:avLst/>
@@ -15237,8 +15237,8 @@
           </p:nvSpPr>
           <p:spPr>
             <a:xfrm>
-              <a:off x="3436478" y="6517908"/>
-              <a:ext cx="77571" cy="77571"/>
+              <a:off x="2960314" y="5557533"/>
+              <a:ext cx="75116" cy="75116"/>
             </a:xfrm>
             <a:prstGeom prst="ellipse">
               <a:avLst/>
@@ -15263,8 +15263,8 @@
           </p:nvSpPr>
           <p:spPr>
             <a:xfrm>
-              <a:off x="3437820" y="6183143"/>
-              <a:ext cx="77571" cy="77571"/>
+              <a:off x="2781567" y="5275014"/>
+              <a:ext cx="75116" cy="75116"/>
             </a:xfrm>
             <a:prstGeom prst="ellipse">
               <a:avLst/>
@@ -15289,8 +15289,8 @@
           </p:nvSpPr>
           <p:spPr>
             <a:xfrm>
-              <a:off x="3190797" y="5978419"/>
-              <a:ext cx="77571" cy="77571"/>
+              <a:off x="3119513" y="5102224"/>
+              <a:ext cx="75116" cy="75116"/>
             </a:xfrm>
             <a:prstGeom prst="ellipse">
               <a:avLst/>
@@ -15315,8 +15315,8 @@
           </p:nvSpPr>
           <p:spPr>
             <a:xfrm>
-              <a:off x="3250578" y="5614106"/>
-              <a:ext cx="77571" cy="77571"/>
+              <a:off x="3074914" y="4789934"/>
+              <a:ext cx="75116" cy="75116"/>
             </a:xfrm>
             <a:prstGeom prst="ellipse">
               <a:avLst/>
@@ -15341,8 +15341,8 @@
           </p:nvSpPr>
           <p:spPr>
             <a:xfrm>
-              <a:off x="3331110" y="5851343"/>
-              <a:ext cx="77571" cy="77571"/>
+              <a:off x="2934649" y="4994778"/>
+              <a:ext cx="75116" cy="75116"/>
             </a:xfrm>
             <a:prstGeom prst="ellipse">
               <a:avLst/>
@@ -15367,8 +15367,8 @@
           </p:nvSpPr>
           <p:spPr>
             <a:xfrm>
-              <a:off x="3355546" y="6542076"/>
-              <a:ext cx="77571" cy="77571"/>
+              <a:off x="3006537" y="5580021"/>
+              <a:ext cx="75116" cy="75116"/>
             </a:xfrm>
             <a:prstGeom prst="ellipse">
               <a:avLst/>
@@ -15393,8 +15393,8 @@
           </p:nvSpPr>
           <p:spPr>
             <a:xfrm>
-              <a:off x="3616623" y="6107745"/>
-              <a:ext cx="77571" cy="77571"/>
+              <a:off x="3108535" y="5213062"/>
+              <a:ext cx="75116" cy="75116"/>
             </a:xfrm>
             <a:prstGeom prst="ellipse">
               <a:avLst/>
@@ -15419,8 +15419,8 @@
           </p:nvSpPr>
           <p:spPr>
             <a:xfrm>
-              <a:off x="3636455" y="6257601"/>
-              <a:ext cx="77571" cy="77571"/>
+              <a:off x="2963703" y="5339577"/>
+              <a:ext cx="75116" cy="75116"/>
             </a:xfrm>
             <a:prstGeom prst="ellipse">
               <a:avLst/>
@@ -15445,8 +15445,8 @@
           </p:nvSpPr>
           <p:spPr>
             <a:xfrm>
-              <a:off x="3471255" y="6059115"/>
-              <a:ext cx="77571" cy="77571"/>
+              <a:off x="2888185" y="5171141"/>
+              <a:ext cx="75116" cy="75116"/>
             </a:xfrm>
             <a:prstGeom prst="ellipse">
               <a:avLst/>
@@ -15471,8 +15471,8 @@
           </p:nvSpPr>
           <p:spPr>
             <a:xfrm>
-              <a:off x="3202573" y="6510809"/>
-              <a:ext cx="77571" cy="77571"/>
+              <a:off x="3110292" y="5553179"/>
+              <a:ext cx="75116" cy="75116"/>
             </a:xfrm>
             <a:prstGeom prst="ellipse">
               <a:avLst/>
@@ -15497,8 +15497,8 @@
           </p:nvSpPr>
           <p:spPr>
             <a:xfrm>
-              <a:off x="3234102" y="6102258"/>
-              <a:ext cx="77571" cy="77571"/>
+              <a:off x="2926396" y="5207567"/>
+              <a:ext cx="75116" cy="75116"/>
             </a:xfrm>
             <a:prstGeom prst="ellipse">
               <a:avLst/>
@@ -15523,8 +15523,8 @@
           </p:nvSpPr>
           <p:spPr>
             <a:xfrm>
-              <a:off x="3424875" y="6473152"/>
-              <a:ext cx="77571" cy="77571"/>
+              <a:off x="2798620" y="5520422"/>
+              <a:ext cx="75116" cy="75116"/>
             </a:xfrm>
             <a:prstGeom prst="ellipse">
               <a:avLst/>
@@ -15549,8 +15549,8 @@
           </p:nvSpPr>
           <p:spPr>
             <a:xfrm>
-              <a:off x="3229381" y="6426028"/>
-              <a:ext cx="77571" cy="77571"/>
+              <a:off x="3176958" y="5483104"/>
+              <a:ext cx="75116" cy="75116"/>
             </a:xfrm>
             <a:prstGeom prst="ellipse">
               <a:avLst/>
@@ -15575,8 +15575,8 @@
           </p:nvSpPr>
           <p:spPr>
             <a:xfrm>
-              <a:off x="4317407" y="6485472"/>
-              <a:ext cx="77571" cy="77571"/>
+              <a:off x="3661868" y="5532526"/>
+              <a:ext cx="75116" cy="75116"/>
             </a:xfrm>
             <a:prstGeom prst="ellipse">
               <a:avLst/>
@@ -15601,8 +15601,8 @@
           </p:nvSpPr>
           <p:spPr>
             <a:xfrm>
-              <a:off x="4448192" y="6431475"/>
-              <a:ext cx="77571" cy="77571"/>
+              <a:off x="3834483" y="5486928"/>
+              <a:ext cx="75116" cy="75116"/>
             </a:xfrm>
             <a:prstGeom prst="ellipse">
               <a:avLst/>
@@ -15627,8 +15627,8 @@
           </p:nvSpPr>
           <p:spPr>
             <a:xfrm>
-              <a:off x="4104626" y="6625050"/>
-              <a:ext cx="77571" cy="77571"/>
+              <a:off x="3789941" y="5651381"/>
+              <a:ext cx="75116" cy="75116"/>
             </a:xfrm>
             <a:prstGeom prst="ellipse">
               <a:avLst/>
@@ -15653,8 +15653,8 @@
           </p:nvSpPr>
           <p:spPr>
             <a:xfrm>
-              <a:off x="4096793" y="6159532"/>
-              <a:ext cx="77571" cy="77571"/>
+              <a:off x="3702039" y="5252538"/>
+              <a:ext cx="75116" cy="75116"/>
             </a:xfrm>
             <a:prstGeom prst="ellipse">
               <a:avLst/>
@@ -15679,8 +15679,8 @@
           </p:nvSpPr>
           <p:spPr>
             <a:xfrm>
-              <a:off x="4437440" y="6222556"/>
-              <a:ext cx="77571" cy="77571"/>
+              <a:off x="3757398" y="5308325"/>
+              <a:ext cx="75116" cy="75116"/>
             </a:xfrm>
             <a:prstGeom prst="ellipse">
               <a:avLst/>
@@ -15705,8 +15705,8 @@
           </p:nvSpPr>
           <p:spPr>
             <a:xfrm>
-              <a:off x="4353696" y="5648761"/>
-              <a:ext cx="77571" cy="77571"/>
+              <a:off x="3857194" y="4819415"/>
+              <a:ext cx="75116" cy="75116"/>
             </a:xfrm>
             <a:prstGeom prst="ellipse">
               <a:avLst/>
@@ -15731,8 +15731,8 @@
           </p:nvSpPr>
           <p:spPr>
             <a:xfrm>
-              <a:off x="4375782" y="6197484"/>
-              <a:ext cx="77571" cy="77571"/>
+              <a:off x="3842597" y="5287016"/>
+              <a:ext cx="75116" cy="75116"/>
             </a:xfrm>
             <a:prstGeom prst="ellipse">
               <a:avLst/>
@@ -15757,8 +15757,8 @@
           </p:nvSpPr>
           <p:spPr>
             <a:xfrm>
-              <a:off x="4266831" y="6428484"/>
-              <a:ext cx="77571" cy="77571"/>
+              <a:off x="3894495" y="5482607"/>
+              <a:ext cx="75116" cy="75116"/>
             </a:xfrm>
             <a:prstGeom prst="ellipse">
               <a:avLst/>
@@ -15783,8 +15783,8 @@
           </p:nvSpPr>
           <p:spPr>
             <a:xfrm>
-              <a:off x="4353989" y="6214227"/>
-              <a:ext cx="77571" cy="77571"/>
+              <a:off x="3558064" y="5300165"/>
+              <a:ext cx="75116" cy="75116"/>
             </a:xfrm>
             <a:prstGeom prst="ellipse">
               <a:avLst/>
@@ -15809,8 +15809,8 @@
           </p:nvSpPr>
           <p:spPr>
             <a:xfrm>
-              <a:off x="4195284" y="6087658"/>
-              <a:ext cx="77571" cy="77571"/>
+              <a:off x="3490462" y="5196470"/>
+              <a:ext cx="75116" cy="75116"/>
             </a:xfrm>
             <a:prstGeom prst="ellipse">
               <a:avLst/>
@@ -15835,8 +15835,8 @@
           </p:nvSpPr>
           <p:spPr>
             <a:xfrm>
-              <a:off x="4320522" y="6026087"/>
-              <a:ext cx="77571" cy="77571"/>
+              <a:off x="3669827" y="5140555"/>
+              <a:ext cx="75116" cy="75116"/>
             </a:xfrm>
             <a:prstGeom prst="ellipse">
               <a:avLst/>
@@ -15861,8 +15861,8 @@
           </p:nvSpPr>
           <p:spPr>
             <a:xfrm>
-              <a:off x="4072570" y="5877241"/>
-              <a:ext cx="77571" cy="77571"/>
+              <a:off x="3608188" y="5013374"/>
+              <a:ext cx="75116" cy="75116"/>
             </a:xfrm>
             <a:prstGeom prst="ellipse">
               <a:avLst/>
@@ -15887,8 +15887,8 @@
           </p:nvSpPr>
           <p:spPr>
             <a:xfrm>
-              <a:off x="4103044" y="6377528"/>
-              <a:ext cx="77571" cy="77571"/>
+              <a:off x="3682176" y="5439363"/>
+              <a:ext cx="75116" cy="75116"/>
             </a:xfrm>
             <a:prstGeom prst="ellipse">
               <a:avLst/>
@@ -15913,8 +15913,8 @@
           </p:nvSpPr>
           <p:spPr>
             <a:xfrm>
-              <a:off x="4482772" y="5766342"/>
-              <a:ext cx="77571" cy="77571"/>
+              <a:off x="3779161" y="4923171"/>
+              <a:ext cx="75116" cy="75116"/>
             </a:xfrm>
             <a:prstGeom prst="ellipse">
               <a:avLst/>
@@ -15939,8 +15939,8 @@
           </p:nvSpPr>
           <p:spPr>
             <a:xfrm>
-              <a:off x="4188053" y="6694767"/>
-              <a:ext cx="77571" cy="77571"/>
+              <a:off x="3857478" y="5708237"/>
+              <a:ext cx="75116" cy="75116"/>
             </a:xfrm>
             <a:prstGeom prst="ellipse">
               <a:avLst/>
@@ -15965,8 +15965,8 @@
           </p:nvSpPr>
           <p:spPr>
             <a:xfrm>
-              <a:off x="4134526" y="6540325"/>
-              <a:ext cx="77571" cy="77571"/>
+              <a:off x="3886441" y="5578474"/>
+              <a:ext cx="75116" cy="75116"/>
             </a:xfrm>
             <a:prstGeom prst="ellipse">
               <a:avLst/>
@@ -15991,8 +15991,8 @@
           </p:nvSpPr>
           <p:spPr>
             <a:xfrm>
-              <a:off x="4510442" y="6351539"/>
-              <a:ext cx="77571" cy="77571"/>
+              <a:off x="3805738" y="5418322"/>
+              <a:ext cx="75116" cy="75116"/>
             </a:xfrm>
             <a:prstGeom prst="ellipse">
               <a:avLst/>
@@ -16017,8 +16017,8 @@
           </p:nvSpPr>
           <p:spPr>
             <a:xfrm>
-              <a:off x="4391874" y="6452693"/>
-              <a:ext cx="77571" cy="77571"/>
+              <a:off x="3608568" y="5502496"/>
+              <a:ext cx="75116" cy="75116"/>
             </a:xfrm>
             <a:prstGeom prst="ellipse">
               <a:avLst/>
@@ -16043,8 +16043,8 @@
           </p:nvSpPr>
           <p:spPr>
             <a:xfrm>
-              <a:off x="4116962" y="6308265"/>
-              <a:ext cx="77571" cy="77571"/>
+              <a:off x="3731064" y="5381357"/>
+              <a:ext cx="75116" cy="75116"/>
             </a:xfrm>
             <a:prstGeom prst="ellipse">
               <a:avLst/>
@@ -16069,8 +16069,8 @@
           </p:nvSpPr>
           <p:spPr>
             <a:xfrm>
-              <a:off x="4319190" y="6500777"/>
-              <a:ext cx="77571" cy="77571"/>
+              <a:off x="3780423" y="5545489"/>
+              <a:ext cx="75116" cy="75116"/>
             </a:xfrm>
             <a:prstGeom prst="ellipse">
               <a:avLst/>
@@ -16095,8 +16095,8 @@
           </p:nvSpPr>
           <p:spPr>
             <a:xfrm>
-              <a:off x="4504389" y="6278711"/>
-              <a:ext cx="77571" cy="77571"/>
+              <a:off x="3744930" y="5354886"/>
+              <a:ext cx="75116" cy="75116"/>
             </a:xfrm>
             <a:prstGeom prst="ellipse">
               <a:avLst/>
@@ -16121,8 +16121,8 @@
           </p:nvSpPr>
           <p:spPr>
             <a:xfrm>
-              <a:off x="4391393" y="6194872"/>
-              <a:ext cx="77571" cy="77571"/>
+              <a:off x="3516548" y="5283398"/>
+              <a:ext cx="75116" cy="75116"/>
             </a:xfrm>
             <a:prstGeom prst="ellipse">
               <a:avLst/>
@@ -16147,8 +16147,8 @@
           </p:nvSpPr>
           <p:spPr>
             <a:xfrm>
-              <a:off x="4057833" y="6204870"/>
-              <a:ext cx="77571" cy="77571"/>
+              <a:off x="3794596" y="5292318"/>
+              <a:ext cx="75116" cy="75116"/>
             </a:xfrm>
             <a:prstGeom prst="ellipse">
               <a:avLst/>
@@ -16173,8 +16173,8 @@
           </p:nvSpPr>
           <p:spPr>
             <a:xfrm>
-              <a:off x="4071994" y="6271725"/>
-              <a:ext cx="77571" cy="77571"/>
+              <a:off x="3705275" y="5352212"/>
+              <a:ext cx="75116" cy="75116"/>
             </a:xfrm>
             <a:prstGeom prst="ellipse">
               <a:avLst/>
@@ -16199,42 +16199,42 @@
           </p:nvSpPr>
           <p:spPr>
             <a:xfrm>
-              <a:off x="1781437" y="6069257"/>
-              <a:ext cx="2533697" cy="479559"/>
+              <a:off x="1583893" y="5183017"/>
+              <a:ext cx="2144462" cy="406724"/>
             </a:xfrm>
             <a:custGeom>
               <a:avLst/>
               <a:pathLst>
-                <a:path w="2533697" h="479559">
+                <a:path w="2144462" h="406724">
                   <a:moveTo>
                     <a:pt x="0" y="0"/>
                   </a:moveTo>
                   <a:lnTo>
-                    <a:pt x="1338605" y="106139"/>
+                    <a:pt x="1132964" y="90018"/>
                   </a:lnTo>
                   <a:lnTo>
-                    <a:pt x="1689131" y="96039"/>
+                    <a:pt x="1429641" y="81453"/>
                   </a:lnTo>
                   <a:lnTo>
-                    <a:pt x="2183171" y="53129"/>
+                    <a:pt x="1847785" y="45060"/>
                   </a:lnTo>
                   <a:lnTo>
-                    <a:pt x="2533697" y="11358"/>
+                    <a:pt x="2144462" y="9633"/>
                   </a:lnTo>
                   <a:lnTo>
-                    <a:pt x="2533697" y="430140"/>
+                    <a:pt x="2144462" y="364810"/>
                   </a:lnTo>
                   <a:lnTo>
-                    <a:pt x="2183171" y="393634"/>
+                    <a:pt x="1847785" y="333849"/>
                   </a:lnTo>
                   <a:lnTo>
-                    <a:pt x="1689131" y="358146"/>
+                    <a:pt x="1429641" y="303750"/>
                   </a:lnTo>
                   <a:lnTo>
-                    <a:pt x="1338605" y="353312"/>
+                    <a:pt x="1132964" y="299651"/>
                   </a:lnTo>
                   <a:lnTo>
-                    <a:pt x="0" y="479559"/>
+                    <a:pt x="0" y="406724"/>
                   </a:lnTo>
                   <a:close/>
                 </a:path>
@@ -16260,27 +16260,27 @@
           </p:nvSpPr>
           <p:spPr>
             <a:xfrm>
-              <a:off x="1781437" y="6069257"/>
-              <a:ext cx="2533697" cy="106139"/>
+              <a:off x="1583893" y="5183017"/>
+              <a:ext cx="2144462" cy="90018"/>
             </a:xfrm>
             <a:custGeom>
               <a:avLst/>
               <a:pathLst>
-                <a:path w="2533697" h="106139">
+                <a:path w="2144462" h="90018">
                   <a:moveTo>
                     <a:pt x="0" y="0"/>
                   </a:moveTo>
                   <a:lnTo>
-                    <a:pt x="1338605" y="106139"/>
+                    <a:pt x="1132964" y="90018"/>
                   </a:lnTo>
                   <a:lnTo>
-                    <a:pt x="1689131" y="96039"/>
+                    <a:pt x="1429641" y="81453"/>
                   </a:lnTo>
                   <a:lnTo>
-                    <a:pt x="2183171" y="53129"/>
+                    <a:pt x="1847785" y="45060"/>
                   </a:lnTo>
                   <a:lnTo>
-                    <a:pt x="2533697" y="11358"/>
+                    <a:pt x="2144462" y="9633"/>
                   </a:lnTo>
                 </a:path>
               </a:pathLst>
@@ -16300,27 +16300,27 @@
           </p:nvSpPr>
           <p:spPr>
             <a:xfrm>
-              <a:off x="1781437" y="6422569"/>
-              <a:ext cx="2533697" cy="126247"/>
+              <a:off x="1583893" y="5482668"/>
+              <a:ext cx="2144462" cy="107073"/>
             </a:xfrm>
             <a:custGeom>
               <a:avLst/>
               <a:pathLst>
-                <a:path w="2533697" h="126247">
+                <a:path w="2144462" h="107073">
                   <a:moveTo>
-                    <a:pt x="2533697" y="76828"/>
+                    <a:pt x="2144462" y="65159"/>
                   </a:moveTo>
                   <a:lnTo>
-                    <a:pt x="2183171" y="40322"/>
+                    <a:pt x="1847785" y="34198"/>
                   </a:lnTo>
                   <a:lnTo>
-                    <a:pt x="1689131" y="4834"/>
+                    <a:pt x="1429641" y="4099"/>
                   </a:lnTo>
                   <a:lnTo>
-                    <a:pt x="1338605" y="0"/>
+                    <a:pt x="1132964" y="0"/>
                   </a:lnTo>
                   <a:lnTo>
-                    <a:pt x="0" y="126247"/>
+                    <a:pt x="0" y="107073"/>
                   </a:lnTo>
                 </a:path>
               </a:pathLst>
@@ -16340,27 +16340,27 @@
           </p:nvSpPr>
           <p:spPr>
             <a:xfrm>
-              <a:off x="1781437" y="6290007"/>
-              <a:ext cx="2533697" cy="19030"/>
+              <a:off x="1583893" y="5370239"/>
+              <a:ext cx="2144462" cy="16140"/>
             </a:xfrm>
             <a:custGeom>
               <a:avLst/>
               <a:pathLst>
-                <a:path w="2533697" h="19030">
+                <a:path w="2144462" h="16140">
                   <a:moveTo>
-                    <a:pt x="0" y="19030"/>
+                    <a:pt x="0" y="16140"/>
                   </a:moveTo>
                   <a:lnTo>
-                    <a:pt x="1338605" y="8976"/>
+                    <a:pt x="1132964" y="7612"/>
                   </a:lnTo>
                   <a:lnTo>
-                    <a:pt x="1689131" y="6343"/>
+                    <a:pt x="1429641" y="5380"/>
                   </a:lnTo>
                   <a:lnTo>
-                    <a:pt x="2183171" y="2632"/>
+                    <a:pt x="1847785" y="2232"/>
                   </a:lnTo>
                   <a:lnTo>
-                    <a:pt x="2533697" y="0"/>
+                    <a:pt x="2144462" y="0"/>
                   </a:lnTo>
                 </a:path>
               </a:pathLst>
@@ -16389,7 +16389,7 @@
           </p:nvSpPr>
           <p:spPr>
             <a:xfrm>
-              <a:off x="3835441" y="5602275"/>
+              <a:off x="3248661" y="4768273"/>
               <a:ext cx="479694" cy="82021"/>
             </a:xfrm>
             <a:prstGeom prst="rect">
@@ -16435,8 +16435,8 @@
           </p:nvSpPr>
           <p:spPr>
             <a:xfrm>
-              <a:off x="1408383" y="5392761"/>
-              <a:ext cx="3290409" cy="1599078"/>
+              <a:off x="1310306" y="4608644"/>
+              <a:ext cx="2746591" cy="1359782"/>
             </a:xfrm>
             <a:prstGeom prst="rect">
               <a:avLst/>
@@ -16456,15 +16456,15 @@
           </p:nvSpPr>
           <p:spPr>
             <a:xfrm>
-              <a:off x="1408383" y="5392761"/>
-              <a:ext cx="0" cy="1599078"/>
+              <a:off x="1310306" y="4608644"/>
+              <a:ext cx="0" cy="1359782"/>
             </a:xfrm>
             <a:custGeom>
               <a:avLst/>
               <a:pathLst>
-                <a:path w="0" h="1599078">
+                <a:path w="0" h="1359782">
                   <a:moveTo>
-                    <a:pt x="0" y="1599078"/>
+                    <a:pt x="0" y="1359782"/>
                   </a:moveTo>
                   <a:lnTo>
                     <a:pt x="0" y="0"/>
@@ -16496,8 +16496,8 @@
           </p:nvSpPr>
           <p:spPr>
             <a:xfrm rot="-5400000">
-              <a:off x="1177387" y="6843488"/>
-              <a:ext cx="194218" cy="100218"/>
+              <a:off x="1140740" y="5845717"/>
+              <a:ext cx="141274" cy="72877"/>
             </a:xfrm>
             <a:prstGeom prst="rect">
               <a:avLst/>
@@ -16510,7 +16510,7 @@
             <a:p>
               <a:pPr algn="l" marL="0" marR="0" indent="0">
                 <a:lnSpc>
-                  <a:spcPts val="1100"/>
+                  <a:spcPts val="800"/>
                 </a:lnSpc>
                 <a:spcBef>
                   <a:spcPts val="0"/>
@@ -16520,7 +16520,7 @@
                 </a:spcAft>
               </a:pPr>
               <a:r>
-                <a:rPr sz="1100">
+                <a:rPr sz="800">
                   <a:solidFill>
                     <a:srgbClr val="000000">
                       <a:alpha val="100000"/>
@@ -16542,8 +16542,8 @@
           </p:nvSpPr>
           <p:spPr>
             <a:xfrm rot="-5400000">
-              <a:off x="1177387" y="6434509"/>
-              <a:ext cx="194218" cy="100218"/>
+              <a:off x="1140740" y="5498854"/>
+              <a:ext cx="141274" cy="72877"/>
             </a:xfrm>
             <a:prstGeom prst="rect">
               <a:avLst/>
@@ -16556,7 +16556,7 @@
             <a:p>
               <a:pPr algn="l" marL="0" marR="0" indent="0">
                 <a:lnSpc>
-                  <a:spcPts val="1100"/>
+                  <a:spcPts val="800"/>
                 </a:lnSpc>
                 <a:spcBef>
                   <a:spcPts val="0"/>
@@ -16566,7 +16566,7 @@
                 </a:spcAft>
               </a:pPr>
               <a:r>
-                <a:rPr sz="1100">
+                <a:rPr sz="800">
                   <a:solidFill>
                     <a:srgbClr val="000000">
                       <a:alpha val="100000"/>
@@ -16588,8 +16588,8 @@
           </p:nvSpPr>
           <p:spPr>
             <a:xfrm rot="-5400000">
-              <a:off x="1177387" y="6025530"/>
-              <a:ext cx="194218" cy="100218"/>
+              <a:off x="1140740" y="5151990"/>
+              <a:ext cx="141274" cy="72877"/>
             </a:xfrm>
             <a:prstGeom prst="rect">
               <a:avLst/>
@@ -16602,7 +16602,7 @@
             <a:p>
               <a:pPr algn="l" marL="0" marR="0" indent="0">
                 <a:lnSpc>
-                  <a:spcPts val="1100"/>
+                  <a:spcPts val="800"/>
                 </a:lnSpc>
                 <a:spcBef>
                   <a:spcPts val="0"/>
@@ -16612,7 +16612,7 @@
                 </a:spcAft>
               </a:pPr>
               <a:r>
-                <a:rPr sz="1100">
+                <a:rPr sz="800">
                   <a:solidFill>
                     <a:srgbClr val="000000">
                       <a:alpha val="100000"/>
@@ -16634,8 +16634,8 @@
           </p:nvSpPr>
           <p:spPr>
             <a:xfrm rot="-5400000">
-              <a:off x="1177387" y="5616551"/>
-              <a:ext cx="194218" cy="100218"/>
+              <a:off x="1140740" y="4805127"/>
+              <a:ext cx="141274" cy="72877"/>
             </a:xfrm>
             <a:prstGeom prst="rect">
               <a:avLst/>
@@ -16648,7 +16648,7 @@
             <a:p>
               <a:pPr algn="l" marL="0" marR="0" indent="0">
                 <a:lnSpc>
-                  <a:spcPts val="1100"/>
+                  <a:spcPts val="800"/>
                 </a:lnSpc>
                 <a:spcBef>
                   <a:spcPts val="0"/>
@@ -16658,7 +16658,7 @@
                 </a:spcAft>
               </a:pPr>
               <a:r>
-                <a:rPr sz="1100">
+                <a:rPr sz="800">
                   <a:solidFill>
                     <a:srgbClr val="000000">
                       <a:alpha val="100000"/>
@@ -16680,18 +16680,18 @@
           </p:nvSpPr>
           <p:spPr>
             <a:xfrm>
-              <a:off x="1370425" y="6893597"/>
-              <a:ext cx="37957" cy="0"/>
+              <a:off x="1281838" y="5882156"/>
+              <a:ext cx="28468" cy="0"/>
             </a:xfrm>
             <a:custGeom>
               <a:avLst/>
               <a:pathLst>
-                <a:path w="37957" h="0">
+                <a:path w="28468" h="0">
                   <a:moveTo>
                     <a:pt x="0" y="0"/>
                   </a:moveTo>
                   <a:lnTo>
-                    <a:pt x="37957" y="0"/>
+                    <a:pt x="28468" y="0"/>
                   </a:lnTo>
                 </a:path>
               </a:pathLst>
@@ -16720,18 +16720,18 @@
           </p:nvSpPr>
           <p:spPr>
             <a:xfrm>
-              <a:off x="1370425" y="6484618"/>
-              <a:ext cx="37957" cy="0"/>
+              <a:off x="1281838" y="5535292"/>
+              <a:ext cx="28468" cy="0"/>
             </a:xfrm>
             <a:custGeom>
               <a:avLst/>
               <a:pathLst>
-                <a:path w="37957" h="0">
+                <a:path w="28468" h="0">
                   <a:moveTo>
                     <a:pt x="0" y="0"/>
                   </a:moveTo>
                   <a:lnTo>
-                    <a:pt x="37957" y="0"/>
+                    <a:pt x="28468" y="0"/>
                   </a:lnTo>
                 </a:path>
               </a:pathLst>
@@ -16760,18 +16760,18 @@
           </p:nvSpPr>
           <p:spPr>
             <a:xfrm>
-              <a:off x="1370425" y="6075639"/>
-              <a:ext cx="37957" cy="0"/>
+              <a:off x="1281838" y="5188429"/>
+              <a:ext cx="28468" cy="0"/>
             </a:xfrm>
             <a:custGeom>
               <a:avLst/>
               <a:pathLst>
-                <a:path w="37957" h="0">
+                <a:path w="28468" h="0">
                   <a:moveTo>
                     <a:pt x="0" y="0"/>
                   </a:moveTo>
                   <a:lnTo>
-                    <a:pt x="37957" y="0"/>
+                    <a:pt x="28468" y="0"/>
                   </a:lnTo>
                 </a:path>
               </a:pathLst>
@@ -16800,18 +16800,18 @@
           </p:nvSpPr>
           <p:spPr>
             <a:xfrm>
-              <a:off x="1370425" y="5666660"/>
-              <a:ext cx="37957" cy="0"/>
+              <a:off x="1281838" y="4841566"/>
+              <a:ext cx="28468" cy="0"/>
             </a:xfrm>
             <a:custGeom>
               <a:avLst/>
               <a:pathLst>
-                <a:path w="37957" h="0">
+                <a:path w="28468" h="0">
                   <a:moveTo>
                     <a:pt x="0" y="0"/>
                   </a:moveTo>
                   <a:lnTo>
-                    <a:pt x="37957" y="0"/>
+                    <a:pt x="28468" y="0"/>
                   </a:lnTo>
                 </a:path>
               </a:pathLst>
@@ -16840,18 +16840,18 @@
           </p:nvSpPr>
           <p:spPr>
             <a:xfrm>
-              <a:off x="1408383" y="6991840"/>
-              <a:ext cx="3290409" cy="0"/>
+              <a:off x="1310306" y="5968427"/>
+              <a:ext cx="2746591" cy="0"/>
             </a:xfrm>
             <a:custGeom>
               <a:avLst/>
               <a:pathLst>
-                <a:path w="3290409" h="0">
+                <a:path w="2746591" h="0">
                   <a:moveTo>
                     <a:pt x="0" y="0"/>
                   </a:moveTo>
                   <a:lnTo>
-                    <a:pt x="3290409" y="0"/>
+                    <a:pt x="2746591" y="0"/>
                   </a:lnTo>
                 </a:path>
               </a:pathLst>
@@ -16880,15 +16880,15 @@
           </p:nvSpPr>
           <p:spPr>
             <a:xfrm>
-              <a:off x="1781437" y="6991840"/>
-              <a:ext cx="0" cy="37957"/>
+              <a:off x="1583893" y="5968427"/>
+              <a:ext cx="0" cy="28468"/>
             </a:xfrm>
             <a:custGeom>
               <a:avLst/>
               <a:pathLst>
-                <a:path w="0" h="37957">
+                <a:path w="0" h="28468">
                   <a:moveTo>
-                    <a:pt x="0" y="37957"/>
+                    <a:pt x="0" y="28468"/>
                   </a:moveTo>
                   <a:lnTo>
                     <a:pt x="0" y="0"/>
@@ -16920,15 +16920,15 @@
           </p:nvSpPr>
           <p:spPr>
             <a:xfrm>
-              <a:off x="2626003" y="6991840"/>
-              <a:ext cx="0" cy="37957"/>
+              <a:off x="2298714" y="5968427"/>
+              <a:ext cx="0" cy="28468"/>
             </a:xfrm>
             <a:custGeom>
               <a:avLst/>
               <a:pathLst>
-                <a:path w="0" h="37957">
+                <a:path w="0" h="28468">
                   <a:moveTo>
-                    <a:pt x="0" y="37957"/>
+                    <a:pt x="0" y="28468"/>
                   </a:moveTo>
                   <a:lnTo>
                     <a:pt x="0" y="0"/>
@@ -16960,15 +16960,15 @@
           </p:nvSpPr>
           <p:spPr>
             <a:xfrm>
-              <a:off x="3470569" y="6991840"/>
-              <a:ext cx="0" cy="37957"/>
+              <a:off x="3013535" y="5968427"/>
+              <a:ext cx="0" cy="28468"/>
             </a:xfrm>
             <a:custGeom>
               <a:avLst/>
               <a:pathLst>
-                <a:path w="0" h="37957">
+                <a:path w="0" h="28468">
                   <a:moveTo>
-                    <a:pt x="0" y="37957"/>
+                    <a:pt x="0" y="28468"/>
                   </a:moveTo>
                   <a:lnTo>
                     <a:pt x="0" y="0"/>
@@ -17000,15 +17000,15 @@
           </p:nvSpPr>
           <p:spPr>
             <a:xfrm>
-              <a:off x="4315135" y="6991840"/>
-              <a:ext cx="0" cy="37957"/>
+              <a:off x="3728356" y="5968427"/>
+              <a:ext cx="0" cy="28468"/>
             </a:xfrm>
             <a:custGeom>
               <a:avLst/>
               <a:pathLst>
-                <a:path w="0" h="37957">
+                <a:path w="0" h="28468">
                   <a:moveTo>
-                    <a:pt x="0" y="37957"/>
+                    <a:pt x="0" y="28468"/>
                   </a:moveTo>
                   <a:lnTo>
                     <a:pt x="0" y="0"/>
@@ -17040,8 +17040,8 @@
           </p:nvSpPr>
           <p:spPr>
             <a:xfrm>
-              <a:off x="1742575" y="7060163"/>
-              <a:ext cx="77724" cy="100218"/>
+              <a:off x="1555638" y="6019670"/>
+              <a:ext cx="56509" cy="72877"/>
             </a:xfrm>
             <a:prstGeom prst="rect">
               <a:avLst/>
@@ -17054,7 +17054,7 @@
             <a:p>
               <a:pPr algn="l" marL="0" marR="0" indent="0">
                 <a:lnSpc>
-                  <a:spcPts val="1100"/>
+                  <a:spcPts val="800"/>
                 </a:lnSpc>
                 <a:spcBef>
                   <a:spcPts val="0"/>
@@ -17064,7 +17064,7 @@
                 </a:spcAft>
               </a:pPr>
               <a:r>
-                <a:rPr sz="1100">
+                <a:rPr sz="800">
                   <a:solidFill>
                     <a:srgbClr val="000000">
                       <a:alpha val="100000"/>
@@ -17086,8 +17086,8 @@
           </p:nvSpPr>
           <p:spPr>
             <a:xfrm>
-              <a:off x="2587141" y="7060163"/>
-              <a:ext cx="77724" cy="100218"/>
+              <a:off x="2270459" y="6019670"/>
+              <a:ext cx="56509" cy="72877"/>
             </a:xfrm>
             <a:prstGeom prst="rect">
               <a:avLst/>
@@ -17100,7 +17100,7 @@
             <a:p>
               <a:pPr algn="l" marL="0" marR="0" indent="0">
                 <a:lnSpc>
-                  <a:spcPts val="1100"/>
+                  <a:spcPts val="800"/>
                 </a:lnSpc>
                 <a:spcBef>
                   <a:spcPts val="0"/>
@@ -17110,7 +17110,7 @@
                 </a:spcAft>
               </a:pPr>
               <a:r>
-                <a:rPr sz="1100">
+                <a:rPr sz="800">
                   <a:solidFill>
                     <a:srgbClr val="000000">
                       <a:alpha val="100000"/>
@@ -17132,8 +17132,8 @@
           </p:nvSpPr>
           <p:spPr>
             <a:xfrm>
-              <a:off x="3431707" y="7060163"/>
-              <a:ext cx="77724" cy="100218"/>
+              <a:off x="2985280" y="6019670"/>
+              <a:ext cx="56509" cy="72877"/>
             </a:xfrm>
             <a:prstGeom prst="rect">
               <a:avLst/>
@@ -17146,7 +17146,7 @@
             <a:p>
               <a:pPr algn="l" marL="0" marR="0" indent="0">
                 <a:lnSpc>
-                  <a:spcPts val="1100"/>
+                  <a:spcPts val="800"/>
                 </a:lnSpc>
                 <a:spcBef>
                   <a:spcPts val="0"/>
@@ -17156,7 +17156,7 @@
                 </a:spcAft>
               </a:pPr>
               <a:r>
-                <a:rPr sz="1100">
+                <a:rPr sz="800">
                   <a:solidFill>
                     <a:srgbClr val="000000">
                       <a:alpha val="100000"/>
@@ -17178,8 +17178,8 @@
           </p:nvSpPr>
           <p:spPr>
             <a:xfrm>
-              <a:off x="4276273" y="7060163"/>
-              <a:ext cx="77724" cy="100218"/>
+              <a:off x="3700101" y="6019670"/>
+              <a:ext cx="56509" cy="72877"/>
             </a:xfrm>
             <a:prstGeom prst="rect">
               <a:avLst/>
@@ -17192,7 +17192,7 @@
             <a:p>
               <a:pPr algn="l" marL="0" marR="0" indent="0">
                 <a:lnSpc>
-                  <a:spcPts val="1100"/>
+                  <a:spcPts val="800"/>
                 </a:lnSpc>
                 <a:spcBef>
                   <a:spcPts val="0"/>
@@ -17202,7 +17202,7 @@
                 </a:spcAft>
               </a:pPr>
               <a:r>
-                <a:rPr sz="1100">
+                <a:rPr sz="800">
                   <a:solidFill>
                     <a:srgbClr val="000000">
                       <a:alpha val="100000"/>
@@ -17224,8 +17224,8 @@
           </p:nvSpPr>
           <p:spPr>
             <a:xfrm>
-              <a:off x="2686547" y="7273028"/>
-              <a:ext cx="734080" cy="118872"/>
+              <a:off x="2401190" y="6177306"/>
+              <a:ext cx="564824" cy="91440"/>
             </a:xfrm>
             <a:prstGeom prst="rect">
               <a:avLst/>
@@ -17238,7 +17238,7 @@
             <a:p>
               <a:pPr algn="l" marL="0" marR="0" indent="0">
                 <a:lnSpc>
-                  <a:spcPts val="1300"/>
+                  <a:spcPts val="1000"/>
                 </a:lnSpc>
                 <a:spcBef>
                   <a:spcPts val="0"/>
@@ -17248,7 +17248,7 @@
                 </a:spcAft>
               </a:pPr>
               <a:r>
-                <a:rPr sz="1300" b="1">
+                <a:rPr sz="1000" b="1">
                   <a:solidFill>
                     <a:srgbClr val="000000">
                       <a:alpha val="100000"/>
@@ -17270,8 +17270,8 @@
           </p:nvSpPr>
           <p:spPr>
             <a:xfrm rot="-5400000">
-              <a:off x="910098" y="6132865"/>
-              <a:ext cx="256946" cy="118872"/>
+              <a:off x="934421" y="5242816"/>
+              <a:ext cx="197510" cy="91440"/>
             </a:xfrm>
             <a:prstGeom prst="rect">
               <a:avLst/>
@@ -17284,7 +17284,7 @@
             <a:p>
               <a:pPr algn="l" marL="0" marR="0" indent="0">
                 <a:lnSpc>
-                  <a:spcPts val="1300"/>
+                  <a:spcPts val="1000"/>
                 </a:lnSpc>
                 <a:spcBef>
                   <a:spcPts val="0"/>
@@ -17294,7 +17294,7 @@
                 </a:spcAft>
               </a:pPr>
               <a:r>
-                <a:rPr sz="1300" b="1">
+                <a:rPr sz="1000" b="1">
                   <a:solidFill>
                     <a:srgbClr val="000000">
                       <a:alpha val="100000"/>
@@ -17316,8 +17316,8 @@
           </p:nvSpPr>
           <p:spPr>
             <a:xfrm>
-              <a:off x="1408383" y="5149602"/>
-              <a:ext cx="1254373" cy="127924"/>
+              <a:off x="1310306" y="4432104"/>
+              <a:ext cx="896569" cy="91440"/>
             </a:xfrm>
             <a:prstGeom prst="rect">
               <a:avLst/>
@@ -17330,7 +17330,7 @@
             <a:p>
               <a:pPr algn="l" marL="0" marR="0" indent="0">
                 <a:lnSpc>
-                  <a:spcPts val="1400"/>
+                  <a:spcPts val="1000"/>
                 </a:lnSpc>
                 <a:spcBef>
                   <a:spcPts val="0"/>
@@ -17340,7 +17340,7 @@
                 </a:spcAft>
               </a:pPr>
               <a:r>
-                <a:rPr sz="1400" b="1">
+                <a:rPr sz="1000" b="1">
                   <a:solidFill>
                     <a:srgbClr val="000000">
                       <a:alpha val="100000"/>
@@ -17362,8 +17362,8 @@
           </p:nvSpPr>
           <p:spPr>
             <a:xfrm>
-              <a:off x="4837970" y="5392761"/>
-              <a:ext cx="3290409" cy="1599078"/>
+              <a:off x="4186587" y="4608644"/>
+              <a:ext cx="2746591" cy="1359782"/>
             </a:xfrm>
             <a:prstGeom prst="rect">
               <a:avLst/>
@@ -17388,8 +17388,8 @@
           </p:nvSpPr>
           <p:spPr>
             <a:xfrm>
-              <a:off x="5248619" y="6348812"/>
-              <a:ext cx="77571" cy="77571"/>
+              <a:off x="4447155" y="5417945"/>
+              <a:ext cx="75116" cy="75116"/>
             </a:xfrm>
             <a:prstGeom prst="ellipse">
               <a:avLst/>
@@ -17414,8 +17414,8 @@
           </p:nvSpPr>
           <p:spPr>
             <a:xfrm>
-              <a:off x="5205329" y="6272539"/>
-              <a:ext cx="77571" cy="77571"/>
+              <a:off x="4371843" y="5352227"/>
+              <a:ext cx="75116" cy="75116"/>
             </a:xfrm>
             <a:prstGeom prst="ellipse">
               <a:avLst/>
@@ -17440,8 +17440,8 @@
           </p:nvSpPr>
           <p:spPr>
             <a:xfrm>
-              <a:off x="5033864" y="6333327"/>
-              <a:ext cx="77571" cy="77571"/>
+              <a:off x="4285821" y="5403770"/>
+              <a:ext cx="75116" cy="75116"/>
             </a:xfrm>
             <a:prstGeom prst="ellipse">
               <a:avLst/>
@@ -17466,8 +17466,8 @@
           </p:nvSpPr>
           <p:spPr>
             <a:xfrm>
-              <a:off x="5264434" y="6653186"/>
-              <a:ext cx="77571" cy="77571"/>
+              <a:off x="4638421" y="5674838"/>
+              <a:ext cx="75116" cy="75116"/>
             </a:xfrm>
             <a:prstGeom prst="ellipse">
               <a:avLst/>
@@ -17492,8 +17492,8 @@
           </p:nvSpPr>
           <p:spPr>
             <a:xfrm>
-              <a:off x="5173065" y="6612143"/>
-              <a:ext cx="77571" cy="77571"/>
+              <a:off x="4273874" y="5641310"/>
+              <a:ext cx="75116" cy="75116"/>
             </a:xfrm>
             <a:prstGeom prst="ellipse">
               <a:avLst/>
@@ -17518,8 +17518,8 @@
           </p:nvSpPr>
           <p:spPr>
             <a:xfrm>
-              <a:off x="4999333" y="6567528"/>
-              <a:ext cx="77571" cy="77571"/>
+              <a:off x="4409140" y="5602490"/>
+              <a:ext cx="75116" cy="75116"/>
             </a:xfrm>
             <a:prstGeom prst="ellipse">
               <a:avLst/>
@@ -17544,8 +17544,8 @@
           </p:nvSpPr>
           <p:spPr>
             <a:xfrm>
-              <a:off x="5020183" y="6088032"/>
-              <a:ext cx="77571" cy="77571"/>
+              <a:off x="4598317" y="5196590"/>
+              <a:ext cx="75116" cy="75116"/>
             </a:xfrm>
             <a:prstGeom prst="ellipse">
               <a:avLst/>
@@ -17570,8 +17570,8 @@
           </p:nvSpPr>
           <p:spPr>
             <a:xfrm>
-              <a:off x="5080504" y="6370110"/>
-              <a:ext cx="77571" cy="77571"/>
+              <a:off x="4440385" y="5435651"/>
+              <a:ext cx="75116" cy="75116"/>
             </a:xfrm>
             <a:prstGeom prst="ellipse">
               <a:avLst/>
@@ -17596,8 +17596,8 @@
           </p:nvSpPr>
           <p:spPr>
             <a:xfrm>
-              <a:off x="5148020" y="6592053"/>
-              <a:ext cx="77571" cy="77571"/>
+              <a:off x="4577265" y="5622610"/>
+              <a:ext cx="75116" cy="75116"/>
             </a:xfrm>
             <a:prstGeom prst="ellipse">
               <a:avLst/>
@@ -17622,8 +17622,8 @@
           </p:nvSpPr>
           <p:spPr>
             <a:xfrm>
-              <a:off x="4948748" y="6245395"/>
-              <a:ext cx="77571" cy="77571"/>
+              <a:off x="4329229" y="5328513"/>
+              <a:ext cx="75116" cy="75116"/>
             </a:xfrm>
             <a:prstGeom prst="ellipse">
               <a:avLst/>
@@ -17648,8 +17648,8 @@
           </p:nvSpPr>
           <p:spPr>
             <a:xfrm>
-              <a:off x="5914233" y="6886426"/>
-              <a:ext cx="77571" cy="77571"/>
+              <a:off x="5191331" y="5874211"/>
+              <a:ext cx="75116" cy="75116"/>
             </a:xfrm>
             <a:prstGeom prst="ellipse">
               <a:avLst/>
@@ -17674,8 +17674,8 @@
           </p:nvSpPr>
           <p:spPr>
             <a:xfrm>
-              <a:off x="6048574" y="6497508"/>
-              <a:ext cx="77571" cy="77571"/>
+              <a:off x="5131855" y="5543632"/>
+              <a:ext cx="75116" cy="75116"/>
             </a:xfrm>
             <a:prstGeom prst="ellipse">
               <a:avLst/>
@@ -17700,8 +17700,8 @@
           </p:nvSpPr>
           <p:spPr>
             <a:xfrm>
-              <a:off x="5977018" y="6279786"/>
-              <a:ext cx="77571" cy="77571"/>
+              <a:off x="5018843" y="5358769"/>
+              <a:ext cx="75116" cy="75116"/>
             </a:xfrm>
             <a:prstGeom prst="ellipse">
               <a:avLst/>
@@ -17726,8 +17726,8 @@
           </p:nvSpPr>
           <p:spPr>
             <a:xfrm>
-              <a:off x="6150559" y="6745201"/>
-              <a:ext cx="77571" cy="77571"/>
+              <a:off x="5044114" y="5753076"/>
+              <a:ext cx="75116" cy="75116"/>
             </a:xfrm>
             <a:prstGeom prst="ellipse">
               <a:avLst/>
@@ -17752,8 +17752,8 @@
           </p:nvSpPr>
           <p:spPr>
             <a:xfrm>
-              <a:off x="5974994" y="6416674"/>
-              <a:ext cx="77571" cy="77571"/>
+              <a:off x="5133363" y="5473852"/>
+              <a:ext cx="75116" cy="75116"/>
             </a:xfrm>
             <a:prstGeom prst="ellipse">
               <a:avLst/>
@@ -17778,8 +17778,8 @@
           </p:nvSpPr>
           <p:spPr>
             <a:xfrm>
-              <a:off x="5996914" y="6019660"/>
-              <a:ext cx="77571" cy="77571"/>
+              <a:off x="4973037" y="5137661"/>
+              <a:ext cx="75116" cy="75116"/>
             </a:xfrm>
             <a:prstGeom prst="ellipse">
               <a:avLst/>
@@ -17804,8 +17804,8 @@
           </p:nvSpPr>
           <p:spPr>
             <a:xfrm>
-              <a:off x="6046329" y="6452094"/>
-              <a:ext cx="77571" cy="77571"/>
+              <a:off x="5211306" y="5504985"/>
+              <a:ext cx="75116" cy="75116"/>
             </a:xfrm>
             <a:prstGeom prst="ellipse">
               <a:avLst/>
@@ -17830,8 +17830,8 @@
           </p:nvSpPr>
           <p:spPr>
             <a:xfrm>
-              <a:off x="5781632" y="6522460"/>
-              <a:ext cx="77571" cy="77571"/>
+              <a:off x="5352769" y="5563474"/>
+              <a:ext cx="75116" cy="75116"/>
             </a:xfrm>
             <a:prstGeom prst="ellipse">
               <a:avLst/>
@@ -17856,8 +17856,8 @@
           </p:nvSpPr>
           <p:spPr>
             <a:xfrm>
-              <a:off x="5760645" y="6259740"/>
-              <a:ext cx="77571" cy="77571"/>
+              <a:off x="5275366" y="5341202"/>
+              <a:ext cx="75116" cy="75116"/>
             </a:xfrm>
             <a:prstGeom prst="ellipse">
               <a:avLst/>
@@ -17882,8 +17882,8 @@
           </p:nvSpPr>
           <p:spPr>
             <a:xfrm>
-              <a:off x="6032487" y="6615445"/>
-              <a:ext cx="77571" cy="77571"/>
+              <a:off x="5036848" y="5643355"/>
+              <a:ext cx="75116" cy="75116"/>
             </a:xfrm>
             <a:prstGeom prst="ellipse">
               <a:avLst/>
@@ -17908,8 +17908,8 @@
           </p:nvSpPr>
           <p:spPr>
             <a:xfrm>
-              <a:off x="6196984" y="6199525"/>
-              <a:ext cx="77571" cy="77571"/>
+              <a:off x="5308389" y="5291152"/>
+              <a:ext cx="75116" cy="75116"/>
             </a:xfrm>
             <a:prstGeom prst="ellipse">
               <a:avLst/>
@@ -17934,8 +17934,8 @@
           </p:nvSpPr>
           <p:spPr>
             <a:xfrm>
-              <a:off x="6119735" y="6574953"/>
-              <a:ext cx="77571" cy="77571"/>
+              <a:off x="5345164" y="5609071"/>
+              <a:ext cx="75116" cy="75116"/>
             </a:xfrm>
             <a:prstGeom prst="ellipse">
               <a:avLst/>
@@ -17960,8 +17960,8 @@
           </p:nvSpPr>
           <p:spPr>
             <a:xfrm>
-              <a:off x="6014266" y="6171944"/>
-              <a:ext cx="77571" cy="77571"/>
+              <a:off x="5122944" y="5266265"/>
+              <a:ext cx="75116" cy="75116"/>
             </a:xfrm>
             <a:prstGeom prst="ellipse">
               <a:avLst/>
@@ -17986,8 +17986,8 @@
           </p:nvSpPr>
           <p:spPr>
             <a:xfrm>
-              <a:off x="5734094" y="5811142"/>
-              <a:ext cx="77571" cy="77571"/>
+              <a:off x="5226463" y="4960505"/>
+              <a:ext cx="75116" cy="75116"/>
             </a:xfrm>
             <a:prstGeom prst="ellipse">
               <a:avLst/>
@@ -18012,8 +18012,8 @@
           </p:nvSpPr>
           <p:spPr>
             <a:xfrm>
-              <a:off x="6025190" y="6091408"/>
-              <a:ext cx="77571" cy="77571"/>
+              <a:off x="5113146" y="5197794"/>
+              <a:ext cx="75116" cy="75116"/>
             </a:xfrm>
             <a:prstGeom prst="ellipse">
               <a:avLst/>
@@ -18038,8 +18038,8 @@
           </p:nvSpPr>
           <p:spPr>
             <a:xfrm>
-              <a:off x="5699874" y="6142997"/>
-              <a:ext cx="77571" cy="77571"/>
+              <a:off x="5366784" y="5241221"/>
+              <a:ext cx="75116" cy="75116"/>
             </a:xfrm>
             <a:prstGeom prst="ellipse">
               <a:avLst/>
@@ -18064,8 +18064,8 @@
           </p:nvSpPr>
           <p:spPr>
             <a:xfrm>
-              <a:off x="5782475" y="6263319"/>
-              <a:ext cx="77571" cy="77571"/>
+              <a:off x="4998714" y="5344231"/>
+              <a:ext cx="75116" cy="75116"/>
             </a:xfrm>
             <a:prstGeom prst="ellipse">
               <a:avLst/>
@@ -18090,8 +18090,8 @@
           </p:nvSpPr>
           <p:spPr>
             <a:xfrm>
-              <a:off x="6031422" y="6555226"/>
-              <a:ext cx="77571" cy="77571"/>
+              <a:off x="5234935" y="5591611"/>
+              <a:ext cx="75116" cy="75116"/>
             </a:xfrm>
             <a:prstGeom prst="ellipse">
               <a:avLst/>
@@ -18116,8 +18116,8 @@
           </p:nvSpPr>
           <p:spPr>
             <a:xfrm>
-              <a:off x="6889892" y="6321875"/>
-              <a:ext cx="77571" cy="77571"/>
+              <a:off x="5780474" y="5394235"/>
+              <a:ext cx="75116" cy="75116"/>
             </a:xfrm>
             <a:prstGeom prst="ellipse">
               <a:avLst/>
@@ -18142,8 +18142,8 @@
           </p:nvSpPr>
           <p:spPr>
             <a:xfrm>
-              <a:off x="6638064" y="6380804"/>
-              <a:ext cx="77571" cy="77571"/>
+              <a:off x="6038425" y="5443835"/>
+              <a:ext cx="75116" cy="75116"/>
             </a:xfrm>
             <a:prstGeom prst="ellipse">
               <a:avLst/>
@@ -18168,8 +18168,8 @@
           </p:nvSpPr>
           <p:spPr>
             <a:xfrm>
-              <a:off x="7064717" y="6593870"/>
-              <a:ext cx="77571" cy="77571"/>
+              <a:off x="5690255" y="5624228"/>
+              <a:ext cx="75116" cy="75116"/>
             </a:xfrm>
             <a:prstGeom prst="ellipse">
               <a:avLst/>
@@ -18194,8 +18194,8 @@
           </p:nvSpPr>
           <p:spPr>
             <a:xfrm>
-              <a:off x="6692549" y="6141173"/>
-              <a:ext cx="77571" cy="77571"/>
+              <a:off x="5984706" y="5241754"/>
+              <a:ext cx="75116" cy="75116"/>
             </a:xfrm>
             <a:prstGeom prst="ellipse">
               <a:avLst/>
@@ -18220,8 +18220,8 @@
           </p:nvSpPr>
           <p:spPr>
             <a:xfrm>
-              <a:off x="6978738" y="6384782"/>
-              <a:ext cx="77571" cy="77571"/>
+              <a:off x="5932482" y="5446238"/>
+              <a:ext cx="75116" cy="75116"/>
             </a:xfrm>
             <a:prstGeom prst="ellipse">
               <a:avLst/>
@@ -18246,8 +18246,8 @@
           </p:nvSpPr>
           <p:spPr>
             <a:xfrm>
-              <a:off x="6726102" y="6163204"/>
-              <a:ext cx="77571" cy="77571"/>
+              <a:off x="5745086" y="5259363"/>
+              <a:ext cx="75116" cy="75116"/>
             </a:xfrm>
             <a:prstGeom prst="ellipse">
               <a:avLst/>
@@ -18272,8 +18272,8 @@
           </p:nvSpPr>
           <p:spPr>
             <a:xfrm>
-              <a:off x="6887359" y="5698712"/>
-              <a:ext cx="77571" cy="77571"/>
+              <a:off x="5851750" y="4862930"/>
+              <a:ext cx="75116" cy="75116"/>
             </a:xfrm>
             <a:prstGeom prst="ellipse">
               <a:avLst/>
@@ -18298,8 +18298,8 @@
           </p:nvSpPr>
           <p:spPr>
             <a:xfrm>
-              <a:off x="6940656" y="6442027"/>
-              <a:ext cx="77571" cy="77571"/>
+              <a:off x="6038519" y="5495654"/>
+              <a:ext cx="75116" cy="75116"/>
             </a:xfrm>
             <a:prstGeom prst="ellipse">
               <a:avLst/>
@@ -18324,8 +18324,8 @@
           </p:nvSpPr>
           <p:spPr>
             <a:xfrm>
-              <a:off x="6758340" y="6261365"/>
-              <a:ext cx="77571" cy="77571"/>
+              <a:off x="5844268" y="5343100"/>
+              <a:ext cx="75116" cy="75116"/>
             </a:xfrm>
             <a:prstGeom prst="ellipse">
               <a:avLst/>
@@ -18350,8 +18350,8 @@
           </p:nvSpPr>
           <p:spPr>
             <a:xfrm>
-              <a:off x="7049955" y="5553861"/>
-              <a:ext cx="77571" cy="77571"/>
+              <a:off x="5767005" y="4741059"/>
+              <a:ext cx="75116" cy="75116"/>
             </a:xfrm>
             <a:prstGeom prst="ellipse">
               <a:avLst/>
@@ -18376,8 +18376,8 @@
           </p:nvSpPr>
           <p:spPr>
             <a:xfrm>
-              <a:off x="6606363" y="6267330"/>
-              <a:ext cx="77571" cy="77571"/>
+              <a:off x="5701953" y="5347539"/>
+              <a:ext cx="75116" cy="75116"/>
             </a:xfrm>
             <a:prstGeom prst="ellipse">
               <a:avLst/>
@@ -18402,8 +18402,8 @@
           </p:nvSpPr>
           <p:spPr>
             <a:xfrm>
-              <a:off x="6962877" y="6384818"/>
-              <a:ext cx="77571" cy="77571"/>
+              <a:off x="5810430" y="5446578"/>
+              <a:ext cx="75116" cy="75116"/>
             </a:xfrm>
             <a:prstGeom prst="ellipse">
               <a:avLst/>
@@ -18428,8 +18428,8 @@
           </p:nvSpPr>
           <p:spPr>
             <a:xfrm>
-              <a:off x="6907658" y="6140182"/>
-              <a:ext cx="77571" cy="77571"/>
+              <a:off x="5850758" y="5237959"/>
+              <a:ext cx="75116" cy="75116"/>
             </a:xfrm>
             <a:prstGeom prst="ellipse">
               <a:avLst/>
@@ -18454,8 +18454,8 @@
           </p:nvSpPr>
           <p:spPr>
             <a:xfrm>
-              <a:off x="6883389" y="6067878"/>
-              <a:ext cx="77571" cy="77571"/>
+              <a:off x="5852095" y="5178200"/>
+              <a:ext cx="75116" cy="75116"/>
             </a:xfrm>
             <a:prstGeom prst="ellipse">
               <a:avLst/>
@@ -18480,8 +18480,8 @@
           </p:nvSpPr>
           <p:spPr>
             <a:xfrm>
-              <a:off x="6668682" y="5928964"/>
-              <a:ext cx="77571" cy="77571"/>
+              <a:off x="5811208" y="5060020"/>
+              <a:ext cx="75116" cy="75116"/>
             </a:xfrm>
             <a:prstGeom prst="ellipse">
               <a:avLst/>
@@ -18506,8 +18506,8 @@
           </p:nvSpPr>
           <p:spPr>
             <a:xfrm>
-              <a:off x="6907783" y="6485039"/>
-              <a:ext cx="77571" cy="77571"/>
+              <a:off x="5747403" y="5533238"/>
+              <a:ext cx="75116" cy="75116"/>
             </a:xfrm>
             <a:prstGeom prst="ellipse">
               <a:avLst/>
@@ -18532,8 +18532,8 @@
           </p:nvSpPr>
           <p:spPr>
             <a:xfrm>
-              <a:off x="6732032" y="6517033"/>
-              <a:ext cx="77571" cy="77571"/>
+              <a:off x="5727903" y="5560187"/>
+              <a:ext cx="75116" cy="75116"/>
             </a:xfrm>
             <a:prstGeom prst="ellipse">
               <a:avLst/>
@@ -18558,8 +18558,8 @@
           </p:nvSpPr>
           <p:spPr>
             <a:xfrm>
-              <a:off x="6982221" y="6725315"/>
-              <a:ext cx="77571" cy="77571"/>
+              <a:off x="5916879" y="5735823"/>
+              <a:ext cx="75116" cy="75116"/>
             </a:xfrm>
             <a:prstGeom prst="ellipse">
               <a:avLst/>
@@ -18584,8 +18584,8 @@
           </p:nvSpPr>
           <p:spPr>
             <a:xfrm>
-              <a:off x="6705200" y="6311991"/>
-              <a:ext cx="77571" cy="77571"/>
+              <a:off x="5943754" y="5385460"/>
+              <a:ext cx="75116" cy="75116"/>
             </a:xfrm>
             <a:prstGeom prst="ellipse">
               <a:avLst/>
@@ -18610,8 +18610,8 @@
           </p:nvSpPr>
           <p:spPr>
             <a:xfrm>
-              <a:off x="6932520" y="6228796"/>
-              <a:ext cx="77571" cy="77571"/>
+              <a:off x="5891572" y="5315155"/>
+              <a:ext cx="75116" cy="75116"/>
             </a:xfrm>
             <a:prstGeom prst="ellipse">
               <a:avLst/>
@@ -18636,8 +18636,8 @@
           </p:nvSpPr>
           <p:spPr>
             <a:xfrm>
-              <a:off x="7676810" y="6278323"/>
-              <a:ext cx="77571" cy="77571"/>
+              <a:off x="6425365" y="5355994"/>
+              <a:ext cx="75116" cy="75116"/>
             </a:xfrm>
             <a:prstGeom prst="ellipse">
               <a:avLst/>
@@ -18662,8 +18662,8 @@
           </p:nvSpPr>
           <p:spPr>
             <a:xfrm>
-              <a:off x="7566837" y="6407404"/>
-              <a:ext cx="77571" cy="77571"/>
+              <a:off x="6764421" y="5467220"/>
+              <a:ext cx="75116" cy="75116"/>
             </a:xfrm>
             <a:prstGeom prst="ellipse">
               <a:avLst/>
@@ -18688,8 +18688,8 @@
           </p:nvSpPr>
           <p:spPr>
             <a:xfrm>
-              <a:off x="7656132" y="6484894"/>
-              <a:ext cx="77571" cy="77571"/>
+              <a:off x="6715883" y="5533132"/>
+              <a:ext cx="75116" cy="75116"/>
             </a:xfrm>
             <a:prstGeom prst="ellipse">
               <a:avLst/>
@@ -18714,8 +18714,8 @@
           </p:nvSpPr>
           <p:spPr>
             <a:xfrm>
-              <a:off x="7567661" y="6522072"/>
-              <a:ext cx="77571" cy="77571"/>
+              <a:off x="6455661" y="5563516"/>
+              <a:ext cx="75116" cy="75116"/>
             </a:xfrm>
             <a:prstGeom prst="ellipse">
               <a:avLst/>
@@ -18740,8 +18740,8 @@
           </p:nvSpPr>
           <p:spPr>
             <a:xfrm>
-              <a:off x="7922055" y="6320247"/>
-              <a:ext cx="77571" cy="77571"/>
+              <a:off x="6731371" y="5393222"/>
+              <a:ext cx="75116" cy="75116"/>
             </a:xfrm>
             <a:prstGeom prst="ellipse">
               <a:avLst/>
@@ -18766,8 +18766,8 @@
           </p:nvSpPr>
           <p:spPr>
             <a:xfrm>
-              <a:off x="7614841" y="6253341"/>
-              <a:ext cx="77571" cy="77571"/>
+              <a:off x="6770776" y="5336396"/>
+              <a:ext cx="75116" cy="75116"/>
             </a:xfrm>
             <a:prstGeom prst="ellipse">
               <a:avLst/>
@@ -18792,8 +18792,8 @@
           </p:nvSpPr>
           <p:spPr>
             <a:xfrm>
-              <a:off x="7516663" y="6481650"/>
-              <a:ext cx="77571" cy="77571"/>
+              <a:off x="6517005" y="5529927"/>
+              <a:ext cx="75116" cy="75116"/>
             </a:xfrm>
             <a:prstGeom prst="ellipse">
               <a:avLst/>
@@ -18818,8 +18818,8 @@
           </p:nvSpPr>
           <p:spPr>
             <a:xfrm>
-              <a:off x="7837966" y="6184585"/>
-              <a:ext cx="77571" cy="77571"/>
+              <a:off x="6617432" y="5276471"/>
+              <a:ext cx="75116" cy="75116"/>
             </a:xfrm>
             <a:prstGeom prst="ellipse">
               <a:avLst/>
@@ -18844,8 +18844,8 @@
           </p:nvSpPr>
           <p:spPr>
             <a:xfrm>
-              <a:off x="7689731" y="6559833"/>
-              <a:ext cx="77571" cy="77571"/>
+              <a:off x="6436263" y="5595196"/>
+              <a:ext cx="75116" cy="75116"/>
             </a:xfrm>
             <a:prstGeom prst="ellipse">
               <a:avLst/>
@@ -18870,8 +18870,8 @@
           </p:nvSpPr>
           <p:spPr>
             <a:xfrm>
-              <a:off x="7853980" y="6403036"/>
-              <a:ext cx="77571" cy="77571"/>
+              <a:off x="6630995" y="5462552"/>
+              <a:ext cx="75116" cy="75116"/>
             </a:xfrm>
             <a:prstGeom prst="ellipse">
               <a:avLst/>
@@ -18896,8 +18896,8 @@
           </p:nvSpPr>
           <p:spPr>
             <a:xfrm>
-              <a:off x="7635924" y="6326316"/>
-              <a:ext cx="77571" cy="77571"/>
+              <a:off x="6551523" y="5396872"/>
+              <a:ext cx="75116" cy="75116"/>
             </a:xfrm>
             <a:prstGeom prst="ellipse">
               <a:avLst/>
@@ -18922,8 +18922,8 @@
           </p:nvSpPr>
           <p:spPr>
             <a:xfrm>
-              <a:off x="7643280" y="6414284"/>
-              <a:ext cx="77571" cy="77571"/>
+              <a:off x="6441096" y="5470716"/>
+              <a:ext cx="75116" cy="75116"/>
             </a:xfrm>
             <a:prstGeom prst="ellipse">
               <a:avLst/>
@@ -18948,8 +18948,8 @@
           </p:nvSpPr>
           <p:spPr>
             <a:xfrm>
-              <a:off x="7763713" y="6370586"/>
-              <a:ext cx="77571" cy="77571"/>
+              <a:off x="6616124" y="5436041"/>
+              <a:ext cx="75116" cy="75116"/>
             </a:xfrm>
             <a:prstGeom prst="ellipse">
               <a:avLst/>
@@ -18974,8 +18974,8 @@
           </p:nvSpPr>
           <p:spPr>
             <a:xfrm>
-              <a:off x="7940029" y="6682019"/>
-              <a:ext cx="77571" cy="77571"/>
+              <a:off x="6454868" y="5699013"/>
+              <a:ext cx="75116" cy="75116"/>
             </a:xfrm>
             <a:prstGeom prst="ellipse">
               <a:avLst/>
@@ -19000,8 +19000,8 @@
           </p:nvSpPr>
           <p:spPr>
             <a:xfrm>
-              <a:off x="7884866" y="6391964"/>
-              <a:ext cx="77571" cy="77571"/>
+              <a:off x="6434958" y="5454023"/>
+              <a:ext cx="75116" cy="75116"/>
             </a:xfrm>
             <a:prstGeom prst="ellipse">
               <a:avLst/>
@@ -19026,8 +19026,8 @@
           </p:nvSpPr>
           <p:spPr>
             <a:xfrm>
-              <a:off x="7506091" y="6410446"/>
-              <a:ext cx="77571" cy="77571"/>
+              <a:off x="6695783" y="5468465"/>
+              <a:ext cx="75116" cy="75116"/>
             </a:xfrm>
             <a:prstGeom prst="ellipse">
               <a:avLst/>
@@ -19052,8 +19052,8 @@
           </p:nvSpPr>
           <p:spPr>
             <a:xfrm>
-              <a:off x="7907143" y="6291594"/>
-              <a:ext cx="77571" cy="77571"/>
+              <a:off x="6529374" y="5368090"/>
+              <a:ext cx="75116" cy="75116"/>
             </a:xfrm>
             <a:prstGeom prst="ellipse">
               <a:avLst/>
@@ -19078,8 +19078,8 @@
           </p:nvSpPr>
           <p:spPr>
             <a:xfrm>
-              <a:off x="7521997" y="6321002"/>
-              <a:ext cx="77571" cy="77571"/>
+              <a:off x="6686845" y="5393201"/>
+              <a:ext cx="75116" cy="75116"/>
             </a:xfrm>
             <a:prstGeom prst="ellipse">
               <a:avLst/>
@@ -19104,8 +19104,8 @@
           </p:nvSpPr>
           <p:spPr>
             <a:xfrm>
-              <a:off x="7904925" y="6698696"/>
-              <a:ext cx="77571" cy="77571"/>
+              <a:off x="6377980" y="5713956"/>
+              <a:ext cx="75116" cy="75116"/>
             </a:xfrm>
             <a:prstGeom prst="ellipse">
               <a:avLst/>
@@ -19130,8 +19130,8 @@
           </p:nvSpPr>
           <p:spPr>
             <a:xfrm>
-              <a:off x="7603610" y="6284765"/>
-              <a:ext cx="77571" cy="77571"/>
+              <a:off x="6411556" y="5363646"/>
+              <a:ext cx="75116" cy="75116"/>
             </a:xfrm>
             <a:prstGeom prst="ellipse">
               <a:avLst/>
@@ -19156,8 +19156,8 @@
           </p:nvSpPr>
           <p:spPr>
             <a:xfrm>
-              <a:off x="7447744" y="6169274"/>
-              <a:ext cx="77571" cy="77571"/>
+              <a:off x="6769054" y="5263842"/>
+              <a:ext cx="75116" cy="75116"/>
             </a:xfrm>
             <a:prstGeom prst="ellipse">
               <a:avLst/>
@@ -19182,8 +19182,8 @@
           </p:nvSpPr>
           <p:spPr>
             <a:xfrm>
-              <a:off x="7456971" y="6196879"/>
-              <a:ext cx="77571" cy="77571"/>
+              <a:off x="6697514" y="5288395"/>
+              <a:ext cx="75116" cy="75116"/>
             </a:xfrm>
             <a:prstGeom prst="ellipse">
               <a:avLst/>
@@ -19208,8 +19208,8 @@
           </p:nvSpPr>
           <p:spPr>
             <a:xfrm>
-              <a:off x="7858871" y="6512328"/>
-              <a:ext cx="77571" cy="77571"/>
+              <a:off x="6446277" y="5555629"/>
+              <a:ext cx="75116" cy="75116"/>
             </a:xfrm>
             <a:prstGeom prst="ellipse">
               <a:avLst/>
@@ -19234,8 +19234,8 @@
           </p:nvSpPr>
           <p:spPr>
             <a:xfrm>
-              <a:off x="7578617" y="6583917"/>
-              <a:ext cx="77571" cy="77571"/>
+              <a:off x="6518941" y="5616911"/>
+              <a:ext cx="75116" cy="75116"/>
             </a:xfrm>
             <a:prstGeom prst="ellipse">
               <a:avLst/>
@@ -19260,42 +19260,42 @@
           </p:nvSpPr>
           <p:spPr>
             <a:xfrm>
-              <a:off x="5114166" y="6194864"/>
-              <a:ext cx="2620530" cy="334721"/>
+              <a:off x="4507888" y="5290534"/>
+              <a:ext cx="2104877" cy="284349"/>
             </a:xfrm>
             <a:custGeom>
               <a:avLst/>
               <a:pathLst>
-                <a:path w="2620530" h="334721">
+                <a:path w="2104877" h="284349">
                   <a:moveTo>
                     <a:pt x="0" y="0"/>
                   </a:moveTo>
                   <a:lnTo>
-                    <a:pt x="1384480" y="68126"/>
+                    <a:pt x="1112050" y="57873"/>
                   </a:lnTo>
                   <a:lnTo>
-                    <a:pt x="1747020" y="66483"/>
+                    <a:pt x="1403251" y="56478"/>
                   </a:lnTo>
                   <a:lnTo>
-                    <a:pt x="2257991" y="49158"/>
+                    <a:pt x="1813676" y="41760"/>
                   </a:lnTo>
                   <a:lnTo>
-                    <a:pt x="2620530" y="29534"/>
+                    <a:pt x="2104877" y="25089"/>
                   </a:lnTo>
                   <a:lnTo>
-                    <a:pt x="2620530" y="324583"/>
+                    <a:pt x="2104877" y="275737"/>
                   </a:lnTo>
                   <a:lnTo>
-                    <a:pt x="2257991" y="302275"/>
+                    <a:pt x="1813676" y="256786"/>
                   </a:lnTo>
                   <a:lnTo>
-                    <a:pt x="1747020" y="281168"/>
+                    <a:pt x="1403251" y="238855"/>
                   </a:lnTo>
                   <a:lnTo>
-                    <a:pt x="1384480" y="276842"/>
+                    <a:pt x="1112050" y="235180"/>
                   </a:lnTo>
                   <a:lnTo>
-                    <a:pt x="0" y="334721"/>
+                    <a:pt x="0" y="284349"/>
                   </a:lnTo>
                   <a:close/>
                 </a:path>
@@ -19321,27 +19321,27 @@
           </p:nvSpPr>
           <p:spPr>
             <a:xfrm>
-              <a:off x="5114166" y="6194864"/>
-              <a:ext cx="2620530" cy="68126"/>
+              <a:off x="4507888" y="5290534"/>
+              <a:ext cx="2104877" cy="57873"/>
             </a:xfrm>
             <a:custGeom>
               <a:avLst/>
               <a:pathLst>
-                <a:path w="2620530" h="68126">
+                <a:path w="2104877" h="57873">
                   <a:moveTo>
                     <a:pt x="0" y="0"/>
                   </a:moveTo>
                   <a:lnTo>
-                    <a:pt x="1384480" y="68126"/>
+                    <a:pt x="1112050" y="57873"/>
                   </a:lnTo>
                   <a:lnTo>
-                    <a:pt x="1747020" y="66483"/>
+                    <a:pt x="1403251" y="56478"/>
                   </a:lnTo>
                   <a:lnTo>
-                    <a:pt x="2257991" y="49158"/>
+                    <a:pt x="1813676" y="41760"/>
                   </a:lnTo>
                   <a:lnTo>
-                    <a:pt x="2620530" y="29534"/>
+                    <a:pt x="2104877" y="25089"/>
                   </a:lnTo>
                 </a:path>
               </a:pathLst>
@@ -19361,27 +19361,27 @@
           </p:nvSpPr>
           <p:spPr>
             <a:xfrm>
-              <a:off x="5114166" y="6471706"/>
-              <a:ext cx="2620530" cy="57878"/>
+              <a:off x="4507888" y="5525715"/>
+              <a:ext cx="2104877" cy="49168"/>
             </a:xfrm>
             <a:custGeom>
               <a:avLst/>
               <a:pathLst>
-                <a:path w="2620530" h="57878">
+                <a:path w="2104877" h="49168">
                   <a:moveTo>
-                    <a:pt x="2620530" y="47740"/>
+                    <a:pt x="2104877" y="40556"/>
                   </a:moveTo>
                   <a:lnTo>
-                    <a:pt x="2257991" y="25433"/>
+                    <a:pt x="1813676" y="21606"/>
                   </a:lnTo>
                   <a:lnTo>
-                    <a:pt x="1747020" y="4326"/>
+                    <a:pt x="1403251" y="3675"/>
                   </a:lnTo>
                   <a:lnTo>
-                    <a:pt x="1384480" y="0"/>
+                    <a:pt x="1112050" y="0"/>
                   </a:lnTo>
                   <a:lnTo>
-                    <a:pt x="0" y="57878"/>
+                    <a:pt x="0" y="49168"/>
                   </a:lnTo>
                 </a:path>
               </a:pathLst>
@@ -19401,27 +19401,27 @@
           </p:nvSpPr>
           <p:spPr>
             <a:xfrm>
-              <a:off x="5114166" y="6362224"/>
-              <a:ext cx="2620530" cy="9698"/>
+              <a:off x="4507888" y="5432709"/>
+              <a:ext cx="2104877" cy="8238"/>
             </a:xfrm>
             <a:custGeom>
               <a:avLst/>
               <a:pathLst>
-                <a:path w="2620530" h="9698">
+                <a:path w="2104877" h="8238">
                   <a:moveTo>
                     <a:pt x="0" y="0"/>
                   </a:moveTo>
                   <a:lnTo>
-                    <a:pt x="1384480" y="5123"/>
+                    <a:pt x="1112050" y="4352"/>
                   </a:lnTo>
                   <a:lnTo>
-                    <a:pt x="1747020" y="6465"/>
+                    <a:pt x="1403251" y="5492"/>
                   </a:lnTo>
                   <a:lnTo>
-                    <a:pt x="2257991" y="8356"/>
+                    <a:pt x="1813676" y="7098"/>
                   </a:lnTo>
                   <a:lnTo>
-                    <a:pt x="2620530" y="9698"/>
+                    <a:pt x="2104877" y="8238"/>
                   </a:lnTo>
                 </a:path>
               </a:pathLst>
@@ -19450,7 +19450,7 @@
           </p:nvSpPr>
           <p:spPr>
             <a:xfrm>
-              <a:off x="7255002" y="5603204"/>
+              <a:off x="6133071" y="4769398"/>
               <a:ext cx="479694" cy="82021"/>
             </a:xfrm>
             <a:prstGeom prst="rect">
@@ -19496,8 +19496,8 @@
           </p:nvSpPr>
           <p:spPr>
             <a:xfrm>
-              <a:off x="4837970" y="5392761"/>
-              <a:ext cx="3290409" cy="1599078"/>
+              <a:off x="4186587" y="4608644"/>
+              <a:ext cx="2746591" cy="1359782"/>
             </a:xfrm>
             <a:prstGeom prst="rect">
               <a:avLst/>
@@ -19517,15 +19517,15 @@
           </p:nvSpPr>
           <p:spPr>
             <a:xfrm>
-              <a:off x="4837970" y="5392761"/>
-              <a:ext cx="0" cy="1599078"/>
+              <a:off x="4186587" y="4608644"/>
+              <a:ext cx="0" cy="1359782"/>
             </a:xfrm>
             <a:custGeom>
               <a:avLst/>
               <a:pathLst>
-                <a:path w="0" h="1599078">
+                <a:path w="0" h="1359782">
                   <a:moveTo>
-                    <a:pt x="0" y="1599078"/>
+                    <a:pt x="0" y="1359782"/>
                   </a:moveTo>
                   <a:lnTo>
                     <a:pt x="0" y="0"/>
@@ -19557,18 +19557,18 @@
           </p:nvSpPr>
           <p:spPr>
             <a:xfrm>
-              <a:off x="4800012" y="6903129"/>
-              <a:ext cx="37957" cy="0"/>
+              <a:off x="4158119" y="5892213"/>
+              <a:ext cx="28468" cy="0"/>
             </a:xfrm>
             <a:custGeom>
               <a:avLst/>
               <a:pathLst>
-                <a:path w="37957" h="0">
+                <a:path w="28468" h="0">
                   <a:moveTo>
                     <a:pt x="0" y="0"/>
                   </a:moveTo>
                   <a:lnTo>
-                    <a:pt x="37957" y="0"/>
+                    <a:pt x="28468" y="0"/>
                   </a:lnTo>
                 </a:path>
               </a:pathLst>
@@ -19597,18 +19597,18 @@
           </p:nvSpPr>
           <p:spPr>
             <a:xfrm>
-              <a:off x="4800012" y="6611414"/>
-              <a:ext cx="37957" cy="0"/>
+              <a:off x="4158119" y="5644398"/>
+              <a:ext cx="28468" cy="0"/>
             </a:xfrm>
             <a:custGeom>
               <a:avLst/>
               <a:pathLst>
-                <a:path w="37957" h="0">
+                <a:path w="28468" h="0">
                   <a:moveTo>
                     <a:pt x="0" y="0"/>
                   </a:moveTo>
                   <a:lnTo>
-                    <a:pt x="37957" y="0"/>
+                    <a:pt x="28468" y="0"/>
                   </a:lnTo>
                 </a:path>
               </a:pathLst>
@@ -19637,18 +19637,18 @@
           </p:nvSpPr>
           <p:spPr>
             <a:xfrm>
-              <a:off x="4800012" y="6319699"/>
-              <a:ext cx="37957" cy="0"/>
+              <a:off x="4158119" y="5396583"/>
+              <a:ext cx="28468" cy="0"/>
             </a:xfrm>
             <a:custGeom>
               <a:avLst/>
               <a:pathLst>
-                <a:path w="37957" h="0">
+                <a:path w="28468" h="0">
                   <a:moveTo>
                     <a:pt x="0" y="0"/>
                   </a:moveTo>
                   <a:lnTo>
-                    <a:pt x="37957" y="0"/>
+                    <a:pt x="28468" y="0"/>
                   </a:lnTo>
                 </a:path>
               </a:pathLst>
@@ -19677,18 +19677,18 @@
           </p:nvSpPr>
           <p:spPr>
             <a:xfrm>
-              <a:off x="4800012" y="6027984"/>
-              <a:ext cx="37957" cy="0"/>
+              <a:off x="4158119" y="5148768"/>
+              <a:ext cx="28468" cy="0"/>
             </a:xfrm>
             <a:custGeom>
               <a:avLst/>
               <a:pathLst>
-                <a:path w="37957" h="0">
+                <a:path w="28468" h="0">
                   <a:moveTo>
                     <a:pt x="0" y="0"/>
                   </a:moveTo>
                   <a:lnTo>
-                    <a:pt x="37957" y="0"/>
+                    <a:pt x="28468" y="0"/>
                   </a:lnTo>
                 </a:path>
               </a:pathLst>
@@ -19717,18 +19717,18 @@
           </p:nvSpPr>
           <p:spPr>
             <a:xfrm>
-              <a:off x="4800012" y="5736270"/>
-              <a:ext cx="37957" cy="0"/>
+              <a:off x="4158119" y="4900953"/>
+              <a:ext cx="28468" cy="0"/>
             </a:xfrm>
             <a:custGeom>
               <a:avLst/>
               <a:pathLst>
-                <a:path w="37957" h="0">
+                <a:path w="28468" h="0">
                   <a:moveTo>
                     <a:pt x="0" y="0"/>
                   </a:moveTo>
                   <a:lnTo>
-                    <a:pt x="37957" y="0"/>
+                    <a:pt x="28468" y="0"/>
                   </a:lnTo>
                 </a:path>
               </a:pathLst>
@@ -19757,18 +19757,18 @@
           </p:nvSpPr>
           <p:spPr>
             <a:xfrm>
-              <a:off x="4800012" y="5444555"/>
-              <a:ext cx="37957" cy="0"/>
+              <a:off x="4158119" y="4653138"/>
+              <a:ext cx="28468" cy="0"/>
             </a:xfrm>
             <a:custGeom>
               <a:avLst/>
               <a:pathLst>
-                <a:path w="37957" h="0">
+                <a:path w="28468" h="0">
                   <a:moveTo>
                     <a:pt x="0" y="0"/>
                   </a:moveTo>
                   <a:lnTo>
-                    <a:pt x="37957" y="0"/>
+                    <a:pt x="28468" y="0"/>
                   </a:lnTo>
                 </a:path>
               </a:pathLst>
@@ -19797,18 +19797,18 @@
           </p:nvSpPr>
           <p:spPr>
             <a:xfrm>
-              <a:off x="4837970" y="6991840"/>
-              <a:ext cx="3290409" cy="0"/>
+              <a:off x="4186587" y="5968427"/>
+              <a:ext cx="2746591" cy="0"/>
             </a:xfrm>
             <a:custGeom>
               <a:avLst/>
               <a:pathLst>
-                <a:path w="3290409" h="0">
+                <a:path w="2746591" h="0">
                   <a:moveTo>
                     <a:pt x="0" y="0"/>
                   </a:moveTo>
                   <a:lnTo>
-                    <a:pt x="3290409" y="0"/>
+                    <a:pt x="2746591" y="0"/>
                   </a:lnTo>
                 </a:path>
               </a:pathLst>
@@ -19837,15 +19837,15 @@
           </p:nvSpPr>
           <p:spPr>
             <a:xfrm>
-              <a:off x="5114166" y="6991840"/>
-              <a:ext cx="0" cy="37957"/>
+              <a:off x="4507888" y="5968427"/>
+              <a:ext cx="0" cy="28468"/>
             </a:xfrm>
             <a:custGeom>
               <a:avLst/>
               <a:pathLst>
-                <a:path w="0" h="37957">
+                <a:path w="0" h="28468">
                   <a:moveTo>
-                    <a:pt x="0" y="37957"/>
+                    <a:pt x="0" y="28468"/>
                   </a:moveTo>
                   <a:lnTo>
                     <a:pt x="0" y="0"/>
@@ -19877,15 +19877,15 @@
           </p:nvSpPr>
           <p:spPr>
             <a:xfrm>
-              <a:off x="5987676" y="6991840"/>
-              <a:ext cx="0" cy="37957"/>
+              <a:off x="5209514" y="5968427"/>
+              <a:ext cx="0" cy="28468"/>
             </a:xfrm>
             <a:custGeom>
               <a:avLst/>
               <a:pathLst>
-                <a:path w="0" h="37957">
+                <a:path w="0" h="28468">
                   <a:moveTo>
-                    <a:pt x="0" y="37957"/>
+                    <a:pt x="0" y="28468"/>
                   </a:moveTo>
                   <a:lnTo>
                     <a:pt x="0" y="0"/>
@@ -19917,15 +19917,15 @@
           </p:nvSpPr>
           <p:spPr>
             <a:xfrm>
-              <a:off x="6861186" y="6991840"/>
-              <a:ext cx="0" cy="37957"/>
+              <a:off x="5911140" y="5968427"/>
+              <a:ext cx="0" cy="28468"/>
             </a:xfrm>
             <a:custGeom>
               <a:avLst/>
               <a:pathLst>
-                <a:path w="0" h="37957">
+                <a:path w="0" h="28468">
                   <a:moveTo>
-                    <a:pt x="0" y="37957"/>
+                    <a:pt x="0" y="28468"/>
                   </a:moveTo>
                   <a:lnTo>
                     <a:pt x="0" y="0"/>
@@ -19957,15 +19957,15 @@
           </p:nvSpPr>
           <p:spPr>
             <a:xfrm>
-              <a:off x="7734697" y="6991840"/>
-              <a:ext cx="0" cy="37957"/>
+              <a:off x="6612765" y="5968427"/>
+              <a:ext cx="0" cy="28468"/>
             </a:xfrm>
             <a:custGeom>
               <a:avLst/>
               <a:pathLst>
-                <a:path w="0" h="37957">
+                <a:path w="0" h="28468">
                   <a:moveTo>
-                    <a:pt x="0" y="37957"/>
+                    <a:pt x="0" y="28468"/>
                   </a:moveTo>
                   <a:lnTo>
                     <a:pt x="0" y="0"/>
@@ -19997,8 +19997,8 @@
           </p:nvSpPr>
           <p:spPr>
             <a:xfrm>
-              <a:off x="5075304" y="7060163"/>
-              <a:ext cx="77724" cy="100218"/>
+              <a:off x="4479633" y="6019670"/>
+              <a:ext cx="56509" cy="72877"/>
             </a:xfrm>
             <a:prstGeom prst="rect">
               <a:avLst/>
@@ -20011,7 +20011,7 @@
             <a:p>
               <a:pPr algn="l" marL="0" marR="0" indent="0">
                 <a:lnSpc>
-                  <a:spcPts val="1100"/>
+                  <a:spcPts val="800"/>
                 </a:lnSpc>
                 <a:spcBef>
                   <a:spcPts val="0"/>
@@ -20021,7 +20021,7 @@
                 </a:spcAft>
               </a:pPr>
               <a:r>
-                <a:rPr sz="1100">
+                <a:rPr sz="800">
                   <a:solidFill>
                     <a:srgbClr val="000000">
                       <a:alpha val="100000"/>
@@ -20043,8 +20043,8 @@
           </p:nvSpPr>
           <p:spPr>
             <a:xfrm>
-              <a:off x="5948814" y="7060163"/>
-              <a:ext cx="77724" cy="100218"/>
+              <a:off x="5181259" y="6019670"/>
+              <a:ext cx="56509" cy="72877"/>
             </a:xfrm>
             <a:prstGeom prst="rect">
               <a:avLst/>
@@ -20057,7 +20057,7 @@
             <a:p>
               <a:pPr algn="l" marL="0" marR="0" indent="0">
                 <a:lnSpc>
-                  <a:spcPts val="1100"/>
+                  <a:spcPts val="800"/>
                 </a:lnSpc>
                 <a:spcBef>
                   <a:spcPts val="0"/>
@@ -20067,7 +20067,7 @@
                 </a:spcAft>
               </a:pPr>
               <a:r>
-                <a:rPr sz="1100">
+                <a:rPr sz="800">
                   <a:solidFill>
                     <a:srgbClr val="000000">
                       <a:alpha val="100000"/>
@@ -20089,8 +20089,8 @@
           </p:nvSpPr>
           <p:spPr>
             <a:xfrm>
-              <a:off x="6822324" y="7060163"/>
-              <a:ext cx="77724" cy="100218"/>
+              <a:off x="5882885" y="6019670"/>
+              <a:ext cx="56509" cy="72877"/>
             </a:xfrm>
             <a:prstGeom prst="rect">
               <a:avLst/>
@@ -20103,7 +20103,7 @@
             <a:p>
               <a:pPr algn="l" marL="0" marR="0" indent="0">
                 <a:lnSpc>
-                  <a:spcPts val="1100"/>
+                  <a:spcPts val="800"/>
                 </a:lnSpc>
                 <a:spcBef>
                   <a:spcPts val="0"/>
@@ -20113,7 +20113,7 @@
                 </a:spcAft>
               </a:pPr>
               <a:r>
-                <a:rPr sz="1100">
+                <a:rPr sz="800">
                   <a:solidFill>
                     <a:srgbClr val="000000">
                       <a:alpha val="100000"/>
@@ -20135,8 +20135,8 @@
           </p:nvSpPr>
           <p:spPr>
             <a:xfrm>
-              <a:off x="7695835" y="7060163"/>
-              <a:ext cx="77724" cy="100218"/>
+              <a:off x="6584510" y="6019670"/>
+              <a:ext cx="56509" cy="72877"/>
             </a:xfrm>
             <a:prstGeom prst="rect">
               <a:avLst/>
@@ -20149,7 +20149,7 @@
             <a:p>
               <a:pPr algn="l" marL="0" marR="0" indent="0">
                 <a:lnSpc>
-                  <a:spcPts val="1100"/>
+                  <a:spcPts val="800"/>
                 </a:lnSpc>
                 <a:spcBef>
                   <a:spcPts val="0"/>
@@ -20159,7 +20159,7 @@
                 </a:spcAft>
               </a:pPr>
               <a:r>
-                <a:rPr sz="1100">
+                <a:rPr sz="800">
                   <a:solidFill>
                     <a:srgbClr val="000000">
                       <a:alpha val="100000"/>
@@ -20181,8 +20181,8 @@
           </p:nvSpPr>
           <p:spPr>
             <a:xfrm>
-              <a:off x="6116134" y="7273028"/>
-              <a:ext cx="734080" cy="118872"/>
+              <a:off x="5277471" y="6177306"/>
+              <a:ext cx="564824" cy="91440"/>
             </a:xfrm>
             <a:prstGeom prst="rect">
               <a:avLst/>
@@ -20195,7 +20195,7 @@
             <a:p>
               <a:pPr algn="l" marL="0" marR="0" indent="0">
                 <a:lnSpc>
-                  <a:spcPts val="1300"/>
+                  <a:spcPts val="1000"/>
                 </a:lnSpc>
                 <a:spcBef>
                   <a:spcPts val="0"/>
@@ -20205,7 +20205,7 @@
                 </a:spcAft>
               </a:pPr>
               <a:r>
-                <a:rPr sz="1300" b="1">
+                <a:rPr sz="1000" b="1">
                   <a:solidFill>
                     <a:srgbClr val="000000">
                       <a:alpha val="100000"/>
@@ -20227,8 +20227,8 @@
           </p:nvSpPr>
           <p:spPr>
             <a:xfrm>
-              <a:off x="4837970" y="5149602"/>
-              <a:ext cx="1194937" cy="127924"/>
+              <a:off x="4186587" y="4432104"/>
+              <a:ext cx="854049" cy="91440"/>
             </a:xfrm>
             <a:prstGeom prst="rect">
               <a:avLst/>
@@ -20241,7 +20241,7 @@
             <a:p>
               <a:pPr algn="l" marL="0" marR="0" indent="0">
                 <a:lnSpc>
-                  <a:spcPts val="1400"/>
+                  <a:spcPts val="1000"/>
                 </a:lnSpc>
                 <a:spcBef>
                   <a:spcPts val="0"/>
@@ -20251,7 +20251,7 @@
                 </a:spcAft>
               </a:pPr>
               <a:r>
-                <a:rPr sz="1400" b="1">
+                <a:rPr sz="1000" b="1">
                   <a:solidFill>
                     <a:srgbClr val="000000">
                       <a:alpha val="100000"/>
@@ -20273,8 +20273,8 @@
           </p:nvSpPr>
           <p:spPr>
             <a:xfrm>
-              <a:off x="2083471" y="7523781"/>
-              <a:ext cx="2615321" cy="655208"/>
+              <a:off x="1889186" y="6402291"/>
+              <a:ext cx="2162967" cy="581497"/>
             </a:xfrm>
             <a:prstGeom prst="rect">
               <a:avLst/>
@@ -20299,8 +20299,8 @@
           </p:nvSpPr>
           <p:spPr>
             <a:xfrm>
-              <a:off x="3103050" y="7540606"/>
-              <a:ext cx="576163" cy="109728"/>
+              <a:off x="2754643" y="6414956"/>
+              <a:ext cx="432054" cy="82296"/>
             </a:xfrm>
             <a:prstGeom prst="rect">
               <a:avLst/>
@@ -20313,7 +20313,7 @@
             <a:p>
               <a:pPr algn="l" marL="0" marR="0" indent="0">
                 <a:lnSpc>
-                  <a:spcPts val="1200"/>
+                  <a:spcPts val="900"/>
                 </a:lnSpc>
                 <a:spcBef>
                   <a:spcPts val="0"/>
@@ -20323,7 +20323,7 @@
                 </a:spcAft>
               </a:pPr>
               <a:r>
-                <a:rPr sz="1200" b="1">
+                <a:rPr sz="900" b="1">
                   <a:solidFill>
                     <a:srgbClr val="000000">
                       <a:alpha val="100000"/>
@@ -20345,8 +20345,8 @@
           </p:nvSpPr>
           <p:spPr>
             <a:xfrm>
-              <a:off x="2083471" y="7743074"/>
-              <a:ext cx="179999" cy="179999"/>
+              <a:off x="1889186" y="6566853"/>
+              <a:ext cx="180000" cy="179999"/>
             </a:xfrm>
             <a:prstGeom prst="rect">
               <a:avLst/>
@@ -20371,8 +20371,8 @@
           </p:nvSpPr>
           <p:spPr>
             <a:xfrm>
-              <a:off x="2134685" y="7794288"/>
-              <a:ext cx="77571" cy="77571"/>
+              <a:off x="1941627" y="6619294"/>
+              <a:ext cx="75116" cy="75116"/>
             </a:xfrm>
             <a:prstGeom prst="ellipse">
               <a:avLst/>
@@ -20397,8 +20397,8 @@
           </p:nvSpPr>
           <p:spPr>
             <a:xfrm>
-              <a:off x="2083471" y="7998989"/>
-              <a:ext cx="179999" cy="179999"/>
+              <a:off x="1889186" y="6803789"/>
+              <a:ext cx="180000" cy="180000"/>
             </a:xfrm>
             <a:prstGeom prst="rect">
               <a:avLst/>
@@ -20423,8 +20423,8 @@
           </p:nvSpPr>
           <p:spPr>
             <a:xfrm>
-              <a:off x="2134685" y="8050204"/>
-              <a:ext cx="77571" cy="77571"/>
+              <a:off x="1941627" y="6856231"/>
+              <a:ext cx="75116" cy="75116"/>
             </a:xfrm>
             <a:prstGeom prst="ellipse">
               <a:avLst/>
@@ -20449,8 +20449,8 @@
           </p:nvSpPr>
           <p:spPr>
             <a:xfrm>
-              <a:off x="2632563" y="7743074"/>
-              <a:ext cx="179999" cy="179999"/>
+              <a:off x="2341067" y="6566853"/>
+              <a:ext cx="180000" cy="179999"/>
             </a:xfrm>
             <a:prstGeom prst="rect">
               <a:avLst/>
@@ -20475,8 +20475,8 @@
           </p:nvSpPr>
           <p:spPr>
             <a:xfrm>
-              <a:off x="2683777" y="7794288"/>
-              <a:ext cx="77571" cy="77571"/>
+              <a:off x="2393509" y="6619294"/>
+              <a:ext cx="75116" cy="75116"/>
             </a:xfrm>
             <a:prstGeom prst="ellipse">
               <a:avLst/>
@@ -20501,8 +20501,8 @@
           </p:nvSpPr>
           <p:spPr>
             <a:xfrm>
-              <a:off x="2632563" y="7998989"/>
-              <a:ext cx="179999" cy="179999"/>
+              <a:off x="2341067" y="6803789"/>
+              <a:ext cx="180000" cy="180000"/>
             </a:xfrm>
             <a:prstGeom prst="rect">
               <a:avLst/>
@@ -20527,8 +20527,8 @@
           </p:nvSpPr>
           <p:spPr>
             <a:xfrm>
-              <a:off x="2683777" y="8050204"/>
-              <a:ext cx="77571" cy="77571"/>
+              <a:off x="2393509" y="6856231"/>
+              <a:ext cx="75116" cy="75116"/>
             </a:xfrm>
             <a:prstGeom prst="ellipse">
               <a:avLst/>
@@ -20553,7 +20553,7 @@
           </p:nvSpPr>
           <p:spPr>
             <a:xfrm>
-              <a:off x="3173883" y="7743074"/>
+              <a:off x="2787279" y="6566853"/>
               <a:ext cx="179999" cy="179999"/>
             </a:xfrm>
             <a:prstGeom prst="rect">
@@ -20579,8 +20579,8 @@
           </p:nvSpPr>
           <p:spPr>
             <a:xfrm>
-              <a:off x="3225097" y="7794288"/>
-              <a:ext cx="77571" cy="77571"/>
+              <a:off x="2839721" y="6619294"/>
+              <a:ext cx="75116" cy="75116"/>
             </a:xfrm>
             <a:prstGeom prst="ellipse">
               <a:avLst/>
@@ -20605,8 +20605,8 @@
           </p:nvSpPr>
           <p:spPr>
             <a:xfrm>
-              <a:off x="3173883" y="7998989"/>
-              <a:ext cx="179999" cy="179999"/>
+              <a:off x="2787279" y="6803789"/>
+              <a:ext cx="179999" cy="180000"/>
             </a:xfrm>
             <a:prstGeom prst="rect">
               <a:avLst/>
@@ -20631,8 +20631,8 @@
           </p:nvSpPr>
           <p:spPr>
             <a:xfrm>
-              <a:off x="3225097" y="8050204"/>
-              <a:ext cx="77571" cy="77571"/>
+              <a:off x="2839721" y="6856231"/>
+              <a:ext cx="75116" cy="75116"/>
             </a:xfrm>
             <a:prstGeom prst="ellipse">
               <a:avLst/>
@@ -20657,8 +20657,8 @@
           </p:nvSpPr>
           <p:spPr>
             <a:xfrm>
-              <a:off x="3699749" y="7743074"/>
-              <a:ext cx="180000" cy="179999"/>
+              <a:off x="3222244" y="6566853"/>
+              <a:ext cx="179999" cy="179999"/>
             </a:xfrm>
             <a:prstGeom prst="rect">
               <a:avLst/>
@@ -20683,8 +20683,8 @@
           </p:nvSpPr>
           <p:spPr>
             <a:xfrm>
-              <a:off x="3750963" y="7794288"/>
-              <a:ext cx="77571" cy="77571"/>
+              <a:off x="3274686" y="6619294"/>
+              <a:ext cx="75116" cy="75116"/>
             </a:xfrm>
             <a:prstGeom prst="ellipse">
               <a:avLst/>
@@ -20709,8 +20709,8 @@
           </p:nvSpPr>
           <p:spPr>
             <a:xfrm>
-              <a:off x="3699749" y="7998989"/>
-              <a:ext cx="180000" cy="179999"/>
+              <a:off x="3222244" y="6803789"/>
+              <a:ext cx="179999" cy="180000"/>
             </a:xfrm>
             <a:prstGeom prst="rect">
               <a:avLst/>
@@ -20735,8 +20735,8 @@
           </p:nvSpPr>
           <p:spPr>
             <a:xfrm>
-              <a:off x="3750963" y="8050204"/>
-              <a:ext cx="77571" cy="77571"/>
+              <a:off x="3274686" y="6856231"/>
+              <a:ext cx="75116" cy="75116"/>
             </a:xfrm>
             <a:prstGeom prst="ellipse">
               <a:avLst/>
@@ -20761,7 +20761,7 @@
           </p:nvSpPr>
           <p:spPr>
             <a:xfrm>
-              <a:off x="4241069" y="7743074"/>
+              <a:off x="3668456" y="6566853"/>
               <a:ext cx="180000" cy="179999"/>
             </a:xfrm>
             <a:prstGeom prst="rect">
@@ -20787,8 +20787,8 @@
           </p:nvSpPr>
           <p:spPr>
             <a:xfrm>
-              <a:off x="4292283" y="7794288"/>
-              <a:ext cx="77571" cy="77571"/>
+              <a:off x="3720898" y="6619294"/>
+              <a:ext cx="75116" cy="75116"/>
             </a:xfrm>
             <a:prstGeom prst="ellipse">
               <a:avLst/>
@@ -20813,8 +20813,8 @@
           </p:nvSpPr>
           <p:spPr>
             <a:xfrm>
-              <a:off x="4241069" y="7998989"/>
-              <a:ext cx="180000" cy="179999"/>
+              <a:off x="3668456" y="6803789"/>
+              <a:ext cx="180000" cy="180000"/>
             </a:xfrm>
             <a:prstGeom prst="rect">
               <a:avLst/>
@@ -20839,8 +20839,8 @@
           </p:nvSpPr>
           <p:spPr>
             <a:xfrm>
-              <a:off x="4292283" y="8050204"/>
-              <a:ext cx="77571" cy="77571"/>
+              <a:off x="3720898" y="6856231"/>
+              <a:ext cx="75116" cy="75116"/>
             </a:xfrm>
             <a:prstGeom prst="ellipse">
               <a:avLst/>
@@ -20865,8 +20865,8 @@
           </p:nvSpPr>
           <p:spPr>
             <a:xfrm>
-              <a:off x="2339386" y="7782965"/>
-              <a:ext cx="209489" cy="100218"/>
+              <a:off x="2126122" y="6620414"/>
+              <a:ext cx="152339" cy="72877"/>
             </a:xfrm>
             <a:prstGeom prst="rect">
               <a:avLst/>
@@ -20879,7 +20879,7 @@
             <a:p>
               <a:pPr algn="l" marL="0" marR="0" indent="0">
                 <a:lnSpc>
-                  <a:spcPts val="1100"/>
+                  <a:spcPts val="800"/>
                 </a:lnSpc>
                 <a:spcBef>
                   <a:spcPts val="0"/>
@@ -20889,7 +20889,7 @@
                 </a:spcAft>
               </a:pPr>
               <a:r>
-                <a:rPr sz="1100" i="1">
+                <a:rPr sz="800" i="1">
                   <a:solidFill>
                     <a:srgbClr val="000000">
                       <a:alpha val="100000"/>
@@ -20911,8 +20911,8 @@
           </p:nvSpPr>
           <p:spPr>
             <a:xfrm>
-              <a:off x="2339386" y="8038880"/>
-              <a:ext cx="217261" cy="100218"/>
+              <a:off x="2126122" y="6857350"/>
+              <a:ext cx="158008" cy="72877"/>
             </a:xfrm>
             <a:prstGeom prst="rect">
               <a:avLst/>
@@ -20925,7 +20925,7 @@
             <a:p>
               <a:pPr algn="l" marL="0" marR="0" indent="0">
                 <a:lnSpc>
-                  <a:spcPts val="1100"/>
+                  <a:spcPts val="800"/>
                 </a:lnSpc>
                 <a:spcBef>
                   <a:spcPts val="0"/>
@@ -20935,7 +20935,7 @@
                 </a:spcAft>
               </a:pPr>
               <a:r>
-                <a:rPr sz="1100" i="1">
+                <a:rPr sz="800" i="1">
                   <a:solidFill>
                     <a:srgbClr val="000000">
                       <a:alpha val="100000"/>
@@ -20957,8 +20957,8 @@
           </p:nvSpPr>
           <p:spPr>
             <a:xfrm>
-              <a:off x="2888478" y="7782965"/>
-              <a:ext cx="194035" cy="100218"/>
+              <a:off x="2578004" y="6620414"/>
+              <a:ext cx="141091" cy="72877"/>
             </a:xfrm>
             <a:prstGeom prst="rect">
               <a:avLst/>
@@ -20971,7 +20971,7 @@
             <a:p>
               <a:pPr algn="l" marL="0" marR="0" indent="0">
                 <a:lnSpc>
-                  <a:spcPts val="1100"/>
+                  <a:spcPts val="800"/>
                 </a:lnSpc>
                 <a:spcBef>
                   <a:spcPts val="0"/>
@@ -20981,7 +20981,7 @@
                 </a:spcAft>
               </a:pPr>
               <a:r>
-                <a:rPr sz="1100" i="1">
+                <a:rPr sz="800" i="1">
                   <a:solidFill>
                     <a:srgbClr val="000000">
                       <a:alpha val="100000"/>
@@ -21003,8 +21003,8 @@
           </p:nvSpPr>
           <p:spPr>
             <a:xfrm>
-              <a:off x="2888478" y="8038880"/>
-              <a:ext cx="209489" cy="100218"/>
+              <a:off x="2578004" y="6857350"/>
+              <a:ext cx="152339" cy="72877"/>
             </a:xfrm>
             <a:prstGeom prst="rect">
               <a:avLst/>
@@ -21017,7 +21017,7 @@
             <a:p>
               <a:pPr algn="l" marL="0" marR="0" indent="0">
                 <a:lnSpc>
-                  <a:spcPts val="1100"/>
+                  <a:spcPts val="800"/>
                 </a:lnSpc>
                 <a:spcBef>
                   <a:spcPts val="0"/>
@@ -21027,7 +21027,7 @@
                 </a:spcAft>
               </a:pPr>
               <a:r>
-                <a:rPr sz="1100" i="1">
+                <a:rPr sz="800" i="1">
                   <a:solidFill>
                     <a:srgbClr val="000000">
                       <a:alpha val="100000"/>
@@ -21049,8 +21049,8 @@
           </p:nvSpPr>
           <p:spPr>
             <a:xfrm>
-              <a:off x="3429798" y="7782965"/>
-              <a:ext cx="194035" cy="100218"/>
+              <a:off x="3024216" y="6620414"/>
+              <a:ext cx="141091" cy="72877"/>
             </a:xfrm>
             <a:prstGeom prst="rect">
               <a:avLst/>
@@ -21063,7 +21063,7 @@
             <a:p>
               <a:pPr algn="l" marL="0" marR="0" indent="0">
                 <a:lnSpc>
-                  <a:spcPts val="1100"/>
+                  <a:spcPts val="800"/>
                 </a:lnSpc>
                 <a:spcBef>
                   <a:spcPts val="0"/>
@@ -21073,7 +21073,7 @@
                 </a:spcAft>
               </a:pPr>
               <a:r>
-                <a:rPr sz="1100" i="1">
+                <a:rPr sz="800" i="1">
                   <a:solidFill>
                     <a:srgbClr val="000000">
                       <a:alpha val="100000"/>
@@ -21095,8 +21095,8 @@
           </p:nvSpPr>
           <p:spPr>
             <a:xfrm>
-              <a:off x="3429798" y="8038880"/>
-              <a:ext cx="194035" cy="100218"/>
+              <a:off x="3024216" y="6857350"/>
+              <a:ext cx="141091" cy="72877"/>
             </a:xfrm>
             <a:prstGeom prst="rect">
               <a:avLst/>
@@ -21109,7 +21109,7 @@
             <a:p>
               <a:pPr algn="l" marL="0" marR="0" indent="0">
                 <a:lnSpc>
-                  <a:spcPts val="1100"/>
+                  <a:spcPts val="800"/>
                 </a:lnSpc>
                 <a:spcBef>
                   <a:spcPts val="0"/>
@@ -21119,7 +21119,7 @@
                 </a:spcAft>
               </a:pPr>
               <a:r>
-                <a:rPr sz="1100" i="1">
+                <a:rPr sz="800" i="1">
                   <a:solidFill>
                     <a:srgbClr val="000000">
                       <a:alpha val="100000"/>
@@ -21141,8 +21141,8 @@
           </p:nvSpPr>
           <p:spPr>
             <a:xfrm>
-              <a:off x="3955664" y="7782965"/>
-              <a:ext cx="178582" cy="100218"/>
+              <a:off x="3459181" y="6620414"/>
+              <a:ext cx="129844" cy="72877"/>
             </a:xfrm>
             <a:prstGeom prst="rect">
               <a:avLst/>
@@ -21155,7 +21155,7 @@
             <a:p>
               <a:pPr algn="l" marL="0" marR="0" indent="0">
                 <a:lnSpc>
-                  <a:spcPts val="1100"/>
+                  <a:spcPts val="800"/>
                 </a:lnSpc>
                 <a:spcBef>
                   <a:spcPts val="0"/>
@@ -21165,7 +21165,7 @@
                 </a:spcAft>
               </a:pPr>
               <a:r>
-                <a:rPr sz="1100" i="1">
+                <a:rPr sz="800" i="1">
                   <a:solidFill>
                     <a:srgbClr val="000000">
                       <a:alpha val="100000"/>
@@ -21187,8 +21187,8 @@
           </p:nvSpPr>
           <p:spPr>
             <a:xfrm>
-              <a:off x="3955664" y="8038880"/>
-              <a:ext cx="209489" cy="100218"/>
+              <a:off x="3459181" y="6857350"/>
+              <a:ext cx="152339" cy="72877"/>
             </a:xfrm>
             <a:prstGeom prst="rect">
               <a:avLst/>
@@ -21201,7 +21201,7 @@
             <a:p>
               <a:pPr algn="l" marL="0" marR="0" indent="0">
                 <a:lnSpc>
-                  <a:spcPts val="1100"/>
+                  <a:spcPts val="800"/>
                 </a:lnSpc>
                 <a:spcBef>
                   <a:spcPts val="0"/>
@@ -21211,7 +21211,7 @@
                 </a:spcAft>
               </a:pPr>
               <a:r>
-                <a:rPr sz="1100" i="1">
+                <a:rPr sz="800" i="1">
                   <a:solidFill>
                     <a:srgbClr val="000000">
                       <a:alpha val="100000"/>
@@ -21233,8 +21233,8 @@
           </p:nvSpPr>
           <p:spPr>
             <a:xfrm>
-              <a:off x="4496984" y="7782965"/>
-              <a:ext cx="201808" cy="100218"/>
+              <a:off x="3905393" y="6620414"/>
+              <a:ext cx="146761" cy="72877"/>
             </a:xfrm>
             <a:prstGeom prst="rect">
               <a:avLst/>
@@ -21247,7 +21247,7 @@
             <a:p>
               <a:pPr algn="l" marL="0" marR="0" indent="0">
                 <a:lnSpc>
-                  <a:spcPts val="1100"/>
+                  <a:spcPts val="800"/>
                 </a:lnSpc>
                 <a:spcBef>
                   <a:spcPts val="0"/>
@@ -21257,7 +21257,7 @@
                 </a:spcAft>
               </a:pPr>
               <a:r>
-                <a:rPr sz="1100" i="1">
+                <a:rPr sz="800" i="1">
                   <a:solidFill>
                     <a:srgbClr val="000000">
                       <a:alpha val="100000"/>
@@ -21279,8 +21279,8 @@
           </p:nvSpPr>
           <p:spPr>
             <a:xfrm>
-              <a:off x="4496984" y="8038880"/>
-              <a:ext cx="186354" cy="100218"/>
+              <a:off x="3905393" y="6857350"/>
+              <a:ext cx="135514" cy="72877"/>
             </a:xfrm>
             <a:prstGeom prst="rect">
               <a:avLst/>
@@ -21293,7 +21293,7 @@
             <a:p>
               <a:pPr algn="l" marL="0" marR="0" indent="0">
                 <a:lnSpc>
-                  <a:spcPts val="1100"/>
+                  <a:spcPts val="800"/>
                 </a:lnSpc>
                 <a:spcBef>
                   <a:spcPts val="0"/>
@@ -21303,7 +21303,7 @@
                 </a:spcAft>
               </a:pPr>
               <a:r>
-                <a:rPr sz="1100" i="1">
+                <a:rPr sz="800" i="1">
                   <a:solidFill>
                     <a:srgbClr val="000000">
                       <a:alpha val="100000"/>
@@ -21325,8 +21325,8 @@
           </p:nvSpPr>
           <p:spPr>
             <a:xfrm>
-              <a:off x="4837970" y="7523781"/>
-              <a:ext cx="2615321" cy="655208"/>
+              <a:off x="4191332" y="6402291"/>
+              <a:ext cx="2162967" cy="581497"/>
             </a:xfrm>
             <a:prstGeom prst="rect">
               <a:avLst/>
@@ -21351,8 +21351,8 @@
           </p:nvSpPr>
           <p:spPr>
             <a:xfrm>
-              <a:off x="5857549" y="7540606"/>
-              <a:ext cx="576163" cy="109728"/>
+              <a:off x="5056789" y="6414956"/>
+              <a:ext cx="432054" cy="82296"/>
             </a:xfrm>
             <a:prstGeom prst="rect">
               <a:avLst/>
@@ -21365,7 +21365,7 @@
             <a:p>
               <a:pPr algn="l" marL="0" marR="0" indent="0">
                 <a:lnSpc>
-                  <a:spcPts val="1200"/>
+                  <a:spcPts val="900"/>
                 </a:lnSpc>
                 <a:spcBef>
                   <a:spcPts val="0"/>
@@ -21375,7 +21375,7 @@
                 </a:spcAft>
               </a:pPr>
               <a:r>
-                <a:rPr sz="1200" b="1">
+                <a:rPr sz="900" b="1">
                   <a:solidFill>
                     <a:srgbClr val="000000">
                       <a:alpha val="100000"/>
@@ -21397,7 +21397,7 @@
           </p:nvSpPr>
           <p:spPr>
             <a:xfrm>
-              <a:off x="4837970" y="7743074"/>
+              <a:off x="4191332" y="6566853"/>
               <a:ext cx="180000" cy="179999"/>
             </a:xfrm>
             <a:prstGeom prst="rect">
@@ -21423,8 +21423,8 @@
           </p:nvSpPr>
           <p:spPr>
             <a:xfrm>
-              <a:off x="4889184" y="7794288"/>
-              <a:ext cx="77571" cy="77571"/>
+              <a:off x="4243773" y="6619294"/>
+              <a:ext cx="75116" cy="75116"/>
             </a:xfrm>
             <a:prstGeom prst="ellipse">
               <a:avLst/>
@@ -21449,8 +21449,8 @@
           </p:nvSpPr>
           <p:spPr>
             <a:xfrm>
-              <a:off x="4837970" y="7998989"/>
-              <a:ext cx="180000" cy="179999"/>
+              <a:off x="4191332" y="6803789"/>
+              <a:ext cx="180000" cy="180000"/>
             </a:xfrm>
             <a:prstGeom prst="rect">
               <a:avLst/>
@@ -21475,8 +21475,8 @@
           </p:nvSpPr>
           <p:spPr>
             <a:xfrm>
-              <a:off x="4889184" y="8050204"/>
-              <a:ext cx="77571" cy="77571"/>
+              <a:off x="4243773" y="6856231"/>
+              <a:ext cx="75116" cy="75116"/>
             </a:xfrm>
             <a:prstGeom prst="ellipse">
               <a:avLst/>
@@ -21501,7 +21501,7 @@
           </p:nvSpPr>
           <p:spPr>
             <a:xfrm>
-              <a:off x="5387062" y="7743074"/>
+              <a:off x="4643213" y="6566853"/>
               <a:ext cx="180000" cy="179999"/>
             </a:xfrm>
             <a:prstGeom prst="rect">
@@ -21527,8 +21527,8 @@
           </p:nvSpPr>
           <p:spPr>
             <a:xfrm>
-              <a:off x="5438276" y="7794288"/>
-              <a:ext cx="77571" cy="77571"/>
+              <a:off x="4695655" y="6619294"/>
+              <a:ext cx="75116" cy="75116"/>
             </a:xfrm>
             <a:prstGeom prst="ellipse">
               <a:avLst/>
@@ -21553,8 +21553,8 @@
           </p:nvSpPr>
           <p:spPr>
             <a:xfrm>
-              <a:off x="5387062" y="7998989"/>
-              <a:ext cx="180000" cy="179999"/>
+              <a:off x="4643213" y="6803789"/>
+              <a:ext cx="180000" cy="180000"/>
             </a:xfrm>
             <a:prstGeom prst="rect">
               <a:avLst/>
@@ -21579,8 +21579,8 @@
           </p:nvSpPr>
           <p:spPr>
             <a:xfrm>
-              <a:off x="5438276" y="8050204"/>
-              <a:ext cx="77571" cy="77571"/>
+              <a:off x="4695655" y="6856231"/>
+              <a:ext cx="75116" cy="75116"/>
             </a:xfrm>
             <a:prstGeom prst="ellipse">
               <a:avLst/>
@@ -21605,7 +21605,7 @@
           </p:nvSpPr>
           <p:spPr>
             <a:xfrm>
-              <a:off x="5928382" y="7743074"/>
+              <a:off x="5089425" y="6566853"/>
               <a:ext cx="180000" cy="179999"/>
             </a:xfrm>
             <a:prstGeom prst="rect">
@@ -21631,8 +21631,8 @@
           </p:nvSpPr>
           <p:spPr>
             <a:xfrm>
-              <a:off x="5979596" y="7794288"/>
-              <a:ext cx="77571" cy="77571"/>
+              <a:off x="5141867" y="6619294"/>
+              <a:ext cx="75116" cy="75116"/>
             </a:xfrm>
             <a:prstGeom prst="ellipse">
               <a:avLst/>
@@ -21657,8 +21657,8 @@
           </p:nvSpPr>
           <p:spPr>
             <a:xfrm>
-              <a:off x="5928382" y="7998989"/>
-              <a:ext cx="180000" cy="179999"/>
+              <a:off x="5089425" y="6803789"/>
+              <a:ext cx="180000" cy="180000"/>
             </a:xfrm>
             <a:prstGeom prst="rect">
               <a:avLst/>
@@ -21683,8 +21683,8 @@
           </p:nvSpPr>
           <p:spPr>
             <a:xfrm>
-              <a:off x="5979596" y="8050204"/>
-              <a:ext cx="77571" cy="77571"/>
+              <a:off x="5141867" y="6856231"/>
+              <a:ext cx="75116" cy="75116"/>
             </a:xfrm>
             <a:prstGeom prst="ellipse">
               <a:avLst/>
@@ -21709,7 +21709,7 @@
           </p:nvSpPr>
           <p:spPr>
             <a:xfrm>
-              <a:off x="6454248" y="7743074"/>
+              <a:off x="5524390" y="6566853"/>
               <a:ext cx="180000" cy="179999"/>
             </a:xfrm>
             <a:prstGeom prst="rect">
@@ -21735,8 +21735,8 @@
           </p:nvSpPr>
           <p:spPr>
             <a:xfrm>
-              <a:off x="6505462" y="7794288"/>
-              <a:ext cx="77571" cy="77571"/>
+              <a:off x="5576832" y="6619294"/>
+              <a:ext cx="75116" cy="75116"/>
             </a:xfrm>
             <a:prstGeom prst="ellipse">
               <a:avLst/>
@@ -21761,8 +21761,8 @@
           </p:nvSpPr>
           <p:spPr>
             <a:xfrm>
-              <a:off x="6454248" y="7998989"/>
-              <a:ext cx="180000" cy="179999"/>
+              <a:off x="5524390" y="6803789"/>
+              <a:ext cx="180000" cy="180000"/>
             </a:xfrm>
             <a:prstGeom prst="rect">
               <a:avLst/>
@@ -21787,8 +21787,8 @@
           </p:nvSpPr>
           <p:spPr>
             <a:xfrm>
-              <a:off x="6505462" y="8050204"/>
-              <a:ext cx="77571" cy="77571"/>
+              <a:off x="5576832" y="6856231"/>
+              <a:ext cx="75116" cy="75116"/>
             </a:xfrm>
             <a:prstGeom prst="ellipse">
               <a:avLst/>
@@ -21813,8 +21813,8 @@
           </p:nvSpPr>
           <p:spPr>
             <a:xfrm>
-              <a:off x="6995568" y="7743074"/>
-              <a:ext cx="179999" cy="179999"/>
+              <a:off x="5970602" y="6566853"/>
+              <a:ext cx="180000" cy="179999"/>
             </a:xfrm>
             <a:prstGeom prst="rect">
               <a:avLst/>
@@ -21839,8 +21839,8 @@
           </p:nvSpPr>
           <p:spPr>
             <a:xfrm>
-              <a:off x="7046782" y="7794288"/>
-              <a:ext cx="77571" cy="77571"/>
+              <a:off x="6023044" y="6619294"/>
+              <a:ext cx="75116" cy="75116"/>
             </a:xfrm>
             <a:prstGeom prst="ellipse">
               <a:avLst/>
@@ -21865,8 +21865,8 @@
           </p:nvSpPr>
           <p:spPr>
             <a:xfrm>
-              <a:off x="6995568" y="7998989"/>
-              <a:ext cx="179999" cy="179999"/>
+              <a:off x="5970602" y="6803789"/>
+              <a:ext cx="180000" cy="180000"/>
             </a:xfrm>
             <a:prstGeom prst="rect">
               <a:avLst/>
@@ -21891,8 +21891,8 @@
           </p:nvSpPr>
           <p:spPr>
             <a:xfrm>
-              <a:off x="7046782" y="8050204"/>
-              <a:ext cx="77571" cy="77571"/>
+              <a:off x="6023044" y="6856231"/>
+              <a:ext cx="75116" cy="75116"/>
             </a:xfrm>
             <a:prstGeom prst="ellipse">
               <a:avLst/>
@@ -21917,8 +21917,8 @@
           </p:nvSpPr>
           <p:spPr>
             <a:xfrm>
-              <a:off x="5093885" y="7782965"/>
-              <a:ext cx="209489" cy="100218"/>
+              <a:off x="4428268" y="6620414"/>
+              <a:ext cx="152339" cy="72877"/>
             </a:xfrm>
             <a:prstGeom prst="rect">
               <a:avLst/>
@@ -21931,7 +21931,7 @@
             <a:p>
               <a:pPr algn="l" marL="0" marR="0" indent="0">
                 <a:lnSpc>
-                  <a:spcPts val="1100"/>
+                  <a:spcPts val="800"/>
                 </a:lnSpc>
                 <a:spcBef>
                   <a:spcPts val="0"/>
@@ -21941,7 +21941,7 @@
                 </a:spcAft>
               </a:pPr>
               <a:r>
-                <a:rPr sz="1100" i="1">
+                <a:rPr sz="800" i="1">
                   <a:solidFill>
                     <a:srgbClr val="000000">
                       <a:alpha val="100000"/>
@@ -21963,8 +21963,8 @@
           </p:nvSpPr>
           <p:spPr>
             <a:xfrm>
-              <a:off x="5093885" y="8038880"/>
-              <a:ext cx="217261" cy="100218"/>
+              <a:off x="4428268" y="6857350"/>
+              <a:ext cx="158008" cy="72877"/>
             </a:xfrm>
             <a:prstGeom prst="rect">
               <a:avLst/>
@@ -21977,7 +21977,7 @@
             <a:p>
               <a:pPr algn="l" marL="0" marR="0" indent="0">
                 <a:lnSpc>
-                  <a:spcPts val="1100"/>
+                  <a:spcPts val="800"/>
                 </a:lnSpc>
                 <a:spcBef>
                   <a:spcPts val="0"/>
@@ -21987,7 +21987,7 @@
                 </a:spcAft>
               </a:pPr>
               <a:r>
-                <a:rPr sz="1100" i="1">
+                <a:rPr sz="800" i="1">
                   <a:solidFill>
                     <a:srgbClr val="000000">
                       <a:alpha val="100000"/>
@@ -22009,8 +22009,8 @@
           </p:nvSpPr>
           <p:spPr>
             <a:xfrm>
-              <a:off x="5642977" y="7782965"/>
-              <a:ext cx="194035" cy="100218"/>
+              <a:off x="4880150" y="6620414"/>
+              <a:ext cx="141091" cy="72877"/>
             </a:xfrm>
             <a:prstGeom prst="rect">
               <a:avLst/>
@@ -22023,7 +22023,7 @@
             <a:p>
               <a:pPr algn="l" marL="0" marR="0" indent="0">
                 <a:lnSpc>
-                  <a:spcPts val="1100"/>
+                  <a:spcPts val="800"/>
                 </a:lnSpc>
                 <a:spcBef>
                   <a:spcPts val="0"/>
@@ -22033,7 +22033,7 @@
                 </a:spcAft>
               </a:pPr>
               <a:r>
-                <a:rPr sz="1100" i="1">
+                <a:rPr sz="800" i="1">
                   <a:solidFill>
                     <a:srgbClr val="000000">
                       <a:alpha val="100000"/>
@@ -22055,8 +22055,8 @@
           </p:nvSpPr>
           <p:spPr>
             <a:xfrm>
-              <a:off x="5642977" y="8038880"/>
-              <a:ext cx="209489" cy="100218"/>
+              <a:off x="4880150" y="6857350"/>
+              <a:ext cx="152339" cy="72877"/>
             </a:xfrm>
             <a:prstGeom prst="rect">
               <a:avLst/>
@@ -22069,7 +22069,7 @@
             <a:p>
               <a:pPr algn="l" marL="0" marR="0" indent="0">
                 <a:lnSpc>
-                  <a:spcPts val="1100"/>
+                  <a:spcPts val="800"/>
                 </a:lnSpc>
                 <a:spcBef>
                   <a:spcPts val="0"/>
@@ -22079,7 +22079,7 @@
                 </a:spcAft>
               </a:pPr>
               <a:r>
-                <a:rPr sz="1100" i="1">
+                <a:rPr sz="800" i="1">
                   <a:solidFill>
                     <a:srgbClr val="000000">
                       <a:alpha val="100000"/>
@@ -22101,8 +22101,8 @@
           </p:nvSpPr>
           <p:spPr>
             <a:xfrm>
-              <a:off x="6184297" y="7782965"/>
-              <a:ext cx="194035" cy="100218"/>
+              <a:off x="5326362" y="6620414"/>
+              <a:ext cx="141091" cy="72877"/>
             </a:xfrm>
             <a:prstGeom prst="rect">
               <a:avLst/>
@@ -22115,7 +22115,7 @@
             <a:p>
               <a:pPr algn="l" marL="0" marR="0" indent="0">
                 <a:lnSpc>
-                  <a:spcPts val="1100"/>
+                  <a:spcPts val="800"/>
                 </a:lnSpc>
                 <a:spcBef>
                   <a:spcPts val="0"/>
@@ -22125,7 +22125,7 @@
                 </a:spcAft>
               </a:pPr>
               <a:r>
-                <a:rPr sz="1100" i="1">
+                <a:rPr sz="800" i="1">
                   <a:solidFill>
                     <a:srgbClr val="000000">
                       <a:alpha val="100000"/>
@@ -22147,8 +22147,8 @@
           </p:nvSpPr>
           <p:spPr>
             <a:xfrm>
-              <a:off x="6184297" y="8038880"/>
-              <a:ext cx="194035" cy="100218"/>
+              <a:off x="5326362" y="6857350"/>
+              <a:ext cx="141091" cy="72877"/>
             </a:xfrm>
             <a:prstGeom prst="rect">
               <a:avLst/>
@@ -22161,7 +22161,7 @@
             <a:p>
               <a:pPr algn="l" marL="0" marR="0" indent="0">
                 <a:lnSpc>
-                  <a:spcPts val="1100"/>
+                  <a:spcPts val="800"/>
                 </a:lnSpc>
                 <a:spcBef>
                   <a:spcPts val="0"/>
@@ -22171,7 +22171,7 @@
                 </a:spcAft>
               </a:pPr>
               <a:r>
-                <a:rPr sz="1100" i="1">
+                <a:rPr sz="800" i="1">
                   <a:solidFill>
                     <a:srgbClr val="000000">
                       <a:alpha val="100000"/>
@@ -22193,8 +22193,8 @@
           </p:nvSpPr>
           <p:spPr>
             <a:xfrm>
-              <a:off x="6710163" y="7782965"/>
-              <a:ext cx="178582" cy="100218"/>
+              <a:off x="5761327" y="6620414"/>
+              <a:ext cx="129844" cy="72877"/>
             </a:xfrm>
             <a:prstGeom prst="rect">
               <a:avLst/>
@@ -22207,7 +22207,7 @@
             <a:p>
               <a:pPr algn="l" marL="0" marR="0" indent="0">
                 <a:lnSpc>
-                  <a:spcPts val="1100"/>
+                  <a:spcPts val="800"/>
                 </a:lnSpc>
                 <a:spcBef>
                   <a:spcPts val="0"/>
@@ -22217,7 +22217,7 @@
                 </a:spcAft>
               </a:pPr>
               <a:r>
-                <a:rPr sz="1100" i="1">
+                <a:rPr sz="800" i="1">
                   <a:solidFill>
                     <a:srgbClr val="000000">
                       <a:alpha val="100000"/>
@@ -22239,8 +22239,8 @@
           </p:nvSpPr>
           <p:spPr>
             <a:xfrm>
-              <a:off x="6710163" y="8038880"/>
-              <a:ext cx="209489" cy="100218"/>
+              <a:off x="5761327" y="6857350"/>
+              <a:ext cx="152339" cy="72877"/>
             </a:xfrm>
             <a:prstGeom prst="rect">
               <a:avLst/>
@@ -22253,7 +22253,7 @@
             <a:p>
               <a:pPr algn="l" marL="0" marR="0" indent="0">
                 <a:lnSpc>
-                  <a:spcPts val="1100"/>
+                  <a:spcPts val="800"/>
                 </a:lnSpc>
                 <a:spcBef>
                   <a:spcPts val="0"/>
@@ -22263,7 +22263,7 @@
                 </a:spcAft>
               </a:pPr>
               <a:r>
-                <a:rPr sz="1100" i="1">
+                <a:rPr sz="800" i="1">
                   <a:solidFill>
                     <a:srgbClr val="000000">
                       <a:alpha val="100000"/>
@@ -22285,8 +22285,8 @@
           </p:nvSpPr>
           <p:spPr>
             <a:xfrm>
-              <a:off x="7251483" y="7782965"/>
-              <a:ext cx="201808" cy="100218"/>
+              <a:off x="6207539" y="6620414"/>
+              <a:ext cx="146761" cy="72877"/>
             </a:xfrm>
             <a:prstGeom prst="rect">
               <a:avLst/>
@@ -22299,7 +22299,7 @@
             <a:p>
               <a:pPr algn="l" marL="0" marR="0" indent="0">
                 <a:lnSpc>
-                  <a:spcPts val="1100"/>
+                  <a:spcPts val="800"/>
                 </a:lnSpc>
                 <a:spcBef>
                   <a:spcPts val="0"/>
@@ -22309,7 +22309,7 @@
                 </a:spcAft>
               </a:pPr>
               <a:r>
-                <a:rPr sz="1100" i="1">
+                <a:rPr sz="800" i="1">
                   <a:solidFill>
                     <a:srgbClr val="000000">
                       <a:alpha val="100000"/>
@@ -22331,8 +22331,8 @@
           </p:nvSpPr>
           <p:spPr>
             <a:xfrm>
-              <a:off x="7251483" y="8038880"/>
-              <a:ext cx="186354" cy="100218"/>
+              <a:off x="6207539" y="6857350"/>
+              <a:ext cx="135514" cy="72877"/>
             </a:xfrm>
             <a:prstGeom prst="rect">
               <a:avLst/>
@@ -22345,7 +22345,7 @@
             <a:p>
               <a:pPr algn="l" marL="0" marR="0" indent="0">
                 <a:lnSpc>
-                  <a:spcPts val="1100"/>
+                  <a:spcPts val="800"/>
                 </a:lnSpc>
                 <a:spcBef>
                   <a:spcPts val="0"/>
@@ -22355,7 +22355,7 @@
                 </a:spcAft>
               </a:pPr>
               <a:r>
-                <a:rPr sz="1100" i="1">
+                <a:rPr sz="800" i="1">
                   <a:solidFill>
                     <a:srgbClr val="000000">
                       <a:alpha val="100000"/>

--- a/figures/Figure_1.pptx
+++ b/figures/Figure_1.pptx
@@ -2515,7 +2515,7 @@
           </p:nvSpPr>
           <p:spPr>
             <a:xfrm>
-              <a:off x="1453146" y="2249407"/>
+              <a:off x="1403391" y="2249542"/>
               <a:ext cx="75116" cy="75116"/>
             </a:xfrm>
             <a:prstGeom prst="ellipse">
@@ -2541,7 +2541,7 @@
           </p:nvSpPr>
           <p:spPr>
             <a:xfrm>
-              <a:off x="1603587" y="2182075"/>
+              <a:off x="1404501" y="2182190"/>
               <a:ext cx="75116" cy="75116"/>
             </a:xfrm>
             <a:prstGeom prst="ellipse">
@@ -2567,7 +2567,7 @@
           </p:nvSpPr>
           <p:spPr>
             <a:xfrm>
-              <a:off x="1440333" y="2283629"/>
+              <a:off x="1443587" y="2283694"/>
               <a:ext cx="75116" cy="75116"/>
             </a:xfrm>
             <a:prstGeom prst="ellipse">
@@ -2593,7 +2593,7 @@
           </p:nvSpPr>
           <p:spPr>
             <a:xfrm>
-              <a:off x="1397593" y="2280745"/>
+              <a:off x="1397593" y="2280808"/>
               <a:ext cx="75116" cy="75116"/>
             </a:xfrm>
             <a:prstGeom prst="ellipse">
@@ -2619,7 +2619,7 @@
           </p:nvSpPr>
           <p:spPr>
             <a:xfrm>
-              <a:off x="1411488" y="2305719"/>
+              <a:off x="1514960" y="2305733"/>
               <a:ext cx="75116" cy="75116"/>
             </a:xfrm>
             <a:prstGeom prst="ellipse">
@@ -2645,7 +2645,7 @@
           </p:nvSpPr>
           <p:spPr>
             <a:xfrm>
-              <a:off x="1509321" y="2163499"/>
+              <a:off x="1561451" y="2163502"/>
               <a:ext cx="75116" cy="75116"/>
             </a:xfrm>
             <a:prstGeom prst="ellipse">
@@ -2671,7 +2671,7 @@
           </p:nvSpPr>
           <p:spPr>
             <a:xfrm>
-              <a:off x="1534963" y="2084244"/>
+              <a:off x="1463356" y="2084316"/>
               <a:ext cx="75116" cy="75116"/>
             </a:xfrm>
             <a:prstGeom prst="ellipse">
@@ -2697,7 +2697,7 @@
           </p:nvSpPr>
           <p:spPr>
             <a:xfrm>
-              <a:off x="1444685" y="2265247"/>
+              <a:off x="1454622" y="2265227"/>
               <a:ext cx="75116" cy="75116"/>
             </a:xfrm>
             <a:prstGeom prst="ellipse">
@@ -2723,7 +2723,7 @@
           </p:nvSpPr>
           <p:spPr>
             <a:xfrm>
-              <a:off x="1432321" y="2334279"/>
+              <a:off x="1474895" y="2334286"/>
               <a:ext cx="75116" cy="75116"/>
             </a:xfrm>
             <a:prstGeom prst="ellipse">
@@ -2749,7 +2749,7 @@
           </p:nvSpPr>
           <p:spPr>
             <a:xfrm>
-              <a:off x="1469420" y="2143913"/>
+              <a:off x="1559236" y="2143893"/>
               <a:ext cx="75116" cy="75116"/>
             </a:xfrm>
             <a:prstGeom prst="ellipse">
@@ -2775,7 +2775,7 @@
           </p:nvSpPr>
           <p:spPr>
             <a:xfrm>
-              <a:off x="2288300" y="2342285"/>
+              <a:off x="2328907" y="2342308"/>
               <a:ext cx="75116" cy="75116"/>
             </a:xfrm>
             <a:prstGeom prst="ellipse">
@@ -2801,7 +2801,7 @@
           </p:nvSpPr>
           <p:spPr>
             <a:xfrm>
-              <a:off x="2273398" y="2281447"/>
+              <a:off x="2263941" y="2281488"/>
               <a:ext cx="75116" cy="75116"/>
             </a:xfrm>
             <a:prstGeom prst="ellipse">
@@ -2827,7 +2827,7 @@
           </p:nvSpPr>
           <p:spPr>
             <a:xfrm>
-              <a:off x="2162276" y="1703175"/>
+              <a:off x="2215022" y="1703222"/>
               <a:ext cx="75116" cy="75116"/>
             </a:xfrm>
             <a:prstGeom prst="ellipse">
@@ -2853,7 +2853,7 @@
           </p:nvSpPr>
           <p:spPr>
             <a:xfrm>
-              <a:off x="2305331" y="2204238"/>
+              <a:off x="2220947" y="2204266"/>
               <a:ext cx="75116" cy="75116"/>
             </a:xfrm>
             <a:prstGeom prst="ellipse">
@@ -2879,7 +2879,7 @@
           </p:nvSpPr>
           <p:spPr>
             <a:xfrm>
-              <a:off x="2214221" y="2275565"/>
+              <a:off x="2347126" y="2275579"/>
               <a:ext cx="75116" cy="75116"/>
             </a:xfrm>
             <a:prstGeom prst="ellipse">
@@ -2905,7 +2905,7 @@
           </p:nvSpPr>
           <p:spPr>
             <a:xfrm>
-              <a:off x="2342987" y="2336845"/>
+              <a:off x="2358704" y="2336888"/>
               <a:ext cx="75116" cy="75116"/>
             </a:xfrm>
             <a:prstGeom prst="ellipse">
@@ -2931,7 +2931,7 @@
           </p:nvSpPr>
           <p:spPr>
             <a:xfrm>
-              <a:off x="2263682" y="2361731"/>
+              <a:off x="2264141" y="2361718"/>
               <a:ext cx="75116" cy="75116"/>
             </a:xfrm>
             <a:prstGeom prst="ellipse">
@@ -2957,7 +2957,7 @@
           </p:nvSpPr>
           <p:spPr>
             <a:xfrm>
-              <a:off x="2354678" y="2196331"/>
+              <a:off x="2351799" y="2196439"/>
               <a:ext cx="75116" cy="75116"/>
             </a:xfrm>
             <a:prstGeom prst="ellipse">
@@ -2983,7 +2983,7 @@
           </p:nvSpPr>
           <p:spPr>
             <a:xfrm>
-              <a:off x="2246425" y="1582900"/>
+              <a:off x="2259354" y="1582850"/>
               <a:ext cx="75116" cy="75116"/>
             </a:xfrm>
             <a:prstGeom prst="ellipse">
@@ -3009,7 +3009,7 @@
           </p:nvSpPr>
           <p:spPr>
             <a:xfrm>
-              <a:off x="2320236" y="1761884"/>
+              <a:off x="2294046" y="1761846"/>
               <a:ext cx="75116" cy="75116"/>
             </a:xfrm>
             <a:prstGeom prst="ellipse">
@@ -3035,7 +3035,7 @@
           </p:nvSpPr>
           <p:spPr>
             <a:xfrm>
-              <a:off x="2315106" y="2352695"/>
+              <a:off x="2294817" y="2352692"/>
               <a:ext cx="75116" cy="75116"/>
             </a:xfrm>
             <a:prstGeom prst="ellipse">
@@ -3061,7 +3061,7 @@
           </p:nvSpPr>
           <p:spPr>
             <a:xfrm>
-              <a:off x="2323087" y="2158181"/>
+              <a:off x="2157170" y="2158230"/>
               <a:ext cx="75116" cy="75116"/>
             </a:xfrm>
             <a:prstGeom prst="ellipse">
@@ -3087,7 +3087,7 @@
           </p:nvSpPr>
           <p:spPr>
             <a:xfrm>
-              <a:off x="2287926" y="2104397"/>
+              <a:off x="2288026" y="2104395"/>
               <a:ext cx="75116" cy="75116"/>
             </a:xfrm>
             <a:prstGeom prst="ellipse">
@@ -3113,7 +3113,7 @@
           </p:nvSpPr>
           <p:spPr>
             <a:xfrm>
-              <a:off x="2329714" y="2113825"/>
+              <a:off x="2316164" y="2113735"/>
               <a:ext cx="75116" cy="75116"/>
             </a:xfrm>
             <a:prstGeom prst="ellipse">
@@ -3139,7 +3139,7 @@
           </p:nvSpPr>
           <p:spPr>
             <a:xfrm>
-              <a:off x="2208508" y="2268902"/>
+              <a:off x="2218119" y="2268987"/>
               <a:ext cx="75116" cy="75116"/>
             </a:xfrm>
             <a:prstGeom prst="ellipse">
@@ -3165,7 +3165,7 @@
           </p:nvSpPr>
           <p:spPr>
             <a:xfrm>
-              <a:off x="2274098" y="2211459"/>
+              <a:off x="2226612" y="2211509"/>
               <a:ext cx="75116" cy="75116"/>
             </a:xfrm>
             <a:prstGeom prst="ellipse">
@@ -3191,7 +3191,7 @@
           </p:nvSpPr>
           <p:spPr>
             <a:xfrm>
-              <a:off x="2299517" y="1754121"/>
+              <a:off x="2364604" y="1754121"/>
               <a:ext cx="75116" cy="75116"/>
             </a:xfrm>
             <a:prstGeom prst="ellipse">
@@ -3217,7 +3217,7 @@
           </p:nvSpPr>
           <p:spPr>
             <a:xfrm>
-              <a:off x="2321799" y="1885034"/>
+              <a:off x="2229178" y="1884933"/>
               <a:ext cx="75116" cy="75116"/>
             </a:xfrm>
             <a:prstGeom prst="ellipse">
@@ -3243,7 +3243,7 @@
           </p:nvSpPr>
           <p:spPr>
             <a:xfrm>
-              <a:off x="2982326" y="2303410"/>
+              <a:off x="3049157" y="2303382"/>
               <a:ext cx="75116" cy="75116"/>
             </a:xfrm>
             <a:prstGeom prst="ellipse">
@@ -3269,7 +3269,7 @@
           </p:nvSpPr>
           <p:spPr>
             <a:xfrm>
-              <a:off x="3095139" y="2095177"/>
+              <a:off x="3059627" y="2095215"/>
               <a:ext cx="75116" cy="75116"/>
             </a:xfrm>
             <a:prstGeom prst="ellipse">
@@ -3295,7 +3295,7 @@
           </p:nvSpPr>
           <p:spPr>
             <a:xfrm>
-              <a:off x="3038492" y="2315447"/>
+              <a:off x="3047256" y="2315528"/>
               <a:ext cx="75116" cy="75116"/>
             </a:xfrm>
             <a:prstGeom prst="ellipse">
@@ -3321,7 +3321,7 @@
           </p:nvSpPr>
           <p:spPr>
             <a:xfrm>
-              <a:off x="3031155" y="2401965"/>
+              <a:off x="3097596" y="2401965"/>
               <a:ext cx="75116" cy="75116"/>
             </a:xfrm>
             <a:prstGeom prst="ellipse">
@@ -3347,7 +3347,7 @@
           </p:nvSpPr>
           <p:spPr>
             <a:xfrm>
-              <a:off x="3091439" y="2158223"/>
+              <a:off x="3033528" y="2158154"/>
               <a:ext cx="75116" cy="75116"/>
             </a:xfrm>
             <a:prstGeom prst="ellipse">
@@ -3373,7 +3373,7 @@
           </p:nvSpPr>
           <p:spPr>
             <a:xfrm>
-              <a:off x="2987949" y="2293336"/>
+              <a:off x="3124956" y="2293412"/>
               <a:ext cx="75116" cy="75116"/>
             </a:xfrm>
             <a:prstGeom prst="ellipse">
@@ -3399,7 +3399,7 @@
           </p:nvSpPr>
           <p:spPr>
             <a:xfrm>
-              <a:off x="3030211" y="1417635"/>
+              <a:off x="2942987" y="1417516"/>
               <a:ext cx="75116" cy="75116"/>
             </a:xfrm>
             <a:prstGeom prst="ellipse">
@@ -3425,7 +3425,7 @@
           </p:nvSpPr>
           <p:spPr>
             <a:xfrm>
-              <a:off x="2996891" y="2337083"/>
+              <a:off x="3085290" y="2337097"/>
               <a:ext cx="75116" cy="75116"/>
             </a:xfrm>
             <a:prstGeom prst="ellipse">
@@ -3451,7 +3451,7 @@
           </p:nvSpPr>
           <p:spPr>
             <a:xfrm>
-              <a:off x="3075540" y="2008447"/>
+              <a:off x="3021659" y="2008425"/>
               <a:ext cx="75116" cy="75116"/>
             </a:xfrm>
             <a:prstGeom prst="ellipse">
@@ -3477,7 +3477,7 @@
           </p:nvSpPr>
           <p:spPr>
             <a:xfrm>
-              <a:off x="2975010" y="1689437"/>
+              <a:off x="2974996" y="1689508"/>
               <a:ext cx="75116" cy="75116"/>
             </a:xfrm>
             <a:prstGeom prst="ellipse">
@@ -3503,7 +3503,7 @@
           </p:nvSpPr>
           <p:spPr>
             <a:xfrm>
-              <a:off x="2962836" y="1165800"/>
+              <a:off x="3082212" y="1165800"/>
               <a:ext cx="75116" cy="75116"/>
             </a:xfrm>
             <a:prstGeom prst="ellipse">
@@ -3529,7 +3529,7 @@
           </p:nvSpPr>
           <p:spPr>
             <a:xfrm>
-              <a:off x="3087251" y="1912657"/>
+              <a:off x="3126824" y="1912655"/>
               <a:ext cx="75116" cy="75116"/>
             </a:xfrm>
             <a:prstGeom prst="ellipse">
@@ -3555,7 +3555,7 @@
           </p:nvSpPr>
           <p:spPr>
             <a:xfrm>
-              <a:off x="3059766" y="2071181"/>
+              <a:off x="2938441" y="2071277"/>
               <a:ext cx="75116" cy="75116"/>
             </a:xfrm>
             <a:prstGeom prst="ellipse">
@@ -3581,7 +3581,7 @@
           </p:nvSpPr>
           <p:spPr>
             <a:xfrm>
-              <a:off x="2962575" y="1937175"/>
+              <a:off x="2970795" y="1937163"/>
               <a:ext cx="75116" cy="75116"/>
             </a:xfrm>
             <a:prstGeom prst="ellipse">
@@ -3607,7 +3607,7 @@
           </p:nvSpPr>
           <p:spPr>
             <a:xfrm>
-              <a:off x="3113590" y="2046463"/>
+              <a:off x="2925454" y="2046409"/>
               <a:ext cx="75116" cy="75116"/>
             </a:xfrm>
             <a:prstGeom prst="ellipse">
@@ -3633,7 +3633,7 @@
           </p:nvSpPr>
           <p:spPr>
             <a:xfrm>
-              <a:off x="3010386" y="2191956"/>
+              <a:off x="2999601" y="2192058"/>
               <a:ext cx="75116" cy="75116"/>
             </a:xfrm>
             <a:prstGeom prst="ellipse">
@@ -3659,7 +3659,7 @@
           </p:nvSpPr>
           <p:spPr>
             <a:xfrm>
-              <a:off x="3015665" y="2108721"/>
+              <a:off x="2914323" y="2108831"/>
               <a:ext cx="75116" cy="75116"/>
             </a:xfrm>
             <a:prstGeom prst="ellipse">
@@ -3685,7 +3685,7 @@
           </p:nvSpPr>
           <p:spPr>
             <a:xfrm>
-              <a:off x="2972928" y="2094823"/>
+              <a:off x="3038607" y="2094852"/>
               <a:ext cx="75116" cy="75116"/>
             </a:xfrm>
             <a:prstGeom prst="ellipse">
@@ -3711,7 +3711,7 @@
           </p:nvSpPr>
           <p:spPr>
             <a:xfrm>
-              <a:off x="3016582" y="2190648"/>
+              <a:off x="2955506" y="2190663"/>
               <a:ext cx="75116" cy="75116"/>
             </a:xfrm>
             <a:prstGeom prst="ellipse">
@@ -3737,7 +3737,7 @@
           </p:nvSpPr>
           <p:spPr>
             <a:xfrm>
-              <a:off x="2943863" y="2180690"/>
+              <a:off x="3083781" y="2180659"/>
               <a:ext cx="75116" cy="75116"/>
             </a:xfrm>
             <a:prstGeom prst="ellipse">
@@ -3763,7 +3763,7 @@
           </p:nvSpPr>
           <p:spPr>
             <a:xfrm>
-              <a:off x="3808459" y="2197179"/>
+              <a:off x="3761998" y="2197218"/>
               <a:ext cx="75116" cy="75116"/>
             </a:xfrm>
             <a:prstGeom prst="ellipse">
@@ -3789,7 +3789,7 @@
           </p:nvSpPr>
           <p:spPr>
             <a:xfrm>
-              <a:off x="3796734" y="2195049"/>
+              <a:off x="3713886" y="2195043"/>
               <a:ext cx="75116" cy="75116"/>
             </a:xfrm>
             <a:prstGeom prst="ellipse">
@@ -3815,7 +3815,7 @@
           </p:nvSpPr>
           <p:spPr>
             <a:xfrm>
-              <a:off x="3818476" y="2153496"/>
+              <a:off x="3683269" y="2153510"/>
               <a:ext cx="75116" cy="75116"/>
             </a:xfrm>
             <a:prstGeom prst="ellipse">
@@ -3841,7 +3841,7 @@
           </p:nvSpPr>
           <p:spPr>
             <a:xfrm>
-              <a:off x="3794476" y="2284949"/>
+              <a:off x="3777202" y="2285047"/>
               <a:ext cx="75116" cy="75116"/>
             </a:xfrm>
             <a:prstGeom prst="ellipse">
@@ -3867,7 +3867,7 @@
           </p:nvSpPr>
           <p:spPr>
             <a:xfrm>
-              <a:off x="3890625" y="1930692"/>
+              <a:off x="3694949" y="1930736"/>
               <a:ext cx="75116" cy="75116"/>
             </a:xfrm>
             <a:prstGeom prst="ellipse">
@@ -3893,7 +3893,7 @@
           </p:nvSpPr>
           <p:spPr>
             <a:xfrm>
-              <a:off x="3785199" y="1947943"/>
+              <a:off x="3823639" y="1947992"/>
               <a:ext cx="75116" cy="75116"/>
             </a:xfrm>
             <a:prstGeom prst="ellipse">
@@ -3919,7 +3919,7 @@
           </p:nvSpPr>
           <p:spPr>
             <a:xfrm>
-              <a:off x="3886384" y="2155630"/>
+              <a:off x="3714422" y="2155694"/>
               <a:ext cx="75116" cy="75116"/>
             </a:xfrm>
             <a:prstGeom prst="ellipse">
@@ -3945,7 +3945,7 @@
           </p:nvSpPr>
           <p:spPr>
             <a:xfrm>
-              <a:off x="3850401" y="2083470"/>
+              <a:off x="3835652" y="2083525"/>
               <a:ext cx="75116" cy="75116"/>
             </a:xfrm>
             <a:prstGeom prst="ellipse">
@@ -3971,7 +3971,7 @@
           </p:nvSpPr>
           <p:spPr>
             <a:xfrm>
-              <a:off x="3758394" y="1998317"/>
+              <a:off x="3874815" y="1998329"/>
               <a:ext cx="75116" cy="75116"/>
             </a:xfrm>
             <a:prstGeom prst="ellipse">
@@ -3997,7 +3997,7 @@
           </p:nvSpPr>
           <p:spPr>
             <a:xfrm>
-              <a:off x="3742450" y="1783804"/>
+              <a:off x="3735603" y="1783742"/>
               <a:ext cx="75116" cy="75116"/>
             </a:xfrm>
             <a:prstGeom prst="ellipse">
@@ -4023,7 +4023,7 @@
           </p:nvSpPr>
           <p:spPr>
             <a:xfrm>
-              <a:off x="3894495" y="1847272"/>
+              <a:off x="3840663" y="1847258"/>
               <a:ext cx="75116" cy="75116"/>
             </a:xfrm>
             <a:prstGeom prst="ellipse">
@@ -4049,7 +4049,7 @@
           </p:nvSpPr>
           <p:spPr>
             <a:xfrm>
-              <a:off x="3734957" y="1716968"/>
+              <a:off x="3766014" y="1716883"/>
               <a:ext cx="75116" cy="75116"/>
             </a:xfrm>
             <a:prstGeom prst="ellipse">
@@ -4075,7 +4075,7 @@
           </p:nvSpPr>
           <p:spPr>
             <a:xfrm>
-              <a:off x="3864402" y="1938013"/>
+              <a:off x="3780674" y="1938111"/>
               <a:ext cx="75116" cy="75116"/>
             </a:xfrm>
             <a:prstGeom prst="ellipse">
@@ -4101,7 +4101,7 @@
           </p:nvSpPr>
           <p:spPr>
             <a:xfrm>
-              <a:off x="3764553" y="1875806"/>
+              <a:off x="3894495" y="1875708"/>
               <a:ext cx="75116" cy="75116"/>
             </a:xfrm>
             <a:prstGeom prst="ellipse">
@@ -4127,7 +4127,7 @@
           </p:nvSpPr>
           <p:spPr>
             <a:xfrm>
-              <a:off x="3703310" y="2254799"/>
+              <a:off x="3683419" y="2254819"/>
               <a:ext cx="75116" cy="75116"/>
             </a:xfrm>
             <a:prstGeom prst="ellipse">
@@ -4153,7 +4153,7 @@
           </p:nvSpPr>
           <p:spPr>
             <a:xfrm>
-              <a:off x="3890767" y="2099597"/>
+              <a:off x="3865614" y="2099519"/>
               <a:ext cx="75116" cy="75116"/>
             </a:xfrm>
             <a:prstGeom prst="ellipse">
@@ -4179,7 +4179,7 @@
           </p:nvSpPr>
           <p:spPr>
             <a:xfrm>
-              <a:off x="3832755" y="2011617"/>
+              <a:off x="3893928" y="2011595"/>
               <a:ext cx="75116" cy="75116"/>
             </a:xfrm>
             <a:prstGeom prst="ellipse">
@@ -4205,7 +4205,7 @@
           </p:nvSpPr>
           <p:spPr>
             <a:xfrm>
-              <a:off x="3805586" y="2069614"/>
+              <a:off x="3832057" y="2069505"/>
               <a:ext cx="75116" cy="75116"/>
             </a:xfrm>
             <a:prstGeom prst="ellipse">
@@ -4231,7 +4231,7 @@
           </p:nvSpPr>
           <p:spPr>
             <a:xfrm>
-              <a:off x="3780771" y="1824514"/>
+              <a:off x="3851859" y="1824482"/>
               <a:ext cx="75116" cy="75116"/>
             </a:xfrm>
             <a:prstGeom prst="ellipse">
@@ -4257,7 +4257,7 @@
           </p:nvSpPr>
           <p:spPr>
             <a:xfrm>
-              <a:off x="3816836" y="2042105"/>
+              <a:off x="3779550" y="2042140"/>
               <a:ext cx="75116" cy="75116"/>
             </a:xfrm>
             <a:prstGeom prst="ellipse">
@@ -4283,7 +4283,7 @@
           </p:nvSpPr>
           <p:spPr>
             <a:xfrm>
-              <a:off x="3704147" y="1914432"/>
+              <a:off x="3857408" y="1914484"/>
               <a:ext cx="75116" cy="75116"/>
             </a:xfrm>
             <a:prstGeom prst="ellipse">
@@ -4309,7 +4309,7 @@
           </p:nvSpPr>
           <p:spPr>
             <a:xfrm>
-              <a:off x="3810514" y="1809195"/>
+              <a:off x="3872288" y="1809174"/>
               <a:ext cx="75116" cy="75116"/>
             </a:xfrm>
             <a:prstGeom prst="ellipse">
@@ -4335,7 +4335,7 @@
           </p:nvSpPr>
           <p:spPr>
             <a:xfrm>
-              <a:off x="3741816" y="1967343"/>
+              <a:off x="3822690" y="1967430"/>
               <a:ext cx="75116" cy="75116"/>
             </a:xfrm>
             <a:prstGeom prst="ellipse">
@@ -4361,7 +4361,7 @@
           </p:nvSpPr>
           <p:spPr>
             <a:xfrm>
-              <a:off x="3750841" y="1938746"/>
+              <a:off x="3762850" y="1938781"/>
               <a:ext cx="75116" cy="75116"/>
             </a:xfrm>
             <a:prstGeom prst="ellipse">
@@ -4387,42 +4387,42 @@
           </p:nvSpPr>
           <p:spPr>
             <a:xfrm>
-              <a:off x="1544118" y="1862409"/>
-              <a:ext cx="2278536" cy="533928"/>
+              <a:off x="1524964" y="1862377"/>
+              <a:ext cx="2304685" cy="533992"/>
             </a:xfrm>
             <a:custGeom>
               <a:avLst/>
               <a:pathLst>
-                <a:path w="2278536" h="533928">
+                <a:path w="2304685" h="533992">
                   <a:moveTo>
-                    <a:pt x="0" y="151537"/>
+                    <a:pt x="0" y="151555"/>
                   </a:moveTo>
                   <a:lnTo>
-                    <a:pt x="1203798" y="145427"/>
+                    <a:pt x="1217613" y="145445"/>
                   </a:lnTo>
                   <a:lnTo>
-                    <a:pt x="1519024" y="115595"/>
+                    <a:pt x="1536456" y="115609"/>
                   </a:lnTo>
                   <a:lnTo>
-                    <a:pt x="1963310" y="53040"/>
+                    <a:pt x="1985841" y="53046"/>
                   </a:lnTo>
                   <a:lnTo>
-                    <a:pt x="2278536" y="0"/>
+                    <a:pt x="2304685" y="0"/>
                   </a:lnTo>
                   <a:lnTo>
-                    <a:pt x="2278536" y="346003"/>
+                    <a:pt x="2304685" y="346045"/>
                   </a:lnTo>
                   <a:lnTo>
-                    <a:pt x="1963310" y="339926"/>
+                    <a:pt x="1985841" y="339967"/>
                   </a:lnTo>
                   <a:lnTo>
-                    <a:pt x="1519024" y="343562"/>
+                    <a:pt x="1536456" y="343603"/>
                   </a:lnTo>
                   <a:lnTo>
-                    <a:pt x="1203798" y="360693"/>
+                    <a:pt x="1217613" y="360736"/>
                   </a:lnTo>
                   <a:lnTo>
-                    <a:pt x="0" y="533928"/>
+                    <a:pt x="0" y="533992"/>
                   </a:lnTo>
                   <a:close/>
                 </a:path>
@@ -4448,27 +4448,27 @@
           </p:nvSpPr>
           <p:spPr>
             <a:xfrm>
-              <a:off x="1544118" y="1862409"/>
-              <a:ext cx="2278536" cy="151537"/>
+              <a:off x="1524964" y="1862377"/>
+              <a:ext cx="2304685" cy="151555"/>
             </a:xfrm>
             <a:custGeom>
               <a:avLst/>
               <a:pathLst>
-                <a:path w="2278536" h="151537">
+                <a:path w="2304685" h="151555">
                   <a:moveTo>
-                    <a:pt x="0" y="151537"/>
+                    <a:pt x="0" y="151555"/>
                   </a:moveTo>
                   <a:lnTo>
-                    <a:pt x="1203798" y="145427"/>
+                    <a:pt x="1217613" y="145445"/>
                   </a:lnTo>
                   <a:lnTo>
-                    <a:pt x="1519024" y="115595"/>
+                    <a:pt x="1536456" y="115609"/>
                   </a:lnTo>
                   <a:lnTo>
-                    <a:pt x="1963310" y="53040"/>
+                    <a:pt x="1985841" y="53046"/>
                   </a:lnTo>
                   <a:lnTo>
-                    <a:pt x="2278536" y="0"/>
+                    <a:pt x="2304685" y="0"/>
                   </a:lnTo>
                 </a:path>
               </a:pathLst>
@@ -4488,27 +4488,27 @@
           </p:nvSpPr>
           <p:spPr>
             <a:xfrm>
-              <a:off x="1544118" y="2202335"/>
-              <a:ext cx="2278536" cy="194001"/>
+              <a:off x="1524964" y="2202344"/>
+              <a:ext cx="2304685" cy="194025"/>
             </a:xfrm>
             <a:custGeom>
               <a:avLst/>
               <a:pathLst>
-                <a:path w="2278536" h="194001">
+                <a:path w="2304685" h="194025">
                   <a:moveTo>
-                    <a:pt x="2278536" y="6077"/>
+                    <a:pt x="2304685" y="6078"/>
                   </a:moveTo>
                   <a:lnTo>
-                    <a:pt x="1963310" y="0"/>
+                    <a:pt x="1985841" y="0"/>
                   </a:lnTo>
                   <a:lnTo>
-                    <a:pt x="1519024" y="3636"/>
+                    <a:pt x="1536456" y="3636"/>
                   </a:lnTo>
                   <a:lnTo>
-                    <a:pt x="1203798" y="20766"/>
+                    <a:pt x="1217613" y="20769"/>
                   </a:lnTo>
                   <a:lnTo>
-                    <a:pt x="0" y="194001"/>
+                    <a:pt x="0" y="194025"/>
                   </a:lnTo>
                 </a:path>
               </a:pathLst>
@@ -4528,27 +4528,27 @@
           </p:nvSpPr>
           <p:spPr>
             <a:xfrm>
-              <a:off x="1544118" y="2035411"/>
-              <a:ext cx="2278536" cy="169730"/>
+              <a:off x="1524964" y="2035400"/>
+              <a:ext cx="2304685" cy="169751"/>
             </a:xfrm>
             <a:custGeom>
               <a:avLst/>
               <a:pathLst>
-                <a:path w="2278536" h="169730">
+                <a:path w="2304685" h="169751">
                   <a:moveTo>
-                    <a:pt x="0" y="169730"/>
+                    <a:pt x="0" y="169751"/>
                   </a:moveTo>
                   <a:lnTo>
-                    <a:pt x="1203798" y="80058"/>
+                    <a:pt x="1217613" y="80068"/>
                   </a:lnTo>
                   <a:lnTo>
-                    <a:pt x="1519024" y="56576"/>
+                    <a:pt x="1536456" y="56583"/>
                   </a:lnTo>
                   <a:lnTo>
-                    <a:pt x="1963310" y="23481"/>
+                    <a:pt x="1985841" y="23484"/>
                   </a:lnTo>
                   <a:lnTo>
-                    <a:pt x="2278536" y="0"/>
+                    <a:pt x="2304685" y="0"/>
                   </a:lnTo>
                 </a:path>
               </a:pathLst>
@@ -4577,7 +4577,7 @@
           </p:nvSpPr>
           <p:spPr>
             <a:xfrm>
-              <a:off x="3342960" y="1245000"/>
+              <a:off x="3349954" y="1244903"/>
               <a:ext cx="479694" cy="82021"/>
             </a:xfrm>
             <a:prstGeom prst="rect">
@@ -4684,7 +4684,7 @@
           </p:nvSpPr>
           <p:spPr>
             <a:xfrm rot="-5400000">
-              <a:off x="1140740" y="2213152"/>
+              <a:off x="1140740" y="2213167"/>
               <a:ext cx="141274" cy="72877"/>
             </a:xfrm>
             <a:prstGeom prst="rect">
@@ -4730,7 +4730,7 @@
           </p:nvSpPr>
           <p:spPr>
             <a:xfrm rot="-5400000">
-              <a:off x="1140740" y="1843879"/>
+              <a:off x="1140740" y="1843849"/>
               <a:ext cx="141274" cy="72877"/>
             </a:xfrm>
             <a:prstGeom prst="rect">
@@ -4776,7 +4776,7 @@
           </p:nvSpPr>
           <p:spPr>
             <a:xfrm rot="-5400000">
-              <a:off x="1140740" y="1474606"/>
+              <a:off x="1140740" y="1474532"/>
               <a:ext cx="141274" cy="72877"/>
             </a:xfrm>
             <a:prstGeom prst="rect">
@@ -4822,7 +4822,7 @@
           </p:nvSpPr>
           <p:spPr>
             <a:xfrm rot="-5400000">
-              <a:off x="1112485" y="1105333"/>
+              <a:off x="1112485" y="1105214"/>
               <a:ext cx="197784" cy="72877"/>
             </a:xfrm>
             <a:prstGeom prst="rect">
@@ -4868,7 +4868,7 @@
           </p:nvSpPr>
           <p:spPr>
             <a:xfrm>
-              <a:off x="1281838" y="2249591"/>
+              <a:off x="1281838" y="2249606"/>
               <a:ext cx="28468" cy="0"/>
             </a:xfrm>
             <a:custGeom>
@@ -4908,7 +4908,7 @@
           </p:nvSpPr>
           <p:spPr>
             <a:xfrm>
-              <a:off x="1281838" y="1880318"/>
+              <a:off x="1281838" y="1880288"/>
               <a:ext cx="28468" cy="0"/>
             </a:xfrm>
             <a:custGeom>
@@ -4948,7 +4948,7 @@
           </p:nvSpPr>
           <p:spPr>
             <a:xfrm>
-              <a:off x="1281838" y="1511045"/>
+              <a:off x="1281838" y="1510970"/>
               <a:ext cx="28468" cy="0"/>
             </a:xfrm>
             <a:custGeom>
@@ -4988,7 +4988,7 @@
           </p:nvSpPr>
           <p:spPr>
             <a:xfrm>
-              <a:off x="1281838" y="1141772"/>
+              <a:off x="1281838" y="1141653"/>
               <a:ext cx="28468" cy="0"/>
             </a:xfrm>
             <a:custGeom>
@@ -5068,7 +5068,7 @@
           </p:nvSpPr>
           <p:spPr>
             <a:xfrm>
-              <a:off x="1544118" y="2501332"/>
+              <a:off x="1524964" y="2501332"/>
               <a:ext cx="0" cy="28468"/>
             </a:xfrm>
             <a:custGeom>
@@ -5108,7 +5108,7 @@
           </p:nvSpPr>
           <p:spPr>
             <a:xfrm>
-              <a:off x="2303630" y="2501332"/>
+              <a:off x="2293192" y="2501332"/>
               <a:ext cx="0" cy="28468"/>
             </a:xfrm>
             <a:custGeom>
@@ -5148,7 +5148,7 @@
           </p:nvSpPr>
           <p:spPr>
             <a:xfrm>
-              <a:off x="3063142" y="2501332"/>
+              <a:off x="3061420" y="2501332"/>
               <a:ext cx="0" cy="28468"/>
             </a:xfrm>
             <a:custGeom>
@@ -5188,7 +5188,7 @@
           </p:nvSpPr>
           <p:spPr>
             <a:xfrm>
-              <a:off x="3822654" y="2501332"/>
+              <a:off x="3829649" y="2501332"/>
               <a:ext cx="0" cy="28468"/>
             </a:xfrm>
             <a:custGeom>
@@ -5228,7 +5228,7 @@
           </p:nvSpPr>
           <p:spPr>
             <a:xfrm>
-              <a:off x="1515863" y="2552575"/>
+              <a:off x="1496709" y="2552575"/>
               <a:ext cx="56509" cy="72877"/>
             </a:xfrm>
             <a:prstGeom prst="rect">
@@ -5274,7 +5274,7 @@
           </p:nvSpPr>
           <p:spPr>
             <a:xfrm>
-              <a:off x="2275375" y="2552575"/>
+              <a:off x="2264937" y="2552575"/>
               <a:ext cx="56509" cy="72877"/>
             </a:xfrm>
             <a:prstGeom prst="rect">
@@ -5320,7 +5320,7 @@
           </p:nvSpPr>
           <p:spPr>
             <a:xfrm>
-              <a:off x="3034887" y="2552575"/>
+              <a:off x="3033165" y="2552575"/>
               <a:ext cx="56509" cy="72877"/>
             </a:xfrm>
             <a:prstGeom prst="rect">
@@ -5366,7 +5366,7 @@
           </p:nvSpPr>
           <p:spPr>
             <a:xfrm>
-              <a:off x="3794399" y="2552575"/>
+              <a:off x="3801394" y="2552575"/>
               <a:ext cx="56509" cy="72877"/>
             </a:xfrm>
             <a:prstGeom prst="rect">
@@ -5530,7 +5530,7 @@
           </p:nvSpPr>
           <p:spPr>
             <a:xfrm>
-              <a:off x="4371800" y="2118809"/>
+              <a:off x="4361439" y="2119013"/>
               <a:ext cx="75116" cy="75116"/>
             </a:xfrm>
             <a:prstGeom prst="ellipse">
@@ -5556,7 +5556,7 @@
           </p:nvSpPr>
           <p:spPr>
             <a:xfrm>
-              <a:off x="4325526" y="1373631"/>
+              <a:off x="4322229" y="1373470"/>
               <a:ext cx="75116" cy="75116"/>
             </a:xfrm>
             <a:prstGeom prst="ellipse">
@@ -5582,7 +5582,7 @@
           </p:nvSpPr>
           <p:spPr>
             <a:xfrm>
-              <a:off x="4273874" y="2111899"/>
+              <a:off x="4340496" y="2112001"/>
               <a:ext cx="75116" cy="75116"/>
             </a:xfrm>
             <a:prstGeom prst="ellipse">
@@ -5608,7 +5608,7 @@
           </p:nvSpPr>
           <p:spPr>
             <a:xfrm>
-              <a:off x="4368151" y="2024262"/>
+              <a:off x="4378896" y="2024428"/>
               <a:ext cx="75116" cy="75116"/>
             </a:xfrm>
             <a:prstGeom prst="ellipse">
@@ -5634,7 +5634,7 @@
           </p:nvSpPr>
           <p:spPr>
             <a:xfrm>
-              <a:off x="4379851" y="2185589"/>
+              <a:off x="4390880" y="2185704"/>
               <a:ext cx="75116" cy="75116"/>
             </a:xfrm>
             <a:prstGeom prst="ellipse">
@@ -5660,7 +5660,7 @@
           </p:nvSpPr>
           <p:spPr>
             <a:xfrm>
-              <a:off x="4300233" y="1599217"/>
+              <a:off x="4325907" y="1599000"/>
               <a:ext cx="75116" cy="75116"/>
             </a:xfrm>
             <a:prstGeom prst="ellipse">
@@ -5686,7 +5686,7 @@
           </p:nvSpPr>
           <p:spPr>
             <a:xfrm>
-              <a:off x="4320141" y="1218932"/>
+              <a:off x="4273874" y="1218918"/>
               <a:ext cx="75116" cy="75116"/>
             </a:xfrm>
             <a:prstGeom prst="ellipse">
@@ -5712,7 +5712,7 @@
           </p:nvSpPr>
           <p:spPr>
             <a:xfrm>
-              <a:off x="4323650" y="1907208"/>
+              <a:off x="4301980" y="1907345"/>
               <a:ext cx="75116" cy="75116"/>
             </a:xfrm>
             <a:prstGeom prst="ellipse">
@@ -5738,7 +5738,7 @@
           </p:nvSpPr>
           <p:spPr>
             <a:xfrm>
-              <a:off x="4412424" y="2367310"/>
+              <a:off x="4310400" y="2367177"/>
               <a:ext cx="75116" cy="75116"/>
             </a:xfrm>
             <a:prstGeom prst="ellipse">
@@ -5764,7 +5764,7 @@
           </p:nvSpPr>
           <p:spPr>
             <a:xfrm>
-              <a:off x="4416958" y="1872384"/>
+              <a:off x="4393076" y="1872480"/>
               <a:ext cx="75116" cy="75116"/>
             </a:xfrm>
             <a:prstGeom prst="ellipse">
@@ -5790,7 +5790,7 @@
           </p:nvSpPr>
           <p:spPr>
             <a:xfrm>
-              <a:off x="5081574" y="2385566"/>
+              <a:off x="5003518" y="2385359"/>
               <a:ext cx="75116" cy="75116"/>
             </a:xfrm>
             <a:prstGeom prst="ellipse">
@@ -5816,7 +5816,7 @@
           </p:nvSpPr>
           <p:spPr>
             <a:xfrm>
-              <a:off x="5075689" y="1599452"/>
+              <a:off x="5064788" y="1599577"/>
               <a:ext cx="75116" cy="75116"/>
             </a:xfrm>
             <a:prstGeom prst="ellipse">
@@ -5842,7 +5842,7 @@
           </p:nvSpPr>
           <p:spPr>
             <a:xfrm>
-              <a:off x="5093000" y="2037240"/>
+              <a:off x="5005974" y="2037331"/>
               <a:ext cx="75116" cy="75116"/>
             </a:xfrm>
             <a:prstGeom prst="ellipse">
@@ -5868,7 +5868,7 @@
           </p:nvSpPr>
           <p:spPr>
             <a:xfrm>
-              <a:off x="5211446" y="2401965"/>
+              <a:off x="5189412" y="2401965"/>
               <a:ext cx="75116" cy="75116"/>
             </a:xfrm>
             <a:prstGeom prst="ellipse">
@@ -5894,7 +5894,7 @@
           </p:nvSpPr>
           <p:spPr>
             <a:xfrm>
-              <a:off x="5234984" y="1759871"/>
+              <a:off x="5138076" y="1759838"/>
               <a:ext cx="75116" cy="75116"/>
             </a:xfrm>
             <a:prstGeom prst="ellipse">
@@ -5920,7 +5920,7 @@
           </p:nvSpPr>
           <p:spPr>
             <a:xfrm>
-              <a:off x="5095230" y="1165800"/>
+              <a:off x="5141896" y="1165800"/>
               <a:ext cx="75116" cy="75116"/>
             </a:xfrm>
             <a:prstGeom prst="ellipse">
@@ -5946,7 +5946,7 @@
           </p:nvSpPr>
           <p:spPr>
             <a:xfrm>
-              <a:off x="5058147" y="2373162"/>
+              <a:off x="5143794" y="2373166"/>
               <a:ext cx="75116" cy="75116"/>
             </a:xfrm>
             <a:prstGeom prst="ellipse">
@@ -5972,7 +5972,7 @@
           </p:nvSpPr>
           <p:spPr>
             <a:xfrm>
-              <a:off x="5152454" y="2322321"/>
+              <a:off x="5191354" y="2322427"/>
               <a:ext cx="75116" cy="75116"/>
             </a:xfrm>
             <a:prstGeom prst="ellipse">
@@ -5998,7 +5998,7 @@
           </p:nvSpPr>
           <p:spPr>
             <a:xfrm>
-              <a:off x="5069345" y="2058358"/>
+              <a:off x="5001931" y="2058338"/>
               <a:ext cx="75116" cy="75116"/>
             </a:xfrm>
             <a:prstGeom prst="ellipse">
@@ -6024,7 +6024,7 @@
           </p:nvSpPr>
           <p:spPr>
             <a:xfrm>
-              <a:off x="5224645" y="2378903"/>
+              <a:off x="5121949" y="2379023"/>
               <a:ext cx="75116" cy="75116"/>
             </a:xfrm>
             <a:prstGeom prst="ellipse">
@@ -6050,7 +6050,7 @@
           </p:nvSpPr>
           <p:spPr>
             <a:xfrm>
-              <a:off x="5095298" y="2198512"/>
+              <a:off x="5162438" y="2198313"/>
               <a:ext cx="75116" cy="75116"/>
             </a:xfrm>
             <a:prstGeom prst="ellipse">
@@ -6076,7 +6076,7 @@
           </p:nvSpPr>
           <p:spPr>
             <a:xfrm>
-              <a:off x="5175154" y="2375839"/>
+              <a:off x="5063959" y="2375917"/>
               <a:ext cx="75116" cy="75116"/>
             </a:xfrm>
             <a:prstGeom prst="ellipse">
@@ -6102,7 +6102,7 @@
           </p:nvSpPr>
           <p:spPr>
             <a:xfrm>
-              <a:off x="5148559" y="1958494"/>
+              <a:off x="5168881" y="1958502"/>
               <a:ext cx="75116" cy="75116"/>
             </a:xfrm>
             <a:prstGeom prst="ellipse">
@@ -6128,7 +6128,7 @@
           </p:nvSpPr>
           <p:spPr>
             <a:xfrm>
-              <a:off x="5112961" y="1842764"/>
+              <a:off x="5064478" y="1842804"/>
               <a:ext cx="75116" cy="75116"/>
             </a:xfrm>
             <a:prstGeom prst="ellipse">
@@ -6154,7 +6154,7 @@
           </p:nvSpPr>
           <p:spPr>
             <a:xfrm>
-              <a:off x="5179763" y="1894661"/>
+              <a:off x="5152055" y="1894589"/>
               <a:ext cx="75116" cy="75116"/>
             </a:xfrm>
             <a:prstGeom prst="ellipse">
@@ -6180,7 +6180,7 @@
           </p:nvSpPr>
           <p:spPr>
             <a:xfrm>
-              <a:off x="5104554" y="1724803"/>
+              <a:off x="4988273" y="1724864"/>
               <a:ext cx="75116" cy="75116"/>
             </a:xfrm>
             <a:prstGeom prst="ellipse">
@@ -6206,7 +6206,7 @@
           </p:nvSpPr>
           <p:spPr>
             <a:xfrm>
-              <a:off x="5113227" y="2169819"/>
+              <a:off x="5081716" y="2169909"/>
               <a:ext cx="75116" cy="75116"/>
             </a:xfrm>
             <a:prstGeom prst="ellipse">
@@ -6232,7 +6232,7 @@
           </p:nvSpPr>
           <p:spPr>
             <a:xfrm>
-              <a:off x="5106179" y="2369934"/>
+              <a:off x="5152354" y="2370052"/>
               <a:ext cx="75116" cy="75116"/>
             </a:xfrm>
             <a:prstGeom prst="ellipse">
@@ -6258,7 +6258,7 @@
           </p:nvSpPr>
           <p:spPr>
             <a:xfrm>
-              <a:off x="5952354" y="2151522"/>
+              <a:off x="5765618" y="2151338"/>
               <a:ext cx="75116" cy="75116"/>
             </a:xfrm>
             <a:prstGeom prst="ellipse">
@@ -6284,7 +6284,7 @@
           </p:nvSpPr>
           <p:spPr>
             <a:xfrm>
-              <a:off x="5860641" y="2232928"/>
+              <a:off x="5837000" y="2232767"/>
               <a:ext cx="75116" cy="75116"/>
             </a:xfrm>
             <a:prstGeom prst="ellipse">
@@ -6310,7 +6310,7 @@
           </p:nvSpPr>
           <p:spPr>
             <a:xfrm>
-              <a:off x="5915309" y="2320621"/>
+              <a:off x="5787123" y="2320662"/>
               <a:ext cx="75116" cy="75116"/>
             </a:xfrm>
             <a:prstGeom prst="ellipse">
@@ -6336,7 +6336,7 @@
           </p:nvSpPr>
           <p:spPr>
             <a:xfrm>
-              <a:off x="5789264" y="2110761"/>
+              <a:off x="5938555" y="2110860"/>
               <a:ext cx="75116" cy="75116"/>
             </a:xfrm>
             <a:prstGeom prst="ellipse">
@@ -6362,7 +6362,7 @@
           </p:nvSpPr>
           <p:spPr>
             <a:xfrm>
-              <a:off x="5891949" y="1656131"/>
+              <a:off x="5890263" y="1656095"/>
               <a:ext cx="75116" cy="75116"/>
             </a:xfrm>
             <a:prstGeom prst="ellipse">
@@ -6388,7 +6388,7 @@
           </p:nvSpPr>
           <p:spPr>
             <a:xfrm>
-              <a:off x="5855530" y="1352390"/>
+              <a:off x="5972819" y="1352399"/>
               <a:ext cx="75116" cy="75116"/>
             </a:xfrm>
             <a:prstGeom prst="ellipse">
@@ -6414,7 +6414,7 @@
           </p:nvSpPr>
           <p:spPr>
             <a:xfrm>
-              <a:off x="5985343" y="1557453"/>
+              <a:off x="5788807" y="1557460"/>
               <a:ext cx="75116" cy="75116"/>
             </a:xfrm>
             <a:prstGeom prst="ellipse">
@@ -6440,7 +6440,7 @@
           </p:nvSpPr>
           <p:spPr>
             <a:xfrm>
-              <a:off x="5965007" y="2178578"/>
+              <a:off x="5929495" y="2178622"/>
               <a:ext cx="75116" cy="75116"/>
             </a:xfrm>
             <a:prstGeom prst="ellipse">
@@ -6466,7 +6466,7 @@
           </p:nvSpPr>
           <p:spPr>
             <a:xfrm>
-              <a:off x="5958700" y="2127882"/>
+              <a:off x="5783439" y="2127839"/>
               <a:ext cx="75116" cy="75116"/>
             </a:xfrm>
             <a:prstGeom prst="ellipse">
@@ -6492,7 +6492,7 @@
           </p:nvSpPr>
           <p:spPr>
             <a:xfrm>
-              <a:off x="5958289" y="1622705"/>
+              <a:off x="5946256" y="1622658"/>
               <a:ext cx="75116" cy="75116"/>
             </a:xfrm>
             <a:prstGeom prst="ellipse">
@@ -6518,7 +6518,7 @@
           </p:nvSpPr>
           <p:spPr>
             <a:xfrm>
-              <a:off x="5972124" y="1803390"/>
+              <a:off x="5976525" y="1803487"/>
               <a:ext cx="75116" cy="75116"/>
             </a:xfrm>
             <a:prstGeom prst="ellipse">
@@ -6544,7 +6544,7 @@
           </p:nvSpPr>
           <p:spPr>
             <a:xfrm>
-              <a:off x="5880526" y="2298696"/>
+              <a:off x="5780755" y="2298881"/>
               <a:ext cx="75116" cy="75116"/>
             </a:xfrm>
             <a:prstGeom prst="ellipse">
@@ -6570,7 +6570,7 @@
           </p:nvSpPr>
           <p:spPr>
             <a:xfrm>
-              <a:off x="5964680" y="1578799"/>
+              <a:off x="5819305" y="1578642"/>
               <a:ext cx="75116" cy="75116"/>
             </a:xfrm>
             <a:prstGeom prst="ellipse">
@@ -6596,7 +6596,7 @@
           </p:nvSpPr>
           <p:spPr>
             <a:xfrm>
-              <a:off x="5944013" y="1750407"/>
+              <a:off x="5849322" y="1750269"/>
               <a:ext cx="75116" cy="75116"/>
             </a:xfrm>
             <a:prstGeom prst="ellipse">
@@ -6622,7 +6622,7 @@
           </p:nvSpPr>
           <p:spPr>
             <a:xfrm>
-              <a:off x="5870531" y="1917991"/>
+              <a:off x="5844226" y="1918143"/>
               <a:ext cx="75116" cy="75116"/>
             </a:xfrm>
             <a:prstGeom prst="ellipse">
@@ -6648,7 +6648,7 @@
           </p:nvSpPr>
           <p:spPr>
             <a:xfrm>
-              <a:off x="5814427" y="2273409"/>
+              <a:off x="5968739" y="2273359"/>
               <a:ext cx="75116" cy="75116"/>
             </a:xfrm>
             <a:prstGeom prst="ellipse">
@@ -6674,7 +6674,7 @@
           </p:nvSpPr>
           <p:spPr>
             <a:xfrm>
-              <a:off x="5996062" y="1910108"/>
+              <a:off x="5842592" y="1910177"/>
               <a:ext cx="75116" cy="75116"/>
             </a:xfrm>
             <a:prstGeom prst="ellipse">
@@ -6700,7 +6700,7 @@
           </p:nvSpPr>
           <p:spPr>
             <a:xfrm>
-              <a:off x="5842898" y="2249486"/>
+              <a:off x="5978658" y="2249647"/>
               <a:ext cx="75116" cy="75116"/>
             </a:xfrm>
             <a:prstGeom prst="ellipse">
@@ -6726,7 +6726,7 @@
           </p:nvSpPr>
           <p:spPr>
             <a:xfrm>
-              <a:off x="5927884" y="1732288"/>
+              <a:off x="5937351" y="1732503"/>
               <a:ext cx="75116" cy="75116"/>
             </a:xfrm>
             <a:prstGeom prst="ellipse">
@@ -6752,7 +6752,7 @@
           </p:nvSpPr>
           <p:spPr>
             <a:xfrm>
-              <a:off x="5990744" y="1922804"/>
+              <a:off x="5935846" y="1922531"/>
               <a:ext cx="75116" cy="75116"/>
             </a:xfrm>
             <a:prstGeom prst="ellipse">
@@ -6778,7 +6778,7 @@
           </p:nvSpPr>
           <p:spPr>
             <a:xfrm>
-              <a:off x="6610221" y="2019326"/>
+              <a:off x="6686945" y="2019388"/>
               <a:ext cx="75116" cy="75116"/>
             </a:xfrm>
             <a:prstGeom prst="ellipse">
@@ -6804,7 +6804,7 @@
           </p:nvSpPr>
           <p:spPr>
             <a:xfrm>
-              <a:off x="6588475" y="2147385"/>
+              <a:off x="6670264" y="2147561"/>
               <a:ext cx="75116" cy="75116"/>
             </a:xfrm>
             <a:prstGeom prst="ellipse">
@@ -6830,7 +6830,7 @@
           </p:nvSpPr>
           <p:spPr>
             <a:xfrm>
-              <a:off x="6667176" y="2197539"/>
+              <a:off x="6550940" y="2197574"/>
               <a:ext cx="75116" cy="75116"/>
             </a:xfrm>
             <a:prstGeom prst="ellipse">
@@ -6856,7 +6856,7 @@
           </p:nvSpPr>
           <p:spPr>
             <a:xfrm>
-              <a:off x="6555776" y="2003790"/>
+              <a:off x="6696178" y="2003784"/>
               <a:ext cx="75116" cy="75116"/>
             </a:xfrm>
             <a:prstGeom prst="ellipse">
@@ -6882,7 +6882,7 @@
           </p:nvSpPr>
           <p:spPr>
             <a:xfrm>
-              <a:off x="6733324" y="1896968"/>
+              <a:off x="6588673" y="1897087"/>
               <a:ext cx="75116" cy="75116"/>
             </a:xfrm>
             <a:prstGeom prst="ellipse">
@@ -6908,7 +6908,7 @@
           </p:nvSpPr>
           <p:spPr>
             <a:xfrm>
-              <a:off x="6699026" y="1943096"/>
+              <a:off x="6767579" y="1943126"/>
               <a:ext cx="75116" cy="75116"/>
             </a:xfrm>
             <a:prstGeom prst="ellipse">
@@ -6934,7 +6934,7 @@
           </p:nvSpPr>
           <p:spPr>
             <a:xfrm>
-              <a:off x="6769952" y="2146108"/>
+              <a:off x="6676563" y="2146196"/>
               <a:ext cx="75116" cy="75116"/>
             </a:xfrm>
             <a:prstGeom prst="ellipse">
@@ -6960,7 +6960,7 @@
           </p:nvSpPr>
           <p:spPr>
             <a:xfrm>
-              <a:off x="6677891" y="1964076"/>
+              <a:off x="6662534" y="1964033"/>
               <a:ext cx="75116" cy="75116"/>
             </a:xfrm>
             <a:prstGeom prst="ellipse">
@@ -6986,7 +6986,7 @@
           </p:nvSpPr>
           <p:spPr>
             <a:xfrm>
-              <a:off x="6708180" y="2178229"/>
+              <a:off x="6669711" y="2178174"/>
               <a:ext cx="75116" cy="75116"/>
             </a:xfrm>
             <a:prstGeom prst="ellipse">
@@ -7012,7 +7012,7 @@
           </p:nvSpPr>
           <p:spPr>
             <a:xfrm>
-              <a:off x="6605835" y="2076543"/>
+              <a:off x="6755883" y="2076526"/>
               <a:ext cx="75116" cy="75116"/>
             </a:xfrm>
             <a:prstGeom prst="ellipse">
@@ -7038,7 +7038,7 @@
           </p:nvSpPr>
           <p:spPr>
             <a:xfrm>
-              <a:off x="6560175" y="1927790"/>
+              <a:off x="6605387" y="1927830"/>
               <a:ext cx="75116" cy="75116"/>
             </a:xfrm>
             <a:prstGeom prst="ellipse">
@@ -7064,7 +7064,7 @@
           </p:nvSpPr>
           <p:spPr>
             <a:xfrm>
-              <a:off x="6747967" y="1650265"/>
+              <a:off x="6743730" y="1650389"/>
               <a:ext cx="75116" cy="75116"/>
             </a:xfrm>
             <a:prstGeom prst="ellipse">
@@ -7090,7 +7090,7 @@
           </p:nvSpPr>
           <p:spPr>
             <a:xfrm>
-              <a:off x="6573943" y="2166983"/>
+              <a:off x="6667109" y="2167131"/>
               <a:ext cx="75116" cy="75116"/>
             </a:xfrm>
             <a:prstGeom prst="ellipse">
@@ -7116,7 +7116,7 @@
           </p:nvSpPr>
           <p:spPr>
             <a:xfrm>
-              <a:off x="6627378" y="2350005"/>
+              <a:off x="6645746" y="2350084"/>
               <a:ext cx="75116" cy="75116"/>
             </a:xfrm>
             <a:prstGeom prst="ellipse">
@@ -7142,7 +7142,7 @@
           </p:nvSpPr>
           <p:spPr>
             <a:xfrm>
-              <a:off x="6570560" y="2224304"/>
+              <a:off x="6745001" y="2224354"/>
               <a:ext cx="75116" cy="75116"/>
             </a:xfrm>
             <a:prstGeom prst="ellipse">
@@ -7168,7 +7168,7 @@
           </p:nvSpPr>
           <p:spPr>
             <a:xfrm>
-              <a:off x="6770776" y="2026373"/>
+              <a:off x="6735107" y="2026190"/>
               <a:ext cx="75116" cy="75116"/>
             </a:xfrm>
             <a:prstGeom prst="ellipse">
@@ -7194,7 +7194,7 @@
           </p:nvSpPr>
           <p:spPr>
             <a:xfrm>
-              <a:off x="6651630" y="2140550"/>
+              <a:off x="6589711" y="2140383"/>
               <a:ext cx="75116" cy="75116"/>
             </a:xfrm>
             <a:prstGeom prst="ellipse">
@@ -7220,7 +7220,7 @@
           </p:nvSpPr>
           <p:spPr>
             <a:xfrm>
-              <a:off x="6570626" y="2004709"/>
+              <a:off x="6735044" y="2004787"/>
               <a:ext cx="75116" cy="75116"/>
             </a:xfrm>
             <a:prstGeom prst="ellipse">
@@ -7246,7 +7246,7 @@
           </p:nvSpPr>
           <p:spPr>
             <a:xfrm>
-              <a:off x="6579239" y="1984060"/>
+              <a:off x="6720280" y="1983864"/>
               <a:ext cx="75116" cy="75116"/>
             </a:xfrm>
             <a:prstGeom prst="ellipse">
@@ -7272,7 +7272,7 @@
           </p:nvSpPr>
           <p:spPr>
             <a:xfrm>
-              <a:off x="6690429" y="1831501"/>
+              <a:off x="6770776" y="1831766"/>
               <a:ext cx="75116" cy="75116"/>
             </a:xfrm>
             <a:prstGeom prst="ellipse">
@@ -7298,7 +7298,7 @@
           </p:nvSpPr>
           <p:spPr>
             <a:xfrm>
-              <a:off x="6657699" y="1870711"/>
+              <a:off x="6680243" y="1870706"/>
               <a:ext cx="75116" cy="75116"/>
             </a:xfrm>
             <a:prstGeom prst="ellipse">
@@ -7324,7 +7324,7 @@
           </p:nvSpPr>
           <p:spPr>
             <a:xfrm>
-              <a:off x="6715840" y="1930847"/>
+              <a:off x="6565049" y="1930906"/>
               <a:ext cx="75116" cy="75116"/>
             </a:xfrm>
             <a:prstGeom prst="ellipse">
@@ -7350,7 +7350,7 @@
           </p:nvSpPr>
           <p:spPr>
             <a:xfrm>
-              <a:off x="6626338" y="2258206"/>
+              <a:off x="6634146" y="2258034"/>
               <a:ext cx="75116" cy="75116"/>
             </a:xfrm>
             <a:prstGeom prst="ellipse">
@@ -7376,7 +7376,7 @@
           </p:nvSpPr>
           <p:spPr>
             <a:xfrm>
-              <a:off x="6626848" y="1997589"/>
+              <a:off x="6574225" y="1997782"/>
               <a:ext cx="75116" cy="75116"/>
             </a:xfrm>
             <a:prstGeom prst="ellipse">
@@ -7402,42 +7402,42 @@
           </p:nvSpPr>
           <p:spPr>
             <a:xfrm>
-              <a:off x="4394117" y="1808886"/>
-              <a:ext cx="2304794" cy="387965"/>
+              <a:off x="4350167" y="1808853"/>
+              <a:ext cx="2347767" cy="388015"/>
             </a:xfrm>
             <a:custGeom>
               <a:avLst/>
               <a:pathLst>
-                <a:path w="2304794" h="387965">
+                <a:path w="2347767" h="388015">
                   <a:moveTo>
                     <a:pt x="0" y="0"/>
                   </a:moveTo>
                   <a:lnTo>
-                    <a:pt x="1217670" y="98635"/>
+                    <a:pt x="1240374" y="98648"/>
                   </a:lnTo>
                   <a:lnTo>
-                    <a:pt x="1536529" y="114732"/>
+                    <a:pt x="1565178" y="114746"/>
                   </a:lnTo>
                   <a:lnTo>
-                    <a:pt x="1985935" y="129645"/>
+                    <a:pt x="2022963" y="129662"/>
                   </a:lnTo>
                   <a:lnTo>
-                    <a:pt x="2304794" y="135524"/>
+                    <a:pt x="2347767" y="135542"/>
                   </a:lnTo>
                   <a:lnTo>
-                    <a:pt x="2304794" y="387965"/>
+                    <a:pt x="2347767" y="388015"/>
                   </a:lnTo>
                   <a:lnTo>
-                    <a:pt x="1985935" y="361737"/>
+                    <a:pt x="2022963" y="361783"/>
                   </a:lnTo>
                   <a:lnTo>
-                    <a:pt x="1536529" y="331398"/>
+                    <a:pt x="1565178" y="331441"/>
                   </a:lnTo>
                   <a:lnTo>
-                    <a:pt x="1217670" y="315388"/>
+                    <a:pt x="1240374" y="315429"/>
                   </a:lnTo>
                   <a:lnTo>
-                    <a:pt x="0" y="291413"/>
+                    <a:pt x="0" y="291450"/>
                   </a:lnTo>
                   <a:close/>
                 </a:path>
@@ -7463,27 +7463,27 @@
           </p:nvSpPr>
           <p:spPr>
             <a:xfrm>
-              <a:off x="4394117" y="1808886"/>
-              <a:ext cx="2304794" cy="135524"/>
+              <a:off x="4350167" y="1808853"/>
+              <a:ext cx="2347767" cy="135542"/>
             </a:xfrm>
             <a:custGeom>
               <a:avLst/>
               <a:pathLst>
-                <a:path w="2304794" h="135524">
+                <a:path w="2347767" h="135542">
                   <a:moveTo>
                     <a:pt x="0" y="0"/>
                   </a:moveTo>
                   <a:lnTo>
-                    <a:pt x="1217670" y="98635"/>
+                    <a:pt x="1240374" y="98648"/>
                   </a:lnTo>
                   <a:lnTo>
-                    <a:pt x="1536529" y="114732"/>
+                    <a:pt x="1565178" y="114746"/>
                   </a:lnTo>
                   <a:lnTo>
-                    <a:pt x="1985935" y="129645"/>
+                    <a:pt x="2022963" y="129662"/>
                   </a:lnTo>
                   <a:lnTo>
-                    <a:pt x="2304794" y="135524"/>
+                    <a:pt x="2347767" y="135542"/>
                   </a:lnTo>
                 </a:path>
               </a:pathLst>
@@ -7503,24 +7503,24 @@
           </p:nvSpPr>
           <p:spPr>
             <a:xfrm>
-              <a:off x="4394117" y="2100299"/>
-              <a:ext cx="2304794" cy="96552"/>
+              <a:off x="4350167" y="2100303"/>
+              <a:ext cx="2347767" cy="96564"/>
             </a:xfrm>
             <a:custGeom>
               <a:avLst/>
               <a:pathLst>
-                <a:path w="2304794" h="96552">
+                <a:path w="2347767" h="96564">
                   <a:moveTo>
-                    <a:pt x="2304794" y="96552"/>
+                    <a:pt x="2347767" y="96564"/>
                   </a:moveTo>
                   <a:lnTo>
-                    <a:pt x="1985935" y="70324"/>
+                    <a:pt x="2022963" y="70333"/>
                   </a:lnTo>
                   <a:lnTo>
-                    <a:pt x="1536529" y="39985"/>
+                    <a:pt x="1565178" y="39991"/>
                   </a:lnTo>
                   <a:lnTo>
-                    <a:pt x="1217670" y="23975"/>
+                    <a:pt x="1240374" y="23978"/>
                   </a:lnTo>
                   <a:lnTo>
                     <a:pt x="0" y="0"/>
@@ -7543,27 +7543,27 @@
           </p:nvSpPr>
           <p:spPr>
             <a:xfrm>
-              <a:off x="4394117" y="1954592"/>
-              <a:ext cx="2304794" cy="116038"/>
+              <a:off x="4350167" y="1954578"/>
+              <a:ext cx="2347767" cy="116053"/>
             </a:xfrm>
             <a:custGeom>
               <a:avLst/>
               <a:pathLst>
-                <a:path w="2304794" h="116038">
+                <a:path w="2347767" h="116053">
                   <a:moveTo>
                     <a:pt x="0" y="0"/>
                   </a:moveTo>
                   <a:lnTo>
-                    <a:pt x="1217670" y="61305"/>
+                    <a:pt x="1240374" y="61313"/>
                   </a:lnTo>
                   <a:lnTo>
-                    <a:pt x="1536529" y="77359"/>
+                    <a:pt x="1565178" y="77368"/>
                   </a:lnTo>
                   <a:lnTo>
-                    <a:pt x="1985935" y="99985"/>
+                    <a:pt x="2022963" y="99997"/>
                   </a:lnTo>
                   <a:lnTo>
-                    <a:pt x="2304794" y="116038"/>
+                    <a:pt x="2347767" y="116053"/>
                   </a:lnTo>
                 </a:path>
               </a:pathLst>
@@ -7592,7 +7592,7 @@
           </p:nvSpPr>
           <p:spPr>
             <a:xfrm>
-              <a:off x="6219218" y="1244973"/>
+              <a:off x="6218240" y="1244878"/>
               <a:ext cx="479694" cy="82021"/>
             </a:xfrm>
             <a:prstGeom prst="rect">
@@ -7699,7 +7699,7 @@
           </p:nvSpPr>
           <p:spPr>
             <a:xfrm>
-              <a:off x="4158119" y="2236924"/>
+              <a:off x="4158119" y="2236946"/>
               <a:ext cx="28468" cy="0"/>
             </a:xfrm>
             <a:custGeom>
@@ -7739,7 +7739,7 @@
           </p:nvSpPr>
           <p:spPr>
             <a:xfrm>
-              <a:off x="4158119" y="1787639"/>
+              <a:off x="4158119" y="1787603"/>
               <a:ext cx="28468" cy="0"/>
             </a:xfrm>
             <a:custGeom>
@@ -7779,7 +7779,7 @@
           </p:nvSpPr>
           <p:spPr>
             <a:xfrm>
-              <a:off x="4158119" y="1338354"/>
+              <a:off x="4158119" y="1338261"/>
               <a:ext cx="28468" cy="0"/>
             </a:xfrm>
             <a:custGeom>
@@ -7859,7 +7859,7 @@
           </p:nvSpPr>
           <p:spPr>
             <a:xfrm>
-              <a:off x="4394117" y="2501332"/>
+              <a:off x="4350167" y="2501332"/>
               <a:ext cx="0" cy="28468"/>
             </a:xfrm>
             <a:custGeom>
@@ -7899,7 +7899,7 @@
           </p:nvSpPr>
           <p:spPr>
             <a:xfrm>
-              <a:off x="5162382" y="2501332"/>
+              <a:off x="5132757" y="2501332"/>
               <a:ext cx="0" cy="28468"/>
             </a:xfrm>
             <a:custGeom>
@@ -7939,7 +7939,7 @@
           </p:nvSpPr>
           <p:spPr>
             <a:xfrm>
-              <a:off x="5930647" y="2501332"/>
+              <a:off x="5915346" y="2501332"/>
               <a:ext cx="0" cy="28468"/>
             </a:xfrm>
             <a:custGeom>
@@ -7979,7 +7979,7 @@
           </p:nvSpPr>
           <p:spPr>
             <a:xfrm>
-              <a:off x="6698912" y="2501332"/>
+              <a:off x="6697935" y="2501332"/>
               <a:ext cx="0" cy="28468"/>
             </a:xfrm>
             <a:custGeom>
@@ -8019,7 +8019,7 @@
           </p:nvSpPr>
           <p:spPr>
             <a:xfrm>
-              <a:off x="4365862" y="2552575"/>
+              <a:off x="4321913" y="2552575"/>
               <a:ext cx="56509" cy="72877"/>
             </a:xfrm>
             <a:prstGeom prst="rect">
@@ -8065,7 +8065,7 @@
           </p:nvSpPr>
           <p:spPr>
             <a:xfrm>
-              <a:off x="5134127" y="2552575"/>
+              <a:off x="5104502" y="2552575"/>
               <a:ext cx="56509" cy="72877"/>
             </a:xfrm>
             <a:prstGeom prst="rect">
@@ -8111,7 +8111,7 @@
           </p:nvSpPr>
           <p:spPr>
             <a:xfrm>
-              <a:off x="5902392" y="2552575"/>
+              <a:off x="5887091" y="2552575"/>
               <a:ext cx="56509" cy="72877"/>
             </a:xfrm>
             <a:prstGeom prst="rect">
@@ -8157,7 +8157,7 @@
           </p:nvSpPr>
           <p:spPr>
             <a:xfrm>
-              <a:off x="6670657" y="2552575"/>
+              <a:off x="6669680" y="2552575"/>
               <a:ext cx="56509" cy="72877"/>
             </a:xfrm>
             <a:prstGeom prst="rect">
@@ -8275,7 +8275,7 @@
           </p:nvSpPr>
           <p:spPr>
             <a:xfrm>
-              <a:off x="1546345" y="4021003"/>
+              <a:off x="1479019" y="4020408"/>
               <a:ext cx="75116" cy="75116"/>
             </a:xfrm>
             <a:prstGeom prst="ellipse">
@@ -8301,7 +8301,7 @@
           </p:nvSpPr>
           <p:spPr>
             <a:xfrm>
-              <a:off x="1528079" y="3887746"/>
+              <a:off x="1733464" y="3885915"/>
               <a:ext cx="75116" cy="75116"/>
             </a:xfrm>
             <a:prstGeom prst="ellipse">
@@ -8327,7 +8327,7 @@
           </p:nvSpPr>
           <p:spPr>
             <a:xfrm>
-              <a:off x="1619787" y="4080935"/>
+              <a:off x="1468723" y="4080319"/>
               <a:ext cx="75116" cy="75116"/>
             </a:xfrm>
             <a:prstGeom prst="ellipse">
@@ -8353,7 +8353,7 @@
           </p:nvSpPr>
           <p:spPr>
             <a:xfrm>
-              <a:off x="1691303" y="3960293"/>
+              <a:off x="1672195" y="3960968"/>
               <a:ext cx="75116" cy="75116"/>
             </a:xfrm>
             <a:prstGeom prst="ellipse">
@@ -8379,7 +8379,7 @@
           </p:nvSpPr>
           <p:spPr>
             <a:xfrm>
-              <a:off x="1397593" y="3987961"/>
+              <a:off x="1617249" y="3986323"/>
               <a:ext cx="75116" cy="75116"/>
             </a:xfrm>
             <a:prstGeom prst="ellipse">
@@ -8405,7 +8405,7 @@
           </p:nvSpPr>
           <p:spPr>
             <a:xfrm>
-              <a:off x="1557519" y="3870755"/>
+              <a:off x="1691340" y="3872413"/>
               <a:ext cx="75116" cy="75116"/>
             </a:xfrm>
             <a:prstGeom prst="ellipse">
@@ -8431,7 +8431,7 @@
           </p:nvSpPr>
           <p:spPr>
             <a:xfrm>
-              <a:off x="1722765" y="3578062"/>
+              <a:off x="1748644" y="3576592"/>
               <a:ext cx="75116" cy="75116"/>
             </a:xfrm>
             <a:prstGeom prst="ellipse">
@@ -8457,7 +8457,7 @@
           </p:nvSpPr>
           <p:spPr>
             <a:xfrm>
-              <a:off x="1447167" y="3962084"/>
+              <a:off x="1740899" y="3959163"/>
               <a:ext cx="75116" cy="75116"/>
             </a:xfrm>
             <a:prstGeom prst="ellipse">
@@ -8483,7 +8483,7 @@
           </p:nvSpPr>
           <p:spPr>
             <a:xfrm>
-              <a:off x="1587309" y="3921109"/>
+              <a:off x="1480270" y="3919032"/>
               <a:ext cx="75116" cy="75116"/>
             </a:xfrm>
             <a:prstGeom prst="ellipse">
@@ -8509,7 +8509,7 @@
           </p:nvSpPr>
           <p:spPr>
             <a:xfrm>
-              <a:off x="1774718" y="3871126"/>
+              <a:off x="1397593" y="3871204"/>
               <a:ext cx="75116" cy="75116"/>
             </a:xfrm>
             <a:prstGeom prst="ellipse">
@@ -8535,7 +8535,7 @@
           </p:nvSpPr>
           <p:spPr>
             <a:xfrm>
-              <a:off x="2204863" y="4088507"/>
+              <a:off x="2167668" y="4088619"/>
               <a:ext cx="75116" cy="75116"/>
             </a:xfrm>
             <a:prstGeom prst="ellipse">
@@ -8561,7 +8561,7 @@
           </p:nvSpPr>
           <p:spPr>
             <a:xfrm>
-              <a:off x="2359239" y="4131320"/>
+              <a:off x="2281487" y="4132371"/>
               <a:ext cx="75116" cy="75116"/>
             </a:xfrm>
             <a:prstGeom prst="ellipse">
@@ -8587,7 +8587,7 @@
           </p:nvSpPr>
           <p:spPr>
             <a:xfrm>
-              <a:off x="2168313" y="3084082"/>
+              <a:off x="2117514" y="3083454"/>
               <a:ext cx="75116" cy="75116"/>
             </a:xfrm>
             <a:prstGeom prst="ellipse">
@@ -8613,7 +8613,7 @@
           </p:nvSpPr>
           <p:spPr>
             <a:xfrm>
-              <a:off x="2369624" y="4018179"/>
+              <a:off x="2437008" y="4015401"/>
               <a:ext cx="75116" cy="75116"/>
             </a:xfrm>
             <a:prstGeom prst="ellipse">
@@ -8639,7 +8639,7 @@
           </p:nvSpPr>
           <p:spPr>
             <a:xfrm>
-              <a:off x="2387263" y="4038264"/>
+              <a:off x="2392351" y="4038340"/>
               <a:ext cx="75116" cy="75116"/>
             </a:xfrm>
             <a:prstGeom prst="ellipse">
@@ -8665,7 +8665,7 @@
           </p:nvSpPr>
           <p:spPr>
             <a:xfrm>
-              <a:off x="2487679" y="3892418"/>
+              <a:off x="2224049" y="3892846"/>
               <a:ext cx="75116" cy="75116"/>
             </a:xfrm>
             <a:prstGeom prst="ellipse">
@@ -8691,7 +8691,7 @@
           </p:nvSpPr>
           <p:spPr>
             <a:xfrm>
-              <a:off x="2165479" y="4039369"/>
+              <a:off x="2152747" y="4039881"/>
               <a:ext cx="75116" cy="75116"/>
             </a:xfrm>
             <a:prstGeom prst="ellipse">
@@ -8717,7 +8717,7 @@
           </p:nvSpPr>
           <p:spPr>
             <a:xfrm>
-              <a:off x="2084927" y="4042177"/>
+              <a:off x="2488858" y="4041650"/>
               <a:ext cx="75116" cy="75116"/>
             </a:xfrm>
             <a:prstGeom prst="ellipse">
@@ -8743,7 +8743,7 @@
           </p:nvSpPr>
           <p:spPr>
             <a:xfrm>
-              <a:off x="2483019" y="3494220"/>
+              <a:off x="2441289" y="3495311"/>
               <a:ext cx="75116" cy="75116"/>
             </a:xfrm>
             <a:prstGeom prst="ellipse">
@@ -8769,7 +8769,7 @@
           </p:nvSpPr>
           <p:spPr>
             <a:xfrm>
-              <a:off x="2160474" y="3619193"/>
+              <a:off x="2291342" y="3617723"/>
               <a:ext cx="75116" cy="75116"/>
             </a:xfrm>
             <a:prstGeom prst="ellipse">
@@ -8795,7 +8795,7 @@
           </p:nvSpPr>
           <p:spPr>
             <a:xfrm>
-              <a:off x="2321373" y="3815627"/>
+              <a:off x="2140818" y="3814458"/>
               <a:ext cx="75116" cy="75116"/>
             </a:xfrm>
             <a:prstGeom prst="ellipse">
@@ -8821,7 +8821,7 @@
           </p:nvSpPr>
           <p:spPr>
             <a:xfrm>
-              <a:off x="2354130" y="3890580"/>
+              <a:off x="2333557" y="3889012"/>
               <a:ext cx="75116" cy="75116"/>
             </a:xfrm>
             <a:prstGeom prst="ellipse">
@@ -8847,7 +8847,7 @@
           </p:nvSpPr>
           <p:spPr>
             <a:xfrm>
-              <a:off x="2375621" y="3751666"/>
+              <a:off x="2262684" y="3752898"/>
               <a:ext cx="75116" cy="75116"/>
             </a:xfrm>
             <a:prstGeom prst="ellipse">
@@ -8873,7 +8873,7 @@
           </p:nvSpPr>
           <p:spPr>
             <a:xfrm>
-              <a:off x="2390257" y="3942908"/>
+              <a:off x="2340132" y="3942469"/>
               <a:ext cx="75116" cy="75116"/>
             </a:xfrm>
             <a:prstGeom prst="ellipse">
@@ -8899,7 +8899,7 @@
           </p:nvSpPr>
           <p:spPr>
             <a:xfrm>
-              <a:off x="2271854" y="3965834"/>
+              <a:off x="2106166" y="3964207"/>
               <a:ext cx="75116" cy="75116"/>
             </a:xfrm>
             <a:prstGeom prst="ellipse">
@@ -8925,7 +8925,7 @@
           </p:nvSpPr>
           <p:spPr>
             <a:xfrm>
-              <a:off x="2158202" y="3850417"/>
+              <a:off x="2247371" y="3849614"/>
               <a:ext cx="75116" cy="75116"/>
             </a:xfrm>
             <a:prstGeom prst="ellipse">
@@ -8951,7 +8951,7 @@
           </p:nvSpPr>
           <p:spPr>
             <a:xfrm>
-              <a:off x="2476619" y="3364555"/>
+              <a:off x="2224461" y="3363304"/>
               <a:ext cx="75116" cy="75116"/>
             </a:xfrm>
             <a:prstGeom prst="ellipse">
@@ -8977,7 +8977,7 @@
           </p:nvSpPr>
           <p:spPr>
             <a:xfrm>
-              <a:off x="2177397" y="3587494"/>
+              <a:off x="2485819" y="3588648"/>
               <a:ext cx="75116" cy="75116"/>
             </a:xfrm>
             <a:prstGeom prst="ellipse">
@@ -9003,7 +9003,7 @@
           </p:nvSpPr>
           <p:spPr>
             <a:xfrm>
-              <a:off x="3150159" y="3838151"/>
+              <a:off x="2991776" y="3837440"/>
               <a:ext cx="75116" cy="75116"/>
             </a:xfrm>
             <a:prstGeom prst="ellipse">
@@ -9029,7 +9029,7 @@
           </p:nvSpPr>
           <p:spPr>
             <a:xfrm>
-              <a:off x="2879186" y="3739567"/>
+              <a:off x="2983698" y="3740973"/>
               <a:ext cx="75116" cy="75116"/>
             </a:xfrm>
             <a:prstGeom prst="ellipse">
@@ -9055,7 +9055,7 @@
           </p:nvSpPr>
           <p:spPr>
             <a:xfrm>
-              <a:off x="3127567" y="4119963"/>
+              <a:off x="3021441" y="4120614"/>
               <a:ext cx="75116" cy="75116"/>
             </a:xfrm>
             <a:prstGeom prst="ellipse">
@@ -9081,7 +9081,7 @@
           </p:nvSpPr>
           <p:spPr>
             <a:xfrm>
-              <a:off x="2983451" y="4114141"/>
+              <a:off x="2819235" y="4112660"/>
               <a:ext cx="75116" cy="75116"/>
             </a:xfrm>
             <a:prstGeom prst="ellipse">
@@ -9107,7 +9107,7 @@
           </p:nvSpPr>
           <p:spPr>
             <a:xfrm>
-              <a:off x="2850721" y="3929991"/>
+              <a:off x="2977533" y="3931654"/>
               <a:ext cx="75116" cy="75116"/>
             </a:xfrm>
             <a:prstGeom prst="ellipse">
@@ -9133,7 +9133,7 @@
           </p:nvSpPr>
           <p:spPr>
             <a:xfrm>
-              <a:off x="2978831" y="4125047"/>
+              <a:off x="3142509" y="4123735"/>
               <a:ext cx="75116" cy="75116"/>
             </a:xfrm>
             <a:prstGeom prst="ellipse">
@@ -9159,7 +9159,7 @@
           </p:nvSpPr>
           <p:spPr>
             <a:xfrm>
-              <a:off x="2839309" y="3271010"/>
+              <a:off x="3183792" y="3271088"/>
               <a:ext cx="75116" cy="75116"/>
             </a:xfrm>
             <a:prstGeom prst="ellipse">
@@ -9185,7 +9185,7 @@
           </p:nvSpPr>
           <p:spPr>
             <a:xfrm>
-              <a:off x="3184332" y="4140663"/>
+              <a:off x="2821237" y="4140663"/>
               <a:ext cx="75116" cy="75116"/>
             </a:xfrm>
             <a:prstGeom prst="ellipse">
@@ -9211,7 +9211,7 @@
           </p:nvSpPr>
           <p:spPr>
             <a:xfrm>
-              <a:off x="3060994" y="3692436"/>
+              <a:off x="3050715" y="3693571"/>
               <a:ext cx="75116" cy="75116"/>
             </a:xfrm>
             <a:prstGeom prst="ellipse">
@@ -9237,7 +9237,7 @@
           </p:nvSpPr>
           <p:spPr>
             <a:xfrm>
-              <a:off x="2837545" y="3106713"/>
+              <a:off x="2889425" y="3105515"/>
               <a:ext cx="75116" cy="75116"/>
             </a:xfrm>
             <a:prstGeom prst="ellipse">
@@ -9263,7 +9263,7 @@
           </p:nvSpPr>
           <p:spPr>
             <a:xfrm>
-              <a:off x="3167537" y="3007511"/>
+              <a:off x="3105272" y="3007511"/>
               <a:ext cx="75116" cy="75116"/>
             </a:xfrm>
             <a:prstGeom prst="ellipse">
@@ -9289,7 +9289,7 @@
           </p:nvSpPr>
           <p:spPr>
             <a:xfrm>
-              <a:off x="3182257" y="3677736"/>
+              <a:off x="3110131" y="3677406"/>
               <a:ext cx="75116" cy="75116"/>
             </a:xfrm>
             <a:prstGeom prst="ellipse">
@@ -9315,7 +9315,7 @@
           </p:nvSpPr>
           <p:spPr>
             <a:xfrm>
-              <a:off x="2853882" y="3558024"/>
+              <a:off x="3168607" y="3556993"/>
               <a:ext cx="75116" cy="75116"/>
             </a:xfrm>
             <a:prstGeom prst="ellipse">
@@ -9341,7 +9341,7 @@
           </p:nvSpPr>
           <p:spPr>
             <a:xfrm>
-              <a:off x="3132639" y="3516482"/>
+              <a:off x="2874170" y="3518353"/>
               <a:ext cx="75116" cy="75116"/>
             </a:xfrm>
             <a:prstGeom prst="ellipse">
@@ -9367,7 +9367,7 @@
           </p:nvSpPr>
           <p:spPr>
             <a:xfrm>
-              <a:off x="3167924" y="3549597"/>
+              <a:off x="2808942" y="3551695"/>
               <a:ext cx="75116" cy="75116"/>
             </a:xfrm>
             <a:prstGeom prst="ellipse">
@@ -9393,7 +9393,7 @@
           </p:nvSpPr>
           <p:spPr>
             <a:xfrm>
-              <a:off x="2929284" y="4055414"/>
+              <a:off x="2976817" y="4053136"/>
               <a:ext cx="75116" cy="75116"/>
             </a:xfrm>
             <a:prstGeom prst="ellipse">
@@ -9419,7 +9419,7 @@
           </p:nvSpPr>
           <p:spPr>
             <a:xfrm>
-              <a:off x="3001427" y="3505043"/>
+              <a:off x="2882951" y="3504811"/>
               <a:ext cx="75116" cy="75116"/>
             </a:xfrm>
             <a:prstGeom prst="ellipse">
@@ -9445,7 +9445,7 @@
           </p:nvSpPr>
           <p:spPr>
             <a:xfrm>
-              <a:off x="2818015" y="3886483"/>
+              <a:off x="2936986" y="3884550"/>
               <a:ext cx="75116" cy="75116"/>
             </a:xfrm>
             <a:prstGeom prst="ellipse">
@@ -9471,7 +9471,7 @@
           </p:nvSpPr>
           <p:spPr>
             <a:xfrm>
-              <a:off x="3067632" y="3904410"/>
+              <a:off x="3126030" y="3904380"/>
               <a:ext cx="75116" cy="75116"/>
             </a:xfrm>
             <a:prstGeom prst="ellipse">
@@ -9497,7 +9497,7 @@
           </p:nvSpPr>
           <p:spPr>
             <a:xfrm>
-              <a:off x="3102111" y="3722958"/>
+              <a:off x="2903621" y="3722771"/>
               <a:ext cx="75116" cy="75116"/>
             </a:xfrm>
             <a:prstGeom prst="ellipse">
@@ -9523,7 +9523,7 @@
           </p:nvSpPr>
           <p:spPr>
             <a:xfrm>
-              <a:off x="3575207" y="3709962"/>
+              <a:off x="3693425" y="3709481"/>
               <a:ext cx="75116" cy="75116"/>
             </a:xfrm>
             <a:prstGeom prst="ellipse">
@@ -9549,7 +9549,7 @@
           </p:nvSpPr>
           <p:spPr>
             <a:xfrm>
-              <a:off x="3650248" y="3809023"/>
+              <a:off x="3768521" y="3808646"/>
               <a:ext cx="75116" cy="75116"/>
             </a:xfrm>
             <a:prstGeom prst="ellipse">
@@ -9575,7 +9575,7 @@
           </p:nvSpPr>
           <p:spPr>
             <a:xfrm>
-              <a:off x="3515459" y="3739650"/>
+              <a:off x="3798306" y="3739969"/>
               <a:ext cx="75116" cy="75116"/>
             </a:xfrm>
             <a:prstGeom prst="ellipse">
@@ -9601,7 +9601,7 @@
           </p:nvSpPr>
           <p:spPr>
             <a:xfrm>
-              <a:off x="3729401" y="4006638"/>
+              <a:off x="3614376" y="4006506"/>
               <a:ext cx="75116" cy="75116"/>
             </a:xfrm>
             <a:prstGeom prst="ellipse">
@@ -9627,7 +9627,7 @@
           </p:nvSpPr>
           <p:spPr>
             <a:xfrm>
-              <a:off x="3862420" y="3508276"/>
+              <a:off x="3546274" y="3508866"/>
               <a:ext cx="75116" cy="75116"/>
             </a:xfrm>
             <a:prstGeom prst="ellipse">
@@ -9653,7 +9653,7 @@
           </p:nvSpPr>
           <p:spPr>
             <a:xfrm>
-              <a:off x="3603138" y="3827569"/>
+              <a:off x="3690247" y="3824937"/>
               <a:ext cx="75116" cy="75116"/>
             </a:xfrm>
             <a:prstGeom prst="ellipse">
@@ -9679,7 +9679,7 @@
           </p:nvSpPr>
           <p:spPr>
             <a:xfrm>
-              <a:off x="3780252" y="3934364"/>
+              <a:off x="3677802" y="3933397"/>
               <a:ext cx="75116" cy="75116"/>
             </a:xfrm>
             <a:prstGeom prst="ellipse">
@@ -9705,7 +9705,7 @@
           </p:nvSpPr>
           <p:spPr>
             <a:xfrm>
-              <a:off x="3571637" y="3662854"/>
+              <a:off x="3684053" y="3663093"/>
               <a:ext cx="75116" cy="75116"/>
             </a:xfrm>
             <a:prstGeom prst="ellipse">
@@ -9731,7 +9731,7 @@
           </p:nvSpPr>
           <p:spPr>
             <a:xfrm>
-              <a:off x="3894495" y="3599726"/>
+              <a:off x="3892377" y="3599787"/>
               <a:ext cx="75116" cy="75116"/>
             </a:xfrm>
             <a:prstGeom prst="ellipse">
@@ -9757,7 +9757,7 @@
           </p:nvSpPr>
           <p:spPr>
             <a:xfrm>
-              <a:off x="3807444" y="3333511"/>
+              <a:off x="3576085" y="3333691"/>
               <a:ext cx="75116" cy="75116"/>
             </a:xfrm>
             <a:prstGeom prst="ellipse">
@@ -9783,7 +9783,7 @@
           </p:nvSpPr>
           <p:spPr>
             <a:xfrm>
-              <a:off x="3564236" y="3356379"/>
+              <a:off x="3844045" y="3357764"/>
               <a:ext cx="75116" cy="75116"/>
             </a:xfrm>
             <a:prstGeom prst="ellipse">
@@ -9809,7 +9809,7 @@
           </p:nvSpPr>
           <p:spPr>
             <a:xfrm>
-              <a:off x="3501343" y="3337278"/>
+              <a:off x="3685376" y="3337558"/>
               <a:ext cx="75116" cy="75116"/>
             </a:xfrm>
             <a:prstGeom prst="ellipse">
@@ -9835,7 +9835,7 @@
           </p:nvSpPr>
           <p:spPr>
             <a:xfrm>
-              <a:off x="3541703" y="3434678"/>
+              <a:off x="3894495" y="3434700"/>
               <a:ext cx="75116" cy="75116"/>
             </a:xfrm>
             <a:prstGeom prst="ellipse">
@@ -9861,7 +9861,7 @@
           </p:nvSpPr>
           <p:spPr>
             <a:xfrm>
-              <a:off x="3698502" y="3670721"/>
+              <a:off x="3530877" y="3669728"/>
               <a:ext cx="75116" cy="75116"/>
             </a:xfrm>
             <a:prstGeom prst="ellipse">
@@ -9887,7 +9887,7 @@
           </p:nvSpPr>
           <p:spPr>
             <a:xfrm>
-              <a:off x="3554320" y="3697092"/>
+              <a:off x="3838509" y="3696439"/>
               <a:ext cx="75116" cy="75116"/>
             </a:xfrm>
             <a:prstGeom prst="ellipse">
@@ -9913,7 +9913,7 @@
           </p:nvSpPr>
           <p:spPr>
             <a:xfrm>
-              <a:off x="3890426" y="3602160"/>
+              <a:off x="3639664" y="3603095"/>
               <a:ext cx="75116" cy="75116"/>
             </a:xfrm>
             <a:prstGeom prst="ellipse">
@@ -9939,7 +9939,7 @@
           </p:nvSpPr>
           <p:spPr>
             <a:xfrm>
-              <a:off x="3706434" y="3564426"/>
+              <a:off x="3602677" y="3564554"/>
               <a:ext cx="75116" cy="75116"/>
             </a:xfrm>
             <a:prstGeom prst="ellipse">
@@ -9965,7 +9965,7 @@
           </p:nvSpPr>
           <p:spPr>
             <a:xfrm>
-              <a:off x="3504761" y="3553215"/>
+              <a:off x="3819701" y="3552841"/>
               <a:ext cx="75116" cy="75116"/>
             </a:xfrm>
             <a:prstGeom prst="ellipse">
@@ -9991,7 +9991,7 @@
           </p:nvSpPr>
           <p:spPr>
             <a:xfrm>
-              <a:off x="3772586" y="3382482"/>
+              <a:off x="3635305" y="3383162"/>
               <a:ext cx="75116" cy="75116"/>
             </a:xfrm>
             <a:prstGeom prst="ellipse">
@@ -10017,7 +10017,7 @@
           </p:nvSpPr>
           <p:spPr>
             <a:xfrm>
-              <a:off x="3682925" y="3495998"/>
+              <a:off x="3591857" y="3495254"/>
               <a:ext cx="75116" cy="75116"/>
             </a:xfrm>
             <a:prstGeom prst="ellipse">
@@ -10043,7 +10043,7 @@
           </p:nvSpPr>
           <p:spPr>
             <a:xfrm>
-              <a:off x="3730666" y="3535891"/>
+              <a:off x="3568467" y="3536712"/>
               <a:ext cx="75116" cy="75116"/>
             </a:xfrm>
             <a:prstGeom prst="ellipse">
@@ -10069,7 +10069,7 @@
           </p:nvSpPr>
           <p:spPr>
             <a:xfrm>
-              <a:off x="3641377" y="3356295"/>
+              <a:off x="3655599" y="3357388"/>
               <a:ext cx="75116" cy="75116"/>
             </a:xfrm>
             <a:prstGeom prst="ellipse">
@@ -10095,7 +10095,7 @@
           </p:nvSpPr>
           <p:spPr>
             <a:xfrm>
-              <a:off x="3694814" y="3564135"/>
+              <a:off x="3634886" y="3566249"/>
               <a:ext cx="75116" cy="75116"/>
             </a:xfrm>
             <a:prstGeom prst="ellipse">
@@ -10121,7 +10121,7 @@
           </p:nvSpPr>
           <p:spPr>
             <a:xfrm>
-              <a:off x="3568789" y="3405086"/>
+              <a:off x="3619123" y="3403911"/>
               <a:ext cx="75116" cy="75116"/>
             </a:xfrm>
             <a:prstGeom prst="ellipse">
@@ -10147,42 +10147,42 @@
           </p:nvSpPr>
           <p:spPr>
             <a:xfrm>
-              <a:off x="1609722" y="3452987"/>
-              <a:ext cx="2134363" cy="683125"/>
+              <a:off x="1620462" y="3452912"/>
+              <a:ext cx="2128369" cy="682783"/>
             </a:xfrm>
             <a:custGeom>
               <a:avLst/>
               <a:pathLst>
-                <a:path w="2134363" h="683125">
+                <a:path w="2128369" h="682783">
                   <a:moveTo>
-                    <a:pt x="0" y="278586"/>
+                    <a:pt x="0" y="278447"/>
                   </a:moveTo>
                   <a:lnTo>
-                    <a:pt x="1127628" y="206318"/>
+                    <a:pt x="1124461" y="206215"/>
                   </a:lnTo>
                   <a:lnTo>
-                    <a:pt x="1422908" y="159025"/>
+                    <a:pt x="1418912" y="158945"/>
                   </a:lnTo>
                   <a:lnTo>
-                    <a:pt x="1839082" y="71368"/>
+                    <a:pt x="1833918" y="71332"/>
                   </a:lnTo>
                   <a:lnTo>
-                    <a:pt x="2134363" y="0"/>
+                    <a:pt x="2128369" y="0"/>
                   </a:lnTo>
                   <a:lnTo>
-                    <a:pt x="2134363" y="362872"/>
+                    <a:pt x="2128369" y="362690"/>
                   </a:lnTo>
                   <a:lnTo>
-                    <a:pt x="1839082" y="374350"/>
+                    <a:pt x="1833918" y="374163"/>
                   </a:lnTo>
                   <a:lnTo>
-                    <a:pt x="1422908" y="403460"/>
+                    <a:pt x="1418912" y="403258"/>
                   </a:lnTo>
                   <a:lnTo>
-                    <a:pt x="1127628" y="439013"/>
+                    <a:pt x="1124461" y="438794"/>
                   </a:lnTo>
                   <a:lnTo>
-                    <a:pt x="0" y="683125"/>
+                    <a:pt x="0" y="682783"/>
                   </a:lnTo>
                   <a:close/>
                 </a:path>
@@ -10208,27 +10208,27 @@
           </p:nvSpPr>
           <p:spPr>
             <a:xfrm>
-              <a:off x="1609722" y="3452987"/>
-              <a:ext cx="2134363" cy="278586"/>
+              <a:off x="1620462" y="3452912"/>
+              <a:ext cx="2128369" cy="278447"/>
             </a:xfrm>
             <a:custGeom>
               <a:avLst/>
               <a:pathLst>
-                <a:path w="2134363" h="278586">
+                <a:path w="2128369" h="278447">
                   <a:moveTo>
-                    <a:pt x="0" y="278586"/>
+                    <a:pt x="0" y="278447"/>
                   </a:moveTo>
                   <a:lnTo>
-                    <a:pt x="1127628" y="206318"/>
+                    <a:pt x="1124461" y="206215"/>
                   </a:lnTo>
                   <a:lnTo>
-                    <a:pt x="1422908" y="159025"/>
+                    <a:pt x="1418912" y="158945"/>
                   </a:lnTo>
                   <a:lnTo>
-                    <a:pt x="1839082" y="71368"/>
+                    <a:pt x="1833918" y="71332"/>
                   </a:lnTo>
                   <a:lnTo>
-                    <a:pt x="2134363" y="0"/>
+                    <a:pt x="2128369" y="0"/>
                   </a:lnTo>
                 </a:path>
               </a:pathLst>
@@ -10248,27 +10248,27 @@
           </p:nvSpPr>
           <p:spPr>
             <a:xfrm>
-              <a:off x="1609722" y="3815859"/>
-              <a:ext cx="2134363" cy="320253"/>
+              <a:off x="1620462" y="3815602"/>
+              <a:ext cx="2128369" cy="320092"/>
             </a:xfrm>
             <a:custGeom>
               <a:avLst/>
               <a:pathLst>
-                <a:path w="2134363" h="320253">
+                <a:path w="2128369" h="320092">
                   <a:moveTo>
-                    <a:pt x="2134363" y="0"/>
+                    <a:pt x="2128369" y="0"/>
                   </a:moveTo>
                   <a:lnTo>
-                    <a:pt x="1839082" y="11478"/>
+                    <a:pt x="1833918" y="11472"/>
                   </a:lnTo>
                   <a:lnTo>
-                    <a:pt x="1422908" y="40588"/>
+                    <a:pt x="1418912" y="40567"/>
                   </a:lnTo>
                   <a:lnTo>
-                    <a:pt x="1127628" y="76141"/>
+                    <a:pt x="1124461" y="76103"/>
                   </a:lnTo>
                   <a:lnTo>
-                    <a:pt x="0" y="320253"/>
+                    <a:pt x="0" y="320092"/>
                   </a:lnTo>
                 </a:path>
               </a:pathLst>
@@ -10288,27 +10288,27 @@
           </p:nvSpPr>
           <p:spPr>
             <a:xfrm>
-              <a:off x="1609722" y="3634423"/>
-              <a:ext cx="2134363" cy="299420"/>
+              <a:off x="1620462" y="3634257"/>
+              <a:ext cx="2128369" cy="299270"/>
             </a:xfrm>
             <a:custGeom>
               <a:avLst/>
               <a:pathLst>
-                <a:path w="2134363" h="299420">
+                <a:path w="2128369" h="299270">
                   <a:moveTo>
-                    <a:pt x="0" y="299420"/>
+                    <a:pt x="0" y="299270"/>
                   </a:moveTo>
                   <a:lnTo>
-                    <a:pt x="1127628" y="141230"/>
+                    <a:pt x="1124461" y="141159"/>
                   </a:lnTo>
                   <a:lnTo>
-                    <a:pt x="1422908" y="99806"/>
+                    <a:pt x="1418912" y="99756"/>
                   </a:lnTo>
                   <a:lnTo>
-                    <a:pt x="1839082" y="41423"/>
+                    <a:pt x="1833918" y="41402"/>
                   </a:lnTo>
                   <a:lnTo>
-                    <a:pt x="2134363" y="0"/>
+                    <a:pt x="2128369" y="0"/>
                   </a:lnTo>
                 </a:path>
               </a:pathLst>
@@ -10337,7 +10337,7 @@
           </p:nvSpPr>
           <p:spPr>
             <a:xfrm>
-              <a:off x="3264391" y="3033946"/>
+              <a:off x="3269137" y="3034018"/>
               <a:ext cx="479694" cy="82021"/>
             </a:xfrm>
             <a:prstGeom prst="rect">
@@ -10444,7 +10444,7 @@
           </p:nvSpPr>
           <p:spPr>
             <a:xfrm rot="-5400000">
-              <a:off x="1140740" y="4149000"/>
+              <a:off x="1140740" y="4148557"/>
               <a:ext cx="141274" cy="72877"/>
             </a:xfrm>
             <a:prstGeom prst="rect">
@@ -10490,7 +10490,7 @@
           </p:nvSpPr>
           <p:spPr>
             <a:xfrm rot="-5400000">
-              <a:off x="1140740" y="3897458"/>
+              <a:off x="1140740" y="3897142"/>
               <a:ext cx="141274" cy="72877"/>
             </a:xfrm>
             <a:prstGeom prst="rect">
@@ -10536,7 +10536,7 @@
           </p:nvSpPr>
           <p:spPr>
             <a:xfrm rot="-5400000">
-              <a:off x="1140740" y="3645917"/>
+              <a:off x="1140740" y="3645726"/>
               <a:ext cx="141274" cy="72877"/>
             </a:xfrm>
             <a:prstGeom prst="rect">
@@ -10582,7 +10582,7 @@
           </p:nvSpPr>
           <p:spPr>
             <a:xfrm rot="-5400000">
-              <a:off x="1140740" y="3394375"/>
+              <a:off x="1140740" y="3394310"/>
               <a:ext cx="141274" cy="72877"/>
             </a:xfrm>
             <a:prstGeom prst="rect">
@@ -10628,7 +10628,7 @@
           </p:nvSpPr>
           <p:spPr>
             <a:xfrm rot="-5400000">
-              <a:off x="1140740" y="3142833"/>
+              <a:off x="1140740" y="3142894"/>
               <a:ext cx="141274" cy="72877"/>
             </a:xfrm>
             <a:prstGeom prst="rect">
@@ -10674,7 +10674,7 @@
           </p:nvSpPr>
           <p:spPr>
             <a:xfrm rot="-5400000">
-              <a:off x="1140740" y="2891291"/>
+              <a:off x="1140740" y="2891479"/>
               <a:ext cx="141274" cy="72877"/>
             </a:xfrm>
             <a:prstGeom prst="rect">
@@ -10720,7 +10720,7 @@
           </p:nvSpPr>
           <p:spPr>
             <a:xfrm>
-              <a:off x="1281838" y="4185439"/>
+              <a:off x="1281838" y="4184996"/>
               <a:ext cx="28468" cy="0"/>
             </a:xfrm>
             <a:custGeom>
@@ -10760,7 +10760,7 @@
           </p:nvSpPr>
           <p:spPr>
             <a:xfrm>
-              <a:off x="1281838" y="3933897"/>
+              <a:off x="1281838" y="3933581"/>
               <a:ext cx="28468" cy="0"/>
             </a:xfrm>
             <a:custGeom>
@@ -10800,7 +10800,7 @@
           </p:nvSpPr>
           <p:spPr>
             <a:xfrm>
-              <a:off x="1281838" y="3682355"/>
+              <a:off x="1281838" y="3682165"/>
               <a:ext cx="28468" cy="0"/>
             </a:xfrm>
             <a:custGeom>
@@ -10840,7 +10840,7 @@
           </p:nvSpPr>
           <p:spPr>
             <a:xfrm>
-              <a:off x="1281838" y="3430814"/>
+              <a:off x="1281838" y="3430749"/>
               <a:ext cx="28468" cy="0"/>
             </a:xfrm>
             <a:custGeom>
@@ -10880,7 +10880,7 @@
           </p:nvSpPr>
           <p:spPr>
             <a:xfrm>
-              <a:off x="1281838" y="3179272"/>
+              <a:off x="1281838" y="3179333"/>
               <a:ext cx="28468" cy="0"/>
             </a:xfrm>
             <a:custGeom>
@@ -10920,7 +10920,7 @@
           </p:nvSpPr>
           <p:spPr>
             <a:xfrm>
-              <a:off x="1281838" y="2927730"/>
+              <a:off x="1281838" y="2927918"/>
               <a:ext cx="28468" cy="0"/>
             </a:xfrm>
             <a:custGeom>
@@ -11000,7 +11000,7 @@
           </p:nvSpPr>
           <p:spPr>
             <a:xfrm>
-              <a:off x="1609722" y="4234879"/>
+              <a:off x="1620462" y="4234879"/>
               <a:ext cx="0" cy="28468"/>
             </a:xfrm>
             <a:custGeom>
@@ -11040,7 +11040,7 @@
           </p:nvSpPr>
           <p:spPr>
             <a:xfrm>
-              <a:off x="2321176" y="4234879"/>
+              <a:off x="2329919" y="4234879"/>
               <a:ext cx="0" cy="28468"/>
             </a:xfrm>
             <a:custGeom>
@@ -11080,7 +11080,7 @@
           </p:nvSpPr>
           <p:spPr>
             <a:xfrm>
-              <a:off x="3032630" y="4234879"/>
+              <a:off x="3039375" y="4234879"/>
               <a:ext cx="0" cy="28468"/>
             </a:xfrm>
             <a:custGeom>
@@ -11120,7 +11120,7 @@
           </p:nvSpPr>
           <p:spPr>
             <a:xfrm>
-              <a:off x="3744085" y="4234879"/>
+              <a:off x="3748831" y="4234879"/>
               <a:ext cx="0" cy="28468"/>
             </a:xfrm>
             <a:custGeom>
@@ -11160,7 +11160,7 @@
           </p:nvSpPr>
           <p:spPr>
             <a:xfrm>
-              <a:off x="1581467" y="4286122"/>
+              <a:off x="1592207" y="4286122"/>
               <a:ext cx="56509" cy="72877"/>
             </a:xfrm>
             <a:prstGeom prst="rect">
@@ -11206,7 +11206,7 @@
           </p:nvSpPr>
           <p:spPr>
             <a:xfrm>
-              <a:off x="2292921" y="4286122"/>
+              <a:off x="2301664" y="4286122"/>
               <a:ext cx="56509" cy="72877"/>
             </a:xfrm>
             <a:prstGeom prst="rect">
@@ -11252,7 +11252,7 @@
           </p:nvSpPr>
           <p:spPr>
             <a:xfrm>
-              <a:off x="3004375" y="4286122"/>
+              <a:off x="3011120" y="4286122"/>
               <a:ext cx="56509" cy="72877"/>
             </a:xfrm>
             <a:prstGeom prst="rect">
@@ -11298,7 +11298,7 @@
           </p:nvSpPr>
           <p:spPr>
             <a:xfrm>
-              <a:off x="3715830" y="4286122"/>
+              <a:off x="3720576" y="4286122"/>
               <a:ext cx="56509" cy="72877"/>
             </a:xfrm>
             <a:prstGeom prst="rect">
@@ -11462,7 +11462,7 @@
           </p:nvSpPr>
           <p:spPr>
             <a:xfrm>
-              <a:off x="4512011" y="3737141"/>
+              <a:off x="4386023" y="3736082"/>
               <a:ext cx="75116" cy="75116"/>
             </a:xfrm>
             <a:prstGeom prst="ellipse">
@@ -11488,7 +11488,7 @@
           </p:nvSpPr>
           <p:spPr>
             <a:xfrm>
-              <a:off x="4466929" y="3122503"/>
+              <a:off x="4334347" y="3123874"/>
               <a:ext cx="75116" cy="75116"/>
             </a:xfrm>
             <a:prstGeom prst="ellipse">
@@ -11514,7 +11514,7 @@
           </p:nvSpPr>
           <p:spPr>
             <a:xfrm>
-              <a:off x="4273874" y="3799900"/>
+              <a:off x="4304269" y="3800590"/>
               <a:ext cx="75116" cy="75116"/>
             </a:xfrm>
             <a:prstGeom prst="ellipse">
@@ -11540,7 +11540,7 @@
           </p:nvSpPr>
           <p:spPr>
             <a:xfrm>
-              <a:off x="4294144" y="3583088"/>
+              <a:off x="4327241" y="3582744"/>
               <a:ext cx="75116" cy="75116"/>
             </a:xfrm>
             <a:prstGeom prst="ellipse">
@@ -11566,7 +11566,7 @@
           </p:nvSpPr>
           <p:spPr>
             <a:xfrm>
-              <a:off x="4565535" y="3845626"/>
+              <a:off x="4455248" y="3843656"/>
               <a:ext cx="75116" cy="75116"/>
             </a:xfrm>
             <a:prstGeom prst="ellipse">
@@ -11592,7 +11592,7 @@
           </p:nvSpPr>
           <p:spPr>
             <a:xfrm>
-              <a:off x="4400831" y="3043701"/>
+              <a:off x="4314301" y="3045094"/>
               <a:ext cx="75116" cy="75116"/>
             </a:xfrm>
             <a:prstGeom prst="ellipse">
@@ -11618,7 +11618,7 @@
           </p:nvSpPr>
           <p:spPr>
             <a:xfrm>
-              <a:off x="4346195" y="3007511"/>
+              <a:off x="4572406" y="3007511"/>
               <a:ext cx="75116" cy="75116"/>
             </a:xfrm>
             <a:prstGeom prst="ellipse">
@@ -11644,7 +11644,7 @@
           </p:nvSpPr>
           <p:spPr>
             <a:xfrm>
-              <a:off x="4544601" y="3341317"/>
+              <a:off x="4593844" y="3339963"/>
               <a:ext cx="75116" cy="75116"/>
             </a:xfrm>
             <a:prstGeom prst="ellipse">
@@ -11670,7 +11670,7 @@
           </p:nvSpPr>
           <p:spPr>
             <a:xfrm>
-              <a:off x="4494319" y="3980980"/>
+              <a:off x="4273874" y="3978440"/>
               <a:ext cx="75116" cy="75116"/>
             </a:xfrm>
             <a:prstGeom prst="ellipse">
@@ -11696,7 +11696,7 @@
           </p:nvSpPr>
           <p:spPr>
             <a:xfrm>
-              <a:off x="4613449" y="3637681"/>
+              <a:off x="4431526" y="3637854"/>
               <a:ext cx="75116" cy="75116"/>
             </a:xfrm>
             <a:prstGeom prst="ellipse">
@@ -11722,7 +11722,7 @@
           </p:nvSpPr>
           <p:spPr>
             <a:xfrm>
-              <a:off x="5353496" y="3884264"/>
+              <a:off x="5038702" y="3884619"/>
               <a:ext cx="75116" cy="75116"/>
             </a:xfrm>
             <a:prstGeom prst="ellipse">
@@ -11748,7 +11748,7 @@
           </p:nvSpPr>
           <p:spPr>
             <a:xfrm>
-              <a:off x="5159873" y="3421979"/>
+              <a:off x="5050531" y="3421815"/>
               <a:ext cx="75116" cy="75116"/>
             </a:xfrm>
             <a:prstGeom prst="ellipse">
@@ -11774,7 +11774,7 @@
           </p:nvSpPr>
           <p:spPr>
             <a:xfrm>
-              <a:off x="5122873" y="3805471"/>
+              <a:off x="5011367" y="3804507"/>
               <a:ext cx="75116" cy="75116"/>
             </a:xfrm>
             <a:prstGeom prst="ellipse">
@@ -11800,7 +11800,7 @@
           </p:nvSpPr>
           <p:spPr>
             <a:xfrm>
-              <a:off x="5237710" y="4018928"/>
+              <a:off x="4956091" y="4018353"/>
               <a:ext cx="75116" cy="75116"/>
             </a:xfrm>
             <a:prstGeom prst="ellipse">
@@ -11826,7 +11826,7 @@
           </p:nvSpPr>
           <p:spPr>
             <a:xfrm>
-              <a:off x="4974438" y="3701871"/>
+              <a:off x="5191944" y="3701231"/>
               <a:ext cx="75116" cy="75116"/>
             </a:xfrm>
             <a:prstGeom prst="ellipse">
@@ -11852,7 +11852,7 @@
           </p:nvSpPr>
           <p:spPr>
             <a:xfrm>
-              <a:off x="5218886" y="3398945"/>
+              <a:off x="5133534" y="3397795"/>
               <a:ext cx="75116" cy="75116"/>
             </a:xfrm>
             <a:prstGeom prst="ellipse">
@@ -11878,7 +11878,7 @@
           </p:nvSpPr>
           <p:spPr>
             <a:xfrm>
-              <a:off x="5094142" y="4093872"/>
+              <a:off x="5296414" y="4091578"/>
               <a:ext cx="75116" cy="75116"/>
             </a:xfrm>
             <a:prstGeom prst="ellipse">
@@ -11904,7 +11904,7 @@
           </p:nvSpPr>
           <p:spPr>
             <a:xfrm>
-              <a:off x="5223108" y="3993073"/>
+              <a:off x="5335668" y="3993143"/>
               <a:ext cx="75116" cy="75116"/>
             </a:xfrm>
             <a:prstGeom prst="ellipse">
@@ -11930,7 +11930,7 @@
           </p:nvSpPr>
           <p:spPr>
             <a:xfrm>
-              <a:off x="5180146" y="3870997"/>
+              <a:off x="5294106" y="3871010"/>
               <a:ext cx="75116" cy="75116"/>
             </a:xfrm>
             <a:prstGeom prst="ellipse">
@@ -11956,7 +11956,7 @@
           </p:nvSpPr>
           <p:spPr>
             <a:xfrm>
-              <a:off x="4991746" y="4088232"/>
+              <a:off x="5267995" y="4085950"/>
               <a:ext cx="75116" cy="75116"/>
             </a:xfrm>
             <a:prstGeom prst="ellipse">
@@ -11982,7 +11982,7 @@
           </p:nvSpPr>
           <p:spPr>
             <a:xfrm>
-              <a:off x="5349054" y="3985056"/>
+              <a:off x="5069375" y="3984785"/>
               <a:ext cx="75116" cy="75116"/>
             </a:xfrm>
             <a:prstGeom prst="ellipse">
@@ -12008,7 +12008,7 @@
           </p:nvSpPr>
           <p:spPr>
             <a:xfrm>
-              <a:off x="5305183" y="4087298"/>
+              <a:off x="5213494" y="4087344"/>
               <a:ext cx="75116" cy="75116"/>
             </a:xfrm>
             <a:prstGeom prst="ellipse">
@@ -12034,7 +12034,7 @@
           </p:nvSpPr>
           <p:spPr>
             <a:xfrm>
-              <a:off x="5261116" y="3837431"/>
+              <a:off x="5287787" y="3836408"/>
               <a:ext cx="75116" cy="75116"/>
             </a:xfrm>
             <a:prstGeom prst="ellipse">
@@ -12060,7 +12060,7 @@
           </p:nvSpPr>
           <p:spPr>
             <a:xfrm>
-              <a:off x="5223698" y="3785803"/>
+              <a:off x="5286671" y="3784356"/>
               <a:ext cx="75116" cy="75116"/>
             </a:xfrm>
             <a:prstGeom prst="ellipse">
@@ -12086,7 +12086,7 @@
           </p:nvSpPr>
           <p:spPr>
             <a:xfrm>
-              <a:off x="5200854" y="3561138"/>
+              <a:off x="5342839" y="3559575"/>
               <a:ext cx="75116" cy="75116"/>
             </a:xfrm>
             <a:prstGeom prst="ellipse">
@@ -12112,7 +12112,7 @@
           </p:nvSpPr>
           <p:spPr>
             <a:xfrm>
-              <a:off x="5008179" y="3595499"/>
+              <a:off x="5048787" y="3597680"/>
               <a:ext cx="75116" cy="75116"/>
             </a:xfrm>
             <a:prstGeom prst="ellipse">
@@ -12138,7 +12138,7 @@
           </p:nvSpPr>
           <p:spPr>
             <a:xfrm>
-              <a:off x="5299642" y="3886547"/>
+              <a:off x="5251996" y="3885839"/>
               <a:ext cx="75116" cy="75116"/>
             </a:xfrm>
             <a:prstGeom prst="ellipse">
@@ -12164,7 +12164,7 @@
           </p:nvSpPr>
           <p:spPr>
             <a:xfrm>
-              <a:off x="5186257" y="4140663"/>
+              <a:off x="5216164" y="4140663"/>
               <a:ext cx="75116" cy="75116"/>
             </a:xfrm>
             <a:prstGeom prst="ellipse">
@@ -12190,7 +12190,7 @@
           </p:nvSpPr>
           <p:spPr>
             <a:xfrm>
-              <a:off x="5892494" y="3874785"/>
+              <a:off x="6037342" y="3875592"/>
               <a:ext cx="75116" cy="75116"/>
             </a:xfrm>
             <a:prstGeom prst="ellipse">
@@ -12216,7 +12216,7 @@
           </p:nvSpPr>
           <p:spPr>
             <a:xfrm>
-              <a:off x="5999513" y="3934437"/>
+              <a:off x="5865674" y="3933700"/>
               <a:ext cx="75116" cy="75116"/>
             </a:xfrm>
             <a:prstGeom prst="ellipse">
@@ -12242,7 +12242,7 @@
           </p:nvSpPr>
           <p:spPr>
             <a:xfrm>
-              <a:off x="6009657" y="3914117"/>
+              <a:off x="5793276" y="3912633"/>
               <a:ext cx="75116" cy="75116"/>
             </a:xfrm>
             <a:prstGeom prst="ellipse">
@@ -12268,7 +12268,7 @@
           </p:nvSpPr>
           <p:spPr>
             <a:xfrm>
-              <a:off x="5674536" y="3961029"/>
+              <a:off x="5694867" y="3962594"/>
               <a:ext cx="75116" cy="75116"/>
             </a:xfrm>
             <a:prstGeom prst="ellipse">
@@ -12294,7 +12294,7 @@
           </p:nvSpPr>
           <p:spPr>
             <a:xfrm>
-              <a:off x="5910187" y="3180740"/>
+              <a:off x="5963392" y="3184273"/>
               <a:ext cx="75116" cy="75116"/>
             </a:xfrm>
             <a:prstGeom prst="ellipse">
@@ -12320,7 +12320,7 @@
           </p:nvSpPr>
           <p:spPr>
             <a:xfrm>
-              <a:off x="5870204" y="3224024"/>
+              <a:off x="5668884" y="3222770"/>
               <a:ext cx="75116" cy="75116"/>
             </a:xfrm>
             <a:prstGeom prst="ellipse">
@@ -12346,7 +12346,7 @@
           </p:nvSpPr>
           <p:spPr>
             <a:xfrm>
-              <a:off x="5959135" y="3717726"/>
+              <a:off x="5835459" y="3718713"/>
               <a:ext cx="75116" cy="75116"/>
             </a:xfrm>
             <a:prstGeom prst="ellipse">
@@ -12372,7 +12372,7 @@
           </p:nvSpPr>
           <p:spPr>
             <a:xfrm>
-              <a:off x="5673721" y="3868742"/>
+              <a:off x="5672190" y="3864878"/>
               <a:ext cx="75116" cy="75116"/>
             </a:xfrm>
             <a:prstGeom prst="ellipse">
@@ -12398,7 +12398,7 @@
           </p:nvSpPr>
           <p:spPr>
             <a:xfrm>
-              <a:off x="5786828" y="3975274"/>
+              <a:off x="5816584" y="3973024"/>
               <a:ext cx="75116" cy="75116"/>
             </a:xfrm>
             <a:prstGeom prst="ellipse">
@@ -12424,7 +12424,7 @@
           </p:nvSpPr>
           <p:spPr>
             <a:xfrm>
-              <a:off x="5735933" y="3687107"/>
+              <a:off x="6007801" y="3687408"/>
               <a:ext cx="75116" cy="75116"/>
             </a:xfrm>
             <a:prstGeom prst="ellipse">
@@ -12450,7 +12450,7 @@
           </p:nvSpPr>
           <p:spPr>
             <a:xfrm>
-              <a:off x="5871114" y="3493336"/>
+              <a:off x="5924783" y="3493458"/>
               <a:ext cx="75116" cy="75116"/>
             </a:xfrm>
             <a:prstGeom prst="ellipse">
@@ -12476,7 +12476,7 @@
           </p:nvSpPr>
           <p:spPr>
             <a:xfrm>
-              <a:off x="5879024" y="4024328"/>
+              <a:off x="5883852" y="4024055"/>
               <a:ext cx="75116" cy="75116"/>
             </a:xfrm>
             <a:prstGeom prst="ellipse">
@@ -12502,7 +12502,7 @@
           </p:nvSpPr>
           <p:spPr>
             <a:xfrm>
-              <a:off x="5984347" y="3350681"/>
+              <a:off x="5724869" y="3348068"/>
               <a:ext cx="75116" cy="75116"/>
             </a:xfrm>
             <a:prstGeom prst="ellipse">
@@ -12528,7 +12528,7 @@
           </p:nvSpPr>
           <p:spPr>
             <a:xfrm>
-              <a:off x="5900708" y="3669446"/>
+              <a:off x="5768876" y="3670324"/>
               <a:ext cx="75116" cy="75116"/>
             </a:xfrm>
             <a:prstGeom prst="ellipse">
@@ -12554,7 +12554,7 @@
           </p:nvSpPr>
           <p:spPr>
             <a:xfrm>
-              <a:off x="6067111" y="3722708"/>
+              <a:off x="5829032" y="3723593"/>
               <a:ext cx="75116" cy="75116"/>
             </a:xfrm>
             <a:prstGeom prst="ellipse">
@@ -12580,7 +12580,7 @@
           </p:nvSpPr>
           <p:spPr>
             <a:xfrm>
-              <a:off x="6016759" y="3966454"/>
+              <a:off x="5798928" y="3966612"/>
               <a:ext cx="75116" cy="75116"/>
             </a:xfrm>
             <a:prstGeom prst="ellipse">
@@ -12606,7 +12606,7 @@
           </p:nvSpPr>
           <p:spPr>
             <a:xfrm>
-              <a:off x="5958084" y="3494226"/>
+              <a:off x="5789450" y="3495234"/>
               <a:ext cx="75116" cy="75116"/>
             </a:xfrm>
             <a:prstGeom prst="ellipse">
@@ -12632,7 +12632,7 @@
           </p:nvSpPr>
           <p:spPr>
             <a:xfrm>
-              <a:off x="5901732" y="3709276"/>
+              <a:off x="5990138" y="3709924"/>
               <a:ext cx="75116" cy="75116"/>
             </a:xfrm>
             <a:prstGeom prst="ellipse">
@@ -12658,7 +12658,7 @@
           </p:nvSpPr>
           <p:spPr>
             <a:xfrm>
-              <a:off x="5769452" y="3471377"/>
+              <a:off x="5876504" y="3469808"/>
               <a:ext cx="75116" cy="75116"/>
             </a:xfrm>
             <a:prstGeom prst="ellipse">
@@ -12684,7 +12684,7 @@
           </p:nvSpPr>
           <p:spPr>
             <a:xfrm>
-              <a:off x="5823664" y="3682792"/>
+              <a:off x="5894783" y="3682819"/>
               <a:ext cx="75116" cy="75116"/>
             </a:xfrm>
             <a:prstGeom prst="ellipse">
@@ -12710,7 +12710,7 @@
           </p:nvSpPr>
           <p:spPr>
             <a:xfrm>
-              <a:off x="6533582" y="3825752"/>
+              <a:off x="6663283" y="3824818"/>
               <a:ext cx="75116" cy="75116"/>
             </a:xfrm>
             <a:prstGeom prst="ellipse">
@@ -12736,7 +12736,7 @@
           </p:nvSpPr>
           <p:spPr>
             <a:xfrm>
-              <a:off x="6633355" y="3913871"/>
+              <a:off x="6379895" y="3910073"/>
               <a:ext cx="75116" cy="75116"/>
             </a:xfrm>
             <a:prstGeom prst="ellipse">
@@ -12762,7 +12762,7 @@
           </p:nvSpPr>
           <p:spPr>
             <a:xfrm>
-              <a:off x="6648132" y="3697516"/>
+              <a:off x="6466011" y="3697031"/>
               <a:ext cx="75116" cy="75116"/>
             </a:xfrm>
             <a:prstGeom prst="ellipse">
@@ -12788,7 +12788,7 @@
           </p:nvSpPr>
           <p:spPr>
             <a:xfrm>
-              <a:off x="6432505" y="3501890"/>
+              <a:off x="6415823" y="3504164"/>
               <a:ext cx="75116" cy="75116"/>
             </a:xfrm>
             <a:prstGeom prst="ellipse">
@@ -12814,7 +12814,7 @@
           </p:nvSpPr>
           <p:spPr>
             <a:xfrm>
-              <a:off x="6705134" y="3673420"/>
+              <a:off x="6654313" y="3672254"/>
               <a:ext cx="75116" cy="75116"/>
             </a:xfrm>
             <a:prstGeom prst="ellipse">
@@ -12840,7 +12840,7 @@
           </p:nvSpPr>
           <p:spPr>
             <a:xfrm>
-              <a:off x="6520335" y="3708517"/>
+              <a:off x="6497206" y="3708021"/>
               <a:ext cx="75116" cy="75116"/>
             </a:xfrm>
             <a:prstGeom prst="ellipse">
@@ -12866,7 +12866,7 @@
           </p:nvSpPr>
           <p:spPr>
             <a:xfrm>
-              <a:off x="6693704" y="3839486"/>
+              <a:off x="6674322" y="3839941"/>
               <a:ext cx="75116" cy="75116"/>
             </a:xfrm>
             <a:prstGeom prst="ellipse">
@@ -12892,7 +12892,7 @@
           </p:nvSpPr>
           <p:spPr>
             <a:xfrm>
-              <a:off x="6564053" y="3745314"/>
+              <a:off x="6619609" y="3745370"/>
               <a:ext cx="75116" cy="75116"/>
             </a:xfrm>
             <a:prstGeom prst="ellipse">
@@ -12918,7 +12918,7 @@
           </p:nvSpPr>
           <p:spPr>
             <a:xfrm>
-              <a:off x="6529219" y="3839086"/>
+              <a:off x="6407695" y="3840189"/>
               <a:ext cx="75116" cy="75116"/>
             </a:xfrm>
             <a:prstGeom prst="ellipse">
@@ -12944,7 +12944,7 @@
           </p:nvSpPr>
           <p:spPr>
             <a:xfrm>
-              <a:off x="6543691" y="3762684"/>
+              <a:off x="6408320" y="3764178"/>
               <a:ext cx="75116" cy="75116"/>
             </a:xfrm>
             <a:prstGeom prst="ellipse">
@@ -12970,7 +12970,7 @@
           </p:nvSpPr>
           <p:spPr>
             <a:xfrm>
-              <a:off x="6625943" y="3538739"/>
+              <a:off x="6692015" y="3538063"/>
               <a:ext cx="75116" cy="75116"/>
             </a:xfrm>
             <a:prstGeom prst="ellipse">
@@ -12996,7 +12996,7 @@
           </p:nvSpPr>
           <p:spPr>
             <a:xfrm>
-              <a:off x="6697875" y="3275694"/>
+              <a:off x="6549663" y="3276115"/>
               <a:ext cx="75116" cy="75116"/>
             </a:xfrm>
             <a:prstGeom prst="ellipse">
@@ -13022,7 +13022,7 @@
           </p:nvSpPr>
           <p:spPr>
             <a:xfrm>
-              <a:off x="6576090" y="3855436"/>
+              <a:off x="6480467" y="3851592"/>
               <a:ext cx="75116" cy="75116"/>
             </a:xfrm>
             <a:prstGeom prst="ellipse">
@@ -13048,7 +13048,7 @@
           </p:nvSpPr>
           <p:spPr>
             <a:xfrm>
-              <a:off x="6425106" y="3999647"/>
+              <a:off x="6432934" y="3996937"/>
               <a:ext cx="75116" cy="75116"/>
             </a:xfrm>
             <a:prstGeom prst="ellipse">
@@ -13074,7 +13074,7 @@
           </p:nvSpPr>
           <p:spPr>
             <a:xfrm>
-              <a:off x="6770776" y="3965788"/>
+              <a:off x="6516923" y="3965909"/>
               <a:ext cx="75116" cy="75116"/>
             </a:xfrm>
             <a:prstGeom prst="ellipse">
@@ -13100,7 +13100,7 @@
           </p:nvSpPr>
           <p:spPr>
             <a:xfrm>
-              <a:off x="6478109" y="3742062"/>
+              <a:off x="6770776" y="3741848"/>
               <a:ext cx="75116" cy="75116"/>
             </a:xfrm>
             <a:prstGeom prst="ellipse">
@@ -13126,7 +13126,7 @@
           </p:nvSpPr>
           <p:spPr>
             <a:xfrm>
-              <a:off x="6412940" y="3906920"/>
+              <a:off x="6622575" y="3905894"/>
               <a:ext cx="75116" cy="75116"/>
             </a:xfrm>
             <a:prstGeom prst="ellipse">
@@ -13152,7 +13152,7 @@
           </p:nvSpPr>
           <p:spPr>
             <a:xfrm>
-              <a:off x="6498947" y="3809039"/>
+              <a:off x="6668781" y="3809483"/>
               <a:ext cx="75116" cy="75116"/>
             </a:xfrm>
             <a:prstGeom prst="ellipse">
@@ -13178,7 +13178,7 @@
           </p:nvSpPr>
           <p:spPr>
             <a:xfrm>
-              <a:off x="6728275" y="3350734"/>
+              <a:off x="6439304" y="3350394"/>
               <a:ext cx="75116" cy="75116"/>
             </a:xfrm>
             <a:prstGeom prst="ellipse">
@@ -13204,7 +13204,7 @@
           </p:nvSpPr>
           <p:spPr>
             <a:xfrm>
-              <a:off x="6568657" y="3652477"/>
+              <a:off x="6597429" y="3651232"/>
               <a:ext cx="75116" cy="75116"/>
             </a:xfrm>
             <a:prstGeom prst="ellipse">
@@ -13230,7 +13230,7 @@
           </p:nvSpPr>
           <p:spPr>
             <a:xfrm>
-              <a:off x="6474352" y="3731702"/>
+              <a:off x="6649874" y="3732917"/>
               <a:ext cx="75116" cy="75116"/>
             </a:xfrm>
             <a:prstGeom prst="ellipse">
@@ -13256,7 +13256,7 @@
           </p:nvSpPr>
           <p:spPr>
             <a:xfrm>
-              <a:off x="6669436" y="3682357"/>
+              <a:off x="6652300" y="3682478"/>
               <a:ext cx="75116" cy="75116"/>
             </a:xfrm>
             <a:prstGeom prst="ellipse">
@@ -13282,7 +13282,7 @@
           </p:nvSpPr>
           <p:spPr>
             <a:xfrm>
-              <a:off x="6731289" y="3963132"/>
+              <a:off x="6468347" y="3961698"/>
               <a:ext cx="75116" cy="75116"/>
             </a:xfrm>
             <a:prstGeom prst="ellipse">
@@ -13308,7 +13308,7 @@
           </p:nvSpPr>
           <p:spPr>
             <a:xfrm>
-              <a:off x="6688542" y="3642379"/>
+              <a:off x="6387010" y="3642233"/>
               <a:ext cx="75116" cy="75116"/>
             </a:xfrm>
             <a:prstGeom prst="ellipse">
@@ -13334,42 +13334,42 @@
           </p:nvSpPr>
           <p:spPr>
             <a:xfrm>
-              <a:off x="4487609" y="3559804"/>
-              <a:ext cx="2129082" cy="335652"/>
+              <a:off x="4483602" y="3559849"/>
+              <a:ext cx="2132930" cy="334961"/>
             </a:xfrm>
             <a:custGeom>
               <a:avLst/>
               <a:pathLst>
-                <a:path w="2129082" h="335652">
+                <a:path w="2132930" h="334961">
                   <a:moveTo>
                     <a:pt x="0" y="0"/>
                   </a:moveTo>
                   <a:lnTo>
-                    <a:pt x="1124838" y="97933"/>
+                    <a:pt x="1126871" y="97731"/>
                   </a:lnTo>
                   <a:lnTo>
-                    <a:pt x="1419388" y="112182"/>
+                    <a:pt x="1421953" y="111951"/>
                   </a:lnTo>
                   <a:lnTo>
-                    <a:pt x="1834533" y="122632"/>
+                    <a:pt x="1837848" y="122380"/>
                   </a:lnTo>
                   <a:lnTo>
-                    <a:pt x="2129082" y="124687"/>
+                    <a:pt x="2132930" y="124430"/>
                   </a:lnTo>
                   <a:lnTo>
-                    <a:pt x="2129082" y="335652"/>
+                    <a:pt x="2132930" y="334961"/>
                   </a:lnTo>
                   <a:lnTo>
-                    <a:pt x="1834533" y="309439"/>
+                    <a:pt x="1837848" y="308802"/>
                   </a:lnTo>
                   <a:lnTo>
-                    <a:pt x="1419388" y="280048"/>
+                    <a:pt x="1421953" y="279472"/>
                   </a:lnTo>
                   <a:lnTo>
-                    <a:pt x="1124838" y="266029"/>
+                    <a:pt x="1126871" y="265481"/>
                   </a:lnTo>
                   <a:lnTo>
-                    <a:pt x="0" y="256012"/>
+                    <a:pt x="0" y="255485"/>
                   </a:lnTo>
                   <a:close/>
                 </a:path>
@@ -13395,27 +13395,27 @@
           </p:nvSpPr>
           <p:spPr>
             <a:xfrm>
-              <a:off x="4487609" y="3559804"/>
-              <a:ext cx="2129082" cy="124687"/>
+              <a:off x="4483602" y="3559849"/>
+              <a:ext cx="2132930" cy="124430"/>
             </a:xfrm>
             <a:custGeom>
               <a:avLst/>
               <a:pathLst>
-                <a:path w="2129082" h="124687">
+                <a:path w="2132930" h="124430">
                   <a:moveTo>
                     <a:pt x="0" y="0"/>
                   </a:moveTo>
                   <a:lnTo>
-                    <a:pt x="1124838" y="97933"/>
+                    <a:pt x="1126871" y="97731"/>
                   </a:lnTo>
                   <a:lnTo>
-                    <a:pt x="1419388" y="112182"/>
+                    <a:pt x="1421953" y="111951"/>
                   </a:lnTo>
                   <a:lnTo>
-                    <a:pt x="1834533" y="122632"/>
+                    <a:pt x="1837848" y="122380"/>
                   </a:lnTo>
                   <a:lnTo>
-                    <a:pt x="2129082" y="124687"/>
+                    <a:pt x="2132930" y="124430"/>
                   </a:lnTo>
                 </a:path>
               </a:pathLst>
@@ -13435,24 +13435,24 @@
           </p:nvSpPr>
           <p:spPr>
             <a:xfrm>
-              <a:off x="4487609" y="3815817"/>
-              <a:ext cx="2129082" cy="79640"/>
+              <a:off x="4483602" y="3815335"/>
+              <a:ext cx="2132930" cy="79476"/>
             </a:xfrm>
             <a:custGeom>
               <a:avLst/>
               <a:pathLst>
-                <a:path w="2129082" h="79640">
+                <a:path w="2132930" h="79476">
                   <a:moveTo>
-                    <a:pt x="2129082" y="79640"/>
+                    <a:pt x="2132930" y="79476"/>
                   </a:moveTo>
                   <a:lnTo>
-                    <a:pt x="1834533" y="53426"/>
+                    <a:pt x="1837848" y="53316"/>
                   </a:lnTo>
                   <a:lnTo>
-                    <a:pt x="1419388" y="24036"/>
+                    <a:pt x="1421953" y="23986"/>
                   </a:lnTo>
                   <a:lnTo>
-                    <a:pt x="1124838" y="10016"/>
+                    <a:pt x="1126871" y="9996"/>
                   </a:lnTo>
                   <a:lnTo>
                     <a:pt x="0" y="0"/>
@@ -13475,27 +13475,27 @@
           </p:nvSpPr>
           <p:spPr>
             <a:xfrm>
-              <a:off x="4487609" y="3687811"/>
-              <a:ext cx="2129082" cy="102163"/>
+              <a:off x="4483602" y="3687592"/>
+              <a:ext cx="2132930" cy="101953"/>
             </a:xfrm>
             <a:custGeom>
               <a:avLst/>
               <a:pathLst>
-                <a:path w="2129082" h="102163">
+                <a:path w="2132930" h="101953">
                   <a:moveTo>
                     <a:pt x="0" y="0"/>
                   </a:moveTo>
                   <a:lnTo>
-                    <a:pt x="1124838" y="53975"/>
+                    <a:pt x="1126871" y="53864"/>
                   </a:lnTo>
                   <a:lnTo>
-                    <a:pt x="1419388" y="68109"/>
+                    <a:pt x="1421953" y="67968"/>
                   </a:lnTo>
                   <a:lnTo>
-                    <a:pt x="1834533" y="88029"/>
+                    <a:pt x="1837848" y="87848"/>
                   </a:lnTo>
                   <a:lnTo>
-                    <a:pt x="2129082" y="102163"/>
+                    <a:pt x="2132930" y="101953"/>
                   </a:lnTo>
                 </a:path>
               </a:pathLst>
@@ -13524,7 +13524,7 @@
           </p:nvSpPr>
           <p:spPr>
             <a:xfrm>
-              <a:off x="6136998" y="3034879"/>
+              <a:off x="6136838" y="3035751"/>
               <a:ext cx="479694" cy="82021"/>
             </a:xfrm>
             <a:prstGeom prst="rect">
@@ -13631,7 +13631,7 @@
           </p:nvSpPr>
           <p:spPr>
             <a:xfrm>
-              <a:off x="4158119" y="4071658"/>
+              <a:off x="4158119" y="4070649"/>
               <a:ext cx="28468" cy="0"/>
             </a:xfrm>
             <a:custGeom>
@@ -13671,7 +13671,7 @@
           </p:nvSpPr>
           <p:spPr>
             <a:xfrm>
-              <a:off x="4158119" y="3839705"/>
+              <a:off x="4158119" y="3839174"/>
               <a:ext cx="28468" cy="0"/>
             </a:xfrm>
             <a:custGeom>
@@ -13711,7 +13711,7 @@
           </p:nvSpPr>
           <p:spPr>
             <a:xfrm>
-              <a:off x="4158119" y="3607752"/>
+              <a:off x="4158119" y="3607698"/>
               <a:ext cx="28468" cy="0"/>
             </a:xfrm>
             <a:custGeom>
@@ -13751,7 +13751,7 @@
           </p:nvSpPr>
           <p:spPr>
             <a:xfrm>
-              <a:off x="4158119" y="3375800"/>
+              <a:off x="4158119" y="3376223"/>
               <a:ext cx="28468" cy="0"/>
             </a:xfrm>
             <a:custGeom>
@@ -13791,7 +13791,7 @@
           </p:nvSpPr>
           <p:spPr>
             <a:xfrm>
-              <a:off x="4158119" y="3143847"/>
+              <a:off x="4158119" y="3144748"/>
               <a:ext cx="28468" cy="0"/>
             </a:xfrm>
             <a:custGeom>
@@ -13831,7 +13831,7 @@
           </p:nvSpPr>
           <p:spPr>
             <a:xfrm>
-              <a:off x="4158119" y="2911894"/>
+              <a:off x="4158119" y="2913273"/>
               <a:ext cx="28468" cy="0"/>
             </a:xfrm>
             <a:custGeom>
@@ -13911,7 +13911,7 @@
           </p:nvSpPr>
           <p:spPr>
             <a:xfrm>
-              <a:off x="4487609" y="4234879"/>
+              <a:off x="4483602" y="4234879"/>
               <a:ext cx="0" cy="28468"/>
             </a:xfrm>
             <a:custGeom>
@@ -13951,7 +13951,7 @@
           </p:nvSpPr>
           <p:spPr>
             <a:xfrm>
-              <a:off x="5197303" y="4234879"/>
+              <a:off x="5194579" y="4234879"/>
               <a:ext cx="0" cy="28468"/>
             </a:xfrm>
             <a:custGeom>
@@ -13991,7 +13991,7 @@
           </p:nvSpPr>
           <p:spPr>
             <a:xfrm>
-              <a:off x="5906998" y="4234879"/>
+              <a:off x="5905555" y="4234879"/>
               <a:ext cx="0" cy="28468"/>
             </a:xfrm>
             <a:custGeom>
@@ -14031,7 +14031,7 @@
           </p:nvSpPr>
           <p:spPr>
             <a:xfrm>
-              <a:off x="6616692" y="4234879"/>
+              <a:off x="6616532" y="4234879"/>
               <a:ext cx="0" cy="28468"/>
             </a:xfrm>
             <a:custGeom>
@@ -14071,7 +14071,7 @@
           </p:nvSpPr>
           <p:spPr>
             <a:xfrm>
-              <a:off x="4459354" y="4286122"/>
+              <a:off x="4455347" y="4286122"/>
               <a:ext cx="56509" cy="72877"/>
             </a:xfrm>
             <a:prstGeom prst="rect">
@@ -14117,7 +14117,7 @@
           </p:nvSpPr>
           <p:spPr>
             <a:xfrm>
-              <a:off x="5169048" y="4286122"/>
+              <a:off x="5166324" y="4286122"/>
               <a:ext cx="56509" cy="72877"/>
             </a:xfrm>
             <a:prstGeom prst="rect">
@@ -14163,7 +14163,7 @@
           </p:nvSpPr>
           <p:spPr>
             <a:xfrm>
-              <a:off x="5878743" y="4286122"/>
+              <a:off x="5877300" y="4286122"/>
               <a:ext cx="56509" cy="72877"/>
             </a:xfrm>
             <a:prstGeom prst="rect">
@@ -14209,7 +14209,7 @@
           </p:nvSpPr>
           <p:spPr>
             <a:xfrm>
-              <a:off x="6588437" y="4286122"/>
+              <a:off x="6588277" y="4286122"/>
               <a:ext cx="56509" cy="72877"/>
             </a:xfrm>
             <a:prstGeom prst="rect">
@@ -14327,7 +14327,7 @@
           </p:nvSpPr>
           <p:spPr>
             <a:xfrm>
-              <a:off x="1419669" y="5491420"/>
+              <a:off x="1498410" y="5491185"/>
               <a:ext cx="75116" cy="75116"/>
             </a:xfrm>
             <a:prstGeom prst="ellipse">
@@ -14353,7 +14353,7 @@
           </p:nvSpPr>
           <p:spPr>
             <a:xfrm>
-              <a:off x="1412253" y="5371395"/>
+              <a:off x="1397593" y="5371527"/>
               <a:ext cx="75116" cy="75116"/>
             </a:xfrm>
             <a:prstGeom prst="ellipse">
@@ -14379,7 +14379,7 @@
           </p:nvSpPr>
           <p:spPr>
             <a:xfrm>
-              <a:off x="1545428" y="5442300"/>
+              <a:off x="1752503" y="5443709"/>
               <a:ext cx="75116" cy="75116"/>
             </a:xfrm>
             <a:prstGeom prst="ellipse">
@@ -14405,7 +14405,7 @@
           </p:nvSpPr>
           <p:spPr>
             <a:xfrm>
-              <a:off x="1702465" y="5606274"/>
+              <a:off x="1606567" y="5607878"/>
               <a:ext cx="75116" cy="75116"/>
             </a:xfrm>
             <a:prstGeom prst="ellipse">
@@ -14431,7 +14431,7 @@
           </p:nvSpPr>
           <p:spPr>
             <a:xfrm>
-              <a:off x="1614988" y="5750544"/>
+              <a:off x="1741526" y="5751832"/>
               <a:ext cx="75116" cy="75116"/>
             </a:xfrm>
             <a:prstGeom prst="ellipse">
@@ -14457,7 +14457,7 @@
           </p:nvSpPr>
           <p:spPr>
             <a:xfrm>
-              <a:off x="1406680" y="5465423"/>
+              <a:off x="1454106" y="5464622"/>
               <a:ext cx="75116" cy="75116"/>
             </a:xfrm>
             <a:prstGeom prst="ellipse">
@@ -14483,7 +14483,7 @@
           </p:nvSpPr>
           <p:spPr>
             <a:xfrm>
-              <a:off x="1455118" y="5577352"/>
+              <a:off x="1530389" y="5578538"/>
               <a:ext cx="75116" cy="75116"/>
             </a:xfrm>
             <a:prstGeom prst="ellipse">
@@ -14509,7 +14509,7 @@
           </p:nvSpPr>
           <p:spPr>
             <a:xfrm>
-              <a:off x="1732662" y="5613343"/>
+              <a:off x="1474526" y="5612234"/>
               <a:ext cx="75116" cy="75116"/>
             </a:xfrm>
             <a:prstGeom prst="ellipse">
@@ -14535,7 +14535,7 @@
           </p:nvSpPr>
           <p:spPr>
             <a:xfrm>
-              <a:off x="1397593" y="5700741"/>
+              <a:off x="1637047" y="5700578"/>
               <a:ext cx="75116" cy="75116"/>
             </a:xfrm>
             <a:prstGeom prst="ellipse">
@@ -14561,7 +14561,7 @@
           </p:nvSpPr>
           <p:spPr>
             <a:xfrm>
-              <a:off x="1724596" y="5426686"/>
+              <a:off x="1637086" y="5426094"/>
               <a:ext cx="75116" cy="75116"/>
             </a:xfrm>
             <a:prstGeom prst="ellipse">
@@ -14587,7 +14587,7 @@
           </p:nvSpPr>
           <p:spPr>
             <a:xfrm>
-              <a:off x="2259778" y="5589963"/>
+              <a:off x="2391073" y="5591335"/>
               <a:ext cx="75116" cy="75116"/>
             </a:xfrm>
             <a:prstGeom prst="ellipse">
@@ -14613,7 +14613,7 @@
           </p:nvSpPr>
           <p:spPr>
             <a:xfrm>
-              <a:off x="2290401" y="4939129"/>
+              <a:off x="2416624" y="4938448"/>
               <a:ext cx="75116" cy="75116"/>
             </a:xfrm>
             <a:prstGeom prst="ellipse">
@@ -14639,7 +14639,7 @@
           </p:nvSpPr>
           <p:spPr>
             <a:xfrm>
-              <a:off x="2215724" y="5074287"/>
+              <a:off x="2240221" y="5074970"/>
               <a:ext cx="75116" cy="75116"/>
             </a:xfrm>
             <a:prstGeom prst="ellipse">
@@ -14665,7 +14665,7 @@
           </p:nvSpPr>
           <p:spPr>
             <a:xfrm>
-              <a:off x="2181844" y="5287928"/>
+              <a:off x="2429536" y="5288143"/>
               <a:ext cx="75116" cy="75116"/>
             </a:xfrm>
             <a:prstGeom prst="ellipse">
@@ -14691,7 +14691,7 @@
           </p:nvSpPr>
           <p:spPr>
             <a:xfrm>
-              <a:off x="2116581" y="5408524"/>
+              <a:off x="2492016" y="5409996"/>
               <a:ext cx="75116" cy="75116"/>
             </a:xfrm>
             <a:prstGeom prst="ellipse">
@@ -14717,7 +14717,7 @@
           </p:nvSpPr>
           <p:spPr>
             <a:xfrm>
-              <a:off x="2330687" y="5874211"/>
+              <a:off x="2220334" y="5874211"/>
               <a:ext cx="75116" cy="75116"/>
             </a:xfrm>
             <a:prstGeom prst="ellipse">
@@ -14743,7 +14743,7 @@
           </p:nvSpPr>
           <p:spPr>
             <a:xfrm>
-              <a:off x="2290652" y="5627260"/>
+              <a:off x="2325464" y="5628482"/>
               <a:ext cx="75116" cy="75116"/>
             </a:xfrm>
             <a:prstGeom prst="ellipse">
@@ -14769,7 +14769,7 @@
           </p:nvSpPr>
           <p:spPr>
             <a:xfrm>
-              <a:off x="2363375" y="5245107"/>
+              <a:off x="2265905" y="5245833"/>
               <a:ext cx="75116" cy="75116"/>
             </a:xfrm>
             <a:prstGeom prst="ellipse">
@@ -14795,7 +14795,7 @@
           </p:nvSpPr>
           <p:spPr>
             <a:xfrm>
-              <a:off x="2099573" y="4816462"/>
+              <a:off x="2246095" y="4817701"/>
               <a:ext cx="75116" cy="75116"/>
             </a:xfrm>
             <a:prstGeom prst="ellipse">
@@ -14821,7 +14821,7 @@
           </p:nvSpPr>
           <p:spPr>
             <a:xfrm>
-              <a:off x="2422043" y="4741059"/>
+              <a:off x="2191108" y="4741059"/>
               <a:ext cx="75116" cy="75116"/>
             </a:xfrm>
             <a:prstGeom prst="ellipse">
@@ -14847,7 +14847,7 @@
           </p:nvSpPr>
           <p:spPr>
             <a:xfrm>
-              <a:off x="2308781" y="5485619"/>
+              <a:off x="2459133" y="5487890"/>
               <a:ext cx="75116" cy="75116"/>
             </a:xfrm>
             <a:prstGeom prst="ellipse">
@@ -14873,7 +14873,7 @@
           </p:nvSpPr>
           <p:spPr>
             <a:xfrm>
-              <a:off x="2344322" y="5228813"/>
+              <a:off x="2327242" y="5230212"/>
               <a:ext cx="75116" cy="75116"/>
             </a:xfrm>
             <a:prstGeom prst="ellipse">
@@ -14899,7 +14899,7 @@
           </p:nvSpPr>
           <p:spPr>
             <a:xfrm>
-              <a:off x="2433296" y="5046730"/>
+              <a:off x="2262533" y="5050266"/>
               <a:ext cx="75116" cy="75116"/>
             </a:xfrm>
             <a:prstGeom prst="ellipse">
@@ -14925,7 +14925,7 @@
           </p:nvSpPr>
           <p:spPr>
             <a:xfrm>
-              <a:off x="2249856" y="5170520"/>
+              <a:off x="2471795" y="5171797"/>
               <a:ext cx="75116" cy="75116"/>
             </a:xfrm>
             <a:prstGeom prst="ellipse">
@@ -14951,7 +14951,7 @@
           </p:nvSpPr>
           <p:spPr>
             <a:xfrm>
-              <a:off x="2164023" y="5624159"/>
+              <a:off x="2350464" y="5623672"/>
               <a:ext cx="75116" cy="75116"/>
             </a:xfrm>
             <a:prstGeom prst="ellipse">
@@ -14977,7 +14977,7 @@
           </p:nvSpPr>
           <p:spPr>
             <a:xfrm>
-              <a:off x="2303672" y="5574059"/>
+              <a:off x="2445941" y="5573784"/>
               <a:ext cx="75116" cy="75116"/>
             </a:xfrm>
             <a:prstGeom prst="ellipse">
@@ -15003,7 +15003,7 @@
           </p:nvSpPr>
           <p:spPr>
             <a:xfrm>
-              <a:off x="2135392" y="5088662"/>
+              <a:off x="2440076" y="5091953"/>
               <a:ext cx="75116" cy="75116"/>
             </a:xfrm>
             <a:prstGeom prst="ellipse">
@@ -15029,7 +15029,7 @@
           </p:nvSpPr>
           <p:spPr>
             <a:xfrm>
-              <a:off x="2117442" y="5130625"/>
+              <a:off x="2369313" y="5134670"/>
               <a:ext cx="75116" cy="75116"/>
             </a:xfrm>
             <a:prstGeom prst="ellipse">
@@ -15055,7 +15055,7 @@
           </p:nvSpPr>
           <p:spPr>
             <a:xfrm>
-              <a:off x="3049620" y="5662120"/>
+              <a:off x="2933932" y="5663831"/>
               <a:ext cx="75116" cy="75116"/>
             </a:xfrm>
             <a:prstGeom prst="ellipse">
@@ -15081,7 +15081,7 @@
           </p:nvSpPr>
           <p:spPr>
             <a:xfrm>
-              <a:off x="2784455" y="5390009"/>
+              <a:off x="3199822" y="5389334"/>
               <a:ext cx="75116" cy="75116"/>
             </a:xfrm>
             <a:prstGeom prst="ellipse">
@@ -15107,7 +15107,7 @@
           </p:nvSpPr>
           <p:spPr>
             <a:xfrm>
-              <a:off x="2854172" y="5494209"/>
+              <a:off x="3048267" y="5496099"/>
               <a:ext cx="75116" cy="75116"/>
             </a:xfrm>
             <a:prstGeom prst="ellipse">
@@ -15133,7 +15133,7 @@
           </p:nvSpPr>
           <p:spPr>
             <a:xfrm>
-              <a:off x="2973188" y="5725196"/>
+              <a:off x="3089012" y="5724729"/>
               <a:ext cx="75116" cy="75116"/>
             </a:xfrm>
             <a:prstGeom prst="ellipse">
@@ -15159,7 +15159,7 @@
           </p:nvSpPr>
           <p:spPr>
             <a:xfrm>
-              <a:off x="3048289" y="5369167"/>
+              <a:off x="2973410" y="5368628"/>
               <a:ext cx="75116" cy="75116"/>
             </a:xfrm>
             <a:prstGeom prst="ellipse">
@@ -15185,7 +15185,7 @@
           </p:nvSpPr>
           <p:spPr>
             <a:xfrm>
-              <a:off x="2898561" y="5624097"/>
+              <a:off x="2982643" y="5624833"/>
               <a:ext cx="75116" cy="75116"/>
             </a:xfrm>
             <a:prstGeom prst="ellipse">
@@ -15211,7 +15211,7 @@
           </p:nvSpPr>
           <p:spPr>
             <a:xfrm>
-              <a:off x="3112447" y="4869359"/>
+              <a:off x="3174729" y="4871714"/>
               <a:ext cx="75116" cy="75116"/>
             </a:xfrm>
             <a:prstGeom prst="ellipse">
@@ -15237,7 +15237,7 @@
           </p:nvSpPr>
           <p:spPr>
             <a:xfrm>
-              <a:off x="2960314" y="5557533"/>
+              <a:off x="3098838" y="5558849"/>
               <a:ext cx="75116" cy="75116"/>
             </a:xfrm>
             <a:prstGeom prst="ellipse">
@@ -15263,7 +15263,7 @@
           </p:nvSpPr>
           <p:spPr>
             <a:xfrm>
-              <a:off x="2781567" y="5275014"/>
+              <a:off x="2934998" y="5276331"/>
               <a:ext cx="75116" cy="75116"/>
             </a:xfrm>
             <a:prstGeom prst="ellipse">
@@ -15289,7 +15289,7 @@
           </p:nvSpPr>
           <p:spPr>
             <a:xfrm>
-              <a:off x="3119513" y="5102224"/>
+              <a:off x="2959393" y="5105156"/>
               <a:ext cx="75116" cy="75116"/>
             </a:xfrm>
             <a:prstGeom prst="ellipse">
@@ -15315,7 +15315,7 @@
           </p:nvSpPr>
           <p:spPr>
             <a:xfrm>
-              <a:off x="3074914" y="4789934"/>
+              <a:off x="2888096" y="4793512"/>
               <a:ext cx="75116" cy="75116"/>
             </a:xfrm>
             <a:prstGeom prst="ellipse">
@@ -15341,7 +15341,7 @@
           </p:nvSpPr>
           <p:spPr>
             <a:xfrm>
-              <a:off x="2934649" y="4994778"/>
+              <a:off x="3051200" y="4995908"/>
               <a:ext cx="75116" cy="75116"/>
             </a:xfrm>
             <a:prstGeom prst="ellipse">
@@ -15367,7 +15367,7 @@
           </p:nvSpPr>
           <p:spPr>
             <a:xfrm>
-              <a:off x="3006537" y="5580021"/>
+              <a:off x="2950497" y="5577239"/>
               <a:ext cx="75116" cy="75116"/>
             </a:xfrm>
             <a:prstGeom prst="ellipse">
@@ -15393,7 +15393,7 @@
           </p:nvSpPr>
           <p:spPr>
             <a:xfrm>
-              <a:off x="3108535" y="5213062"/>
+              <a:off x="3193767" y="5214048"/>
               <a:ext cx="75116" cy="75116"/>
             </a:xfrm>
             <a:prstGeom prst="ellipse">
@@ -15419,7 +15419,7 @@
           </p:nvSpPr>
           <p:spPr>
             <a:xfrm>
-              <a:off x="2963703" y="5339577"/>
+              <a:off x="2951919" y="5340235"/>
               <a:ext cx="75116" cy="75116"/>
             </a:xfrm>
             <a:prstGeom prst="ellipse">
@@ -15445,7 +15445,7 @@
           </p:nvSpPr>
           <p:spPr>
             <a:xfrm>
-              <a:off x="2888185" y="5171141"/>
+              <a:off x="2991558" y="5170002"/>
               <a:ext cx="75116" cy="75116"/>
             </a:xfrm>
             <a:prstGeom prst="ellipse">
@@ -15471,7 +15471,7 @@
           </p:nvSpPr>
           <p:spPr>
             <a:xfrm>
-              <a:off x="3110292" y="5553179"/>
+              <a:off x="2926646" y="5552422"/>
               <a:ext cx="75116" cy="75116"/>
             </a:xfrm>
             <a:prstGeom prst="ellipse">
@@ -15497,7 +15497,7 @@
           </p:nvSpPr>
           <p:spPr>
             <a:xfrm>
-              <a:off x="2926396" y="5207567"/>
+              <a:off x="2865581" y="5208060"/>
               <a:ext cx="75116" cy="75116"/>
             </a:xfrm>
             <a:prstGeom prst="ellipse">
@@ -15523,7 +15523,7 @@
           </p:nvSpPr>
           <p:spPr>
             <a:xfrm>
-              <a:off x="2798620" y="5520422"/>
+              <a:off x="3016927" y="5520761"/>
               <a:ext cx="75116" cy="75116"/>
             </a:xfrm>
             <a:prstGeom prst="ellipse">
@@ -15549,7 +15549,7 @@
           </p:nvSpPr>
           <p:spPr>
             <a:xfrm>
-              <a:off x="3176958" y="5483104"/>
+              <a:off x="2923304" y="5482859"/>
               <a:ext cx="75116" cy="75116"/>
             </a:xfrm>
             <a:prstGeom prst="ellipse">
@@ -15575,7 +15575,7 @@
           </p:nvSpPr>
           <p:spPr>
             <a:xfrm>
-              <a:off x="3661868" y="5532526"/>
+              <a:off x="3872699" y="5534268"/>
               <a:ext cx="75116" cy="75116"/>
             </a:xfrm>
             <a:prstGeom prst="ellipse">
@@ -15601,7 +15601,7 @@
           </p:nvSpPr>
           <p:spPr>
             <a:xfrm>
-              <a:off x="3834483" y="5486928"/>
+              <a:off x="3558649" y="5484861"/>
               <a:ext cx="75116" cy="75116"/>
             </a:xfrm>
             <a:prstGeom prst="ellipse">
@@ -15627,7 +15627,7 @@
           </p:nvSpPr>
           <p:spPr>
             <a:xfrm>
-              <a:off x="3789941" y="5651381"/>
+              <a:off x="3808920" y="5649528"/>
               <a:ext cx="75116" cy="75116"/>
             </a:xfrm>
             <a:prstGeom prst="ellipse">
@@ -15653,7 +15653,7 @@
           </p:nvSpPr>
           <p:spPr>
             <a:xfrm>
-              <a:off x="3702039" y="5252538"/>
+              <a:off x="3774245" y="5256699"/>
               <a:ext cx="75116" cy="75116"/>
             </a:xfrm>
             <a:prstGeom prst="ellipse">
@@ -15679,7 +15679,7 @@
           </p:nvSpPr>
           <p:spPr>
             <a:xfrm>
-              <a:off x="3757398" y="5308325"/>
+              <a:off x="3586524" y="5308601"/>
               <a:ext cx="75116" cy="75116"/>
             </a:xfrm>
             <a:prstGeom prst="ellipse">
@@ -15705,7 +15705,7 @@
           </p:nvSpPr>
           <p:spPr>
             <a:xfrm>
-              <a:off x="3857194" y="4819415"/>
+              <a:off x="3726078" y="4821238"/>
               <a:ext cx="75116" cy="75116"/>
             </a:xfrm>
             <a:prstGeom prst="ellipse">
@@ -15731,7 +15731,7 @@
           </p:nvSpPr>
           <p:spPr>
             <a:xfrm>
-              <a:off x="3842597" y="5287016"/>
+              <a:off x="3859586" y="5288455"/>
               <a:ext cx="75116" cy="75116"/>
             </a:xfrm>
             <a:prstGeom prst="ellipse">
@@ -15757,7 +15757,7 @@
           </p:nvSpPr>
           <p:spPr>
             <a:xfrm>
-              <a:off x="3894495" y="5482607"/>
+              <a:off x="3688307" y="5482952"/>
               <a:ext cx="75116" cy="75116"/>
             </a:xfrm>
             <a:prstGeom prst="ellipse">
@@ -15783,7 +15783,7 @@
           </p:nvSpPr>
           <p:spPr>
             <a:xfrm>
-              <a:off x="3558064" y="5300165"/>
+              <a:off x="3628945" y="5302256"/>
               <a:ext cx="75116" cy="75116"/>
             </a:xfrm>
             <a:prstGeom prst="ellipse">
@@ -15809,7 +15809,7 @@
           </p:nvSpPr>
           <p:spPr>
             <a:xfrm>
-              <a:off x="3490462" y="5196470"/>
+              <a:off x="3697724" y="5197706"/>
               <a:ext cx="75116" cy="75116"/>
             </a:xfrm>
             <a:prstGeom prst="ellipse">
@@ -15835,7 +15835,7 @@
           </p:nvSpPr>
           <p:spPr>
             <a:xfrm>
-              <a:off x="3669827" y="5140555"/>
+              <a:off x="3655753" y="5141695"/>
               <a:ext cx="75116" cy="75116"/>
             </a:xfrm>
             <a:prstGeom prst="ellipse">
@@ -15861,7 +15861,7 @@
           </p:nvSpPr>
           <p:spPr>
             <a:xfrm>
-              <a:off x="3608188" y="5013374"/>
+              <a:off x="3642251" y="5014884"/>
               <a:ext cx="75116" cy="75116"/>
             </a:xfrm>
             <a:prstGeom prst="ellipse">
@@ -15887,7 +15887,7 @@
           </p:nvSpPr>
           <p:spPr>
             <a:xfrm>
-              <a:off x="3682176" y="5439363"/>
+              <a:off x="3693567" y="5439536"/>
               <a:ext cx="75116" cy="75116"/>
             </a:xfrm>
             <a:prstGeom prst="ellipse">
@@ -15913,7 +15913,7 @@
           </p:nvSpPr>
           <p:spPr>
             <a:xfrm>
-              <a:off x="3779161" y="4923171"/>
+              <a:off x="3696422" y="4924095"/>
               <a:ext cx="75116" cy="75116"/>
             </a:xfrm>
             <a:prstGeom prst="ellipse">
@@ -15939,7 +15939,7 @@
           </p:nvSpPr>
           <p:spPr>
             <a:xfrm>
-              <a:off x="3857478" y="5708237"/>
+              <a:off x="3636051" y="5708566"/>
               <a:ext cx="75116" cy="75116"/>
             </a:xfrm>
             <a:prstGeom prst="ellipse">
@@ -15965,7 +15965,7 @@
           </p:nvSpPr>
           <p:spPr>
             <a:xfrm>
-              <a:off x="3886441" y="5578474"/>
+              <a:off x="3624484" y="5577870"/>
               <a:ext cx="75116" cy="75116"/>
             </a:xfrm>
             <a:prstGeom prst="ellipse">
@@ -15991,7 +15991,7 @@
           </p:nvSpPr>
           <p:spPr>
             <a:xfrm>
-              <a:off x="3805738" y="5418322"/>
+              <a:off x="3633859" y="5420140"/>
               <a:ext cx="75116" cy="75116"/>
             </a:xfrm>
             <a:prstGeom prst="ellipse">
@@ -16017,7 +16017,7 @@
           </p:nvSpPr>
           <p:spPr>
             <a:xfrm>
-              <a:off x="3608568" y="5502496"/>
+              <a:off x="3696385" y="5503040"/>
               <a:ext cx="75116" cy="75116"/>
             </a:xfrm>
             <a:prstGeom prst="ellipse">
@@ -16043,7 +16043,7 @@
           </p:nvSpPr>
           <p:spPr>
             <a:xfrm>
-              <a:off x="3731064" y="5381357"/>
+              <a:off x="3662838" y="5382452"/>
               <a:ext cx="75116" cy="75116"/>
             </a:xfrm>
             <a:prstGeom prst="ellipse">
@@ -16069,7 +16069,7 @@
           </p:nvSpPr>
           <p:spPr>
             <a:xfrm>
-              <a:off x="3780423" y="5545489"/>
+              <a:off x="3894495" y="5544813"/>
               <a:ext cx="75116" cy="75116"/>
             </a:xfrm>
             <a:prstGeom prst="ellipse">
@@ -16095,7 +16095,7 @@
           </p:nvSpPr>
           <p:spPr>
             <a:xfrm>
-              <a:off x="3744930" y="5354886"/>
+              <a:off x="3728698" y="5355705"/>
               <a:ext cx="75116" cy="75116"/>
             </a:xfrm>
             <a:prstGeom prst="ellipse">
@@ -16121,7 +16121,7 @@
           </p:nvSpPr>
           <p:spPr>
             <a:xfrm>
-              <a:off x="3516548" y="5283398"/>
+              <a:off x="3693324" y="5284846"/>
               <a:ext cx="75116" cy="75116"/>
             </a:xfrm>
             <a:prstGeom prst="ellipse">
@@ -16147,7 +16147,7 @@
           </p:nvSpPr>
           <p:spPr>
             <a:xfrm>
-              <a:off x="3794596" y="5292318"/>
+              <a:off x="3859164" y="5291443"/>
               <a:ext cx="75116" cy="75116"/>
             </a:xfrm>
             <a:prstGeom prst="ellipse">
@@ -16173,7 +16173,7 @@
           </p:nvSpPr>
           <p:spPr>
             <a:xfrm>
-              <a:off x="3705275" y="5352212"/>
+              <a:off x="3602141" y="5352594"/>
               <a:ext cx="75116" cy="75116"/>
             </a:xfrm>
             <a:prstGeom prst="ellipse">
@@ -16199,42 +16199,42 @@
           </p:nvSpPr>
           <p:spPr>
             <a:xfrm>
-              <a:off x="1583893" y="5183017"/>
-              <a:ext cx="2144462" cy="406724"/>
+              <a:off x="1639833" y="5184216"/>
+              <a:ext cx="2135925" cy="406125"/>
             </a:xfrm>
             <a:custGeom>
               <a:avLst/>
               <a:pathLst>
-                <a:path w="2144462" h="406724">
+                <a:path w="2135925" h="406125">
                   <a:moveTo>
                     <a:pt x="0" y="0"/>
                   </a:moveTo>
                   <a:lnTo>
-                    <a:pt x="1132964" y="90018"/>
+                    <a:pt x="1128453" y="89886"/>
                   </a:lnTo>
                   <a:lnTo>
-                    <a:pt x="1429641" y="81453"/>
+                    <a:pt x="1423950" y="81333"/>
                   </a:lnTo>
                   <a:lnTo>
-                    <a:pt x="1847785" y="45060"/>
+                    <a:pt x="1840429" y="44993"/>
                   </a:lnTo>
                   <a:lnTo>
-                    <a:pt x="2144462" y="9633"/>
+                    <a:pt x="2135925" y="9619"/>
                   </a:lnTo>
                   <a:lnTo>
-                    <a:pt x="2144462" y="364810"/>
+                    <a:pt x="2135925" y="364273"/>
                   </a:lnTo>
                   <a:lnTo>
-                    <a:pt x="1847785" y="333849"/>
+                    <a:pt x="1840429" y="333357"/>
                   </a:lnTo>
                   <a:lnTo>
-                    <a:pt x="1429641" y="303750"/>
+                    <a:pt x="1423950" y="303303"/>
                   </a:lnTo>
                   <a:lnTo>
-                    <a:pt x="1132964" y="299651"/>
+                    <a:pt x="1128453" y="299209"/>
                   </a:lnTo>
                   <a:lnTo>
-                    <a:pt x="0" y="406724"/>
+                    <a:pt x="0" y="406125"/>
                   </a:lnTo>
                   <a:close/>
                 </a:path>
@@ -16260,27 +16260,27 @@
           </p:nvSpPr>
           <p:spPr>
             <a:xfrm>
-              <a:off x="1583893" y="5183017"/>
-              <a:ext cx="2144462" cy="90018"/>
+              <a:off x="1639833" y="5184216"/>
+              <a:ext cx="2135925" cy="89886"/>
             </a:xfrm>
             <a:custGeom>
               <a:avLst/>
               <a:pathLst>
-                <a:path w="2144462" h="90018">
+                <a:path w="2135925" h="89886">
                   <a:moveTo>
                     <a:pt x="0" y="0"/>
                   </a:moveTo>
                   <a:lnTo>
-                    <a:pt x="1132964" y="90018"/>
+                    <a:pt x="1128453" y="89886"/>
                   </a:lnTo>
                   <a:lnTo>
-                    <a:pt x="1429641" y="81453"/>
+                    <a:pt x="1423950" y="81333"/>
                   </a:lnTo>
                   <a:lnTo>
-                    <a:pt x="1847785" y="45060"/>
+                    <a:pt x="1840429" y="44993"/>
                   </a:lnTo>
                   <a:lnTo>
-                    <a:pt x="2144462" y="9633"/>
+                    <a:pt x="2135925" y="9619"/>
                   </a:lnTo>
                 </a:path>
               </a:pathLst>
@@ -16300,27 +16300,27 @@
           </p:nvSpPr>
           <p:spPr>
             <a:xfrm>
-              <a:off x="1583893" y="5482668"/>
-              <a:ext cx="2144462" cy="107073"/>
+              <a:off x="1639833" y="5483426"/>
+              <a:ext cx="2135925" cy="106915"/>
             </a:xfrm>
             <a:custGeom>
               <a:avLst/>
               <a:pathLst>
-                <a:path w="2144462" h="107073">
+                <a:path w="2135925" h="106915">
                   <a:moveTo>
-                    <a:pt x="2144462" y="65159"/>
+                    <a:pt x="2135925" y="65063"/>
                   </a:moveTo>
                   <a:lnTo>
-                    <a:pt x="1847785" y="34198"/>
+                    <a:pt x="1840429" y="34148"/>
                   </a:lnTo>
                   <a:lnTo>
-                    <a:pt x="1429641" y="4099"/>
+                    <a:pt x="1423950" y="4093"/>
                   </a:lnTo>
                   <a:lnTo>
-                    <a:pt x="1132964" y="0"/>
+                    <a:pt x="1128453" y="0"/>
                   </a:lnTo>
                   <a:lnTo>
-                    <a:pt x="0" y="107073"/>
+                    <a:pt x="0" y="106915"/>
                   </a:lnTo>
                 </a:path>
               </a:pathLst>
@@ -16340,27 +16340,27 @@
           </p:nvSpPr>
           <p:spPr>
             <a:xfrm>
-              <a:off x="1583893" y="5370239"/>
-              <a:ext cx="2144462" cy="16140"/>
+              <a:off x="1639833" y="5371162"/>
+              <a:ext cx="2135925" cy="16116"/>
             </a:xfrm>
             <a:custGeom>
               <a:avLst/>
               <a:pathLst>
-                <a:path w="2144462" h="16140">
+                <a:path w="2135925" h="16116">
                   <a:moveTo>
-                    <a:pt x="0" y="16140"/>
+                    <a:pt x="0" y="16116"/>
                   </a:moveTo>
                   <a:lnTo>
-                    <a:pt x="1132964" y="7612"/>
+                    <a:pt x="1128453" y="7601"/>
                   </a:lnTo>
                   <a:lnTo>
-                    <a:pt x="1429641" y="5380"/>
+                    <a:pt x="1423950" y="5372"/>
                   </a:lnTo>
                   <a:lnTo>
-                    <a:pt x="1847785" y="2232"/>
+                    <a:pt x="1840429" y="2229"/>
                   </a:lnTo>
                   <a:lnTo>
-                    <a:pt x="2144462" y="0"/>
+                    <a:pt x="2135925" y="0"/>
                   </a:lnTo>
                 </a:path>
               </a:pathLst>
@@ -16389,7 +16389,7 @@
           </p:nvSpPr>
           <p:spPr>
             <a:xfrm>
-              <a:off x="3248661" y="4768273"/>
+              <a:off x="3296064" y="4769902"/>
               <a:ext cx="479694" cy="82021"/>
             </a:xfrm>
             <a:prstGeom prst="rect">
@@ -16496,7 +16496,7 @@
           </p:nvSpPr>
           <p:spPr>
             <a:xfrm rot="-5400000">
-              <a:off x="1140740" y="5845717"/>
+              <a:off x="1140740" y="5845886"/>
               <a:ext cx="141274" cy="72877"/>
             </a:xfrm>
             <a:prstGeom prst="rect">
@@ -16542,7 +16542,7 @@
           </p:nvSpPr>
           <p:spPr>
             <a:xfrm rot="-5400000">
-              <a:off x="1140740" y="5498854"/>
+              <a:off x="1140740" y="5499534"/>
               <a:ext cx="141274" cy="72877"/>
             </a:xfrm>
             <a:prstGeom prst="rect">
@@ -16588,7 +16588,7 @@
           </p:nvSpPr>
           <p:spPr>
             <a:xfrm rot="-5400000">
-              <a:off x="1140740" y="5151990"/>
+              <a:off x="1140740" y="5153182"/>
               <a:ext cx="141274" cy="72877"/>
             </a:xfrm>
             <a:prstGeom prst="rect">
@@ -16634,7 +16634,7 @@
           </p:nvSpPr>
           <p:spPr>
             <a:xfrm rot="-5400000">
-              <a:off x="1140740" y="4805127"/>
+              <a:off x="1140740" y="4806829"/>
               <a:ext cx="141274" cy="72877"/>
             </a:xfrm>
             <a:prstGeom prst="rect">
@@ -16680,7 +16680,7 @@
           </p:nvSpPr>
           <p:spPr>
             <a:xfrm>
-              <a:off x="1281838" y="5882156"/>
+              <a:off x="1281838" y="5882325"/>
               <a:ext cx="28468" cy="0"/>
             </a:xfrm>
             <a:custGeom>
@@ -16720,7 +16720,7 @@
           </p:nvSpPr>
           <p:spPr>
             <a:xfrm>
-              <a:off x="1281838" y="5535292"/>
+              <a:off x="1281838" y="5535973"/>
               <a:ext cx="28468" cy="0"/>
             </a:xfrm>
             <a:custGeom>
@@ -16760,7 +16760,7 @@
           </p:nvSpPr>
           <p:spPr>
             <a:xfrm>
-              <a:off x="1281838" y="5188429"/>
+              <a:off x="1281838" y="5189620"/>
               <a:ext cx="28468" cy="0"/>
             </a:xfrm>
             <a:custGeom>
@@ -16800,7 +16800,7 @@
           </p:nvSpPr>
           <p:spPr>
             <a:xfrm>
-              <a:off x="1281838" y="4841566"/>
+              <a:off x="1281838" y="4843268"/>
               <a:ext cx="28468" cy="0"/>
             </a:xfrm>
             <a:custGeom>
@@ -16880,7 +16880,7 @@
           </p:nvSpPr>
           <p:spPr>
             <a:xfrm>
-              <a:off x="1583893" y="5968427"/>
+              <a:off x="1639833" y="5968427"/>
               <a:ext cx="0" cy="28468"/>
             </a:xfrm>
             <a:custGeom>
@@ -16920,7 +16920,7 @@
           </p:nvSpPr>
           <p:spPr>
             <a:xfrm>
-              <a:off x="2298714" y="5968427"/>
+              <a:off x="2351808" y="5968427"/>
               <a:ext cx="0" cy="28468"/>
             </a:xfrm>
             <a:custGeom>
@@ -16960,7 +16960,7 @@
           </p:nvSpPr>
           <p:spPr>
             <a:xfrm>
-              <a:off x="3013535" y="5968427"/>
+              <a:off x="3063783" y="5968427"/>
               <a:ext cx="0" cy="28468"/>
             </a:xfrm>
             <a:custGeom>
@@ -17000,7 +17000,7 @@
           </p:nvSpPr>
           <p:spPr>
             <a:xfrm>
-              <a:off x="3728356" y="5968427"/>
+              <a:off x="3775758" y="5968427"/>
               <a:ext cx="0" cy="28468"/>
             </a:xfrm>
             <a:custGeom>
@@ -17040,7 +17040,7 @@
           </p:nvSpPr>
           <p:spPr>
             <a:xfrm>
-              <a:off x="1555638" y="6019670"/>
+              <a:off x="1611578" y="6019670"/>
               <a:ext cx="56509" cy="72877"/>
             </a:xfrm>
             <a:prstGeom prst="rect">
@@ -17086,7 +17086,7 @@
           </p:nvSpPr>
           <p:spPr>
             <a:xfrm>
-              <a:off x="2270459" y="6019670"/>
+              <a:off x="2323553" y="6019670"/>
               <a:ext cx="56509" cy="72877"/>
             </a:xfrm>
             <a:prstGeom prst="rect">
@@ -17132,7 +17132,7 @@
           </p:nvSpPr>
           <p:spPr>
             <a:xfrm>
-              <a:off x="2985280" y="6019670"/>
+              <a:off x="3035528" y="6019670"/>
               <a:ext cx="56509" cy="72877"/>
             </a:xfrm>
             <a:prstGeom prst="rect">
@@ -17178,7 +17178,7 @@
           </p:nvSpPr>
           <p:spPr>
             <a:xfrm>
-              <a:off x="3700101" y="6019670"/>
+              <a:off x="3747503" y="6019670"/>
               <a:ext cx="56509" cy="72877"/>
             </a:xfrm>
             <a:prstGeom prst="rect">
@@ -17388,7 +17388,7 @@
           </p:nvSpPr>
           <p:spPr>
             <a:xfrm>
-              <a:off x="4447155" y="5417945"/>
+              <a:off x="4273874" y="5417316"/>
               <a:ext cx="75116" cy="75116"/>
             </a:xfrm>
             <a:prstGeom prst="ellipse">
@@ -17414,7 +17414,7 @@
           </p:nvSpPr>
           <p:spPr>
             <a:xfrm>
-              <a:off x="4371843" y="5352227"/>
+              <a:off x="4429913" y="5352197"/>
               <a:ext cx="75116" cy="75116"/>
             </a:xfrm>
             <a:prstGeom prst="ellipse">
@@ -17440,7 +17440,7 @@
           </p:nvSpPr>
           <p:spPr>
             <a:xfrm>
-              <a:off x="4285821" y="5403770"/>
+              <a:off x="4319017" y="5403827"/>
               <a:ext cx="75116" cy="75116"/>
             </a:xfrm>
             <a:prstGeom prst="ellipse">
@@ -17466,7 +17466,7 @@
           </p:nvSpPr>
           <p:spPr>
             <a:xfrm>
-              <a:off x="4638421" y="5674838"/>
+              <a:off x="4629118" y="5675290"/>
               <a:ext cx="75116" cy="75116"/>
             </a:xfrm>
             <a:prstGeom prst="ellipse">
@@ -17492,7 +17492,7 @@
           </p:nvSpPr>
           <p:spPr>
             <a:xfrm>
-              <a:off x="4273874" y="5641310"/>
+              <a:off x="4508658" y="5642038"/>
               <a:ext cx="75116" cy="75116"/>
             </a:xfrm>
             <a:prstGeom prst="ellipse">
@@ -17518,7 +17518,7 @@
           </p:nvSpPr>
           <p:spPr>
             <a:xfrm>
-              <a:off x="4409140" y="5602490"/>
+              <a:off x="4314934" y="5603784"/>
               <a:ext cx="75116" cy="75116"/>
             </a:xfrm>
             <a:prstGeom prst="ellipse">
@@ -17544,7 +17544,7 @@
           </p:nvSpPr>
           <p:spPr>
             <a:xfrm>
-              <a:off x="4598317" y="5196590"/>
+              <a:off x="4600746" y="5196113"/>
               <a:ext cx="75116" cy="75116"/>
             </a:xfrm>
             <a:prstGeom prst="ellipse">
@@ -17570,7 +17570,7 @@
           </p:nvSpPr>
           <p:spPr>
             <a:xfrm>
-              <a:off x="4440385" y="5435651"/>
+              <a:off x="4580010" y="5435558"/>
               <a:ext cx="75116" cy="75116"/>
             </a:xfrm>
             <a:prstGeom prst="ellipse">
@@ -17596,7 +17596,7 @@
           </p:nvSpPr>
           <p:spPr>
             <a:xfrm>
-              <a:off x="4577265" y="5622610"/>
+              <a:off x="4579785" y="5623679"/>
               <a:ext cx="75116" cy="75116"/>
             </a:xfrm>
             <a:prstGeom prst="ellipse">
@@ -17622,7 +17622,7 @@
           </p:nvSpPr>
           <p:spPr>
             <a:xfrm>
-              <a:off x="4329229" y="5328513"/>
+              <a:off x="4448912" y="5329419"/>
               <a:ext cx="75116" cy="75116"/>
             </a:xfrm>
             <a:prstGeom prst="ellipse">
@@ -17648,7 +17648,7 @@
           </p:nvSpPr>
           <p:spPr>
             <a:xfrm>
-              <a:off x="5191331" y="5874211"/>
+              <a:off x="5206893" y="5874211"/>
               <a:ext cx="75116" cy="75116"/>
             </a:xfrm>
             <a:prstGeom prst="ellipse">
@@ -17674,7 +17674,7 @@
           </p:nvSpPr>
           <p:spPr>
             <a:xfrm>
-              <a:off x="5131855" y="5543632"/>
+              <a:off x="5204765" y="5544973"/>
               <a:ext cx="75116" cy="75116"/>
             </a:xfrm>
             <a:prstGeom prst="ellipse">
@@ -17700,7 +17700,7 @@
           </p:nvSpPr>
           <p:spPr>
             <a:xfrm>
-              <a:off x="5018843" y="5358769"/>
+              <a:off x="5255701" y="5359562"/>
               <a:ext cx="75116" cy="75116"/>
             </a:xfrm>
             <a:prstGeom prst="ellipse">
@@ -17726,7 +17726,7 @@
           </p:nvSpPr>
           <p:spPr>
             <a:xfrm>
-              <a:off x="5044114" y="5753076"/>
+              <a:off x="5026691" y="5753705"/>
               <a:ext cx="75116" cy="75116"/>
             </a:xfrm>
             <a:prstGeom prst="ellipse">
@@ -17752,7 +17752,7 @@
           </p:nvSpPr>
           <p:spPr>
             <a:xfrm>
-              <a:off x="5133363" y="5473852"/>
+              <a:off x="5135564" y="5473879"/>
               <a:ext cx="75116" cy="75116"/>
             </a:xfrm>
             <a:prstGeom prst="ellipse">
@@ -17778,7 +17778,7 @@
           </p:nvSpPr>
           <p:spPr>
             <a:xfrm>
-              <a:off x="4973037" y="5137661"/>
+              <a:off x="5106685" y="5137531"/>
               <a:ext cx="75116" cy="75116"/>
             </a:xfrm>
             <a:prstGeom prst="ellipse">
@@ -17804,7 +17804,7 @@
           </p:nvSpPr>
           <p:spPr>
             <a:xfrm>
-              <a:off x="5211306" y="5504985"/>
+              <a:off x="5232935" y="5505732"/>
               <a:ext cx="75116" cy="75116"/>
             </a:xfrm>
             <a:prstGeom prst="ellipse">
@@ -17830,7 +17830,7 @@
           </p:nvSpPr>
           <p:spPr>
             <a:xfrm>
-              <a:off x="5352769" y="5563474"/>
+              <a:off x="5129019" y="5563957"/>
               <a:ext cx="75116" cy="75116"/>
             </a:xfrm>
             <a:prstGeom prst="ellipse">
@@ -17856,7 +17856,7 @@
           </p:nvSpPr>
           <p:spPr>
             <a:xfrm>
-              <a:off x="5275366" y="5341202"/>
+              <a:off x="5188880" y="5340134"/>
               <a:ext cx="75116" cy="75116"/>
             </a:xfrm>
             <a:prstGeom prst="ellipse">
@@ -17882,7 +17882,7 @@
           </p:nvSpPr>
           <p:spPr>
             <a:xfrm>
-              <a:off x="5036848" y="5643355"/>
+              <a:off x="5329572" y="5643400"/>
               <a:ext cx="75116" cy="75116"/>
             </a:xfrm>
             <a:prstGeom prst="ellipse">
@@ -17908,7 +17908,7 @@
           </p:nvSpPr>
           <p:spPr>
             <a:xfrm>
-              <a:off x="5308389" y="5291152"/>
+              <a:off x="5232542" y="5290469"/>
               <a:ext cx="75116" cy="75116"/>
             </a:xfrm>
             <a:prstGeom prst="ellipse">
@@ -17934,7 +17934,7 @@
           </p:nvSpPr>
           <p:spPr>
             <a:xfrm>
-              <a:off x="5345164" y="5609071"/>
+              <a:off x="5289636" y="5610632"/>
               <a:ext cx="75116" cy="75116"/>
             </a:xfrm>
             <a:prstGeom prst="ellipse">
@@ -17960,7 +17960,7 @@
           </p:nvSpPr>
           <p:spPr>
             <a:xfrm>
-              <a:off x="5122944" y="5266265"/>
+              <a:off x="5005944" y="5266627"/>
               <a:ext cx="75116" cy="75116"/>
             </a:xfrm>
             <a:prstGeom prst="ellipse">
@@ -17986,7 +17986,7 @@
           </p:nvSpPr>
           <p:spPr>
             <a:xfrm>
-              <a:off x="5226463" y="4960505"/>
+              <a:off x="5364599" y="4961630"/>
               <a:ext cx="75116" cy="75116"/>
             </a:xfrm>
             <a:prstGeom prst="ellipse">
@@ -18012,7 +18012,7 @@
           </p:nvSpPr>
           <p:spPr>
             <a:xfrm>
-              <a:off x="5113146" y="5197794"/>
+              <a:off x="4999238" y="5198362"/>
               <a:ext cx="75116" cy="75116"/>
             </a:xfrm>
             <a:prstGeom prst="ellipse">
@@ -18038,7 +18038,7 @@
           </p:nvSpPr>
           <p:spPr>
             <a:xfrm>
-              <a:off x="5366784" y="5241221"/>
+              <a:off x="5005596" y="5241397"/>
               <a:ext cx="75116" cy="75116"/>
             </a:xfrm>
             <a:prstGeom prst="ellipse">
@@ -18064,7 +18064,7 @@
           </p:nvSpPr>
           <p:spPr>
             <a:xfrm>
-              <a:off x="4998714" y="5344231"/>
+              <a:off x="5202231" y="5344820"/>
               <a:ext cx="75116" cy="75116"/>
             </a:xfrm>
             <a:prstGeom prst="ellipse">
@@ -18090,7 +18090,7 @@
           </p:nvSpPr>
           <p:spPr>
             <a:xfrm>
-              <a:off x="5234935" y="5591611"/>
+              <a:off x="5316764" y="5592669"/>
               <a:ext cx="75116" cy="75116"/>
             </a:xfrm>
             <a:prstGeom prst="ellipse">
@@ -18116,7 +18116,7 @@
           </p:nvSpPr>
           <p:spPr>
             <a:xfrm>
-              <a:off x="5780474" y="5394235"/>
+              <a:off x="5735904" y="5395004"/>
               <a:ext cx="75116" cy="75116"/>
             </a:xfrm>
             <a:prstGeom prst="ellipse">
@@ -18142,7 +18142,7 @@
           </p:nvSpPr>
           <p:spPr>
             <a:xfrm>
-              <a:off x="6038425" y="5443835"/>
+              <a:off x="5837688" y="5445481"/>
               <a:ext cx="75116" cy="75116"/>
             </a:xfrm>
             <a:prstGeom prst="ellipse">
@@ -18168,7 +18168,7 @@
           </p:nvSpPr>
           <p:spPr>
             <a:xfrm>
-              <a:off x="5690255" y="5624228"/>
+              <a:off x="5803432" y="5625473"/>
               <a:ext cx="75116" cy="75116"/>
             </a:xfrm>
             <a:prstGeom prst="ellipse">
@@ -18194,7 +18194,7 @@
           </p:nvSpPr>
           <p:spPr>
             <a:xfrm>
-              <a:off x="5984706" y="5241754"/>
+              <a:off x="5828980" y="5240834"/>
               <a:ext cx="75116" cy="75116"/>
             </a:xfrm>
             <a:prstGeom prst="ellipse">
@@ -18220,7 +18220,7 @@
           </p:nvSpPr>
           <p:spPr>
             <a:xfrm>
-              <a:off x="5932482" y="5446238"/>
+              <a:off x="5724408" y="5446660"/>
               <a:ext cx="75116" cy="75116"/>
             </a:xfrm>
             <a:prstGeom prst="ellipse">
@@ -18246,7 +18246,7 @@
           </p:nvSpPr>
           <p:spPr>
             <a:xfrm>
-              <a:off x="5745086" y="5259363"/>
+              <a:off x="5874071" y="5260066"/>
               <a:ext cx="75116" cy="75116"/>
             </a:xfrm>
             <a:prstGeom prst="ellipse">
@@ -18272,7 +18272,7 @@
           </p:nvSpPr>
           <p:spPr>
             <a:xfrm>
-              <a:off x="5851750" y="4862930"/>
+              <a:off x="6035452" y="4864378"/>
               <a:ext cx="75116" cy="75116"/>
             </a:xfrm>
             <a:prstGeom prst="ellipse">
@@ -18298,7 +18298,7 @@
           </p:nvSpPr>
           <p:spPr>
             <a:xfrm>
-              <a:off x="6038519" y="5495654"/>
+              <a:off x="5730504" y="5496351"/>
               <a:ext cx="75116" cy="75116"/>
             </a:xfrm>
             <a:prstGeom prst="ellipse">
@@ -18324,7 +18324,7 @@
           </p:nvSpPr>
           <p:spPr>
             <a:xfrm>
-              <a:off x="5844268" y="5343100"/>
+              <a:off x="5761378" y="5343975"/>
               <a:ext cx="75116" cy="75116"/>
             </a:xfrm>
             <a:prstGeom prst="ellipse">
@@ -18350,7 +18350,7 @@
           </p:nvSpPr>
           <p:spPr>
             <a:xfrm>
-              <a:off x="5767005" y="4741059"/>
+              <a:off x="5804817" y="4741059"/>
               <a:ext cx="75116" cy="75116"/>
             </a:xfrm>
             <a:prstGeom prst="ellipse">
@@ -18376,7 +18376,7 @@
           </p:nvSpPr>
           <p:spPr>
             <a:xfrm>
-              <a:off x="5701953" y="5347539"/>
+              <a:off x="5825173" y="5348424"/>
               <a:ext cx="75116" cy="75116"/>
             </a:xfrm>
             <a:prstGeom prst="ellipse">
@@ -18402,7 +18402,7 @@
           </p:nvSpPr>
           <p:spPr>
             <a:xfrm>
-              <a:off x="5810430" y="5446578"/>
+              <a:off x="5676356" y="5447991"/>
               <a:ext cx="75116" cy="75116"/>
             </a:xfrm>
             <a:prstGeom prst="ellipse">
@@ -18428,7 +18428,7 @@
           </p:nvSpPr>
           <p:spPr>
             <a:xfrm>
-              <a:off x="5850758" y="5237959"/>
+              <a:off x="5674132" y="5238578"/>
               <a:ext cx="75116" cy="75116"/>
             </a:xfrm>
             <a:prstGeom prst="ellipse">
@@ -18454,7 +18454,7 @@
           </p:nvSpPr>
           <p:spPr>
             <a:xfrm>
-              <a:off x="5852095" y="5178200"/>
+              <a:off x="5910847" y="5178138"/>
               <a:ext cx="75116" cy="75116"/>
             </a:xfrm>
             <a:prstGeom prst="ellipse">
@@ -18480,7 +18480,7 @@
           </p:nvSpPr>
           <p:spPr>
             <a:xfrm>
-              <a:off x="5811208" y="5060020"/>
+              <a:off x="5982064" y="5061210"/>
               <a:ext cx="75116" cy="75116"/>
             </a:xfrm>
             <a:prstGeom prst="ellipse">
@@ -18506,7 +18506,7 @@
           </p:nvSpPr>
           <p:spPr>
             <a:xfrm>
-              <a:off x="5747403" y="5533238"/>
+              <a:off x="5827848" y="5533473"/>
               <a:ext cx="75116" cy="75116"/>
             </a:xfrm>
             <a:prstGeom prst="ellipse">
@@ -18532,7 +18532,7 @@
           </p:nvSpPr>
           <p:spPr>
             <a:xfrm>
-              <a:off x="5727903" y="5560187"/>
+              <a:off x="5935144" y="5560193"/>
               <a:ext cx="75116" cy="75116"/>
             </a:xfrm>
             <a:prstGeom prst="ellipse">
@@ -18558,7 +18558,7 @@
           </p:nvSpPr>
           <p:spPr>
             <a:xfrm>
-              <a:off x="5916879" y="5735823"/>
+              <a:off x="5995397" y="5736146"/>
               <a:ext cx="75116" cy="75116"/>
             </a:xfrm>
             <a:prstGeom prst="ellipse">
@@ -18584,7 +18584,7 @@
           </p:nvSpPr>
           <p:spPr>
             <a:xfrm>
-              <a:off x="5943754" y="5385460"/>
+              <a:off x="5717225" y="5385852"/>
               <a:ext cx="75116" cy="75116"/>
             </a:xfrm>
             <a:prstGeom prst="ellipse">
@@ -18610,7 +18610,7 @@
           </p:nvSpPr>
           <p:spPr>
             <a:xfrm>
-              <a:off x="5891572" y="5315155"/>
+              <a:off x="5945852" y="5316920"/>
               <a:ext cx="75116" cy="75116"/>
             </a:xfrm>
             <a:prstGeom prst="ellipse">
@@ -18636,7 +18636,7 @@
           </p:nvSpPr>
           <p:spPr>
             <a:xfrm>
-              <a:off x="6425365" y="5355994"/>
+              <a:off x="6697359" y="5355959"/>
               <a:ext cx="75116" cy="75116"/>
             </a:xfrm>
             <a:prstGeom prst="ellipse">
@@ -18662,7 +18662,7 @@
           </p:nvSpPr>
           <p:spPr>
             <a:xfrm>
-              <a:off x="6764421" y="5467220"/>
+              <a:off x="6653808" y="5467237"/>
               <a:ext cx="75116" cy="75116"/>
             </a:xfrm>
             <a:prstGeom prst="ellipse">
@@ -18688,7 +18688,7 @@
           </p:nvSpPr>
           <p:spPr>
             <a:xfrm>
-              <a:off x="6715883" y="5533132"/>
+              <a:off x="6548871" y="5533516"/>
               <a:ext cx="75116" cy="75116"/>
             </a:xfrm>
             <a:prstGeom prst="ellipse">
@@ -18714,7 +18714,7 @@
           </p:nvSpPr>
           <p:spPr>
             <a:xfrm>
-              <a:off x="6455661" y="5563516"/>
+              <a:off x="6711915" y="5563843"/>
               <a:ext cx="75116" cy="75116"/>
             </a:xfrm>
             <a:prstGeom prst="ellipse">
@@ -18740,7 +18740,7 @@
           </p:nvSpPr>
           <p:spPr>
             <a:xfrm>
-              <a:off x="6731371" y="5393222"/>
+              <a:off x="6493078" y="5392081"/>
               <a:ext cx="75116" cy="75116"/>
             </a:xfrm>
             <a:prstGeom prst="ellipse">
@@ -18766,7 +18766,7 @@
           </p:nvSpPr>
           <p:spPr>
             <a:xfrm>
-              <a:off x="6770776" y="5336396"/>
+              <a:off x="6508295" y="5336271"/>
               <a:ext cx="75116" cy="75116"/>
             </a:xfrm>
             <a:prstGeom prst="ellipse">
@@ -18792,7 +18792,7 @@
           </p:nvSpPr>
           <p:spPr>
             <a:xfrm>
-              <a:off x="6517005" y="5529927"/>
+              <a:off x="6416167" y="5531670"/>
               <a:ext cx="75116" cy="75116"/>
             </a:xfrm>
             <a:prstGeom prst="ellipse">
@@ -18818,7 +18818,7 @@
           </p:nvSpPr>
           <p:spPr>
             <a:xfrm>
-              <a:off x="6617432" y="5276471"/>
+              <a:off x="6763873" y="5277726"/>
               <a:ext cx="75116" cy="75116"/>
             </a:xfrm>
             <a:prstGeom prst="ellipse">
@@ -18844,7 +18844,7 @@
           </p:nvSpPr>
           <p:spPr>
             <a:xfrm>
-              <a:off x="6436263" y="5595196"/>
+              <a:off x="6661961" y="5595863"/>
               <a:ext cx="75116" cy="75116"/>
             </a:xfrm>
             <a:prstGeom prst="ellipse">
@@ -18870,7 +18870,7 @@
           </p:nvSpPr>
           <p:spPr>
             <a:xfrm>
-              <a:off x="6630995" y="5462552"/>
+              <a:off x="6473572" y="5462310"/>
               <a:ext cx="75116" cy="75116"/>
             </a:xfrm>
             <a:prstGeom prst="ellipse">
@@ -18896,7 +18896,7 @@
           </p:nvSpPr>
           <p:spPr>
             <a:xfrm>
-              <a:off x="6551523" y="5396872"/>
+              <a:off x="6639482" y="5397508"/>
               <a:ext cx="75116" cy="75116"/>
             </a:xfrm>
             <a:prstGeom prst="ellipse">
@@ -18922,7 +18922,7 @@
           </p:nvSpPr>
           <p:spPr>
             <a:xfrm>
-              <a:off x="6441096" y="5470716"/>
+              <a:off x="6649354" y="5471873"/>
               <a:ext cx="75116" cy="75116"/>
             </a:xfrm>
             <a:prstGeom prst="ellipse">
@@ -18948,7 +18948,7 @@
           </p:nvSpPr>
           <p:spPr>
             <a:xfrm>
-              <a:off x="6616124" y="5436041"/>
+              <a:off x="6540326" y="5435196"/>
               <a:ext cx="75116" cy="75116"/>
             </a:xfrm>
             <a:prstGeom prst="ellipse">
@@ -18974,7 +18974,7 @@
           </p:nvSpPr>
           <p:spPr>
             <a:xfrm>
-              <a:off x="6454868" y="5699013"/>
+              <a:off x="6651456" y="5699767"/>
               <a:ext cx="75116" cy="75116"/>
             </a:xfrm>
             <a:prstGeom prst="ellipse">
@@ -19000,7 +19000,7 @@
           </p:nvSpPr>
           <p:spPr>
             <a:xfrm>
-              <a:off x="6434958" y="5454023"/>
+              <a:off x="6523812" y="5454618"/>
               <a:ext cx="75116" cy="75116"/>
             </a:xfrm>
             <a:prstGeom prst="ellipse">
@@ -19026,7 +19026,7 @@
           </p:nvSpPr>
           <p:spPr>
             <a:xfrm>
-              <a:off x="6695783" y="5468465"/>
+              <a:off x="6609773" y="5470591"/>
               <a:ext cx="75116" cy="75116"/>
             </a:xfrm>
             <a:prstGeom prst="ellipse">
@@ -19052,7 +19052,7 @@
           </p:nvSpPr>
           <p:spPr>
             <a:xfrm>
-              <a:off x="6529374" y="5368090"/>
+              <a:off x="6734767" y="5368640"/>
               <a:ext cx="75116" cy="75116"/>
             </a:xfrm>
             <a:prstGeom prst="ellipse">
@@ -19078,7 +19078,7 @@
           </p:nvSpPr>
           <p:spPr>
             <a:xfrm>
-              <a:off x="6686845" y="5393201"/>
+              <a:off x="6680977" y="5393635"/>
               <a:ext cx="75116" cy="75116"/>
             </a:xfrm>
             <a:prstGeom prst="ellipse">
@@ -19104,7 +19104,7 @@
           </p:nvSpPr>
           <p:spPr>
             <a:xfrm>
-              <a:off x="6377980" y="5713956"/>
+              <a:off x="6715693" y="5714270"/>
               <a:ext cx="75116" cy="75116"/>
             </a:xfrm>
             <a:prstGeom prst="ellipse">
@@ -19130,7 +19130,7 @@
           </p:nvSpPr>
           <p:spPr>
             <a:xfrm>
-              <a:off x="6411556" y="5363646"/>
+              <a:off x="6599120" y="5363566"/>
               <a:ext cx="75116" cy="75116"/>
             </a:xfrm>
             <a:prstGeom prst="ellipse">
@@ -19156,7 +19156,7 @@
           </p:nvSpPr>
           <p:spPr>
             <a:xfrm>
-              <a:off x="6769054" y="5263842"/>
+              <a:off x="6650017" y="5263593"/>
               <a:ext cx="75116" cy="75116"/>
             </a:xfrm>
             <a:prstGeom prst="ellipse">
@@ -19182,7 +19182,7 @@
           </p:nvSpPr>
           <p:spPr>
             <a:xfrm>
-              <a:off x="6697514" y="5288395"/>
+              <a:off x="6445570" y="5289649"/>
               <a:ext cx="75116" cy="75116"/>
             </a:xfrm>
             <a:prstGeom prst="ellipse">
@@ -19208,7 +19208,7 @@
           </p:nvSpPr>
           <p:spPr>
             <a:xfrm>
-              <a:off x="6446277" y="5555629"/>
+              <a:off x="6482265" y="5554913"/>
               <a:ext cx="75116" cy="75116"/>
             </a:xfrm>
             <a:prstGeom prst="ellipse">
@@ -19234,7 +19234,7 @@
           </p:nvSpPr>
           <p:spPr>
             <a:xfrm>
-              <a:off x="6518941" y="5616911"/>
+              <a:off x="6770776" y="5617318"/>
               <a:ext cx="75116" cy="75116"/>
             </a:xfrm>
             <a:prstGeom prst="ellipse">
@@ -19260,42 +19260,42 @@
           </p:nvSpPr>
           <p:spPr>
             <a:xfrm>
-              <a:off x="4507888" y="5290534"/>
-              <a:ext cx="2104877" cy="284349"/>
+              <a:off x="4505642" y="5291006"/>
+              <a:ext cx="2112320" cy="284488"/>
             </a:xfrm>
             <a:custGeom>
               <a:avLst/>
               <a:pathLst>
-                <a:path w="2104877" h="284349">
+                <a:path w="2112320" h="284488">
                   <a:moveTo>
                     <a:pt x="0" y="0"/>
                   </a:moveTo>
                   <a:lnTo>
-                    <a:pt x="1112050" y="57873"/>
+                    <a:pt x="1115983" y="57902"/>
                   </a:lnTo>
                   <a:lnTo>
-                    <a:pt x="1403251" y="56478"/>
+                    <a:pt x="1408213" y="56506"/>
                   </a:lnTo>
                   <a:lnTo>
-                    <a:pt x="1813676" y="41760"/>
+                    <a:pt x="1820090" y="41780"/>
                   </a:lnTo>
                   <a:lnTo>
-                    <a:pt x="2104877" y="25089"/>
+                    <a:pt x="2112320" y="25101"/>
                   </a:lnTo>
                   <a:lnTo>
-                    <a:pt x="2104877" y="275737"/>
+                    <a:pt x="2112320" y="275871"/>
                   </a:lnTo>
                   <a:lnTo>
-                    <a:pt x="1813676" y="256786"/>
+                    <a:pt x="1820090" y="256912"/>
                   </a:lnTo>
                   <a:lnTo>
-                    <a:pt x="1403251" y="238855"/>
+                    <a:pt x="1408213" y="238972"/>
                   </a:lnTo>
                   <a:lnTo>
-                    <a:pt x="1112050" y="235180"/>
+                    <a:pt x="1115983" y="235295"/>
                   </a:lnTo>
                   <a:lnTo>
-                    <a:pt x="0" y="284349"/>
+                    <a:pt x="0" y="284488"/>
                   </a:lnTo>
                   <a:close/>
                 </a:path>
@@ -19321,27 +19321,27 @@
           </p:nvSpPr>
           <p:spPr>
             <a:xfrm>
-              <a:off x="4507888" y="5290534"/>
-              <a:ext cx="2104877" cy="57873"/>
+              <a:off x="4505642" y="5291006"/>
+              <a:ext cx="2112320" cy="57902"/>
             </a:xfrm>
             <a:custGeom>
               <a:avLst/>
               <a:pathLst>
-                <a:path w="2104877" h="57873">
+                <a:path w="2112320" h="57902">
                   <a:moveTo>
                     <a:pt x="0" y="0"/>
                   </a:moveTo>
                   <a:lnTo>
-                    <a:pt x="1112050" y="57873"/>
+                    <a:pt x="1115983" y="57902"/>
                   </a:lnTo>
                   <a:lnTo>
-                    <a:pt x="1403251" y="56478"/>
+                    <a:pt x="1408213" y="56506"/>
                   </a:lnTo>
                   <a:lnTo>
-                    <a:pt x="1813676" y="41760"/>
+                    <a:pt x="1820090" y="41780"/>
                   </a:lnTo>
                   <a:lnTo>
-                    <a:pt x="2104877" y="25089"/>
+                    <a:pt x="2112320" y="25101"/>
                   </a:lnTo>
                 </a:path>
               </a:pathLst>
@@ -19361,27 +19361,27 @@
           </p:nvSpPr>
           <p:spPr>
             <a:xfrm>
-              <a:off x="4507888" y="5525715"/>
-              <a:ext cx="2104877" cy="49168"/>
+              <a:off x="4505642" y="5526302"/>
+              <a:ext cx="2112320" cy="49192"/>
             </a:xfrm>
             <a:custGeom>
               <a:avLst/>
               <a:pathLst>
-                <a:path w="2104877" h="49168">
+                <a:path w="2112320" h="49192">
                   <a:moveTo>
-                    <a:pt x="2104877" y="40556"/>
+                    <a:pt x="2112320" y="40576"/>
                   </a:moveTo>
                   <a:lnTo>
-                    <a:pt x="1813676" y="21606"/>
+                    <a:pt x="1820090" y="21616"/>
                   </a:lnTo>
                   <a:lnTo>
-                    <a:pt x="1403251" y="3675"/>
+                    <a:pt x="1408213" y="3676"/>
                   </a:lnTo>
                   <a:lnTo>
-                    <a:pt x="1112050" y="0"/>
+                    <a:pt x="1115983" y="0"/>
                   </a:lnTo>
                   <a:lnTo>
-                    <a:pt x="0" y="49168"/>
+                    <a:pt x="0" y="49192"/>
                   </a:lnTo>
                 </a:path>
               </a:pathLst>
@@ -19401,27 +19401,27 @@
           </p:nvSpPr>
           <p:spPr>
             <a:xfrm>
-              <a:off x="4507888" y="5432709"/>
-              <a:ext cx="2104877" cy="8238"/>
+              <a:off x="4505642" y="5433250"/>
+              <a:ext cx="2112320" cy="8242"/>
             </a:xfrm>
             <a:custGeom>
               <a:avLst/>
               <a:pathLst>
-                <a:path w="2104877" h="8238">
+                <a:path w="2112320" h="8242">
                   <a:moveTo>
                     <a:pt x="0" y="0"/>
                   </a:moveTo>
                   <a:lnTo>
-                    <a:pt x="1112050" y="4352"/>
+                    <a:pt x="1115983" y="4354"/>
                   </a:lnTo>
                   <a:lnTo>
-                    <a:pt x="1403251" y="5492"/>
+                    <a:pt x="1408213" y="5495"/>
                   </a:lnTo>
                   <a:lnTo>
-                    <a:pt x="1813676" y="7098"/>
+                    <a:pt x="1820090" y="7102"/>
                   </a:lnTo>
                   <a:lnTo>
-                    <a:pt x="2104877" y="8238"/>
+                    <a:pt x="2112320" y="8242"/>
                   </a:lnTo>
                 </a:path>
               </a:pathLst>
@@ -19450,7 +19450,7 @@
           </p:nvSpPr>
           <p:spPr>
             <a:xfrm>
-              <a:off x="6133071" y="4769398"/>
+              <a:off x="6138269" y="4769675"/>
               <a:ext cx="479694" cy="82021"/>
             </a:xfrm>
             <a:prstGeom prst="rect">
@@ -19557,7 +19557,7 @@
           </p:nvSpPr>
           <p:spPr>
             <a:xfrm>
-              <a:off x="4158119" y="5892213"/>
+              <a:off x="4158119" y="5892979"/>
               <a:ext cx="28468" cy="0"/>
             </a:xfrm>
             <a:custGeom>
@@ -19597,7 +19597,7 @@
           </p:nvSpPr>
           <p:spPr>
             <a:xfrm>
-              <a:off x="4158119" y="5644398"/>
+              <a:off x="4158119" y="5645043"/>
               <a:ext cx="28468" cy="0"/>
             </a:xfrm>
             <a:custGeom>
@@ -19637,7 +19637,7 @@
           </p:nvSpPr>
           <p:spPr>
             <a:xfrm>
-              <a:off x="4158119" y="5396583"/>
+              <a:off x="4158119" y="5397107"/>
               <a:ext cx="28468" cy="0"/>
             </a:xfrm>
             <a:custGeom>
@@ -19677,7 +19677,7 @@
           </p:nvSpPr>
           <p:spPr>
             <a:xfrm>
-              <a:off x="4158119" y="5148768"/>
+              <a:off x="4158119" y="5149171"/>
               <a:ext cx="28468" cy="0"/>
             </a:xfrm>
             <a:custGeom>
@@ -19717,7 +19717,7 @@
           </p:nvSpPr>
           <p:spPr>
             <a:xfrm>
-              <a:off x="4158119" y="4900953"/>
+              <a:off x="4158119" y="4901235"/>
               <a:ext cx="28468" cy="0"/>
             </a:xfrm>
             <a:custGeom>
@@ -19757,7 +19757,7 @@
           </p:nvSpPr>
           <p:spPr>
             <a:xfrm>
-              <a:off x="4158119" y="4653138"/>
+              <a:off x="4158119" y="4653299"/>
               <a:ext cx="28468" cy="0"/>
             </a:xfrm>
             <a:custGeom>
@@ -19837,7 +19837,7 @@
           </p:nvSpPr>
           <p:spPr>
             <a:xfrm>
-              <a:off x="4507888" y="5968427"/>
+              <a:off x="4505642" y="5968427"/>
               <a:ext cx="0" cy="28468"/>
             </a:xfrm>
             <a:custGeom>
@@ -19877,7 +19877,7 @@
           </p:nvSpPr>
           <p:spPr>
             <a:xfrm>
-              <a:off x="5209514" y="5968427"/>
+              <a:off x="5209749" y="5968427"/>
               <a:ext cx="0" cy="28468"/>
             </a:xfrm>
             <a:custGeom>
@@ -19917,7 +19917,7 @@
           </p:nvSpPr>
           <p:spPr>
             <a:xfrm>
-              <a:off x="5911140" y="5968427"/>
+              <a:off x="5913856" y="5968427"/>
               <a:ext cx="0" cy="28468"/>
             </a:xfrm>
             <a:custGeom>
@@ -19957,7 +19957,7 @@
           </p:nvSpPr>
           <p:spPr>
             <a:xfrm>
-              <a:off x="6612765" y="5968427"/>
+              <a:off x="6617963" y="5968427"/>
               <a:ext cx="0" cy="28468"/>
             </a:xfrm>
             <a:custGeom>
@@ -19997,7 +19997,7 @@
           </p:nvSpPr>
           <p:spPr>
             <a:xfrm>
-              <a:off x="4479633" y="6019670"/>
+              <a:off x="4477387" y="6019670"/>
               <a:ext cx="56509" cy="72877"/>
             </a:xfrm>
             <a:prstGeom prst="rect">
@@ -20043,7 +20043,7 @@
           </p:nvSpPr>
           <p:spPr>
             <a:xfrm>
-              <a:off x="5181259" y="6019670"/>
+              <a:off x="5181494" y="6019670"/>
               <a:ext cx="56509" cy="72877"/>
             </a:xfrm>
             <a:prstGeom prst="rect">
@@ -20089,7 +20089,7 @@
           </p:nvSpPr>
           <p:spPr>
             <a:xfrm>
-              <a:off x="5882885" y="6019670"/>
+              <a:off x="5885601" y="6019670"/>
               <a:ext cx="56509" cy="72877"/>
             </a:xfrm>
             <a:prstGeom prst="rect">
@@ -20135,7 +20135,7 @@
           </p:nvSpPr>
           <p:spPr>
             <a:xfrm>
-              <a:off x="6584510" y="6019670"/>
+              <a:off x="6589708" y="6019670"/>
               <a:ext cx="56509" cy="72877"/>
             </a:xfrm>
             <a:prstGeom prst="rect">

--- a/figures/Figure_1.pptx
+++ b/figures/Figure_1.pptx
@@ -2334,7 +2334,7 @@
           <p:spPr>
             <a:xfrm>
               <a:off x="965010" y="939705"/>
-              <a:ext cx="3142498" cy="1733547"/>
+              <a:ext cx="3142361" cy="1733638"/>
             </a:xfrm>
             <a:prstGeom prst="rect">
               <a:avLst/>
@@ -2359,8 +2359,8 @@
           </p:nvSpPr>
           <p:spPr>
             <a:xfrm>
-              <a:off x="4107509" y="939705"/>
-              <a:ext cx="2876280" cy="1733547"/>
+              <a:off x="4107371" y="939705"/>
+              <a:ext cx="2876417" cy="1733638"/>
             </a:xfrm>
             <a:prstGeom prst="rect">
               <a:avLst/>
@@ -2385,8 +2385,8 @@
           </p:nvSpPr>
           <p:spPr>
             <a:xfrm>
-              <a:off x="965010" y="2673252"/>
-              <a:ext cx="3142498" cy="1733547"/>
+              <a:off x="965010" y="2673343"/>
+              <a:ext cx="3142361" cy="1733638"/>
             </a:xfrm>
             <a:prstGeom prst="rect">
               <a:avLst/>
@@ -2411,8 +2411,8 @@
           </p:nvSpPr>
           <p:spPr>
             <a:xfrm>
-              <a:off x="4107509" y="2673252"/>
-              <a:ext cx="2876280" cy="1733547"/>
+              <a:off x="4107371" y="2673343"/>
+              <a:ext cx="2876417" cy="1733638"/>
             </a:xfrm>
             <a:prstGeom prst="rect">
               <a:avLst/>
@@ -2437,8 +2437,8 @@
           </p:nvSpPr>
           <p:spPr>
             <a:xfrm>
-              <a:off x="965010" y="4406799"/>
-              <a:ext cx="3142498" cy="2602295"/>
+              <a:off x="965010" y="4406982"/>
+              <a:ext cx="3142361" cy="2602112"/>
             </a:xfrm>
             <a:prstGeom prst="rect">
               <a:avLst/>
@@ -2463,8 +2463,8 @@
           </p:nvSpPr>
           <p:spPr>
             <a:xfrm>
-              <a:off x="4107509" y="4406799"/>
-              <a:ext cx="2876280" cy="2602295"/>
+              <a:off x="4107371" y="4406982"/>
+              <a:ext cx="2876417" cy="2602112"/>
             </a:xfrm>
             <a:prstGeom prst="rect">
               <a:avLst/>
@@ -2489,8 +2489,8 @@
           </p:nvSpPr>
           <p:spPr>
             <a:xfrm>
-              <a:off x="1310306" y="1141550"/>
-              <a:ext cx="2746591" cy="1359782"/>
+              <a:off x="1310032" y="1141550"/>
+              <a:ext cx="2746729" cy="1359873"/>
             </a:xfrm>
             <a:prstGeom prst="rect">
               <a:avLst/>
@@ -2515,7 +2515,7 @@
           </p:nvSpPr>
           <p:spPr>
             <a:xfrm>
-              <a:off x="1403391" y="2249542"/>
+              <a:off x="1509123" y="2249554"/>
               <a:ext cx="75116" cy="75116"/>
             </a:xfrm>
             <a:prstGeom prst="ellipse">
@@ -2541,7 +2541,7 @@
           </p:nvSpPr>
           <p:spPr>
             <a:xfrm>
-              <a:off x="1404501" y="2182190"/>
+              <a:off x="1426889" y="2182210"/>
               <a:ext cx="75116" cy="75116"/>
             </a:xfrm>
             <a:prstGeom prst="ellipse">
@@ -2567,7 +2567,7 @@
           </p:nvSpPr>
           <p:spPr>
             <a:xfrm>
-              <a:off x="1443587" y="2283694"/>
+              <a:off x="1397325" y="2283785"/>
               <a:ext cx="75116" cy="75116"/>
             </a:xfrm>
             <a:prstGeom prst="ellipse">
@@ -2593,7 +2593,7 @@
           </p:nvSpPr>
           <p:spPr>
             <a:xfrm>
-              <a:off x="1397593" y="2280808"/>
+              <a:off x="1584460" y="2280922"/>
               <a:ext cx="75116" cy="75116"/>
             </a:xfrm>
             <a:prstGeom prst="ellipse">
@@ -2619,7 +2619,7 @@
           </p:nvSpPr>
           <p:spPr>
             <a:xfrm>
-              <a:off x="1514960" y="2305733"/>
+              <a:off x="1462711" y="2305907"/>
               <a:ext cx="75116" cy="75116"/>
             </a:xfrm>
             <a:prstGeom prst="ellipse">
@@ -2645,7 +2645,7 @@
           </p:nvSpPr>
           <p:spPr>
             <a:xfrm>
-              <a:off x="1561451" y="2163502"/>
+              <a:off x="1467700" y="2163671"/>
               <a:ext cx="75116" cy="75116"/>
             </a:xfrm>
             <a:prstGeom prst="ellipse">
@@ -2671,7 +2671,7 @@
           </p:nvSpPr>
           <p:spPr>
             <a:xfrm>
-              <a:off x="1463356" y="2084316"/>
+              <a:off x="1594731" y="2084386"/>
               <a:ext cx="75116" cy="75116"/>
             </a:xfrm>
             <a:prstGeom prst="ellipse">
@@ -2697,7 +2697,7 @@
           </p:nvSpPr>
           <p:spPr>
             <a:xfrm>
-              <a:off x="1454622" y="2265227"/>
+              <a:off x="1609494" y="2265348"/>
               <a:ext cx="75116" cy="75116"/>
             </a:xfrm>
             <a:prstGeom prst="ellipse">
@@ -2723,7 +2723,7 @@
           </p:nvSpPr>
           <p:spPr>
             <a:xfrm>
-              <a:off x="1474895" y="2334286"/>
+              <a:off x="1413578" y="2334458"/>
               <a:ext cx="75116" cy="75116"/>
             </a:xfrm>
             <a:prstGeom prst="ellipse">
@@ -2749,7 +2749,7 @@
           </p:nvSpPr>
           <p:spPr>
             <a:xfrm>
-              <a:off x="1559236" y="2143893"/>
+              <a:off x="1400753" y="2144015"/>
               <a:ext cx="75116" cy="75116"/>
             </a:xfrm>
             <a:prstGeom prst="ellipse">
@@ -2775,7 +2775,7 @@
           </p:nvSpPr>
           <p:spPr>
             <a:xfrm>
-              <a:off x="2328907" y="2342308"/>
+              <a:off x="2281264" y="2342442"/>
               <a:ext cx="75116" cy="75116"/>
             </a:xfrm>
             <a:prstGeom prst="ellipse">
@@ -2801,7 +2801,7 @@
           </p:nvSpPr>
           <p:spPr>
             <a:xfrm>
-              <a:off x="2263941" y="2281488"/>
+              <a:off x="2327078" y="2281647"/>
               <a:ext cx="75116" cy="75116"/>
             </a:xfrm>
             <a:prstGeom prst="ellipse">
@@ -2827,7 +2827,7 @@
           </p:nvSpPr>
           <p:spPr>
             <a:xfrm>
-              <a:off x="2215022" y="1703222"/>
+              <a:off x="2244695" y="1703282"/>
               <a:ext cx="75116" cy="75116"/>
             </a:xfrm>
             <a:prstGeom prst="ellipse">
@@ -2853,7 +2853,7 @@
           </p:nvSpPr>
           <p:spPr>
             <a:xfrm>
-              <a:off x="2220947" y="2204266"/>
+              <a:off x="2331170" y="2204380"/>
               <a:ext cx="75116" cy="75116"/>
             </a:xfrm>
             <a:prstGeom prst="ellipse">
@@ -2879,7 +2879,7 @@
           </p:nvSpPr>
           <p:spPr>
             <a:xfrm>
-              <a:off x="2347126" y="2275579"/>
+              <a:off x="2287827" y="2275699"/>
               <a:ext cx="75116" cy="75116"/>
             </a:xfrm>
             <a:prstGeom prst="ellipse">
@@ -2905,7 +2905,7 @@
           </p:nvSpPr>
           <p:spPr>
             <a:xfrm>
-              <a:off x="2358704" y="2336888"/>
+              <a:off x="2352491" y="2337064"/>
               <a:ext cx="75116" cy="75116"/>
             </a:xfrm>
             <a:prstGeom prst="ellipse">
@@ -2931,7 +2931,7 @@
           </p:nvSpPr>
           <p:spPr>
             <a:xfrm>
-              <a:off x="2264141" y="2361718"/>
+              <a:off x="2367992" y="2361938"/>
               <a:ext cx="75116" cy="75116"/>
             </a:xfrm>
             <a:prstGeom prst="ellipse">
@@ -2957,7 +2957,7 @@
           </p:nvSpPr>
           <p:spPr>
             <a:xfrm>
-              <a:off x="2351799" y="2196439"/>
+              <a:off x="2342329" y="2196567"/>
               <a:ext cx="75116" cy="75116"/>
             </a:xfrm>
             <a:prstGeom prst="ellipse">
@@ -2983,7 +2983,7 @@
           </p:nvSpPr>
           <p:spPr>
             <a:xfrm>
-              <a:off x="2259354" y="1582850"/>
+              <a:off x="2193023" y="1582901"/>
               <a:ext cx="75116" cy="75116"/>
             </a:xfrm>
             <a:prstGeom prst="ellipse">
@@ -3009,7 +3009,7 @@
           </p:nvSpPr>
           <p:spPr>
             <a:xfrm>
-              <a:off x="2294046" y="1761846"/>
+              <a:off x="2369456" y="1761818"/>
               <a:ext cx="75116" cy="75116"/>
             </a:xfrm>
             <a:prstGeom prst="ellipse">
@@ -3035,7 +3035,7 @@
           </p:nvSpPr>
           <p:spPr>
             <a:xfrm>
-              <a:off x="2294817" y="2352692"/>
+              <a:off x="2196641" y="2352764"/>
               <a:ext cx="75116" cy="75116"/>
             </a:xfrm>
             <a:prstGeom prst="ellipse">
@@ -3061,7 +3061,7 @@
           </p:nvSpPr>
           <p:spPr>
             <a:xfrm>
-              <a:off x="2157170" y="2158230"/>
+              <a:off x="2179743" y="2158364"/>
               <a:ext cx="75116" cy="75116"/>
             </a:xfrm>
             <a:prstGeom prst="ellipse">
@@ -3087,7 +3087,7 @@
           </p:nvSpPr>
           <p:spPr>
             <a:xfrm>
-              <a:off x="2288026" y="2104395"/>
+              <a:off x="2157979" y="2104549"/>
               <a:ext cx="75116" cy="75116"/>
             </a:xfrm>
             <a:prstGeom prst="ellipse">
@@ -3113,7 +3113,7 @@
           </p:nvSpPr>
           <p:spPr>
             <a:xfrm>
-              <a:off x="2316164" y="2113735"/>
+              <a:off x="2358515" y="2113969"/>
               <a:ext cx="75116" cy="75116"/>
             </a:xfrm>
             <a:prstGeom prst="ellipse">
@@ -3139,7 +3139,7 @@
           </p:nvSpPr>
           <p:spPr>
             <a:xfrm>
-              <a:off x="2218119" y="2268987"/>
+              <a:off x="2319566" y="2269041"/>
               <a:ext cx="75116" cy="75116"/>
             </a:xfrm>
             <a:prstGeom prst="ellipse">
@@ -3165,7 +3165,7 @@
           </p:nvSpPr>
           <p:spPr>
             <a:xfrm>
-              <a:off x="2226612" y="2211509"/>
+              <a:off x="2231505" y="2211564"/>
               <a:ext cx="75116" cy="75116"/>
             </a:xfrm>
             <a:prstGeom prst="ellipse">
@@ -3191,7 +3191,7 @@
           </p:nvSpPr>
           <p:spPr>
             <a:xfrm>
-              <a:off x="2364604" y="1754121"/>
+              <a:off x="2225704" y="1754122"/>
               <a:ext cx="75116" cy="75116"/>
             </a:xfrm>
             <a:prstGeom prst="ellipse">
@@ -3217,7 +3217,7 @@
           </p:nvSpPr>
           <p:spPr>
             <a:xfrm>
-              <a:off x="2229178" y="1884933"/>
+              <a:off x="2361145" y="1885015"/>
               <a:ext cx="75116" cy="75116"/>
             </a:xfrm>
             <a:prstGeom prst="ellipse">
@@ -3243,7 +3243,7 @@
           </p:nvSpPr>
           <p:spPr>
             <a:xfrm>
-              <a:off x="3049157" y="2303382"/>
+              <a:off x="2997322" y="2303624"/>
               <a:ext cx="75116" cy="75116"/>
             </a:xfrm>
             <a:prstGeom prst="ellipse">
@@ -3269,7 +3269,7 @@
           </p:nvSpPr>
           <p:spPr>
             <a:xfrm>
-              <a:off x="3059627" y="2095215"/>
+              <a:off x="2954774" y="2095305"/>
               <a:ext cx="75116" cy="75116"/>
             </a:xfrm>
             <a:prstGeom prst="ellipse">
@@ -3295,7 +3295,7 @@
           </p:nvSpPr>
           <p:spPr>
             <a:xfrm>
-              <a:off x="3047256" y="2315528"/>
+              <a:off x="2968297" y="2315696"/>
               <a:ext cx="75116" cy="75116"/>
             </a:xfrm>
             <a:prstGeom prst="ellipse">
@@ -3321,7 +3321,7 @@
           </p:nvSpPr>
           <p:spPr>
             <a:xfrm>
-              <a:off x="3097596" y="2401965"/>
+              <a:off x="3005814" y="2402053"/>
               <a:ext cx="75116" cy="75116"/>
             </a:xfrm>
             <a:prstGeom prst="ellipse">
@@ -3347,7 +3347,7 @@
           </p:nvSpPr>
           <p:spPr>
             <a:xfrm>
-              <a:off x="3033528" y="2158154"/>
+              <a:off x="3118998" y="2158359"/>
               <a:ext cx="75116" cy="75116"/>
             </a:xfrm>
             <a:prstGeom prst="ellipse">
@@ -3373,7 +3373,7 @@
           </p:nvSpPr>
           <p:spPr>
             <a:xfrm>
-              <a:off x="3124956" y="2293412"/>
+              <a:off x="2986063" y="2293568"/>
               <a:ext cx="75116" cy="75116"/>
             </a:xfrm>
             <a:prstGeom prst="ellipse">
@@ -3399,7 +3399,7 @@
           </p:nvSpPr>
           <p:spPr>
             <a:xfrm>
-              <a:off x="2942987" y="1417516"/>
+              <a:off x="3043364" y="1417574"/>
               <a:ext cx="75116" cy="75116"/>
             </a:xfrm>
             <a:prstGeom prst="ellipse">
@@ -3425,7 +3425,7 @@
           </p:nvSpPr>
           <p:spPr>
             <a:xfrm>
-              <a:off x="3085290" y="2337097"/>
+              <a:off x="3023867" y="2337288"/>
               <a:ext cx="75116" cy="75116"/>
             </a:xfrm>
             <a:prstGeom prst="ellipse">
@@ -3451,7 +3451,7 @@
           </p:nvSpPr>
           <p:spPr>
             <a:xfrm>
-              <a:off x="3021659" y="2008425"/>
+              <a:off x="2934101" y="2008580"/>
               <a:ext cx="75116" cy="75116"/>
             </a:xfrm>
             <a:prstGeom prst="ellipse">
@@ -3477,7 +3477,7 @@
           </p:nvSpPr>
           <p:spPr>
             <a:xfrm>
-              <a:off x="2974996" y="1689508"/>
+              <a:off x="3099601" y="1689511"/>
               <a:ext cx="75116" cy="75116"/>
             </a:xfrm>
             <a:prstGeom prst="ellipse">
@@ -3503,7 +3503,7 @@
           </p:nvSpPr>
           <p:spPr>
             <a:xfrm>
-              <a:off x="3082212" y="1165800"/>
+              <a:off x="3066159" y="1165804"/>
               <a:ext cx="75116" cy="75116"/>
             </a:xfrm>
             <a:prstGeom prst="ellipse">
@@ -3529,7 +3529,7 @@
           </p:nvSpPr>
           <p:spPr>
             <a:xfrm>
-              <a:off x="3126824" y="1912655"/>
+              <a:off x="3124545" y="1912650"/>
               <a:ext cx="75116" cy="75116"/>
             </a:xfrm>
             <a:prstGeom prst="ellipse">
@@ -3555,7 +3555,7 @@
           </p:nvSpPr>
           <p:spPr>
             <a:xfrm>
-              <a:off x="2938441" y="2071277"/>
+              <a:off x="3089241" y="2071304"/>
               <a:ext cx="75116" cy="75116"/>
             </a:xfrm>
             <a:prstGeom prst="ellipse">
@@ -3581,7 +3581,7 @@
           </p:nvSpPr>
           <p:spPr>
             <a:xfrm>
-              <a:off x="2970795" y="1937163"/>
+              <a:off x="3106921" y="1937327"/>
               <a:ext cx="75116" cy="75116"/>
             </a:xfrm>
             <a:prstGeom prst="ellipse">
@@ -3607,7 +3607,7 @@
           </p:nvSpPr>
           <p:spPr>
             <a:xfrm>
-              <a:off x="2925454" y="2046409"/>
+              <a:off x="3095887" y="2046542"/>
               <a:ext cx="75116" cy="75116"/>
             </a:xfrm>
             <a:prstGeom prst="ellipse">
@@ -3633,7 +3633,7 @@
           </p:nvSpPr>
           <p:spPr>
             <a:xfrm>
-              <a:off x="2999601" y="2192058"/>
+              <a:off x="3006545" y="2192139"/>
               <a:ext cx="75116" cy="75116"/>
             </a:xfrm>
             <a:prstGeom prst="ellipse">
@@ -3659,7 +3659,7 @@
           </p:nvSpPr>
           <p:spPr>
             <a:xfrm>
-              <a:off x="2914323" y="2108831"/>
+              <a:off x="3012356" y="2108877"/>
               <a:ext cx="75116" cy="75116"/>
             </a:xfrm>
             <a:prstGeom prst="ellipse">
@@ -3685,7 +3685,7 @@
           </p:nvSpPr>
           <p:spPr>
             <a:xfrm>
-              <a:off x="3038607" y="2094852"/>
+              <a:off x="3053328" y="2095007"/>
               <a:ext cx="75116" cy="75116"/>
             </a:xfrm>
             <a:prstGeom prst="ellipse">
@@ -3711,7 +3711,7 @@
           </p:nvSpPr>
           <p:spPr>
             <a:xfrm>
-              <a:off x="2955506" y="2190663"/>
+              <a:off x="2941998" y="2190825"/>
               <a:ext cx="75116" cy="75116"/>
             </a:xfrm>
             <a:prstGeom prst="ellipse">
@@ -3737,7 +3737,7 @@
           </p:nvSpPr>
           <p:spPr>
             <a:xfrm>
-              <a:off x="3083781" y="2180659"/>
+              <a:off x="2976292" y="2180727"/>
               <a:ext cx="75116" cy="75116"/>
             </a:xfrm>
             <a:prstGeom prst="ellipse">
@@ -3763,7 +3763,7 @@
           </p:nvSpPr>
           <p:spPr>
             <a:xfrm>
-              <a:off x="3761998" y="2197218"/>
+              <a:off x="3854106" y="2197357"/>
               <a:ext cx="75116" cy="75116"/>
             </a:xfrm>
             <a:prstGeom prst="ellipse">
@@ -3789,7 +3789,7 @@
           </p:nvSpPr>
           <p:spPr>
             <a:xfrm>
-              <a:off x="3713886" y="2195043"/>
+              <a:off x="3727023" y="2195185"/>
               <a:ext cx="75116" cy="75116"/>
             </a:xfrm>
             <a:prstGeom prst="ellipse">
@@ -3815,7 +3815,7 @@
           </p:nvSpPr>
           <p:spPr>
             <a:xfrm>
-              <a:off x="3683269" y="2153510"/>
+              <a:off x="3851970" y="2153579"/>
               <a:ext cx="75116" cy="75116"/>
             </a:xfrm>
             <a:prstGeom prst="ellipse">
@@ -3841,7 +3841,7 @@
           </p:nvSpPr>
           <p:spPr>
             <a:xfrm>
-              <a:off x="3777202" y="2285047"/>
+              <a:off x="3866860" y="2285155"/>
               <a:ext cx="75116" cy="75116"/>
             </a:xfrm>
             <a:prstGeom prst="ellipse">
@@ -3867,7 +3867,7 @@
           </p:nvSpPr>
           <p:spPr>
             <a:xfrm>
-              <a:off x="3694949" y="1930736"/>
+              <a:off x="3695323" y="1930796"/>
               <a:ext cx="75116" cy="75116"/>
             </a:xfrm>
             <a:prstGeom prst="ellipse">
@@ -3893,7 +3893,7 @@
           </p:nvSpPr>
           <p:spPr>
             <a:xfrm>
-              <a:off x="3823639" y="1947992"/>
+              <a:off x="3781514" y="1948080"/>
               <a:ext cx="75116" cy="75116"/>
             </a:xfrm>
             <a:prstGeom prst="ellipse">
@@ -3919,7 +3919,7 @@
           </p:nvSpPr>
           <p:spPr>
             <a:xfrm>
-              <a:off x="3714422" y="2155694"/>
+              <a:off x="3799731" y="2155858"/>
               <a:ext cx="75116" cy="75116"/>
             </a:xfrm>
             <a:prstGeom prst="ellipse">
@@ -3945,7 +3945,7 @@
           </p:nvSpPr>
           <p:spPr>
             <a:xfrm>
-              <a:off x="3835652" y="2083525"/>
+              <a:off x="3774696" y="2083576"/>
               <a:ext cx="75116" cy="75116"/>
             </a:xfrm>
             <a:prstGeom prst="ellipse">
@@ -3971,7 +3971,7 @@
           </p:nvSpPr>
           <p:spPr>
             <a:xfrm>
-              <a:off x="3874815" y="1998329"/>
+              <a:off x="3834743" y="1998482"/>
               <a:ext cx="75116" cy="75116"/>
             </a:xfrm>
             <a:prstGeom prst="ellipse">
@@ -3997,7 +3997,7 @@
           </p:nvSpPr>
           <p:spPr>
             <a:xfrm>
-              <a:off x="3735603" y="1783742"/>
+              <a:off x="3891052" y="1783810"/>
               <a:ext cx="75116" cy="75116"/>
             </a:xfrm>
             <a:prstGeom prst="ellipse">
@@ -4023,7 +4023,7 @@
           </p:nvSpPr>
           <p:spPr>
             <a:xfrm>
-              <a:off x="3840663" y="1847258"/>
+              <a:off x="3860613" y="1847372"/>
               <a:ext cx="75116" cy="75116"/>
             </a:xfrm>
             <a:prstGeom prst="ellipse">
@@ -4049,7 +4049,7 @@
           </p:nvSpPr>
           <p:spPr>
             <a:xfrm>
-              <a:off x="3766014" y="1716883"/>
+              <a:off x="3783181" y="1716972"/>
               <a:ext cx="75116" cy="75116"/>
             </a:xfrm>
             <a:prstGeom prst="ellipse">
@@ -4075,7 +4075,7 @@
           </p:nvSpPr>
           <p:spPr>
             <a:xfrm>
-              <a:off x="3780674" y="1938111"/>
+              <a:off x="3778543" y="1938081"/>
               <a:ext cx="75116" cy="75116"/>
             </a:xfrm>
             <a:prstGeom prst="ellipse">
@@ -4101,7 +4101,7 @@
           </p:nvSpPr>
           <p:spPr>
             <a:xfrm>
-              <a:off x="3894495" y="1875708"/>
+              <a:off x="3822829" y="1875771"/>
               <a:ext cx="75116" cy="75116"/>
             </a:xfrm>
             <a:prstGeom prst="ellipse">
@@ -4127,7 +4127,7 @@
           </p:nvSpPr>
           <p:spPr>
             <a:xfrm>
-              <a:off x="3683419" y="2254819"/>
+              <a:off x="3834663" y="2254933"/>
               <a:ext cx="75116" cy="75116"/>
             </a:xfrm>
             <a:prstGeom prst="ellipse">
@@ -4153,7 +4153,7 @@
           </p:nvSpPr>
           <p:spPr>
             <a:xfrm>
-              <a:off x="3865614" y="2099519"/>
+              <a:off x="3803519" y="2099622"/>
               <a:ext cx="75116" cy="75116"/>
             </a:xfrm>
             <a:prstGeom prst="ellipse">
@@ -4179,7 +4179,7 @@
           </p:nvSpPr>
           <p:spPr>
             <a:xfrm>
-              <a:off x="3893928" y="2011595"/>
+              <a:off x="3838506" y="2011760"/>
               <a:ext cx="75116" cy="75116"/>
             </a:xfrm>
             <a:prstGeom prst="ellipse">
@@ -4205,7 +4205,7 @@
           </p:nvSpPr>
           <p:spPr>
             <a:xfrm>
-              <a:off x="3832057" y="2069505"/>
+              <a:off x="3731950" y="2069733"/>
               <a:ext cx="75116" cy="75116"/>
             </a:xfrm>
             <a:prstGeom prst="ellipse">
@@ -4231,7 +4231,7 @@
           </p:nvSpPr>
           <p:spPr>
             <a:xfrm>
-              <a:off x="3851859" y="1824482"/>
+              <a:off x="3704914" y="1824519"/>
               <a:ext cx="75116" cy="75116"/>
             </a:xfrm>
             <a:prstGeom prst="ellipse">
@@ -4257,7 +4257,7 @@
           </p:nvSpPr>
           <p:spPr>
             <a:xfrm>
-              <a:off x="3779550" y="2042140"/>
+              <a:off x="3823365" y="2042204"/>
               <a:ext cx="75116" cy="75116"/>
             </a:xfrm>
             <a:prstGeom prst="ellipse">
@@ -4283,7 +4283,7 @@
           </p:nvSpPr>
           <p:spPr>
             <a:xfrm>
-              <a:off x="3857408" y="1914484"/>
+              <a:off x="3800383" y="1914520"/>
               <a:ext cx="75116" cy="75116"/>
             </a:xfrm>
             <a:prstGeom prst="ellipse">
@@ -4309,7 +4309,7 @@
           </p:nvSpPr>
           <p:spPr>
             <a:xfrm>
-              <a:off x="3872288" y="1809174"/>
+              <a:off x="3821734" y="1809304"/>
               <a:ext cx="75116" cy="75116"/>
             </a:xfrm>
             <a:prstGeom prst="ellipse">
@@ -4335,7 +4335,7 @@
           </p:nvSpPr>
           <p:spPr>
             <a:xfrm>
-              <a:off x="3822690" y="1967430"/>
+              <a:off x="3815628" y="1967483"/>
               <a:ext cx="75116" cy="75116"/>
             </a:xfrm>
             <a:prstGeom prst="ellipse">
@@ -4361,7 +4361,7 @@
           </p:nvSpPr>
           <p:spPr>
             <a:xfrm>
-              <a:off x="3762850" y="1938781"/>
+              <a:off x="3894352" y="1938794"/>
               <a:ext cx="75116" cy="75116"/>
             </a:xfrm>
             <a:prstGeom prst="ellipse">
@@ -4387,42 +4387,42 @@
           </p:nvSpPr>
           <p:spPr>
             <a:xfrm>
-              <a:off x="1524964" y="1862377"/>
-              <a:ext cx="2304685" cy="533992"/>
+              <a:off x="1540350" y="1862454"/>
+              <a:ext cx="2294852" cy="534058"/>
             </a:xfrm>
             <a:custGeom>
               <a:avLst/>
               <a:pathLst>
-                <a:path w="2304685" h="533992">
+                <a:path w="2294852" h="534058">
                   <a:moveTo>
-                    <a:pt x="0" y="151555"/>
+                    <a:pt x="0" y="151574"/>
                   </a:moveTo>
                   <a:lnTo>
-                    <a:pt x="1217613" y="145445"/>
+                    <a:pt x="1212418" y="145463"/>
                   </a:lnTo>
                   <a:lnTo>
-                    <a:pt x="1536456" y="115609"/>
+                    <a:pt x="1529901" y="115623"/>
                   </a:lnTo>
                   <a:lnTo>
-                    <a:pt x="1985841" y="53046"/>
+                    <a:pt x="1977369" y="53053"/>
                   </a:lnTo>
                   <a:lnTo>
-                    <a:pt x="2304685" y="0"/>
+                    <a:pt x="2294852" y="0"/>
                   </a:lnTo>
                   <a:lnTo>
-                    <a:pt x="2304685" y="346045"/>
+                    <a:pt x="2294852" y="346088"/>
                   </a:lnTo>
                   <a:lnTo>
-                    <a:pt x="1985841" y="339967"/>
+                    <a:pt x="1977369" y="340009"/>
                   </a:lnTo>
                   <a:lnTo>
-                    <a:pt x="1536456" y="343603"/>
+                    <a:pt x="1529901" y="343646"/>
                   </a:lnTo>
                   <a:lnTo>
-                    <a:pt x="1217613" y="360736"/>
+                    <a:pt x="1212418" y="360781"/>
                   </a:lnTo>
                   <a:lnTo>
-                    <a:pt x="0" y="533992"/>
+                    <a:pt x="0" y="534058"/>
                   </a:lnTo>
                   <a:close/>
                 </a:path>
@@ -4448,27 +4448,27 @@
           </p:nvSpPr>
           <p:spPr>
             <a:xfrm>
-              <a:off x="1524964" y="1862377"/>
-              <a:ext cx="2304685" cy="151555"/>
+              <a:off x="1540350" y="1862454"/>
+              <a:ext cx="2294852" cy="151574"/>
             </a:xfrm>
             <a:custGeom>
               <a:avLst/>
               <a:pathLst>
-                <a:path w="2304685" h="151555">
+                <a:path w="2294852" h="151574">
                   <a:moveTo>
-                    <a:pt x="0" y="151555"/>
+                    <a:pt x="0" y="151574"/>
                   </a:moveTo>
                   <a:lnTo>
-                    <a:pt x="1217613" y="145445"/>
+                    <a:pt x="1212418" y="145463"/>
                   </a:lnTo>
                   <a:lnTo>
-                    <a:pt x="1536456" y="115609"/>
+                    <a:pt x="1529901" y="115623"/>
                   </a:lnTo>
                   <a:lnTo>
-                    <a:pt x="1985841" y="53046"/>
+                    <a:pt x="1977369" y="53053"/>
                   </a:lnTo>
                   <a:lnTo>
-                    <a:pt x="2304685" y="0"/>
+                    <a:pt x="2294852" y="0"/>
                   </a:lnTo>
                 </a:path>
               </a:pathLst>
@@ -4488,27 +4488,27 @@
           </p:nvSpPr>
           <p:spPr>
             <a:xfrm>
-              <a:off x="1524964" y="2202344"/>
-              <a:ext cx="2304685" cy="194025"/>
+              <a:off x="1540350" y="2202463"/>
+              <a:ext cx="2294852" cy="194049"/>
             </a:xfrm>
             <a:custGeom>
               <a:avLst/>
               <a:pathLst>
-                <a:path w="2304685" h="194025">
+                <a:path w="2294852" h="194049">
                   <a:moveTo>
-                    <a:pt x="2304685" y="6078"/>
+                    <a:pt x="2294852" y="6078"/>
                   </a:moveTo>
                   <a:lnTo>
-                    <a:pt x="1985841" y="0"/>
+                    <a:pt x="1977369" y="0"/>
                   </a:lnTo>
                   <a:lnTo>
-                    <a:pt x="1536456" y="3636"/>
+                    <a:pt x="1529901" y="3637"/>
                   </a:lnTo>
                   <a:lnTo>
-                    <a:pt x="1217613" y="20769"/>
+                    <a:pt x="1212418" y="20771"/>
                   </a:lnTo>
                   <a:lnTo>
-                    <a:pt x="0" y="194025"/>
+                    <a:pt x="0" y="194049"/>
                   </a:lnTo>
                 </a:path>
               </a:pathLst>
@@ -4528,27 +4528,27 @@
           </p:nvSpPr>
           <p:spPr>
             <a:xfrm>
-              <a:off x="1524964" y="2035400"/>
-              <a:ext cx="2304685" cy="169751"/>
+              <a:off x="1540350" y="2035498"/>
+              <a:ext cx="2294852" cy="169772"/>
             </a:xfrm>
             <a:custGeom>
               <a:avLst/>
               <a:pathLst>
-                <a:path w="2304685" h="169751">
+                <a:path w="2294852" h="169772">
                   <a:moveTo>
-                    <a:pt x="0" y="169751"/>
+                    <a:pt x="0" y="169772"/>
                   </a:moveTo>
                   <a:lnTo>
-                    <a:pt x="1217613" y="80068"/>
+                    <a:pt x="1212418" y="80078"/>
                   </a:lnTo>
                   <a:lnTo>
-                    <a:pt x="1536456" y="56583"/>
+                    <a:pt x="1529901" y="56590"/>
                   </a:lnTo>
                   <a:lnTo>
-                    <a:pt x="1985841" y="23484"/>
+                    <a:pt x="1977369" y="23487"/>
                   </a:lnTo>
                   <a:lnTo>
-                    <a:pt x="2304685" y="0"/>
+                    <a:pt x="2294852" y="0"/>
                   </a:lnTo>
                 </a:path>
               </a:pathLst>
@@ -4577,7 +4577,7 @@
           </p:nvSpPr>
           <p:spPr>
             <a:xfrm>
-              <a:off x="3349954" y="1244903"/>
+              <a:off x="3355508" y="1244914"/>
               <a:ext cx="479694" cy="82021"/>
             </a:xfrm>
             <a:prstGeom prst="rect">
@@ -4623,8 +4623,8 @@
           </p:nvSpPr>
           <p:spPr>
             <a:xfrm>
-              <a:off x="1310306" y="1141550"/>
-              <a:ext cx="2746591" cy="1359782"/>
+              <a:off x="1310032" y="1141550"/>
+              <a:ext cx="2746729" cy="1359873"/>
             </a:xfrm>
             <a:prstGeom prst="rect">
               <a:avLst/>
@@ -4644,15 +4644,15 @@
           </p:nvSpPr>
           <p:spPr>
             <a:xfrm>
-              <a:off x="1310306" y="1141550"/>
-              <a:ext cx="0" cy="1359782"/>
+              <a:off x="1310032" y="1141550"/>
+              <a:ext cx="0" cy="1359873"/>
             </a:xfrm>
             <a:custGeom>
               <a:avLst/>
               <a:pathLst>
-                <a:path w="0" h="1359782">
+                <a:path w="0" h="1359873">
                   <a:moveTo>
-                    <a:pt x="0" y="1359782"/>
+                    <a:pt x="0" y="1359873"/>
                   </a:moveTo>
                   <a:lnTo>
                     <a:pt x="0" y="0"/>
@@ -4684,7 +4684,7 @@
           </p:nvSpPr>
           <p:spPr>
             <a:xfrm rot="-5400000">
-              <a:off x="1140740" y="2213167"/>
+              <a:off x="1140466" y="2213292"/>
               <a:ext cx="141274" cy="72877"/>
             </a:xfrm>
             <a:prstGeom prst="rect">
@@ -4730,7 +4730,7 @@
           </p:nvSpPr>
           <p:spPr>
             <a:xfrm rot="-5400000">
-              <a:off x="1140740" y="1843849"/>
+              <a:off x="1140466" y="1843929"/>
               <a:ext cx="141274" cy="72877"/>
             </a:xfrm>
             <a:prstGeom prst="rect">
@@ -4776,7 +4776,7 @@
           </p:nvSpPr>
           <p:spPr>
             <a:xfrm rot="-5400000">
-              <a:off x="1140740" y="1474532"/>
+              <a:off x="1140466" y="1474565"/>
               <a:ext cx="141274" cy="72877"/>
             </a:xfrm>
             <a:prstGeom prst="rect">
@@ -4822,7 +4822,7 @@
           </p:nvSpPr>
           <p:spPr>
             <a:xfrm rot="-5400000">
-              <a:off x="1112485" y="1105214"/>
+              <a:off x="1112211" y="1105201"/>
               <a:ext cx="197784" cy="72877"/>
             </a:xfrm>
             <a:prstGeom prst="rect">
@@ -4868,7 +4868,7 @@
           </p:nvSpPr>
           <p:spPr>
             <a:xfrm>
-              <a:off x="1281838" y="2249606"/>
+              <a:off x="1281564" y="2249731"/>
               <a:ext cx="28468" cy="0"/>
             </a:xfrm>
             <a:custGeom>
@@ -4908,7 +4908,7 @@
           </p:nvSpPr>
           <p:spPr>
             <a:xfrm>
-              <a:off x="1281838" y="1880288"/>
+              <a:off x="1281564" y="1880367"/>
               <a:ext cx="28468" cy="0"/>
             </a:xfrm>
             <a:custGeom>
@@ -4948,7 +4948,7 @@
           </p:nvSpPr>
           <p:spPr>
             <a:xfrm>
-              <a:off x="1281838" y="1510970"/>
+              <a:off x="1281564" y="1511004"/>
               <a:ext cx="28468" cy="0"/>
             </a:xfrm>
             <a:custGeom>
@@ -4988,7 +4988,7 @@
           </p:nvSpPr>
           <p:spPr>
             <a:xfrm>
-              <a:off x="1281838" y="1141653"/>
+              <a:off x="1281564" y="1141640"/>
               <a:ext cx="28468" cy="0"/>
             </a:xfrm>
             <a:custGeom>
@@ -5028,18 +5028,18 @@
           </p:nvSpPr>
           <p:spPr>
             <a:xfrm>
-              <a:off x="1310306" y="2501332"/>
-              <a:ext cx="2746591" cy="0"/>
+              <a:off x="1310032" y="2501424"/>
+              <a:ext cx="2746729" cy="0"/>
             </a:xfrm>
             <a:custGeom>
               <a:avLst/>
               <a:pathLst>
-                <a:path w="2746591" h="0">
+                <a:path w="2746729" h="0">
                   <a:moveTo>
                     <a:pt x="0" y="0"/>
                   </a:moveTo>
                   <a:lnTo>
-                    <a:pt x="2746591" y="0"/>
+                    <a:pt x="2746729" y="0"/>
                   </a:lnTo>
                 </a:path>
               </a:pathLst>
@@ -5068,7 +5068,7 @@
           </p:nvSpPr>
           <p:spPr>
             <a:xfrm>
-              <a:off x="1524964" y="2501332"/>
+              <a:off x="1540350" y="2501424"/>
               <a:ext cx="0" cy="28468"/>
             </a:xfrm>
             <a:custGeom>
@@ -5108,7 +5108,7 @@
           </p:nvSpPr>
           <p:spPr>
             <a:xfrm>
-              <a:off x="2293192" y="2501332"/>
+              <a:off x="2305301" y="2501424"/>
               <a:ext cx="0" cy="28468"/>
             </a:xfrm>
             <a:custGeom>
@@ -5148,7 +5148,7 @@
           </p:nvSpPr>
           <p:spPr>
             <a:xfrm>
-              <a:off x="3061420" y="2501332"/>
+              <a:off x="3070251" y="2501424"/>
               <a:ext cx="0" cy="28468"/>
             </a:xfrm>
             <a:custGeom>
@@ -5188,7 +5188,7 @@
           </p:nvSpPr>
           <p:spPr>
             <a:xfrm>
-              <a:off x="3829649" y="2501332"/>
+              <a:off x="3835202" y="2501424"/>
               <a:ext cx="0" cy="28468"/>
             </a:xfrm>
             <a:custGeom>
@@ -5228,7 +5228,7 @@
           </p:nvSpPr>
           <p:spPr>
             <a:xfrm>
-              <a:off x="1496709" y="2552575"/>
+              <a:off x="1512095" y="2552666"/>
               <a:ext cx="56509" cy="72877"/>
             </a:xfrm>
             <a:prstGeom prst="rect">
@@ -5274,7 +5274,7 @@
           </p:nvSpPr>
           <p:spPr>
             <a:xfrm>
-              <a:off x="2264937" y="2552575"/>
+              <a:off x="2277046" y="2552666"/>
               <a:ext cx="56509" cy="72877"/>
             </a:xfrm>
             <a:prstGeom prst="rect">
@@ -5320,7 +5320,7 @@
           </p:nvSpPr>
           <p:spPr>
             <a:xfrm>
-              <a:off x="3033165" y="2552575"/>
+              <a:off x="3041997" y="2552666"/>
               <a:ext cx="56509" cy="72877"/>
             </a:xfrm>
             <a:prstGeom prst="rect">
@@ -5366,7 +5366,7 @@
           </p:nvSpPr>
           <p:spPr>
             <a:xfrm>
-              <a:off x="3801394" y="2552575"/>
+              <a:off x="3806947" y="2552666"/>
               <a:ext cx="56509" cy="72877"/>
             </a:xfrm>
             <a:prstGeom prst="rect">
@@ -5412,8 +5412,8 @@
           </p:nvSpPr>
           <p:spPr>
             <a:xfrm rot="-5400000">
-              <a:off x="934421" y="1775721"/>
-              <a:ext cx="197510" cy="91440"/>
+              <a:off x="934284" y="1775904"/>
+              <a:ext cx="197510" cy="91165"/>
             </a:xfrm>
             <a:prstGeom prst="rect">
               <a:avLst/>
@@ -5436,7 +5436,7 @@
                 </a:spcAft>
               </a:pPr>
               <a:r>
-                <a:rPr sz="1000" b="1">
+                <a:rPr sz="1000">
                   <a:solidFill>
                     <a:srgbClr val="000000">
                       <a:alpha val="100000"/>
@@ -5458,7 +5458,7 @@
           </p:nvSpPr>
           <p:spPr>
             <a:xfrm>
-              <a:off x="1310306" y="965010"/>
+              <a:off x="1310032" y="965010"/>
               <a:ext cx="1015989" cy="91440"/>
             </a:xfrm>
             <a:prstGeom prst="rect">
@@ -5504,8 +5504,8 @@
           </p:nvSpPr>
           <p:spPr>
             <a:xfrm>
-              <a:off x="4186587" y="1141550"/>
-              <a:ext cx="2746591" cy="1359782"/>
+              <a:off x="4186450" y="1141550"/>
+              <a:ext cx="2746729" cy="1359873"/>
             </a:xfrm>
             <a:prstGeom prst="rect">
               <a:avLst/>
@@ -5530,7 +5530,7 @@
           </p:nvSpPr>
           <p:spPr>
             <a:xfrm>
-              <a:off x="4361439" y="2119013"/>
+              <a:off x="4366238" y="2119172"/>
               <a:ext cx="75116" cy="75116"/>
             </a:xfrm>
             <a:prstGeom prst="ellipse">
@@ -5556,7 +5556,7 @@
           </p:nvSpPr>
           <p:spPr>
             <a:xfrm>
-              <a:off x="4322229" y="1373470"/>
+              <a:off x="4328542" y="1373665"/>
               <a:ext cx="75116" cy="75116"/>
             </a:xfrm>
             <a:prstGeom prst="ellipse">
@@ -5582,7 +5582,7 @@
           </p:nvSpPr>
           <p:spPr>
             <a:xfrm>
-              <a:off x="4340496" y="2112001"/>
+              <a:off x="4300649" y="2112064"/>
               <a:ext cx="75116" cy="75116"/>
             </a:xfrm>
             <a:prstGeom prst="ellipse">
@@ -5608,7 +5608,7 @@
           </p:nvSpPr>
           <p:spPr>
             <a:xfrm>
-              <a:off x="4378896" y="2024428"/>
+              <a:off x="4273743" y="2024571"/>
               <a:ext cx="75116" cy="75116"/>
             </a:xfrm>
             <a:prstGeom prst="ellipse">
@@ -5634,7 +5634,7 @@
           </p:nvSpPr>
           <p:spPr>
             <a:xfrm>
-              <a:off x="4390880" y="2185704"/>
+              <a:off x="4424421" y="2185962"/>
               <a:ext cx="75116" cy="75116"/>
             </a:xfrm>
             <a:prstGeom prst="ellipse">
@@ -5660,7 +5660,7 @@
           </p:nvSpPr>
           <p:spPr>
             <a:xfrm>
-              <a:off x="4325907" y="1599000"/>
+              <a:off x="4464151" y="1599294"/>
               <a:ext cx="75116" cy="75116"/>
             </a:xfrm>
             <a:prstGeom prst="ellipse">
@@ -5686,7 +5686,7 @@
           </p:nvSpPr>
           <p:spPr>
             <a:xfrm>
-              <a:off x="4273874" y="1218918"/>
+              <a:off x="4429586" y="1218861"/>
               <a:ext cx="75116" cy="75116"/>
             </a:xfrm>
             <a:prstGeom prst="ellipse">
@@ -5712,7 +5712,7 @@
           </p:nvSpPr>
           <p:spPr>
             <a:xfrm>
-              <a:off x="4301980" y="1907345"/>
+              <a:off x="4409546" y="1907503"/>
               <a:ext cx="75116" cy="75116"/>
             </a:xfrm>
             <a:prstGeom prst="ellipse">
@@ -5738,7 +5738,7 @@
           </p:nvSpPr>
           <p:spPr>
             <a:xfrm>
-              <a:off x="4310400" y="2367177"/>
+              <a:off x="4413753" y="2367314"/>
               <a:ext cx="75116" cy="75116"/>
             </a:xfrm>
             <a:prstGeom prst="ellipse">
@@ -5764,7 +5764,7 @@
           </p:nvSpPr>
           <p:spPr>
             <a:xfrm>
-              <a:off x="4393076" y="1872480"/>
+              <a:off x="4401133" y="1872411"/>
               <a:ext cx="75116" cy="75116"/>
             </a:xfrm>
             <a:prstGeom prst="ellipse">
@@ -5790,7 +5790,7 @@
           </p:nvSpPr>
           <p:spPr>
             <a:xfrm>
-              <a:off x="5003518" y="2385359"/>
+              <a:off x="5241537" y="2385629"/>
               <a:ext cx="75116" cy="75116"/>
             </a:xfrm>
             <a:prstGeom prst="ellipse">
@@ -5816,7 +5816,7 @@
           </p:nvSpPr>
           <p:spPr>
             <a:xfrm>
-              <a:off x="5064788" y="1599577"/>
+              <a:off x="5193242" y="1599606"/>
               <a:ext cx="75116" cy="75116"/>
             </a:xfrm>
             <a:prstGeom prst="ellipse">
@@ -5842,7 +5842,7 @@
           </p:nvSpPr>
           <p:spPr>
             <a:xfrm>
-              <a:off x="5005974" y="2037331"/>
+              <a:off x="5091781" y="2037611"/>
               <a:ext cx="75116" cy="75116"/>
             </a:xfrm>
             <a:prstGeom prst="ellipse">
@@ -5868,7 +5868,7 @@
           </p:nvSpPr>
           <p:spPr>
             <a:xfrm>
-              <a:off x="5189412" y="2401965"/>
+              <a:off x="5086521" y="2402053"/>
               <a:ext cx="75116" cy="75116"/>
             </a:xfrm>
             <a:prstGeom prst="ellipse">
@@ -5894,7 +5894,7 @@
           </p:nvSpPr>
           <p:spPr>
             <a:xfrm>
-              <a:off x="5138076" y="1759838"/>
+              <a:off x="5149821" y="1760107"/>
               <a:ext cx="75116" cy="75116"/>
             </a:xfrm>
             <a:prstGeom prst="ellipse">
@@ -5920,7 +5920,7 @@
           </p:nvSpPr>
           <p:spPr>
             <a:xfrm>
-              <a:off x="5141896" y="1165800"/>
+              <a:off x="5143304" y="1165804"/>
               <a:ext cx="75116" cy="75116"/>
             </a:xfrm>
             <a:prstGeom prst="ellipse">
@@ -5946,7 +5946,7 @@
           </p:nvSpPr>
           <p:spPr>
             <a:xfrm>
-              <a:off x="5143794" y="2373166"/>
+              <a:off x="5167513" y="2373515"/>
               <a:ext cx="75116" cy="75116"/>
             </a:xfrm>
             <a:prstGeom prst="ellipse">
@@ -5972,7 +5972,7 @@
           </p:nvSpPr>
           <p:spPr>
             <a:xfrm>
-              <a:off x="5191354" y="2322427"/>
+              <a:off x="5221418" y="2322600"/>
               <a:ext cx="75116" cy="75116"/>
             </a:xfrm>
             <a:prstGeom prst="ellipse">
@@ -5998,7 +5998,7 @@
           </p:nvSpPr>
           <p:spPr>
             <a:xfrm>
-              <a:off x="5001931" y="2058338"/>
+              <a:off x="5122329" y="2058524"/>
               <a:ext cx="75116" cy="75116"/>
             </a:xfrm>
             <a:prstGeom prst="ellipse">
@@ -6024,7 +6024,7 @@
           </p:nvSpPr>
           <p:spPr>
             <a:xfrm>
-              <a:off x="5121949" y="2379023"/>
+              <a:off x="5222986" y="2379331"/>
               <a:ext cx="75116" cy="75116"/>
             </a:xfrm>
             <a:prstGeom prst="ellipse">
@@ -6050,7 +6050,7 @@
           </p:nvSpPr>
           <p:spPr>
             <a:xfrm>
-              <a:off x="5162438" y="2198313"/>
+              <a:off x="5053464" y="2198526"/>
               <a:ext cx="75116" cy="75116"/>
             </a:xfrm>
             <a:prstGeom prst="ellipse">
@@ -6076,7 +6076,7 @@
           </p:nvSpPr>
           <p:spPr>
             <a:xfrm>
-              <a:off x="5063959" y="2375917"/>
+              <a:off x="5132334" y="2376357"/>
               <a:ext cx="75116" cy="75116"/>
             </a:xfrm>
             <a:prstGeom prst="ellipse">
@@ -6102,7 +6102,7 @@
           </p:nvSpPr>
           <p:spPr>
             <a:xfrm>
-              <a:off x="5168881" y="1958502"/>
+              <a:off x="5047821" y="1958813"/>
               <a:ext cx="75116" cy="75116"/>
             </a:xfrm>
             <a:prstGeom prst="ellipse">
@@ -6128,7 +6128,7 @@
           </p:nvSpPr>
           <p:spPr>
             <a:xfrm>
-              <a:off x="5064478" y="1842804"/>
+              <a:off x="5182470" y="1842995"/>
               <a:ext cx="75116" cy="75116"/>
             </a:xfrm>
             <a:prstGeom prst="ellipse">
@@ -6154,7 +6154,7 @@
           </p:nvSpPr>
           <p:spPr>
             <a:xfrm>
-              <a:off x="5152055" y="1894589"/>
+              <a:off x="5115413" y="1894793"/>
               <a:ext cx="75116" cy="75116"/>
             </a:xfrm>
             <a:prstGeom prst="ellipse">
@@ -6180,7 +6180,7 @@
           </p:nvSpPr>
           <p:spPr>
             <a:xfrm>
-              <a:off x="4988273" y="1724864"/>
+              <a:off x="5049678" y="1724750"/>
               <a:ext cx="75116" cy="75116"/>
             </a:xfrm>
             <a:prstGeom prst="ellipse">
@@ -6206,7 +6206,7 @@
           </p:nvSpPr>
           <p:spPr>
             <a:xfrm>
-              <a:off x="5081716" y="2169909"/>
+              <a:off x="5221049" y="2170014"/>
               <a:ext cx="75116" cy="75116"/>
             </a:xfrm>
             <a:prstGeom prst="ellipse">
@@ -6232,7 +6232,7 @@
           </p:nvSpPr>
           <p:spPr>
             <a:xfrm>
-              <a:off x="5152354" y="2370052"/>
+              <a:off x="5116054" y="2370107"/>
               <a:ext cx="75116" cy="75116"/>
             </a:xfrm>
             <a:prstGeom prst="ellipse">
@@ -6258,7 +6258,7 @@
           </p:nvSpPr>
           <p:spPr>
             <a:xfrm>
-              <a:off x="5765618" y="2151338"/>
+              <a:off x="5995187" y="2151540"/>
               <a:ext cx="75116" cy="75116"/>
             </a:xfrm>
             <a:prstGeom prst="ellipse">
@@ -6284,7 +6284,7 @@
           </p:nvSpPr>
           <p:spPr>
             <a:xfrm>
-              <a:off x="5837000" y="2232767"/>
+              <a:off x="5867917" y="2233154"/>
               <a:ext cx="75116" cy="75116"/>
             </a:xfrm>
             <a:prstGeom prst="ellipse">
@@ -6310,7 +6310,7 @@
           </p:nvSpPr>
           <p:spPr>
             <a:xfrm>
-              <a:off x="5787123" y="2320662"/>
+              <a:off x="5917475" y="2320905"/>
               <a:ext cx="75116" cy="75116"/>
             </a:xfrm>
             <a:prstGeom prst="ellipse">
@@ -6336,7 +6336,7 @@
           </p:nvSpPr>
           <p:spPr>
             <a:xfrm>
-              <a:off x="5938555" y="2110860"/>
+              <a:off x="5881477" y="2110880"/>
               <a:ext cx="75116" cy="75116"/>
             </a:xfrm>
             <a:prstGeom prst="ellipse">
@@ -6362,7 +6362,7 @@
           </p:nvSpPr>
           <p:spPr>
             <a:xfrm>
-              <a:off x="5890263" y="1656095"/>
+              <a:off x="5829085" y="1656271"/>
               <a:ext cx="75116" cy="75116"/>
             </a:xfrm>
             <a:prstGeom prst="ellipse">
@@ -6388,7 +6388,7 @@
           </p:nvSpPr>
           <p:spPr>
             <a:xfrm>
-              <a:off x="5972819" y="1352399"/>
+              <a:off x="5933864" y="1352368"/>
               <a:ext cx="75116" cy="75116"/>
             </a:xfrm>
             <a:prstGeom prst="ellipse">
@@ -6414,7 +6414,7 @@
           </p:nvSpPr>
           <p:spPr>
             <a:xfrm>
-              <a:off x="5788807" y="1557460"/>
+              <a:off x="5930444" y="1557682"/>
               <a:ext cx="75116" cy="75116"/>
             </a:xfrm>
             <a:prstGeom prst="ellipse">
@@ -6440,7 +6440,7 @@
           </p:nvSpPr>
           <p:spPr>
             <a:xfrm>
-              <a:off x="5929495" y="2178622"/>
+              <a:off x="5949360" y="2178870"/>
               <a:ext cx="75116" cy="75116"/>
             </a:xfrm>
             <a:prstGeom prst="ellipse">
@@ -6466,7 +6466,7 @@
           </p:nvSpPr>
           <p:spPr>
             <a:xfrm>
-              <a:off x="5783439" y="2127839"/>
+              <a:off x="5870868" y="2128300"/>
               <a:ext cx="75116" cy="75116"/>
             </a:xfrm>
             <a:prstGeom prst="ellipse">
@@ -6492,7 +6492,7 @@
           </p:nvSpPr>
           <p:spPr>
             <a:xfrm>
-              <a:off x="5946256" y="1622658"/>
+              <a:off x="5938685" y="1622975"/>
               <a:ext cx="75116" cy="75116"/>
             </a:xfrm>
             <a:prstGeom prst="ellipse">
@@ -6518,7 +6518,7 @@
           </p:nvSpPr>
           <p:spPr>
             <a:xfrm>
-              <a:off x="5976525" y="1803487"/>
+              <a:off x="5904672" y="1803529"/>
               <a:ext cx="75116" cy="75116"/>
             </a:xfrm>
             <a:prstGeom prst="ellipse">
@@ -6544,7 +6544,7 @@
           </p:nvSpPr>
           <p:spPr>
             <a:xfrm>
-              <a:off x="5780755" y="2298881"/>
+              <a:off x="5955544" y="2299074"/>
               <a:ext cx="75116" cy="75116"/>
             </a:xfrm>
             <a:prstGeom prst="ellipse">
@@ -6570,7 +6570,7 @@
           </p:nvSpPr>
           <p:spPr>
             <a:xfrm>
-              <a:off x="5819305" y="1578642"/>
+              <a:off x="5984153" y="1578689"/>
               <a:ext cx="75116" cy="75116"/>
             </a:xfrm>
             <a:prstGeom prst="ellipse">
@@ -6596,7 +6596,7 @@
           </p:nvSpPr>
           <p:spPr>
             <a:xfrm>
-              <a:off x="5849322" y="1750269"/>
+              <a:off x="5956675" y="1750254"/>
               <a:ext cx="75116" cy="75116"/>
             </a:xfrm>
             <a:prstGeom prst="ellipse">
@@ -6622,7 +6622,7 @@
           </p:nvSpPr>
           <p:spPr>
             <a:xfrm>
-              <a:off x="5844226" y="1918143"/>
+              <a:off x="5872713" y="1918078"/>
               <a:ext cx="75116" cy="75116"/>
             </a:xfrm>
             <a:prstGeom prst="ellipse">
@@ -6648,7 +6648,7 @@
           </p:nvSpPr>
           <p:spPr>
             <a:xfrm>
-              <a:off x="5968739" y="2273359"/>
+              <a:off x="5810475" y="2273473"/>
               <a:ext cx="75116" cy="75116"/>
             </a:xfrm>
             <a:prstGeom prst="ellipse">
@@ -6674,7 +6674,7 @@
           </p:nvSpPr>
           <p:spPr>
             <a:xfrm>
-              <a:off x="5842592" y="1910177"/>
+              <a:off x="5966258" y="1910314"/>
               <a:ext cx="75116" cy="75116"/>
             </a:xfrm>
             <a:prstGeom prst="ellipse">
@@ -6700,7 +6700,7 @@
           </p:nvSpPr>
           <p:spPr>
             <a:xfrm>
-              <a:off x="5978658" y="2249647"/>
+              <a:off x="5831121" y="2249701"/>
               <a:ext cx="75116" cy="75116"/>
             </a:xfrm>
             <a:prstGeom prst="ellipse">
@@ -6726,7 +6726,7 @@
           </p:nvSpPr>
           <p:spPr>
             <a:xfrm>
-              <a:off x="5937351" y="1732503"/>
+              <a:off x="5952634" y="1732666"/>
               <a:ext cx="75116" cy="75116"/>
             </a:xfrm>
             <a:prstGeom prst="ellipse">
@@ -6752,7 +6752,7 @@
           </p:nvSpPr>
           <p:spPr>
             <a:xfrm>
-              <a:off x="5935846" y="1922531"/>
+              <a:off x="5824566" y="1922751"/>
               <a:ext cx="75116" cy="75116"/>
             </a:xfrm>
             <a:prstGeom prst="ellipse">
@@ -6778,7 +6778,7 @@
           </p:nvSpPr>
           <p:spPr>
             <a:xfrm>
-              <a:off x="6686945" y="2019388"/>
+              <a:off x="6747294" y="2019511"/>
               <a:ext cx="75116" cy="75116"/>
             </a:xfrm>
             <a:prstGeom prst="ellipse">
@@ -6804,7 +6804,7 @@
           </p:nvSpPr>
           <p:spPr>
             <a:xfrm>
-              <a:off x="6670264" y="2147561"/>
+              <a:off x="6578937" y="2147743"/>
               <a:ext cx="75116" cy="75116"/>
             </a:xfrm>
             <a:prstGeom prst="ellipse">
@@ -6830,7 +6830,7 @@
           </p:nvSpPr>
           <p:spPr>
             <a:xfrm>
-              <a:off x="6550940" y="2197574"/>
+              <a:off x="6645817" y="2197589"/>
               <a:ext cx="75116" cy="75116"/>
             </a:xfrm>
             <a:prstGeom prst="ellipse">
@@ -6856,7 +6856,7 @@
           </p:nvSpPr>
           <p:spPr>
             <a:xfrm>
-              <a:off x="6696178" y="2003784"/>
+              <a:off x="6655556" y="2003949"/>
               <a:ext cx="75116" cy="75116"/>
             </a:xfrm>
             <a:prstGeom prst="ellipse">
@@ -6882,7 +6882,7 @@
           </p:nvSpPr>
           <p:spPr>
             <a:xfrm>
-              <a:off x="6588673" y="1897087"/>
+              <a:off x="6724780" y="1897010"/>
               <a:ext cx="75116" cy="75116"/>
             </a:xfrm>
             <a:prstGeom prst="ellipse">
@@ -6908,7 +6908,7 @@
           </p:nvSpPr>
           <p:spPr>
             <a:xfrm>
-              <a:off x="6767579" y="1943126"/>
+              <a:off x="6717387" y="1943142"/>
               <a:ext cx="75116" cy="75116"/>
             </a:xfrm>
             <a:prstGeom prst="ellipse">
@@ -6934,7 +6934,7 @@
           </p:nvSpPr>
           <p:spPr>
             <a:xfrm>
-              <a:off x="6676563" y="2146196"/>
+              <a:off x="6692576" y="2146095"/>
               <a:ext cx="75116" cy="75116"/>
             </a:xfrm>
             <a:prstGeom prst="ellipse">
@@ -6960,7 +6960,7 @@
           </p:nvSpPr>
           <p:spPr>
             <a:xfrm>
-              <a:off x="6662534" y="1964033"/>
+              <a:off x="6661929" y="1964295"/>
               <a:ext cx="75116" cy="75116"/>
             </a:xfrm>
             <a:prstGeom prst="ellipse">
@@ -6986,7 +6986,7 @@
           </p:nvSpPr>
           <p:spPr>
             <a:xfrm>
-              <a:off x="6669711" y="2178174"/>
+              <a:off x="6770769" y="2178541"/>
               <a:ext cx="75116" cy="75116"/>
             </a:xfrm>
             <a:prstGeom prst="ellipse">
@@ -7012,7 +7012,7 @@
           </p:nvSpPr>
           <p:spPr>
             <a:xfrm>
-              <a:off x="6755883" y="2076526"/>
+              <a:off x="6702074" y="2076526"/>
               <a:ext cx="75116" cy="75116"/>
             </a:xfrm>
             <a:prstGeom prst="ellipse">
@@ -7038,7 +7038,7 @@
           </p:nvSpPr>
           <p:spPr>
             <a:xfrm>
-              <a:off x="6605387" y="1927830"/>
+              <a:off x="6749021" y="1927946"/>
               <a:ext cx="75116" cy="75116"/>
             </a:xfrm>
             <a:prstGeom prst="ellipse">
@@ -7064,7 +7064,7 @@
           </p:nvSpPr>
           <p:spPr>
             <a:xfrm>
-              <a:off x="6743730" y="1650389"/>
+              <a:off x="6610903" y="1650563"/>
               <a:ext cx="75116" cy="75116"/>
             </a:xfrm>
             <a:prstGeom prst="ellipse">
@@ -7090,7 +7090,7 @@
           </p:nvSpPr>
           <p:spPr>
             <a:xfrm>
-              <a:off x="6667109" y="2167131"/>
+              <a:off x="6700966" y="2167293"/>
               <a:ext cx="75116" cy="75116"/>
             </a:xfrm>
             <a:prstGeom prst="ellipse">
@@ -7116,7 +7116,7 @@
           </p:nvSpPr>
           <p:spPr>
             <a:xfrm>
-              <a:off x="6645746" y="2350084"/>
+              <a:off x="6719327" y="2350208"/>
               <a:ext cx="75116" cy="75116"/>
             </a:xfrm>
             <a:prstGeom prst="ellipse">
@@ -7142,7 +7142,7 @@
           </p:nvSpPr>
           <p:spPr>
             <a:xfrm>
-              <a:off x="6745001" y="2224354"/>
+              <a:off x="6601761" y="2224688"/>
               <a:ext cx="75116" cy="75116"/>
             </a:xfrm>
             <a:prstGeom prst="ellipse">
@@ -7168,7 +7168,7 @@
           </p:nvSpPr>
           <p:spPr>
             <a:xfrm>
-              <a:off x="6735107" y="2026190"/>
+              <a:off x="6664846" y="2026591"/>
               <a:ext cx="75116" cy="75116"/>
             </a:xfrm>
             <a:prstGeom prst="ellipse">
@@ -7194,7 +7194,7 @@
           </p:nvSpPr>
           <p:spPr>
             <a:xfrm>
-              <a:off x="6589711" y="2140383"/>
+              <a:off x="6565974" y="2140668"/>
               <a:ext cx="75116" cy="75116"/>
             </a:xfrm>
             <a:prstGeom prst="ellipse">
@@ -7220,7 +7220,7 @@
           </p:nvSpPr>
           <p:spPr>
             <a:xfrm>
-              <a:off x="6735044" y="2004787"/>
+              <a:off x="6694907" y="2004818"/>
               <a:ext cx="75116" cy="75116"/>
             </a:xfrm>
             <a:prstGeom prst="ellipse">
@@ -7246,7 +7246,7 @@
           </p:nvSpPr>
           <p:spPr>
             <a:xfrm>
-              <a:off x="6720280" y="1983864"/>
+              <a:off x="6683117" y="1984309"/>
               <a:ext cx="75116" cy="75116"/>
             </a:xfrm>
             <a:prstGeom prst="ellipse">
@@ -7272,7 +7272,7 @@
           </p:nvSpPr>
           <p:spPr>
             <a:xfrm>
-              <a:off x="6770776" y="1831766"/>
+              <a:off x="6564138" y="1831635"/>
               <a:ext cx="75116" cy="75116"/>
             </a:xfrm>
             <a:prstGeom prst="ellipse">
@@ -7298,7 +7298,7 @@
           </p:nvSpPr>
           <p:spPr>
             <a:xfrm>
-              <a:off x="6680243" y="1870706"/>
+              <a:off x="6634390" y="1871022"/>
               <a:ext cx="75116" cy="75116"/>
             </a:xfrm>
             <a:prstGeom prst="ellipse">
@@ -7324,7 +7324,7 @@
           </p:nvSpPr>
           <p:spPr>
             <a:xfrm>
-              <a:off x="6565049" y="1930906"/>
+              <a:off x="6654859" y="1931180"/>
               <a:ext cx="75116" cy="75116"/>
             </a:xfrm>
             <a:prstGeom prst="ellipse">
@@ -7350,7 +7350,7 @@
           </p:nvSpPr>
           <p:spPr>
             <a:xfrm>
-              <a:off x="6634146" y="2258034"/>
+              <a:off x="6579083" y="2258157"/>
               <a:ext cx="75116" cy="75116"/>
             </a:xfrm>
             <a:prstGeom prst="ellipse">
@@ -7376,7 +7376,7 @@
           </p:nvSpPr>
           <p:spPr>
             <a:xfrm>
-              <a:off x="6574225" y="1997782"/>
+              <a:off x="6705361" y="1997771"/>
               <a:ext cx="75116" cy="75116"/>
             </a:xfrm>
             <a:prstGeom prst="ellipse">
@@ -7402,42 +7402,42 @@
           </p:nvSpPr>
           <p:spPr>
             <a:xfrm>
-              <a:off x="4350167" y="1808853"/>
-              <a:ext cx="2347767" cy="388015"/>
+              <a:off x="4419139" y="1808996"/>
+              <a:ext cx="2282672" cy="388039"/>
             </a:xfrm>
             <a:custGeom>
               <a:avLst/>
               <a:pathLst>
-                <a:path w="2347767" h="388015">
+                <a:path w="2282672" h="388039">
                   <a:moveTo>
                     <a:pt x="0" y="0"/>
                   </a:moveTo>
                   <a:lnTo>
-                    <a:pt x="1240374" y="98648"/>
+                    <a:pt x="1205983" y="98654"/>
                   </a:lnTo>
                   <a:lnTo>
-                    <a:pt x="1565178" y="114746"/>
+                    <a:pt x="1521781" y="114754"/>
                   </a:lnTo>
                   <a:lnTo>
-                    <a:pt x="2022963" y="129662"/>
+                    <a:pt x="1966873" y="129670"/>
                   </a:lnTo>
                   <a:lnTo>
-                    <a:pt x="2347767" y="135542"/>
+                    <a:pt x="2282672" y="135550"/>
                   </a:lnTo>
                   <a:lnTo>
-                    <a:pt x="2347767" y="388015"/>
+                    <a:pt x="2282672" y="388039"/>
                   </a:lnTo>
                   <a:lnTo>
-                    <a:pt x="2022963" y="361783"/>
+                    <a:pt x="1966873" y="361806"/>
                   </a:lnTo>
                   <a:lnTo>
-                    <a:pt x="1565178" y="331441"/>
+                    <a:pt x="1521781" y="331462"/>
                   </a:lnTo>
                   <a:lnTo>
-                    <a:pt x="1240374" y="315429"/>
+                    <a:pt x="1205983" y="315448"/>
                   </a:lnTo>
                   <a:lnTo>
-                    <a:pt x="0" y="291450"/>
+                    <a:pt x="0" y="291468"/>
                   </a:lnTo>
                   <a:close/>
                 </a:path>
@@ -7463,27 +7463,27 @@
           </p:nvSpPr>
           <p:spPr>
             <a:xfrm>
-              <a:off x="4350167" y="1808853"/>
-              <a:ext cx="2347767" cy="135542"/>
+              <a:off x="4419139" y="1808996"/>
+              <a:ext cx="2282672" cy="135550"/>
             </a:xfrm>
             <a:custGeom>
               <a:avLst/>
               <a:pathLst>
-                <a:path w="2347767" h="135542">
+                <a:path w="2282672" h="135550">
                   <a:moveTo>
                     <a:pt x="0" y="0"/>
                   </a:moveTo>
                   <a:lnTo>
-                    <a:pt x="1240374" y="98648"/>
+                    <a:pt x="1205983" y="98654"/>
                   </a:lnTo>
                   <a:lnTo>
-                    <a:pt x="1565178" y="114746"/>
+                    <a:pt x="1521781" y="114754"/>
                   </a:lnTo>
                   <a:lnTo>
-                    <a:pt x="2022963" y="129662"/>
+                    <a:pt x="1966873" y="129670"/>
                   </a:lnTo>
                   <a:lnTo>
-                    <a:pt x="2347767" y="135542"/>
+                    <a:pt x="2282672" y="135550"/>
                   </a:lnTo>
                 </a:path>
               </a:pathLst>
@@ -7503,24 +7503,24 @@
           </p:nvSpPr>
           <p:spPr>
             <a:xfrm>
-              <a:off x="4350167" y="2100303"/>
-              <a:ext cx="2347767" cy="96564"/>
+              <a:off x="4419139" y="2100464"/>
+              <a:ext cx="2282672" cy="96570"/>
             </a:xfrm>
             <a:custGeom>
               <a:avLst/>
               <a:pathLst>
-                <a:path w="2347767" h="96564">
+                <a:path w="2282672" h="96570">
                   <a:moveTo>
-                    <a:pt x="2347767" y="96564"/>
+                    <a:pt x="2282672" y="96570"/>
                   </a:moveTo>
                   <a:lnTo>
-                    <a:pt x="2022963" y="70333"/>
+                    <a:pt x="1966873" y="70337"/>
                   </a:lnTo>
                   <a:lnTo>
-                    <a:pt x="1565178" y="39991"/>
+                    <a:pt x="1521781" y="39993"/>
                   </a:lnTo>
                   <a:lnTo>
-                    <a:pt x="1240374" y="23978"/>
+                    <a:pt x="1205983" y="23980"/>
                   </a:lnTo>
                   <a:lnTo>
                     <a:pt x="0" y="0"/>
@@ -7543,27 +7543,27 @@
           </p:nvSpPr>
           <p:spPr>
             <a:xfrm>
-              <a:off x="4350167" y="1954578"/>
-              <a:ext cx="2347767" cy="116053"/>
+              <a:off x="4419139" y="1954730"/>
+              <a:ext cx="2282672" cy="116060"/>
             </a:xfrm>
             <a:custGeom>
               <a:avLst/>
               <a:pathLst>
-                <a:path w="2347767" h="116053">
+                <a:path w="2282672" h="116060">
                   <a:moveTo>
                     <a:pt x="0" y="0"/>
                   </a:moveTo>
                   <a:lnTo>
-                    <a:pt x="1240374" y="61313"/>
+                    <a:pt x="1205983" y="61317"/>
                   </a:lnTo>
                   <a:lnTo>
-                    <a:pt x="1565178" y="77368"/>
+                    <a:pt x="1521781" y="77373"/>
                   </a:lnTo>
                   <a:lnTo>
-                    <a:pt x="2022963" y="99997"/>
+                    <a:pt x="1966873" y="100004"/>
                   </a:lnTo>
                   <a:lnTo>
-                    <a:pt x="2347767" y="116053"/>
+                    <a:pt x="2282672" y="116060"/>
                   </a:lnTo>
                 </a:path>
               </a:pathLst>
@@ -7592,7 +7592,7 @@
           </p:nvSpPr>
           <p:spPr>
             <a:xfrm>
-              <a:off x="6218240" y="1244878"/>
+              <a:off x="6222117" y="1244991"/>
               <a:ext cx="479694" cy="82021"/>
             </a:xfrm>
             <a:prstGeom prst="rect">
@@ -7638,8 +7638,8 @@
           </p:nvSpPr>
           <p:spPr>
             <a:xfrm>
-              <a:off x="4186587" y="1141550"/>
-              <a:ext cx="2746591" cy="1359782"/>
+              <a:off x="4186450" y="1141550"/>
+              <a:ext cx="2746729" cy="1359873"/>
             </a:xfrm>
             <a:prstGeom prst="rect">
               <a:avLst/>
@@ -7659,15 +7659,15 @@
           </p:nvSpPr>
           <p:spPr>
             <a:xfrm>
-              <a:off x="4186587" y="1141550"/>
-              <a:ext cx="0" cy="1359782"/>
+              <a:off x="4186450" y="1141550"/>
+              <a:ext cx="0" cy="1359873"/>
             </a:xfrm>
             <a:custGeom>
               <a:avLst/>
               <a:pathLst>
-                <a:path w="0" h="1359782">
+                <a:path w="0" h="1359873">
                   <a:moveTo>
-                    <a:pt x="0" y="1359782"/>
+                    <a:pt x="0" y="1359873"/>
                   </a:moveTo>
                   <a:lnTo>
                     <a:pt x="0" y="0"/>
@@ -7699,7 +7699,7 @@
           </p:nvSpPr>
           <p:spPr>
             <a:xfrm>
-              <a:off x="4158119" y="2236946"/>
+              <a:off x="4157982" y="2237115"/>
               <a:ext cx="28468" cy="0"/>
             </a:xfrm>
             <a:custGeom>
@@ -7739,7 +7739,7 @@
           </p:nvSpPr>
           <p:spPr>
             <a:xfrm>
-              <a:off x="4158119" y="1787603"/>
+              <a:off x="4157982" y="1787745"/>
               <a:ext cx="28468" cy="0"/>
             </a:xfrm>
             <a:custGeom>
@@ -7779,7 +7779,7 @@
           </p:nvSpPr>
           <p:spPr>
             <a:xfrm>
-              <a:off x="4158119" y="1338261"/>
+              <a:off x="4157982" y="1338375"/>
               <a:ext cx="28468" cy="0"/>
             </a:xfrm>
             <a:custGeom>
@@ -7819,18 +7819,18 @@
           </p:nvSpPr>
           <p:spPr>
             <a:xfrm>
-              <a:off x="4186587" y="2501332"/>
-              <a:ext cx="2746591" cy="0"/>
+              <a:off x="4186450" y="2501424"/>
+              <a:ext cx="2746729" cy="0"/>
             </a:xfrm>
             <a:custGeom>
               <a:avLst/>
               <a:pathLst>
-                <a:path w="2746591" h="0">
+                <a:path w="2746729" h="0">
                   <a:moveTo>
                     <a:pt x="0" y="0"/>
                   </a:moveTo>
                   <a:lnTo>
-                    <a:pt x="2746591" y="0"/>
+                    <a:pt x="2746729" y="0"/>
                   </a:lnTo>
                 </a:path>
               </a:pathLst>
@@ -7859,7 +7859,7 @@
           </p:nvSpPr>
           <p:spPr>
             <a:xfrm>
-              <a:off x="4350167" y="2501332"/>
+              <a:off x="4419139" y="2501424"/>
               <a:ext cx="0" cy="28468"/>
             </a:xfrm>
             <a:custGeom>
@@ -7899,7 +7899,7 @@
           </p:nvSpPr>
           <p:spPr>
             <a:xfrm>
-              <a:off x="5132757" y="2501332"/>
+              <a:off x="5180030" y="2501424"/>
               <a:ext cx="0" cy="28468"/>
             </a:xfrm>
             <a:custGeom>
@@ -7939,7 +7939,7 @@
           </p:nvSpPr>
           <p:spPr>
             <a:xfrm>
-              <a:off x="5915346" y="2501332"/>
+              <a:off x="5940921" y="2501424"/>
               <a:ext cx="0" cy="28468"/>
             </a:xfrm>
             <a:custGeom>
@@ -7979,7 +7979,7 @@
           </p:nvSpPr>
           <p:spPr>
             <a:xfrm>
-              <a:off x="6697935" y="2501332"/>
+              <a:off x="6701811" y="2501424"/>
               <a:ext cx="0" cy="28468"/>
             </a:xfrm>
             <a:custGeom>
@@ -8019,7 +8019,7 @@
           </p:nvSpPr>
           <p:spPr>
             <a:xfrm>
-              <a:off x="4321913" y="2552575"/>
+              <a:off x="4390884" y="2552666"/>
               <a:ext cx="56509" cy="72877"/>
             </a:xfrm>
             <a:prstGeom prst="rect">
@@ -8065,7 +8065,7 @@
           </p:nvSpPr>
           <p:spPr>
             <a:xfrm>
-              <a:off x="5104502" y="2552575"/>
+              <a:off x="5151775" y="2552666"/>
               <a:ext cx="56509" cy="72877"/>
             </a:xfrm>
             <a:prstGeom prst="rect">
@@ -8111,7 +8111,7 @@
           </p:nvSpPr>
           <p:spPr>
             <a:xfrm>
-              <a:off x="5887091" y="2552575"/>
+              <a:off x="5912666" y="2552666"/>
               <a:ext cx="56509" cy="72877"/>
             </a:xfrm>
             <a:prstGeom prst="rect">
@@ -8157,7 +8157,7 @@
           </p:nvSpPr>
           <p:spPr>
             <a:xfrm>
-              <a:off x="6669680" y="2552575"/>
+              <a:off x="6673556" y="2552666"/>
               <a:ext cx="56509" cy="72877"/>
             </a:xfrm>
             <a:prstGeom prst="rect">
@@ -8203,7 +8203,7 @@
           </p:nvSpPr>
           <p:spPr>
             <a:xfrm>
-              <a:off x="4186587" y="965010"/>
+              <a:off x="4186450" y="965010"/>
               <a:ext cx="1008674" cy="91440"/>
             </a:xfrm>
             <a:prstGeom prst="rect">
@@ -8249,8 +8249,8 @@
           </p:nvSpPr>
           <p:spPr>
             <a:xfrm>
-              <a:off x="1310306" y="2875097"/>
-              <a:ext cx="2746591" cy="1359782"/>
+              <a:off x="1310032" y="2875189"/>
+              <a:ext cx="2746729" cy="1359873"/>
             </a:xfrm>
             <a:prstGeom prst="rect">
               <a:avLst/>
@@ -8275,7 +8275,7 @@
           </p:nvSpPr>
           <p:spPr>
             <a:xfrm>
-              <a:off x="1479019" y="4020408"/>
+              <a:off x="1652514" y="4023647"/>
               <a:ext cx="75116" cy="75116"/>
             </a:xfrm>
             <a:prstGeom prst="ellipse">
@@ -8301,7 +8301,7 @@
           </p:nvSpPr>
           <p:spPr>
             <a:xfrm>
-              <a:off x="1733464" y="3885915"/>
+              <a:off x="1692921" y="3887385"/>
               <a:ext cx="75116" cy="75116"/>
             </a:xfrm>
             <a:prstGeom prst="ellipse">
@@ -8327,7 +8327,7 @@
           </p:nvSpPr>
           <p:spPr>
             <a:xfrm>
-              <a:off x="1468723" y="4080319"/>
+              <a:off x="1572563" y="4081084"/>
               <a:ext cx="75116" cy="75116"/>
             </a:xfrm>
             <a:prstGeom prst="ellipse">
@@ -8353,7 +8353,7 @@
           </p:nvSpPr>
           <p:spPr>
             <a:xfrm>
-              <a:off x="1672195" y="3960968"/>
+              <a:off x="1710475" y="3964025"/>
               <a:ext cx="75116" cy="75116"/>
             </a:xfrm>
             <a:prstGeom prst="ellipse">
@@ -8379,7 +8379,7 @@
           </p:nvSpPr>
           <p:spPr>
             <a:xfrm>
-              <a:off x="1617249" y="3986323"/>
+              <a:off x="1399841" y="3988888"/>
               <a:ext cx="75116" cy="75116"/>
             </a:xfrm>
             <a:prstGeom prst="ellipse">
@@ -8405,7 +8405,7 @@
           </p:nvSpPr>
           <p:spPr>
             <a:xfrm>
-              <a:off x="1691340" y="3872413"/>
+              <a:off x="1708675" y="3873249"/>
               <a:ext cx="75116" cy="75116"/>
             </a:xfrm>
             <a:prstGeom prst="ellipse">
@@ -8431,7 +8431,7 @@
           </p:nvSpPr>
           <p:spPr>
             <a:xfrm>
-              <a:off x="1748644" y="3576592"/>
+              <a:off x="1397325" y="3576856"/>
               <a:ext cx="75116" cy="75116"/>
             </a:xfrm>
             <a:prstGeom prst="ellipse">
@@ -8457,7 +8457,7 @@
           </p:nvSpPr>
           <p:spPr>
             <a:xfrm>
-              <a:off x="1740899" y="3959163"/>
+              <a:off x="1552515" y="3961723"/>
               <a:ext cx="75116" cy="75116"/>
             </a:xfrm>
             <a:prstGeom prst="ellipse">
@@ -8483,7 +8483,7 @@
           </p:nvSpPr>
           <p:spPr>
             <a:xfrm>
-              <a:off x="1480270" y="3919032"/>
+              <a:off x="1573615" y="3921068"/>
               <a:ext cx="75116" cy="75116"/>
             </a:xfrm>
             <a:prstGeom prst="ellipse">
@@ -8509,7 +8509,7 @@
           </p:nvSpPr>
           <p:spPr>
             <a:xfrm>
-              <a:off x="1397593" y="3871204"/>
+              <a:off x="1469197" y="3872476"/>
               <a:ext cx="75116" cy="75116"/>
             </a:xfrm>
             <a:prstGeom prst="ellipse">
@@ -8535,7 +8535,7 @@
           </p:nvSpPr>
           <p:spPr>
             <a:xfrm>
-              <a:off x="2167668" y="4088619"/>
+              <a:off x="2215442" y="4089685"/>
               <a:ext cx="75116" cy="75116"/>
             </a:xfrm>
             <a:prstGeom prst="ellipse">
@@ -8561,7 +8561,7 @@
           </p:nvSpPr>
           <p:spPr>
             <a:xfrm>
-              <a:off x="2281487" y="4132371"/>
+              <a:off x="2377814" y="4135602"/>
               <a:ext cx="75116" cy="75116"/>
             </a:xfrm>
             <a:prstGeom prst="ellipse">
@@ -8587,7 +8587,7 @@
           </p:nvSpPr>
           <p:spPr>
             <a:xfrm>
-              <a:off x="2117514" y="3083454"/>
+              <a:off x="2433943" y="3083980"/>
               <a:ext cx="75116" cy="75116"/>
             </a:xfrm>
             <a:prstGeom prst="ellipse">
@@ -8613,7 +8613,7 @@
           </p:nvSpPr>
           <p:spPr>
             <a:xfrm>
-              <a:off x="2437008" y="4015401"/>
+              <a:off x="2423065" y="4017562"/>
               <a:ext cx="75116" cy="75116"/>
             </a:xfrm>
             <a:prstGeom prst="ellipse">
@@ -8639,7 +8639,7 @@
           </p:nvSpPr>
           <p:spPr>
             <a:xfrm>
-              <a:off x="2392351" y="4038340"/>
+              <a:off x="2194092" y="4042183"/>
               <a:ext cx="75116" cy="75116"/>
             </a:xfrm>
             <a:prstGeom prst="ellipse">
@@ -8665,7 +8665,7 @@
           </p:nvSpPr>
           <p:spPr>
             <a:xfrm>
-              <a:off x="2224049" y="3892846"/>
+              <a:off x="2407648" y="3895807"/>
               <a:ext cx="75116" cy="75116"/>
             </a:xfrm>
             <a:prstGeom prst="ellipse">
@@ -8691,7 +8691,7 @@
           </p:nvSpPr>
           <p:spPr>
             <a:xfrm>
-              <a:off x="2152747" y="4039881"/>
+              <a:off x="2369235" y="4040252"/>
               <a:ext cx="75116" cy="75116"/>
             </a:xfrm>
             <a:prstGeom prst="ellipse">
@@ -8717,7 +8717,7 @@
           </p:nvSpPr>
           <p:spPr>
             <a:xfrm>
-              <a:off x="2488858" y="4041650"/>
+              <a:off x="2319388" y="4043488"/>
               <a:ext cx="75116" cy="75116"/>
             </a:xfrm>
             <a:prstGeom prst="ellipse">
@@ -8743,7 +8743,7 @@
           </p:nvSpPr>
           <p:spPr>
             <a:xfrm>
-              <a:off x="2441289" y="3495311"/>
+              <a:off x="2081725" y="3494842"/>
               <a:ext cx="75116" cy="75116"/>
             </a:xfrm>
             <a:prstGeom prst="ellipse">
@@ -8769,7 +8769,7 @@
           </p:nvSpPr>
           <p:spPr>
             <a:xfrm>
-              <a:off x="2291342" y="3617723"/>
+              <a:off x="2263725" y="3620191"/>
               <a:ext cx="75116" cy="75116"/>
             </a:xfrm>
             <a:prstGeom prst="ellipse">
@@ -8795,7 +8795,7 @@
           </p:nvSpPr>
           <p:spPr>
             <a:xfrm>
-              <a:off x="2140818" y="3814458"/>
+              <a:off x="2457642" y="3816915"/>
               <a:ext cx="75116" cy="75116"/>
             </a:xfrm>
             <a:prstGeom prst="ellipse">
@@ -8821,7 +8821,7 @@
           </p:nvSpPr>
           <p:spPr>
             <a:xfrm>
-              <a:off x="2333557" y="3889012"/>
+              <a:off x="2392527" y="3891707"/>
               <a:ext cx="75116" cy="75116"/>
             </a:xfrm>
             <a:prstGeom prst="ellipse">
@@ -8847,7 +8847,7 @@
           </p:nvSpPr>
           <p:spPr>
             <a:xfrm>
-              <a:off x="2262684" y="3752898"/>
+              <a:off x="2338025" y="3752543"/>
               <a:ext cx="75116" cy="75116"/>
             </a:xfrm>
             <a:prstGeom prst="ellipse">
@@ -8873,7 +8873,7 @@
           </p:nvSpPr>
           <p:spPr>
             <a:xfrm>
-              <a:off x="2340132" y="3942469"/>
+              <a:off x="2482490" y="3942579"/>
               <a:ext cx="75116" cy="75116"/>
             </a:xfrm>
             <a:prstGeom prst="ellipse">
@@ -8899,7 +8899,7 @@
           </p:nvSpPr>
           <p:spPr>
             <a:xfrm>
-              <a:off x="2106166" y="3964207"/>
+              <a:off x="2476826" y="3966206"/>
               <a:ext cx="75116" cy="75116"/>
             </a:xfrm>
             <a:prstGeom prst="ellipse">
@@ -8925,7 +8925,7 @@
           </p:nvSpPr>
           <p:spPr>
             <a:xfrm>
-              <a:off x="2247371" y="3849614"/>
+              <a:off x="2183422" y="3850252"/>
               <a:ext cx="75116" cy="75116"/>
             </a:xfrm>
             <a:prstGeom prst="ellipse">
@@ -8951,7 +8951,7 @@
           </p:nvSpPr>
           <p:spPr>
             <a:xfrm>
-              <a:off x="2224461" y="3363304"/>
+              <a:off x="2243153" y="3365745"/>
               <a:ext cx="75116" cy="75116"/>
             </a:xfrm>
             <a:prstGeom prst="ellipse">
@@ -8977,7 +8977,7 @@
           </p:nvSpPr>
           <p:spPr>
             <a:xfrm>
-              <a:off x="2485819" y="3588648"/>
+              <a:off x="2279667" y="3587736"/>
               <a:ext cx="75116" cy="75116"/>
             </a:xfrm>
             <a:prstGeom prst="ellipse">
@@ -9003,7 +9003,7 @@
           </p:nvSpPr>
           <p:spPr>
             <a:xfrm>
-              <a:off x="2991776" y="3837440"/>
+              <a:off x="3056889" y="3838020"/>
               <a:ext cx="75116" cy="75116"/>
             </a:xfrm>
             <a:prstGeom prst="ellipse">
@@ -9029,7 +9029,7 @@
           </p:nvSpPr>
           <p:spPr>
             <a:xfrm>
-              <a:off x="2983698" y="3740973"/>
+              <a:off x="2910503" y="3741328"/>
               <a:ext cx="75116" cy="75116"/>
             </a:xfrm>
             <a:prstGeom prst="ellipse">
@@ -9055,7 +9055,7 @@
           </p:nvSpPr>
           <p:spPr>
             <a:xfrm>
-              <a:off x="3021441" y="4120614"/>
+              <a:off x="3138632" y="4123964"/>
               <a:ext cx="75116" cy="75116"/>
             </a:xfrm>
             <a:prstGeom prst="ellipse">
@@ -9081,7 +9081,7 @@
           </p:nvSpPr>
           <p:spPr>
             <a:xfrm>
-              <a:off x="2819235" y="4112660"/>
+              <a:off x="3166545" y="4115870"/>
               <a:ext cx="75116" cy="75116"/>
             </a:xfrm>
             <a:prstGeom prst="ellipse">
@@ -9107,7 +9107,7 @@
           </p:nvSpPr>
           <p:spPr>
             <a:xfrm>
-              <a:off x="2977533" y="3931654"/>
+              <a:off x="3004060" y="3933015"/>
               <a:ext cx="75116" cy="75116"/>
             </a:xfrm>
             <a:prstGeom prst="ellipse">
@@ -9133,7 +9133,7 @@
           </p:nvSpPr>
           <p:spPr>
             <a:xfrm>
-              <a:off x="3142509" y="4123735"/>
+              <a:off x="3013243" y="4127268"/>
               <a:ext cx="75116" cy="75116"/>
             </a:xfrm>
             <a:prstGeom prst="ellipse">
@@ -9159,7 +9159,7 @@
           </p:nvSpPr>
           <p:spPr>
             <a:xfrm>
-              <a:off x="3183792" y="3271088"/>
+              <a:off x="3162302" y="3271358"/>
               <a:ext cx="75116" cy="75116"/>
             </a:xfrm>
             <a:prstGeom prst="ellipse">
@@ -9185,7 +9185,7 @@
           </p:nvSpPr>
           <p:spPr>
             <a:xfrm>
-              <a:off x="2821237" y="4140663"/>
+              <a:off x="3034694" y="4140843"/>
               <a:ext cx="75116" cy="75116"/>
             </a:xfrm>
             <a:prstGeom prst="ellipse">
@@ -9211,7 +9211,7 @@
           </p:nvSpPr>
           <p:spPr>
             <a:xfrm>
-              <a:off x="3050715" y="3693571"/>
+              <a:off x="2970091" y="3694621"/>
               <a:ext cx="75116" cy="75116"/>
             </a:xfrm>
             <a:prstGeom prst="ellipse">
@@ -9237,7 +9237,7 @@
           </p:nvSpPr>
           <p:spPr>
             <a:xfrm>
-              <a:off x="2889425" y="3105515"/>
+              <a:off x="3047822" y="3107581"/>
               <a:ext cx="75116" cy="75116"/>
             </a:xfrm>
             <a:prstGeom prst="ellipse">
@@ -9263,7 +9263,7 @@
           </p:nvSpPr>
           <p:spPr>
             <a:xfrm>
-              <a:off x="3105272" y="3007511"/>
+              <a:off x="3150919" y="3007614"/>
               <a:ext cx="75116" cy="75116"/>
             </a:xfrm>
             <a:prstGeom prst="ellipse">
@@ -9289,7 +9289,7 @@
           </p:nvSpPr>
           <p:spPr>
             <a:xfrm>
-              <a:off x="3110131" y="3677406"/>
+              <a:off x="2984818" y="3680326"/>
               <a:ext cx="75116" cy="75116"/>
             </a:xfrm>
             <a:prstGeom prst="ellipse">
@@ -9315,7 +9315,7 @@
           </p:nvSpPr>
           <p:spPr>
             <a:xfrm>
-              <a:off x="3168607" y="3556993"/>
+              <a:off x="2926888" y="3559270"/>
               <a:ext cx="75116" cy="75116"/>
             </a:xfrm>
             <a:prstGeom prst="ellipse">
@@ -9341,7 +9341,7 @@
           </p:nvSpPr>
           <p:spPr>
             <a:xfrm>
-              <a:off x="2874170" y="3518353"/>
+              <a:off x="2800719" y="3517790"/>
               <a:ext cx="75116" cy="75116"/>
             </a:xfrm>
             <a:prstGeom prst="ellipse">
@@ -9367,7 +9367,7 @@
           </p:nvSpPr>
           <p:spPr>
             <a:xfrm>
-              <a:off x="2808942" y="3551695"/>
+              <a:off x="3181705" y="3553321"/>
               <a:ext cx="75116" cy="75116"/>
             </a:xfrm>
             <a:prstGeom prst="ellipse">
@@ -9393,7 +9393,7 @@
           </p:nvSpPr>
           <p:spPr>
             <a:xfrm>
-              <a:off x="2976817" y="4053136"/>
+              <a:off x="2831045" y="4057520"/>
               <a:ext cx="75116" cy="75116"/>
             </a:xfrm>
             <a:prstGeom prst="ellipse">
@@ -9419,7 +9419,7 @@
           </p:nvSpPr>
           <p:spPr>
             <a:xfrm>
-              <a:off x="2882951" y="3504811"/>
+              <a:off x="3114994" y="3506274"/>
               <a:ext cx="75116" cy="75116"/>
             </a:xfrm>
             <a:prstGeom prst="ellipse">
@@ -9445,7 +9445,7 @@
           </p:nvSpPr>
           <p:spPr>
             <a:xfrm>
-              <a:off x="2936986" y="3884550"/>
+              <a:off x="2875414" y="3886790"/>
               <a:ext cx="75116" cy="75116"/>
             </a:xfrm>
             <a:prstGeom prst="ellipse">
@@ -9471,7 +9471,7 @@
           </p:nvSpPr>
           <p:spPr>
             <a:xfrm>
-              <a:off x="3126030" y="3904380"/>
+              <a:off x="2836863" y="3906492"/>
               <a:ext cx="75116" cy="75116"/>
             </a:xfrm>
             <a:prstGeom prst="ellipse">
@@ -9497,7 +9497,7 @@
           </p:nvSpPr>
           <p:spPr>
             <a:xfrm>
-              <a:off x="2903621" y="3722771"/>
+              <a:off x="2997694" y="3724169"/>
               <a:ext cx="75116" cy="75116"/>
             </a:xfrm>
             <a:prstGeom prst="ellipse">
@@ -9523,7 +9523,7 @@
           </p:nvSpPr>
           <p:spPr>
             <a:xfrm>
-              <a:off x="3693425" y="3709481"/>
+              <a:off x="3820916" y="3711772"/>
               <a:ext cx="75116" cy="75116"/>
             </a:xfrm>
             <a:prstGeom prst="ellipse">
@@ -9549,7 +9549,7 @@
           </p:nvSpPr>
           <p:spPr>
             <a:xfrm>
-              <a:off x="3768521" y="3808646"/>
+              <a:off x="3517413" y="3810665"/>
               <a:ext cx="75116" cy="75116"/>
             </a:xfrm>
             <a:prstGeom prst="ellipse">
@@ -9575,7 +9575,7 @@
           </p:nvSpPr>
           <p:spPr>
             <a:xfrm>
-              <a:off x="3798306" y="3739969"/>
+              <a:off x="3686451" y="3741620"/>
               <a:ext cx="75116" cy="75116"/>
             </a:xfrm>
             <a:prstGeom prst="ellipse">
@@ -9601,7 +9601,7 @@
           </p:nvSpPr>
           <p:spPr>
             <a:xfrm>
-              <a:off x="3614376" y="4006506"/>
+              <a:off x="3810536" y="4006779"/>
               <a:ext cx="75116" cy="75116"/>
             </a:xfrm>
             <a:prstGeom prst="ellipse">
@@ -9627,7 +9627,7 @@
           </p:nvSpPr>
           <p:spPr>
             <a:xfrm>
-              <a:off x="3546274" y="3508866"/>
+              <a:off x="3613861" y="3510597"/>
               <a:ext cx="75116" cy="75116"/>
             </a:xfrm>
             <a:prstGeom prst="ellipse">
@@ -9653,7 +9653,7 @@
           </p:nvSpPr>
           <p:spPr>
             <a:xfrm>
-              <a:off x="3690247" y="3824937"/>
+              <a:off x="3681311" y="3829092"/>
               <a:ext cx="75116" cy="75116"/>
             </a:xfrm>
             <a:prstGeom prst="ellipse">
@@ -9679,7 +9679,7 @@
           </p:nvSpPr>
           <p:spPr>
             <a:xfrm>
-              <a:off x="3677802" y="3933397"/>
+              <a:off x="3894352" y="3937048"/>
               <a:ext cx="75116" cy="75116"/>
             </a:xfrm>
             <a:prstGeom prst="ellipse">
@@ -9705,7 +9705,7 @@
           </p:nvSpPr>
           <p:spPr>
             <a:xfrm>
-              <a:off x="3684053" y="3663093"/>
+              <a:off x="3790231" y="3662938"/>
               <a:ext cx="75116" cy="75116"/>
             </a:xfrm>
             <a:prstGeom prst="ellipse">
@@ -9731,7 +9731,7 @@
           </p:nvSpPr>
           <p:spPr>
             <a:xfrm>
-              <a:off x="3892377" y="3599787"/>
+              <a:off x="3693571" y="3599162"/>
               <a:ext cx="75116" cy="75116"/>
             </a:xfrm>
             <a:prstGeom prst="ellipse">
@@ -9757,7 +9757,7 @@
           </p:nvSpPr>
           <p:spPr>
             <a:xfrm>
-              <a:off x="3576085" y="3333691"/>
+              <a:off x="3854951" y="3334129"/>
               <a:ext cx="75116" cy="75116"/>
             </a:xfrm>
             <a:prstGeom prst="ellipse">
@@ -9783,7 +9783,7 @@
           </p:nvSpPr>
           <p:spPr>
             <a:xfrm>
-              <a:off x="3844045" y="3357764"/>
+              <a:off x="3598496" y="3357297"/>
               <a:ext cx="75116" cy="75116"/>
             </a:xfrm>
             <a:prstGeom prst="ellipse">
@@ -9809,7 +9809,7 @@
           </p:nvSpPr>
           <p:spPr>
             <a:xfrm>
-              <a:off x="3685376" y="3337558"/>
+              <a:off x="3737981" y="3339232"/>
               <a:ext cx="75116" cy="75116"/>
             </a:xfrm>
             <a:prstGeom prst="ellipse">
@@ -9835,7 +9835,7 @@
           </p:nvSpPr>
           <p:spPr>
             <a:xfrm>
-              <a:off x="3894495" y="3434700"/>
+              <a:off x="3825409" y="3436068"/>
               <a:ext cx="75116" cy="75116"/>
             </a:xfrm>
             <a:prstGeom prst="ellipse">
@@ -9861,7 +9861,7 @@
           </p:nvSpPr>
           <p:spPr>
             <a:xfrm>
-              <a:off x="3530877" y="3669728"/>
+              <a:off x="3639394" y="3670270"/>
               <a:ext cx="75116" cy="75116"/>
             </a:xfrm>
             <a:prstGeom prst="ellipse">
@@ -9887,7 +9887,7 @@
           </p:nvSpPr>
           <p:spPr>
             <a:xfrm>
-              <a:off x="3838509" y="3696439"/>
+              <a:off x="3889399" y="3697213"/>
               <a:ext cx="75116" cy="75116"/>
             </a:xfrm>
             <a:prstGeom prst="ellipse">
@@ -9913,7 +9913,7 @@
           </p:nvSpPr>
           <p:spPr>
             <a:xfrm>
-              <a:off x="3639664" y="3603095"/>
+              <a:off x="3742756" y="3603411"/>
               <a:ext cx="75116" cy="75116"/>
             </a:xfrm>
             <a:prstGeom prst="ellipse">
@@ -9939,7 +9939,7 @@
           </p:nvSpPr>
           <p:spPr>
             <a:xfrm>
-              <a:off x="3602677" y="3564554"/>
+              <a:off x="3816125" y="3565915"/>
               <a:ext cx="75116" cy="75116"/>
             </a:xfrm>
             <a:prstGeom prst="ellipse">
@@ -9965,7 +9965,7 @@
           </p:nvSpPr>
           <p:spPr>
             <a:xfrm>
-              <a:off x="3819701" y="3552841"/>
+              <a:off x="3774785" y="3554577"/>
               <a:ext cx="75116" cy="75116"/>
             </a:xfrm>
             <a:prstGeom prst="ellipse">
@@ -9991,7 +9991,7 @@
           </p:nvSpPr>
           <p:spPr>
             <a:xfrm>
-              <a:off x="3635305" y="3383162"/>
+              <a:off x="3542267" y="3383713"/>
               <a:ext cx="75116" cy="75116"/>
             </a:xfrm>
             <a:prstGeom prst="ellipse">
@@ -10017,7 +10017,7 @@
           </p:nvSpPr>
           <p:spPr>
             <a:xfrm>
-              <a:off x="3591857" y="3495254"/>
+              <a:off x="3634283" y="3495096"/>
               <a:ext cx="75116" cy="75116"/>
             </a:xfrm>
             <a:prstGeom prst="ellipse">
@@ -10043,7 +10043,7 @@
           </p:nvSpPr>
           <p:spPr>
             <a:xfrm>
-              <a:off x="3568467" y="3536712"/>
+              <a:off x="3537416" y="3535790"/>
               <a:ext cx="75116" cy="75116"/>
             </a:xfrm>
             <a:prstGeom prst="ellipse">
@@ -10069,7 +10069,7 @@
           </p:nvSpPr>
           <p:spPr>
             <a:xfrm>
-              <a:off x="3655599" y="3357388"/>
+              <a:off x="3851087" y="3357336"/>
               <a:ext cx="75116" cy="75116"/>
             </a:xfrm>
             <a:prstGeom prst="ellipse">
@@ -10095,7 +10095,7 @@
           </p:nvSpPr>
           <p:spPr>
             <a:xfrm>
-              <a:off x="3634886" y="3566249"/>
+              <a:off x="3552732" y="3566257"/>
               <a:ext cx="75116" cy="75116"/>
             </a:xfrm>
             <a:prstGeom prst="ellipse">
@@ -10121,7 +10121,7 @@
           </p:nvSpPr>
           <p:spPr>
             <a:xfrm>
-              <a:off x="3619123" y="3403911"/>
+              <a:off x="3561647" y="3407365"/>
               <a:ext cx="75116" cy="75116"/>
             </a:xfrm>
             <a:prstGeom prst="ellipse">
@@ -10147,42 +10147,42 @@
           </p:nvSpPr>
           <p:spPr>
             <a:xfrm>
-              <a:off x="1620462" y="3452912"/>
-              <a:ext cx="2128369" cy="682783"/>
+              <a:off x="1614896" y="3454031"/>
+              <a:ext cx="2116142" cy="684115"/>
             </a:xfrm>
             <a:custGeom>
               <a:avLst/>
               <a:pathLst>
-                <a:path w="2128369" h="682783">
+                <a:path w="2116142" h="684115">
                   <a:moveTo>
-                    <a:pt x="0" y="278447"/>
+                    <a:pt x="0" y="278990"/>
                   </a:moveTo>
                   <a:lnTo>
-                    <a:pt x="1124461" y="206215"/>
+                    <a:pt x="1118001" y="206617"/>
                   </a:lnTo>
                   <a:lnTo>
-                    <a:pt x="1418912" y="158945"/>
+                    <a:pt x="1410761" y="159255"/>
                   </a:lnTo>
                   <a:lnTo>
-                    <a:pt x="1833918" y="71332"/>
+                    <a:pt x="1823382" y="71471"/>
                   </a:lnTo>
                   <a:lnTo>
-                    <a:pt x="2128369" y="0"/>
+                    <a:pt x="2116142" y="0"/>
                   </a:lnTo>
                   <a:lnTo>
-                    <a:pt x="2128369" y="362690"/>
+                    <a:pt x="2116142" y="363398"/>
                   </a:lnTo>
                   <a:lnTo>
-                    <a:pt x="1833918" y="374163"/>
+                    <a:pt x="1823382" y="374893"/>
                   </a:lnTo>
                   <a:lnTo>
-                    <a:pt x="1418912" y="403258"/>
+                    <a:pt x="1410761" y="404045"/>
                   </a:lnTo>
                   <a:lnTo>
-                    <a:pt x="1124461" y="438794"/>
+                    <a:pt x="1118001" y="439650"/>
                   </a:lnTo>
                   <a:lnTo>
-                    <a:pt x="0" y="682783"/>
+                    <a:pt x="0" y="684115"/>
                   </a:lnTo>
                   <a:close/>
                 </a:path>
@@ -10208,27 +10208,27 @@
           </p:nvSpPr>
           <p:spPr>
             <a:xfrm>
-              <a:off x="1620462" y="3452912"/>
-              <a:ext cx="2128369" cy="278447"/>
+              <a:off x="1614896" y="3454031"/>
+              <a:ext cx="2116142" cy="278990"/>
             </a:xfrm>
             <a:custGeom>
               <a:avLst/>
               <a:pathLst>
-                <a:path w="2128369" h="278447">
+                <a:path w="2116142" h="278990">
                   <a:moveTo>
-                    <a:pt x="0" y="278447"/>
+                    <a:pt x="0" y="278990"/>
                   </a:moveTo>
                   <a:lnTo>
-                    <a:pt x="1124461" y="206215"/>
+                    <a:pt x="1118001" y="206617"/>
                   </a:lnTo>
                   <a:lnTo>
-                    <a:pt x="1418912" y="158945"/>
+                    <a:pt x="1410761" y="159255"/>
                   </a:lnTo>
                   <a:lnTo>
-                    <a:pt x="1833918" y="71332"/>
+                    <a:pt x="1823382" y="71471"/>
                   </a:lnTo>
                   <a:lnTo>
-                    <a:pt x="2128369" y="0"/>
+                    <a:pt x="2116142" y="0"/>
                   </a:lnTo>
                 </a:path>
               </a:pathLst>
@@ -10248,27 +10248,27 @@
           </p:nvSpPr>
           <p:spPr>
             <a:xfrm>
-              <a:off x="1620462" y="3815602"/>
-              <a:ext cx="2128369" cy="320092"/>
+              <a:off x="1614896" y="3817429"/>
+              <a:ext cx="2116142" cy="320717"/>
             </a:xfrm>
             <a:custGeom>
               <a:avLst/>
               <a:pathLst>
-                <a:path w="2128369" h="320092">
+                <a:path w="2116142" h="320717">
                   <a:moveTo>
-                    <a:pt x="2128369" y="0"/>
+                    <a:pt x="2116142" y="0"/>
                   </a:moveTo>
                   <a:lnTo>
-                    <a:pt x="1833918" y="11472"/>
+                    <a:pt x="1823382" y="11495"/>
                   </a:lnTo>
                   <a:lnTo>
-                    <a:pt x="1418912" y="40567"/>
+                    <a:pt x="1410761" y="40647"/>
                   </a:lnTo>
                   <a:lnTo>
-                    <a:pt x="1124461" y="76103"/>
+                    <a:pt x="1118001" y="76252"/>
                   </a:lnTo>
                   <a:lnTo>
-                    <a:pt x="0" y="320092"/>
+                    <a:pt x="0" y="320717"/>
                   </a:lnTo>
                 </a:path>
               </a:pathLst>
@@ -10288,27 +10288,27 @@
           </p:nvSpPr>
           <p:spPr>
             <a:xfrm>
-              <a:off x="1620462" y="3634257"/>
-              <a:ext cx="2128369" cy="299270"/>
+              <a:off x="1614896" y="3635730"/>
+              <a:ext cx="2116142" cy="299854"/>
             </a:xfrm>
             <a:custGeom>
               <a:avLst/>
               <a:pathLst>
-                <a:path w="2128369" h="299270">
+                <a:path w="2116142" h="299854">
                   <a:moveTo>
-                    <a:pt x="0" y="299270"/>
+                    <a:pt x="0" y="299854"/>
                   </a:moveTo>
                   <a:lnTo>
-                    <a:pt x="1124461" y="141159"/>
+                    <a:pt x="1118001" y="141434"/>
                   </a:lnTo>
                   <a:lnTo>
-                    <a:pt x="1418912" y="99756"/>
+                    <a:pt x="1410761" y="99951"/>
                   </a:lnTo>
                   <a:lnTo>
-                    <a:pt x="1833918" y="41402"/>
+                    <a:pt x="1823382" y="41483"/>
                   </a:lnTo>
                   <a:lnTo>
-                    <a:pt x="2128369" y="0"/>
+                    <a:pt x="2116142" y="0"/>
                   </a:lnTo>
                 </a:path>
               </a:pathLst>
@@ -10337,7 +10337,7 @@
           </p:nvSpPr>
           <p:spPr>
             <a:xfrm>
-              <a:off x="3269137" y="3034018"/>
+              <a:off x="3251344" y="3034560"/>
               <a:ext cx="479694" cy="82021"/>
             </a:xfrm>
             <a:prstGeom prst="rect">
@@ -10383,8 +10383,8 @@
           </p:nvSpPr>
           <p:spPr>
             <a:xfrm>
-              <a:off x="1310306" y="2875097"/>
-              <a:ext cx="2746591" cy="1359782"/>
+              <a:off x="1310032" y="2875189"/>
+              <a:ext cx="2746729" cy="1359873"/>
             </a:xfrm>
             <a:prstGeom prst="rect">
               <a:avLst/>
@@ -10404,15 +10404,15 @@
           </p:nvSpPr>
           <p:spPr>
             <a:xfrm>
-              <a:off x="1310306" y="2875097"/>
-              <a:ext cx="0" cy="1359782"/>
+              <a:off x="1310032" y="2875189"/>
+              <a:ext cx="0" cy="1359873"/>
             </a:xfrm>
             <a:custGeom>
               <a:avLst/>
               <a:pathLst>
-                <a:path w="0" h="1359782">
+                <a:path w="0" h="1359873">
                   <a:moveTo>
-                    <a:pt x="0" y="1359782"/>
+                    <a:pt x="0" y="1359873"/>
                   </a:moveTo>
                   <a:lnTo>
                     <a:pt x="0" y="0"/>
@@ -10444,7 +10444,7 @@
           </p:nvSpPr>
           <p:spPr>
             <a:xfrm rot="-5400000">
-              <a:off x="1140740" y="4148557"/>
+              <a:off x="1140466" y="4151106"/>
               <a:ext cx="141274" cy="72877"/>
             </a:xfrm>
             <a:prstGeom prst="rect">
@@ -10490,7 +10490,7 @@
           </p:nvSpPr>
           <p:spPr>
             <a:xfrm rot="-5400000">
-              <a:off x="1140740" y="3897142"/>
+              <a:off x="1140466" y="3899199"/>
               <a:ext cx="141274" cy="72877"/>
             </a:xfrm>
             <a:prstGeom prst="rect">
@@ -10536,7 +10536,7 @@
           </p:nvSpPr>
           <p:spPr>
             <a:xfrm rot="-5400000">
-              <a:off x="1140740" y="3645726"/>
+              <a:off x="1140466" y="3647293"/>
               <a:ext cx="141274" cy="72877"/>
             </a:xfrm>
             <a:prstGeom prst="rect">
@@ -10582,7 +10582,7 @@
           </p:nvSpPr>
           <p:spPr>
             <a:xfrm rot="-5400000">
-              <a:off x="1140740" y="3394310"/>
+              <a:off x="1140466" y="3395386"/>
               <a:ext cx="141274" cy="72877"/>
             </a:xfrm>
             <a:prstGeom prst="rect">
@@ -10628,7 +10628,7 @@
           </p:nvSpPr>
           <p:spPr>
             <a:xfrm rot="-5400000">
-              <a:off x="1140740" y="3142894"/>
+              <a:off x="1140466" y="3143480"/>
               <a:ext cx="141274" cy="72877"/>
             </a:xfrm>
             <a:prstGeom prst="rect">
@@ -10674,7 +10674,7 @@
           </p:nvSpPr>
           <p:spPr>
             <a:xfrm rot="-5400000">
-              <a:off x="1140740" y="2891479"/>
+              <a:off x="1140466" y="2891574"/>
               <a:ext cx="141274" cy="72877"/>
             </a:xfrm>
             <a:prstGeom prst="rect">
@@ -10720,7 +10720,7 @@
           </p:nvSpPr>
           <p:spPr>
             <a:xfrm>
-              <a:off x="1281838" y="4184996"/>
+              <a:off x="1281564" y="4187545"/>
               <a:ext cx="28468" cy="0"/>
             </a:xfrm>
             <a:custGeom>
@@ -10760,7 +10760,7 @@
           </p:nvSpPr>
           <p:spPr>
             <a:xfrm>
-              <a:off x="1281838" y="3933581"/>
+              <a:off x="1281564" y="3935638"/>
               <a:ext cx="28468" cy="0"/>
             </a:xfrm>
             <a:custGeom>
@@ -10800,7 +10800,7 @@
           </p:nvSpPr>
           <p:spPr>
             <a:xfrm>
-              <a:off x="1281838" y="3682165"/>
+              <a:off x="1281564" y="3683732"/>
               <a:ext cx="28468" cy="0"/>
             </a:xfrm>
             <a:custGeom>
@@ -10840,7 +10840,7 @@
           </p:nvSpPr>
           <p:spPr>
             <a:xfrm>
-              <a:off x="1281838" y="3430749"/>
+              <a:off x="1281564" y="3431825"/>
               <a:ext cx="28468" cy="0"/>
             </a:xfrm>
             <a:custGeom>
@@ -10880,7 +10880,7 @@
           </p:nvSpPr>
           <p:spPr>
             <a:xfrm>
-              <a:off x="1281838" y="3179333"/>
+              <a:off x="1281564" y="3179919"/>
               <a:ext cx="28468" cy="0"/>
             </a:xfrm>
             <a:custGeom>
@@ -10920,7 +10920,7 @@
           </p:nvSpPr>
           <p:spPr>
             <a:xfrm>
-              <a:off x="1281838" y="2927918"/>
+              <a:off x="1281564" y="2928012"/>
               <a:ext cx="28468" cy="0"/>
             </a:xfrm>
             <a:custGeom>
@@ -10960,18 +10960,18 @@
           </p:nvSpPr>
           <p:spPr>
             <a:xfrm>
-              <a:off x="1310306" y="4234879"/>
-              <a:ext cx="2746591" cy="0"/>
+              <a:off x="1310032" y="4235062"/>
+              <a:ext cx="2746729" cy="0"/>
             </a:xfrm>
             <a:custGeom>
               <a:avLst/>
               <a:pathLst>
-                <a:path w="2746591" h="0">
+                <a:path w="2746729" h="0">
                   <a:moveTo>
                     <a:pt x="0" y="0"/>
                   </a:moveTo>
                   <a:lnTo>
-                    <a:pt x="2746591" y="0"/>
+                    <a:pt x="2746729" y="0"/>
                   </a:lnTo>
                 </a:path>
               </a:pathLst>
@@ -11000,7 +11000,7 @@
           </p:nvSpPr>
           <p:spPr>
             <a:xfrm>
-              <a:off x="1620462" y="4234879"/>
+              <a:off x="1614896" y="4235062"/>
               <a:ext cx="0" cy="28468"/>
             </a:xfrm>
             <a:custGeom>
@@ -11040,7 +11040,7 @@
           </p:nvSpPr>
           <p:spPr>
             <a:xfrm>
-              <a:off x="2329919" y="4234879"/>
+              <a:off x="2320277" y="4235062"/>
               <a:ext cx="0" cy="28468"/>
             </a:xfrm>
             <a:custGeom>
@@ -11080,7 +11080,7 @@
           </p:nvSpPr>
           <p:spPr>
             <a:xfrm>
-              <a:off x="3039375" y="4234879"/>
+              <a:off x="3025658" y="4235062"/>
               <a:ext cx="0" cy="28468"/>
             </a:xfrm>
             <a:custGeom>
@@ -11120,7 +11120,7 @@
           </p:nvSpPr>
           <p:spPr>
             <a:xfrm>
-              <a:off x="3748831" y="4234879"/>
+              <a:off x="3731039" y="4235062"/>
               <a:ext cx="0" cy="28468"/>
             </a:xfrm>
             <a:custGeom>
@@ -11160,7 +11160,7 @@
           </p:nvSpPr>
           <p:spPr>
             <a:xfrm>
-              <a:off x="1592207" y="4286122"/>
+              <a:off x="1586642" y="4286305"/>
               <a:ext cx="56509" cy="72877"/>
             </a:xfrm>
             <a:prstGeom prst="rect">
@@ -11206,7 +11206,7 @@
           </p:nvSpPr>
           <p:spPr>
             <a:xfrm>
-              <a:off x="2301664" y="4286122"/>
+              <a:off x="2292022" y="4286305"/>
               <a:ext cx="56509" cy="72877"/>
             </a:xfrm>
             <a:prstGeom prst="rect">
@@ -11252,7 +11252,7 @@
           </p:nvSpPr>
           <p:spPr>
             <a:xfrm>
-              <a:off x="3011120" y="4286122"/>
+              <a:off x="2997403" y="4286305"/>
               <a:ext cx="56509" cy="72877"/>
             </a:xfrm>
             <a:prstGeom prst="rect">
@@ -11298,7 +11298,7 @@
           </p:nvSpPr>
           <p:spPr>
             <a:xfrm>
-              <a:off x="3720576" y="4286122"/>
+              <a:off x="3702784" y="4286305"/>
               <a:ext cx="56509" cy="72877"/>
             </a:xfrm>
             <a:prstGeom prst="rect">
@@ -11344,8 +11344,8 @@
           </p:nvSpPr>
           <p:spPr>
             <a:xfrm rot="-5400000">
-              <a:off x="934421" y="3509268"/>
-              <a:ext cx="197510" cy="91440"/>
+              <a:off x="934284" y="3509543"/>
+              <a:ext cx="197510" cy="91165"/>
             </a:xfrm>
             <a:prstGeom prst="rect">
               <a:avLst/>
@@ -11368,7 +11368,7 @@
                 </a:spcAft>
               </a:pPr>
               <a:r>
-                <a:rPr sz="1000" b="1">
+                <a:rPr sz="1000">
                   <a:solidFill>
                     <a:srgbClr val="000000">
                       <a:alpha val="100000"/>
@@ -11390,7 +11390,7 @@
           </p:nvSpPr>
           <p:spPr>
             <a:xfrm>
-              <a:off x="1310306" y="2698557"/>
+              <a:off x="1310032" y="2698649"/>
               <a:ext cx="896569" cy="91440"/>
             </a:xfrm>
             <a:prstGeom prst="rect">
@@ -11436,8 +11436,8 @@
           </p:nvSpPr>
           <p:spPr>
             <a:xfrm>
-              <a:off x="4186587" y="2875097"/>
-              <a:ext cx="2746591" cy="1359782"/>
+              <a:off x="4186450" y="2875189"/>
+              <a:ext cx="2746729" cy="1359873"/>
             </a:xfrm>
             <a:prstGeom prst="rect">
               <a:avLst/>
@@ -11462,7 +11462,7 @@
           </p:nvSpPr>
           <p:spPr>
             <a:xfrm>
-              <a:off x="4386023" y="3736082"/>
+              <a:off x="4464833" y="3736700"/>
               <a:ext cx="75116" cy="75116"/>
             </a:xfrm>
             <a:prstGeom prst="ellipse">
@@ -11488,7 +11488,7 @@
           </p:nvSpPr>
           <p:spPr>
             <a:xfrm>
-              <a:off x="4334347" y="3123874"/>
+              <a:off x="4358895" y="3123471"/>
               <a:ext cx="75116" cy="75116"/>
             </a:xfrm>
             <a:prstGeom prst="ellipse">
@@ -11514,7 +11514,7 @@
           </p:nvSpPr>
           <p:spPr>
             <a:xfrm>
-              <a:off x="4304269" y="3800590"/>
+              <a:off x="4483043" y="3796823"/>
               <a:ext cx="75116" cy="75116"/>
             </a:xfrm>
             <a:prstGeom prst="ellipse">
@@ -11540,7 +11540,7 @@
           </p:nvSpPr>
           <p:spPr>
             <a:xfrm>
-              <a:off x="4327241" y="3582744"/>
+              <a:off x="4532574" y="3581779"/>
               <a:ext cx="75116" cy="75116"/>
             </a:xfrm>
             <a:prstGeom prst="ellipse">
@@ -11566,7 +11566,7 @@
           </p:nvSpPr>
           <p:spPr>
             <a:xfrm>
-              <a:off x="4455248" y="3843656"/>
+              <a:off x="4466301" y="3844017"/>
               <a:ext cx="75116" cy="75116"/>
             </a:xfrm>
             <a:prstGeom prst="ellipse">
@@ -11592,7 +11592,7 @@
           </p:nvSpPr>
           <p:spPr>
             <a:xfrm>
-              <a:off x="4314301" y="3045094"/>
+              <a:off x="4357659" y="3043366"/>
               <a:ext cx="75116" cy="75116"/>
             </a:xfrm>
             <a:prstGeom prst="ellipse">
@@ -11618,7 +11618,7 @@
           </p:nvSpPr>
           <p:spPr>
             <a:xfrm>
-              <a:off x="4572406" y="3007511"/>
+              <a:off x="4604329" y="3007614"/>
               <a:ext cx="75116" cy="75116"/>
             </a:xfrm>
             <a:prstGeom prst="ellipse">
@@ -11644,7 +11644,7 @@
           </p:nvSpPr>
           <p:spPr>
             <a:xfrm>
-              <a:off x="4593844" y="3339963"/>
+              <a:off x="4548654" y="3339643"/>
               <a:ext cx="75116" cy="75116"/>
             </a:xfrm>
             <a:prstGeom prst="ellipse">
@@ -11670,7 +11670,7 @@
           </p:nvSpPr>
           <p:spPr>
             <a:xfrm>
-              <a:off x="4273874" y="3978440"/>
+              <a:off x="4630333" y="3976997"/>
               <a:ext cx="75116" cy="75116"/>
             </a:xfrm>
             <a:prstGeom prst="ellipse">
@@ -11696,7 +11696,7 @@
           </p:nvSpPr>
           <p:spPr>
             <a:xfrm>
-              <a:off x="4431526" y="3637854"/>
+              <a:off x="4273743" y="3636551"/>
               <a:ext cx="75116" cy="75116"/>
             </a:xfrm>
             <a:prstGeom prst="ellipse">
@@ -11722,7 +11722,7 @@
           </p:nvSpPr>
           <p:spPr>
             <a:xfrm>
-              <a:off x="5038702" y="3884619"/>
+              <a:off x="5243165" y="3882767"/>
               <a:ext cx="75116" cy="75116"/>
             </a:xfrm>
             <a:prstGeom prst="ellipse">
@@ -11748,7 +11748,7 @@
           </p:nvSpPr>
           <p:spPr>
             <a:xfrm>
-              <a:off x="5050531" y="3421815"/>
+              <a:off x="5047367" y="3419083"/>
               <a:ext cx="75116" cy="75116"/>
             </a:xfrm>
             <a:prstGeom prst="ellipse">
@@ -11774,7 +11774,7 @@
           </p:nvSpPr>
           <p:spPr>
             <a:xfrm>
-              <a:off x="5011367" y="3804507"/>
+              <a:off x="5029703" y="3803520"/>
               <a:ext cx="75116" cy="75116"/>
             </a:xfrm>
             <a:prstGeom prst="ellipse">
@@ -11800,7 +11800,7 @@
           </p:nvSpPr>
           <p:spPr>
             <a:xfrm>
-              <a:off x="4956091" y="4018353"/>
+              <a:off x="4951817" y="4019148"/>
               <a:ext cx="75116" cy="75116"/>
             </a:xfrm>
             <a:prstGeom prst="ellipse">
@@ -11826,7 +11826,7 @@
           </p:nvSpPr>
           <p:spPr>
             <a:xfrm>
-              <a:off x="5191944" y="3701231"/>
+              <a:off x="5010851" y="3700003"/>
               <a:ext cx="75116" cy="75116"/>
             </a:xfrm>
             <a:prstGeom prst="ellipse">
@@ -11852,7 +11852,7 @@
           </p:nvSpPr>
           <p:spPr>
             <a:xfrm>
-              <a:off x="5133534" y="3397795"/>
+              <a:off x="5306893" y="3397645"/>
               <a:ext cx="75116" cy="75116"/>
             </a:xfrm>
             <a:prstGeom prst="ellipse">
@@ -11878,7 +11878,7 @@
           </p:nvSpPr>
           <p:spPr>
             <a:xfrm>
-              <a:off x="5296414" y="4091578"/>
+              <a:off x="5230529" y="4091228"/>
               <a:ext cx="75116" cy="75116"/>
             </a:xfrm>
             <a:prstGeom prst="ellipse">
@@ -11904,7 +11904,7 @@
           </p:nvSpPr>
           <p:spPr>
             <a:xfrm>
-              <a:off x="5335668" y="3993143"/>
+              <a:off x="5333998" y="3991632"/>
               <a:ext cx="75116" cy="75116"/>
             </a:xfrm>
             <a:prstGeom prst="ellipse">
@@ -11930,7 +11930,7 @@
           </p:nvSpPr>
           <p:spPr>
             <a:xfrm>
-              <a:off x="5294106" y="3871010"/>
+              <a:off x="5133045" y="3868807"/>
               <a:ext cx="75116" cy="75116"/>
             </a:xfrm>
             <a:prstGeom prst="ellipse">
@@ -11956,7 +11956,7 @@
           </p:nvSpPr>
           <p:spPr>
             <a:xfrm>
-              <a:off x="5267995" y="4085950"/>
+              <a:off x="5137443" y="4084628"/>
               <a:ext cx="75116" cy="75116"/>
             </a:xfrm>
             <a:prstGeom prst="ellipse">
@@ -11982,7 +11982,7 @@
           </p:nvSpPr>
           <p:spPr>
             <a:xfrm>
-              <a:off x="5069375" y="3984785"/>
+              <a:off x="5284594" y="3981914"/>
               <a:ext cx="75116" cy="75116"/>
             </a:xfrm>
             <a:prstGeom prst="ellipse">
@@ -12008,7 +12008,7 @@
           </p:nvSpPr>
           <p:spPr>
             <a:xfrm>
-              <a:off x="5213494" y="4087344"/>
+              <a:off x="5184275" y="4085229"/>
               <a:ext cx="75116" cy="75116"/>
             </a:xfrm>
             <a:prstGeom prst="ellipse">
@@ -12034,7 +12034,7 @@
           </p:nvSpPr>
           <p:spPr>
             <a:xfrm>
-              <a:off x="5287787" y="3836408"/>
+              <a:off x="5222716" y="3832519"/>
               <a:ext cx="75116" cy="75116"/>
             </a:xfrm>
             <a:prstGeom prst="ellipse">
@@ -12060,7 +12060,7 @@
           </p:nvSpPr>
           <p:spPr>
             <a:xfrm>
-              <a:off x="5286671" y="3784356"/>
+              <a:off x="5218331" y="3785935"/>
               <a:ext cx="75116" cy="75116"/>
             </a:xfrm>
             <a:prstGeom prst="ellipse">
@@ -12086,7 +12086,7 @@
           </p:nvSpPr>
           <p:spPr>
             <a:xfrm>
-              <a:off x="5342839" y="3559575"/>
+              <a:off x="4993281" y="3560518"/>
               <a:ext cx="75116" cy="75116"/>
             </a:xfrm>
             <a:prstGeom prst="ellipse">
@@ -12112,7 +12112,7 @@
           </p:nvSpPr>
           <p:spPr>
             <a:xfrm>
-              <a:off x="5048787" y="3597680"/>
+              <a:off x="5010195" y="3594531"/>
               <a:ext cx="75116" cy="75116"/>
             </a:xfrm>
             <a:prstGeom prst="ellipse">
@@ -12138,7 +12138,7 @@
           </p:nvSpPr>
           <p:spPr>
             <a:xfrm>
-              <a:off x="5251996" y="3885839"/>
+              <a:off x="5028201" y="3883788"/>
               <a:ext cx="75116" cy="75116"/>
             </a:xfrm>
             <a:prstGeom prst="ellipse">
@@ -12164,7 +12164,7 @@
           </p:nvSpPr>
           <p:spPr>
             <a:xfrm>
-              <a:off x="5216164" y="4140663"/>
+              <a:off x="4984848" y="4140843"/>
               <a:ext cx="75116" cy="75116"/>
             </a:xfrm>
             <a:prstGeom prst="ellipse">
@@ -12190,7 +12190,7 @@
           </p:nvSpPr>
           <p:spPr>
             <a:xfrm>
-              <a:off x="6037342" y="3875592"/>
+              <a:off x="5803429" y="3873673"/>
               <a:ext cx="75116" cy="75116"/>
             </a:xfrm>
             <a:prstGeom prst="ellipse">
@@ -12216,7 +12216,7 @@
           </p:nvSpPr>
           <p:spPr>
             <a:xfrm>
-              <a:off x="5865674" y="3933700"/>
+              <a:off x="5883578" y="3933766"/>
               <a:ext cx="75116" cy="75116"/>
             </a:xfrm>
             <a:prstGeom prst="ellipse">
@@ -12242,7 +12242,7 @@
           </p:nvSpPr>
           <p:spPr>
             <a:xfrm>
-              <a:off x="5793276" y="3912633"/>
+              <a:off x="6038830" y="3910834"/>
               <a:ext cx="75116" cy="75116"/>
             </a:xfrm>
             <a:prstGeom prst="ellipse">
@@ -12268,7 +12268,7 @@
           </p:nvSpPr>
           <p:spPr>
             <a:xfrm>
-              <a:off x="5694867" y="3962594"/>
+              <a:off x="5773563" y="3961157"/>
               <a:ext cx="75116" cy="75116"/>
             </a:xfrm>
             <a:prstGeom prst="ellipse">
@@ -12294,7 +12294,7 @@
           </p:nvSpPr>
           <p:spPr>
             <a:xfrm>
-              <a:off x="5963392" y="3184273"/>
+              <a:off x="5755552" y="3181315"/>
               <a:ext cx="75116" cy="75116"/>
             </a:xfrm>
             <a:prstGeom prst="ellipse">
@@ -12320,7 +12320,7 @@
           </p:nvSpPr>
           <p:spPr>
             <a:xfrm>
-              <a:off x="5668884" y="3222770"/>
+              <a:off x="5832562" y="3223283"/>
               <a:ext cx="75116" cy="75116"/>
             </a:xfrm>
             <a:prstGeom prst="ellipse">
@@ -12346,7 +12346,7 @@
           </p:nvSpPr>
           <p:spPr>
             <a:xfrm>
-              <a:off x="5835459" y="3718713"/>
+              <a:off x="6039439" y="3716366"/>
               <a:ext cx="75116" cy="75116"/>
             </a:xfrm>
             <a:prstGeom prst="ellipse">
@@ -12372,7 +12372,7 @@
           </p:nvSpPr>
           <p:spPr>
             <a:xfrm>
-              <a:off x="5672190" y="3864878"/>
+              <a:off x="5693467" y="3867216"/>
               <a:ext cx="75116" cy="75116"/>
             </a:xfrm>
             <a:prstGeom prst="ellipse">
@@ -12398,7 +12398,7 @@
           </p:nvSpPr>
           <p:spPr>
             <a:xfrm>
-              <a:off x="5816584" y="3973024"/>
+              <a:off x="5655832" y="3972787"/>
               <a:ext cx="75116" cy="75116"/>
             </a:xfrm>
             <a:prstGeom prst="ellipse">
@@ -12424,7 +12424,7 @@
           </p:nvSpPr>
           <p:spPr>
             <a:xfrm>
-              <a:off x="6007801" y="3687408"/>
+              <a:off x="5702822" y="3684641"/>
               <a:ext cx="75116" cy="75116"/>
             </a:xfrm>
             <a:prstGeom prst="ellipse">
@@ -12450,7 +12450,7 @@
           </p:nvSpPr>
           <p:spPr>
             <a:xfrm>
-              <a:off x="5924783" y="3493458"/>
+              <a:off x="5909273" y="3493287"/>
               <a:ext cx="75116" cy="75116"/>
             </a:xfrm>
             <a:prstGeom prst="ellipse">
@@ -12476,7 +12476,7 @@
           </p:nvSpPr>
           <p:spPr>
             <a:xfrm>
-              <a:off x="5883852" y="4024055"/>
+              <a:off x="5761187" y="4024316"/>
               <a:ext cx="75116" cy="75116"/>
             </a:xfrm>
             <a:prstGeom prst="ellipse">
@@ -12502,7 +12502,7 @@
           </p:nvSpPr>
           <p:spPr>
             <a:xfrm>
-              <a:off x="5724869" y="3348068"/>
+              <a:off x="5991709" y="3348365"/>
               <a:ext cx="75116" cy="75116"/>
             </a:xfrm>
             <a:prstGeom prst="ellipse">
@@ -12528,7 +12528,7 @@
           </p:nvSpPr>
           <p:spPr>
             <a:xfrm>
-              <a:off x="5768876" y="3670324"/>
+              <a:off x="5840091" y="3667109"/>
               <a:ext cx="75116" cy="75116"/>
             </a:xfrm>
             <a:prstGeom prst="ellipse">
@@ -12554,7 +12554,7 @@
           </p:nvSpPr>
           <p:spPr>
             <a:xfrm>
-              <a:off x="5829032" y="3723593"/>
+              <a:off x="6020107" y="3720626"/>
               <a:ext cx="75116" cy="75116"/>
             </a:xfrm>
             <a:prstGeom prst="ellipse">
@@ -12580,7 +12580,7 @@
           </p:nvSpPr>
           <p:spPr>
             <a:xfrm>
-              <a:off x="5798928" y="3966612"/>
+              <a:off x="5761323" y="3964058"/>
               <a:ext cx="75116" cy="75116"/>
             </a:xfrm>
             <a:prstGeom prst="ellipse">
@@ -12606,7 +12606,7 @@
           </p:nvSpPr>
           <p:spPr>
             <a:xfrm>
-              <a:off x="5789450" y="3495234"/>
+              <a:off x="5815297" y="3492226"/>
               <a:ext cx="75116" cy="75116"/>
             </a:xfrm>
             <a:prstGeom prst="ellipse">
@@ -12632,7 +12632,7 @@
           </p:nvSpPr>
           <p:spPr>
             <a:xfrm>
-              <a:off x="5990138" y="3709924"/>
+              <a:off x="6023590" y="3707747"/>
               <a:ext cx="75116" cy="75116"/>
             </a:xfrm>
             <a:prstGeom prst="ellipse">
@@ -12658,7 +12658,7 @@
           </p:nvSpPr>
           <p:spPr>
             <a:xfrm>
-              <a:off x="5876504" y="3469808"/>
+              <a:off x="5802206" y="3470956"/>
               <a:ext cx="75116" cy="75116"/>
             </a:xfrm>
             <a:prstGeom prst="ellipse">
@@ -12684,7 +12684,7 @@
           </p:nvSpPr>
           <p:spPr>
             <a:xfrm>
-              <a:off x="5894783" y="3682819"/>
+              <a:off x="5665180" y="3681479"/>
               <a:ext cx="75116" cy="75116"/>
             </a:xfrm>
             <a:prstGeom prst="ellipse">
@@ -12710,7 +12710,7 @@
           </p:nvSpPr>
           <p:spPr>
             <a:xfrm>
-              <a:off x="6663283" y="3824818"/>
+              <a:off x="6435267" y="3824388"/>
               <a:ext cx="75116" cy="75116"/>
             </a:xfrm>
             <a:prstGeom prst="ellipse">
@@ -12736,7 +12736,7 @@
           </p:nvSpPr>
           <p:spPr>
             <a:xfrm>
-              <a:off x="6379895" y="3910073"/>
+              <a:off x="6481418" y="3910196"/>
               <a:ext cx="75116" cy="75116"/>
             </a:xfrm>
             <a:prstGeom prst="ellipse">
@@ -12762,7 +12762,7 @@
           </p:nvSpPr>
           <p:spPr>
             <a:xfrm>
-              <a:off x="6466011" y="3697031"/>
+              <a:off x="6768059" y="3694941"/>
               <a:ext cx="75116" cy="75116"/>
             </a:xfrm>
             <a:prstGeom prst="ellipse">
@@ -12788,7 +12788,7 @@
           </p:nvSpPr>
           <p:spPr>
             <a:xfrm>
-              <a:off x="6415823" y="3504164"/>
+              <a:off x="6770769" y="3502493"/>
               <a:ext cx="75116" cy="75116"/>
             </a:xfrm>
             <a:prstGeom prst="ellipse">
@@ -12814,7 +12814,7 @@
           </p:nvSpPr>
           <p:spPr>
             <a:xfrm>
-              <a:off x="6654313" y="3672254"/>
+              <a:off x="6518319" y="3672544"/>
               <a:ext cx="75116" cy="75116"/>
             </a:xfrm>
             <a:prstGeom prst="ellipse">
@@ -12840,7 +12840,7 @@
           </p:nvSpPr>
           <p:spPr>
             <a:xfrm>
-              <a:off x="6497206" y="3708021"/>
+              <a:off x="6752236" y="3709369"/>
               <a:ext cx="75116" cy="75116"/>
             </a:xfrm>
             <a:prstGeom prst="ellipse">
@@ -12866,7 +12866,7 @@
           </p:nvSpPr>
           <p:spPr>
             <a:xfrm>
-              <a:off x="6674322" y="3839941"/>
+              <a:off x="6397121" y="3839362"/>
               <a:ext cx="75116" cy="75116"/>
             </a:xfrm>
             <a:prstGeom prst="ellipse">
@@ -12892,7 +12892,7 @@
           </p:nvSpPr>
           <p:spPr>
             <a:xfrm>
-              <a:off x="6619609" y="3745370"/>
+              <a:off x="6660462" y="3744456"/>
               <a:ext cx="75116" cy="75116"/>
             </a:xfrm>
             <a:prstGeom prst="ellipse">
@@ -12918,7 +12918,7 @@
           </p:nvSpPr>
           <p:spPr>
             <a:xfrm>
-              <a:off x="6407695" y="3840189"/>
+              <a:off x="6515165" y="3838044"/>
               <a:ext cx="75116" cy="75116"/>
             </a:xfrm>
             <a:prstGeom prst="ellipse">
@@ -12944,7 +12944,7 @@
           </p:nvSpPr>
           <p:spPr>
             <a:xfrm>
-              <a:off x="6408320" y="3764178"/>
+              <a:off x="6713244" y="3760776"/>
               <a:ext cx="75116" cy="75116"/>
             </a:xfrm>
             <a:prstGeom prst="ellipse">
@@ -12970,7 +12970,7 @@
           </p:nvSpPr>
           <p:spPr>
             <a:xfrm>
-              <a:off x="6692015" y="3538063"/>
+              <a:off x="6641202" y="3538574"/>
               <a:ext cx="75116" cy="75116"/>
             </a:xfrm>
             <a:prstGeom prst="ellipse">
@@ -12996,7 +12996,7 @@
           </p:nvSpPr>
           <p:spPr>
             <a:xfrm>
-              <a:off x="6549663" y="3276115"/>
+              <a:off x="6640426" y="3275828"/>
               <a:ext cx="75116" cy="75116"/>
             </a:xfrm>
             <a:prstGeom prst="ellipse">
@@ -13022,7 +13022,7 @@
           </p:nvSpPr>
           <p:spPr>
             <a:xfrm>
-              <a:off x="6480467" y="3851592"/>
+              <a:off x="6629172" y="3851479"/>
               <a:ext cx="75116" cy="75116"/>
             </a:xfrm>
             <a:prstGeom prst="ellipse">
@@ -13048,7 +13048,7 @@
           </p:nvSpPr>
           <p:spPr>
             <a:xfrm>
-              <a:off x="6432934" y="3996937"/>
+              <a:off x="6526202" y="3996513"/>
               <a:ext cx="75116" cy="75116"/>
             </a:xfrm>
             <a:prstGeom prst="ellipse">
@@ -13074,7 +13074,7 @@
           </p:nvSpPr>
           <p:spPr>
             <a:xfrm>
-              <a:off x="6516923" y="3965909"/>
+              <a:off x="6473552" y="3963487"/>
               <a:ext cx="75116" cy="75116"/>
             </a:xfrm>
             <a:prstGeom prst="ellipse">
@@ -13100,7 +13100,7 @@
           </p:nvSpPr>
           <p:spPr>
             <a:xfrm>
-              <a:off x="6770776" y="3741848"/>
+              <a:off x="6588316" y="3738096"/>
               <a:ext cx="75116" cy="75116"/>
             </a:xfrm>
             <a:prstGeom prst="ellipse">
@@ -13126,7 +13126,7 @@
           </p:nvSpPr>
           <p:spPr>
             <a:xfrm>
-              <a:off x="6622575" y="3905894"/>
+              <a:off x="6706922" y="3905938"/>
               <a:ext cx="75116" cy="75116"/>
             </a:xfrm>
             <a:prstGeom prst="ellipse">
@@ -13152,7 +13152,7 @@
           </p:nvSpPr>
           <p:spPr>
             <a:xfrm>
-              <a:off x="6668781" y="3809483"/>
+              <a:off x="6675008" y="3805775"/>
               <a:ext cx="75116" cy="75116"/>
             </a:xfrm>
             <a:prstGeom prst="ellipse">
@@ -13178,7 +13178,7 @@
           </p:nvSpPr>
           <p:spPr>
             <a:xfrm>
-              <a:off x="6439304" y="3350394"/>
+              <a:off x="6433325" y="3347679"/>
               <a:ext cx="75116" cy="75116"/>
             </a:xfrm>
             <a:prstGeom prst="ellipse">
@@ -13204,7 +13204,7 @@
           </p:nvSpPr>
           <p:spPr>
             <a:xfrm>
-              <a:off x="6597429" y="3651232"/>
+              <a:off x="6536395" y="3650961"/>
               <a:ext cx="75116" cy="75116"/>
             </a:xfrm>
             <a:prstGeom prst="ellipse">
@@ -13230,7 +13230,7 @@
           </p:nvSpPr>
           <p:spPr>
             <a:xfrm>
-              <a:off x="6649874" y="3732917"/>
+              <a:off x="6615897" y="3730884"/>
               <a:ext cx="75116" cy="75116"/>
             </a:xfrm>
             <a:prstGeom prst="ellipse">
@@ -13256,7 +13256,7 @@
           </p:nvSpPr>
           <p:spPr>
             <a:xfrm>
-              <a:off x="6652300" y="3682478"/>
+              <a:off x="6561717" y="3683010"/>
               <a:ext cx="75116" cy="75116"/>
             </a:xfrm>
             <a:prstGeom prst="ellipse">
@@ -13282,7 +13282,7 @@
           </p:nvSpPr>
           <p:spPr>
             <a:xfrm>
-              <a:off x="6468347" y="3961698"/>
+              <a:off x="6482793" y="3959507"/>
               <a:ext cx="75116" cy="75116"/>
             </a:xfrm>
             <a:prstGeom prst="ellipse">
@@ -13308,7 +13308,7 @@
           </p:nvSpPr>
           <p:spPr>
             <a:xfrm>
-              <a:off x="6387010" y="3642233"/>
+              <a:off x="6647347" y="3639113"/>
               <a:ext cx="75116" cy="75116"/>
             </a:xfrm>
             <a:prstGeom prst="ellipse">
@@ -13334,42 +13334,42 @@
           </p:nvSpPr>
           <p:spPr>
             <a:xfrm>
-              <a:off x="4483602" y="3559849"/>
-              <a:ext cx="2132930" cy="334961"/>
+              <a:off x="4469739" y="3558751"/>
+              <a:ext cx="2135625" cy="335038"/>
             </a:xfrm>
             <a:custGeom>
               <a:avLst/>
               <a:pathLst>
-                <a:path w="2132930" h="334961">
+                <a:path w="2135625" h="335038">
                   <a:moveTo>
                     <a:pt x="0" y="0"/>
                   </a:moveTo>
                   <a:lnTo>
-                    <a:pt x="1126871" y="97731"/>
+                    <a:pt x="1128295" y="97754"/>
                   </a:lnTo>
                   <a:lnTo>
-                    <a:pt x="1421953" y="111951"/>
+                    <a:pt x="1423750" y="111976"/>
                   </a:lnTo>
                   <a:lnTo>
-                    <a:pt x="1837848" y="122380"/>
+                    <a:pt x="1840170" y="122408"/>
                   </a:lnTo>
                   <a:lnTo>
-                    <a:pt x="2132930" y="124430"/>
+                    <a:pt x="2135625" y="124459"/>
                   </a:lnTo>
                   <a:lnTo>
-                    <a:pt x="2132930" y="334961"/>
+                    <a:pt x="2135625" y="335038"/>
                   </a:lnTo>
                   <a:lnTo>
-                    <a:pt x="1837848" y="308802"/>
+                    <a:pt x="1840170" y="308873"/>
                   </a:lnTo>
                   <a:lnTo>
-                    <a:pt x="1421953" y="279472"/>
+                    <a:pt x="1423750" y="279536"/>
                   </a:lnTo>
                   <a:lnTo>
-                    <a:pt x="1126871" y="265481"/>
+                    <a:pt x="1128295" y="265542"/>
                   </a:lnTo>
                   <a:lnTo>
-                    <a:pt x="0" y="255485"/>
+                    <a:pt x="0" y="255544"/>
                   </a:lnTo>
                   <a:close/>
                 </a:path>
@@ -13395,27 +13395,27 @@
           </p:nvSpPr>
           <p:spPr>
             <a:xfrm>
-              <a:off x="4483602" y="3559849"/>
-              <a:ext cx="2132930" cy="124430"/>
+              <a:off x="4469739" y="3558751"/>
+              <a:ext cx="2135625" cy="124459"/>
             </a:xfrm>
             <a:custGeom>
               <a:avLst/>
               <a:pathLst>
-                <a:path w="2132930" h="124430">
+                <a:path w="2135625" h="124459">
                   <a:moveTo>
                     <a:pt x="0" y="0"/>
                   </a:moveTo>
                   <a:lnTo>
-                    <a:pt x="1126871" y="97731"/>
+                    <a:pt x="1128295" y="97754"/>
                   </a:lnTo>
                   <a:lnTo>
-                    <a:pt x="1421953" y="111951"/>
+                    <a:pt x="1423750" y="111976"/>
                   </a:lnTo>
                   <a:lnTo>
-                    <a:pt x="1837848" y="122380"/>
+                    <a:pt x="1840170" y="122408"/>
                   </a:lnTo>
                   <a:lnTo>
-                    <a:pt x="2132930" y="124430"/>
+                    <a:pt x="2135625" y="124459"/>
                   </a:lnTo>
                 </a:path>
               </a:pathLst>
@@ -13435,24 +13435,24 @@
           </p:nvSpPr>
           <p:spPr>
             <a:xfrm>
-              <a:off x="4483602" y="3815335"/>
-              <a:ext cx="2132930" cy="79476"/>
+              <a:off x="4469739" y="3814295"/>
+              <a:ext cx="2135625" cy="79494"/>
             </a:xfrm>
             <a:custGeom>
               <a:avLst/>
               <a:pathLst>
-                <a:path w="2132930" h="79476">
+                <a:path w="2135625" h="79494">
                   <a:moveTo>
-                    <a:pt x="2132930" y="79476"/>
+                    <a:pt x="2135625" y="79494"/>
                   </a:moveTo>
                   <a:lnTo>
-                    <a:pt x="1837848" y="53316"/>
+                    <a:pt x="1840170" y="53329"/>
                   </a:lnTo>
                   <a:lnTo>
-                    <a:pt x="1421953" y="23986"/>
+                    <a:pt x="1423750" y="23992"/>
                   </a:lnTo>
                   <a:lnTo>
-                    <a:pt x="1126871" y="9996"/>
+                    <a:pt x="1128295" y="9998"/>
                   </a:lnTo>
                   <a:lnTo>
                     <a:pt x="0" y="0"/>
@@ -13475,27 +13475,27 @@
           </p:nvSpPr>
           <p:spPr>
             <a:xfrm>
-              <a:off x="4483602" y="3687592"/>
-              <a:ext cx="2132930" cy="101953"/>
+              <a:off x="4469739" y="3686523"/>
+              <a:ext cx="2135625" cy="101976"/>
             </a:xfrm>
             <a:custGeom>
               <a:avLst/>
               <a:pathLst>
-                <a:path w="2132930" h="101953">
+                <a:path w="2135625" h="101976">
                   <a:moveTo>
                     <a:pt x="0" y="0"/>
                   </a:moveTo>
                   <a:lnTo>
-                    <a:pt x="1126871" y="53864"/>
+                    <a:pt x="1128295" y="53876"/>
                   </a:lnTo>
                   <a:lnTo>
-                    <a:pt x="1421953" y="67968"/>
+                    <a:pt x="1423750" y="67984"/>
                   </a:lnTo>
                   <a:lnTo>
-                    <a:pt x="1837848" y="87848"/>
+                    <a:pt x="1840170" y="87868"/>
                   </a:lnTo>
                   <a:lnTo>
-                    <a:pt x="2132930" y="101953"/>
+                    <a:pt x="2135625" y="101976"/>
                   </a:lnTo>
                 </a:path>
               </a:pathLst>
@@ -13524,7 +13524,7 @@
           </p:nvSpPr>
           <p:spPr>
             <a:xfrm>
-              <a:off x="6136838" y="3035751"/>
+              <a:off x="6125671" y="3034561"/>
               <a:ext cx="479694" cy="82021"/>
             </a:xfrm>
             <a:prstGeom prst="rect">
@@ -13570,8 +13570,8 @@
           </p:nvSpPr>
           <p:spPr>
             <a:xfrm>
-              <a:off x="4186587" y="2875097"/>
-              <a:ext cx="2746591" cy="1359782"/>
+              <a:off x="4186450" y="2875189"/>
+              <a:ext cx="2746729" cy="1359873"/>
             </a:xfrm>
             <a:prstGeom prst="rect">
               <a:avLst/>
@@ -13591,15 +13591,15 @@
           </p:nvSpPr>
           <p:spPr>
             <a:xfrm>
-              <a:off x="4186587" y="2875097"/>
-              <a:ext cx="0" cy="1359782"/>
+              <a:off x="4186450" y="2875189"/>
+              <a:ext cx="0" cy="1359873"/>
             </a:xfrm>
             <a:custGeom>
               <a:avLst/>
               <a:pathLst>
-                <a:path w="0" h="1359782">
+                <a:path w="0" h="1359873">
                   <a:moveTo>
-                    <a:pt x="0" y="1359782"/>
+                    <a:pt x="0" y="1359873"/>
                   </a:moveTo>
                   <a:lnTo>
                     <a:pt x="0" y="0"/>
@@ -13631,7 +13631,7 @@
           </p:nvSpPr>
           <p:spPr>
             <a:xfrm>
-              <a:off x="4158119" y="4070649"/>
+              <a:off x="4157982" y="4069668"/>
               <a:ext cx="28468" cy="0"/>
             </a:xfrm>
             <a:custGeom>
@@ -13671,7 +13671,7 @@
           </p:nvSpPr>
           <p:spPr>
             <a:xfrm>
-              <a:off x="4158119" y="3839174"/>
+              <a:off x="4157982" y="3838139"/>
               <a:ext cx="28468" cy="0"/>
             </a:xfrm>
             <a:custGeom>
@@ -13711,7 +13711,7 @@
           </p:nvSpPr>
           <p:spPr>
             <a:xfrm>
-              <a:off x="4158119" y="3607698"/>
+              <a:off x="4157982" y="3606611"/>
               <a:ext cx="28468" cy="0"/>
             </a:xfrm>
             <a:custGeom>
@@ -13751,7 +13751,7 @@
           </p:nvSpPr>
           <p:spPr>
             <a:xfrm>
-              <a:off x="4158119" y="3376223"/>
+              <a:off x="4157982" y="3375083"/>
               <a:ext cx="28468" cy="0"/>
             </a:xfrm>
             <a:custGeom>
@@ -13791,7 +13791,7 @@
           </p:nvSpPr>
           <p:spPr>
             <a:xfrm>
-              <a:off x="4158119" y="3144748"/>
+              <a:off x="4157982" y="3143554"/>
               <a:ext cx="28468" cy="0"/>
             </a:xfrm>
             <a:custGeom>
@@ -13831,7 +13831,7 @@
           </p:nvSpPr>
           <p:spPr>
             <a:xfrm>
-              <a:off x="4158119" y="2913273"/>
+              <a:off x="4157982" y="2912026"/>
               <a:ext cx="28468" cy="0"/>
             </a:xfrm>
             <a:custGeom>
@@ -13871,18 +13871,18 @@
           </p:nvSpPr>
           <p:spPr>
             <a:xfrm>
-              <a:off x="4186587" y="4234879"/>
-              <a:ext cx="2746591" cy="0"/>
+              <a:off x="4186450" y="4235062"/>
+              <a:ext cx="2746729" cy="0"/>
             </a:xfrm>
             <a:custGeom>
               <a:avLst/>
               <a:pathLst>
-                <a:path w="2746591" h="0">
+                <a:path w="2746729" h="0">
                   <a:moveTo>
                     <a:pt x="0" y="0"/>
                   </a:moveTo>
                   <a:lnTo>
-                    <a:pt x="2746591" y="0"/>
+                    <a:pt x="2746729" y="0"/>
                   </a:lnTo>
                 </a:path>
               </a:pathLst>
@@ -13911,7 +13911,7 @@
           </p:nvSpPr>
           <p:spPr>
             <a:xfrm>
-              <a:off x="4483602" y="4234879"/>
+              <a:off x="4469739" y="4235062"/>
               <a:ext cx="0" cy="28468"/>
             </a:xfrm>
             <a:custGeom>
@@ -13951,7 +13951,7 @@
           </p:nvSpPr>
           <p:spPr>
             <a:xfrm>
-              <a:off x="5194579" y="4234879"/>
+              <a:off x="5181614" y="4235062"/>
               <a:ext cx="0" cy="28468"/>
             </a:xfrm>
             <a:custGeom>
@@ -13991,7 +13991,7 @@
           </p:nvSpPr>
           <p:spPr>
             <a:xfrm>
-              <a:off x="5905555" y="4234879"/>
+              <a:off x="5893490" y="4235062"/>
               <a:ext cx="0" cy="28468"/>
             </a:xfrm>
             <a:custGeom>
@@ -14031,7 +14031,7 @@
           </p:nvSpPr>
           <p:spPr>
             <a:xfrm>
-              <a:off x="6616532" y="4234879"/>
+              <a:off x="6605365" y="4235062"/>
               <a:ext cx="0" cy="28468"/>
             </a:xfrm>
             <a:custGeom>
@@ -14071,7 +14071,7 @@
           </p:nvSpPr>
           <p:spPr>
             <a:xfrm>
-              <a:off x="4455347" y="4286122"/>
+              <a:off x="4441484" y="4286305"/>
               <a:ext cx="56509" cy="72877"/>
             </a:xfrm>
             <a:prstGeom prst="rect">
@@ -14117,7 +14117,7 @@
           </p:nvSpPr>
           <p:spPr>
             <a:xfrm>
-              <a:off x="5166324" y="4286122"/>
+              <a:off x="5153359" y="4286305"/>
               <a:ext cx="56509" cy="72877"/>
             </a:xfrm>
             <a:prstGeom prst="rect">
@@ -14163,7 +14163,7 @@
           </p:nvSpPr>
           <p:spPr>
             <a:xfrm>
-              <a:off x="5877300" y="4286122"/>
+              <a:off x="5865235" y="4286305"/>
               <a:ext cx="56509" cy="72877"/>
             </a:xfrm>
             <a:prstGeom prst="rect">
@@ -14209,7 +14209,7 @@
           </p:nvSpPr>
           <p:spPr>
             <a:xfrm>
-              <a:off x="6588277" y="4286122"/>
+              <a:off x="6577110" y="4286305"/>
               <a:ext cx="56509" cy="72877"/>
             </a:xfrm>
             <a:prstGeom prst="rect">
@@ -14255,7 +14255,7 @@
           </p:nvSpPr>
           <p:spPr>
             <a:xfrm>
-              <a:off x="4186587" y="2698557"/>
+              <a:off x="4186450" y="2698649"/>
               <a:ext cx="889254" cy="91440"/>
             </a:xfrm>
             <a:prstGeom prst="rect">
@@ -14301,8 +14301,8 @@
           </p:nvSpPr>
           <p:spPr>
             <a:xfrm>
-              <a:off x="1310306" y="4608644"/>
-              <a:ext cx="2746591" cy="1359782"/>
+              <a:off x="1310032" y="4608827"/>
+              <a:ext cx="2746729" cy="1359873"/>
             </a:xfrm>
             <a:prstGeom prst="rect">
               <a:avLst/>
@@ -14327,7 +14327,7 @@
           </p:nvSpPr>
           <p:spPr>
             <a:xfrm>
-              <a:off x="1498410" y="5491185"/>
+              <a:off x="1430046" y="5492452"/>
               <a:ext cx="75116" cy="75116"/>
             </a:xfrm>
             <a:prstGeom prst="ellipse">
@@ -14353,7 +14353,7 @@
           </p:nvSpPr>
           <p:spPr>
             <a:xfrm>
-              <a:off x="1397593" y="5371527"/>
+              <a:off x="1397325" y="5373704"/>
               <a:ext cx="75116" cy="75116"/>
             </a:xfrm>
             <a:prstGeom prst="ellipse">
@@ -14379,7 +14379,7 @@
           </p:nvSpPr>
           <p:spPr>
             <a:xfrm>
-              <a:off x="1752503" y="5443709"/>
+              <a:off x="1621999" y="5446603"/>
               <a:ext cx="75116" cy="75116"/>
             </a:xfrm>
             <a:prstGeom prst="ellipse">
@@ -14405,7 +14405,7 @@
           </p:nvSpPr>
           <p:spPr>
             <a:xfrm>
-              <a:off x="1606567" y="5607878"/>
+              <a:off x="1451314" y="5609643"/>
               <a:ext cx="75116" cy="75116"/>
             </a:xfrm>
             <a:prstGeom prst="ellipse">
@@ -14431,7 +14431,7 @@
           </p:nvSpPr>
           <p:spPr>
             <a:xfrm>
-              <a:off x="1741526" y="5751832"/>
+              <a:off x="1776079" y="5754582"/>
               <a:ext cx="75116" cy="75116"/>
             </a:xfrm>
             <a:prstGeom prst="ellipse">
@@ -14457,7 +14457,7 @@
           </p:nvSpPr>
           <p:spPr>
             <a:xfrm>
-              <a:off x="1454106" y="5464622"/>
+              <a:off x="1471575" y="5467345"/>
               <a:ext cx="75116" cy="75116"/>
             </a:xfrm>
             <a:prstGeom prst="ellipse">
@@ -14483,7 +14483,7 @@
           </p:nvSpPr>
           <p:spPr>
             <a:xfrm>
-              <a:off x="1530389" y="5578538"/>
+              <a:off x="1759274" y="5580966"/>
               <a:ext cx="75116" cy="75116"/>
             </a:xfrm>
             <a:prstGeom prst="ellipse">
@@ -14509,7 +14509,7 @@
           </p:nvSpPr>
           <p:spPr>
             <a:xfrm>
-              <a:off x="1474526" y="5612234"/>
+              <a:off x="1410722" y="5612982"/>
               <a:ext cx="75116" cy="75116"/>
             </a:xfrm>
             <a:prstGeom prst="ellipse">
@@ -14535,7 +14535,7 @@
           </p:nvSpPr>
           <p:spPr>
             <a:xfrm>
-              <a:off x="1637047" y="5700578"/>
+              <a:off x="1660481" y="5702534"/>
               <a:ext cx="75116" cy="75116"/>
             </a:xfrm>
             <a:prstGeom prst="ellipse">
@@ -14561,7 +14561,7 @@
           </p:nvSpPr>
           <p:spPr>
             <a:xfrm>
-              <a:off x="1637086" y="5426094"/>
+              <a:off x="1790331" y="5429993"/>
               <a:ext cx="75116" cy="75116"/>
             </a:xfrm>
             <a:prstGeom prst="ellipse">
@@ -14587,7 +14587,7 @@
           </p:nvSpPr>
           <p:spPr>
             <a:xfrm>
-              <a:off x="2391073" y="5591335"/>
+              <a:off x="2117746" y="5591499"/>
               <a:ext cx="75116" cy="75116"/>
             </a:xfrm>
             <a:prstGeom prst="ellipse">
@@ -14613,7 +14613,7 @@
           </p:nvSpPr>
           <p:spPr>
             <a:xfrm>
-              <a:off x="2416624" y="4938448"/>
+              <a:off x="2348441" y="4937726"/>
               <a:ext cx="75116" cy="75116"/>
             </a:xfrm>
             <a:prstGeom prst="ellipse">
@@ -14639,7 +14639,7 @@
           </p:nvSpPr>
           <p:spPr>
             <a:xfrm>
-              <a:off x="2240221" y="5074970"/>
+              <a:off x="2201701" y="5072785"/>
               <a:ext cx="75116" cy="75116"/>
             </a:xfrm>
             <a:prstGeom prst="ellipse">
@@ -14665,7 +14665,7 @@
           </p:nvSpPr>
           <p:spPr>
             <a:xfrm>
-              <a:off x="2429536" y="5288143"/>
+              <a:off x="2397413" y="5289952"/>
               <a:ext cx="75116" cy="75116"/>
             </a:xfrm>
             <a:prstGeom prst="ellipse">
@@ -14691,7 +14691,7 @@
           </p:nvSpPr>
           <p:spPr>
             <a:xfrm>
-              <a:off x="2492016" y="5409996"/>
+              <a:off x="2242783" y="5413016"/>
               <a:ext cx="75116" cy="75116"/>
             </a:xfrm>
             <a:prstGeom prst="ellipse">
@@ -14717,7 +14717,7 @@
           </p:nvSpPr>
           <p:spPr>
             <a:xfrm>
-              <a:off x="2220334" y="5874211"/>
+              <a:off x="2360978" y="5874481"/>
               <a:ext cx="75116" cy="75116"/>
             </a:xfrm>
             <a:prstGeom prst="ellipse">
@@ -14743,7 +14743,7 @@
           </p:nvSpPr>
           <p:spPr>
             <a:xfrm>
-              <a:off x="2325464" y="5628482"/>
+              <a:off x="2417126" y="5630179"/>
               <a:ext cx="75116" cy="75116"/>
             </a:xfrm>
             <a:prstGeom prst="ellipse">
@@ -14769,7 +14769,7 @@
           </p:nvSpPr>
           <p:spPr>
             <a:xfrm>
-              <a:off x="2265905" y="5245833"/>
+              <a:off x="2477371" y="5248575"/>
               <a:ext cx="75116" cy="75116"/>
             </a:xfrm>
             <a:prstGeom prst="ellipse">
@@ -14795,7 +14795,7 @@
           </p:nvSpPr>
           <p:spPr>
             <a:xfrm>
-              <a:off x="2246095" y="4817701"/>
+              <a:off x="2204747" y="4816648"/>
               <a:ext cx="75116" cy="75116"/>
             </a:xfrm>
             <a:prstGeom prst="ellipse">
@@ -14821,7 +14821,7 @@
           </p:nvSpPr>
           <p:spPr>
             <a:xfrm>
-              <a:off x="2191108" y="4741059"/>
+              <a:off x="2158360" y="4741253"/>
               <a:ext cx="75116" cy="75116"/>
             </a:xfrm>
             <a:prstGeom prst="ellipse">
@@ -14847,7 +14847,7 @@
           </p:nvSpPr>
           <p:spPr>
             <a:xfrm>
-              <a:off x="2459133" y="5487890"/>
+              <a:off x="2323624" y="5486573"/>
               <a:ext cx="75116" cy="75116"/>
             </a:xfrm>
             <a:prstGeom prst="ellipse">
@@ -14873,7 +14873,7 @@
           </p:nvSpPr>
           <p:spPr>
             <a:xfrm>
-              <a:off x="2327242" y="5230212"/>
+              <a:off x="2179727" y="5230265"/>
               <a:ext cx="75116" cy="75116"/>
             </a:xfrm>
             <a:prstGeom prst="ellipse">
@@ -14899,7 +14899,7 @@
           </p:nvSpPr>
           <p:spPr>
             <a:xfrm>
-              <a:off x="2262533" y="5050266"/>
+              <a:off x="2437790" y="5048360"/>
               <a:ext cx="75116" cy="75116"/>
             </a:xfrm>
             <a:prstGeom prst="ellipse">
@@ -14925,7 +14925,7 @@
           </p:nvSpPr>
           <p:spPr>
             <a:xfrm>
-              <a:off x="2471795" y="5171797"/>
+              <a:off x="2344738" y="5172095"/>
               <a:ext cx="75116" cy="75116"/>
             </a:xfrm>
             <a:prstGeom prst="ellipse">
@@ -14951,7 +14951,7 @@
           </p:nvSpPr>
           <p:spPr>
             <a:xfrm>
-              <a:off x="2350464" y="5623672"/>
+              <a:off x="2408163" y="5627995"/>
               <a:ext cx="75116" cy="75116"/>
             </a:xfrm>
             <a:prstGeom prst="ellipse">
@@ -14977,7 +14977,7 @@
           </p:nvSpPr>
           <p:spPr>
             <a:xfrm>
-              <a:off x="2445941" y="5573784"/>
+              <a:off x="2499922" y="5576499"/>
               <a:ext cx="75116" cy="75116"/>
             </a:xfrm>
             <a:prstGeom prst="ellipse">
@@ -15003,7 +15003,7 @@
           </p:nvSpPr>
           <p:spPr>
             <a:xfrm>
-              <a:off x="2440076" y="5091953"/>
+              <a:off x="2250368" y="5091998"/>
               <a:ext cx="75116" cy="75116"/>
             </a:xfrm>
             <a:prstGeom prst="ellipse">
@@ -15029,7 +15029,7 @@
           </p:nvSpPr>
           <p:spPr>
             <a:xfrm>
-              <a:off x="2369313" y="5134670"/>
+              <a:off x="2164369" y="5131612"/>
               <a:ext cx="75116" cy="75116"/>
             </a:xfrm>
             <a:prstGeom prst="ellipse">
@@ -15055,7 +15055,7 @@
           </p:nvSpPr>
           <p:spPr>
             <a:xfrm>
-              <a:off x="2933932" y="5663831"/>
+              <a:off x="2798715" y="5665796"/>
               <a:ext cx="75116" cy="75116"/>
             </a:xfrm>
             <a:prstGeom prst="ellipse">
@@ -15081,7 +15081,7 @@
           </p:nvSpPr>
           <p:spPr>
             <a:xfrm>
-              <a:off x="3199822" y="5389334"/>
+              <a:off x="3102267" y="5390186"/>
               <a:ext cx="75116" cy="75116"/>
             </a:xfrm>
             <a:prstGeom prst="ellipse">
@@ -15107,7 +15107,7 @@
           </p:nvSpPr>
           <p:spPr>
             <a:xfrm>
-              <a:off x="3048267" y="5496099"/>
+              <a:off x="2911716" y="5495095"/>
               <a:ext cx="75116" cy="75116"/>
             </a:xfrm>
             <a:prstGeom prst="ellipse">
@@ -15133,7 +15133,7 @@
           </p:nvSpPr>
           <p:spPr>
             <a:xfrm>
-              <a:off x="3089012" y="5724729"/>
+              <a:off x="2937255" y="5726268"/>
               <a:ext cx="75116" cy="75116"/>
             </a:xfrm>
             <a:prstGeom prst="ellipse">
@@ -15159,7 +15159,7 @@
           </p:nvSpPr>
           <p:spPr>
             <a:xfrm>
-              <a:off x="2973410" y="5368628"/>
+              <a:off x="2886753" y="5367972"/>
               <a:ext cx="75116" cy="75116"/>
             </a:xfrm>
             <a:prstGeom prst="ellipse">
@@ -15185,7 +15185,7 @@
           </p:nvSpPr>
           <p:spPr>
             <a:xfrm>
-              <a:off x="2982643" y="5624833"/>
+              <a:off x="2993301" y="5628117"/>
               <a:ext cx="75116" cy="75116"/>
             </a:xfrm>
             <a:prstGeom prst="ellipse">
@@ -15211,7 +15211,7 @@
           </p:nvSpPr>
           <p:spPr>
             <a:xfrm>
-              <a:off x="3174729" y="4871714"/>
+              <a:off x="3046108" y="4872087"/>
               <a:ext cx="75116" cy="75116"/>
             </a:xfrm>
             <a:prstGeom prst="ellipse">
@@ -15237,7 +15237,7 @@
           </p:nvSpPr>
           <p:spPr>
             <a:xfrm>
-              <a:off x="3098838" y="5558849"/>
+              <a:off x="3022974" y="5557555"/>
               <a:ext cx="75116" cy="75116"/>
             </a:xfrm>
             <a:prstGeom prst="ellipse">
@@ -15263,7 +15263,7 @@
           </p:nvSpPr>
           <p:spPr>
             <a:xfrm>
-              <a:off x="2934998" y="5276331"/>
+              <a:off x="3018537" y="5277957"/>
               <a:ext cx="75116" cy="75116"/>
             </a:xfrm>
             <a:prstGeom prst="ellipse">
@@ -15289,7 +15289,7 @@
           </p:nvSpPr>
           <p:spPr>
             <a:xfrm>
-              <a:off x="2959393" y="5105156"/>
+              <a:off x="3063681" y="5104715"/>
               <a:ext cx="75116" cy="75116"/>
             </a:xfrm>
             <a:prstGeom prst="ellipse">
@@ -15315,7 +15315,7 @@
           </p:nvSpPr>
           <p:spPr>
             <a:xfrm>
-              <a:off x="2888096" y="4793512"/>
+              <a:off x="3091528" y="4791411"/>
               <a:ext cx="75116" cy="75116"/>
             </a:xfrm>
             <a:prstGeom prst="ellipse">
@@ -15341,7 +15341,7 @@
           </p:nvSpPr>
           <p:spPr>
             <a:xfrm>
-              <a:off x="3051200" y="4995908"/>
+              <a:off x="3044865" y="4993378"/>
               <a:ext cx="75116" cy="75116"/>
             </a:xfrm>
             <a:prstGeom prst="ellipse">
@@ -15367,7 +15367,7 @@
           </p:nvSpPr>
           <p:spPr>
             <a:xfrm>
-              <a:off x="2950497" y="5577239"/>
+              <a:off x="3108409" y="5581710"/>
               <a:ext cx="75116" cy="75116"/>
             </a:xfrm>
             <a:prstGeom prst="ellipse">
@@ -15393,7 +15393,7 @@
           </p:nvSpPr>
           <p:spPr>
             <a:xfrm>
-              <a:off x="3193767" y="5214048"/>
+              <a:off x="2899736" y="5212440"/>
               <a:ext cx="75116" cy="75116"/>
             </a:xfrm>
             <a:prstGeom prst="ellipse">
@@ -15419,7 +15419,7 @@
           </p:nvSpPr>
           <p:spPr>
             <a:xfrm>
-              <a:off x="2951919" y="5340235"/>
+              <a:off x="2963101" y="5340224"/>
               <a:ext cx="75116" cy="75116"/>
             </a:xfrm>
             <a:prstGeom prst="ellipse">
@@ -15445,7 +15445,7 @@
           </p:nvSpPr>
           <p:spPr>
             <a:xfrm>
-              <a:off x="2991558" y="5170002"/>
+              <a:off x="2897286" y="5171437"/>
               <a:ext cx="75116" cy="75116"/>
             </a:xfrm>
             <a:prstGeom prst="ellipse">
@@ -15471,7 +15471,7 @@
           </p:nvSpPr>
           <p:spPr>
             <a:xfrm>
-              <a:off x="2926646" y="5552422"/>
+              <a:off x="3199865" y="5553430"/>
               <a:ext cx="75116" cy="75116"/>
             </a:xfrm>
             <a:prstGeom prst="ellipse">
@@ -15497,7 +15497,7 @@
           </p:nvSpPr>
           <p:spPr>
             <a:xfrm>
-              <a:off x="2865581" y="5208060"/>
+              <a:off x="3051724" y="5208432"/>
               <a:ext cx="75116" cy="75116"/>
             </a:xfrm>
             <a:prstGeom prst="ellipse">
@@ -15523,7 +15523,7 @@
           </p:nvSpPr>
           <p:spPr>
             <a:xfrm>
-              <a:off x="3016927" y="5520761"/>
+              <a:off x="2988088" y="5519477"/>
               <a:ext cx="75116" cy="75116"/>
             </a:xfrm>
             <a:prstGeom prst="ellipse">
@@ -15549,7 +15549,7 @@
           </p:nvSpPr>
           <p:spPr>
             <a:xfrm>
-              <a:off x="2923304" y="5482859"/>
+              <a:off x="3002603" y="5482991"/>
               <a:ext cx="75116" cy="75116"/>
             </a:xfrm>
             <a:prstGeom prst="ellipse">
@@ -15575,7 +15575,7 @@
           </p:nvSpPr>
           <p:spPr>
             <a:xfrm>
-              <a:off x="3872699" y="5534268"/>
+              <a:off x="3666850" y="5533843"/>
               <a:ext cx="75116" cy="75116"/>
             </a:xfrm>
             <a:prstGeom prst="ellipse">
@@ -15601,7 +15601,7 @@
           </p:nvSpPr>
           <p:spPr>
             <a:xfrm>
-              <a:off x="3558649" y="5484861"/>
+              <a:off x="3677561" y="5488669"/>
               <a:ext cx="75116" cy="75116"/>
             </a:xfrm>
             <a:prstGeom prst="ellipse">
@@ -15627,7 +15627,7 @@
           </p:nvSpPr>
           <p:spPr>
             <a:xfrm>
-              <a:off x="3808920" y="5649528"/>
+              <a:off x="3858097" y="5652742"/>
               <a:ext cx="75116" cy="75116"/>
             </a:xfrm>
             <a:prstGeom prst="ellipse">
@@ -15653,7 +15653,7 @@
           </p:nvSpPr>
           <p:spPr>
             <a:xfrm>
-              <a:off x="3774245" y="5256699"/>
+              <a:off x="3596047" y="5257010"/>
               <a:ext cx="75116" cy="75116"/>
             </a:xfrm>
             <a:prstGeom prst="ellipse">
@@ -15679,7 +15679,7 @@
           </p:nvSpPr>
           <p:spPr>
             <a:xfrm>
-              <a:off x="3586524" y="5308601"/>
+              <a:off x="3506781" y="5311374"/>
               <a:ext cx="75116" cy="75116"/>
             </a:xfrm>
             <a:prstGeom prst="ellipse">
@@ -15705,7 +15705,7 @@
           </p:nvSpPr>
           <p:spPr>
             <a:xfrm>
-              <a:off x="3726078" y="4821238"/>
+              <a:off x="3700848" y="4822591"/>
               <a:ext cx="75116" cy="75116"/>
             </a:xfrm>
             <a:prstGeom prst="ellipse">
@@ -15731,7 +15731,7 @@
           </p:nvSpPr>
           <p:spPr>
             <a:xfrm>
-              <a:off x="3859586" y="5288455"/>
+              <a:off x="3894352" y="5288388"/>
               <a:ext cx="75116" cy="75116"/>
             </a:xfrm>
             <a:prstGeom prst="ellipse">
@@ -15757,7 +15757,7 @@
           </p:nvSpPr>
           <p:spPr>
             <a:xfrm>
-              <a:off x="3688307" y="5482952"/>
+              <a:off x="3811858" y="5482404"/>
               <a:ext cx="75116" cy="75116"/>
             </a:xfrm>
             <a:prstGeom prst="ellipse">
@@ -15783,7 +15783,7 @@
           </p:nvSpPr>
           <p:spPr>
             <a:xfrm>
-              <a:off x="3628945" y="5302256"/>
+              <a:off x="3645253" y="5303274"/>
               <a:ext cx="75116" cy="75116"/>
             </a:xfrm>
             <a:prstGeom prst="ellipse">
@@ -15809,7 +15809,7 @@
           </p:nvSpPr>
           <p:spPr>
             <a:xfrm>
-              <a:off x="3697724" y="5197706"/>
+              <a:off x="3666655" y="5195651"/>
               <a:ext cx="75116" cy="75116"/>
             </a:xfrm>
             <a:prstGeom prst="ellipse">
@@ -15835,7 +15835,7 @@
           </p:nvSpPr>
           <p:spPr>
             <a:xfrm>
-              <a:off x="3655753" y="5141695"/>
+              <a:off x="3571036" y="5141673"/>
               <a:ext cx="75116" cy="75116"/>
             </a:xfrm>
             <a:prstGeom prst="ellipse">
@@ -15861,7 +15861,7 @@
           </p:nvSpPr>
           <p:spPr>
             <a:xfrm>
-              <a:off x="3642251" y="5014884"/>
+              <a:off x="3585303" y="5015044"/>
               <a:ext cx="75116" cy="75116"/>
             </a:xfrm>
             <a:prstGeom prst="ellipse">
@@ -15887,7 +15887,7 @@
           </p:nvSpPr>
           <p:spPr>
             <a:xfrm>
-              <a:off x="3693567" y="5439536"/>
+              <a:off x="3589041" y="5439781"/>
               <a:ext cx="75116" cy="75116"/>
             </a:xfrm>
             <a:prstGeom prst="ellipse">
@@ -15913,7 +15913,7 @@
           </p:nvSpPr>
           <p:spPr>
             <a:xfrm>
-              <a:off x="3696422" y="4924095"/>
+              <a:off x="3809394" y="4923099"/>
               <a:ext cx="75116" cy="75116"/>
             </a:xfrm>
             <a:prstGeom prst="ellipse">
@@ -15939,7 +15939,7 @@
           </p:nvSpPr>
           <p:spPr>
             <a:xfrm>
-              <a:off x="3636051" y="5708566"/>
+              <a:off x="3581942" y="5712365"/>
               <a:ext cx="75116" cy="75116"/>
             </a:xfrm>
             <a:prstGeom prst="ellipse">
@@ -15965,7 +15965,7 @@
           </p:nvSpPr>
           <p:spPr>
             <a:xfrm>
-              <a:off x="3624484" y="5577870"/>
+              <a:off x="3709113" y="5580219"/>
               <a:ext cx="75116" cy="75116"/>
             </a:xfrm>
             <a:prstGeom prst="ellipse">
@@ -15991,7 +15991,7 @@
           </p:nvSpPr>
           <p:spPr>
             <a:xfrm>
-              <a:off x="3633859" y="5420140"/>
+              <a:off x="3806705" y="5418473"/>
               <a:ext cx="75116" cy="75116"/>
             </a:xfrm>
             <a:prstGeom prst="ellipse">
@@ -16017,7 +16017,7 @@
           </p:nvSpPr>
           <p:spPr>
             <a:xfrm>
-              <a:off x="3696385" y="5503040"/>
+              <a:off x="3509040" y="5504901"/>
               <a:ext cx="75116" cy="75116"/>
             </a:xfrm>
             <a:prstGeom prst="ellipse">
@@ -16043,7 +16043,7 @@
           </p:nvSpPr>
           <p:spPr>
             <a:xfrm>
-              <a:off x="3662838" y="5382452"/>
+              <a:off x="3766583" y="5383320"/>
               <a:ext cx="75116" cy="75116"/>
             </a:xfrm>
             <a:prstGeom prst="ellipse">
@@ -16069,7 +16069,7 @@
           </p:nvSpPr>
           <p:spPr>
             <a:xfrm>
-              <a:off x="3894495" y="5544813"/>
+              <a:off x="3858797" y="5547235"/>
               <a:ext cx="75116" cy="75116"/>
             </a:xfrm>
             <a:prstGeom prst="ellipse">
@@ -16095,7 +16095,7 @@
           </p:nvSpPr>
           <p:spPr>
             <a:xfrm>
-              <a:off x="3728698" y="5355705"/>
+              <a:off x="3566119" y="5357491"/>
               <a:ext cx="75116" cy="75116"/>
             </a:xfrm>
             <a:prstGeom prst="ellipse">
@@ -16121,7 +16121,7 @@
           </p:nvSpPr>
           <p:spPr>
             <a:xfrm>
-              <a:off x="3693324" y="5284846"/>
+              <a:off x="3849065" y="5283703"/>
               <a:ext cx="75116" cy="75116"/>
             </a:xfrm>
             <a:prstGeom prst="ellipse">
@@ -16147,7 +16147,7 @@
           </p:nvSpPr>
           <p:spPr>
             <a:xfrm>
-              <a:off x="3859164" y="5291443"/>
+              <a:off x="3871782" y="5292996"/>
               <a:ext cx="75116" cy="75116"/>
             </a:xfrm>
             <a:prstGeom prst="ellipse">
@@ -16173,7 +16173,7 @@
           </p:nvSpPr>
           <p:spPr>
             <a:xfrm>
-              <a:off x="3602141" y="5352594"/>
+              <a:off x="3819474" y="5351546"/>
               <a:ext cx="75116" cy="75116"/>
             </a:xfrm>
             <a:prstGeom prst="ellipse">
@@ -16199,42 +16199,42 @@
           </p:nvSpPr>
           <p:spPr>
             <a:xfrm>
-              <a:off x="1639833" y="5184216"/>
-              <a:ext cx="2135925" cy="406125"/>
+              <a:off x="1630855" y="5184060"/>
+              <a:ext cx="2111102" cy="407488"/>
             </a:xfrm>
             <a:custGeom>
               <a:avLst/>
               <a:pathLst>
-                <a:path w="2135925" h="406125">
+                <a:path w="2111102" h="407488">
                   <a:moveTo>
                     <a:pt x="0" y="0"/>
                   </a:moveTo>
                   <a:lnTo>
-                    <a:pt x="1128453" y="89886"/>
+                    <a:pt x="1115339" y="90188"/>
                   </a:lnTo>
                   <a:lnTo>
-                    <a:pt x="1423950" y="81333"/>
+                    <a:pt x="1407401" y="81606"/>
                   </a:lnTo>
                   <a:lnTo>
-                    <a:pt x="1840429" y="44993"/>
+                    <a:pt x="1819040" y="45145"/>
                   </a:lnTo>
                   <a:lnTo>
-                    <a:pt x="2135925" y="9619"/>
+                    <a:pt x="2111102" y="9651"/>
                   </a:lnTo>
                   <a:lnTo>
-                    <a:pt x="2135925" y="364273"/>
+                    <a:pt x="2111102" y="365496"/>
                   </a:lnTo>
                   <a:lnTo>
-                    <a:pt x="1840429" y="333357"/>
+                    <a:pt x="1819040" y="334477"/>
                   </a:lnTo>
                   <a:lnTo>
-                    <a:pt x="1423950" y="303303"/>
+                    <a:pt x="1407401" y="304322"/>
                   </a:lnTo>
                   <a:lnTo>
-                    <a:pt x="1128453" y="299209"/>
+                    <a:pt x="1115339" y="300214"/>
                   </a:lnTo>
                   <a:lnTo>
-                    <a:pt x="0" y="406125"/>
+                    <a:pt x="0" y="407488"/>
                   </a:lnTo>
                   <a:close/>
                 </a:path>
@@ -16260,27 +16260,27 @@
           </p:nvSpPr>
           <p:spPr>
             <a:xfrm>
-              <a:off x="1639833" y="5184216"/>
-              <a:ext cx="2135925" cy="89886"/>
+              <a:off x="1630855" y="5184060"/>
+              <a:ext cx="2111102" cy="90188"/>
             </a:xfrm>
             <a:custGeom>
               <a:avLst/>
               <a:pathLst>
-                <a:path w="2135925" h="89886">
+                <a:path w="2111102" h="90188">
                   <a:moveTo>
                     <a:pt x="0" y="0"/>
                   </a:moveTo>
                   <a:lnTo>
-                    <a:pt x="1128453" y="89886"/>
+                    <a:pt x="1115339" y="90188"/>
                   </a:lnTo>
                   <a:lnTo>
-                    <a:pt x="1423950" y="81333"/>
+                    <a:pt x="1407401" y="81606"/>
                   </a:lnTo>
                   <a:lnTo>
-                    <a:pt x="1840429" y="44993"/>
+                    <a:pt x="1819040" y="45145"/>
                   </a:lnTo>
                   <a:lnTo>
-                    <a:pt x="2135925" y="9619"/>
+                    <a:pt x="2111102" y="9651"/>
                   </a:lnTo>
                 </a:path>
               </a:pathLst>
@@ -16300,27 +16300,27 @@
           </p:nvSpPr>
           <p:spPr>
             <a:xfrm>
-              <a:off x="1639833" y="5483426"/>
-              <a:ext cx="2135925" cy="106915"/>
+              <a:off x="1630855" y="5484275"/>
+              <a:ext cx="2111102" cy="107274"/>
             </a:xfrm>
             <a:custGeom>
               <a:avLst/>
               <a:pathLst>
-                <a:path w="2135925" h="106915">
+                <a:path w="2111102" h="107274">
                   <a:moveTo>
-                    <a:pt x="2135925" y="65063"/>
+                    <a:pt x="2111102" y="65282"/>
                   </a:moveTo>
                   <a:lnTo>
-                    <a:pt x="1840429" y="34148"/>
+                    <a:pt x="1819040" y="34262"/>
                   </a:lnTo>
                   <a:lnTo>
-                    <a:pt x="1423950" y="4093"/>
+                    <a:pt x="1407401" y="4107"/>
                   </a:lnTo>
                   <a:lnTo>
-                    <a:pt x="1128453" y="0"/>
+                    <a:pt x="1115339" y="0"/>
                   </a:lnTo>
                   <a:lnTo>
-                    <a:pt x="0" y="106915"/>
+                    <a:pt x="0" y="107274"/>
                   </a:lnTo>
                 </a:path>
               </a:pathLst>
@@ -16340,27 +16340,27 @@
           </p:nvSpPr>
           <p:spPr>
             <a:xfrm>
-              <a:off x="1639833" y="5371162"/>
-              <a:ext cx="2135925" cy="16116"/>
+              <a:off x="1630855" y="5371634"/>
+              <a:ext cx="2111102" cy="16170"/>
             </a:xfrm>
             <a:custGeom>
               <a:avLst/>
               <a:pathLst>
-                <a:path w="2135925" h="16116">
+                <a:path w="2111102" h="16170">
                   <a:moveTo>
-                    <a:pt x="0" y="16116"/>
+                    <a:pt x="0" y="16170"/>
                   </a:moveTo>
                   <a:lnTo>
-                    <a:pt x="1128453" y="7601"/>
+                    <a:pt x="1115339" y="7627"/>
                   </a:lnTo>
                   <a:lnTo>
-                    <a:pt x="1423950" y="5372"/>
+                    <a:pt x="1407401" y="5390"/>
                   </a:lnTo>
                   <a:lnTo>
-                    <a:pt x="1840429" y="2229"/>
+                    <a:pt x="1819040" y="2237"/>
                   </a:lnTo>
                   <a:lnTo>
-                    <a:pt x="2135925" y="0"/>
+                    <a:pt x="2111102" y="0"/>
                   </a:lnTo>
                 </a:path>
               </a:pathLst>
@@ -16389,7 +16389,7 @@
           </p:nvSpPr>
           <p:spPr>
             <a:xfrm>
-              <a:off x="3296064" y="4769902"/>
+              <a:off x="3262263" y="4768768"/>
               <a:ext cx="479694" cy="82021"/>
             </a:xfrm>
             <a:prstGeom prst="rect">
@@ -16435,8 +16435,8 @@
           </p:nvSpPr>
           <p:spPr>
             <a:xfrm>
-              <a:off x="1310306" y="4608644"/>
-              <a:ext cx="2746591" cy="1359782"/>
+              <a:off x="1310032" y="4608827"/>
+              <a:ext cx="2746729" cy="1359873"/>
             </a:xfrm>
             <a:prstGeom prst="rect">
               <a:avLst/>
@@ -16456,15 +16456,15 @@
           </p:nvSpPr>
           <p:spPr>
             <a:xfrm>
-              <a:off x="1310306" y="4608644"/>
-              <a:ext cx="0" cy="1359782"/>
+              <a:off x="1310032" y="4608827"/>
+              <a:ext cx="0" cy="1359873"/>
             </a:xfrm>
             <a:custGeom>
               <a:avLst/>
               <a:pathLst>
-                <a:path w="0" h="1359782">
+                <a:path w="0" h="1359873">
                   <a:moveTo>
-                    <a:pt x="0" y="1359782"/>
+                    <a:pt x="0" y="1359873"/>
                   </a:moveTo>
                   <a:lnTo>
                     <a:pt x="0" y="0"/>
@@ -16496,7 +16496,7 @@
           </p:nvSpPr>
           <p:spPr>
             <a:xfrm rot="-5400000">
-              <a:off x="1140740" y="5845886"/>
+              <a:off x="1140466" y="5848075"/>
               <a:ext cx="141274" cy="72877"/>
             </a:xfrm>
             <a:prstGeom prst="rect">
@@ -16542,7 +16542,7 @@
           </p:nvSpPr>
           <p:spPr>
             <a:xfrm rot="-5400000">
-              <a:off x="1140740" y="5499534"/>
+              <a:off x="1140466" y="5500559"/>
               <a:ext cx="141274" cy="72877"/>
             </a:xfrm>
             <a:prstGeom prst="rect">
@@ -16588,7 +16588,7 @@
           </p:nvSpPr>
           <p:spPr>
             <a:xfrm rot="-5400000">
-              <a:off x="1140740" y="5153182"/>
+              <a:off x="1140466" y="5153044"/>
               <a:ext cx="141274" cy="72877"/>
             </a:xfrm>
             <a:prstGeom prst="rect">
@@ -16634,7 +16634,7 @@
           </p:nvSpPr>
           <p:spPr>
             <a:xfrm rot="-5400000">
-              <a:off x="1140740" y="4806829"/>
+              <a:off x="1140466" y="4805529"/>
               <a:ext cx="141274" cy="72877"/>
             </a:xfrm>
             <a:prstGeom prst="rect">
@@ -16680,7 +16680,7 @@
           </p:nvSpPr>
           <p:spPr>
             <a:xfrm>
-              <a:off x="1281838" y="5882325"/>
+              <a:off x="1281564" y="5884514"/>
               <a:ext cx="28468" cy="0"/>
             </a:xfrm>
             <a:custGeom>
@@ -16720,7 +16720,7 @@
           </p:nvSpPr>
           <p:spPr>
             <a:xfrm>
-              <a:off x="1281838" y="5535973"/>
+              <a:off x="1281564" y="5536998"/>
               <a:ext cx="28468" cy="0"/>
             </a:xfrm>
             <a:custGeom>
@@ -16760,7 +16760,7 @@
           </p:nvSpPr>
           <p:spPr>
             <a:xfrm>
-              <a:off x="1281838" y="5189620"/>
+              <a:off x="1281564" y="5189483"/>
               <a:ext cx="28468" cy="0"/>
             </a:xfrm>
             <a:custGeom>
@@ -16800,7 +16800,7 @@
           </p:nvSpPr>
           <p:spPr>
             <a:xfrm>
-              <a:off x="1281838" y="4843268"/>
+              <a:off x="1281564" y="4841967"/>
               <a:ext cx="28468" cy="0"/>
             </a:xfrm>
             <a:custGeom>
@@ -16840,18 +16840,18 @@
           </p:nvSpPr>
           <p:spPr>
             <a:xfrm>
-              <a:off x="1310306" y="5968427"/>
-              <a:ext cx="2746591" cy="0"/>
+              <a:off x="1310032" y="5968701"/>
+              <a:ext cx="2746729" cy="0"/>
             </a:xfrm>
             <a:custGeom>
               <a:avLst/>
               <a:pathLst>
-                <a:path w="2746591" h="0">
+                <a:path w="2746729" h="0">
                   <a:moveTo>
                     <a:pt x="0" y="0"/>
                   </a:moveTo>
                   <a:lnTo>
-                    <a:pt x="2746591" y="0"/>
+                    <a:pt x="2746729" y="0"/>
                   </a:lnTo>
                 </a:path>
               </a:pathLst>
@@ -16880,7 +16880,7 @@
           </p:nvSpPr>
           <p:spPr>
             <a:xfrm>
-              <a:off x="1639833" y="5968427"/>
+              <a:off x="1630855" y="5968701"/>
               <a:ext cx="0" cy="28468"/>
             </a:xfrm>
             <a:custGeom>
@@ -16920,7 +16920,7 @@
           </p:nvSpPr>
           <p:spPr>
             <a:xfrm>
-              <a:off x="2351808" y="5968427"/>
+              <a:off x="2334556" y="5968701"/>
               <a:ext cx="0" cy="28468"/>
             </a:xfrm>
             <a:custGeom>
@@ -16960,7 +16960,7 @@
           </p:nvSpPr>
           <p:spPr>
             <a:xfrm>
-              <a:off x="3063783" y="5968427"/>
+              <a:off x="3038257" y="5968701"/>
               <a:ext cx="0" cy="28468"/>
             </a:xfrm>
             <a:custGeom>
@@ -17000,7 +17000,7 @@
           </p:nvSpPr>
           <p:spPr>
             <a:xfrm>
-              <a:off x="3775758" y="5968427"/>
+              <a:off x="3741957" y="5968701"/>
               <a:ext cx="0" cy="28468"/>
             </a:xfrm>
             <a:custGeom>
@@ -17040,7 +17040,7 @@
           </p:nvSpPr>
           <p:spPr>
             <a:xfrm>
-              <a:off x="1611578" y="6019670"/>
+              <a:off x="1602600" y="6019944"/>
               <a:ext cx="56509" cy="72877"/>
             </a:xfrm>
             <a:prstGeom prst="rect">
@@ -17086,7 +17086,7 @@
           </p:nvSpPr>
           <p:spPr>
             <a:xfrm>
-              <a:off x="2323553" y="6019670"/>
+              <a:off x="2306301" y="6019944"/>
               <a:ext cx="56509" cy="72877"/>
             </a:xfrm>
             <a:prstGeom prst="rect">
@@ -17132,7 +17132,7 @@
           </p:nvSpPr>
           <p:spPr>
             <a:xfrm>
-              <a:off x="3035528" y="6019670"/>
+              <a:off x="3010002" y="6019944"/>
               <a:ext cx="56509" cy="72877"/>
             </a:xfrm>
             <a:prstGeom prst="rect">
@@ -17178,7 +17178,7 @@
           </p:nvSpPr>
           <p:spPr>
             <a:xfrm>
-              <a:off x="3747503" y="6019670"/>
+              <a:off x="3713702" y="6019944"/>
               <a:ext cx="56509" cy="72877"/>
             </a:xfrm>
             <a:prstGeom prst="rect">
@@ -17224,8 +17224,8 @@
           </p:nvSpPr>
           <p:spPr>
             <a:xfrm>
-              <a:off x="2401190" y="6177306"/>
-              <a:ext cx="564824" cy="91440"/>
+              <a:off x="2422335" y="6177580"/>
+              <a:ext cx="522122" cy="91165"/>
             </a:xfrm>
             <a:prstGeom prst="rect">
               <a:avLst/>
@@ -17248,7 +17248,7 @@
                 </a:spcAft>
               </a:pPr>
               <a:r>
-                <a:rPr sz="1000" b="1">
+                <a:rPr sz="1000">
                   <a:solidFill>
                     <a:srgbClr val="000000">
                       <a:alpha val="100000"/>
@@ -17270,8 +17270,8 @@
           </p:nvSpPr>
           <p:spPr>
             <a:xfrm rot="-5400000">
-              <a:off x="934421" y="5242816"/>
-              <a:ext cx="197510" cy="91440"/>
+              <a:off x="934284" y="5243181"/>
+              <a:ext cx="197510" cy="91165"/>
             </a:xfrm>
             <a:prstGeom prst="rect">
               <a:avLst/>
@@ -17294,7 +17294,7 @@
                 </a:spcAft>
               </a:pPr>
               <a:r>
-                <a:rPr sz="1000" b="1">
+                <a:rPr sz="1000">
                   <a:solidFill>
                     <a:srgbClr val="000000">
                       <a:alpha val="100000"/>
@@ -17316,7 +17316,7 @@
           </p:nvSpPr>
           <p:spPr>
             <a:xfrm>
-              <a:off x="1310306" y="4432104"/>
+              <a:off x="1310032" y="4432287"/>
               <a:ext cx="896569" cy="91440"/>
             </a:xfrm>
             <a:prstGeom prst="rect">
@@ -17362,8 +17362,8 @@
           </p:nvSpPr>
           <p:spPr>
             <a:xfrm>
-              <a:off x="4186587" y="4608644"/>
-              <a:ext cx="2746591" cy="1359782"/>
+              <a:off x="4186450" y="4608827"/>
+              <a:ext cx="2746729" cy="1359873"/>
             </a:xfrm>
             <a:prstGeom prst="rect">
               <a:avLst/>
@@ -17388,7 +17388,7 @@
           </p:nvSpPr>
           <p:spPr>
             <a:xfrm>
-              <a:off x="4273874" y="5417316"/>
+              <a:off x="4631995" y="5418136"/>
               <a:ext cx="75116" cy="75116"/>
             </a:xfrm>
             <a:prstGeom prst="ellipse">
@@ -17414,7 +17414,7 @@
           </p:nvSpPr>
           <p:spPr>
             <a:xfrm>
-              <a:off x="4429913" y="5352197"/>
+              <a:off x="4392454" y="5351220"/>
               <a:ext cx="75116" cy="75116"/>
             </a:xfrm>
             <a:prstGeom prst="ellipse">
@@ -17440,7 +17440,7 @@
           </p:nvSpPr>
           <p:spPr>
             <a:xfrm>
-              <a:off x="4319017" y="5403827"/>
+              <a:off x="4362110" y="5404341"/>
               <a:ext cx="75116" cy="75116"/>
             </a:xfrm>
             <a:prstGeom prst="ellipse">
@@ -17466,7 +17466,7 @@
           </p:nvSpPr>
           <p:spPr>
             <a:xfrm>
-              <a:off x="4629118" y="5675290"/>
+              <a:off x="4541689" y="5675598"/>
               <a:ext cx="75116" cy="75116"/>
             </a:xfrm>
             <a:prstGeom prst="ellipse">
@@ -17492,7 +17492,7 @@
           </p:nvSpPr>
           <p:spPr>
             <a:xfrm>
-              <a:off x="4508658" y="5642038"/>
+              <a:off x="4517635" y="5640968"/>
               <a:ext cx="75116" cy="75116"/>
             </a:xfrm>
             <a:prstGeom prst="ellipse">
@@ -17518,7 +17518,7 @@
           </p:nvSpPr>
           <p:spPr>
             <a:xfrm>
-              <a:off x="4314934" y="5603784"/>
+              <a:off x="4273743" y="5603414"/>
               <a:ext cx="75116" cy="75116"/>
             </a:xfrm>
             <a:prstGeom prst="ellipse">
@@ -17544,7 +17544,7 @@
           </p:nvSpPr>
           <p:spPr>
             <a:xfrm>
-              <a:off x="4600746" y="5196113"/>
+              <a:off x="4423096" y="5195471"/>
               <a:ext cx="75116" cy="75116"/>
             </a:xfrm>
             <a:prstGeom prst="ellipse">
@@ -17570,7 +17570,7 @@
           </p:nvSpPr>
           <p:spPr>
             <a:xfrm>
-              <a:off x="4580010" y="5435558"/>
+              <a:off x="4512919" y="5434908"/>
               <a:ext cx="75116" cy="75116"/>
             </a:xfrm>
             <a:prstGeom prst="ellipse">
@@ -17596,7 +17596,7 @@
           </p:nvSpPr>
           <p:spPr>
             <a:xfrm>
-              <a:off x="4579785" y="5623679"/>
+              <a:off x="4494538" y="5623598"/>
               <a:ext cx="75116" cy="75116"/>
             </a:xfrm>
             <a:prstGeom prst="ellipse">
@@ -17622,7 +17622,7 @@
           </p:nvSpPr>
           <p:spPr>
             <a:xfrm>
-              <a:off x="4448912" y="5329419"/>
+              <a:off x="4380855" y="5328839"/>
               <a:ext cx="75116" cy="75116"/>
             </a:xfrm>
             <a:prstGeom prst="ellipse">
@@ -17648,7 +17648,7 @@
           </p:nvSpPr>
           <p:spPr>
             <a:xfrm>
-              <a:off x="5206893" y="5874211"/>
+              <a:off x="5304733" y="5874481"/>
               <a:ext cx="75116" cy="75116"/>
             </a:xfrm>
             <a:prstGeom prst="ellipse">
@@ -17674,7 +17674,7 @@
           </p:nvSpPr>
           <p:spPr>
             <a:xfrm>
-              <a:off x="5204765" y="5544973"/>
+              <a:off x="5297628" y="5543985"/>
               <a:ext cx="75116" cy="75116"/>
             </a:xfrm>
             <a:prstGeom prst="ellipse">
@@ -17700,7 +17700,7 @@
           </p:nvSpPr>
           <p:spPr>
             <a:xfrm>
-              <a:off x="5255701" y="5359562"/>
+              <a:off x="5219408" y="5358538"/>
               <a:ext cx="75116" cy="75116"/>
             </a:xfrm>
             <a:prstGeom prst="ellipse">
@@ -17726,7 +17726,7 @@
           </p:nvSpPr>
           <p:spPr>
             <a:xfrm>
-              <a:off x="5026691" y="5753705"/>
+              <a:off x="5139460" y="5754402"/>
               <a:ext cx="75116" cy="75116"/>
             </a:xfrm>
             <a:prstGeom prst="ellipse">
@@ -17752,7 +17752,7 @@
           </p:nvSpPr>
           <p:spPr>
             <a:xfrm>
-              <a:off x="5135564" y="5473879"/>
+              <a:off x="5183235" y="5474486"/>
               <a:ext cx="75116" cy="75116"/>
             </a:xfrm>
             <a:prstGeom prst="ellipse">
@@ -17778,7 +17778,7 @@
           </p:nvSpPr>
           <p:spPr>
             <a:xfrm>
-              <a:off x="5106685" y="5137531"/>
+              <a:off x="5097961" y="5137564"/>
               <a:ext cx="75116" cy="75116"/>
             </a:xfrm>
             <a:prstGeom prst="ellipse">
@@ -17804,7 +17804,7 @@
           </p:nvSpPr>
           <p:spPr>
             <a:xfrm>
-              <a:off x="5232935" y="5505732"/>
+              <a:off x="5287969" y="5506013"/>
               <a:ext cx="75116" cy="75116"/>
             </a:xfrm>
             <a:prstGeom prst="ellipse">
@@ -17830,7 +17830,7 @@
           </p:nvSpPr>
           <p:spPr>
             <a:xfrm>
-              <a:off x="5129019" y="5563957"/>
+              <a:off x="5021028" y="5564963"/>
               <a:ext cx="75116" cy="75116"/>
             </a:xfrm>
             <a:prstGeom prst="ellipse">
@@ -17856,7 +17856,7 @@
           </p:nvSpPr>
           <p:spPr>
             <a:xfrm>
-              <a:off x="5188880" y="5340134"/>
+              <a:off x="5159162" y="5341077"/>
               <a:ext cx="75116" cy="75116"/>
             </a:xfrm>
             <a:prstGeom prst="ellipse">
@@ -17882,7 +17882,7 @@
           </p:nvSpPr>
           <p:spPr>
             <a:xfrm>
-              <a:off x="5329572" y="5643400"/>
+              <a:off x="5147063" y="5644546"/>
               <a:ext cx="75116" cy="75116"/>
             </a:xfrm>
             <a:prstGeom prst="ellipse">
@@ -17908,7 +17908,7 @@
           </p:nvSpPr>
           <p:spPr>
             <a:xfrm>
-              <a:off x="5232542" y="5290469"/>
+              <a:off x="4992329" y="5291610"/>
               <a:ext cx="75116" cy="75116"/>
             </a:xfrm>
             <a:prstGeom prst="ellipse">
@@ -17934,7 +17934,7 @@
           </p:nvSpPr>
           <p:spPr>
             <a:xfrm>
-              <a:off x="5289636" y="5610632"/>
+              <a:off x="5351440" y="5609395"/>
               <a:ext cx="75116" cy="75116"/>
             </a:xfrm>
             <a:prstGeom prst="ellipse">
@@ -17960,7 +17960,7 @@
           </p:nvSpPr>
           <p:spPr>
             <a:xfrm>
-              <a:off x="5005944" y="5266627"/>
+              <a:off x="5363937" y="5265231"/>
               <a:ext cx="75116" cy="75116"/>
             </a:xfrm>
             <a:prstGeom prst="ellipse">
@@ -17986,7 +17986,7 @@
           </p:nvSpPr>
           <p:spPr>
             <a:xfrm>
-              <a:off x="5364599" y="4961630"/>
+              <a:off x="5290447" y="4960087"/>
               <a:ext cx="75116" cy="75116"/>
             </a:xfrm>
             <a:prstGeom prst="ellipse">
@@ -18012,7 +18012,7 @@
           </p:nvSpPr>
           <p:spPr>
             <a:xfrm>
-              <a:off x="4999238" y="5198362"/>
+              <a:off x="5238746" y="5198332"/>
               <a:ext cx="75116" cy="75116"/>
             </a:xfrm>
             <a:prstGeom prst="ellipse">
@@ -18038,7 +18038,7 @@
           </p:nvSpPr>
           <p:spPr>
             <a:xfrm>
-              <a:off x="5005596" y="5241397"/>
+              <a:off x="5353295" y="5240159"/>
               <a:ext cx="75116" cy="75116"/>
             </a:xfrm>
             <a:prstGeom prst="ellipse">
@@ -18064,7 +18064,7 @@
           </p:nvSpPr>
           <p:spPr>
             <a:xfrm>
-              <a:off x="5202231" y="5344820"/>
+              <a:off x="5164042" y="5345408"/>
               <a:ext cx="75116" cy="75116"/>
             </a:xfrm>
             <a:prstGeom prst="ellipse">
@@ -18090,7 +18090,7 @@
           </p:nvSpPr>
           <p:spPr>
             <a:xfrm>
-              <a:off x="5316764" y="5592669"/>
+              <a:off x="5234299" y="5592279"/>
               <a:ext cx="75116" cy="75116"/>
             </a:xfrm>
             <a:prstGeom prst="ellipse">
@@ -18116,7 +18116,7 @@
           </p:nvSpPr>
           <p:spPr>
             <a:xfrm>
-              <a:off x="5735904" y="5395004"/>
+              <a:off x="6043422" y="5395679"/>
               <a:ext cx="75116" cy="75116"/>
             </a:xfrm>
             <a:prstGeom prst="ellipse">
@@ -18142,7 +18142,7 @@
           </p:nvSpPr>
           <p:spPr>
             <a:xfrm>
-              <a:off x="5837688" y="5445481"/>
+              <a:off x="6027832" y="5444595"/>
               <a:ext cx="75116" cy="75116"/>
             </a:xfrm>
             <a:prstGeom prst="ellipse">
@@ -18168,7 +18168,7 @@
           </p:nvSpPr>
           <p:spPr>
             <a:xfrm>
-              <a:off x="5803432" y="5625473"/>
+              <a:off x="6010797" y="5625474"/>
               <a:ext cx="75116" cy="75116"/>
             </a:xfrm>
             <a:prstGeom prst="ellipse">
@@ -18194,7 +18194,7 @@
           </p:nvSpPr>
           <p:spPr>
             <a:xfrm>
-              <a:off x="5828980" y="5240834"/>
+              <a:off x="5753953" y="5241090"/>
               <a:ext cx="75116" cy="75116"/>
             </a:xfrm>
             <a:prstGeom prst="ellipse">
@@ -18220,7 +18220,7 @@
           </p:nvSpPr>
           <p:spPr>
             <a:xfrm>
-              <a:off x="5724408" y="5446660"/>
+              <a:off x="6033092" y="5447721"/>
               <a:ext cx="75116" cy="75116"/>
             </a:xfrm>
             <a:prstGeom prst="ellipse">
@@ -18246,7 +18246,7 @@
           </p:nvSpPr>
           <p:spPr>
             <a:xfrm>
-              <a:off x="5874071" y="5260066"/>
+              <a:off x="6043646" y="5259583"/>
               <a:ext cx="75116" cy="75116"/>
             </a:xfrm>
             <a:prstGeom prst="ellipse">
@@ -18272,7 +18272,7 @@
           </p:nvSpPr>
           <p:spPr>
             <a:xfrm>
-              <a:off x="6035452" y="4864378"/>
+              <a:off x="5802941" y="4863322"/>
               <a:ext cx="75116" cy="75116"/>
             </a:xfrm>
             <a:prstGeom prst="ellipse">
@@ -18298,7 +18298,7 @@
           </p:nvSpPr>
           <p:spPr>
             <a:xfrm>
-              <a:off x="5730504" y="5496351"/>
+              <a:off x="5967449" y="5496372"/>
               <a:ext cx="75116" cy="75116"/>
             </a:xfrm>
             <a:prstGeom prst="ellipse">
@@ -18324,7 +18324,7 @@
           </p:nvSpPr>
           <p:spPr>
             <a:xfrm>
-              <a:off x="5761378" y="5343975"/>
+              <a:off x="6030187" y="5342159"/>
               <a:ext cx="75116" cy="75116"/>
             </a:xfrm>
             <a:prstGeom prst="ellipse">
@@ -18350,7 +18350,7 @@
           </p:nvSpPr>
           <p:spPr>
             <a:xfrm>
-              <a:off x="5804817" y="4741059"/>
+              <a:off x="6025529" y="4741253"/>
               <a:ext cx="75116" cy="75116"/>
             </a:xfrm>
             <a:prstGeom prst="ellipse">
@@ -18376,7 +18376,7 @@
           </p:nvSpPr>
           <p:spPr>
             <a:xfrm>
-              <a:off x="5825173" y="5348424"/>
+              <a:off x="6061122" y="5348096"/>
               <a:ext cx="75116" cy="75116"/>
             </a:xfrm>
             <a:prstGeom prst="ellipse">
@@ -18402,7 +18402,7 @@
           </p:nvSpPr>
           <p:spPr>
             <a:xfrm>
-              <a:off x="5676356" y="5447991"/>
+              <a:off x="5857378" y="5446135"/>
               <a:ext cx="75116" cy="75116"/>
             </a:xfrm>
             <a:prstGeom prst="ellipse">
@@ -18428,7 +18428,7 @@
           </p:nvSpPr>
           <p:spPr>
             <a:xfrm>
-              <a:off x="5674132" y="5238578"/>
+              <a:off x="5822599" y="5238727"/>
               <a:ext cx="75116" cy="75116"/>
             </a:xfrm>
             <a:prstGeom prst="ellipse">
@@ -18454,7 +18454,7 @@
           </p:nvSpPr>
           <p:spPr>
             <a:xfrm>
-              <a:off x="5910847" y="5178138"/>
+              <a:off x="5954916" y="5176826"/>
               <a:ext cx="75116" cy="75116"/>
             </a:xfrm>
             <a:prstGeom prst="ellipse">
@@ -18480,7 +18480,7 @@
           </p:nvSpPr>
           <p:spPr>
             <a:xfrm>
-              <a:off x="5982064" y="5061210"/>
+              <a:off x="5740289" y="5059025"/>
               <a:ext cx="75116" cy="75116"/>
             </a:xfrm>
             <a:prstGeom prst="ellipse">
@@ -18506,7 +18506,7 @@
           </p:nvSpPr>
           <p:spPr>
             <a:xfrm>
-              <a:off x="5827848" y="5533473"/>
+              <a:off x="5772622" y="5533799"/>
               <a:ext cx="75116" cy="75116"/>
             </a:xfrm>
             <a:prstGeom prst="ellipse">
@@ -18532,7 +18532,7 @@
           </p:nvSpPr>
           <p:spPr>
             <a:xfrm>
-              <a:off x="5935144" y="5560193"/>
+              <a:off x="5952258" y="5559646"/>
               <a:ext cx="75116" cy="75116"/>
             </a:xfrm>
             <a:prstGeom prst="ellipse">
@@ -18558,7 +18558,7 @@
           </p:nvSpPr>
           <p:spPr>
             <a:xfrm>
-              <a:off x="5995397" y="5736146"/>
+              <a:off x="5745356" y="5737248"/>
               <a:ext cx="75116" cy="75116"/>
             </a:xfrm>
             <a:prstGeom prst="ellipse">
@@ -18584,7 +18584,7 @@
           </p:nvSpPr>
           <p:spPr>
             <a:xfrm>
-              <a:off x="5717225" y="5385852"/>
+              <a:off x="5697528" y="5385843"/>
               <a:ext cx="75116" cy="75116"/>
             </a:xfrm>
             <a:prstGeom prst="ellipse">
@@ -18610,7 +18610,7 @@
           </p:nvSpPr>
           <p:spPr>
             <a:xfrm>
-              <a:off x="5945852" y="5316920"/>
+              <a:off x="5856059" y="5315996"/>
               <a:ext cx="75116" cy="75116"/>
             </a:xfrm>
             <a:prstGeom prst="ellipse">
@@ -18636,7 +18636,7 @@
           </p:nvSpPr>
           <p:spPr>
             <a:xfrm>
-              <a:off x="6697359" y="5355959"/>
+              <a:off x="6478768" y="5356701"/>
               <a:ext cx="75116" cy="75116"/>
             </a:xfrm>
             <a:prstGeom prst="ellipse">
@@ -18662,7 +18662,7 @@
           </p:nvSpPr>
           <p:spPr>
             <a:xfrm>
-              <a:off x="6653808" y="5467237"/>
+              <a:off x="6770769" y="5467441"/>
               <a:ext cx="75116" cy="75116"/>
             </a:xfrm>
             <a:prstGeom prst="ellipse">
@@ -18688,7 +18688,7 @@
           </p:nvSpPr>
           <p:spPr>
             <a:xfrm>
-              <a:off x="6548871" y="5533516"/>
+              <a:off x="6670548" y="5532795"/>
               <a:ext cx="75116" cy="75116"/>
             </a:xfrm>
             <a:prstGeom prst="ellipse">
@@ -18714,7 +18714,7 @@
           </p:nvSpPr>
           <p:spPr>
             <a:xfrm>
-              <a:off x="6711915" y="5563843"/>
+              <a:off x="6697735" y="5564968"/>
               <a:ext cx="75116" cy="75116"/>
             </a:xfrm>
             <a:prstGeom prst="ellipse">
@@ -18740,7 +18740,7 @@
           </p:nvSpPr>
           <p:spPr>
             <a:xfrm>
-              <a:off x="6493078" y="5392081"/>
+              <a:off x="6674443" y="5391924"/>
               <a:ext cx="75116" cy="75116"/>
             </a:xfrm>
             <a:prstGeom prst="ellipse">
@@ -18766,7 +18766,7 @@
           </p:nvSpPr>
           <p:spPr>
             <a:xfrm>
-              <a:off x="6508295" y="5336271"/>
+              <a:off x="6477532" y="5336662"/>
               <a:ext cx="75116" cy="75116"/>
             </a:xfrm>
             <a:prstGeom prst="ellipse">
@@ -18792,7 +18792,7 @@
           </p:nvSpPr>
           <p:spPr>
             <a:xfrm>
-              <a:off x="6416167" y="5531670"/>
+              <a:off x="6550368" y="5529769"/>
               <a:ext cx="75116" cy="75116"/>
             </a:xfrm>
             <a:prstGeom prst="ellipse">
@@ -18818,7 +18818,7 @@
           </p:nvSpPr>
           <p:spPr>
             <a:xfrm>
-              <a:off x="6763873" y="5277726"/>
+              <a:off x="6752465" y="5277426"/>
               <a:ext cx="75116" cy="75116"/>
             </a:xfrm>
             <a:prstGeom prst="ellipse">
@@ -18844,7 +18844,7 @@
           </p:nvSpPr>
           <p:spPr>
             <a:xfrm>
-              <a:off x="6661961" y="5595863"/>
+              <a:off x="6441578" y="5596241"/>
               <a:ext cx="75116" cy="75116"/>
             </a:xfrm>
             <a:prstGeom prst="ellipse">
@@ -18870,7 +18870,7 @@
           </p:nvSpPr>
           <p:spPr>
             <a:xfrm>
-              <a:off x="6473572" y="5462310"/>
+              <a:off x="6613645" y="5463636"/>
               <a:ext cx="75116" cy="75116"/>
             </a:xfrm>
             <a:prstGeom prst="ellipse">
@@ -18896,7 +18896,7 @@
           </p:nvSpPr>
           <p:spPr>
             <a:xfrm>
-              <a:off x="6639482" y="5397508"/>
+              <a:off x="6531204" y="5397706"/>
               <a:ext cx="75116" cy="75116"/>
             </a:xfrm>
             <a:prstGeom prst="ellipse">
@@ -18922,7 +18922,7 @@
           </p:nvSpPr>
           <p:spPr>
             <a:xfrm>
-              <a:off x="6649354" y="5471873"/>
+              <a:off x="6601031" y="5471015"/>
               <a:ext cx="75116" cy="75116"/>
             </a:xfrm>
             <a:prstGeom prst="ellipse">
@@ -18948,7 +18948,7 @@
           </p:nvSpPr>
           <p:spPr>
             <a:xfrm>
-              <a:off x="6540326" y="5435196"/>
+              <a:off x="6495497" y="5435053"/>
               <a:ext cx="75116" cy="75116"/>
             </a:xfrm>
             <a:prstGeom prst="ellipse">
@@ -18974,7 +18974,7 @@
           </p:nvSpPr>
           <p:spPr>
             <a:xfrm>
-              <a:off x="6651456" y="5699767"/>
+              <a:off x="6681578" y="5700725"/>
               <a:ext cx="75116" cy="75116"/>
             </a:xfrm>
             <a:prstGeom prst="ellipse">
@@ -19000,7 +19000,7 @@
           </p:nvSpPr>
           <p:spPr>
             <a:xfrm>
-              <a:off x="6523812" y="5454618"/>
+              <a:off x="6611687" y="5453248"/>
               <a:ext cx="75116" cy="75116"/>
             </a:xfrm>
             <a:prstGeom prst="ellipse">
@@ -19026,7 +19026,7 @@
           </p:nvSpPr>
           <p:spPr>
             <a:xfrm>
-              <a:off x="6609773" y="5470591"/>
+              <a:off x="6418633" y="5468695"/>
               <a:ext cx="75116" cy="75116"/>
             </a:xfrm>
             <a:prstGeom prst="ellipse">
@@ -19052,7 +19052,7 @@
           </p:nvSpPr>
           <p:spPr>
             <a:xfrm>
-              <a:off x="6734767" y="5368640"/>
+              <a:off x="6569592" y="5367585"/>
               <a:ext cx="75116" cy="75116"/>
             </a:xfrm>
             <a:prstGeom prst="ellipse">
@@ -19078,7 +19078,7 @@
           </p:nvSpPr>
           <p:spPr>
             <a:xfrm>
-              <a:off x="6680977" y="5393635"/>
+              <a:off x="6528557" y="5392439"/>
               <a:ext cx="75116" cy="75116"/>
             </a:xfrm>
             <a:prstGeom prst="ellipse">
@@ -19104,7 +19104,7 @@
           </p:nvSpPr>
           <p:spPr>
             <a:xfrm>
-              <a:off x="6715693" y="5714270"/>
+              <a:off x="6583772" y="5713523"/>
               <a:ext cx="75116" cy="75116"/>
             </a:xfrm>
             <a:prstGeom prst="ellipse">
@@ -19130,7 +19130,7 @@
           </p:nvSpPr>
           <p:spPr>
             <a:xfrm>
-              <a:off x="6599120" y="5363566"/>
+              <a:off x="6615465" y="5363291"/>
               <a:ext cx="75116" cy="75116"/>
             </a:xfrm>
             <a:prstGeom prst="ellipse">
@@ -19156,7 +19156,7 @@
           </p:nvSpPr>
           <p:spPr>
             <a:xfrm>
-              <a:off x="6650017" y="5263593"/>
+              <a:off x="6689082" y="5263326"/>
               <a:ext cx="75116" cy="75116"/>
             </a:xfrm>
             <a:prstGeom prst="ellipse">
@@ -19182,7 +19182,7 @@
           </p:nvSpPr>
           <p:spPr>
             <a:xfrm>
-              <a:off x="6445570" y="5289649"/>
+              <a:off x="6468362" y="5288942"/>
               <a:ext cx="75116" cy="75116"/>
             </a:xfrm>
             <a:prstGeom prst="ellipse">
@@ -19208,7 +19208,7 @@
           </p:nvSpPr>
           <p:spPr>
             <a:xfrm>
-              <a:off x="6482265" y="5554913"/>
+              <a:off x="6434593" y="5554935"/>
               <a:ext cx="75116" cy="75116"/>
             </a:xfrm>
             <a:prstGeom prst="ellipse">
@@ -19234,7 +19234,7 @@
           </p:nvSpPr>
           <p:spPr>
             <a:xfrm>
-              <a:off x="6770776" y="5617318"/>
+              <a:off x="6660159" y="5616240"/>
               <a:ext cx="75116" cy="75116"/>
             </a:xfrm>
             <a:prstGeom prst="ellipse">
@@ -19260,42 +19260,42 @@
           </p:nvSpPr>
           <p:spPr>
             <a:xfrm>
-              <a:off x="4505642" y="5291006"/>
-              <a:ext cx="2112320" cy="284488"/>
+              <a:off x="4476302" y="5290539"/>
+              <a:ext cx="2158647" cy="284835"/>
             </a:xfrm>
             <a:custGeom>
               <a:avLst/>
               <a:pathLst>
-                <a:path w="2112320" h="284488">
+                <a:path w="2158647" h="284835">
                   <a:moveTo>
                     <a:pt x="0" y="0"/>
                   </a:moveTo>
                   <a:lnTo>
-                    <a:pt x="1115983" y="57902"/>
+                    <a:pt x="1140458" y="57972"/>
                   </a:lnTo>
                   <a:lnTo>
-                    <a:pt x="1408213" y="56506"/>
+                    <a:pt x="1439098" y="56575"/>
                   </a:lnTo>
                   <a:lnTo>
-                    <a:pt x="1820090" y="41780"/>
+                    <a:pt x="1860008" y="41831"/>
                   </a:lnTo>
                   <a:lnTo>
-                    <a:pt x="2112320" y="25101"/>
+                    <a:pt x="2158647" y="25132"/>
                   </a:lnTo>
                   <a:lnTo>
-                    <a:pt x="2112320" y="275871"/>
+                    <a:pt x="2158647" y="276208"/>
                   </a:lnTo>
                   <a:lnTo>
-                    <a:pt x="1820090" y="256912"/>
+                    <a:pt x="1860008" y="257225"/>
                   </a:lnTo>
                   <a:lnTo>
-                    <a:pt x="1408213" y="238972"/>
+                    <a:pt x="1439098" y="239264"/>
                   </a:lnTo>
                   <a:lnTo>
-                    <a:pt x="1115983" y="235295"/>
+                    <a:pt x="1140458" y="235582"/>
                   </a:lnTo>
                   <a:lnTo>
-                    <a:pt x="0" y="284488"/>
+                    <a:pt x="0" y="284835"/>
                   </a:lnTo>
                   <a:close/>
                 </a:path>
@@ -19321,27 +19321,27 @@
           </p:nvSpPr>
           <p:spPr>
             <a:xfrm>
-              <a:off x="4505642" y="5291006"/>
-              <a:ext cx="2112320" cy="57902"/>
+              <a:off x="4476302" y="5290539"/>
+              <a:ext cx="2158647" cy="57972"/>
             </a:xfrm>
             <a:custGeom>
               <a:avLst/>
               <a:pathLst>
-                <a:path w="2112320" h="57902">
+                <a:path w="2158647" h="57972">
                   <a:moveTo>
                     <a:pt x="0" y="0"/>
                   </a:moveTo>
                   <a:lnTo>
-                    <a:pt x="1115983" y="57902"/>
+                    <a:pt x="1140458" y="57972"/>
                   </a:lnTo>
                   <a:lnTo>
-                    <a:pt x="1408213" y="56506"/>
+                    <a:pt x="1439098" y="56575"/>
                   </a:lnTo>
                   <a:lnTo>
-                    <a:pt x="1820090" y="41780"/>
+                    <a:pt x="1860008" y="41831"/>
                   </a:lnTo>
                   <a:lnTo>
-                    <a:pt x="2112320" y="25101"/>
+                    <a:pt x="2158647" y="25132"/>
                   </a:lnTo>
                 </a:path>
               </a:pathLst>
@@ -19361,27 +19361,27 @@
           </p:nvSpPr>
           <p:spPr>
             <a:xfrm>
-              <a:off x="4505642" y="5526302"/>
-              <a:ext cx="2112320" cy="49192"/>
+              <a:off x="4476302" y="5526121"/>
+              <a:ext cx="2158647" cy="49252"/>
             </a:xfrm>
             <a:custGeom>
               <a:avLst/>
               <a:pathLst>
-                <a:path w="2112320" h="49192">
+                <a:path w="2158647" h="49252">
                   <a:moveTo>
-                    <a:pt x="2112320" y="40576"/>
+                    <a:pt x="2158647" y="40625"/>
                   </a:moveTo>
                   <a:lnTo>
-                    <a:pt x="1820090" y="21616"/>
+                    <a:pt x="1860008" y="21643"/>
                   </a:lnTo>
                   <a:lnTo>
-                    <a:pt x="1408213" y="3676"/>
+                    <a:pt x="1439098" y="3681"/>
                   </a:lnTo>
                   <a:lnTo>
-                    <a:pt x="1115983" y="0"/>
+                    <a:pt x="1140458" y="0"/>
                   </a:lnTo>
                   <a:lnTo>
-                    <a:pt x="0" y="49192"/>
+                    <a:pt x="0" y="49252"/>
                   </a:lnTo>
                 </a:path>
               </a:pathLst>
@@ -19401,27 +19401,27 @@
           </p:nvSpPr>
           <p:spPr>
             <a:xfrm>
-              <a:off x="4505642" y="5433250"/>
-              <a:ext cx="2112320" cy="8242"/>
+              <a:off x="4476302" y="5432956"/>
+              <a:ext cx="2158647" cy="8252"/>
             </a:xfrm>
             <a:custGeom>
               <a:avLst/>
               <a:pathLst>
-                <a:path w="2112320" h="8242">
+                <a:path w="2158647" h="8252">
                   <a:moveTo>
                     <a:pt x="0" y="0"/>
                   </a:moveTo>
                   <a:lnTo>
-                    <a:pt x="1115983" y="4354"/>
+                    <a:pt x="1140458" y="4360"/>
                   </a:lnTo>
                   <a:lnTo>
-                    <a:pt x="1408213" y="5495"/>
+                    <a:pt x="1439098" y="5501"/>
                   </a:lnTo>
                   <a:lnTo>
-                    <a:pt x="1820090" y="7102"/>
+                    <a:pt x="1860008" y="7111"/>
                   </a:lnTo>
                   <a:lnTo>
-                    <a:pt x="2112320" y="8242"/>
+                    <a:pt x="2158647" y="8252"/>
                   </a:lnTo>
                 </a:path>
               </a:pathLst>
@@ -19450,7 +19450,7 @@
           </p:nvSpPr>
           <p:spPr>
             <a:xfrm>
-              <a:off x="6138269" y="4769675"/>
+              <a:off x="6155255" y="4768722"/>
               <a:ext cx="479694" cy="82021"/>
             </a:xfrm>
             <a:prstGeom prst="rect">
@@ -19496,8 +19496,8 @@
           </p:nvSpPr>
           <p:spPr>
             <a:xfrm>
-              <a:off x="4186587" y="4608644"/>
-              <a:ext cx="2746591" cy="1359782"/>
+              <a:off x="4186450" y="4608827"/>
+              <a:ext cx="2746729" cy="1359873"/>
             </a:xfrm>
             <a:prstGeom prst="rect">
               <a:avLst/>
@@ -19517,15 +19517,15 @@
           </p:nvSpPr>
           <p:spPr>
             <a:xfrm>
-              <a:off x="4186587" y="4608644"/>
-              <a:ext cx="0" cy="1359782"/>
+              <a:off x="4186450" y="4608827"/>
+              <a:ext cx="0" cy="1359873"/>
             </a:xfrm>
             <a:custGeom>
               <a:avLst/>
               <a:pathLst>
-                <a:path w="0" h="1359782">
+                <a:path w="0" h="1359873">
                   <a:moveTo>
-                    <a:pt x="0" y="1359782"/>
+                    <a:pt x="0" y="1359873"/>
                   </a:moveTo>
                   <a:lnTo>
                     <a:pt x="0" y="0"/>
@@ -19557,7 +19557,7 @@
           </p:nvSpPr>
           <p:spPr>
             <a:xfrm>
-              <a:off x="4158119" y="5892979"/>
+              <a:off x="4157982" y="5893246"/>
               <a:ext cx="28468" cy="0"/>
             </a:xfrm>
             <a:custGeom>
@@ -19597,7 +19597,7 @@
           </p:nvSpPr>
           <p:spPr>
             <a:xfrm>
-              <a:off x="4158119" y="5645043"/>
+              <a:off x="4157982" y="5645008"/>
               <a:ext cx="28468" cy="0"/>
             </a:xfrm>
             <a:custGeom>
@@ -19637,7 +19637,7 @@
           </p:nvSpPr>
           <p:spPr>
             <a:xfrm>
-              <a:off x="4158119" y="5397107"/>
+              <a:off x="4157982" y="5396769"/>
               <a:ext cx="28468" cy="0"/>
             </a:xfrm>
             <a:custGeom>
@@ -19677,7 +19677,7 @@
           </p:nvSpPr>
           <p:spPr>
             <a:xfrm>
-              <a:off x="4158119" y="5149171"/>
+              <a:off x="4157982" y="5148530"/>
               <a:ext cx="28468" cy="0"/>
             </a:xfrm>
             <a:custGeom>
@@ -19717,7 +19717,7 @@
           </p:nvSpPr>
           <p:spPr>
             <a:xfrm>
-              <a:off x="4158119" y="4901235"/>
+              <a:off x="4157982" y="4900292"/>
               <a:ext cx="28468" cy="0"/>
             </a:xfrm>
             <a:custGeom>
@@ -19757,7 +19757,7 @@
           </p:nvSpPr>
           <p:spPr>
             <a:xfrm>
-              <a:off x="4158119" y="4653299"/>
+              <a:off x="4157982" y="4652053"/>
               <a:ext cx="28468" cy="0"/>
             </a:xfrm>
             <a:custGeom>
@@ -19797,18 +19797,18 @@
           </p:nvSpPr>
           <p:spPr>
             <a:xfrm>
-              <a:off x="4186587" y="5968427"/>
-              <a:ext cx="2746591" cy="0"/>
+              <a:off x="4186450" y="5968701"/>
+              <a:ext cx="2746729" cy="0"/>
             </a:xfrm>
             <a:custGeom>
               <a:avLst/>
               <a:pathLst>
-                <a:path w="2746591" h="0">
+                <a:path w="2746729" h="0">
                   <a:moveTo>
                     <a:pt x="0" y="0"/>
                   </a:moveTo>
                   <a:lnTo>
-                    <a:pt x="2746591" y="0"/>
+                    <a:pt x="2746729" y="0"/>
                   </a:lnTo>
                 </a:path>
               </a:pathLst>
@@ -19837,7 +19837,7 @@
           </p:nvSpPr>
           <p:spPr>
             <a:xfrm>
-              <a:off x="4505642" y="5968427"/>
+              <a:off x="4476302" y="5968701"/>
               <a:ext cx="0" cy="28468"/>
             </a:xfrm>
             <a:custGeom>
@@ -19877,7 +19877,7 @@
           </p:nvSpPr>
           <p:spPr>
             <a:xfrm>
-              <a:off x="5209749" y="5968427"/>
+              <a:off x="5195851" y="5968701"/>
               <a:ext cx="0" cy="28468"/>
             </a:xfrm>
             <a:custGeom>
@@ -19917,7 +19917,7 @@
           </p:nvSpPr>
           <p:spPr>
             <a:xfrm>
-              <a:off x="5913856" y="5968427"/>
+              <a:off x="5915400" y="5968701"/>
               <a:ext cx="0" cy="28468"/>
             </a:xfrm>
             <a:custGeom>
@@ -19957,7 +19957,7 @@
           </p:nvSpPr>
           <p:spPr>
             <a:xfrm>
-              <a:off x="6617963" y="5968427"/>
+              <a:off x="6634950" y="5968701"/>
               <a:ext cx="0" cy="28468"/>
             </a:xfrm>
             <a:custGeom>
@@ -19997,7 +19997,7 @@
           </p:nvSpPr>
           <p:spPr>
             <a:xfrm>
-              <a:off x="4477387" y="6019670"/>
+              <a:off x="4448047" y="6019944"/>
               <a:ext cx="56509" cy="72877"/>
             </a:xfrm>
             <a:prstGeom prst="rect">
@@ -20043,7 +20043,7 @@
           </p:nvSpPr>
           <p:spPr>
             <a:xfrm>
-              <a:off x="5181494" y="6019670"/>
+              <a:off x="5167596" y="6019944"/>
               <a:ext cx="56509" cy="72877"/>
             </a:xfrm>
             <a:prstGeom prst="rect">
@@ -20089,7 +20089,7 @@
           </p:nvSpPr>
           <p:spPr>
             <a:xfrm>
-              <a:off x="5885601" y="6019670"/>
+              <a:off x="5887145" y="6019944"/>
               <a:ext cx="56509" cy="72877"/>
             </a:xfrm>
             <a:prstGeom prst="rect">
@@ -20135,7 +20135,7 @@
           </p:nvSpPr>
           <p:spPr>
             <a:xfrm>
-              <a:off x="6589708" y="6019670"/>
+              <a:off x="6606695" y="6019944"/>
               <a:ext cx="56509" cy="72877"/>
             </a:xfrm>
             <a:prstGeom prst="rect">
@@ -20181,8 +20181,8 @@
           </p:nvSpPr>
           <p:spPr>
             <a:xfrm>
-              <a:off x="5277471" y="6177306"/>
-              <a:ext cx="564824" cy="91440"/>
+              <a:off x="5298753" y="6177580"/>
+              <a:ext cx="522122" cy="91165"/>
             </a:xfrm>
             <a:prstGeom prst="rect">
               <a:avLst/>
@@ -20205,7 +20205,7 @@
                 </a:spcAft>
               </a:pPr>
               <a:r>
-                <a:rPr sz="1000" b="1">
+                <a:rPr sz="1000">
                   <a:solidFill>
                     <a:srgbClr val="000000">
                       <a:alpha val="100000"/>
@@ -20227,7 +20227,7 @@
           </p:nvSpPr>
           <p:spPr>
             <a:xfrm>
-              <a:off x="4186587" y="4432104"/>
+              <a:off x="4186450" y="4432287"/>
               <a:ext cx="854049" cy="91440"/>
             </a:xfrm>
             <a:prstGeom prst="rect">
@@ -20273,7 +20273,7 @@
           </p:nvSpPr>
           <p:spPr>
             <a:xfrm>
-              <a:off x="1889186" y="6402291"/>
+              <a:off x="1889049" y="6402291"/>
               <a:ext cx="2162967" cy="581497"/>
             </a:xfrm>
             <a:prstGeom prst="rect">
@@ -20299,7 +20299,7 @@
           </p:nvSpPr>
           <p:spPr>
             <a:xfrm>
-              <a:off x="2754643" y="6414956"/>
+              <a:off x="2754506" y="6414956"/>
               <a:ext cx="432054" cy="82296"/>
             </a:xfrm>
             <a:prstGeom prst="rect">
@@ -20345,7 +20345,7 @@
           </p:nvSpPr>
           <p:spPr>
             <a:xfrm>
-              <a:off x="1889186" y="6566853"/>
+              <a:off x="1889049" y="6566853"/>
               <a:ext cx="180000" cy="179999"/>
             </a:xfrm>
             <a:prstGeom prst="rect">
@@ -20371,7 +20371,7 @@
           </p:nvSpPr>
           <p:spPr>
             <a:xfrm>
-              <a:off x="1941627" y="6619294"/>
+              <a:off x="1941490" y="6619294"/>
               <a:ext cx="75116" cy="75116"/>
             </a:xfrm>
             <a:prstGeom prst="ellipse">
@@ -20397,7 +20397,7 @@
           </p:nvSpPr>
           <p:spPr>
             <a:xfrm>
-              <a:off x="1889186" y="6803789"/>
+              <a:off x="1889049" y="6803789"/>
               <a:ext cx="180000" cy="180000"/>
             </a:xfrm>
             <a:prstGeom prst="rect">
@@ -20423,7 +20423,7 @@
           </p:nvSpPr>
           <p:spPr>
             <a:xfrm>
-              <a:off x="1941627" y="6856231"/>
+              <a:off x="1941490" y="6856231"/>
               <a:ext cx="75116" cy="75116"/>
             </a:xfrm>
             <a:prstGeom prst="ellipse">
@@ -20449,7 +20449,7 @@
           </p:nvSpPr>
           <p:spPr>
             <a:xfrm>
-              <a:off x="2341067" y="6566853"/>
+              <a:off x="2340930" y="6566853"/>
               <a:ext cx="180000" cy="179999"/>
             </a:xfrm>
             <a:prstGeom prst="rect">
@@ -20475,7 +20475,7 @@
           </p:nvSpPr>
           <p:spPr>
             <a:xfrm>
-              <a:off x="2393509" y="6619294"/>
+              <a:off x="2393372" y="6619294"/>
               <a:ext cx="75116" cy="75116"/>
             </a:xfrm>
             <a:prstGeom prst="ellipse">
@@ -20501,7 +20501,7 @@
           </p:nvSpPr>
           <p:spPr>
             <a:xfrm>
-              <a:off x="2341067" y="6803789"/>
+              <a:off x="2340930" y="6803789"/>
               <a:ext cx="180000" cy="180000"/>
             </a:xfrm>
             <a:prstGeom prst="rect">
@@ -20527,7 +20527,7 @@
           </p:nvSpPr>
           <p:spPr>
             <a:xfrm>
-              <a:off x="2393509" y="6856231"/>
+              <a:off x="2393372" y="6856231"/>
               <a:ext cx="75116" cy="75116"/>
             </a:xfrm>
             <a:prstGeom prst="ellipse">
@@ -20553,7 +20553,7 @@
           </p:nvSpPr>
           <p:spPr>
             <a:xfrm>
-              <a:off x="2787279" y="6566853"/>
+              <a:off x="2787142" y="6566853"/>
               <a:ext cx="179999" cy="179999"/>
             </a:xfrm>
             <a:prstGeom prst="rect">
@@ -20579,7 +20579,7 @@
           </p:nvSpPr>
           <p:spPr>
             <a:xfrm>
-              <a:off x="2839721" y="6619294"/>
+              <a:off x="2839584" y="6619294"/>
               <a:ext cx="75116" cy="75116"/>
             </a:xfrm>
             <a:prstGeom prst="ellipse">
@@ -20605,7 +20605,7 @@
           </p:nvSpPr>
           <p:spPr>
             <a:xfrm>
-              <a:off x="2787279" y="6803789"/>
+              <a:off x="2787142" y="6803789"/>
               <a:ext cx="179999" cy="180000"/>
             </a:xfrm>
             <a:prstGeom prst="rect">
@@ -20631,7 +20631,7 @@
           </p:nvSpPr>
           <p:spPr>
             <a:xfrm>
-              <a:off x="2839721" y="6856231"/>
+              <a:off x="2839584" y="6856231"/>
               <a:ext cx="75116" cy="75116"/>
             </a:xfrm>
             <a:prstGeom prst="ellipse">
@@ -20657,7 +20657,7 @@
           </p:nvSpPr>
           <p:spPr>
             <a:xfrm>
-              <a:off x="3222244" y="6566853"/>
+              <a:off x="3222107" y="6566853"/>
               <a:ext cx="179999" cy="179999"/>
             </a:xfrm>
             <a:prstGeom prst="rect">
@@ -20683,7 +20683,7 @@
           </p:nvSpPr>
           <p:spPr>
             <a:xfrm>
-              <a:off x="3274686" y="6619294"/>
+              <a:off x="3274548" y="6619294"/>
               <a:ext cx="75116" cy="75116"/>
             </a:xfrm>
             <a:prstGeom prst="ellipse">
@@ -20709,7 +20709,7 @@
           </p:nvSpPr>
           <p:spPr>
             <a:xfrm>
-              <a:off x="3222244" y="6803789"/>
+              <a:off x="3222107" y="6803789"/>
               <a:ext cx="179999" cy="180000"/>
             </a:xfrm>
             <a:prstGeom prst="rect">
@@ -20735,7 +20735,7 @@
           </p:nvSpPr>
           <p:spPr>
             <a:xfrm>
-              <a:off x="3274686" y="6856231"/>
+              <a:off x="3274548" y="6856231"/>
               <a:ext cx="75116" cy="75116"/>
             </a:xfrm>
             <a:prstGeom prst="ellipse">
@@ -20761,8 +20761,8 @@
           </p:nvSpPr>
           <p:spPr>
             <a:xfrm>
-              <a:off x="3668456" y="6566853"/>
-              <a:ext cx="180000" cy="179999"/>
+              <a:off x="3668319" y="6566853"/>
+              <a:ext cx="179999" cy="179999"/>
             </a:xfrm>
             <a:prstGeom prst="rect">
               <a:avLst/>
@@ -20787,7 +20787,7 @@
           </p:nvSpPr>
           <p:spPr>
             <a:xfrm>
-              <a:off x="3720898" y="6619294"/>
+              <a:off x="3720760" y="6619294"/>
               <a:ext cx="75116" cy="75116"/>
             </a:xfrm>
             <a:prstGeom prst="ellipse">
@@ -20813,8 +20813,8 @@
           </p:nvSpPr>
           <p:spPr>
             <a:xfrm>
-              <a:off x="3668456" y="6803789"/>
-              <a:ext cx="180000" cy="180000"/>
+              <a:off x="3668319" y="6803789"/>
+              <a:ext cx="179999" cy="180000"/>
             </a:xfrm>
             <a:prstGeom prst="rect">
               <a:avLst/>
@@ -20839,7 +20839,7 @@
           </p:nvSpPr>
           <p:spPr>
             <a:xfrm>
-              <a:off x="3720898" y="6856231"/>
+              <a:off x="3720760" y="6856231"/>
               <a:ext cx="75116" cy="75116"/>
             </a:xfrm>
             <a:prstGeom prst="ellipse">
@@ -20865,7 +20865,7 @@
           </p:nvSpPr>
           <p:spPr>
             <a:xfrm>
-              <a:off x="2126122" y="6620414"/>
+              <a:off x="2125985" y="6620414"/>
               <a:ext cx="152339" cy="72877"/>
             </a:xfrm>
             <a:prstGeom prst="rect">
@@ -20911,7 +20911,7 @@
           </p:nvSpPr>
           <p:spPr>
             <a:xfrm>
-              <a:off x="2126122" y="6857350"/>
+              <a:off x="2125985" y="6857350"/>
               <a:ext cx="158008" cy="72877"/>
             </a:xfrm>
             <a:prstGeom prst="rect">
@@ -20957,7 +20957,7 @@
           </p:nvSpPr>
           <p:spPr>
             <a:xfrm>
-              <a:off x="2578004" y="6620414"/>
+              <a:off x="2577866" y="6620414"/>
               <a:ext cx="141091" cy="72877"/>
             </a:xfrm>
             <a:prstGeom prst="rect">
@@ -21003,7 +21003,7 @@
           </p:nvSpPr>
           <p:spPr>
             <a:xfrm>
-              <a:off x="2578004" y="6857350"/>
+              <a:off x="2577866" y="6857350"/>
               <a:ext cx="152339" cy="72877"/>
             </a:xfrm>
             <a:prstGeom prst="rect">
@@ -21049,7 +21049,7 @@
           </p:nvSpPr>
           <p:spPr>
             <a:xfrm>
-              <a:off x="3024216" y="6620414"/>
+              <a:off x="3024078" y="6620414"/>
               <a:ext cx="141091" cy="72877"/>
             </a:xfrm>
             <a:prstGeom prst="rect">
@@ -21095,7 +21095,7 @@
           </p:nvSpPr>
           <p:spPr>
             <a:xfrm>
-              <a:off x="3024216" y="6857350"/>
+              <a:off x="3024078" y="6857350"/>
               <a:ext cx="141091" cy="72877"/>
             </a:xfrm>
             <a:prstGeom prst="rect">
@@ -21141,7 +21141,7 @@
           </p:nvSpPr>
           <p:spPr>
             <a:xfrm>
-              <a:off x="3459181" y="6620414"/>
+              <a:off x="3459043" y="6620414"/>
               <a:ext cx="129844" cy="72877"/>
             </a:xfrm>
             <a:prstGeom prst="rect">
@@ -21187,7 +21187,7 @@
           </p:nvSpPr>
           <p:spPr>
             <a:xfrm>
-              <a:off x="3459181" y="6857350"/>
+              <a:off x="3459043" y="6857350"/>
               <a:ext cx="152339" cy="72877"/>
             </a:xfrm>
             <a:prstGeom prst="rect">
@@ -21233,7 +21233,7 @@
           </p:nvSpPr>
           <p:spPr>
             <a:xfrm>
-              <a:off x="3905393" y="6620414"/>
+              <a:off x="3905255" y="6620414"/>
               <a:ext cx="146761" cy="72877"/>
             </a:xfrm>
             <a:prstGeom prst="rect">
@@ -21279,7 +21279,7 @@
           </p:nvSpPr>
           <p:spPr>
             <a:xfrm>
-              <a:off x="3905393" y="6857350"/>
+              <a:off x="3905255" y="6857350"/>
               <a:ext cx="135514" cy="72877"/>
             </a:xfrm>
             <a:prstGeom prst="rect">
@@ -21325,7 +21325,7 @@
           </p:nvSpPr>
           <p:spPr>
             <a:xfrm>
-              <a:off x="4191332" y="6402291"/>
+              <a:off x="4191195" y="6402291"/>
               <a:ext cx="2162967" cy="581497"/>
             </a:xfrm>
             <a:prstGeom prst="rect">
@@ -21351,7 +21351,7 @@
           </p:nvSpPr>
           <p:spPr>
             <a:xfrm>
-              <a:off x="5056789" y="6414956"/>
+              <a:off x="5056652" y="6414956"/>
               <a:ext cx="432054" cy="82296"/>
             </a:xfrm>
             <a:prstGeom prst="rect">
@@ -21397,7 +21397,7 @@
           </p:nvSpPr>
           <p:spPr>
             <a:xfrm>
-              <a:off x="4191332" y="6566853"/>
+              <a:off x="4191195" y="6566853"/>
               <a:ext cx="180000" cy="179999"/>
             </a:xfrm>
             <a:prstGeom prst="rect">
@@ -21423,7 +21423,7 @@
           </p:nvSpPr>
           <p:spPr>
             <a:xfrm>
-              <a:off x="4243773" y="6619294"/>
+              <a:off x="4243636" y="6619294"/>
               <a:ext cx="75116" cy="75116"/>
             </a:xfrm>
             <a:prstGeom prst="ellipse">
@@ -21449,7 +21449,7 @@
           </p:nvSpPr>
           <p:spPr>
             <a:xfrm>
-              <a:off x="4191332" y="6803789"/>
+              <a:off x="4191195" y="6803789"/>
               <a:ext cx="180000" cy="180000"/>
             </a:xfrm>
             <a:prstGeom prst="rect">
@@ -21475,7 +21475,7 @@
           </p:nvSpPr>
           <p:spPr>
             <a:xfrm>
-              <a:off x="4243773" y="6856231"/>
+              <a:off x="4243636" y="6856231"/>
               <a:ext cx="75116" cy="75116"/>
             </a:xfrm>
             <a:prstGeom prst="ellipse">
@@ -21501,7 +21501,7 @@
           </p:nvSpPr>
           <p:spPr>
             <a:xfrm>
-              <a:off x="4643213" y="6566853"/>
+              <a:off x="4643076" y="6566853"/>
               <a:ext cx="180000" cy="179999"/>
             </a:xfrm>
             <a:prstGeom prst="rect">
@@ -21527,7 +21527,7 @@
           </p:nvSpPr>
           <p:spPr>
             <a:xfrm>
-              <a:off x="4695655" y="6619294"/>
+              <a:off x="4695518" y="6619294"/>
               <a:ext cx="75116" cy="75116"/>
             </a:xfrm>
             <a:prstGeom prst="ellipse">
@@ -21553,7 +21553,7 @@
           </p:nvSpPr>
           <p:spPr>
             <a:xfrm>
-              <a:off x="4643213" y="6803789"/>
+              <a:off x="4643076" y="6803789"/>
               <a:ext cx="180000" cy="180000"/>
             </a:xfrm>
             <a:prstGeom prst="rect">
@@ -21579,7 +21579,7 @@
           </p:nvSpPr>
           <p:spPr>
             <a:xfrm>
-              <a:off x="4695655" y="6856231"/>
+              <a:off x="4695518" y="6856231"/>
               <a:ext cx="75116" cy="75116"/>
             </a:xfrm>
             <a:prstGeom prst="ellipse">
@@ -21605,7 +21605,7 @@
           </p:nvSpPr>
           <p:spPr>
             <a:xfrm>
-              <a:off x="5089425" y="6566853"/>
+              <a:off x="5089288" y="6566853"/>
               <a:ext cx="180000" cy="179999"/>
             </a:xfrm>
             <a:prstGeom prst="rect">
@@ -21631,7 +21631,7 @@
           </p:nvSpPr>
           <p:spPr>
             <a:xfrm>
-              <a:off x="5141867" y="6619294"/>
+              <a:off x="5141730" y="6619294"/>
               <a:ext cx="75116" cy="75116"/>
             </a:xfrm>
             <a:prstGeom prst="ellipse">
@@ -21657,7 +21657,7 @@
           </p:nvSpPr>
           <p:spPr>
             <a:xfrm>
-              <a:off x="5089425" y="6803789"/>
+              <a:off x="5089288" y="6803789"/>
               <a:ext cx="180000" cy="180000"/>
             </a:xfrm>
             <a:prstGeom prst="rect">
@@ -21683,7 +21683,7 @@
           </p:nvSpPr>
           <p:spPr>
             <a:xfrm>
-              <a:off x="5141867" y="6856231"/>
+              <a:off x="5141730" y="6856231"/>
               <a:ext cx="75116" cy="75116"/>
             </a:xfrm>
             <a:prstGeom prst="ellipse">
@@ -21709,7 +21709,7 @@
           </p:nvSpPr>
           <p:spPr>
             <a:xfrm>
-              <a:off x="5524390" y="6566853"/>
+              <a:off x="5524253" y="6566853"/>
               <a:ext cx="180000" cy="179999"/>
             </a:xfrm>
             <a:prstGeom prst="rect">
@@ -21735,7 +21735,7 @@
           </p:nvSpPr>
           <p:spPr>
             <a:xfrm>
-              <a:off x="5576832" y="6619294"/>
+              <a:off x="5576694" y="6619294"/>
               <a:ext cx="75116" cy="75116"/>
             </a:xfrm>
             <a:prstGeom prst="ellipse">
@@ -21761,7 +21761,7 @@
           </p:nvSpPr>
           <p:spPr>
             <a:xfrm>
-              <a:off x="5524390" y="6803789"/>
+              <a:off x="5524253" y="6803789"/>
               <a:ext cx="180000" cy="180000"/>
             </a:xfrm>
             <a:prstGeom prst="rect">
@@ -21787,7 +21787,7 @@
           </p:nvSpPr>
           <p:spPr>
             <a:xfrm>
-              <a:off x="5576832" y="6856231"/>
+              <a:off x="5576694" y="6856231"/>
               <a:ext cx="75116" cy="75116"/>
             </a:xfrm>
             <a:prstGeom prst="ellipse">
@@ -21813,7 +21813,7 @@
           </p:nvSpPr>
           <p:spPr>
             <a:xfrm>
-              <a:off x="5970602" y="6566853"/>
+              <a:off x="5970465" y="6566853"/>
               <a:ext cx="180000" cy="179999"/>
             </a:xfrm>
             <a:prstGeom prst="rect">
@@ -21839,7 +21839,7 @@
           </p:nvSpPr>
           <p:spPr>
             <a:xfrm>
-              <a:off x="6023044" y="6619294"/>
+              <a:off x="6022906" y="6619294"/>
               <a:ext cx="75116" cy="75116"/>
             </a:xfrm>
             <a:prstGeom prst="ellipse">
@@ -21865,7 +21865,7 @@
           </p:nvSpPr>
           <p:spPr>
             <a:xfrm>
-              <a:off x="5970602" y="6803789"/>
+              <a:off x="5970465" y="6803789"/>
               <a:ext cx="180000" cy="180000"/>
             </a:xfrm>
             <a:prstGeom prst="rect">
@@ -21891,7 +21891,7 @@
           </p:nvSpPr>
           <p:spPr>
             <a:xfrm>
-              <a:off x="6023044" y="6856231"/>
+              <a:off x="6022906" y="6856231"/>
               <a:ext cx="75116" cy="75116"/>
             </a:xfrm>
             <a:prstGeom prst="ellipse">
@@ -21917,7 +21917,7 @@
           </p:nvSpPr>
           <p:spPr>
             <a:xfrm>
-              <a:off x="4428268" y="6620414"/>
+              <a:off x="4428131" y="6620414"/>
               <a:ext cx="152339" cy="72877"/>
             </a:xfrm>
             <a:prstGeom prst="rect">
@@ -21963,7 +21963,7 @@
           </p:nvSpPr>
           <p:spPr>
             <a:xfrm>
-              <a:off x="4428268" y="6857350"/>
+              <a:off x="4428131" y="6857350"/>
               <a:ext cx="158008" cy="72877"/>
             </a:xfrm>
             <a:prstGeom prst="rect">
@@ -22009,7 +22009,7 @@
           </p:nvSpPr>
           <p:spPr>
             <a:xfrm>
-              <a:off x="4880150" y="6620414"/>
+              <a:off x="4880012" y="6620414"/>
               <a:ext cx="141091" cy="72877"/>
             </a:xfrm>
             <a:prstGeom prst="rect">
@@ -22055,7 +22055,7 @@
           </p:nvSpPr>
           <p:spPr>
             <a:xfrm>
-              <a:off x="4880150" y="6857350"/>
+              <a:off x="4880012" y="6857350"/>
               <a:ext cx="152339" cy="72877"/>
             </a:xfrm>
             <a:prstGeom prst="rect">
@@ -22101,7 +22101,7 @@
           </p:nvSpPr>
           <p:spPr>
             <a:xfrm>
-              <a:off x="5326362" y="6620414"/>
+              <a:off x="5326224" y="6620414"/>
               <a:ext cx="141091" cy="72877"/>
             </a:xfrm>
             <a:prstGeom prst="rect">
@@ -22147,7 +22147,7 @@
           </p:nvSpPr>
           <p:spPr>
             <a:xfrm>
-              <a:off x="5326362" y="6857350"/>
+              <a:off x="5326224" y="6857350"/>
               <a:ext cx="141091" cy="72877"/>
             </a:xfrm>
             <a:prstGeom prst="rect">
@@ -22193,7 +22193,7 @@
           </p:nvSpPr>
           <p:spPr>
             <a:xfrm>
-              <a:off x="5761327" y="6620414"/>
+              <a:off x="5761189" y="6620414"/>
               <a:ext cx="129844" cy="72877"/>
             </a:xfrm>
             <a:prstGeom prst="rect">
@@ -22239,7 +22239,7 @@
           </p:nvSpPr>
           <p:spPr>
             <a:xfrm>
-              <a:off x="5761327" y="6857350"/>
+              <a:off x="5761189" y="6857350"/>
               <a:ext cx="152339" cy="72877"/>
             </a:xfrm>
             <a:prstGeom prst="rect">
@@ -22285,7 +22285,7 @@
           </p:nvSpPr>
           <p:spPr>
             <a:xfrm>
-              <a:off x="6207539" y="6620414"/>
+              <a:off x="6207401" y="6620414"/>
               <a:ext cx="146761" cy="72877"/>
             </a:xfrm>
             <a:prstGeom prst="rect">
@@ -22331,7 +22331,7 @@
           </p:nvSpPr>
           <p:spPr>
             <a:xfrm>
-              <a:off x="6207539" y="6857350"/>
+              <a:off x="6207401" y="6857350"/>
               <a:ext cx="135514" cy="72877"/>
             </a:xfrm>
             <a:prstGeom prst="rect">

--- a/figures/Figure_1.pptx
+++ b/figures/Figure_1.pptx
@@ -2515,7 +2515,7 @@
           </p:nvSpPr>
           <p:spPr>
             <a:xfrm>
-              <a:off x="1509123" y="2249554"/>
+              <a:off x="1529594" y="2249595"/>
               <a:ext cx="75116" cy="75116"/>
             </a:xfrm>
             <a:prstGeom prst="ellipse">
@@ -2541,7 +2541,7 @@
           </p:nvSpPr>
           <p:spPr>
             <a:xfrm>
-              <a:off x="1426889" y="2182210"/>
+              <a:off x="1408410" y="2182183"/>
               <a:ext cx="75116" cy="75116"/>
             </a:xfrm>
             <a:prstGeom prst="ellipse">
@@ -2567,7 +2567,7 @@
           </p:nvSpPr>
           <p:spPr>
             <a:xfrm>
-              <a:off x="1397325" y="2283785"/>
+              <a:off x="1452392" y="2283727"/>
               <a:ext cx="75116" cy="75116"/>
             </a:xfrm>
             <a:prstGeom prst="ellipse">
@@ -2593,7 +2593,7 @@
           </p:nvSpPr>
           <p:spPr>
             <a:xfrm>
-              <a:off x="1584460" y="2280922"/>
+              <a:off x="1549914" y="2280856"/>
               <a:ext cx="75116" cy="75116"/>
             </a:xfrm>
             <a:prstGeom prst="ellipse">
@@ -2619,7 +2619,7 @@
           </p:nvSpPr>
           <p:spPr>
             <a:xfrm>
-              <a:off x="1462711" y="2305907"/>
+              <a:off x="1561313" y="2305831"/>
               <a:ext cx="75116" cy="75116"/>
             </a:xfrm>
             <a:prstGeom prst="ellipse">
@@ -2645,7 +2645,7 @@
           </p:nvSpPr>
           <p:spPr>
             <a:xfrm>
-              <a:off x="1467700" y="2163671"/>
+              <a:off x="1435071" y="2163607"/>
               <a:ext cx="75116" cy="75116"/>
             </a:xfrm>
             <a:prstGeom prst="ellipse">
@@ -2671,7 +2671,7 @@
           </p:nvSpPr>
           <p:spPr>
             <a:xfrm>
-              <a:off x="1594731" y="2084386"/>
+              <a:off x="1602138" y="2084384"/>
               <a:ext cx="75116" cy="75116"/>
             </a:xfrm>
             <a:prstGeom prst="ellipse">
@@ -2697,7 +2697,7 @@
           </p:nvSpPr>
           <p:spPr>
             <a:xfrm>
-              <a:off x="1609494" y="2265348"/>
+              <a:off x="1421229" y="2265314"/>
               <a:ext cx="75116" cy="75116"/>
             </a:xfrm>
             <a:prstGeom prst="ellipse">
@@ -2723,7 +2723,7 @@
           </p:nvSpPr>
           <p:spPr>
             <a:xfrm>
-              <a:off x="1413578" y="2334458"/>
+              <a:off x="1397325" y="2334306"/>
               <a:ext cx="75116" cy="75116"/>
             </a:xfrm>
             <a:prstGeom prst="ellipse">
@@ -2749,7 +2749,7 @@
           </p:nvSpPr>
           <p:spPr>
             <a:xfrm>
-              <a:off x="1400753" y="2144015"/>
+              <a:off x="1545936" y="2144030"/>
               <a:ext cx="75116" cy="75116"/>
             </a:xfrm>
             <a:prstGeom prst="ellipse">
@@ -2775,7 +2775,7 @@
           </p:nvSpPr>
           <p:spPr>
             <a:xfrm>
-              <a:off x="2281264" y="2342442"/>
+              <a:off x="2353760" y="2342349"/>
               <a:ext cx="75116" cy="75116"/>
             </a:xfrm>
             <a:prstGeom prst="ellipse">
@@ -2801,7 +2801,7 @@
           </p:nvSpPr>
           <p:spPr>
             <a:xfrm>
-              <a:off x="2327078" y="2281647"/>
+              <a:off x="2262009" y="2281536"/>
               <a:ext cx="75116" cy="75116"/>
             </a:xfrm>
             <a:prstGeom prst="ellipse">
@@ -2827,7 +2827,7 @@
           </p:nvSpPr>
           <p:spPr>
             <a:xfrm>
-              <a:off x="2244695" y="1703282"/>
+              <a:off x="2319971" y="1703187"/>
               <a:ext cx="75116" cy="75116"/>
             </a:xfrm>
             <a:prstGeom prst="ellipse">
@@ -2853,7 +2853,7 @@
           </p:nvSpPr>
           <p:spPr>
             <a:xfrm>
-              <a:off x="2331170" y="2204380"/>
+              <a:off x="2167859" y="2204326"/>
               <a:ext cx="75116" cy="75116"/>
             </a:xfrm>
             <a:prstGeom prst="ellipse">
@@ -2879,7 +2879,7 @@
           </p:nvSpPr>
           <p:spPr>
             <a:xfrm>
-              <a:off x="2287827" y="2275699"/>
+              <a:off x="2249131" y="2275758"/>
               <a:ext cx="75116" cy="75116"/>
             </a:xfrm>
             <a:prstGeom prst="ellipse">
@@ -2905,7 +2905,7 @@
           </p:nvSpPr>
           <p:spPr>
             <a:xfrm>
-              <a:off x="2352491" y="2337064"/>
+              <a:off x="2230682" y="2337006"/>
               <a:ext cx="75116" cy="75116"/>
             </a:xfrm>
             <a:prstGeom prst="ellipse">
@@ -2931,7 +2931,7 @@
           </p:nvSpPr>
           <p:spPr>
             <a:xfrm>
-              <a:off x="2367992" y="2361938"/>
+              <a:off x="2296813" y="2361887"/>
               <a:ext cx="75116" cy="75116"/>
             </a:xfrm>
             <a:prstGeom prst="ellipse">
@@ -2957,7 +2957,7 @@
           </p:nvSpPr>
           <p:spPr>
             <a:xfrm>
-              <a:off x="2342329" y="2196567"/>
+              <a:off x="2221200" y="2196470"/>
               <a:ext cx="75116" cy="75116"/>
             </a:xfrm>
             <a:prstGeom prst="ellipse">
@@ -2983,7 +2983,7 @@
           </p:nvSpPr>
           <p:spPr>
             <a:xfrm>
-              <a:off x="2193023" y="1582901"/>
+              <a:off x="2169460" y="1582956"/>
               <a:ext cx="75116" cy="75116"/>
             </a:xfrm>
             <a:prstGeom prst="ellipse">
@@ -3009,7 +3009,7 @@
           </p:nvSpPr>
           <p:spPr>
             <a:xfrm>
-              <a:off x="2369456" y="1761818"/>
+              <a:off x="2319274" y="1761827"/>
               <a:ext cx="75116" cy="75116"/>
             </a:xfrm>
             <a:prstGeom prst="ellipse">
@@ -3035,7 +3035,7 @@
           </p:nvSpPr>
           <p:spPr>
             <a:xfrm>
-              <a:off x="2196641" y="2352764"/>
+              <a:off x="2354301" y="2352748"/>
               <a:ext cx="75116" cy="75116"/>
             </a:xfrm>
             <a:prstGeom prst="ellipse">
@@ -3061,7 +3061,7 @@
           </p:nvSpPr>
           <p:spPr>
             <a:xfrm>
-              <a:off x="2179743" y="2158364"/>
+              <a:off x="2335772" y="2158324"/>
               <a:ext cx="75116" cy="75116"/>
             </a:xfrm>
             <a:prstGeom prst="ellipse">
@@ -3087,7 +3087,7 @@
           </p:nvSpPr>
           <p:spPr>
             <a:xfrm>
-              <a:off x="2157979" y="2104549"/>
+              <a:off x="2278430" y="2104520"/>
               <a:ext cx="75116" cy="75116"/>
             </a:xfrm>
             <a:prstGeom prst="ellipse">
@@ -3113,7 +3113,7 @@
           </p:nvSpPr>
           <p:spPr>
             <a:xfrm>
-              <a:off x="2358515" y="2113969"/>
+              <a:off x="2344310" y="2113903"/>
               <a:ext cx="75116" cy="75116"/>
             </a:xfrm>
             <a:prstGeom prst="ellipse">
@@ -3139,7 +3139,7 @@
           </p:nvSpPr>
           <p:spPr>
             <a:xfrm>
-              <a:off x="2319566" y="2269041"/>
+              <a:off x="2315918" y="2269008"/>
               <a:ext cx="75116" cy="75116"/>
             </a:xfrm>
             <a:prstGeom prst="ellipse">
@@ -3165,7 +3165,7 @@
           </p:nvSpPr>
           <p:spPr>
             <a:xfrm>
-              <a:off x="2231505" y="2211564"/>
+              <a:off x="2309406" y="2211544"/>
               <a:ext cx="75116" cy="75116"/>
             </a:xfrm>
             <a:prstGeom prst="ellipse">
@@ -3191,7 +3191,7 @@
           </p:nvSpPr>
           <p:spPr>
             <a:xfrm>
-              <a:off x="2225704" y="1754122"/>
+              <a:off x="2348697" y="1754128"/>
               <a:ext cx="75116" cy="75116"/>
             </a:xfrm>
             <a:prstGeom prst="ellipse">
@@ -3217,7 +3217,7 @@
           </p:nvSpPr>
           <p:spPr>
             <a:xfrm>
-              <a:off x="2361145" y="1885015"/>
+              <a:off x="2190253" y="1885051"/>
               <a:ext cx="75116" cy="75116"/>
             </a:xfrm>
             <a:prstGeom prst="ellipse">
@@ -3243,7 +3243,7 @@
           </p:nvSpPr>
           <p:spPr>
             <a:xfrm>
-              <a:off x="2997322" y="2303624"/>
+              <a:off x="3011946" y="2303569"/>
               <a:ext cx="75116" cy="75116"/>
             </a:xfrm>
             <a:prstGeom prst="ellipse">
@@ -3269,7 +3269,7 @@
           </p:nvSpPr>
           <p:spPr>
             <a:xfrm>
-              <a:off x="2954774" y="2095305"/>
+              <a:off x="2920404" y="2095312"/>
               <a:ext cx="75116" cy="75116"/>
             </a:xfrm>
             <a:prstGeom prst="ellipse">
@@ -3295,7 +3295,7 @@
           </p:nvSpPr>
           <p:spPr>
             <a:xfrm>
-              <a:off x="2968297" y="2315696"/>
+              <a:off x="2946918" y="2315649"/>
               <a:ext cx="75116" cy="75116"/>
             </a:xfrm>
             <a:prstGeom prst="ellipse">
@@ -3321,7 +3321,7 @@
           </p:nvSpPr>
           <p:spPr>
             <a:xfrm>
-              <a:off x="3005814" y="2402053"/>
+              <a:off x="3017901" y="2402053"/>
               <a:ext cx="75116" cy="75116"/>
             </a:xfrm>
             <a:prstGeom prst="ellipse">
@@ -3347,7 +3347,7 @@
           </p:nvSpPr>
           <p:spPr>
             <a:xfrm>
-              <a:off x="3118998" y="2158359"/>
+              <a:off x="2954229" y="2158261"/>
               <a:ext cx="75116" cy="75116"/>
             </a:xfrm>
             <a:prstGeom prst="ellipse">
@@ -3373,7 +3373,7 @@
           </p:nvSpPr>
           <p:spPr>
             <a:xfrm>
-              <a:off x="2986063" y="2293568"/>
+              <a:off x="3065179" y="2293497"/>
               <a:ext cx="75116" cy="75116"/>
             </a:xfrm>
             <a:prstGeom prst="ellipse">
@@ -3399,7 +3399,7 @@
           </p:nvSpPr>
           <p:spPr>
             <a:xfrm>
-              <a:off x="3043364" y="1417574"/>
+              <a:off x="3014770" y="1417535"/>
               <a:ext cx="75116" cy="75116"/>
             </a:xfrm>
             <a:prstGeom prst="ellipse">
@@ -3425,7 +3425,7 @@
           </p:nvSpPr>
           <p:spPr>
             <a:xfrm>
-              <a:off x="3023867" y="2337288"/>
+              <a:off x="2947546" y="2337183"/>
               <a:ext cx="75116" cy="75116"/>
             </a:xfrm>
             <a:prstGeom prst="ellipse">
@@ -3451,7 +3451,7 @@
           </p:nvSpPr>
           <p:spPr>
             <a:xfrm>
-              <a:off x="2934101" y="2008580"/>
+              <a:off x="2934774" y="2008553"/>
               <a:ext cx="75116" cy="75116"/>
             </a:xfrm>
             <a:prstGeom prst="ellipse">
@@ -3477,7 +3477,7 @@
           </p:nvSpPr>
           <p:spPr>
             <a:xfrm>
-              <a:off x="3099601" y="1689511"/>
+              <a:off x="3044343" y="1689557"/>
               <a:ext cx="75116" cy="75116"/>
             </a:xfrm>
             <a:prstGeom prst="ellipse">
@@ -3503,7 +3503,7 @@
           </p:nvSpPr>
           <p:spPr>
             <a:xfrm>
-              <a:off x="3066159" y="1165804"/>
+              <a:off x="2992581" y="1165804"/>
               <a:ext cx="75116" cy="75116"/>
             </a:xfrm>
             <a:prstGeom prst="ellipse">
@@ -3529,7 +3529,7 @@
           </p:nvSpPr>
           <p:spPr>
             <a:xfrm>
-              <a:off x="3124545" y="1912650"/>
+              <a:off x="2997250" y="1912681"/>
               <a:ext cx="75116" cy="75116"/>
             </a:xfrm>
             <a:prstGeom prst="ellipse">
@@ -3555,7 +3555,7 @@
           </p:nvSpPr>
           <p:spPr>
             <a:xfrm>
-              <a:off x="3089241" y="2071304"/>
+              <a:off x="2986699" y="2071383"/>
               <a:ext cx="75116" cy="75116"/>
             </a:xfrm>
             <a:prstGeom prst="ellipse">
@@ -3581,7 +3581,7 @@
           </p:nvSpPr>
           <p:spPr>
             <a:xfrm>
-              <a:off x="3106921" y="1937327"/>
+              <a:off x="2991813" y="1937231"/>
               <a:ext cx="75116" cy="75116"/>
             </a:xfrm>
             <a:prstGeom prst="ellipse">
@@ -3607,7 +3607,7 @@
           </p:nvSpPr>
           <p:spPr>
             <a:xfrm>
-              <a:off x="3095887" y="2046542"/>
+              <a:off x="3109556" y="2046482"/>
               <a:ext cx="75116" cy="75116"/>
             </a:xfrm>
             <a:prstGeom prst="ellipse">
@@ -3633,7 +3633,7 @@
           </p:nvSpPr>
           <p:spPr>
             <a:xfrm>
-              <a:off x="3006545" y="2192139"/>
+              <a:off x="3138987" y="2192098"/>
               <a:ext cx="75116" cy="75116"/>
             </a:xfrm>
             <a:prstGeom prst="ellipse">
@@ -3659,7 +3659,7 @@
           </p:nvSpPr>
           <p:spPr>
             <a:xfrm>
-              <a:off x="3012356" y="2108877"/>
+              <a:off x="3123619" y="2108869"/>
               <a:ext cx="75116" cy="75116"/>
             </a:xfrm>
             <a:prstGeom prst="ellipse">
@@ -3685,7 +3685,7 @@
           </p:nvSpPr>
           <p:spPr>
             <a:xfrm>
-              <a:off x="3053328" y="2095007"/>
+              <a:off x="2992212" y="2094904"/>
               <a:ext cx="75116" cy="75116"/>
             </a:xfrm>
             <a:prstGeom prst="ellipse">
@@ -3711,7 +3711,7 @@
           </p:nvSpPr>
           <p:spPr>
             <a:xfrm>
-              <a:off x="2941998" y="2190825"/>
+              <a:off x="3125806" y="2190826"/>
               <a:ext cx="75116" cy="75116"/>
             </a:xfrm>
             <a:prstGeom prst="ellipse">
@@ -3737,7 +3737,7 @@
           </p:nvSpPr>
           <p:spPr>
             <a:xfrm>
-              <a:off x="2976292" y="2180727"/>
+              <a:off x="2942025" y="2180766"/>
               <a:ext cx="75116" cy="75116"/>
             </a:xfrm>
             <a:prstGeom prst="ellipse">
@@ -3763,7 +3763,7 @@
           </p:nvSpPr>
           <p:spPr>
             <a:xfrm>
-              <a:off x="3854106" y="2197357"/>
+              <a:off x="3692809" y="2197324"/>
               <a:ext cx="75116" cy="75116"/>
             </a:xfrm>
             <a:prstGeom prst="ellipse">
@@ -3789,7 +3789,7 @@
           </p:nvSpPr>
           <p:spPr>
             <a:xfrm>
-              <a:off x="3727023" y="2195185"/>
+              <a:off x="3767432" y="2195072"/>
               <a:ext cx="75116" cy="75116"/>
             </a:xfrm>
             <a:prstGeom prst="ellipse">
@@ -3815,7 +3815,7 @@
           </p:nvSpPr>
           <p:spPr>
             <a:xfrm>
-              <a:off x="3851970" y="2153579"/>
+              <a:off x="3816449" y="2153520"/>
               <a:ext cx="75116" cy="75116"/>
             </a:xfrm>
             <a:prstGeom prst="ellipse">
@@ -3841,7 +3841,7 @@
           </p:nvSpPr>
           <p:spPr>
             <a:xfrm>
-              <a:off x="3866860" y="2285155"/>
+              <a:off x="3790900" y="2285045"/>
               <a:ext cx="75116" cy="75116"/>
             </a:xfrm>
             <a:prstGeom prst="ellipse">
@@ -3867,7 +3867,7 @@
           </p:nvSpPr>
           <p:spPr>
             <a:xfrm>
-              <a:off x="3695323" y="1930796"/>
+              <a:off x="3800665" y="1930693"/>
               <a:ext cx="75116" cy="75116"/>
             </a:xfrm>
             <a:prstGeom prst="ellipse">
@@ -3893,7 +3893,7 @@
           </p:nvSpPr>
           <p:spPr>
             <a:xfrm>
-              <a:off x="3781514" y="1948080"/>
+              <a:off x="3737496" y="1948008"/>
               <a:ext cx="75116" cy="75116"/>
             </a:xfrm>
             <a:prstGeom prst="ellipse">
@@ -3919,7 +3919,7 @@
           </p:nvSpPr>
           <p:spPr>
             <a:xfrm>
-              <a:off x="3799731" y="2155858"/>
+              <a:off x="3870783" y="2155824"/>
               <a:ext cx="75116" cy="75116"/>
             </a:xfrm>
             <a:prstGeom prst="ellipse">
@@ -3945,7 +3945,7 @@
           </p:nvSpPr>
           <p:spPr>
             <a:xfrm>
-              <a:off x="3774696" y="2083576"/>
+              <a:off x="3827415" y="2083485"/>
               <a:ext cx="75116" cy="75116"/>
             </a:xfrm>
             <a:prstGeom prst="ellipse">
@@ -3971,7 +3971,7 @@
           </p:nvSpPr>
           <p:spPr>
             <a:xfrm>
-              <a:off x="3834743" y="1998482"/>
+              <a:off x="3747771" y="1998495"/>
               <a:ext cx="75116" cy="75116"/>
             </a:xfrm>
             <a:prstGeom prst="ellipse">
@@ -3997,7 +3997,7 @@
           </p:nvSpPr>
           <p:spPr>
             <a:xfrm>
-              <a:off x="3891052" y="1783810"/>
+              <a:off x="3789211" y="1783812"/>
               <a:ext cx="75116" cy="75116"/>
             </a:xfrm>
             <a:prstGeom prst="ellipse">
@@ -4023,7 +4023,7 @@
           </p:nvSpPr>
           <p:spPr>
             <a:xfrm>
-              <a:off x="3860613" y="1847372"/>
+              <a:off x="3692618" y="1847293"/>
               <a:ext cx="75116" cy="75116"/>
             </a:xfrm>
             <a:prstGeom prst="ellipse">
@@ -4049,7 +4049,7 @@
           </p:nvSpPr>
           <p:spPr>
             <a:xfrm>
-              <a:off x="3783181" y="1716972"/>
+              <a:off x="3792690" y="1716922"/>
               <a:ext cx="75116" cy="75116"/>
             </a:xfrm>
             <a:prstGeom prst="ellipse">
@@ -4075,7 +4075,7 @@
           </p:nvSpPr>
           <p:spPr>
             <a:xfrm>
-              <a:off x="3778543" y="1938081"/>
+              <a:off x="3767136" y="1938095"/>
               <a:ext cx="75116" cy="75116"/>
             </a:xfrm>
             <a:prstGeom prst="ellipse">
@@ -4101,7 +4101,7 @@
           </p:nvSpPr>
           <p:spPr>
             <a:xfrm>
-              <a:off x="3822829" y="1875771"/>
+              <a:off x="3787579" y="1875790"/>
               <a:ext cx="75116" cy="75116"/>
             </a:xfrm>
             <a:prstGeom prst="ellipse">
@@ -4127,7 +4127,7 @@
           </p:nvSpPr>
           <p:spPr>
             <a:xfrm>
-              <a:off x="3834663" y="2254933"/>
+              <a:off x="3853551" y="2254964"/>
               <a:ext cx="75116" cy="75116"/>
             </a:xfrm>
             <a:prstGeom prst="ellipse">
@@ -4153,7 +4153,7 @@
           </p:nvSpPr>
           <p:spPr>
             <a:xfrm>
-              <a:off x="3803519" y="2099622"/>
+              <a:off x="3714570" y="2099700"/>
               <a:ext cx="75116" cy="75116"/>
             </a:xfrm>
             <a:prstGeom prst="ellipse">
@@ -4179,7 +4179,7 @@
           </p:nvSpPr>
           <p:spPr>
             <a:xfrm>
-              <a:off x="3838506" y="2011760"/>
+              <a:off x="3871253" y="2011675"/>
               <a:ext cx="75116" cy="75116"/>
             </a:xfrm>
             <a:prstGeom prst="ellipse">
@@ -4205,7 +4205,7 @@
           </p:nvSpPr>
           <p:spPr>
             <a:xfrm>
-              <a:off x="3731950" y="2069733"/>
+              <a:off x="3867754" y="2069635"/>
               <a:ext cx="75116" cy="75116"/>
             </a:xfrm>
             <a:prstGeom prst="ellipse">
@@ -4231,7 +4231,7 @@
           </p:nvSpPr>
           <p:spPr>
             <a:xfrm>
-              <a:off x="3704914" y="1824519"/>
+              <a:off x="3845639" y="1824570"/>
               <a:ext cx="75116" cy="75116"/>
             </a:xfrm>
             <a:prstGeom prst="ellipse">
@@ -4257,7 +4257,7 @@
           </p:nvSpPr>
           <p:spPr>
             <a:xfrm>
-              <a:off x="3823365" y="2042204"/>
+              <a:off x="3733276" y="2042164"/>
               <a:ext cx="75116" cy="75116"/>
             </a:xfrm>
             <a:prstGeom prst="ellipse">
@@ -4283,7 +4283,7 @@
           </p:nvSpPr>
           <p:spPr>
             <a:xfrm>
-              <a:off x="3800383" y="1914520"/>
+              <a:off x="3894352" y="1914546"/>
               <a:ext cx="75116" cy="75116"/>
             </a:xfrm>
             <a:prstGeom prst="ellipse">
@@ -4309,7 +4309,7 @@
           </p:nvSpPr>
           <p:spPr>
             <a:xfrm>
-              <a:off x="3821734" y="1809304"/>
+              <a:off x="3846450" y="1809329"/>
               <a:ext cx="75116" cy="75116"/>
             </a:xfrm>
             <a:prstGeom prst="ellipse">
@@ -4335,7 +4335,7 @@
           </p:nvSpPr>
           <p:spPr>
             <a:xfrm>
-              <a:off x="3815628" y="1967483"/>
+              <a:off x="3863737" y="1967436"/>
               <a:ext cx="75116" cy="75116"/>
             </a:xfrm>
             <a:prstGeom prst="ellipse">
@@ -4361,7 +4361,7 @@
           </p:nvSpPr>
           <p:spPr>
             <a:xfrm>
-              <a:off x="3894352" y="1938794"/>
+              <a:off x="3876132" y="1938745"/>
               <a:ext cx="75116" cy="75116"/>
             </a:xfrm>
             <a:prstGeom prst="ellipse">
@@ -4387,42 +4387,42 @@
           </p:nvSpPr>
           <p:spPr>
             <a:xfrm>
-              <a:off x="1540350" y="1862454"/>
-              <a:ext cx="2294852" cy="534058"/>
+              <a:off x="1530215" y="1862439"/>
+              <a:ext cx="2303691" cy="534032"/>
             </a:xfrm>
             <a:custGeom>
               <a:avLst/>
               <a:pathLst>
-                <a:path w="2294852" h="534058">
+                <a:path w="2303691" h="534032">
                   <a:moveTo>
-                    <a:pt x="0" y="151574"/>
+                    <a:pt x="0" y="151566"/>
                   </a:moveTo>
                   <a:lnTo>
-                    <a:pt x="1212418" y="145463"/>
+                    <a:pt x="1217088" y="145455"/>
                   </a:lnTo>
                   <a:lnTo>
-                    <a:pt x="1529901" y="115623"/>
+                    <a:pt x="1535794" y="115617"/>
                   </a:lnTo>
                   <a:lnTo>
-                    <a:pt x="1977369" y="53053"/>
+                    <a:pt x="1984985" y="53050"/>
                   </a:lnTo>
                   <a:lnTo>
-                    <a:pt x="2294852" y="0"/>
+                    <a:pt x="2303691" y="0"/>
                   </a:lnTo>
                   <a:lnTo>
-                    <a:pt x="2294852" y="346088"/>
+                    <a:pt x="2303691" y="346071"/>
                   </a:lnTo>
                   <a:lnTo>
-                    <a:pt x="1977369" y="340009"/>
+                    <a:pt x="1984985" y="339992"/>
                   </a:lnTo>
                   <a:lnTo>
-                    <a:pt x="1529901" y="343646"/>
+                    <a:pt x="1535794" y="343629"/>
                   </a:lnTo>
                   <a:lnTo>
-                    <a:pt x="1212418" y="360781"/>
+                    <a:pt x="1217088" y="360763"/>
                   </a:lnTo>
                   <a:lnTo>
-                    <a:pt x="0" y="534058"/>
+                    <a:pt x="0" y="534032"/>
                   </a:lnTo>
                   <a:close/>
                 </a:path>
@@ -4448,27 +4448,27 @@
           </p:nvSpPr>
           <p:spPr>
             <a:xfrm>
-              <a:off x="1540350" y="1862454"/>
-              <a:ext cx="2294852" cy="151574"/>
+              <a:off x="1530215" y="1862439"/>
+              <a:ext cx="2303691" cy="151566"/>
             </a:xfrm>
             <a:custGeom>
               <a:avLst/>
               <a:pathLst>
-                <a:path w="2294852" h="151574">
+                <a:path w="2303691" h="151566">
                   <a:moveTo>
-                    <a:pt x="0" y="151574"/>
+                    <a:pt x="0" y="151566"/>
                   </a:moveTo>
                   <a:lnTo>
-                    <a:pt x="1212418" y="145463"/>
+                    <a:pt x="1217088" y="145455"/>
                   </a:lnTo>
                   <a:lnTo>
-                    <a:pt x="1529901" y="115623"/>
+                    <a:pt x="1535794" y="115617"/>
                   </a:lnTo>
                   <a:lnTo>
-                    <a:pt x="1977369" y="53053"/>
+                    <a:pt x="1984985" y="53050"/>
                   </a:lnTo>
                   <a:lnTo>
-                    <a:pt x="2294852" y="0"/>
+                    <a:pt x="2303691" y="0"/>
                   </a:lnTo>
                 </a:path>
               </a:pathLst>
@@ -4488,27 +4488,27 @@
           </p:nvSpPr>
           <p:spPr>
             <a:xfrm>
-              <a:off x="1540350" y="2202463"/>
-              <a:ext cx="2294852" cy="194049"/>
+              <a:off x="1530215" y="2202432"/>
+              <a:ext cx="2303691" cy="194039"/>
             </a:xfrm>
             <a:custGeom>
               <a:avLst/>
               <a:pathLst>
-                <a:path w="2294852" h="194049">
+                <a:path w="2303691" h="194039">
                   <a:moveTo>
-                    <a:pt x="2294852" y="6078"/>
+                    <a:pt x="2303691" y="6078"/>
                   </a:moveTo>
                   <a:lnTo>
-                    <a:pt x="1977369" y="0"/>
+                    <a:pt x="1984985" y="0"/>
                   </a:lnTo>
                   <a:lnTo>
-                    <a:pt x="1529901" y="3637"/>
+                    <a:pt x="1535794" y="3636"/>
                   </a:lnTo>
                   <a:lnTo>
-                    <a:pt x="1212418" y="20771"/>
+                    <a:pt x="1217088" y="20770"/>
                   </a:lnTo>
                   <a:lnTo>
-                    <a:pt x="0" y="194049"/>
+                    <a:pt x="0" y="194039"/>
                   </a:lnTo>
                 </a:path>
               </a:pathLst>
@@ -4528,27 +4528,27 @@
           </p:nvSpPr>
           <p:spPr>
             <a:xfrm>
-              <a:off x="1540350" y="2035498"/>
-              <a:ext cx="2294852" cy="169772"/>
+              <a:off x="1530215" y="2035475"/>
+              <a:ext cx="2303691" cy="169763"/>
             </a:xfrm>
             <a:custGeom>
               <a:avLst/>
               <a:pathLst>
-                <a:path w="2294852" h="169772">
+                <a:path w="2303691" h="169763">
                   <a:moveTo>
-                    <a:pt x="0" y="169772"/>
+                    <a:pt x="0" y="169763"/>
                   </a:moveTo>
                   <a:lnTo>
-                    <a:pt x="1212418" y="80078"/>
+                    <a:pt x="1217088" y="80074"/>
                   </a:lnTo>
                   <a:lnTo>
-                    <a:pt x="1529901" y="56590"/>
+                    <a:pt x="1535794" y="56587"/>
                   </a:lnTo>
                   <a:lnTo>
-                    <a:pt x="1977369" y="23487"/>
+                    <a:pt x="1984985" y="23486"/>
                   </a:lnTo>
                   <a:lnTo>
-                    <a:pt x="2294852" y="0"/>
+                    <a:pt x="2303691" y="0"/>
                   </a:lnTo>
                 </a:path>
               </a:pathLst>
@@ -4577,7 +4577,7 @@
           </p:nvSpPr>
           <p:spPr>
             <a:xfrm>
-              <a:off x="3355508" y="1244914"/>
+              <a:off x="3354212" y="1244926"/>
               <a:ext cx="479694" cy="82021"/>
             </a:xfrm>
             <a:prstGeom prst="rect">
@@ -4684,7 +4684,7 @@
           </p:nvSpPr>
           <p:spPr>
             <a:xfrm rot="-5400000">
-              <a:off x="1140466" y="2213292"/>
+              <a:off x="1140466" y="2213258"/>
               <a:ext cx="141274" cy="72877"/>
             </a:xfrm>
             <a:prstGeom prst="rect">
@@ -4730,7 +4730,7 @@
           </p:nvSpPr>
           <p:spPr>
             <a:xfrm rot="-5400000">
-              <a:off x="1140466" y="1843929"/>
+              <a:off x="1140466" y="1843913"/>
               <a:ext cx="141274" cy="72877"/>
             </a:xfrm>
             <a:prstGeom prst="rect">
@@ -4776,7 +4776,7 @@
           </p:nvSpPr>
           <p:spPr>
             <a:xfrm rot="-5400000">
-              <a:off x="1140466" y="1474565"/>
+              <a:off x="1140466" y="1474568"/>
               <a:ext cx="141274" cy="72877"/>
             </a:xfrm>
             <a:prstGeom prst="rect">
@@ -4822,7 +4822,7 @@
           </p:nvSpPr>
           <p:spPr>
             <a:xfrm rot="-5400000">
-              <a:off x="1112211" y="1105201"/>
+              <a:off x="1112211" y="1105223"/>
               <a:ext cx="197784" cy="72877"/>
             </a:xfrm>
             <a:prstGeom prst="rect">
@@ -4868,7 +4868,7 @@
           </p:nvSpPr>
           <p:spPr>
             <a:xfrm>
-              <a:off x="1281564" y="2249731"/>
+              <a:off x="1281564" y="2249697"/>
               <a:ext cx="28468" cy="0"/>
             </a:xfrm>
             <a:custGeom>
@@ -4908,7 +4908,7 @@
           </p:nvSpPr>
           <p:spPr>
             <a:xfrm>
-              <a:off x="1281564" y="1880367"/>
+              <a:off x="1281564" y="1880352"/>
               <a:ext cx="28468" cy="0"/>
             </a:xfrm>
             <a:custGeom>
@@ -4948,7 +4948,7 @@
           </p:nvSpPr>
           <p:spPr>
             <a:xfrm>
-              <a:off x="1281564" y="1511004"/>
+              <a:off x="1281564" y="1511007"/>
               <a:ext cx="28468" cy="0"/>
             </a:xfrm>
             <a:custGeom>
@@ -4988,7 +4988,7 @@
           </p:nvSpPr>
           <p:spPr>
             <a:xfrm>
-              <a:off x="1281564" y="1141640"/>
+              <a:off x="1281564" y="1141661"/>
               <a:ext cx="28468" cy="0"/>
             </a:xfrm>
             <a:custGeom>
@@ -5068,7 +5068,7 @@
           </p:nvSpPr>
           <p:spPr>
             <a:xfrm>
-              <a:off x="1540350" y="2501424"/>
+              <a:off x="1530215" y="2501424"/>
               <a:ext cx="0" cy="28468"/>
             </a:xfrm>
             <a:custGeom>
@@ -5108,7 +5108,7 @@
           </p:nvSpPr>
           <p:spPr>
             <a:xfrm>
-              <a:off x="2305301" y="2501424"/>
+              <a:off x="2298112" y="2501424"/>
               <a:ext cx="0" cy="28468"/>
             </a:xfrm>
             <a:custGeom>
@@ -5148,7 +5148,7 @@
           </p:nvSpPr>
           <p:spPr>
             <a:xfrm>
-              <a:off x="3070251" y="2501424"/>
+              <a:off x="3066009" y="2501424"/>
               <a:ext cx="0" cy="28468"/>
             </a:xfrm>
             <a:custGeom>
@@ -5188,7 +5188,7 @@
           </p:nvSpPr>
           <p:spPr>
             <a:xfrm>
-              <a:off x="3835202" y="2501424"/>
+              <a:off x="3833907" y="2501424"/>
               <a:ext cx="0" cy="28468"/>
             </a:xfrm>
             <a:custGeom>
@@ -5228,7 +5228,7 @@
           </p:nvSpPr>
           <p:spPr>
             <a:xfrm>
-              <a:off x="1512095" y="2552666"/>
+              <a:off x="1501960" y="2552666"/>
               <a:ext cx="56509" cy="72877"/>
             </a:xfrm>
             <a:prstGeom prst="rect">
@@ -5274,7 +5274,7 @@
           </p:nvSpPr>
           <p:spPr>
             <a:xfrm>
-              <a:off x="2277046" y="2552666"/>
+              <a:off x="2269857" y="2552666"/>
               <a:ext cx="56509" cy="72877"/>
             </a:xfrm>
             <a:prstGeom prst="rect">
@@ -5320,7 +5320,7 @@
           </p:nvSpPr>
           <p:spPr>
             <a:xfrm>
-              <a:off x="3041997" y="2552666"/>
+              <a:off x="3037754" y="2552666"/>
               <a:ext cx="56509" cy="72877"/>
             </a:xfrm>
             <a:prstGeom prst="rect">
@@ -5366,7 +5366,7 @@
           </p:nvSpPr>
           <p:spPr>
             <a:xfrm>
-              <a:off x="3806947" y="2552666"/>
+              <a:off x="3805652" y="2552666"/>
               <a:ext cx="56509" cy="72877"/>
             </a:xfrm>
             <a:prstGeom prst="rect">
@@ -5530,7 +5530,7 @@
           </p:nvSpPr>
           <p:spPr>
             <a:xfrm>
-              <a:off x="4366238" y="2119172"/>
+              <a:off x="4364121" y="2119070"/>
               <a:ext cx="75116" cy="75116"/>
             </a:xfrm>
             <a:prstGeom prst="ellipse">
@@ -5556,7 +5556,7 @@
           </p:nvSpPr>
           <p:spPr>
             <a:xfrm>
-              <a:off x="4328542" y="1373665"/>
+              <a:off x="4448625" y="1373722"/>
               <a:ext cx="75116" cy="75116"/>
             </a:xfrm>
             <a:prstGeom prst="ellipse">
@@ -5582,7 +5582,7 @@
           </p:nvSpPr>
           <p:spPr>
             <a:xfrm>
-              <a:off x="4300649" y="2112064"/>
+              <a:off x="4284402" y="2112164"/>
               <a:ext cx="75116" cy="75116"/>
             </a:xfrm>
             <a:prstGeom prst="ellipse">
@@ -5608,7 +5608,7 @@
           </p:nvSpPr>
           <p:spPr>
             <a:xfrm>
-              <a:off x="4273743" y="2024571"/>
+              <a:off x="4330559" y="2024498"/>
               <a:ext cx="75116" cy="75116"/>
             </a:xfrm>
             <a:prstGeom prst="ellipse">
@@ -5634,7 +5634,7 @@
           </p:nvSpPr>
           <p:spPr>
             <a:xfrm>
-              <a:off x="4424421" y="2185962"/>
+              <a:off x="4395879" y="2185883"/>
               <a:ext cx="75116" cy="75116"/>
             </a:xfrm>
             <a:prstGeom prst="ellipse">
@@ -5660,7 +5660,7 @@
           </p:nvSpPr>
           <p:spPr>
             <a:xfrm>
-              <a:off x="4464151" y="1599294"/>
+              <a:off x="4492021" y="1599181"/>
               <a:ext cx="75116" cy="75116"/>
             </a:xfrm>
             <a:prstGeom prst="ellipse">
@@ -5686,7 +5686,7 @@
           </p:nvSpPr>
           <p:spPr>
             <a:xfrm>
-              <a:off x="4429586" y="1218861"/>
+              <a:off x="4480479" y="1219078"/>
               <a:ext cx="75116" cy="75116"/>
             </a:xfrm>
             <a:prstGeom prst="ellipse">
@@ -5712,7 +5712,7 @@
           </p:nvSpPr>
           <p:spPr>
             <a:xfrm>
-              <a:off x="4409546" y="1907503"/>
+              <a:off x="4303818" y="1907310"/>
               <a:ext cx="75116" cy="75116"/>
             </a:xfrm>
             <a:prstGeom prst="ellipse">
@@ -5738,7 +5738,7 @@
           </p:nvSpPr>
           <p:spPr>
             <a:xfrm>
-              <a:off x="4413753" y="2367314"/>
+              <a:off x="4462306" y="2367376"/>
               <a:ext cx="75116" cy="75116"/>
             </a:xfrm>
             <a:prstGeom prst="ellipse">
@@ -5764,7 +5764,7 @@
           </p:nvSpPr>
           <p:spPr>
             <a:xfrm>
-              <a:off x="4401133" y="1872411"/>
+              <a:off x="4273743" y="1872614"/>
               <a:ext cx="75116" cy="75116"/>
             </a:xfrm>
             <a:prstGeom prst="ellipse">
@@ -5790,7 +5790,7 @@
           </p:nvSpPr>
           <p:spPr>
             <a:xfrm>
-              <a:off x="5241537" y="2385629"/>
+              <a:off x="5114623" y="2385693"/>
               <a:ext cx="75116" cy="75116"/>
             </a:xfrm>
             <a:prstGeom prst="ellipse">
@@ -5816,7 +5816,7 @@
           </p:nvSpPr>
           <p:spPr>
             <a:xfrm>
-              <a:off x="5193242" y="1599606"/>
+              <a:off x="5056737" y="1599474"/>
               <a:ext cx="75116" cy="75116"/>
             </a:xfrm>
             <a:prstGeom prst="ellipse">
@@ -5842,7 +5842,7 @@
           </p:nvSpPr>
           <p:spPr>
             <a:xfrm>
-              <a:off x="5091781" y="2037611"/>
+              <a:off x="5188511" y="2037515"/>
               <a:ext cx="75116" cy="75116"/>
             </a:xfrm>
             <a:prstGeom prst="ellipse">
@@ -5868,7 +5868,7 @@
           </p:nvSpPr>
           <p:spPr>
             <a:xfrm>
-              <a:off x="5086521" y="2402053"/>
+              <a:off x="5185597" y="2402053"/>
               <a:ext cx="75116" cy="75116"/>
             </a:xfrm>
             <a:prstGeom prst="ellipse">
@@ -5894,7 +5894,7 @@
           </p:nvSpPr>
           <p:spPr>
             <a:xfrm>
-              <a:off x="5149821" y="1760107"/>
+              <a:off x="5211738" y="1760012"/>
               <a:ext cx="75116" cy="75116"/>
             </a:xfrm>
             <a:prstGeom prst="ellipse">
@@ -5920,7 +5920,7 @@
           </p:nvSpPr>
           <p:spPr>
             <a:xfrm>
-              <a:off x="5143304" y="1165804"/>
+              <a:off x="5072166" y="1165804"/>
               <a:ext cx="75116" cy="75116"/>
             </a:xfrm>
             <a:prstGeom prst="ellipse">
@@ -5946,7 +5946,7 @@
           </p:nvSpPr>
           <p:spPr>
             <a:xfrm>
-              <a:off x="5167513" y="2373515"/>
+              <a:off x="5164427" y="2373487"/>
               <a:ext cx="75116" cy="75116"/>
             </a:xfrm>
             <a:prstGeom prst="ellipse">
@@ -5972,7 +5972,7 @@
           </p:nvSpPr>
           <p:spPr>
             <a:xfrm>
-              <a:off x="5221418" y="2322600"/>
+              <a:off x="5140833" y="2322390"/>
               <a:ext cx="75116" cy="75116"/>
             </a:xfrm>
             <a:prstGeom prst="ellipse">
@@ -5998,7 +5998,7 @@
           </p:nvSpPr>
           <p:spPr>
             <a:xfrm>
-              <a:off x="5122329" y="2058524"/>
+              <a:off x="5108114" y="2058297"/>
               <a:ext cx="75116" cy="75116"/>
             </a:xfrm>
             <a:prstGeom prst="ellipse">
@@ -6024,7 +6024,7 @@
           </p:nvSpPr>
           <p:spPr>
             <a:xfrm>
-              <a:off x="5222986" y="2379331"/>
+              <a:off x="5041502" y="2379320"/>
               <a:ext cx="75116" cy="75116"/>
             </a:xfrm>
             <a:prstGeom prst="ellipse">
@@ -6050,7 +6050,7 @@
           </p:nvSpPr>
           <p:spPr>
             <a:xfrm>
-              <a:off x="5053464" y="2198526"/>
+              <a:off x="5195696" y="2198624"/>
               <a:ext cx="75116" cy="75116"/>
             </a:xfrm>
             <a:prstGeom prst="ellipse">
@@ -6076,7 +6076,7 @@
           </p:nvSpPr>
           <p:spPr>
             <a:xfrm>
-              <a:off x="5132334" y="2376357"/>
+              <a:off x="5254420" y="2376300"/>
               <a:ext cx="75116" cy="75116"/>
             </a:xfrm>
             <a:prstGeom prst="ellipse">
@@ -6102,7 +6102,7 @@
           </p:nvSpPr>
           <p:spPr>
             <a:xfrm>
-              <a:off x="5047821" y="1958813"/>
+              <a:off x="5146086" y="1958604"/>
               <a:ext cx="75116" cy="75116"/>
             </a:xfrm>
             <a:prstGeom prst="ellipse">
@@ -6128,7 +6128,7 @@
           </p:nvSpPr>
           <p:spPr>
             <a:xfrm>
-              <a:off x="5182470" y="1842995"/>
+              <a:off x="5251681" y="1843130"/>
               <a:ext cx="75116" cy="75116"/>
             </a:xfrm>
             <a:prstGeom prst="ellipse">
@@ -6154,7 +6154,7 @@
           </p:nvSpPr>
           <p:spPr>
             <a:xfrm>
-              <a:off x="5115413" y="1894793"/>
+              <a:off x="5086144" y="1894867"/>
               <a:ext cx="75116" cy="75116"/>
             </a:xfrm>
             <a:prstGeom prst="ellipse">
@@ -6180,7 +6180,7 @@
           </p:nvSpPr>
           <p:spPr>
             <a:xfrm>
-              <a:off x="5049678" y="1724750"/>
+              <a:off x="5223436" y="1725045"/>
               <a:ext cx="75116" cy="75116"/>
             </a:xfrm>
             <a:prstGeom prst="ellipse">
@@ -6206,7 +6206,7 @@
           </p:nvSpPr>
           <p:spPr>
             <a:xfrm>
-              <a:off x="5221049" y="2170014"/>
+              <a:off x="5232625" y="2170010"/>
               <a:ext cx="75116" cy="75116"/>
             </a:xfrm>
             <a:prstGeom prst="ellipse">
@@ -6232,7 +6232,7 @@
           </p:nvSpPr>
           <p:spPr>
             <a:xfrm>
-              <a:off x="5116054" y="2370107"/>
+              <a:off x="5212821" y="2370152"/>
               <a:ext cx="75116" cy="75116"/>
             </a:xfrm>
             <a:prstGeom prst="ellipse">
@@ -6258,7 +6258,7 @@
           </p:nvSpPr>
           <p:spPr>
             <a:xfrm>
-              <a:off x="5995187" y="2151540"/>
+              <a:off x="5971102" y="2151696"/>
               <a:ext cx="75116" cy="75116"/>
             </a:xfrm>
             <a:prstGeom prst="ellipse">
@@ -6284,7 +6284,7 @@
           </p:nvSpPr>
           <p:spPr>
             <a:xfrm>
-              <a:off x="5867917" y="2233154"/>
+              <a:off x="5882759" y="2233057"/>
               <a:ext cx="75116" cy="75116"/>
             </a:xfrm>
             <a:prstGeom prst="ellipse">
@@ -6310,7 +6310,7 @@
           </p:nvSpPr>
           <p:spPr>
             <a:xfrm>
-              <a:off x="5917475" y="2320905"/>
+              <a:off x="5857998" y="2320805"/>
               <a:ext cx="75116" cy="75116"/>
             </a:xfrm>
             <a:prstGeom prst="ellipse">
@@ -6336,7 +6336,7 @@
           </p:nvSpPr>
           <p:spPr>
             <a:xfrm>
-              <a:off x="5881477" y="2110880"/>
+              <a:off x="5857558" y="2110852"/>
               <a:ext cx="75116" cy="75116"/>
             </a:xfrm>
             <a:prstGeom prst="ellipse">
@@ -6362,7 +6362,7 @@
           </p:nvSpPr>
           <p:spPr>
             <a:xfrm>
-              <a:off x="5829085" y="1656271"/>
+              <a:off x="5998298" y="1656241"/>
               <a:ext cx="75116" cy="75116"/>
             </a:xfrm>
             <a:prstGeom prst="ellipse">
@@ -6388,7 +6388,7 @@
           </p:nvSpPr>
           <p:spPr>
             <a:xfrm>
-              <a:off x="5933864" y="1352368"/>
+              <a:off x="6012746" y="1352599"/>
               <a:ext cx="75116" cy="75116"/>
             </a:xfrm>
             <a:prstGeom prst="ellipse">
@@ -6414,7 +6414,7 @@
           </p:nvSpPr>
           <p:spPr>
             <a:xfrm>
-              <a:off x="5930444" y="1557682"/>
+              <a:off x="5895237" y="1557661"/>
               <a:ext cx="75116" cy="75116"/>
             </a:xfrm>
             <a:prstGeom prst="ellipse">
@@ -6440,7 +6440,7 @@
           </p:nvSpPr>
           <p:spPr>
             <a:xfrm>
-              <a:off x="5949360" y="2178870"/>
+              <a:off x="5808517" y="2178995"/>
               <a:ext cx="75116" cy="75116"/>
             </a:xfrm>
             <a:prstGeom prst="ellipse">
@@ -6466,7 +6466,7 @@
           </p:nvSpPr>
           <p:spPr>
             <a:xfrm>
-              <a:off x="5870868" y="2128300"/>
+              <a:off x="5914898" y="2128034"/>
               <a:ext cx="75116" cy="75116"/>
             </a:xfrm>
             <a:prstGeom prst="ellipse">
@@ -6492,7 +6492,7 @@
           </p:nvSpPr>
           <p:spPr>
             <a:xfrm>
-              <a:off x="5938685" y="1622975"/>
+              <a:off x="6000295" y="1622896"/>
               <a:ext cx="75116" cy="75116"/>
             </a:xfrm>
             <a:prstGeom prst="ellipse">
@@ -6518,7 +6518,7 @@
           </p:nvSpPr>
           <p:spPr>
             <a:xfrm>
-              <a:off x="5904672" y="1803529"/>
+              <a:off x="5924230" y="1803682"/>
               <a:ext cx="75116" cy="75116"/>
             </a:xfrm>
             <a:prstGeom prst="ellipse">
@@ -6544,7 +6544,7 @@
           </p:nvSpPr>
           <p:spPr>
             <a:xfrm>
-              <a:off x="5955544" y="2299074"/>
+              <a:off x="5836880" y="2298848"/>
               <a:ext cx="75116" cy="75116"/>
             </a:xfrm>
             <a:prstGeom prst="ellipse">
@@ -6570,7 +6570,7 @@
           </p:nvSpPr>
           <p:spPr>
             <a:xfrm>
-              <a:off x="5984153" y="1578689"/>
+              <a:off x="5988191" y="1578784"/>
               <a:ext cx="75116" cy="75116"/>
             </a:xfrm>
             <a:prstGeom prst="ellipse">
@@ -6596,7 +6596,7 @@
           </p:nvSpPr>
           <p:spPr>
             <a:xfrm>
-              <a:off x="5956675" y="1750254"/>
+              <a:off x="5816639" y="1750407"/>
               <a:ext cx="75116" cy="75116"/>
             </a:xfrm>
             <a:prstGeom prst="ellipse">
@@ -6622,7 +6622,7 @@
           </p:nvSpPr>
           <p:spPr>
             <a:xfrm>
-              <a:off x="5872713" y="1918078"/>
+              <a:off x="5950612" y="1918216"/>
               <a:ext cx="75116" cy="75116"/>
             </a:xfrm>
             <a:prstGeom prst="ellipse">
@@ -6648,7 +6648,7 @@
           </p:nvSpPr>
           <p:spPr>
             <a:xfrm>
-              <a:off x="5810475" y="2273473"/>
+              <a:off x="5983396" y="2273460"/>
               <a:ext cx="75116" cy="75116"/>
             </a:xfrm>
             <a:prstGeom prst="ellipse">
@@ -6674,7 +6674,7 @@
           </p:nvSpPr>
           <p:spPr>
             <a:xfrm>
-              <a:off x="5966258" y="1910314"/>
+              <a:off x="5904448" y="1910296"/>
               <a:ext cx="75116" cy="75116"/>
             </a:xfrm>
             <a:prstGeom prst="ellipse">
@@ -6700,7 +6700,7 @@
           </p:nvSpPr>
           <p:spPr>
             <a:xfrm>
-              <a:off x="5831121" y="2249701"/>
+              <a:off x="5957988" y="2249678"/>
               <a:ext cx="75116" cy="75116"/>
             </a:xfrm>
             <a:prstGeom prst="ellipse">
@@ -6726,7 +6726,7 @@
           </p:nvSpPr>
           <p:spPr>
             <a:xfrm>
-              <a:off x="5952634" y="1732666"/>
+              <a:off x="5939786" y="1732387"/>
               <a:ext cx="75116" cy="75116"/>
             </a:xfrm>
             <a:prstGeom prst="ellipse">
@@ -6752,7 +6752,7 @@
           </p:nvSpPr>
           <p:spPr>
             <a:xfrm>
-              <a:off x="5824566" y="1922751"/>
+              <a:off x="5905295" y="1922806"/>
               <a:ext cx="75116" cy="75116"/>
             </a:xfrm>
             <a:prstGeom prst="ellipse">
@@ -6778,7 +6778,7 @@
           </p:nvSpPr>
           <p:spPr>
             <a:xfrm>
-              <a:off x="6747294" y="2019511"/>
+              <a:off x="6687591" y="2019476"/>
               <a:ext cx="75116" cy="75116"/>
             </a:xfrm>
             <a:prstGeom prst="ellipse">
@@ -6804,7 +6804,7 @@
           </p:nvSpPr>
           <p:spPr>
             <a:xfrm>
-              <a:off x="6578937" y="2147743"/>
+              <a:off x="6576808" y="2147544"/>
               <a:ext cx="75116" cy="75116"/>
             </a:xfrm>
             <a:prstGeom prst="ellipse">
@@ -6830,7 +6830,7 @@
           </p:nvSpPr>
           <p:spPr>
             <a:xfrm>
-              <a:off x="6645817" y="2197589"/>
+              <a:off x="6574223" y="2197864"/>
               <a:ext cx="75116" cy="75116"/>
             </a:xfrm>
             <a:prstGeom prst="ellipse">
@@ -6856,7 +6856,7 @@
           </p:nvSpPr>
           <p:spPr>
             <a:xfrm>
-              <a:off x="6655556" y="2003949"/>
+              <a:off x="6747789" y="2003888"/>
               <a:ext cx="75116" cy="75116"/>
             </a:xfrm>
             <a:prstGeom prst="ellipse">
@@ -6882,7 +6882,7 @@
           </p:nvSpPr>
           <p:spPr>
             <a:xfrm>
-              <a:off x="6724780" y="1897010"/>
+              <a:off x="6670214" y="1897072"/>
               <a:ext cx="75116" cy="75116"/>
             </a:xfrm>
             <a:prstGeom prst="ellipse">
@@ -6908,7 +6908,7 @@
           </p:nvSpPr>
           <p:spPr>
             <a:xfrm>
-              <a:off x="6717387" y="1943142"/>
+              <a:off x="6693256" y="1943307"/>
               <a:ext cx="75116" cy="75116"/>
             </a:xfrm>
             <a:prstGeom prst="ellipse">
@@ -6934,7 +6934,7 @@
           </p:nvSpPr>
           <p:spPr>
             <a:xfrm>
-              <a:off x="6692576" y="2146095"/>
+              <a:off x="6731986" y="2146117"/>
               <a:ext cx="75116" cy="75116"/>
             </a:xfrm>
             <a:prstGeom prst="ellipse">
@@ -6960,7 +6960,7 @@
           </p:nvSpPr>
           <p:spPr>
             <a:xfrm>
-              <a:off x="6661929" y="1964295"/>
+              <a:off x="6638079" y="1964253"/>
               <a:ext cx="75116" cy="75116"/>
             </a:xfrm>
             <a:prstGeom prst="ellipse">
@@ -6986,7 +6986,7 @@
           </p:nvSpPr>
           <p:spPr>
             <a:xfrm>
-              <a:off x="6770769" y="2178541"/>
+              <a:off x="6613414" y="2178599"/>
               <a:ext cx="75116" cy="75116"/>
             </a:xfrm>
             <a:prstGeom prst="ellipse">
@@ -7012,7 +7012,7 @@
           </p:nvSpPr>
           <p:spPr>
             <a:xfrm>
-              <a:off x="6702074" y="2076526"/>
+              <a:off x="6770769" y="2076571"/>
               <a:ext cx="75116" cy="75116"/>
             </a:xfrm>
             <a:prstGeom prst="ellipse">
@@ -7038,7 +7038,7 @@
           </p:nvSpPr>
           <p:spPr>
             <a:xfrm>
-              <a:off x="6749021" y="1927946"/>
+              <a:off x="6650468" y="1927731"/>
               <a:ext cx="75116" cy="75116"/>
             </a:xfrm>
             <a:prstGeom prst="ellipse">
@@ -7064,7 +7064,7 @@
           </p:nvSpPr>
           <p:spPr>
             <a:xfrm>
-              <a:off x="6610903" y="1650563"/>
+              <a:off x="6703074" y="1650570"/>
               <a:ext cx="75116" cy="75116"/>
             </a:xfrm>
             <a:prstGeom prst="ellipse">
@@ -7090,7 +7090,7 @@
           </p:nvSpPr>
           <p:spPr>
             <a:xfrm>
-              <a:off x="6700966" y="2167293"/>
+              <a:off x="6761778" y="2167080"/>
               <a:ext cx="75116" cy="75116"/>
             </a:xfrm>
             <a:prstGeom prst="ellipse">
@@ -7116,7 +7116,7 @@
           </p:nvSpPr>
           <p:spPr>
             <a:xfrm>
-              <a:off x="6719327" y="2350208"/>
+              <a:off x="6731818" y="2350358"/>
               <a:ext cx="75116" cy="75116"/>
             </a:xfrm>
             <a:prstGeom prst="ellipse">
@@ -7142,7 +7142,7 @@
           </p:nvSpPr>
           <p:spPr>
             <a:xfrm>
-              <a:off x="6601761" y="2224688"/>
+              <a:off x="6749378" y="2224432"/>
               <a:ext cx="75116" cy="75116"/>
             </a:xfrm>
             <a:prstGeom prst="ellipse">
@@ -7168,7 +7168,7 @@
           </p:nvSpPr>
           <p:spPr>
             <a:xfrm>
-              <a:off x="6664846" y="2026591"/>
+              <a:off x="6626048" y="2026519"/>
               <a:ext cx="75116" cy="75116"/>
             </a:xfrm>
             <a:prstGeom prst="ellipse">
@@ -7194,7 +7194,7 @@
           </p:nvSpPr>
           <p:spPr>
             <a:xfrm>
-              <a:off x="6565974" y="2140668"/>
+              <a:off x="6654013" y="2140484"/>
               <a:ext cx="75116" cy="75116"/>
             </a:xfrm>
             <a:prstGeom prst="ellipse">
@@ -7220,7 +7220,7 @@
           </p:nvSpPr>
           <p:spPr>
             <a:xfrm>
-              <a:off x="6694907" y="2004818"/>
+              <a:off x="6733173" y="2004681"/>
               <a:ext cx="75116" cy="75116"/>
             </a:xfrm>
             <a:prstGeom prst="ellipse">
@@ -7246,7 +7246,7 @@
           </p:nvSpPr>
           <p:spPr>
             <a:xfrm>
-              <a:off x="6683117" y="1984309"/>
+              <a:off x="6697329" y="1984335"/>
               <a:ext cx="75116" cy="75116"/>
             </a:xfrm>
             <a:prstGeom prst="ellipse">
@@ -7272,7 +7272,7 @@
           </p:nvSpPr>
           <p:spPr>
             <a:xfrm>
-              <a:off x="6564138" y="1831635"/>
+              <a:off x="6575035" y="1831790"/>
               <a:ext cx="75116" cy="75116"/>
             </a:xfrm>
             <a:prstGeom prst="ellipse">
@@ -7298,7 +7298,7 @@
           </p:nvSpPr>
           <p:spPr>
             <a:xfrm>
-              <a:off x="6634390" y="1871022"/>
+              <a:off x="6604862" y="1870834"/>
               <a:ext cx="75116" cy="75116"/>
             </a:xfrm>
             <a:prstGeom prst="ellipse">
@@ -7324,7 +7324,7 @@
           </p:nvSpPr>
           <p:spPr>
             <a:xfrm>
-              <a:off x="6654859" y="1931180"/>
+              <a:off x="6616906" y="1931172"/>
               <a:ext cx="75116" cy="75116"/>
             </a:xfrm>
             <a:prstGeom prst="ellipse">
@@ -7350,7 +7350,7 @@
           </p:nvSpPr>
           <p:spPr>
             <a:xfrm>
-              <a:off x="6579083" y="2258157"/>
+              <a:off x="6763279" y="2258284"/>
               <a:ext cx="75116" cy="75116"/>
             </a:xfrm>
             <a:prstGeom prst="ellipse">
@@ -7376,7 +7376,7 @@
           </p:nvSpPr>
           <p:spPr>
             <a:xfrm>
-              <a:off x="6705361" y="1997771"/>
+              <a:off x="6638868" y="1997730"/>
               <a:ext cx="75116" cy="75116"/>
             </a:xfrm>
             <a:prstGeom prst="ellipse">
@@ -7402,42 +7402,42 @@
           </p:nvSpPr>
           <p:spPr>
             <a:xfrm>
-              <a:off x="4419139" y="1808996"/>
-              <a:ext cx="2282672" cy="388039"/>
+              <a:off x="4420781" y="1809016"/>
+              <a:ext cx="2286035" cy="387995"/>
             </a:xfrm>
             <a:custGeom>
               <a:avLst/>
               <a:pathLst>
-                <a:path w="2282672" h="388039">
+                <a:path w="2286035" h="387995">
                   <a:moveTo>
                     <a:pt x="0" y="0"/>
                   </a:moveTo>
                   <a:lnTo>
-                    <a:pt x="1205983" y="98654"/>
+                    <a:pt x="1207760" y="98643"/>
                   </a:lnTo>
                   <a:lnTo>
-                    <a:pt x="1521781" y="114754"/>
+                    <a:pt x="1524023" y="114741"/>
                   </a:lnTo>
                   <a:lnTo>
-                    <a:pt x="1966873" y="129670"/>
+                    <a:pt x="1969771" y="129656"/>
                   </a:lnTo>
                   <a:lnTo>
-                    <a:pt x="2282672" y="135550"/>
+                    <a:pt x="2286035" y="135535"/>
                   </a:lnTo>
                   <a:lnTo>
-                    <a:pt x="2282672" y="388039"/>
+                    <a:pt x="2286035" y="387995"/>
                   </a:lnTo>
                   <a:lnTo>
-                    <a:pt x="1966873" y="361806"/>
+                    <a:pt x="1969771" y="361765"/>
                   </a:lnTo>
                   <a:lnTo>
-                    <a:pt x="1521781" y="331462"/>
+                    <a:pt x="1524023" y="331424"/>
                   </a:lnTo>
                   <a:lnTo>
-                    <a:pt x="1205983" y="315448"/>
+                    <a:pt x="1207760" y="315413"/>
                   </a:lnTo>
                   <a:lnTo>
-                    <a:pt x="0" y="291468"/>
+                    <a:pt x="0" y="291435"/>
                   </a:lnTo>
                   <a:close/>
                 </a:path>
@@ -7463,27 +7463,27 @@
           </p:nvSpPr>
           <p:spPr>
             <a:xfrm>
-              <a:off x="4419139" y="1808996"/>
-              <a:ext cx="2282672" cy="135550"/>
+              <a:off x="4420781" y="1809016"/>
+              <a:ext cx="2286035" cy="135535"/>
             </a:xfrm>
             <a:custGeom>
               <a:avLst/>
               <a:pathLst>
-                <a:path w="2282672" h="135550">
+                <a:path w="2286035" h="135535">
                   <a:moveTo>
                     <a:pt x="0" y="0"/>
                   </a:moveTo>
                   <a:lnTo>
-                    <a:pt x="1205983" y="98654"/>
+                    <a:pt x="1207760" y="98643"/>
                   </a:lnTo>
                   <a:lnTo>
-                    <a:pt x="1521781" y="114754"/>
+                    <a:pt x="1524023" y="114741"/>
                   </a:lnTo>
                   <a:lnTo>
-                    <a:pt x="1966873" y="129670"/>
+                    <a:pt x="1969771" y="129656"/>
                   </a:lnTo>
                   <a:lnTo>
-                    <a:pt x="2282672" y="135550"/>
+                    <a:pt x="2286035" y="135535"/>
                   </a:lnTo>
                 </a:path>
               </a:pathLst>
@@ -7503,24 +7503,24 @@
           </p:nvSpPr>
           <p:spPr>
             <a:xfrm>
-              <a:off x="4419139" y="2100464"/>
-              <a:ext cx="2282672" cy="96570"/>
+              <a:off x="4420781" y="2100452"/>
+              <a:ext cx="2286035" cy="96559"/>
             </a:xfrm>
             <a:custGeom>
               <a:avLst/>
               <a:pathLst>
-                <a:path w="2282672" h="96570">
+                <a:path w="2286035" h="96559">
                   <a:moveTo>
-                    <a:pt x="2282672" y="96570"/>
+                    <a:pt x="2286035" y="96559"/>
                   </a:moveTo>
                   <a:lnTo>
-                    <a:pt x="1966873" y="70337"/>
+                    <a:pt x="1969771" y="70329"/>
                   </a:lnTo>
                   <a:lnTo>
-                    <a:pt x="1521781" y="39993"/>
+                    <a:pt x="1524023" y="39988"/>
                   </a:lnTo>
                   <a:lnTo>
-                    <a:pt x="1205983" y="23980"/>
+                    <a:pt x="1207760" y="23977"/>
                   </a:lnTo>
                   <a:lnTo>
                     <a:pt x="0" y="0"/>
@@ -7543,27 +7543,27 @@
           </p:nvSpPr>
           <p:spPr>
             <a:xfrm>
-              <a:off x="4419139" y="1954730"/>
-              <a:ext cx="2282672" cy="116060"/>
+              <a:off x="4420781" y="1954734"/>
+              <a:ext cx="2286035" cy="116047"/>
             </a:xfrm>
             <a:custGeom>
               <a:avLst/>
               <a:pathLst>
-                <a:path w="2282672" h="116060">
+                <a:path w="2286035" h="116047">
                   <a:moveTo>
                     <a:pt x="0" y="0"/>
                   </a:moveTo>
                   <a:lnTo>
-                    <a:pt x="1205983" y="61317"/>
+                    <a:pt x="1207760" y="61310"/>
                   </a:lnTo>
                   <a:lnTo>
-                    <a:pt x="1521781" y="77373"/>
+                    <a:pt x="1524023" y="77365"/>
                   </a:lnTo>
                   <a:lnTo>
-                    <a:pt x="1966873" y="100004"/>
+                    <a:pt x="1969771" y="99992"/>
                   </a:lnTo>
                   <a:lnTo>
-                    <a:pt x="2282672" y="116060"/>
+                    <a:pt x="2286035" y="116047"/>
                   </a:lnTo>
                 </a:path>
               </a:pathLst>
@@ -7592,7 +7592,7 @@
           </p:nvSpPr>
           <p:spPr>
             <a:xfrm>
-              <a:off x="6222117" y="1244991"/>
+              <a:off x="6227122" y="1245066"/>
               <a:ext cx="479694" cy="82021"/>
             </a:xfrm>
             <a:prstGeom prst="rect">
@@ -7699,7 +7699,7 @@
           </p:nvSpPr>
           <p:spPr>
             <a:xfrm>
-              <a:off x="4157982" y="2237115"/>
+              <a:off x="4157982" y="2237087"/>
               <a:ext cx="28468" cy="0"/>
             </a:xfrm>
             <a:custGeom>
@@ -7739,7 +7739,7 @@
           </p:nvSpPr>
           <p:spPr>
             <a:xfrm>
-              <a:off x="4157982" y="1787745"/>
+              <a:off x="4157982" y="1787768"/>
               <a:ext cx="28468" cy="0"/>
             </a:xfrm>
             <a:custGeom>
@@ -7779,7 +7779,7 @@
           </p:nvSpPr>
           <p:spPr>
             <a:xfrm>
-              <a:off x="4157982" y="1338375"/>
+              <a:off x="4157982" y="1338448"/>
               <a:ext cx="28468" cy="0"/>
             </a:xfrm>
             <a:custGeom>
@@ -7859,7 +7859,7 @@
           </p:nvSpPr>
           <p:spPr>
             <a:xfrm>
-              <a:off x="4419139" y="2501424"/>
+              <a:off x="4420781" y="2501424"/>
               <a:ext cx="0" cy="28468"/>
             </a:xfrm>
             <a:custGeom>
@@ -7899,7 +7899,7 @@
           </p:nvSpPr>
           <p:spPr>
             <a:xfrm>
-              <a:off x="5180030" y="2501424"/>
+              <a:off x="5182793" y="2501424"/>
               <a:ext cx="0" cy="28468"/>
             </a:xfrm>
             <a:custGeom>
@@ -7939,7 +7939,7 @@
           </p:nvSpPr>
           <p:spPr>
             <a:xfrm>
-              <a:off x="5940921" y="2501424"/>
+              <a:off x="5944804" y="2501424"/>
               <a:ext cx="0" cy="28468"/>
             </a:xfrm>
             <a:custGeom>
@@ -7979,7 +7979,7 @@
           </p:nvSpPr>
           <p:spPr>
             <a:xfrm>
-              <a:off x="6701811" y="2501424"/>
+              <a:off x="6706816" y="2501424"/>
               <a:ext cx="0" cy="28468"/>
             </a:xfrm>
             <a:custGeom>
@@ -8019,7 +8019,7 @@
           </p:nvSpPr>
           <p:spPr>
             <a:xfrm>
-              <a:off x="4390884" y="2552666"/>
+              <a:off x="4392526" y="2552666"/>
               <a:ext cx="56509" cy="72877"/>
             </a:xfrm>
             <a:prstGeom prst="rect">
@@ -8065,7 +8065,7 @@
           </p:nvSpPr>
           <p:spPr>
             <a:xfrm>
-              <a:off x="5151775" y="2552666"/>
+              <a:off x="5154538" y="2552666"/>
               <a:ext cx="56509" cy="72877"/>
             </a:xfrm>
             <a:prstGeom prst="rect">
@@ -8111,7 +8111,7 @@
           </p:nvSpPr>
           <p:spPr>
             <a:xfrm>
-              <a:off x="5912666" y="2552666"/>
+              <a:off x="5916550" y="2552666"/>
               <a:ext cx="56509" cy="72877"/>
             </a:xfrm>
             <a:prstGeom prst="rect">
@@ -8157,7 +8157,7 @@
           </p:nvSpPr>
           <p:spPr>
             <a:xfrm>
-              <a:off x="6673556" y="2552666"/>
+              <a:off x="6678561" y="2552666"/>
               <a:ext cx="56509" cy="72877"/>
             </a:xfrm>
             <a:prstGeom prst="rect">
@@ -8275,7 +8275,7 @@
           </p:nvSpPr>
           <p:spPr>
             <a:xfrm>
-              <a:off x="1652514" y="4023647"/>
+              <a:off x="1565429" y="4022956"/>
               <a:ext cx="75116" cy="75116"/>
             </a:xfrm>
             <a:prstGeom prst="ellipse">
@@ -8301,7 +8301,7 @@
           </p:nvSpPr>
           <p:spPr>
             <a:xfrm>
-              <a:off x="1692921" y="3887385"/>
+              <a:off x="1446137" y="3888922"/>
               <a:ext cx="75116" cy="75116"/>
             </a:xfrm>
             <a:prstGeom prst="ellipse">
@@ -8327,7 +8327,7 @@
           </p:nvSpPr>
           <p:spPr>
             <a:xfrm>
-              <a:off x="1572563" y="4081084"/>
+              <a:off x="1720735" y="4080654"/>
               <a:ext cx="75116" cy="75116"/>
             </a:xfrm>
             <a:prstGeom prst="ellipse">
@@ -8353,7 +8353,7 @@
           </p:nvSpPr>
           <p:spPr>
             <a:xfrm>
-              <a:off x="1710475" y="3964025"/>
+              <a:off x="1397410" y="3962384"/>
               <a:ext cx="75116" cy="75116"/>
             </a:xfrm>
             <a:prstGeom prst="ellipse">
@@ -8379,7 +8379,7 @@
           </p:nvSpPr>
           <p:spPr>
             <a:xfrm>
-              <a:off x="1399841" y="3988888"/>
+              <a:off x="1462130" y="3989084"/>
               <a:ext cx="75116" cy="75116"/>
             </a:xfrm>
             <a:prstGeom prst="ellipse">
@@ -8405,7 +8405,7 @@
           </p:nvSpPr>
           <p:spPr>
             <a:xfrm>
-              <a:off x="1708675" y="3873249"/>
+              <a:off x="1648163" y="3871904"/>
               <a:ext cx="75116" cy="75116"/>
             </a:xfrm>
             <a:prstGeom prst="ellipse">
@@ -8431,7 +8431,7 @@
           </p:nvSpPr>
           <p:spPr>
             <a:xfrm>
-              <a:off x="1397325" y="3576856"/>
+              <a:off x="1503898" y="3578450"/>
               <a:ext cx="75116" cy="75116"/>
             </a:xfrm>
             <a:prstGeom prst="ellipse">
@@ -8457,7 +8457,7 @@
           </p:nvSpPr>
           <p:spPr>
             <a:xfrm>
-              <a:off x="1552515" y="3961723"/>
+              <a:off x="1658292" y="3962036"/>
               <a:ext cx="75116" cy="75116"/>
             </a:xfrm>
             <a:prstGeom prst="ellipse">
@@ -8483,7 +8483,7 @@
           </p:nvSpPr>
           <p:spPr>
             <a:xfrm>
-              <a:off x="1573615" y="3921068"/>
+              <a:off x="1397325" y="3920881"/>
               <a:ext cx="75116" cy="75116"/>
             </a:xfrm>
             <a:prstGeom prst="ellipse">
@@ -8509,7 +8509,7 @@
           </p:nvSpPr>
           <p:spPr>
             <a:xfrm>
-              <a:off x="1469197" y="3872476"/>
+              <a:off x="1485592" y="3872933"/>
               <a:ext cx="75116" cy="75116"/>
             </a:xfrm>
             <a:prstGeom prst="ellipse">
@@ -8535,7 +8535,7 @@
           </p:nvSpPr>
           <p:spPr>
             <a:xfrm>
-              <a:off x="2215442" y="4089685"/>
+              <a:off x="2263602" y="4087419"/>
               <a:ext cx="75116" cy="75116"/>
             </a:xfrm>
             <a:prstGeom prst="ellipse">
@@ -8561,7 +8561,7 @@
           </p:nvSpPr>
           <p:spPr>
             <a:xfrm>
-              <a:off x="2377814" y="4135602"/>
+              <a:off x="2167943" y="4132650"/>
               <a:ext cx="75116" cy="75116"/>
             </a:xfrm>
             <a:prstGeom prst="ellipse">
@@ -8587,7 +8587,7 @@
           </p:nvSpPr>
           <p:spPr>
             <a:xfrm>
-              <a:off x="2433943" y="3083980"/>
+              <a:off x="2430270" y="3085301"/>
               <a:ext cx="75116" cy="75116"/>
             </a:xfrm>
             <a:prstGeom prst="ellipse">
@@ -8613,7 +8613,7 @@
           </p:nvSpPr>
           <p:spPr>
             <a:xfrm>
-              <a:off x="2423065" y="4017562"/>
+              <a:off x="2253415" y="4018310"/>
               <a:ext cx="75116" cy="75116"/>
             </a:xfrm>
             <a:prstGeom prst="ellipse">
@@ -8639,7 +8639,7 @@
           </p:nvSpPr>
           <p:spPr>
             <a:xfrm>
-              <a:off x="2194092" y="4042183"/>
+              <a:off x="2440950" y="4039709"/>
               <a:ext cx="75116" cy="75116"/>
             </a:xfrm>
             <a:prstGeom prst="ellipse">
@@ -8665,7 +8665,7 @@
           </p:nvSpPr>
           <p:spPr>
             <a:xfrm>
-              <a:off x="2407648" y="3895807"/>
+              <a:off x="2130893" y="3895658"/>
               <a:ext cx="75116" cy="75116"/>
             </a:xfrm>
             <a:prstGeom prst="ellipse">
@@ -8691,7 +8691,7 @@
           </p:nvSpPr>
           <p:spPr>
             <a:xfrm>
-              <a:off x="2369235" y="4040252"/>
+              <a:off x="2377743" y="4039131"/>
               <a:ext cx="75116" cy="75116"/>
             </a:xfrm>
             <a:prstGeom prst="ellipse">
@@ -8717,7 +8717,7 @@
           </p:nvSpPr>
           <p:spPr>
             <a:xfrm>
-              <a:off x="2319388" y="4043488"/>
+              <a:off x="2214510" y="4043192"/>
               <a:ext cx="75116" cy="75116"/>
             </a:xfrm>
             <a:prstGeom prst="ellipse">
@@ -8743,7 +8743,7 @@
           </p:nvSpPr>
           <p:spPr>
             <a:xfrm>
-              <a:off x="2081725" y="3494842"/>
+              <a:off x="2286557" y="3496596"/>
               <a:ext cx="75116" cy="75116"/>
             </a:xfrm>
             <a:prstGeom prst="ellipse">
@@ -8769,7 +8769,7 @@
           </p:nvSpPr>
           <p:spPr>
             <a:xfrm>
-              <a:off x="2263725" y="3620191"/>
+              <a:off x="2346937" y="3619196"/>
               <a:ext cx="75116" cy="75116"/>
             </a:xfrm>
             <a:prstGeom prst="ellipse">
@@ -8795,7 +8795,7 @@
           </p:nvSpPr>
           <p:spPr>
             <a:xfrm>
-              <a:off x="2457642" y="3816915"/>
+              <a:off x="2369235" y="3816242"/>
               <a:ext cx="75116" cy="75116"/>
             </a:xfrm>
             <a:prstGeom prst="ellipse">
@@ -8821,7 +8821,7 @@
           </p:nvSpPr>
           <p:spPr>
             <a:xfrm>
-              <a:off x="2392527" y="3891707"/>
+              <a:off x="2259201" y="3892208"/>
               <a:ext cx="75116" cy="75116"/>
             </a:xfrm>
             <a:prstGeom prst="ellipse">
@@ -8847,7 +8847,7 @@
           </p:nvSpPr>
           <p:spPr>
             <a:xfrm>
-              <a:off x="2338025" y="3752543"/>
+              <a:off x="2269607" y="3752017"/>
               <a:ext cx="75116" cy="75116"/>
             </a:xfrm>
             <a:prstGeom prst="ellipse">
@@ -8873,7 +8873,7 @@
           </p:nvSpPr>
           <p:spPr>
             <a:xfrm>
-              <a:off x="2482490" y="3942579"/>
+              <a:off x="2166700" y="3942988"/>
               <a:ext cx="75116" cy="75116"/>
             </a:xfrm>
             <a:prstGeom prst="ellipse">
@@ -8899,7 +8899,7 @@
           </p:nvSpPr>
           <p:spPr>
             <a:xfrm>
-              <a:off x="2476826" y="3966206"/>
+              <a:off x="2480877" y="3965984"/>
               <a:ext cx="75116" cy="75116"/>
             </a:xfrm>
             <a:prstGeom prst="ellipse">
@@ -8925,7 +8925,7 @@
           </p:nvSpPr>
           <p:spPr>
             <a:xfrm>
-              <a:off x="2183422" y="3850252"/>
+              <a:off x="2107929" y="3851388"/>
               <a:ext cx="75116" cy="75116"/>
             </a:xfrm>
             <a:prstGeom prst="ellipse">
@@ -8951,7 +8951,7 @@
           </p:nvSpPr>
           <p:spPr>
             <a:xfrm>
-              <a:off x="2243153" y="3365745"/>
+              <a:off x="2314456" y="3364419"/>
               <a:ext cx="75116" cy="75116"/>
             </a:xfrm>
             <a:prstGeom prst="ellipse">
@@ -8977,7 +8977,7 @@
           </p:nvSpPr>
           <p:spPr>
             <a:xfrm>
-              <a:off x="2279667" y="3587736"/>
+              <a:off x="2102713" y="3590515"/>
               <a:ext cx="75116" cy="75116"/>
             </a:xfrm>
             <a:prstGeom prst="ellipse">
@@ -9003,7 +9003,7 @@
           </p:nvSpPr>
           <p:spPr>
             <a:xfrm>
-              <a:off x="3056889" y="3838020"/>
+              <a:off x="3108394" y="3838354"/>
               <a:ext cx="75116" cy="75116"/>
             </a:xfrm>
             <a:prstGeom prst="ellipse">
@@ -9029,7 +9029,7 @@
           </p:nvSpPr>
           <p:spPr>
             <a:xfrm>
-              <a:off x="2910503" y="3741328"/>
+              <a:off x="3153598" y="3741677"/>
               <a:ext cx="75116" cy="75116"/>
             </a:xfrm>
             <a:prstGeom prst="ellipse">
@@ -9055,7 +9055,7 @@
           </p:nvSpPr>
           <p:spPr>
             <a:xfrm>
-              <a:off x="3138632" y="4123964"/>
+              <a:off x="3115102" y="4121869"/>
               <a:ext cx="75116" cy="75116"/>
             </a:xfrm>
             <a:prstGeom prst="ellipse">
@@ -9081,7 +9081,7 @@
           </p:nvSpPr>
           <p:spPr>
             <a:xfrm>
-              <a:off x="3166545" y="4115870"/>
+              <a:off x="2883519" y="4116326"/>
               <a:ext cx="75116" cy="75116"/>
             </a:xfrm>
             <a:prstGeom prst="ellipse">
@@ -9107,7 +9107,7 @@
           </p:nvSpPr>
           <p:spPr>
             <a:xfrm>
-              <a:off x="3004060" y="3933015"/>
+              <a:off x="2808827" y="3931262"/>
               <a:ext cx="75116" cy="75116"/>
             </a:xfrm>
             <a:prstGeom prst="ellipse">
@@ -9133,7 +9133,7 @@
           </p:nvSpPr>
           <p:spPr>
             <a:xfrm>
-              <a:off x="3013243" y="4127268"/>
+              <a:off x="3173505" y="4127295"/>
               <a:ext cx="75116" cy="75116"/>
             </a:xfrm>
             <a:prstGeom prst="ellipse">
@@ -9159,7 +9159,7 @@
           </p:nvSpPr>
           <p:spPr>
             <a:xfrm>
-              <a:off x="3162302" y="3271358"/>
+              <a:off x="3049133" y="3273825"/>
               <a:ext cx="75116" cy="75116"/>
             </a:xfrm>
             <a:prstGeom prst="ellipse">
@@ -9185,7 +9185,7 @@
           </p:nvSpPr>
           <p:spPr>
             <a:xfrm>
-              <a:off x="3034694" y="4140843"/>
+              <a:off x="2998948" y="4140843"/>
               <a:ext cx="75116" cy="75116"/>
             </a:xfrm>
             <a:prstGeom prst="ellipse">
@@ -9211,7 +9211,7 @@
           </p:nvSpPr>
           <p:spPr>
             <a:xfrm>
-              <a:off x="2970091" y="3694621"/>
+              <a:off x="2936322" y="3694847"/>
               <a:ext cx="75116" cy="75116"/>
             </a:xfrm>
             <a:prstGeom prst="ellipse">
@@ -9237,7 +9237,7 @@
           </p:nvSpPr>
           <p:spPr>
             <a:xfrm>
-              <a:off x="3047822" y="3107581"/>
+              <a:off x="3176912" y="3107853"/>
               <a:ext cx="75116" cy="75116"/>
             </a:xfrm>
             <a:prstGeom prst="ellipse">
@@ -9263,7 +9263,7 @@
           </p:nvSpPr>
           <p:spPr>
             <a:xfrm>
-              <a:off x="3150919" y="3007614"/>
+              <a:off x="3184336" y="3007614"/>
               <a:ext cx="75116" cy="75116"/>
             </a:xfrm>
             <a:prstGeom prst="ellipse">
@@ -9289,7 +9289,7 @@
           </p:nvSpPr>
           <p:spPr>
             <a:xfrm>
-              <a:off x="2984818" y="3680326"/>
+              <a:off x="3050187" y="3679728"/>
               <a:ext cx="75116" cy="75116"/>
             </a:xfrm>
             <a:prstGeom prst="ellipse">
@@ -9315,7 +9315,7 @@
           </p:nvSpPr>
           <p:spPr>
             <a:xfrm>
-              <a:off x="2926888" y="3559270"/>
+              <a:off x="2960532" y="3561137"/>
               <a:ext cx="75116" cy="75116"/>
             </a:xfrm>
             <a:prstGeom prst="ellipse">
@@ -9341,7 +9341,7 @@
           </p:nvSpPr>
           <p:spPr>
             <a:xfrm>
-              <a:off x="2800719" y="3517790"/>
+              <a:off x="2840786" y="3517387"/>
               <a:ext cx="75116" cy="75116"/>
             </a:xfrm>
             <a:prstGeom prst="ellipse">
@@ -9367,7 +9367,7 @@
           </p:nvSpPr>
           <p:spPr>
             <a:xfrm>
-              <a:off x="3181705" y="3553321"/>
+              <a:off x="3024247" y="3553089"/>
               <a:ext cx="75116" cy="75116"/>
             </a:xfrm>
             <a:prstGeom prst="ellipse">
@@ -9393,7 +9393,7 @@
           </p:nvSpPr>
           <p:spPr>
             <a:xfrm>
-              <a:off x="2831045" y="4057520"/>
+              <a:off x="3058407" y="4053977"/>
               <a:ext cx="75116" cy="75116"/>
             </a:xfrm>
             <a:prstGeom prst="ellipse">
@@ -9419,7 +9419,7 @@
           </p:nvSpPr>
           <p:spPr>
             <a:xfrm>
-              <a:off x="3114994" y="3506274"/>
+              <a:off x="2952961" y="3508653"/>
               <a:ext cx="75116" cy="75116"/>
             </a:xfrm>
             <a:prstGeom prst="ellipse">
@@ -9445,7 +9445,7 @@
           </p:nvSpPr>
           <p:spPr>
             <a:xfrm>
-              <a:off x="2875414" y="3886790"/>
+              <a:off x="3026565" y="3887537"/>
               <a:ext cx="75116" cy="75116"/>
             </a:xfrm>
             <a:prstGeom prst="ellipse">
@@ -9471,7 +9471,7 @@
           </p:nvSpPr>
           <p:spPr>
             <a:xfrm>
-              <a:off x="2836863" y="3906492"/>
+              <a:off x="3089173" y="3905768"/>
               <a:ext cx="75116" cy="75116"/>
             </a:xfrm>
             <a:prstGeom prst="ellipse">
@@ -9497,7 +9497,7 @@
           </p:nvSpPr>
           <p:spPr>
             <a:xfrm>
-              <a:off x="2997694" y="3724169"/>
+              <a:off x="2925941" y="3724332"/>
               <a:ext cx="75116" cy="75116"/>
             </a:xfrm>
             <a:prstGeom prst="ellipse">
@@ -9523,7 +9523,7 @@
           </p:nvSpPr>
           <p:spPr>
             <a:xfrm>
-              <a:off x="3820916" y="3711772"/>
+              <a:off x="3506819" y="3712014"/>
               <a:ext cx="75116" cy="75116"/>
             </a:xfrm>
             <a:prstGeom prst="ellipse">
@@ -9549,7 +9549,7 @@
           </p:nvSpPr>
           <p:spPr>
             <a:xfrm>
-              <a:off x="3517413" y="3810665"/>
+              <a:off x="3885861" y="3810829"/>
               <a:ext cx="75116" cy="75116"/>
             </a:xfrm>
             <a:prstGeom prst="ellipse">
@@ -9575,7 +9575,7 @@
           </p:nvSpPr>
           <p:spPr>
             <a:xfrm>
-              <a:off x="3686451" y="3741620"/>
+              <a:off x="3815587" y="3740996"/>
               <a:ext cx="75116" cy="75116"/>
             </a:xfrm>
             <a:prstGeom prst="ellipse">
@@ -9601,7 +9601,7 @@
           </p:nvSpPr>
           <p:spPr>
             <a:xfrm>
-              <a:off x="3810536" y="4006779"/>
+              <a:off x="3688769" y="4006533"/>
               <a:ext cx="75116" cy="75116"/>
             </a:xfrm>
             <a:prstGeom prst="ellipse">
@@ -9627,7 +9627,7 @@
           </p:nvSpPr>
           <p:spPr>
             <a:xfrm>
-              <a:off x="3613861" y="3510597"/>
+              <a:off x="3675876" y="3510194"/>
               <a:ext cx="75116" cy="75116"/>
             </a:xfrm>
             <a:prstGeom prst="ellipse">
@@ -9653,7 +9653,7 @@
           </p:nvSpPr>
           <p:spPr>
             <a:xfrm>
-              <a:off x="3681311" y="3829092"/>
+              <a:off x="3545575" y="3828847"/>
               <a:ext cx="75116" cy="75116"/>
             </a:xfrm>
             <a:prstGeom prst="ellipse">
@@ -9679,7 +9679,7 @@
           </p:nvSpPr>
           <p:spPr>
             <a:xfrm>
-              <a:off x="3894352" y="3937048"/>
+              <a:off x="3785087" y="3936606"/>
               <a:ext cx="75116" cy="75116"/>
             </a:xfrm>
             <a:prstGeom prst="ellipse">
@@ -9705,7 +9705,7 @@
           </p:nvSpPr>
           <p:spPr>
             <a:xfrm>
-              <a:off x="3790231" y="3662938"/>
+              <a:off x="3517155" y="3663361"/>
               <a:ext cx="75116" cy="75116"/>
             </a:xfrm>
             <a:prstGeom prst="ellipse">
@@ -9731,7 +9731,7 @@
           </p:nvSpPr>
           <p:spPr>
             <a:xfrm>
-              <a:off x="3693571" y="3599162"/>
+              <a:off x="3599916" y="3600574"/>
               <a:ext cx="75116" cy="75116"/>
             </a:xfrm>
             <a:prstGeom prst="ellipse">
@@ -9757,7 +9757,7 @@
           </p:nvSpPr>
           <p:spPr>
             <a:xfrm>
-              <a:off x="3854951" y="3334129"/>
+              <a:off x="3541388" y="3335227"/>
               <a:ext cx="75116" cy="75116"/>
             </a:xfrm>
             <a:prstGeom prst="ellipse">
@@ -9783,7 +9783,7 @@
           </p:nvSpPr>
           <p:spPr>
             <a:xfrm>
-              <a:off x="3598496" y="3357297"/>
+              <a:off x="3502858" y="3357585"/>
               <a:ext cx="75116" cy="75116"/>
             </a:xfrm>
             <a:prstGeom prst="ellipse">
@@ -9809,7 +9809,7 @@
           </p:nvSpPr>
           <p:spPr>
             <a:xfrm>
-              <a:off x="3737981" y="3339232"/>
+              <a:off x="3854522" y="3340828"/>
               <a:ext cx="75116" cy="75116"/>
             </a:xfrm>
             <a:prstGeom prst="ellipse">
@@ -9835,7 +9835,7 @@
           </p:nvSpPr>
           <p:spPr>
             <a:xfrm>
-              <a:off x="3825409" y="3436068"/>
+              <a:off x="3675196" y="3435884"/>
               <a:ext cx="75116" cy="75116"/>
             </a:xfrm>
             <a:prstGeom prst="ellipse">
@@ -9861,7 +9861,7 @@
           </p:nvSpPr>
           <p:spPr>
             <a:xfrm>
-              <a:off x="3639394" y="3670270"/>
+              <a:off x="3879202" y="3670667"/>
               <a:ext cx="75116" cy="75116"/>
             </a:xfrm>
             <a:prstGeom prst="ellipse">
@@ -9887,7 +9887,7 @@
           </p:nvSpPr>
           <p:spPr>
             <a:xfrm>
-              <a:off x="3889399" y="3697213"/>
+              <a:off x="3533994" y="3696136"/>
               <a:ext cx="75116" cy="75116"/>
             </a:xfrm>
             <a:prstGeom prst="ellipse">
@@ -9913,7 +9913,7 @@
           </p:nvSpPr>
           <p:spPr>
             <a:xfrm>
-              <a:off x="3742756" y="3603411"/>
+              <a:off x="3814147" y="3603568"/>
               <a:ext cx="75116" cy="75116"/>
             </a:xfrm>
             <a:prstGeom prst="ellipse">
@@ -9939,7 +9939,7 @@
           </p:nvSpPr>
           <p:spPr>
             <a:xfrm>
-              <a:off x="3816125" y="3565915"/>
+              <a:off x="3734481" y="3567479"/>
               <a:ext cx="75116" cy="75116"/>
             </a:xfrm>
             <a:prstGeom prst="ellipse">
@@ -9965,7 +9965,7 @@
           </p:nvSpPr>
           <p:spPr>
             <a:xfrm>
-              <a:off x="3774785" y="3554577"/>
+              <a:off x="3894352" y="3555832"/>
               <a:ext cx="75116" cy="75116"/>
             </a:xfrm>
             <a:prstGeom prst="ellipse">
@@ -9991,7 +9991,7 @@
           </p:nvSpPr>
           <p:spPr>
             <a:xfrm>
-              <a:off x="3542267" y="3383713"/>
+              <a:off x="3648462" y="3385871"/>
               <a:ext cx="75116" cy="75116"/>
             </a:xfrm>
             <a:prstGeom prst="ellipse">
@@ -10017,7 +10017,7 @@
           </p:nvSpPr>
           <p:spPr>
             <a:xfrm>
-              <a:off x="3634283" y="3495096"/>
+              <a:off x="3569128" y="3495277"/>
               <a:ext cx="75116" cy="75116"/>
             </a:xfrm>
             <a:prstGeom prst="ellipse">
@@ -10043,7 +10043,7 @@
           </p:nvSpPr>
           <p:spPr>
             <a:xfrm>
-              <a:off x="3537416" y="3535790"/>
+              <a:off x="3781527" y="3538409"/>
               <a:ext cx="75116" cy="75116"/>
             </a:xfrm>
             <a:prstGeom prst="ellipse">
@@ -10069,7 +10069,7 @@
           </p:nvSpPr>
           <p:spPr>
             <a:xfrm>
-              <a:off x="3851087" y="3357336"/>
+              <a:off x="3665221" y="3358574"/>
               <a:ext cx="75116" cy="75116"/>
             </a:xfrm>
             <a:prstGeom prst="ellipse">
@@ -10095,7 +10095,7 @@
           </p:nvSpPr>
           <p:spPr>
             <a:xfrm>
-              <a:off x="3552732" y="3566257"/>
+              <a:off x="3842797" y="3567737"/>
               <a:ext cx="75116" cy="75116"/>
             </a:xfrm>
             <a:prstGeom prst="ellipse">
@@ -10121,7 +10121,7 @@
           </p:nvSpPr>
           <p:spPr>
             <a:xfrm>
-              <a:off x="3561647" y="3407365"/>
+              <a:off x="3802078" y="3407985"/>
               <a:ext cx="75116" cy="75116"/>
             </a:xfrm>
             <a:prstGeom prst="ellipse">
@@ -10147,42 +10147,42 @@
           </p:nvSpPr>
           <p:spPr>
             <a:xfrm>
-              <a:off x="1614896" y="3454031"/>
-              <a:ext cx="2116142" cy="684115"/>
+              <a:off x="1604163" y="3454691"/>
+              <a:ext cx="2131696" cy="682545"/>
             </a:xfrm>
             <a:custGeom>
               <a:avLst/>
               <a:pathLst>
-                <a:path w="2116142" h="684115">
+                <a:path w="2131696" h="682545">
                   <a:moveTo>
-                    <a:pt x="0" y="278990"/>
+                    <a:pt x="0" y="278350"/>
                   </a:moveTo>
                   <a:lnTo>
-                    <a:pt x="1118001" y="206617"/>
+                    <a:pt x="1126219" y="206143"/>
                   </a:lnTo>
                   <a:lnTo>
-                    <a:pt x="1410761" y="159255"/>
+                    <a:pt x="1421131" y="158890"/>
                   </a:lnTo>
                   <a:lnTo>
-                    <a:pt x="1823382" y="71471"/>
+                    <a:pt x="1836785" y="71307"/>
                   </a:lnTo>
                   <a:lnTo>
-                    <a:pt x="2116142" y="0"/>
+                    <a:pt x="2131696" y="0"/>
                   </a:lnTo>
                   <a:lnTo>
-                    <a:pt x="2116142" y="363398"/>
+                    <a:pt x="2131696" y="362564"/>
                   </a:lnTo>
                   <a:lnTo>
-                    <a:pt x="1823382" y="374893"/>
+                    <a:pt x="1836785" y="374033"/>
                   </a:lnTo>
                   <a:lnTo>
-                    <a:pt x="1410761" y="404045"/>
+                    <a:pt x="1421131" y="403117"/>
                   </a:lnTo>
                   <a:lnTo>
-                    <a:pt x="1118001" y="439650"/>
+                    <a:pt x="1126219" y="438641"/>
                   </a:lnTo>
                   <a:lnTo>
-                    <a:pt x="0" y="684115"/>
+                    <a:pt x="0" y="682545"/>
                   </a:lnTo>
                   <a:close/>
                 </a:path>
@@ -10208,27 +10208,27 @@
           </p:nvSpPr>
           <p:spPr>
             <a:xfrm>
-              <a:off x="1614896" y="3454031"/>
-              <a:ext cx="2116142" cy="278990"/>
+              <a:off x="1604163" y="3454691"/>
+              <a:ext cx="2131696" cy="278350"/>
             </a:xfrm>
             <a:custGeom>
               <a:avLst/>
               <a:pathLst>
-                <a:path w="2116142" h="278990">
+                <a:path w="2131696" h="278350">
                   <a:moveTo>
-                    <a:pt x="0" y="278990"/>
+                    <a:pt x="0" y="278350"/>
                   </a:moveTo>
                   <a:lnTo>
-                    <a:pt x="1118001" y="206617"/>
+                    <a:pt x="1126219" y="206143"/>
                   </a:lnTo>
                   <a:lnTo>
-                    <a:pt x="1410761" y="159255"/>
+                    <a:pt x="1421131" y="158890"/>
                   </a:lnTo>
                   <a:lnTo>
-                    <a:pt x="1823382" y="71471"/>
+                    <a:pt x="1836785" y="71307"/>
                   </a:lnTo>
                   <a:lnTo>
-                    <a:pt x="2116142" y="0"/>
+                    <a:pt x="2131696" y="0"/>
                   </a:lnTo>
                 </a:path>
               </a:pathLst>
@@ -10248,27 +10248,27 @@
           </p:nvSpPr>
           <p:spPr>
             <a:xfrm>
-              <a:off x="1614896" y="3817429"/>
-              <a:ext cx="2116142" cy="320717"/>
+              <a:off x="1604163" y="3817255"/>
+              <a:ext cx="2131696" cy="319981"/>
             </a:xfrm>
             <a:custGeom>
               <a:avLst/>
               <a:pathLst>
-                <a:path w="2116142" h="320717">
+                <a:path w="2131696" h="319981">
                   <a:moveTo>
-                    <a:pt x="2116142" y="0"/>
+                    <a:pt x="2131696" y="0"/>
                   </a:moveTo>
                   <a:lnTo>
-                    <a:pt x="1823382" y="11495"/>
+                    <a:pt x="1836785" y="11468"/>
                   </a:lnTo>
                   <a:lnTo>
-                    <a:pt x="1410761" y="40647"/>
+                    <a:pt x="1421131" y="40553"/>
                   </a:lnTo>
                   <a:lnTo>
-                    <a:pt x="1118001" y="76252"/>
+                    <a:pt x="1126219" y="76077"/>
                   </a:lnTo>
                   <a:lnTo>
-                    <a:pt x="0" y="320717"/>
+                    <a:pt x="0" y="319981"/>
                   </a:lnTo>
                 </a:path>
               </a:pathLst>
@@ -10288,27 +10288,27 @@
           </p:nvSpPr>
           <p:spPr>
             <a:xfrm>
-              <a:off x="1614896" y="3635730"/>
-              <a:ext cx="2116142" cy="299854"/>
+              <a:off x="1604163" y="3635973"/>
+              <a:ext cx="2131696" cy="299165"/>
             </a:xfrm>
             <a:custGeom>
               <a:avLst/>
               <a:pathLst>
-                <a:path w="2116142" h="299854">
+                <a:path w="2131696" h="299165">
                   <a:moveTo>
-                    <a:pt x="0" y="299854"/>
+                    <a:pt x="0" y="299165"/>
                   </a:moveTo>
                   <a:lnTo>
-                    <a:pt x="1118001" y="141434"/>
+                    <a:pt x="1126219" y="141110"/>
                   </a:lnTo>
                   <a:lnTo>
-                    <a:pt x="1410761" y="99951"/>
+                    <a:pt x="1421131" y="99721"/>
                   </a:lnTo>
                   <a:lnTo>
-                    <a:pt x="1823382" y="41483"/>
+                    <a:pt x="1836785" y="41388"/>
                   </a:lnTo>
                   <a:lnTo>
-                    <a:pt x="2116142" y="0"/>
+                    <a:pt x="2131696" y="0"/>
                   </a:lnTo>
                 </a:path>
               </a:pathLst>
@@ -10337,7 +10337,7 @@
           </p:nvSpPr>
           <p:spPr>
             <a:xfrm>
-              <a:off x="3251344" y="3034560"/>
+              <a:off x="3256166" y="3035901"/>
               <a:ext cx="479694" cy="82021"/>
             </a:xfrm>
             <a:prstGeom prst="rect">
@@ -10444,7 +10444,7 @@
           </p:nvSpPr>
           <p:spPr>
             <a:xfrm rot="-5400000">
-              <a:off x="1140466" y="4151106"/>
+              <a:off x="1140466" y="4150082"/>
               <a:ext cx="141274" cy="72877"/>
             </a:xfrm>
             <a:prstGeom prst="rect">
@@ -10490,7 +10490,7 @@
           </p:nvSpPr>
           <p:spPr>
             <a:xfrm rot="-5400000">
-              <a:off x="1140466" y="3899199"/>
+              <a:off x="1140466" y="3898754"/>
               <a:ext cx="141274" cy="72877"/>
             </a:xfrm>
             <a:prstGeom prst="rect">
@@ -10536,7 +10536,7 @@
           </p:nvSpPr>
           <p:spPr>
             <a:xfrm rot="-5400000">
-              <a:off x="1140466" y="3647293"/>
+              <a:off x="1140466" y="3647425"/>
               <a:ext cx="141274" cy="72877"/>
             </a:xfrm>
             <a:prstGeom prst="rect">
@@ -10582,7 +10582,7 @@
           </p:nvSpPr>
           <p:spPr>
             <a:xfrm rot="-5400000">
-              <a:off x="1140466" y="3395386"/>
+              <a:off x="1140466" y="3396097"/>
               <a:ext cx="141274" cy="72877"/>
             </a:xfrm>
             <a:prstGeom prst="rect">
@@ -10628,7 +10628,7 @@
           </p:nvSpPr>
           <p:spPr>
             <a:xfrm rot="-5400000">
-              <a:off x="1140466" y="3143480"/>
+              <a:off x="1140466" y="3144769"/>
               <a:ext cx="141274" cy="72877"/>
             </a:xfrm>
             <a:prstGeom prst="rect">
@@ -10674,7 +10674,7 @@
           </p:nvSpPr>
           <p:spPr>
             <a:xfrm rot="-5400000">
-              <a:off x="1140466" y="2891574"/>
+              <a:off x="1140466" y="2893441"/>
               <a:ext cx="141274" cy="72877"/>
             </a:xfrm>
             <a:prstGeom prst="rect">
@@ -10720,7 +10720,7 @@
           </p:nvSpPr>
           <p:spPr>
             <a:xfrm>
-              <a:off x="1281564" y="4187545"/>
+              <a:off x="1281564" y="4186521"/>
               <a:ext cx="28468" cy="0"/>
             </a:xfrm>
             <a:custGeom>
@@ -10760,7 +10760,7 @@
           </p:nvSpPr>
           <p:spPr>
             <a:xfrm>
-              <a:off x="1281564" y="3935638"/>
+              <a:off x="1281564" y="3935193"/>
               <a:ext cx="28468" cy="0"/>
             </a:xfrm>
             <a:custGeom>
@@ -10800,7 +10800,7 @@
           </p:nvSpPr>
           <p:spPr>
             <a:xfrm>
-              <a:off x="1281564" y="3683732"/>
+              <a:off x="1281564" y="3683864"/>
               <a:ext cx="28468" cy="0"/>
             </a:xfrm>
             <a:custGeom>
@@ -10840,7 +10840,7 @@
           </p:nvSpPr>
           <p:spPr>
             <a:xfrm>
-              <a:off x="1281564" y="3431825"/>
+              <a:off x="1281564" y="3432536"/>
               <a:ext cx="28468" cy="0"/>
             </a:xfrm>
             <a:custGeom>
@@ -10880,7 +10880,7 @@
           </p:nvSpPr>
           <p:spPr>
             <a:xfrm>
-              <a:off x="1281564" y="3179919"/>
+              <a:off x="1281564" y="3181208"/>
               <a:ext cx="28468" cy="0"/>
             </a:xfrm>
             <a:custGeom>
@@ -10920,7 +10920,7 @@
           </p:nvSpPr>
           <p:spPr>
             <a:xfrm>
-              <a:off x="1281564" y="2928012"/>
+              <a:off x="1281564" y="2929880"/>
               <a:ext cx="28468" cy="0"/>
             </a:xfrm>
             <a:custGeom>
@@ -11000,7 +11000,7 @@
           </p:nvSpPr>
           <p:spPr>
             <a:xfrm>
-              <a:off x="1614896" y="4235062"/>
+              <a:off x="1604163" y="4235062"/>
               <a:ext cx="0" cy="28468"/>
             </a:xfrm>
             <a:custGeom>
@@ -11040,7 +11040,7 @@
           </p:nvSpPr>
           <p:spPr>
             <a:xfrm>
-              <a:off x="2320277" y="4235062"/>
+              <a:off x="2314729" y="4235062"/>
               <a:ext cx="0" cy="28468"/>
             </a:xfrm>
             <a:custGeom>
@@ -11080,7 +11080,7 @@
           </p:nvSpPr>
           <p:spPr>
             <a:xfrm>
-              <a:off x="3025658" y="4235062"/>
+              <a:off x="3025295" y="4235062"/>
               <a:ext cx="0" cy="28468"/>
             </a:xfrm>
             <a:custGeom>
@@ -11120,7 +11120,7 @@
           </p:nvSpPr>
           <p:spPr>
             <a:xfrm>
-              <a:off x="3731039" y="4235062"/>
+              <a:off x="3735860" y="4235062"/>
               <a:ext cx="0" cy="28468"/>
             </a:xfrm>
             <a:custGeom>
@@ -11160,7 +11160,7 @@
           </p:nvSpPr>
           <p:spPr>
             <a:xfrm>
-              <a:off x="1586642" y="4286305"/>
+              <a:off x="1575909" y="4286305"/>
               <a:ext cx="56509" cy="72877"/>
             </a:xfrm>
             <a:prstGeom prst="rect">
@@ -11206,7 +11206,7 @@
           </p:nvSpPr>
           <p:spPr>
             <a:xfrm>
-              <a:off x="2292022" y="4286305"/>
+              <a:off x="2286474" y="4286305"/>
               <a:ext cx="56509" cy="72877"/>
             </a:xfrm>
             <a:prstGeom prst="rect">
@@ -11252,7 +11252,7 @@
           </p:nvSpPr>
           <p:spPr>
             <a:xfrm>
-              <a:off x="2997403" y="4286305"/>
+              <a:off x="2997040" y="4286305"/>
               <a:ext cx="56509" cy="72877"/>
             </a:xfrm>
             <a:prstGeom prst="rect">
@@ -11298,7 +11298,7 @@
           </p:nvSpPr>
           <p:spPr>
             <a:xfrm>
-              <a:off x="3702784" y="4286305"/>
+              <a:off x="3707605" y="4286305"/>
               <a:ext cx="56509" cy="72877"/>
             </a:xfrm>
             <a:prstGeom prst="rect">
@@ -11462,7 +11462,7 @@
           </p:nvSpPr>
           <p:spPr>
             <a:xfrm>
-              <a:off x="4464833" y="3736700"/>
+              <a:off x="4411027" y="3737198"/>
               <a:ext cx="75116" cy="75116"/>
             </a:xfrm>
             <a:prstGeom prst="ellipse">
@@ -11488,7 +11488,7 @@
           </p:nvSpPr>
           <p:spPr>
             <a:xfrm>
-              <a:off x="4358895" y="3123471"/>
+              <a:off x="4429706" y="3126957"/>
               <a:ext cx="75116" cy="75116"/>
             </a:xfrm>
             <a:prstGeom prst="ellipse">
@@ -11514,7 +11514,7 @@
           </p:nvSpPr>
           <p:spPr>
             <a:xfrm>
-              <a:off x="4483043" y="3796823"/>
+              <a:off x="4321319" y="3798241"/>
               <a:ext cx="75116" cy="75116"/>
             </a:xfrm>
             <a:prstGeom prst="ellipse">
@@ -11540,7 +11540,7 @@
           </p:nvSpPr>
           <p:spPr>
             <a:xfrm>
-              <a:off x="4532574" y="3581779"/>
+              <a:off x="4397735" y="3582217"/>
               <a:ext cx="75116" cy="75116"/>
             </a:xfrm>
             <a:prstGeom prst="ellipse">
@@ -11566,7 +11566,7 @@
           </p:nvSpPr>
           <p:spPr>
             <a:xfrm>
-              <a:off x="4466301" y="3844017"/>
+              <a:off x="4620686" y="3844278"/>
               <a:ext cx="75116" cy="75116"/>
             </a:xfrm>
             <a:prstGeom prst="ellipse">
@@ -11592,7 +11592,7 @@
           </p:nvSpPr>
           <p:spPr>
             <a:xfrm>
-              <a:off x="4357659" y="3043366"/>
+              <a:off x="4478135" y="3046242"/>
               <a:ext cx="75116" cy="75116"/>
             </a:xfrm>
             <a:prstGeom prst="ellipse">
@@ -11618,7 +11618,7 @@
           </p:nvSpPr>
           <p:spPr>
             <a:xfrm>
-              <a:off x="4604329" y="3007614"/>
+              <a:off x="4295705" y="3007614"/>
               <a:ext cx="75116" cy="75116"/>
             </a:xfrm>
             <a:prstGeom prst="ellipse">
@@ -11644,7 +11644,7 @@
           </p:nvSpPr>
           <p:spPr>
             <a:xfrm>
-              <a:off x="4548654" y="3339643"/>
+              <a:off x="4273743" y="3342268"/>
               <a:ext cx="75116" cy="75116"/>
             </a:xfrm>
             <a:prstGeom prst="ellipse">
@@ -11670,7 +11670,7 @@
           </p:nvSpPr>
           <p:spPr>
             <a:xfrm>
-              <a:off x="4630333" y="3976997"/>
+              <a:off x="4299777" y="3977679"/>
               <a:ext cx="75116" cy="75116"/>
             </a:xfrm>
             <a:prstGeom prst="ellipse">
@@ -11696,7 +11696,7 @@
           </p:nvSpPr>
           <p:spPr>
             <a:xfrm>
-              <a:off x="4273743" y="3636551"/>
+              <a:off x="4379808" y="3636036"/>
               <a:ext cx="75116" cy="75116"/>
             </a:xfrm>
             <a:prstGeom prst="ellipse">
@@ -11722,7 +11722,7 @@
           </p:nvSpPr>
           <p:spPr>
             <a:xfrm>
-              <a:off x="5243165" y="3882767"/>
+              <a:off x="5258165" y="3884996"/>
               <a:ext cx="75116" cy="75116"/>
             </a:xfrm>
             <a:prstGeom prst="ellipse">
@@ -11748,7 +11748,7 @@
           </p:nvSpPr>
           <p:spPr>
             <a:xfrm>
-              <a:off x="5047367" y="3419083"/>
+              <a:off x="5079730" y="3423438"/>
               <a:ext cx="75116" cy="75116"/>
             </a:xfrm>
             <a:prstGeom prst="ellipse">
@@ -11774,7 +11774,7 @@
           </p:nvSpPr>
           <p:spPr>
             <a:xfrm>
-              <a:off x="5029703" y="3803520"/>
+              <a:off x="5344832" y="3801575"/>
               <a:ext cx="75116" cy="75116"/>
             </a:xfrm>
             <a:prstGeom prst="ellipse">
@@ -11800,7 +11800,7 @@
           </p:nvSpPr>
           <p:spPr>
             <a:xfrm>
-              <a:off x="4951817" y="4019148"/>
+              <a:off x="5190479" y="4017626"/>
               <a:ext cx="75116" cy="75116"/>
             </a:xfrm>
             <a:prstGeom prst="ellipse">
@@ -11826,7 +11826,7 @@
           </p:nvSpPr>
           <p:spPr>
             <a:xfrm>
-              <a:off x="5010851" y="3700003"/>
+              <a:off x="5151532" y="3698071"/>
               <a:ext cx="75116" cy="75116"/>
             </a:xfrm>
             <a:prstGeom prst="ellipse">
@@ -11852,7 +11852,7 @@
           </p:nvSpPr>
           <p:spPr>
             <a:xfrm>
-              <a:off x="5306893" y="3397645"/>
+              <a:off x="5130895" y="3397949"/>
               <a:ext cx="75116" cy="75116"/>
             </a:xfrm>
             <a:prstGeom prst="ellipse">
@@ -11878,7 +11878,7 @@
           </p:nvSpPr>
           <p:spPr>
             <a:xfrm>
-              <a:off x="5230529" y="4091228"/>
+              <a:off x="4985577" y="4089841"/>
               <a:ext cx="75116" cy="75116"/>
             </a:xfrm>
             <a:prstGeom prst="ellipse">
@@ -11904,7 +11904,7 @@
           </p:nvSpPr>
           <p:spPr>
             <a:xfrm>
-              <a:off x="5333998" y="3991632"/>
+              <a:off x="5235068" y="3990364"/>
               <a:ext cx="75116" cy="75116"/>
             </a:xfrm>
             <a:prstGeom prst="ellipse">
@@ -11930,7 +11930,7 @@
           </p:nvSpPr>
           <p:spPr>
             <a:xfrm>
-              <a:off x="5133045" y="3868807"/>
+              <a:off x="5064207" y="3871674"/>
               <a:ext cx="75116" cy="75116"/>
             </a:xfrm>
             <a:prstGeom prst="ellipse">
@@ -11956,7 +11956,7 @@
           </p:nvSpPr>
           <p:spPr>
             <a:xfrm>
-              <a:off x="5137443" y="4084628"/>
+              <a:off x="5132911" y="4085088"/>
               <a:ext cx="75116" cy="75116"/>
             </a:xfrm>
             <a:prstGeom prst="ellipse">
@@ -11982,7 +11982,7 @@
           </p:nvSpPr>
           <p:spPr>
             <a:xfrm>
-              <a:off x="5284594" y="3981914"/>
+              <a:off x="5025601" y="3983993"/>
               <a:ext cx="75116" cy="75116"/>
             </a:xfrm>
             <a:prstGeom prst="ellipse">
@@ -12008,7 +12008,7 @@
           </p:nvSpPr>
           <p:spPr>
             <a:xfrm>
-              <a:off x="5184275" y="4085229"/>
+              <a:off x="5099852" y="4083994"/>
               <a:ext cx="75116" cy="75116"/>
             </a:xfrm>
             <a:prstGeom prst="ellipse">
@@ -12034,7 +12034,7 @@
           </p:nvSpPr>
           <p:spPr>
             <a:xfrm>
-              <a:off x="5222716" y="3832519"/>
+              <a:off x="5173167" y="3834235"/>
               <a:ext cx="75116" cy="75116"/>
             </a:xfrm>
             <a:prstGeom prst="ellipse">
@@ -12060,7 +12060,7 @@
           </p:nvSpPr>
           <p:spPr>
             <a:xfrm>
-              <a:off x="5218331" y="3785935"/>
+              <a:off x="5152258" y="3784502"/>
               <a:ext cx="75116" cy="75116"/>
             </a:xfrm>
             <a:prstGeom prst="ellipse">
@@ -12086,7 +12086,7 @@
           </p:nvSpPr>
           <p:spPr>
             <a:xfrm>
-              <a:off x="4993281" y="3560518"/>
+              <a:off x="5124763" y="3561751"/>
               <a:ext cx="75116" cy="75116"/>
             </a:xfrm>
             <a:prstGeom prst="ellipse">
@@ -12112,7 +12112,7 @@
           </p:nvSpPr>
           <p:spPr>
             <a:xfrm>
-              <a:off x="5010195" y="3594531"/>
+              <a:off x="4973254" y="3597311"/>
               <a:ext cx="75116" cy="75116"/>
             </a:xfrm>
             <a:prstGeom prst="ellipse">
@@ -12138,7 +12138,7 @@
           </p:nvSpPr>
           <p:spPr>
             <a:xfrm>
-              <a:off x="5028201" y="3883788"/>
+              <a:off x="5150188" y="3882876"/>
               <a:ext cx="75116" cy="75116"/>
             </a:xfrm>
             <a:prstGeom prst="ellipse">
@@ -12164,7 +12164,7 @@
           </p:nvSpPr>
           <p:spPr>
             <a:xfrm>
-              <a:off x="4984848" y="4140843"/>
+              <a:off x="5212629" y="4140843"/>
               <a:ext cx="75116" cy="75116"/>
             </a:xfrm>
             <a:prstGeom prst="ellipse">
@@ -12190,7 +12190,7 @@
           </p:nvSpPr>
           <p:spPr>
             <a:xfrm>
-              <a:off x="5803429" y="3873673"/>
+              <a:off x="5658854" y="3873923"/>
               <a:ext cx="75116" cy="75116"/>
             </a:xfrm>
             <a:prstGeom prst="ellipse">
@@ -12216,7 +12216,7 @@
           </p:nvSpPr>
           <p:spPr>
             <a:xfrm>
-              <a:off x="5883578" y="3933766"/>
+              <a:off x="6045588" y="3933151"/>
               <a:ext cx="75116" cy="75116"/>
             </a:xfrm>
             <a:prstGeom prst="ellipse">
@@ -12242,7 +12242,7 @@
           </p:nvSpPr>
           <p:spPr>
             <a:xfrm>
-              <a:off x="6038830" y="3910834"/>
+              <a:off x="5777008" y="3909454"/>
               <a:ext cx="75116" cy="75116"/>
             </a:xfrm>
             <a:prstGeom prst="ellipse">
@@ -12268,7 +12268,7 @@
           </p:nvSpPr>
           <p:spPr>
             <a:xfrm>
-              <a:off x="5773563" y="3961157"/>
+              <a:off x="5768977" y="3961161"/>
               <a:ext cx="75116" cy="75116"/>
             </a:xfrm>
             <a:prstGeom prst="ellipse">
@@ -12294,7 +12294,7 @@
           </p:nvSpPr>
           <p:spPr>
             <a:xfrm>
-              <a:off x="5755552" y="3181315"/>
+              <a:off x="5914398" y="3184267"/>
               <a:ext cx="75116" cy="75116"/>
             </a:xfrm>
             <a:prstGeom prst="ellipse">
@@ -12320,7 +12320,7 @@
           </p:nvSpPr>
           <p:spPr>
             <a:xfrm>
-              <a:off x="5832562" y="3223283"/>
+              <a:off x="5846686" y="3223788"/>
               <a:ext cx="75116" cy="75116"/>
             </a:xfrm>
             <a:prstGeom prst="ellipse">
@@ -12346,7 +12346,7 @@
           </p:nvSpPr>
           <p:spPr>
             <a:xfrm>
-              <a:off x="6039439" y="3716366"/>
+              <a:off x="5720005" y="3717655"/>
               <a:ext cx="75116" cy="75116"/>
             </a:xfrm>
             <a:prstGeom prst="ellipse">
@@ -12372,7 +12372,7 @@
           </p:nvSpPr>
           <p:spPr>
             <a:xfrm>
-              <a:off x="5693467" y="3867216"/>
+              <a:off x="5763783" y="3864505"/>
               <a:ext cx="75116" cy="75116"/>
             </a:xfrm>
             <a:prstGeom prst="ellipse">
@@ -12398,7 +12398,7 @@
           </p:nvSpPr>
           <p:spPr>
             <a:xfrm>
-              <a:off x="5655832" y="3972787"/>
+              <a:off x="5826362" y="3972841"/>
               <a:ext cx="75116" cy="75116"/>
             </a:xfrm>
             <a:prstGeom prst="ellipse">
@@ -12424,7 +12424,7 @@
           </p:nvSpPr>
           <p:spPr>
             <a:xfrm>
-              <a:off x="5702822" y="3684641"/>
+              <a:off x="5698878" y="3687917"/>
               <a:ext cx="75116" cy="75116"/>
             </a:xfrm>
             <a:prstGeom prst="ellipse">
@@ -12450,7 +12450,7 @@
           </p:nvSpPr>
           <p:spPr>
             <a:xfrm>
-              <a:off x="5909273" y="3493287"/>
+              <a:off x="5851134" y="3493026"/>
               <a:ext cx="75116" cy="75116"/>
             </a:xfrm>
             <a:prstGeom prst="ellipse">
@@ -12476,7 +12476,7 @@
           </p:nvSpPr>
           <p:spPr>
             <a:xfrm>
-              <a:off x="5761187" y="4024316"/>
+              <a:off x="5751525" y="4023024"/>
               <a:ext cx="75116" cy="75116"/>
             </a:xfrm>
             <a:prstGeom prst="ellipse">
@@ -12502,7 +12502,7 @@
           </p:nvSpPr>
           <p:spPr>
             <a:xfrm>
-              <a:off x="5991709" y="3348365"/>
+              <a:off x="6007451" y="3351788"/>
               <a:ext cx="75116" cy="75116"/>
             </a:xfrm>
             <a:prstGeom prst="ellipse">
@@ -12528,7 +12528,7 @@
           </p:nvSpPr>
           <p:spPr>
             <a:xfrm>
-              <a:off x="5840091" y="3667109"/>
+              <a:off x="5887273" y="3669803"/>
               <a:ext cx="75116" cy="75116"/>
             </a:xfrm>
             <a:prstGeom prst="ellipse">
@@ -12554,7 +12554,7 @@
           </p:nvSpPr>
           <p:spPr>
             <a:xfrm>
-              <a:off x="6020107" y="3720626"/>
+              <a:off x="5984496" y="3724058"/>
               <a:ext cx="75116" cy="75116"/>
             </a:xfrm>
             <a:prstGeom prst="ellipse">
@@ -12580,7 +12580,7 @@
           </p:nvSpPr>
           <p:spPr>
             <a:xfrm>
-              <a:off x="5761323" y="3964058"/>
+              <a:off x="5962785" y="3965275"/>
               <a:ext cx="75116" cy="75116"/>
             </a:xfrm>
             <a:prstGeom prst="ellipse">
@@ -12606,7 +12606,7 @@
           </p:nvSpPr>
           <p:spPr>
             <a:xfrm>
-              <a:off x="5815297" y="3492226"/>
+              <a:off x="5990560" y="3494190"/>
               <a:ext cx="75116" cy="75116"/>
             </a:xfrm>
             <a:prstGeom prst="ellipse">
@@ -12632,7 +12632,7 @@
           </p:nvSpPr>
           <p:spPr>
             <a:xfrm>
-              <a:off x="6023590" y="3707747"/>
+              <a:off x="5696518" y="3710589"/>
               <a:ext cx="75116" cy="75116"/>
             </a:xfrm>
             <a:prstGeom prst="ellipse">
@@ -12658,7 +12658,7 @@
           </p:nvSpPr>
           <p:spPr>
             <a:xfrm>
-              <a:off x="5802206" y="3470956"/>
+              <a:off x="5825983" y="3469982"/>
               <a:ext cx="75116" cy="75116"/>
             </a:xfrm>
             <a:prstGeom prst="ellipse">
@@ -12684,7 +12684,7 @@
           </p:nvSpPr>
           <p:spPr>
             <a:xfrm>
-              <a:off x="5665180" y="3681479"/>
+              <a:off x="5772157" y="3681591"/>
               <a:ext cx="75116" cy="75116"/>
             </a:xfrm>
             <a:prstGeom prst="ellipse">
@@ -12710,7 +12710,7 @@
           </p:nvSpPr>
           <p:spPr>
             <a:xfrm>
-              <a:off x="6435267" y="3824388"/>
+              <a:off x="6541614" y="3826419"/>
               <a:ext cx="75116" cy="75116"/>
             </a:xfrm>
             <a:prstGeom prst="ellipse">
@@ -12736,7 +12736,7 @@
           </p:nvSpPr>
           <p:spPr>
             <a:xfrm>
-              <a:off x="6481418" y="3910196"/>
+              <a:off x="6678280" y="3910447"/>
               <a:ext cx="75116" cy="75116"/>
             </a:xfrm>
             <a:prstGeom prst="ellipse">
@@ -12762,7 +12762,7 @@
           </p:nvSpPr>
           <p:spPr>
             <a:xfrm>
-              <a:off x="6768059" y="3694941"/>
+              <a:off x="6770769" y="3694570"/>
               <a:ext cx="75116" cy="75116"/>
             </a:xfrm>
             <a:prstGeom prst="ellipse">
@@ -12788,7 +12788,7 @@
           </p:nvSpPr>
           <p:spPr>
             <a:xfrm>
-              <a:off x="6770769" y="3502493"/>
+              <a:off x="6656111" y="3500771"/>
               <a:ext cx="75116" cy="75116"/>
             </a:xfrm>
             <a:prstGeom prst="ellipse">
@@ -12814,7 +12814,7 @@
           </p:nvSpPr>
           <p:spPr>
             <a:xfrm>
-              <a:off x="6518319" y="3672544"/>
+              <a:off x="6755202" y="3673832"/>
               <a:ext cx="75116" cy="75116"/>
             </a:xfrm>
             <a:prstGeom prst="ellipse">
@@ -12840,7 +12840,7 @@
           </p:nvSpPr>
           <p:spPr>
             <a:xfrm>
-              <a:off x="6752236" y="3709369"/>
+              <a:off x="6744258" y="3708655"/>
               <a:ext cx="75116" cy="75116"/>
             </a:xfrm>
             <a:prstGeom prst="ellipse">
@@ -12866,7 +12866,7 @@
           </p:nvSpPr>
           <p:spPr>
             <a:xfrm>
-              <a:off x="6397121" y="3839362"/>
+              <a:off x="6480226" y="3837461"/>
               <a:ext cx="75116" cy="75116"/>
             </a:xfrm>
             <a:prstGeom prst="ellipse">
@@ -12892,7 +12892,7 @@
           </p:nvSpPr>
           <p:spPr>
             <a:xfrm>
-              <a:off x="6660462" y="3744456"/>
+              <a:off x="6737024" y="3745166"/>
               <a:ext cx="75116" cy="75116"/>
             </a:xfrm>
             <a:prstGeom prst="ellipse">
@@ -12918,7 +12918,7 @@
           </p:nvSpPr>
           <p:spPr>
             <a:xfrm>
-              <a:off x="6515165" y="3838044"/>
+              <a:off x="6740578" y="3838080"/>
               <a:ext cx="75116" cy="75116"/>
             </a:xfrm>
             <a:prstGeom prst="ellipse">
@@ -12944,7 +12944,7 @@
           </p:nvSpPr>
           <p:spPr>
             <a:xfrm>
-              <a:off x="6713244" y="3760776"/>
+              <a:off x="6652160" y="3760933"/>
               <a:ext cx="75116" cy="75116"/>
             </a:xfrm>
             <a:prstGeom prst="ellipse">
@@ -12970,7 +12970,7 @@
           </p:nvSpPr>
           <p:spPr>
             <a:xfrm>
-              <a:off x="6641202" y="3538574"/>
+              <a:off x="6543457" y="3537762"/>
               <a:ext cx="75116" cy="75116"/>
             </a:xfrm>
             <a:prstGeom prst="ellipse">
@@ -12996,7 +12996,7 @@
           </p:nvSpPr>
           <p:spPr>
             <a:xfrm>
-              <a:off x="6640426" y="3275828"/>
+              <a:off x="6761080" y="3277664"/>
               <a:ext cx="75116" cy="75116"/>
             </a:xfrm>
             <a:prstGeom prst="ellipse">
@@ -13022,7 +13022,7 @@
           </p:nvSpPr>
           <p:spPr>
             <a:xfrm>
-              <a:off x="6629172" y="3851479"/>
+              <a:off x="6668407" y="3851932"/>
               <a:ext cx="75116" cy="75116"/>
             </a:xfrm>
             <a:prstGeom prst="ellipse">
@@ -13048,7 +13048,7 @@
           </p:nvSpPr>
           <p:spPr>
             <a:xfrm>
-              <a:off x="6526202" y="3996513"/>
+              <a:off x="6363929" y="3994515"/>
               <a:ext cx="75116" cy="75116"/>
             </a:xfrm>
             <a:prstGeom prst="ellipse">
@@ -13074,7 +13074,7 @@
           </p:nvSpPr>
           <p:spPr>
             <a:xfrm>
-              <a:off x="6473552" y="3963487"/>
+              <a:off x="6547970" y="3965832"/>
               <a:ext cx="75116" cy="75116"/>
             </a:xfrm>
             <a:prstGeom prst="ellipse">
@@ -13100,7 +13100,7 @@
           </p:nvSpPr>
           <p:spPr>
             <a:xfrm>
-              <a:off x="6588316" y="3738096"/>
+              <a:off x="6607713" y="3739804"/>
               <a:ext cx="75116" cy="75116"/>
             </a:xfrm>
             <a:prstGeom prst="ellipse">
@@ -13126,7 +13126,7 @@
           </p:nvSpPr>
           <p:spPr>
             <a:xfrm>
-              <a:off x="6706922" y="3905938"/>
+              <a:off x="6635359" y="3905497"/>
               <a:ext cx="75116" cy="75116"/>
             </a:xfrm>
             <a:prstGeom prst="ellipse">
@@ -13152,7 +13152,7 @@
           </p:nvSpPr>
           <p:spPr>
             <a:xfrm>
-              <a:off x="6675008" y="3805775"/>
+              <a:off x="6531156" y="3806139"/>
               <a:ext cx="75116" cy="75116"/>
             </a:xfrm>
             <a:prstGeom prst="ellipse">
@@ -13178,7 +13178,7 @@
           </p:nvSpPr>
           <p:spPr>
             <a:xfrm>
-              <a:off x="6433325" y="3347679"/>
+              <a:off x="6708635" y="3349827"/>
               <a:ext cx="75116" cy="75116"/>
             </a:xfrm>
             <a:prstGeom prst="ellipse">
@@ -13204,7 +13204,7 @@
           </p:nvSpPr>
           <p:spPr>
             <a:xfrm>
-              <a:off x="6536395" y="3650961"/>
+              <a:off x="6572373" y="3648731"/>
               <a:ext cx="75116" cy="75116"/>
             </a:xfrm>
             <a:prstGeom prst="ellipse">
@@ -13230,7 +13230,7 @@
           </p:nvSpPr>
           <p:spPr>
             <a:xfrm>
-              <a:off x="6615897" y="3730884"/>
+              <a:off x="6727140" y="3732587"/>
               <a:ext cx="75116" cy="75116"/>
             </a:xfrm>
             <a:prstGeom prst="ellipse">
@@ -13256,7 +13256,7 @@
           </p:nvSpPr>
           <p:spPr>
             <a:xfrm>
-              <a:off x="6561717" y="3683010"/>
+              <a:off x="6446074" y="3681770"/>
               <a:ext cx="75116" cy="75116"/>
             </a:xfrm>
             <a:prstGeom prst="ellipse">
@@ -13282,7 +13282,7 @@
           </p:nvSpPr>
           <p:spPr>
             <a:xfrm>
-              <a:off x="6482793" y="3959507"/>
+              <a:off x="6492322" y="3959340"/>
               <a:ext cx="75116" cy="75116"/>
             </a:xfrm>
             <a:prstGeom prst="ellipse">
@@ -13308,7 +13308,7 @@
           </p:nvSpPr>
           <p:spPr>
             <a:xfrm>
-              <a:off x="6647347" y="3639113"/>
+              <a:off x="6664427" y="3642262"/>
               <a:ext cx="75116" cy="75116"/>
             </a:xfrm>
             <a:prstGeom prst="ellipse">
@@ -13334,42 +13334,42 @@
           </p:nvSpPr>
           <p:spPr>
             <a:xfrm>
-              <a:off x="4469739" y="3558751"/>
-              <a:ext cx="2135625" cy="335038"/>
+              <a:off x="4475588" y="3559843"/>
+              <a:ext cx="2129999" cy="334154"/>
             </a:xfrm>
             <a:custGeom>
               <a:avLst/>
               <a:pathLst>
-                <a:path w="2135625" h="335038">
+                <a:path w="2129999" h="334154">
                   <a:moveTo>
                     <a:pt x="0" y="0"/>
                   </a:moveTo>
                   <a:lnTo>
-                    <a:pt x="1128295" y="97754"/>
+                    <a:pt x="1125323" y="97496"/>
                   </a:lnTo>
                   <a:lnTo>
-                    <a:pt x="1423750" y="111976"/>
+                    <a:pt x="1419999" y="111681"/>
                   </a:lnTo>
                   <a:lnTo>
-                    <a:pt x="1840170" y="122408"/>
+                    <a:pt x="1835323" y="122085"/>
                   </a:lnTo>
                   <a:lnTo>
-                    <a:pt x="2135625" y="124459"/>
+                    <a:pt x="2129999" y="124130"/>
                   </a:lnTo>
                   <a:lnTo>
-                    <a:pt x="2135625" y="335038"/>
+                    <a:pt x="2129999" y="334154"/>
                   </a:lnTo>
                   <a:lnTo>
-                    <a:pt x="1840170" y="308873"/>
+                    <a:pt x="1835323" y="308058"/>
                   </a:lnTo>
                   <a:lnTo>
-                    <a:pt x="1423750" y="279536"/>
+                    <a:pt x="1419999" y="278798"/>
                   </a:lnTo>
                   <a:lnTo>
-                    <a:pt x="1128295" y="265542"/>
+                    <a:pt x="1125323" y="264842"/>
                   </a:lnTo>
                   <a:lnTo>
-                    <a:pt x="0" y="255544"/>
+                    <a:pt x="0" y="254870"/>
                   </a:lnTo>
                   <a:close/>
                 </a:path>
@@ -13395,27 +13395,27 @@
           </p:nvSpPr>
           <p:spPr>
             <a:xfrm>
-              <a:off x="4469739" y="3558751"/>
-              <a:ext cx="2135625" cy="124459"/>
+              <a:off x="4475588" y="3559843"/>
+              <a:ext cx="2129999" cy="124130"/>
             </a:xfrm>
             <a:custGeom>
               <a:avLst/>
               <a:pathLst>
-                <a:path w="2135625" h="124459">
+                <a:path w="2129999" h="124130">
                   <a:moveTo>
                     <a:pt x="0" y="0"/>
                   </a:moveTo>
                   <a:lnTo>
-                    <a:pt x="1128295" y="97754"/>
+                    <a:pt x="1125323" y="97496"/>
                   </a:lnTo>
                   <a:lnTo>
-                    <a:pt x="1423750" y="111976"/>
+                    <a:pt x="1419999" y="111681"/>
                   </a:lnTo>
                   <a:lnTo>
-                    <a:pt x="1840170" y="122408"/>
+                    <a:pt x="1835323" y="122085"/>
                   </a:lnTo>
                   <a:lnTo>
-                    <a:pt x="2135625" y="124459"/>
+                    <a:pt x="2129999" y="124130"/>
                   </a:lnTo>
                 </a:path>
               </a:pathLst>
@@ -13435,24 +13435,24 @@
           </p:nvSpPr>
           <p:spPr>
             <a:xfrm>
-              <a:off x="4469739" y="3814295"/>
-              <a:ext cx="2135625" cy="79494"/>
+              <a:off x="4475588" y="3814713"/>
+              <a:ext cx="2129999" cy="79284"/>
             </a:xfrm>
             <a:custGeom>
               <a:avLst/>
               <a:pathLst>
-                <a:path w="2135625" h="79494">
+                <a:path w="2129999" h="79284">
                   <a:moveTo>
-                    <a:pt x="2135625" y="79494"/>
+                    <a:pt x="2129999" y="79284"/>
                   </a:moveTo>
                   <a:lnTo>
-                    <a:pt x="1840170" y="53329"/>
+                    <a:pt x="1835323" y="53188"/>
                   </a:lnTo>
                   <a:lnTo>
-                    <a:pt x="1423750" y="23992"/>
+                    <a:pt x="1419999" y="23928"/>
                   </a:lnTo>
                   <a:lnTo>
-                    <a:pt x="1128295" y="9998"/>
+                    <a:pt x="1125323" y="9972"/>
                   </a:lnTo>
                   <a:lnTo>
                     <a:pt x="0" y="0"/>
@@ -13475,27 +13475,27 @@
           </p:nvSpPr>
           <p:spPr>
             <a:xfrm>
-              <a:off x="4469739" y="3686523"/>
-              <a:ext cx="2135625" cy="101976"/>
+              <a:off x="4475588" y="3687278"/>
+              <a:ext cx="2129999" cy="101707"/>
             </a:xfrm>
             <a:custGeom>
               <a:avLst/>
               <a:pathLst>
-                <a:path w="2135625" h="101976">
+                <a:path w="2129999" h="101707">
                   <a:moveTo>
                     <a:pt x="0" y="0"/>
                   </a:moveTo>
                   <a:lnTo>
-                    <a:pt x="1128295" y="53876"/>
+                    <a:pt x="1125323" y="53734"/>
                   </a:lnTo>
                   <a:lnTo>
-                    <a:pt x="1423750" y="67984"/>
+                    <a:pt x="1419999" y="67805"/>
                   </a:lnTo>
                   <a:lnTo>
-                    <a:pt x="1840170" y="87868"/>
+                    <a:pt x="1835323" y="87636"/>
                   </a:lnTo>
                   <a:lnTo>
-                    <a:pt x="2135625" y="101976"/>
+                    <a:pt x="2129999" y="101707"/>
                   </a:lnTo>
                 </a:path>
               </a:pathLst>
@@ -13524,7 +13524,7 @@
           </p:nvSpPr>
           <p:spPr>
             <a:xfrm>
-              <a:off x="6125671" y="3034561"/>
+              <a:off x="6125894" y="3036711"/>
               <a:ext cx="479694" cy="82021"/>
             </a:xfrm>
             <a:prstGeom prst="rect">
@@ -13631,7 +13631,7 @@
           </p:nvSpPr>
           <p:spPr>
             <a:xfrm>
-              <a:off x="4157982" y="4069668"/>
+              <a:off x="4157982" y="4069412"/>
               <a:ext cx="28468" cy="0"/>
             </a:xfrm>
             <a:custGeom>
@@ -13671,7 +13671,7 @@
           </p:nvSpPr>
           <p:spPr>
             <a:xfrm>
-              <a:off x="4157982" y="3838139"/>
+              <a:off x="4157982" y="3838494"/>
               <a:ext cx="28468" cy="0"/>
             </a:xfrm>
             <a:custGeom>
@@ -13711,7 +13711,7 @@
           </p:nvSpPr>
           <p:spPr>
             <a:xfrm>
-              <a:off x="4157982" y="3606611"/>
+              <a:off x="4157982" y="3607577"/>
               <a:ext cx="28468" cy="0"/>
             </a:xfrm>
             <a:custGeom>
@@ -13751,7 +13751,7 @@
           </p:nvSpPr>
           <p:spPr>
             <a:xfrm>
-              <a:off x="4157982" y="3375083"/>
+              <a:off x="4157982" y="3376659"/>
               <a:ext cx="28468" cy="0"/>
             </a:xfrm>
             <a:custGeom>
@@ -13791,7 +13791,7 @@
           </p:nvSpPr>
           <p:spPr>
             <a:xfrm>
-              <a:off x="4157982" y="3143554"/>
+              <a:off x="4157982" y="3145741"/>
               <a:ext cx="28468" cy="0"/>
             </a:xfrm>
             <a:custGeom>
@@ -13831,7 +13831,7 @@
           </p:nvSpPr>
           <p:spPr>
             <a:xfrm>
-              <a:off x="4157982" y="2912026"/>
+              <a:off x="4157982" y="2914823"/>
               <a:ext cx="28468" cy="0"/>
             </a:xfrm>
             <a:custGeom>
@@ -13911,7 +13911,7 @@
           </p:nvSpPr>
           <p:spPr>
             <a:xfrm>
-              <a:off x="4469739" y="4235062"/>
+              <a:off x="4475588" y="4235062"/>
               <a:ext cx="0" cy="28468"/>
             </a:xfrm>
             <a:custGeom>
@@ -13951,7 +13951,7 @@
           </p:nvSpPr>
           <p:spPr>
             <a:xfrm>
-              <a:off x="5181614" y="4235062"/>
+              <a:off x="5185588" y="4235062"/>
               <a:ext cx="0" cy="28468"/>
             </a:xfrm>
             <a:custGeom>
@@ -13991,7 +13991,7 @@
           </p:nvSpPr>
           <p:spPr>
             <a:xfrm>
-              <a:off x="5893490" y="4235062"/>
+              <a:off x="5895588" y="4235062"/>
               <a:ext cx="0" cy="28468"/>
             </a:xfrm>
             <a:custGeom>
@@ -14031,7 +14031,7 @@
           </p:nvSpPr>
           <p:spPr>
             <a:xfrm>
-              <a:off x="6605365" y="4235062"/>
+              <a:off x="6605588" y="4235062"/>
               <a:ext cx="0" cy="28468"/>
             </a:xfrm>
             <a:custGeom>
@@ -14071,7 +14071,7 @@
           </p:nvSpPr>
           <p:spPr>
             <a:xfrm>
-              <a:off x="4441484" y="4286305"/>
+              <a:off x="4447333" y="4286305"/>
               <a:ext cx="56509" cy="72877"/>
             </a:xfrm>
             <a:prstGeom prst="rect">
@@ -14117,7 +14117,7 @@
           </p:nvSpPr>
           <p:spPr>
             <a:xfrm>
-              <a:off x="5153359" y="4286305"/>
+              <a:off x="5157333" y="4286305"/>
               <a:ext cx="56509" cy="72877"/>
             </a:xfrm>
             <a:prstGeom prst="rect">
@@ -14163,7 +14163,7 @@
           </p:nvSpPr>
           <p:spPr>
             <a:xfrm>
-              <a:off x="5865235" y="4286305"/>
+              <a:off x="5867333" y="4286305"/>
               <a:ext cx="56509" cy="72877"/>
             </a:xfrm>
             <a:prstGeom prst="rect">
@@ -14209,7 +14209,7 @@
           </p:nvSpPr>
           <p:spPr>
             <a:xfrm>
-              <a:off x="6577110" y="4286305"/>
+              <a:off x="6577333" y="4286305"/>
               <a:ext cx="56509" cy="72877"/>
             </a:xfrm>
             <a:prstGeom prst="rect">
@@ -14327,7 +14327,7 @@
           </p:nvSpPr>
           <p:spPr>
             <a:xfrm>
-              <a:off x="1430046" y="5492452"/>
+              <a:off x="1464516" y="5488996"/>
               <a:ext cx="75116" cy="75116"/>
             </a:xfrm>
             <a:prstGeom prst="ellipse">
@@ -14353,7 +14353,7 @@
           </p:nvSpPr>
           <p:spPr>
             <a:xfrm>
-              <a:off x="1397325" y="5373704"/>
+              <a:off x="1720126" y="5374046"/>
               <a:ext cx="75116" cy="75116"/>
             </a:xfrm>
             <a:prstGeom prst="ellipse">
@@ -14379,7 +14379,7 @@
           </p:nvSpPr>
           <p:spPr>
             <a:xfrm>
-              <a:off x="1621999" y="5446603"/>
+              <a:off x="1703645" y="5443067"/>
               <a:ext cx="75116" cy="75116"/>
             </a:xfrm>
             <a:prstGeom prst="ellipse">
@@ -14405,7 +14405,7 @@
           </p:nvSpPr>
           <p:spPr>
             <a:xfrm>
-              <a:off x="1451314" y="5609643"/>
+              <a:off x="1539463" y="5606865"/>
               <a:ext cx="75116" cy="75116"/>
             </a:xfrm>
             <a:prstGeom prst="ellipse">
@@ -14431,7 +14431,7 @@
           </p:nvSpPr>
           <p:spPr>
             <a:xfrm>
-              <a:off x="1776079" y="5754582"/>
+              <a:off x="1425649" y="5751103"/>
               <a:ext cx="75116" cy="75116"/>
             </a:xfrm>
             <a:prstGeom prst="ellipse">
@@ -14457,7 +14457,7 @@
           </p:nvSpPr>
           <p:spPr>
             <a:xfrm>
-              <a:off x="1471575" y="5467345"/>
+              <a:off x="1581082" y="5466977"/>
               <a:ext cx="75116" cy="75116"/>
             </a:xfrm>
             <a:prstGeom prst="ellipse">
@@ -14483,7 +14483,7 @@
           </p:nvSpPr>
           <p:spPr>
             <a:xfrm>
-              <a:off x="1759274" y="5580966"/>
+              <a:off x="1431380" y="5579052"/>
               <a:ext cx="75116" cy="75116"/>
             </a:xfrm>
             <a:prstGeom prst="ellipse">
@@ -14509,7 +14509,7 @@
           </p:nvSpPr>
           <p:spPr>
             <a:xfrm>
-              <a:off x="1410722" y="5612982"/>
+              <a:off x="1397325" y="5612819"/>
               <a:ext cx="75116" cy="75116"/>
             </a:xfrm>
             <a:prstGeom prst="ellipse">
@@ -14535,7 +14535,7 @@
           </p:nvSpPr>
           <p:spPr>
             <a:xfrm>
-              <a:off x="1660481" y="5702534"/>
+              <a:off x="1434374" y="5699892"/>
               <a:ext cx="75116" cy="75116"/>
             </a:xfrm>
             <a:prstGeom prst="ellipse">
@@ -14561,7 +14561,7 @@
           </p:nvSpPr>
           <p:spPr>
             <a:xfrm>
-              <a:off x="1790331" y="5429993"/>
+              <a:off x="1540714" y="5428880"/>
               <a:ext cx="75116" cy="75116"/>
             </a:xfrm>
             <a:prstGeom prst="ellipse">
@@ -14587,7 +14587,7 @@
           </p:nvSpPr>
           <p:spPr>
             <a:xfrm>
-              <a:off x="2117746" y="5591499"/>
+              <a:off x="2302308" y="5591695"/>
               <a:ext cx="75116" cy="75116"/>
             </a:xfrm>
             <a:prstGeom prst="ellipse">
@@ -14613,7 +14613,7 @@
           </p:nvSpPr>
           <p:spPr>
             <a:xfrm>
-              <a:off x="2348441" y="4937726"/>
+              <a:off x="2477598" y="4940791"/>
               <a:ext cx="75116" cy="75116"/>
             </a:xfrm>
             <a:prstGeom prst="ellipse">
@@ -14639,7 +14639,7 @@
           </p:nvSpPr>
           <p:spPr>
             <a:xfrm>
-              <a:off x="2201701" y="5072785"/>
+              <a:off x="2434829" y="5073564"/>
               <a:ext cx="75116" cy="75116"/>
             </a:xfrm>
             <a:prstGeom prst="ellipse">
@@ -14665,7 +14665,7 @@
           </p:nvSpPr>
           <p:spPr>
             <a:xfrm>
-              <a:off x="2397413" y="5289952"/>
+              <a:off x="2489155" y="5287528"/>
               <a:ext cx="75116" cy="75116"/>
             </a:xfrm>
             <a:prstGeom prst="ellipse">
@@ -14691,7 +14691,7 @@
           </p:nvSpPr>
           <p:spPr>
             <a:xfrm>
-              <a:off x="2242783" y="5413016"/>
+              <a:off x="2166892" y="5410849"/>
               <a:ext cx="75116" cy="75116"/>
             </a:xfrm>
             <a:prstGeom prst="ellipse">
@@ -14717,7 +14717,7 @@
           </p:nvSpPr>
           <p:spPr>
             <a:xfrm>
-              <a:off x="2360978" y="5874481"/>
+              <a:off x="2292738" y="5874481"/>
               <a:ext cx="75116" cy="75116"/>
             </a:xfrm>
             <a:prstGeom prst="ellipse">
@@ -14743,7 +14743,7 @@
           </p:nvSpPr>
           <p:spPr>
             <a:xfrm>
-              <a:off x="2417126" y="5630179"/>
+              <a:off x="2084151" y="5630922"/>
               <a:ext cx="75116" cy="75116"/>
             </a:xfrm>
             <a:prstGeom prst="ellipse">
@@ -14769,7 +14769,7 @@
           </p:nvSpPr>
           <p:spPr>
             <a:xfrm>
-              <a:off x="2477371" y="5248575"/>
+              <a:off x="2326850" y="5245816"/>
               <a:ext cx="75116" cy="75116"/>
             </a:xfrm>
             <a:prstGeom prst="ellipse">
@@ -14795,7 +14795,7 @@
           </p:nvSpPr>
           <p:spPr>
             <a:xfrm>
-              <a:off x="2204747" y="4816648"/>
+              <a:off x="2083285" y="4817666"/>
               <a:ext cx="75116" cy="75116"/>
             </a:xfrm>
             <a:prstGeom prst="ellipse">
@@ -14821,7 +14821,7 @@
           </p:nvSpPr>
           <p:spPr>
             <a:xfrm>
-              <a:off x="2158360" y="4741253"/>
+              <a:off x="2146680" y="4741253"/>
               <a:ext cx="75116" cy="75116"/>
             </a:xfrm>
             <a:prstGeom prst="ellipse">
@@ -14847,7 +14847,7 @@
           </p:nvSpPr>
           <p:spPr>
             <a:xfrm>
-              <a:off x="2323624" y="5486573"/>
+              <a:off x="2101344" y="5486718"/>
               <a:ext cx="75116" cy="75116"/>
             </a:xfrm>
             <a:prstGeom prst="ellipse">
@@ -14873,7 +14873,7 @@
           </p:nvSpPr>
           <p:spPr>
             <a:xfrm>
-              <a:off x="2179727" y="5230265"/>
+              <a:off x="2230079" y="5229314"/>
               <a:ext cx="75116" cy="75116"/>
             </a:xfrm>
             <a:prstGeom prst="ellipse">
@@ -14899,7 +14899,7 @@
           </p:nvSpPr>
           <p:spPr>
             <a:xfrm>
-              <a:off x="2437790" y="5048360"/>
+              <a:off x="2336288" y="5050034"/>
               <a:ext cx="75116" cy="75116"/>
             </a:xfrm>
             <a:prstGeom prst="ellipse">
@@ -14925,7 +14925,7 @@
           </p:nvSpPr>
           <p:spPr>
             <a:xfrm>
-              <a:off x="2344738" y="5172095"/>
+              <a:off x="2170588" y="5170063"/>
               <a:ext cx="75116" cy="75116"/>
             </a:xfrm>
             <a:prstGeom prst="ellipse">
@@ -14951,7 +14951,7 @@
           </p:nvSpPr>
           <p:spPr>
             <a:xfrm>
-              <a:off x="2408163" y="5627995"/>
+              <a:off x="2123950" y="5624434"/>
               <a:ext cx="75116" cy="75116"/>
             </a:xfrm>
             <a:prstGeom prst="ellipse">
@@ -14977,7 +14977,7 @@
           </p:nvSpPr>
           <p:spPr>
             <a:xfrm>
-              <a:off x="2499922" y="5576499"/>
+              <a:off x="2139028" y="5575013"/>
               <a:ext cx="75116" cy="75116"/>
             </a:xfrm>
             <a:prstGeom prst="ellipse">
@@ -15003,7 +15003,7 @@
           </p:nvSpPr>
           <p:spPr>
             <a:xfrm>
-              <a:off x="2250368" y="5091998"/>
+              <a:off x="2239763" y="5089759"/>
               <a:ext cx="75116" cy="75116"/>
             </a:xfrm>
             <a:prstGeom prst="ellipse">
@@ -15029,7 +15029,7 @@
           </p:nvSpPr>
           <p:spPr>
             <a:xfrm>
-              <a:off x="2164369" y="5131612"/>
+              <a:off x="2236673" y="5133797"/>
               <a:ext cx="75116" cy="75116"/>
             </a:xfrm>
             <a:prstGeom prst="ellipse">
@@ -15055,7 +15055,7 @@
           </p:nvSpPr>
           <p:spPr>
             <a:xfrm>
-              <a:off x="2798715" y="5665796"/>
+              <a:off x="2876392" y="5663526"/>
               <a:ext cx="75116" cy="75116"/>
             </a:xfrm>
             <a:prstGeom prst="ellipse">
@@ -15081,7 +15081,7 @@
           </p:nvSpPr>
           <p:spPr>
             <a:xfrm>
-              <a:off x="3102267" y="5390186"/>
+              <a:off x="2907247" y="5389896"/>
               <a:ext cx="75116" cy="75116"/>
             </a:xfrm>
             <a:prstGeom prst="ellipse">
@@ -15107,7 +15107,7 @@
           </p:nvSpPr>
           <p:spPr>
             <a:xfrm>
-              <a:off x="2911716" y="5495095"/>
+              <a:off x="2924603" y="5495803"/>
               <a:ext cx="75116" cy="75116"/>
             </a:xfrm>
             <a:prstGeom prst="ellipse">
@@ -15133,7 +15133,7 @@
           </p:nvSpPr>
           <p:spPr>
             <a:xfrm>
-              <a:off x="2937255" y="5726268"/>
+              <a:off x="2977084" y="5724975"/>
               <a:ext cx="75116" cy="75116"/>
             </a:xfrm>
             <a:prstGeom prst="ellipse">
@@ -15159,7 +15159,7 @@
           </p:nvSpPr>
           <p:spPr>
             <a:xfrm>
-              <a:off x="2886753" y="5367972"/>
+              <a:off x="3006259" y="5367594"/>
               <a:ext cx="75116" cy="75116"/>
             </a:xfrm>
             <a:prstGeom prst="ellipse">
@@ -15185,7 +15185,7 @@
           </p:nvSpPr>
           <p:spPr>
             <a:xfrm>
-              <a:off x="2993301" y="5628117"/>
+              <a:off x="3041496" y="5624888"/>
               <a:ext cx="75116" cy="75116"/>
             </a:xfrm>
             <a:prstGeom prst="ellipse">
@@ -15211,7 +15211,7 @@
           </p:nvSpPr>
           <p:spPr>
             <a:xfrm>
-              <a:off x="3046108" y="4872087"/>
+              <a:off x="2828469" y="4873503"/>
               <a:ext cx="75116" cy="75116"/>
             </a:xfrm>
             <a:prstGeom prst="ellipse">
@@ -15237,7 +15237,7 @@
           </p:nvSpPr>
           <p:spPr>
             <a:xfrm>
-              <a:off x="3022974" y="5557555"/>
+              <a:off x="3076818" y="5558602"/>
               <a:ext cx="75116" cy="75116"/>
             </a:xfrm>
             <a:prstGeom prst="ellipse">
@@ -15263,7 +15263,7 @@
           </p:nvSpPr>
           <p:spPr>
             <a:xfrm>
-              <a:off x="3018537" y="5277957"/>
+              <a:off x="2933278" y="5275033"/>
               <a:ext cx="75116" cy="75116"/>
             </a:xfrm>
             <a:prstGeom prst="ellipse">
@@ -15289,7 +15289,7 @@
           </p:nvSpPr>
           <p:spPr>
             <a:xfrm>
-              <a:off x="3063681" y="5104715"/>
+              <a:off x="2982949" y="5103469"/>
               <a:ext cx="75116" cy="75116"/>
             </a:xfrm>
             <a:prstGeom prst="ellipse">
@@ -15315,7 +15315,7 @@
           </p:nvSpPr>
           <p:spPr>
             <a:xfrm>
-              <a:off x="3091528" y="4791411"/>
+              <a:off x="3002936" y="4793510"/>
               <a:ext cx="75116" cy="75116"/>
             </a:xfrm>
             <a:prstGeom prst="ellipse">
@@ -15341,7 +15341,7 @@
           </p:nvSpPr>
           <p:spPr>
             <a:xfrm>
-              <a:off x="3044865" y="4993378"/>
+              <a:off x="3209447" y="4992494"/>
               <a:ext cx="75116" cy="75116"/>
             </a:xfrm>
             <a:prstGeom prst="ellipse">
@@ -15367,7 +15367,7 @@
           </p:nvSpPr>
           <p:spPr>
             <a:xfrm>
-              <a:off x="3108409" y="5581710"/>
+              <a:off x="2822053" y="5579552"/>
               <a:ext cx="75116" cy="75116"/>
             </a:xfrm>
             <a:prstGeom prst="ellipse">
@@ -15393,7 +15393,7 @@
           </p:nvSpPr>
           <p:spPr>
             <a:xfrm>
-              <a:off x="2899736" y="5212440"/>
+              <a:off x="3067447" y="5212400"/>
               <a:ext cx="75116" cy="75116"/>
             </a:xfrm>
             <a:prstGeom prst="ellipse">
@@ -15419,7 +15419,7 @@
           </p:nvSpPr>
           <p:spPr>
             <a:xfrm>
-              <a:off x="2963101" y="5340224"/>
+              <a:off x="2887942" y="5338235"/>
               <a:ext cx="75116" cy="75116"/>
             </a:xfrm>
             <a:prstGeom prst="ellipse">
@@ -15445,7 +15445,7 @@
           </p:nvSpPr>
           <p:spPr>
             <a:xfrm>
-              <a:off x="2897286" y="5171437"/>
+              <a:off x="3006890" y="5170421"/>
               <a:ext cx="75116" cy="75116"/>
             </a:xfrm>
             <a:prstGeom prst="ellipse">
@@ -15471,7 +15471,7 @@
           </p:nvSpPr>
           <p:spPr>
             <a:xfrm>
-              <a:off x="3199865" y="5553430"/>
+              <a:off x="2998878" y="5553309"/>
               <a:ext cx="75116" cy="75116"/>
             </a:xfrm>
             <a:prstGeom prst="ellipse">
@@ -15497,7 +15497,7 @@
           </p:nvSpPr>
           <p:spPr>
             <a:xfrm>
-              <a:off x="3051724" y="5208432"/>
+              <a:off x="2946047" y="5210262"/>
               <a:ext cx="75116" cy="75116"/>
             </a:xfrm>
             <a:prstGeom prst="ellipse">
@@ -15523,7 +15523,7 @@
           </p:nvSpPr>
           <p:spPr>
             <a:xfrm>
-              <a:off x="2988088" y="5519477"/>
+              <a:off x="2963115" y="5519732"/>
               <a:ext cx="75116" cy="75116"/>
             </a:xfrm>
             <a:prstGeom prst="ellipse">
@@ -15549,7 +15549,7 @@
           </p:nvSpPr>
           <p:spPr>
             <a:xfrm>
-              <a:off x="3002603" y="5482991"/>
+              <a:off x="3008673" y="5482648"/>
               <a:ext cx="75116" cy="75116"/>
             </a:xfrm>
             <a:prstGeom prst="ellipse">
@@ -15575,7 +15575,7 @@
           </p:nvSpPr>
           <p:spPr>
             <a:xfrm>
-              <a:off x="3666850" y="5533843"/>
+              <a:off x="3575515" y="5532156"/>
               <a:ext cx="75116" cy="75116"/>
             </a:xfrm>
             <a:prstGeom prst="ellipse">
@@ -15601,7 +15601,7 @@
           </p:nvSpPr>
           <p:spPr>
             <a:xfrm>
-              <a:off x="3677561" y="5488669"/>
+              <a:off x="3657863" y="5486574"/>
               <a:ext cx="75116" cy="75116"/>
             </a:xfrm>
             <a:prstGeom prst="ellipse">
@@ -15627,7 +15627,7 @@
           </p:nvSpPr>
           <p:spPr>
             <a:xfrm>
-              <a:off x="3858097" y="5652742"/>
+              <a:off x="3887104" y="5648911"/>
               <a:ext cx="75116" cy="75116"/>
             </a:xfrm>
             <a:prstGeom prst="ellipse">
@@ -15653,7 +15653,7 @@
           </p:nvSpPr>
           <p:spPr>
             <a:xfrm>
-              <a:off x="3596047" y="5257010"/>
+              <a:off x="3712700" y="5256324"/>
               <a:ext cx="75116" cy="75116"/>
             </a:xfrm>
             <a:prstGeom prst="ellipse">
@@ -15679,7 +15679,7 @@
           </p:nvSpPr>
           <p:spPr>
             <a:xfrm>
-              <a:off x="3506781" y="5311374"/>
+              <a:off x="3870443" y="5308737"/>
               <a:ext cx="75116" cy="75116"/>
             </a:xfrm>
             <a:prstGeom prst="ellipse">
@@ -15705,7 +15705,7 @@
           </p:nvSpPr>
           <p:spPr>
             <a:xfrm>
-              <a:off x="3700848" y="4822591"/>
+              <a:off x="3709203" y="4821758"/>
               <a:ext cx="75116" cy="75116"/>
             </a:xfrm>
             <a:prstGeom prst="ellipse">
@@ -15731,7 +15731,7 @@
           </p:nvSpPr>
           <p:spPr>
             <a:xfrm>
-              <a:off x="3894352" y="5288388"/>
+              <a:off x="3804034" y="5288519"/>
               <a:ext cx="75116" cy="75116"/>
             </a:xfrm>
             <a:prstGeom prst="ellipse">
@@ -15757,7 +15757,7 @@
           </p:nvSpPr>
           <p:spPr>
             <a:xfrm>
-              <a:off x="3811858" y="5482404"/>
+              <a:off x="3543666" y="5483265"/>
               <a:ext cx="75116" cy="75116"/>
             </a:xfrm>
             <a:prstGeom prst="ellipse">
@@ -15783,7 +15783,7 @@
           </p:nvSpPr>
           <p:spPr>
             <a:xfrm>
-              <a:off x="3645253" y="5303274"/>
+              <a:off x="3551390" y="5299640"/>
               <a:ext cx="75116" cy="75116"/>
             </a:xfrm>
             <a:prstGeom prst="ellipse">
@@ -15809,7 +15809,7 @@
           </p:nvSpPr>
           <p:spPr>
             <a:xfrm>
-              <a:off x="3666655" y="5195651"/>
+              <a:off x="3785621" y="5196911"/>
               <a:ext cx="75116" cy="75116"/>
             </a:xfrm>
             <a:prstGeom prst="ellipse">
@@ -15835,7 +15835,7 @@
           </p:nvSpPr>
           <p:spPr>
             <a:xfrm>
-              <a:off x="3571036" y="5141673"/>
+              <a:off x="3540843" y="5141473"/>
               <a:ext cx="75116" cy="75116"/>
             </a:xfrm>
             <a:prstGeom prst="ellipse">
@@ -15861,7 +15861,7 @@
           </p:nvSpPr>
           <p:spPr>
             <a:xfrm>
-              <a:off x="3585303" y="5015044"/>
+              <a:off x="3894352" y="5013505"/>
               <a:ext cx="75116" cy="75116"/>
             </a:xfrm>
             <a:prstGeom prst="ellipse">
@@ -15887,7 +15887,7 @@
           </p:nvSpPr>
           <p:spPr>
             <a:xfrm>
-              <a:off x="3589041" y="5439781"/>
+              <a:off x="3654490" y="5440187"/>
               <a:ext cx="75116" cy="75116"/>
             </a:xfrm>
             <a:prstGeom prst="ellipse">
@@ -15913,7 +15913,7 @@
           </p:nvSpPr>
           <p:spPr>
             <a:xfrm>
-              <a:off x="3809394" y="4923099"/>
+              <a:off x="3644980" y="4921207"/>
               <a:ext cx="75116" cy="75116"/>
             </a:xfrm>
             <a:prstGeom prst="ellipse">
@@ -15939,7 +15939,7 @@
           </p:nvSpPr>
           <p:spPr>
             <a:xfrm>
-              <a:off x="3581942" y="5712365"/>
+              <a:off x="3891108" y="5710531"/>
               <a:ext cx="75116" cy="75116"/>
             </a:xfrm>
             <a:prstGeom prst="ellipse">
@@ -15965,7 +15965,7 @@
           </p:nvSpPr>
           <p:spPr>
             <a:xfrm>
-              <a:off x="3709113" y="5580219"/>
+              <a:off x="3626142" y="5578705"/>
               <a:ext cx="75116" cy="75116"/>
             </a:xfrm>
             <a:prstGeom prst="ellipse">
@@ -15991,7 +15991,7 @@
           </p:nvSpPr>
           <p:spPr>
             <a:xfrm>
-              <a:off x="3806705" y="5418473"/>
+              <a:off x="3707572" y="5417528"/>
               <a:ext cx="75116" cy="75116"/>
             </a:xfrm>
             <a:prstGeom prst="ellipse">
@@ -16017,7 +16017,7 @@
           </p:nvSpPr>
           <p:spPr>
             <a:xfrm>
-              <a:off x="3509040" y="5504901"/>
+              <a:off x="3704196" y="5502494"/>
               <a:ext cx="75116" cy="75116"/>
             </a:xfrm>
             <a:prstGeom prst="ellipse">
@@ -16043,7 +16043,7 @@
           </p:nvSpPr>
           <p:spPr>
             <a:xfrm>
-              <a:off x="3766583" y="5383320"/>
+              <a:off x="3653215" y="5382744"/>
               <a:ext cx="75116" cy="75116"/>
             </a:xfrm>
             <a:prstGeom prst="ellipse">
@@ -16069,7 +16069,7 @@
           </p:nvSpPr>
           <p:spPr>
             <a:xfrm>
-              <a:off x="3858797" y="5547235"/>
+              <a:off x="3551750" y="5543874"/>
               <a:ext cx="75116" cy="75116"/>
             </a:xfrm>
             <a:prstGeom prst="ellipse">
@@ -16095,7 +16095,7 @@
           </p:nvSpPr>
           <p:spPr>
             <a:xfrm>
-              <a:off x="3566119" y="5357491"/>
+              <a:off x="3721935" y="5355629"/>
               <a:ext cx="75116" cy="75116"/>
             </a:xfrm>
             <a:prstGeom prst="ellipse">
@@ -16121,7 +16121,7 @@
           </p:nvSpPr>
           <p:spPr>
             <a:xfrm>
-              <a:off x="3849065" y="5283703"/>
+              <a:off x="3684267" y="5285778"/>
               <a:ext cx="75116" cy="75116"/>
             </a:xfrm>
             <a:prstGeom prst="ellipse">
@@ -16147,7 +16147,7 @@
           </p:nvSpPr>
           <p:spPr>
             <a:xfrm>
-              <a:off x="3871782" y="5292996"/>
+              <a:off x="3752509" y="5292230"/>
               <a:ext cx="75116" cy="75116"/>
             </a:xfrm>
             <a:prstGeom prst="ellipse">
@@ -16173,7 +16173,7 @@
           </p:nvSpPr>
           <p:spPr>
             <a:xfrm>
-              <a:off x="3819474" y="5351546"/>
+              <a:off x="3777888" y="5350377"/>
               <a:ext cx="75116" cy="75116"/>
             </a:xfrm>
             <a:prstGeom prst="ellipse">
@@ -16199,42 +16199,42 @@
           </p:nvSpPr>
           <p:spPr>
             <a:xfrm>
-              <a:off x="1630855" y="5184060"/>
-              <a:ext cx="2111102" cy="407488"/>
+              <a:off x="1590195" y="5183910"/>
+              <a:ext cx="2193175" cy="406411"/>
             </a:xfrm>
             <a:custGeom>
               <a:avLst/>
               <a:pathLst>
-                <a:path w="2111102" h="407488">
+                <a:path w="2193175" h="406411">
                   <a:moveTo>
                     <a:pt x="0" y="0"/>
                   </a:moveTo>
                   <a:lnTo>
-                    <a:pt x="1115339" y="90188"/>
+                    <a:pt x="1158700" y="89949"/>
                   </a:lnTo>
                   <a:lnTo>
-                    <a:pt x="1407401" y="81606"/>
+                    <a:pt x="1462116" y="81390"/>
                   </a:lnTo>
                   <a:lnTo>
-                    <a:pt x="1819040" y="45145"/>
+                    <a:pt x="1889758" y="45025"/>
                   </a:lnTo>
                   <a:lnTo>
-                    <a:pt x="2111102" y="9651"/>
+                    <a:pt x="2193175" y="9625"/>
                   </a:lnTo>
                   <a:lnTo>
-                    <a:pt x="2111102" y="365496"/>
+                    <a:pt x="2193175" y="364529"/>
                   </a:lnTo>
                   <a:lnTo>
-                    <a:pt x="1819040" y="334477"/>
+                    <a:pt x="1889758" y="333592"/>
                   </a:lnTo>
                   <a:lnTo>
-                    <a:pt x="1407401" y="304322"/>
+                    <a:pt x="1462116" y="303517"/>
                   </a:lnTo>
                   <a:lnTo>
-                    <a:pt x="1115339" y="300214"/>
+                    <a:pt x="1158700" y="299420"/>
                   </a:lnTo>
                   <a:lnTo>
-                    <a:pt x="0" y="407488"/>
+                    <a:pt x="0" y="406411"/>
                   </a:lnTo>
                   <a:close/>
                 </a:path>
@@ -16260,27 +16260,27 @@
           </p:nvSpPr>
           <p:spPr>
             <a:xfrm>
-              <a:off x="1630855" y="5184060"/>
-              <a:ext cx="2111102" cy="90188"/>
+              <a:off x="1590195" y="5183910"/>
+              <a:ext cx="2193175" cy="89949"/>
             </a:xfrm>
             <a:custGeom>
               <a:avLst/>
               <a:pathLst>
-                <a:path w="2111102" h="90188">
+                <a:path w="2193175" h="89949">
                   <a:moveTo>
                     <a:pt x="0" y="0"/>
                   </a:moveTo>
                   <a:lnTo>
-                    <a:pt x="1115339" y="90188"/>
+                    <a:pt x="1158700" y="89949"/>
                   </a:lnTo>
                   <a:lnTo>
-                    <a:pt x="1407401" y="81606"/>
+                    <a:pt x="1462116" y="81390"/>
                   </a:lnTo>
                   <a:lnTo>
-                    <a:pt x="1819040" y="45145"/>
+                    <a:pt x="1889758" y="45025"/>
                   </a:lnTo>
                   <a:lnTo>
-                    <a:pt x="2111102" y="9651"/>
+                    <a:pt x="2193175" y="9625"/>
                   </a:lnTo>
                 </a:path>
               </a:pathLst>
@@ -16300,27 +16300,27 @@
           </p:nvSpPr>
           <p:spPr>
             <a:xfrm>
-              <a:off x="1630855" y="5484275"/>
-              <a:ext cx="2111102" cy="107274"/>
+              <a:off x="1590195" y="5483331"/>
+              <a:ext cx="2193175" cy="106990"/>
             </a:xfrm>
             <a:custGeom>
               <a:avLst/>
               <a:pathLst>
-                <a:path w="2111102" h="107274">
+                <a:path w="2193175" h="106990">
                   <a:moveTo>
-                    <a:pt x="2111102" y="65282"/>
+                    <a:pt x="2193175" y="65109"/>
                   </a:moveTo>
                   <a:lnTo>
-                    <a:pt x="1819040" y="34262"/>
+                    <a:pt x="1889758" y="34172"/>
                   </a:lnTo>
                   <a:lnTo>
-                    <a:pt x="1407401" y="4107"/>
+                    <a:pt x="1462116" y="4096"/>
                   </a:lnTo>
                   <a:lnTo>
-                    <a:pt x="1115339" y="0"/>
+                    <a:pt x="1158700" y="0"/>
                   </a:lnTo>
                   <a:lnTo>
-                    <a:pt x="0" y="107274"/>
+                    <a:pt x="0" y="106990"/>
                   </a:lnTo>
                 </a:path>
               </a:pathLst>
@@ -16340,27 +16340,27 @@
           </p:nvSpPr>
           <p:spPr>
             <a:xfrm>
-              <a:off x="1630855" y="5371634"/>
-              <a:ext cx="2111102" cy="16170"/>
+              <a:off x="1590195" y="5370988"/>
+              <a:ext cx="2193175" cy="16127"/>
             </a:xfrm>
             <a:custGeom>
               <a:avLst/>
               <a:pathLst>
-                <a:path w="2111102" h="16170">
+                <a:path w="2193175" h="16127">
                   <a:moveTo>
-                    <a:pt x="0" y="16170"/>
+                    <a:pt x="0" y="16127"/>
                   </a:moveTo>
                   <a:lnTo>
-                    <a:pt x="1115339" y="7627"/>
+                    <a:pt x="1158700" y="7607"/>
                   </a:lnTo>
                   <a:lnTo>
-                    <a:pt x="1407401" y="5390"/>
+                    <a:pt x="1462116" y="5375"/>
                   </a:lnTo>
                   <a:lnTo>
-                    <a:pt x="1819040" y="2237"/>
+                    <a:pt x="1889758" y="2231"/>
                   </a:lnTo>
                   <a:lnTo>
-                    <a:pt x="2111102" y="0"/>
+                    <a:pt x="2193175" y="0"/>
                   </a:lnTo>
                 </a:path>
               </a:pathLst>
@@ -16389,7 +16389,7 @@
           </p:nvSpPr>
           <p:spPr>
             <a:xfrm>
-              <a:off x="3262263" y="4768768"/>
+              <a:off x="3303677" y="4769391"/>
               <a:ext cx="479694" cy="82021"/>
             </a:xfrm>
             <a:prstGeom prst="rect">
@@ -16496,7 +16496,7 @@
           </p:nvSpPr>
           <p:spPr>
             <a:xfrm rot="-5400000">
-              <a:off x="1140466" y="5848075"/>
+              <a:off x="1140466" y="5846072"/>
               <a:ext cx="141274" cy="72877"/>
             </a:xfrm>
             <a:prstGeom prst="rect">
@@ -16542,7 +16542,7 @@
           </p:nvSpPr>
           <p:spPr>
             <a:xfrm rot="-5400000">
-              <a:off x="1140466" y="5500559"/>
+              <a:off x="1140466" y="5499476"/>
               <a:ext cx="141274" cy="72877"/>
             </a:xfrm>
             <a:prstGeom prst="rect">
@@ -16588,7 +16588,7 @@
           </p:nvSpPr>
           <p:spPr>
             <a:xfrm rot="-5400000">
-              <a:off x="1140466" y="5153044"/>
+              <a:off x="1140466" y="5152880"/>
               <a:ext cx="141274" cy="72877"/>
             </a:xfrm>
             <a:prstGeom prst="rect">
@@ -16634,7 +16634,7 @@
           </p:nvSpPr>
           <p:spPr>
             <a:xfrm rot="-5400000">
-              <a:off x="1140466" y="4805529"/>
+              <a:off x="1140466" y="4806283"/>
               <a:ext cx="141274" cy="72877"/>
             </a:xfrm>
             <a:prstGeom prst="rect">
@@ -16680,7 +16680,7 @@
           </p:nvSpPr>
           <p:spPr>
             <a:xfrm>
-              <a:off x="1281564" y="5884514"/>
+              <a:off x="1281564" y="5882511"/>
               <a:ext cx="28468" cy="0"/>
             </a:xfrm>
             <a:custGeom>
@@ -16720,7 +16720,7 @@
           </p:nvSpPr>
           <p:spPr>
             <a:xfrm>
-              <a:off x="1281564" y="5536998"/>
+              <a:off x="1281564" y="5535915"/>
               <a:ext cx="28468" cy="0"/>
             </a:xfrm>
             <a:custGeom>
@@ -16760,7 +16760,7 @@
           </p:nvSpPr>
           <p:spPr>
             <a:xfrm>
-              <a:off x="1281564" y="5189483"/>
+              <a:off x="1281564" y="5189318"/>
               <a:ext cx="28468" cy="0"/>
             </a:xfrm>
             <a:custGeom>
@@ -16800,7 +16800,7 @@
           </p:nvSpPr>
           <p:spPr>
             <a:xfrm>
-              <a:off x="1281564" y="4841967"/>
+              <a:off x="1281564" y="4842722"/>
               <a:ext cx="28468" cy="0"/>
             </a:xfrm>
             <a:custGeom>
@@ -16880,7 +16880,7 @@
           </p:nvSpPr>
           <p:spPr>
             <a:xfrm>
-              <a:off x="1630855" y="5968701"/>
+              <a:off x="1590195" y="5968701"/>
               <a:ext cx="0" cy="28468"/>
             </a:xfrm>
             <a:custGeom>
@@ -16920,7 +16920,7 @@
           </p:nvSpPr>
           <p:spPr>
             <a:xfrm>
-              <a:off x="2334556" y="5968701"/>
+              <a:off x="2321254" y="5968701"/>
               <a:ext cx="0" cy="28468"/>
             </a:xfrm>
             <a:custGeom>
@@ -16960,7 +16960,7 @@
           </p:nvSpPr>
           <p:spPr>
             <a:xfrm>
-              <a:off x="3038257" y="5968701"/>
+              <a:off x="3052312" y="5968701"/>
               <a:ext cx="0" cy="28468"/>
             </a:xfrm>
             <a:custGeom>
@@ -17000,7 +17000,7 @@
           </p:nvSpPr>
           <p:spPr>
             <a:xfrm>
-              <a:off x="3741957" y="5968701"/>
+              <a:off x="3783371" y="5968701"/>
               <a:ext cx="0" cy="28468"/>
             </a:xfrm>
             <a:custGeom>
@@ -17040,7 +17040,7 @@
           </p:nvSpPr>
           <p:spPr>
             <a:xfrm>
-              <a:off x="1602600" y="6019944"/>
+              <a:off x="1561940" y="6019944"/>
               <a:ext cx="56509" cy="72877"/>
             </a:xfrm>
             <a:prstGeom prst="rect">
@@ -17086,7 +17086,7 @@
           </p:nvSpPr>
           <p:spPr>
             <a:xfrm>
-              <a:off x="2306301" y="6019944"/>
+              <a:off x="2292999" y="6019944"/>
               <a:ext cx="56509" cy="72877"/>
             </a:xfrm>
             <a:prstGeom prst="rect">
@@ -17132,7 +17132,7 @@
           </p:nvSpPr>
           <p:spPr>
             <a:xfrm>
-              <a:off x="3010002" y="6019944"/>
+              <a:off x="3024057" y="6019944"/>
               <a:ext cx="56509" cy="72877"/>
             </a:xfrm>
             <a:prstGeom prst="rect">
@@ -17178,7 +17178,7 @@
           </p:nvSpPr>
           <p:spPr>
             <a:xfrm>
-              <a:off x="3713702" y="6019944"/>
+              <a:off x="3755116" y="6019944"/>
               <a:ext cx="56509" cy="72877"/>
             </a:xfrm>
             <a:prstGeom prst="rect">
@@ -17388,7 +17388,7 @@
           </p:nvSpPr>
           <p:spPr>
             <a:xfrm>
-              <a:off x="4631995" y="5418136"/>
+              <a:off x="4576366" y="5417647"/>
               <a:ext cx="75116" cy="75116"/>
             </a:xfrm>
             <a:prstGeom prst="ellipse">
@@ -17414,7 +17414,7 @@
           </p:nvSpPr>
           <p:spPr>
             <a:xfrm>
-              <a:off x="4392454" y="5351220"/>
+              <a:off x="4609386" y="5352362"/>
               <a:ext cx="75116" cy="75116"/>
             </a:xfrm>
             <a:prstGeom prst="ellipse">
@@ -17440,7 +17440,7 @@
           </p:nvSpPr>
           <p:spPr>
             <a:xfrm>
-              <a:off x="4362110" y="5404341"/>
+              <a:off x="4308130" y="5404994"/>
               <a:ext cx="75116" cy="75116"/>
             </a:xfrm>
             <a:prstGeom prst="ellipse">
@@ -17466,7 +17466,7 @@
           </p:nvSpPr>
           <p:spPr>
             <a:xfrm>
-              <a:off x="4541689" y="5675598"/>
+              <a:off x="4273743" y="5675916"/>
               <a:ext cx="75116" cy="75116"/>
             </a:xfrm>
             <a:prstGeom prst="ellipse">
@@ -17492,7 +17492,7 @@
           </p:nvSpPr>
           <p:spPr>
             <a:xfrm>
-              <a:off x="4517635" y="5640968"/>
+              <a:off x="4532461" y="5641918"/>
               <a:ext cx="75116" cy="75116"/>
             </a:xfrm>
             <a:prstGeom prst="ellipse">
@@ -17518,7 +17518,7 @@
           </p:nvSpPr>
           <p:spPr>
             <a:xfrm>
-              <a:off x="4273743" y="5603414"/>
+              <a:off x="4596067" y="5603795"/>
               <a:ext cx="75116" cy="75116"/>
             </a:xfrm>
             <a:prstGeom prst="ellipse">
@@ -17544,7 +17544,7 @@
           </p:nvSpPr>
           <p:spPr>
             <a:xfrm>
-              <a:off x="4423096" y="5195471"/>
+              <a:off x="4319546" y="5195749"/>
               <a:ext cx="75116" cy="75116"/>
             </a:xfrm>
             <a:prstGeom prst="ellipse">
@@ -17570,7 +17570,7 @@
           </p:nvSpPr>
           <p:spPr>
             <a:xfrm>
-              <a:off x="4512919" y="5434908"/>
+              <a:off x="4338146" y="5436199"/>
               <a:ext cx="75116" cy="75116"/>
             </a:xfrm>
             <a:prstGeom prst="ellipse">
@@ -17596,7 +17596,7 @@
           </p:nvSpPr>
           <p:spPr>
             <a:xfrm>
-              <a:off x="4494538" y="5623598"/>
+              <a:off x="4446457" y="5623158"/>
               <a:ext cx="75116" cy="75116"/>
             </a:xfrm>
             <a:prstGeom prst="ellipse">
@@ -17622,7 +17622,7 @@
           </p:nvSpPr>
           <p:spPr>
             <a:xfrm>
-              <a:off x="4380855" y="5328839"/>
+              <a:off x="4408560" y="5329237"/>
               <a:ext cx="75116" cy="75116"/>
             </a:xfrm>
             <a:prstGeom prst="ellipse">
@@ -17648,7 +17648,7 @@
           </p:nvSpPr>
           <p:spPr>
             <a:xfrm>
-              <a:off x="5304733" y="5874481"/>
+              <a:off x="5229152" y="5874481"/>
               <a:ext cx="75116" cy="75116"/>
             </a:xfrm>
             <a:prstGeom prst="ellipse">
@@ -17674,7 +17674,7 @@
           </p:nvSpPr>
           <p:spPr>
             <a:xfrm>
-              <a:off x="5297628" y="5543985"/>
+              <a:off x="5155876" y="5544164"/>
               <a:ext cx="75116" cy="75116"/>
             </a:xfrm>
             <a:prstGeom prst="ellipse">
@@ -17700,7 +17700,7 @@
           </p:nvSpPr>
           <p:spPr>
             <a:xfrm>
-              <a:off x="5219408" y="5358538"/>
+              <a:off x="5183989" y="5359229"/>
               <a:ext cx="75116" cy="75116"/>
             </a:xfrm>
             <a:prstGeom prst="ellipse">
@@ -17726,7 +17726,7 @@
           </p:nvSpPr>
           <p:spPr>
             <a:xfrm>
-              <a:off x="5139460" y="5754402"/>
+              <a:off x="4974146" y="5755417"/>
               <a:ext cx="75116" cy="75116"/>
             </a:xfrm>
             <a:prstGeom prst="ellipse">
@@ -17752,7 +17752,7 @@
           </p:nvSpPr>
           <p:spPr>
             <a:xfrm>
-              <a:off x="5183235" y="5474486"/>
+              <a:off x="5341211" y="5473549"/>
               <a:ext cx="75116" cy="75116"/>
             </a:xfrm>
             <a:prstGeom prst="ellipse">
@@ -17778,7 +17778,7 @@
           </p:nvSpPr>
           <p:spPr>
             <a:xfrm>
-              <a:off x="5097961" y="5137564"/>
+              <a:off x="5020054" y="5138171"/>
               <a:ext cx="75116" cy="75116"/>
             </a:xfrm>
             <a:prstGeom prst="ellipse">
@@ -17804,7 +17804,7 @@
           </p:nvSpPr>
           <p:spPr>
             <a:xfrm>
-              <a:off x="5287969" y="5506013"/>
+              <a:off x="5013411" y="5505404"/>
               <a:ext cx="75116" cy="75116"/>
             </a:xfrm>
             <a:prstGeom prst="ellipse">
@@ -17830,7 +17830,7 @@
           </p:nvSpPr>
           <p:spPr>
             <a:xfrm>
-              <a:off x="5021028" y="5564963"/>
+              <a:off x="5022357" y="5564458"/>
               <a:ext cx="75116" cy="75116"/>
             </a:xfrm>
             <a:prstGeom prst="ellipse">
@@ -17856,7 +17856,7 @@
           </p:nvSpPr>
           <p:spPr>
             <a:xfrm>
-              <a:off x="5159162" y="5341077"/>
+              <a:off x="5277476" y="5340680"/>
               <a:ext cx="75116" cy="75116"/>
             </a:xfrm>
             <a:prstGeom prst="ellipse">
@@ -17882,7 +17882,7 @@
           </p:nvSpPr>
           <p:spPr>
             <a:xfrm>
-              <a:off x="5147063" y="5644546"/>
+              <a:off x="5010083" y="5643990"/>
               <a:ext cx="75116" cy="75116"/>
             </a:xfrm>
             <a:prstGeom prst="ellipse">
@@ -17908,7 +17908,7 @@
           </p:nvSpPr>
           <p:spPr>
             <a:xfrm>
-              <a:off x="4992329" y="5291610"/>
+              <a:off x="5320074" y="5291683"/>
               <a:ext cx="75116" cy="75116"/>
             </a:xfrm>
             <a:prstGeom prst="ellipse">
@@ -17934,7 +17934,7 @@
           </p:nvSpPr>
           <p:spPr>
             <a:xfrm>
-              <a:off x="5351440" y="5609395"/>
+              <a:off x="5182719" y="5609964"/>
               <a:ext cx="75116" cy="75116"/>
             </a:xfrm>
             <a:prstGeom prst="ellipse">
@@ -17960,7 +17960,7 @@
           </p:nvSpPr>
           <p:spPr>
             <a:xfrm>
-              <a:off x="5363937" y="5265231"/>
+              <a:off x="5206152" y="5266998"/>
               <a:ext cx="75116" cy="75116"/>
             </a:xfrm>
             <a:prstGeom prst="ellipse">
@@ -17986,7 +17986,7 @@
           </p:nvSpPr>
           <p:spPr>
             <a:xfrm>
-              <a:off x="5290447" y="4960087"/>
+              <a:off x="5306106" y="4960753"/>
               <a:ext cx="75116" cy="75116"/>
             </a:xfrm>
             <a:prstGeom prst="ellipse">
@@ -18012,7 +18012,7 @@
           </p:nvSpPr>
           <p:spPr>
             <a:xfrm>
-              <a:off x="5238746" y="5198332"/>
+              <a:off x="5016410" y="5199064"/>
               <a:ext cx="75116" cy="75116"/>
             </a:xfrm>
             <a:prstGeom prst="ellipse">
@@ -18038,7 +18038,7 @@
           </p:nvSpPr>
           <p:spPr>
             <a:xfrm>
-              <a:off x="5353295" y="5240159"/>
+              <a:off x="5064816" y="5241518"/>
               <a:ext cx="75116" cy="75116"/>
             </a:xfrm>
             <a:prstGeom prst="ellipse">
@@ -18064,7 +18064,7 @@
           </p:nvSpPr>
           <p:spPr>
             <a:xfrm>
-              <a:off x="5164042" y="5345408"/>
+              <a:off x="5289812" y="5345138"/>
               <a:ext cx="75116" cy="75116"/>
             </a:xfrm>
             <a:prstGeom prst="ellipse">
@@ -18090,7 +18090,7 @@
           </p:nvSpPr>
           <p:spPr>
             <a:xfrm>
-              <a:off x="5234299" y="5592279"/>
+              <a:off x="5071270" y="5592729"/>
               <a:ext cx="75116" cy="75116"/>
             </a:xfrm>
             <a:prstGeom prst="ellipse">
@@ -18116,7 +18116,7 @@
           </p:nvSpPr>
           <p:spPr>
             <a:xfrm>
-              <a:off x="6043422" y="5395679"/>
+              <a:off x="5955386" y="5395493"/>
               <a:ext cx="75116" cy="75116"/>
             </a:xfrm>
             <a:prstGeom prst="ellipse">
@@ -18142,7 +18142,7 @@
           </p:nvSpPr>
           <p:spPr>
             <a:xfrm>
-              <a:off x="6027832" y="5444595"/>
+              <a:off x="5924331" y="5445393"/>
               <a:ext cx="75116" cy="75116"/>
             </a:xfrm>
             <a:prstGeom prst="ellipse">
@@ -18168,7 +18168,7 @@
           </p:nvSpPr>
           <p:spPr>
             <a:xfrm>
-              <a:off x="6010797" y="5625474"/>
+              <a:off x="5847157" y="5625747"/>
               <a:ext cx="75116" cy="75116"/>
             </a:xfrm>
             <a:prstGeom prst="ellipse">
@@ -18194,7 +18194,7 @@
           </p:nvSpPr>
           <p:spPr>
             <a:xfrm>
-              <a:off x="5753953" y="5241090"/>
+              <a:off x="5957636" y="5241708"/>
               <a:ext cx="75116" cy="75116"/>
             </a:xfrm>
             <a:prstGeom prst="ellipse">
@@ -18220,7 +18220,7 @@
           </p:nvSpPr>
           <p:spPr>
             <a:xfrm>
-              <a:off x="6033092" y="5447721"/>
+              <a:off x="5686877" y="5446963"/>
               <a:ext cx="75116" cy="75116"/>
             </a:xfrm>
             <a:prstGeom prst="ellipse">
@@ -18246,7 +18246,7 @@
           </p:nvSpPr>
           <p:spPr>
             <a:xfrm>
-              <a:off x="6043646" y="5259583"/>
+              <a:off x="5970440" y="5259411"/>
               <a:ext cx="75116" cy="75116"/>
             </a:xfrm>
             <a:prstGeom prst="ellipse">
@@ -18272,7 +18272,7 @@
           </p:nvSpPr>
           <p:spPr>
             <a:xfrm>
-              <a:off x="5802941" y="4863322"/>
+              <a:off x="6045808" y="4863638"/>
               <a:ext cx="75116" cy="75116"/>
             </a:xfrm>
             <a:prstGeom prst="ellipse">
@@ -18298,7 +18298,7 @@
           </p:nvSpPr>
           <p:spPr>
             <a:xfrm>
-              <a:off x="5967449" y="5496372"/>
+              <a:off x="5811667" y="5497138"/>
               <a:ext cx="75116" cy="75116"/>
             </a:xfrm>
             <a:prstGeom prst="ellipse">
@@ -18324,7 +18324,7 @@
           </p:nvSpPr>
           <p:spPr>
             <a:xfrm>
-              <a:off x="6030187" y="5342159"/>
+              <a:off x="5801022" y="5344042"/>
               <a:ext cx="75116" cy="75116"/>
             </a:xfrm>
             <a:prstGeom prst="ellipse">
@@ -18350,7 +18350,7 @@
           </p:nvSpPr>
           <p:spPr>
             <a:xfrm>
-              <a:off x="6025529" y="4741253"/>
+              <a:off x="5893749" y="4741253"/>
               <a:ext cx="75116" cy="75116"/>
             </a:xfrm>
             <a:prstGeom prst="ellipse">
@@ -18376,7 +18376,7 @@
           </p:nvSpPr>
           <p:spPr>
             <a:xfrm>
-              <a:off x="6061122" y="5348096"/>
+              <a:off x="5762597" y="5347095"/>
               <a:ext cx="75116" cy="75116"/>
             </a:xfrm>
             <a:prstGeom prst="ellipse">
@@ -18402,7 +18402,7 @@
           </p:nvSpPr>
           <p:spPr>
             <a:xfrm>
-              <a:off x="5857378" y="5446135"/>
+              <a:off x="5943399" y="5446764"/>
               <a:ext cx="75116" cy="75116"/>
             </a:xfrm>
             <a:prstGeom prst="ellipse">
@@ -18428,7 +18428,7 @@
           </p:nvSpPr>
           <p:spPr>
             <a:xfrm>
-              <a:off x="5822599" y="5238727"/>
+              <a:off x="5919587" y="5239847"/>
               <a:ext cx="75116" cy="75116"/>
             </a:xfrm>
             <a:prstGeom prst="ellipse">
@@ -18454,7 +18454,7 @@
           </p:nvSpPr>
           <p:spPr>
             <a:xfrm>
-              <a:off x="5954916" y="5176826"/>
+              <a:off x="5961086" y="5178701"/>
               <a:ext cx="75116" cy="75116"/>
             </a:xfrm>
             <a:prstGeom prst="ellipse">
@@ -18480,7 +18480,7 @@
           </p:nvSpPr>
           <p:spPr>
             <a:xfrm>
-              <a:off x="5740289" y="5059025"/>
+              <a:off x="6034604" y="5060669"/>
               <a:ext cx="75116" cy="75116"/>
             </a:xfrm>
             <a:prstGeom prst="ellipse">
@@ -18506,7 +18506,7 @@
           </p:nvSpPr>
           <p:spPr>
             <a:xfrm>
-              <a:off x="5772622" y="5533799"/>
+              <a:off x="5730230" y="5534118"/>
               <a:ext cx="75116" cy="75116"/>
             </a:xfrm>
             <a:prstGeom prst="ellipse">
@@ -18532,7 +18532,7 @@
           </p:nvSpPr>
           <p:spPr>
             <a:xfrm>
-              <a:off x="5952258" y="5559646"/>
+              <a:off x="5901494" y="5560786"/>
               <a:ext cx="75116" cy="75116"/>
             </a:xfrm>
             <a:prstGeom prst="ellipse">
@@ -18558,7 +18558,7 @@
           </p:nvSpPr>
           <p:spPr>
             <a:xfrm>
-              <a:off x="5745356" y="5737248"/>
+              <a:off x="5872409" y="5737013"/>
               <a:ext cx="75116" cy="75116"/>
             </a:xfrm>
             <a:prstGeom prst="ellipse">
@@ -18584,7 +18584,7 @@
           </p:nvSpPr>
           <p:spPr>
             <a:xfrm>
-              <a:off x="5697528" y="5385843"/>
+              <a:off x="6074294" y="5385926"/>
               <a:ext cx="75116" cy="75116"/>
             </a:xfrm>
             <a:prstGeom prst="ellipse">
@@ -18610,7 +18610,7 @@
           </p:nvSpPr>
           <p:spPr>
             <a:xfrm>
-              <a:off x="5856059" y="5315996"/>
+              <a:off x="5716761" y="5316924"/>
               <a:ext cx="75116" cy="75116"/>
             </a:xfrm>
             <a:prstGeom prst="ellipse">
@@ -18636,7 +18636,7 @@
           </p:nvSpPr>
           <p:spPr>
             <a:xfrm>
-              <a:off x="6478768" y="5356701"/>
+              <a:off x="6490213" y="5356645"/>
               <a:ext cx="75116" cy="75116"/>
             </a:xfrm>
             <a:prstGeom prst="ellipse">
@@ -18662,7 +18662,7 @@
           </p:nvSpPr>
           <p:spPr>
             <a:xfrm>
-              <a:off x="6770769" y="5467441"/>
+              <a:off x="6651818" y="5466885"/>
               <a:ext cx="75116" cy="75116"/>
             </a:xfrm>
             <a:prstGeom prst="ellipse">
@@ -18688,7 +18688,7 @@
           </p:nvSpPr>
           <p:spPr>
             <a:xfrm>
-              <a:off x="6670548" y="5532795"/>
+              <a:off x="6467026" y="5532525"/>
               <a:ext cx="75116" cy="75116"/>
             </a:xfrm>
             <a:prstGeom prst="ellipse">
@@ -18714,7 +18714,7 @@
           </p:nvSpPr>
           <p:spPr>
             <a:xfrm>
-              <a:off x="6697735" y="5564968"/>
+              <a:off x="6770769" y="5564606"/>
               <a:ext cx="75116" cy="75116"/>
             </a:xfrm>
             <a:prstGeom prst="ellipse">
@@ -18740,7 +18740,7 @@
           </p:nvSpPr>
           <p:spPr>
             <a:xfrm>
-              <a:off x="6674443" y="5391924"/>
+              <a:off x="6396563" y="5393515"/>
               <a:ext cx="75116" cy="75116"/>
             </a:xfrm>
             <a:prstGeom prst="ellipse">
@@ -18766,7 +18766,7 @@
           </p:nvSpPr>
           <p:spPr>
             <a:xfrm>
-              <a:off x="6477532" y="5336662"/>
+              <a:off x="6562432" y="5337255"/>
               <a:ext cx="75116" cy="75116"/>
             </a:xfrm>
             <a:prstGeom prst="ellipse">
@@ -18792,7 +18792,7 @@
           </p:nvSpPr>
           <p:spPr>
             <a:xfrm>
-              <a:off x="6550368" y="5529769"/>
+              <a:off x="6624901" y="5531350"/>
               <a:ext cx="75116" cy="75116"/>
             </a:xfrm>
             <a:prstGeom prst="ellipse">
@@ -18818,7 +18818,7 @@
           </p:nvSpPr>
           <p:spPr>
             <a:xfrm>
-              <a:off x="6752465" y="5277426"/>
+              <a:off x="6638608" y="5277250"/>
               <a:ext cx="75116" cy="75116"/>
             </a:xfrm>
             <a:prstGeom prst="ellipse">
@@ -18844,7 +18844,7 @@
           </p:nvSpPr>
           <p:spPr>
             <a:xfrm>
-              <a:off x="6441578" y="5596241"/>
+              <a:off x="6435268" y="5595676"/>
               <a:ext cx="75116" cy="75116"/>
             </a:xfrm>
             <a:prstGeom prst="ellipse">
@@ -18870,7 +18870,7 @@
           </p:nvSpPr>
           <p:spPr>
             <a:xfrm>
-              <a:off x="6613645" y="5463636"/>
+              <a:off x="6577127" y="5462514"/>
               <a:ext cx="75116" cy="75116"/>
             </a:xfrm>
             <a:prstGeom prst="ellipse">
@@ -18896,7 +18896,7 @@
           </p:nvSpPr>
           <p:spPr>
             <a:xfrm>
-              <a:off x="6531204" y="5397706"/>
+              <a:off x="6730701" y="5397926"/>
               <a:ext cx="75116" cy="75116"/>
             </a:xfrm>
             <a:prstGeom prst="ellipse">
@@ -18922,7 +18922,7 @@
           </p:nvSpPr>
           <p:spPr>
             <a:xfrm>
-              <a:off x="6601031" y="5471015"/>
+              <a:off x="6436884" y="5471421"/>
               <a:ext cx="75116" cy="75116"/>
             </a:xfrm>
             <a:prstGeom prst="ellipse">
@@ -18948,7 +18948,7 @@
           </p:nvSpPr>
           <p:spPr>
             <a:xfrm>
-              <a:off x="6495497" y="5435053"/>
+              <a:off x="6485314" y="5436599"/>
               <a:ext cx="75116" cy="75116"/>
             </a:xfrm>
             <a:prstGeom prst="ellipse">
@@ -18974,7 +18974,7 @@
           </p:nvSpPr>
           <p:spPr>
             <a:xfrm>
-              <a:off x="6681578" y="5700725"/>
+              <a:off x="6377820" y="5700656"/>
               <a:ext cx="75116" cy="75116"/>
             </a:xfrm>
             <a:prstGeom prst="ellipse">
@@ -19000,7 +19000,7 @@
           </p:nvSpPr>
           <p:spPr>
             <a:xfrm>
-              <a:off x="6611687" y="5453248"/>
+              <a:off x="6407717" y="5454540"/>
               <a:ext cx="75116" cy="75116"/>
             </a:xfrm>
             <a:prstGeom prst="ellipse">
@@ -19026,7 +19026,7 @@
           </p:nvSpPr>
           <p:spPr>
             <a:xfrm>
-              <a:off x="6418633" y="5468695"/>
+              <a:off x="6396516" y="5470115"/>
               <a:ext cx="75116" cy="75116"/>
             </a:xfrm>
             <a:prstGeom prst="ellipse">
@@ -19052,7 +19052,7 @@
           </p:nvSpPr>
           <p:spPr>
             <a:xfrm>
-              <a:off x="6569592" y="5367585"/>
+              <a:off x="6690268" y="5368822"/>
               <a:ext cx="75116" cy="75116"/>
             </a:xfrm>
             <a:prstGeom prst="ellipse">
@@ -19078,7 +19078,7 @@
           </p:nvSpPr>
           <p:spPr>
             <a:xfrm>
-              <a:off x="6528557" y="5392439"/>
+              <a:off x="6376982" y="5392470"/>
               <a:ext cx="75116" cy="75116"/>
             </a:xfrm>
             <a:prstGeom prst="ellipse">
@@ -19104,7 +19104,7 @@
           </p:nvSpPr>
           <p:spPr>
             <a:xfrm>
-              <a:off x="6583772" y="5713523"/>
+              <a:off x="6558008" y="5714318"/>
               <a:ext cx="75116" cy="75116"/>
             </a:xfrm>
             <a:prstGeom prst="ellipse">
@@ -19130,7 +19130,7 @@
           </p:nvSpPr>
           <p:spPr>
             <a:xfrm>
-              <a:off x="6615465" y="5363291"/>
+              <a:off x="6758535" y="5364181"/>
               <a:ext cx="75116" cy="75116"/>
             </a:xfrm>
             <a:prstGeom prst="ellipse">
@@ -19156,7 +19156,7 @@
           </p:nvSpPr>
           <p:spPr>
             <a:xfrm>
-              <a:off x="6689082" y="5263326"/>
+              <a:off x="6488213" y="5263402"/>
               <a:ext cx="75116" cy="75116"/>
             </a:xfrm>
             <a:prstGeom prst="ellipse">
@@ -19182,7 +19182,7 @@
           </p:nvSpPr>
           <p:spPr>
             <a:xfrm>
-              <a:off x="6468362" y="5288942"/>
+              <a:off x="6480338" y="5289087"/>
               <a:ext cx="75116" cy="75116"/>
             </a:xfrm>
             <a:prstGeom prst="ellipse">
@@ -19208,7 +19208,7 @@
           </p:nvSpPr>
           <p:spPr>
             <a:xfrm>
-              <a:off x="6434593" y="5554935"/>
+              <a:off x="6485468" y="5556035"/>
               <a:ext cx="75116" cy="75116"/>
             </a:xfrm>
             <a:prstGeom prst="ellipse">
@@ -19234,7 +19234,7 @@
           </p:nvSpPr>
           <p:spPr>
             <a:xfrm>
-              <a:off x="6660159" y="5616240"/>
+              <a:off x="6645783" y="5616837"/>
               <a:ext cx="75116" cy="75116"/>
             </a:xfrm>
             <a:prstGeom prst="ellipse">
@@ -19260,42 +19260,42 @@
           </p:nvSpPr>
           <p:spPr>
             <a:xfrm>
-              <a:off x="4476302" y="5290539"/>
-              <a:ext cx="2158647" cy="284835"/>
+              <a:off x="4496208" y="5291105"/>
+              <a:ext cx="2118040" cy="284582"/>
             </a:xfrm>
             <a:custGeom>
               <a:avLst/>
               <a:pathLst>
-                <a:path w="2158647" h="284835">
+                <a:path w="2118040" h="284582">
                   <a:moveTo>
                     <a:pt x="0" y="0"/>
                   </a:moveTo>
                   <a:lnTo>
-                    <a:pt x="1140458" y="57972"/>
+                    <a:pt x="1119004" y="57921"/>
                   </a:lnTo>
                   <a:lnTo>
-                    <a:pt x="1439098" y="56575"/>
+                    <a:pt x="1412027" y="56524"/>
                   </a:lnTo>
                   <a:lnTo>
-                    <a:pt x="1860008" y="41831"/>
+                    <a:pt x="1825018" y="41794"/>
                   </a:lnTo>
                   <a:lnTo>
-                    <a:pt x="2158647" y="25132"/>
+                    <a:pt x="2118040" y="25110"/>
                   </a:lnTo>
                   <a:lnTo>
-                    <a:pt x="2158647" y="276208"/>
+                    <a:pt x="2118040" y="275963"/>
                   </a:lnTo>
                   <a:lnTo>
-                    <a:pt x="1860008" y="257225"/>
+                    <a:pt x="1825018" y="256997"/>
                   </a:lnTo>
                   <a:lnTo>
-                    <a:pt x="1439098" y="239264"/>
+                    <a:pt x="1412027" y="239051"/>
                   </a:lnTo>
                   <a:lnTo>
-                    <a:pt x="1140458" y="235582"/>
+                    <a:pt x="1119004" y="235373"/>
                   </a:lnTo>
                   <a:lnTo>
-                    <a:pt x="0" y="284835"/>
+                    <a:pt x="0" y="284582"/>
                   </a:lnTo>
                   <a:close/>
                 </a:path>
@@ -19321,27 +19321,27 @@
           </p:nvSpPr>
           <p:spPr>
             <a:xfrm>
-              <a:off x="4476302" y="5290539"/>
-              <a:ext cx="2158647" cy="57972"/>
+              <a:off x="4496208" y="5291105"/>
+              <a:ext cx="2118040" cy="57921"/>
             </a:xfrm>
             <a:custGeom>
               <a:avLst/>
               <a:pathLst>
-                <a:path w="2158647" h="57972">
+                <a:path w="2118040" h="57921">
                   <a:moveTo>
                     <a:pt x="0" y="0"/>
                   </a:moveTo>
                   <a:lnTo>
-                    <a:pt x="1140458" y="57972"/>
+                    <a:pt x="1119004" y="57921"/>
                   </a:lnTo>
                   <a:lnTo>
-                    <a:pt x="1439098" y="56575"/>
+                    <a:pt x="1412027" y="56524"/>
                   </a:lnTo>
                   <a:lnTo>
-                    <a:pt x="1860008" y="41831"/>
+                    <a:pt x="1825018" y="41794"/>
                   </a:lnTo>
                   <a:lnTo>
-                    <a:pt x="2158647" y="25132"/>
+                    <a:pt x="2118040" y="25110"/>
                   </a:lnTo>
                 </a:path>
               </a:pathLst>
@@ -19361,27 +19361,27 @@
           </p:nvSpPr>
           <p:spPr>
             <a:xfrm>
-              <a:off x="4476302" y="5526121"/>
-              <a:ext cx="2158647" cy="49252"/>
+              <a:off x="4496208" y="5526478"/>
+              <a:ext cx="2118040" cy="49208"/>
             </a:xfrm>
             <a:custGeom>
               <a:avLst/>
               <a:pathLst>
-                <a:path w="2158647" h="49252">
+                <a:path w="2118040" h="49208">
                   <a:moveTo>
-                    <a:pt x="2158647" y="40625"/>
+                    <a:pt x="2118040" y="40589"/>
                   </a:moveTo>
                   <a:lnTo>
-                    <a:pt x="1860008" y="21643"/>
+                    <a:pt x="1825018" y="21623"/>
                   </a:lnTo>
                   <a:lnTo>
-                    <a:pt x="1439098" y="3681"/>
+                    <a:pt x="1412027" y="3678"/>
                   </a:lnTo>
                   <a:lnTo>
-                    <a:pt x="1140458" y="0"/>
+                    <a:pt x="1119004" y="0"/>
                   </a:lnTo>
                   <a:lnTo>
-                    <a:pt x="0" y="49252"/>
+                    <a:pt x="0" y="49208"/>
                   </a:lnTo>
                 </a:path>
               </a:pathLst>
@@ -19401,27 +19401,27 @@
           </p:nvSpPr>
           <p:spPr>
             <a:xfrm>
-              <a:off x="4476302" y="5432956"/>
-              <a:ext cx="2158647" cy="8252"/>
+              <a:off x="4496208" y="5433396"/>
+              <a:ext cx="2118040" cy="8245"/>
             </a:xfrm>
             <a:custGeom>
               <a:avLst/>
               <a:pathLst>
-                <a:path w="2158647" h="8252">
+                <a:path w="2118040" h="8245">
                   <a:moveTo>
                     <a:pt x="0" y="0"/>
                   </a:moveTo>
                   <a:lnTo>
-                    <a:pt x="1140458" y="4360"/>
+                    <a:pt x="1119004" y="4356"/>
                   </a:lnTo>
                   <a:lnTo>
-                    <a:pt x="1439098" y="5501"/>
+                    <a:pt x="1412027" y="5497"/>
                   </a:lnTo>
                   <a:lnTo>
-                    <a:pt x="1860008" y="7111"/>
+                    <a:pt x="1825018" y="7104"/>
                   </a:lnTo>
                   <a:lnTo>
-                    <a:pt x="2158647" y="8252"/>
+                    <a:pt x="2118040" y="8245"/>
                   </a:lnTo>
                 </a:path>
               </a:pathLst>
@@ -19450,7 +19450,7 @@
           </p:nvSpPr>
           <p:spPr>
             <a:xfrm>
-              <a:off x="6155255" y="4768722"/>
+              <a:off x="6134554" y="4769642"/>
               <a:ext cx="479694" cy="82021"/>
             </a:xfrm>
             <a:prstGeom prst="rect">
@@ -19557,7 +19557,7 @@
           </p:nvSpPr>
           <p:spPr>
             <a:xfrm>
-              <a:off x="4157982" y="5893246"/>
+              <a:off x="4157982" y="5893277"/>
               <a:ext cx="28468" cy="0"/>
             </a:xfrm>
             <a:custGeom>
@@ -19597,7 +19597,7 @@
           </p:nvSpPr>
           <p:spPr>
             <a:xfrm>
-              <a:off x="4157982" y="5645008"/>
+              <a:off x="4157982" y="5645259"/>
               <a:ext cx="28468" cy="0"/>
             </a:xfrm>
             <a:custGeom>
@@ -19637,7 +19637,7 @@
           </p:nvSpPr>
           <p:spPr>
             <a:xfrm>
-              <a:off x="4157982" y="5396769"/>
+              <a:off x="4157982" y="5397241"/>
               <a:ext cx="28468" cy="0"/>
             </a:xfrm>
             <a:custGeom>
@@ -19677,7 +19677,7 @@
           </p:nvSpPr>
           <p:spPr>
             <a:xfrm>
-              <a:off x="4157982" y="5148530"/>
+              <a:off x="4157982" y="5149223"/>
               <a:ext cx="28468" cy="0"/>
             </a:xfrm>
             <a:custGeom>
@@ -19717,7 +19717,7 @@
           </p:nvSpPr>
           <p:spPr>
             <a:xfrm>
-              <a:off x="4157982" y="4900292"/>
+              <a:off x="4157982" y="4901205"/>
               <a:ext cx="28468" cy="0"/>
             </a:xfrm>
             <a:custGeom>
@@ -19757,7 +19757,7 @@
           </p:nvSpPr>
           <p:spPr>
             <a:xfrm>
-              <a:off x="4157982" y="4652053"/>
+              <a:off x="4157982" y="4653187"/>
               <a:ext cx="28468" cy="0"/>
             </a:xfrm>
             <a:custGeom>
@@ -19837,7 +19837,7 @@
           </p:nvSpPr>
           <p:spPr>
             <a:xfrm>
-              <a:off x="4476302" y="5968701"/>
+              <a:off x="4496208" y="5968701"/>
               <a:ext cx="0" cy="28468"/>
             </a:xfrm>
             <a:custGeom>
@@ -19877,7 +19877,7 @@
           </p:nvSpPr>
           <p:spPr>
             <a:xfrm>
-              <a:off x="5195851" y="5968701"/>
+              <a:off x="5202221" y="5968701"/>
               <a:ext cx="0" cy="28468"/>
             </a:xfrm>
             <a:custGeom>
@@ -19917,7 +19917,7 @@
           </p:nvSpPr>
           <p:spPr>
             <a:xfrm>
-              <a:off x="5915400" y="5968701"/>
+              <a:off x="5908235" y="5968701"/>
               <a:ext cx="0" cy="28468"/>
             </a:xfrm>
             <a:custGeom>
@@ -19957,7 +19957,7 @@
           </p:nvSpPr>
           <p:spPr>
             <a:xfrm>
-              <a:off x="6634950" y="5968701"/>
+              <a:off x="6614248" y="5968701"/>
               <a:ext cx="0" cy="28468"/>
             </a:xfrm>
             <a:custGeom>
@@ -19997,7 +19997,7 @@
           </p:nvSpPr>
           <p:spPr>
             <a:xfrm>
-              <a:off x="4448047" y="6019944"/>
+              <a:off x="4467953" y="6019944"/>
               <a:ext cx="56509" cy="72877"/>
             </a:xfrm>
             <a:prstGeom prst="rect">
@@ -20043,7 +20043,7 @@
           </p:nvSpPr>
           <p:spPr>
             <a:xfrm>
-              <a:off x="5167596" y="6019944"/>
+              <a:off x="5173966" y="6019944"/>
               <a:ext cx="56509" cy="72877"/>
             </a:xfrm>
             <a:prstGeom prst="rect">
@@ -20089,7 +20089,7 @@
           </p:nvSpPr>
           <p:spPr>
             <a:xfrm>
-              <a:off x="5887145" y="6019944"/>
+              <a:off x="5879980" y="6019944"/>
               <a:ext cx="56509" cy="72877"/>
             </a:xfrm>
             <a:prstGeom prst="rect">
@@ -20135,7 +20135,7 @@
           </p:nvSpPr>
           <p:spPr>
             <a:xfrm>
-              <a:off x="6606695" y="6019944"/>
+              <a:off x="6585993" y="6019944"/>
               <a:ext cx="56509" cy="72877"/>
             </a:xfrm>
             <a:prstGeom prst="rect">

--- a/figures/Figure_1.pptx
+++ b/figures/Figure_1.pptx
@@ -2515,7 +2515,7 @@
           </p:nvSpPr>
           <p:spPr>
             <a:xfrm>
-              <a:off x="1529594" y="2249595"/>
+              <a:off x="1455675" y="2249632"/>
               <a:ext cx="75116" cy="75116"/>
             </a:xfrm>
             <a:prstGeom prst="ellipse">
@@ -2541,7 +2541,7 @@
           </p:nvSpPr>
           <p:spPr>
             <a:xfrm>
-              <a:off x="1408410" y="2182183"/>
+              <a:off x="1541911" y="2182246"/>
               <a:ext cx="75116" cy="75116"/>
             </a:xfrm>
             <a:prstGeom prst="ellipse">
@@ -2567,7 +2567,7 @@
           </p:nvSpPr>
           <p:spPr>
             <a:xfrm>
-              <a:off x="1452392" y="2283727"/>
+              <a:off x="1458542" y="2283778"/>
               <a:ext cx="75116" cy="75116"/>
             </a:xfrm>
             <a:prstGeom prst="ellipse">
@@ -2593,7 +2593,7 @@
           </p:nvSpPr>
           <p:spPr>
             <a:xfrm>
-              <a:off x="1549914" y="2280856"/>
+              <a:off x="1397325" y="2280890"/>
               <a:ext cx="75116" cy="75116"/>
             </a:xfrm>
             <a:prstGeom prst="ellipse">
@@ -2619,7 +2619,7 @@
           </p:nvSpPr>
           <p:spPr>
             <a:xfrm>
-              <a:off x="1561313" y="2305831"/>
+              <a:off x="1471207" y="2305880"/>
               <a:ext cx="75116" cy="75116"/>
             </a:xfrm>
             <a:prstGeom prst="ellipse">
@@ -2645,7 +2645,7 @@
           </p:nvSpPr>
           <p:spPr>
             <a:xfrm>
-              <a:off x="1435071" y="2163607"/>
+              <a:off x="1431141" y="2163658"/>
               <a:ext cx="75116" cy="75116"/>
             </a:xfrm>
             <a:prstGeom prst="ellipse">
@@ -2671,7 +2671,7 @@
           </p:nvSpPr>
           <p:spPr>
             <a:xfrm>
-              <a:off x="1602138" y="2084384"/>
+              <a:off x="1418569" y="2084418"/>
               <a:ext cx="75116" cy="75116"/>
             </a:xfrm>
             <a:prstGeom prst="ellipse">
@@ -2697,7 +2697,7 @@
           </p:nvSpPr>
           <p:spPr>
             <a:xfrm>
-              <a:off x="1421229" y="2265314"/>
+              <a:off x="1513152" y="2265406"/>
               <a:ext cx="75116" cy="75116"/>
             </a:xfrm>
             <a:prstGeom prst="ellipse">
@@ -2723,7 +2723,7 @@
           </p:nvSpPr>
           <p:spPr>
             <a:xfrm>
-              <a:off x="1397325" y="2334306"/>
+              <a:off x="1578596" y="2334383"/>
               <a:ext cx="75116" cy="75116"/>
             </a:xfrm>
             <a:prstGeom prst="ellipse">
@@ -2749,7 +2749,7 @@
           </p:nvSpPr>
           <p:spPr>
             <a:xfrm>
-              <a:off x="1545936" y="2144030"/>
+              <a:off x="1503436" y="2144030"/>
               <a:ext cx="75116" cy="75116"/>
             </a:xfrm>
             <a:prstGeom prst="ellipse">
@@ -2775,7 +2775,7 @@
           </p:nvSpPr>
           <p:spPr>
             <a:xfrm>
-              <a:off x="2353760" y="2342349"/>
+              <a:off x="2221977" y="2342447"/>
               <a:ext cx="75116" cy="75116"/>
             </a:xfrm>
             <a:prstGeom prst="ellipse">
@@ -2801,7 +2801,7 @@
           </p:nvSpPr>
           <p:spPr>
             <a:xfrm>
-              <a:off x="2262009" y="2281536"/>
+              <a:off x="2257631" y="2281578"/>
               <a:ext cx="75116" cy="75116"/>
             </a:xfrm>
             <a:prstGeom prst="ellipse">
@@ -2827,7 +2827,7 @@
           </p:nvSpPr>
           <p:spPr>
             <a:xfrm>
-              <a:off x="2319971" y="1703187"/>
+              <a:off x="2340192" y="1703297"/>
               <a:ext cx="75116" cy="75116"/>
             </a:xfrm>
             <a:prstGeom prst="ellipse">
@@ -2853,7 +2853,7 @@
           </p:nvSpPr>
           <p:spPr>
             <a:xfrm>
-              <a:off x="2167859" y="2204326"/>
+              <a:off x="2277106" y="2204367"/>
               <a:ext cx="75116" cy="75116"/>
             </a:xfrm>
             <a:prstGeom prst="ellipse">
@@ -2879,7 +2879,7 @@
           </p:nvSpPr>
           <p:spPr>
             <a:xfrm>
-              <a:off x="2249131" y="2275758"/>
+              <a:off x="2326279" y="2275741"/>
               <a:ext cx="75116" cy="75116"/>
             </a:xfrm>
             <a:prstGeom prst="ellipse">
@@ -2905,7 +2905,7 @@
           </p:nvSpPr>
           <p:spPr>
             <a:xfrm>
-              <a:off x="2230682" y="2337006"/>
+              <a:off x="2260620" y="2337048"/>
               <a:ext cx="75116" cy="75116"/>
             </a:xfrm>
             <a:prstGeom prst="ellipse">
@@ -2931,7 +2931,7 @@
           </p:nvSpPr>
           <p:spPr>
             <a:xfrm>
-              <a:off x="2296813" y="2361887"/>
+              <a:off x="2317585" y="2361923"/>
               <a:ext cx="75116" cy="75116"/>
             </a:xfrm>
             <a:prstGeom prst="ellipse">
@@ -2957,7 +2957,7 @@
           </p:nvSpPr>
           <p:spPr>
             <a:xfrm>
-              <a:off x="2221200" y="2196470"/>
+              <a:off x="2204730" y="2196457"/>
               <a:ext cx="75116" cy="75116"/>
             </a:xfrm>
             <a:prstGeom prst="ellipse">
@@ -2983,7 +2983,7 @@
           </p:nvSpPr>
           <p:spPr>
             <a:xfrm>
-              <a:off x="2169460" y="1582956"/>
+              <a:off x="2165072" y="1583060"/>
               <a:ext cx="75116" cy="75116"/>
             </a:xfrm>
             <a:prstGeom prst="ellipse">
@@ -3009,7 +3009,7 @@
           </p:nvSpPr>
           <p:spPr>
             <a:xfrm>
-              <a:off x="2319274" y="1761827"/>
+              <a:off x="2248421" y="1761994"/>
               <a:ext cx="75116" cy="75116"/>
             </a:xfrm>
             <a:prstGeom prst="ellipse">
@@ -3035,7 +3035,7 @@
           </p:nvSpPr>
           <p:spPr>
             <a:xfrm>
-              <a:off x="2354301" y="2352748"/>
+              <a:off x="2240737" y="2352803"/>
               <a:ext cx="75116" cy="75116"/>
             </a:xfrm>
             <a:prstGeom prst="ellipse">
@@ -3061,7 +3061,7 @@
           </p:nvSpPr>
           <p:spPr>
             <a:xfrm>
-              <a:off x="2335772" y="2158324"/>
+              <a:off x="2169670" y="2158267"/>
               <a:ext cx="75116" cy="75116"/>
             </a:xfrm>
             <a:prstGeom prst="ellipse">
@@ -3087,7 +3087,7 @@
           </p:nvSpPr>
           <p:spPr>
             <a:xfrm>
-              <a:off x="2278430" y="2104520"/>
+              <a:off x="2341923" y="2104503"/>
               <a:ext cx="75116" cy="75116"/>
             </a:xfrm>
             <a:prstGeom prst="ellipse">
@@ -3113,7 +3113,7 @@
           </p:nvSpPr>
           <p:spPr>
             <a:xfrm>
-              <a:off x="2344310" y="2113903"/>
+              <a:off x="2178965" y="2113925"/>
               <a:ext cx="75116" cy="75116"/>
             </a:xfrm>
             <a:prstGeom prst="ellipse">
@@ -3139,7 +3139,7 @@
           </p:nvSpPr>
           <p:spPr>
             <a:xfrm>
-              <a:off x="2315918" y="2269008"/>
+              <a:off x="2346047" y="2269012"/>
               <a:ext cx="75116" cy="75116"/>
             </a:xfrm>
             <a:prstGeom prst="ellipse">
@@ -3165,7 +3165,7 @@
           </p:nvSpPr>
           <p:spPr>
             <a:xfrm>
-              <a:off x="2309406" y="2211544"/>
+              <a:off x="2351530" y="2211609"/>
               <a:ext cx="75116" cy="75116"/>
             </a:xfrm>
             <a:prstGeom prst="ellipse">
@@ -3191,7 +3191,7 @@
           </p:nvSpPr>
           <p:spPr>
             <a:xfrm>
-              <a:off x="2348697" y="1754128"/>
+              <a:off x="2297467" y="1754284"/>
               <a:ext cx="75116" cy="75116"/>
             </a:xfrm>
             <a:prstGeom prst="ellipse">
@@ -3217,7 +3217,7 @@
           </p:nvSpPr>
           <p:spPr>
             <a:xfrm>
-              <a:off x="2190253" y="1885051"/>
+              <a:off x="2244611" y="1885014"/>
               <a:ext cx="75116" cy="75116"/>
             </a:xfrm>
             <a:prstGeom prst="ellipse">
@@ -3243,7 +3243,7 @@
           </p:nvSpPr>
           <p:spPr>
             <a:xfrm>
-              <a:off x="3011946" y="2303569"/>
+              <a:off x="2959210" y="2303562"/>
               <a:ext cx="75116" cy="75116"/>
             </a:xfrm>
             <a:prstGeom prst="ellipse">
@@ -3269,7 +3269,7 @@
           </p:nvSpPr>
           <p:spPr>
             <a:xfrm>
-              <a:off x="2920404" y="2095312"/>
+              <a:off x="3124929" y="2095315"/>
               <a:ext cx="75116" cy="75116"/>
             </a:xfrm>
             <a:prstGeom prst="ellipse">
@@ -3295,7 +3295,7 @@
           </p:nvSpPr>
           <p:spPr>
             <a:xfrm>
-              <a:off x="2946918" y="2315649"/>
+              <a:off x="3038266" y="2315587"/>
               <a:ext cx="75116" cy="75116"/>
             </a:xfrm>
             <a:prstGeom prst="ellipse">
@@ -3321,7 +3321,7 @@
           </p:nvSpPr>
           <p:spPr>
             <a:xfrm>
-              <a:off x="3017901" y="2402053"/>
+              <a:off x="3007623" y="2402053"/>
               <a:ext cx="75116" cy="75116"/>
             </a:xfrm>
             <a:prstGeom prst="ellipse">
@@ -3347,7 +3347,7 @@
           </p:nvSpPr>
           <p:spPr>
             <a:xfrm>
-              <a:off x="2954229" y="2158261"/>
+              <a:off x="3065105" y="2158267"/>
               <a:ext cx="75116" cy="75116"/>
             </a:xfrm>
             <a:prstGeom prst="ellipse">
@@ -3373,7 +3373,7 @@
           </p:nvSpPr>
           <p:spPr>
             <a:xfrm>
-              <a:off x="3065179" y="2293497"/>
+              <a:off x="2993736" y="2293536"/>
               <a:ext cx="75116" cy="75116"/>
             </a:xfrm>
             <a:prstGeom prst="ellipse">
@@ -3399,7 +3399,7 @@
           </p:nvSpPr>
           <p:spPr>
             <a:xfrm>
-              <a:off x="3014770" y="1417535"/>
+              <a:off x="2937847" y="1417692"/>
               <a:ext cx="75116" cy="75116"/>
             </a:xfrm>
             <a:prstGeom prst="ellipse">
@@ -3425,7 +3425,7 @@
           </p:nvSpPr>
           <p:spPr>
             <a:xfrm>
-              <a:off x="2947546" y="2337183"/>
+              <a:off x="2938255" y="2337185"/>
               <a:ext cx="75116" cy="75116"/>
             </a:xfrm>
             <a:prstGeom prst="ellipse">
@@ -3451,7 +3451,7 @@
           </p:nvSpPr>
           <p:spPr>
             <a:xfrm>
-              <a:off x="2934774" y="2008553"/>
+              <a:off x="2960318" y="2008543"/>
               <a:ext cx="75116" cy="75116"/>
             </a:xfrm>
             <a:prstGeom prst="ellipse">
@@ -3477,7 +3477,7 @@
           </p:nvSpPr>
           <p:spPr>
             <a:xfrm>
-              <a:off x="3044343" y="1689557"/>
+              <a:off x="2967912" y="1689562"/>
               <a:ext cx="75116" cy="75116"/>
             </a:xfrm>
             <a:prstGeom prst="ellipse">
@@ -3503,7 +3503,7 @@
           </p:nvSpPr>
           <p:spPr>
             <a:xfrm>
-              <a:off x="2992581" y="1165804"/>
+              <a:off x="2936614" y="1165804"/>
               <a:ext cx="75116" cy="75116"/>
             </a:xfrm>
             <a:prstGeom prst="ellipse">
@@ -3529,7 +3529,7 @@
           </p:nvSpPr>
           <p:spPr>
             <a:xfrm>
-              <a:off x="2997250" y="1912681"/>
+              <a:off x="2971151" y="1912774"/>
               <a:ext cx="75116" cy="75116"/>
             </a:xfrm>
             <a:prstGeom prst="ellipse">
@@ -3555,7 +3555,7 @@
           </p:nvSpPr>
           <p:spPr>
             <a:xfrm>
-              <a:off x="2986699" y="2071383"/>
+              <a:off x="3046366" y="2071402"/>
               <a:ext cx="75116" cy="75116"/>
             </a:xfrm>
             <a:prstGeom prst="ellipse">
@@ -3581,7 +3581,7 @@
           </p:nvSpPr>
           <p:spPr>
             <a:xfrm>
-              <a:off x="2991813" y="1937231"/>
+              <a:off x="2916780" y="1937340"/>
               <a:ext cx="75116" cy="75116"/>
             </a:xfrm>
             <a:prstGeom prst="ellipse">
@@ -3607,7 +3607,7 @@
           </p:nvSpPr>
           <p:spPr>
             <a:xfrm>
-              <a:off x="3109556" y="2046482"/>
+              <a:off x="3044291" y="2046552"/>
               <a:ext cx="75116" cy="75116"/>
             </a:xfrm>
             <a:prstGeom prst="ellipse">
@@ -3633,7 +3633,7 @@
           </p:nvSpPr>
           <p:spPr>
             <a:xfrm>
-              <a:off x="3138987" y="2192098"/>
+              <a:off x="2914071" y="2192102"/>
               <a:ext cx="75116" cy="75116"/>
             </a:xfrm>
             <a:prstGeom prst="ellipse">
@@ -3659,7 +3659,7 @@
           </p:nvSpPr>
           <p:spPr>
             <a:xfrm>
-              <a:off x="3123619" y="2108869"/>
+              <a:off x="2914733" y="2108874"/>
               <a:ext cx="75116" cy="75116"/>
             </a:xfrm>
             <a:prstGeom prst="ellipse">
@@ -3685,7 +3685,7 @@
           </p:nvSpPr>
           <p:spPr>
             <a:xfrm>
-              <a:off x="2992212" y="2094904"/>
+              <a:off x="3041419" y="2095051"/>
               <a:ext cx="75116" cy="75116"/>
             </a:xfrm>
             <a:prstGeom prst="ellipse">
@@ -3711,7 +3711,7 @@
           </p:nvSpPr>
           <p:spPr>
             <a:xfrm>
-              <a:off x="3125806" y="2190826"/>
+              <a:off x="2913996" y="2190812"/>
               <a:ext cx="75116" cy="75116"/>
             </a:xfrm>
             <a:prstGeom prst="ellipse">
@@ -3737,7 +3737,7 @@
           </p:nvSpPr>
           <p:spPr>
             <a:xfrm>
-              <a:off x="2942025" y="2180766"/>
+              <a:off x="2914429" y="2180804"/>
               <a:ext cx="75116" cy="75116"/>
             </a:xfrm>
             <a:prstGeom prst="ellipse">
@@ -3763,7 +3763,7 @@
           </p:nvSpPr>
           <p:spPr>
             <a:xfrm>
-              <a:off x="3692809" y="2197324"/>
+              <a:off x="3697697" y="2197341"/>
               <a:ext cx="75116" cy="75116"/>
             </a:xfrm>
             <a:prstGeom prst="ellipse">
@@ -3789,7 +3789,7 @@
           </p:nvSpPr>
           <p:spPr>
             <a:xfrm>
-              <a:off x="3767432" y="2195072"/>
+              <a:off x="3789901" y="2195200"/>
               <a:ext cx="75116" cy="75116"/>
             </a:xfrm>
             <a:prstGeom prst="ellipse">
@@ -3815,7 +3815,7 @@
           </p:nvSpPr>
           <p:spPr>
             <a:xfrm>
-              <a:off x="3816449" y="2153520"/>
+              <a:off x="3841642" y="2153675"/>
               <a:ext cx="75116" cy="75116"/>
             </a:xfrm>
             <a:prstGeom prst="ellipse">
@@ -3841,7 +3841,7 @@
           </p:nvSpPr>
           <p:spPr>
             <a:xfrm>
-              <a:off x="3790900" y="2285045"/>
+              <a:off x="3722871" y="2285141"/>
               <a:ext cx="75116" cy="75116"/>
             </a:xfrm>
             <a:prstGeom prst="ellipse">
@@ -3867,7 +3867,7 @@
           </p:nvSpPr>
           <p:spPr>
             <a:xfrm>
-              <a:off x="3800665" y="1930693"/>
+              <a:off x="3729384" y="1930806"/>
               <a:ext cx="75116" cy="75116"/>
             </a:xfrm>
             <a:prstGeom prst="ellipse">
@@ -3893,7 +3893,7 @@
           </p:nvSpPr>
           <p:spPr>
             <a:xfrm>
-              <a:off x="3737496" y="1948008"/>
+              <a:off x="3849186" y="1948048"/>
               <a:ext cx="75116" cy="75116"/>
             </a:xfrm>
             <a:prstGeom prst="ellipse">
@@ -3919,7 +3919,7 @@
           </p:nvSpPr>
           <p:spPr>
             <a:xfrm>
-              <a:off x="3870783" y="2155824"/>
+              <a:off x="3801996" y="2155758"/>
               <a:ext cx="75116" cy="75116"/>
             </a:xfrm>
             <a:prstGeom prst="ellipse">
@@ -3945,7 +3945,7 @@
           </p:nvSpPr>
           <p:spPr>
             <a:xfrm>
-              <a:off x="3827415" y="2083485"/>
+              <a:off x="3745883" y="2083588"/>
               <a:ext cx="75116" cy="75116"/>
             </a:xfrm>
             <a:prstGeom prst="ellipse">
@@ -3971,7 +3971,7 @@
           </p:nvSpPr>
           <p:spPr>
             <a:xfrm>
-              <a:off x="3747771" y="1998495"/>
+              <a:off x="3712956" y="1998445"/>
               <a:ext cx="75116" cy="75116"/>
             </a:xfrm>
             <a:prstGeom prst="ellipse">
@@ -3997,7 +3997,7 @@
           </p:nvSpPr>
           <p:spPr>
             <a:xfrm>
-              <a:off x="3789211" y="1783812"/>
+              <a:off x="3869011" y="1783895"/>
               <a:ext cx="75116" cy="75116"/>
             </a:xfrm>
             <a:prstGeom prst="ellipse">
@@ -4023,7 +4023,7 @@
           </p:nvSpPr>
           <p:spPr>
             <a:xfrm>
-              <a:off x="3692618" y="1847293"/>
+              <a:off x="3713155" y="1847382"/>
               <a:ext cx="75116" cy="75116"/>
             </a:xfrm>
             <a:prstGeom prst="ellipse">
@@ -4049,7 +4049,7 @@
           </p:nvSpPr>
           <p:spPr>
             <a:xfrm>
-              <a:off x="3792690" y="1716922"/>
+              <a:off x="3830108" y="1717065"/>
               <a:ext cx="75116" cy="75116"/>
             </a:xfrm>
             <a:prstGeom prst="ellipse">
@@ -4075,7 +4075,7 @@
           </p:nvSpPr>
           <p:spPr>
             <a:xfrm>
-              <a:off x="3767136" y="1938095"/>
+              <a:off x="3737496" y="1938199"/>
               <a:ext cx="75116" cy="75116"/>
             </a:xfrm>
             <a:prstGeom prst="ellipse">
@@ -4101,7 +4101,7 @@
           </p:nvSpPr>
           <p:spPr>
             <a:xfrm>
-              <a:off x="3787579" y="1875790"/>
+              <a:off x="3733086" y="1875842"/>
               <a:ext cx="75116" cy="75116"/>
             </a:xfrm>
             <a:prstGeom prst="ellipse">
@@ -4127,7 +4127,7 @@
           </p:nvSpPr>
           <p:spPr>
             <a:xfrm>
-              <a:off x="3853551" y="2254964"/>
+              <a:off x="3874972" y="2254937"/>
               <a:ext cx="75116" cy="75116"/>
             </a:xfrm>
             <a:prstGeom prst="ellipse">
@@ -4153,7 +4153,7 @@
           </p:nvSpPr>
           <p:spPr>
             <a:xfrm>
-              <a:off x="3714570" y="2099700"/>
+              <a:off x="3731583" y="2099736"/>
               <a:ext cx="75116" cy="75116"/>
             </a:xfrm>
             <a:prstGeom prst="ellipse">
@@ -4179,7 +4179,7 @@
           </p:nvSpPr>
           <p:spPr>
             <a:xfrm>
-              <a:off x="3871253" y="2011675"/>
+              <a:off x="3853481" y="2011784"/>
               <a:ext cx="75116" cy="75116"/>
             </a:xfrm>
             <a:prstGeom prst="ellipse">
@@ -4205,7 +4205,7 @@
           </p:nvSpPr>
           <p:spPr>
             <a:xfrm>
-              <a:off x="3867754" y="2069635"/>
+              <a:off x="3863297" y="2069684"/>
               <a:ext cx="75116" cy="75116"/>
             </a:xfrm>
             <a:prstGeom prst="ellipse">
@@ -4231,7 +4231,7 @@
           </p:nvSpPr>
           <p:spPr>
             <a:xfrm>
-              <a:off x="3845639" y="1824570"/>
+              <a:off x="3894352" y="1824624"/>
               <a:ext cx="75116" cy="75116"/>
             </a:xfrm>
             <a:prstGeom prst="ellipse">
@@ -4257,7 +4257,7 @@
           </p:nvSpPr>
           <p:spPr>
             <a:xfrm>
-              <a:off x="3733276" y="2042164"/>
+              <a:off x="3804272" y="2042195"/>
               <a:ext cx="75116" cy="75116"/>
             </a:xfrm>
             <a:prstGeom prst="ellipse">
@@ -4283,7 +4283,7 @@
           </p:nvSpPr>
           <p:spPr>
             <a:xfrm>
-              <a:off x="3894352" y="1914546"/>
+              <a:off x="3812583" y="1914499"/>
               <a:ext cx="75116" cy="75116"/>
             </a:xfrm>
             <a:prstGeom prst="ellipse">
@@ -4309,7 +4309,7 @@
           </p:nvSpPr>
           <p:spPr>
             <a:xfrm>
-              <a:off x="3846450" y="1809329"/>
+              <a:off x="3815451" y="1809409"/>
               <a:ext cx="75116" cy="75116"/>
             </a:xfrm>
             <a:prstGeom prst="ellipse">
@@ -4335,7 +4335,7 @@
           </p:nvSpPr>
           <p:spPr>
             <a:xfrm>
-              <a:off x="3863737" y="1967436"/>
+              <a:off x="3734870" y="1967550"/>
               <a:ext cx="75116" cy="75116"/>
             </a:xfrm>
             <a:prstGeom prst="ellipse">
@@ -4361,7 +4361,7 @@
           </p:nvSpPr>
           <p:spPr>
             <a:xfrm>
-              <a:off x="3876132" y="1938745"/>
+              <a:off x="3714116" y="1938843"/>
               <a:ext cx="75116" cy="75116"/>
             </a:xfrm>
             <a:prstGeom prst="ellipse">
@@ -4387,42 +4387,42 @@
           </p:nvSpPr>
           <p:spPr>
             <a:xfrm>
-              <a:off x="1530215" y="1862439"/>
-              <a:ext cx="2303691" cy="534032"/>
+              <a:off x="1533524" y="1862495"/>
+              <a:ext cx="2288584" cy="534003"/>
             </a:xfrm>
             <a:custGeom>
               <a:avLst/>
               <a:pathLst>
-                <a:path w="2303691" h="534032">
+                <a:path w="2288584" h="534003">
                   <a:moveTo>
-                    <a:pt x="0" y="151566"/>
+                    <a:pt x="0" y="151558"/>
                   </a:moveTo>
                   <a:lnTo>
-                    <a:pt x="1217088" y="145455"/>
+                    <a:pt x="1209107" y="145448"/>
                   </a:lnTo>
                   <a:lnTo>
-                    <a:pt x="1535794" y="115617"/>
+                    <a:pt x="1525723" y="115611"/>
                   </a:lnTo>
                   <a:lnTo>
-                    <a:pt x="1984985" y="53050"/>
+                    <a:pt x="1971968" y="53048"/>
                   </a:lnTo>
                   <a:lnTo>
-                    <a:pt x="2303691" y="0"/>
+                    <a:pt x="2288584" y="0"/>
                   </a:lnTo>
                   <a:lnTo>
-                    <a:pt x="2303691" y="346071"/>
+                    <a:pt x="2288584" y="346052"/>
                   </a:lnTo>
                   <a:lnTo>
-                    <a:pt x="1984985" y="339992"/>
+                    <a:pt x="1971968" y="339974"/>
                   </a:lnTo>
                   <a:lnTo>
-                    <a:pt x="1535794" y="343629"/>
+                    <a:pt x="1525723" y="343611"/>
                   </a:lnTo>
                   <a:lnTo>
-                    <a:pt x="1217088" y="360763"/>
+                    <a:pt x="1209107" y="360744"/>
                   </a:lnTo>
                   <a:lnTo>
-                    <a:pt x="0" y="534032"/>
+                    <a:pt x="0" y="534003"/>
                   </a:lnTo>
                   <a:close/>
                 </a:path>
@@ -4448,27 +4448,27 @@
           </p:nvSpPr>
           <p:spPr>
             <a:xfrm>
-              <a:off x="1530215" y="1862439"/>
-              <a:ext cx="2303691" cy="151566"/>
+              <a:off x="1533524" y="1862495"/>
+              <a:ext cx="2288584" cy="151558"/>
             </a:xfrm>
             <a:custGeom>
               <a:avLst/>
               <a:pathLst>
-                <a:path w="2303691" h="151566">
+                <a:path w="2288584" h="151558">
                   <a:moveTo>
-                    <a:pt x="0" y="151566"/>
+                    <a:pt x="0" y="151558"/>
                   </a:moveTo>
                   <a:lnTo>
-                    <a:pt x="1217088" y="145455"/>
+                    <a:pt x="1209107" y="145448"/>
                   </a:lnTo>
                   <a:lnTo>
-                    <a:pt x="1535794" y="115617"/>
+                    <a:pt x="1525723" y="115611"/>
                   </a:lnTo>
                   <a:lnTo>
-                    <a:pt x="1984985" y="53050"/>
+                    <a:pt x="1971968" y="53048"/>
                   </a:lnTo>
                   <a:lnTo>
-                    <a:pt x="2303691" y="0"/>
+                    <a:pt x="2288584" y="0"/>
                   </a:lnTo>
                 </a:path>
               </a:pathLst>
@@ -4488,27 +4488,27 @@
           </p:nvSpPr>
           <p:spPr>
             <a:xfrm>
-              <a:off x="1530215" y="2202432"/>
-              <a:ext cx="2303691" cy="194039"/>
+              <a:off x="1533524" y="2202469"/>
+              <a:ext cx="2288584" cy="194029"/>
             </a:xfrm>
             <a:custGeom>
               <a:avLst/>
               <a:pathLst>
-                <a:path w="2303691" h="194039">
+                <a:path w="2288584" h="194029">
                   <a:moveTo>
-                    <a:pt x="2303691" y="6078"/>
+                    <a:pt x="2288584" y="6078"/>
                   </a:moveTo>
                   <a:lnTo>
-                    <a:pt x="1984985" y="0"/>
+                    <a:pt x="1971968" y="0"/>
                   </a:lnTo>
                   <a:lnTo>
-                    <a:pt x="1535794" y="3636"/>
+                    <a:pt x="1525723" y="3636"/>
                   </a:lnTo>
                   <a:lnTo>
-                    <a:pt x="1217088" y="20770"/>
+                    <a:pt x="1209107" y="20769"/>
                   </a:lnTo>
                   <a:lnTo>
-                    <a:pt x="0" y="194039"/>
+                    <a:pt x="0" y="194029"/>
                   </a:lnTo>
                 </a:path>
               </a:pathLst>
@@ -4528,27 +4528,27 @@
           </p:nvSpPr>
           <p:spPr>
             <a:xfrm>
-              <a:off x="1530215" y="2035475"/>
-              <a:ext cx="2303691" cy="169763"/>
+              <a:off x="1533524" y="2035521"/>
+              <a:ext cx="2288584" cy="169754"/>
             </a:xfrm>
             <a:custGeom>
               <a:avLst/>
               <a:pathLst>
-                <a:path w="2303691" h="169763">
+                <a:path w="2288584" h="169754">
                   <a:moveTo>
-                    <a:pt x="0" y="169763"/>
+                    <a:pt x="0" y="169754"/>
                   </a:moveTo>
                   <a:lnTo>
-                    <a:pt x="1217088" y="80074"/>
+                    <a:pt x="1209107" y="80069"/>
                   </a:lnTo>
                   <a:lnTo>
-                    <a:pt x="1535794" y="56587"/>
+                    <a:pt x="1525723" y="56584"/>
                   </a:lnTo>
                   <a:lnTo>
-                    <a:pt x="1984985" y="23486"/>
+                    <a:pt x="1971968" y="23484"/>
                   </a:lnTo>
                   <a:lnTo>
-                    <a:pt x="2303691" y="0"/>
+                    <a:pt x="2288584" y="0"/>
                   </a:lnTo>
                 </a:path>
               </a:pathLst>
@@ -4577,7 +4577,7 @@
           </p:nvSpPr>
           <p:spPr>
             <a:xfrm>
-              <a:off x="3354212" y="1244926"/>
+              <a:off x="3342415" y="1245010"/>
               <a:ext cx="479694" cy="82021"/>
             </a:xfrm>
             <a:prstGeom prst="rect">
@@ -4684,7 +4684,7 @@
           </p:nvSpPr>
           <p:spPr>
             <a:xfrm rot="-5400000">
-              <a:off x="1140466" y="2213258"/>
+              <a:off x="1140466" y="2213293"/>
               <a:ext cx="141274" cy="72877"/>
             </a:xfrm>
             <a:prstGeom prst="rect">
@@ -4730,7 +4730,7 @@
           </p:nvSpPr>
           <p:spPr>
             <a:xfrm rot="-5400000">
-              <a:off x="1140466" y="1843913"/>
+              <a:off x="1140466" y="1843967"/>
               <a:ext cx="141274" cy="72877"/>
             </a:xfrm>
             <a:prstGeom prst="rect">
@@ -4776,7 +4776,7 @@
           </p:nvSpPr>
           <p:spPr>
             <a:xfrm rot="-5400000">
-              <a:off x="1140466" y="1474568"/>
+              <a:off x="1140466" y="1474642"/>
               <a:ext cx="141274" cy="72877"/>
             </a:xfrm>
             <a:prstGeom prst="rect">
@@ -4822,7 +4822,7 @@
           </p:nvSpPr>
           <p:spPr>
             <a:xfrm rot="-5400000">
-              <a:off x="1112211" y="1105223"/>
+              <a:off x="1112211" y="1105316"/>
               <a:ext cx="197784" cy="72877"/>
             </a:xfrm>
             <a:prstGeom prst="rect">
@@ -4868,7 +4868,7 @@
           </p:nvSpPr>
           <p:spPr>
             <a:xfrm>
-              <a:off x="1281564" y="2249697"/>
+              <a:off x="1281564" y="2249732"/>
               <a:ext cx="28468" cy="0"/>
             </a:xfrm>
             <a:custGeom>
@@ -4908,7 +4908,7 @@
           </p:nvSpPr>
           <p:spPr>
             <a:xfrm>
-              <a:off x="1281564" y="1880352"/>
+              <a:off x="1281564" y="1880406"/>
               <a:ext cx="28468" cy="0"/>
             </a:xfrm>
             <a:custGeom>
@@ -4948,7 +4948,7 @@
           </p:nvSpPr>
           <p:spPr>
             <a:xfrm>
-              <a:off x="1281564" y="1511007"/>
+              <a:off x="1281564" y="1511081"/>
               <a:ext cx="28468" cy="0"/>
             </a:xfrm>
             <a:custGeom>
@@ -4988,7 +4988,7 @@
           </p:nvSpPr>
           <p:spPr>
             <a:xfrm>
-              <a:off x="1281564" y="1141661"/>
+              <a:off x="1281564" y="1141755"/>
               <a:ext cx="28468" cy="0"/>
             </a:xfrm>
             <a:custGeom>
@@ -5068,7 +5068,7 @@
           </p:nvSpPr>
           <p:spPr>
             <a:xfrm>
-              <a:off x="1530215" y="2501424"/>
+              <a:off x="1533524" y="2501424"/>
               <a:ext cx="0" cy="28468"/>
             </a:xfrm>
             <a:custGeom>
@@ -5108,7 +5108,7 @@
           </p:nvSpPr>
           <p:spPr>
             <a:xfrm>
-              <a:off x="2298112" y="2501424"/>
+              <a:off x="2296386" y="2501424"/>
               <a:ext cx="0" cy="28468"/>
             </a:xfrm>
             <a:custGeom>
@@ -5148,7 +5148,7 @@
           </p:nvSpPr>
           <p:spPr>
             <a:xfrm>
-              <a:off x="3066009" y="2501424"/>
+              <a:off x="3059248" y="2501424"/>
               <a:ext cx="0" cy="28468"/>
             </a:xfrm>
             <a:custGeom>
@@ -5188,7 +5188,7 @@
           </p:nvSpPr>
           <p:spPr>
             <a:xfrm>
-              <a:off x="3833907" y="2501424"/>
+              <a:off x="3822109" y="2501424"/>
               <a:ext cx="0" cy="28468"/>
             </a:xfrm>
             <a:custGeom>
@@ -5228,7 +5228,7 @@
           </p:nvSpPr>
           <p:spPr>
             <a:xfrm>
-              <a:off x="1501960" y="2552666"/>
+              <a:off x="1505269" y="2552666"/>
               <a:ext cx="56509" cy="72877"/>
             </a:xfrm>
             <a:prstGeom prst="rect">
@@ -5274,7 +5274,7 @@
           </p:nvSpPr>
           <p:spPr>
             <a:xfrm>
-              <a:off x="2269857" y="2552666"/>
+              <a:off x="2268131" y="2552666"/>
               <a:ext cx="56509" cy="72877"/>
             </a:xfrm>
             <a:prstGeom prst="rect">
@@ -5320,7 +5320,7 @@
           </p:nvSpPr>
           <p:spPr>
             <a:xfrm>
-              <a:off x="3037754" y="2552666"/>
+              <a:off x="3030993" y="2552666"/>
               <a:ext cx="56509" cy="72877"/>
             </a:xfrm>
             <a:prstGeom prst="rect">
@@ -5366,7 +5366,7 @@
           </p:nvSpPr>
           <p:spPr>
             <a:xfrm>
-              <a:off x="3805652" y="2552666"/>
+              <a:off x="3793854" y="2552666"/>
               <a:ext cx="56509" cy="72877"/>
             </a:xfrm>
             <a:prstGeom prst="rect">
@@ -5530,7 +5530,7 @@
           </p:nvSpPr>
           <p:spPr>
             <a:xfrm>
-              <a:off x="4364121" y="2119070"/>
+              <a:off x="4442889" y="2119026"/>
               <a:ext cx="75116" cy="75116"/>
             </a:xfrm>
             <a:prstGeom prst="ellipse">
@@ -5556,7 +5556,7 @@
           </p:nvSpPr>
           <p:spPr>
             <a:xfrm>
-              <a:off x="4448625" y="1373722"/>
+              <a:off x="4273743" y="1373731"/>
               <a:ext cx="75116" cy="75116"/>
             </a:xfrm>
             <a:prstGeom prst="ellipse">
@@ -5582,7 +5582,7 @@
           </p:nvSpPr>
           <p:spPr>
             <a:xfrm>
-              <a:off x="4284402" y="2112164"/>
+              <a:off x="4327663" y="2112124"/>
               <a:ext cx="75116" cy="75116"/>
             </a:xfrm>
             <a:prstGeom prst="ellipse">
@@ -5608,7 +5608,7 @@
           </p:nvSpPr>
           <p:spPr>
             <a:xfrm>
-              <a:off x="4330559" y="2024498"/>
+              <a:off x="4392617" y="2024489"/>
               <a:ext cx="75116" cy="75116"/>
             </a:xfrm>
             <a:prstGeom prst="ellipse">
@@ -5634,7 +5634,7 @@
           </p:nvSpPr>
           <p:spPr>
             <a:xfrm>
-              <a:off x="4395879" y="2185883"/>
+              <a:off x="4317219" y="2185813"/>
               <a:ext cx="75116" cy="75116"/>
             </a:xfrm>
             <a:prstGeom prst="ellipse">
@@ -5660,7 +5660,7 @@
           </p:nvSpPr>
           <p:spPr>
             <a:xfrm>
-              <a:off x="4492021" y="1599181"/>
+              <a:off x="4295567" y="1599245"/>
               <a:ext cx="75116" cy="75116"/>
             </a:xfrm>
             <a:prstGeom prst="ellipse">
@@ -5686,7 +5686,7 @@
           </p:nvSpPr>
           <p:spPr>
             <a:xfrm>
-              <a:off x="4480479" y="1219078"/>
+              <a:off x="4394605" y="1219039"/>
               <a:ext cx="75116" cy="75116"/>
             </a:xfrm>
             <a:prstGeom prst="ellipse">
@@ -5712,7 +5712,7 @@
           </p:nvSpPr>
           <p:spPr>
             <a:xfrm>
-              <a:off x="4303818" y="1907310"/>
+              <a:off x="4379439" y="1907238"/>
               <a:ext cx="75116" cy="75116"/>
             </a:xfrm>
             <a:prstGeom prst="ellipse">
@@ -5738,7 +5738,7 @@
           </p:nvSpPr>
           <p:spPr>
             <a:xfrm>
-              <a:off x="4462306" y="2367376"/>
+              <a:off x="4437562" y="2367242"/>
               <a:ext cx="75116" cy="75116"/>
             </a:xfrm>
             <a:prstGeom prst="ellipse">
@@ -5764,7 +5764,7 @@
           </p:nvSpPr>
           <p:spPr>
             <a:xfrm>
-              <a:off x="4273743" y="1872614"/>
+              <a:off x="4411758" y="1872271"/>
               <a:ext cx="75116" cy="75116"/>
             </a:xfrm>
             <a:prstGeom prst="ellipse">
@@ -5790,7 +5790,7 @@
           </p:nvSpPr>
           <p:spPr>
             <a:xfrm>
-              <a:off x="5114623" y="2385693"/>
+              <a:off x="5149196" y="2385493"/>
               <a:ext cx="75116" cy="75116"/>
             </a:xfrm>
             <a:prstGeom prst="ellipse">
@@ -5816,7 +5816,7 @@
           </p:nvSpPr>
           <p:spPr>
             <a:xfrm>
-              <a:off x="5056737" y="1599474"/>
+              <a:off x="5106255" y="1599611"/>
               <a:ext cx="75116" cy="75116"/>
             </a:xfrm>
             <a:prstGeom prst="ellipse">
@@ -5842,7 +5842,7 @@
           </p:nvSpPr>
           <p:spPr>
             <a:xfrm>
-              <a:off x="5188511" y="2037515"/>
+              <a:off x="5184556" y="2037596"/>
               <a:ext cx="75116" cy="75116"/>
             </a:xfrm>
             <a:prstGeom prst="ellipse">
@@ -5868,7 +5868,7 @@
           </p:nvSpPr>
           <p:spPr>
             <a:xfrm>
-              <a:off x="5185597" y="2402053"/>
+              <a:off x="5122788" y="2402053"/>
               <a:ext cx="75116" cy="75116"/>
             </a:xfrm>
             <a:prstGeom prst="ellipse">
@@ -5894,7 +5894,7 @@
           </p:nvSpPr>
           <p:spPr>
             <a:xfrm>
-              <a:off x="5211738" y="1760012"/>
+              <a:off x="5028788" y="1759910"/>
               <a:ext cx="75116" cy="75116"/>
             </a:xfrm>
             <a:prstGeom prst="ellipse">
@@ -5920,7 +5920,7 @@
           </p:nvSpPr>
           <p:spPr>
             <a:xfrm>
-              <a:off x="5072166" y="1165804"/>
+              <a:off x="5173932" y="1165804"/>
               <a:ext cx="75116" cy="75116"/>
             </a:xfrm>
             <a:prstGeom prst="ellipse">
@@ -5946,7 +5946,7 @@
           </p:nvSpPr>
           <p:spPr>
             <a:xfrm>
-              <a:off x="5164427" y="2373487"/>
+              <a:off x="5067026" y="2373248"/>
               <a:ext cx="75116" cy="75116"/>
             </a:xfrm>
             <a:prstGeom prst="ellipse">
@@ -5972,7 +5972,7 @@
           </p:nvSpPr>
           <p:spPr>
             <a:xfrm>
-              <a:off x="5140833" y="2322390"/>
+              <a:off x="5202628" y="2322453"/>
               <a:ext cx="75116" cy="75116"/>
             </a:xfrm>
             <a:prstGeom prst="ellipse">
@@ -5998,7 +5998,7 @@
           </p:nvSpPr>
           <p:spPr>
             <a:xfrm>
-              <a:off x="5108114" y="2058297"/>
+              <a:off x="5150752" y="2058251"/>
               <a:ext cx="75116" cy="75116"/>
             </a:xfrm>
             <a:prstGeom prst="ellipse">
@@ -6024,7 +6024,7 @@
           </p:nvSpPr>
           <p:spPr>
             <a:xfrm>
-              <a:off x="5041502" y="2379320"/>
+              <a:off x="5102804" y="2379182"/>
               <a:ext cx="75116" cy="75116"/>
             </a:xfrm>
             <a:prstGeom prst="ellipse">
@@ -6050,7 +6050,7 @@
           </p:nvSpPr>
           <p:spPr>
             <a:xfrm>
-              <a:off x="5195696" y="2198624"/>
+              <a:off x="5230476" y="2198575"/>
               <a:ext cx="75116" cy="75116"/>
             </a:xfrm>
             <a:prstGeom prst="ellipse">
@@ -6076,7 +6076,7 @@
           </p:nvSpPr>
           <p:spPr>
             <a:xfrm>
-              <a:off x="5254420" y="2376300"/>
+              <a:off x="5213988" y="2376187"/>
               <a:ext cx="75116" cy="75116"/>
             </a:xfrm>
             <a:prstGeom prst="ellipse">
@@ -6102,7 +6102,7 @@
           </p:nvSpPr>
           <p:spPr>
             <a:xfrm>
-              <a:off x="5146086" y="1958604"/>
+              <a:off x="5035658" y="1958681"/>
               <a:ext cx="75116" cy="75116"/>
             </a:xfrm>
             <a:prstGeom prst="ellipse">
@@ -6128,7 +6128,7 @@
           </p:nvSpPr>
           <p:spPr>
             <a:xfrm>
-              <a:off x="5251681" y="1843130"/>
+              <a:off x="5040795" y="1842915"/>
               <a:ext cx="75116" cy="75116"/>
             </a:xfrm>
             <a:prstGeom prst="ellipse">
@@ -6154,7 +6154,7 @@
           </p:nvSpPr>
           <p:spPr>
             <a:xfrm>
-              <a:off x="5086144" y="1894867"/>
+              <a:off x="5041094" y="1894786"/>
               <a:ext cx="75116" cy="75116"/>
             </a:xfrm>
             <a:prstGeom prst="ellipse">
@@ -6180,7 +6180,7 @@
           </p:nvSpPr>
           <p:spPr>
             <a:xfrm>
-              <a:off x="5223436" y="1725045"/>
+              <a:off x="5139159" y="1724966"/>
               <a:ext cx="75116" cy="75116"/>
             </a:xfrm>
             <a:prstGeom prst="ellipse">
@@ -6206,7 +6206,7 @@
           </p:nvSpPr>
           <p:spPr>
             <a:xfrm>
-              <a:off x="5232625" y="2170010"/>
+              <a:off x="5105967" y="2169832"/>
               <a:ext cx="75116" cy="75116"/>
             </a:xfrm>
             <a:prstGeom prst="ellipse">
@@ -6232,7 +6232,7 @@
           </p:nvSpPr>
           <p:spPr>
             <a:xfrm>
-              <a:off x="5212821" y="2370152"/>
+              <a:off x="5195348" y="2369953"/>
               <a:ext cx="75116" cy="75116"/>
             </a:xfrm>
             <a:prstGeom prst="ellipse">
@@ -6258,7 +6258,7 @@
           </p:nvSpPr>
           <p:spPr>
             <a:xfrm>
-              <a:off x="5971102" y="2151696"/>
+              <a:off x="5963429" y="2151538"/>
               <a:ext cx="75116" cy="75116"/>
             </a:xfrm>
             <a:prstGeom prst="ellipse">
@@ -6284,7 +6284,7 @@
           </p:nvSpPr>
           <p:spPr>
             <a:xfrm>
-              <a:off x="5882759" y="2233057"/>
+              <a:off x="5883219" y="2232974"/>
               <a:ext cx="75116" cy="75116"/>
             </a:xfrm>
             <a:prstGeom prst="ellipse">
@@ -6310,7 +6310,7 @@
           </p:nvSpPr>
           <p:spPr>
             <a:xfrm>
-              <a:off x="5857998" y="2320805"/>
+              <a:off x="5997086" y="2320782"/>
               <a:ext cx="75116" cy="75116"/>
             </a:xfrm>
             <a:prstGeom prst="ellipse">
@@ -6336,7 +6336,7 @@
           </p:nvSpPr>
           <p:spPr>
             <a:xfrm>
-              <a:off x="5857558" y="2110852"/>
+              <a:off x="5830227" y="2110839"/>
               <a:ext cx="75116" cy="75116"/>
             </a:xfrm>
             <a:prstGeom prst="ellipse">
@@ -6362,7 +6362,7 @@
           </p:nvSpPr>
           <p:spPr>
             <a:xfrm>
-              <a:off x="5998298" y="1656241"/>
+              <a:off x="5970919" y="1655958"/>
               <a:ext cx="75116" cy="75116"/>
             </a:xfrm>
             <a:prstGeom prst="ellipse">
@@ -6388,7 +6388,7 @@
           </p:nvSpPr>
           <p:spPr>
             <a:xfrm>
-              <a:off x="6012746" y="1352599"/>
+              <a:off x="5910502" y="1352423"/>
               <a:ext cx="75116" cy="75116"/>
             </a:xfrm>
             <a:prstGeom prst="ellipse">
@@ -6414,7 +6414,7 @@
           </p:nvSpPr>
           <p:spPr>
             <a:xfrm>
-              <a:off x="5895237" y="1557661"/>
+              <a:off x="5863118" y="1557558"/>
               <a:ext cx="75116" cy="75116"/>
             </a:xfrm>
             <a:prstGeom prst="ellipse">
@@ -6440,7 +6440,7 @@
           </p:nvSpPr>
           <p:spPr>
             <a:xfrm>
-              <a:off x="5808517" y="2178995"/>
+              <a:off x="5812893" y="2178902"/>
               <a:ext cx="75116" cy="75116"/>
             </a:xfrm>
             <a:prstGeom prst="ellipse">
@@ -6466,7 +6466,7 @@
           </p:nvSpPr>
           <p:spPr>
             <a:xfrm>
-              <a:off x="5914898" y="2128034"/>
+              <a:off x="5855896" y="2127943"/>
               <a:ext cx="75116" cy="75116"/>
             </a:xfrm>
             <a:prstGeom prst="ellipse">
@@ -6492,7 +6492,7 @@
           </p:nvSpPr>
           <p:spPr>
             <a:xfrm>
-              <a:off x="6000295" y="1622896"/>
+              <a:off x="5998792" y="1622767"/>
               <a:ext cx="75116" cy="75116"/>
             </a:xfrm>
             <a:prstGeom prst="ellipse">
@@ -6518,7 +6518,7 @@
           </p:nvSpPr>
           <p:spPr>
             <a:xfrm>
-              <a:off x="5924230" y="1803682"/>
+              <a:off x="5851621" y="1803613"/>
               <a:ext cx="75116" cy="75116"/>
             </a:xfrm>
             <a:prstGeom prst="ellipse">
@@ -6544,7 +6544,7 @@
           </p:nvSpPr>
           <p:spPr>
             <a:xfrm>
-              <a:off x="5836880" y="2298848"/>
+              <a:off x="6020540" y="2298768"/>
               <a:ext cx="75116" cy="75116"/>
             </a:xfrm>
             <a:prstGeom prst="ellipse">
@@ -6570,7 +6570,7 @@
           </p:nvSpPr>
           <p:spPr>
             <a:xfrm>
-              <a:off x="5988191" y="1578784"/>
+              <a:off x="5804761" y="1578735"/>
               <a:ext cx="75116" cy="75116"/>
             </a:xfrm>
             <a:prstGeom prst="ellipse">
@@ -6596,7 +6596,7 @@
           </p:nvSpPr>
           <p:spPr>
             <a:xfrm>
-              <a:off x="5816639" y="1750407"/>
+              <a:off x="5951907" y="1750270"/>
               <a:ext cx="75116" cy="75116"/>
             </a:xfrm>
             <a:prstGeom prst="ellipse">
@@ -6622,7 +6622,7 @@
           </p:nvSpPr>
           <p:spPr>
             <a:xfrm>
-              <a:off x="5950612" y="1918216"/>
+              <a:off x="6009329" y="1918091"/>
               <a:ext cx="75116" cy="75116"/>
             </a:xfrm>
             <a:prstGeom prst="ellipse">
@@ -6648,7 +6648,7 @@
           </p:nvSpPr>
           <p:spPr>
             <a:xfrm>
-              <a:off x="5983396" y="2273460"/>
+              <a:off x="5890534" y="2273578"/>
               <a:ext cx="75116" cy="75116"/>
             </a:xfrm>
             <a:prstGeom prst="ellipse">
@@ -6674,7 +6674,7 @@
           </p:nvSpPr>
           <p:spPr>
             <a:xfrm>
-              <a:off x="5904448" y="1910296"/>
+              <a:off x="5809228" y="1910215"/>
               <a:ext cx="75116" cy="75116"/>
             </a:xfrm>
             <a:prstGeom prst="ellipse">
@@ -6700,7 +6700,7 @@
           </p:nvSpPr>
           <p:spPr>
             <a:xfrm>
-              <a:off x="5957988" y="2249678"/>
+              <a:off x="5915702" y="2249589"/>
               <a:ext cx="75116" cy="75116"/>
             </a:xfrm>
             <a:prstGeom prst="ellipse">
@@ -6726,7 +6726,7 @@
           </p:nvSpPr>
           <p:spPr>
             <a:xfrm>
-              <a:off x="5939786" y="1732387"/>
+              <a:off x="5867502" y="1732459"/>
               <a:ext cx="75116" cy="75116"/>
             </a:xfrm>
             <a:prstGeom prst="ellipse">
@@ -6752,7 +6752,7 @@
           </p:nvSpPr>
           <p:spPr>
             <a:xfrm>
-              <a:off x="5905295" y="1922806"/>
+              <a:off x="5865032" y="1922827"/>
               <a:ext cx="75116" cy="75116"/>
             </a:xfrm>
             <a:prstGeom prst="ellipse">
@@ -6778,7 +6778,7 @@
           </p:nvSpPr>
           <p:spPr>
             <a:xfrm>
-              <a:off x="6687591" y="2019476"/>
+              <a:off x="6625752" y="2019529"/>
               <a:ext cx="75116" cy="75116"/>
             </a:xfrm>
             <a:prstGeom prst="ellipse">
@@ -6804,7 +6804,7 @@
           </p:nvSpPr>
           <p:spPr>
             <a:xfrm>
-              <a:off x="6576808" y="2147544"/>
+              <a:off x="6676092" y="2147432"/>
               <a:ext cx="75116" cy="75116"/>
             </a:xfrm>
             <a:prstGeom prst="ellipse">
@@ -6830,7 +6830,7 @@
           </p:nvSpPr>
           <p:spPr>
             <a:xfrm>
-              <a:off x="6574223" y="2197864"/>
+              <a:off x="6761987" y="2197650"/>
               <a:ext cx="75116" cy="75116"/>
             </a:xfrm>
             <a:prstGeom prst="ellipse">
@@ -6856,7 +6856,7 @@
           </p:nvSpPr>
           <p:spPr>
             <a:xfrm>
-              <a:off x="6747789" y="2003888"/>
+              <a:off x="6665306" y="2003621"/>
               <a:ext cx="75116" cy="75116"/>
             </a:xfrm>
             <a:prstGeom prst="ellipse">
@@ -6882,7 +6882,7 @@
           </p:nvSpPr>
           <p:spPr>
             <a:xfrm>
-              <a:off x="6670214" y="1897072"/>
+              <a:off x="6762489" y="1897037"/>
               <a:ext cx="75116" cy="75116"/>
             </a:xfrm>
             <a:prstGeom prst="ellipse">
@@ -6908,7 +6908,7 @@
           </p:nvSpPr>
           <p:spPr>
             <a:xfrm>
-              <a:off x="6693256" y="1943307"/>
+              <a:off x="6716849" y="1943264"/>
               <a:ext cx="75116" cy="75116"/>
             </a:xfrm>
             <a:prstGeom prst="ellipse">
@@ -6934,7 +6934,7 @@
           </p:nvSpPr>
           <p:spPr>
             <a:xfrm>
-              <a:off x="6731986" y="2146117"/>
+              <a:off x="6652462" y="2146045"/>
               <a:ext cx="75116" cy="75116"/>
             </a:xfrm>
             <a:prstGeom prst="ellipse">
@@ -6960,7 +6960,7 @@
           </p:nvSpPr>
           <p:spPr>
             <a:xfrm>
-              <a:off x="6638079" y="1964253"/>
+              <a:off x="6758565" y="1964212"/>
               <a:ext cx="75116" cy="75116"/>
             </a:xfrm>
             <a:prstGeom prst="ellipse">
@@ -6986,7 +6986,7 @@
           </p:nvSpPr>
           <p:spPr>
             <a:xfrm>
-              <a:off x="6613414" y="2178599"/>
+              <a:off x="6749730" y="2178391"/>
               <a:ext cx="75116" cy="75116"/>
             </a:xfrm>
             <a:prstGeom prst="ellipse">
@@ -7012,7 +7012,7 @@
           </p:nvSpPr>
           <p:spPr>
             <a:xfrm>
-              <a:off x="6770769" y="2076571"/>
+              <a:off x="6769902" y="2076574"/>
               <a:ext cx="75116" cy="75116"/>
             </a:xfrm>
             <a:prstGeom prst="ellipse">
@@ -7038,7 +7038,7 @@
           </p:nvSpPr>
           <p:spPr>
             <a:xfrm>
-              <a:off x="6650468" y="1927731"/>
+              <a:off x="6595591" y="1927797"/>
               <a:ext cx="75116" cy="75116"/>
             </a:xfrm>
             <a:prstGeom prst="ellipse">
@@ -7064,7 +7064,7 @@
           </p:nvSpPr>
           <p:spPr>
             <a:xfrm>
-              <a:off x="6703074" y="1650570"/>
+              <a:off x="6766113" y="1650336"/>
               <a:ext cx="75116" cy="75116"/>
             </a:xfrm>
             <a:prstGeom prst="ellipse">
@@ -7090,7 +7090,7 @@
           </p:nvSpPr>
           <p:spPr>
             <a:xfrm>
-              <a:off x="6761778" y="2167080"/>
+              <a:off x="6632727" y="2167058"/>
               <a:ext cx="75116" cy="75116"/>
             </a:xfrm>
             <a:prstGeom prst="ellipse">
@@ -7116,7 +7116,7 @@
           </p:nvSpPr>
           <p:spPr>
             <a:xfrm>
-              <a:off x="6731818" y="2350358"/>
+              <a:off x="6605244" y="2350107"/>
               <a:ext cx="75116" cy="75116"/>
             </a:xfrm>
             <a:prstGeom prst="ellipse">
@@ -7142,7 +7142,7 @@
           </p:nvSpPr>
           <p:spPr>
             <a:xfrm>
-              <a:off x="6749378" y="2224432"/>
+              <a:off x="6726814" y="2224602"/>
               <a:ext cx="75116" cy="75116"/>
             </a:xfrm>
             <a:prstGeom prst="ellipse">
@@ -7168,7 +7168,7 @@
           </p:nvSpPr>
           <p:spPr>
             <a:xfrm>
-              <a:off x="6626048" y="2026519"/>
+              <a:off x="6683547" y="2026474"/>
               <a:ext cx="75116" cy="75116"/>
             </a:xfrm>
             <a:prstGeom prst="ellipse">
@@ -7194,7 +7194,7 @@
           </p:nvSpPr>
           <p:spPr>
             <a:xfrm>
-              <a:off x="6654013" y="2140484"/>
+              <a:off x="6645870" y="2140573"/>
               <a:ext cx="75116" cy="75116"/>
             </a:xfrm>
             <a:prstGeom prst="ellipse">
@@ -7220,7 +7220,7 @@
           </p:nvSpPr>
           <p:spPr>
             <a:xfrm>
-              <a:off x="6733173" y="2004681"/>
+              <a:off x="6572410" y="2004613"/>
               <a:ext cx="75116" cy="75116"/>
             </a:xfrm>
             <a:prstGeom prst="ellipse">
@@ -7246,7 +7246,7 @@
           </p:nvSpPr>
           <p:spPr>
             <a:xfrm>
-              <a:off x="6697329" y="1984335"/>
+              <a:off x="6585657" y="1983995"/>
               <a:ext cx="75116" cy="75116"/>
             </a:xfrm>
             <a:prstGeom prst="ellipse">
@@ -7272,7 +7272,7 @@
           </p:nvSpPr>
           <p:spPr>
             <a:xfrm>
-              <a:off x="6575035" y="1831790"/>
+              <a:off x="6655530" y="1831811"/>
               <a:ext cx="75116" cy="75116"/>
             </a:xfrm>
             <a:prstGeom prst="ellipse">
@@ -7298,7 +7298,7 @@
           </p:nvSpPr>
           <p:spPr>
             <a:xfrm>
-              <a:off x="6604862" y="1870834"/>
+              <a:off x="6631605" y="1870907"/>
               <a:ext cx="75116" cy="75116"/>
             </a:xfrm>
             <a:prstGeom prst="ellipse">
@@ -7324,7 +7324,7 @@
           </p:nvSpPr>
           <p:spPr>
             <a:xfrm>
-              <a:off x="6616906" y="1931172"/>
+              <a:off x="6770769" y="1930877"/>
               <a:ext cx="75116" cy="75116"/>
             </a:xfrm>
             <a:prstGeom prst="ellipse">
@@ -7350,7 +7350,7 @@
           </p:nvSpPr>
           <p:spPr>
             <a:xfrm>
-              <a:off x="6763279" y="2258284"/>
+              <a:off x="6631082" y="2258171"/>
               <a:ext cx="75116" cy="75116"/>
             </a:xfrm>
             <a:prstGeom prst="ellipse">
@@ -7376,7 +7376,7 @@
           </p:nvSpPr>
           <p:spPr>
             <a:xfrm>
-              <a:off x="6638868" y="1997730"/>
+              <a:off x="6611731" y="1997889"/>
               <a:ext cx="75116" cy="75116"/>
             </a:xfrm>
             <a:prstGeom prst="ellipse">
@@ -7402,42 +7402,42 @@
           </p:nvSpPr>
           <p:spPr>
             <a:xfrm>
-              <a:off x="4420781" y="1809016"/>
-              <a:ext cx="2286035" cy="387995"/>
+              <a:off x="4404344" y="1808956"/>
+              <a:ext cx="2313794" cy="387975"/>
             </a:xfrm>
             <a:custGeom>
               <a:avLst/>
               <a:pathLst>
-                <a:path w="2286035" h="387995">
+                <a:path w="2313794" h="387975">
                   <a:moveTo>
                     <a:pt x="0" y="0"/>
                   </a:moveTo>
                   <a:lnTo>
-                    <a:pt x="1207760" y="98643"/>
+                    <a:pt x="1222425" y="98637"/>
                   </a:lnTo>
                   <a:lnTo>
-                    <a:pt x="1524023" y="114741"/>
+                    <a:pt x="1542529" y="114735"/>
                   </a:lnTo>
                   <a:lnTo>
-                    <a:pt x="1969771" y="129656"/>
+                    <a:pt x="1993690" y="129649"/>
                   </a:lnTo>
                   <a:lnTo>
-                    <a:pt x="2286035" y="135535"/>
+                    <a:pt x="2313794" y="135528"/>
                   </a:lnTo>
                   <a:lnTo>
-                    <a:pt x="2286035" y="387995"/>
+                    <a:pt x="2313794" y="387975"/>
                   </a:lnTo>
                   <a:lnTo>
-                    <a:pt x="1969771" y="361765"/>
+                    <a:pt x="1993690" y="361746"/>
                   </a:lnTo>
                   <a:lnTo>
-                    <a:pt x="1524023" y="331424"/>
+                    <a:pt x="1542529" y="331407"/>
                   </a:lnTo>
                   <a:lnTo>
-                    <a:pt x="1207760" y="315413"/>
+                    <a:pt x="1222425" y="315396"/>
                   </a:lnTo>
                   <a:lnTo>
-                    <a:pt x="0" y="291435"/>
+                    <a:pt x="0" y="291420"/>
                   </a:lnTo>
                   <a:close/>
                 </a:path>
@@ -7463,27 +7463,27 @@
           </p:nvSpPr>
           <p:spPr>
             <a:xfrm>
-              <a:off x="4420781" y="1809016"/>
-              <a:ext cx="2286035" cy="135535"/>
+              <a:off x="4404344" y="1808956"/>
+              <a:ext cx="2313794" cy="135528"/>
             </a:xfrm>
             <a:custGeom>
               <a:avLst/>
               <a:pathLst>
-                <a:path w="2286035" h="135535">
+                <a:path w="2313794" h="135528">
                   <a:moveTo>
                     <a:pt x="0" y="0"/>
                   </a:moveTo>
                   <a:lnTo>
-                    <a:pt x="1207760" y="98643"/>
+                    <a:pt x="1222425" y="98637"/>
                   </a:lnTo>
                   <a:lnTo>
-                    <a:pt x="1524023" y="114741"/>
+                    <a:pt x="1542529" y="114735"/>
                   </a:lnTo>
                   <a:lnTo>
-                    <a:pt x="1969771" y="129656"/>
+                    <a:pt x="1993690" y="129649"/>
                   </a:lnTo>
                   <a:lnTo>
-                    <a:pt x="2286035" y="135535"/>
+                    <a:pt x="2313794" y="135528"/>
                   </a:lnTo>
                 </a:path>
               </a:pathLst>
@@ -7503,24 +7503,24 @@
           </p:nvSpPr>
           <p:spPr>
             <a:xfrm>
-              <a:off x="4420781" y="2100452"/>
-              <a:ext cx="2286035" cy="96559"/>
+              <a:off x="4404344" y="2100376"/>
+              <a:ext cx="2313794" cy="96554"/>
             </a:xfrm>
             <a:custGeom>
               <a:avLst/>
               <a:pathLst>
-                <a:path w="2286035" h="96559">
+                <a:path w="2313794" h="96554">
                   <a:moveTo>
-                    <a:pt x="2286035" y="96559"/>
+                    <a:pt x="2313794" y="96554"/>
                   </a:moveTo>
                   <a:lnTo>
-                    <a:pt x="1969771" y="70329"/>
+                    <a:pt x="1993690" y="70326"/>
                   </a:lnTo>
                   <a:lnTo>
-                    <a:pt x="1524023" y="39988"/>
+                    <a:pt x="1542529" y="39986"/>
                   </a:lnTo>
                   <a:lnTo>
-                    <a:pt x="1207760" y="23977"/>
+                    <a:pt x="1222425" y="23976"/>
                   </a:lnTo>
                   <a:lnTo>
                     <a:pt x="0" y="0"/>
@@ -7543,27 +7543,27 @@
           </p:nvSpPr>
           <p:spPr>
             <a:xfrm>
-              <a:off x="4420781" y="1954734"/>
-              <a:ext cx="2286035" cy="116047"/>
+              <a:off x="4404344" y="1954666"/>
+              <a:ext cx="2313794" cy="116041"/>
             </a:xfrm>
             <a:custGeom>
               <a:avLst/>
               <a:pathLst>
-                <a:path w="2286035" h="116047">
+                <a:path w="2313794" h="116041">
                   <a:moveTo>
                     <a:pt x="0" y="0"/>
                   </a:moveTo>
                   <a:lnTo>
-                    <a:pt x="1207760" y="61310"/>
+                    <a:pt x="1222425" y="61307"/>
                   </a:lnTo>
                   <a:lnTo>
-                    <a:pt x="1524023" y="77365"/>
+                    <a:pt x="1542529" y="77360"/>
                   </a:lnTo>
                   <a:lnTo>
-                    <a:pt x="1969771" y="99992"/>
+                    <a:pt x="1993690" y="99987"/>
                   </a:lnTo>
                   <a:lnTo>
-                    <a:pt x="2286035" y="116047"/>
+                    <a:pt x="2313794" y="116041"/>
                   </a:lnTo>
                 </a:path>
               </a:pathLst>
@@ -7592,7 +7592,7 @@
           </p:nvSpPr>
           <p:spPr>
             <a:xfrm>
-              <a:off x="6227122" y="1245066"/>
+              <a:off x="6238444" y="1245031"/>
               <a:ext cx="479694" cy="82021"/>
             </a:xfrm>
             <a:prstGeom prst="rect">
@@ -7699,7 +7699,7 @@
           </p:nvSpPr>
           <p:spPr>
             <a:xfrm>
-              <a:off x="4157982" y="2237087"/>
+              <a:off x="4157982" y="2237005"/>
               <a:ext cx="28468" cy="0"/>
             </a:xfrm>
             <a:custGeom>
@@ -7739,7 +7739,7 @@
           </p:nvSpPr>
           <p:spPr>
             <a:xfrm>
-              <a:off x="4157982" y="1787768"/>
+              <a:off x="4157982" y="1787709"/>
               <a:ext cx="28468" cy="0"/>
             </a:xfrm>
             <a:custGeom>
@@ -7779,7 +7779,7 @@
           </p:nvSpPr>
           <p:spPr>
             <a:xfrm>
-              <a:off x="4157982" y="1338448"/>
+              <a:off x="4157982" y="1338412"/>
               <a:ext cx="28468" cy="0"/>
             </a:xfrm>
             <a:custGeom>
@@ -7859,7 +7859,7 @@
           </p:nvSpPr>
           <p:spPr>
             <a:xfrm>
-              <a:off x="4420781" y="2501424"/>
+              <a:off x="4404344" y="2501424"/>
               <a:ext cx="0" cy="28468"/>
             </a:xfrm>
             <a:custGeom>
@@ -7899,7 +7899,7 @@
           </p:nvSpPr>
           <p:spPr>
             <a:xfrm>
-              <a:off x="5182793" y="2501424"/>
+              <a:off x="5175609" y="2501424"/>
               <a:ext cx="0" cy="28468"/>
             </a:xfrm>
             <a:custGeom>
@@ -7939,7 +7939,7 @@
           </p:nvSpPr>
           <p:spPr>
             <a:xfrm>
-              <a:off x="5944804" y="2501424"/>
+              <a:off x="5946874" y="2501424"/>
               <a:ext cx="0" cy="28468"/>
             </a:xfrm>
             <a:custGeom>
@@ -7979,7 +7979,7 @@
           </p:nvSpPr>
           <p:spPr>
             <a:xfrm>
-              <a:off x="6706816" y="2501424"/>
+              <a:off x="6718138" y="2501424"/>
               <a:ext cx="0" cy="28468"/>
             </a:xfrm>
             <a:custGeom>
@@ -8019,7 +8019,7 @@
           </p:nvSpPr>
           <p:spPr>
             <a:xfrm>
-              <a:off x="4392526" y="2552666"/>
+              <a:off x="4376089" y="2552666"/>
               <a:ext cx="56509" cy="72877"/>
             </a:xfrm>
             <a:prstGeom prst="rect">
@@ -8065,7 +8065,7 @@
           </p:nvSpPr>
           <p:spPr>
             <a:xfrm>
-              <a:off x="5154538" y="2552666"/>
+              <a:off x="5147354" y="2552666"/>
               <a:ext cx="56509" cy="72877"/>
             </a:xfrm>
             <a:prstGeom prst="rect">
@@ -8111,7 +8111,7 @@
           </p:nvSpPr>
           <p:spPr>
             <a:xfrm>
-              <a:off x="5916550" y="2552666"/>
+              <a:off x="5918619" y="2552666"/>
               <a:ext cx="56509" cy="72877"/>
             </a:xfrm>
             <a:prstGeom prst="rect">
@@ -8157,7 +8157,7 @@
           </p:nvSpPr>
           <p:spPr>
             <a:xfrm>
-              <a:off x="6678561" y="2552666"/>
+              <a:off x="6689884" y="2552666"/>
               <a:ext cx="56509" cy="72877"/>
             </a:xfrm>
             <a:prstGeom prst="rect">
@@ -8275,7 +8275,7 @@
           </p:nvSpPr>
           <p:spPr>
             <a:xfrm>
-              <a:off x="1565429" y="4022956"/>
+              <a:off x="1478594" y="4020532"/>
               <a:ext cx="75116" cy="75116"/>
             </a:xfrm>
             <a:prstGeom prst="ellipse">
@@ -8301,7 +8301,7 @@
           </p:nvSpPr>
           <p:spPr>
             <a:xfrm>
-              <a:off x="1446137" y="3888922"/>
+              <a:off x="1581083" y="3887604"/>
               <a:ext cx="75116" cy="75116"/>
             </a:xfrm>
             <a:prstGeom prst="ellipse">
@@ -8327,7 +8327,7 @@
           </p:nvSpPr>
           <p:spPr>
             <a:xfrm>
-              <a:off x="1720735" y="4080654"/>
+              <a:off x="1605089" y="4080365"/>
               <a:ext cx="75116" cy="75116"/>
             </a:xfrm>
             <a:prstGeom prst="ellipse">
@@ -8353,7 +8353,7 @@
           </p:nvSpPr>
           <p:spPr>
             <a:xfrm>
-              <a:off x="1397410" y="3962384"/>
+              <a:off x="1634940" y="3959841"/>
               <a:ext cx="75116" cy="75116"/>
             </a:xfrm>
             <a:prstGeom prst="ellipse">
@@ -8379,7 +8379,7 @@
           </p:nvSpPr>
           <p:spPr>
             <a:xfrm>
-              <a:off x="1462130" y="3989084"/>
+              <a:off x="1659971" y="3986808"/>
               <a:ext cx="75116" cy="75116"/>
             </a:xfrm>
             <a:prstGeom prst="ellipse">
@@ -8405,7 +8405,7 @@
           </p:nvSpPr>
           <p:spPr>
             <a:xfrm>
-              <a:off x="1648163" y="3871904"/>
+              <a:off x="1473937" y="3871387"/>
               <a:ext cx="75116" cy="75116"/>
             </a:xfrm>
             <a:prstGeom prst="ellipse">
@@ -8431,7 +8431,7 @@
           </p:nvSpPr>
           <p:spPr>
             <a:xfrm>
-              <a:off x="1503898" y="3578450"/>
+              <a:off x="1651791" y="3578076"/>
               <a:ext cx="75116" cy="75116"/>
             </a:xfrm>
             <a:prstGeom prst="ellipse">
@@ -8457,7 +8457,7 @@
           </p:nvSpPr>
           <p:spPr>
             <a:xfrm>
-              <a:off x="1658292" y="3962036"/>
+              <a:off x="1397325" y="3962306"/>
               <a:ext cx="75116" cy="75116"/>
             </a:xfrm>
             <a:prstGeom prst="ellipse">
@@ -8483,7 +8483,7 @@
           </p:nvSpPr>
           <p:spPr>
             <a:xfrm>
-              <a:off x="1397325" y="3920881"/>
+              <a:off x="1688036" y="3920719"/>
               <a:ext cx="75116" cy="75116"/>
             </a:xfrm>
             <a:prstGeom prst="ellipse">
@@ -8509,7 +8509,7 @@
           </p:nvSpPr>
           <p:spPr>
             <a:xfrm>
-              <a:off x="1485592" y="3872933"/>
+              <a:off x="1587414" y="3873240"/>
               <a:ext cx="75116" cy="75116"/>
             </a:xfrm>
             <a:prstGeom prst="ellipse">
@@ -8535,7 +8535,7 @@
           </p:nvSpPr>
           <p:spPr>
             <a:xfrm>
-              <a:off x="2263602" y="4087419"/>
+              <a:off x="2148837" y="4089056"/>
               <a:ext cx="75116" cy="75116"/>
             </a:xfrm>
             <a:prstGeom prst="ellipse">
@@ -8561,7 +8561,7 @@
           </p:nvSpPr>
           <p:spPr>
             <a:xfrm>
-              <a:off x="2167943" y="4132650"/>
+              <a:off x="2445878" y="4132164"/>
               <a:ext cx="75116" cy="75116"/>
             </a:xfrm>
             <a:prstGeom prst="ellipse">
@@ -8587,7 +8587,7 @@
           </p:nvSpPr>
           <p:spPr>
             <a:xfrm>
-              <a:off x="2430270" y="3085301"/>
+              <a:off x="2438599" y="3087092"/>
               <a:ext cx="75116" cy="75116"/>
             </a:xfrm>
             <a:prstGeom prst="ellipse">
@@ -8613,7 +8613,7 @@
           </p:nvSpPr>
           <p:spPr>
             <a:xfrm>
-              <a:off x="2253415" y="4018310"/>
+              <a:off x="2396474" y="4016201"/>
               <a:ext cx="75116" cy="75116"/>
             </a:xfrm>
             <a:prstGeom prst="ellipse">
@@ -8639,7 +8639,7 @@
           </p:nvSpPr>
           <p:spPr>
             <a:xfrm>
-              <a:off x="2440950" y="4039709"/>
+              <a:off x="2028273" y="4040069"/>
               <a:ext cx="75116" cy="75116"/>
             </a:xfrm>
             <a:prstGeom prst="ellipse">
@@ -8665,7 +8665,7 @@
           </p:nvSpPr>
           <p:spPr>
             <a:xfrm>
-              <a:off x="2130893" y="3895658"/>
+              <a:off x="2145382" y="3893566"/>
               <a:ext cx="75116" cy="75116"/>
             </a:xfrm>
             <a:prstGeom prst="ellipse">
@@ -8691,7 +8691,7 @@
           </p:nvSpPr>
           <p:spPr>
             <a:xfrm>
-              <a:off x="2377743" y="4039131"/>
+              <a:off x="2222065" y="4040035"/>
               <a:ext cx="75116" cy="75116"/>
             </a:xfrm>
             <a:prstGeom prst="ellipse">
@@ -8717,7 +8717,7 @@
           </p:nvSpPr>
           <p:spPr>
             <a:xfrm>
-              <a:off x="2214510" y="4043192"/>
+              <a:off x="2325388" y="4042666"/>
               <a:ext cx="75116" cy="75116"/>
             </a:xfrm>
             <a:prstGeom prst="ellipse">
@@ -8743,7 +8743,7 @@
           </p:nvSpPr>
           <p:spPr>
             <a:xfrm>
-              <a:off x="2286557" y="3496596"/>
+              <a:off x="2355260" y="3497262"/>
               <a:ext cx="75116" cy="75116"/>
             </a:xfrm>
             <a:prstGeom prst="ellipse">
@@ -8769,7 +8769,7 @@
           </p:nvSpPr>
           <p:spPr>
             <a:xfrm>
-              <a:off x="2346937" y="3619196"/>
+              <a:off x="2256531" y="3618252"/>
               <a:ext cx="75116" cy="75116"/>
             </a:xfrm>
             <a:prstGeom prst="ellipse">
@@ -8795,7 +8795,7 @@
           </p:nvSpPr>
           <p:spPr>
             <a:xfrm>
-              <a:off x="2369235" y="3816242"/>
+              <a:off x="2357292" y="3817206"/>
               <a:ext cx="75116" cy="75116"/>
             </a:xfrm>
             <a:prstGeom prst="ellipse">
@@ -8821,7 +8821,7 @@
           </p:nvSpPr>
           <p:spPr>
             <a:xfrm>
-              <a:off x="2259201" y="3892208"/>
+              <a:off x="2281781" y="3891786"/>
               <a:ext cx="75116" cy="75116"/>
             </a:xfrm>
             <a:prstGeom prst="ellipse">
@@ -8847,7 +8847,7 @@
           </p:nvSpPr>
           <p:spPr>
             <a:xfrm>
-              <a:off x="2269607" y="3752017"/>
+              <a:off x="2133741" y="3752967"/>
               <a:ext cx="75116" cy="75116"/>
             </a:xfrm>
             <a:prstGeom prst="ellipse">
@@ -8873,7 +8873,7 @@
           </p:nvSpPr>
           <p:spPr>
             <a:xfrm>
-              <a:off x="2166700" y="3942988"/>
+              <a:off x="2084740" y="3941434"/>
               <a:ext cx="75116" cy="75116"/>
             </a:xfrm>
             <a:prstGeom prst="ellipse">
@@ -8899,7 +8899,7 @@
           </p:nvSpPr>
           <p:spPr>
             <a:xfrm>
-              <a:off x="2480877" y="3965984"/>
+              <a:off x="2071773" y="3963917"/>
               <a:ext cx="75116" cy="75116"/>
             </a:xfrm>
             <a:prstGeom prst="ellipse">
@@ -8925,7 +8925,7 @@
           </p:nvSpPr>
           <p:spPr>
             <a:xfrm>
-              <a:off x="2107929" y="3851388"/>
+              <a:off x="2116842" y="3848933"/>
               <a:ext cx="75116" cy="75116"/>
             </a:xfrm>
             <a:prstGeom prst="ellipse">
@@ -8951,7 +8951,7 @@
           </p:nvSpPr>
           <p:spPr>
             <a:xfrm>
-              <a:off x="2314456" y="3364419"/>
+              <a:off x="2245111" y="3364779"/>
               <a:ext cx="75116" cy="75116"/>
             </a:xfrm>
             <a:prstGeom prst="ellipse">
@@ -8977,7 +8977,7 @@
           </p:nvSpPr>
           <p:spPr>
             <a:xfrm>
-              <a:off x="2102713" y="3590515"/>
+              <a:off x="2195289" y="3589678"/>
               <a:ext cx="75116" cy="75116"/>
             </a:xfrm>
             <a:prstGeom prst="ellipse">
@@ -9003,7 +9003,7 @@
           </p:nvSpPr>
           <p:spPr>
             <a:xfrm>
-              <a:off x="3108394" y="3838354"/>
+              <a:off x="2769746" y="3837306"/>
               <a:ext cx="75116" cy="75116"/>
             </a:xfrm>
             <a:prstGeom prst="ellipse">
@@ -9029,7 +9029,7 @@
           </p:nvSpPr>
           <p:spPr>
             <a:xfrm>
-              <a:off x="3153598" y="3741677"/>
+              <a:off x="2963264" y="3741709"/>
               <a:ext cx="75116" cy="75116"/>
             </a:xfrm>
             <a:prstGeom prst="ellipse">
@@ -9055,7 +9055,7 @@
           </p:nvSpPr>
           <p:spPr>
             <a:xfrm>
-              <a:off x="3115102" y="4121869"/>
+              <a:off x="3036857" y="4121698"/>
               <a:ext cx="75116" cy="75116"/>
             </a:xfrm>
             <a:prstGeom prst="ellipse">
@@ -9081,7 +9081,7 @@
           </p:nvSpPr>
           <p:spPr>
             <a:xfrm>
-              <a:off x="2883519" y="4116326"/>
+              <a:off x="3146946" y="4113322"/>
               <a:ext cx="75116" cy="75116"/>
             </a:xfrm>
             <a:prstGeom prst="ellipse">
@@ -9107,7 +9107,7 @@
           </p:nvSpPr>
           <p:spPr>
             <a:xfrm>
-              <a:off x="2808827" y="3931262"/>
+              <a:off x="2939610" y="3932331"/>
               <a:ext cx="75116" cy="75116"/>
             </a:xfrm>
             <a:prstGeom prst="ellipse">
@@ -9133,7 +9133,7 @@
           </p:nvSpPr>
           <p:spPr>
             <a:xfrm>
-              <a:off x="3173505" y="4127295"/>
+              <a:off x="3172408" y="4123768"/>
               <a:ext cx="75116" cy="75116"/>
             </a:xfrm>
             <a:prstGeom prst="ellipse">
@@ -9159,7 +9159,7 @@
           </p:nvSpPr>
           <p:spPr>
             <a:xfrm>
-              <a:off x="3049133" y="3273825"/>
+              <a:off x="2998301" y="3273786"/>
               <a:ext cx="75116" cy="75116"/>
             </a:xfrm>
             <a:prstGeom prst="ellipse">
@@ -9185,7 +9185,7 @@
           </p:nvSpPr>
           <p:spPr>
             <a:xfrm>
-              <a:off x="2998948" y="4140843"/>
+              <a:off x="3080892" y="4140843"/>
               <a:ext cx="75116" cy="75116"/>
             </a:xfrm>
             <a:prstGeom prst="ellipse">
@@ -9211,7 +9211,7 @@
           </p:nvSpPr>
           <p:spPr>
             <a:xfrm>
-              <a:off x="2936322" y="3694847"/>
+              <a:off x="2772304" y="3692773"/>
               <a:ext cx="75116" cy="75116"/>
             </a:xfrm>
             <a:prstGeom prst="ellipse">
@@ -9237,7 +9237,7 @@
           </p:nvSpPr>
           <p:spPr>
             <a:xfrm>
-              <a:off x="3176912" y="3107853"/>
+              <a:off x="3087235" y="3107941"/>
               <a:ext cx="75116" cy="75116"/>
             </a:xfrm>
             <a:prstGeom prst="ellipse">
@@ -9263,7 +9263,7 @@
           </p:nvSpPr>
           <p:spPr>
             <a:xfrm>
-              <a:off x="3184336" y="3007614"/>
+              <a:off x="3132882" y="3007614"/>
               <a:ext cx="75116" cy="75116"/>
             </a:xfrm>
             <a:prstGeom prst="ellipse">
@@ -9289,7 +9289,7 @@
           </p:nvSpPr>
           <p:spPr>
             <a:xfrm>
-              <a:off x="3050187" y="3679728"/>
+              <a:off x="2902393" y="3676908"/>
               <a:ext cx="75116" cy="75116"/>
             </a:xfrm>
             <a:prstGeom prst="ellipse">
@@ -9315,7 +9315,7 @@
           </p:nvSpPr>
           <p:spPr>
             <a:xfrm>
-              <a:off x="2960532" y="3561137"/>
+              <a:off x="2923543" y="3558744"/>
               <a:ext cx="75116" cy="75116"/>
             </a:xfrm>
             <a:prstGeom prst="ellipse">
@@ -9341,7 +9341,7 @@
           </p:nvSpPr>
           <p:spPr>
             <a:xfrm>
-              <a:off x="2840786" y="3517387"/>
+              <a:off x="2880382" y="3517666"/>
               <a:ext cx="75116" cy="75116"/>
             </a:xfrm>
             <a:prstGeom prst="ellipse">
@@ -9367,7 +9367,7 @@
           </p:nvSpPr>
           <p:spPr>
             <a:xfrm>
-              <a:off x="3024247" y="3553089"/>
+              <a:off x="3142217" y="3550901"/>
               <a:ext cx="75116" cy="75116"/>
             </a:xfrm>
             <a:prstGeom prst="ellipse">
@@ -9393,7 +9393,7 @@
           </p:nvSpPr>
           <p:spPr>
             <a:xfrm>
-              <a:off x="3058407" y="4053977"/>
+              <a:off x="3122212" y="4054945"/>
               <a:ext cx="75116" cy="75116"/>
             </a:xfrm>
             <a:prstGeom prst="ellipse">
@@ -9419,7 +9419,7 @@
           </p:nvSpPr>
           <p:spPr>
             <a:xfrm>
-              <a:off x="2952961" y="3508653"/>
+              <a:off x="3097018" y="3506157"/>
               <a:ext cx="75116" cy="75116"/>
             </a:xfrm>
             <a:prstGeom prst="ellipse">
@@ -9445,7 +9445,7 @@
           </p:nvSpPr>
           <p:spPr>
             <a:xfrm>
-              <a:off x="3026565" y="3887537"/>
+              <a:off x="2821961" y="3885757"/>
               <a:ext cx="75116" cy="75116"/>
             </a:xfrm>
             <a:prstGeom prst="ellipse">
@@ -9471,7 +9471,7 @@
           </p:nvSpPr>
           <p:spPr>
             <a:xfrm>
-              <a:off x="3089173" y="3905768"/>
+              <a:off x="2890890" y="3906371"/>
               <a:ext cx="75116" cy="75116"/>
             </a:xfrm>
             <a:prstGeom prst="ellipse">
@@ -9497,7 +9497,7 @@
           </p:nvSpPr>
           <p:spPr>
             <a:xfrm>
-              <a:off x="2925941" y="3724332"/>
+              <a:off x="3115461" y="3723425"/>
               <a:ext cx="75116" cy="75116"/>
             </a:xfrm>
             <a:prstGeom prst="ellipse">
@@ -9523,7 +9523,7 @@
           </p:nvSpPr>
           <p:spPr>
             <a:xfrm>
-              <a:off x="3506819" y="3712014"/>
+              <a:off x="3686391" y="3712363"/>
               <a:ext cx="75116" cy="75116"/>
             </a:xfrm>
             <a:prstGeom prst="ellipse">
@@ -9549,7 +9549,7 @@
           </p:nvSpPr>
           <p:spPr>
             <a:xfrm>
-              <a:off x="3885861" y="3810829"/>
+              <a:off x="3837701" y="3808155"/>
               <a:ext cx="75116" cy="75116"/>
             </a:xfrm>
             <a:prstGeom prst="ellipse">
@@ -9575,7 +9575,7 @@
           </p:nvSpPr>
           <p:spPr>
             <a:xfrm>
-              <a:off x="3815587" y="3740996"/>
+              <a:off x="3729444" y="3742372"/>
               <a:ext cx="75116" cy="75116"/>
             </a:xfrm>
             <a:prstGeom prst="ellipse">
@@ -9601,7 +9601,7 @@
           </p:nvSpPr>
           <p:spPr>
             <a:xfrm>
-              <a:off x="3688769" y="4006533"/>
+              <a:off x="3629298" y="4007275"/>
               <a:ext cx="75116" cy="75116"/>
             </a:xfrm>
             <a:prstGeom prst="ellipse">
@@ -9627,7 +9627,7 @@
           </p:nvSpPr>
           <p:spPr>
             <a:xfrm>
-              <a:off x="3675876" y="3510194"/>
+              <a:off x="3847034" y="3510910"/>
               <a:ext cx="75116" cy="75116"/>
             </a:xfrm>
             <a:prstGeom prst="ellipse">
@@ -9653,7 +9653,7 @@
           </p:nvSpPr>
           <p:spPr>
             <a:xfrm>
-              <a:off x="3545575" y="3828847"/>
+              <a:off x="3894352" y="3828199"/>
               <a:ext cx="75116" cy="75116"/>
             </a:xfrm>
             <a:prstGeom prst="ellipse">
@@ -9679,7 +9679,7 @@
           </p:nvSpPr>
           <p:spPr>
             <a:xfrm>
-              <a:off x="3785087" y="3936606"/>
+              <a:off x="3619978" y="3935735"/>
               <a:ext cx="75116" cy="75116"/>
             </a:xfrm>
             <a:prstGeom prst="ellipse">
@@ -9705,7 +9705,7 @@
           </p:nvSpPr>
           <p:spPr>
             <a:xfrm>
-              <a:off x="3517155" y="3663361"/>
+              <a:off x="3675065" y="3662713"/>
               <a:ext cx="75116" cy="75116"/>
             </a:xfrm>
             <a:prstGeom prst="ellipse">
@@ -9731,7 +9731,7 @@
           </p:nvSpPr>
           <p:spPr>
             <a:xfrm>
-              <a:off x="3599916" y="3600574"/>
+              <a:off x="3513065" y="3599032"/>
               <a:ext cx="75116" cy="75116"/>
             </a:xfrm>
             <a:prstGeom prst="ellipse">
@@ -9757,7 +9757,7 @@
           </p:nvSpPr>
           <p:spPr>
             <a:xfrm>
-              <a:off x="3541388" y="3335227"/>
+              <a:off x="3851218" y="3335904"/>
               <a:ext cx="75116" cy="75116"/>
             </a:xfrm>
             <a:prstGeom prst="ellipse">
@@ -9783,7 +9783,7 @@
           </p:nvSpPr>
           <p:spPr>
             <a:xfrm>
-              <a:off x="3502858" y="3357585"/>
+              <a:off x="3829767" y="3358551"/>
               <a:ext cx="75116" cy="75116"/>
             </a:xfrm>
             <a:prstGeom prst="ellipse">
@@ -9809,7 +9809,7 @@
           </p:nvSpPr>
           <p:spPr>
             <a:xfrm>
-              <a:off x="3854522" y="3340828"/>
+              <a:off x="3758164" y="3338624"/>
               <a:ext cx="75116" cy="75116"/>
             </a:xfrm>
             <a:prstGeom prst="ellipse">
@@ -9835,7 +9835,7 @@
           </p:nvSpPr>
           <p:spPr>
             <a:xfrm>
-              <a:off x="3675196" y="3435884"/>
+              <a:off x="3755888" y="3436483"/>
               <a:ext cx="75116" cy="75116"/>
             </a:xfrm>
             <a:prstGeom prst="ellipse">
@@ -9861,7 +9861,7 @@
           </p:nvSpPr>
           <p:spPr>
             <a:xfrm>
-              <a:off x="3879202" y="3670667"/>
+              <a:off x="3659031" y="3669892"/>
               <a:ext cx="75116" cy="75116"/>
             </a:xfrm>
             <a:prstGeom prst="ellipse">
@@ -9887,7 +9887,7 @@
           </p:nvSpPr>
           <p:spPr>
             <a:xfrm>
-              <a:off x="3533994" y="3696136"/>
+              <a:off x="3633748" y="3697197"/>
               <a:ext cx="75116" cy="75116"/>
             </a:xfrm>
             <a:prstGeom prst="ellipse">
@@ -9913,7 +9913,7 @@
           </p:nvSpPr>
           <p:spPr>
             <a:xfrm>
-              <a:off x="3814147" y="3603568"/>
+              <a:off x="3627646" y="3604359"/>
               <a:ext cx="75116" cy="75116"/>
             </a:xfrm>
             <a:prstGeom prst="ellipse">
@@ -9939,7 +9939,7 @@
           </p:nvSpPr>
           <p:spPr>
             <a:xfrm>
-              <a:off x="3734481" y="3567479"/>
+              <a:off x="3875926" y="3566647"/>
               <a:ext cx="75116" cy="75116"/>
             </a:xfrm>
             <a:prstGeom prst="ellipse">
@@ -9965,7 +9965,7 @@
           </p:nvSpPr>
           <p:spPr>
             <a:xfrm>
-              <a:off x="3894352" y="3555832"/>
+              <a:off x="3537150" y="3556227"/>
               <a:ext cx="75116" cy="75116"/>
             </a:xfrm>
             <a:prstGeom prst="ellipse">
@@ -9991,7 +9991,7 @@
           </p:nvSpPr>
           <p:spPr>
             <a:xfrm>
-              <a:off x="3648462" y="3385871"/>
+              <a:off x="3593687" y="3385208"/>
               <a:ext cx="75116" cy="75116"/>
             </a:xfrm>
             <a:prstGeom prst="ellipse">
@@ -10017,7 +10017,7 @@
           </p:nvSpPr>
           <p:spPr>
             <a:xfrm>
-              <a:off x="3569128" y="3495277"/>
+              <a:off x="3855280" y="3495239"/>
               <a:ext cx="75116" cy="75116"/>
             </a:xfrm>
             <a:prstGeom prst="ellipse">
@@ -10043,7 +10043,7 @@
           </p:nvSpPr>
           <p:spPr>
             <a:xfrm>
-              <a:off x="3781527" y="3538409"/>
+              <a:off x="3872322" y="3537395"/>
               <a:ext cx="75116" cy="75116"/>
             </a:xfrm>
             <a:prstGeom prst="ellipse">
@@ -10069,7 +10069,7 @@
           </p:nvSpPr>
           <p:spPr>
             <a:xfrm>
-              <a:off x="3665221" y="3358574"/>
+              <a:off x="3683820" y="3358258"/>
               <a:ext cx="75116" cy="75116"/>
             </a:xfrm>
             <a:prstGeom prst="ellipse">
@@ -10095,7 +10095,7 @@
           </p:nvSpPr>
           <p:spPr>
             <a:xfrm>
-              <a:off x="3842797" y="3567737"/>
+              <a:off x="3548872" y="3567197"/>
               <a:ext cx="75116" cy="75116"/>
             </a:xfrm>
             <a:prstGeom prst="ellipse">
@@ -10121,7 +10121,7 @@
           </p:nvSpPr>
           <p:spPr>
             <a:xfrm>
-              <a:off x="3802078" y="3407985"/>
+              <a:off x="3855703" y="3405760"/>
               <a:ext cx="75116" cy="75116"/>
             </a:xfrm>
             <a:prstGeom prst="ellipse">
@@ -10147,42 +10147,42 @@
           </p:nvSpPr>
           <p:spPr>
             <a:xfrm>
-              <a:off x="1604163" y="3454691"/>
-              <a:ext cx="2131696" cy="682545"/>
+              <a:off x="1541361" y="3454511"/>
+              <a:ext cx="2207802" cy="681522"/>
             </a:xfrm>
             <a:custGeom>
               <a:avLst/>
               <a:pathLst>
-                <a:path w="2131696" h="682545">
+                <a:path w="2207802" h="681522">
                   <a:moveTo>
-                    <a:pt x="0" y="278350"/>
+                    <a:pt x="0" y="277933"/>
                   </a:moveTo>
                   <a:lnTo>
-                    <a:pt x="1126219" y="206143"/>
+                    <a:pt x="1166427" y="205834"/>
                   </a:lnTo>
                   <a:lnTo>
-                    <a:pt x="1421131" y="158890"/>
+                    <a:pt x="1471868" y="158652"/>
                   </a:lnTo>
                   <a:lnTo>
-                    <a:pt x="1836785" y="71307"/>
+                    <a:pt x="1902362" y="71200"/>
                   </a:lnTo>
                   <a:lnTo>
-                    <a:pt x="2131696" y="0"/>
+                    <a:pt x="2207802" y="0"/>
                   </a:lnTo>
                   <a:lnTo>
-                    <a:pt x="2131696" y="362564"/>
+                    <a:pt x="2207802" y="362021"/>
                   </a:lnTo>
                   <a:lnTo>
-                    <a:pt x="1836785" y="374033"/>
+                    <a:pt x="1902362" y="373472"/>
                   </a:lnTo>
                   <a:lnTo>
-                    <a:pt x="1421131" y="403117"/>
+                    <a:pt x="1471868" y="402514"/>
                   </a:lnTo>
                   <a:lnTo>
-                    <a:pt x="1126219" y="438641"/>
+                    <a:pt x="1166427" y="437984"/>
                   </a:lnTo>
                   <a:lnTo>
-                    <a:pt x="0" y="682545"/>
+                    <a:pt x="0" y="681522"/>
                   </a:lnTo>
                   <a:close/>
                 </a:path>
@@ -10208,27 +10208,27 @@
           </p:nvSpPr>
           <p:spPr>
             <a:xfrm>
-              <a:off x="1604163" y="3454691"/>
-              <a:ext cx="2131696" cy="278350"/>
+              <a:off x="1541361" y="3454511"/>
+              <a:ext cx="2207802" cy="277933"/>
             </a:xfrm>
             <a:custGeom>
               <a:avLst/>
               <a:pathLst>
-                <a:path w="2131696" h="278350">
+                <a:path w="2207802" h="277933">
                   <a:moveTo>
-                    <a:pt x="0" y="278350"/>
+                    <a:pt x="0" y="277933"/>
                   </a:moveTo>
                   <a:lnTo>
-                    <a:pt x="1126219" y="206143"/>
+                    <a:pt x="1166427" y="205834"/>
                   </a:lnTo>
                   <a:lnTo>
-                    <a:pt x="1421131" y="158890"/>
+                    <a:pt x="1471868" y="158652"/>
                   </a:lnTo>
                   <a:lnTo>
-                    <a:pt x="1836785" y="71307"/>
+                    <a:pt x="1902362" y="71200"/>
                   </a:lnTo>
                   <a:lnTo>
-                    <a:pt x="2131696" y="0"/>
+                    <a:pt x="2207802" y="0"/>
                   </a:lnTo>
                 </a:path>
               </a:pathLst>
@@ -10248,27 +10248,27 @@
           </p:nvSpPr>
           <p:spPr>
             <a:xfrm>
-              <a:off x="1604163" y="3817255"/>
-              <a:ext cx="2131696" cy="319981"/>
+              <a:off x="1541361" y="3816532"/>
+              <a:ext cx="2207802" cy="319501"/>
             </a:xfrm>
             <a:custGeom>
               <a:avLst/>
               <a:pathLst>
-                <a:path w="2131696" h="319981">
+                <a:path w="2207802" h="319501">
                   <a:moveTo>
-                    <a:pt x="2131696" y="0"/>
+                    <a:pt x="2207802" y="0"/>
                   </a:moveTo>
                   <a:lnTo>
-                    <a:pt x="1836785" y="11468"/>
+                    <a:pt x="1902362" y="11451"/>
                   </a:lnTo>
                   <a:lnTo>
-                    <a:pt x="1421131" y="40553"/>
+                    <a:pt x="1471868" y="40493"/>
                   </a:lnTo>
                   <a:lnTo>
-                    <a:pt x="1126219" y="76077"/>
+                    <a:pt x="1166427" y="75963"/>
                   </a:lnTo>
                   <a:lnTo>
-                    <a:pt x="0" y="319981"/>
+                    <a:pt x="0" y="319501"/>
                   </a:lnTo>
                 </a:path>
               </a:pathLst>
@@ -10288,27 +10288,27 @@
           </p:nvSpPr>
           <p:spPr>
             <a:xfrm>
-              <a:off x="1604163" y="3635973"/>
-              <a:ext cx="2131696" cy="299165"/>
+              <a:off x="1541361" y="3635521"/>
+              <a:ext cx="2207802" cy="298717"/>
             </a:xfrm>
             <a:custGeom>
               <a:avLst/>
               <a:pathLst>
-                <a:path w="2131696" h="299165">
+                <a:path w="2207802" h="298717">
                   <a:moveTo>
-                    <a:pt x="0" y="299165"/>
+                    <a:pt x="0" y="298717"/>
                   </a:moveTo>
                   <a:lnTo>
-                    <a:pt x="1126219" y="141110"/>
+                    <a:pt x="1166427" y="140898"/>
                   </a:lnTo>
                   <a:lnTo>
-                    <a:pt x="1421131" y="99721"/>
+                    <a:pt x="1471868" y="99572"/>
                   </a:lnTo>
                   <a:lnTo>
-                    <a:pt x="1836785" y="41388"/>
+                    <a:pt x="1902362" y="41326"/>
                   </a:lnTo>
                   <a:lnTo>
-                    <a:pt x="2131696" y="0"/>
+                    <a:pt x="2207802" y="0"/>
                   </a:lnTo>
                 </a:path>
               </a:pathLst>
@@ -10337,7 +10337,7 @@
           </p:nvSpPr>
           <p:spPr>
             <a:xfrm>
-              <a:off x="3256166" y="3035901"/>
+              <a:off x="3269469" y="3036163"/>
               <a:ext cx="479694" cy="82021"/>
             </a:xfrm>
             <a:prstGeom prst="rect">
@@ -10444,7 +10444,7 @@
           </p:nvSpPr>
           <p:spPr>
             <a:xfrm rot="-5400000">
-              <a:off x="1140466" y="4150082"/>
+              <a:off x="1140466" y="4148805"/>
               <a:ext cx="141274" cy="72877"/>
             </a:xfrm>
             <a:prstGeom prst="rect">
@@ -10490,7 +10490,7 @@
           </p:nvSpPr>
           <p:spPr>
             <a:xfrm rot="-5400000">
-              <a:off x="1140466" y="3898754"/>
+              <a:off x="1140466" y="3897854"/>
               <a:ext cx="141274" cy="72877"/>
             </a:xfrm>
             <a:prstGeom prst="rect">
@@ -10536,7 +10536,7 @@
           </p:nvSpPr>
           <p:spPr>
             <a:xfrm rot="-5400000">
-              <a:off x="1140466" y="3647425"/>
+              <a:off x="1140466" y="3646902"/>
               <a:ext cx="141274" cy="72877"/>
             </a:xfrm>
             <a:prstGeom prst="rect">
@@ -10582,7 +10582,7 @@
           </p:nvSpPr>
           <p:spPr>
             <a:xfrm rot="-5400000">
-              <a:off x="1140466" y="3396097"/>
+              <a:off x="1140466" y="3395950"/>
               <a:ext cx="141274" cy="72877"/>
             </a:xfrm>
             <a:prstGeom prst="rect">
@@ -10628,7 +10628,7 @@
           </p:nvSpPr>
           <p:spPr>
             <a:xfrm rot="-5400000">
-              <a:off x="1140466" y="3144769"/>
+              <a:off x="1140466" y="3144999"/>
               <a:ext cx="141274" cy="72877"/>
             </a:xfrm>
             <a:prstGeom prst="rect">
@@ -10674,7 +10674,7 @@
           </p:nvSpPr>
           <p:spPr>
             <a:xfrm rot="-5400000">
-              <a:off x="1140466" y="2893441"/>
+              <a:off x="1140466" y="2894047"/>
               <a:ext cx="141274" cy="72877"/>
             </a:xfrm>
             <a:prstGeom prst="rect">
@@ -10720,7 +10720,7 @@
           </p:nvSpPr>
           <p:spPr>
             <a:xfrm>
-              <a:off x="1281564" y="4186521"/>
+              <a:off x="1281564" y="4185244"/>
               <a:ext cx="28468" cy="0"/>
             </a:xfrm>
             <a:custGeom>
@@ -10760,7 +10760,7 @@
           </p:nvSpPr>
           <p:spPr>
             <a:xfrm>
-              <a:off x="1281564" y="3935193"/>
+              <a:off x="1281564" y="3934292"/>
               <a:ext cx="28468" cy="0"/>
             </a:xfrm>
             <a:custGeom>
@@ -10800,7 +10800,7 @@
           </p:nvSpPr>
           <p:spPr>
             <a:xfrm>
-              <a:off x="1281564" y="3683864"/>
+              <a:off x="1281564" y="3683341"/>
               <a:ext cx="28468" cy="0"/>
             </a:xfrm>
             <a:custGeom>
@@ -10840,7 +10840,7 @@
           </p:nvSpPr>
           <p:spPr>
             <a:xfrm>
-              <a:off x="1281564" y="3432536"/>
+              <a:off x="1281564" y="3432389"/>
               <a:ext cx="28468" cy="0"/>
             </a:xfrm>
             <a:custGeom>
@@ -10880,7 +10880,7 @@
           </p:nvSpPr>
           <p:spPr>
             <a:xfrm>
-              <a:off x="1281564" y="3181208"/>
+              <a:off x="1281564" y="3181437"/>
               <a:ext cx="28468" cy="0"/>
             </a:xfrm>
             <a:custGeom>
@@ -10920,7 +10920,7 @@
           </p:nvSpPr>
           <p:spPr>
             <a:xfrm>
-              <a:off x="1281564" y="2929880"/>
+              <a:off x="1281564" y="2930486"/>
               <a:ext cx="28468" cy="0"/>
             </a:xfrm>
             <a:custGeom>
@@ -11000,7 +11000,7 @@
           </p:nvSpPr>
           <p:spPr>
             <a:xfrm>
-              <a:off x="1604163" y="4235062"/>
+              <a:off x="1541361" y="4235062"/>
               <a:ext cx="0" cy="28468"/>
             </a:xfrm>
             <a:custGeom>
@@ -11040,7 +11040,7 @@
           </p:nvSpPr>
           <p:spPr>
             <a:xfrm>
-              <a:off x="2314729" y="4235062"/>
+              <a:off x="2277295" y="4235062"/>
               <a:ext cx="0" cy="28468"/>
             </a:xfrm>
             <a:custGeom>
@@ -11080,7 +11080,7 @@
           </p:nvSpPr>
           <p:spPr>
             <a:xfrm>
-              <a:off x="3025295" y="4235062"/>
+              <a:off x="3013229" y="4235062"/>
               <a:ext cx="0" cy="28468"/>
             </a:xfrm>
             <a:custGeom>
@@ -11120,7 +11120,7 @@
           </p:nvSpPr>
           <p:spPr>
             <a:xfrm>
-              <a:off x="3735860" y="4235062"/>
+              <a:off x="3749163" y="4235062"/>
               <a:ext cx="0" cy="28468"/>
             </a:xfrm>
             <a:custGeom>
@@ -11160,7 +11160,7 @@
           </p:nvSpPr>
           <p:spPr>
             <a:xfrm>
-              <a:off x="1575909" y="4286305"/>
+              <a:off x="1513106" y="4286305"/>
               <a:ext cx="56509" cy="72877"/>
             </a:xfrm>
             <a:prstGeom prst="rect">
@@ -11206,7 +11206,7 @@
           </p:nvSpPr>
           <p:spPr>
             <a:xfrm>
-              <a:off x="2286474" y="4286305"/>
+              <a:off x="2249040" y="4286305"/>
               <a:ext cx="56509" cy="72877"/>
             </a:xfrm>
             <a:prstGeom prst="rect">
@@ -11252,7 +11252,7 @@
           </p:nvSpPr>
           <p:spPr>
             <a:xfrm>
-              <a:off x="2997040" y="4286305"/>
+              <a:off x="2984974" y="4286305"/>
               <a:ext cx="56509" cy="72877"/>
             </a:xfrm>
             <a:prstGeom prst="rect">
@@ -11298,7 +11298,7 @@
           </p:nvSpPr>
           <p:spPr>
             <a:xfrm>
-              <a:off x="3707605" y="4286305"/>
+              <a:off x="3720908" y="4286305"/>
               <a:ext cx="56509" cy="72877"/>
             </a:xfrm>
             <a:prstGeom prst="rect">
@@ -11462,7 +11462,7 @@
           </p:nvSpPr>
           <p:spPr>
             <a:xfrm>
-              <a:off x="4411027" y="3737198"/>
+              <a:off x="4404210" y="3736807"/>
               <a:ext cx="75116" cy="75116"/>
             </a:xfrm>
             <a:prstGeom prst="ellipse">
@@ -11488,7 +11488,7 @@
           </p:nvSpPr>
           <p:spPr>
             <a:xfrm>
-              <a:off x="4429706" y="3126957"/>
+              <a:off x="4275161" y="3126909"/>
               <a:ext cx="75116" cy="75116"/>
             </a:xfrm>
             <a:prstGeom prst="ellipse">
@@ -11514,7 +11514,7 @@
           </p:nvSpPr>
           <p:spPr>
             <a:xfrm>
-              <a:off x="4321319" y="3798241"/>
+              <a:off x="4468660" y="3800082"/>
               <a:ext cx="75116" cy="75116"/>
             </a:xfrm>
             <a:prstGeom prst="ellipse">
@@ -11540,7 +11540,7 @@
           </p:nvSpPr>
           <p:spPr>
             <a:xfrm>
-              <a:off x="4397735" y="3582217"/>
+              <a:off x="4273743" y="3585260"/>
               <a:ext cx="75116" cy="75116"/>
             </a:xfrm>
             <a:prstGeom prst="ellipse">
@@ -11566,7 +11566,7 @@
           </p:nvSpPr>
           <p:spPr>
             <a:xfrm>
-              <a:off x="4620686" y="3844278"/>
+              <a:off x="4441753" y="3844831"/>
               <a:ext cx="75116" cy="75116"/>
             </a:xfrm>
             <a:prstGeom prst="ellipse">
@@ -11592,7 +11592,7 @@
           </p:nvSpPr>
           <p:spPr>
             <a:xfrm>
-              <a:off x="4478135" y="3046242"/>
+              <a:off x="4636501" y="3044110"/>
               <a:ext cx="75116" cy="75116"/>
             </a:xfrm>
             <a:prstGeom prst="ellipse">
@@ -11618,7 +11618,7 @@
           </p:nvSpPr>
           <p:spPr>
             <a:xfrm>
-              <a:off x="4295705" y="3007614"/>
+              <a:off x="4563298" y="3007614"/>
               <a:ext cx="75116" cy="75116"/>
             </a:xfrm>
             <a:prstGeom prst="ellipse">
@@ -11644,7 +11644,7 @@
           </p:nvSpPr>
           <p:spPr>
             <a:xfrm>
-              <a:off x="4273743" y="3342268"/>
+              <a:off x="4284315" y="3341324"/>
               <a:ext cx="75116" cy="75116"/>
             </a:xfrm>
             <a:prstGeom prst="ellipse">
@@ -11670,7 +11670,7 @@
           </p:nvSpPr>
           <p:spPr>
             <a:xfrm>
-              <a:off x="4299777" y="3977679"/>
+              <a:off x="4591629" y="3980589"/>
               <a:ext cx="75116" cy="75116"/>
             </a:xfrm>
             <a:prstGeom prst="ellipse">
@@ -11696,7 +11696,7 @@
           </p:nvSpPr>
           <p:spPr>
             <a:xfrm>
-              <a:off x="4379808" y="3636036"/>
+              <a:off x="4545224" y="3636324"/>
               <a:ext cx="75116" cy="75116"/>
             </a:xfrm>
             <a:prstGeom prst="ellipse">
@@ -11722,7 +11722,7 @@
           </p:nvSpPr>
           <p:spPr>
             <a:xfrm>
-              <a:off x="5258165" y="3884996"/>
+              <a:off x="5112777" y="3885910"/>
               <a:ext cx="75116" cy="75116"/>
             </a:xfrm>
             <a:prstGeom prst="ellipse">
@@ -11748,7 +11748,7 @@
           </p:nvSpPr>
           <p:spPr>
             <a:xfrm>
-              <a:off x="5079730" y="3423438"/>
+              <a:off x="5001709" y="3423838"/>
               <a:ext cx="75116" cy="75116"/>
             </a:xfrm>
             <a:prstGeom prst="ellipse">
@@ -11774,7 +11774,7 @@
           </p:nvSpPr>
           <p:spPr>
             <a:xfrm>
-              <a:off x="5344832" y="3801575"/>
+              <a:off x="5216486" y="3805472"/>
               <a:ext cx="75116" cy="75116"/>
             </a:xfrm>
             <a:prstGeom prst="ellipse">
@@ -11800,7 +11800,7 @@
           </p:nvSpPr>
           <p:spPr>
             <a:xfrm>
-              <a:off x="5190479" y="4017626"/>
+              <a:off x="5054864" y="4018284"/>
               <a:ext cx="75116" cy="75116"/>
             </a:xfrm>
             <a:prstGeom prst="ellipse">
@@ -11826,7 +11826,7 @@
           </p:nvSpPr>
           <p:spPr>
             <a:xfrm>
-              <a:off x="5151532" y="3698071"/>
+              <a:off x="5231967" y="3700273"/>
               <a:ext cx="75116" cy="75116"/>
             </a:xfrm>
             <a:prstGeom prst="ellipse">
@@ -11852,7 +11852,7 @@
           </p:nvSpPr>
           <p:spPr>
             <a:xfrm>
-              <a:off x="5130895" y="3397949"/>
+              <a:off x="4990632" y="3398654"/>
               <a:ext cx="75116" cy="75116"/>
             </a:xfrm>
             <a:prstGeom prst="ellipse">
@@ -11878,7 +11878,7 @@
           </p:nvSpPr>
           <p:spPr>
             <a:xfrm>
-              <a:off x="4985577" y="4089841"/>
+              <a:off x="5248256" y="4092915"/>
               <a:ext cx="75116" cy="75116"/>
             </a:xfrm>
             <a:prstGeom prst="ellipse">
@@ -11904,7 +11904,7 @@
           </p:nvSpPr>
           <p:spPr>
             <a:xfrm>
-              <a:off x="5235068" y="3990364"/>
+              <a:off x="5126288" y="3993844"/>
               <a:ext cx="75116" cy="75116"/>
             </a:xfrm>
             <a:prstGeom prst="ellipse">
@@ -11930,7 +11930,7 @@
           </p:nvSpPr>
           <p:spPr>
             <a:xfrm>
-              <a:off x="5064207" y="3871674"/>
+              <a:off x="5140898" y="3871528"/>
               <a:ext cx="75116" cy="75116"/>
             </a:xfrm>
             <a:prstGeom prst="ellipse">
@@ -11956,7 +11956,7 @@
           </p:nvSpPr>
           <p:spPr>
             <a:xfrm>
-              <a:off x="5132911" y="4085088"/>
+              <a:off x="5188589" y="4086268"/>
               <a:ext cx="75116" cy="75116"/>
             </a:xfrm>
             <a:prstGeom prst="ellipse">
@@ -11982,7 +11982,7 @@
           </p:nvSpPr>
           <p:spPr>
             <a:xfrm>
-              <a:off x="5025601" y="3983993"/>
+              <a:off x="4992957" y="3984530"/>
               <a:ext cx="75116" cy="75116"/>
             </a:xfrm>
             <a:prstGeom prst="ellipse">
@@ -12008,7 +12008,7 @@
           </p:nvSpPr>
           <p:spPr>
             <a:xfrm>
-              <a:off x="5099852" y="4083994"/>
+              <a:off x="5008251" y="4088203"/>
               <a:ext cx="75116" cy="75116"/>
             </a:xfrm>
             <a:prstGeom prst="ellipse">
@@ -12034,7 +12034,7 @@
           </p:nvSpPr>
           <p:spPr>
             <a:xfrm>
-              <a:off x="5173167" y="3834235"/>
+              <a:off x="5253728" y="3834345"/>
               <a:ext cx="75116" cy="75116"/>
             </a:xfrm>
             <a:prstGeom prst="ellipse">
@@ -12060,7 +12060,7 @@
           </p:nvSpPr>
           <p:spPr>
             <a:xfrm>
-              <a:off x="5152258" y="3784502"/>
+              <a:off x="5174376" y="3787765"/>
               <a:ext cx="75116" cy="75116"/>
             </a:xfrm>
             <a:prstGeom prst="ellipse">
@@ -12086,7 +12086,7 @@
           </p:nvSpPr>
           <p:spPr>
             <a:xfrm>
-              <a:off x="5124763" y="3561751"/>
+              <a:off x="5085345" y="3563031"/>
               <a:ext cx="75116" cy="75116"/>
             </a:xfrm>
             <a:prstGeom prst="ellipse">
@@ -12112,7 +12112,7 @@
           </p:nvSpPr>
           <p:spPr>
             <a:xfrm>
-              <a:off x="4973254" y="3597311"/>
+              <a:off x="5236112" y="3597299"/>
               <a:ext cx="75116" cy="75116"/>
             </a:xfrm>
             <a:prstGeom prst="ellipse">
@@ -12138,7 +12138,7 @@
           </p:nvSpPr>
           <p:spPr>
             <a:xfrm>
-              <a:off x="5150188" y="3882876"/>
+              <a:off x="5281683" y="3884742"/>
               <a:ext cx="75116" cy="75116"/>
             </a:xfrm>
             <a:prstGeom prst="ellipse">
@@ -12164,7 +12164,7 @@
           </p:nvSpPr>
           <p:spPr>
             <a:xfrm>
-              <a:off x="5212629" y="4140843"/>
+              <a:off x="5148202" y="4140843"/>
               <a:ext cx="75116" cy="75116"/>
             </a:xfrm>
             <a:prstGeom prst="ellipse">
@@ -12190,7 +12190,7 @@
           </p:nvSpPr>
           <p:spPr>
             <a:xfrm>
-              <a:off x="5658854" y="3873923"/>
+              <a:off x="6064563" y="3877066"/>
               <a:ext cx="75116" cy="75116"/>
             </a:xfrm>
             <a:prstGeom prst="ellipse">
@@ -12216,7 +12216,7 @@
           </p:nvSpPr>
           <p:spPr>
             <a:xfrm>
-              <a:off x="6045588" y="3933151"/>
+              <a:off x="5879775" y="3934457"/>
               <a:ext cx="75116" cy="75116"/>
             </a:xfrm>
             <a:prstGeom prst="ellipse">
@@ -12242,7 +12242,7 @@
           </p:nvSpPr>
           <p:spPr>
             <a:xfrm>
-              <a:off x="5777008" y="3909454"/>
+              <a:off x="6049072" y="3912101"/>
               <a:ext cx="75116" cy="75116"/>
             </a:xfrm>
             <a:prstGeom prst="ellipse">
@@ -12268,7 +12268,7 @@
           </p:nvSpPr>
           <p:spPr>
             <a:xfrm>
-              <a:off x="5768977" y="3961161"/>
+              <a:off x="5857557" y="3959656"/>
               <a:ext cx="75116" cy="75116"/>
             </a:xfrm>
             <a:prstGeom prst="ellipse">
@@ -12294,7 +12294,7 @@
           </p:nvSpPr>
           <p:spPr>
             <a:xfrm>
-              <a:off x="5914398" y="3184267"/>
+              <a:off x="5961486" y="3182524"/>
               <a:ext cx="75116" cy="75116"/>
             </a:xfrm>
             <a:prstGeom prst="ellipse">
@@ -12320,7 +12320,7 @@
           </p:nvSpPr>
           <p:spPr>
             <a:xfrm>
-              <a:off x="5846686" y="3223788"/>
+              <a:off x="6041989" y="3226241"/>
               <a:ext cx="75116" cy="75116"/>
             </a:xfrm>
             <a:prstGeom prst="ellipse">
@@ -12346,7 +12346,7 @@
           </p:nvSpPr>
           <p:spPr>
             <a:xfrm>
-              <a:off x="5720005" y="3717655"/>
+              <a:off x="5849768" y="3719191"/>
               <a:ext cx="75116" cy="75116"/>
             </a:xfrm>
             <a:prstGeom prst="ellipse">
@@ -12372,7 +12372,7 @@
           </p:nvSpPr>
           <p:spPr>
             <a:xfrm>
-              <a:off x="5763783" y="3864505"/>
+              <a:off x="5675524" y="3867412"/>
               <a:ext cx="75116" cy="75116"/>
             </a:xfrm>
             <a:prstGeom prst="ellipse">
@@ -12398,7 +12398,7 @@
           </p:nvSpPr>
           <p:spPr>
             <a:xfrm>
-              <a:off x="5826362" y="3972841"/>
+              <a:off x="6033738" y="3974445"/>
               <a:ext cx="75116" cy="75116"/>
             </a:xfrm>
             <a:prstGeom prst="ellipse">
@@ -12424,7 +12424,7 @@
           </p:nvSpPr>
           <p:spPr>
             <a:xfrm>
-              <a:off x="5698878" y="3687917"/>
+              <a:off x="6006040" y="3688083"/>
               <a:ext cx="75116" cy="75116"/>
             </a:xfrm>
             <a:prstGeom prst="ellipse">
@@ -12450,7 +12450,7 @@
           </p:nvSpPr>
           <p:spPr>
             <a:xfrm>
-              <a:off x="5851134" y="3493026"/>
+              <a:off x="6024727" y="3495152"/>
               <a:ext cx="75116" cy="75116"/>
             </a:xfrm>
             <a:prstGeom prst="ellipse">
@@ -12476,7 +12476,7 @@
           </p:nvSpPr>
           <p:spPr>
             <a:xfrm>
-              <a:off x="5751525" y="4023024"/>
+              <a:off x="5860743" y="4023530"/>
               <a:ext cx="75116" cy="75116"/>
             </a:xfrm>
             <a:prstGeom prst="ellipse">
@@ -12502,7 +12502,7 @@
           </p:nvSpPr>
           <p:spPr>
             <a:xfrm>
-              <a:off x="6007451" y="3351788"/>
+              <a:off x="5864260" y="3351904"/>
               <a:ext cx="75116" cy="75116"/>
             </a:xfrm>
             <a:prstGeom prst="ellipse">
@@ -12528,7 +12528,7 @@
           </p:nvSpPr>
           <p:spPr>
             <a:xfrm>
-              <a:off x="5887273" y="3669803"/>
+              <a:off x="5985685" y="3669566"/>
               <a:ext cx="75116" cy="75116"/>
             </a:xfrm>
             <a:prstGeom prst="ellipse">
@@ -12554,7 +12554,7 @@
           </p:nvSpPr>
           <p:spPr>
             <a:xfrm>
-              <a:off x="5984496" y="3724058"/>
+              <a:off x="5769969" y="3722654"/>
               <a:ext cx="75116" cy="75116"/>
             </a:xfrm>
             <a:prstGeom prst="ellipse">
@@ -12580,7 +12580,7 @@
           </p:nvSpPr>
           <p:spPr>
             <a:xfrm>
-              <a:off x="5962785" y="3965275"/>
+              <a:off x="5889081" y="3966469"/>
               <a:ext cx="75116" cy="75116"/>
             </a:xfrm>
             <a:prstGeom prst="ellipse">
@@ -12606,7 +12606,7 @@
           </p:nvSpPr>
           <p:spPr>
             <a:xfrm>
-              <a:off x="5990560" y="3494190"/>
+              <a:off x="5738937" y="3494350"/>
               <a:ext cx="75116" cy="75116"/>
             </a:xfrm>
             <a:prstGeom prst="ellipse">
@@ -12632,7 +12632,7 @@
           </p:nvSpPr>
           <p:spPr>
             <a:xfrm>
-              <a:off x="5696518" y="3710589"/>
+              <a:off x="5851948" y="3708922"/>
               <a:ext cx="75116" cy="75116"/>
             </a:xfrm>
             <a:prstGeom prst="ellipse">
@@ -12658,7 +12658,7 @@
           </p:nvSpPr>
           <p:spPr>
             <a:xfrm>
-              <a:off x="5825983" y="3469982"/>
+              <a:off x="6037587" y="3470957"/>
               <a:ext cx="75116" cy="75116"/>
             </a:xfrm>
             <a:prstGeom prst="ellipse">
@@ -12684,7 +12684,7 @@
           </p:nvSpPr>
           <p:spPr>
             <a:xfrm>
-              <a:off x="5772157" y="3681591"/>
+              <a:off x="5842795" y="3681677"/>
               <a:ext cx="75116" cy="75116"/>
             </a:xfrm>
             <a:prstGeom prst="ellipse">
@@ -12710,7 +12710,7 @@
           </p:nvSpPr>
           <p:spPr>
             <a:xfrm>
-              <a:off x="6541614" y="3826419"/>
+              <a:off x="6400640" y="3826807"/>
               <a:ext cx="75116" cy="75116"/>
             </a:xfrm>
             <a:prstGeom prst="ellipse">
@@ -12736,7 +12736,7 @@
           </p:nvSpPr>
           <p:spPr>
             <a:xfrm>
-              <a:off x="6678280" y="3910447"/>
+              <a:off x="6540231" y="3913129"/>
               <a:ext cx="75116" cy="75116"/>
             </a:xfrm>
             <a:prstGeom prst="ellipse">
@@ -12762,7 +12762,7 @@
           </p:nvSpPr>
           <p:spPr>
             <a:xfrm>
-              <a:off x="6770769" y="3694570"/>
+              <a:off x="6530764" y="3697167"/>
               <a:ext cx="75116" cy="75116"/>
             </a:xfrm>
             <a:prstGeom prst="ellipse">
@@ -12788,7 +12788,7 @@
           </p:nvSpPr>
           <p:spPr>
             <a:xfrm>
-              <a:off x="6656111" y="3500771"/>
+              <a:off x="6770769" y="3503339"/>
               <a:ext cx="75116" cy="75116"/>
             </a:xfrm>
             <a:prstGeom prst="ellipse">
@@ -12814,7 +12814,7 @@
           </p:nvSpPr>
           <p:spPr>
             <a:xfrm>
-              <a:off x="6755202" y="3673832"/>
+              <a:off x="6621482" y="3675221"/>
               <a:ext cx="75116" cy="75116"/>
             </a:xfrm>
             <a:prstGeom prst="ellipse">
@@ -12840,7 +12840,7 @@
           </p:nvSpPr>
           <p:spPr>
             <a:xfrm>
-              <a:off x="6744258" y="3708655"/>
+              <a:off x="6396793" y="3711581"/>
               <a:ext cx="75116" cy="75116"/>
             </a:xfrm>
             <a:prstGeom prst="ellipse">
@@ -12866,7 +12866,7 @@
           </p:nvSpPr>
           <p:spPr>
             <a:xfrm>
-              <a:off x="6480226" y="3837461"/>
+              <a:off x="6438260" y="3840262"/>
               <a:ext cx="75116" cy="75116"/>
             </a:xfrm>
             <a:prstGeom prst="ellipse">
@@ -12892,7 +12892,7 @@
           </p:nvSpPr>
           <p:spPr>
             <a:xfrm>
-              <a:off x="6737024" y="3745166"/>
+              <a:off x="6445790" y="3744546"/>
               <a:ext cx="75116" cy="75116"/>
             </a:xfrm>
             <a:prstGeom prst="ellipse">
@@ -12918,7 +12918,7 @@
           </p:nvSpPr>
           <p:spPr>
             <a:xfrm>
-              <a:off x="6740578" y="3838080"/>
+              <a:off x="6479355" y="3841137"/>
               <a:ext cx="75116" cy="75116"/>
             </a:xfrm>
             <a:prstGeom prst="ellipse">
@@ -12944,7 +12944,7 @@
           </p:nvSpPr>
           <p:spPr>
             <a:xfrm>
-              <a:off x="6652160" y="3760933"/>
+              <a:off x="6497728" y="3764453"/>
               <a:ext cx="75116" cy="75116"/>
             </a:xfrm>
             <a:prstGeom prst="ellipse">
@@ -12970,7 +12970,7 @@
           </p:nvSpPr>
           <p:spPr>
             <a:xfrm>
-              <a:off x="6543457" y="3537762"/>
+              <a:off x="6679865" y="3539220"/>
               <a:ext cx="75116" cy="75116"/>
             </a:xfrm>
             <a:prstGeom prst="ellipse">
@@ -12996,7 +12996,7 @@
           </p:nvSpPr>
           <p:spPr>
             <a:xfrm>
-              <a:off x="6761080" y="3277664"/>
+              <a:off x="6602195" y="3277680"/>
               <a:ext cx="75116" cy="75116"/>
             </a:xfrm>
             <a:prstGeom prst="ellipse">
@@ -13022,7 +13022,7 @@
           </p:nvSpPr>
           <p:spPr>
             <a:xfrm>
-              <a:off x="6668407" y="3851932"/>
+              <a:off x="6726237" y="3854100"/>
               <a:ext cx="75116" cy="75116"/>
             </a:xfrm>
             <a:prstGeom prst="ellipse">
@@ -13048,7 +13048,7 @@
           </p:nvSpPr>
           <p:spPr>
             <a:xfrm>
-              <a:off x="6363929" y="3994515"/>
+              <a:off x="6544038" y="3998796"/>
               <a:ext cx="75116" cy="75116"/>
             </a:xfrm>
             <a:prstGeom prst="ellipse">
@@ -13074,7 +13074,7 @@
           </p:nvSpPr>
           <p:spPr>
             <a:xfrm>
-              <a:off x="6547970" y="3965832"/>
+              <a:off x="6690107" y="3965479"/>
               <a:ext cx="75116" cy="75116"/>
             </a:xfrm>
             <a:prstGeom prst="ellipse">
@@ -13100,7 +13100,7 @@
           </p:nvSpPr>
           <p:spPr>
             <a:xfrm>
-              <a:off x="6607713" y="3739804"/>
+              <a:off x="6614442" y="3742224"/>
               <a:ext cx="75116" cy="75116"/>
             </a:xfrm>
             <a:prstGeom prst="ellipse">
@@ -13126,7 +13126,7 @@
           </p:nvSpPr>
           <p:spPr>
             <a:xfrm>
-              <a:off x="6635359" y="3905497"/>
+              <a:off x="6539709" y="3908464"/>
               <a:ext cx="75116" cy="75116"/>
             </a:xfrm>
             <a:prstGeom prst="ellipse">
@@ -13152,7 +13152,7 @@
           </p:nvSpPr>
           <p:spPr>
             <a:xfrm>
-              <a:off x="6531156" y="3806139"/>
+              <a:off x="6435205" y="3808542"/>
               <a:ext cx="75116" cy="75116"/>
             </a:xfrm>
             <a:prstGeom prst="ellipse">
@@ -13178,7 +13178,7 @@
           </p:nvSpPr>
           <p:spPr>
             <a:xfrm>
-              <a:off x="6708635" y="3349827"/>
+              <a:off x="6505952" y="3350352"/>
               <a:ext cx="75116" cy="75116"/>
             </a:xfrm>
             <a:prstGeom prst="ellipse">
@@ -13204,7 +13204,7 @@
           </p:nvSpPr>
           <p:spPr>
             <a:xfrm>
-              <a:off x="6572373" y="3648731"/>
+              <a:off x="6733901" y="3649754"/>
               <a:ext cx="75116" cy="75116"/>
             </a:xfrm>
             <a:prstGeom prst="ellipse">
@@ -13230,7 +13230,7 @@
           </p:nvSpPr>
           <p:spPr>
             <a:xfrm>
-              <a:off x="6727140" y="3732587"/>
+              <a:off x="6589889" y="3730531"/>
               <a:ext cx="75116" cy="75116"/>
             </a:xfrm>
             <a:prstGeom prst="ellipse">
@@ -13256,7 +13256,7 @@
           </p:nvSpPr>
           <p:spPr>
             <a:xfrm>
-              <a:off x="6446074" y="3681770"/>
+              <a:off x="6547056" y="3681613"/>
               <a:ext cx="75116" cy="75116"/>
             </a:xfrm>
             <a:prstGeom prst="ellipse">
@@ -13282,7 +13282,7 @@
           </p:nvSpPr>
           <p:spPr>
             <a:xfrm>
-              <a:off x="6492322" y="3959340"/>
+              <a:off x="6670976" y="3962693"/>
               <a:ext cx="75116" cy="75116"/>
             </a:xfrm>
             <a:prstGeom prst="ellipse">
@@ -13308,7 +13308,7 @@
           </p:nvSpPr>
           <p:spPr>
             <a:xfrm>
-              <a:off x="6664427" y="3642262"/>
+              <a:off x="6463249" y="3641972"/>
               <a:ext cx="75116" cy="75116"/>
             </a:xfrm>
             <a:prstGeom prst="ellipse">
@@ -13334,42 +13334,42 @@
           </p:nvSpPr>
           <p:spPr>
             <a:xfrm>
-              <a:off x="4475588" y="3559843"/>
-              <a:ext cx="2129999" cy="334154"/>
+              <a:off x="4473138" y="3560518"/>
+              <a:ext cx="2156479" cy="334746"/>
             </a:xfrm>
             <a:custGeom>
               <a:avLst/>
               <a:pathLst>
-                <a:path w="2129999" h="334154">
+                <a:path w="2156479" h="334746">
                   <a:moveTo>
                     <a:pt x="0" y="0"/>
                   </a:moveTo>
                   <a:lnTo>
-                    <a:pt x="1125323" y="97496"/>
+                    <a:pt x="1139313" y="97669"/>
                   </a:lnTo>
                   <a:lnTo>
-                    <a:pt x="1419999" y="111681"/>
+                    <a:pt x="1437653" y="111879"/>
                   </a:lnTo>
                   <a:lnTo>
-                    <a:pt x="1835323" y="122085"/>
+                    <a:pt x="1858139" y="122301"/>
                   </a:lnTo>
                   <a:lnTo>
-                    <a:pt x="2129999" y="124130"/>
+                    <a:pt x="2156479" y="124350"/>
                   </a:lnTo>
                   <a:lnTo>
-                    <a:pt x="2129999" y="334154"/>
+                    <a:pt x="2156479" y="334746"/>
                   </a:lnTo>
                   <a:lnTo>
-                    <a:pt x="1835323" y="308058"/>
+                    <a:pt x="1858139" y="308603"/>
                   </a:lnTo>
                   <a:lnTo>
-                    <a:pt x="1419999" y="278798"/>
+                    <a:pt x="1437653" y="279292"/>
                   </a:lnTo>
                   <a:lnTo>
-                    <a:pt x="1125323" y="264842"/>
+                    <a:pt x="1139313" y="265310"/>
                   </a:lnTo>
                   <a:lnTo>
-                    <a:pt x="0" y="254870"/>
+                    <a:pt x="0" y="255321"/>
                   </a:lnTo>
                   <a:close/>
                 </a:path>
@@ -13395,27 +13395,27 @@
           </p:nvSpPr>
           <p:spPr>
             <a:xfrm>
-              <a:off x="4475588" y="3559843"/>
-              <a:ext cx="2129999" cy="124130"/>
+              <a:off x="4473138" y="3560518"/>
+              <a:ext cx="2156479" cy="124350"/>
             </a:xfrm>
             <a:custGeom>
               <a:avLst/>
               <a:pathLst>
-                <a:path w="2129999" h="124130">
+                <a:path w="2156479" h="124350">
                   <a:moveTo>
                     <a:pt x="0" y="0"/>
                   </a:moveTo>
                   <a:lnTo>
-                    <a:pt x="1125323" y="97496"/>
+                    <a:pt x="1139313" y="97669"/>
                   </a:lnTo>
                   <a:lnTo>
-                    <a:pt x="1419999" y="111681"/>
+                    <a:pt x="1437653" y="111879"/>
                   </a:lnTo>
                   <a:lnTo>
-                    <a:pt x="1835323" y="122085"/>
+                    <a:pt x="1858139" y="122301"/>
                   </a:lnTo>
                   <a:lnTo>
-                    <a:pt x="2129999" y="124130"/>
+                    <a:pt x="2156479" y="124350"/>
                   </a:lnTo>
                 </a:path>
               </a:pathLst>
@@ -13435,24 +13435,24 @@
           </p:nvSpPr>
           <p:spPr>
             <a:xfrm>
-              <a:off x="4475588" y="3814713"/>
-              <a:ext cx="2129999" cy="79284"/>
+              <a:off x="4473138" y="3815839"/>
+              <a:ext cx="2156479" cy="79425"/>
             </a:xfrm>
             <a:custGeom>
               <a:avLst/>
               <a:pathLst>
-                <a:path w="2129999" h="79284">
+                <a:path w="2156479" h="79425">
                   <a:moveTo>
-                    <a:pt x="2129999" y="79284"/>
+                    <a:pt x="2156479" y="79425"/>
                   </a:moveTo>
                   <a:lnTo>
-                    <a:pt x="1835323" y="53188"/>
+                    <a:pt x="1858139" y="53282"/>
                   </a:lnTo>
                   <a:lnTo>
-                    <a:pt x="1419999" y="23928"/>
+                    <a:pt x="1437653" y="23971"/>
                   </a:lnTo>
                   <a:lnTo>
-                    <a:pt x="1125323" y="9972"/>
+                    <a:pt x="1139313" y="9989"/>
                   </a:lnTo>
                   <a:lnTo>
                     <a:pt x="0" y="0"/>
@@ -13475,27 +13475,27 @@
           </p:nvSpPr>
           <p:spPr>
             <a:xfrm>
-              <a:off x="4475588" y="3687278"/>
-              <a:ext cx="2129999" cy="101707"/>
+              <a:off x="4473138" y="3688179"/>
+              <a:ext cx="2156479" cy="101887"/>
             </a:xfrm>
             <a:custGeom>
               <a:avLst/>
               <a:pathLst>
-                <a:path w="2129999" h="101707">
+                <a:path w="2156479" h="101887">
                   <a:moveTo>
                     <a:pt x="0" y="0"/>
                   </a:moveTo>
                   <a:lnTo>
-                    <a:pt x="1125323" y="53734"/>
+                    <a:pt x="1139313" y="53829"/>
                   </a:lnTo>
                   <a:lnTo>
-                    <a:pt x="1419999" y="67805"/>
+                    <a:pt x="1437653" y="67925"/>
                   </a:lnTo>
                   <a:lnTo>
-                    <a:pt x="1835323" y="87636"/>
+                    <a:pt x="1858139" y="87791"/>
                   </a:lnTo>
                   <a:lnTo>
-                    <a:pt x="2129999" y="101707"/>
+                    <a:pt x="2156479" y="101887"/>
                   </a:lnTo>
                 </a:path>
               </a:pathLst>
@@ -13524,7 +13524,7 @@
           </p:nvSpPr>
           <p:spPr>
             <a:xfrm>
-              <a:off x="6125894" y="3036711"/>
+              <a:off x="6149924" y="3036679"/>
               <a:ext cx="479694" cy="82021"/>
             </a:xfrm>
             <a:prstGeom prst="rect">
@@ -13631,7 +13631,7 @@
           </p:nvSpPr>
           <p:spPr>
             <a:xfrm>
-              <a:off x="4157982" y="4069412"/>
+              <a:off x="4157982" y="4070989"/>
               <a:ext cx="28468" cy="0"/>
             </a:xfrm>
             <a:custGeom>
@@ -13671,7 +13671,7 @@
           </p:nvSpPr>
           <p:spPr>
             <a:xfrm>
-              <a:off x="4157982" y="3838494"/>
+              <a:off x="4157982" y="3839663"/>
               <a:ext cx="28468" cy="0"/>
             </a:xfrm>
             <a:custGeom>
@@ -13711,7 +13711,7 @@
           </p:nvSpPr>
           <p:spPr>
             <a:xfrm>
-              <a:off x="4157982" y="3607577"/>
+              <a:off x="4157982" y="3608337"/>
               <a:ext cx="28468" cy="0"/>
             </a:xfrm>
             <a:custGeom>
@@ -13751,7 +13751,7 @@
           </p:nvSpPr>
           <p:spPr>
             <a:xfrm>
-              <a:off x="4157982" y="3376659"/>
+              <a:off x="4157982" y="3377011"/>
               <a:ext cx="28468" cy="0"/>
             </a:xfrm>
             <a:custGeom>
@@ -13791,7 +13791,7 @@
           </p:nvSpPr>
           <p:spPr>
             <a:xfrm>
-              <a:off x="4157982" y="3145741"/>
+              <a:off x="4157982" y="3145684"/>
               <a:ext cx="28468" cy="0"/>
             </a:xfrm>
             <a:custGeom>
@@ -13831,7 +13831,7 @@
           </p:nvSpPr>
           <p:spPr>
             <a:xfrm>
-              <a:off x="4157982" y="2914823"/>
+              <a:off x="4157982" y="2914358"/>
               <a:ext cx="28468" cy="0"/>
             </a:xfrm>
             <a:custGeom>
@@ -13911,7 +13911,7 @@
           </p:nvSpPr>
           <p:spPr>
             <a:xfrm>
-              <a:off x="4475588" y="4235062"/>
+              <a:off x="4473138" y="4235062"/>
               <a:ext cx="0" cy="28468"/>
             </a:xfrm>
             <a:custGeom>
@@ -13951,7 +13951,7 @@
           </p:nvSpPr>
           <p:spPr>
             <a:xfrm>
-              <a:off x="5185588" y="4235062"/>
+              <a:off x="5191965" y="4235062"/>
               <a:ext cx="0" cy="28468"/>
             </a:xfrm>
             <a:custGeom>
@@ -13991,7 +13991,7 @@
           </p:nvSpPr>
           <p:spPr>
             <a:xfrm>
-              <a:off x="5895588" y="4235062"/>
+              <a:off x="5910791" y="4235062"/>
               <a:ext cx="0" cy="28468"/>
             </a:xfrm>
             <a:custGeom>
@@ -14031,7 +14031,7 @@
           </p:nvSpPr>
           <p:spPr>
             <a:xfrm>
-              <a:off x="6605588" y="4235062"/>
+              <a:off x="6629618" y="4235062"/>
               <a:ext cx="0" cy="28468"/>
             </a:xfrm>
             <a:custGeom>
@@ -14071,7 +14071,7 @@
           </p:nvSpPr>
           <p:spPr>
             <a:xfrm>
-              <a:off x="4447333" y="4286305"/>
+              <a:off x="4444883" y="4286305"/>
               <a:ext cx="56509" cy="72877"/>
             </a:xfrm>
             <a:prstGeom prst="rect">
@@ -14117,7 +14117,7 @@
           </p:nvSpPr>
           <p:spPr>
             <a:xfrm>
-              <a:off x="5157333" y="4286305"/>
+              <a:off x="5163710" y="4286305"/>
               <a:ext cx="56509" cy="72877"/>
             </a:xfrm>
             <a:prstGeom prst="rect">
@@ -14163,7 +14163,7 @@
           </p:nvSpPr>
           <p:spPr>
             <a:xfrm>
-              <a:off x="5867333" y="4286305"/>
+              <a:off x="5882536" y="4286305"/>
               <a:ext cx="56509" cy="72877"/>
             </a:xfrm>
             <a:prstGeom prst="rect">
@@ -14209,7 +14209,7 @@
           </p:nvSpPr>
           <p:spPr>
             <a:xfrm>
-              <a:off x="6577333" y="4286305"/>
+              <a:off x="6601363" y="4286305"/>
               <a:ext cx="56509" cy="72877"/>
             </a:xfrm>
             <a:prstGeom prst="rect">
@@ -14327,7 +14327,7 @@
           </p:nvSpPr>
           <p:spPr>
             <a:xfrm>
-              <a:off x="1464516" y="5488996"/>
+              <a:off x="1448451" y="5490960"/>
               <a:ext cx="75116" cy="75116"/>
             </a:xfrm>
             <a:prstGeom prst="ellipse">
@@ -14353,7 +14353,7 @@
           </p:nvSpPr>
           <p:spPr>
             <a:xfrm>
-              <a:off x="1720126" y="5374046"/>
+              <a:off x="1673464" y="5372680"/>
               <a:ext cx="75116" cy="75116"/>
             </a:xfrm>
             <a:prstGeom prst="ellipse">
@@ -14379,7 +14379,7 @@
           </p:nvSpPr>
           <p:spPr>
             <a:xfrm>
-              <a:off x="1703645" y="5443067"/>
+              <a:off x="1397325" y="5445849"/>
               <a:ext cx="75116" cy="75116"/>
             </a:xfrm>
             <a:prstGeom prst="ellipse">
@@ -14405,7 +14405,7 @@
           </p:nvSpPr>
           <p:spPr>
             <a:xfrm>
-              <a:off x="1539463" y="5606865"/>
+              <a:off x="1591276" y="5607334"/>
               <a:ext cx="75116" cy="75116"/>
             </a:xfrm>
             <a:prstGeom prst="ellipse">
@@ -14431,7 +14431,7 @@
           </p:nvSpPr>
           <p:spPr>
             <a:xfrm>
-              <a:off x="1425649" y="5751103"/>
+              <a:off x="1523100" y="5752520"/>
               <a:ext cx="75116" cy="75116"/>
             </a:xfrm>
             <a:prstGeom prst="ellipse">
@@ -14457,7 +14457,7 @@
           </p:nvSpPr>
           <p:spPr>
             <a:xfrm>
-              <a:off x="1581082" y="5466977"/>
+              <a:off x="1615044" y="5464120"/>
               <a:ext cx="75116" cy="75116"/>
             </a:xfrm>
             <a:prstGeom prst="ellipse">
@@ -14483,7 +14483,7 @@
           </p:nvSpPr>
           <p:spPr>
             <a:xfrm>
-              <a:off x="1431380" y="5579052"/>
+              <a:off x="1419527" y="5580273"/>
               <a:ext cx="75116" cy="75116"/>
             </a:xfrm>
             <a:prstGeom prst="ellipse">
@@ -14509,7 +14509,7 @@
           </p:nvSpPr>
           <p:spPr>
             <a:xfrm>
-              <a:off x="1397325" y="5612819"/>
+              <a:off x="1581535" y="5611978"/>
               <a:ext cx="75116" cy="75116"/>
             </a:xfrm>
             <a:prstGeom prst="ellipse">
@@ -14535,7 +14535,7 @@
           </p:nvSpPr>
           <p:spPr>
             <a:xfrm>
-              <a:off x="1434374" y="5699892"/>
+              <a:off x="1666629" y="5700283"/>
               <a:ext cx="75116" cy="75116"/>
             </a:xfrm>
             <a:prstGeom prst="ellipse">
@@ -14561,7 +14561,7 @@
           </p:nvSpPr>
           <p:spPr>
             <a:xfrm>
-              <a:off x="1540714" y="5428880"/>
+              <a:off x="1461244" y="5426360"/>
               <a:ext cx="75116" cy="75116"/>
             </a:xfrm>
             <a:prstGeom prst="ellipse">
@@ -14587,7 +14587,7 @@
           </p:nvSpPr>
           <p:spPr>
             <a:xfrm>
-              <a:off x="2302308" y="5591695"/>
+              <a:off x="2334857" y="5590731"/>
               <a:ext cx="75116" cy="75116"/>
             </a:xfrm>
             <a:prstGeom prst="ellipse">
@@ -14613,7 +14613,7 @@
           </p:nvSpPr>
           <p:spPr>
             <a:xfrm>
-              <a:off x="2477598" y="4940791"/>
+              <a:off x="2441596" y="4937130"/>
               <a:ext cx="75116" cy="75116"/>
             </a:xfrm>
             <a:prstGeom prst="ellipse">
@@ -14639,7 +14639,7 @@
           </p:nvSpPr>
           <p:spPr>
             <a:xfrm>
-              <a:off x="2434829" y="5073564"/>
+              <a:off x="2271571" y="5074606"/>
               <a:ext cx="75116" cy="75116"/>
             </a:xfrm>
             <a:prstGeom prst="ellipse">
@@ -14665,7 +14665,7 @@
           </p:nvSpPr>
           <p:spPr>
             <a:xfrm>
-              <a:off x="2489155" y="5287528"/>
+              <a:off x="2260330" y="5288404"/>
               <a:ext cx="75116" cy="75116"/>
             </a:xfrm>
             <a:prstGeom prst="ellipse">
@@ -14691,7 +14691,7 @@
           </p:nvSpPr>
           <p:spPr>
             <a:xfrm>
-              <a:off x="2166892" y="5410849"/>
+              <a:off x="2263109" y="5410559"/>
               <a:ext cx="75116" cy="75116"/>
             </a:xfrm>
             <a:prstGeom prst="ellipse">
@@ -14717,7 +14717,7 @@
           </p:nvSpPr>
           <p:spPr>
             <a:xfrm>
-              <a:off x="2292738" y="5874481"/>
+              <a:off x="2192742" y="5874481"/>
               <a:ext cx="75116" cy="75116"/>
             </a:xfrm>
             <a:prstGeom prst="ellipse">
@@ -14743,7 +14743,7 @@
           </p:nvSpPr>
           <p:spPr>
             <a:xfrm>
-              <a:off x="2084151" y="5630922"/>
+              <a:off x="2162026" y="5628754"/>
               <a:ext cx="75116" cy="75116"/>
             </a:xfrm>
             <a:prstGeom prst="ellipse">
@@ -14769,7 +14769,7 @@
           </p:nvSpPr>
           <p:spPr>
             <a:xfrm>
-              <a:off x="2326850" y="5245816"/>
+              <a:off x="2366895" y="5247390"/>
               <a:ext cx="75116" cy="75116"/>
             </a:xfrm>
             <a:prstGeom prst="ellipse">
@@ -14795,7 +14795,7 @@
           </p:nvSpPr>
           <p:spPr>
             <a:xfrm>
-              <a:off x="2083285" y="4817666"/>
+              <a:off x="2391700" y="4816757"/>
               <a:ext cx="75116" cy="75116"/>
             </a:xfrm>
             <a:prstGeom prst="ellipse">
@@ -14821,7 +14821,7 @@
           </p:nvSpPr>
           <p:spPr>
             <a:xfrm>
-              <a:off x="2146680" y="4741253"/>
+              <a:off x="2317716" y="4741253"/>
               <a:ext cx="75116" cy="75116"/>
             </a:xfrm>
             <a:prstGeom prst="ellipse">
@@ -14847,7 +14847,7 @@
           </p:nvSpPr>
           <p:spPr>
             <a:xfrm>
-              <a:off x="2101344" y="5486718"/>
+              <a:off x="2373780" y="5486047"/>
               <a:ext cx="75116" cy="75116"/>
             </a:xfrm>
             <a:prstGeom prst="ellipse">
@@ -14873,7 +14873,7 @@
           </p:nvSpPr>
           <p:spPr>
             <a:xfrm>
-              <a:off x="2230079" y="5229314"/>
+              <a:off x="2082555" y="5228270"/>
               <a:ext cx="75116" cy="75116"/>
             </a:xfrm>
             <a:prstGeom prst="ellipse">
@@ -14899,7 +14899,7 @@
           </p:nvSpPr>
           <p:spPr>
             <a:xfrm>
-              <a:off x="2336288" y="5050034"/>
+              <a:off x="2406734" y="5046308"/>
               <a:ext cx="75116" cy="75116"/>
             </a:xfrm>
             <a:prstGeom prst="ellipse">
@@ -14925,7 +14925,7 @@
           </p:nvSpPr>
           <p:spPr>
             <a:xfrm>
-              <a:off x="2170588" y="5170063"/>
+              <a:off x="2385258" y="5170080"/>
               <a:ext cx="75116" cy="75116"/>
             </a:xfrm>
             <a:prstGeom prst="ellipse">
@@ -14951,7 +14951,7 @@
           </p:nvSpPr>
           <p:spPr>
             <a:xfrm>
-              <a:off x="2123950" y="5624434"/>
+              <a:off x="2325962" y="5624531"/>
               <a:ext cx="75116" cy="75116"/>
             </a:xfrm>
             <a:prstGeom prst="ellipse">
@@ -14977,7 +14977,7 @@
           </p:nvSpPr>
           <p:spPr>
             <a:xfrm>
-              <a:off x="2139028" y="5575013"/>
+              <a:off x="2360062" y="5576435"/>
               <a:ext cx="75116" cy="75116"/>
             </a:xfrm>
             <a:prstGeom prst="ellipse">
@@ -15003,7 +15003,7 @@
           </p:nvSpPr>
           <p:spPr>
             <a:xfrm>
-              <a:off x="2239763" y="5089759"/>
+              <a:off x="2218200" y="5090244"/>
               <a:ext cx="75116" cy="75116"/>
             </a:xfrm>
             <a:prstGeom prst="ellipse">
@@ -15029,7 +15029,7 @@
           </p:nvSpPr>
           <p:spPr>
             <a:xfrm>
-              <a:off x="2236673" y="5133797"/>
+              <a:off x="2185632" y="5131216"/>
               <a:ext cx="75116" cy="75116"/>
             </a:xfrm>
             <a:prstGeom prst="ellipse">
@@ -15055,7 +15055,7 @@
           </p:nvSpPr>
           <p:spPr>
             <a:xfrm>
-              <a:off x="2876392" y="5663526"/>
+              <a:off x="2896493" y="5662139"/>
               <a:ext cx="75116" cy="75116"/>
             </a:xfrm>
             <a:prstGeom prst="ellipse">
@@ -15081,7 +15081,7 @@
           </p:nvSpPr>
           <p:spPr>
             <a:xfrm>
-              <a:off x="2907247" y="5389896"/>
+              <a:off x="2778568" y="5390406"/>
               <a:ext cx="75116" cy="75116"/>
             </a:xfrm>
             <a:prstGeom prst="ellipse">
@@ -15107,7 +15107,7 @@
           </p:nvSpPr>
           <p:spPr>
             <a:xfrm>
-              <a:off x="2924603" y="5495803"/>
+              <a:off x="2827424" y="5494670"/>
               <a:ext cx="75116" cy="75116"/>
             </a:xfrm>
             <a:prstGeom prst="ellipse">
@@ -15133,7 +15133,7 @@
           </p:nvSpPr>
           <p:spPr>
             <a:xfrm>
-              <a:off x="2977084" y="5724975"/>
+              <a:off x="3034926" y="5726199"/>
               <a:ext cx="75116" cy="75116"/>
             </a:xfrm>
             <a:prstGeom prst="ellipse">
@@ -15159,7 +15159,7 @@
           </p:nvSpPr>
           <p:spPr>
             <a:xfrm>
-              <a:off x="3006259" y="5367594"/>
+              <a:off x="3044975" y="5368047"/>
               <a:ext cx="75116" cy="75116"/>
             </a:xfrm>
             <a:prstGeom prst="ellipse">
@@ -15185,7 +15185,7 @@
           </p:nvSpPr>
           <p:spPr>
             <a:xfrm>
-              <a:off x="3041496" y="5624888"/>
+              <a:off x="2860326" y="5624650"/>
               <a:ext cx="75116" cy="75116"/>
             </a:xfrm>
             <a:prstGeom prst="ellipse">
@@ -15211,7 +15211,7 @@
           </p:nvSpPr>
           <p:spPr>
             <a:xfrm>
-              <a:off x="2828469" y="4873503"/>
+              <a:off x="2835775" y="4872070"/>
               <a:ext cx="75116" cy="75116"/>
             </a:xfrm>
             <a:prstGeom prst="ellipse">
@@ -15237,7 +15237,7 @@
           </p:nvSpPr>
           <p:spPr>
             <a:xfrm>
-              <a:off x="3076818" y="5558602"/>
+              <a:off x="3043586" y="5556661"/>
               <a:ext cx="75116" cy="75116"/>
             </a:xfrm>
             <a:prstGeom prst="ellipse">
@@ -15263,7 +15263,7 @@
           </p:nvSpPr>
           <p:spPr>
             <a:xfrm>
-              <a:off x="2933278" y="5275033"/>
+              <a:off x="3091680" y="5275681"/>
               <a:ext cx="75116" cy="75116"/>
             </a:xfrm>
             <a:prstGeom prst="ellipse">
@@ -15289,7 +15289,7 @@
           </p:nvSpPr>
           <p:spPr>
             <a:xfrm>
-              <a:off x="2982949" y="5103469"/>
+              <a:off x="2850482" y="5102258"/>
               <a:ext cx="75116" cy="75116"/>
             </a:xfrm>
             <a:prstGeom prst="ellipse">
@@ -15315,7 +15315,7 @@
           </p:nvSpPr>
           <p:spPr>
             <a:xfrm>
-              <a:off x="3002936" y="4793510"/>
+              <a:off x="3149760" y="4790533"/>
               <a:ext cx="75116" cy="75116"/>
             </a:xfrm>
             <a:prstGeom prst="ellipse">
@@ -15341,7 +15341,7 @@
           </p:nvSpPr>
           <p:spPr>
             <a:xfrm>
-              <a:off x="3209447" y="4992494"/>
+              <a:off x="2796072" y="4994247"/>
               <a:ext cx="75116" cy="75116"/>
             </a:xfrm>
             <a:prstGeom prst="ellipse">
@@ -15367,7 +15367,7 @@
           </p:nvSpPr>
           <p:spPr>
             <a:xfrm>
-              <a:off x="2822053" y="5579552"/>
+              <a:off x="3003218" y="5578793"/>
               <a:ext cx="75116" cy="75116"/>
             </a:xfrm>
             <a:prstGeom prst="ellipse">
@@ -15393,7 +15393,7 @@
           </p:nvSpPr>
           <p:spPr>
             <a:xfrm>
-              <a:off x="3067447" y="5212400"/>
+              <a:off x="3018255" y="5210781"/>
               <a:ext cx="75116" cy="75116"/>
             </a:xfrm>
             <a:prstGeom prst="ellipse">
@@ -15419,7 +15419,7 @@
           </p:nvSpPr>
           <p:spPr>
             <a:xfrm>
-              <a:off x="2887942" y="5338235"/>
+              <a:off x="3137290" y="5339548"/>
               <a:ext cx="75116" cy="75116"/>
             </a:xfrm>
             <a:prstGeom prst="ellipse">
@@ -15445,7 +15445,7 @@
           </p:nvSpPr>
           <p:spPr>
             <a:xfrm>
-              <a:off x="3006890" y="5170421"/>
+              <a:off x="2831745" y="5171615"/>
               <a:ext cx="75116" cy="75116"/>
             </a:xfrm>
             <a:prstGeom prst="ellipse">
@@ -15471,7 +15471,7 @@
           </p:nvSpPr>
           <p:spPr>
             <a:xfrm>
-              <a:off x="2998878" y="5553309"/>
+              <a:off x="2891974" y="5552655"/>
               <a:ext cx="75116" cy="75116"/>
             </a:xfrm>
             <a:prstGeom prst="ellipse">
@@ -15497,7 +15497,7 @@
           </p:nvSpPr>
           <p:spPr>
             <a:xfrm>
-              <a:off x="2946047" y="5210262"/>
+              <a:off x="3021670" y="5207474"/>
               <a:ext cx="75116" cy="75116"/>
             </a:xfrm>
             <a:prstGeom prst="ellipse">
@@ -15523,7 +15523,7 @@
           </p:nvSpPr>
           <p:spPr>
             <a:xfrm>
-              <a:off x="2963115" y="5519732"/>
+              <a:off x="2966417" y="5519356"/>
               <a:ext cx="75116" cy="75116"/>
             </a:xfrm>
             <a:prstGeom prst="ellipse">
@@ -15549,7 +15549,7 @@
           </p:nvSpPr>
           <p:spPr>
             <a:xfrm>
-              <a:off x="3008673" y="5482648"/>
+              <a:off x="2871315" y="5482828"/>
               <a:ext cx="75116" cy="75116"/>
             </a:xfrm>
             <a:prstGeom prst="ellipse">
@@ -15575,7 +15575,7 @@
           </p:nvSpPr>
           <p:spPr>
             <a:xfrm>
-              <a:off x="3575515" y="5532156"/>
+              <a:off x="3682783" y="5531464"/>
               <a:ext cx="75116" cy="75116"/>
             </a:xfrm>
             <a:prstGeom prst="ellipse">
@@ -15601,7 +15601,7 @@
           </p:nvSpPr>
           <p:spPr>
             <a:xfrm>
-              <a:off x="3657863" y="5486574"/>
+              <a:off x="3511234" y="5486794"/>
               <a:ext cx="75116" cy="75116"/>
             </a:xfrm>
             <a:prstGeom prst="ellipse">
@@ -15627,7 +15627,7 @@
           </p:nvSpPr>
           <p:spPr>
             <a:xfrm>
-              <a:off x="3887104" y="5648911"/>
+              <a:off x="3563308" y="5651313"/>
               <a:ext cx="75116" cy="75116"/>
             </a:xfrm>
             <a:prstGeom prst="ellipse">
@@ -15653,7 +15653,7 @@
           </p:nvSpPr>
           <p:spPr>
             <a:xfrm>
-              <a:off x="3712700" y="5256324"/>
+              <a:off x="3553657" y="5254077"/>
               <a:ext cx="75116" cy="75116"/>
             </a:xfrm>
             <a:prstGeom prst="ellipse">
@@ -15679,7 +15679,7 @@
           </p:nvSpPr>
           <p:spPr>
             <a:xfrm>
-              <a:off x="3870443" y="5308737"/>
+              <a:off x="3894352" y="5308804"/>
               <a:ext cx="75116" cy="75116"/>
             </a:xfrm>
             <a:prstGeom prst="ellipse">
@@ -15705,7 +15705,7 @@
           </p:nvSpPr>
           <p:spPr>
             <a:xfrm>
-              <a:off x="3709203" y="4821758"/>
+              <a:off x="3673282" y="4820520"/>
               <a:ext cx="75116" cy="75116"/>
             </a:xfrm>
             <a:prstGeom prst="ellipse">
@@ -15731,7 +15731,7 @@
           </p:nvSpPr>
           <p:spPr>
             <a:xfrm>
-              <a:off x="3804034" y="5288519"/>
+              <a:off x="3629270" y="5289848"/>
               <a:ext cx="75116" cy="75116"/>
             </a:xfrm>
             <a:prstGeom prst="ellipse">
@@ -15757,7 +15757,7 @@
           </p:nvSpPr>
           <p:spPr>
             <a:xfrm>
-              <a:off x="3543666" y="5483265"/>
+              <a:off x="3752738" y="5482442"/>
               <a:ext cx="75116" cy="75116"/>
             </a:xfrm>
             <a:prstGeom prst="ellipse">
@@ -15783,7 +15783,7 @@
           </p:nvSpPr>
           <p:spPr>
             <a:xfrm>
-              <a:off x="3551390" y="5299640"/>
+              <a:off x="3837015" y="5299849"/>
               <a:ext cx="75116" cy="75116"/>
             </a:xfrm>
             <a:prstGeom prst="ellipse">
@@ -15809,7 +15809,7 @@
           </p:nvSpPr>
           <p:spPr>
             <a:xfrm>
-              <a:off x="3785621" y="5196911"/>
+              <a:off x="3595114" y="5195146"/>
               <a:ext cx="75116" cy="75116"/>
             </a:xfrm>
             <a:prstGeom prst="ellipse">
@@ -15835,7 +15835,7 @@
           </p:nvSpPr>
           <p:spPr>
             <a:xfrm>
-              <a:off x="3540843" y="5141473"/>
+              <a:off x="3689535" y="5140389"/>
               <a:ext cx="75116" cy="75116"/>
             </a:xfrm>
             <a:prstGeom prst="ellipse">
@@ -15861,7 +15861,7 @@
           </p:nvSpPr>
           <p:spPr>
             <a:xfrm>
-              <a:off x="3894352" y="5013505"/>
+              <a:off x="3886460" y="5012380"/>
               <a:ext cx="75116" cy="75116"/>
             </a:xfrm>
             <a:prstGeom prst="ellipse">
@@ -15887,7 +15887,7 @@
           </p:nvSpPr>
           <p:spPr>
             <a:xfrm>
-              <a:off x="3654490" y="5440187"/>
+              <a:off x="3547076" y="5441223"/>
               <a:ext cx="75116" cy="75116"/>
             </a:xfrm>
             <a:prstGeom prst="ellipse">
@@ -15913,7 +15913,7 @@
           </p:nvSpPr>
           <p:spPr>
             <a:xfrm>
-              <a:off x="3644980" y="4921207"/>
+              <a:off x="3596716" y="4922386"/>
               <a:ext cx="75116" cy="75116"/>
             </a:xfrm>
             <a:prstGeom prst="ellipse">
@@ -15939,7 +15939,7 @@
           </p:nvSpPr>
           <p:spPr>
             <a:xfrm>
-              <a:off x="3891108" y="5710531"/>
+              <a:off x="3836223" y="5710617"/>
               <a:ext cx="75116" cy="75116"/>
             </a:xfrm>
             <a:prstGeom prst="ellipse">
@@ -15965,7 +15965,7 @@
           </p:nvSpPr>
           <p:spPr>
             <a:xfrm>
-              <a:off x="3626142" y="5578705"/>
+              <a:off x="3638652" y="5579976"/>
               <a:ext cx="75116" cy="75116"/>
             </a:xfrm>
             <a:prstGeom prst="ellipse">
@@ -15991,7 +15991,7 @@
           </p:nvSpPr>
           <p:spPr>
             <a:xfrm>
-              <a:off x="3707572" y="5417528"/>
+              <a:off x="3605736" y="5418126"/>
               <a:ext cx="75116" cy="75116"/>
             </a:xfrm>
             <a:prstGeom prst="ellipse">
@@ -16017,7 +16017,7 @@
           </p:nvSpPr>
           <p:spPr>
             <a:xfrm>
-              <a:off x="3704196" y="5502494"/>
+              <a:off x="3572261" y="5504001"/>
               <a:ext cx="75116" cy="75116"/>
             </a:xfrm>
             <a:prstGeom prst="ellipse">
@@ -16043,7 +16043,7 @@
           </p:nvSpPr>
           <p:spPr>
             <a:xfrm>
-              <a:off x="3653215" y="5382744"/>
+              <a:off x="3847831" y="5382149"/>
               <a:ext cx="75116" cy="75116"/>
             </a:xfrm>
             <a:prstGeom prst="ellipse">
@@ -16069,7 +16069,7 @@
           </p:nvSpPr>
           <p:spPr>
             <a:xfrm>
-              <a:off x="3551750" y="5543874"/>
+              <a:off x="3504075" y="5544393"/>
               <a:ext cx="75116" cy="75116"/>
             </a:xfrm>
             <a:prstGeom prst="ellipse">
@@ -16095,7 +16095,7 @@
           </p:nvSpPr>
           <p:spPr>
             <a:xfrm>
-              <a:off x="3721935" y="5355629"/>
+              <a:off x="3584627" y="5356931"/>
               <a:ext cx="75116" cy="75116"/>
             </a:xfrm>
             <a:prstGeom prst="ellipse">
@@ -16121,7 +16121,7 @@
           </p:nvSpPr>
           <p:spPr>
             <a:xfrm>
-              <a:off x="3684267" y="5285778"/>
+              <a:off x="3605733" y="5284239"/>
               <a:ext cx="75116" cy="75116"/>
             </a:xfrm>
             <a:prstGeom prst="ellipse">
@@ -16147,7 +16147,7 @@
           </p:nvSpPr>
           <p:spPr>
             <a:xfrm>
-              <a:off x="3752509" y="5292230"/>
+              <a:off x="3676167" y="5293683"/>
               <a:ext cx="75116" cy="75116"/>
             </a:xfrm>
             <a:prstGeom prst="ellipse">
@@ -16173,7 +16173,7 @@
           </p:nvSpPr>
           <p:spPr>
             <a:xfrm>
-              <a:off x="3777888" y="5350377"/>
+              <a:off x="3727877" y="5350056"/>
               <a:ext cx="75116" cy="75116"/>
             </a:xfrm>
             <a:prstGeom prst="ellipse">
@@ -16199,42 +16199,42 @@
           </p:nvSpPr>
           <p:spPr>
             <a:xfrm>
-              <a:off x="1590195" y="5183910"/>
-              <a:ext cx="2193175" cy="406411"/>
+              <a:off x="1581012" y="5183112"/>
+              <a:ext cx="2155529" cy="407466"/>
             </a:xfrm>
             <a:custGeom>
               <a:avLst/>
               <a:pathLst>
-                <a:path w="2193175" h="406411">
+                <a:path w="2155529" h="407466">
                   <a:moveTo>
                     <a:pt x="0" y="0"/>
                   </a:moveTo>
                   <a:lnTo>
-                    <a:pt x="1158700" y="89949"/>
+                    <a:pt x="1138811" y="90183"/>
                   </a:lnTo>
                   <a:lnTo>
-                    <a:pt x="1462116" y="81390"/>
+                    <a:pt x="1437019" y="81601"/>
                   </a:lnTo>
                   <a:lnTo>
-                    <a:pt x="1889758" y="45025"/>
+                    <a:pt x="1857321" y="45142"/>
                   </a:lnTo>
                   <a:lnTo>
-                    <a:pt x="2193175" y="9625"/>
+                    <a:pt x="2155529" y="9651"/>
                   </a:lnTo>
                   <a:lnTo>
-                    <a:pt x="2193175" y="364529"/>
+                    <a:pt x="2155529" y="365476"/>
                   </a:lnTo>
                   <a:lnTo>
-                    <a:pt x="1889758" y="333592"/>
+                    <a:pt x="1857321" y="334459"/>
                   </a:lnTo>
                   <a:lnTo>
-                    <a:pt x="1462116" y="303517"/>
+                    <a:pt x="1437019" y="304305"/>
                   </a:lnTo>
                   <a:lnTo>
-                    <a:pt x="1158700" y="299420"/>
+                    <a:pt x="1138811" y="300198"/>
                   </a:lnTo>
                   <a:lnTo>
-                    <a:pt x="0" y="406411"/>
+                    <a:pt x="0" y="407466"/>
                   </a:lnTo>
                   <a:close/>
                 </a:path>
@@ -16260,27 +16260,27 @@
           </p:nvSpPr>
           <p:spPr>
             <a:xfrm>
-              <a:off x="1590195" y="5183910"/>
-              <a:ext cx="2193175" cy="89949"/>
+              <a:off x="1581012" y="5183112"/>
+              <a:ext cx="2155529" cy="90183"/>
             </a:xfrm>
             <a:custGeom>
               <a:avLst/>
               <a:pathLst>
-                <a:path w="2193175" h="89949">
+                <a:path w="2155529" h="90183">
                   <a:moveTo>
                     <a:pt x="0" y="0"/>
                   </a:moveTo>
                   <a:lnTo>
-                    <a:pt x="1158700" y="89949"/>
+                    <a:pt x="1138811" y="90183"/>
                   </a:lnTo>
                   <a:lnTo>
-                    <a:pt x="1462116" y="81390"/>
+                    <a:pt x="1437019" y="81601"/>
                   </a:lnTo>
                   <a:lnTo>
-                    <a:pt x="1889758" y="45025"/>
+                    <a:pt x="1857321" y="45142"/>
                   </a:lnTo>
                   <a:lnTo>
-                    <a:pt x="2193175" y="9625"/>
+                    <a:pt x="2155529" y="9651"/>
                   </a:lnTo>
                 </a:path>
               </a:pathLst>
@@ -16300,27 +16300,27 @@
           </p:nvSpPr>
           <p:spPr>
             <a:xfrm>
-              <a:off x="1590195" y="5483331"/>
-              <a:ext cx="2193175" cy="106990"/>
+              <a:off x="1581012" y="5483311"/>
+              <a:ext cx="2155529" cy="107268"/>
             </a:xfrm>
             <a:custGeom>
               <a:avLst/>
               <a:pathLst>
-                <a:path w="2193175" h="106990">
+                <a:path w="2155529" h="107268">
                   <a:moveTo>
-                    <a:pt x="2193175" y="65109"/>
+                    <a:pt x="2155529" y="65278"/>
                   </a:moveTo>
                   <a:lnTo>
-                    <a:pt x="1889758" y="34172"/>
+                    <a:pt x="1857321" y="34260"/>
                   </a:lnTo>
                   <a:lnTo>
-                    <a:pt x="1462116" y="4096"/>
+                    <a:pt x="1437019" y="4107"/>
                   </a:lnTo>
                   <a:lnTo>
-                    <a:pt x="1158700" y="0"/>
+                    <a:pt x="1138811" y="0"/>
                   </a:lnTo>
                   <a:lnTo>
-                    <a:pt x="0" y="106990"/>
+                    <a:pt x="0" y="107268"/>
                   </a:lnTo>
                 </a:path>
               </a:pathLst>
@@ -16340,27 +16340,27 @@
           </p:nvSpPr>
           <p:spPr>
             <a:xfrm>
-              <a:off x="1590195" y="5370988"/>
-              <a:ext cx="2193175" cy="16127"/>
+              <a:off x="1581012" y="5370676"/>
+              <a:ext cx="2155529" cy="16169"/>
             </a:xfrm>
             <a:custGeom>
               <a:avLst/>
               <a:pathLst>
-                <a:path w="2193175" h="16127">
+                <a:path w="2155529" h="16169">
                   <a:moveTo>
-                    <a:pt x="0" y="16127"/>
+                    <a:pt x="0" y="16169"/>
                   </a:moveTo>
                   <a:lnTo>
-                    <a:pt x="1158700" y="7607"/>
+                    <a:pt x="1138811" y="7626"/>
                   </a:lnTo>
                   <a:lnTo>
-                    <a:pt x="1462116" y="5375"/>
+                    <a:pt x="1437019" y="5389"/>
                   </a:lnTo>
                   <a:lnTo>
-                    <a:pt x="1889758" y="2231"/>
+                    <a:pt x="1857321" y="2236"/>
                   </a:lnTo>
                   <a:lnTo>
-                    <a:pt x="2193175" y="0"/>
+                    <a:pt x="2155529" y="0"/>
                   </a:lnTo>
                 </a:path>
               </a:pathLst>
@@ -16389,7 +16389,7 @@
           </p:nvSpPr>
           <p:spPr>
             <a:xfrm>
-              <a:off x="3303677" y="4769391"/>
+              <a:off x="3256847" y="4767836"/>
               <a:ext cx="479694" cy="82021"/>
             </a:xfrm>
             <a:prstGeom prst="rect">
@@ -16496,7 +16496,7 @@
           </p:nvSpPr>
           <p:spPr>
             <a:xfrm rot="-5400000">
-              <a:off x="1140466" y="5846072"/>
+              <a:off x="1140466" y="5847089"/>
               <a:ext cx="141274" cy="72877"/>
             </a:xfrm>
             <a:prstGeom prst="rect">
@@ -16542,7 +16542,7 @@
           </p:nvSpPr>
           <p:spPr>
             <a:xfrm rot="-5400000">
-              <a:off x="1140466" y="5499476"/>
+              <a:off x="1140466" y="5499593"/>
               <a:ext cx="141274" cy="72877"/>
             </a:xfrm>
             <a:prstGeom prst="rect">
@@ -16588,7 +16588,7 @@
           </p:nvSpPr>
           <p:spPr>
             <a:xfrm rot="-5400000">
-              <a:off x="1140466" y="5152880"/>
+              <a:off x="1140466" y="5152096"/>
               <a:ext cx="141274" cy="72877"/>
             </a:xfrm>
             <a:prstGeom prst="rect">
@@ -16634,7 +16634,7 @@
           </p:nvSpPr>
           <p:spPr>
             <a:xfrm rot="-5400000">
-              <a:off x="1140466" y="4806283"/>
+              <a:off x="1140466" y="4804599"/>
               <a:ext cx="141274" cy="72877"/>
             </a:xfrm>
             <a:prstGeom prst="rect">
@@ -16680,7 +16680,7 @@
           </p:nvSpPr>
           <p:spPr>
             <a:xfrm>
-              <a:off x="1281564" y="5882511"/>
+              <a:off x="1281564" y="5883528"/>
               <a:ext cx="28468" cy="0"/>
             </a:xfrm>
             <a:custGeom>
@@ -16720,7 +16720,7 @@
           </p:nvSpPr>
           <p:spPr>
             <a:xfrm>
-              <a:off x="1281564" y="5535915"/>
+              <a:off x="1281564" y="5536031"/>
               <a:ext cx="28468" cy="0"/>
             </a:xfrm>
             <a:custGeom>
@@ -16760,7 +16760,7 @@
           </p:nvSpPr>
           <p:spPr>
             <a:xfrm>
-              <a:off x="1281564" y="5189318"/>
+              <a:off x="1281564" y="5188535"/>
               <a:ext cx="28468" cy="0"/>
             </a:xfrm>
             <a:custGeom>
@@ -16800,7 +16800,7 @@
           </p:nvSpPr>
           <p:spPr>
             <a:xfrm>
-              <a:off x="1281564" y="4842722"/>
+              <a:off x="1281564" y="4841038"/>
               <a:ext cx="28468" cy="0"/>
             </a:xfrm>
             <a:custGeom>
@@ -16880,7 +16880,7 @@
           </p:nvSpPr>
           <p:spPr>
             <a:xfrm>
-              <a:off x="1590195" y="5968701"/>
+              <a:off x="1581012" y="5968701"/>
               <a:ext cx="0" cy="28468"/>
             </a:xfrm>
             <a:custGeom>
@@ -16920,7 +16920,7 @@
           </p:nvSpPr>
           <p:spPr>
             <a:xfrm>
-              <a:off x="2321254" y="5968701"/>
+              <a:off x="2299522" y="5968701"/>
               <a:ext cx="0" cy="28468"/>
             </a:xfrm>
             <a:custGeom>
@@ -16960,7 +16960,7 @@
           </p:nvSpPr>
           <p:spPr>
             <a:xfrm>
-              <a:off x="3052312" y="5968701"/>
+              <a:off x="3018032" y="5968701"/>
               <a:ext cx="0" cy="28468"/>
             </a:xfrm>
             <a:custGeom>
@@ -17000,7 +17000,7 @@
           </p:nvSpPr>
           <p:spPr>
             <a:xfrm>
-              <a:off x="3783371" y="5968701"/>
+              <a:off x="3736542" y="5968701"/>
               <a:ext cx="0" cy="28468"/>
             </a:xfrm>
             <a:custGeom>
@@ -17040,7 +17040,7 @@
           </p:nvSpPr>
           <p:spPr>
             <a:xfrm>
-              <a:off x="1561940" y="6019944"/>
+              <a:off x="1552757" y="6019944"/>
               <a:ext cx="56509" cy="72877"/>
             </a:xfrm>
             <a:prstGeom prst="rect">
@@ -17086,7 +17086,7 @@
           </p:nvSpPr>
           <p:spPr>
             <a:xfrm>
-              <a:off x="2292999" y="6019944"/>
+              <a:off x="2271267" y="6019944"/>
               <a:ext cx="56509" cy="72877"/>
             </a:xfrm>
             <a:prstGeom prst="rect">
@@ -17132,7 +17132,7 @@
           </p:nvSpPr>
           <p:spPr>
             <a:xfrm>
-              <a:off x="3024057" y="6019944"/>
+              <a:off x="2989777" y="6019944"/>
               <a:ext cx="56509" cy="72877"/>
             </a:xfrm>
             <a:prstGeom prst="rect">
@@ -17178,7 +17178,7 @@
           </p:nvSpPr>
           <p:spPr>
             <a:xfrm>
-              <a:off x="3755116" y="6019944"/>
+              <a:off x="3708287" y="6019944"/>
               <a:ext cx="56509" cy="72877"/>
             </a:xfrm>
             <a:prstGeom prst="rect">
@@ -17388,7 +17388,7 @@
           </p:nvSpPr>
           <p:spPr>
             <a:xfrm>
-              <a:off x="4576366" y="5417647"/>
+              <a:off x="4426708" y="5418367"/>
               <a:ext cx="75116" cy="75116"/>
             </a:xfrm>
             <a:prstGeom prst="ellipse">
@@ -17414,7 +17414,7 @@
           </p:nvSpPr>
           <p:spPr>
             <a:xfrm>
-              <a:off x="4609386" y="5352362"/>
+              <a:off x="4485814" y="5352733"/>
               <a:ext cx="75116" cy="75116"/>
             </a:xfrm>
             <a:prstGeom prst="ellipse">
@@ -17440,7 +17440,7 @@
           </p:nvSpPr>
           <p:spPr>
             <a:xfrm>
-              <a:off x="4308130" y="5404994"/>
+              <a:off x="4273743" y="5404330"/>
               <a:ext cx="75116" cy="75116"/>
             </a:xfrm>
             <a:prstGeom prst="ellipse">
@@ -17466,7 +17466,7 @@
           </p:nvSpPr>
           <p:spPr>
             <a:xfrm>
-              <a:off x="4273743" y="5675916"/>
+              <a:off x="4423156" y="5675006"/>
               <a:ext cx="75116" cy="75116"/>
             </a:xfrm>
             <a:prstGeom prst="ellipse">
@@ -17492,7 +17492,7 @@
           </p:nvSpPr>
           <p:spPr>
             <a:xfrm>
-              <a:off x="4532461" y="5641918"/>
+              <a:off x="4333695" y="5640961"/>
               <a:ext cx="75116" cy="75116"/>
             </a:xfrm>
             <a:prstGeom prst="ellipse">
@@ -17518,7 +17518,7 @@
           </p:nvSpPr>
           <p:spPr>
             <a:xfrm>
-              <a:off x="4596067" y="5603795"/>
+              <a:off x="4297108" y="5602746"/>
               <a:ext cx="75116" cy="75116"/>
             </a:xfrm>
             <a:prstGeom prst="ellipse">
@@ -17544,7 +17544,7 @@
           </p:nvSpPr>
           <p:spPr>
             <a:xfrm>
-              <a:off x="4319546" y="5195749"/>
+              <a:off x="4347654" y="5195374"/>
               <a:ext cx="75116" cy="75116"/>
             </a:xfrm>
             <a:prstGeom prst="ellipse">
@@ -17570,7 +17570,7 @@
           </p:nvSpPr>
           <p:spPr>
             <a:xfrm>
-              <a:off x="4338146" y="5436199"/>
+              <a:off x="4426268" y="5436272"/>
               <a:ext cx="75116" cy="75116"/>
             </a:xfrm>
             <a:prstGeom prst="ellipse">
@@ -17596,7 +17596,7 @@
           </p:nvSpPr>
           <p:spPr>
             <a:xfrm>
-              <a:off x="4446457" y="5623158"/>
+              <a:off x="4347053" y="5624095"/>
               <a:ext cx="75116" cy="75116"/>
             </a:xfrm>
             <a:prstGeom prst="ellipse">
@@ -17622,7 +17622,7 @@
           </p:nvSpPr>
           <p:spPr>
             <a:xfrm>
-              <a:off x="4408560" y="5329237"/>
+              <a:off x="4597506" y="5328336"/>
               <a:ext cx="75116" cy="75116"/>
             </a:xfrm>
             <a:prstGeom prst="ellipse">
@@ -17648,7 +17648,7 @@
           </p:nvSpPr>
           <p:spPr>
             <a:xfrm>
-              <a:off x="5229152" y="5874481"/>
+              <a:off x="5037882" y="5874481"/>
               <a:ext cx="75116" cy="75116"/>
             </a:xfrm>
             <a:prstGeom prst="ellipse">
@@ -17674,7 +17674,7 @@
           </p:nvSpPr>
           <p:spPr>
             <a:xfrm>
-              <a:off x="5155876" y="5544164"/>
+              <a:off x="5073873" y="5544469"/>
               <a:ext cx="75116" cy="75116"/>
             </a:xfrm>
             <a:prstGeom prst="ellipse">
@@ -17700,7 +17700,7 @@
           </p:nvSpPr>
           <p:spPr>
             <a:xfrm>
-              <a:off x="5183989" y="5359229"/>
+              <a:off x="5138393" y="5358663"/>
               <a:ext cx="75116" cy="75116"/>
             </a:xfrm>
             <a:prstGeom prst="ellipse">
@@ -17726,7 +17726,7 @@
           </p:nvSpPr>
           <p:spPr>
             <a:xfrm>
-              <a:off x="4974146" y="5755417"/>
+              <a:off x="5261449" y="5754218"/>
               <a:ext cx="75116" cy="75116"/>
             </a:xfrm>
             <a:prstGeom prst="ellipse">
@@ -17752,7 +17752,7 @@
           </p:nvSpPr>
           <p:spPr>
             <a:xfrm>
-              <a:off x="5341211" y="5473549"/>
+              <a:off x="5065582" y="5474249"/>
               <a:ext cx="75116" cy="75116"/>
             </a:xfrm>
             <a:prstGeom prst="ellipse">
@@ -17778,7 +17778,7 @@
           </p:nvSpPr>
           <p:spPr>
             <a:xfrm>
-              <a:off x="5020054" y="5138171"/>
+              <a:off x="5209361" y="5136033"/>
               <a:ext cx="75116" cy="75116"/>
             </a:xfrm>
             <a:prstGeom prst="ellipse">
@@ -17804,7 +17804,7 @@
           </p:nvSpPr>
           <p:spPr>
             <a:xfrm>
-              <a:off x="5013411" y="5505404"/>
+              <a:off x="5306635" y="5505622"/>
               <a:ext cx="75116" cy="75116"/>
             </a:xfrm>
             <a:prstGeom prst="ellipse">
@@ -17830,7 +17830,7 @@
           </p:nvSpPr>
           <p:spPr>
             <a:xfrm>
-              <a:off x="5022357" y="5564458"/>
+              <a:off x="5369176" y="5565050"/>
               <a:ext cx="75116" cy="75116"/>
             </a:xfrm>
             <a:prstGeom prst="ellipse">
@@ -17856,7 +17856,7 @@
           </p:nvSpPr>
           <p:spPr>
             <a:xfrm>
-              <a:off x="5277476" y="5340680"/>
+              <a:off x="5028072" y="5339870"/>
               <a:ext cx="75116" cy="75116"/>
             </a:xfrm>
             <a:prstGeom prst="ellipse">
@@ -17882,7 +17882,7 @@
           </p:nvSpPr>
           <p:spPr>
             <a:xfrm>
-              <a:off x="5010083" y="5643990"/>
+              <a:off x="5137538" y="5644104"/>
               <a:ext cx="75116" cy="75116"/>
             </a:xfrm>
             <a:prstGeom prst="ellipse">
@@ -17908,7 +17908,7 @@
           </p:nvSpPr>
           <p:spPr>
             <a:xfrm>
-              <a:off x="5320074" y="5291683"/>
+              <a:off x="5161737" y="5290661"/>
               <a:ext cx="75116" cy="75116"/>
             </a:xfrm>
             <a:prstGeom prst="ellipse">
@@ -17934,7 +17934,7 @@
           </p:nvSpPr>
           <p:spPr>
             <a:xfrm>
-              <a:off x="5182719" y="5609964"/>
+              <a:off x="5333997" y="5610306"/>
               <a:ext cx="75116" cy="75116"/>
             </a:xfrm>
             <a:prstGeom prst="ellipse">
@@ -17960,7 +17960,7 @@
           </p:nvSpPr>
           <p:spPr>
             <a:xfrm>
-              <a:off x="5206152" y="5266998"/>
+              <a:off x="5346538" y="5265067"/>
               <a:ext cx="75116" cy="75116"/>
             </a:xfrm>
             <a:prstGeom prst="ellipse">
@@ -17986,7 +17986,7 @@
           </p:nvSpPr>
           <p:spPr>
             <a:xfrm>
-              <a:off x="5306106" y="4960753"/>
+              <a:off x="5091564" y="4961024"/>
               <a:ext cx="75116" cy="75116"/>
             </a:xfrm>
             <a:prstGeom prst="ellipse">
@@ -18012,7 +18012,7 @@
           </p:nvSpPr>
           <p:spPr>
             <a:xfrm>
-              <a:off x="5016410" y="5199064"/>
+              <a:off x="5120412" y="5197607"/>
               <a:ext cx="75116" cy="75116"/>
             </a:xfrm>
             <a:prstGeom prst="ellipse">
@@ -18038,7 +18038,7 @@
           </p:nvSpPr>
           <p:spPr>
             <a:xfrm>
-              <a:off x="5064816" y="5241518"/>
+              <a:off x="5338859" y="5241714"/>
               <a:ext cx="75116" cy="75116"/>
             </a:xfrm>
             <a:prstGeom prst="ellipse">
@@ -18064,7 +18064,7 @@
           </p:nvSpPr>
           <p:spPr>
             <a:xfrm>
-              <a:off x="5289812" y="5345138"/>
+              <a:off x="5017955" y="5345349"/>
               <a:ext cx="75116" cy="75116"/>
             </a:xfrm>
             <a:prstGeom prst="ellipse">
@@ -18090,7 +18090,7 @@
           </p:nvSpPr>
           <p:spPr>
             <a:xfrm>
-              <a:off x="5071270" y="5592729"/>
+              <a:off x="5040291" y="5591848"/>
               <a:ext cx="75116" cy="75116"/>
             </a:xfrm>
             <a:prstGeom prst="ellipse">
@@ -18116,7 +18116,7 @@
           </p:nvSpPr>
           <p:spPr>
             <a:xfrm>
-              <a:off x="5955386" y="5395493"/>
+              <a:off x="5871961" y="5394514"/>
               <a:ext cx="75116" cy="75116"/>
             </a:xfrm>
             <a:prstGeom prst="ellipse">
@@ -18142,7 +18142,7 @@
           </p:nvSpPr>
           <p:spPr>
             <a:xfrm>
-              <a:off x="5924331" y="5445393"/>
+              <a:off x="5754420" y="5444013"/>
               <a:ext cx="75116" cy="75116"/>
             </a:xfrm>
             <a:prstGeom prst="ellipse">
@@ -18168,7 +18168,7 @@
           </p:nvSpPr>
           <p:spPr>
             <a:xfrm>
-              <a:off x="5847157" y="5625747"/>
+              <a:off x="5975163" y="5625393"/>
               <a:ext cx="75116" cy="75116"/>
             </a:xfrm>
             <a:prstGeom prst="ellipse">
@@ -18194,7 +18194,7 @@
           </p:nvSpPr>
           <p:spPr>
             <a:xfrm>
-              <a:off x="5957636" y="5241708"/>
+              <a:off x="6093804" y="5240639"/>
               <a:ext cx="75116" cy="75116"/>
             </a:xfrm>
             <a:prstGeom prst="ellipse">
@@ -18220,7 +18220,7 @@
           </p:nvSpPr>
           <p:spPr>
             <a:xfrm>
-              <a:off x="5686877" y="5446963"/>
+              <a:off x="5753653" y="5446951"/>
               <a:ext cx="75116" cy="75116"/>
             </a:xfrm>
             <a:prstGeom prst="ellipse">
@@ -18246,7 +18246,7 @@
           </p:nvSpPr>
           <p:spPr>
             <a:xfrm>
-              <a:off x="5970440" y="5259411"/>
+              <a:off x="5745998" y="5259281"/>
               <a:ext cx="75116" cy="75116"/>
             </a:xfrm>
             <a:prstGeom prst="ellipse">
@@ -18272,7 +18272,7 @@
           </p:nvSpPr>
           <p:spPr>
             <a:xfrm>
-              <a:off x="6045808" y="4863638"/>
+              <a:off x="5953156" y="4863746"/>
               <a:ext cx="75116" cy="75116"/>
             </a:xfrm>
             <a:prstGeom prst="ellipse">
@@ -18298,7 +18298,7 @@
           </p:nvSpPr>
           <p:spPr>
             <a:xfrm>
-              <a:off x="5811667" y="5497138"/>
+              <a:off x="5837338" y="5496651"/>
               <a:ext cx="75116" cy="75116"/>
             </a:xfrm>
             <a:prstGeom prst="ellipse">
@@ -18324,7 +18324,7 @@
           </p:nvSpPr>
           <p:spPr>
             <a:xfrm>
-              <a:off x="5801022" y="5344042"/>
+              <a:off x="5790591" y="5342825"/>
               <a:ext cx="75116" cy="75116"/>
             </a:xfrm>
             <a:prstGeom prst="ellipse">
@@ -18350,7 +18350,7 @@
           </p:nvSpPr>
           <p:spPr>
             <a:xfrm>
-              <a:off x="5893749" y="4741253"/>
+              <a:off x="5725518" y="4741253"/>
               <a:ext cx="75116" cy="75116"/>
             </a:xfrm>
             <a:prstGeom prst="ellipse">
@@ -18376,7 +18376,7 @@
           </p:nvSpPr>
           <p:spPr>
             <a:xfrm>
-              <a:off x="5762597" y="5347095"/>
+              <a:off x="6050448" y="5347175"/>
               <a:ext cx="75116" cy="75116"/>
             </a:xfrm>
             <a:prstGeom prst="ellipse">
@@ -18402,7 +18402,7 @@
           </p:nvSpPr>
           <p:spPr>
             <a:xfrm>
-              <a:off x="5943399" y="5446764"/>
+              <a:off x="5970816" y="5446512"/>
               <a:ext cx="75116" cy="75116"/>
             </a:xfrm>
             <a:prstGeom prst="ellipse">
@@ -18428,7 +18428,7 @@
           </p:nvSpPr>
           <p:spPr>
             <a:xfrm>
-              <a:off x="5919587" y="5239847"/>
+              <a:off x="6054978" y="5238470"/>
               <a:ext cx="75116" cy="75116"/>
             </a:xfrm>
             <a:prstGeom prst="ellipse">
@@ -18454,7 +18454,7 @@
           </p:nvSpPr>
           <p:spPr>
             <a:xfrm>
-              <a:off x="5961086" y="5178701"/>
+              <a:off x="5810737" y="5177042"/>
               <a:ext cx="75116" cy="75116"/>
             </a:xfrm>
             <a:prstGeom prst="ellipse">
@@ -18480,7 +18480,7 @@
           </p:nvSpPr>
           <p:spPr>
             <a:xfrm>
-              <a:off x="6034604" y="5060669"/>
+              <a:off x="5801625" y="5059660"/>
               <a:ext cx="75116" cy="75116"/>
             </a:xfrm>
             <a:prstGeom prst="ellipse">
@@ -18506,7 +18506,7 @@
           </p:nvSpPr>
           <p:spPr>
             <a:xfrm>
-              <a:off x="5730230" y="5534118"/>
+              <a:off x="5728314" y="5533735"/>
               <a:ext cx="75116" cy="75116"/>
             </a:xfrm>
             <a:prstGeom prst="ellipse">
@@ -18532,7 +18532,7 @@
           </p:nvSpPr>
           <p:spPr>
             <a:xfrm>
-              <a:off x="5901494" y="5560786"/>
+              <a:off x="5890656" y="5560830"/>
               <a:ext cx="75116" cy="75116"/>
             </a:xfrm>
             <a:prstGeom prst="ellipse">
@@ -18558,7 +18558,7 @@
           </p:nvSpPr>
           <p:spPr>
             <a:xfrm>
-              <a:off x="5872409" y="5737013"/>
+              <a:off x="5979113" y="5737259"/>
               <a:ext cx="75116" cy="75116"/>
             </a:xfrm>
             <a:prstGeom prst="ellipse">
@@ -18584,7 +18584,7 @@
           </p:nvSpPr>
           <p:spPr>
             <a:xfrm>
-              <a:off x="6074294" y="5385926"/>
+              <a:off x="6112997" y="5385831"/>
               <a:ext cx="75116" cy="75116"/>
             </a:xfrm>
             <a:prstGeom prst="ellipse">
@@ -18610,7 +18610,7 @@
           </p:nvSpPr>
           <p:spPr>
             <a:xfrm>
-              <a:off x="5716761" y="5316924"/>
+              <a:off x="5729276" y="5316373"/>
               <a:ext cx="75116" cy="75116"/>
             </a:xfrm>
             <a:prstGeom prst="ellipse">
@@ -18636,7 +18636,7 @@
           </p:nvSpPr>
           <p:spPr>
             <a:xfrm>
-              <a:off x="6490213" y="5356645"/>
+              <a:off x="6541320" y="5356340"/>
               <a:ext cx="75116" cy="75116"/>
             </a:xfrm>
             <a:prstGeom prst="ellipse">
@@ -18662,7 +18662,7 @@
           </p:nvSpPr>
           <p:spPr>
             <a:xfrm>
-              <a:off x="6651818" y="5466885"/>
+              <a:off x="6770769" y="5468061"/>
               <a:ext cx="75116" cy="75116"/>
             </a:xfrm>
             <a:prstGeom prst="ellipse">
@@ -18688,7 +18688,7 @@
           </p:nvSpPr>
           <p:spPr>
             <a:xfrm>
-              <a:off x="6467026" y="5532525"/>
+              <a:off x="6483807" y="5532065"/>
               <a:ext cx="75116" cy="75116"/>
             </a:xfrm>
             <a:prstGeom prst="ellipse">
@@ -18714,7 +18714,7 @@
           </p:nvSpPr>
           <p:spPr>
             <a:xfrm>
-              <a:off x="6770769" y="5564606"/>
+              <a:off x="6635850" y="5565292"/>
               <a:ext cx="75116" cy="75116"/>
             </a:xfrm>
             <a:prstGeom prst="ellipse">
@@ -18740,7 +18740,7 @@
           </p:nvSpPr>
           <p:spPr>
             <a:xfrm>
-              <a:off x="6396563" y="5393515"/>
+              <a:off x="6683136" y="5393345"/>
               <a:ext cx="75116" cy="75116"/>
             </a:xfrm>
             <a:prstGeom prst="ellipse">
@@ -18766,7 +18766,7 @@
           </p:nvSpPr>
           <p:spPr>
             <a:xfrm>
-              <a:off x="6562432" y="5337255"/>
+              <a:off x="6593168" y="5335686"/>
               <a:ext cx="75116" cy="75116"/>
             </a:xfrm>
             <a:prstGeom prst="ellipse">
@@ -18792,7 +18792,7 @@
           </p:nvSpPr>
           <p:spPr>
             <a:xfrm>
-              <a:off x="6624901" y="5531350"/>
+              <a:off x="6706643" y="5530821"/>
               <a:ext cx="75116" cy="75116"/>
             </a:xfrm>
             <a:prstGeom prst="ellipse">
@@ -18818,7 +18818,7 @@
           </p:nvSpPr>
           <p:spPr>
             <a:xfrm>
-              <a:off x="6638608" y="5277250"/>
+              <a:off x="6692548" y="5277572"/>
               <a:ext cx="75116" cy="75116"/>
             </a:xfrm>
             <a:prstGeom prst="ellipse">
@@ -18844,7 +18844,7 @@
           </p:nvSpPr>
           <p:spPr>
             <a:xfrm>
-              <a:off x="6435268" y="5595676"/>
+              <a:off x="6747621" y="5596047"/>
               <a:ext cx="75116" cy="75116"/>
             </a:xfrm>
             <a:prstGeom prst="ellipse">
@@ -18870,7 +18870,7 @@
           </p:nvSpPr>
           <p:spPr>
             <a:xfrm>
-              <a:off x="6577127" y="5462514"/>
+              <a:off x="6531874" y="5463424"/>
               <a:ext cx="75116" cy="75116"/>
             </a:xfrm>
             <a:prstGeom prst="ellipse">
@@ -18896,7 +18896,7 @@
           </p:nvSpPr>
           <p:spPr>
             <a:xfrm>
-              <a:off x="6730701" y="5397926"/>
+              <a:off x="6566004" y="5397905"/>
               <a:ext cx="75116" cy="75116"/>
             </a:xfrm>
             <a:prstGeom prst="ellipse">
@@ -18922,7 +18922,7 @@
           </p:nvSpPr>
           <p:spPr>
             <a:xfrm>
-              <a:off x="6436884" y="5471421"/>
+              <a:off x="6536895" y="5471384"/>
               <a:ext cx="75116" cy="75116"/>
             </a:xfrm>
             <a:prstGeom prst="ellipse">
@@ -18948,7 +18948,7 @@
           </p:nvSpPr>
           <p:spPr>
             <a:xfrm>
-              <a:off x="6485314" y="5436599"/>
+              <a:off x="6601957" y="5436102"/>
               <a:ext cx="75116" cy="75116"/>
             </a:xfrm>
             <a:prstGeom prst="ellipse">
@@ -18974,7 +18974,7 @@
           </p:nvSpPr>
           <p:spPr>
             <a:xfrm>
-              <a:off x="6377820" y="5700656"/>
+              <a:off x="6609651" y="5700499"/>
               <a:ext cx="75116" cy="75116"/>
             </a:xfrm>
             <a:prstGeom prst="ellipse">
@@ -19000,7 +19000,7 @@
           </p:nvSpPr>
           <p:spPr>
             <a:xfrm>
-              <a:off x="6407717" y="5454540"/>
+              <a:off x="6711845" y="5453538"/>
               <a:ext cx="75116" cy="75116"/>
             </a:xfrm>
             <a:prstGeom prst="ellipse">
@@ -19026,7 +19026,7 @@
           </p:nvSpPr>
           <p:spPr>
             <a:xfrm>
-              <a:off x="6396516" y="5470115"/>
+              <a:off x="6569663" y="5468747"/>
               <a:ext cx="75116" cy="75116"/>
             </a:xfrm>
             <a:prstGeom prst="ellipse">
@@ -19052,7 +19052,7 @@
           </p:nvSpPr>
           <p:spPr>
             <a:xfrm>
-              <a:off x="6690268" y="5368822"/>
+              <a:off x="6463137" y="5368554"/>
               <a:ext cx="75116" cy="75116"/>
             </a:xfrm>
             <a:prstGeom prst="ellipse">
@@ -19078,7 +19078,7 @@
           </p:nvSpPr>
           <p:spPr>
             <a:xfrm>
-              <a:off x="6376982" y="5392470"/>
+              <a:off x="6727839" y="5392166"/>
               <a:ext cx="75116" cy="75116"/>
             </a:xfrm>
             <a:prstGeom prst="ellipse">
@@ -19104,7 +19104,7 @@
           </p:nvSpPr>
           <p:spPr>
             <a:xfrm>
-              <a:off x="6558008" y="5714318"/>
+              <a:off x="6686908" y="5714244"/>
               <a:ext cx="75116" cy="75116"/>
             </a:xfrm>
             <a:prstGeom prst="ellipse">
@@ -19130,7 +19130,7 @@
           </p:nvSpPr>
           <p:spPr>
             <a:xfrm>
-              <a:off x="6758535" y="5364181"/>
+              <a:off x="6495325" y="5363958"/>
               <a:ext cx="75116" cy="75116"/>
             </a:xfrm>
             <a:prstGeom prst="ellipse">
@@ -19156,7 +19156,7 @@
           </p:nvSpPr>
           <p:spPr>
             <a:xfrm>
-              <a:off x="6488213" y="5263402"/>
+              <a:off x="6745574" y="5264096"/>
               <a:ext cx="75116" cy="75116"/>
             </a:xfrm>
             <a:prstGeom prst="ellipse">
@@ -19182,7 +19182,7 @@
           </p:nvSpPr>
           <p:spPr>
             <a:xfrm>
-              <a:off x="6480338" y="5289087"/>
+              <a:off x="6596945" y="5288777"/>
               <a:ext cx="75116" cy="75116"/>
             </a:xfrm>
             <a:prstGeom prst="ellipse">
@@ -19208,7 +19208,7 @@
           </p:nvSpPr>
           <p:spPr>
             <a:xfrm>
-              <a:off x="6485468" y="5556035"/>
+              <a:off x="6457917" y="5555233"/>
               <a:ext cx="75116" cy="75116"/>
             </a:xfrm>
             <a:prstGeom prst="ellipse">
@@ -19234,7 +19234,7 @@
           </p:nvSpPr>
           <p:spPr>
             <a:xfrm>
-              <a:off x="6645783" y="5616837"/>
+              <a:off x="6505309" y="5616126"/>
               <a:ext cx="75116" cy="75116"/>
             </a:xfrm>
             <a:prstGeom prst="ellipse">
@@ -19260,42 +19260,42 @@
           </p:nvSpPr>
           <p:spPr>
             <a:xfrm>
-              <a:off x="4496208" y="5291105"/>
-              <a:ext cx="2118040" cy="284582"/>
+              <a:off x="4497825" y="5290554"/>
+              <a:ext cx="2180770" cy="284768"/>
             </a:xfrm>
             <a:custGeom>
               <a:avLst/>
               <a:pathLst>
-                <a:path w="2118040" h="284582">
+                <a:path w="2180770" h="284768">
                   <a:moveTo>
                     <a:pt x="0" y="0"/>
                   </a:moveTo>
                   <a:lnTo>
-                    <a:pt x="1119004" y="57921"/>
+                    <a:pt x="1152146" y="57959"/>
                   </a:lnTo>
                   <a:lnTo>
-                    <a:pt x="1412027" y="56524"/>
+                    <a:pt x="1453846" y="56561"/>
                   </a:lnTo>
                   <a:lnTo>
-                    <a:pt x="1825018" y="41794"/>
+                    <a:pt x="1879069" y="41822"/>
                   </a:lnTo>
                   <a:lnTo>
-                    <a:pt x="2118040" y="25110"/>
+                    <a:pt x="2180770" y="25126"/>
                   </a:lnTo>
                   <a:lnTo>
-                    <a:pt x="2118040" y="275963"/>
+                    <a:pt x="2180770" y="276144"/>
                   </a:lnTo>
                   <a:lnTo>
-                    <a:pt x="1825018" y="256997"/>
+                    <a:pt x="1879069" y="257165"/>
                   </a:lnTo>
                   <a:lnTo>
-                    <a:pt x="1412027" y="239051"/>
+                    <a:pt x="1453846" y="239208"/>
                   </a:lnTo>
                   <a:lnTo>
-                    <a:pt x="1119004" y="235373"/>
+                    <a:pt x="1152146" y="235527"/>
                   </a:lnTo>
                   <a:lnTo>
-                    <a:pt x="0" y="284582"/>
+                    <a:pt x="0" y="284768"/>
                   </a:lnTo>
                   <a:close/>
                 </a:path>
@@ -19321,27 +19321,27 @@
           </p:nvSpPr>
           <p:spPr>
             <a:xfrm>
-              <a:off x="4496208" y="5291105"/>
-              <a:ext cx="2118040" cy="57921"/>
+              <a:off x="4497825" y="5290554"/>
+              <a:ext cx="2180770" cy="57959"/>
             </a:xfrm>
             <a:custGeom>
               <a:avLst/>
               <a:pathLst>
-                <a:path w="2118040" h="57921">
+                <a:path w="2180770" h="57959">
                   <a:moveTo>
                     <a:pt x="0" y="0"/>
                   </a:moveTo>
                   <a:lnTo>
-                    <a:pt x="1119004" y="57921"/>
+                    <a:pt x="1152146" y="57959"/>
                   </a:lnTo>
                   <a:lnTo>
-                    <a:pt x="1412027" y="56524"/>
+                    <a:pt x="1453846" y="56561"/>
                   </a:lnTo>
                   <a:lnTo>
-                    <a:pt x="1825018" y="41794"/>
+                    <a:pt x="1879069" y="41822"/>
                   </a:lnTo>
                   <a:lnTo>
-                    <a:pt x="2118040" y="25110"/>
+                    <a:pt x="2180770" y="25126"/>
                   </a:lnTo>
                 </a:path>
               </a:pathLst>
@@ -19361,27 +19361,27 @@
           </p:nvSpPr>
           <p:spPr>
             <a:xfrm>
-              <a:off x="4496208" y="5526478"/>
-              <a:ext cx="2118040" cy="49208"/>
+              <a:off x="4497825" y="5526082"/>
+              <a:ext cx="2180770" cy="49241"/>
             </a:xfrm>
             <a:custGeom>
               <a:avLst/>
               <a:pathLst>
-                <a:path w="2118040" h="49208">
+                <a:path w="2180770" h="49241">
                   <a:moveTo>
-                    <a:pt x="2118040" y="40589"/>
+                    <a:pt x="2180770" y="40616"/>
                   </a:moveTo>
                   <a:lnTo>
-                    <a:pt x="1825018" y="21623"/>
+                    <a:pt x="1879069" y="21637"/>
                   </a:lnTo>
                   <a:lnTo>
-                    <a:pt x="1412027" y="3678"/>
+                    <a:pt x="1453846" y="3680"/>
                   </a:lnTo>
                   <a:lnTo>
-                    <a:pt x="1119004" y="0"/>
+                    <a:pt x="1152146" y="0"/>
                   </a:lnTo>
                   <a:lnTo>
-                    <a:pt x="0" y="49208"/>
+                    <a:pt x="0" y="49241"/>
                   </a:lnTo>
                 </a:path>
               </a:pathLst>
@@ -19401,27 +19401,27 @@
           </p:nvSpPr>
           <p:spPr>
             <a:xfrm>
-              <a:off x="4496208" y="5433396"/>
-              <a:ext cx="2118040" cy="8245"/>
+              <a:off x="4497825" y="5432939"/>
+              <a:ext cx="2180770" cy="8250"/>
             </a:xfrm>
             <a:custGeom>
               <a:avLst/>
               <a:pathLst>
-                <a:path w="2118040" h="8245">
+                <a:path w="2180770" h="8250">
                   <a:moveTo>
                     <a:pt x="0" y="0"/>
                   </a:moveTo>
                   <a:lnTo>
-                    <a:pt x="1119004" y="4356"/>
+                    <a:pt x="1152146" y="4359"/>
                   </a:lnTo>
                   <a:lnTo>
-                    <a:pt x="1412027" y="5497"/>
+                    <a:pt x="1453846" y="5500"/>
                   </a:lnTo>
                   <a:lnTo>
-                    <a:pt x="1825018" y="7104"/>
+                    <a:pt x="1879069" y="7109"/>
                   </a:lnTo>
                   <a:lnTo>
-                    <a:pt x="2118040" y="8245"/>
+                    <a:pt x="2180770" y="8250"/>
                   </a:lnTo>
                 </a:path>
               </a:pathLst>
@@ -19450,7 +19450,7 @@
           </p:nvSpPr>
           <p:spPr>
             <a:xfrm>
-              <a:off x="6134554" y="4769642"/>
+              <a:off x="6198901" y="4768830"/>
               <a:ext cx="479694" cy="82021"/>
             </a:xfrm>
             <a:prstGeom prst="rect">
@@ -19557,7 +19557,7 @@
           </p:nvSpPr>
           <p:spPr>
             <a:xfrm>
-              <a:off x="4157982" y="5893277"/>
+              <a:off x="4157982" y="5893122"/>
               <a:ext cx="28468" cy="0"/>
             </a:xfrm>
             <a:custGeom>
@@ -19597,7 +19597,7 @@
           </p:nvSpPr>
           <p:spPr>
             <a:xfrm>
-              <a:off x="4157982" y="5645259"/>
+              <a:off x="4157982" y="5644941"/>
               <a:ext cx="28468" cy="0"/>
             </a:xfrm>
             <a:custGeom>
@@ -19637,7 +19637,7 @@
           </p:nvSpPr>
           <p:spPr>
             <a:xfrm>
-              <a:off x="4157982" y="5397241"/>
+              <a:off x="4157982" y="5396760"/>
               <a:ext cx="28468" cy="0"/>
             </a:xfrm>
             <a:custGeom>
@@ -19677,7 +19677,7 @@
           </p:nvSpPr>
           <p:spPr>
             <a:xfrm>
-              <a:off x="4157982" y="5149223"/>
+              <a:off x="4157982" y="5148579"/>
               <a:ext cx="28468" cy="0"/>
             </a:xfrm>
             <a:custGeom>
@@ -19717,7 +19717,7 @@
           </p:nvSpPr>
           <p:spPr>
             <a:xfrm>
-              <a:off x="4157982" y="4901205"/>
+              <a:off x="4157982" y="4900398"/>
               <a:ext cx="28468" cy="0"/>
             </a:xfrm>
             <a:custGeom>
@@ -19757,7 +19757,7 @@
           </p:nvSpPr>
           <p:spPr>
             <a:xfrm>
-              <a:off x="4157982" y="4653187"/>
+              <a:off x="4157982" y="4652218"/>
               <a:ext cx="28468" cy="0"/>
             </a:xfrm>
             <a:custGeom>
@@ -19837,7 +19837,7 @@
           </p:nvSpPr>
           <p:spPr>
             <a:xfrm>
-              <a:off x="4496208" y="5968701"/>
+              <a:off x="4497825" y="5968701"/>
               <a:ext cx="0" cy="28468"/>
             </a:xfrm>
             <a:custGeom>
@@ -19877,7 +19877,7 @@
           </p:nvSpPr>
           <p:spPr>
             <a:xfrm>
-              <a:off x="5202221" y="5968701"/>
+              <a:off x="5224749" y="5968701"/>
               <a:ext cx="0" cy="28468"/>
             </a:xfrm>
             <a:custGeom>
@@ -19917,7 +19917,7 @@
           </p:nvSpPr>
           <p:spPr>
             <a:xfrm>
-              <a:off x="5908235" y="5968701"/>
+              <a:off x="5951672" y="5968701"/>
               <a:ext cx="0" cy="28468"/>
             </a:xfrm>
             <a:custGeom>
@@ -19957,7 +19957,7 @@
           </p:nvSpPr>
           <p:spPr>
             <a:xfrm>
-              <a:off x="6614248" y="5968701"/>
+              <a:off x="6678595" y="5968701"/>
               <a:ext cx="0" cy="28468"/>
             </a:xfrm>
             <a:custGeom>
@@ -19997,7 +19997,7 @@
           </p:nvSpPr>
           <p:spPr>
             <a:xfrm>
-              <a:off x="4467953" y="6019944"/>
+              <a:off x="4469570" y="6019944"/>
               <a:ext cx="56509" cy="72877"/>
             </a:xfrm>
             <a:prstGeom prst="rect">
@@ -20043,7 +20043,7 @@
           </p:nvSpPr>
           <p:spPr>
             <a:xfrm>
-              <a:off x="5173966" y="6019944"/>
+              <a:off x="5196494" y="6019944"/>
               <a:ext cx="56509" cy="72877"/>
             </a:xfrm>
             <a:prstGeom prst="rect">
@@ -20089,7 +20089,7 @@
           </p:nvSpPr>
           <p:spPr>
             <a:xfrm>
-              <a:off x="5879980" y="6019944"/>
+              <a:off x="5923417" y="6019944"/>
               <a:ext cx="56509" cy="72877"/>
             </a:xfrm>
             <a:prstGeom prst="rect">
@@ -20135,7 +20135,7 @@
           </p:nvSpPr>
           <p:spPr>
             <a:xfrm>
-              <a:off x="6585993" y="6019944"/>
+              <a:off x="6650340" y="6019944"/>
               <a:ext cx="56509" cy="72877"/>
             </a:xfrm>
             <a:prstGeom prst="rect">

--- a/figures/Figure_1.pptx
+++ b/figures/Figure_1.pptx
@@ -2515,7 +2515,7 @@
           </p:nvSpPr>
           <p:spPr>
             <a:xfrm>
-              <a:off x="1449947" y="2359148"/>
+              <a:off x="1397325" y="2359262"/>
               <a:ext cx="75116" cy="75116"/>
             </a:xfrm>
             <a:prstGeom prst="ellipse">
@@ -2541,7 +2541,7 @@
           </p:nvSpPr>
           <p:spPr>
             <a:xfrm>
-              <a:off x="1474420" y="2286836"/>
+              <a:off x="1574598" y="2286953"/>
               <a:ext cx="75116" cy="75116"/>
             </a:xfrm>
             <a:prstGeom prst="ellipse">
@@ -2567,7 +2567,7 @@
           </p:nvSpPr>
           <p:spPr>
             <a:xfrm>
-              <a:off x="1427496" y="2395907"/>
+              <a:off x="1513816" y="2395877"/>
               <a:ext cx="75116" cy="75116"/>
             </a:xfrm>
             <a:prstGeom prst="ellipse">
@@ -2593,7 +2593,7 @@
           </p:nvSpPr>
           <p:spPr>
             <a:xfrm>
-              <a:off x="1517859" y="2392818"/>
+              <a:off x="1423316" y="2392934"/>
               <a:ext cx="75116" cy="75116"/>
             </a:xfrm>
             <a:prstGeom prst="ellipse">
@@ -2619,7 +2619,7 @@
           </p:nvSpPr>
           <p:spPr>
             <a:xfrm>
-              <a:off x="1544384" y="2419619"/>
+              <a:off x="1543834" y="2419630"/>
               <a:ext cx="75116" cy="75116"/>
             </a:xfrm>
             <a:prstGeom prst="ellipse">
@@ -2645,7 +2645,7 @@
           </p:nvSpPr>
           <p:spPr>
             <a:xfrm>
-              <a:off x="1469171" y="2266901"/>
+              <a:off x="1540906" y="2266995"/>
               <a:ext cx="75116" cy="75116"/>
             </a:xfrm>
             <a:prstGeom prst="ellipse">
@@ -2671,7 +2671,7 @@
           </p:nvSpPr>
           <p:spPr>
             <a:xfrm>
-              <a:off x="1397325" y="2181916"/>
+              <a:off x="1548902" y="2181804"/>
               <a:ext cx="75116" cy="75116"/>
             </a:xfrm>
             <a:prstGeom prst="ellipse">
@@ -2697,7 +2697,7 @@
           </p:nvSpPr>
           <p:spPr>
             <a:xfrm>
-              <a:off x="1446671" y="2376153"/>
+              <a:off x="1589075" y="2376195"/>
               <a:ext cx="75116" cy="75116"/>
             </a:xfrm>
             <a:prstGeom prst="ellipse">
@@ -2723,7 +2723,7 @@
           </p:nvSpPr>
           <p:spPr>
             <a:xfrm>
-              <a:off x="1404359" y="2450259"/>
+              <a:off x="1594698" y="2450190"/>
               <a:ext cx="75116" cy="75116"/>
             </a:xfrm>
             <a:prstGeom prst="ellipse">
@@ -2749,7 +2749,7 @@
           </p:nvSpPr>
           <p:spPr>
             <a:xfrm>
-              <a:off x="1589363" y="2245903"/>
+              <a:off x="1512015" y="2245890"/>
               <a:ext cx="75116" cy="75116"/>
             </a:xfrm>
             <a:prstGeom prst="ellipse">
@@ -2775,7 +2775,7 @@
           </p:nvSpPr>
           <p:spPr>
             <a:xfrm>
-              <a:off x="2232155" y="2458828"/>
+              <a:off x="2318268" y="2458915"/>
               <a:ext cx="75116" cy="75116"/>
             </a:xfrm>
             <a:prstGeom prst="ellipse">
@@ -2801,7 +2801,7 @@
           </p:nvSpPr>
           <p:spPr>
             <a:xfrm>
-              <a:off x="2241093" y="2393521"/>
+              <a:off x="2149421" y="2393646"/>
               <a:ext cx="75116" cy="75116"/>
             </a:xfrm>
             <a:prstGeom prst="ellipse">
@@ -2827,7 +2827,7 @@
           </p:nvSpPr>
           <p:spPr>
             <a:xfrm>
-              <a:off x="2212399" y="1772592"/>
+              <a:off x="2302270" y="1772602"/>
               <a:ext cx="75116" cy="75116"/>
             </a:xfrm>
             <a:prstGeom prst="ellipse">
@@ -2853,7 +2853,7 @@
           </p:nvSpPr>
           <p:spPr>
             <a:xfrm>
-              <a:off x="2193275" y="2310609"/>
+              <a:off x="2177353" y="2310727"/>
               <a:ext cx="75116" cy="75116"/>
             </a:xfrm>
             <a:prstGeom prst="ellipse">
@@ -2879,7 +2879,7 @@
           </p:nvSpPr>
           <p:spPr>
             <a:xfrm>
-              <a:off x="2230588" y="2387197"/>
+              <a:off x="2278724" y="2387233"/>
               <a:ext cx="75116" cy="75116"/>
             </a:xfrm>
             <a:prstGeom prst="ellipse">
@@ -2905,7 +2905,7 @@
           </p:nvSpPr>
           <p:spPr>
             <a:xfrm>
-              <a:off x="2200901" y="2453154"/>
+              <a:off x="2281512" y="2453176"/>
               <a:ext cx="75116" cy="75116"/>
             </a:xfrm>
             <a:prstGeom prst="ellipse">
@@ -2931,7 +2931,7 @@
           </p:nvSpPr>
           <p:spPr>
             <a:xfrm>
-              <a:off x="2314889" y="2479689"/>
+              <a:off x="2314259" y="2479780"/>
               <a:ext cx="75116" cy="75116"/>
             </a:xfrm>
             <a:prstGeom prst="ellipse">
@@ -2957,7 +2957,7 @@
           </p:nvSpPr>
           <p:spPr>
             <a:xfrm>
-              <a:off x="2276655" y="2302180"/>
+              <a:off x="2241140" y="2302229"/>
               <a:ext cx="75116" cy="75116"/>
             </a:xfrm>
             <a:prstGeom prst="ellipse">
@@ -2983,7 +2983,7 @@
           </p:nvSpPr>
           <p:spPr>
             <a:xfrm>
-              <a:off x="2226957" y="1643497"/>
+              <a:off x="2362021" y="1643471"/>
               <a:ext cx="75116" cy="75116"/>
             </a:xfrm>
             <a:prstGeom prst="ellipse">
@@ -3009,7 +3009,7 @@
           </p:nvSpPr>
           <p:spPr>
             <a:xfrm>
-              <a:off x="2247239" y="1835650"/>
+              <a:off x="2150244" y="1835625"/>
               <a:ext cx="75116" cy="75116"/>
             </a:xfrm>
             <a:prstGeom prst="ellipse">
@@ -3035,7 +3035,7 @@
           </p:nvSpPr>
           <p:spPr>
             <a:xfrm>
-              <a:off x="2219156" y="2470043"/>
+              <a:off x="2281794" y="2470027"/>
               <a:ext cx="75116" cy="75116"/>
             </a:xfrm>
             <a:prstGeom prst="ellipse">
@@ -3061,7 +3061,7 @@
           </p:nvSpPr>
           <p:spPr>
             <a:xfrm>
-              <a:off x="2260858" y="2261218"/>
+              <a:off x="2319894" y="2261239"/>
               <a:ext cx="75116" cy="75116"/>
             </a:xfrm>
             <a:prstGeom prst="ellipse">
@@ -3087,7 +3087,7 @@
           </p:nvSpPr>
           <p:spPr>
             <a:xfrm>
-              <a:off x="2302658" y="2203448"/>
+              <a:off x="2226982" y="2203493"/>
               <a:ext cx="75116" cy="75116"/>
             </a:xfrm>
             <a:prstGeom prst="ellipse">
@@ -3113,7 +3113,7 @@
           </p:nvSpPr>
           <p:spPr>
             <a:xfrm>
-              <a:off x="2286145" y="2213560"/>
+              <a:off x="2320989" y="2213546"/>
               <a:ext cx="75116" cy="75116"/>
             </a:xfrm>
             <a:prstGeom prst="ellipse">
@@ -3139,7 +3139,7 @@
           </p:nvSpPr>
           <p:spPr>
             <a:xfrm>
-              <a:off x="2338066" y="2380015"/>
+              <a:off x="2310482" y="2380120"/>
               <a:ext cx="75116" cy="75116"/>
             </a:xfrm>
             <a:prstGeom prst="ellipse">
@@ -3165,7 +3165,7 @@
           </p:nvSpPr>
           <p:spPr>
             <a:xfrm>
-              <a:off x="2343936" y="2318322"/>
+              <a:off x="2262562" y="2318358"/>
               <a:ext cx="75116" cy="75116"/>
             </a:xfrm>
             <a:prstGeom prst="ellipse">
@@ -3191,7 +3191,7 @@
           </p:nvSpPr>
           <p:spPr>
             <a:xfrm>
-              <a:off x="2239340" y="1827302"/>
+              <a:off x="2360148" y="1827271"/>
               <a:ext cx="75116" cy="75116"/>
             </a:xfrm>
             <a:prstGeom prst="ellipse">
@@ -3217,7 +3217,7 @@
           </p:nvSpPr>
           <p:spPr>
             <a:xfrm>
-              <a:off x="2248048" y="1967766"/>
+              <a:off x="2303122" y="1967874"/>
               <a:ext cx="75116" cy="75116"/>
             </a:xfrm>
             <a:prstGeom prst="ellipse">
@@ -3243,7 +3243,7 @@
           </p:nvSpPr>
           <p:spPr>
             <a:xfrm>
-              <a:off x="3139875" y="2417156"/>
+              <a:off x="3030960" y="2417113"/>
               <a:ext cx="75116" cy="75116"/>
             </a:xfrm>
             <a:prstGeom prst="ellipse">
@@ -3269,7 +3269,7 @@
           </p:nvSpPr>
           <p:spPr>
             <a:xfrm>
-              <a:off x="3100682" y="2193571"/>
+              <a:off x="3101679" y="2193553"/>
               <a:ext cx="75116" cy="75116"/>
             </a:xfrm>
             <a:prstGeom prst="ellipse">
@@ -3295,7 +3295,7 @@
           </p:nvSpPr>
           <p:spPr>
             <a:xfrm>
-              <a:off x="2949859" y="2430002"/>
+              <a:off x="3084235" y="2430147"/>
               <a:ext cx="75116" cy="75116"/>
             </a:xfrm>
             <a:prstGeom prst="ellipse">
@@ -3321,7 +3321,7 @@
           </p:nvSpPr>
           <p:spPr>
             <a:xfrm>
-              <a:off x="3138307" y="2522901"/>
+              <a:off x="3059255" y="2522901"/>
               <a:ext cx="75116" cy="75116"/>
             </a:xfrm>
             <a:prstGeom prst="ellipse">
@@ -3347,7 +3347,7 @@
           </p:nvSpPr>
           <p:spPr>
             <a:xfrm>
-              <a:off x="2967718" y="2261180"/>
+              <a:off x="3116823" y="2261206"/>
               <a:ext cx="75116" cy="75116"/>
             </a:xfrm>
             <a:prstGeom prst="ellipse">
@@ -3373,7 +3373,7 @@
           </p:nvSpPr>
           <p:spPr>
             <a:xfrm>
-              <a:off x="3065110" y="2406309"/>
+              <a:off x="3107389" y="2406296"/>
               <a:ext cx="75116" cy="75116"/>
             </a:xfrm>
             <a:prstGeom prst="ellipse">
@@ -3399,7 +3399,7 @@
           </p:nvSpPr>
           <p:spPr>
             <a:xfrm>
-              <a:off x="2960785" y="1466047"/>
+              <a:off x="3090377" y="1465923"/>
               <a:ext cx="75116" cy="75116"/>
             </a:xfrm>
             <a:prstGeom prst="ellipse">
@@ -3425,7 +3425,7 @@
           </p:nvSpPr>
           <p:spPr>
             <a:xfrm>
-              <a:off x="2995923" y="2453237"/>
+              <a:off x="3072245" y="2453364"/>
               <a:ext cx="75116" cy="75116"/>
             </a:xfrm>
             <a:prstGeom prst="ellipse">
@@ -3451,7 +3451,7 @@
           </p:nvSpPr>
           <p:spPr>
             <a:xfrm>
-              <a:off x="3098906" y="2100317"/>
+              <a:off x="3063656" y="2100442"/>
               <a:ext cx="75116" cy="75116"/>
             </a:xfrm>
             <a:prstGeom prst="ellipse">
@@ -3477,7 +3477,7 @@
           </p:nvSpPr>
           <p:spPr>
             <a:xfrm>
-              <a:off x="3119790" y="1757978"/>
+              <a:off x="2935410" y="1757883"/>
               <a:ext cx="75116" cy="75116"/>
             </a:xfrm>
             <a:prstGeom prst="ellipse">
@@ -3503,7 +3503,7 @@
           </p:nvSpPr>
           <p:spPr>
             <a:xfrm>
-              <a:off x="3105599" y="1195659"/>
+              <a:off x="3048996" y="1195659"/>
               <a:ext cx="75116" cy="75116"/>
             </a:xfrm>
             <a:prstGeom prst="ellipse">
@@ -3529,7 +3529,7 @@
           </p:nvSpPr>
           <p:spPr>
             <a:xfrm>
-              <a:off x="2941028" y="1997543"/>
+              <a:off x="3029903" y="1997471"/>
               <a:ext cx="75116" cy="75116"/>
             </a:xfrm>
             <a:prstGeom prst="ellipse">
@@ -3555,7 +3555,7 @@
           </p:nvSpPr>
           <p:spPr>
             <a:xfrm>
-              <a:off x="3128026" y="2167814"/>
+              <a:off x="3011950" y="2167826"/>
               <a:ext cx="75116" cy="75116"/>
             </a:xfrm>
             <a:prstGeom prst="ellipse">
@@ -3581,7 +3581,7 @@
           </p:nvSpPr>
           <p:spPr>
             <a:xfrm>
-              <a:off x="3136477" y="2023944"/>
+              <a:off x="3089669" y="2023899"/>
               <a:ext cx="75116" cy="75116"/>
             </a:xfrm>
             <a:prstGeom prst="ellipse">
@@ -3607,7 +3607,7 @@
           </p:nvSpPr>
           <p:spPr>
             <a:xfrm>
-              <a:off x="2993177" y="2141258"/>
+              <a:off x="2992776" y="2141186"/>
               <a:ext cx="75116" cy="75116"/>
             </a:xfrm>
             <a:prstGeom prst="ellipse">
@@ -3633,7 +3633,7 @@
           </p:nvSpPr>
           <p:spPr>
             <a:xfrm>
-              <a:off x="2982969" y="2297439"/>
+              <a:off x="3003699" y="2297486"/>
               <a:ext cx="75116" cy="75116"/>
             </a:xfrm>
             <a:prstGeom prst="ellipse">
@@ -3659,7 +3659,7 @@
           </p:nvSpPr>
           <p:spPr>
             <a:xfrm>
-              <a:off x="2939855" y="2208053"/>
+              <a:off x="3041550" y="2208170"/>
               <a:ext cx="75116" cy="75116"/>
             </a:xfrm>
             <a:prstGeom prst="ellipse">
@@ -3685,7 +3685,7 @@
           </p:nvSpPr>
           <p:spPr>
             <a:xfrm>
-              <a:off x="2946406" y="2193205"/>
+              <a:off x="2924268" y="2193185"/>
               <a:ext cx="75116" cy="75116"/>
             </a:xfrm>
             <a:prstGeom prst="ellipse">
@@ -3711,7 +3711,7 @@
           </p:nvSpPr>
           <p:spPr>
             <a:xfrm>
-              <a:off x="3101223" y="2296009"/>
+              <a:off x="3075625" y="2296159"/>
               <a:ext cx="75116" cy="75116"/>
             </a:xfrm>
             <a:prstGeom prst="ellipse">
@@ -3737,7 +3737,7 @@
           </p:nvSpPr>
           <p:spPr>
             <a:xfrm>
-              <a:off x="3046830" y="2285293"/>
+              <a:off x="3062467" y="2285373"/>
               <a:ext cx="75116" cy="75116"/>
             </a:xfrm>
             <a:prstGeom prst="ellipse">
@@ -3763,7 +3763,7 @@
           </p:nvSpPr>
           <p:spPr>
             <a:xfrm>
-              <a:off x="3822883" y="2303029"/>
+              <a:off x="3804046" y="2303158"/>
               <a:ext cx="75116" cy="75116"/>
             </a:xfrm>
             <a:prstGeom prst="ellipse">
@@ -3789,7 +3789,7 @@
           </p:nvSpPr>
           <p:spPr>
             <a:xfrm>
-              <a:off x="3743325" y="2300784"/>
+              <a:off x="3825479" y="2300720"/>
               <a:ext cx="75116" cy="75116"/>
             </a:xfrm>
             <a:prstGeom prst="ellipse">
@@ -3815,7 +3815,7 @@
           </p:nvSpPr>
           <p:spPr>
             <a:xfrm>
-              <a:off x="3819124" y="2256130"/>
+              <a:off x="3830125" y="2256127"/>
               <a:ext cx="75116" cy="75116"/>
             </a:xfrm>
             <a:prstGeom prst="ellipse">
@@ -3841,7 +3841,7 @@
           </p:nvSpPr>
           <p:spPr>
             <a:xfrm>
-              <a:off x="3835053" y="2397337"/>
+              <a:off x="3691412" y="2397444"/>
               <a:ext cx="75116" cy="75116"/>
             </a:xfrm>
             <a:prstGeom prst="ellipse">
@@ -3867,7 +3867,7 @@
           </p:nvSpPr>
           <p:spPr>
             <a:xfrm>
-              <a:off x="3872688" y="2016942"/>
+              <a:off x="3759451" y="2016952"/>
               <a:ext cx="75116" cy="75116"/>
             </a:xfrm>
             <a:prstGeom prst="ellipse">
@@ -3893,7 +3893,7 @@
           </p:nvSpPr>
           <p:spPr>
             <a:xfrm>
-              <a:off x="3706448" y="2035409"/>
+              <a:off x="3845685" y="2035435"/>
               <a:ext cx="75116" cy="75116"/>
             </a:xfrm>
             <a:prstGeom prst="ellipse">
@@ -3919,7 +3919,7 @@
           </p:nvSpPr>
           <p:spPr>
             <a:xfrm>
-              <a:off x="3810862" y="2258430"/>
+              <a:off x="3834349" y="2258497"/>
               <a:ext cx="75116" cy="75116"/>
             </a:xfrm>
             <a:prstGeom prst="ellipse">
@@ -3945,7 +3945,7 @@
           </p:nvSpPr>
           <p:spPr>
             <a:xfrm>
-              <a:off x="3780456" y="2180992"/>
+              <a:off x="3774283" y="2181042"/>
               <a:ext cx="75116" cy="75116"/>
             </a:xfrm>
             <a:prstGeom prst="ellipse">
@@ -3971,7 +3971,7 @@
           </p:nvSpPr>
           <p:spPr>
             <a:xfrm>
-              <a:off x="3894352" y="2089549"/>
+              <a:off x="3841563" y="2089593"/>
               <a:ext cx="75116" cy="75116"/>
             </a:xfrm>
             <a:prstGeom prst="ellipse">
@@ -3997,7 +3997,7 @@
           </p:nvSpPr>
           <p:spPr>
             <a:xfrm>
-              <a:off x="3841042" y="1859105"/>
+              <a:off x="3786567" y="1859145"/>
               <a:ext cx="75116" cy="75116"/>
             </a:xfrm>
             <a:prstGeom prst="ellipse">
@@ -4023,7 +4023,7 @@
           </p:nvSpPr>
           <p:spPr>
             <a:xfrm>
-              <a:off x="3765138" y="1927392"/>
+              <a:off x="3687276" y="1927396"/>
               <a:ext cx="75116" cy="75116"/>
             </a:xfrm>
             <a:prstGeom prst="ellipse">
@@ -4049,7 +4049,7 @@
           </p:nvSpPr>
           <p:spPr>
             <a:xfrm>
-              <a:off x="3745483" y="1787444"/>
+              <a:off x="3746168" y="1787414"/>
               <a:ext cx="75116" cy="75116"/>
             </a:xfrm>
             <a:prstGeom prst="ellipse">
@@ -4075,7 +4075,7 @@
           </p:nvSpPr>
           <p:spPr>
             <a:xfrm>
-              <a:off x="3725434" y="2024775"/>
+              <a:off x="3867837" y="2024804"/>
               <a:ext cx="75116" cy="75116"/>
             </a:xfrm>
             <a:prstGeom prst="ellipse">
@@ -4101,7 +4101,7 @@
           </p:nvSpPr>
           <p:spPr>
             <a:xfrm>
-              <a:off x="3782034" y="1957906"/>
+              <a:off x="3794596" y="1957879"/>
               <a:ext cx="75116" cy="75116"/>
             </a:xfrm>
             <a:prstGeom prst="ellipse">
@@ -4127,7 +4127,7 @@
           </p:nvSpPr>
           <p:spPr>
             <a:xfrm>
-              <a:off x="3825286" y="2364921"/>
+              <a:off x="3687778" y="2364958"/>
               <a:ext cx="75116" cy="75116"/>
             </a:xfrm>
             <a:prstGeom prst="ellipse">
@@ -4153,7 +4153,7 @@
           </p:nvSpPr>
           <p:spPr>
             <a:xfrm>
-              <a:off x="3766783" y="2198255"/>
+              <a:off x="3894352" y="2198188"/>
               <a:ext cx="75116" cy="75116"/>
             </a:xfrm>
             <a:prstGeom prst="ellipse">
@@ -4179,7 +4179,7 @@
           </p:nvSpPr>
           <p:spPr>
             <a:xfrm>
-              <a:off x="3809888" y="2103773"/>
+              <a:off x="3887421" y="2103783"/>
               <a:ext cx="75116" cy="75116"/>
             </a:xfrm>
             <a:prstGeom prst="ellipse">
@@ -4205,7 +4205,7 @@
           </p:nvSpPr>
           <p:spPr>
             <a:xfrm>
-              <a:off x="3878932" y="2166057"/>
+              <a:off x="3882302" y="2166062"/>
               <a:ext cx="75116" cy="75116"/>
             </a:xfrm>
             <a:prstGeom prst="ellipse">
@@ -4231,7 +4231,7 @@
           </p:nvSpPr>
           <p:spPr>
             <a:xfrm>
-              <a:off x="3751525" y="1902847"/>
+              <a:off x="3886334" y="1902913"/>
               <a:ext cx="75116" cy="75116"/>
             </a:xfrm>
             <a:prstGeom prst="ellipse">
@@ -4257,7 +4257,7 @@
           </p:nvSpPr>
           <p:spPr>
             <a:xfrm>
-              <a:off x="3816808" y="2136583"/>
+              <a:off x="3734170" y="2136506"/>
               <a:ext cx="75116" cy="75116"/>
             </a:xfrm>
             <a:prstGeom prst="ellipse">
@@ -4283,7 +4283,7 @@
           </p:nvSpPr>
           <p:spPr>
             <a:xfrm>
-              <a:off x="3813063" y="1999428"/>
+              <a:off x="3814169" y="1999410"/>
               <a:ext cx="75116" cy="75116"/>
             </a:xfrm>
             <a:prstGeom prst="ellipse">
@@ -4309,7 +4309,7 @@
           </p:nvSpPr>
           <p:spPr>
             <a:xfrm>
-              <a:off x="3765950" y="1886538"/>
+              <a:off x="3734563" y="1886503"/>
               <a:ext cx="75116" cy="75116"/>
             </a:xfrm>
             <a:prstGeom prst="ellipse">
@@ -4335,7 +4335,7 @@
           </p:nvSpPr>
           <p:spPr>
             <a:xfrm>
-              <a:off x="3696374" y="2056281"/>
+              <a:off x="3716529" y="2056248"/>
               <a:ext cx="75116" cy="75116"/>
             </a:xfrm>
             <a:prstGeom prst="ellipse">
@@ -4361,7 +4361,7 @@
           </p:nvSpPr>
           <p:spPr>
             <a:xfrm>
-              <a:off x="3880038" y="2025623"/>
+              <a:off x="3712619" y="2025521"/>
               <a:ext cx="75116" cy="75116"/>
             </a:xfrm>
             <a:prstGeom prst="ellipse">
@@ -4387,42 +4387,42 @@
           </p:nvSpPr>
           <p:spPr>
             <a:xfrm>
-              <a:off x="1528089" y="1940815"/>
-              <a:ext cx="2311352" cy="573317"/>
+              <a:off x="1523263" y="1940811"/>
+              <a:ext cx="2311051" cy="573365"/>
             </a:xfrm>
             <a:custGeom>
               <a:avLst/>
               <a:pathLst>
-                <a:path w="2311352" h="573317">
+                <a:path w="2311051" h="573365">
                   <a:moveTo>
-                    <a:pt x="0" y="162716"/>
+                    <a:pt x="0" y="162730"/>
                   </a:moveTo>
                   <a:lnTo>
-                    <a:pt x="1221135" y="156156"/>
+                    <a:pt x="1220976" y="156169"/>
                   </a:lnTo>
                   <a:lnTo>
-                    <a:pt x="1540901" y="124122"/>
+                    <a:pt x="1540700" y="124133"/>
                   </a:lnTo>
                   <a:lnTo>
-                    <a:pt x="1991586" y="56953"/>
+                    <a:pt x="1991326" y="56958"/>
                   </a:lnTo>
                   <a:lnTo>
-                    <a:pt x="2311352" y="0"/>
+                    <a:pt x="2311051" y="0"/>
                   </a:lnTo>
                   <a:lnTo>
-                    <a:pt x="2311352" y="371529"/>
+                    <a:pt x="2311051" y="371560"/>
                   </a:lnTo>
                   <a:lnTo>
-                    <a:pt x="1991586" y="365003"/>
+                    <a:pt x="1991326" y="365033"/>
                   </a:lnTo>
                   <a:lnTo>
-                    <a:pt x="1540901" y="368908"/>
+                    <a:pt x="1540700" y="368938"/>
                   </a:lnTo>
                   <a:lnTo>
-                    <a:pt x="1221135" y="387302"/>
+                    <a:pt x="1220976" y="387334"/>
                   </a:lnTo>
                   <a:lnTo>
-                    <a:pt x="0" y="573317"/>
+                    <a:pt x="0" y="573365"/>
                   </a:lnTo>
                   <a:close/>
                 </a:path>
@@ -4448,27 +4448,27 @@
           </p:nvSpPr>
           <p:spPr>
             <a:xfrm>
-              <a:off x="1528089" y="1940815"/>
-              <a:ext cx="2311352" cy="162716"/>
+              <a:off x="1523263" y="1940811"/>
+              <a:ext cx="2311051" cy="162730"/>
             </a:xfrm>
             <a:custGeom>
               <a:avLst/>
               <a:pathLst>
-                <a:path w="2311352" h="162716">
+                <a:path w="2311051" h="162730">
                   <a:moveTo>
-                    <a:pt x="0" y="162716"/>
+                    <a:pt x="0" y="162730"/>
                   </a:moveTo>
                   <a:lnTo>
-                    <a:pt x="1221135" y="156156"/>
+                    <a:pt x="1220976" y="156169"/>
                   </a:lnTo>
                   <a:lnTo>
-                    <a:pt x="1540901" y="124122"/>
+                    <a:pt x="1540700" y="124133"/>
                   </a:lnTo>
                   <a:lnTo>
-                    <a:pt x="1991586" y="56953"/>
+                    <a:pt x="1991326" y="56958"/>
                   </a:lnTo>
                   <a:lnTo>
-                    <a:pt x="2311352" y="0"/>
+                    <a:pt x="2311051" y="0"/>
                   </a:lnTo>
                 </a:path>
               </a:pathLst>
@@ -4488,27 +4488,27 @@
           </p:nvSpPr>
           <p:spPr>
             <a:xfrm>
-              <a:off x="1528089" y="2305818"/>
-              <a:ext cx="2311352" cy="208314"/>
+              <a:off x="1523263" y="2305845"/>
+              <a:ext cx="2311051" cy="208331"/>
             </a:xfrm>
             <a:custGeom>
               <a:avLst/>
               <a:pathLst>
-                <a:path w="2311352" h="208314">
+                <a:path w="2311051" h="208331">
                   <a:moveTo>
-                    <a:pt x="2311352" y="6525"/>
+                    <a:pt x="2311051" y="6526"/>
                   </a:moveTo>
                   <a:lnTo>
-                    <a:pt x="1991586" y="0"/>
+                    <a:pt x="1991326" y="0"/>
                   </a:lnTo>
                   <a:lnTo>
-                    <a:pt x="1540901" y="3904"/>
+                    <a:pt x="1540700" y="3904"/>
                   </a:lnTo>
                   <a:lnTo>
-                    <a:pt x="1221135" y="22298"/>
+                    <a:pt x="1220976" y="22300"/>
                   </a:lnTo>
                   <a:lnTo>
-                    <a:pt x="0" y="208314"/>
+                    <a:pt x="0" y="208331"/>
                   </a:lnTo>
                 </a:path>
               </a:pathLst>
@@ -4528,27 +4528,27 @@
           </p:nvSpPr>
           <p:spPr>
             <a:xfrm>
-              <a:off x="1528089" y="2126579"/>
-              <a:ext cx="2311352" cy="182252"/>
+              <a:off x="1523263" y="2126592"/>
+              <a:ext cx="2311051" cy="182267"/>
             </a:xfrm>
             <a:custGeom>
               <a:avLst/>
               <a:pathLst>
-                <a:path w="2311352" h="182252">
+                <a:path w="2311051" h="182267">
                   <a:moveTo>
-                    <a:pt x="0" y="182252"/>
+                    <a:pt x="0" y="182267"/>
                   </a:moveTo>
                   <a:lnTo>
-                    <a:pt x="1221135" y="85964"/>
+                    <a:pt x="1220976" y="85971"/>
                   </a:lnTo>
                   <a:lnTo>
-                    <a:pt x="1540901" y="60750"/>
+                    <a:pt x="1540700" y="60755"/>
                   </a:lnTo>
                   <a:lnTo>
-                    <a:pt x="1991586" y="25213"/>
+                    <a:pt x="1991326" y="25215"/>
                   </a:lnTo>
                   <a:lnTo>
-                    <a:pt x="2311352" y="0"/>
+                    <a:pt x="2311051" y="0"/>
                   </a:lnTo>
                 </a:path>
               </a:pathLst>
@@ -4577,7 +4577,7 @@
           </p:nvSpPr>
           <p:spPr>
             <a:xfrm>
-              <a:off x="3350558" y="1260043"/>
+              <a:off x="3345430" y="1259992"/>
               <a:ext cx="63550" cy="82021"/>
             </a:xfrm>
             <a:prstGeom prst="rect">
@@ -4623,7 +4623,7 @@
           </p:nvSpPr>
           <p:spPr>
             <a:xfrm>
-              <a:off x="3423298" y="1260043"/>
+              <a:off x="3418171" y="1259992"/>
               <a:ext cx="416143" cy="82021"/>
             </a:xfrm>
             <a:prstGeom prst="rect">
@@ -4706,7 +4706,7 @@
                 </a:path>
               </a:pathLst>
             </a:custGeom>
-            <a:ln w="21681" cap="flat">
+            <a:ln w="11086" cap="flat">
               <a:solidFill>
                 <a:srgbClr val="000000">
                   <a:alpha val="100000"/>
@@ -4730,7 +4730,7 @@
           </p:nvSpPr>
           <p:spPr>
             <a:xfrm rot="-5400000">
-              <a:off x="1140466" y="2320122"/>
+              <a:off x="1140466" y="2320153"/>
               <a:ext cx="141274" cy="72877"/>
             </a:xfrm>
             <a:prstGeom prst="rect">
@@ -4776,7 +4776,7 @@
           </p:nvSpPr>
           <p:spPr>
             <a:xfrm rot="-5400000">
-              <a:off x="1140466" y="1923606"/>
+              <a:off x="1140466" y="1923604"/>
               <a:ext cx="141274" cy="72877"/>
             </a:xfrm>
             <a:prstGeom prst="rect">
@@ -4822,7 +4822,7 @@
           </p:nvSpPr>
           <p:spPr>
             <a:xfrm rot="-5400000">
-              <a:off x="1140466" y="1527090"/>
+              <a:off x="1140466" y="1527056"/>
               <a:ext cx="141274" cy="72877"/>
             </a:xfrm>
             <a:prstGeom prst="rect">
@@ -4868,7 +4868,7 @@
           </p:nvSpPr>
           <p:spPr>
             <a:xfrm rot="-5400000">
-              <a:off x="1112211" y="1130575"/>
+              <a:off x="1112211" y="1130507"/>
               <a:ext cx="197784" cy="72877"/>
             </a:xfrm>
             <a:prstGeom prst="rect">
@@ -4914,7 +4914,7 @@
           </p:nvSpPr>
           <p:spPr>
             <a:xfrm>
-              <a:off x="1281564" y="2356561"/>
+              <a:off x="1281564" y="2356592"/>
               <a:ext cx="28468" cy="0"/>
             </a:xfrm>
             <a:custGeom>
@@ -4930,9 +4930,9 @@
                 </a:path>
               </a:pathLst>
             </a:custGeom>
-            <a:ln w="21681" cap="flat">
+            <a:ln w="11086" cap="flat">
               <a:solidFill>
-                <a:srgbClr val="000000">
+                <a:srgbClr val="333333">
                   <a:alpha val="100000"/>
                 </a:srgbClr>
               </a:solidFill>
@@ -4954,7 +4954,7 @@
           </p:nvSpPr>
           <p:spPr>
             <a:xfrm>
-              <a:off x="1281564" y="1960045"/>
+              <a:off x="1281564" y="1960043"/>
               <a:ext cx="28468" cy="0"/>
             </a:xfrm>
             <a:custGeom>
@@ -4970,9 +4970,9 @@
                 </a:path>
               </a:pathLst>
             </a:custGeom>
-            <a:ln w="21681" cap="flat">
+            <a:ln w="11086" cap="flat">
               <a:solidFill>
-                <a:srgbClr val="000000">
+                <a:srgbClr val="333333">
                   <a:alpha val="100000"/>
                 </a:srgbClr>
               </a:solidFill>
@@ -4994,7 +4994,7 @@
           </p:nvSpPr>
           <p:spPr>
             <a:xfrm>
-              <a:off x="1281564" y="1563529"/>
+              <a:off x="1281564" y="1563495"/>
               <a:ext cx="28468" cy="0"/>
             </a:xfrm>
             <a:custGeom>
@@ -5010,9 +5010,9 @@
                 </a:path>
               </a:pathLst>
             </a:custGeom>
-            <a:ln w="21681" cap="flat">
+            <a:ln w="11086" cap="flat">
               <a:solidFill>
-                <a:srgbClr val="000000">
+                <a:srgbClr val="333333">
                   <a:alpha val="100000"/>
                 </a:srgbClr>
               </a:solidFill>
@@ -5034,7 +5034,7 @@
           </p:nvSpPr>
           <p:spPr>
             <a:xfrm>
-              <a:off x="1281564" y="1167014"/>
+              <a:off x="1281564" y="1166946"/>
               <a:ext cx="28468" cy="0"/>
             </a:xfrm>
             <a:custGeom>
@@ -5050,9 +5050,9 @@
                 </a:path>
               </a:pathLst>
             </a:custGeom>
-            <a:ln w="21681" cap="flat">
+            <a:ln w="11086" cap="flat">
               <a:solidFill>
-                <a:srgbClr val="000000">
+                <a:srgbClr val="333333">
                   <a:alpha val="100000"/>
                 </a:srgbClr>
               </a:solidFill>
@@ -5090,7 +5090,7 @@
                 </a:path>
               </a:pathLst>
             </a:custGeom>
-            <a:ln w="21681" cap="flat">
+            <a:ln w="11086" cap="flat">
               <a:solidFill>
                 <a:srgbClr val="000000">
                   <a:alpha val="100000"/>
@@ -5114,7 +5114,7 @@
           </p:nvSpPr>
           <p:spPr>
             <a:xfrm>
-              <a:off x="1528089" y="2626821"/>
+              <a:off x="1523263" y="2626821"/>
               <a:ext cx="0" cy="28468"/>
             </a:xfrm>
             <a:custGeom>
@@ -5130,9 +5130,9 @@
                 </a:path>
               </a:pathLst>
             </a:custGeom>
-            <a:ln w="21681" cap="flat">
+            <a:ln w="11086" cap="flat">
               <a:solidFill>
-                <a:srgbClr val="000000">
+                <a:srgbClr val="333333">
                   <a:alpha val="100000"/>
                 </a:srgbClr>
               </a:solidFill>
@@ -5154,7 +5154,7 @@
           </p:nvSpPr>
           <p:spPr>
             <a:xfrm>
-              <a:off x="2298540" y="2626821"/>
+              <a:off x="2293613" y="2626821"/>
               <a:ext cx="0" cy="28468"/>
             </a:xfrm>
             <a:custGeom>
@@ -5170,9 +5170,9 @@
                 </a:path>
               </a:pathLst>
             </a:custGeom>
-            <a:ln w="21681" cap="flat">
+            <a:ln w="11086" cap="flat">
               <a:solidFill>
-                <a:srgbClr val="000000">
+                <a:srgbClr val="333333">
                   <a:alpha val="100000"/>
                 </a:srgbClr>
               </a:solidFill>
@@ -5194,7 +5194,7 @@
           </p:nvSpPr>
           <p:spPr>
             <a:xfrm>
-              <a:off x="3068991" y="2626821"/>
+              <a:off x="3063964" y="2626821"/>
               <a:ext cx="0" cy="28468"/>
             </a:xfrm>
             <a:custGeom>
@@ -5210,9 +5210,9 @@
                 </a:path>
               </a:pathLst>
             </a:custGeom>
-            <a:ln w="21681" cap="flat">
+            <a:ln w="11086" cap="flat">
               <a:solidFill>
-                <a:srgbClr val="000000">
+                <a:srgbClr val="333333">
                   <a:alpha val="100000"/>
                 </a:srgbClr>
               </a:solidFill>
@@ -5234,7 +5234,7 @@
           </p:nvSpPr>
           <p:spPr>
             <a:xfrm>
-              <a:off x="3839442" y="2626821"/>
+              <a:off x="3834314" y="2626821"/>
               <a:ext cx="0" cy="28468"/>
             </a:xfrm>
             <a:custGeom>
@@ -5250,9 +5250,9 @@
                 </a:path>
               </a:pathLst>
             </a:custGeom>
-            <a:ln w="21681" cap="flat">
+            <a:ln w="11086" cap="flat">
               <a:solidFill>
-                <a:srgbClr val="000000">
+                <a:srgbClr val="333333">
                   <a:alpha val="100000"/>
                 </a:srgbClr>
               </a:solidFill>
@@ -5274,7 +5274,7 @@
           </p:nvSpPr>
           <p:spPr>
             <a:xfrm>
-              <a:off x="1499834" y="2678064"/>
+              <a:off x="1495008" y="2678064"/>
               <a:ext cx="56509" cy="72877"/>
             </a:xfrm>
             <a:prstGeom prst="rect">
@@ -5320,7 +5320,7 @@
           </p:nvSpPr>
           <p:spPr>
             <a:xfrm>
-              <a:off x="2270285" y="2678064"/>
+              <a:off x="2265358" y="2678064"/>
               <a:ext cx="56509" cy="72877"/>
             </a:xfrm>
             <a:prstGeom prst="rect">
@@ -5366,7 +5366,7 @@
           </p:nvSpPr>
           <p:spPr>
             <a:xfrm>
-              <a:off x="3040736" y="2678064"/>
+              <a:off x="3035709" y="2678064"/>
               <a:ext cx="56509" cy="72877"/>
             </a:xfrm>
             <a:prstGeom prst="rect">
@@ -5412,7 +5412,7 @@
           </p:nvSpPr>
           <p:spPr>
             <a:xfrm>
-              <a:off x="3811187" y="2678064"/>
+              <a:off x="3806059" y="2678064"/>
               <a:ext cx="56509" cy="72877"/>
             </a:xfrm>
             <a:prstGeom prst="rect">
@@ -5530,7 +5530,7 @@
           </p:nvSpPr>
           <p:spPr>
             <a:xfrm>
-              <a:off x="4310596" y="2219355"/>
+              <a:off x="4432258" y="2218936"/>
               <a:ext cx="75116" cy="75116"/>
             </a:xfrm>
             <a:prstGeom prst="ellipse">
@@ -5556,7 +5556,7 @@
           </p:nvSpPr>
           <p:spPr>
             <a:xfrm>
-              <a:off x="4274418" y="1418654"/>
+              <a:off x="4420433" y="1418701"/>
               <a:ext cx="75116" cy="75116"/>
             </a:xfrm>
             <a:prstGeom prst="ellipse">
@@ -5582,7 +5582,7 @@
           </p:nvSpPr>
           <p:spPr>
             <a:xfrm>
-              <a:off x="4322180" y="2211765"/>
+              <a:off x="4324655" y="2211380"/>
               <a:ext cx="75116" cy="75116"/>
             </a:xfrm>
             <a:prstGeom prst="ellipse">
@@ -5608,7 +5608,7 @@
           </p:nvSpPr>
           <p:spPr>
             <a:xfrm>
-              <a:off x="4361600" y="2117539"/>
+              <a:off x="4283864" y="2117292"/>
               <a:ext cx="75116" cy="75116"/>
             </a:xfrm>
             <a:prstGeom prst="ellipse">
@@ -5634,7 +5634,7 @@
           </p:nvSpPr>
           <p:spPr>
             <a:xfrm>
-              <a:off x="4309241" y="2291114"/>
+              <a:off x="4442963" y="2290835"/>
               <a:ext cx="75116" cy="75116"/>
             </a:xfrm>
             <a:prstGeom prst="ellipse">
@@ -5660,7 +5660,7 @@
           </p:nvSpPr>
           <p:spPr>
             <a:xfrm>
-              <a:off x="4464624" y="1660873"/>
+              <a:off x="4374365" y="1660924"/>
               <a:ext cx="75116" cy="75116"/>
             </a:xfrm>
             <a:prstGeom prst="ellipse">
@@ -5686,7 +5686,7 @@
           </p:nvSpPr>
           <p:spPr>
             <a:xfrm>
-              <a:off x="4434932" y="1252747"/>
+              <a:off x="4299663" y="1252607"/>
               <a:ext cx="75116" cy="75116"/>
             </a:xfrm>
             <a:prstGeom prst="ellipse">
@@ -5712,7 +5712,7 @@
           </p:nvSpPr>
           <p:spPr>
             <a:xfrm>
-              <a:off x="4292680" y="1991998"/>
+              <a:off x="4273743" y="1991651"/>
               <a:ext cx="75116" cy="75116"/>
             </a:xfrm>
             <a:prstGeom prst="ellipse">
@@ -5738,7 +5738,7 @@
           </p:nvSpPr>
           <p:spPr>
             <a:xfrm>
-              <a:off x="4345097" y="2485864"/>
+              <a:off x="4281202" y="2485508"/>
               <a:ext cx="75116" cy="75116"/>
             </a:xfrm>
             <a:prstGeom prst="ellipse">
@@ -5764,7 +5764,7 @@
           </p:nvSpPr>
           <p:spPr>
             <a:xfrm>
-              <a:off x="4273743" y="1954397"/>
+              <a:off x="4316909" y="1954204"/>
               <a:ext cx="75116" cy="75116"/>
             </a:xfrm>
             <a:prstGeom prst="ellipse">
@@ -5790,7 +5790,7 @@
           </p:nvSpPr>
           <p:spPr>
             <a:xfrm>
-              <a:off x="5051674" y="2505326"/>
+              <a:off x="5163860" y="2505003"/>
               <a:ext cx="75116" cy="75116"/>
             </a:xfrm>
             <a:prstGeom prst="ellipse">
@@ -5816,7 +5816,7 @@
           </p:nvSpPr>
           <p:spPr>
             <a:xfrm>
-              <a:off x="5071243" y="1661274"/>
+              <a:off x="5121493" y="1661169"/>
               <a:ext cx="75116" cy="75116"/>
             </a:xfrm>
             <a:prstGeom prst="ellipse">
@@ -5842,7 +5842,7 @@
           </p:nvSpPr>
           <p:spPr>
             <a:xfrm>
-              <a:off x="5133030" y="2131704"/>
+              <a:off x="5230882" y="2131404"/>
               <a:ext cx="75116" cy="75116"/>
             </a:xfrm>
             <a:prstGeom prst="ellipse">
@@ -5868,7 +5868,7 @@
           </p:nvSpPr>
           <p:spPr>
             <a:xfrm>
-              <a:off x="5100317" y="2522901"/>
+              <a:off x="5111451" y="2522901"/>
               <a:ext cx="75116" cy="75116"/>
             </a:xfrm>
             <a:prstGeom prst="ellipse">
@@ -5894,7 +5894,7 @@
           </p:nvSpPr>
           <p:spPr>
             <a:xfrm>
-              <a:off x="5198543" y="1833564"/>
+              <a:off x="5144546" y="1833336"/>
               <a:ext cx="75116" cy="75116"/>
             </a:xfrm>
             <a:prstGeom prst="ellipse">
@@ -5920,7 +5920,7 @@
           </p:nvSpPr>
           <p:spPr>
             <a:xfrm>
-              <a:off x="5133684" y="1195659"/>
+              <a:off x="5082736" y="1195659"/>
               <a:ext cx="75116" cy="75116"/>
             </a:xfrm>
             <a:prstGeom prst="ellipse">
@@ -5946,7 +5946,7 @@
           </p:nvSpPr>
           <p:spPr>
             <a:xfrm>
-              <a:off x="5147057" y="2492414"/>
+              <a:off x="5154164" y="2491915"/>
               <a:ext cx="75116" cy="75116"/>
             </a:xfrm>
             <a:prstGeom prst="ellipse">
@@ -5972,7 +5972,7 @@
           </p:nvSpPr>
           <p:spPr>
             <a:xfrm>
-              <a:off x="5147563" y="2437765"/>
+              <a:off x="5183666" y="2437271"/>
               <a:ext cx="75116" cy="75116"/>
             </a:xfrm>
             <a:prstGeom prst="ellipse">
@@ -5998,7 +5998,7 @@
           </p:nvSpPr>
           <p:spPr>
             <a:xfrm>
-              <a:off x="5108627" y="2154193"/>
+              <a:off x="5040196" y="2153721"/>
               <a:ext cx="75116" cy="75116"/>
             </a:xfrm>
             <a:prstGeom prst="ellipse">
@@ -6024,7 +6024,7 @@
           </p:nvSpPr>
           <p:spPr>
             <a:xfrm>
-              <a:off x="5046417" y="2498388"/>
+              <a:off x="5140279" y="2498434"/>
               <a:ext cx="75116" cy="75116"/>
             </a:xfrm>
             <a:prstGeom prst="ellipse">
@@ -6050,7 +6050,7 @@
           </p:nvSpPr>
           <p:spPr>
             <a:xfrm>
-              <a:off x="5102425" y="2304438"/>
+              <a:off x="5086861" y="2304151"/>
               <a:ext cx="75116" cy="75116"/>
             </a:xfrm>
             <a:prstGeom prst="ellipse">
@@ -6076,7 +6076,7 @@
           </p:nvSpPr>
           <p:spPr>
             <a:xfrm>
-              <a:off x="5190243" y="2495386"/>
+              <a:off x="5085945" y="2494957"/>
               <a:ext cx="75116" cy="75116"/>
             </a:xfrm>
             <a:prstGeom prst="ellipse">
@@ -6102,7 +6102,7 @@
           </p:nvSpPr>
           <p:spPr>
             <a:xfrm>
-              <a:off x="5085835" y="2046877"/>
+              <a:off x="5133034" y="2046672"/>
               <a:ext cx="75116" cy="75116"/>
             </a:xfrm>
             <a:prstGeom prst="ellipse">
@@ -6128,7 +6128,7 @@
           </p:nvSpPr>
           <p:spPr>
             <a:xfrm>
-              <a:off x="5026368" y="1922855"/>
+              <a:off x="5152175" y="1922601"/>
               <a:ext cx="75116" cy="75116"/>
             </a:xfrm>
             <a:prstGeom prst="ellipse">
@@ -6154,7 +6154,7 @@
           </p:nvSpPr>
           <p:spPr>
             <a:xfrm>
-              <a:off x="5058007" y="1978528"/>
+              <a:off x="5146396" y="1978185"/>
               <a:ext cx="75116" cy="75116"/>
             </a:xfrm>
             <a:prstGeom prst="ellipse">
@@ -6180,7 +6180,7 @@
           </p:nvSpPr>
           <p:spPr>
             <a:xfrm>
-              <a:off x="5024850" y="1796145"/>
+              <a:off x="5131838" y="1795945"/>
               <a:ext cx="75116" cy="75116"/>
             </a:xfrm>
             <a:prstGeom prst="ellipse">
@@ -6206,7 +6206,7 @@
           </p:nvSpPr>
           <p:spPr>
             <a:xfrm>
-              <a:off x="5171430" y="2274036"/>
+              <a:off x="5182703" y="2273761"/>
               <a:ext cx="75116" cy="75116"/>
             </a:xfrm>
             <a:prstGeom prst="ellipse">
@@ -6232,7 +6232,7 @@
           </p:nvSpPr>
           <p:spPr>
             <a:xfrm>
-              <a:off x="5081210" y="2488738"/>
+              <a:off x="5184193" y="2488706"/>
               <a:ext cx="75116" cy="75116"/>
             </a:xfrm>
             <a:prstGeom prst="ellipse">
@@ -6258,7 +6258,7 @@
           </p:nvSpPr>
           <p:spPr>
             <a:xfrm>
-              <a:off x="5912678" y="2253996"/>
+              <a:off x="6006829" y="2253834"/>
               <a:ext cx="75116" cy="75116"/>
             </a:xfrm>
             <a:prstGeom prst="ellipse">
@@ -6284,7 +6284,7 @@
           </p:nvSpPr>
           <p:spPr>
             <a:xfrm>
-              <a:off x="5882445" y="2341523"/>
+              <a:off x="5866159" y="2341201"/>
               <a:ext cx="75116" cy="75116"/>
             </a:xfrm>
             <a:prstGeom prst="ellipse">
@@ -6310,7 +6310,7 @@
           </p:nvSpPr>
           <p:spPr>
             <a:xfrm>
-              <a:off x="5827061" y="2435749"/>
+              <a:off x="5820089" y="2435474"/>
               <a:ext cx="75116" cy="75116"/>
             </a:xfrm>
             <a:prstGeom prst="ellipse">
@@ -6336,7 +6336,7 @@
           </p:nvSpPr>
           <p:spPr>
             <a:xfrm>
-              <a:off x="5870842" y="2210566"/>
+              <a:off x="5950929" y="2210333"/>
               <a:ext cx="75116" cy="75116"/>
             </a:xfrm>
             <a:prstGeom prst="ellipse">
@@ -6362,7 +6362,7 @@
           </p:nvSpPr>
           <p:spPr>
             <a:xfrm>
-              <a:off x="5831270" y="1722001"/>
+              <a:off x="6008682" y="1722022"/>
               <a:ext cx="75116" cy="75116"/>
             </a:xfrm>
             <a:prstGeom prst="ellipse">
@@ -6388,7 +6388,7 @@
           </p:nvSpPr>
           <p:spPr>
             <a:xfrm>
-              <a:off x="5908405" y="1396296"/>
+              <a:off x="5844589" y="1395864"/>
               <a:ext cx="75116" cy="75116"/>
             </a:xfrm>
             <a:prstGeom prst="ellipse">
@@ -6414,7 +6414,7 @@
           </p:nvSpPr>
           <p:spPr>
             <a:xfrm>
-              <a:off x="5857916" y="1616296"/>
+              <a:off x="5854570" y="1616358"/>
               <a:ext cx="75116" cy="75116"/>
             </a:xfrm>
             <a:prstGeom prst="ellipse">
@@ -6440,7 +6440,7 @@
           </p:nvSpPr>
           <p:spPr>
             <a:xfrm>
-              <a:off x="5988060" y="2283332"/>
+              <a:off x="5833841" y="2283216"/>
               <a:ext cx="75116" cy="75116"/>
             </a:xfrm>
             <a:prstGeom prst="ellipse">
@@ -6466,7 +6466,7 @@
           </p:nvSpPr>
           <p:spPr>
             <a:xfrm>
-              <a:off x="5900582" y="2228929"/>
+              <a:off x="6003752" y="2228657"/>
               <a:ext cx="75116" cy="75116"/>
             </a:xfrm>
             <a:prstGeom prst="ellipse">
@@ -6492,7 +6492,7 @@
           </p:nvSpPr>
           <p:spPr>
             <a:xfrm>
-              <a:off x="5926806" y="1686558"/>
+              <a:off x="6015626" y="1686328"/>
               <a:ext cx="75116" cy="75116"/>
             </a:xfrm>
             <a:prstGeom prst="ellipse">
@@ -6518,7 +6518,7 @@
           </p:nvSpPr>
           <p:spPr>
             <a:xfrm>
-              <a:off x="5905268" y="1880528"/>
+              <a:off x="5831411" y="1880221"/>
               <a:ext cx="75116" cy="75116"/>
             </a:xfrm>
             <a:prstGeom prst="ellipse">
@@ -6544,7 +6544,7 @@
           </p:nvSpPr>
           <p:spPr>
             <a:xfrm>
-              <a:off x="5828235" y="2412370"/>
+              <a:off x="5856108" y="2412048"/>
               <a:ext cx="75116" cy="75116"/>
             </a:xfrm>
             <a:prstGeom prst="ellipse">
@@ -6570,7 +6570,7 @@
           </p:nvSpPr>
           <p:spPr>
             <a:xfrm>
-              <a:off x="5910628" y="1639024"/>
+              <a:off x="5883920" y="1638741"/>
               <a:ext cx="75116" cy="75116"/>
             </a:xfrm>
             <a:prstGeom prst="ellipse">
@@ -6596,7 +6596,7 @@
           </p:nvSpPr>
           <p:spPr>
             <a:xfrm>
-              <a:off x="6006126" y="1823302"/>
+              <a:off x="5942104" y="1823243"/>
               <a:ext cx="75116" cy="75116"/>
             </a:xfrm>
             <a:prstGeom prst="ellipse">
@@ -6622,7 +6622,7 @@
           </p:nvSpPr>
           <p:spPr>
             <a:xfrm>
-              <a:off x="5905018" y="2003486"/>
+              <a:off x="5995827" y="2003311"/>
               <a:ext cx="75116" cy="75116"/>
             </a:xfrm>
             <a:prstGeom prst="ellipse">
@@ -6648,7 +6648,7 @@
           </p:nvSpPr>
           <p:spPr>
             <a:xfrm>
-              <a:off x="5870605" y="2385074"/>
+              <a:off x="5891385" y="2384666"/>
               <a:ext cx="75116" cy="75116"/>
             </a:xfrm>
             <a:prstGeom prst="ellipse">
@@ -6674,7 +6674,7 @@
           </p:nvSpPr>
           <p:spPr>
             <a:xfrm>
-              <a:off x="5841226" y="1995128"/>
+              <a:off x="5999973" y="1994862"/>
               <a:ext cx="75116" cy="75116"/>
             </a:xfrm>
             <a:prstGeom prst="ellipse">
@@ -6700,7 +6700,7 @@
           </p:nvSpPr>
           <p:spPr>
             <a:xfrm>
-              <a:off x="5840704" y="2359581"/>
+              <a:off x="5948164" y="2359330"/>
               <a:ext cx="75116" cy="75116"/>
             </a:xfrm>
             <a:prstGeom prst="ellipse">
@@ -6726,7 +6726,7 @@
           </p:nvSpPr>
           <p:spPr>
             <a:xfrm>
-              <a:off x="5846368" y="1804145"/>
+              <a:off x="5997136" y="1803835"/>
               <a:ext cx="75116" cy="75116"/>
             </a:xfrm>
             <a:prstGeom prst="ellipse">
@@ -6752,7 +6752,7 @@
           </p:nvSpPr>
           <p:spPr>
             <a:xfrm>
-              <a:off x="5861293" y="2008412"/>
+              <a:off x="5943731" y="2008446"/>
               <a:ext cx="75116" cy="75116"/>
             </a:xfrm>
             <a:prstGeom prst="ellipse">
@@ -6778,7 +6778,7 @@
           </p:nvSpPr>
           <p:spPr>
             <a:xfrm>
-              <a:off x="6603654" y="2112121"/>
+              <a:off x="6724011" y="2112073"/>
               <a:ext cx="75116" cy="75116"/>
             </a:xfrm>
             <a:prstGeom prst="ellipse">
@@ -6804,7 +6804,7 @@
           </p:nvSpPr>
           <p:spPr>
             <a:xfrm>
-              <a:off x="6663053" y="2249852"/>
+              <a:off x="6606120" y="2249518"/>
               <a:ext cx="75116" cy="75116"/>
             </a:xfrm>
             <a:prstGeom prst="ellipse">
@@ -6830,7 +6830,7 @@
           </p:nvSpPr>
           <p:spPr>
             <a:xfrm>
-              <a:off x="6770769" y="2303731"/>
+              <a:off x="6585120" y="2303493"/>
               <a:ext cx="75116" cy="75116"/>
             </a:xfrm>
             <a:prstGeom prst="ellipse">
@@ -6856,7 +6856,7 @@
           </p:nvSpPr>
           <p:spPr>
             <a:xfrm>
-              <a:off x="6631079" y="2095602"/>
+              <a:off x="6761948" y="2095337"/>
               <a:ext cx="75116" cy="75116"/>
             </a:xfrm>
             <a:prstGeom prst="ellipse">
@@ -6882,7 +6882,7 @@
           </p:nvSpPr>
           <p:spPr>
             <a:xfrm>
-              <a:off x="6715799" y="1981097"/>
+              <a:off x="6757851" y="1980728"/>
               <a:ext cx="75116" cy="75116"/>
             </a:xfrm>
             <a:prstGeom prst="ellipse">
@@ -6908,7 +6908,7 @@
           </p:nvSpPr>
           <p:spPr>
             <a:xfrm>
-              <a:off x="6565774" y="2030426"/>
+              <a:off x="6762585" y="2030345"/>
               <a:ext cx="75116" cy="75116"/>
             </a:xfrm>
             <a:prstGeom prst="ellipse">
@@ -6934,7 +6934,7 @@
           </p:nvSpPr>
           <p:spPr>
             <a:xfrm>
-              <a:off x="6565105" y="2248493"/>
+              <a:off x="6691365" y="2248105"/>
               <a:ext cx="75116" cy="75116"/>
             </a:xfrm>
             <a:prstGeom prst="ellipse">
@@ -6960,7 +6960,7 @@
           </p:nvSpPr>
           <p:spPr>
             <a:xfrm>
-              <a:off x="6582827" y="2052998"/>
+              <a:off x="6663673" y="2052877"/>
               <a:ext cx="75116" cy="75116"/>
             </a:xfrm>
             <a:prstGeom prst="ellipse">
@@ -6986,7 +6986,7 @@
           </p:nvSpPr>
           <p:spPr>
             <a:xfrm>
-              <a:off x="6678546" y="2283156"/>
+              <a:off x="6667872" y="2282643"/>
               <a:ext cx="75116" cy="75116"/>
             </a:xfrm>
             <a:prstGeom prst="ellipse">
@@ -7012,7 +7012,7 @@
           </p:nvSpPr>
           <p:spPr>
             <a:xfrm>
-              <a:off x="6671419" y="2173755"/>
+              <a:off x="6710109" y="2173471"/>
               <a:ext cx="75116" cy="75116"/>
             </a:xfrm>
             <a:prstGeom prst="ellipse">
@@ -7038,7 +7038,7 @@
           </p:nvSpPr>
           <p:spPr>
             <a:xfrm>
-              <a:off x="6745353" y="2013965"/>
+              <a:off x="6689652" y="2013558"/>
               <a:ext cx="75116" cy="75116"/>
             </a:xfrm>
             <a:prstGeom prst="ellipse">
@@ -7064,7 +7064,7 @@
           </p:nvSpPr>
           <p:spPr>
             <a:xfrm>
-              <a:off x="6578428" y="1716008"/>
+              <a:off x="6568450" y="1715970"/>
               <a:ext cx="75116" cy="75116"/>
             </a:xfrm>
             <a:prstGeom prst="ellipse">
@@ -7090,7 +7090,7 @@
           </p:nvSpPr>
           <p:spPr>
             <a:xfrm>
-              <a:off x="6660882" y="2271004"/>
+              <a:off x="6770769" y="2270621"/>
               <a:ext cx="75116" cy="75116"/>
             </a:xfrm>
             <a:prstGeom prst="ellipse">
@@ -7116,7 +7116,7 @@
           </p:nvSpPr>
           <p:spPr>
             <a:xfrm>
-              <a:off x="6730444" y="2467584"/>
+              <a:off x="6684915" y="2467134"/>
               <a:ext cx="75116" cy="75116"/>
             </a:xfrm>
             <a:prstGeom prst="ellipse">
@@ -7142,7 +7142,7 @@
           </p:nvSpPr>
           <p:spPr>
             <a:xfrm>
-              <a:off x="6752980" y="2332376"/>
+              <a:off x="6726498" y="2332173"/>
               <a:ext cx="75116" cy="75116"/>
             </a:xfrm>
             <a:prstGeom prst="ellipse">
@@ -7168,7 +7168,7 @@
           </p:nvSpPr>
           <p:spPr>
             <a:xfrm>
-              <a:off x="6648705" y="2119868"/>
+              <a:off x="6714374" y="2119485"/>
               <a:ext cx="75116" cy="75116"/>
             </a:xfrm>
             <a:prstGeom prst="ellipse">
@@ -7194,7 +7194,7 @@
           </p:nvSpPr>
           <p:spPr>
             <a:xfrm>
-              <a:off x="6569863" y="2242223"/>
+              <a:off x="6634701" y="2242226"/>
               <a:ext cx="75116" cy="75116"/>
             </a:xfrm>
             <a:prstGeom prst="ellipse">
@@ -7220,7 +7220,7 @@
           </p:nvSpPr>
           <p:spPr>
             <a:xfrm>
-              <a:off x="6567145" y="2096543"/>
+              <a:off x="6593281" y="2096353"/>
               <a:ext cx="75116" cy="75116"/>
             </a:xfrm>
             <a:prstGeom prst="ellipse">
@@ -7246,7 +7246,7 @@
           </p:nvSpPr>
           <p:spPr>
             <a:xfrm>
-              <a:off x="6679849" y="2074253"/>
+              <a:off x="6703233" y="2074177"/>
               <a:ext cx="75116" cy="75116"/>
             </a:xfrm>
             <a:prstGeom prst="ellipse">
@@ -7272,7 +7272,7 @@
           </p:nvSpPr>
           <p:spPr>
             <a:xfrm>
-              <a:off x="6737659" y="1910719"/>
+              <a:off x="6588955" y="1910534"/>
               <a:ext cx="75116" cy="75116"/>
             </a:xfrm>
             <a:prstGeom prst="ellipse">
@@ -7298,7 +7298,7 @@
           </p:nvSpPr>
           <p:spPr>
             <a:xfrm>
-              <a:off x="6629687" y="1952741"/>
+              <a:off x="6695599" y="1952365"/>
               <a:ext cx="75116" cy="75116"/>
             </a:xfrm>
             <a:prstGeom prst="ellipse">
@@ -7324,7 +7324,7 @@
           </p:nvSpPr>
           <p:spPr>
             <a:xfrm>
-              <a:off x="6710372" y="2017212"/>
+              <a:off x="6579042" y="2017278"/>
               <a:ext cx="75116" cy="75116"/>
             </a:xfrm>
             <a:prstGeom prst="ellipse">
@@ -7350,7 +7350,7 @@
           </p:nvSpPr>
           <p:spPr>
             <a:xfrm>
-              <a:off x="6609555" y="2368654"/>
+              <a:off x="6643747" y="2368615"/>
               <a:ext cx="75116" cy="75116"/>
             </a:xfrm>
             <a:prstGeom prst="ellipse">
@@ -7376,7 +7376,7 @@
           </p:nvSpPr>
           <p:spPr>
             <a:xfrm>
-              <a:off x="6607695" y="2089163"/>
+              <a:off x="6674074" y="2088669"/>
               <a:ext cx="75116" cy="75116"/>
             </a:xfrm>
             <a:prstGeom prst="ellipse">
@@ -7402,42 +7402,42 @@
           </p:nvSpPr>
           <p:spPr>
             <a:xfrm>
-              <a:off x="4402947" y="1883527"/>
-              <a:ext cx="2302579" cy="416625"/>
+              <a:off x="4419973" y="1883319"/>
+              <a:ext cx="2293106" cy="416592"/>
             </a:xfrm>
             <a:custGeom>
               <a:avLst/>
               <a:pathLst>
-                <a:path w="2302579" h="416625">
+                <a:path w="2293106" h="416592">
                   <a:moveTo>
                     <a:pt x="0" y="0"/>
                   </a:moveTo>
                   <a:lnTo>
-                    <a:pt x="1216500" y="105921"/>
+                    <a:pt x="1211495" y="105913"/>
                   </a:lnTo>
                   <a:lnTo>
-                    <a:pt x="1535053" y="123207"/>
+                    <a:pt x="1528737" y="123198"/>
                   </a:lnTo>
                   <a:lnTo>
-                    <a:pt x="1984027" y="139223"/>
+                    <a:pt x="1975864" y="139212"/>
                   </a:lnTo>
                   <a:lnTo>
-                    <a:pt x="2302579" y="145536"/>
+                    <a:pt x="2293106" y="145525"/>
                   </a:lnTo>
                   <a:lnTo>
-                    <a:pt x="2302579" y="416625"/>
+                    <a:pt x="2293106" y="416592"/>
                   </a:lnTo>
                   <a:lnTo>
-                    <a:pt x="1984027" y="388459"/>
+                    <a:pt x="1975864" y="388429"/>
                   </a:lnTo>
                   <a:lnTo>
-                    <a:pt x="1535053" y="355880"/>
+                    <a:pt x="1528737" y="355852"/>
                   </a:lnTo>
                   <a:lnTo>
-                    <a:pt x="1216500" y="338687"/>
+                    <a:pt x="1211495" y="338660"/>
                   </a:lnTo>
                   <a:lnTo>
-                    <a:pt x="0" y="312940"/>
+                    <a:pt x="0" y="312915"/>
                   </a:lnTo>
                   <a:close/>
                 </a:path>
@@ -7463,27 +7463,27 @@
           </p:nvSpPr>
           <p:spPr>
             <a:xfrm>
-              <a:off x="4402947" y="1883527"/>
-              <a:ext cx="2302579" cy="145536"/>
+              <a:off x="4419973" y="1883319"/>
+              <a:ext cx="2293106" cy="145525"/>
             </a:xfrm>
             <a:custGeom>
               <a:avLst/>
               <a:pathLst>
-                <a:path w="2302579" h="145536">
+                <a:path w="2293106" h="145525">
                   <a:moveTo>
                     <a:pt x="0" y="0"/>
                   </a:moveTo>
                   <a:lnTo>
-                    <a:pt x="1216500" y="105921"/>
+                    <a:pt x="1211495" y="105913"/>
                   </a:lnTo>
                   <a:lnTo>
-                    <a:pt x="1535053" y="123207"/>
+                    <a:pt x="1528737" y="123198"/>
                   </a:lnTo>
                   <a:lnTo>
-                    <a:pt x="1984027" y="139223"/>
+                    <a:pt x="1975864" y="139212"/>
                   </a:lnTo>
                   <a:lnTo>
-                    <a:pt x="2302579" y="145536"/>
+                    <a:pt x="2293106" y="145525"/>
                   </a:lnTo>
                 </a:path>
               </a:pathLst>
@@ -7503,24 +7503,24 @@
           </p:nvSpPr>
           <p:spPr>
             <a:xfrm>
-              <a:off x="4402947" y="2196468"/>
-              <a:ext cx="2302579" cy="103684"/>
+              <a:off x="4419973" y="2196235"/>
+              <a:ext cx="2293106" cy="103676"/>
             </a:xfrm>
             <a:custGeom>
               <a:avLst/>
               <a:pathLst>
-                <a:path w="2302579" h="103684">
+                <a:path w="2293106" h="103676">
                   <a:moveTo>
-                    <a:pt x="2302579" y="103684"/>
+                    <a:pt x="2293106" y="103676"/>
                   </a:moveTo>
                   <a:lnTo>
-                    <a:pt x="1984027" y="75519"/>
+                    <a:pt x="1975864" y="75513"/>
                   </a:lnTo>
                   <a:lnTo>
-                    <a:pt x="1535053" y="42939"/>
+                    <a:pt x="1528737" y="42936"/>
                   </a:lnTo>
                   <a:lnTo>
-                    <a:pt x="1216500" y="25746"/>
+                    <a:pt x="1211495" y="25744"/>
                   </a:lnTo>
                   <a:lnTo>
                     <a:pt x="0" y="0"/>
@@ -7543,27 +7543,27 @@
           </p:nvSpPr>
           <p:spPr>
             <a:xfrm>
-              <a:off x="4402947" y="2039998"/>
-              <a:ext cx="2302579" cy="124610"/>
+              <a:off x="4419973" y="2039777"/>
+              <a:ext cx="2293106" cy="124600"/>
             </a:xfrm>
             <a:custGeom>
               <a:avLst/>
               <a:pathLst>
-                <a:path w="2302579" h="124610">
+                <a:path w="2293106" h="124600">
                   <a:moveTo>
                     <a:pt x="0" y="0"/>
                   </a:moveTo>
                   <a:lnTo>
-                    <a:pt x="1216500" y="65834"/>
+                    <a:pt x="1211495" y="65829"/>
                   </a:lnTo>
                   <a:lnTo>
-                    <a:pt x="1535053" y="83073"/>
+                    <a:pt x="1528737" y="83067"/>
                   </a:lnTo>
                   <a:lnTo>
-                    <a:pt x="1984027" y="107371"/>
+                    <a:pt x="1975864" y="107362"/>
                   </a:lnTo>
                   <a:lnTo>
-                    <a:pt x="2302579" y="124610"/>
+                    <a:pt x="2293106" y="124600"/>
                   </a:lnTo>
                 </a:path>
               </a:pathLst>
@@ -7592,7 +7592,7 @@
           </p:nvSpPr>
           <p:spPr>
             <a:xfrm>
-              <a:off x="6216643" y="1260151"/>
+              <a:off x="6224195" y="1259983"/>
               <a:ext cx="63550" cy="82021"/>
             </a:xfrm>
             <a:prstGeom prst="rect">
@@ -7638,7 +7638,7 @@
           </p:nvSpPr>
           <p:spPr>
             <a:xfrm>
-              <a:off x="6289383" y="1260151"/>
+              <a:off x="6296935" y="1259983"/>
               <a:ext cx="416143" cy="82021"/>
             </a:xfrm>
             <a:prstGeom prst="rect">
@@ -7721,7 +7721,7 @@
                 </a:path>
               </a:pathLst>
             </a:custGeom>
-            <a:ln w="21681" cap="flat">
+            <a:ln w="11086" cap="flat">
               <a:solidFill>
                 <a:srgbClr val="000000">
                   <a:alpha val="100000"/>
@@ -7745,7 +7745,7 @@
           </p:nvSpPr>
           <p:spPr>
             <a:xfrm>
-              <a:off x="4157982" y="2343186"/>
+              <a:off x="4157982" y="2342941"/>
               <a:ext cx="28468" cy="0"/>
             </a:xfrm>
             <a:custGeom>
@@ -7761,9 +7761,9 @@
                 </a:path>
               </a:pathLst>
             </a:custGeom>
-            <a:ln w="21681" cap="flat">
+            <a:ln w="11086" cap="flat">
               <a:solidFill>
-                <a:srgbClr val="000000">
+                <a:srgbClr val="333333">
                   <a:alpha val="100000"/>
                 </a:srgbClr>
               </a:solidFill>
@@ -7785,7 +7785,7 @@
           </p:nvSpPr>
           <p:spPr>
             <a:xfrm>
-              <a:off x="4157982" y="1860711"/>
+              <a:off x="4157982" y="1860504"/>
               <a:ext cx="28468" cy="0"/>
             </a:xfrm>
             <a:custGeom>
@@ -7801,9 +7801,9 @@
                 </a:path>
               </a:pathLst>
             </a:custGeom>
-            <a:ln w="21681" cap="flat">
+            <a:ln w="11086" cap="flat">
               <a:solidFill>
-                <a:srgbClr val="000000">
+                <a:srgbClr val="333333">
                   <a:alpha val="100000"/>
                 </a:srgbClr>
               </a:solidFill>
@@ -7825,7 +7825,7 @@
           </p:nvSpPr>
           <p:spPr>
             <a:xfrm>
-              <a:off x="4157982" y="1378237"/>
+              <a:off x="4157982" y="1378068"/>
               <a:ext cx="28468" cy="0"/>
             </a:xfrm>
             <a:custGeom>
@@ -7841,9 +7841,9 @@
                 </a:path>
               </a:pathLst>
             </a:custGeom>
-            <a:ln w="21681" cap="flat">
+            <a:ln w="11086" cap="flat">
               <a:solidFill>
-                <a:srgbClr val="000000">
+                <a:srgbClr val="333333">
                   <a:alpha val="100000"/>
                 </a:srgbClr>
               </a:solidFill>
@@ -7881,7 +7881,7 @@
                 </a:path>
               </a:pathLst>
             </a:custGeom>
-            <a:ln w="21681" cap="flat">
+            <a:ln w="11086" cap="flat">
               <a:solidFill>
                 <a:srgbClr val="000000">
                   <a:alpha val="100000"/>
@@ -7905,7 +7905,7 @@
           </p:nvSpPr>
           <p:spPr>
             <a:xfrm>
-              <a:off x="4402947" y="2626821"/>
+              <a:off x="4419973" y="2626821"/>
               <a:ext cx="0" cy="28468"/>
             </a:xfrm>
             <a:custGeom>
@@ -7921,9 +7921,9 @@
                 </a:path>
               </a:pathLst>
             </a:custGeom>
-            <a:ln w="21681" cap="flat">
+            <a:ln w="11086" cap="flat">
               <a:solidFill>
-                <a:srgbClr val="000000">
+                <a:srgbClr val="333333">
                   <a:alpha val="100000"/>
                 </a:srgbClr>
               </a:solidFill>
@@ -7945,7 +7945,7 @@
           </p:nvSpPr>
           <p:spPr>
             <a:xfrm>
-              <a:off x="5170474" y="2626821"/>
+              <a:off x="5184341" y="2626821"/>
               <a:ext cx="0" cy="28468"/>
             </a:xfrm>
             <a:custGeom>
@@ -7961,9 +7961,9 @@
                 </a:path>
               </a:pathLst>
             </a:custGeom>
-            <a:ln w="21681" cap="flat">
+            <a:ln w="11086" cap="flat">
               <a:solidFill>
-                <a:srgbClr val="000000">
+                <a:srgbClr val="333333">
                   <a:alpha val="100000"/>
                 </a:srgbClr>
               </a:solidFill>
@@ -7985,7 +7985,7 @@
           </p:nvSpPr>
           <p:spPr>
             <a:xfrm>
-              <a:off x="5938000" y="2626821"/>
+              <a:off x="5948710" y="2626821"/>
               <a:ext cx="0" cy="28468"/>
             </a:xfrm>
             <a:custGeom>
@@ -8001,9 +8001,9 @@
                 </a:path>
               </a:pathLst>
             </a:custGeom>
-            <a:ln w="21681" cap="flat">
+            <a:ln w="11086" cap="flat">
               <a:solidFill>
-                <a:srgbClr val="000000">
+                <a:srgbClr val="333333">
                   <a:alpha val="100000"/>
                 </a:srgbClr>
               </a:solidFill>
@@ -8025,7 +8025,7 @@
           </p:nvSpPr>
           <p:spPr>
             <a:xfrm>
-              <a:off x="6705527" y="2626821"/>
+              <a:off x="6713079" y="2626821"/>
               <a:ext cx="0" cy="28468"/>
             </a:xfrm>
             <a:custGeom>
@@ -8041,9 +8041,9 @@
                 </a:path>
               </a:pathLst>
             </a:custGeom>
-            <a:ln w="21681" cap="flat">
+            <a:ln w="11086" cap="flat">
               <a:solidFill>
-                <a:srgbClr val="000000">
+                <a:srgbClr val="333333">
                   <a:alpha val="100000"/>
                 </a:srgbClr>
               </a:solidFill>
@@ -8065,7 +8065,7 @@
           </p:nvSpPr>
           <p:spPr>
             <a:xfrm>
-              <a:off x="4374692" y="2678064"/>
+              <a:off x="4391718" y="2678064"/>
               <a:ext cx="56509" cy="72877"/>
             </a:xfrm>
             <a:prstGeom prst="rect">
@@ -8111,7 +8111,7 @@
           </p:nvSpPr>
           <p:spPr>
             <a:xfrm>
-              <a:off x="5142219" y="2678064"/>
+              <a:off x="5156086" y="2678064"/>
               <a:ext cx="56509" cy="72877"/>
             </a:xfrm>
             <a:prstGeom prst="rect">
@@ -8157,7 +8157,7 @@
           </p:nvSpPr>
           <p:spPr>
             <a:xfrm>
-              <a:off x="5909745" y="2678064"/>
+              <a:off x="5920455" y="2678064"/>
               <a:ext cx="56509" cy="72877"/>
             </a:xfrm>
             <a:prstGeom prst="rect">
@@ -8203,7 +8203,7 @@
           </p:nvSpPr>
           <p:spPr>
             <a:xfrm>
-              <a:off x="6677272" y="2678064"/>
+              <a:off x="6684824" y="2678064"/>
               <a:ext cx="56509" cy="72877"/>
             </a:xfrm>
             <a:prstGeom prst="rect">
@@ -8321,7 +8321,7 @@
           </p:nvSpPr>
           <p:spPr>
             <a:xfrm>
-              <a:off x="1497576" y="4259733"/>
+              <a:off x="1513570" y="4258498"/>
               <a:ext cx="75116" cy="75116"/>
             </a:xfrm>
             <a:prstGeom prst="ellipse">
@@ -8347,7 +8347,7 @@
           </p:nvSpPr>
           <p:spPr>
             <a:xfrm>
-              <a:off x="1526881" y="4114464"/>
+              <a:off x="1492391" y="4116001"/>
               <a:ext cx="75116" cy="75116"/>
             </a:xfrm>
             <a:prstGeom prst="ellipse">
@@ -8373,7 +8373,7 @@
           </p:nvSpPr>
           <p:spPr>
             <a:xfrm>
-              <a:off x="1583294" y="4324513"/>
+              <a:off x="1582093" y="4323104"/>
               <a:ext cx="75116" cy="75116"/>
             </a:xfrm>
             <a:prstGeom prst="ellipse">
@@ -8399,7 +8399,7 @@
           </p:nvSpPr>
           <p:spPr>
             <a:xfrm>
-              <a:off x="1553980" y="4196389"/>
+              <a:off x="1452223" y="4196741"/>
               <a:ext cx="75116" cy="75116"/>
             </a:xfrm>
             <a:prstGeom prst="ellipse">
@@ -8425,7 +8425,7 @@
           </p:nvSpPr>
           <p:spPr>
             <a:xfrm>
-              <a:off x="1397325" y="4222831"/>
+              <a:off x="1397325" y="4222860"/>
               <a:ext cx="75116" cy="75116"/>
             </a:xfrm>
             <a:prstGeom prst="ellipse">
@@ -8451,7 +8451,7 @@
           </p:nvSpPr>
           <p:spPr>
             <a:xfrm>
-              <a:off x="1452624" y="4101251"/>
+              <a:off x="1467232" y="4100228"/>
               <a:ext cx="75116" cy="75116"/>
             </a:xfrm>
             <a:prstGeom prst="ellipse">
@@ -8477,7 +8477,7 @@
           </p:nvSpPr>
           <p:spPr>
             <a:xfrm>
-              <a:off x="1422230" y="3783250"/>
+              <a:off x="1576625" y="3783226"/>
               <a:ext cx="75116" cy="75116"/>
             </a:xfrm>
             <a:prstGeom prst="ellipse">
@@ -8503,7 +8503,7 @@
           </p:nvSpPr>
           <p:spPr>
             <a:xfrm>
-              <a:off x="1574453" y="4197228"/>
+              <a:off x="1482275" y="4194150"/>
               <a:ext cx="75116" cy="75116"/>
             </a:xfrm>
             <a:prstGeom prst="ellipse">
@@ -8529,7 +8529,7 @@
           </p:nvSpPr>
           <p:spPr>
             <a:xfrm>
-              <a:off x="1587657" y="4151316"/>
+              <a:off x="1467478" y="4152238"/>
               <a:ext cx="75116" cy="75116"/>
             </a:xfrm>
             <a:prstGeom prst="ellipse">
@@ -8555,7 +8555,7 @@
           </p:nvSpPr>
           <p:spPr>
             <a:xfrm>
-              <a:off x="1472729" y="4099922"/>
+              <a:off x="1592420" y="4099134"/>
               <a:ext cx="75116" cy="75116"/>
             </a:xfrm>
             <a:prstGeom prst="ellipse">
@@ -8581,7 +8581,7 @@
           </p:nvSpPr>
           <p:spPr>
             <a:xfrm>
-              <a:off x="2301462" y="4333137"/>
+              <a:off x="2219933" y="4331123"/>
               <a:ext cx="75116" cy="75116"/>
             </a:xfrm>
             <a:prstGeom prst="ellipse">
@@ -8607,7 +8607,7 @@
           </p:nvSpPr>
           <p:spPr>
             <a:xfrm>
-              <a:off x="2169459" y="4378357"/>
+              <a:off x="2177276" y="4378905"/>
               <a:ext cx="75116" cy="75116"/>
             </a:xfrm>
             <a:prstGeom prst="ellipse">
@@ -8633,7 +8633,7 @@
           </p:nvSpPr>
           <p:spPr>
             <a:xfrm>
-              <a:off x="2219240" y="3255209"/>
+              <a:off x="2317854" y="3254433"/>
               <a:ext cx="75116" cy="75116"/>
             </a:xfrm>
             <a:prstGeom prst="ellipse">
@@ -8659,7 +8659,7 @@
           </p:nvSpPr>
           <p:spPr>
             <a:xfrm>
-              <a:off x="2209909" y="4256218"/>
+              <a:off x="2350476" y="4254389"/>
               <a:ext cx="75116" cy="75116"/>
             </a:xfrm>
             <a:prstGeom prst="ellipse">
@@ -8685,7 +8685,7 @@
           </p:nvSpPr>
           <p:spPr>
             <a:xfrm>
-              <a:off x="2194265" y="4278487"/>
+              <a:off x="2324968" y="4280544"/>
               <a:ext cx="75116" cy="75116"/>
             </a:xfrm>
             <a:prstGeom prst="ellipse">
@@ -8711,7 +8711,7 @@
           </p:nvSpPr>
           <p:spPr>
             <a:xfrm>
-              <a:off x="2347231" y="4122859"/>
+              <a:off x="2347292" y="4123299"/>
               <a:ext cx="75116" cy="75116"/>
             </a:xfrm>
             <a:prstGeom prst="ellipse">
@@ -8737,7 +8737,7 @@
           </p:nvSpPr>
           <p:spPr>
             <a:xfrm>
-              <a:off x="2332612" y="4278564"/>
+              <a:off x="2246910" y="4279713"/>
               <a:ext cx="75116" cy="75116"/>
             </a:xfrm>
             <a:prstGeom prst="ellipse">
@@ -8763,7 +8763,7 @@
           </p:nvSpPr>
           <p:spPr>
             <a:xfrm>
-              <a:off x="2229897" y="4282900"/>
+              <a:off x="2306032" y="4283833"/>
               <a:ext cx="75116" cy="75116"/>
             </a:xfrm>
             <a:prstGeom prst="ellipse">
@@ -8789,7 +8789,7 @@
           </p:nvSpPr>
           <p:spPr>
             <a:xfrm>
-              <a:off x="2368403" y="3695904"/>
+              <a:off x="2295480" y="3694587"/>
               <a:ext cx="75116" cy="75116"/>
             </a:xfrm>
             <a:prstGeom prst="ellipse">
@@ -8815,7 +8815,7 @@
           </p:nvSpPr>
           <p:spPr>
             <a:xfrm>
-              <a:off x="2166982" y="3826560"/>
+              <a:off x="2359884" y="3828345"/>
               <a:ext cx="75116" cy="75116"/>
             </a:xfrm>
             <a:prstGeom prst="ellipse">
@@ -8841,7 +8841,7 @@
           </p:nvSpPr>
           <p:spPr>
             <a:xfrm>
-              <a:off x="2249021" y="4039419"/>
+              <a:off x="2231134" y="4039766"/>
               <a:ext cx="75116" cy="75116"/>
             </a:xfrm>
             <a:prstGeom prst="ellipse">
@@ -8867,7 +8867,7 @@
           </p:nvSpPr>
           <p:spPr>
             <a:xfrm>
-              <a:off x="2259261" y="4118602"/>
+              <a:off x="2235573" y="4120201"/>
               <a:ext cx="75116" cy="75116"/>
             </a:xfrm>
             <a:prstGeom prst="ellipse">
@@ -8893,7 +8893,7 @@
           </p:nvSpPr>
           <p:spPr>
             <a:xfrm>
-              <a:off x="2157778" y="3970756"/>
+              <a:off x="2285227" y="3972213"/>
               <a:ext cx="75116" cy="75116"/>
             </a:xfrm>
             <a:prstGeom prst="ellipse">
@@ -8919,7 +8919,7 @@
           </p:nvSpPr>
           <p:spPr>
             <a:xfrm>
-              <a:off x="2311577" y="4176999"/>
+              <a:off x="2363130" y="4175117"/>
               <a:ext cx="75116" cy="75116"/>
             </a:xfrm>
             <a:prstGeom prst="ellipse">
@@ -8945,7 +8945,7 @@
           </p:nvSpPr>
           <p:spPr>
             <a:xfrm>
-              <a:off x="2265395" y="4199445"/>
+              <a:off x="2350756" y="4198743"/>
               <a:ext cx="75116" cy="75116"/>
             </a:xfrm>
             <a:prstGeom prst="ellipse">
@@ -8971,7 +8971,7 @@
           </p:nvSpPr>
           <p:spPr>
             <a:xfrm>
-              <a:off x="2177005" y="4075847"/>
+              <a:off x="2308698" y="4075934"/>
               <a:ext cx="75116" cy="75116"/>
             </a:xfrm>
             <a:prstGeom prst="ellipse">
@@ -8997,7 +8997,7 @@
           </p:nvSpPr>
           <p:spPr>
             <a:xfrm>
-              <a:off x="2243585" y="3555983"/>
+              <a:off x="2361533" y="3553499"/>
               <a:ext cx="75116" cy="75116"/>
             </a:xfrm>
             <a:prstGeom prst="ellipse">
@@ -9023,7 +9023,7 @@
           </p:nvSpPr>
           <p:spPr>
             <a:xfrm>
-              <a:off x="2247303" y="3794995"/>
+              <a:off x="2270120" y="3794746"/>
               <a:ext cx="75116" cy="75116"/>
             </a:xfrm>
             <a:prstGeom prst="ellipse">
@@ -9049,7 +9049,7 @@
           </p:nvSpPr>
           <p:spPr>
             <a:xfrm>
-              <a:off x="3128596" y="4064116"/>
+              <a:off x="3131683" y="4063075"/>
               <a:ext cx="75116" cy="75116"/>
             </a:xfrm>
             <a:prstGeom prst="ellipse">
@@ -9075,7 +9075,7 @@
           </p:nvSpPr>
           <p:spPr>
             <a:xfrm>
-              <a:off x="3052431" y="3959292"/>
+              <a:off x="2975838" y="3959316"/>
               <a:ext cx="75116" cy="75116"/>
             </a:xfrm>
             <a:prstGeom prst="ellipse">
@@ -9101,7 +9101,7 @@
           </p:nvSpPr>
           <p:spPr>
             <a:xfrm>
-              <a:off x="2979743" y="4368447"/>
+              <a:off x="2967871" y="4368657"/>
               <a:ext cx="75116" cy="75116"/>
             </a:xfrm>
             <a:prstGeom prst="ellipse">
@@ -9127,7 +9127,7 @@
           </p:nvSpPr>
           <p:spPr>
             <a:xfrm>
-              <a:off x="3153113" y="4359693"/>
+              <a:off x="2987430" y="4359220"/>
               <a:ext cx="75116" cy="75116"/>
             </a:xfrm>
             <a:prstGeom prst="ellipse">
@@ -9153,7 +9153,7 @@
           </p:nvSpPr>
           <p:spPr>
             <a:xfrm>
-              <a:off x="2973084" y="4163441"/>
+              <a:off x="2913881" y="4163139"/>
               <a:ext cx="75116" cy="75116"/>
             </a:xfrm>
             <a:prstGeom prst="ellipse">
@@ -9179,7 +9179,7 @@
           </p:nvSpPr>
           <p:spPr>
             <a:xfrm>
-              <a:off x="3070469" y="4370569"/>
+              <a:off x="3022930" y="4372409"/>
               <a:ext cx="75116" cy="75116"/>
             </a:xfrm>
             <a:prstGeom prst="ellipse">
@@ -9205,7 +9205,7 @@
           </p:nvSpPr>
           <p:spPr>
             <a:xfrm>
-              <a:off x="3011077" y="3457509"/>
+              <a:off x="3076744" y="3455484"/>
               <a:ext cx="75116" cy="75116"/>
             </a:xfrm>
             <a:prstGeom prst="ellipse">
@@ -9231,7 +9231,7 @@
           </p:nvSpPr>
           <p:spPr>
             <a:xfrm>
-              <a:off x="2998695" y="4387467"/>
+              <a:off x="3128247" y="4387467"/>
               <a:ext cx="75116" cy="75116"/>
             </a:xfrm>
             <a:prstGeom prst="ellipse">
@@ -9257,7 +9257,7 @@
           </p:nvSpPr>
           <p:spPr>
             <a:xfrm>
-              <a:off x="2991960" y="3909009"/>
+              <a:off x="2914100" y="3907869"/>
               <a:ext cx="75116" cy="75116"/>
             </a:xfrm>
             <a:prstGeom prst="ellipse">
@@ -9283,7 +9283,7 @@
           </p:nvSpPr>
           <p:spPr>
             <a:xfrm>
-              <a:off x="3140688" y="3280566"/>
+              <a:off x="3010437" y="3276712"/>
               <a:ext cx="75116" cy="75116"/>
             </a:xfrm>
             <a:prstGeom prst="ellipse">
@@ -9309,7 +9309,7 @@
           </p:nvSpPr>
           <p:spPr>
             <a:xfrm>
-              <a:off x="3111738" y="3170829"/>
+              <a:off x="3051895" y="3170829"/>
               <a:ext cx="75116" cy="75116"/>
             </a:xfrm>
             <a:prstGeom prst="ellipse">
@@ -9335,7 +9335,7 @@
           </p:nvSpPr>
           <p:spPr>
             <a:xfrm>
-              <a:off x="2998360" y="3892705"/>
+              <a:off x="3028249" y="3890700"/>
               <a:ext cx="75116" cy="75116"/>
             </a:xfrm>
             <a:prstGeom prst="ellipse">
@@ -9361,7 +9361,7 @@
           </p:nvSpPr>
           <p:spPr>
             <a:xfrm>
-              <a:off x="2997876" y="3765352"/>
+              <a:off x="2920070" y="3763924"/>
               <a:ext cx="75116" cy="75116"/>
             </a:xfrm>
             <a:prstGeom prst="ellipse">
@@ -9387,7 +9387,7 @@
           </p:nvSpPr>
           <p:spPr>
             <a:xfrm>
-              <a:off x="3076583" y="3719039"/>
+              <a:off x="3079941" y="3718369"/>
               <a:ext cx="75116" cy="75116"/>
             </a:xfrm>
             <a:prstGeom prst="ellipse">
@@ -9413,7 +9413,7 @@
           </p:nvSpPr>
           <p:spPr>
             <a:xfrm>
-              <a:off x="2983822" y="3754703"/>
+              <a:off x="2938900" y="3754175"/>
               <a:ext cx="75116" cy="75116"/>
             </a:xfrm>
             <a:prstGeom prst="ellipse">
@@ -9439,7 +9439,7 @@
           </p:nvSpPr>
           <p:spPr>
             <a:xfrm>
-              <a:off x="3014563" y="4297006"/>
+              <a:off x="3041610" y="4294374"/>
               <a:ext cx="75116" cy="75116"/>
             </a:xfrm>
             <a:prstGeom prst="ellipse">
@@ -9465,7 +9465,7 @@
           </p:nvSpPr>
           <p:spPr>
             <a:xfrm>
-              <a:off x="2946610" y="3706266"/>
+              <a:off x="2952464" y="3708335"/>
               <a:ext cx="75116" cy="75116"/>
             </a:xfrm>
             <a:prstGeom prst="ellipse">
@@ -9491,7 +9491,7 @@
           </p:nvSpPr>
           <p:spPr>
             <a:xfrm>
-              <a:off x="3154214" y="4117108"/>
+              <a:off x="3056715" y="4116507"/>
               <a:ext cx="75116" cy="75116"/>
             </a:xfrm>
             <a:prstGeom prst="ellipse">
@@ -9517,7 +9517,7 @@
           </p:nvSpPr>
           <p:spPr>
             <a:xfrm>
-              <a:off x="3139398" y="4135472"/>
+              <a:off x="2978199" y="4137188"/>
               <a:ext cx="75116" cy="75116"/>
             </a:xfrm>
             <a:prstGeom prst="ellipse">
@@ -9543,7 +9543,7 @@
           </p:nvSpPr>
           <p:spPr>
             <a:xfrm>
-              <a:off x="3154236" y="3941153"/>
+              <a:off x="2960661" y="3937747"/>
               <a:ext cx="75116" cy="75116"/>
             </a:xfrm>
             <a:prstGeom prst="ellipse">
@@ -9569,7 +9569,7 @@
           </p:nvSpPr>
           <p:spPr>
             <a:xfrm>
-              <a:off x="3859983" y="3927643"/>
+              <a:off x="3894352" y="3928571"/>
               <a:ext cx="75116" cy="75116"/>
             </a:xfrm>
             <a:prstGeom prst="ellipse">
@@ -9595,7 +9595,7 @@
           </p:nvSpPr>
           <p:spPr>
             <a:xfrm>
-              <a:off x="3860375" y="4031981"/>
+              <a:off x="3839355" y="4030761"/>
               <a:ext cx="75116" cy="75116"/>
             </a:xfrm>
             <a:prstGeom prst="ellipse">
@@ -9621,7 +9621,7 @@
           </p:nvSpPr>
           <p:spPr>
             <a:xfrm>
-              <a:off x="3816800" y="3959261"/>
+              <a:off x="3798340" y="3959263"/>
               <a:ext cx="75116" cy="75116"/>
             </a:xfrm>
             <a:prstGeom prst="ellipse">
@@ -9647,7 +9647,7 @@
           </p:nvSpPr>
           <p:spPr>
             <a:xfrm>
-              <a:off x="3835231" y="4244304"/>
+              <a:off x="3764050" y="4242312"/>
               <a:ext cx="75116" cy="75116"/>
             </a:xfrm>
             <a:prstGeom prst="ellipse">
@@ -9673,7 +9673,7 @@
           </p:nvSpPr>
           <p:spPr>
             <a:xfrm>
-              <a:off x="3881200" y="3711261"/>
+              <a:off x="3678745" y="3711358"/>
               <a:ext cx="75116" cy="75116"/>
             </a:xfrm>
             <a:prstGeom prst="ellipse">
@@ -9699,7 +9699,7 @@
           </p:nvSpPr>
           <p:spPr>
             <a:xfrm>
-              <a:off x="3820527" y="4052195"/>
+              <a:off x="3714152" y="4051383"/>
               <a:ext cx="75116" cy="75116"/>
             </a:xfrm>
             <a:prstGeom prst="ellipse">
@@ -9725,7 +9725,7 @@
           </p:nvSpPr>
           <p:spPr>
             <a:xfrm>
-              <a:off x="3894352" y="4167449"/>
+              <a:off x="3841862" y="4167215"/>
               <a:ext cx="75116" cy="75116"/>
             </a:xfrm>
             <a:prstGeom prst="ellipse">
@@ -9751,7 +9751,7 @@
           </p:nvSpPr>
           <p:spPr>
             <a:xfrm>
-              <a:off x="3731078" y="3876197"/>
+              <a:off x="3683288" y="3875704"/>
               <a:ext cx="75116" cy="75116"/>
             </a:xfrm>
             <a:prstGeom prst="ellipse">
@@ -9777,7 +9777,7 @@
           </p:nvSpPr>
           <p:spPr>
             <a:xfrm>
-              <a:off x="3888812" y="3809272"/>
+              <a:off x="3842756" y="3807118"/>
               <a:ext cx="75116" cy="75116"/>
             </a:xfrm>
             <a:prstGeom prst="ellipse">
@@ -9803,7 +9803,7 @@
           </p:nvSpPr>
           <p:spPr>
             <a:xfrm>
-              <a:off x="3750690" y="3524009"/>
+              <a:off x="3875295" y="3521796"/>
               <a:ext cx="75116" cy="75116"/>
             </a:xfrm>
             <a:prstGeom prst="ellipse">
@@ -9829,7 +9829,7 @@
           </p:nvSpPr>
           <p:spPr>
             <a:xfrm>
-              <a:off x="3767002" y="3546331"/>
+              <a:off x="3813203" y="3548163"/>
               <a:ext cx="75116" cy="75116"/>
             </a:xfrm>
             <a:prstGeom prst="ellipse">
@@ -9855,7 +9855,7 @@
           </p:nvSpPr>
           <p:spPr>
             <a:xfrm>
-              <a:off x="3847250" y="3528729"/>
+              <a:off x="3771320" y="3526529"/>
               <a:ext cx="75116" cy="75116"/>
             </a:xfrm>
             <a:prstGeom prst="ellipse">
@@ -9881,7 +9881,7 @@
           </p:nvSpPr>
           <p:spPr>
             <a:xfrm>
-              <a:off x="3761064" y="3632100"/>
+              <a:off x="3705862" y="3630556"/>
               <a:ext cx="75116" cy="75116"/>
             </a:xfrm>
             <a:prstGeom prst="ellipse">
@@ -9907,7 +9907,7 @@
           </p:nvSpPr>
           <p:spPr>
             <a:xfrm>
-              <a:off x="3788707" y="3884841"/>
+              <a:off x="3861142" y="3883511"/>
               <a:ext cx="75116" cy="75116"/>
             </a:xfrm>
             <a:prstGeom prst="ellipse">
@@ -9933,7 +9933,7 @@
           </p:nvSpPr>
           <p:spPr>
             <a:xfrm>
-              <a:off x="3759329" y="3912720"/>
+              <a:off x="3748141" y="3912516"/>
               <a:ext cx="75116" cy="75116"/>
             </a:xfrm>
             <a:prstGeom prst="ellipse">
@@ -9959,7 +9959,7 @@
           </p:nvSpPr>
           <p:spPr>
             <a:xfrm>
-              <a:off x="3727221" y="3813175"/>
+              <a:off x="3866171" y="3809827"/>
               <a:ext cx="75116" cy="75116"/>
             </a:xfrm>
             <a:prstGeom prst="ellipse">
@@ -9985,7 +9985,7 @@
           </p:nvSpPr>
           <p:spPr>
             <a:xfrm>
-              <a:off x="3771181" y="3771189"/>
+              <a:off x="3785542" y="3770533"/>
               <a:ext cx="75116" cy="75116"/>
             </a:xfrm>
             <a:prstGeom prst="ellipse">
@@ -10011,7 +10011,7 @@
           </p:nvSpPr>
           <p:spPr>
             <a:xfrm>
-              <a:off x="3788132" y="3760799"/>
+              <a:off x="3815275" y="3759377"/>
               <a:ext cx="75116" cy="75116"/>
             </a:xfrm>
             <a:prstGeom prst="ellipse">
@@ -10037,7 +10037,7 @@
           </p:nvSpPr>
           <p:spPr>
             <a:xfrm>
-              <a:off x="3855178" y="3574765"/>
+              <a:off x="3888061" y="3575828"/>
               <a:ext cx="75116" cy="75116"/>
             </a:xfrm>
             <a:prstGeom prst="ellipse">
@@ -10063,7 +10063,7 @@
           </p:nvSpPr>
           <p:spPr>
             <a:xfrm>
-              <a:off x="3842890" y="3696321"/>
+              <a:off x="3753794" y="3695869"/>
               <a:ext cx="75116" cy="75116"/>
             </a:xfrm>
             <a:prstGeom prst="ellipse">
@@ -10089,7 +10089,7 @@
           </p:nvSpPr>
           <p:spPr>
             <a:xfrm>
-              <a:off x="3848554" y="3740694"/>
+              <a:off x="3836122" y="3739066"/>
               <a:ext cx="75116" cy="75116"/>
             </a:xfrm>
             <a:prstGeom prst="ellipse">
@@ -10115,7 +10115,7 @@
           </p:nvSpPr>
           <p:spPr>
             <a:xfrm>
-              <a:off x="3827214" y="3547101"/>
+              <a:off x="3863815" y="3545826"/>
               <a:ext cx="75116" cy="75116"/>
             </a:xfrm>
             <a:prstGeom prst="ellipse">
@@ -10141,7 +10141,7 @@
           </p:nvSpPr>
           <p:spPr>
             <a:xfrm>
-              <a:off x="3770503" y="3772584"/>
+              <a:off x="3869522" y="3770710"/>
               <a:ext cx="75116" cy="75116"/>
             </a:xfrm>
             <a:prstGeom prst="ellipse">
@@ -10167,7 +10167,7 @@
           </p:nvSpPr>
           <p:spPr>
             <a:xfrm>
-              <a:off x="3806756" y="3600494"/>
+              <a:off x="3834122" y="3598952"/>
               <a:ext cx="75116" cy="75116"/>
             </a:xfrm>
             <a:prstGeom prst="ellipse">
@@ -10193,42 +10193,42 @@
           </p:nvSpPr>
           <p:spPr>
             <a:xfrm>
-              <a:off x="1527154" y="3648488"/>
-              <a:ext cx="2337596" cy="732240"/>
+              <a:off x="1533493" y="3647417"/>
+              <a:ext cx="2291194" cy="733723"/>
             </a:xfrm>
             <a:custGeom>
               <a:avLst/>
               <a:pathLst>
-                <a:path w="2337596" h="732240">
+                <a:path w="2291194" h="733723">
                   <a:moveTo>
-                    <a:pt x="0" y="298616"/>
+                    <a:pt x="0" y="299221"/>
                   </a:moveTo>
                   <a:lnTo>
-                    <a:pt x="1235000" y="221152"/>
+                    <a:pt x="1210485" y="221600"/>
                   </a:lnTo>
                   <a:lnTo>
-                    <a:pt x="1558397" y="170458"/>
+                    <a:pt x="1527462" y="170803"/>
                   </a:lnTo>
                   <a:lnTo>
-                    <a:pt x="2014199" y="76499"/>
+                    <a:pt x="1974217" y="76654"/>
                   </a:lnTo>
                   <a:lnTo>
-                    <a:pt x="2337596" y="0"/>
+                    <a:pt x="2291194" y="0"/>
                   </a:lnTo>
                   <a:lnTo>
-                    <a:pt x="2337596" y="388962"/>
+                    <a:pt x="2291194" y="389749"/>
                   </a:lnTo>
                   <a:lnTo>
-                    <a:pt x="2014199" y="401266"/>
+                    <a:pt x="1974217" y="402078"/>
                   </a:lnTo>
                   <a:lnTo>
-                    <a:pt x="1558397" y="432468"/>
+                    <a:pt x="1527462" y="433344"/>
                   </a:lnTo>
                   <a:lnTo>
-                    <a:pt x="1235000" y="470578"/>
+                    <a:pt x="1210485" y="471530"/>
                   </a:lnTo>
                   <a:lnTo>
-                    <a:pt x="0" y="732240"/>
+                    <a:pt x="0" y="733723"/>
                   </a:lnTo>
                   <a:close/>
                 </a:path>
@@ -10254,27 +10254,27 @@
           </p:nvSpPr>
           <p:spPr>
             <a:xfrm>
-              <a:off x="1527154" y="3648488"/>
-              <a:ext cx="2337596" cy="298616"/>
+              <a:off x="1533493" y="3647417"/>
+              <a:ext cx="2291194" cy="299221"/>
             </a:xfrm>
             <a:custGeom>
               <a:avLst/>
               <a:pathLst>
-                <a:path w="2337596" h="298616">
+                <a:path w="2291194" h="299221">
                   <a:moveTo>
-                    <a:pt x="0" y="298616"/>
+                    <a:pt x="0" y="299221"/>
                   </a:moveTo>
                   <a:lnTo>
-                    <a:pt x="1235000" y="221152"/>
+                    <a:pt x="1210485" y="221600"/>
                   </a:lnTo>
                   <a:lnTo>
-                    <a:pt x="1558397" y="170458"/>
+                    <a:pt x="1527462" y="170803"/>
                   </a:lnTo>
                   <a:lnTo>
-                    <a:pt x="2014199" y="76499"/>
+                    <a:pt x="1974217" y="76654"/>
                   </a:lnTo>
                   <a:lnTo>
-                    <a:pt x="2337596" y="0"/>
+                    <a:pt x="2291194" y="0"/>
                   </a:lnTo>
                 </a:path>
               </a:pathLst>
@@ -10294,27 +10294,27 @@
           </p:nvSpPr>
           <p:spPr>
             <a:xfrm>
-              <a:off x="1527154" y="4037450"/>
-              <a:ext cx="2337596" cy="343278"/>
+              <a:off x="1533493" y="4037166"/>
+              <a:ext cx="2291194" cy="343973"/>
             </a:xfrm>
             <a:custGeom>
               <a:avLst/>
               <a:pathLst>
-                <a:path w="2337596" h="343278">
+                <a:path w="2291194" h="343973">
                   <a:moveTo>
-                    <a:pt x="2337596" y="0"/>
+                    <a:pt x="2291194" y="0"/>
                   </a:moveTo>
                   <a:lnTo>
-                    <a:pt x="2014199" y="12303"/>
+                    <a:pt x="1974217" y="12328"/>
                   </a:lnTo>
                   <a:lnTo>
-                    <a:pt x="1558397" y="43506"/>
+                    <a:pt x="1527462" y="43594"/>
                   </a:lnTo>
                   <a:lnTo>
-                    <a:pt x="1235000" y="81616"/>
+                    <a:pt x="1210485" y="81781"/>
                   </a:lnTo>
                   <a:lnTo>
-                    <a:pt x="0" y="343278"/>
+                    <a:pt x="0" y="343973"/>
                   </a:lnTo>
                 </a:path>
               </a:pathLst>
@@ -10334,27 +10334,27 @@
           </p:nvSpPr>
           <p:spPr>
             <a:xfrm>
-              <a:off x="1527154" y="3842969"/>
-              <a:ext cx="2337596" cy="320947"/>
+              <a:off x="1533493" y="3842292"/>
+              <a:ext cx="2291194" cy="321597"/>
             </a:xfrm>
             <a:custGeom>
               <a:avLst/>
               <a:pathLst>
-                <a:path w="2337596" h="320947">
+                <a:path w="2291194" h="321597">
                   <a:moveTo>
-                    <a:pt x="0" y="320947"/>
+                    <a:pt x="0" y="321597"/>
                   </a:moveTo>
                   <a:lnTo>
-                    <a:pt x="1235000" y="151384"/>
+                    <a:pt x="1210485" y="151690"/>
                   </a:lnTo>
                   <a:lnTo>
-                    <a:pt x="1558397" y="106982"/>
+                    <a:pt x="1527462" y="107199"/>
                   </a:lnTo>
                   <a:lnTo>
-                    <a:pt x="2014199" y="44401"/>
+                    <a:pt x="1974217" y="44491"/>
                   </a:lnTo>
                   <a:lnTo>
-                    <a:pt x="2337596" y="0"/>
+                    <a:pt x="2291194" y="0"/>
                   </a:lnTo>
                 </a:path>
               </a:pathLst>
@@ -10383,7 +10383,7 @@
           </p:nvSpPr>
           <p:spPr>
             <a:xfrm>
-              <a:off x="3375867" y="3173326"/>
+              <a:off x="3335803" y="3171612"/>
               <a:ext cx="63550" cy="82021"/>
             </a:xfrm>
             <a:prstGeom prst="rect">
@@ -10429,7 +10429,7 @@
           </p:nvSpPr>
           <p:spPr>
             <a:xfrm>
-              <a:off x="3448607" y="3173326"/>
+              <a:off x="3408544" y="3171612"/>
               <a:ext cx="416143" cy="82021"/>
             </a:xfrm>
             <a:prstGeom prst="rect">
@@ -10512,7 +10512,7 @@
                 </a:path>
               </a:pathLst>
             </a:custGeom>
-            <a:ln w="21681" cap="flat">
+            <a:ln w="11086" cap="flat">
               <a:solidFill>
                 <a:srgbClr val="000000">
                   <a:alpha val="100000"/>
@@ -10536,7 +10536,7 @@
           </p:nvSpPr>
           <p:spPr>
             <a:xfrm rot="-5400000">
-              <a:off x="1140466" y="4397163"/>
+              <a:off x="1140466" y="4397681"/>
               <a:ext cx="141274" cy="72877"/>
             </a:xfrm>
             <a:prstGeom prst="rect">
@@ -10582,7 +10582,7 @@
           </p:nvSpPr>
           <p:spPr>
             <a:xfrm rot="-5400000">
-              <a:off x="1140466" y="4127536"/>
+              <a:off x="1140466" y="4127508"/>
               <a:ext cx="141274" cy="72877"/>
             </a:xfrm>
             <a:prstGeom prst="rect">
@@ -10628,7 +10628,7 @@
           </p:nvSpPr>
           <p:spPr>
             <a:xfrm rot="-5400000">
-              <a:off x="1140466" y="3857909"/>
+              <a:off x="1140466" y="3857335"/>
               <a:ext cx="141274" cy="72877"/>
             </a:xfrm>
             <a:prstGeom prst="rect">
@@ -10674,7 +10674,7 @@
           </p:nvSpPr>
           <p:spPr>
             <a:xfrm rot="-5400000">
-              <a:off x="1140466" y="3588282"/>
+              <a:off x="1140466" y="3587162"/>
               <a:ext cx="141274" cy="72877"/>
             </a:xfrm>
             <a:prstGeom prst="rect">
@@ -10720,7 +10720,7 @@
           </p:nvSpPr>
           <p:spPr>
             <a:xfrm rot="-5400000">
-              <a:off x="1140466" y="3318655"/>
+              <a:off x="1140466" y="3316989"/>
               <a:ext cx="141274" cy="72877"/>
             </a:xfrm>
             <a:prstGeom prst="rect">
@@ -10766,7 +10766,7 @@
           </p:nvSpPr>
           <p:spPr>
             <a:xfrm rot="-5400000">
-              <a:off x="1140466" y="3049027"/>
+              <a:off x="1140466" y="3046816"/>
               <a:ext cx="141274" cy="72877"/>
             </a:xfrm>
             <a:prstGeom prst="rect">
@@ -10812,7 +10812,7 @@
           </p:nvSpPr>
           <p:spPr>
             <a:xfrm>
-              <a:off x="1281564" y="4433602"/>
+              <a:off x="1281564" y="4434120"/>
               <a:ext cx="28468" cy="0"/>
             </a:xfrm>
             <a:custGeom>
@@ -10828,9 +10828,9 @@
                 </a:path>
               </a:pathLst>
             </a:custGeom>
-            <a:ln w="21681" cap="flat">
+            <a:ln w="11086" cap="flat">
               <a:solidFill>
-                <a:srgbClr val="000000">
+                <a:srgbClr val="333333">
                   <a:alpha val="100000"/>
                 </a:srgbClr>
               </a:solidFill>
@@ -10852,7 +10852,7 @@
           </p:nvSpPr>
           <p:spPr>
             <a:xfrm>
-              <a:off x="1281564" y="4163975"/>
+              <a:off x="1281564" y="4163947"/>
               <a:ext cx="28468" cy="0"/>
             </a:xfrm>
             <a:custGeom>
@@ -10868,9 +10868,9 @@
                 </a:path>
               </a:pathLst>
             </a:custGeom>
-            <a:ln w="21681" cap="flat">
+            <a:ln w="11086" cap="flat">
               <a:solidFill>
-                <a:srgbClr val="000000">
+                <a:srgbClr val="333333">
                   <a:alpha val="100000"/>
                 </a:srgbClr>
               </a:solidFill>
@@ -10892,7 +10892,7 @@
           </p:nvSpPr>
           <p:spPr>
             <a:xfrm>
-              <a:off x="1281564" y="3894348"/>
+              <a:off x="1281564" y="3893774"/>
               <a:ext cx="28468" cy="0"/>
             </a:xfrm>
             <a:custGeom>
@@ -10908,9 +10908,9 @@
                 </a:path>
               </a:pathLst>
             </a:custGeom>
-            <a:ln w="21681" cap="flat">
+            <a:ln w="11086" cap="flat">
               <a:solidFill>
-                <a:srgbClr val="000000">
+                <a:srgbClr val="333333">
                   <a:alpha val="100000"/>
                 </a:srgbClr>
               </a:solidFill>
@@ -10932,7 +10932,7 @@
           </p:nvSpPr>
           <p:spPr>
             <a:xfrm>
-              <a:off x="1281564" y="3624721"/>
+              <a:off x="1281564" y="3623601"/>
               <a:ext cx="28468" cy="0"/>
             </a:xfrm>
             <a:custGeom>
@@ -10948,9 +10948,9 @@
                 </a:path>
               </a:pathLst>
             </a:custGeom>
-            <a:ln w="21681" cap="flat">
+            <a:ln w="11086" cap="flat">
               <a:solidFill>
-                <a:srgbClr val="000000">
+                <a:srgbClr val="333333">
                   <a:alpha val="100000"/>
                 </a:srgbClr>
               </a:solidFill>
@@ -10972,7 +10972,7 @@
           </p:nvSpPr>
           <p:spPr>
             <a:xfrm>
-              <a:off x="1281564" y="3355093"/>
+              <a:off x="1281564" y="3353428"/>
               <a:ext cx="28468" cy="0"/>
             </a:xfrm>
             <a:custGeom>
@@ -10988,9 +10988,9 @@
                 </a:path>
               </a:pathLst>
             </a:custGeom>
-            <a:ln w="21681" cap="flat">
+            <a:ln w="11086" cap="flat">
               <a:solidFill>
-                <a:srgbClr val="000000">
+                <a:srgbClr val="333333">
                   <a:alpha val="100000"/>
                 </a:srgbClr>
               </a:solidFill>
@@ -11012,7 +11012,7 @@
           </p:nvSpPr>
           <p:spPr>
             <a:xfrm>
-              <a:off x="1281564" y="3085466"/>
+              <a:off x="1281564" y="3083255"/>
               <a:ext cx="28468" cy="0"/>
             </a:xfrm>
             <a:custGeom>
@@ -11028,9 +11028,9 @@
                 </a:path>
               </a:pathLst>
             </a:custGeom>
-            <a:ln w="21681" cap="flat">
+            <a:ln w="11086" cap="flat">
               <a:solidFill>
-                <a:srgbClr val="000000">
+                <a:srgbClr val="333333">
                   <a:alpha val="100000"/>
                 </a:srgbClr>
               </a:solidFill>
@@ -11068,7 +11068,7 @@
                 </a:path>
               </a:pathLst>
             </a:custGeom>
-            <a:ln w="21681" cap="flat">
+            <a:ln w="11086" cap="flat">
               <a:solidFill>
                 <a:srgbClr val="000000">
                   <a:alpha val="100000"/>
@@ -11092,7 +11092,7 @@
           </p:nvSpPr>
           <p:spPr>
             <a:xfrm>
-              <a:off x="1527154" y="4485858"/>
+              <a:off x="1533493" y="4485858"/>
               <a:ext cx="0" cy="28468"/>
             </a:xfrm>
             <a:custGeom>
@@ -11108,9 +11108,9 @@
                 </a:path>
               </a:pathLst>
             </a:custGeom>
-            <a:ln w="21681" cap="flat">
+            <a:ln w="11086" cap="flat">
               <a:solidFill>
-                <a:srgbClr val="000000">
+                <a:srgbClr val="333333">
                   <a:alpha val="100000"/>
                 </a:srgbClr>
               </a:solidFill>
@@ -11132,7 +11132,7 @@
           </p:nvSpPr>
           <p:spPr>
             <a:xfrm>
-              <a:off x="2306353" y="4485858"/>
+              <a:off x="2297225" y="4485858"/>
               <a:ext cx="0" cy="28468"/>
             </a:xfrm>
             <a:custGeom>
@@ -11148,9 +11148,9 @@
                 </a:path>
               </a:pathLst>
             </a:custGeom>
-            <a:ln w="21681" cap="flat">
+            <a:ln w="11086" cap="flat">
               <a:solidFill>
-                <a:srgbClr val="000000">
+                <a:srgbClr val="333333">
                   <a:alpha val="100000"/>
                 </a:srgbClr>
               </a:solidFill>
@@ -11172,7 +11172,7 @@
           </p:nvSpPr>
           <p:spPr>
             <a:xfrm>
-              <a:off x="3085552" y="4485858"/>
+              <a:off x="3060956" y="4485858"/>
               <a:ext cx="0" cy="28468"/>
             </a:xfrm>
             <a:custGeom>
@@ -11188,9 +11188,9 @@
                 </a:path>
               </a:pathLst>
             </a:custGeom>
-            <a:ln w="21681" cap="flat">
+            <a:ln w="11086" cap="flat">
               <a:solidFill>
-                <a:srgbClr val="000000">
+                <a:srgbClr val="333333">
                   <a:alpha val="100000"/>
                 </a:srgbClr>
               </a:solidFill>
@@ -11212,7 +11212,7 @@
           </p:nvSpPr>
           <p:spPr>
             <a:xfrm>
-              <a:off x="3864751" y="4485858"/>
+              <a:off x="3824687" y="4485858"/>
               <a:ext cx="0" cy="28468"/>
             </a:xfrm>
             <a:custGeom>
@@ -11228,9 +11228,9 @@
                 </a:path>
               </a:pathLst>
             </a:custGeom>
-            <a:ln w="21681" cap="flat">
+            <a:ln w="11086" cap="flat">
               <a:solidFill>
-                <a:srgbClr val="000000">
+                <a:srgbClr val="333333">
                   <a:alpha val="100000"/>
                 </a:srgbClr>
               </a:solidFill>
@@ -11252,7 +11252,7 @@
           </p:nvSpPr>
           <p:spPr>
             <a:xfrm>
-              <a:off x="1498899" y="4537100"/>
+              <a:off x="1505238" y="4537100"/>
               <a:ext cx="56509" cy="72877"/>
             </a:xfrm>
             <a:prstGeom prst="rect">
@@ -11298,7 +11298,7 @@
           </p:nvSpPr>
           <p:spPr>
             <a:xfrm>
-              <a:off x="2278098" y="4537100"/>
+              <a:off x="2268970" y="4537100"/>
               <a:ext cx="56509" cy="72877"/>
             </a:xfrm>
             <a:prstGeom prst="rect">
@@ -11344,7 +11344,7 @@
           </p:nvSpPr>
           <p:spPr>
             <a:xfrm>
-              <a:off x="3057297" y="4537100"/>
+              <a:off x="3032701" y="4537100"/>
               <a:ext cx="56509" cy="72877"/>
             </a:xfrm>
             <a:prstGeom prst="rect">
@@ -11390,7 +11390,7 @@
           </p:nvSpPr>
           <p:spPr>
             <a:xfrm>
-              <a:off x="3836496" y="4537100"/>
+              <a:off x="3796432" y="4537100"/>
               <a:ext cx="56509" cy="72877"/>
             </a:xfrm>
             <a:prstGeom prst="rect">
@@ -11554,7 +11554,7 @@
           </p:nvSpPr>
           <p:spPr>
             <a:xfrm>
-              <a:off x="4375823" y="3954225"/>
+              <a:off x="4418161" y="3950649"/>
               <a:ext cx="75116" cy="75116"/>
             </a:xfrm>
             <a:prstGeom prst="ellipse">
@@ -11580,7 +11580,7 @@
           </p:nvSpPr>
           <p:spPr>
             <a:xfrm>
-              <a:off x="4299235" y="3295467"/>
+              <a:off x="4388506" y="3294022"/>
               <a:ext cx="75116" cy="75116"/>
             </a:xfrm>
             <a:prstGeom prst="ellipse">
@@ -11606,7 +11606,7 @@
           </p:nvSpPr>
           <p:spPr>
             <a:xfrm>
-              <a:off x="4274360" y="4021538"/>
+              <a:off x="4447879" y="4021892"/>
               <a:ext cx="75116" cy="75116"/>
             </a:xfrm>
             <a:prstGeom prst="ellipse">
@@ -11632,7 +11632,7 @@
           </p:nvSpPr>
           <p:spPr>
             <a:xfrm>
-              <a:off x="4367903" y="3789649"/>
+              <a:off x="4304007" y="3786292"/>
               <a:ext cx="75116" cy="75116"/>
             </a:xfrm>
             <a:prstGeom prst="ellipse">
@@ -11658,7 +11658,7 @@
           </p:nvSpPr>
           <p:spPr>
             <a:xfrm>
-              <a:off x="4405488" y="4066409"/>
+              <a:off x="4330020" y="4068112"/>
               <a:ext cx="75116" cy="75116"/>
             </a:xfrm>
             <a:prstGeom prst="ellipse">
@@ -11684,7 +11684,7 @@
           </p:nvSpPr>
           <p:spPr>
             <a:xfrm>
-              <a:off x="4366200" y="3207110"/>
+              <a:off x="4480076" y="3208138"/>
               <a:ext cx="75116" cy="75116"/>
             </a:xfrm>
             <a:prstGeom prst="ellipse">
@@ -11710,7 +11710,7 @@
           </p:nvSpPr>
           <p:spPr>
             <a:xfrm>
-              <a:off x="4361983" y="3170829"/>
+              <a:off x="4273743" y="3170829"/>
               <a:ext cx="75116" cy="75116"/>
             </a:xfrm>
             <a:prstGeom prst="ellipse">
@@ -11736,7 +11736,7 @@
           </p:nvSpPr>
           <p:spPr>
             <a:xfrm>
-              <a:off x="4460577" y="3527867"/>
+              <a:off x="4420273" y="3527409"/>
               <a:ext cx="75116" cy="75116"/>
             </a:xfrm>
             <a:prstGeom prst="ellipse">
@@ -11762,7 +11762,7 @@
           </p:nvSpPr>
           <p:spPr>
             <a:xfrm>
-              <a:off x="4389344" y="4211308"/>
+              <a:off x="4374254" y="4215017"/>
               <a:ext cx="75116" cy="75116"/>
             </a:xfrm>
             <a:prstGeom prst="ellipse">
@@ -11788,7 +11788,7 @@
           </p:nvSpPr>
           <p:spPr>
             <a:xfrm>
-              <a:off x="4273743" y="3847953"/>
+              <a:off x="4424894" y="3847753"/>
               <a:ext cx="75116" cy="75116"/>
             </a:xfrm>
             <a:prstGeom prst="ellipse">
@@ -11814,7 +11814,7 @@
           </p:nvSpPr>
           <p:spPr>
             <a:xfrm>
-              <a:off x="5152203" y="4112256"/>
+              <a:off x="5211662" y="4111223"/>
               <a:ext cx="75116" cy="75116"/>
             </a:xfrm>
             <a:prstGeom prst="ellipse">
@@ -11840,7 +11840,7 @@
           </p:nvSpPr>
           <p:spPr>
             <a:xfrm>
-              <a:off x="5042267" y="3615821"/>
+              <a:off x="5148370" y="3615457"/>
               <a:ext cx="75116" cy="75116"/>
             </a:xfrm>
             <a:prstGeom prst="ellipse">
@@ -11866,7 +11866,7 @@
           </p:nvSpPr>
           <p:spPr>
             <a:xfrm>
-              <a:off x="5185779" y="4026069"/>
+              <a:off x="5089109" y="4025553"/>
               <a:ext cx="75116" cy="75116"/>
             </a:xfrm>
             <a:prstGeom prst="ellipse">
@@ -11892,7 +11892,7 @@
           </p:nvSpPr>
           <p:spPr>
             <a:xfrm>
-              <a:off x="5023152" y="4255838"/>
+              <a:off x="5061830" y="4257511"/>
               <a:ext cx="75116" cy="75116"/>
             </a:xfrm>
             <a:prstGeom prst="ellipse">
@@ -11918,7 +11918,7 @@
           </p:nvSpPr>
           <p:spPr>
             <a:xfrm>
-              <a:off x="5136751" y="3914956"/>
+              <a:off x="5148480" y="3915029"/>
               <a:ext cx="75116" cy="75116"/>
             </a:xfrm>
             <a:prstGeom prst="ellipse">
@@ -11944,7 +11944,7 @@
           </p:nvSpPr>
           <p:spPr>
             <a:xfrm>
-              <a:off x="5150882" y="3590524"/>
+              <a:off x="5174128" y="3588821"/>
               <a:ext cx="75116" cy="75116"/>
             </a:xfrm>
             <a:prstGeom prst="ellipse">
@@ -11970,7 +11970,7 @@
           </p:nvSpPr>
           <p:spPr>
             <a:xfrm>
-              <a:off x="5108730" y="4335657"/>
+              <a:off x="5114120" y="4333143"/>
               <a:ext cx="75116" cy="75116"/>
             </a:xfrm>
             <a:prstGeom prst="ellipse">
@@ -11996,7 +11996,7 @@
           </p:nvSpPr>
           <p:spPr>
             <a:xfrm>
-              <a:off x="5201081" y="4229150"/>
+              <a:off x="5055653" y="4226207"/>
               <a:ext cx="75116" cy="75116"/>
             </a:xfrm>
             <a:prstGeom prst="ellipse">
@@ -12022,7 +12022,7 @@
           </p:nvSpPr>
           <p:spPr>
             <a:xfrm>
-              <a:off x="5055271" y="4098092"/>
+              <a:off x="5220368" y="4097571"/>
               <a:ext cx="75116" cy="75116"/>
             </a:xfrm>
             <a:prstGeom prst="ellipse">
@@ -12048,7 +12048,7 @@
           </p:nvSpPr>
           <p:spPr>
             <a:xfrm>
-              <a:off x="5189702" y="4329001"/>
+              <a:off x="5149396" y="4331133"/>
               <a:ext cx="75116" cy="75116"/>
             </a:xfrm>
             <a:prstGeom prst="ellipse">
@@ -12074,7 +12074,7 @@
           </p:nvSpPr>
           <p:spPr>
             <a:xfrm>
-              <a:off x="5082275" y="4216208"/>
+              <a:off x="5148563" y="4217164"/>
               <a:ext cx="75116" cy="75116"/>
             </a:xfrm>
             <a:prstGeom prst="ellipse">
@@ -12100,7 +12100,7 @@
           </p:nvSpPr>
           <p:spPr>
             <a:xfrm>
-              <a:off x="5095397" y="4331062"/>
+              <a:off x="5172675" y="4329749"/>
               <a:ext cx="75116" cy="75116"/>
             </a:xfrm>
             <a:prstGeom prst="ellipse">
@@ -12126,7 +12126,7 @@
           </p:nvSpPr>
           <p:spPr>
             <a:xfrm>
-              <a:off x="5134625" y="4057376"/>
+              <a:off x="5123544" y="4060472"/>
               <a:ext cx="75116" cy="75116"/>
             </a:xfrm>
             <a:prstGeom prst="ellipse">
@@ -12152,7 +12152,7 @@
           </p:nvSpPr>
           <p:spPr>
             <a:xfrm>
-              <a:off x="5205934" y="4006997"/>
+              <a:off x="5188028" y="4006266"/>
               <a:ext cx="75116" cy="75116"/>
             </a:xfrm>
             <a:prstGeom prst="ellipse">
@@ -12178,7 +12178,7 @@
           </p:nvSpPr>
           <p:spPr>
             <a:xfrm>
-              <a:off x="5031365" y="3764907"/>
+              <a:off x="5093010" y="3763643"/>
               <a:ext cx="75116" cy="75116"/>
             </a:xfrm>
             <a:prstGeom prst="ellipse">
@@ -12204,7 +12204,7 @@
           </p:nvSpPr>
           <p:spPr>
             <a:xfrm>
-              <a:off x="5200874" y="3802221"/>
+              <a:off x="5101053" y="3802854"/>
               <a:ext cx="75116" cy="75116"/>
             </a:xfrm>
             <a:prstGeom prst="ellipse">
@@ -12230,7 +12230,7 @@
           </p:nvSpPr>
           <p:spPr>
             <a:xfrm>
-              <a:off x="5214386" y="4111335"/>
+              <a:off x="5105167" y="4110230"/>
               <a:ext cx="75116" cy="75116"/>
             </a:xfrm>
             <a:prstGeom prst="ellipse">
@@ -12256,7 +12256,7 @@
           </p:nvSpPr>
           <p:spPr>
             <a:xfrm>
-              <a:off x="5030680" y="4387467"/>
+              <a:off x="5066780" y="4387467"/>
               <a:ext cx="75116" cy="75116"/>
             </a:xfrm>
             <a:prstGeom prst="ellipse">
@@ -12282,7 +12282,7 @@
           </p:nvSpPr>
           <p:spPr>
             <a:xfrm>
-              <a:off x="5985544" y="4103125"/>
+              <a:off x="5936395" y="4102131"/>
               <a:ext cx="75116" cy="75116"/>
             </a:xfrm>
             <a:prstGeom prst="ellipse">
@@ -12308,7 +12308,7 @@
           </p:nvSpPr>
           <p:spPr>
             <a:xfrm>
-              <a:off x="5814418" y="4165735"/>
+              <a:off x="5795312" y="4166855"/>
               <a:ext cx="75116" cy="75116"/>
             </a:xfrm>
             <a:prstGeom prst="ellipse">
@@ -12334,7 +12334,7 @@
           </p:nvSpPr>
           <p:spPr>
             <a:xfrm>
-              <a:off x="6004936" y="4142327"/>
+              <a:off x="5814022" y="4140588"/>
               <a:ext cx="75116" cy="75116"/>
             </a:xfrm>
             <a:prstGeom prst="ellipse">
@@ -12360,7 +12360,7 @@
           </p:nvSpPr>
           <p:spPr>
             <a:xfrm>
-              <a:off x="5988957" y="4192305"/>
+              <a:off x="5810511" y="4194847"/>
               <a:ext cx="75116" cy="75116"/>
             </a:xfrm>
             <a:prstGeom prst="ellipse">
@@ -12386,7 +12386,7 @@
           </p:nvSpPr>
           <p:spPr>
             <a:xfrm>
-              <a:off x="5950314" y="3359155"/>
+              <a:off x="5910672" y="3356199"/>
               <a:ext cx="75116" cy="75116"/>
             </a:xfrm>
             <a:prstGeom prst="ellipse">
@@ -12412,7 +12412,7 @@
           </p:nvSpPr>
           <p:spPr>
             <a:xfrm>
-              <a:off x="5843598" y="3403130"/>
+              <a:off x="5902464" y="3401621"/>
               <a:ext cx="75116" cy="75116"/>
             </a:xfrm>
             <a:prstGeom prst="ellipse">
@@ -12438,7 +12438,7 @@
           </p:nvSpPr>
           <p:spPr>
             <a:xfrm>
-              <a:off x="5816808" y="3934855"/>
+              <a:off x="5948162" y="3933679"/>
               <a:ext cx="75116" cy="75116"/>
             </a:xfrm>
             <a:prstGeom prst="ellipse">
@@ -12464,7 +12464,7 @@
           </p:nvSpPr>
           <p:spPr>
             <a:xfrm>
-              <a:off x="5948821" y="4091898"/>
+              <a:off x="5906740" y="4090870"/>
               <a:ext cx="75116" cy="75116"/>
             </a:xfrm>
             <a:prstGeom prst="ellipse">
@@ -12490,7 +12490,7 @@
           </p:nvSpPr>
           <p:spPr>
             <a:xfrm>
-              <a:off x="5824066" y="4210061"/>
+              <a:off x="5966583" y="4209426"/>
               <a:ext cx="75116" cy="75116"/>
             </a:xfrm>
             <a:prstGeom prst="ellipse">
@@ -12516,7 +12516,7 @@
           </p:nvSpPr>
           <p:spPr>
             <a:xfrm>
-              <a:off x="5830899" y="3899705"/>
+              <a:off x="5818524" y="3897952"/>
               <a:ext cx="75116" cy="75116"/>
             </a:xfrm>
             <a:prstGeom prst="ellipse">
@@ -12542,7 +12542,7 @@
           </p:nvSpPr>
           <p:spPr>
             <a:xfrm>
-              <a:off x="5900069" y="3690342"/>
+              <a:off x="5896056" y="3693018"/>
               <a:ext cx="75116" cy="75116"/>
             </a:xfrm>
             <a:prstGeom prst="ellipse">
@@ -12568,7 +12568,7 @@
           </p:nvSpPr>
           <p:spPr>
             <a:xfrm>
-              <a:off x="5905276" y="4260357"/>
+              <a:off x="5889318" y="4263236"/>
               <a:ext cx="75116" cy="75116"/>
             </a:xfrm>
             <a:prstGeom prst="ellipse">
@@ -12594,7 +12594,7 @@
           </p:nvSpPr>
           <p:spPr>
             <a:xfrm>
-              <a:off x="5865532" y="3535848"/>
+              <a:off x="5943962" y="3535934"/>
               <a:ext cx="75116" cy="75116"/>
             </a:xfrm>
             <a:prstGeom prst="ellipse">
@@ -12620,7 +12620,7 @@
           </p:nvSpPr>
           <p:spPr>
             <a:xfrm>
-              <a:off x="5921055" y="3878203"/>
+              <a:off x="5831081" y="3878739"/>
               <a:ext cx="75116" cy="75116"/>
             </a:xfrm>
             <a:prstGeom prst="ellipse">
@@ -12646,7 +12646,7 @@
           </p:nvSpPr>
           <p:spPr>
             <a:xfrm>
-              <a:off x="5826404" y="3937713"/>
+              <a:off x="5858603" y="3938844"/>
               <a:ext cx="75116" cy="75116"/>
             </a:xfrm>
             <a:prstGeom prst="ellipse">
@@ -12672,7 +12672,7 @@
           </p:nvSpPr>
           <p:spPr>
             <a:xfrm>
-              <a:off x="5923335" y="4200488"/>
+              <a:off x="5907430" y="4199402"/>
               <a:ext cx="75116" cy="75116"/>
             </a:xfrm>
             <a:prstGeom prst="ellipse">
@@ -12698,7 +12698,7 @@
           </p:nvSpPr>
           <p:spPr>
             <a:xfrm>
-              <a:off x="5820413" y="3691665"/>
+              <a:off x="5948756" y="3690558"/>
               <a:ext cx="75116" cy="75116"/>
             </a:xfrm>
             <a:prstGeom prst="ellipse">
@@ -12724,7 +12724,7 @@
           </p:nvSpPr>
           <p:spPr>
             <a:xfrm>
-              <a:off x="5961411" y="3924042"/>
+              <a:off x="5961910" y="3923399"/>
               <a:ext cx="75116" cy="75116"/>
             </a:xfrm>
             <a:prstGeom prst="ellipse">
@@ -12750,7 +12750,7 @@
           </p:nvSpPr>
           <p:spPr>
             <a:xfrm>
-              <a:off x="5788714" y="3668925"/>
+              <a:off x="5817016" y="3668179"/>
               <a:ext cx="75116" cy="75116"/>
             </a:xfrm>
             <a:prstGeom prst="ellipse">
@@ -12776,7 +12776,7 @@
           </p:nvSpPr>
           <p:spPr>
             <a:xfrm>
-              <a:off x="5998580" y="3894273"/>
+              <a:off x="5879456" y="3896240"/>
               <a:ext cx="75116" cy="75116"/>
             </a:xfrm>
             <a:prstGeom prst="ellipse">
@@ -12802,7 +12802,7 @@
           </p:nvSpPr>
           <p:spPr>
             <a:xfrm>
-              <a:off x="6687589" y="4047523"/>
+              <a:off x="6697667" y="4047441"/>
               <a:ext cx="75116" cy="75116"/>
             </a:xfrm>
             <a:prstGeom prst="ellipse">
@@ -12828,7 +12828,7 @@
           </p:nvSpPr>
           <p:spPr>
             <a:xfrm>
-              <a:off x="6715783" y="4140813"/>
+              <a:off x="6752709" y="4141943"/>
               <a:ext cx="75116" cy="75116"/>
             </a:xfrm>
             <a:prstGeom prst="ellipse">
@@ -12854,7 +12854,7 @@
           </p:nvSpPr>
           <p:spPr>
             <a:xfrm>
-              <a:off x="6622719" y="3910398"/>
+              <a:off x="6583654" y="3910620"/>
               <a:ext cx="75116" cy="75116"/>
             </a:xfrm>
             <a:prstGeom prst="ellipse">
@@ -12880,7 +12880,7 @@
           </p:nvSpPr>
           <p:spPr>
             <a:xfrm>
-              <a:off x="6589428" y="3700669"/>
+              <a:off x="6621788" y="3702908"/>
               <a:ext cx="75116" cy="75116"/>
             </a:xfrm>
             <a:prstGeom prst="ellipse">
@@ -12906,7 +12906,7 @@
           </p:nvSpPr>
           <p:spPr>
             <a:xfrm>
-              <a:off x="6726049" y="3885566"/>
+              <a:off x="6590538" y="3885382"/>
               <a:ext cx="75116" cy="75116"/>
             </a:xfrm>
             <a:prstGeom prst="ellipse">
@@ -12932,7 +12932,7 @@
           </p:nvSpPr>
           <p:spPr>
             <a:xfrm>
-              <a:off x="6572192" y="3924286"/>
+              <a:off x="6674389" y="3922734"/>
               <a:ext cx="75116" cy="75116"/>
             </a:xfrm>
             <a:prstGeom prst="ellipse">
@@ -12958,7 +12958,7 @@
           </p:nvSpPr>
           <p:spPr>
             <a:xfrm>
-              <a:off x="6765159" y="4065100"/>
+              <a:off x="6670445" y="4062660"/>
               <a:ext cx="75116" cy="75116"/>
             </a:xfrm>
             <a:prstGeom prst="ellipse">
@@ -12984,7 +12984,7 @@
           </p:nvSpPr>
           <p:spPr>
             <a:xfrm>
-              <a:off x="6710157" y="3961499"/>
+              <a:off x="6602676" y="3962530"/>
               <a:ext cx="75116" cy="75116"/>
             </a:xfrm>
             <a:prstGeom prst="ellipse">
@@ -13010,7 +13010,7 @@
           </p:nvSpPr>
           <p:spPr>
             <a:xfrm>
-              <a:off x="6619566" y="4065057"/>
+              <a:off x="6622004" y="4063664"/>
               <a:ext cx="75116" cy="75116"/>
             </a:xfrm>
             <a:prstGeom prst="ellipse">
@@ -13036,7 +13036,7 @@
           </p:nvSpPr>
           <p:spPr>
             <a:xfrm>
-              <a:off x="6762619" y="3980846"/>
+              <a:off x="6655523" y="3979534"/>
               <a:ext cx="75116" cy="75116"/>
             </a:xfrm>
             <a:prstGeom prst="ellipse">
@@ -13062,7 +13062,7 @@
           </p:nvSpPr>
           <p:spPr>
             <a:xfrm>
-              <a:off x="6565835" y="3741181"/>
+              <a:off x="6563644" y="3740750"/>
               <a:ext cx="75116" cy="75116"/>
             </a:xfrm>
             <a:prstGeom prst="ellipse">
@@ -13088,7 +13088,7 @@
           </p:nvSpPr>
           <p:spPr>
             <a:xfrm>
-              <a:off x="6770769" y="3457778"/>
+              <a:off x="6745803" y="3458487"/>
               <a:ext cx="75116" cy="75116"/>
             </a:xfrm>
             <a:prstGeom prst="ellipse">
@@ -13114,7 +13114,7 @@
           </p:nvSpPr>
           <p:spPr>
             <a:xfrm>
-              <a:off x="6737759" y="4079717"/>
+              <a:off x="6574030" y="4077277"/>
               <a:ext cx="75116" cy="75116"/>
             </a:xfrm>
             <a:prstGeom prst="ellipse">
@@ -13140,7 +13140,7 @@
           </p:nvSpPr>
           <p:spPr>
             <a:xfrm>
-              <a:off x="6555904" y="4230866"/>
+              <a:off x="6592119" y="4231552"/>
               <a:ext cx="75116" cy="75116"/>
             </a:xfrm>
             <a:prstGeom prst="ellipse">
@@ -13166,7 +13166,7 @@
           </p:nvSpPr>
           <p:spPr>
             <a:xfrm>
-              <a:off x="6754946" y="4197447"/>
+              <a:off x="6576993" y="4197944"/>
               <a:ext cx="75116" cy="75116"/>
             </a:xfrm>
             <a:prstGeom prst="ellipse">
@@ -13192,7 +13192,7 @@
           </p:nvSpPr>
           <p:spPr>
             <a:xfrm>
-              <a:off x="6750366" y="3957663"/>
+              <a:off x="6642866" y="3958702"/>
               <a:ext cx="75116" cy="75116"/>
             </a:xfrm>
             <a:prstGeom prst="ellipse">
@@ -13218,7 +13218,7 @@
           </p:nvSpPr>
           <p:spPr>
             <a:xfrm>
-              <a:off x="6562483" y="4136776"/>
+              <a:off x="6587432" y="4136541"/>
               <a:ext cx="75116" cy="75116"/>
             </a:xfrm>
             <a:prstGeom prst="ellipse">
@@ -13244,7 +13244,7 @@
           </p:nvSpPr>
           <p:spPr>
             <a:xfrm>
-              <a:off x="6694037" y="4031104"/>
+              <a:off x="6637713" y="4030980"/>
               <a:ext cx="75116" cy="75116"/>
             </a:xfrm>
             <a:prstGeom prst="ellipse">
@@ -13270,7 +13270,7 @@
           </p:nvSpPr>
           <p:spPr>
             <a:xfrm>
-              <a:off x="6650613" y="3538763"/>
+              <a:off x="6688862" y="3536826"/>
               <a:ext cx="75116" cy="75116"/>
             </a:xfrm>
             <a:prstGeom prst="ellipse">
@@ -13296,7 +13296,7 @@
           </p:nvSpPr>
           <p:spPr>
             <a:xfrm>
-              <a:off x="6650063" y="3861971"/>
+              <a:off x="6679015" y="3862148"/>
               <a:ext cx="75116" cy="75116"/>
             </a:xfrm>
             <a:prstGeom prst="ellipse">
@@ -13322,7 +13322,7 @@
           </p:nvSpPr>
           <p:spPr>
             <a:xfrm>
-              <a:off x="6598909" y="3946879"/>
+              <a:off x="6660932" y="3947976"/>
               <a:ext cx="75116" cy="75116"/>
             </a:xfrm>
             <a:prstGeom prst="ellipse">
@@ -13348,7 +13348,7 @@
           </p:nvSpPr>
           <p:spPr>
             <a:xfrm>
-              <a:off x="6598452" y="3893738"/>
+              <a:off x="6730895" y="3893643"/>
               <a:ext cx="75116" cy="75116"/>
             </a:xfrm>
             <a:prstGeom prst="ellipse">
@@ -13374,7 +13374,7 @@
           </p:nvSpPr>
           <p:spPr>
             <a:xfrm>
-              <a:off x="6741861" y="4193886"/>
+              <a:off x="6770769" y="4193319"/>
               <a:ext cx="75116" cy="75116"/>
             </a:xfrm>
             <a:prstGeom prst="ellipse">
@@ -13400,7 +13400,7 @@
           </p:nvSpPr>
           <p:spPr>
             <a:xfrm>
-              <a:off x="6609852" y="3849748"/>
+              <a:off x="6735022" y="3852353"/>
               <a:ext cx="75116" cy="75116"/>
             </a:xfrm>
             <a:prstGeom prst="ellipse">
@@ -13426,42 +13426,42 @@
           </p:nvSpPr>
           <p:spPr>
             <a:xfrm>
-              <a:off x="4391023" y="3759959"/>
-              <a:ext cx="2312034" cy="359939"/>
+              <a:off x="4409073" y="3760054"/>
+              <a:ext cx="2295783" cy="360017"/>
             </a:xfrm>
             <a:custGeom>
               <a:avLst/>
               <a:pathLst>
-                <a:path w="2312034" h="359939">
+                <a:path w="2295783" h="360017">
                   <a:moveTo>
                     <a:pt x="0" y="0"/>
                   </a:moveTo>
                   <a:lnTo>
-                    <a:pt x="1221496" y="105019"/>
+                    <a:pt x="1212910" y="105042"/>
                   </a:lnTo>
                   <a:lnTo>
-                    <a:pt x="1541356" y="120299"/>
+                    <a:pt x="1530522" y="120325"/>
                   </a:lnTo>
                   <a:lnTo>
-                    <a:pt x="1992174" y="131505"/>
+                    <a:pt x="1978171" y="131534"/>
                   </a:lnTo>
                   <a:lnTo>
-                    <a:pt x="2312034" y="133709"/>
+                    <a:pt x="2295783" y="133738"/>
                   </a:lnTo>
                   <a:lnTo>
-                    <a:pt x="2312034" y="359939"/>
+                    <a:pt x="2295783" y="360017"/>
                   </a:lnTo>
                   <a:lnTo>
-                    <a:pt x="1992174" y="331829"/>
+                    <a:pt x="1978171" y="331901"/>
                   </a:lnTo>
                   <a:lnTo>
-                    <a:pt x="1541356" y="300311"/>
+                    <a:pt x="1530522" y="300377"/>
                   </a:lnTo>
                   <a:lnTo>
-                    <a:pt x="1221496" y="285278"/>
+                    <a:pt x="1212910" y="285340"/>
                   </a:lnTo>
                   <a:lnTo>
-                    <a:pt x="0" y="274536"/>
+                    <a:pt x="0" y="274596"/>
                   </a:lnTo>
                   <a:close/>
                 </a:path>
@@ -13487,27 +13487,27 @@
           </p:nvSpPr>
           <p:spPr>
             <a:xfrm>
-              <a:off x="4391023" y="3759959"/>
-              <a:ext cx="2312034" cy="133709"/>
+              <a:off x="4409073" y="3760054"/>
+              <a:ext cx="2295783" cy="133738"/>
             </a:xfrm>
             <a:custGeom>
               <a:avLst/>
               <a:pathLst>
-                <a:path w="2312034" h="133709">
+                <a:path w="2295783" h="133738">
                   <a:moveTo>
                     <a:pt x="0" y="0"/>
                   </a:moveTo>
                   <a:lnTo>
-                    <a:pt x="1221496" y="105019"/>
+                    <a:pt x="1212910" y="105042"/>
                   </a:lnTo>
                   <a:lnTo>
-                    <a:pt x="1541356" y="120299"/>
+                    <a:pt x="1530522" y="120325"/>
                   </a:lnTo>
                   <a:lnTo>
-                    <a:pt x="1992174" y="131505"/>
+                    <a:pt x="1978171" y="131534"/>
                   </a:lnTo>
                   <a:lnTo>
-                    <a:pt x="2312034" y="133709"/>
+                    <a:pt x="2295783" y="133738"/>
                   </a:lnTo>
                 </a:path>
               </a:pathLst>
@@ -13527,24 +13527,24 @@
           </p:nvSpPr>
           <p:spPr>
             <a:xfrm>
-              <a:off x="4391023" y="4034495"/>
-              <a:ext cx="2312034" cy="85402"/>
+              <a:off x="4409073" y="4034650"/>
+              <a:ext cx="2295783" cy="85421"/>
             </a:xfrm>
             <a:custGeom>
               <a:avLst/>
               <a:pathLst>
-                <a:path w="2312034" h="85402">
+                <a:path w="2295783" h="85421">
                   <a:moveTo>
-                    <a:pt x="2312034" y="85402"/>
+                    <a:pt x="2295783" y="85421"/>
                   </a:moveTo>
                   <a:lnTo>
-                    <a:pt x="1992174" y="57292"/>
+                    <a:pt x="1978171" y="57305"/>
                   </a:lnTo>
                   <a:lnTo>
-                    <a:pt x="1541356" y="25775"/>
+                    <a:pt x="1530522" y="25780"/>
                   </a:lnTo>
                   <a:lnTo>
-                    <a:pt x="1221496" y="10741"/>
+                    <a:pt x="1212910" y="10743"/>
                   </a:lnTo>
                   <a:lnTo>
                     <a:pt x="0" y="0"/>
@@ -13567,27 +13567,27 @@
           </p:nvSpPr>
           <p:spPr>
             <a:xfrm>
-              <a:off x="4391023" y="3897227"/>
-              <a:ext cx="2312034" cy="109555"/>
+              <a:off x="4409073" y="3897352"/>
+              <a:ext cx="2295783" cy="109579"/>
             </a:xfrm>
             <a:custGeom>
               <a:avLst/>
               <a:pathLst>
-                <a:path w="2312034" h="109555">
+                <a:path w="2295783" h="109579">
                   <a:moveTo>
                     <a:pt x="0" y="0"/>
                   </a:moveTo>
                   <a:lnTo>
-                    <a:pt x="1221496" y="57880"/>
+                    <a:pt x="1212910" y="57893"/>
                   </a:lnTo>
                   <a:lnTo>
-                    <a:pt x="1541356" y="73037"/>
+                    <a:pt x="1530522" y="73053"/>
                   </a:lnTo>
                   <a:lnTo>
-                    <a:pt x="1992174" y="94399"/>
+                    <a:pt x="1978171" y="94419"/>
                   </a:lnTo>
                   <a:lnTo>
-                    <a:pt x="2312034" y="109555"/>
+                    <a:pt x="2295783" y="109579"/>
                   </a:lnTo>
                 </a:path>
               </a:pathLst>
@@ -13616,7 +13616,7 @@
           </p:nvSpPr>
           <p:spPr>
             <a:xfrm>
-              <a:off x="6214174" y="3171116"/>
+              <a:off x="6215973" y="3171117"/>
               <a:ext cx="63550" cy="82021"/>
             </a:xfrm>
             <a:prstGeom prst="rect">
@@ -13662,7 +13662,7 @@
           </p:nvSpPr>
           <p:spPr>
             <a:xfrm>
-              <a:off x="6286915" y="3171116"/>
+              <a:off x="6288713" y="3171117"/>
               <a:ext cx="416143" cy="82021"/>
             </a:xfrm>
             <a:prstGeom prst="rect">
@@ -13745,7 +13745,7 @@
                 </a:path>
               </a:pathLst>
             </a:custGeom>
-            <a:ln w="21681" cap="flat">
+            <a:ln w="11086" cap="flat">
               <a:solidFill>
                 <a:srgbClr val="000000">
                   <a:alpha val="100000"/>
@@ -13769,7 +13769,7 @@
           </p:nvSpPr>
           <p:spPr>
             <a:xfrm>
-              <a:off x="4157982" y="4308847"/>
+              <a:off x="4157982" y="4309062"/>
               <a:ext cx="28468" cy="0"/>
             </a:xfrm>
             <a:custGeom>
@@ -13785,9 +13785,9 @@
                 </a:path>
               </a:pathLst>
             </a:custGeom>
-            <a:ln w="21681" cap="flat">
+            <a:ln w="11086" cap="flat">
               <a:solidFill>
-                <a:srgbClr val="000000">
+                <a:srgbClr val="333333">
                   <a:alpha val="100000"/>
                 </a:srgbClr>
               </a:solidFill>
@@ -13809,7 +13809,7 @@
           </p:nvSpPr>
           <p:spPr>
             <a:xfrm>
-              <a:off x="4157982" y="4060112"/>
+              <a:off x="4157982" y="4060272"/>
               <a:ext cx="28468" cy="0"/>
             </a:xfrm>
             <a:custGeom>
@@ -13825,9 +13825,9 @@
                 </a:path>
               </a:pathLst>
             </a:custGeom>
-            <a:ln w="21681" cap="flat">
+            <a:ln w="11086" cap="flat">
               <a:solidFill>
-                <a:srgbClr val="000000">
+                <a:srgbClr val="333333">
                   <a:alpha val="100000"/>
                 </a:srgbClr>
               </a:solidFill>
@@ -13849,7 +13849,7 @@
           </p:nvSpPr>
           <p:spPr>
             <a:xfrm>
-              <a:off x="4157982" y="3811376"/>
+              <a:off x="4157982" y="3811482"/>
               <a:ext cx="28468" cy="0"/>
             </a:xfrm>
             <a:custGeom>
@@ -13865,9 +13865,9 @@
                 </a:path>
               </a:pathLst>
             </a:custGeom>
-            <a:ln w="21681" cap="flat">
+            <a:ln w="11086" cap="flat">
               <a:solidFill>
-                <a:srgbClr val="000000">
+                <a:srgbClr val="333333">
                   <a:alpha val="100000"/>
                 </a:srgbClr>
               </a:solidFill>
@@ -13889,7 +13889,7 @@
           </p:nvSpPr>
           <p:spPr>
             <a:xfrm>
-              <a:off x="4157982" y="3562640"/>
+              <a:off x="4157982" y="3562692"/>
               <a:ext cx="28468" cy="0"/>
             </a:xfrm>
             <a:custGeom>
@@ -13905,9 +13905,9 @@
                 </a:path>
               </a:pathLst>
             </a:custGeom>
-            <a:ln w="21681" cap="flat">
+            <a:ln w="11086" cap="flat">
               <a:solidFill>
-                <a:srgbClr val="000000">
+                <a:srgbClr val="333333">
                   <a:alpha val="100000"/>
                 </a:srgbClr>
               </a:solidFill>
@@ -13929,7 +13929,7 @@
           </p:nvSpPr>
           <p:spPr>
             <a:xfrm>
-              <a:off x="4157982" y="3313904"/>
+              <a:off x="4157982" y="3313902"/>
               <a:ext cx="28468" cy="0"/>
             </a:xfrm>
             <a:custGeom>
@@ -13945,9 +13945,9 @@
                 </a:path>
               </a:pathLst>
             </a:custGeom>
-            <a:ln w="21681" cap="flat">
+            <a:ln w="11086" cap="flat">
               <a:solidFill>
-                <a:srgbClr val="000000">
+                <a:srgbClr val="333333">
                   <a:alpha val="100000"/>
                 </a:srgbClr>
               </a:solidFill>
@@ -13969,7 +13969,7 @@
           </p:nvSpPr>
           <p:spPr>
             <a:xfrm>
-              <a:off x="4157982" y="3065168"/>
+              <a:off x="4157982" y="3065112"/>
               <a:ext cx="28468" cy="0"/>
             </a:xfrm>
             <a:custGeom>
@@ -13985,9 +13985,9 @@
                 </a:path>
               </a:pathLst>
             </a:custGeom>
-            <a:ln w="21681" cap="flat">
+            <a:ln w="11086" cap="flat">
               <a:solidFill>
-                <a:srgbClr val="000000">
+                <a:srgbClr val="333333">
                   <a:alpha val="100000"/>
                 </a:srgbClr>
               </a:solidFill>
@@ -14025,7 +14025,7 @@
                 </a:path>
               </a:pathLst>
             </a:custGeom>
-            <a:ln w="21681" cap="flat">
+            <a:ln w="11086" cap="flat">
               <a:solidFill>
                 <a:srgbClr val="000000">
                   <a:alpha val="100000"/>
@@ -14049,7 +14049,7 @@
           </p:nvSpPr>
           <p:spPr>
             <a:xfrm>
-              <a:off x="4391023" y="4485858"/>
+              <a:off x="4409073" y="4485858"/>
               <a:ext cx="0" cy="28468"/>
             </a:xfrm>
             <a:custGeom>
@@ -14065,9 +14065,9 @@
                 </a:path>
               </a:pathLst>
             </a:custGeom>
-            <a:ln w="21681" cap="flat">
+            <a:ln w="11086" cap="flat">
               <a:solidFill>
-                <a:srgbClr val="000000">
+                <a:srgbClr val="333333">
                   <a:alpha val="100000"/>
                 </a:srgbClr>
               </a:solidFill>
@@ -14089,7 +14089,7 @@
           </p:nvSpPr>
           <p:spPr>
             <a:xfrm>
-              <a:off x="5161702" y="4485858"/>
+              <a:off x="5174334" y="4485858"/>
               <a:ext cx="0" cy="28468"/>
             </a:xfrm>
             <a:custGeom>
@@ -14105,9 +14105,9 @@
                 </a:path>
               </a:pathLst>
             </a:custGeom>
-            <a:ln w="21681" cap="flat">
+            <a:ln w="11086" cap="flat">
               <a:solidFill>
-                <a:srgbClr val="000000">
+                <a:srgbClr val="333333">
                   <a:alpha val="100000"/>
                 </a:srgbClr>
               </a:solidFill>
@@ -14129,7 +14129,7 @@
           </p:nvSpPr>
           <p:spPr>
             <a:xfrm>
-              <a:off x="5932380" y="4485858"/>
+              <a:off x="5939596" y="4485858"/>
               <a:ext cx="0" cy="28468"/>
             </a:xfrm>
             <a:custGeom>
@@ -14145,9 +14145,9 @@
                 </a:path>
               </a:pathLst>
             </a:custGeom>
-            <a:ln w="21681" cap="flat">
+            <a:ln w="11086" cap="flat">
               <a:solidFill>
-                <a:srgbClr val="000000">
+                <a:srgbClr val="333333">
                   <a:alpha val="100000"/>
                 </a:srgbClr>
               </a:solidFill>
@@ -14169,7 +14169,7 @@
           </p:nvSpPr>
           <p:spPr>
             <a:xfrm>
-              <a:off x="6703058" y="4485858"/>
+              <a:off x="6704857" y="4485858"/>
               <a:ext cx="0" cy="28468"/>
             </a:xfrm>
             <a:custGeom>
@@ -14185,9 +14185,9 @@
                 </a:path>
               </a:pathLst>
             </a:custGeom>
-            <a:ln w="21681" cap="flat">
+            <a:ln w="11086" cap="flat">
               <a:solidFill>
-                <a:srgbClr val="000000">
+                <a:srgbClr val="333333">
                   <a:alpha val="100000"/>
                 </a:srgbClr>
               </a:solidFill>
@@ -14209,7 +14209,7 @@
           </p:nvSpPr>
           <p:spPr>
             <a:xfrm>
-              <a:off x="4362769" y="4537100"/>
+              <a:off x="4380818" y="4537100"/>
               <a:ext cx="56509" cy="72877"/>
             </a:xfrm>
             <a:prstGeom prst="rect">
@@ -14255,7 +14255,7 @@
           </p:nvSpPr>
           <p:spPr>
             <a:xfrm>
-              <a:off x="5133447" y="4537100"/>
+              <a:off x="5146079" y="4537100"/>
               <a:ext cx="56509" cy="72877"/>
             </a:xfrm>
             <a:prstGeom prst="rect">
@@ -14301,7 +14301,7 @@
           </p:nvSpPr>
           <p:spPr>
             <a:xfrm>
-              <a:off x="5904125" y="4537100"/>
+              <a:off x="5911341" y="4537100"/>
               <a:ext cx="56509" cy="72877"/>
             </a:xfrm>
             <a:prstGeom prst="rect">
@@ -14347,7 +14347,7 @@
           </p:nvSpPr>
           <p:spPr>
             <a:xfrm>
-              <a:off x="6674803" y="4537100"/>
+              <a:off x="6676602" y="4537100"/>
               <a:ext cx="56509" cy="72877"/>
             </a:xfrm>
             <a:prstGeom prst="rect">
@@ -14465,7 +14465,7 @@
           </p:nvSpPr>
           <p:spPr>
             <a:xfrm>
-              <a:off x="1503255" y="5835263"/>
+              <a:off x="1475046" y="5834462"/>
               <a:ext cx="75116" cy="75116"/>
             </a:xfrm>
             <a:prstGeom prst="ellipse">
@@ -14491,7 +14491,7 @@
           </p:nvSpPr>
           <p:spPr>
             <a:xfrm>
-              <a:off x="1454635" y="5709019"/>
+              <a:off x="1580096" y="5707356"/>
               <a:ext cx="75116" cy="75116"/>
             </a:xfrm>
             <a:prstGeom prst="ellipse">
@@ -14517,7 +14517,7 @@
           </p:nvSpPr>
           <p:spPr>
             <a:xfrm>
-              <a:off x="1403895" y="5786164"/>
+              <a:off x="1506327" y="5787320"/>
               <a:ext cx="75116" cy="75116"/>
             </a:xfrm>
             <a:prstGeom prst="ellipse">
@@ -14543,7 +14543,7 @@
           </p:nvSpPr>
           <p:spPr>
             <a:xfrm>
-              <a:off x="1484604" y="5960852"/>
+              <a:off x="1397325" y="5962435"/>
               <a:ext cx="75116" cy="75116"/>
             </a:xfrm>
             <a:prstGeom prst="ellipse">
@@ -14569,7 +14569,7 @@
           </p:nvSpPr>
           <p:spPr>
             <a:xfrm>
-              <a:off x="1431346" y="6117327"/>
+              <a:off x="1586953" y="6116024"/>
               <a:ext cx="75116" cy="75116"/>
             </a:xfrm>
             <a:prstGeom prst="ellipse">
@@ -14595,7 +14595,7 @@
           </p:nvSpPr>
           <p:spPr>
             <a:xfrm>
-              <a:off x="1559660" y="5807387"/>
+              <a:off x="1571878" y="5808149"/>
               <a:ext cx="75116" cy="75116"/>
             </a:xfrm>
             <a:prstGeom prst="ellipse">
@@ -14621,7 +14621,7 @@
           </p:nvSpPr>
           <p:spPr>
             <a:xfrm>
-              <a:off x="1397325" y="5929032"/>
+              <a:off x="1429775" y="5929044"/>
               <a:ext cx="75116" cy="75116"/>
             </a:xfrm>
             <a:prstGeom prst="ellipse">
@@ -14647,7 +14647,7 @@
           </p:nvSpPr>
           <p:spPr>
             <a:xfrm>
-              <a:off x="1477937" y="5964828"/>
+              <a:off x="1480766" y="5968092"/>
               <a:ext cx="75116" cy="75116"/>
             </a:xfrm>
             <a:prstGeom prst="ellipse">
@@ -14673,7 +14673,7 @@
           </p:nvSpPr>
           <p:spPr>
             <a:xfrm>
-              <a:off x="1512783" y="6063262"/>
+              <a:off x="1447185" y="6060438"/>
               <a:ext cx="75116" cy="75116"/>
             </a:xfrm>
             <a:prstGeom prst="ellipse">
@@ -14699,7 +14699,7 @@
           </p:nvSpPr>
           <p:spPr>
             <a:xfrm>
-              <a:off x="1440818" y="5768807"/>
+              <a:off x="1470991" y="5768194"/>
               <a:ext cx="75116" cy="75116"/>
             </a:xfrm>
             <a:prstGeom prst="ellipse">
@@ -14725,7 +14725,7 @@
           </p:nvSpPr>
           <p:spPr>
             <a:xfrm>
-              <a:off x="2212497" y="5943283"/>
+              <a:off x="2326226" y="5945397"/>
               <a:ext cx="75116" cy="75116"/>
             </a:xfrm>
             <a:prstGeom prst="ellipse">
@@ -14751,7 +14751,7 @@
           </p:nvSpPr>
           <p:spPr>
             <a:xfrm>
-              <a:off x="2207334" y="5240531"/>
+              <a:off x="2196967" y="5244532"/>
               <a:ext cx="75116" cy="75116"/>
             </a:xfrm>
             <a:prstGeom prst="ellipse">
@@ -14777,7 +14777,7 @@
           </p:nvSpPr>
           <p:spPr>
             <a:xfrm>
-              <a:off x="2319982" y="5386438"/>
+              <a:off x="2283919" y="5388945"/>
               <a:ext cx="75116" cy="75116"/>
             </a:xfrm>
             <a:prstGeom prst="ellipse">
@@ -14803,7 +14803,7 @@
           </p:nvSpPr>
           <p:spPr>
             <a:xfrm>
-              <a:off x="2179368" y="5618459"/>
+              <a:off x="2261940" y="5617178"/>
               <a:ext cx="75116" cy="75116"/>
             </a:xfrm>
             <a:prstGeom prst="ellipse">
@@ -14829,7 +14829,7 @@
           </p:nvSpPr>
           <p:spPr>
             <a:xfrm>
-              <a:off x="2273412" y="5750510"/>
+              <a:off x="2258781" y="5749083"/>
               <a:ext cx="75116" cy="75116"/>
             </a:xfrm>
             <a:prstGeom prst="ellipse">
@@ -14855,7 +14855,7 @@
           </p:nvSpPr>
           <p:spPr>
             <a:xfrm>
-              <a:off x="2300439" y="6246504"/>
+              <a:off x="2334999" y="6246504"/>
               <a:ext cx="75116" cy="75116"/>
             </a:xfrm>
             <a:prstGeom prst="ellipse">
@@ -14881,7 +14881,7 @@
           </p:nvSpPr>
           <p:spPr>
             <a:xfrm>
-              <a:off x="2345767" y="5985206"/>
+              <a:off x="2188181" y="5985245"/>
               <a:ext cx="75116" cy="75116"/>
             </a:xfrm>
             <a:prstGeom prst="ellipse">
@@ -14907,7 +14907,7 @@
           </p:nvSpPr>
           <p:spPr>
             <a:xfrm>
-              <a:off x="2227172" y="5572880"/>
+              <a:off x="2323536" y="5573010"/>
               <a:ext cx="75116" cy="75116"/>
             </a:xfrm>
             <a:prstGeom prst="ellipse">
@@ -14933,7 +14933,7 @@
           </p:nvSpPr>
           <p:spPr>
             <a:xfrm>
-              <a:off x="2200133" y="5111818"/>
+              <a:off x="2235460" y="5113247"/>
               <a:ext cx="75116" cy="75116"/>
             </a:xfrm>
             <a:prstGeom prst="ellipse">
@@ -14959,7 +14959,7 @@
           </p:nvSpPr>
           <p:spPr>
             <a:xfrm>
-              <a:off x="2351144" y="5029865"/>
+              <a:off x="2177952" y="5029865"/>
               <a:ext cx="75116" cy="75116"/>
             </a:xfrm>
             <a:prstGeom prst="ellipse">
@@ -14985,7 +14985,7 @@
           </p:nvSpPr>
           <p:spPr>
             <a:xfrm>
-              <a:off x="2347891" y="5829178"/>
+              <a:off x="2180607" y="5831976"/>
               <a:ext cx="75116" cy="75116"/>
             </a:xfrm>
             <a:prstGeom prst="ellipse">
@@ -15011,7 +15011,7 @@
           </p:nvSpPr>
           <p:spPr>
             <a:xfrm>
-              <a:off x="2297218" y="5555743"/>
+              <a:off x="2358829" y="5556150"/>
               <a:ext cx="75116" cy="75116"/>
             </a:xfrm>
             <a:prstGeom prst="ellipse">
@@ -15037,7 +15037,7 @@
           </p:nvSpPr>
           <p:spPr>
             <a:xfrm>
-              <a:off x="2320207" y="5358346"/>
+              <a:off x="2172705" y="5361823"/>
               <a:ext cx="75116" cy="75116"/>
             </a:xfrm>
             <a:prstGeom prst="ellipse">
@@ -15063,7 +15063,7 @@
           </p:nvSpPr>
           <p:spPr>
             <a:xfrm>
-              <a:off x="2349557" y="5491184"/>
+              <a:off x="2287426" y="5490494"/>
               <a:ext cx="75116" cy="75116"/>
             </a:xfrm>
             <a:prstGeom prst="ellipse">
@@ -15089,7 +15089,7 @@
           </p:nvSpPr>
           <p:spPr>
             <a:xfrm>
-              <a:off x="2144608" y="5978439"/>
+              <a:off x="2279716" y="5978739"/>
               <a:ext cx="75116" cy="75116"/>
             </a:xfrm>
             <a:prstGeom prst="ellipse">
@@ -15115,7 +15115,7 @@
           </p:nvSpPr>
           <p:spPr>
             <a:xfrm>
-              <a:off x="2199593" y="5927530"/>
+              <a:off x="2254295" y="5925204"/>
               <a:ext cx="75116" cy="75116"/>
             </a:xfrm>
             <a:prstGeom prst="ellipse">
@@ -15141,7 +15141,7 @@
           </p:nvSpPr>
           <p:spPr>
             <a:xfrm>
-              <a:off x="2353253" y="5403973"/>
+              <a:off x="2336335" y="5407075"/>
               <a:ext cx="75116" cy="75116"/>
             </a:xfrm>
             <a:prstGeom prst="ellipse">
@@ -15167,7 +15167,7 @@
           </p:nvSpPr>
           <p:spPr>
             <a:xfrm>
-              <a:off x="2356146" y="5449556"/>
+              <a:off x="2215533" y="5452297"/>
               <a:ext cx="75116" cy="75116"/>
             </a:xfrm>
             <a:prstGeom prst="ellipse">
@@ -15193,7 +15193,7 @@
           </p:nvSpPr>
           <p:spPr>
             <a:xfrm>
-              <a:off x="3104698" y="6019256"/>
+              <a:off x="3071609" y="6019340"/>
               <a:ext cx="75116" cy="75116"/>
             </a:xfrm>
             <a:prstGeom prst="ellipse">
@@ -15219,7 +15219,7 @@
           </p:nvSpPr>
           <p:spPr>
             <a:xfrm>
-              <a:off x="3034181" y="5726770"/>
+              <a:off x="2925816" y="5728662"/>
               <a:ext cx="75116" cy="75116"/>
             </a:xfrm>
             <a:prstGeom prst="ellipse">
@@ -15245,7 +15245,7 @@
           </p:nvSpPr>
           <p:spPr>
             <a:xfrm>
-              <a:off x="3087239" y="5839841"/>
+              <a:off x="3008960" y="5841295"/>
               <a:ext cx="75116" cy="75116"/>
             </a:xfrm>
             <a:prstGeom prst="ellipse">
@@ -15271,7 +15271,7 @@
           </p:nvSpPr>
           <p:spPr>
             <a:xfrm>
-              <a:off x="3021086" y="6087119"/>
+              <a:off x="3041000" y="6088989"/>
               <a:ext cx="75116" cy="75116"/>
             </a:xfrm>
             <a:prstGeom prst="ellipse">
@@ -15297,7 +15297,7 @@
           </p:nvSpPr>
           <p:spPr>
             <a:xfrm>
-              <a:off x="3124485" y="5703855"/>
+              <a:off x="3072404" y="5703493"/>
               <a:ext cx="75116" cy="75116"/>
             </a:xfrm>
             <a:prstGeom prst="ellipse">
@@ -15323,7 +15323,7 @@
           </p:nvSpPr>
           <p:spPr>
             <a:xfrm>
-              <a:off x="3115152" y="5981887"/>
+              <a:off x="3040708" y="5980968"/>
               <a:ext cx="75116" cy="75116"/>
             </a:xfrm>
             <a:prstGeom prst="ellipse">
@@ -15349,7 +15349,7 @@
           </p:nvSpPr>
           <p:spPr>
             <a:xfrm>
-              <a:off x="3048357" y="5167885"/>
+              <a:off x="3088926" y="5172199"/>
               <a:ext cx="75116" cy="75116"/>
             </a:xfrm>
             <a:prstGeom prst="ellipse">
@@ -15375,7 +15375,7 @@
           </p:nvSpPr>
           <p:spPr>
             <a:xfrm>
-              <a:off x="3088988" y="5905917"/>
+              <a:off x="3140793" y="5909330"/>
               <a:ext cx="75116" cy="75116"/>
             </a:xfrm>
             <a:prstGeom prst="ellipse">
@@ -15401,7 +15401,7 @@
           </p:nvSpPr>
           <p:spPr>
             <a:xfrm>
-              <a:off x="2927444" y="5605481"/>
+              <a:off x="3104908" y="5603649"/>
               <a:ext cx="75116" cy="75116"/>
             </a:xfrm>
             <a:prstGeom prst="ellipse">
@@ -15427,7 +15427,7 @@
           </p:nvSpPr>
           <p:spPr>
             <a:xfrm>
-              <a:off x="3107477" y="5419378"/>
+              <a:off x="2946268" y="5419466"/>
               <a:ext cx="75116" cy="75116"/>
             </a:xfrm>
             <a:prstGeom prst="ellipse">
@@ -15453,7 +15453,7 @@
           </p:nvSpPr>
           <p:spPr>
             <a:xfrm>
-              <a:off x="2989926" y="5084332"/>
+              <a:off x="3062817" y="5085257"/>
               <a:ext cx="75116" cy="75116"/>
             </a:xfrm>
             <a:prstGeom prst="ellipse">
@@ -15479,7 +15479,7 @@
           </p:nvSpPr>
           <p:spPr>
             <a:xfrm>
-              <a:off x="2963853" y="5300568"/>
+              <a:off x="3026240" y="5301122"/>
               <a:ext cx="75116" cy="75116"/>
             </a:xfrm>
             <a:prstGeom prst="ellipse">
@@ -15505,7 +15505,7 @@
           </p:nvSpPr>
           <p:spPr>
             <a:xfrm>
-              <a:off x="3091114" y="5930719"/>
+              <a:off x="3089474" y="5928957"/>
               <a:ext cx="75116" cy="75116"/>
             </a:xfrm>
             <a:prstGeom prst="ellipse">
@@ -15531,7 +15531,7 @@
           </p:nvSpPr>
           <p:spPr>
             <a:xfrm>
-              <a:off x="2952997" y="5537495"/>
+              <a:off x="2998211" y="5535925"/>
               <a:ext cx="75116" cy="75116"/>
             </a:xfrm>
             <a:prstGeom prst="ellipse">
@@ -15557,7 +15557,7 @@
           </p:nvSpPr>
           <p:spPr>
             <a:xfrm>
-              <a:off x="3020929" y="5671939"/>
+              <a:off x="2970282" y="5673072"/>
               <a:ext cx="75116" cy="75116"/>
             </a:xfrm>
             <a:prstGeom prst="ellipse">
@@ -15583,7 +15583,7 @@
           </p:nvSpPr>
           <p:spPr>
             <a:xfrm>
-              <a:off x="2973875" y="5489710"/>
+              <a:off x="3134742" y="5490581"/>
               <a:ext cx="75116" cy="75116"/>
             </a:xfrm>
             <a:prstGeom prst="ellipse">
@@ -15609,7 +15609,7 @@
           </p:nvSpPr>
           <p:spPr>
             <a:xfrm>
-              <a:off x="3079188" y="5902439"/>
+              <a:off x="2969456" y="5903278"/>
               <a:ext cx="75116" cy="75116"/>
             </a:xfrm>
             <a:prstGeom prst="ellipse">
@@ -15635,7 +15635,7 @@
           </p:nvSpPr>
           <p:spPr>
             <a:xfrm>
-              <a:off x="2925016" y="5533070"/>
+              <a:off x="2925742" y="5532483"/>
               <a:ext cx="75116" cy="75116"/>
             </a:xfrm>
             <a:prstGeom prst="ellipse">
@@ -15661,7 +15661,7 @@
           </p:nvSpPr>
           <p:spPr>
             <a:xfrm>
-              <a:off x="2913454" y="5865086"/>
+              <a:off x="2931673" y="5867721"/>
               <a:ext cx="75116" cy="75116"/>
             </a:xfrm>
             <a:prstGeom prst="ellipse">
@@ -15687,7 +15687,7 @@
           </p:nvSpPr>
           <p:spPr>
             <a:xfrm>
-              <a:off x="2937962" y="5826856"/>
+              <a:off x="3133904" y="5826323"/>
               <a:ext cx="75116" cy="75116"/>
             </a:xfrm>
             <a:prstGeom prst="ellipse">
@@ -15713,7 +15713,7 @@
           </p:nvSpPr>
           <p:spPr>
             <a:xfrm>
-              <a:off x="3712568" y="5881805"/>
+              <a:off x="3787901" y="5880662"/>
               <a:ext cx="75116" cy="75116"/>
             </a:xfrm>
             <a:prstGeom prst="ellipse">
@@ -15739,7 +15739,7 @@
           </p:nvSpPr>
           <p:spPr>
             <a:xfrm>
-              <a:off x="3734321" y="5831128"/>
+              <a:off x="3722550" y="5829455"/>
               <a:ext cx="75116" cy="75116"/>
             </a:xfrm>
             <a:prstGeom prst="ellipse">
@@ -15765,7 +15765,7 @@
           </p:nvSpPr>
           <p:spPr>
             <a:xfrm>
-              <a:off x="3884675" y="6007300"/>
+              <a:off x="3740654" y="6007405"/>
               <a:ext cx="75116" cy="75116"/>
             </a:xfrm>
             <a:prstGeom prst="ellipse">
@@ -15791,7 +15791,7 @@
           </p:nvSpPr>
           <p:spPr>
             <a:xfrm>
-              <a:off x="3779558" y="5580015"/>
+              <a:off x="3781128" y="5583901"/>
               <a:ext cx="75116" cy="75116"/>
             </a:xfrm>
             <a:prstGeom prst="ellipse">
@@ -15817,7 +15817,7 @@
           </p:nvSpPr>
           <p:spPr>
             <a:xfrm>
-              <a:off x="3681084" y="5639725"/>
+              <a:off x="3778616" y="5639288"/>
               <a:ext cx="75116" cy="75116"/>
             </a:xfrm>
             <a:prstGeom prst="ellipse">
@@ -15843,7 +15843,7 @@
           </p:nvSpPr>
           <p:spPr>
             <a:xfrm>
-              <a:off x="3836203" y="5115340"/>
+              <a:off x="3721814" y="5116757"/>
               <a:ext cx="75116" cy="75116"/>
             </a:xfrm>
             <a:prstGeom prst="ellipse">
@@ -15869,7 +15869,7 @@
           </p:nvSpPr>
           <p:spPr>
             <a:xfrm>
-              <a:off x="3684841" y="5618944"/>
+              <a:off x="3889815" y="5618000"/>
               <a:ext cx="75116" cy="75116"/>
             </a:xfrm>
             <a:prstGeom prst="ellipse">
@@ -15895,7 +15895,7 @@
           </p:nvSpPr>
           <p:spPr>
             <a:xfrm>
-              <a:off x="3772416" y="5824927"/>
+              <a:off x="3757442" y="5828022"/>
               <a:ext cx="75116" cy="75116"/>
             </a:xfrm>
             <a:prstGeom prst="ellipse">
@@ -15921,7 +15921,7 @@
           </p:nvSpPr>
           <p:spPr>
             <a:xfrm>
-              <a:off x="3726702" y="5630335"/>
+              <a:off x="3701943" y="5631180"/>
               <a:ext cx="75116" cy="75116"/>
             </a:xfrm>
             <a:prstGeom prst="ellipse">
@@ -15947,7 +15947,7 @@
           </p:nvSpPr>
           <p:spPr>
             <a:xfrm>
-              <a:off x="3726845" y="5517460"/>
+              <a:off x="3870801" y="5519092"/>
               <a:ext cx="75116" cy="75116"/>
             </a:xfrm>
             <a:prstGeom prst="ellipse">
@@ -15973,7 +15973,7 @@
           </p:nvSpPr>
           <p:spPr>
             <a:xfrm>
-              <a:off x="3760536" y="5458614"/>
+              <a:off x="3807595" y="5459174"/>
               <a:ext cx="75116" cy="75116"/>
             </a:xfrm>
             <a:prstGeom prst="ellipse">
@@ -15999,7 +15999,7 @@
           </p:nvSpPr>
           <p:spPr>
             <a:xfrm>
-              <a:off x="3894238" y="5322846"/>
+              <a:off x="3829925" y="5324220"/>
               <a:ext cx="75116" cy="75116"/>
             </a:xfrm>
             <a:prstGeom prst="ellipse">
@@ -16025,7 +16025,7 @@
           </p:nvSpPr>
           <p:spPr>
             <a:xfrm>
-              <a:off x="3868368" y="5780916"/>
+              <a:off x="3761550" y="5782524"/>
               <a:ext cx="75116" cy="75116"/>
             </a:xfrm>
             <a:prstGeom prst="ellipse">
@@ -16051,7 +16051,7 @@
           </p:nvSpPr>
           <p:spPr>
             <a:xfrm>
-              <a:off x="3713102" y="5223462"/>
+              <a:off x="3821094" y="5226382"/>
               <a:ext cx="75116" cy="75116"/>
             </a:xfrm>
             <a:prstGeom prst="ellipse">
@@ -16077,7 +16077,7 @@
           </p:nvSpPr>
           <p:spPr>
             <a:xfrm>
-              <a:off x="3724515" y="6072418"/>
+              <a:off x="3838336" y="6071294"/>
               <a:ext cx="75116" cy="75116"/>
             </a:xfrm>
             <a:prstGeom prst="ellipse">
@@ -16103,7 +16103,7 @@
           </p:nvSpPr>
           <p:spPr>
             <a:xfrm>
-              <a:off x="3757057" y="5929870"/>
+              <a:off x="3734693" y="5930101"/>
               <a:ext cx="75116" cy="75116"/>
             </a:xfrm>
             <a:prstGeom prst="ellipse">
@@ -16129,7 +16129,7 @@
           </p:nvSpPr>
           <p:spPr>
             <a:xfrm>
-              <a:off x="3880650" y="5757777"/>
+              <a:off x="3790820" y="5757516"/>
               <a:ext cx="75116" cy="75116"/>
             </a:xfrm>
             <a:prstGeom prst="ellipse">
@@ -16155,7 +16155,7 @@
           </p:nvSpPr>
           <p:spPr>
             <a:xfrm>
-              <a:off x="3773348" y="5847082"/>
+              <a:off x="3847586" y="5847370"/>
               <a:ext cx="75116" cy="75116"/>
             </a:xfrm>
             <a:prstGeom prst="ellipse">
@@ -16181,7 +16181,7 @@
           </p:nvSpPr>
           <p:spPr>
             <a:xfrm>
-              <a:off x="3773819" y="5718249"/>
+              <a:off x="3824944" y="5718050"/>
               <a:ext cx="75116" cy="75116"/>
             </a:xfrm>
             <a:prstGeom prst="ellipse">
@@ -16207,7 +16207,7 @@
           </p:nvSpPr>
           <p:spPr>
             <a:xfrm>
-              <a:off x="3861503" y="5895068"/>
+              <a:off x="3823617" y="5894098"/>
               <a:ext cx="75116" cy="75116"/>
             </a:xfrm>
             <a:prstGeom prst="ellipse">
@@ -16233,7 +16233,7 @@
           </p:nvSpPr>
           <p:spPr>
             <a:xfrm>
-              <a:off x="3721206" y="5689737"/>
+              <a:off x="3894352" y="5691595"/>
               <a:ext cx="75116" cy="75116"/>
             </a:xfrm>
             <a:prstGeom prst="ellipse">
@@ -16259,7 +16259,7 @@
           </p:nvSpPr>
           <p:spPr>
             <a:xfrm>
-              <a:off x="3737765" y="5614097"/>
+              <a:off x="3846006" y="5612829"/>
               <a:ext cx="75116" cy="75116"/>
             </a:xfrm>
             <a:prstGeom prst="ellipse">
@@ -16285,7 +16285,7 @@
           </p:nvSpPr>
           <p:spPr>
             <a:xfrm>
-              <a:off x="3894352" y="5624023"/>
+              <a:off x="3817327" y="5621289"/>
               <a:ext cx="75116" cy="75116"/>
             </a:xfrm>
             <a:prstGeom prst="ellipse">
@@ -16311,7 +16311,7 @@
           </p:nvSpPr>
           <p:spPr>
             <a:xfrm>
-              <a:off x="3760643" y="5687256"/>
+              <a:off x="3839156" y="5687361"/>
               <a:ext cx="75116" cy="75116"/>
             </a:xfrm>
             <a:prstGeom prst="ellipse">
@@ -16337,42 +16337,42 @@
           </p:nvSpPr>
           <p:spPr>
             <a:xfrm>
-              <a:off x="1521799" y="5502280"/>
-              <a:ext cx="2306941" cy="437419"/>
+              <a:off x="1531243" y="5503137"/>
+              <a:ext cx="2306013" cy="436737"/>
             </a:xfrm>
             <a:custGeom>
               <a:avLst/>
               <a:pathLst>
-                <a:path w="2306941" h="437419">
+                <a:path w="2306013" h="436737">
                   <a:moveTo>
                     <a:pt x="0" y="0"/>
                   </a:moveTo>
                   <a:lnTo>
-                    <a:pt x="1218805" y="96812"/>
+                    <a:pt x="1218315" y="96661"/>
                   </a:lnTo>
                   <a:lnTo>
-                    <a:pt x="1537960" y="87600"/>
+                    <a:pt x="1537342" y="87463"/>
                   </a:lnTo>
                   <a:lnTo>
-                    <a:pt x="1987785" y="48461"/>
+                    <a:pt x="1986986" y="48385"/>
                   </a:lnTo>
                   <a:lnTo>
-                    <a:pt x="2306941" y="10360"/>
+                    <a:pt x="2306013" y="10344"/>
                   </a:lnTo>
                   <a:lnTo>
-                    <a:pt x="2306941" y="392343"/>
+                    <a:pt x="2306013" y="391730"/>
                   </a:lnTo>
                   <a:lnTo>
-                    <a:pt x="1987785" y="359045"/>
+                    <a:pt x="1986986" y="358485"/>
                   </a:lnTo>
                   <a:lnTo>
-                    <a:pt x="1537960" y="326675"/>
+                    <a:pt x="1537342" y="326165"/>
                   </a:lnTo>
                   <a:lnTo>
-                    <a:pt x="1218805" y="322266"/>
+                    <a:pt x="1218315" y="321763"/>
                   </a:lnTo>
                   <a:lnTo>
-                    <a:pt x="0" y="437419"/>
+                    <a:pt x="0" y="436737"/>
                   </a:lnTo>
                   <a:close/>
                 </a:path>
@@ -16398,27 +16398,27 @@
           </p:nvSpPr>
           <p:spPr>
             <a:xfrm>
-              <a:off x="1521799" y="5502280"/>
-              <a:ext cx="2306941" cy="96812"/>
+              <a:off x="1531243" y="5503137"/>
+              <a:ext cx="2306013" cy="96661"/>
             </a:xfrm>
             <a:custGeom>
               <a:avLst/>
               <a:pathLst>
-                <a:path w="2306941" h="96812">
+                <a:path w="2306013" h="96661">
                   <a:moveTo>
                     <a:pt x="0" y="0"/>
                   </a:moveTo>
                   <a:lnTo>
-                    <a:pt x="1218805" y="96812"/>
+                    <a:pt x="1218315" y="96661"/>
                   </a:lnTo>
                   <a:lnTo>
-                    <a:pt x="1537960" y="87600"/>
+                    <a:pt x="1537342" y="87463"/>
                   </a:lnTo>
                   <a:lnTo>
-                    <a:pt x="1987785" y="48461"/>
+                    <a:pt x="1986986" y="48385"/>
                   </a:lnTo>
                   <a:lnTo>
-                    <a:pt x="2306941" y="10360"/>
+                    <a:pt x="2306013" y="10344"/>
                   </a:lnTo>
                 </a:path>
               </a:pathLst>
@@ -16438,27 +16438,27 @@
           </p:nvSpPr>
           <p:spPr>
             <a:xfrm>
-              <a:off x="1521799" y="5824546"/>
-              <a:ext cx="2306941" cy="115153"/>
+              <a:off x="1531243" y="5824901"/>
+              <a:ext cx="2306013" cy="114974"/>
             </a:xfrm>
             <a:custGeom>
               <a:avLst/>
               <a:pathLst>
-                <a:path w="2306941" h="115153">
+                <a:path w="2306013" h="114974">
                   <a:moveTo>
-                    <a:pt x="2306941" y="70077"/>
+                    <a:pt x="2306013" y="69967"/>
                   </a:moveTo>
                   <a:lnTo>
-                    <a:pt x="1987785" y="36779"/>
+                    <a:pt x="1986986" y="36721"/>
                   </a:lnTo>
                   <a:lnTo>
-                    <a:pt x="1537960" y="4409"/>
+                    <a:pt x="1537342" y="4402"/>
                   </a:lnTo>
                   <a:lnTo>
-                    <a:pt x="1218805" y="0"/>
+                    <a:pt x="1218315" y="0"/>
                   </a:lnTo>
                   <a:lnTo>
-                    <a:pt x="0" y="115153"/>
+                    <a:pt x="0" y="114974"/>
                   </a:lnTo>
                 </a:path>
               </a:pathLst>
@@ -16478,27 +16478,27 @@
           </p:nvSpPr>
           <p:spPr>
             <a:xfrm>
-              <a:off x="1521799" y="5703632"/>
-              <a:ext cx="2306941" cy="17358"/>
+              <a:off x="1531243" y="5704175"/>
+              <a:ext cx="2306013" cy="17331"/>
             </a:xfrm>
             <a:custGeom>
               <a:avLst/>
               <a:pathLst>
-                <a:path w="2306941" h="17358">
+                <a:path w="2306013" h="17331">
                   <a:moveTo>
-                    <a:pt x="0" y="17358"/>
+                    <a:pt x="0" y="17331"/>
                   </a:moveTo>
                   <a:lnTo>
-                    <a:pt x="1218805" y="8187"/>
+                    <a:pt x="1218315" y="8174"/>
                   </a:lnTo>
                   <a:lnTo>
-                    <a:pt x="1537960" y="5786"/>
+                    <a:pt x="1537342" y="5777"/>
                   </a:lnTo>
                   <a:lnTo>
-                    <a:pt x="1987785" y="2401"/>
+                    <a:pt x="1986986" y="2397"/>
                   </a:lnTo>
                   <a:lnTo>
-                    <a:pt x="2306941" y="0"/>
+                    <a:pt x="2306013" y="0"/>
                   </a:lnTo>
                 </a:path>
               </a:pathLst>
@@ -16527,7 +16527,7 @@
           </p:nvSpPr>
           <p:spPr>
             <a:xfrm>
-              <a:off x="3339857" y="5030683"/>
+              <a:off x="3348373" y="5032029"/>
               <a:ext cx="63550" cy="82021"/>
             </a:xfrm>
             <a:prstGeom prst="rect">
@@ -16573,7 +16573,7 @@
           </p:nvSpPr>
           <p:spPr>
             <a:xfrm>
-              <a:off x="3412597" y="5030683"/>
+              <a:off x="3421113" y="5032029"/>
               <a:ext cx="416143" cy="82021"/>
             </a:xfrm>
             <a:prstGeom prst="rect">
@@ -16656,7 +16656,7 @@
                 </a:path>
               </a:pathLst>
             </a:custGeom>
-            <a:ln w="21681" cap="flat">
+            <a:ln w="11086" cap="flat">
               <a:solidFill>
                 <a:srgbClr val="000000">
                   <a:alpha val="100000"/>
@@ -16680,7 +16680,7 @@
           </p:nvSpPr>
           <p:spPr>
             <a:xfrm rot="-5400000">
-              <a:off x="1140466" y="6217745"/>
+              <a:off x="1140466" y="6217429"/>
               <a:ext cx="141274" cy="72877"/>
             </a:xfrm>
             <a:prstGeom prst="rect">
@@ -16726,7 +16726,7 @@
           </p:nvSpPr>
           <p:spPr>
             <a:xfrm rot="-5400000">
-              <a:off x="1140466" y="5844704"/>
+              <a:off x="1140466" y="5844969"/>
               <a:ext cx="141274" cy="72877"/>
             </a:xfrm>
             <a:prstGeom prst="rect">
@@ -16772,7 +16772,7 @@
           </p:nvSpPr>
           <p:spPr>
             <a:xfrm rot="-5400000">
-              <a:off x="1140466" y="5471662"/>
+              <a:off x="1140466" y="5472510"/>
               <a:ext cx="141274" cy="72877"/>
             </a:xfrm>
             <a:prstGeom prst="rect">
@@ -16818,7 +16818,7 @@
           </p:nvSpPr>
           <p:spPr>
             <a:xfrm rot="-5400000">
-              <a:off x="1140466" y="5098621"/>
+              <a:off x="1140466" y="5100051"/>
               <a:ext cx="141274" cy="72877"/>
             </a:xfrm>
             <a:prstGeom prst="rect">
@@ -16864,7 +16864,7 @@
           </p:nvSpPr>
           <p:spPr>
             <a:xfrm>
-              <a:off x="1281564" y="6254184"/>
+              <a:off x="1281564" y="6253867"/>
               <a:ext cx="28468" cy="0"/>
             </a:xfrm>
             <a:custGeom>
@@ -16880,9 +16880,9 @@
                 </a:path>
               </a:pathLst>
             </a:custGeom>
-            <a:ln w="21681" cap="flat">
+            <a:ln w="11086" cap="flat">
               <a:solidFill>
-                <a:srgbClr val="000000">
+                <a:srgbClr val="333333">
                   <a:alpha val="100000"/>
                 </a:srgbClr>
               </a:solidFill>
@@ -16904,7 +16904,7 @@
           </p:nvSpPr>
           <p:spPr>
             <a:xfrm>
-              <a:off x="1281564" y="5881143"/>
+              <a:off x="1281564" y="5881408"/>
               <a:ext cx="28468" cy="0"/>
             </a:xfrm>
             <a:custGeom>
@@ -16920,9 +16920,9 @@
                 </a:path>
               </a:pathLst>
             </a:custGeom>
-            <a:ln w="21681" cap="flat">
+            <a:ln w="11086" cap="flat">
               <a:solidFill>
-                <a:srgbClr val="000000">
+                <a:srgbClr val="333333">
                   <a:alpha val="100000"/>
                 </a:srgbClr>
               </a:solidFill>
@@ -16944,7 +16944,7 @@
           </p:nvSpPr>
           <p:spPr>
             <a:xfrm>
-              <a:off x="1281564" y="5508101"/>
+              <a:off x="1281564" y="5508949"/>
               <a:ext cx="28468" cy="0"/>
             </a:xfrm>
             <a:custGeom>
@@ -16960,9 +16960,9 @@
                 </a:path>
               </a:pathLst>
             </a:custGeom>
-            <a:ln w="21681" cap="flat">
+            <a:ln w="11086" cap="flat">
               <a:solidFill>
-                <a:srgbClr val="000000">
+                <a:srgbClr val="333333">
                   <a:alpha val="100000"/>
                 </a:srgbClr>
               </a:solidFill>
@@ -16984,7 +16984,7 @@
           </p:nvSpPr>
           <p:spPr>
             <a:xfrm>
-              <a:off x="1281564" y="5135060"/>
+              <a:off x="1281564" y="5136490"/>
               <a:ext cx="28468" cy="0"/>
             </a:xfrm>
             <a:custGeom>
@@ -17000,9 +17000,9 @@
                 </a:path>
               </a:pathLst>
             </a:custGeom>
-            <a:ln w="21681" cap="flat">
+            <a:ln w="11086" cap="flat">
               <a:solidFill>
-                <a:srgbClr val="000000">
+                <a:srgbClr val="333333">
                   <a:alpha val="100000"/>
                 </a:srgbClr>
               </a:solidFill>
@@ -17040,7 +17040,7 @@
                 </a:path>
               </a:pathLst>
             </a:custGeom>
-            <a:ln w="21681" cap="flat">
+            <a:ln w="11086" cap="flat">
               <a:solidFill>
                 <a:srgbClr val="000000">
                   <a:alpha val="100000"/>
@@ -17064,7 +17064,7 @@
           </p:nvSpPr>
           <p:spPr>
             <a:xfrm>
-              <a:off x="1521799" y="6344894"/>
+              <a:off x="1531243" y="6344894"/>
               <a:ext cx="0" cy="28468"/>
             </a:xfrm>
             <a:custGeom>
@@ -17080,9 +17080,9 @@
                 </a:path>
               </a:pathLst>
             </a:custGeom>
-            <a:ln w="21681" cap="flat">
+            <a:ln w="11086" cap="flat">
               <a:solidFill>
-                <a:srgbClr val="000000">
+                <a:srgbClr val="333333">
                   <a:alpha val="100000"/>
                 </a:srgbClr>
               </a:solidFill>
@@ -17104,7 +17104,7 @@
           </p:nvSpPr>
           <p:spPr>
             <a:xfrm>
-              <a:off x="2290780" y="6344894"/>
+              <a:off x="2299914" y="6344894"/>
               <a:ext cx="0" cy="28468"/>
             </a:xfrm>
             <a:custGeom>
@@ -17120,9 +17120,9 @@
                 </a:path>
               </a:pathLst>
             </a:custGeom>
-            <a:ln w="21681" cap="flat">
+            <a:ln w="11086" cap="flat">
               <a:solidFill>
-                <a:srgbClr val="000000">
+                <a:srgbClr val="333333">
                   <a:alpha val="100000"/>
                 </a:srgbClr>
               </a:solidFill>
@@ -17144,7 +17144,7 @@
           </p:nvSpPr>
           <p:spPr>
             <a:xfrm>
-              <a:off x="3059760" y="6344894"/>
+              <a:off x="3068585" y="6344894"/>
               <a:ext cx="0" cy="28468"/>
             </a:xfrm>
             <a:custGeom>
@@ -17160,9 +17160,9 @@
                 </a:path>
               </a:pathLst>
             </a:custGeom>
-            <a:ln w="21681" cap="flat">
+            <a:ln w="11086" cap="flat">
               <a:solidFill>
-                <a:srgbClr val="000000">
+                <a:srgbClr val="333333">
                   <a:alpha val="100000"/>
                 </a:srgbClr>
               </a:solidFill>
@@ -17184,7 +17184,7 @@
           </p:nvSpPr>
           <p:spPr>
             <a:xfrm>
-              <a:off x="3828741" y="6344894"/>
+              <a:off x="3837256" y="6344894"/>
               <a:ext cx="0" cy="28468"/>
             </a:xfrm>
             <a:custGeom>
@@ -17200,9 +17200,9 @@
                 </a:path>
               </a:pathLst>
             </a:custGeom>
-            <a:ln w="21681" cap="flat">
+            <a:ln w="11086" cap="flat">
               <a:solidFill>
-                <a:srgbClr val="000000">
+                <a:srgbClr val="333333">
                   <a:alpha val="100000"/>
                 </a:srgbClr>
               </a:solidFill>
@@ -17224,7 +17224,7 @@
           </p:nvSpPr>
           <p:spPr>
             <a:xfrm>
-              <a:off x="1493544" y="6396137"/>
+              <a:off x="1502988" y="6396137"/>
               <a:ext cx="56509" cy="72877"/>
             </a:xfrm>
             <a:prstGeom prst="rect">
@@ -17270,7 +17270,7 @@
           </p:nvSpPr>
           <p:spPr>
             <a:xfrm>
-              <a:off x="2262525" y="6396137"/>
+              <a:off x="2271659" y="6396137"/>
               <a:ext cx="56509" cy="72877"/>
             </a:xfrm>
             <a:prstGeom prst="rect">
@@ -17316,7 +17316,7 @@
           </p:nvSpPr>
           <p:spPr>
             <a:xfrm>
-              <a:off x="3031505" y="6396137"/>
+              <a:off x="3040330" y="6396137"/>
               <a:ext cx="56509" cy="72877"/>
             </a:xfrm>
             <a:prstGeom prst="rect">
@@ -17362,7 +17362,7 @@
           </p:nvSpPr>
           <p:spPr>
             <a:xfrm>
-              <a:off x="3800486" y="6396137"/>
+              <a:off x="3809002" y="6396137"/>
               <a:ext cx="56509" cy="72877"/>
             </a:xfrm>
             <a:prstGeom prst="rect">
@@ -17526,7 +17526,7 @@
           </p:nvSpPr>
           <p:spPr>
             <a:xfrm>
-              <a:off x="4274060" y="5755283"/>
+              <a:off x="4334406" y="5756848"/>
               <a:ext cx="75116" cy="75116"/>
             </a:xfrm>
             <a:prstGeom prst="ellipse">
@@ -17552,7 +17552,7 @@
           </p:nvSpPr>
           <p:spPr>
             <a:xfrm>
-              <a:off x="4439393" y="5685517"/>
+              <a:off x="4293442" y="5684805"/>
               <a:ext cx="75116" cy="75116"/>
             </a:xfrm>
             <a:prstGeom prst="ellipse">
@@ -17578,7 +17578,7 @@
           </p:nvSpPr>
           <p:spPr>
             <a:xfrm>
-              <a:off x="4463896" y="5740401"/>
+              <a:off x="4293680" y="5742010"/>
               <a:ext cx="75116" cy="75116"/>
             </a:xfrm>
             <a:prstGeom prst="ellipse">
@@ -17604,7 +17604,7 @@
           </p:nvSpPr>
           <p:spPr>
             <a:xfrm>
-              <a:off x="4281835" y="6032103"/>
+              <a:off x="4273743" y="6033263"/>
               <a:ext cx="75116" cy="75116"/>
             </a:xfrm>
             <a:prstGeom prst="ellipse">
@@ -17630,7 +17630,7 @@
           </p:nvSpPr>
           <p:spPr>
             <a:xfrm>
-              <a:off x="4291693" y="5995934"/>
+              <a:off x="4350440" y="5997421"/>
               <a:ext cx="75116" cy="75116"/>
             </a:xfrm>
             <a:prstGeom prst="ellipse">
@@ -17656,7 +17656,7 @@
           </p:nvSpPr>
           <p:spPr>
             <a:xfrm>
-              <a:off x="4469679" y="5954023"/>
+              <a:off x="4323539" y="5954330"/>
               <a:ext cx="75116" cy="75116"/>
             </a:xfrm>
             <a:prstGeom prst="ellipse">
@@ -17682,7 +17682,7 @@
           </p:nvSpPr>
           <p:spPr>
             <a:xfrm>
-              <a:off x="4273743" y="5517160"/>
+              <a:off x="4452411" y="5517612"/>
               <a:ext cx="75116" cy="75116"/>
             </a:xfrm>
             <a:prstGeom prst="ellipse">
@@ -17708,7 +17708,7 @@
           </p:nvSpPr>
           <p:spPr>
             <a:xfrm>
-              <a:off x="4458025" y="5774729"/>
+              <a:off x="4377357" y="5775784"/>
               <a:ext cx="75116" cy="75116"/>
             </a:xfrm>
             <a:prstGeom prst="ellipse">
@@ -17734,7 +17734,7 @@
           </p:nvSpPr>
           <p:spPr>
             <a:xfrm>
-              <a:off x="4431459" y="5975797"/>
+              <a:off x="4434789" y="5977441"/>
               <a:ext cx="75116" cy="75116"/>
             </a:xfrm>
             <a:prstGeom prst="ellipse">
@@ -17760,7 +17760,7 @@
           </p:nvSpPr>
           <p:spPr>
             <a:xfrm>
-              <a:off x="4399174" y="5660924"/>
+              <a:off x="4404059" y="5661757"/>
               <a:ext cx="75116" cy="75116"/>
             </a:xfrm>
             <a:prstGeom prst="ellipse">
@@ -17786,7 +17786,7 @@
           </p:nvSpPr>
           <p:spPr>
             <a:xfrm>
-              <a:off x="5228204" y="6246504"/>
+              <a:off x="5066808" y="6246504"/>
               <a:ext cx="75116" cy="75116"/>
             </a:xfrm>
             <a:prstGeom prst="ellipse">
@@ -17812,7 +17812,7 @@
           </p:nvSpPr>
           <p:spPr>
             <a:xfrm>
-              <a:off x="5153175" y="5892466"/>
+              <a:off x="5106519" y="5892015"/>
               <a:ext cx="75116" cy="75116"/>
             </a:xfrm>
             <a:prstGeom prst="ellipse">
@@ -17838,7 +17838,7 @@
           </p:nvSpPr>
           <p:spPr>
             <a:xfrm>
-              <a:off x="5086926" y="5693370"/>
+              <a:off x="5059237" y="5692051"/>
               <a:ext cx="75116" cy="75116"/>
             </a:xfrm>
             <a:prstGeom prst="ellipse">
@@ -17864,7 +17864,7 @@
           </p:nvSpPr>
           <p:spPr>
             <a:xfrm>
-              <a:off x="5038281" y="6117972"/>
+              <a:off x="5088985" y="6118322"/>
               <a:ext cx="75116" cy="75116"/>
             </a:xfrm>
             <a:prstGeom prst="ellipse">
@@ -17890,7 +17890,7 @@
           </p:nvSpPr>
           <p:spPr>
             <a:xfrm>
-              <a:off x="5094299" y="5816849"/>
+              <a:off x="5164420" y="5816051"/>
               <a:ext cx="75116" cy="75116"/>
             </a:xfrm>
             <a:prstGeom prst="ellipse">
@@ -17916,7 +17916,7 @@
           </p:nvSpPr>
           <p:spPr>
             <a:xfrm>
-              <a:off x="5182039" y="5455706"/>
+              <a:off x="5073182" y="5454451"/>
               <a:ext cx="75116" cy="75116"/>
             </a:xfrm>
             <a:prstGeom prst="ellipse">
@@ -17942,7 +17942,7 @@
           </p:nvSpPr>
           <p:spPr>
             <a:xfrm>
-              <a:off x="5115065" y="5850689"/>
+              <a:off x="5082953" y="5850277"/>
               <a:ext cx="75116" cy="75116"/>
             </a:xfrm>
             <a:prstGeom prst="ellipse">
@@ -17968,7 +17968,7 @@
           </p:nvSpPr>
           <p:spPr>
             <a:xfrm>
-              <a:off x="5200498" y="5912569"/>
+              <a:off x="5247216" y="5914098"/>
               <a:ext cx="75116" cy="75116"/>
             </a:xfrm>
             <a:prstGeom prst="ellipse">
@@ -17994,7 +17994,7 @@
           </p:nvSpPr>
           <p:spPr>
             <a:xfrm>
-              <a:off x="5133144" y="5673452"/>
+              <a:off x="5033997" y="5674297"/>
               <a:ext cx="75116" cy="75116"/>
             </a:xfrm>
             <a:prstGeom prst="ellipse">
@@ -18020,7 +18020,7 @@
           </p:nvSpPr>
           <p:spPr>
             <a:xfrm>
-              <a:off x="5206695" y="5999285"/>
+              <a:off x="5037737" y="5998386"/>
               <a:ext cx="75116" cy="75116"/>
             </a:xfrm>
             <a:prstGeom prst="ellipse">
@@ -18046,7 +18046,7 @@
           </p:nvSpPr>
           <p:spPr>
             <a:xfrm>
-              <a:off x="5090401" y="5620087"/>
+              <a:off x="5195031" y="5621059"/>
               <a:ext cx="75116" cy="75116"/>
             </a:xfrm>
             <a:prstGeom prst="ellipse">
@@ -18072,7 +18072,7 @@
           </p:nvSpPr>
           <p:spPr>
             <a:xfrm>
-              <a:off x="5121281" y="5962617"/>
+              <a:off x="5222610" y="5962752"/>
               <a:ext cx="75116" cy="75116"/>
             </a:xfrm>
             <a:prstGeom prst="ellipse">
@@ -18098,7 +18098,7 @@
           </p:nvSpPr>
           <p:spPr>
             <a:xfrm>
-              <a:off x="5073032" y="5593825"/>
+              <a:off x="5208688" y="5592964"/>
               <a:ext cx="75116" cy="75116"/>
             </a:xfrm>
             <a:prstGeom prst="ellipse">
@@ -18124,7 +18124,7 @@
           </p:nvSpPr>
           <p:spPr>
             <a:xfrm>
-              <a:off x="5229452" y="5265012"/>
+              <a:off x="5250160" y="5266082"/>
               <a:ext cx="75116" cy="75116"/>
             </a:xfrm>
             <a:prstGeom prst="ellipse">
@@ -18150,7 +18150,7 @@
           </p:nvSpPr>
           <p:spPr>
             <a:xfrm>
-              <a:off x="5117753" y="5521013"/>
+              <a:off x="5091291" y="5520669"/>
               <a:ext cx="75116" cy="75116"/>
             </a:xfrm>
             <a:prstGeom prst="ellipse">
@@ -18176,7 +18176,7 @@
           </p:nvSpPr>
           <p:spPr>
             <a:xfrm>
-              <a:off x="5172146" y="5565923"/>
+              <a:off x="5129736" y="5567218"/>
               <a:ext cx="75116" cy="75116"/>
             </a:xfrm>
             <a:prstGeom prst="ellipse">
@@ -18202,7 +18202,7 @@
           </p:nvSpPr>
           <p:spPr>
             <a:xfrm>
-              <a:off x="5231843" y="5678544"/>
+              <a:off x="5053061" y="5677559"/>
               <a:ext cx="75116" cy="75116"/>
             </a:xfrm>
             <a:prstGeom prst="ellipse">
@@ -18228,7 +18228,7 @@
           </p:nvSpPr>
           <p:spPr>
             <a:xfrm>
-              <a:off x="5190671" y="5942379"/>
+              <a:off x="5087400" y="5942492"/>
               <a:ext cx="75116" cy="75116"/>
             </a:xfrm>
             <a:prstGeom prst="ellipse">
@@ -18254,7 +18254,7 @@
           </p:nvSpPr>
           <p:spPr>
             <a:xfrm>
-              <a:off x="5993336" y="5731972"/>
+              <a:off x="5949739" y="5732263"/>
               <a:ext cx="75116" cy="75116"/>
             </a:xfrm>
             <a:prstGeom prst="ellipse">
@@ -18280,7 +18280,7 @@
           </p:nvSpPr>
           <p:spPr>
             <a:xfrm>
-              <a:off x="5834023" y="5784118"/>
+              <a:off x="5967410" y="5785192"/>
               <a:ext cx="75116" cy="75116"/>
             </a:xfrm>
             <a:prstGeom prst="ellipse">
@@ -18306,7 +18306,7 @@
           </p:nvSpPr>
           <p:spPr>
             <a:xfrm>
-              <a:off x="5931832" y="5979492"/>
+              <a:off x="5827105" y="5980073"/>
               <a:ext cx="75116" cy="75116"/>
             </a:xfrm>
             <a:prstGeom prst="ellipse">
@@ -18332,7 +18332,7 @@
           </p:nvSpPr>
           <p:spPr>
             <a:xfrm>
-              <a:off x="5971998" y="5566122"/>
+              <a:off x="5864537" y="5566186"/>
               <a:ext cx="75116" cy="75116"/>
             </a:xfrm>
             <a:prstGeom prst="ellipse">
@@ -18358,7 +18358,7 @@
           </p:nvSpPr>
           <p:spPr>
             <a:xfrm>
-              <a:off x="5918128" y="5786538"/>
+              <a:off x="5967686" y="5787336"/>
               <a:ext cx="75116" cy="75116"/>
             </a:xfrm>
             <a:prstGeom prst="ellipse">
@@ -18384,7 +18384,7 @@
           </p:nvSpPr>
           <p:spPr>
             <a:xfrm>
-              <a:off x="5904679" y="5585008"/>
+              <a:off x="5972330" y="5586125"/>
               <a:ext cx="75116" cy="75116"/>
             </a:xfrm>
             <a:prstGeom prst="ellipse">
@@ -18410,7 +18410,7 @@
           </p:nvSpPr>
           <p:spPr>
             <a:xfrm>
-              <a:off x="5829589" y="5161804"/>
+              <a:off x="6009932" y="5162169"/>
               <a:ext cx="75116" cy="75116"/>
             </a:xfrm>
             <a:prstGeom prst="ellipse">
@@ -18436,7 +18436,7 @@
           </p:nvSpPr>
           <p:spPr>
             <a:xfrm>
-              <a:off x="5802769" y="5841379"/>
+              <a:off x="5995898" y="5840903"/>
               <a:ext cx="75116" cy="75116"/>
             </a:xfrm>
             <a:prstGeom prst="ellipse">
@@ -18462,7 +18462,7 @@
           </p:nvSpPr>
           <p:spPr>
             <a:xfrm>
-              <a:off x="5932490" y="5675537"/>
+              <a:off x="5919340" y="5676133"/>
               <a:ext cx="75116" cy="75116"/>
             </a:xfrm>
             <a:prstGeom prst="ellipse">
@@ -18488,7 +18488,7 @@
           </p:nvSpPr>
           <p:spPr>
             <a:xfrm>
-              <a:off x="5934402" y="5029865"/>
+              <a:off x="5842041" y="5029865"/>
               <a:ext cx="75116" cy="75116"/>
             </a:xfrm>
             <a:prstGeom prst="ellipse">
@@ -18514,7 +18514,7 @@
           </p:nvSpPr>
           <p:spPr>
             <a:xfrm>
-              <a:off x="5887413" y="5679695"/>
+              <a:off x="5898534" y="5680508"/>
               <a:ext cx="75116" cy="75116"/>
             </a:xfrm>
             <a:prstGeom prst="ellipse">
@@ -18540,7 +18540,7 @@
           </p:nvSpPr>
           <p:spPr>
             <a:xfrm>
-              <a:off x="5995978" y="5786898"/>
+              <a:off x="5843227" y="5787725"/>
               <a:ext cx="75116" cy="75116"/>
             </a:xfrm>
             <a:prstGeom prst="ellipse">
@@ -18566,7 +18566,7 @@
           </p:nvSpPr>
           <p:spPr>
             <a:xfrm>
-              <a:off x="5990187" y="5564035"/>
+              <a:off x="5848939" y="5563653"/>
               <a:ext cx="75116" cy="75116"/>
             </a:xfrm>
             <a:prstGeom prst="ellipse">
@@ -18592,7 +18592,7 @@
           </p:nvSpPr>
           <p:spPr>
             <a:xfrm>
-              <a:off x="5907803" y="5498219"/>
+              <a:off x="5852163" y="5497932"/>
               <a:ext cx="75116" cy="75116"/>
             </a:xfrm>
             <a:prstGeom prst="ellipse">
@@ -18618,7 +18618,7 @@
           </p:nvSpPr>
           <p:spPr>
             <a:xfrm>
-              <a:off x="5908830" y="5373235"/>
+              <a:off x="5817759" y="5372915"/>
               <a:ext cx="75116" cy="75116"/>
             </a:xfrm>
             <a:prstGeom prst="ellipse">
@@ -18644,7 +18644,7 @@
           </p:nvSpPr>
           <p:spPr>
             <a:xfrm>
-              <a:off x="5994964" y="5880425"/>
+              <a:off x="5977572" y="5879911"/>
               <a:ext cx="75116" cy="75116"/>
             </a:xfrm>
             <a:prstGeom prst="ellipse">
@@ -18670,7 +18670,7 @@
           </p:nvSpPr>
           <p:spPr>
             <a:xfrm>
-              <a:off x="5821072" y="5909585"/>
+              <a:off x="5923574" y="5908939"/>
               <a:ext cx="75116" cy="75116"/>
             </a:xfrm>
             <a:prstGeom prst="ellipse">
@@ -18696,7 +18696,7 @@
           </p:nvSpPr>
           <p:spPr>
             <a:xfrm>
-              <a:off x="5813481" y="6097358"/>
+              <a:off x="5931806" y="6098827"/>
               <a:ext cx="75116" cy="75116"/>
             </a:xfrm>
             <a:prstGeom prst="ellipse">
@@ -18722,7 +18722,7 @@
           </p:nvSpPr>
           <p:spPr>
             <a:xfrm>
-              <a:off x="5819465" y="5722393"/>
+              <a:off x="5953171" y="5722473"/>
               <a:ext cx="75116" cy="75116"/>
             </a:xfrm>
             <a:prstGeom prst="ellipse">
@@ -18748,7 +18748,7 @@
           </p:nvSpPr>
           <p:spPr>
             <a:xfrm>
-              <a:off x="5856999" y="5646949"/>
+              <a:off x="5880394" y="5646782"/>
               <a:ext cx="75116" cy="75116"/>
             </a:xfrm>
             <a:prstGeom prst="ellipse">
@@ -18774,7 +18774,7 @@
           </p:nvSpPr>
           <p:spPr>
             <a:xfrm>
-              <a:off x="6770769" y="5690648"/>
+              <a:off x="6720090" y="5690613"/>
               <a:ext cx="75116" cy="75116"/>
             </a:xfrm>
             <a:prstGeom prst="ellipse">
@@ -18800,7 +18800,7 @@
           </p:nvSpPr>
           <p:spPr>
             <a:xfrm>
-              <a:off x="6745380" y="5809966"/>
+              <a:off x="6753584" y="5809878"/>
               <a:ext cx="75116" cy="75116"/>
             </a:xfrm>
             <a:prstGeom prst="ellipse">
@@ -18826,7 +18826,7 @@
           </p:nvSpPr>
           <p:spPr>
             <a:xfrm>
-              <a:off x="6605810" y="5878688"/>
+              <a:off x="6648237" y="5880658"/>
               <a:ext cx="75116" cy="75116"/>
             </a:xfrm>
             <a:prstGeom prst="ellipse">
@@ -18852,7 +18852,7 @@
           </p:nvSpPr>
           <p:spPr>
             <a:xfrm>
-              <a:off x="6624859" y="5914095"/>
+              <a:off x="6674358" y="5913573"/>
               <a:ext cx="75116" cy="75116"/>
             </a:xfrm>
             <a:prstGeom prst="ellipse">
@@ -18878,7 +18878,7 @@
           </p:nvSpPr>
           <p:spPr>
             <a:xfrm>
-              <a:off x="6727386" y="5728280"/>
+              <a:off x="6770769" y="5729240"/>
               <a:ext cx="75116" cy="75116"/>
             </a:xfrm>
             <a:prstGeom prst="ellipse">
@@ -18904,7 +18904,7 @@
           </p:nvSpPr>
           <p:spPr>
             <a:xfrm>
-              <a:off x="6588106" y="5668686"/>
+              <a:off x="6698875" y="5669016"/>
               <a:ext cx="75116" cy="75116"/>
             </a:xfrm>
             <a:prstGeom prst="ellipse">
@@ -18930,7 +18930,7 @@
           </p:nvSpPr>
           <p:spPr>
             <a:xfrm>
-              <a:off x="6587198" y="5876685"/>
+              <a:off x="6683234" y="5877820"/>
               <a:ext cx="75116" cy="75116"/>
             </a:xfrm>
             <a:prstGeom prst="ellipse">
@@ -18956,7 +18956,7 @@
           </p:nvSpPr>
           <p:spPr>
             <a:xfrm>
-              <a:off x="6728374" y="5605870"/>
+              <a:off x="6687281" y="5605588"/>
               <a:ext cx="75116" cy="75116"/>
             </a:xfrm>
             <a:prstGeom prst="ellipse">
@@ -18982,7 +18982,7 @@
           </p:nvSpPr>
           <p:spPr>
             <a:xfrm>
-              <a:off x="6568973" y="5947600"/>
+              <a:off x="6625840" y="5947914"/>
               <a:ext cx="75116" cy="75116"/>
             </a:xfrm>
             <a:prstGeom prst="ellipse">
@@ -19008,7 +19008,7 @@
           </p:nvSpPr>
           <p:spPr>
             <a:xfrm>
-              <a:off x="6611273" y="5803580"/>
+              <a:off x="6637029" y="5805057"/>
               <a:ext cx="75116" cy="75116"/>
             </a:xfrm>
             <a:prstGeom prst="ellipse">
@@ -19034,7 +19034,7 @@
           </p:nvSpPr>
           <p:spPr>
             <a:xfrm>
-              <a:off x="6566907" y="5733019"/>
+              <a:off x="6672930" y="5734687"/>
               <a:ext cx="75116" cy="75116"/>
             </a:xfrm>
             <a:prstGeom prst="ellipse">
@@ -19060,7 +19060,7 @@
           </p:nvSpPr>
           <p:spPr>
             <a:xfrm>
-              <a:off x="6694129" y="5813588"/>
+              <a:off x="6644779" y="5814286"/>
               <a:ext cx="75116" cy="75116"/>
             </a:xfrm>
             <a:prstGeom prst="ellipse">
@@ -19086,7 +19086,7 @@
           </p:nvSpPr>
           <p:spPr>
             <a:xfrm>
-              <a:off x="6614679" y="5774495"/>
+              <a:off x="6571095" y="5775326"/>
               <a:ext cx="75116" cy="75116"/>
             </a:xfrm>
             <a:prstGeom prst="ellipse">
@@ -19112,7 +19112,7 @@
           </p:nvSpPr>
           <p:spPr>
             <a:xfrm>
-              <a:off x="6690286" y="6060041"/>
+              <a:off x="6585843" y="6058721"/>
               <a:ext cx="75116" cy="75116"/>
             </a:xfrm>
             <a:prstGeom prst="ellipse">
@@ -19138,7 +19138,7 @@
           </p:nvSpPr>
           <p:spPr>
             <a:xfrm>
-              <a:off x="6655846" y="5794539"/>
+              <a:off x="6584533" y="5794399"/>
               <a:ext cx="75116" cy="75116"/>
             </a:xfrm>
             <a:prstGeom prst="ellipse">
@@ -19164,7 +19164,7 @@
           </p:nvSpPr>
           <p:spPr>
             <a:xfrm>
-              <a:off x="6592716" y="5811775"/>
+              <a:off x="6676112" y="5812484"/>
               <a:ext cx="75116" cy="75116"/>
             </a:xfrm>
             <a:prstGeom prst="ellipse">
@@ -19190,7 +19190,7 @@
           </p:nvSpPr>
           <p:spPr>
             <a:xfrm>
-              <a:off x="6629916" y="5701971"/>
+              <a:off x="6637090" y="5701843"/>
               <a:ext cx="75116" cy="75116"/>
             </a:xfrm>
             <a:prstGeom prst="ellipse">
@@ -19216,7 +19216,7 @@
           </p:nvSpPr>
           <p:spPr>
             <a:xfrm>
-              <a:off x="6595497" y="5729088"/>
+              <a:off x="6579494" y="5729422"/>
               <a:ext cx="75116" cy="75116"/>
             </a:xfrm>
             <a:prstGeom prst="ellipse">
@@ -19242,7 +19242,7 @@
           </p:nvSpPr>
           <p:spPr>
             <a:xfrm>
-              <a:off x="6759978" y="6074510"/>
+              <a:off x="6576044" y="6074311"/>
               <a:ext cx="75116" cy="75116"/>
             </a:xfrm>
             <a:prstGeom prst="ellipse">
@@ -19268,7 +19268,7 @@
           </p:nvSpPr>
           <p:spPr>
             <a:xfrm>
-              <a:off x="6684231" y="5698393"/>
+              <a:off x="6685768" y="5698724"/>
               <a:ext cx="75116" cy="75116"/>
             </a:xfrm>
             <a:prstGeom prst="ellipse">
@@ -19294,7 +19294,7 @@
           </p:nvSpPr>
           <p:spPr>
             <a:xfrm>
-              <a:off x="6662126" y="5589853"/>
+              <a:off x="6715939" y="5591926"/>
               <a:ext cx="75116" cy="75116"/>
             </a:xfrm>
             <a:prstGeom prst="ellipse">
@@ -19320,7 +19320,7 @@
           </p:nvSpPr>
           <p:spPr>
             <a:xfrm>
-              <a:off x="6619499" y="5616496"/>
+              <a:off x="6583291" y="5617465"/>
               <a:ext cx="75116" cy="75116"/>
             </a:xfrm>
             <a:prstGeom prst="ellipse">
@@ -19346,7 +19346,7 @@
           </p:nvSpPr>
           <p:spPr>
             <a:xfrm>
-              <a:off x="6661890" y="5902943"/>
+              <a:off x="6726349" y="5904513"/>
               <a:ext cx="75116" cy="75116"/>
             </a:xfrm>
             <a:prstGeom prst="ellipse">
@@ -19372,7 +19372,7 @@
           </p:nvSpPr>
           <p:spPr>
             <a:xfrm>
-              <a:off x="6698699" y="5969520"/>
+              <a:off x="6708894" y="5969912"/>
               <a:ext cx="75116" cy="75116"/>
             </a:xfrm>
             <a:prstGeom prst="ellipse">
@@ -19398,42 +19398,42 @@
           </p:nvSpPr>
           <p:spPr>
             <a:xfrm>
-              <a:off x="4416076" y="5616913"/>
-              <a:ext cx="2298278" cy="305419"/>
+              <a:off x="4409355" y="5617198"/>
+              <a:ext cx="2303768" cy="305588"/>
             </a:xfrm>
             <a:custGeom>
               <a:avLst/>
               <a:pathLst>
-                <a:path w="2298278" h="305419">
+                <a:path w="2303768" h="305588">
                   <a:moveTo>
                     <a:pt x="0" y="0"/>
                   </a:moveTo>
                   <a:lnTo>
-                    <a:pt x="1214228" y="62162"/>
+                    <a:pt x="1217128" y="62196"/>
                   </a:lnTo>
                   <a:lnTo>
-                    <a:pt x="1532185" y="60663"/>
+                    <a:pt x="1535845" y="60697"/>
                   </a:lnTo>
                   <a:lnTo>
-                    <a:pt x="1980320" y="44854"/>
+                    <a:pt x="1985051" y="44879"/>
                   </a:lnTo>
                   <a:lnTo>
-                    <a:pt x="2298278" y="26948"/>
+                    <a:pt x="2303768" y="26963"/>
                   </a:lnTo>
                   <a:lnTo>
-                    <a:pt x="2298278" y="296168"/>
+                    <a:pt x="2303768" y="296333"/>
                   </a:lnTo>
                   <a:lnTo>
-                    <a:pt x="1980320" y="275814"/>
+                    <a:pt x="1985051" y="275967"/>
                   </a:lnTo>
                   <a:lnTo>
-                    <a:pt x="1532185" y="256554"/>
+                    <a:pt x="1535845" y="256697"/>
                   </a:lnTo>
                   <a:lnTo>
-                    <a:pt x="1214228" y="252607"/>
+                    <a:pt x="1217128" y="252747"/>
                   </a:lnTo>
                   <a:lnTo>
-                    <a:pt x="0" y="305419"/>
+                    <a:pt x="0" y="305588"/>
                   </a:lnTo>
                   <a:close/>
                 </a:path>
@@ -19459,27 +19459,27 @@
           </p:nvSpPr>
           <p:spPr>
             <a:xfrm>
-              <a:off x="4416076" y="5616913"/>
-              <a:ext cx="2298278" cy="62162"/>
+              <a:off x="4409355" y="5617198"/>
+              <a:ext cx="2303768" cy="62196"/>
             </a:xfrm>
             <a:custGeom>
               <a:avLst/>
               <a:pathLst>
-                <a:path w="2298278" h="62162">
+                <a:path w="2303768" h="62196">
                   <a:moveTo>
                     <a:pt x="0" y="0"/>
                   </a:moveTo>
                   <a:lnTo>
-                    <a:pt x="1214228" y="62162"/>
+                    <a:pt x="1217128" y="62196"/>
                   </a:lnTo>
                   <a:lnTo>
-                    <a:pt x="1532185" y="60663"/>
+                    <a:pt x="1535845" y="60697"/>
                   </a:lnTo>
                   <a:lnTo>
-                    <a:pt x="1980320" y="44854"/>
+                    <a:pt x="1985051" y="44879"/>
                   </a:lnTo>
                   <a:lnTo>
-                    <a:pt x="2298278" y="26948"/>
+                    <a:pt x="2303768" y="26963"/>
                   </a:lnTo>
                 </a:path>
               </a:pathLst>
@@ -19499,27 +19499,27 @@
           </p:nvSpPr>
           <p:spPr>
             <a:xfrm>
-              <a:off x="4416076" y="5869520"/>
-              <a:ext cx="2298278" cy="52811"/>
+              <a:off x="4409355" y="5869945"/>
+              <a:ext cx="2303768" cy="52841"/>
             </a:xfrm>
             <a:custGeom>
               <a:avLst/>
               <a:pathLst>
-                <a:path w="2298278" h="52811">
+                <a:path w="2303768" h="52841">
                   <a:moveTo>
-                    <a:pt x="2298278" y="43561"/>
+                    <a:pt x="2303768" y="43585"/>
                   </a:moveTo>
                   <a:lnTo>
-                    <a:pt x="1980320" y="23207"/>
+                    <a:pt x="1985051" y="23219"/>
                   </a:lnTo>
                   <a:lnTo>
-                    <a:pt x="1532185" y="3947"/>
+                    <a:pt x="1535845" y="3949"/>
                   </a:lnTo>
                   <a:lnTo>
-                    <a:pt x="1214228" y="0"/>
+                    <a:pt x="1217128" y="0"/>
                   </a:lnTo>
                   <a:lnTo>
-                    <a:pt x="0" y="52811"/>
+                    <a:pt x="0" y="52841"/>
                   </a:lnTo>
                 </a:path>
               </a:pathLst>
@@ -19539,27 +19539,27 @@
           </p:nvSpPr>
           <p:spPr>
             <a:xfrm>
-              <a:off x="4416076" y="5769622"/>
-              <a:ext cx="2298278" cy="8849"/>
+              <a:off x="4409355" y="5769992"/>
+              <a:ext cx="2303768" cy="8854"/>
             </a:xfrm>
             <a:custGeom>
               <a:avLst/>
               <a:pathLst>
-                <a:path w="2298278" h="8849">
+                <a:path w="2303768" h="8854">
                   <a:moveTo>
                     <a:pt x="0" y="0"/>
                   </a:moveTo>
                   <a:lnTo>
-                    <a:pt x="1214228" y="4675"/>
+                    <a:pt x="1217128" y="4677"/>
                   </a:lnTo>
                   <a:lnTo>
-                    <a:pt x="1532185" y="5899"/>
+                    <a:pt x="1535845" y="5902"/>
                   </a:lnTo>
                   <a:lnTo>
-                    <a:pt x="1980320" y="7625"/>
+                    <a:pt x="1985051" y="7629"/>
                   </a:lnTo>
                   <a:lnTo>
-                    <a:pt x="2298278" y="8849"/>
+                    <a:pt x="2303768" y="8854"/>
                   </a:lnTo>
                 </a:path>
               </a:pathLst>
@@ -19588,7 +19588,7 @@
           </p:nvSpPr>
           <p:spPr>
             <a:xfrm>
-              <a:off x="6225470" y="5031347"/>
+              <a:off x="6224240" y="5031395"/>
               <a:ext cx="63550" cy="82021"/>
             </a:xfrm>
             <a:prstGeom prst="rect">
@@ -19634,7 +19634,7 @@
           </p:nvSpPr>
           <p:spPr>
             <a:xfrm>
-              <a:off x="6298211" y="5031347"/>
+              <a:off x="6296980" y="5031395"/>
               <a:ext cx="416143" cy="82021"/>
             </a:xfrm>
             <a:prstGeom prst="rect">
@@ -19717,7 +19717,7 @@
                 </a:path>
               </a:pathLst>
             </a:custGeom>
-            <a:ln w="21681" cap="flat">
+            <a:ln w="11086" cap="flat">
               <a:solidFill>
                 <a:srgbClr val="000000">
                   <a:alpha val="100000"/>
@@ -19741,7 +19741,7 @@
           </p:nvSpPr>
           <p:spPr>
             <a:xfrm>
-              <a:off x="4157982" y="6263176"/>
+              <a:off x="4157982" y="6263819"/>
               <a:ext cx="28468" cy="0"/>
             </a:xfrm>
             <a:custGeom>
@@ -19757,9 +19757,9 @@
                 </a:path>
               </a:pathLst>
             </a:custGeom>
-            <a:ln w="21681" cap="flat">
+            <a:ln w="11086" cap="flat">
               <a:solidFill>
-                <a:srgbClr val="000000">
+                <a:srgbClr val="333333">
                   <a:alpha val="100000"/>
                 </a:srgbClr>
               </a:solidFill>
@@ -19781,7 +19781,7 @@
           </p:nvSpPr>
           <p:spPr>
             <a:xfrm>
-              <a:off x="4157982" y="5996998"/>
+              <a:off x="4157982" y="5997494"/>
               <a:ext cx="28468" cy="0"/>
             </a:xfrm>
             <a:custGeom>
@@ -19797,9 +19797,9 @@
                 </a:path>
               </a:pathLst>
             </a:custGeom>
-            <a:ln w="21681" cap="flat">
+            <a:ln w="11086" cap="flat">
               <a:solidFill>
-                <a:srgbClr val="000000">
+                <a:srgbClr val="333333">
                   <a:alpha val="100000"/>
                 </a:srgbClr>
               </a:solidFill>
@@ -19821,7 +19821,7 @@
           </p:nvSpPr>
           <p:spPr>
             <a:xfrm>
-              <a:off x="4157982" y="5730820"/>
+              <a:off x="4157982" y="5731168"/>
               <a:ext cx="28468" cy="0"/>
             </a:xfrm>
             <a:custGeom>
@@ -19837,9 +19837,9 @@
                 </a:path>
               </a:pathLst>
             </a:custGeom>
-            <a:ln w="21681" cap="flat">
+            <a:ln w="11086" cap="flat">
               <a:solidFill>
-                <a:srgbClr val="000000">
+                <a:srgbClr val="333333">
                   <a:alpha val="100000"/>
                 </a:srgbClr>
               </a:solidFill>
@@ -19861,7 +19861,7 @@
           </p:nvSpPr>
           <p:spPr>
             <a:xfrm>
-              <a:off x="4157982" y="5464642"/>
+              <a:off x="4157982" y="5464842"/>
               <a:ext cx="28468" cy="0"/>
             </a:xfrm>
             <a:custGeom>
@@ -19877,9 +19877,9 @@
                 </a:path>
               </a:pathLst>
             </a:custGeom>
-            <a:ln w="21681" cap="flat">
+            <a:ln w="11086" cap="flat">
               <a:solidFill>
-                <a:srgbClr val="000000">
+                <a:srgbClr val="333333">
                   <a:alpha val="100000"/>
                 </a:srgbClr>
               </a:solidFill>
@@ -19901,7 +19901,7 @@
           </p:nvSpPr>
           <p:spPr>
             <a:xfrm>
-              <a:off x="4157982" y="5198465"/>
+              <a:off x="4157982" y="5198517"/>
               <a:ext cx="28468" cy="0"/>
             </a:xfrm>
             <a:custGeom>
@@ -19917,9 +19917,9 @@
                 </a:path>
               </a:pathLst>
             </a:custGeom>
-            <a:ln w="21681" cap="flat">
+            <a:ln w="11086" cap="flat">
               <a:solidFill>
-                <a:srgbClr val="000000">
+                <a:srgbClr val="333333">
                   <a:alpha val="100000"/>
                 </a:srgbClr>
               </a:solidFill>
@@ -19941,7 +19941,7 @@
           </p:nvSpPr>
           <p:spPr>
             <a:xfrm>
-              <a:off x="4157982" y="4932287"/>
+              <a:off x="4157982" y="4932191"/>
               <a:ext cx="28468" cy="0"/>
             </a:xfrm>
             <a:custGeom>
@@ -19957,9 +19957,9 @@
                 </a:path>
               </a:pathLst>
             </a:custGeom>
-            <a:ln w="21681" cap="flat">
+            <a:ln w="11086" cap="flat">
               <a:solidFill>
-                <a:srgbClr val="000000">
+                <a:srgbClr val="333333">
                   <a:alpha val="100000"/>
                 </a:srgbClr>
               </a:solidFill>
@@ -19997,7 +19997,7 @@
                 </a:path>
               </a:pathLst>
             </a:custGeom>
-            <a:ln w="21681" cap="flat">
+            <a:ln w="11086" cap="flat">
               <a:solidFill>
                 <a:srgbClr val="000000">
                   <a:alpha val="100000"/>
@@ -20021,7 +20021,7 @@
           </p:nvSpPr>
           <p:spPr>
             <a:xfrm>
-              <a:off x="4416076" y="6344894"/>
+              <a:off x="4409355" y="6344894"/>
               <a:ext cx="0" cy="28468"/>
             </a:xfrm>
             <a:custGeom>
@@ -20037,9 +20037,9 @@
                 </a:path>
               </a:pathLst>
             </a:custGeom>
-            <a:ln w="21681" cap="flat">
+            <a:ln w="11086" cap="flat">
               <a:solidFill>
-                <a:srgbClr val="000000">
+                <a:srgbClr val="333333">
                   <a:alpha val="100000"/>
                 </a:srgbClr>
               </a:solidFill>
@@ -20061,7 +20061,7 @@
           </p:nvSpPr>
           <p:spPr>
             <a:xfrm>
-              <a:off x="5182169" y="6344894"/>
+              <a:off x="5177278" y="6344894"/>
               <a:ext cx="0" cy="28468"/>
             </a:xfrm>
             <a:custGeom>
@@ -20077,9 +20077,9 @@
                 </a:path>
               </a:pathLst>
             </a:custGeom>
-            <a:ln w="21681" cap="flat">
+            <a:ln w="11086" cap="flat">
               <a:solidFill>
-                <a:srgbClr val="000000">
+                <a:srgbClr val="333333">
                   <a:alpha val="100000"/>
                 </a:srgbClr>
               </a:solidFill>
@@ -20101,7 +20101,7 @@
           </p:nvSpPr>
           <p:spPr>
             <a:xfrm>
-              <a:off x="5948262" y="6344894"/>
+              <a:off x="5945201" y="6344894"/>
               <a:ext cx="0" cy="28468"/>
             </a:xfrm>
             <a:custGeom>
@@ -20117,9 +20117,9 @@
                 </a:path>
               </a:pathLst>
             </a:custGeom>
-            <a:ln w="21681" cap="flat">
+            <a:ln w="11086" cap="flat">
               <a:solidFill>
-                <a:srgbClr val="000000">
+                <a:srgbClr val="333333">
                   <a:alpha val="100000"/>
                 </a:srgbClr>
               </a:solidFill>
@@ -20141,7 +20141,7 @@
           </p:nvSpPr>
           <p:spPr>
             <a:xfrm>
-              <a:off x="6714354" y="6344894"/>
+              <a:off x="6713124" y="6344894"/>
               <a:ext cx="0" cy="28468"/>
             </a:xfrm>
             <a:custGeom>
@@ -20157,9 +20157,9 @@
                 </a:path>
               </a:pathLst>
             </a:custGeom>
-            <a:ln w="21681" cap="flat">
+            <a:ln w="11086" cap="flat">
               <a:solidFill>
-                <a:srgbClr val="000000">
+                <a:srgbClr val="333333">
                   <a:alpha val="100000"/>
                 </a:srgbClr>
               </a:solidFill>
@@ -20181,7 +20181,7 @@
           </p:nvSpPr>
           <p:spPr>
             <a:xfrm>
-              <a:off x="4387821" y="6396137"/>
+              <a:off x="4381100" y="6396137"/>
               <a:ext cx="56509" cy="72877"/>
             </a:xfrm>
             <a:prstGeom prst="rect">
@@ -20227,7 +20227,7 @@
           </p:nvSpPr>
           <p:spPr>
             <a:xfrm>
-              <a:off x="5153914" y="6396137"/>
+              <a:off x="5149023" y="6396137"/>
               <a:ext cx="56509" cy="72877"/>
             </a:xfrm>
             <a:prstGeom prst="rect">
@@ -20273,7 +20273,7 @@
           </p:nvSpPr>
           <p:spPr>
             <a:xfrm>
-              <a:off x="5920007" y="6396137"/>
+              <a:off x="5916946" y="6396137"/>
               <a:ext cx="56509" cy="72877"/>
             </a:xfrm>
             <a:prstGeom prst="rect">
@@ -20319,7 +20319,7 @@
           </p:nvSpPr>
           <p:spPr>
             <a:xfrm>
-              <a:off x="6686099" y="6396137"/>
+              <a:off x="6684869" y="6396137"/>
               <a:ext cx="56509" cy="72877"/>
             </a:xfrm>
             <a:prstGeom prst="rect">

--- a/figures/Figure_1.pptx
+++ b/figures/Figure_1.pptx
@@ -2515,7 +2515,7 @@
           </p:nvSpPr>
           <p:spPr>
             <a:xfrm>
-              <a:off x="1397325" y="2359262"/>
+              <a:off x="1431120" y="2359254"/>
               <a:ext cx="75116" cy="75116"/>
             </a:xfrm>
             <a:prstGeom prst="ellipse">
@@ -2541,7 +2541,7 @@
           </p:nvSpPr>
           <p:spPr>
             <a:xfrm>
-              <a:off x="1574598" y="2286953"/>
+              <a:off x="1581397" y="2286945"/>
               <a:ext cx="75116" cy="75116"/>
             </a:xfrm>
             <a:prstGeom prst="ellipse">
@@ -2567,7 +2567,7 @@
           </p:nvSpPr>
           <p:spPr>
             <a:xfrm>
-              <a:off x="1513816" y="2395877"/>
+              <a:off x="1397325" y="2395957"/>
               <a:ext cx="75116" cy="75116"/>
             </a:xfrm>
             <a:prstGeom prst="ellipse">
@@ -2593,7 +2593,7 @@
           </p:nvSpPr>
           <p:spPr>
             <a:xfrm>
-              <a:off x="1423316" y="2392934"/>
+              <a:off x="1437402" y="2392833"/>
               <a:ext cx="75116" cy="75116"/>
             </a:xfrm>
             <a:prstGeom prst="ellipse">
@@ -2619,7 +2619,7 @@
           </p:nvSpPr>
           <p:spPr>
             <a:xfrm>
-              <a:off x="1543834" y="2419630"/>
+              <a:off x="1464991" y="2419644"/>
               <a:ext cx="75116" cy="75116"/>
             </a:xfrm>
             <a:prstGeom prst="ellipse">
@@ -2645,7 +2645,7 @@
           </p:nvSpPr>
           <p:spPr>
             <a:xfrm>
-              <a:off x="1540906" y="2266995"/>
+              <a:off x="1458932" y="2266950"/>
               <a:ext cx="75116" cy="75116"/>
             </a:xfrm>
             <a:prstGeom prst="ellipse">
@@ -2671,7 +2671,7 @@
           </p:nvSpPr>
           <p:spPr>
             <a:xfrm>
-              <a:off x="1548902" y="2181804"/>
+              <a:off x="1574671" y="2181795"/>
               <a:ext cx="75116" cy="75116"/>
             </a:xfrm>
             <a:prstGeom prst="ellipse">
@@ -2697,7 +2697,7 @@
           </p:nvSpPr>
           <p:spPr>
             <a:xfrm>
-              <a:off x="1589075" y="2376195"/>
+              <a:off x="1599392" y="2376103"/>
               <a:ext cx="75116" cy="75116"/>
             </a:xfrm>
             <a:prstGeom prst="ellipse">
@@ -2723,7 +2723,7 @@
           </p:nvSpPr>
           <p:spPr>
             <a:xfrm>
-              <a:off x="1594698" y="2450190"/>
+              <a:off x="1490318" y="2450229"/>
               <a:ext cx="75116" cy="75116"/>
             </a:xfrm>
             <a:prstGeom prst="ellipse">
@@ -2749,7 +2749,7 @@
           </p:nvSpPr>
           <p:spPr>
             <a:xfrm>
-              <a:off x="1512015" y="2245890"/>
+              <a:off x="1526904" y="2245885"/>
               <a:ext cx="75116" cy="75116"/>
             </a:xfrm>
             <a:prstGeom prst="ellipse">
@@ -2775,7 +2775,7 @@
           </p:nvSpPr>
           <p:spPr>
             <a:xfrm>
-              <a:off x="2318268" y="2458915"/>
+              <a:off x="2283370" y="2458808"/>
               <a:ext cx="75116" cy="75116"/>
             </a:xfrm>
             <a:prstGeom prst="ellipse">
@@ -2801,7 +2801,7 @@
           </p:nvSpPr>
           <p:spPr>
             <a:xfrm>
-              <a:off x="2149421" y="2393646"/>
+              <a:off x="2343550" y="2393518"/>
               <a:ext cx="75116" cy="75116"/>
             </a:xfrm>
             <a:prstGeom prst="ellipse">
@@ -2827,7 +2827,7 @@
           </p:nvSpPr>
           <p:spPr>
             <a:xfrm>
-              <a:off x="2302270" y="1772602"/>
+              <a:off x="2182661" y="1772670"/>
               <a:ext cx="75116" cy="75116"/>
             </a:xfrm>
             <a:prstGeom prst="ellipse">
@@ -2853,7 +2853,7 @@
           </p:nvSpPr>
           <p:spPr>
             <a:xfrm>
-              <a:off x="2177353" y="2310727"/>
+              <a:off x="2372474" y="2310702"/>
               <a:ext cx="75116" cy="75116"/>
             </a:xfrm>
             <a:prstGeom prst="ellipse">
@@ -2879,7 +2879,7 @@
           </p:nvSpPr>
           <p:spPr>
             <a:xfrm>
-              <a:off x="2278724" y="2387233"/>
+              <a:off x="2310261" y="2387255"/>
               <a:ext cx="75116" cy="75116"/>
             </a:xfrm>
             <a:prstGeom prst="ellipse">
@@ -2905,7 +2905,7 @@
           </p:nvSpPr>
           <p:spPr>
             <a:xfrm>
-              <a:off x="2281512" y="2453176"/>
+              <a:off x="2234046" y="2453125"/>
               <a:ext cx="75116" cy="75116"/>
             </a:xfrm>
             <a:prstGeom prst="ellipse">
@@ -2931,7 +2931,7 @@
           </p:nvSpPr>
           <p:spPr>
             <a:xfrm>
-              <a:off x="2314259" y="2479780"/>
+              <a:off x="2283025" y="2479647"/>
               <a:ext cx="75116" cy="75116"/>
             </a:xfrm>
             <a:prstGeom prst="ellipse">
@@ -2957,7 +2957,7 @@
           </p:nvSpPr>
           <p:spPr>
             <a:xfrm>
-              <a:off x="2241140" y="2302229"/>
+              <a:off x="2259209" y="2302138"/>
               <a:ext cx="75116" cy="75116"/>
             </a:xfrm>
             <a:prstGeom prst="ellipse">
@@ -2983,7 +2983,7 @@
           </p:nvSpPr>
           <p:spPr>
             <a:xfrm>
-              <a:off x="2362021" y="1643471"/>
+              <a:off x="2309367" y="1643571"/>
               <a:ext cx="75116" cy="75116"/>
             </a:xfrm>
             <a:prstGeom prst="ellipse">
@@ -3009,7 +3009,7 @@
           </p:nvSpPr>
           <p:spPr>
             <a:xfrm>
-              <a:off x="2150244" y="1835625"/>
+              <a:off x="2241919" y="1835550"/>
               <a:ext cx="75116" cy="75116"/>
             </a:xfrm>
             <a:prstGeom prst="ellipse">
@@ -3035,7 +3035,7 @@
           </p:nvSpPr>
           <p:spPr>
             <a:xfrm>
-              <a:off x="2281794" y="2470027"/>
+              <a:off x="2361064" y="2469957"/>
               <a:ext cx="75116" cy="75116"/>
             </a:xfrm>
             <a:prstGeom prst="ellipse">
@@ -3061,7 +3061,7 @@
           </p:nvSpPr>
           <p:spPr>
             <a:xfrm>
-              <a:off x="2319894" y="2261239"/>
+              <a:off x="2184750" y="2261223"/>
               <a:ext cx="75116" cy="75116"/>
             </a:xfrm>
             <a:prstGeom prst="ellipse">
@@ -3087,7 +3087,7 @@
           </p:nvSpPr>
           <p:spPr>
             <a:xfrm>
-              <a:off x="2226982" y="2203493"/>
+              <a:off x="2338972" y="2203427"/>
               <a:ext cx="75116" cy="75116"/>
             </a:xfrm>
             <a:prstGeom prst="ellipse">
@@ -3113,7 +3113,7 @@
           </p:nvSpPr>
           <p:spPr>
             <a:xfrm>
-              <a:off x="2320989" y="2213546"/>
+              <a:off x="2369211" y="2213437"/>
               <a:ext cx="75116" cy="75116"/>
             </a:xfrm>
             <a:prstGeom prst="ellipse">
@@ -3139,7 +3139,7 @@
           </p:nvSpPr>
           <p:spPr>
             <a:xfrm>
-              <a:off x="2310482" y="2380120"/>
+              <a:off x="2311958" y="2380120"/>
               <a:ext cx="75116" cy="75116"/>
             </a:xfrm>
             <a:prstGeom prst="ellipse">
@@ -3165,7 +3165,7 @@
           </p:nvSpPr>
           <p:spPr>
             <a:xfrm>
-              <a:off x="2262562" y="2318358"/>
+              <a:off x="2190879" y="2318317"/>
               <a:ext cx="75116" cy="75116"/>
             </a:xfrm>
             <a:prstGeom prst="ellipse">
@@ -3191,7 +3191,7 @@
           </p:nvSpPr>
           <p:spPr>
             <a:xfrm>
-              <a:off x="2360148" y="1827271"/>
+              <a:off x="2255236" y="1827392"/>
               <a:ext cx="75116" cy="75116"/>
             </a:xfrm>
             <a:prstGeom prst="ellipse">
@@ -3217,7 +3217,7 @@
           </p:nvSpPr>
           <p:spPr>
             <a:xfrm>
-              <a:off x="2303122" y="1967874"/>
+              <a:off x="2233657" y="1967802"/>
               <a:ext cx="75116" cy="75116"/>
             </a:xfrm>
             <a:prstGeom prst="ellipse">
@@ -3243,7 +3243,7 @@
           </p:nvSpPr>
           <p:spPr>
             <a:xfrm>
-              <a:off x="3030960" y="2417113"/>
+              <a:off x="3020049" y="2417171"/>
               <a:ext cx="75116" cy="75116"/>
             </a:xfrm>
             <a:prstGeom prst="ellipse">
@@ -3269,7 +3269,7 @@
           </p:nvSpPr>
           <p:spPr>
             <a:xfrm>
-              <a:off x="3101679" y="2193553"/>
+              <a:off x="2966896" y="2193593"/>
               <a:ext cx="75116" cy="75116"/>
             </a:xfrm>
             <a:prstGeom prst="ellipse">
@@ -3295,7 +3295,7 @@
           </p:nvSpPr>
           <p:spPr>
             <a:xfrm>
-              <a:off x="3084235" y="2430147"/>
+              <a:off x="2928634" y="2430024"/>
               <a:ext cx="75116" cy="75116"/>
             </a:xfrm>
             <a:prstGeom prst="ellipse">
@@ -3321,7 +3321,7 @@
           </p:nvSpPr>
           <p:spPr>
             <a:xfrm>
-              <a:off x="3059255" y="2522901"/>
+              <a:off x="3060254" y="2522901"/>
               <a:ext cx="75116" cy="75116"/>
             </a:xfrm>
             <a:prstGeom prst="ellipse">
@@ -3347,7 +3347,7 @@
           </p:nvSpPr>
           <p:spPr>
             <a:xfrm>
-              <a:off x="3116823" y="2261206"/>
+              <a:off x="2953669" y="2261191"/>
               <a:ext cx="75116" cy="75116"/>
             </a:xfrm>
             <a:prstGeom prst="ellipse">
@@ -3373,7 +3373,7 @@
           </p:nvSpPr>
           <p:spPr>
             <a:xfrm>
-              <a:off x="3107389" y="2406296"/>
+              <a:off x="3041801" y="2406387"/>
               <a:ext cx="75116" cy="75116"/>
             </a:xfrm>
             <a:prstGeom prst="ellipse">
@@ -3399,7 +3399,7 @@
           </p:nvSpPr>
           <p:spPr>
             <a:xfrm>
-              <a:off x="3090377" y="1465923"/>
+              <a:off x="3116414" y="1465979"/>
               <a:ext cx="75116" cy="75116"/>
             </a:xfrm>
             <a:prstGeom prst="ellipse">
@@ -3425,7 +3425,7 @@
           </p:nvSpPr>
           <p:spPr>
             <a:xfrm>
-              <a:off x="3072245" y="2453364"/>
+              <a:off x="2940627" y="2453273"/>
               <a:ext cx="75116" cy="75116"/>
             </a:xfrm>
             <a:prstGeom prst="ellipse">
@@ -3451,7 +3451,7 @@
           </p:nvSpPr>
           <p:spPr>
             <a:xfrm>
-              <a:off x="3063656" y="2100442"/>
+              <a:off x="3081014" y="2100374"/>
               <a:ext cx="75116" cy="75116"/>
             </a:xfrm>
             <a:prstGeom prst="ellipse">
@@ -3477,7 +3477,7 @@
           </p:nvSpPr>
           <p:spPr>
             <a:xfrm>
-              <a:off x="2935410" y="1757883"/>
+              <a:off x="3074496" y="1757918"/>
               <a:ext cx="75116" cy="75116"/>
             </a:xfrm>
             <a:prstGeom prst="ellipse">
@@ -3503,7 +3503,7 @@
           </p:nvSpPr>
           <p:spPr>
             <a:xfrm>
-              <a:off x="3048996" y="1195659"/>
+              <a:off x="3139009" y="1195659"/>
               <a:ext cx="75116" cy="75116"/>
             </a:xfrm>
             <a:prstGeom prst="ellipse">
@@ -3529,7 +3529,7 @@
           </p:nvSpPr>
           <p:spPr>
             <a:xfrm>
-              <a:off x="3029903" y="1997471"/>
+              <a:off x="3051533" y="1997439"/>
               <a:ext cx="75116" cy="75116"/>
             </a:xfrm>
             <a:prstGeom prst="ellipse">
@@ -3555,7 +3555,7 @@
           </p:nvSpPr>
           <p:spPr>
             <a:xfrm>
-              <a:off x="3011950" y="2167826"/>
+              <a:off x="3013249" y="2167819"/>
               <a:ext cx="75116" cy="75116"/>
             </a:xfrm>
             <a:prstGeom prst="ellipse">
@@ -3581,7 +3581,7 @@
           </p:nvSpPr>
           <p:spPr>
             <a:xfrm>
-              <a:off x="3089669" y="2023899"/>
+              <a:off x="2963035" y="2023880"/>
               <a:ext cx="75116" cy="75116"/>
             </a:xfrm>
             <a:prstGeom prst="ellipse">
@@ -3607,7 +3607,7 @@
           </p:nvSpPr>
           <p:spPr>
             <a:xfrm>
-              <a:off x="2992776" y="2141186"/>
+              <a:off x="3042406" y="2141180"/>
               <a:ext cx="75116" cy="75116"/>
             </a:xfrm>
             <a:prstGeom prst="ellipse">
@@ -3633,7 +3633,7 @@
           </p:nvSpPr>
           <p:spPr>
             <a:xfrm>
-              <a:off x="3003699" y="2297486"/>
+              <a:off x="3074339" y="2297462"/>
               <a:ext cx="75116" cy="75116"/>
             </a:xfrm>
             <a:prstGeom prst="ellipse">
@@ -3659,7 +3659,7 @@
           </p:nvSpPr>
           <p:spPr>
             <a:xfrm>
-              <a:off x="3041550" y="2208170"/>
+              <a:off x="2972275" y="2208169"/>
               <a:ext cx="75116" cy="75116"/>
             </a:xfrm>
             <a:prstGeom prst="ellipse">
@@ -3685,7 +3685,7 @@
           </p:nvSpPr>
           <p:spPr>
             <a:xfrm>
-              <a:off x="2924268" y="2193185"/>
+              <a:off x="3052102" y="2193249"/>
               <a:ext cx="75116" cy="75116"/>
             </a:xfrm>
             <a:prstGeom prst="ellipse">
@@ -3711,7 +3711,7 @@
           </p:nvSpPr>
           <p:spPr>
             <a:xfrm>
-              <a:off x="3075625" y="2296159"/>
+              <a:off x="3088640" y="2296003"/>
               <a:ext cx="75116" cy="75116"/>
             </a:xfrm>
             <a:prstGeom prst="ellipse">
@@ -3737,7 +3737,7 @@
           </p:nvSpPr>
           <p:spPr>
             <a:xfrm>
-              <a:off x="3062467" y="2285373"/>
+              <a:off x="2941212" y="2285327"/>
               <a:ext cx="75116" cy="75116"/>
             </a:xfrm>
             <a:prstGeom prst="ellipse">
@@ -3763,7 +3763,7 @@
           </p:nvSpPr>
           <p:spPr>
             <a:xfrm>
-              <a:off x="3804046" y="2303158"/>
+              <a:off x="3839606" y="2303145"/>
               <a:ext cx="75116" cy="75116"/>
             </a:xfrm>
             <a:prstGeom prst="ellipse">
@@ -3789,7 +3789,7 @@
           </p:nvSpPr>
           <p:spPr>
             <a:xfrm>
-              <a:off x="3825479" y="2300720"/>
+              <a:off x="3699181" y="2300809"/>
               <a:ext cx="75116" cy="75116"/>
             </a:xfrm>
             <a:prstGeom prst="ellipse">
@@ -3815,7 +3815,7 @@
           </p:nvSpPr>
           <p:spPr>
             <a:xfrm>
-              <a:off x="3830125" y="2256127"/>
+              <a:off x="3719031" y="2256170"/>
               <a:ext cx="75116" cy="75116"/>
             </a:xfrm>
             <a:prstGeom prst="ellipse">
@@ -3841,7 +3841,7 @@
           </p:nvSpPr>
           <p:spPr>
             <a:xfrm>
-              <a:off x="3691412" y="2397444"/>
+              <a:off x="3810924" y="2397376"/>
               <a:ext cx="75116" cy="75116"/>
             </a:xfrm>
             <a:prstGeom prst="ellipse">
@@ -3867,7 +3867,7 @@
           </p:nvSpPr>
           <p:spPr>
             <a:xfrm>
-              <a:off x="3759451" y="2016952"/>
+              <a:off x="3783589" y="2016954"/>
               <a:ext cx="75116" cy="75116"/>
             </a:xfrm>
             <a:prstGeom prst="ellipse">
@@ -3893,7 +3893,7 @@
           </p:nvSpPr>
           <p:spPr>
             <a:xfrm>
-              <a:off x="3845685" y="2035435"/>
+              <a:off x="3772115" y="2035371"/>
               <a:ext cx="75116" cy="75116"/>
             </a:xfrm>
             <a:prstGeom prst="ellipse">
@@ -3919,7 +3919,7 @@
           </p:nvSpPr>
           <p:spPr>
             <a:xfrm>
-              <a:off x="3834349" y="2258497"/>
+              <a:off x="3816298" y="2258540"/>
               <a:ext cx="75116" cy="75116"/>
             </a:xfrm>
             <a:prstGeom prst="ellipse">
@@ -3945,7 +3945,7 @@
           </p:nvSpPr>
           <p:spPr>
             <a:xfrm>
-              <a:off x="3774283" y="2181042"/>
+              <a:off x="3685231" y="2180992"/>
               <a:ext cx="75116" cy="75116"/>
             </a:xfrm>
             <a:prstGeom prst="ellipse">
@@ -3971,7 +3971,7 @@
           </p:nvSpPr>
           <p:spPr>
             <a:xfrm>
-              <a:off x="3841563" y="2089593"/>
+              <a:off x="3878510" y="2089622"/>
               <a:ext cx="75116" cy="75116"/>
             </a:xfrm>
             <a:prstGeom prst="ellipse">
@@ -3997,7 +3997,7 @@
           </p:nvSpPr>
           <p:spPr>
             <a:xfrm>
-              <a:off x="3786567" y="1859145"/>
+              <a:off x="3685147" y="1859198"/>
               <a:ext cx="75116" cy="75116"/>
             </a:xfrm>
             <a:prstGeom prst="ellipse">
@@ -4023,7 +4023,7 @@
           </p:nvSpPr>
           <p:spPr>
             <a:xfrm>
-              <a:off x="3687276" y="1927396"/>
+              <a:off x="3833788" y="1927286"/>
               <a:ext cx="75116" cy="75116"/>
             </a:xfrm>
             <a:prstGeom prst="ellipse">
@@ -4049,7 +4049,7 @@
           </p:nvSpPr>
           <p:spPr>
             <a:xfrm>
-              <a:off x="3746168" y="1787414"/>
+              <a:off x="3715584" y="1787349"/>
               <a:ext cx="75116" cy="75116"/>
             </a:xfrm>
             <a:prstGeom prst="ellipse">
@@ -4075,7 +4075,7 @@
           </p:nvSpPr>
           <p:spPr>
             <a:xfrm>
-              <a:off x="3867837" y="2024804"/>
+              <a:off x="3745485" y="2024880"/>
               <a:ext cx="75116" cy="75116"/>
             </a:xfrm>
             <a:prstGeom prst="ellipse">
@@ -4101,7 +4101,7 @@
           </p:nvSpPr>
           <p:spPr>
             <a:xfrm>
-              <a:off x="3794596" y="1957879"/>
+              <a:off x="3787621" y="1957885"/>
               <a:ext cx="75116" cy="75116"/>
             </a:xfrm>
             <a:prstGeom prst="ellipse">
@@ -4127,7 +4127,7 @@
           </p:nvSpPr>
           <p:spPr>
             <a:xfrm>
-              <a:off x="3687778" y="2364958"/>
+              <a:off x="3727125" y="2364919"/>
               <a:ext cx="75116" cy="75116"/>
             </a:xfrm>
             <a:prstGeom prst="ellipse">
@@ -4153,7 +4153,7 @@
           </p:nvSpPr>
           <p:spPr>
             <a:xfrm>
-              <a:off x="3894352" y="2198188"/>
+              <a:off x="3810755" y="2198263"/>
               <a:ext cx="75116" cy="75116"/>
             </a:xfrm>
             <a:prstGeom prst="ellipse">
@@ -4179,7 +4179,7 @@
           </p:nvSpPr>
           <p:spPr>
             <a:xfrm>
-              <a:off x="3887421" y="2103783"/>
+              <a:off x="3760984" y="2103719"/>
               <a:ext cx="75116" cy="75116"/>
             </a:xfrm>
             <a:prstGeom prst="ellipse">
@@ -4205,7 +4205,7 @@
           </p:nvSpPr>
           <p:spPr>
             <a:xfrm>
-              <a:off x="3882302" y="2166062"/>
+              <a:off x="3894352" y="2165968"/>
               <a:ext cx="75116" cy="75116"/>
             </a:xfrm>
             <a:prstGeom prst="ellipse">
@@ -4231,7 +4231,7 @@
           </p:nvSpPr>
           <p:spPr>
             <a:xfrm>
-              <a:off x="3886334" y="1902913"/>
+              <a:off x="3797229" y="1902910"/>
               <a:ext cx="75116" cy="75116"/>
             </a:xfrm>
             <a:prstGeom prst="ellipse">
@@ -4257,7 +4257,7 @@
           </p:nvSpPr>
           <p:spPr>
             <a:xfrm>
-              <a:off x="3734170" y="2136506"/>
+              <a:off x="3844086" y="2136587"/>
               <a:ext cx="75116" cy="75116"/>
             </a:xfrm>
             <a:prstGeom prst="ellipse">
@@ -4283,7 +4283,7 @@
           </p:nvSpPr>
           <p:spPr>
             <a:xfrm>
-              <a:off x="3814169" y="1999410"/>
+              <a:off x="3791284" y="1999477"/>
               <a:ext cx="75116" cy="75116"/>
             </a:xfrm>
             <a:prstGeom prst="ellipse">
@@ -4309,7 +4309,7 @@
           </p:nvSpPr>
           <p:spPr>
             <a:xfrm>
-              <a:off x="3734563" y="1886503"/>
+              <a:off x="3885137" y="1886486"/>
               <a:ext cx="75116" cy="75116"/>
             </a:xfrm>
             <a:prstGeom prst="ellipse">
@@ -4335,7 +4335,7 @@
           </p:nvSpPr>
           <p:spPr>
             <a:xfrm>
-              <a:off x="3716529" y="2056248"/>
+              <a:off x="3723303" y="2056241"/>
               <a:ext cx="75116" cy="75116"/>
             </a:xfrm>
             <a:prstGeom prst="ellipse">
@@ -4361,7 +4361,7 @@
           </p:nvSpPr>
           <p:spPr>
             <a:xfrm>
-              <a:off x="3712619" y="2025521"/>
+              <a:off x="3742542" y="2025588"/>
               <a:ext cx="75116" cy="75116"/>
             </a:xfrm>
             <a:prstGeom prst="ellipse">
@@ -4387,42 +4387,42 @@
           </p:nvSpPr>
           <p:spPr>
             <a:xfrm>
-              <a:off x="1523263" y="1940811"/>
-              <a:ext cx="2311051" cy="573365"/>
+              <a:off x="1541140" y="1940805"/>
+              <a:ext cx="2289589" cy="573330"/>
             </a:xfrm>
             <a:custGeom>
               <a:avLst/>
               <a:pathLst>
-                <a:path w="2311051" h="573365">
+                <a:path w="2289589" h="573330">
                   <a:moveTo>
-                    <a:pt x="0" y="162730"/>
+                    <a:pt x="0" y="162720"/>
                   </a:moveTo>
                   <a:lnTo>
-                    <a:pt x="1220976" y="156169"/>
+                    <a:pt x="1209637" y="156159"/>
                   </a:lnTo>
                   <a:lnTo>
-                    <a:pt x="1540700" y="124133"/>
+                    <a:pt x="1526393" y="124125"/>
                   </a:lnTo>
                   <a:lnTo>
-                    <a:pt x="1991326" y="56958"/>
+                    <a:pt x="1972834" y="56954"/>
                   </a:lnTo>
                   <a:lnTo>
-                    <a:pt x="2311051" y="0"/>
+                    <a:pt x="2289589" y="0"/>
                   </a:lnTo>
                   <a:lnTo>
-                    <a:pt x="2311051" y="371560"/>
+                    <a:pt x="2289589" y="371537"/>
                   </a:lnTo>
                   <a:lnTo>
-                    <a:pt x="1991326" y="365033"/>
+                    <a:pt x="1972834" y="365011"/>
                   </a:lnTo>
                   <a:lnTo>
-                    <a:pt x="1540700" y="368938"/>
+                    <a:pt x="1526393" y="368916"/>
                   </a:lnTo>
                   <a:lnTo>
-                    <a:pt x="1220976" y="387334"/>
+                    <a:pt x="1209637" y="387311"/>
                   </a:lnTo>
                   <a:lnTo>
-                    <a:pt x="0" y="573365"/>
+                    <a:pt x="0" y="573330"/>
                   </a:lnTo>
                   <a:close/>
                 </a:path>
@@ -4448,27 +4448,27 @@
           </p:nvSpPr>
           <p:spPr>
             <a:xfrm>
-              <a:off x="1523263" y="1940811"/>
-              <a:ext cx="2311051" cy="162730"/>
+              <a:off x="1541140" y="1940805"/>
+              <a:ext cx="2289589" cy="162720"/>
             </a:xfrm>
             <a:custGeom>
               <a:avLst/>
               <a:pathLst>
-                <a:path w="2311051" h="162730">
+                <a:path w="2289589" h="162720">
                   <a:moveTo>
-                    <a:pt x="0" y="162730"/>
+                    <a:pt x="0" y="162720"/>
                   </a:moveTo>
                   <a:lnTo>
-                    <a:pt x="1220976" y="156169"/>
+                    <a:pt x="1209637" y="156159"/>
                   </a:lnTo>
                   <a:lnTo>
-                    <a:pt x="1540700" y="124133"/>
+                    <a:pt x="1526393" y="124125"/>
                   </a:lnTo>
                   <a:lnTo>
-                    <a:pt x="1991326" y="56958"/>
+                    <a:pt x="1972834" y="56954"/>
                   </a:lnTo>
                   <a:lnTo>
-                    <a:pt x="2311051" y="0"/>
+                    <a:pt x="2289589" y="0"/>
                   </a:lnTo>
                 </a:path>
               </a:pathLst>
@@ -4488,27 +4488,27 @@
           </p:nvSpPr>
           <p:spPr>
             <a:xfrm>
-              <a:off x="1523263" y="2305845"/>
-              <a:ext cx="2311051" cy="208331"/>
+              <a:off x="1541140" y="2305817"/>
+              <a:ext cx="2289589" cy="208318"/>
             </a:xfrm>
             <a:custGeom>
               <a:avLst/>
               <a:pathLst>
-                <a:path w="2311051" h="208331">
+                <a:path w="2289589" h="208318">
                   <a:moveTo>
-                    <a:pt x="2311051" y="6526"/>
+                    <a:pt x="2289589" y="6525"/>
                   </a:moveTo>
                   <a:lnTo>
-                    <a:pt x="1991326" y="0"/>
+                    <a:pt x="1972834" y="0"/>
                   </a:lnTo>
                   <a:lnTo>
-                    <a:pt x="1540700" y="3904"/>
+                    <a:pt x="1526393" y="3904"/>
                   </a:lnTo>
                   <a:lnTo>
-                    <a:pt x="1220976" y="22300"/>
+                    <a:pt x="1209637" y="22299"/>
                   </a:lnTo>
                   <a:lnTo>
-                    <a:pt x="0" y="208331"/>
+                    <a:pt x="0" y="208318"/>
                   </a:lnTo>
                 </a:path>
               </a:pathLst>
@@ -4528,27 +4528,27 @@
           </p:nvSpPr>
           <p:spPr>
             <a:xfrm>
-              <a:off x="1523263" y="2126592"/>
-              <a:ext cx="2311051" cy="182267"/>
+              <a:off x="1541140" y="2126574"/>
+              <a:ext cx="2289589" cy="182256"/>
             </a:xfrm>
             <a:custGeom>
               <a:avLst/>
               <a:pathLst>
-                <a:path w="2311051" h="182267">
+                <a:path w="2289589" h="182256">
                   <a:moveTo>
-                    <a:pt x="0" y="182267"/>
+                    <a:pt x="0" y="182256"/>
                   </a:moveTo>
                   <a:lnTo>
-                    <a:pt x="1220976" y="85971"/>
+                    <a:pt x="1209637" y="85966"/>
                   </a:lnTo>
                   <a:lnTo>
-                    <a:pt x="1540700" y="60755"/>
+                    <a:pt x="1526393" y="60752"/>
                   </a:lnTo>
                   <a:lnTo>
-                    <a:pt x="1991326" y="25215"/>
+                    <a:pt x="1972834" y="25214"/>
                   </a:lnTo>
                   <a:lnTo>
-                    <a:pt x="2311051" y="0"/>
+                    <a:pt x="2289589" y="0"/>
                   </a:lnTo>
                 </a:path>
               </a:pathLst>
@@ -4577,7 +4577,7 @@
           </p:nvSpPr>
           <p:spPr>
             <a:xfrm>
-              <a:off x="3345430" y="1259992"/>
+              <a:off x="3341845" y="1260020"/>
               <a:ext cx="63550" cy="82021"/>
             </a:xfrm>
             <a:prstGeom prst="rect">
@@ -4623,7 +4623,7 @@
           </p:nvSpPr>
           <p:spPr>
             <a:xfrm>
-              <a:off x="3418171" y="1259992"/>
+              <a:off x="3414586" y="1260020"/>
               <a:ext cx="416143" cy="82021"/>
             </a:xfrm>
             <a:prstGeom prst="rect">
@@ -4730,7 +4730,7 @@
           </p:nvSpPr>
           <p:spPr>
             <a:xfrm rot="-5400000">
-              <a:off x="1140466" y="2320153"/>
+              <a:off x="1140466" y="2320121"/>
               <a:ext cx="141274" cy="72877"/>
             </a:xfrm>
             <a:prstGeom prst="rect">
@@ -4776,7 +4776,7 @@
           </p:nvSpPr>
           <p:spPr>
             <a:xfrm rot="-5400000">
-              <a:off x="1140466" y="1923604"/>
+              <a:off x="1140466" y="1923597"/>
               <a:ext cx="141274" cy="72877"/>
             </a:xfrm>
             <a:prstGeom prst="rect">
@@ -4822,7 +4822,7 @@
           </p:nvSpPr>
           <p:spPr>
             <a:xfrm rot="-5400000">
-              <a:off x="1140466" y="1527056"/>
+              <a:off x="1140466" y="1527072"/>
               <a:ext cx="141274" cy="72877"/>
             </a:xfrm>
             <a:prstGeom prst="rect">
@@ -4868,7 +4868,7 @@
           </p:nvSpPr>
           <p:spPr>
             <a:xfrm rot="-5400000">
-              <a:off x="1112211" y="1130507"/>
+              <a:off x="1112211" y="1130548"/>
               <a:ext cx="197784" cy="72877"/>
             </a:xfrm>
             <a:prstGeom prst="rect">
@@ -4914,7 +4914,7 @@
           </p:nvSpPr>
           <p:spPr>
             <a:xfrm>
-              <a:off x="1281564" y="2356592"/>
+              <a:off x="1281564" y="2356560"/>
               <a:ext cx="28468" cy="0"/>
             </a:xfrm>
             <a:custGeom>
@@ -4954,7 +4954,7 @@
           </p:nvSpPr>
           <p:spPr>
             <a:xfrm>
-              <a:off x="1281564" y="1960043"/>
+              <a:off x="1281564" y="1960036"/>
               <a:ext cx="28468" cy="0"/>
             </a:xfrm>
             <a:custGeom>
@@ -4994,7 +4994,7 @@
           </p:nvSpPr>
           <p:spPr>
             <a:xfrm>
-              <a:off x="1281564" y="1563495"/>
+              <a:off x="1281564" y="1563511"/>
               <a:ext cx="28468" cy="0"/>
             </a:xfrm>
             <a:custGeom>
@@ -5034,7 +5034,7 @@
           </p:nvSpPr>
           <p:spPr>
             <a:xfrm>
-              <a:off x="1281564" y="1166946"/>
+              <a:off x="1281564" y="1166987"/>
               <a:ext cx="28468" cy="0"/>
             </a:xfrm>
             <a:custGeom>
@@ -5114,7 +5114,7 @@
           </p:nvSpPr>
           <p:spPr>
             <a:xfrm>
-              <a:off x="1523263" y="2626821"/>
+              <a:off x="1541140" y="2626821"/>
               <a:ext cx="0" cy="28468"/>
             </a:xfrm>
             <a:custGeom>
@@ -5154,7 +5154,7 @@
           </p:nvSpPr>
           <p:spPr>
             <a:xfrm>
-              <a:off x="2293613" y="2626821"/>
+              <a:off x="2304336" y="2626821"/>
               <a:ext cx="0" cy="28468"/>
             </a:xfrm>
             <a:custGeom>
@@ -5194,7 +5194,7 @@
           </p:nvSpPr>
           <p:spPr>
             <a:xfrm>
-              <a:off x="3063964" y="2626821"/>
+              <a:off x="3067533" y="2626821"/>
               <a:ext cx="0" cy="28468"/>
             </a:xfrm>
             <a:custGeom>
@@ -5234,7 +5234,7 @@
           </p:nvSpPr>
           <p:spPr>
             <a:xfrm>
-              <a:off x="3834314" y="2626821"/>
+              <a:off x="3830729" y="2626821"/>
               <a:ext cx="0" cy="28468"/>
             </a:xfrm>
             <a:custGeom>
@@ -5274,7 +5274,7 @@
           </p:nvSpPr>
           <p:spPr>
             <a:xfrm>
-              <a:off x="1495008" y="2678064"/>
+              <a:off x="1512885" y="2678064"/>
               <a:ext cx="56509" cy="72877"/>
             </a:xfrm>
             <a:prstGeom prst="rect">
@@ -5320,7 +5320,7 @@
           </p:nvSpPr>
           <p:spPr>
             <a:xfrm>
-              <a:off x="2265358" y="2678064"/>
+              <a:off x="2276081" y="2678064"/>
               <a:ext cx="56509" cy="72877"/>
             </a:xfrm>
             <a:prstGeom prst="rect">
@@ -5366,7 +5366,7 @@
           </p:nvSpPr>
           <p:spPr>
             <a:xfrm>
-              <a:off x="3035709" y="2678064"/>
+              <a:off x="3039278" y="2678064"/>
               <a:ext cx="56509" cy="72877"/>
             </a:xfrm>
             <a:prstGeom prst="rect">
@@ -5412,7 +5412,7 @@
           </p:nvSpPr>
           <p:spPr>
             <a:xfrm>
-              <a:off x="3806059" y="2678064"/>
+              <a:off x="3802474" y="2678064"/>
               <a:ext cx="56509" cy="72877"/>
             </a:xfrm>
             <a:prstGeom prst="rect">
@@ -5530,7 +5530,7 @@
           </p:nvSpPr>
           <p:spPr>
             <a:xfrm>
-              <a:off x="4432258" y="2218936"/>
+              <a:off x="4456853" y="2219127"/>
               <a:ext cx="75116" cy="75116"/>
             </a:xfrm>
             <a:prstGeom prst="ellipse">
@@ -5556,7 +5556,7 @@
           </p:nvSpPr>
           <p:spPr>
             <a:xfrm>
-              <a:off x="4420433" y="1418701"/>
+              <a:off x="4448044" y="1418738"/>
               <a:ext cx="75116" cy="75116"/>
             </a:xfrm>
             <a:prstGeom prst="ellipse">
@@ -5582,7 +5582,7 @@
           </p:nvSpPr>
           <p:spPr>
             <a:xfrm>
-              <a:off x="4324655" y="2211380"/>
+              <a:off x="4338055" y="2211594"/>
               <a:ext cx="75116" cy="75116"/>
             </a:xfrm>
             <a:prstGeom prst="ellipse">
@@ -5608,7 +5608,7 @@
           </p:nvSpPr>
           <p:spPr>
             <a:xfrm>
-              <a:off x="4283864" y="2117292"/>
+              <a:off x="4356742" y="2117467"/>
               <a:ext cx="75116" cy="75116"/>
             </a:xfrm>
             <a:prstGeom prst="ellipse">
@@ -5634,7 +5634,7 @@
           </p:nvSpPr>
           <p:spPr>
             <a:xfrm>
-              <a:off x="4442963" y="2290835"/>
+              <a:off x="4386800" y="2290949"/>
               <a:ext cx="75116" cy="75116"/>
             </a:xfrm>
             <a:prstGeom prst="ellipse">
@@ -5660,7 +5660,7 @@
           </p:nvSpPr>
           <p:spPr>
             <a:xfrm>
-              <a:off x="4374365" y="1660924"/>
+              <a:off x="4273743" y="1660986"/>
               <a:ext cx="75116" cy="75116"/>
             </a:xfrm>
             <a:prstGeom prst="ellipse">
@@ -5686,7 +5686,7 @@
           </p:nvSpPr>
           <p:spPr>
             <a:xfrm>
-              <a:off x="4299663" y="1252607"/>
+              <a:off x="4284406" y="1252706"/>
               <a:ext cx="75116" cy="75116"/>
             </a:xfrm>
             <a:prstGeom prst="ellipse">
@@ -5712,7 +5712,7 @@
           </p:nvSpPr>
           <p:spPr>
             <a:xfrm>
-              <a:off x="4273743" y="1991651"/>
+              <a:off x="4365277" y="1991819"/>
               <a:ext cx="75116" cy="75116"/>
             </a:xfrm>
             <a:prstGeom prst="ellipse">
@@ -5738,7 +5738,7 @@
           </p:nvSpPr>
           <p:spPr>
             <a:xfrm>
-              <a:off x="4281202" y="2485508"/>
+              <a:off x="4368736" y="2485843"/>
               <a:ext cx="75116" cy="75116"/>
             </a:xfrm>
             <a:prstGeom prst="ellipse">
@@ -5764,7 +5764,7 @@
           </p:nvSpPr>
           <p:spPr>
             <a:xfrm>
-              <a:off x="4316909" y="1954204"/>
+              <a:off x="4374594" y="1954227"/>
               <a:ext cx="75116" cy="75116"/>
             </a:xfrm>
             <a:prstGeom prst="ellipse">
@@ -5790,7 +5790,7 @@
           </p:nvSpPr>
           <p:spPr>
             <a:xfrm>
-              <a:off x="5163860" y="2505003"/>
+              <a:off x="5239960" y="2505415"/>
               <a:ext cx="75116" cy="75116"/>
             </a:xfrm>
             <a:prstGeom prst="ellipse">
@@ -5816,7 +5816,7 @@
           </p:nvSpPr>
           <p:spPr>
             <a:xfrm>
-              <a:off x="5121493" y="1661169"/>
+              <a:off x="5226033" y="1661413"/>
               <a:ext cx="75116" cy="75116"/>
             </a:xfrm>
             <a:prstGeom prst="ellipse">
@@ -5842,7 +5842,7 @@
           </p:nvSpPr>
           <p:spPr>
             <a:xfrm>
-              <a:off x="5230882" y="2131404"/>
+              <a:off x="5237232" y="2131496"/>
               <a:ext cx="75116" cy="75116"/>
             </a:xfrm>
             <a:prstGeom prst="ellipse">
@@ -5868,7 +5868,7 @@
           </p:nvSpPr>
           <p:spPr>
             <a:xfrm>
-              <a:off x="5111451" y="2522901"/>
+              <a:off x="5129330" y="2522901"/>
               <a:ext cx="75116" cy="75116"/>
             </a:xfrm>
             <a:prstGeom prst="ellipse">
@@ -5894,7 +5894,7 @@
           </p:nvSpPr>
           <p:spPr>
             <a:xfrm>
-              <a:off x="5144546" y="1833336"/>
+              <a:off x="5210215" y="1833770"/>
               <a:ext cx="75116" cy="75116"/>
             </a:xfrm>
             <a:prstGeom prst="ellipse">
@@ -5920,7 +5920,7 @@
           </p:nvSpPr>
           <p:spPr>
             <a:xfrm>
-              <a:off x="5082736" y="1195659"/>
+              <a:off x="5249871" y="1195659"/>
               <a:ext cx="75116" cy="75116"/>
             </a:xfrm>
             <a:prstGeom prst="ellipse">
@@ -5946,7 +5946,7 @@
           </p:nvSpPr>
           <p:spPr>
             <a:xfrm>
-              <a:off x="5154164" y="2491915"/>
+              <a:off x="5051567" y="2492108"/>
               <a:ext cx="75116" cy="75116"/>
             </a:xfrm>
             <a:prstGeom prst="ellipse">
@@ -5972,7 +5972,7 @@
           </p:nvSpPr>
           <p:spPr>
             <a:xfrm>
-              <a:off x="5183666" y="2437271"/>
+              <a:off x="5144001" y="2437449"/>
               <a:ext cx="75116" cy="75116"/>
             </a:xfrm>
             <a:prstGeom prst="ellipse">
@@ -5998,7 +5998,7 @@
           </p:nvSpPr>
           <p:spPr>
             <a:xfrm>
-              <a:off x="5040196" y="2153721"/>
+              <a:off x="5233263" y="2153950"/>
               <a:ext cx="75116" cy="75116"/>
             </a:xfrm>
             <a:prstGeom prst="ellipse">
@@ -6024,7 +6024,7 @@
           </p:nvSpPr>
           <p:spPr>
             <a:xfrm>
-              <a:off x="5140279" y="2498434"/>
+              <a:off x="5193644" y="2498274"/>
               <a:ext cx="75116" cy="75116"/>
             </a:xfrm>
             <a:prstGeom prst="ellipse">
@@ -6050,7 +6050,7 @@
           </p:nvSpPr>
           <p:spPr>
             <a:xfrm>
-              <a:off x="5086861" y="2304151"/>
+              <a:off x="5214612" y="2304417"/>
               <a:ext cx="75116" cy="75116"/>
             </a:xfrm>
             <a:prstGeom prst="ellipse">
@@ -6076,7 +6076,7 @@
           </p:nvSpPr>
           <p:spPr>
             <a:xfrm>
-              <a:off x="5085945" y="2494957"/>
+              <a:off x="5173509" y="2495139"/>
               <a:ext cx="75116" cy="75116"/>
             </a:xfrm>
             <a:prstGeom prst="ellipse">
@@ -6102,7 +6102,7 @@
           </p:nvSpPr>
           <p:spPr>
             <a:xfrm>
-              <a:off x="5133034" y="2046672"/>
+              <a:off x="5154742" y="2046856"/>
               <a:ext cx="75116" cy="75116"/>
             </a:xfrm>
             <a:prstGeom prst="ellipse">
@@ -6128,7 +6128,7 @@
           </p:nvSpPr>
           <p:spPr>
             <a:xfrm>
-              <a:off x="5152175" y="1922601"/>
+              <a:off x="5226983" y="1922885"/>
               <a:ext cx="75116" cy="75116"/>
             </a:xfrm>
             <a:prstGeom prst="ellipse">
@@ -6154,7 +6154,7 @@
           </p:nvSpPr>
           <p:spPr>
             <a:xfrm>
-              <a:off x="5146396" y="1978185"/>
+              <a:off x="5144970" y="1978248"/>
               <a:ext cx="75116" cy="75116"/>
             </a:xfrm>
             <a:prstGeom prst="ellipse">
@@ -6180,7 +6180,7 @@
           </p:nvSpPr>
           <p:spPr>
             <a:xfrm>
-              <a:off x="5131838" y="1795945"/>
+              <a:off x="5139483" y="1795970"/>
               <a:ext cx="75116" cy="75116"/>
             </a:xfrm>
             <a:prstGeom prst="ellipse">
@@ -6206,7 +6206,7 @@
           </p:nvSpPr>
           <p:spPr>
             <a:xfrm>
-              <a:off x="5182703" y="2273761"/>
+              <a:off x="5191159" y="2273977"/>
               <a:ext cx="75116" cy="75116"/>
             </a:xfrm>
             <a:prstGeom prst="ellipse">
@@ -6232,7 +6232,7 @@
           </p:nvSpPr>
           <p:spPr>
             <a:xfrm>
-              <a:off x="5184193" y="2488706"/>
+              <a:off x="5235456" y="2488697"/>
               <a:ext cx="75116" cy="75116"/>
             </a:xfrm>
             <a:prstGeom prst="ellipse">
@@ -6258,7 +6258,7 @@
           </p:nvSpPr>
           <p:spPr>
             <a:xfrm>
-              <a:off x="6006829" y="2253834"/>
+              <a:off x="5942422" y="2254181"/>
               <a:ext cx="75116" cy="75116"/>
             </a:xfrm>
             <a:prstGeom prst="ellipse">
@@ -6284,7 +6284,7 @@
           </p:nvSpPr>
           <p:spPr>
             <a:xfrm>
-              <a:off x="5866159" y="2341201"/>
+              <a:off x="5797882" y="2341298"/>
               <a:ext cx="75116" cy="75116"/>
             </a:xfrm>
             <a:prstGeom prst="ellipse">
@@ -6310,7 +6310,7 @@
           </p:nvSpPr>
           <p:spPr>
             <a:xfrm>
-              <a:off x="5820089" y="2435474"/>
+              <a:off x="5930969" y="2435671"/>
               <a:ext cx="75116" cy="75116"/>
             </a:xfrm>
             <a:prstGeom prst="ellipse">
@@ -6336,7 +6336,7 @@
           </p:nvSpPr>
           <p:spPr>
             <a:xfrm>
-              <a:off x="5950929" y="2210333"/>
+              <a:off x="5926859" y="2210364"/>
               <a:ext cx="75116" cy="75116"/>
             </a:xfrm>
             <a:prstGeom prst="ellipse">
@@ -6362,7 +6362,7 @@
           </p:nvSpPr>
           <p:spPr>
             <a:xfrm>
-              <a:off x="6008682" y="1722022"/>
+              <a:off x="5813876" y="1721973"/>
               <a:ext cx="75116" cy="75116"/>
             </a:xfrm>
             <a:prstGeom prst="ellipse">
@@ -6388,7 +6388,7 @@
           </p:nvSpPr>
           <p:spPr>
             <a:xfrm>
-              <a:off x="5844589" y="1395864"/>
+              <a:off x="5913189" y="1396339"/>
               <a:ext cx="75116" cy="75116"/>
             </a:xfrm>
             <a:prstGeom prst="ellipse">
@@ -6414,7 +6414,7 @@
           </p:nvSpPr>
           <p:spPr>
             <a:xfrm>
-              <a:off x="5854570" y="1616358"/>
+              <a:off x="5944371" y="1616253"/>
               <a:ext cx="75116" cy="75116"/>
             </a:xfrm>
             <a:prstGeom prst="ellipse">
@@ -6440,7 +6440,7 @@
           </p:nvSpPr>
           <p:spPr>
             <a:xfrm>
-              <a:off x="5833841" y="2283216"/>
+              <a:off x="6012209" y="2283322"/>
               <a:ext cx="75116" cy="75116"/>
             </a:xfrm>
             <a:prstGeom prst="ellipse">
@@ -6466,7 +6466,7 @@
           </p:nvSpPr>
           <p:spPr>
             <a:xfrm>
-              <a:off x="6003752" y="2228657"/>
+              <a:off x="5828626" y="2228765"/>
               <a:ext cx="75116" cy="75116"/>
             </a:xfrm>
             <a:prstGeom prst="ellipse">
@@ -6492,7 +6492,7 @@
           </p:nvSpPr>
           <p:spPr>
             <a:xfrm>
-              <a:off x="6015626" y="1686328"/>
+              <a:off x="5824414" y="1686510"/>
               <a:ext cx="75116" cy="75116"/>
             </a:xfrm>
             <a:prstGeom prst="ellipse">
@@ -6518,7 +6518,7 @@
           </p:nvSpPr>
           <p:spPr>
             <a:xfrm>
-              <a:off x="5831411" y="1880221"/>
+              <a:off x="5795654" y="1880297"/>
               <a:ext cx="75116" cy="75116"/>
             </a:xfrm>
             <a:prstGeom prst="ellipse">
@@ -6544,7 +6544,7 @@
           </p:nvSpPr>
           <p:spPr>
             <a:xfrm>
-              <a:off x="5856108" y="2412048"/>
+              <a:off x="5818489" y="2412160"/>
               <a:ext cx="75116" cy="75116"/>
             </a:xfrm>
             <a:prstGeom prst="ellipse">
@@ -6570,7 +6570,7 @@
           </p:nvSpPr>
           <p:spPr>
             <a:xfrm>
-              <a:off x="5883920" y="1638741"/>
+              <a:off x="5954973" y="1639125"/>
               <a:ext cx="75116" cy="75116"/>
             </a:xfrm>
             <a:prstGeom prst="ellipse">
@@ -6596,7 +6596,7 @@
           </p:nvSpPr>
           <p:spPr>
             <a:xfrm>
-              <a:off x="5942104" y="1823243"/>
+              <a:off x="5849345" y="1823412"/>
               <a:ext cx="75116" cy="75116"/>
             </a:xfrm>
             <a:prstGeom prst="ellipse">
@@ -6622,7 +6622,7 @@
           </p:nvSpPr>
           <p:spPr>
             <a:xfrm>
-              <a:off x="5995827" y="2003311"/>
+              <a:off x="5962922" y="2003443"/>
               <a:ext cx="75116" cy="75116"/>
             </a:xfrm>
             <a:prstGeom prst="ellipse">
@@ -6648,7 +6648,7 @@
           </p:nvSpPr>
           <p:spPr>
             <a:xfrm>
-              <a:off x="5891385" y="2384666"/>
+              <a:off x="5994855" y="2385010"/>
               <a:ext cx="75116" cy="75116"/>
             </a:xfrm>
             <a:prstGeom prst="ellipse">
@@ -6674,7 +6674,7 @@
           </p:nvSpPr>
           <p:spPr>
             <a:xfrm>
-              <a:off x="5999973" y="1994862"/>
+              <a:off x="5799641" y="1994916"/>
               <a:ext cx="75116" cy="75116"/>
             </a:xfrm>
             <a:prstGeom prst="ellipse">
@@ -6700,7 +6700,7 @@
           </p:nvSpPr>
           <p:spPr>
             <a:xfrm>
-              <a:off x="5948164" y="2359330"/>
+              <a:off x="5922702" y="2359159"/>
               <a:ext cx="75116" cy="75116"/>
             </a:xfrm>
             <a:prstGeom prst="ellipse">
@@ -6726,7 +6726,7 @@
           </p:nvSpPr>
           <p:spPr>
             <a:xfrm>
-              <a:off x="5997136" y="1803835"/>
+              <a:off x="5891887" y="1804247"/>
               <a:ext cx="75116" cy="75116"/>
             </a:xfrm>
             <a:prstGeom prst="ellipse">
@@ -6752,7 +6752,7 @@
           </p:nvSpPr>
           <p:spPr>
             <a:xfrm>
-              <a:off x="5943731" y="2008446"/>
+              <a:off x="5966583" y="2008571"/>
               <a:ext cx="75116" cy="75116"/>
             </a:xfrm>
             <a:prstGeom prst="ellipse">
@@ -6778,7 +6778,7 @@
           </p:nvSpPr>
           <p:spPr>
             <a:xfrm>
-              <a:off x="6724011" y="2112073"/>
+              <a:off x="6615214" y="2112213"/>
               <a:ext cx="75116" cy="75116"/>
             </a:xfrm>
             <a:prstGeom prst="ellipse">
@@ -6804,7 +6804,7 @@
           </p:nvSpPr>
           <p:spPr>
             <a:xfrm>
-              <a:off x="6606120" y="2249518"/>
+              <a:off x="6709797" y="2249608"/>
               <a:ext cx="75116" cy="75116"/>
             </a:xfrm>
             <a:prstGeom prst="ellipse">
@@ -6830,7 +6830,7 @@
           </p:nvSpPr>
           <p:spPr>
             <a:xfrm>
-              <a:off x="6585120" y="2303493"/>
+              <a:off x="6585017" y="2303532"/>
               <a:ext cx="75116" cy="75116"/>
             </a:xfrm>
             <a:prstGeom prst="ellipse">
@@ -6856,7 +6856,7 @@
           </p:nvSpPr>
           <p:spPr>
             <a:xfrm>
-              <a:off x="6761948" y="2095337"/>
+              <a:off x="6723894" y="2095547"/>
               <a:ext cx="75116" cy="75116"/>
             </a:xfrm>
             <a:prstGeom prst="ellipse">
@@ -6882,7 +6882,7 @@
           </p:nvSpPr>
           <p:spPr>
             <a:xfrm>
-              <a:off x="6757851" y="1980728"/>
+              <a:off x="6736943" y="1981009"/>
               <a:ext cx="75116" cy="75116"/>
             </a:xfrm>
             <a:prstGeom prst="ellipse">
@@ -6908,7 +6908,7 @@
           </p:nvSpPr>
           <p:spPr>
             <a:xfrm>
-              <a:off x="6762585" y="2030345"/>
+              <a:off x="6759826" y="2030264"/>
               <a:ext cx="75116" cy="75116"/>
             </a:xfrm>
             <a:prstGeom prst="ellipse">
@@ -6934,7 +6934,7 @@
           </p:nvSpPr>
           <p:spPr>
             <a:xfrm>
-              <a:off x="6691365" y="2248105"/>
+              <a:off x="6694444" y="2248274"/>
               <a:ext cx="75116" cy="75116"/>
             </a:xfrm>
             <a:prstGeom prst="ellipse">
@@ -6960,7 +6960,7 @@
           </p:nvSpPr>
           <p:spPr>
             <a:xfrm>
-              <a:off x="6663673" y="2052877"/>
+              <a:off x="6678827" y="2052977"/>
               <a:ext cx="75116" cy="75116"/>
             </a:xfrm>
             <a:prstGeom prst="ellipse">
@@ -6986,7 +6986,7 @@
           </p:nvSpPr>
           <p:spPr>
             <a:xfrm>
-              <a:off x="6667872" y="2282643"/>
+              <a:off x="6770769" y="2282837"/>
               <a:ext cx="75116" cy="75116"/>
             </a:xfrm>
             <a:prstGeom prst="ellipse">
@@ -7012,7 +7012,7 @@
           </p:nvSpPr>
           <p:spPr>
             <a:xfrm>
-              <a:off x="6710109" y="2173471"/>
+              <a:off x="6686429" y="2173423"/>
               <a:ext cx="75116" cy="75116"/>
             </a:xfrm>
             <a:prstGeom prst="ellipse">
@@ -7038,7 +7038,7 @@
           </p:nvSpPr>
           <p:spPr>
             <a:xfrm>
-              <a:off x="6689652" y="2013558"/>
+              <a:off x="6749812" y="2013955"/>
               <a:ext cx="75116" cy="75116"/>
             </a:xfrm>
             <a:prstGeom prst="ellipse">
@@ -7064,7 +7064,7 @@
           </p:nvSpPr>
           <p:spPr>
             <a:xfrm>
-              <a:off x="6568450" y="1715970"/>
+              <a:off x="6737000" y="1716058"/>
               <a:ext cx="75116" cy="75116"/>
             </a:xfrm>
             <a:prstGeom prst="ellipse">
@@ -7090,7 +7090,7 @@
           </p:nvSpPr>
           <p:spPr>
             <a:xfrm>
-              <a:off x="6770769" y="2270621"/>
+              <a:off x="6739039" y="2270921"/>
               <a:ext cx="75116" cy="75116"/>
             </a:xfrm>
             <a:prstGeom prst="ellipse">
@@ -7116,7 +7116,7 @@
           </p:nvSpPr>
           <p:spPr>
             <a:xfrm>
-              <a:off x="6684915" y="2467134"/>
+              <a:off x="6641535" y="2467402"/>
               <a:ext cx="75116" cy="75116"/>
             </a:xfrm>
             <a:prstGeom prst="ellipse">
@@ -7142,7 +7142,7 @@
           </p:nvSpPr>
           <p:spPr>
             <a:xfrm>
-              <a:off x="6726498" y="2332173"/>
+              <a:off x="6716675" y="2332261"/>
               <a:ext cx="75116" cy="75116"/>
             </a:xfrm>
             <a:prstGeom prst="ellipse">
@@ -7168,7 +7168,7 @@
           </p:nvSpPr>
           <p:spPr>
             <a:xfrm>
-              <a:off x="6714374" y="2119485"/>
+              <a:off x="6584363" y="2119599"/>
               <a:ext cx="75116" cy="75116"/>
             </a:xfrm>
             <a:prstGeom prst="ellipse">
@@ -7194,7 +7194,7 @@
           </p:nvSpPr>
           <p:spPr>
             <a:xfrm>
-              <a:off x="6634701" y="2242226"/>
+              <a:off x="6599952" y="2242256"/>
               <a:ext cx="75116" cy="75116"/>
             </a:xfrm>
             <a:prstGeom prst="ellipse">
@@ -7220,7 +7220,7 @@
           </p:nvSpPr>
           <p:spPr>
             <a:xfrm>
-              <a:off x="6593281" y="2096353"/>
+              <a:off x="6737297" y="2096636"/>
               <a:ext cx="75116" cy="75116"/>
             </a:xfrm>
             <a:prstGeom prst="ellipse">
@@ -7246,7 +7246,7 @@
           </p:nvSpPr>
           <p:spPr>
             <a:xfrm>
-              <a:off x="6703233" y="2074177"/>
+              <a:off x="6676797" y="2074194"/>
               <a:ext cx="75116" cy="75116"/>
             </a:xfrm>
             <a:prstGeom prst="ellipse">
@@ -7272,7 +7272,7 @@
           </p:nvSpPr>
           <p:spPr>
             <a:xfrm>
-              <a:off x="6588955" y="1910534"/>
+              <a:off x="6559563" y="1910783"/>
               <a:ext cx="75116" cy="75116"/>
             </a:xfrm>
             <a:prstGeom prst="ellipse">
@@ -7298,7 +7298,7 @@
           </p:nvSpPr>
           <p:spPr>
             <a:xfrm>
-              <a:off x="6695599" y="1952365"/>
+              <a:off x="6559038" y="1952559"/>
               <a:ext cx="75116" cy="75116"/>
             </a:xfrm>
             <a:prstGeom prst="ellipse">
@@ -7324,7 +7324,7 @@
           </p:nvSpPr>
           <p:spPr>
             <a:xfrm>
-              <a:off x="6579042" y="2017278"/>
+              <a:off x="6669743" y="2017128"/>
               <a:ext cx="75116" cy="75116"/>
             </a:xfrm>
             <a:prstGeom prst="ellipse">
@@ -7350,7 +7350,7 @@
           </p:nvSpPr>
           <p:spPr>
             <a:xfrm>
-              <a:off x="6643747" y="2368615"/>
+              <a:off x="6670843" y="2368696"/>
               <a:ext cx="75116" cy="75116"/>
             </a:xfrm>
             <a:prstGeom prst="ellipse">
@@ -7376,7 +7376,7 @@
           </p:nvSpPr>
           <p:spPr>
             <a:xfrm>
-              <a:off x="6674074" y="2088669"/>
+              <a:off x="6728867" y="2088823"/>
               <a:ext cx="75116" cy="75116"/>
             </a:xfrm>
             <a:prstGeom prst="ellipse">
@@ -7402,42 +7402,42 @@
           </p:nvSpPr>
           <p:spPr>
             <a:xfrm>
-              <a:off x="4419973" y="1883319"/>
-              <a:ext cx="2293106" cy="416592"/>
+              <a:off x="4420334" y="1883465"/>
+              <a:ext cx="2280252" cy="416579"/>
             </a:xfrm>
             <a:custGeom>
               <a:avLst/>
               <a:pathLst>
-                <a:path w="2293106" h="416592">
+                <a:path w="2280252" h="416579">
                   <a:moveTo>
                     <a:pt x="0" y="0"/>
                   </a:moveTo>
                   <a:lnTo>
-                    <a:pt x="1211495" y="105913"/>
+                    <a:pt x="1204704" y="105910"/>
                   </a:lnTo>
                   <a:lnTo>
-                    <a:pt x="1528737" y="123198"/>
+                    <a:pt x="1520168" y="123194"/>
                   </a:lnTo>
                   <a:lnTo>
-                    <a:pt x="1975864" y="139212"/>
+                    <a:pt x="1964788" y="139208"/>
                   </a:lnTo>
                   <a:lnTo>
-                    <a:pt x="2293106" y="145525"/>
+                    <a:pt x="2280252" y="145520"/>
                   </a:lnTo>
                   <a:lnTo>
-                    <a:pt x="2293106" y="416592"/>
+                    <a:pt x="2280252" y="416579"/>
                   </a:lnTo>
                   <a:lnTo>
-                    <a:pt x="1975864" y="388429"/>
+                    <a:pt x="1964788" y="388417"/>
                   </a:lnTo>
                   <a:lnTo>
-                    <a:pt x="1528737" y="355852"/>
+                    <a:pt x="1520168" y="355841"/>
                   </a:lnTo>
                   <a:lnTo>
-                    <a:pt x="1211495" y="338660"/>
+                    <a:pt x="1204704" y="338650"/>
                   </a:lnTo>
                   <a:lnTo>
-                    <a:pt x="0" y="312915"/>
+                    <a:pt x="0" y="312906"/>
                   </a:lnTo>
                   <a:close/>
                 </a:path>
@@ -7463,27 +7463,27 @@
           </p:nvSpPr>
           <p:spPr>
             <a:xfrm>
-              <a:off x="4419973" y="1883319"/>
-              <a:ext cx="2293106" cy="145525"/>
+              <a:off x="4420334" y="1883465"/>
+              <a:ext cx="2280252" cy="145520"/>
             </a:xfrm>
             <a:custGeom>
               <a:avLst/>
               <a:pathLst>
-                <a:path w="2293106" h="145525">
+                <a:path w="2280252" h="145520">
                   <a:moveTo>
                     <a:pt x="0" y="0"/>
                   </a:moveTo>
                   <a:lnTo>
-                    <a:pt x="1211495" y="105913"/>
+                    <a:pt x="1204704" y="105910"/>
                   </a:lnTo>
                   <a:lnTo>
-                    <a:pt x="1528737" y="123198"/>
+                    <a:pt x="1520168" y="123194"/>
                   </a:lnTo>
                   <a:lnTo>
-                    <a:pt x="1975864" y="139212"/>
+                    <a:pt x="1964788" y="139208"/>
                   </a:lnTo>
                   <a:lnTo>
-                    <a:pt x="2293106" y="145525"/>
+                    <a:pt x="2280252" y="145520"/>
                   </a:lnTo>
                 </a:path>
               </a:pathLst>
@@ -7503,24 +7503,24 @@
           </p:nvSpPr>
           <p:spPr>
             <a:xfrm>
-              <a:off x="4419973" y="2196235"/>
-              <a:ext cx="2293106" cy="103676"/>
+              <a:off x="4420334" y="2196371"/>
+              <a:ext cx="2280252" cy="103673"/>
             </a:xfrm>
             <a:custGeom>
               <a:avLst/>
               <a:pathLst>
-                <a:path w="2293106" h="103676">
+                <a:path w="2280252" h="103673">
                   <a:moveTo>
-                    <a:pt x="2293106" y="103676"/>
+                    <a:pt x="2280252" y="103673"/>
                   </a:moveTo>
                   <a:lnTo>
-                    <a:pt x="1975864" y="75513"/>
+                    <a:pt x="1964788" y="75510"/>
                   </a:lnTo>
                   <a:lnTo>
-                    <a:pt x="1528737" y="42936"/>
+                    <a:pt x="1520168" y="42935"/>
                   </a:lnTo>
                   <a:lnTo>
-                    <a:pt x="1211495" y="25744"/>
+                    <a:pt x="1204704" y="25744"/>
                   </a:lnTo>
                   <a:lnTo>
                     <a:pt x="0" y="0"/>
@@ -7543,27 +7543,27 @@
           </p:nvSpPr>
           <p:spPr>
             <a:xfrm>
-              <a:off x="4419973" y="2039777"/>
-              <a:ext cx="2293106" cy="124600"/>
+              <a:off x="4420334" y="2039918"/>
+              <a:ext cx="2280252" cy="124596"/>
             </a:xfrm>
             <a:custGeom>
               <a:avLst/>
               <a:pathLst>
-                <a:path w="2293106" h="124600">
+                <a:path w="2280252" h="124596">
                   <a:moveTo>
                     <a:pt x="0" y="0"/>
                   </a:moveTo>
                   <a:lnTo>
-                    <a:pt x="1211495" y="65829"/>
+                    <a:pt x="1204704" y="65827"/>
                   </a:lnTo>
                   <a:lnTo>
-                    <a:pt x="1528737" y="83067"/>
+                    <a:pt x="1520168" y="83064"/>
                   </a:lnTo>
                   <a:lnTo>
-                    <a:pt x="1975864" y="107362"/>
+                    <a:pt x="1964788" y="107359"/>
                   </a:lnTo>
                   <a:lnTo>
-                    <a:pt x="2293106" y="124600"/>
+                    <a:pt x="2280252" y="124596"/>
                   </a:lnTo>
                 </a:path>
               </a:pathLst>
@@ -7592,7 +7592,7 @@
           </p:nvSpPr>
           <p:spPr>
             <a:xfrm>
-              <a:off x="6224195" y="1259983"/>
+              <a:off x="6211702" y="1260144"/>
               <a:ext cx="63550" cy="82021"/>
             </a:xfrm>
             <a:prstGeom prst="rect">
@@ -7638,7 +7638,7 @@
           </p:nvSpPr>
           <p:spPr>
             <a:xfrm>
-              <a:off x="6296935" y="1259983"/>
+              <a:off x="6284442" y="1260144"/>
               <a:ext cx="416143" cy="82021"/>
             </a:xfrm>
             <a:prstGeom prst="rect">
@@ -7745,7 +7745,7 @@
           </p:nvSpPr>
           <p:spPr>
             <a:xfrm>
-              <a:off x="4157982" y="2342941"/>
+              <a:off x="4157982" y="2343073"/>
               <a:ext cx="28468" cy="0"/>
             </a:xfrm>
             <a:custGeom>
@@ -7785,7 +7785,7 @@
           </p:nvSpPr>
           <p:spPr>
             <a:xfrm>
-              <a:off x="4157982" y="1860504"/>
+              <a:off x="4157982" y="1860651"/>
               <a:ext cx="28468" cy="0"/>
             </a:xfrm>
             <a:custGeom>
@@ -7825,7 +7825,7 @@
           </p:nvSpPr>
           <p:spPr>
             <a:xfrm>
-              <a:off x="4157982" y="1378068"/>
+              <a:off x="4157982" y="1378229"/>
               <a:ext cx="28468" cy="0"/>
             </a:xfrm>
             <a:custGeom>
@@ -7905,7 +7905,7 @@
           </p:nvSpPr>
           <p:spPr>
             <a:xfrm>
-              <a:off x="4419973" y="2626821"/>
+              <a:off x="4420334" y="2626821"/>
               <a:ext cx="0" cy="28468"/>
             </a:xfrm>
             <a:custGeom>
@@ -7945,7 +7945,7 @@
           </p:nvSpPr>
           <p:spPr>
             <a:xfrm>
-              <a:off x="5184341" y="2626821"/>
+              <a:off x="5180418" y="2626821"/>
               <a:ext cx="0" cy="28468"/>
             </a:xfrm>
             <a:custGeom>
@@ -7985,7 +7985,7 @@
           </p:nvSpPr>
           <p:spPr>
             <a:xfrm>
-              <a:off x="5948710" y="2626821"/>
+              <a:off x="5940502" y="2626821"/>
               <a:ext cx="0" cy="28468"/>
             </a:xfrm>
             <a:custGeom>
@@ -8025,7 +8025,7 @@
           </p:nvSpPr>
           <p:spPr>
             <a:xfrm>
-              <a:off x="6713079" y="2626821"/>
+              <a:off x="6700586" y="2626821"/>
               <a:ext cx="0" cy="28468"/>
             </a:xfrm>
             <a:custGeom>
@@ -8065,7 +8065,7 @@
           </p:nvSpPr>
           <p:spPr>
             <a:xfrm>
-              <a:off x="4391718" y="2678064"/>
+              <a:off x="4392079" y="2678064"/>
               <a:ext cx="56509" cy="72877"/>
             </a:xfrm>
             <a:prstGeom prst="rect">
@@ -8111,7 +8111,7 @@
           </p:nvSpPr>
           <p:spPr>
             <a:xfrm>
-              <a:off x="5156086" y="2678064"/>
+              <a:off x="5152163" y="2678064"/>
               <a:ext cx="56509" cy="72877"/>
             </a:xfrm>
             <a:prstGeom prst="rect">
@@ -8157,7 +8157,7 @@
           </p:nvSpPr>
           <p:spPr>
             <a:xfrm>
-              <a:off x="5920455" y="2678064"/>
+              <a:off x="5912247" y="2678064"/>
               <a:ext cx="56509" cy="72877"/>
             </a:xfrm>
             <a:prstGeom prst="rect">
@@ -8203,7 +8203,7 @@
           </p:nvSpPr>
           <p:spPr>
             <a:xfrm>
-              <a:off x="6684824" y="2678064"/>
+              <a:off x="6672331" y="2678064"/>
               <a:ext cx="56509" cy="72877"/>
             </a:xfrm>
             <a:prstGeom prst="rect">
@@ -8321,7 +8321,7 @@
           </p:nvSpPr>
           <p:spPr>
             <a:xfrm>
-              <a:off x="1513570" y="4258498"/>
+              <a:off x="1464143" y="4258129"/>
               <a:ext cx="75116" cy="75116"/>
             </a:xfrm>
             <a:prstGeom prst="ellipse">
@@ -8347,7 +8347,7 @@
           </p:nvSpPr>
           <p:spPr>
             <a:xfrm>
-              <a:off x="1492391" y="4116001"/>
+              <a:off x="1489124" y="4114438"/>
               <a:ext cx="75116" cy="75116"/>
             </a:xfrm>
             <a:prstGeom prst="ellipse">
@@ -8373,7 +8373,7 @@
           </p:nvSpPr>
           <p:spPr>
             <a:xfrm>
-              <a:off x="1582093" y="4323104"/>
+              <a:off x="1406531" y="4321495"/>
               <a:ext cx="75116" cy="75116"/>
             </a:xfrm>
             <a:prstGeom prst="ellipse">
@@ -8399,7 +8399,7 @@
           </p:nvSpPr>
           <p:spPr>
             <a:xfrm>
-              <a:off x="1452223" y="4196741"/>
+              <a:off x="1530932" y="4194501"/>
               <a:ext cx="75116" cy="75116"/>
             </a:xfrm>
             <a:prstGeom prst="ellipse">
@@ -8425,7 +8425,7 @@
           </p:nvSpPr>
           <p:spPr>
             <a:xfrm>
-              <a:off x="1397325" y="4222860"/>
+              <a:off x="1509391" y="4224598"/>
               <a:ext cx="75116" cy="75116"/>
             </a:xfrm>
             <a:prstGeom prst="ellipse">
@@ -8451,7 +8451,7 @@
           </p:nvSpPr>
           <p:spPr>
             <a:xfrm>
-              <a:off x="1467232" y="4100228"/>
+              <a:off x="1397325" y="4099376"/>
               <a:ext cx="75116" cy="75116"/>
             </a:xfrm>
             <a:prstGeom prst="ellipse">
@@ -8477,7 +8477,7 @@
           </p:nvSpPr>
           <p:spPr>
             <a:xfrm>
-              <a:off x="1576625" y="3783226"/>
+              <a:off x="1464762" y="3782658"/>
               <a:ext cx="75116" cy="75116"/>
             </a:xfrm>
             <a:prstGeom prst="ellipse">
@@ -8503,7 +8503,7 @@
           </p:nvSpPr>
           <p:spPr>
             <a:xfrm>
-              <a:off x="1482275" y="4194150"/>
+              <a:off x="1429681" y="4193533"/>
               <a:ext cx="75116" cy="75116"/>
             </a:xfrm>
             <a:prstGeom prst="ellipse">
@@ -8529,7 +8529,7 @@
           </p:nvSpPr>
           <p:spPr>
             <a:xfrm>
-              <a:off x="1467478" y="4152238"/>
+              <a:off x="1567668" y="4151946"/>
               <a:ext cx="75116" cy="75116"/>
             </a:xfrm>
             <a:prstGeom prst="ellipse">
@@ -8555,7 +8555,7 @@
           </p:nvSpPr>
           <p:spPr>
             <a:xfrm>
-              <a:off x="1592420" y="4099134"/>
+              <a:off x="1443247" y="4099045"/>
               <a:ext cx="75116" cy="75116"/>
             </a:xfrm>
             <a:prstGeom prst="ellipse">
@@ -8581,7 +8581,7 @@
           </p:nvSpPr>
           <p:spPr>
             <a:xfrm>
-              <a:off x="2219933" y="4331123"/>
+              <a:off x="2251329" y="4329576"/>
               <a:ext cx="75116" cy="75116"/>
             </a:xfrm>
             <a:prstGeom prst="ellipse">
@@ -8607,7 +8607,7 @@
           </p:nvSpPr>
           <p:spPr>
             <a:xfrm>
-              <a:off x="2177276" y="4378905"/>
+              <a:off x="2323598" y="4380329"/>
               <a:ext cx="75116" cy="75116"/>
             </a:xfrm>
             <a:prstGeom prst="ellipse">
@@ -8633,7 +8633,7 @@
           </p:nvSpPr>
           <p:spPr>
             <a:xfrm>
-              <a:off x="2317854" y="3254433"/>
+              <a:off x="2212141" y="3254390"/>
               <a:ext cx="75116" cy="75116"/>
             </a:xfrm>
             <a:prstGeom prst="ellipse">
@@ -8659,7 +8659,7 @@
           </p:nvSpPr>
           <p:spPr>
             <a:xfrm>
-              <a:off x="2350476" y="4254389"/>
+              <a:off x="2251353" y="4254503"/>
               <a:ext cx="75116" cy="75116"/>
             </a:xfrm>
             <a:prstGeom prst="ellipse">
@@ -8685,7 +8685,7 @@
           </p:nvSpPr>
           <p:spPr>
             <a:xfrm>
-              <a:off x="2324968" y="4280544"/>
+              <a:off x="2339093" y="4279203"/>
               <a:ext cx="75116" cy="75116"/>
             </a:xfrm>
             <a:prstGeom prst="ellipse">
@@ -8711,7 +8711,7 @@
           </p:nvSpPr>
           <p:spPr>
             <a:xfrm>
-              <a:off x="2347292" y="4123299"/>
+              <a:off x="2185499" y="4122659"/>
               <a:ext cx="75116" cy="75116"/>
             </a:xfrm>
             <a:prstGeom prst="ellipse">
@@ -8737,7 +8737,7 @@
           </p:nvSpPr>
           <p:spPr>
             <a:xfrm>
-              <a:off x="2246910" y="4279713"/>
+              <a:off x="2158705" y="4279973"/>
               <a:ext cx="75116" cy="75116"/>
             </a:xfrm>
             <a:prstGeom prst="ellipse">
@@ -8763,7 +8763,7 @@
           </p:nvSpPr>
           <p:spPr>
             <a:xfrm>
-              <a:off x="2306032" y="4283833"/>
+              <a:off x="2319306" y="4283727"/>
               <a:ext cx="75116" cy="75116"/>
             </a:xfrm>
             <a:prstGeom prst="ellipse">
@@ -8789,7 +8789,7 @@
           </p:nvSpPr>
           <p:spPr>
             <a:xfrm>
-              <a:off x="2295480" y="3694587"/>
+              <a:off x="2367521" y="3693851"/>
               <a:ext cx="75116" cy="75116"/>
             </a:xfrm>
             <a:prstGeom prst="ellipse">
@@ -8815,7 +8815,7 @@
           </p:nvSpPr>
           <p:spPr>
             <a:xfrm>
-              <a:off x="2359884" y="3828345"/>
+              <a:off x="2337437" y="3827294"/>
               <a:ext cx="75116" cy="75116"/>
             </a:xfrm>
             <a:prstGeom prst="ellipse">
@@ -8841,7 +8841,7 @@
           </p:nvSpPr>
           <p:spPr>
             <a:xfrm>
-              <a:off x="2231134" y="4039766"/>
+              <a:off x="2325966" y="4038784"/>
               <a:ext cx="75116" cy="75116"/>
             </a:xfrm>
             <a:prstGeom prst="ellipse">
@@ -8867,7 +8867,7 @@
           </p:nvSpPr>
           <p:spPr>
             <a:xfrm>
-              <a:off x="2235573" y="4120201"/>
+              <a:off x="2327646" y="4119105"/>
               <a:ext cx="75116" cy="75116"/>
             </a:xfrm>
             <a:prstGeom prst="ellipse">
@@ -8893,7 +8893,7 @@
           </p:nvSpPr>
           <p:spPr>
             <a:xfrm>
-              <a:off x="2285227" y="3972213"/>
+              <a:off x="2300674" y="3969774"/>
               <a:ext cx="75116" cy="75116"/>
             </a:xfrm>
             <a:prstGeom prst="ellipse">
@@ -8919,7 +8919,7 @@
           </p:nvSpPr>
           <p:spPr>
             <a:xfrm>
-              <a:off x="2363130" y="4175117"/>
+              <a:off x="2161590" y="4174909"/>
               <a:ext cx="75116" cy="75116"/>
             </a:xfrm>
             <a:prstGeom prst="ellipse">
@@ -8945,7 +8945,7 @@
           </p:nvSpPr>
           <p:spPr>
             <a:xfrm>
-              <a:off x="2350756" y="4198743"/>
+              <a:off x="2177217" y="4199474"/>
               <a:ext cx="75116" cy="75116"/>
             </a:xfrm>
             <a:prstGeom prst="ellipse">
@@ -8971,7 +8971,7 @@
           </p:nvSpPr>
           <p:spPr>
             <a:xfrm>
-              <a:off x="2308698" y="4075934"/>
+              <a:off x="2335194" y="4074338"/>
               <a:ext cx="75116" cy="75116"/>
             </a:xfrm>
             <a:prstGeom prst="ellipse">
@@ -8997,7 +8997,7 @@
           </p:nvSpPr>
           <p:spPr>
             <a:xfrm>
-              <a:off x="2361533" y="3553499"/>
+              <a:off x="2332094" y="3556307"/>
               <a:ext cx="75116" cy="75116"/>
             </a:xfrm>
             <a:prstGeom prst="ellipse">
@@ -9023,7 +9023,7 @@
           </p:nvSpPr>
           <p:spPr>
             <a:xfrm>
-              <a:off x="2270120" y="3794746"/>
+              <a:off x="2207964" y="3794811"/>
               <a:ext cx="75116" cy="75116"/>
             </a:xfrm>
             <a:prstGeom prst="ellipse">
@@ -9049,7 +9049,7 @@
           </p:nvSpPr>
           <p:spPr>
             <a:xfrm>
-              <a:off x="3131683" y="4063075"/>
+              <a:off x="3024166" y="4063166"/>
               <a:ext cx="75116" cy="75116"/>
             </a:xfrm>
             <a:prstGeom prst="ellipse">
@@ -9075,7 +9075,7 @@
           </p:nvSpPr>
           <p:spPr>
             <a:xfrm>
-              <a:off x="2975838" y="3959316"/>
+              <a:off x="3073083" y="3960755"/>
               <a:ext cx="75116" cy="75116"/>
             </a:xfrm>
             <a:prstGeom prst="ellipse">
@@ -9101,7 +9101,7 @@
           </p:nvSpPr>
           <p:spPr>
             <a:xfrm>
-              <a:off x="2967871" y="4368657"/>
+              <a:off x="3117745" y="4366926"/>
               <a:ext cx="75116" cy="75116"/>
             </a:xfrm>
             <a:prstGeom prst="ellipse">
@@ -9127,7 +9127,7 @@
           </p:nvSpPr>
           <p:spPr>
             <a:xfrm>
-              <a:off x="2987430" y="4359220"/>
+              <a:off x="3003581" y="4358924"/>
               <a:ext cx="75116" cy="75116"/>
             </a:xfrm>
             <a:prstGeom prst="ellipse">
@@ -9153,7 +9153,7 @@
           </p:nvSpPr>
           <p:spPr>
             <a:xfrm>
-              <a:off x="2913881" y="4163139"/>
+              <a:off x="2963638" y="4163220"/>
               <a:ext cx="75116" cy="75116"/>
             </a:xfrm>
             <a:prstGeom prst="ellipse">
@@ -9179,7 +9179,7 @@
           </p:nvSpPr>
           <p:spPr>
             <a:xfrm>
-              <a:off x="3022930" y="4372409"/>
+              <a:off x="2967420" y="4371866"/>
               <a:ext cx="75116" cy="75116"/>
             </a:xfrm>
             <a:prstGeom prst="ellipse">
@@ -9205,7 +9205,7 @@
           </p:nvSpPr>
           <p:spPr>
             <a:xfrm>
-              <a:off x="3076744" y="3455484"/>
+              <a:off x="3008503" y="3455013"/>
               <a:ext cx="75116" cy="75116"/>
             </a:xfrm>
             <a:prstGeom prst="ellipse">
@@ -9231,7 +9231,7 @@
           </p:nvSpPr>
           <p:spPr>
             <a:xfrm>
-              <a:off x="3128247" y="4387467"/>
+              <a:off x="3065761" y="4387467"/>
               <a:ext cx="75116" cy="75116"/>
             </a:xfrm>
             <a:prstGeom prst="ellipse">
@@ -9257,7 +9257,7 @@
           </p:nvSpPr>
           <p:spPr>
             <a:xfrm>
-              <a:off x="2914100" y="3907869"/>
+              <a:off x="3013418" y="3906789"/>
               <a:ext cx="75116" cy="75116"/>
             </a:xfrm>
             <a:prstGeom prst="ellipse">
@@ -9283,7 +9283,7 @@
           </p:nvSpPr>
           <p:spPr>
             <a:xfrm>
-              <a:off x="3010437" y="3276712"/>
+              <a:off x="3074800" y="3279380"/>
               <a:ext cx="75116" cy="75116"/>
             </a:xfrm>
             <a:prstGeom prst="ellipse">
@@ -9309,7 +9309,7 @@
           </p:nvSpPr>
           <p:spPr>
             <a:xfrm>
-              <a:off x="3051895" y="3170829"/>
+              <a:off x="3040103" y="3170829"/>
               <a:ext cx="75116" cy="75116"/>
             </a:xfrm>
             <a:prstGeom prst="ellipse">
@@ -9335,7 +9335,7 @@
           </p:nvSpPr>
           <p:spPr>
             <a:xfrm>
-              <a:off x="3028249" y="3890700"/>
+              <a:off x="3004735" y="3891282"/>
               <a:ext cx="75116" cy="75116"/>
             </a:xfrm>
             <a:prstGeom prst="ellipse">
@@ -9361,7 +9361,7 @@
           </p:nvSpPr>
           <p:spPr>
             <a:xfrm>
-              <a:off x="2920070" y="3763924"/>
+              <a:off x="2944528" y="3764162"/>
               <a:ext cx="75116" cy="75116"/>
             </a:xfrm>
             <a:prstGeom prst="ellipse">
@@ -9387,7 +9387,7 @@
           </p:nvSpPr>
           <p:spPr>
             <a:xfrm>
-              <a:off x="3079941" y="3718369"/>
+              <a:off x="2986008" y="3718151"/>
               <a:ext cx="75116" cy="75116"/>
             </a:xfrm>
             <a:prstGeom prst="ellipse">
@@ -9413,7 +9413,7 @@
           </p:nvSpPr>
           <p:spPr>
             <a:xfrm>
-              <a:off x="2938900" y="3754175"/>
+              <a:off x="3047744" y="3756848"/>
               <a:ext cx="75116" cy="75116"/>
             </a:xfrm>
             <a:prstGeom prst="ellipse">
@@ -9439,7 +9439,7 @@
           </p:nvSpPr>
           <p:spPr>
   